--- a/docs/06_중간발표_PPT.pptx
+++ b/docs/06_중간발표_PPT.pptx
@@ -123,50 +123,50 @@
   <p:extLst>
     <p:ext uri="{521415D9-36F7-43E2-AB2F-B90AF26B5E84}">
       <p14:sectionLst xmlns:p14="http://schemas.microsoft.com/office/powerpoint/2010/main">
-        <p14:section name="① 표지·팀 소개" id="{acc447ab-508c-f660-fde0-26665576c001}">
+        <p14:section name="① 표지·팀 소개" id="{bf9406b6-2c5b-5f40-0716-9d4f37255351}">
           <p14:sldIdLst>
             <p14:sldId id="256"/>
             <p14:sldId id="257"/>
           </p14:sldIdLst>
         </p14:section>
-        <p14:section name="② 문제 정의" id="{623f85dc-3fba-d505-8e5d-e7d889b71aa9}">
+        <p14:section name="② 문제 정의" id="{98d51515-58a4-875b-3793-3d5bcfe7f457}">
           <p14:sldIdLst>
             <p14:sldId id="258"/>
             <p14:sldId id="259"/>
           </p14:sldIdLst>
         </p14:section>
-        <p14:section name="③ 솔루션·핵심 가치" id="{b0f46ecf-bb05-a6ea-0381-ac78c12b2262}">
+        <p14:section name="③ 솔루션·핵심 가치" id="{7616ce2b-0be8-d1b6-56d8-912465d04ef3}">
           <p14:sldIdLst>
             <p14:sldId id="260"/>
             <p14:sldId id="261"/>
           </p14:sldIdLst>
         </p14:section>
-        <p14:section name="④ SW 기술 아키텍처" id="{869740f6-15fd-d6fb-69ec-e3672d286674}">
+        <p14:section name="④ SW 기술 아키텍처" id="{11292891-09ba-d5a8-e442-20e12de12a09}">
           <p14:sldIdLst>
             <p14:sldId id="262"/>
             <p14:sldId id="263"/>
           </p14:sldIdLst>
         </p14:section>
-        <p14:section name="⑤ 개발 현황·MVP 시연" id="{e6006e98-b51c-d2e8-deb9-738763ec4262}">
+        <p14:section name="⑤ 개발 현황·MVP 시연" id="{b8f6f9e9-c75f-ab8d-b0c6-de66570f4f0c}">
           <p14:sldIdLst>
             <p14:sldId id="264"/>
             <p14:sldId id="265"/>
             <p14:sldId id="266"/>
           </p14:sldIdLst>
         </p14:section>
-        <p14:section name="⑥ 시장 분석·비즈니스 모델" id="{5f50d2cb-903a-2ee0-dc57-7ecbeb5ef7cf}">
+        <p14:section name="⑥ 시장 분석·비즈니스 모델" id="{fe7c2f88-ceb7-7385-a644-8948451deb67}">
           <p14:sldIdLst>
             <p14:sldId id="267"/>
             <p14:sldId id="268"/>
             <p14:sldId id="269"/>
           </p14:sldIdLst>
         </p14:section>
-        <p14:section name="⑦ 초기 시장 검증" id="{cc642823-e8b2-8e57-f508-77976c333f3b}">
+        <p14:section name="⑦ 초기 시장 검증" id="{112f5b94-15b1-6795-b4df-b76467bb85c3}">
           <p14:sldIdLst>
             <p14:sldId id="270"/>
           </p14:sldIdLst>
         </p14:section>
-        <p14:section name="⑧ 향후 계획·팀 역량" id="{ffd22769-67e2-a0ab-8a36-93baf7d12252}">
+        <p14:section name="⑧ 향후 계획·팀 역량" id="{7cfb239b-ae1f-c379-45b8-32e86167afc5}">
           <p14:sldIdLst>
             <p14:sldId id="271"/>
             <p14:sldId id="272"/>
@@ -2940,8 +2940,8 @@
         </p:blipFill>
         <p:spPr>
           <a:xfrm>
-            <a:off x="548640" y="685800"/>
-            <a:ext cx="868680" cy="868680"/>
+            <a:off x="548640" y="548640"/>
+            <a:ext cx="731520" cy="731520"/>
           </a:xfrm>
           <a:prstGeom prst="rect">
             <a:avLst/>
@@ -2956,7 +2956,7 @@
         </p:nvSpPr>
         <p:spPr>
           <a:xfrm>
-            <a:off x="548640" y="1737360"/>
+            <a:off x="548640" y="1371600"/>
             <a:ext cx="5486400" cy="914400"/>
           </a:xfrm>
           <a:prstGeom prst="rect">
@@ -2973,14 +2973,14 @@
               <a:buNone/>
             </a:pPr>
             <a:r>
-              <a:rPr lang="en-US" sz="4800" b="1" dirty="0">
+              <a:rPr lang="en-US" sz="5400" b="1" dirty="0">
                 <a:solidFill>
                   <a:schemeClr val="bg1"/>
                 </a:solidFill>
               </a:rPr>
               <a:t>알바가드</a:t>
             </a:r>
-            <a:endParaRPr lang="en-US" sz="4800" dirty="0"/>
+            <a:endParaRPr lang="en-US" sz="5400" dirty="0"/>
           </a:p>
         </p:txBody>
       </p:sp>
@@ -2992,8 +2992,8 @@
         </p:nvSpPr>
         <p:spPr>
           <a:xfrm>
-            <a:off x="548640" y="2651760"/>
-            <a:ext cx="5486400" cy="457200"/>
+            <a:off x="548640" y="2331720"/>
+            <a:ext cx="5486400" cy="411480"/>
           </a:xfrm>
           <a:prstGeom prst="rect">
             <a:avLst/>
@@ -3022,65 +3022,23 @@
       </p:sp>
       <p:sp>
         <p:nvSpPr>
-          <p:cNvPr id="5" name="Text 2"/>
-          <p:cNvSpPr txBox="1"/>
-          <p:nvPr/>
-        </p:nvSpPr>
-        <p:spPr>
-          <a:xfrm>
-            <a:off x="548640" y="3200400"/>
-            <a:ext cx="5486400" cy="365760"/>
-          </a:xfrm>
-          <a:prstGeom prst="rect">
-            <a:avLst/>
-          </a:prstGeom>
-          <a:noFill/>
-          <a:ln/>
-        </p:spPr>
-        <p:txBody>
-          <a:bodyPr wrap="square" lIns="0" tIns="0" rIns="0" bIns="0" rtlCol="0" anchor="ctr"/>
-          <a:lstStyle/>
-          <a:p>
-            <a:pPr indent="0" marL="0">
-              <a:buNone/>
-            </a:pPr>
-            <a:r>
-              <a:rPr lang="en-US" sz="1300" dirty="0">
-                <a:solidFill>
-                  <a:schemeClr val="bg2"/>
-                </a:solidFill>
-              </a:rPr>
-              <a:t>SW기술창업 중간발표 · 4조 · 2026.10.27</a:t>
-            </a:r>
-            <a:endParaRPr lang="en-US" sz="1300" dirty="0"/>
-          </a:p>
-        </p:txBody>
-      </p:sp>
-      <p:sp>
-        <p:nvSpPr>
-          <p:cNvPr id="6" name="팀 칸"/>
+          <p:cNvPr id="5" name="Shape 2"/>
           <p:cNvSpPr/>
           <p:nvPr/>
         </p:nvSpPr>
         <p:spPr>
           <a:xfrm>
-            <a:off x="5943600" y="685800"/>
-            <a:ext cx="2743200" cy="3794760"/>
-          </a:xfrm>
-          <a:prstGeom prst="roundRect">
-            <a:avLst>
-              <a:gd name="adj" fmla="val 4000"/>
-            </a:avLst>
-          </a:prstGeom>
-          <a:solidFill>
-            <a:srgbClr val="FFFFFF">
-              <a:alpha val="10000"/>
-            </a:srgbClr>
-          </a:solidFill>
+            <a:off x="548640" y="3108960"/>
+            <a:ext cx="4937760" cy="0"/>
+          </a:xfrm>
+          <a:prstGeom prst="line">
+            <a:avLst/>
+          </a:prstGeom>
+          <a:noFill/>
           <a:ln w="9525">
             <a:solidFill>
               <a:srgbClr val="FFFFFF">
-                <a:alpha val="30000"/>
+                <a:alpha val="40000"/>
               </a:srgbClr>
             </a:solidFill>
             <a:prstDash val="solid"/>
@@ -3089,14 +3047,50 @@
       </p:sp>
       <p:sp>
         <p:nvSpPr>
+          <p:cNvPr id="6" name="Text 3"/>
+          <p:cNvSpPr txBox="1"/>
+          <p:nvPr/>
+        </p:nvSpPr>
+        <p:spPr>
+          <a:xfrm>
+            <a:off x="548640" y="3127248"/>
+            <a:ext cx="3108960" cy="457200"/>
+          </a:xfrm>
+          <a:prstGeom prst="rect">
+            <a:avLst/>
+          </a:prstGeom>
+          <a:noFill/>
+          <a:ln/>
+        </p:spPr>
+        <p:txBody>
+          <a:bodyPr wrap="square" lIns="0" tIns="0" rIns="0" bIns="0" rtlCol="0" anchor="ctr"/>
+          <a:lstStyle/>
+          <a:p>
+            <a:pPr indent="0" marL="0">
+              <a:buNone/>
+            </a:pPr>
+            <a:r>
+              <a:rPr lang="en-US" sz="1400" dirty="0">
+                <a:solidFill>
+                  <a:schemeClr val="bg1"/>
+                </a:solidFill>
+              </a:rPr>
+              <a:t>덜 받은 급여 · 2개월</a:t>
+            </a:r>
+            <a:endParaRPr lang="en-US" sz="1400" dirty="0"/>
+          </a:p>
+        </p:txBody>
+      </p:sp>
+      <p:sp>
+        <p:nvSpPr>
           <p:cNvPr id="7" name="Text 4"/>
           <p:cNvSpPr txBox="1"/>
           <p:nvPr/>
         </p:nvSpPr>
         <p:spPr>
           <a:xfrm>
-            <a:off x="6217920" y="868680"/>
-            <a:ext cx="2286000" cy="274320"/>
+            <a:off x="3657600" y="3127248"/>
+            <a:ext cx="1828800" cy="457200"/>
           </a:xfrm>
           <a:prstGeom prst="rect">
             <a:avLst/>
@@ -3108,6 +3102,139 @@
           <a:bodyPr wrap="square" lIns="0" tIns="0" rIns="0" bIns="0" rtlCol="0" anchor="ctr"/>
           <a:lstStyle/>
           <a:p>
+            <a:pPr algn="r" indent="0" marL="0">
+              <a:buNone/>
+            </a:pPr>
+            <a:r>
+              <a:rPr lang="en-US" sz="2000" b="1" dirty="0">
+                <a:solidFill>
+                  <a:srgbClr val="F5A08F"/>
+                </a:solidFill>
+              </a:rPr>
+              <a:t>269,352원</a:t>
+            </a:r>
+            <a:endParaRPr lang="en-US" sz="2000" dirty="0"/>
+          </a:p>
+        </p:txBody>
+      </p:sp>
+      <p:sp>
+        <p:nvSpPr>
+          <p:cNvPr id="8" name="Shape 5"/>
+          <p:cNvSpPr/>
+          <p:nvPr/>
+        </p:nvSpPr>
+        <p:spPr>
+          <a:xfrm>
+            <a:off x="548640" y="3602736"/>
+            <a:ext cx="4937760" cy="0"/>
+          </a:xfrm>
+          <a:prstGeom prst="line">
+            <a:avLst/>
+          </a:prstGeom>
+          <a:noFill/>
+          <a:ln w="9525">
+            <a:solidFill>
+              <a:srgbClr val="FFFFFF">
+                <a:alpha val="40000"/>
+              </a:srgbClr>
+            </a:solidFill>
+            <a:prstDash val="solid"/>
+          </a:ln>
+        </p:spPr>
+      </p:sp>
+      <p:sp>
+        <p:nvSpPr>
+          <p:cNvPr id="9" name="Text 6"/>
+          <p:cNvSpPr txBox="1"/>
+          <p:nvPr/>
+        </p:nvSpPr>
+        <p:spPr>
+          <a:xfrm>
+            <a:off x="548640" y="3639312"/>
+            <a:ext cx="4937760" cy="274320"/>
+          </a:xfrm>
+          <a:prstGeom prst="rect">
+            <a:avLst/>
+          </a:prstGeom>
+          <a:noFill/>
+          <a:ln/>
+        </p:spPr>
+        <p:txBody>
+          <a:bodyPr wrap="square" lIns="0" tIns="0" rIns="0" bIns="0" rtlCol="0" anchor="ctr"/>
+          <a:lstStyle/>
+          <a:p>
+            <a:pPr indent="0" marL="0">
+              <a:buNone/>
+            </a:pPr>
+            <a:r>
+              <a:rPr lang="en-US" sz="900" dirty="0">
+                <a:solidFill>
+                  <a:schemeClr val="bg2"/>
+                </a:solidFill>
+              </a:rPr>
+              <a:t>앱 첫 화면의 알림 줄 (예시 데이터)</a:t>
+            </a:r>
+            <a:endParaRPr lang="en-US" sz="900" dirty="0"/>
+          </a:p>
+        </p:txBody>
+      </p:sp>
+      <p:sp>
+        <p:nvSpPr>
+          <p:cNvPr id="10" name="Text 7"/>
+          <p:cNvSpPr txBox="1"/>
+          <p:nvPr/>
+        </p:nvSpPr>
+        <p:spPr>
+          <a:xfrm>
+            <a:off x="548640" y="4297680"/>
+            <a:ext cx="5486400" cy="320040"/>
+          </a:xfrm>
+          <a:prstGeom prst="rect">
+            <a:avLst/>
+          </a:prstGeom>
+          <a:noFill/>
+          <a:ln/>
+        </p:spPr>
+        <p:txBody>
+          <a:bodyPr wrap="square" lIns="0" tIns="0" rIns="0" bIns="0" rtlCol="0" anchor="ctr"/>
+          <a:lstStyle/>
+          <a:p>
+            <a:pPr indent="0" marL="0">
+              <a:buNone/>
+            </a:pPr>
+            <a:r>
+              <a:rPr lang="en-US" sz="1200" dirty="0">
+                <a:solidFill>
+                  <a:schemeClr val="bg2"/>
+                </a:solidFill>
+              </a:rPr>
+              <a:t>SW기술창업 중간발표 · 4조 · 2026.10.27</a:t>
+            </a:r>
+            <a:endParaRPr lang="en-US" sz="1200" dirty="0"/>
+          </a:p>
+        </p:txBody>
+      </p:sp>
+      <p:sp>
+        <p:nvSpPr>
+          <p:cNvPr id="11" name="Text 8"/>
+          <p:cNvSpPr txBox="1"/>
+          <p:nvPr/>
+        </p:nvSpPr>
+        <p:spPr>
+          <a:xfrm>
+            <a:off x="6126480" y="1417320"/>
+            <a:ext cx="2560320" cy="274320"/>
+          </a:xfrm>
+          <a:prstGeom prst="rect">
+            <a:avLst/>
+          </a:prstGeom>
+          <a:noFill/>
+          <a:ln/>
+        </p:spPr>
+        <p:txBody>
+          <a:bodyPr wrap="square" lIns="0" tIns="0" rIns="0" bIns="0" rtlCol="0" anchor="ctr"/>
+          <a:lstStyle/>
+          <a:p>
             <a:pPr indent="0" marL="0">
               <a:buNone/>
             </a:pPr>
@@ -3117,7 +3244,7 @@
                   <a:schemeClr val="bg2"/>
                 </a:solidFill>
               </a:rPr>
-              <a:t>팀명 (후보)</a:t>
+              <a:t>팀명 후보</a:t>
             </a:r>
             <a:endParaRPr lang="en-US" sz="1000" dirty="0"/>
           </a:p>
@@ -3125,14 +3252,14 @@
       </p:sp>
       <p:sp>
         <p:nvSpPr>
-          <p:cNvPr id="8" name="Text 5"/>
-          <p:cNvSpPr txBox="1"/>
-          <p:nvPr/>
-        </p:nvSpPr>
-        <p:spPr>
-          <a:xfrm>
-            <a:off x="6217920" y="1143000"/>
-            <a:ext cx="2286000" cy="548640"/>
+          <p:cNvPr id="12" name="Text 9"/>
+          <p:cNvSpPr txBox="1"/>
+          <p:nvPr/>
+        </p:nvSpPr>
+        <p:spPr>
+          <a:xfrm>
+            <a:off x="6126480" y="1691640"/>
+            <a:ext cx="2560320" cy="548640"/>
           </a:xfrm>
           <a:prstGeom prst="rect">
             <a:avLst/>
@@ -3161,14 +3288,14 @@
       </p:sp>
       <p:sp>
         <p:nvSpPr>
-          <p:cNvPr id="9" name="Text 6"/>
-          <p:cNvSpPr txBox="1"/>
-          <p:nvPr/>
-        </p:nvSpPr>
-        <p:spPr>
-          <a:xfrm>
-            <a:off x="6217920" y="1691640"/>
-            <a:ext cx="2286000" cy="274320"/>
+          <p:cNvPr id="13" name="Text 10"/>
+          <p:cNvSpPr txBox="1"/>
+          <p:nvPr/>
+        </p:nvSpPr>
+        <p:spPr>
+          <a:xfrm>
+            <a:off x="6126480" y="2240280"/>
+            <a:ext cx="2560320" cy="274320"/>
           </a:xfrm>
           <a:prstGeom prst="rect">
             <a:avLst/>
@@ -3197,14 +3324,39 @@
       </p:sp>
       <p:sp>
         <p:nvSpPr>
-          <p:cNvPr id="10" name="Text 7"/>
-          <p:cNvSpPr txBox="1"/>
-          <p:nvPr/>
-        </p:nvSpPr>
-        <p:spPr>
-          <a:xfrm>
-            <a:off x="6217920" y="2194560"/>
-            <a:ext cx="2286000" cy="274320"/>
+          <p:cNvPr id="14" name="Shape 11"/>
+          <p:cNvSpPr/>
+          <p:nvPr/>
+        </p:nvSpPr>
+        <p:spPr>
+          <a:xfrm>
+            <a:off x="6126480" y="2651760"/>
+            <a:ext cx="2560320" cy="0"/>
+          </a:xfrm>
+          <a:prstGeom prst="line">
+            <a:avLst/>
+          </a:prstGeom>
+          <a:noFill/>
+          <a:ln w="9525">
+            <a:solidFill>
+              <a:srgbClr val="FFFFFF">
+                <a:alpha val="40000"/>
+              </a:srgbClr>
+            </a:solidFill>
+            <a:prstDash val="solid"/>
+          </a:ln>
+        </p:spPr>
+      </p:sp>
+      <p:sp>
+        <p:nvSpPr>
+          <p:cNvPr id="15" name="Text 12"/>
+          <p:cNvSpPr txBox="1"/>
+          <p:nvPr/>
+        </p:nvSpPr>
+        <p:spPr>
+          <a:xfrm>
+            <a:off x="6126480" y="2743200"/>
+            <a:ext cx="2560320" cy="274320"/>
           </a:xfrm>
           <a:prstGeom prst="rect">
             <a:avLst/>
@@ -3233,14 +3385,14 @@
       </p:sp>
       <p:sp>
         <p:nvSpPr>
-          <p:cNvPr id="11" name="Text 8"/>
-          <p:cNvSpPr txBox="1"/>
-          <p:nvPr/>
-        </p:nvSpPr>
-        <p:spPr>
-          <a:xfrm>
-            <a:off x="6217920" y="2468880"/>
-            <a:ext cx="2286000" cy="1920240"/>
+          <p:cNvPr id="16" name="Text 13"/>
+          <p:cNvSpPr txBox="1"/>
+          <p:nvPr/>
+        </p:nvSpPr>
+        <p:spPr>
+          <a:xfrm>
+            <a:off x="6126480" y="3017520"/>
+            <a:ext cx="2560320" cy="1737360"/>
           </a:xfrm>
           <a:prstGeom prst="rect">
             <a:avLst/>
@@ -3357,7 +3509,7 @@
       </p:sp>
       <p:sp>
         <p:nvSpPr>
-          <p:cNvPr id="13" name="Text 0"/>
+          <p:cNvPr id="18" name="Text 0"/>
           <p:cNvSpPr/>
           <p:nvPr>
             <p:ph idx="100" type="title" hasCustomPrompt="1"/>
@@ -3511,13 +3663,6 @@
             </a:solidFill>
             <a:prstDash val="solid"/>
           </a:ln>
-          <a:effectLst>
-            <a:outerShdw sx="100000" sy="100000" kx="0" ky="0" algn="bl" rotWithShape="0" blurRad="76200" dist="25400" dir="5400000">
-              <a:srgbClr val="000000">
-                <a:alpha val="22000"/>
-              </a:srgbClr>
-            </a:outerShdw>
-          </a:effectLst>
         </p:spPr>
       </p:sp>
       <p:pic>
@@ -3641,13 +3786,6 @@
             </a:solidFill>
             <a:prstDash val="solid"/>
           </a:ln>
-          <a:effectLst>
-            <a:outerShdw sx="100000" sy="100000" kx="0" ky="0" algn="bl" rotWithShape="0" blurRad="76200" dist="25400" dir="5400000">
-              <a:srgbClr val="000000">
-                <a:alpha val="22000"/>
-              </a:srgbClr>
-            </a:outerShdw>
-          </a:effectLst>
         </p:spPr>
       </p:sp>
       <p:pic>
@@ -3771,13 +3909,6 @@
             </a:solidFill>
             <a:prstDash val="solid"/>
           </a:ln>
-          <a:effectLst>
-            <a:outerShdw sx="100000" sy="100000" kx="0" ky="0" algn="bl" rotWithShape="0" blurRad="76200" dist="25400" dir="5400000">
-              <a:srgbClr val="000000">
-                <a:alpha val="22000"/>
-              </a:srgbClr>
-            </a:outerShdw>
-          </a:effectLst>
         </p:spPr>
       </p:sp>
       <p:pic>
@@ -3901,13 +4032,6 @@
             </a:solidFill>
             <a:prstDash val="solid"/>
           </a:ln>
-          <a:effectLst>
-            <a:outerShdw sx="100000" sy="100000" kx="0" ky="0" algn="bl" rotWithShape="0" blurRad="76200" dist="25400" dir="5400000">
-              <a:srgbClr val="000000">
-                <a:alpha val="22000"/>
-              </a:srgbClr>
-            </a:outerShdw>
-          </a:effectLst>
         </p:spPr>
       </p:sp>
       <p:pic>
@@ -5344,14 +5468,14 @@
               <a:buNone/>
             </a:pPr>
             <a:r>
-              <a:rPr lang="en-US" sz="2400" b="1" dirty="0">
+              <a:rPr lang="en-US" sz="2000" b="1" dirty="0">
                 <a:solidFill>
                   <a:schemeClr val="tx2"/>
                 </a:solidFill>
               </a:rPr>
               <a:t>26만 2,304명</a:t>
             </a:r>
-            <a:endParaRPr lang="en-US" sz="2400" dirty="0"/>
+            <a:endParaRPr lang="en-US" sz="2000" dirty="0"/>
           </a:p>
         </p:txBody>
       </p:sp>
@@ -5439,14 +5563,14 @@
               <a:buNone/>
             </a:pPr>
             <a:r>
-              <a:rPr lang="en-US" sz="2400" b="1" dirty="0">
+              <a:rPr lang="en-US" sz="2000" b="1" dirty="0">
                 <a:solidFill>
                   <a:schemeClr val="accent3"/>
                 </a:solidFill>
               </a:rPr>
               <a:t>67.8%</a:t>
             </a:r>
-            <a:endParaRPr lang="en-US" sz="2400" dirty="0"/>
+            <a:endParaRPr lang="en-US" sz="2000" dirty="0"/>
           </a:p>
         </p:txBody>
       </p:sp>
@@ -5534,14 +5658,14 @@
               <a:buNone/>
             </a:pPr>
             <a:r>
-              <a:rPr lang="en-US" sz="2400" b="1" dirty="0">
+              <a:rPr lang="en-US" sz="2000" b="1" dirty="0">
                 <a:solidFill>
                   <a:schemeClr val="accent3"/>
                 </a:solidFill>
               </a:rPr>
               <a:t>48.0%</a:t>
             </a:r>
-            <a:endParaRPr lang="en-US" sz="2400" dirty="0"/>
+            <a:endParaRPr lang="en-US" sz="2000" dirty="0"/>
           </a:p>
         </p:txBody>
       </p:sp>
@@ -6382,13 +6506,6 @@
             </a:solidFill>
             <a:prstDash val="solid"/>
           </a:ln>
-          <a:effectLst>
-            <a:outerShdw sx="100000" sy="100000" kx="0" ky="0" algn="bl" rotWithShape="0" blurRad="50800" dist="12700" dir="5400000">
-              <a:srgbClr val="000000">
-                <a:alpha val="20000"/>
-              </a:srgbClr>
-            </a:outerShdw>
-          </a:effectLst>
         </p:spPr>
       </p:sp>
       <p:sp>
@@ -6717,465 +6834,99 @@
       </p:sp>
       <p:sp>
         <p:nvSpPr>
-          <p:cNvPr id="4" name="핵심 화면 칸"/>
+          <p:cNvPr id="4" name="Text 2"/>
+          <p:cNvSpPr txBox="1"/>
+          <p:nvPr/>
+        </p:nvSpPr>
+        <p:spPr>
+          <a:xfrm>
+            <a:off x="457200" y="1280160"/>
+            <a:ext cx="6419088" cy="603504"/>
+          </a:xfrm>
+          <a:prstGeom prst="rect">
+            <a:avLst/>
+          </a:prstGeom>
+          <a:noFill/>
+          <a:ln/>
+        </p:spPr>
+        <p:txBody>
+          <a:bodyPr wrap="square" lIns="0" tIns="0" rIns="0" bIns="0" rtlCol="0" anchor="ctr"/>
+          <a:lstStyle/>
+          <a:p>
+            <a:pPr indent="0" marL="0">
+              <a:buNone/>
+            </a:pPr>
+            <a:r>
+              <a:rPr lang="en-US" sz="1200" b="1" dirty="0">
+                <a:solidFill>
+                  <a:schemeClr val="tx1"/>
+                </a:solidFill>
+              </a:rPr>
+              <a:t>핵심 화면: 기록 · 비교 · 요청 · 증빙</a:t>
+            </a:r>
+            <a:endParaRPr lang="en-US" sz="1200" dirty="0"/>
+          </a:p>
+          <a:p>
+            <a:pPr indent="0" marL="0">
+              <a:buNone/>
+            </a:pPr>
+            <a:r>
+              <a:rPr lang="en-US" sz="950" dirty="0">
+                <a:solidFill>
+                  <a:schemeClr val="accent5"/>
+                </a:solidFill>
+              </a:rPr>
+              <a:t>신뢰가 핵심인 화면에는 광고를 섞지 않는다</a:t>
+            </a:r>
+            <a:endParaRPr lang="en-US" sz="1200" dirty="0"/>
+          </a:p>
+        </p:txBody>
+      </p:sp>
+      <p:sp>
+        <p:nvSpPr>
+          <p:cNvPr id="5" name="Text 3"/>
+          <p:cNvSpPr txBox="1"/>
+          <p:nvPr/>
+        </p:nvSpPr>
+        <p:spPr>
+          <a:xfrm>
+            <a:off x="6876288" y="1280160"/>
+            <a:ext cx="1810512" cy="603504"/>
+          </a:xfrm>
+          <a:prstGeom prst="rect">
+            <a:avLst/>
+          </a:prstGeom>
+          <a:noFill/>
+          <a:ln/>
+        </p:spPr>
+        <p:txBody>
+          <a:bodyPr wrap="square" lIns="0" tIns="0" rIns="0" bIns="0" rtlCol="0" anchor="ctr"/>
+          <a:lstStyle/>
+          <a:p>
+            <a:pPr algn="r" indent="0" marL="0">
+              <a:buNone/>
+            </a:pPr>
+            <a:r>
+              <a:rPr lang="en-US" sz="1200" b="1" dirty="0">
+                <a:solidFill>
+                  <a:schemeClr val="accent2"/>
+                </a:solidFill>
+              </a:rPr>
+              <a:t>무료 · 광고 없음</a:t>
+            </a:r>
+            <a:endParaRPr lang="en-US" sz="1200" dirty="0"/>
+          </a:p>
+        </p:txBody>
+      </p:sp>
+      <p:sp>
+        <p:nvSpPr>
+          <p:cNvPr id="6" name="Shape 4"/>
           <p:cNvSpPr/>
           <p:nvPr/>
         </p:nvSpPr>
         <p:spPr>
           <a:xfrm>
-            <a:off x="457200" y="1234440"/>
-            <a:ext cx="2651760" cy="1783080"/>
-          </a:xfrm>
-          <a:prstGeom prst="roundRect">
-            <a:avLst>
-              <a:gd name="adj" fmla="val 5128"/>
-            </a:avLst>
-          </a:prstGeom>
-          <a:solidFill>
-            <a:schemeClr val="bg2"/>
-          </a:solidFill>
-          <a:ln w="12700">
-            <a:solidFill>
-              <a:schemeClr val="bg2"/>
-            </a:solidFill>
-            <a:prstDash val="solid"/>
-          </a:ln>
-        </p:spPr>
-      </p:sp>
-      <p:sp>
-        <p:nvSpPr>
-          <p:cNvPr id="5" name="Text 3"/>
-          <p:cNvSpPr txBox="1"/>
-          <p:nvPr/>
-        </p:nvSpPr>
-        <p:spPr>
-          <a:xfrm>
-            <a:off x="640080" y="1325880"/>
-            <a:ext cx="2286000" cy="274320"/>
-          </a:xfrm>
-          <a:prstGeom prst="rect">
-            <a:avLst/>
-          </a:prstGeom>
-          <a:noFill/>
-          <a:ln/>
-        </p:spPr>
-        <p:txBody>
-          <a:bodyPr wrap="square" lIns="0" tIns="0" rIns="0" bIns="0" rtlCol="0" anchor="ctr"/>
-          <a:lstStyle/>
-          <a:p>
-            <a:pPr indent="0" marL="0">
-              <a:buNone/>
-            </a:pPr>
-            <a:r>
-              <a:rPr lang="en-US" sz="1000" b="1" dirty="0">
-                <a:solidFill>
-                  <a:schemeClr val="accent2"/>
-                </a:solidFill>
-              </a:rPr>
-              <a:t>핵심 화면</a:t>
-            </a:r>
-            <a:endParaRPr lang="en-US" sz="1000" dirty="0"/>
-          </a:p>
-        </p:txBody>
-      </p:sp>
-      <p:sp>
-        <p:nvSpPr>
-          <p:cNvPr id="6" name="Text 4"/>
-          <p:cNvSpPr txBox="1"/>
-          <p:nvPr/>
-        </p:nvSpPr>
-        <p:spPr>
-          <a:xfrm>
-            <a:off x="640080" y="1600200"/>
-            <a:ext cx="2286000" cy="365760"/>
-          </a:xfrm>
-          <a:prstGeom prst="rect">
-            <a:avLst/>
-          </a:prstGeom>
-          <a:noFill/>
-          <a:ln/>
-        </p:spPr>
-        <p:txBody>
-          <a:bodyPr wrap="square" lIns="0" tIns="0" rIns="0" bIns="0" rtlCol="0" anchor="ctr"/>
-          <a:lstStyle/>
-          <a:p>
-            <a:pPr indent="0" marL="0">
-              <a:buNone/>
-            </a:pPr>
-            <a:r>
-              <a:rPr lang="en-US" sz="1400" b="1" dirty="0">
-                <a:solidFill>
-                  <a:schemeClr val="tx2"/>
-                </a:solidFill>
-              </a:rPr>
-              <a:t>무료 · 광고 없음</a:t>
-            </a:r>
-            <a:endParaRPr lang="en-US" sz="1400" dirty="0"/>
-          </a:p>
-        </p:txBody>
-      </p:sp>
-      <p:sp>
-        <p:nvSpPr>
-          <p:cNvPr id="7" name="Text 5"/>
-          <p:cNvSpPr txBox="1"/>
-          <p:nvPr/>
-        </p:nvSpPr>
-        <p:spPr>
-          <a:xfrm>
-            <a:off x="640080" y="1993392"/>
-            <a:ext cx="2286000" cy="960120"/>
-          </a:xfrm>
-          <a:prstGeom prst="rect">
-            <a:avLst/>
-          </a:prstGeom>
-          <a:noFill/>
-          <a:ln/>
-        </p:spPr>
-        <p:txBody>
-          <a:bodyPr wrap="square" lIns="0" tIns="0" rIns="0" bIns="0" rtlCol="0" anchor="t"/>
-          <a:lstStyle/>
-          <a:p>
-            <a:pPr indent="0" marL="0">
-              <a:buNone/>
-            </a:pPr>
-            <a:r>
-              <a:rPr lang="en-US" sz="1000" dirty="0">
-                <a:solidFill>
-                  <a:schemeClr val="tx1"/>
-                </a:solidFill>
-              </a:rPr>
-              <a:t>기록 · 비교 · 요청 · 증빙. 신뢰가 핵심인 화면에 광고를 섞지 않는다</a:t>
-            </a:r>
-            <a:endParaRPr lang="en-US" sz="1000" dirty="0"/>
-          </a:p>
-        </p:txBody>
-      </p:sp>
-      <p:sp>
-        <p:nvSpPr>
-          <p:cNvPr id="8" name="1차 (가설) 칸"/>
-          <p:cNvSpPr/>
-          <p:nvPr/>
-        </p:nvSpPr>
-        <p:spPr>
-          <a:xfrm>
-            <a:off x="3246120" y="1234440"/>
-            <a:ext cx="2651760" cy="1783080"/>
-          </a:xfrm>
-          <a:prstGeom prst="roundRect">
-            <a:avLst>
-              <a:gd name="adj" fmla="val 5128"/>
-            </a:avLst>
-          </a:prstGeom>
-          <a:solidFill>
-            <a:schemeClr val="bg2"/>
-          </a:solidFill>
-          <a:ln w="12700">
-            <a:solidFill>
-              <a:schemeClr val="bg2"/>
-            </a:solidFill>
-            <a:prstDash val="solid"/>
-          </a:ln>
-        </p:spPr>
-      </p:sp>
-      <p:sp>
-        <p:nvSpPr>
-          <p:cNvPr id="9" name="Text 7"/>
-          <p:cNvSpPr txBox="1"/>
-          <p:nvPr/>
-        </p:nvSpPr>
-        <p:spPr>
-          <a:xfrm>
-            <a:off x="3429000" y="1325880"/>
-            <a:ext cx="2286000" cy="274320"/>
-          </a:xfrm>
-          <a:prstGeom prst="rect">
-            <a:avLst/>
-          </a:prstGeom>
-          <a:noFill/>
-          <a:ln/>
-        </p:spPr>
-        <p:txBody>
-          <a:bodyPr wrap="square" lIns="0" tIns="0" rIns="0" bIns="0" rtlCol="0" anchor="ctr"/>
-          <a:lstStyle/>
-          <a:p>
-            <a:pPr indent="0" marL="0">
-              <a:buNone/>
-            </a:pPr>
-            <a:r>
-              <a:rPr lang="en-US" sz="1000" b="1" dirty="0">
-                <a:solidFill>
-                  <a:schemeClr val="accent1"/>
-                </a:solidFill>
-              </a:rPr>
-              <a:t>1차 (가설)</a:t>
-            </a:r>
-            <a:endParaRPr lang="en-US" sz="1000" dirty="0"/>
-          </a:p>
-        </p:txBody>
-      </p:sp>
-      <p:sp>
-        <p:nvSpPr>
-          <p:cNvPr id="10" name="Text 8"/>
-          <p:cNvSpPr txBox="1"/>
-          <p:nvPr/>
-        </p:nvSpPr>
-        <p:spPr>
-          <a:xfrm>
-            <a:off x="3429000" y="1600200"/>
-            <a:ext cx="2286000" cy="365760"/>
-          </a:xfrm>
-          <a:prstGeom prst="rect">
-            <a:avLst/>
-          </a:prstGeom>
-          <a:noFill/>
-          <a:ln/>
-        </p:spPr>
-        <p:txBody>
-          <a:bodyPr wrap="square" lIns="0" tIns="0" rIns="0" bIns="0" rtlCol="0" anchor="ctr"/>
-          <a:lstStyle/>
-          <a:p>
-            <a:pPr indent="0" marL="0">
-              <a:buNone/>
-            </a:pPr>
-            <a:r>
-              <a:rPr lang="en-US" sz="1400" b="1" dirty="0">
-                <a:solidFill>
-                  <a:schemeClr val="tx2"/>
-                </a:solidFill>
-              </a:rPr>
-              <a:t>쉬는 틈 게임 화면 광고</a:t>
-            </a:r>
-            <a:endParaRPr lang="en-US" sz="1400" dirty="0"/>
-          </a:p>
-        </p:txBody>
-      </p:sp>
-      <p:sp>
-        <p:nvSpPr>
-          <p:cNvPr id="11" name="Text 9"/>
-          <p:cNvSpPr txBox="1"/>
-          <p:nvPr/>
-        </p:nvSpPr>
-        <p:spPr>
-          <a:xfrm>
-            <a:off x="3429000" y="1993392"/>
-            <a:ext cx="2286000" cy="960120"/>
-          </a:xfrm>
-          <a:prstGeom prst="rect">
-            <a:avLst/>
-          </a:prstGeom>
-          <a:noFill/>
-          <a:ln/>
-        </p:spPr>
-        <p:txBody>
-          <a:bodyPr wrap="square" lIns="0" tIns="0" rIns="0" bIns="0" rtlCol="0" anchor="t"/>
-          <a:lstStyle/>
-          <a:p>
-            <a:pPr indent="0" marL="0">
-              <a:buNone/>
-            </a:pPr>
-            <a:r>
-              <a:rPr lang="en-US" sz="1000" dirty="0">
-                <a:solidFill>
-                  <a:schemeClr val="tx1"/>
-                </a:solidFill>
-              </a:rPr>
-              <a:t>스도쿠 · 틀린 그림 찾기 · 블록 채우기 화면에만. 웹앱에서도 Google H5 Games Ads로 배너 · 보상형이 가능 (승인 심사 필요, 미신청)</a:t>
-            </a:r>
-            <a:endParaRPr lang="en-US" sz="1000" dirty="0"/>
-          </a:p>
-        </p:txBody>
-      </p:sp>
-      <p:sp>
-        <p:nvSpPr>
-          <p:cNvPr id="12" name="2차 (후보) 칸"/>
-          <p:cNvSpPr/>
-          <p:nvPr/>
-        </p:nvSpPr>
-        <p:spPr>
-          <a:xfrm>
-            <a:off x="6035040" y="1234440"/>
-            <a:ext cx="2651760" cy="1783080"/>
-          </a:xfrm>
-          <a:prstGeom prst="roundRect">
-            <a:avLst>
-              <a:gd name="adj" fmla="val 5128"/>
-            </a:avLst>
-          </a:prstGeom>
-          <a:solidFill>
-            <a:schemeClr val="bg2"/>
-          </a:solidFill>
-          <a:ln w="12700">
-            <a:solidFill>
-              <a:schemeClr val="bg2"/>
-            </a:solidFill>
-            <a:prstDash val="solid"/>
-          </a:ln>
-        </p:spPr>
-      </p:sp>
-      <p:sp>
-        <p:nvSpPr>
-          <p:cNvPr id="13" name="Text 11"/>
-          <p:cNvSpPr txBox="1"/>
-          <p:nvPr/>
-        </p:nvSpPr>
-        <p:spPr>
-          <a:xfrm>
-            <a:off x="6217920" y="1325880"/>
-            <a:ext cx="2286000" cy="274320"/>
-          </a:xfrm>
-          <a:prstGeom prst="rect">
-            <a:avLst/>
-          </a:prstGeom>
-          <a:noFill/>
-          <a:ln/>
-        </p:spPr>
-        <p:txBody>
-          <a:bodyPr wrap="square" lIns="0" tIns="0" rIns="0" bIns="0" rtlCol="0" anchor="ctr"/>
-          <a:lstStyle/>
-          <a:p>
-            <a:pPr indent="0" marL="0">
-              <a:buNone/>
-            </a:pPr>
-            <a:r>
-              <a:rPr lang="en-US" sz="1000" b="1" dirty="0">
-                <a:solidFill>
-                  <a:schemeClr val="accent4"/>
-                </a:solidFill>
-              </a:rPr>
-              <a:t>2차 (후보)</a:t>
-            </a:r>
-            <a:endParaRPr lang="en-US" sz="1000" dirty="0"/>
-          </a:p>
-        </p:txBody>
-      </p:sp>
-      <p:sp>
-        <p:nvSpPr>
-          <p:cNvPr id="14" name="Text 12"/>
-          <p:cNvSpPr txBox="1"/>
-          <p:nvPr/>
-        </p:nvSpPr>
-        <p:spPr>
-          <a:xfrm>
-            <a:off x="6217920" y="1600200"/>
-            <a:ext cx="2286000" cy="365760"/>
-          </a:xfrm>
-          <a:prstGeom prst="rect">
-            <a:avLst/>
-          </a:prstGeom>
-          <a:noFill/>
-          <a:ln/>
-        </p:spPr>
-        <p:txBody>
-          <a:bodyPr wrap="square" lIns="0" tIns="0" rIns="0" bIns="0" rtlCol="0" anchor="ctr"/>
-          <a:lstStyle/>
-          <a:p>
-            <a:pPr indent="0" marL="0">
-              <a:buNone/>
-            </a:pPr>
-            <a:r>
-              <a:rPr lang="en-US" sz="1400" b="1" dirty="0">
-                <a:solidFill>
-                  <a:schemeClr val="tx2"/>
-                </a:solidFill>
-              </a:rPr>
-              <a:t>편의 기능 구독</a:t>
-            </a:r>
-            <a:endParaRPr lang="en-US" sz="1400" dirty="0"/>
-          </a:p>
-        </p:txBody>
-      </p:sp>
-      <p:sp>
-        <p:nvSpPr>
-          <p:cNvPr id="15" name="Text 13"/>
-          <p:cNvSpPr txBox="1"/>
-          <p:nvPr/>
-        </p:nvSpPr>
-        <p:spPr>
-          <a:xfrm>
-            <a:off x="6217920" y="1993392"/>
-            <a:ext cx="2286000" cy="960120"/>
-          </a:xfrm>
-          <a:prstGeom prst="rect">
-            <a:avLst/>
-          </a:prstGeom>
-          <a:noFill/>
-          <a:ln/>
-        </p:spPr>
-        <p:txBody>
-          <a:bodyPr wrap="square" lIns="0" tIns="0" rIns="0" bIns="0" rtlCol="0" anchor="t"/>
-          <a:lstStyle/>
-          <a:p>
-            <a:pPr indent="0" marL="0">
-              <a:buNone/>
-            </a:pPr>
-            <a:r>
-              <a:rPr lang="en-US" sz="1000" dirty="0">
-                <a:solidFill>
-                  <a:schemeClr val="tx1"/>
-                </a:solidFill>
-              </a:rPr>
-              <a:t>여러 폰 동기화, 자동 백업처럼 문서 · 법률과 무관한 기능만</a:t>
-            </a:r>
-            <a:endParaRPr lang="en-US" sz="1000" dirty="0"/>
-          </a:p>
-        </p:txBody>
-      </p:sp>
-      <p:sp>
-        <p:nvSpPr>
-          <p:cNvPr id="16" name="Text 14"/>
-          <p:cNvSpPr txBox="1"/>
-          <p:nvPr/>
-        </p:nvSpPr>
-        <p:spPr>
-          <a:xfrm>
-            <a:off x="457200" y="3108960"/>
-            <a:ext cx="8229600" cy="438912"/>
-          </a:xfrm>
-          <a:prstGeom prst="rect">
-            <a:avLst/>
-          </a:prstGeom>
-          <a:noFill/>
-          <a:ln/>
-        </p:spPr>
-        <p:txBody>
-          <a:bodyPr wrap="square" lIns="0" tIns="0" rIns="0" bIns="0" rtlCol="0" anchor="ctr"/>
-          <a:lstStyle/>
-          <a:p>
-            <a:pPr indent="0" marL="0">
-              <a:buNone/>
-            </a:pPr>
-            <a:r>
-              <a:rPr lang="en-US" sz="1050" b="1" dirty="0">
-                <a:solidFill>
-                  <a:schemeClr val="accent3"/>
-                </a:solidFill>
-              </a:rPr>
-              <a:t>하지 않는 것  </a:t>
-            </a:r>
-            <a:pPr indent="0" marL="0">
-              <a:buNone/>
-            </a:pPr>
-            <a:r>
-              <a:rPr lang="en-US" sz="1050" dirty="0">
-                <a:solidFill>
-                  <a:schemeClr val="tx1"/>
-                </a:solidFill>
-              </a:rPr>
-              <a:t>정산 요청 문구 · 내용증명 · 증빙 묶음의 유료화. 돈을 받고 문서를 만들어 주면 변호사법 · 공인노무사법 문제에 가까워진다 (웹 조사 기준, 전문가 검토 아님)</a:t>
-            </a:r>
-            <a:endParaRPr lang="en-US" sz="1050" dirty="0"/>
-          </a:p>
-        </p:txBody>
-      </p:sp>
-      <p:sp>
-        <p:nvSpPr>
-          <p:cNvPr id="17" name="Shape 15"/>
-          <p:cNvSpPr/>
-          <p:nvPr/>
-        </p:nvSpPr>
-        <p:spPr>
-          <a:xfrm>
-            <a:off x="457200" y="3593592"/>
+            <a:off x="457200" y="1883664"/>
             <a:ext cx="8229600" cy="0"/>
           </a:xfrm>
           <a:prstGeom prst="line">
@@ -7192,14 +6943,14 @@
       </p:sp>
       <p:sp>
         <p:nvSpPr>
-          <p:cNvPr id="18" name="Text 16"/>
-          <p:cNvSpPr txBox="1"/>
-          <p:nvPr/>
-        </p:nvSpPr>
-        <p:spPr>
-          <a:xfrm>
-            <a:off x="457200" y="3657600"/>
-            <a:ext cx="1097280" cy="274320"/>
+          <p:cNvPr id="7" name="Text 5"/>
+          <p:cNvSpPr txBox="1"/>
+          <p:nvPr/>
+        </p:nvSpPr>
+        <p:spPr>
+          <a:xfrm>
+            <a:off x="457200" y="1883664"/>
+            <a:ext cx="6419088" cy="603504"/>
           </a:xfrm>
           <a:prstGeom prst="rect">
             <a:avLst/>
@@ -7215,111 +6966,85 @@
               <a:buNone/>
             </a:pPr>
             <a:r>
-              <a:rPr lang="en-US" sz="1050" b="1" dirty="0">
+              <a:rPr lang="en-US" sz="1200" b="1" dirty="0">
+                <a:solidFill>
+                  <a:schemeClr val="tx1"/>
+                </a:solidFill>
+              </a:rPr>
+              <a:t>1차 (가설): 쉬는 틈 게임 화면 광고</a:t>
+            </a:r>
+            <a:endParaRPr lang="en-US" sz="1200" dirty="0"/>
+          </a:p>
+          <a:p>
+            <a:pPr indent="0" marL="0">
+              <a:buNone/>
+            </a:pPr>
+            <a:r>
+              <a:rPr lang="en-US" sz="950" dirty="0">
+                <a:solidFill>
+                  <a:schemeClr val="accent5"/>
+                </a:solidFill>
+              </a:rPr>
+              <a:t>스도쿠 · 틀린 그림 찾기 · 블록 채우기 화면에만. 웹에서도 Google H5 Games Ads로 보상형 광고 가능 (승인 필요, 미신청)</a:t>
+            </a:r>
+            <a:endParaRPr lang="en-US" sz="1200" dirty="0"/>
+          </a:p>
+        </p:txBody>
+      </p:sp>
+      <p:sp>
+        <p:nvSpPr>
+          <p:cNvPr id="8" name="Text 6"/>
+          <p:cNvSpPr txBox="1"/>
+          <p:nvPr/>
+        </p:nvSpPr>
+        <p:spPr>
+          <a:xfrm>
+            <a:off x="6876288" y="1883664"/>
+            <a:ext cx="1810512" cy="603504"/>
+          </a:xfrm>
+          <a:prstGeom prst="rect">
+            <a:avLst/>
+          </a:prstGeom>
+          <a:noFill/>
+          <a:ln/>
+        </p:spPr>
+        <p:txBody>
+          <a:bodyPr wrap="square" lIns="0" tIns="0" rIns="0" bIns="0" rtlCol="0" anchor="ctr"/>
+          <a:lstStyle/>
+          <a:p>
+            <a:pPr algn="r" indent="0" marL="0">
+              <a:buNone/>
+            </a:pPr>
+            <a:r>
+              <a:rPr lang="en-US" sz="1200" b="1" dirty="0">
                 <a:solidFill>
                   <a:schemeClr val="tx2"/>
                 </a:solidFill>
               </a:rPr>
-              <a:t>유저 확보</a:t>
-            </a:r>
-            <a:endParaRPr lang="en-US" sz="1050" dirty="0"/>
-          </a:p>
-        </p:txBody>
-      </p:sp>
-      <p:sp>
-        <p:nvSpPr>
-          <p:cNvPr id="19" name="Text 17"/>
-          <p:cNvSpPr txBox="1"/>
-          <p:nvPr/>
-        </p:nvSpPr>
-        <p:spPr>
-          <a:xfrm>
-            <a:off x="1554480" y="3657600"/>
-            <a:ext cx="7132320" cy="365760"/>
-          </a:xfrm>
-          <a:prstGeom prst="rect">
-            <a:avLst/>
-          </a:prstGeom>
-          <a:noFill/>
-          <a:ln/>
-        </p:spPr>
-        <p:txBody>
-          <a:bodyPr wrap="square" lIns="0" tIns="0" rIns="0" bIns="0" rtlCol="0" anchor="t"/>
-          <a:lstStyle/>
-          <a:p>
-            <a:pPr indent="0" marL="0">
-              <a:buNone/>
-            </a:pPr>
-            <a:r>
-              <a:rPr lang="en-US" sz="1050" dirty="0">
-                <a:solidFill>
-                  <a:schemeClr val="tx1"/>
-                </a:solidFill>
-              </a:rPr>
-              <a:t>링크 하나로 설치되니 에브리타임 · 학과 · 동아리 단톡 · 알바 커뮤니티에 링크로 전파. "주휴수당 계산법" 같은 짧은 영상으로 유입</a:t>
-            </a:r>
-            <a:endParaRPr lang="en-US" sz="1050" dirty="0"/>
-          </a:p>
-        </p:txBody>
-      </p:sp>
-      <p:sp>
-        <p:nvSpPr>
-          <p:cNvPr id="20" name="Text 18"/>
-          <p:cNvSpPr txBox="1"/>
-          <p:nvPr/>
-        </p:nvSpPr>
-        <p:spPr>
-          <a:xfrm>
-            <a:off x="457200" y="4114800"/>
-            <a:ext cx="1097280" cy="274320"/>
-          </a:xfrm>
-          <a:prstGeom prst="rect">
-            <a:avLst/>
-          </a:prstGeom>
-          <a:noFill/>
-          <a:ln/>
-        </p:spPr>
-        <p:txBody>
-          <a:bodyPr wrap="square" lIns="0" tIns="0" rIns="0" bIns="0" rtlCol="0" anchor="ctr"/>
-          <a:lstStyle/>
-          <a:p>
-            <a:pPr indent="0" marL="0">
-              <a:buNone/>
-            </a:pPr>
-            <a:r>
-              <a:rPr lang="en-US" sz="1050" b="1" dirty="0">
-                <a:solidFill>
-                  <a:schemeClr val="tx2"/>
-                </a:solidFill>
-              </a:rPr>
-              <a:t>지표 (앞으로)</a:t>
-            </a:r>
-            <a:endParaRPr lang="en-US" sz="1050" dirty="0"/>
-          </a:p>
-        </p:txBody>
-      </p:sp>
-      <p:sp>
-        <p:nvSpPr>
-          <p:cNvPr id="21" name="지표 1"/>
+              <a:t>게임 화면만</a:t>
+            </a:r>
+            <a:endParaRPr lang="en-US" sz="1200" dirty="0"/>
+          </a:p>
+        </p:txBody>
+      </p:sp>
+      <p:sp>
+        <p:nvSpPr>
+          <p:cNvPr id="9" name="Shape 7"/>
           <p:cNvSpPr/>
           <p:nvPr/>
         </p:nvSpPr>
         <p:spPr>
           <a:xfrm>
-            <a:off x="1554480" y="4114800"/>
-            <a:ext cx="1097280" cy="329184"/>
-          </a:xfrm>
-          <a:prstGeom prst="roundRect">
-            <a:avLst>
-              <a:gd name="adj" fmla="val 16667"/>
-            </a:avLst>
-          </a:prstGeom>
-          <a:solidFill>
-            <a:schemeClr val="bg2"/>
-          </a:solidFill>
-          <a:ln w="12700">
+            <a:off x="457200" y="2487168"/>
+            <a:ext cx="8229600" cy="0"/>
+          </a:xfrm>
+          <a:prstGeom prst="line">
+            <a:avLst/>
+          </a:prstGeom>
+          <a:noFill/>
+          <a:ln w="9525">
             <a:solidFill>
-              <a:schemeClr val="bg2"/>
+              <a:srgbClr val="DCD9D0"/>
             </a:solidFill>
             <a:prstDash val="solid"/>
           </a:ln>
@@ -7327,14 +7052,14 @@
       </p:sp>
       <p:sp>
         <p:nvSpPr>
-          <p:cNvPr id="22" name="Text 20"/>
-          <p:cNvSpPr txBox="1"/>
-          <p:nvPr/>
-        </p:nvSpPr>
-        <p:spPr>
-          <a:xfrm>
-            <a:off x="1554480" y="4114800"/>
-            <a:ext cx="1097280" cy="329184"/>
+          <p:cNvPr id="10" name="Text 8"/>
+          <p:cNvSpPr txBox="1"/>
+          <p:nvPr/>
+        </p:nvSpPr>
+        <p:spPr>
+          <a:xfrm>
+            <a:off x="457200" y="2487168"/>
+            <a:ext cx="6419088" cy="603504"/>
           </a:xfrm>
           <a:prstGeom prst="rect">
             <a:avLst/>
@@ -7346,31 +7071,81 @@
           <a:bodyPr wrap="square" lIns="0" tIns="0" rIns="0" bIns="0" rtlCol="0" anchor="ctr"/>
           <a:lstStyle/>
           <a:p>
-            <a:pPr algn="ctr" indent="0" marL="0">
-              <a:buNone/>
-            </a:pPr>
-            <a:r>
-              <a:rPr lang="en-US" sz="850" dirty="0">
+            <a:pPr indent="0" marL="0">
+              <a:buNone/>
+            </a:pPr>
+            <a:r>
+              <a:rPr lang="en-US" sz="1200" b="1" dirty="0">
                 <a:solidFill>
                   <a:schemeClr val="tx1"/>
                 </a:solidFill>
               </a:rPr>
-              <a:t>홈 화면 추가</a:t>
-            </a:r>
-            <a:endParaRPr lang="en-US" sz="850" dirty="0"/>
-          </a:p>
-        </p:txBody>
-      </p:sp>
-      <p:sp>
-        <p:nvSpPr>
-          <p:cNvPr id="23" name="Shape 21"/>
+              <a:t>2차 (후보): 편의 기능 구독</a:t>
+            </a:r>
+            <a:endParaRPr lang="en-US" sz="1200" dirty="0"/>
+          </a:p>
+          <a:p>
+            <a:pPr indent="0" marL="0">
+              <a:buNone/>
+            </a:pPr>
+            <a:r>
+              <a:rPr lang="en-US" sz="950" dirty="0">
+                <a:solidFill>
+                  <a:schemeClr val="accent5"/>
+                </a:solidFill>
+              </a:rPr>
+              <a:t>여러 폰 동기화, 자동 백업처럼 문서 · 법률과 무관한 기능만</a:t>
+            </a:r>
+            <a:endParaRPr lang="en-US" sz="1200" dirty="0"/>
+          </a:p>
+        </p:txBody>
+      </p:sp>
+      <p:sp>
+        <p:nvSpPr>
+          <p:cNvPr id="11" name="Text 9"/>
+          <p:cNvSpPr txBox="1"/>
+          <p:nvPr/>
+        </p:nvSpPr>
+        <p:spPr>
+          <a:xfrm>
+            <a:off x="6876288" y="2487168"/>
+            <a:ext cx="1810512" cy="603504"/>
+          </a:xfrm>
+          <a:prstGeom prst="rect">
+            <a:avLst/>
+          </a:prstGeom>
+          <a:noFill/>
+          <a:ln/>
+        </p:spPr>
+        <p:txBody>
+          <a:bodyPr wrap="square" lIns="0" tIns="0" rIns="0" bIns="0" rtlCol="0" anchor="ctr"/>
+          <a:lstStyle/>
+          <a:p>
+            <a:pPr algn="r" indent="0" marL="0">
+              <a:buNone/>
+            </a:pPr>
+            <a:r>
+              <a:rPr lang="en-US" sz="1200" b="1" dirty="0">
+                <a:solidFill>
+                  <a:schemeClr val="tx2"/>
+                </a:solidFill>
+              </a:rPr>
+              <a:t>구독</a:t>
+            </a:r>
+            <a:endParaRPr lang="en-US" sz="1200" dirty="0"/>
+          </a:p>
+        </p:txBody>
+      </p:sp>
+      <p:sp>
+        <p:nvSpPr>
+          <p:cNvPr id="12" name="Shape 10"/>
           <p:cNvSpPr/>
           <p:nvPr/>
         </p:nvSpPr>
         <p:spPr>
           <a:xfrm>
-            <a:off x="2651760" y="4279392"/>
-            <a:ext cx="109728" cy="0"/>
+            <a:off x="457200" y="3090672"/>
+            <a:ext cx="8229600" cy="0"/>
           </a:xfrm>
           <a:prstGeom prst="line">
             <a:avLst/>
@@ -7378,35 +7153,7 @@
           <a:noFill/>
           <a:ln w="9525">
             <a:solidFill>
-              <a:srgbClr val="5D636D"/>
-            </a:solidFill>
-            <a:prstDash val="solid"/>
-            <a:tailEnd type="triangle"/>
-          </a:ln>
-        </p:spPr>
-      </p:sp>
-      <p:sp>
-        <p:nvSpPr>
-          <p:cNvPr id="24" name="지표 2"/>
-          <p:cNvSpPr/>
-          <p:nvPr/>
-        </p:nvSpPr>
-        <p:spPr>
-          <a:xfrm>
-            <a:off x="2761488" y="4114800"/>
-            <a:ext cx="1097280" cy="329184"/>
-          </a:xfrm>
-          <a:prstGeom prst="roundRect">
-            <a:avLst>
-              <a:gd name="adj" fmla="val 16667"/>
-            </a:avLst>
-          </a:prstGeom>
-          <a:solidFill>
-            <a:schemeClr val="bg2"/>
-          </a:solidFill>
-          <a:ln w="12700">
-            <a:solidFill>
-              <a:schemeClr val="bg2"/>
+              <a:srgbClr val="DCD9D0"/>
             </a:solidFill>
             <a:prstDash val="solid"/>
           </a:ln>
@@ -7414,14 +7161,14 @@
       </p:sp>
       <p:sp>
         <p:nvSpPr>
-          <p:cNvPr id="25" name="Text 23"/>
-          <p:cNvSpPr txBox="1"/>
-          <p:nvPr/>
-        </p:nvSpPr>
-        <p:spPr>
-          <a:xfrm>
-            <a:off x="2761488" y="4114800"/>
-            <a:ext cx="1097280" cy="329184"/>
+          <p:cNvPr id="13" name="Text 11"/>
+          <p:cNvSpPr txBox="1"/>
+          <p:nvPr/>
+        </p:nvSpPr>
+        <p:spPr>
+          <a:xfrm>
+            <a:off x="457200" y="3090672"/>
+            <a:ext cx="6419088" cy="603504"/>
           </a:xfrm>
           <a:prstGeom prst="rect">
             <a:avLst/>
@@ -7433,31 +7180,81 @@
           <a:bodyPr wrap="square" lIns="0" tIns="0" rIns="0" bIns="0" rtlCol="0" anchor="ctr"/>
           <a:lstStyle/>
           <a:p>
-            <a:pPr algn="ctr" indent="0" marL="0">
-              <a:buNone/>
-            </a:pPr>
-            <a:r>
-              <a:rPr lang="en-US" sz="850" dirty="0">
-                <a:solidFill>
-                  <a:schemeClr val="tx1"/>
-                </a:solidFill>
-              </a:rPr>
-              <a:t>첫 기록</a:t>
-            </a:r>
-            <a:endParaRPr lang="en-US" sz="850" dirty="0"/>
-          </a:p>
-        </p:txBody>
-      </p:sp>
-      <p:sp>
-        <p:nvSpPr>
-          <p:cNvPr id="26" name="Shape 24"/>
+            <a:pPr indent="0" marL="0">
+              <a:buNone/>
+            </a:pPr>
+            <a:r>
+              <a:rPr lang="en-US" sz="1200" b="1" dirty="0">
+                <a:solidFill>
+                  <a:schemeClr val="accent3"/>
+                </a:solidFill>
+              </a:rPr>
+              <a:t>하지 않는 것: 정산 문구 · 내용증명 · 증빙 묶음 유료화</a:t>
+            </a:r>
+            <a:endParaRPr lang="en-US" sz="1200" dirty="0"/>
+          </a:p>
+          <a:p>
+            <a:pPr indent="0" marL="0">
+              <a:buNone/>
+            </a:pPr>
+            <a:r>
+              <a:rPr lang="en-US" sz="950" dirty="0">
+                <a:solidFill>
+                  <a:schemeClr val="accent5"/>
+                </a:solidFill>
+              </a:rPr>
+              <a:t>돈을 받고 문서를 만들어 주면 변호사법 · 공인노무사법 문제에 가까워진다 (웹 조사 기준)</a:t>
+            </a:r>
+            <a:endParaRPr lang="en-US" sz="1200" dirty="0"/>
+          </a:p>
+        </p:txBody>
+      </p:sp>
+      <p:sp>
+        <p:nvSpPr>
+          <p:cNvPr id="14" name="Text 12"/>
+          <p:cNvSpPr txBox="1"/>
+          <p:nvPr/>
+        </p:nvSpPr>
+        <p:spPr>
+          <a:xfrm>
+            <a:off x="6876288" y="3090672"/>
+            <a:ext cx="1810512" cy="603504"/>
+          </a:xfrm>
+          <a:prstGeom prst="rect">
+            <a:avLst/>
+          </a:prstGeom>
+          <a:noFill/>
+          <a:ln/>
+        </p:spPr>
+        <p:txBody>
+          <a:bodyPr wrap="square" lIns="0" tIns="0" rIns="0" bIns="0" rtlCol="0" anchor="ctr"/>
+          <a:lstStyle/>
+          <a:p>
+            <a:pPr algn="r" indent="0" marL="0">
+              <a:buNone/>
+            </a:pPr>
+            <a:r>
+              <a:rPr lang="en-US" sz="1200" b="1" dirty="0">
+                <a:solidFill>
+                  <a:schemeClr val="accent3"/>
+                </a:solidFill>
+              </a:rPr>
+              <a:t>유료화 안 함</a:t>
+            </a:r>
+            <a:endParaRPr lang="en-US" sz="1200" dirty="0"/>
+          </a:p>
+        </p:txBody>
+      </p:sp>
+      <p:sp>
+        <p:nvSpPr>
+          <p:cNvPr id="15" name="Shape 13"/>
           <p:cNvSpPr/>
           <p:nvPr/>
         </p:nvSpPr>
         <p:spPr>
           <a:xfrm>
-            <a:off x="3858768" y="4279392"/>
-            <a:ext cx="109728" cy="0"/>
+            <a:off x="457200" y="3694176"/>
+            <a:ext cx="8229600" cy="0"/>
           </a:xfrm>
           <a:prstGeom prst="line">
             <a:avLst/>
@@ -7465,35 +7262,7 @@
           <a:noFill/>
           <a:ln w="9525">
             <a:solidFill>
-              <a:srgbClr val="5D636D"/>
-            </a:solidFill>
-            <a:prstDash val="solid"/>
-            <a:tailEnd type="triangle"/>
-          </a:ln>
-        </p:spPr>
-      </p:sp>
-      <p:sp>
-        <p:nvSpPr>
-          <p:cNvPr id="27" name="지표 3"/>
-          <p:cNvSpPr/>
-          <p:nvPr/>
-        </p:nvSpPr>
-        <p:spPr>
-          <a:xfrm>
-            <a:off x="3968496" y="4114800"/>
-            <a:ext cx="1097280" cy="329184"/>
-          </a:xfrm>
-          <a:prstGeom prst="roundRect">
-            <a:avLst>
-              <a:gd name="adj" fmla="val 16667"/>
-            </a:avLst>
-          </a:prstGeom>
-          <a:solidFill>
-            <a:schemeClr val="bg2"/>
-          </a:solidFill>
-          <a:ln w="12700">
-            <a:solidFill>
-              <a:schemeClr val="bg2"/>
+              <a:srgbClr val="DCD9D0"/>
             </a:solidFill>
             <a:prstDash val="solid"/>
           </a:ln>
@@ -7501,14 +7270,14 @@
       </p:sp>
       <p:sp>
         <p:nvSpPr>
-          <p:cNvPr id="28" name="Text 26"/>
-          <p:cNvSpPr txBox="1"/>
-          <p:nvPr/>
-        </p:nvSpPr>
-        <p:spPr>
-          <a:xfrm>
-            <a:off x="3968496" y="4114800"/>
-            <a:ext cx="1097280" cy="329184"/>
+          <p:cNvPr id="16" name="Text 14"/>
+          <p:cNvSpPr txBox="1"/>
+          <p:nvPr/>
+        </p:nvSpPr>
+        <p:spPr>
+          <a:xfrm>
+            <a:off x="457200" y="3886200"/>
+            <a:ext cx="1188720" cy="320040"/>
           </a:xfrm>
           <a:prstGeom prst="rect">
             <a:avLst/>
@@ -7520,82 +7289,67 @@
           <a:bodyPr wrap="square" lIns="0" tIns="0" rIns="0" bIns="0" rtlCol="0" anchor="ctr"/>
           <a:lstStyle/>
           <a:p>
-            <a:pPr algn="ctr" indent="0" marL="0">
-              <a:buNone/>
-            </a:pPr>
-            <a:r>
-              <a:rPr lang="en-US" sz="850" dirty="0">
+            <a:pPr indent="0" marL="0">
+              <a:buNone/>
+            </a:pPr>
+            <a:r>
+              <a:rPr lang="en-US" sz="1050" b="1" dirty="0">
+                <a:solidFill>
+                  <a:schemeClr val="tx2"/>
+                </a:solidFill>
+              </a:rPr>
+              <a:t>유저 확보</a:t>
+            </a:r>
+            <a:endParaRPr lang="en-US" sz="1050" dirty="0"/>
+          </a:p>
+        </p:txBody>
+      </p:sp>
+      <p:sp>
+        <p:nvSpPr>
+          <p:cNvPr id="17" name="Text 15"/>
+          <p:cNvSpPr txBox="1"/>
+          <p:nvPr/>
+        </p:nvSpPr>
+        <p:spPr>
+          <a:xfrm>
+            <a:off x="1645920" y="3886200"/>
+            <a:ext cx="7040880" cy="365760"/>
+          </a:xfrm>
+          <a:prstGeom prst="rect">
+            <a:avLst/>
+          </a:prstGeom>
+          <a:noFill/>
+          <a:ln/>
+        </p:spPr>
+        <p:txBody>
+          <a:bodyPr wrap="square" lIns="0" tIns="0" rIns="0" bIns="0" rtlCol="0" anchor="t"/>
+          <a:lstStyle/>
+          <a:p>
+            <a:pPr indent="0" marL="0">
+              <a:buNone/>
+            </a:pPr>
+            <a:r>
+              <a:rPr lang="en-US" sz="1050" dirty="0">
                 <a:solidFill>
                   <a:schemeClr val="tx1"/>
                 </a:solidFill>
               </a:rPr>
-              <a:t>받은 금액 입력</a:t>
-            </a:r>
-            <a:endParaRPr lang="en-US" sz="850" dirty="0"/>
-          </a:p>
-        </p:txBody>
-      </p:sp>
-      <p:sp>
-        <p:nvSpPr>
-          <p:cNvPr id="29" name="Shape 27"/>
-          <p:cNvSpPr/>
-          <p:nvPr/>
-        </p:nvSpPr>
-        <p:spPr>
-          <a:xfrm>
-            <a:off x="5065776" y="4279392"/>
-            <a:ext cx="109728" cy="0"/>
-          </a:xfrm>
-          <a:prstGeom prst="line">
-            <a:avLst/>
-          </a:prstGeom>
-          <a:noFill/>
-          <a:ln w="9525">
-            <a:solidFill>
-              <a:srgbClr val="5D636D"/>
-            </a:solidFill>
-            <a:prstDash val="solid"/>
-            <a:tailEnd type="triangle"/>
-          </a:ln>
-        </p:spPr>
-      </p:sp>
-      <p:sp>
-        <p:nvSpPr>
-          <p:cNvPr id="30" name="지표 4"/>
-          <p:cNvSpPr/>
-          <p:nvPr/>
-        </p:nvSpPr>
-        <p:spPr>
-          <a:xfrm>
-            <a:off x="5175504" y="4114800"/>
-            <a:ext cx="1097280" cy="329184"/>
-          </a:xfrm>
-          <a:prstGeom prst="roundRect">
-            <a:avLst>
-              <a:gd name="adj" fmla="val 16667"/>
-            </a:avLst>
-          </a:prstGeom>
-          <a:solidFill>
-            <a:schemeClr val="bg2"/>
-          </a:solidFill>
-          <a:ln w="12700">
-            <a:solidFill>
-              <a:schemeClr val="bg2"/>
-            </a:solidFill>
-            <a:prstDash val="solid"/>
-          </a:ln>
-        </p:spPr>
-      </p:sp>
-      <p:sp>
-        <p:nvSpPr>
-          <p:cNvPr id="31" name="Text 29"/>
-          <p:cNvSpPr txBox="1"/>
-          <p:nvPr/>
-        </p:nvSpPr>
-        <p:spPr>
-          <a:xfrm>
-            <a:off x="5175504" y="4114800"/>
-            <a:ext cx="1097280" cy="329184"/>
+              <a:t>링크 하나로 설치되니 에브리타임 · 학과 · 동아리 단톡 · 알바 커뮤니티에 링크로 전파. "주휴수당 계산법" 같은 짧은 영상으로 유입</a:t>
+            </a:r>
+            <a:endParaRPr lang="en-US" sz="1050" dirty="0"/>
+          </a:p>
+        </p:txBody>
+      </p:sp>
+      <p:sp>
+        <p:nvSpPr>
+          <p:cNvPr id="18" name="Text 16"/>
+          <p:cNvSpPr txBox="1"/>
+          <p:nvPr/>
+        </p:nvSpPr>
+        <p:spPr>
+          <a:xfrm>
+            <a:off x="457200" y="4315968"/>
+            <a:ext cx="1188720" cy="320040"/>
           </a:xfrm>
           <a:prstGeom prst="rect">
             <a:avLst/>
@@ -7607,192 +7361,54 @@
           <a:bodyPr wrap="square" lIns="0" tIns="0" rIns="0" bIns="0" rtlCol="0" anchor="ctr"/>
           <a:lstStyle/>
           <a:p>
-            <a:pPr algn="ctr" indent="0" marL="0">
-              <a:buNone/>
-            </a:pPr>
-            <a:r>
-              <a:rPr lang="en-US" sz="850" dirty="0">
-                <a:solidFill>
-                  <a:schemeClr val="tx1"/>
-                </a:solidFill>
-              </a:rPr>
-              <a:t>차액 발견</a:t>
-            </a:r>
-            <a:endParaRPr lang="en-US" sz="850" dirty="0"/>
-          </a:p>
-        </p:txBody>
-      </p:sp>
-      <p:sp>
-        <p:nvSpPr>
-          <p:cNvPr id="32" name="Shape 30"/>
-          <p:cNvSpPr/>
-          <p:nvPr/>
-        </p:nvSpPr>
-        <p:spPr>
-          <a:xfrm>
-            <a:off x="6272784" y="4279392"/>
-            <a:ext cx="109728" cy="0"/>
-          </a:xfrm>
-          <a:prstGeom prst="line">
-            <a:avLst/>
-          </a:prstGeom>
-          <a:noFill/>
-          <a:ln w="9525">
-            <a:solidFill>
-              <a:srgbClr val="5D636D"/>
-            </a:solidFill>
-            <a:prstDash val="solid"/>
-            <a:tailEnd type="triangle"/>
-          </a:ln>
-        </p:spPr>
-      </p:sp>
-      <p:sp>
-        <p:nvSpPr>
-          <p:cNvPr id="33" name="지표 5"/>
-          <p:cNvSpPr/>
-          <p:nvPr/>
-        </p:nvSpPr>
-        <p:spPr>
-          <a:xfrm>
-            <a:off x="6382512" y="4114800"/>
-            <a:ext cx="1097280" cy="329184"/>
-          </a:xfrm>
-          <a:prstGeom prst="roundRect">
-            <a:avLst>
-              <a:gd name="adj" fmla="val 16667"/>
-            </a:avLst>
-          </a:prstGeom>
-          <a:solidFill>
-            <a:schemeClr val="bg2"/>
-          </a:solidFill>
-          <a:ln w="12700">
-            <a:solidFill>
-              <a:schemeClr val="bg2"/>
-            </a:solidFill>
-            <a:prstDash val="solid"/>
-          </a:ln>
-        </p:spPr>
-      </p:sp>
-      <p:sp>
-        <p:nvSpPr>
-          <p:cNvPr id="34" name="Text 32"/>
-          <p:cNvSpPr txBox="1"/>
-          <p:nvPr/>
-        </p:nvSpPr>
-        <p:spPr>
-          <a:xfrm>
-            <a:off x="6382512" y="4114800"/>
-            <a:ext cx="1097280" cy="329184"/>
-          </a:xfrm>
-          <a:prstGeom prst="rect">
-            <a:avLst/>
-          </a:prstGeom>
-          <a:noFill/>
-          <a:ln/>
-        </p:spPr>
-        <p:txBody>
-          <a:bodyPr wrap="square" lIns="0" tIns="0" rIns="0" bIns="0" rtlCol="0" anchor="ctr"/>
-          <a:lstStyle/>
-          <a:p>
-            <a:pPr algn="ctr" indent="0" marL="0">
-              <a:buNone/>
-            </a:pPr>
-            <a:r>
-              <a:rPr lang="en-US" sz="850" dirty="0">
-                <a:solidFill>
-                  <a:schemeClr val="tx1"/>
-                </a:solidFill>
-              </a:rPr>
-              <a:t>요청 보냄</a:t>
-            </a:r>
-            <a:endParaRPr lang="en-US" sz="850" dirty="0"/>
-          </a:p>
-        </p:txBody>
-      </p:sp>
-      <p:sp>
-        <p:nvSpPr>
-          <p:cNvPr id="35" name="Shape 33"/>
-          <p:cNvSpPr/>
-          <p:nvPr/>
-        </p:nvSpPr>
-        <p:spPr>
-          <a:xfrm>
-            <a:off x="7479792" y="4279392"/>
-            <a:ext cx="109728" cy="0"/>
-          </a:xfrm>
-          <a:prstGeom prst="line">
-            <a:avLst/>
-          </a:prstGeom>
-          <a:noFill/>
-          <a:ln w="9525">
-            <a:solidFill>
-              <a:srgbClr val="5D636D"/>
-            </a:solidFill>
-            <a:prstDash val="solid"/>
-            <a:tailEnd type="triangle"/>
-          </a:ln>
-        </p:spPr>
-      </p:sp>
-      <p:sp>
-        <p:nvSpPr>
-          <p:cNvPr id="36" name="지표 6"/>
-          <p:cNvSpPr/>
-          <p:nvPr/>
-        </p:nvSpPr>
-        <p:spPr>
-          <a:xfrm>
-            <a:off x="7589520" y="4114800"/>
-            <a:ext cx="1097280" cy="329184"/>
-          </a:xfrm>
-          <a:prstGeom prst="roundRect">
-            <a:avLst>
-              <a:gd name="adj" fmla="val 16667"/>
-            </a:avLst>
-          </a:prstGeom>
-          <a:solidFill>
-            <a:schemeClr val="bg2"/>
-          </a:solidFill>
-          <a:ln w="12700">
-            <a:solidFill>
-              <a:schemeClr val="bg2"/>
-            </a:solidFill>
-            <a:prstDash val="solid"/>
-          </a:ln>
-        </p:spPr>
-      </p:sp>
-      <p:sp>
-        <p:nvSpPr>
-          <p:cNvPr id="37" name="Text 35"/>
-          <p:cNvSpPr txBox="1"/>
-          <p:nvPr/>
-        </p:nvSpPr>
-        <p:spPr>
-          <a:xfrm>
-            <a:off x="7589520" y="4114800"/>
-            <a:ext cx="1097280" cy="329184"/>
-          </a:xfrm>
-          <a:prstGeom prst="rect">
-            <a:avLst/>
-          </a:prstGeom>
-          <a:noFill/>
-          <a:ln/>
-        </p:spPr>
-        <p:txBody>
-          <a:bodyPr wrap="square" lIns="0" tIns="0" rIns="0" bIns="0" rtlCol="0" anchor="ctr"/>
-          <a:lstStyle/>
-          <a:p>
-            <a:pPr algn="ctr" indent="0" marL="0">
-              <a:buNone/>
-            </a:pPr>
-            <a:r>
-              <a:rPr lang="en-US" sz="850" dirty="0">
-                <a:solidFill>
-                  <a:schemeClr val="tx1"/>
-                </a:solidFill>
-              </a:rPr>
-              <a:t>실제로 받음 (인터뷰)</a:t>
-            </a:r>
-            <a:endParaRPr lang="en-US" sz="850" dirty="0"/>
+            <a:pPr indent="0" marL="0">
+              <a:buNone/>
+            </a:pPr>
+            <a:r>
+              <a:rPr lang="en-US" sz="1050" b="1" dirty="0">
+                <a:solidFill>
+                  <a:schemeClr val="tx2"/>
+                </a:solidFill>
+              </a:rPr>
+              <a:t>지표 (앞으로)</a:t>
+            </a:r>
+            <a:endParaRPr lang="en-US" sz="1050" dirty="0"/>
+          </a:p>
+        </p:txBody>
+      </p:sp>
+      <p:sp>
+        <p:nvSpPr>
+          <p:cNvPr id="19" name="Text 17"/>
+          <p:cNvSpPr txBox="1"/>
+          <p:nvPr/>
+        </p:nvSpPr>
+        <p:spPr>
+          <a:xfrm>
+            <a:off x="1645920" y="4315968"/>
+            <a:ext cx="7040880" cy="320040"/>
+          </a:xfrm>
+          <a:prstGeom prst="rect">
+            <a:avLst/>
+          </a:prstGeom>
+          <a:noFill/>
+          <a:ln/>
+        </p:spPr>
+        <p:txBody>
+          <a:bodyPr wrap="square" lIns="0" tIns="0" rIns="0" bIns="0" rtlCol="0" anchor="t"/>
+          <a:lstStyle/>
+          <a:p>
+            <a:pPr indent="0" marL="0">
+              <a:buNone/>
+            </a:pPr>
+            <a:r>
+              <a:rPr lang="en-US" sz="1050" b="1" dirty="0">
+                <a:solidFill>
+                  <a:schemeClr val="tx2"/>
+                </a:solidFill>
+              </a:rPr>
+              <a:t>홈 화면 추가 → 첫 기록 → 받은 금액 입력 → 차액 발견 → 요청 보냄 → 실제로 받음 (인터뷰)</a:t>
+            </a:r>
+            <a:endParaRPr lang="en-US" sz="1050" dirty="0"/>
           </a:p>
         </p:txBody>
       </p:sp>
@@ -10917,34 +10533,50 @@
       </p:sp>
       <p:sp>
         <p:nvSpPr>
-          <p:cNvPr id="3" name="이지훈 R&amp;R"/>
-          <p:cNvSpPr/>
+          <p:cNvPr id="3" name="Text 1"/>
+          <p:cNvSpPr txBox="1"/>
           <p:nvPr/>
         </p:nvSpPr>
         <p:spPr>
           <a:xfrm>
             <a:off x="548640" y="1371600"/>
-            <a:ext cx="2560320" cy="2194560"/>
-          </a:xfrm>
-          <a:prstGeom prst="roundRect">
-            <a:avLst>
-              <a:gd name="adj" fmla="val 5000"/>
-            </a:avLst>
-          </a:prstGeom>
-          <a:solidFill>
-            <a:srgbClr val="FFFFFF">
-              <a:alpha val="10000"/>
-            </a:srgbClr>
-          </a:solidFill>
-          <a:ln w="9525">
-            <a:solidFill>
-              <a:srgbClr val="FFFFFF">
-                <a:alpha val="30000"/>
-              </a:srgbClr>
-            </a:solidFill>
-            <a:prstDash val="solid"/>
-          </a:ln>
-        </p:spPr>
+            <a:ext cx="2377440" cy="411480"/>
+          </a:xfrm>
+          <a:prstGeom prst="rect">
+            <a:avLst/>
+          </a:prstGeom>
+          <a:noFill/>
+          <a:ln/>
+        </p:spPr>
+        <p:txBody>
+          <a:bodyPr wrap="square" lIns="0" tIns="0" rIns="0" bIns="0" rtlCol="0" anchor="ctr"/>
+          <a:lstStyle/>
+          <a:p>
+            <a:pPr indent="0" marL="0">
+              <a:buNone/>
+            </a:pPr>
+            <a:r>
+              <a:rPr lang="en-US" sz="1800" b="1" dirty="0">
+                <a:solidFill>
+                  <a:schemeClr val="bg1"/>
+                </a:solidFill>
+              </a:rPr>
+              <a:t>이지훈</a:t>
+            </a:r>
+            <a:pPr indent="0" marL="0">
+              <a:buNone/>
+            </a:pPr>
+            <a:r>
+              <a:rPr lang="en-US" sz="1000" dirty="0">
+                <a:solidFill>
+                  <a:schemeClr val="bg2"/>
+                </a:solidFill>
+              </a:rPr>
+              <a:t>  팀장 · 개발</a:t>
+            </a:r>
+            <a:endParaRPr lang="en-US" sz="1800" dirty="0"/>
+          </a:p>
+        </p:txBody>
       </p:sp>
       <p:sp>
         <p:nvSpPr>
@@ -10954,55 +10586,8 @@
         </p:nvSpPr>
         <p:spPr>
           <a:xfrm>
-            <a:off x="777240" y="1508760"/>
-            <a:ext cx="2194560" cy="411480"/>
-          </a:xfrm>
-          <a:prstGeom prst="rect">
-            <a:avLst/>
-          </a:prstGeom>
-          <a:noFill/>
-          <a:ln/>
-        </p:spPr>
-        <p:txBody>
-          <a:bodyPr wrap="square" lIns="0" tIns="0" rIns="0" bIns="0" rtlCol="0" anchor="ctr"/>
-          <a:lstStyle/>
-          <a:p>
-            <a:pPr indent="0" marL="0">
-              <a:buNone/>
-            </a:pPr>
-            <a:r>
-              <a:rPr lang="en-US" sz="1800" b="1" dirty="0">
-                <a:solidFill>
-                  <a:schemeClr val="bg1"/>
-                </a:solidFill>
-              </a:rPr>
-              <a:t>이지훈</a:t>
-            </a:r>
-            <a:pPr indent="0" marL="0">
-              <a:buNone/>
-            </a:pPr>
-            <a:r>
-              <a:rPr lang="en-US" sz="1000" dirty="0">
-                <a:solidFill>
-                  <a:schemeClr val="bg2"/>
-                </a:solidFill>
-              </a:rPr>
-              <a:t>  팀장 · 개발</a:t>
-            </a:r>
-            <a:endParaRPr lang="en-US" sz="1800" dirty="0"/>
-          </a:p>
-        </p:txBody>
-      </p:sp>
-      <p:sp>
-        <p:nvSpPr>
-          <p:cNvPr id="5" name="Text 3"/>
-          <p:cNvSpPr txBox="1"/>
-          <p:nvPr/>
-        </p:nvSpPr>
-        <p:spPr>
-          <a:xfrm>
-            <a:off x="777240" y="2011680"/>
-            <a:ext cx="2194560" cy="1371600"/>
+            <a:off x="548640" y="1874520"/>
+            <a:ext cx="2377440" cy="1554480"/>
           </a:xfrm>
           <a:prstGeom prst="rect">
             <a:avLst/>
@@ -11071,29 +10656,23 @@
       </p:sp>
       <p:sp>
         <p:nvSpPr>
-          <p:cNvPr id="6" name="손유호 R&amp;R"/>
+          <p:cNvPr id="5" name="Shape 3"/>
           <p:cNvSpPr/>
           <p:nvPr/>
         </p:nvSpPr>
         <p:spPr>
           <a:xfrm>
-            <a:off x="3291840" y="1371600"/>
-            <a:ext cx="2560320" cy="2194560"/>
-          </a:xfrm>
-          <a:prstGeom prst="roundRect">
-            <a:avLst>
-              <a:gd name="adj" fmla="val 5000"/>
-            </a:avLst>
-          </a:prstGeom>
-          <a:solidFill>
-            <a:srgbClr val="FFFFFF">
-              <a:alpha val="10000"/>
-            </a:srgbClr>
-          </a:solidFill>
+            <a:off x="3108960" y="1417320"/>
+            <a:ext cx="0" cy="1737360"/>
+          </a:xfrm>
+          <a:prstGeom prst="line">
+            <a:avLst/>
+          </a:prstGeom>
+          <a:noFill/>
           <a:ln w="9525">
             <a:solidFill>
               <a:srgbClr val="FFFFFF">
-                <a:alpha val="30000"/>
+                <a:alpha val="40000"/>
               </a:srgbClr>
             </a:solidFill>
             <a:prstDash val="solid"/>
@@ -11102,61 +10681,61 @@
       </p:sp>
       <p:sp>
         <p:nvSpPr>
+          <p:cNvPr id="6" name="Text 4"/>
+          <p:cNvSpPr txBox="1"/>
+          <p:nvPr/>
+        </p:nvSpPr>
+        <p:spPr>
+          <a:xfrm>
+            <a:off x="3291840" y="1371600"/>
+            <a:ext cx="2377440" cy="411480"/>
+          </a:xfrm>
+          <a:prstGeom prst="rect">
+            <a:avLst/>
+          </a:prstGeom>
+          <a:noFill/>
+          <a:ln/>
+        </p:spPr>
+        <p:txBody>
+          <a:bodyPr wrap="square" lIns="0" tIns="0" rIns="0" bIns="0" rtlCol="0" anchor="ctr"/>
+          <a:lstStyle/>
+          <a:p>
+            <a:pPr indent="0" marL="0">
+              <a:buNone/>
+            </a:pPr>
+            <a:r>
+              <a:rPr lang="en-US" sz="1800" b="1" dirty="0">
+                <a:solidFill>
+                  <a:schemeClr val="bg1"/>
+                </a:solidFill>
+              </a:rPr>
+              <a:t>손유호</a:t>
+            </a:r>
+            <a:pPr indent="0" marL="0">
+              <a:buNone/>
+            </a:pPr>
+            <a:r>
+              <a:rPr lang="en-US" sz="1000" dirty="0">
+                <a:solidFill>
+                  <a:schemeClr val="bg2"/>
+                </a:solidFill>
+              </a:rPr>
+              <a:t>  기획 · 시장</a:t>
+            </a:r>
+            <a:endParaRPr lang="en-US" sz="1800" dirty="0"/>
+          </a:p>
+        </p:txBody>
+      </p:sp>
+      <p:sp>
+        <p:nvSpPr>
           <p:cNvPr id="7" name="Text 5"/>
           <p:cNvSpPr txBox="1"/>
           <p:nvPr/>
         </p:nvSpPr>
         <p:spPr>
           <a:xfrm>
-            <a:off x="3520440" y="1508760"/>
-            <a:ext cx="2194560" cy="411480"/>
-          </a:xfrm>
-          <a:prstGeom prst="rect">
-            <a:avLst/>
-          </a:prstGeom>
-          <a:noFill/>
-          <a:ln/>
-        </p:spPr>
-        <p:txBody>
-          <a:bodyPr wrap="square" lIns="0" tIns="0" rIns="0" bIns="0" rtlCol="0" anchor="ctr"/>
-          <a:lstStyle/>
-          <a:p>
-            <a:pPr indent="0" marL="0">
-              <a:buNone/>
-            </a:pPr>
-            <a:r>
-              <a:rPr lang="en-US" sz="1800" b="1" dirty="0">
-                <a:solidFill>
-                  <a:schemeClr val="bg1"/>
-                </a:solidFill>
-              </a:rPr>
-              <a:t>손유호</a:t>
-            </a:r>
-            <a:pPr indent="0" marL="0">
-              <a:buNone/>
-            </a:pPr>
-            <a:r>
-              <a:rPr lang="en-US" sz="1000" dirty="0">
-                <a:solidFill>
-                  <a:schemeClr val="bg2"/>
-                </a:solidFill>
-              </a:rPr>
-              <a:t>  기획 · 시장</a:t>
-            </a:r>
-            <a:endParaRPr lang="en-US" sz="1800" dirty="0"/>
-          </a:p>
-        </p:txBody>
-      </p:sp>
-      <p:sp>
-        <p:nvSpPr>
-          <p:cNvPr id="8" name="Text 6"/>
-          <p:cNvSpPr txBox="1"/>
-          <p:nvPr/>
-        </p:nvSpPr>
-        <p:spPr>
-          <a:xfrm>
-            <a:off x="3520440" y="2011680"/>
-            <a:ext cx="2194560" cy="1371600"/>
+            <a:off x="3291840" y="1874520"/>
+            <a:ext cx="2377440" cy="1554480"/>
           </a:xfrm>
           <a:prstGeom prst="rect">
             <a:avLst/>
@@ -11225,29 +10804,23 @@
       </p:sp>
       <p:sp>
         <p:nvSpPr>
-          <p:cNvPr id="9" name="박명진 R&amp;R"/>
+          <p:cNvPr id="8" name="Shape 6"/>
           <p:cNvSpPr/>
           <p:nvPr/>
         </p:nvSpPr>
         <p:spPr>
           <a:xfrm>
-            <a:off x="6035040" y="1371600"/>
-            <a:ext cx="2560320" cy="2194560"/>
-          </a:xfrm>
-          <a:prstGeom prst="roundRect">
-            <a:avLst>
-              <a:gd name="adj" fmla="val 5000"/>
-            </a:avLst>
-          </a:prstGeom>
-          <a:solidFill>
-            <a:srgbClr val="FFFFFF">
-              <a:alpha val="10000"/>
-            </a:srgbClr>
-          </a:solidFill>
+            <a:off x="5852160" y="1417320"/>
+            <a:ext cx="0" cy="1737360"/>
+          </a:xfrm>
+          <a:prstGeom prst="line">
+            <a:avLst/>
+          </a:prstGeom>
+          <a:noFill/>
           <a:ln w="9525">
             <a:solidFill>
               <a:srgbClr val="FFFFFF">
-                <a:alpha val="30000"/>
+                <a:alpha val="40000"/>
               </a:srgbClr>
             </a:solidFill>
             <a:prstDash val="solid"/>
@@ -11256,61 +10829,61 @@
       </p:sp>
       <p:sp>
         <p:nvSpPr>
+          <p:cNvPr id="9" name="Text 7"/>
+          <p:cNvSpPr txBox="1"/>
+          <p:nvPr/>
+        </p:nvSpPr>
+        <p:spPr>
+          <a:xfrm>
+            <a:off x="6035040" y="1371600"/>
+            <a:ext cx="2377440" cy="411480"/>
+          </a:xfrm>
+          <a:prstGeom prst="rect">
+            <a:avLst/>
+          </a:prstGeom>
+          <a:noFill/>
+          <a:ln/>
+        </p:spPr>
+        <p:txBody>
+          <a:bodyPr wrap="square" lIns="0" tIns="0" rIns="0" bIns="0" rtlCol="0" anchor="ctr"/>
+          <a:lstStyle/>
+          <a:p>
+            <a:pPr indent="0" marL="0">
+              <a:buNone/>
+            </a:pPr>
+            <a:r>
+              <a:rPr lang="en-US" sz="1800" b="1" dirty="0">
+                <a:solidFill>
+                  <a:schemeClr val="bg1"/>
+                </a:solidFill>
+              </a:rPr>
+              <a:t>박명진</a:t>
+            </a:r>
+            <a:pPr indent="0" marL="0">
+              <a:buNone/>
+            </a:pPr>
+            <a:r>
+              <a:rPr lang="en-US" sz="1000" dirty="0">
+                <a:solidFill>
+                  <a:schemeClr val="bg2"/>
+                </a:solidFill>
+              </a:rPr>
+              <a:t>  검증 · 운영</a:t>
+            </a:r>
+            <a:endParaRPr lang="en-US" sz="1800" dirty="0"/>
+          </a:p>
+        </p:txBody>
+      </p:sp>
+      <p:sp>
+        <p:nvSpPr>
           <p:cNvPr id="10" name="Text 8"/>
           <p:cNvSpPr txBox="1"/>
           <p:nvPr/>
         </p:nvSpPr>
         <p:spPr>
           <a:xfrm>
-            <a:off x="6263640" y="1508760"/>
-            <a:ext cx="2194560" cy="411480"/>
-          </a:xfrm>
-          <a:prstGeom prst="rect">
-            <a:avLst/>
-          </a:prstGeom>
-          <a:noFill/>
-          <a:ln/>
-        </p:spPr>
-        <p:txBody>
-          <a:bodyPr wrap="square" lIns="0" tIns="0" rIns="0" bIns="0" rtlCol="0" anchor="ctr"/>
-          <a:lstStyle/>
-          <a:p>
-            <a:pPr indent="0" marL="0">
-              <a:buNone/>
-            </a:pPr>
-            <a:r>
-              <a:rPr lang="en-US" sz="1800" b="1" dirty="0">
-                <a:solidFill>
-                  <a:schemeClr val="bg1"/>
-                </a:solidFill>
-              </a:rPr>
-              <a:t>박명진</a:t>
-            </a:r>
-            <a:pPr indent="0" marL="0">
-              <a:buNone/>
-            </a:pPr>
-            <a:r>
-              <a:rPr lang="en-US" sz="1000" dirty="0">
-                <a:solidFill>
-                  <a:schemeClr val="bg2"/>
-                </a:solidFill>
-              </a:rPr>
-              <a:t>  검증 · 운영</a:t>
-            </a:r>
-            <a:endParaRPr lang="en-US" sz="1800" dirty="0"/>
-          </a:p>
-        </p:txBody>
-      </p:sp>
-      <p:sp>
-        <p:nvSpPr>
-          <p:cNvPr id="11" name="Text 9"/>
-          <p:cNvSpPr txBox="1"/>
-          <p:nvPr/>
-        </p:nvSpPr>
-        <p:spPr>
-          <a:xfrm>
-            <a:off x="6263640" y="2011680"/>
-            <a:ext cx="2194560" cy="1371600"/>
+            <a:off x="6035040" y="1874520"/>
+            <a:ext cx="2377440" cy="1554480"/>
           </a:xfrm>
           <a:prstGeom prst="rect">
             <a:avLst/>
@@ -11379,7 +10952,7 @@
       </p:sp>
       <p:sp>
         <p:nvSpPr>
-          <p:cNvPr id="12" name="Text 10"/>
+          <p:cNvPr id="11" name="Text 9"/>
           <p:cNvSpPr txBox="1"/>
           <p:nvPr/>
         </p:nvSpPr>
@@ -11415,7 +10988,7 @@
       </p:sp>
       <p:sp>
         <p:nvSpPr>
-          <p:cNvPr id="13" name="Text 11"/>
+          <p:cNvPr id="12" name="Text 10"/>
           <p:cNvSpPr txBox="1"/>
           <p:nvPr/>
         </p:nvSpPr>
@@ -11588,26 +11161,130 @@
       </p:sp>
       <p:sp>
         <p:nvSpPr>
-          <p:cNvPr id="5" name="이지훈 카드"/>
+          <p:cNvPr id="5" name="Text 3"/>
+          <p:cNvSpPr txBox="1"/>
+          <p:nvPr/>
+        </p:nvSpPr>
+        <p:spPr>
+          <a:xfrm>
+            <a:off x="457200" y="1691640"/>
+            <a:ext cx="1554480" cy="274320"/>
+          </a:xfrm>
+          <a:prstGeom prst="rect">
+            <a:avLst/>
+          </a:prstGeom>
+          <a:noFill/>
+          <a:ln/>
+        </p:spPr>
+        <p:txBody>
+          <a:bodyPr wrap="square" lIns="0" tIns="0" rIns="0" bIns="0" rtlCol="0" anchor="ctr"/>
+          <a:lstStyle/>
+          <a:p>
+            <a:pPr indent="0" marL="0">
+              <a:buNone/>
+            </a:pPr>
+            <a:r>
+              <a:rPr lang="en-US" sz="950" b="1" dirty="0">
+                <a:solidFill>
+                  <a:schemeClr val="accent5"/>
+                </a:solidFill>
+              </a:rPr>
+              <a:t>이름</a:t>
+            </a:r>
+            <a:endParaRPr lang="en-US" sz="950" dirty="0"/>
+          </a:p>
+        </p:txBody>
+      </p:sp>
+      <p:sp>
+        <p:nvSpPr>
+          <p:cNvPr id="6" name="Text 4"/>
+          <p:cNvSpPr txBox="1"/>
+          <p:nvPr/>
+        </p:nvSpPr>
+        <p:spPr>
+          <a:xfrm>
+            <a:off x="2011680" y="1691640"/>
+            <a:ext cx="4023360" cy="274320"/>
+          </a:xfrm>
+          <a:prstGeom prst="rect">
+            <a:avLst/>
+          </a:prstGeom>
+          <a:noFill/>
+          <a:ln/>
+        </p:spPr>
+        <p:txBody>
+          <a:bodyPr wrap="square" lIns="0" tIns="0" rIns="0" bIns="0" rtlCol="0" anchor="ctr"/>
+          <a:lstStyle/>
+          <a:p>
+            <a:pPr indent="0" marL="0">
+              <a:buNone/>
+            </a:pPr>
+            <a:r>
+              <a:rPr lang="en-US" sz="950" b="1" dirty="0">
+                <a:solidFill>
+                  <a:schemeClr val="accent5"/>
+                </a:solidFill>
+              </a:rPr>
+              <a:t>맡는 일</a:t>
+            </a:r>
+            <a:endParaRPr lang="en-US" sz="950" dirty="0"/>
+          </a:p>
+        </p:txBody>
+      </p:sp>
+      <p:sp>
+        <p:nvSpPr>
+          <p:cNvPr id="7" name="Text 5"/>
+          <p:cNvSpPr txBox="1"/>
+          <p:nvPr/>
+        </p:nvSpPr>
+        <p:spPr>
+          <a:xfrm>
+            <a:off x="6217920" y="1691640"/>
+            <a:ext cx="2468880" cy="274320"/>
+          </a:xfrm>
+          <a:prstGeom prst="rect">
+            <a:avLst/>
+          </a:prstGeom>
+          <a:noFill/>
+          <a:ln/>
+        </p:spPr>
+        <p:txBody>
+          <a:bodyPr wrap="square" lIns="0" tIns="0" rIns="0" bIns="0" rtlCol="0" anchor="ctr"/>
+          <a:lstStyle/>
+          <a:p>
+            <a:pPr indent="0" marL="0">
+              <a:buNone/>
+            </a:pPr>
+            <a:r>
+              <a:rPr lang="en-US" sz="950" b="1" dirty="0">
+                <a:solidFill>
+                  <a:schemeClr val="accent5"/>
+                </a:solidFill>
+              </a:rPr>
+              <a:t>발표</a:t>
+            </a:r>
+            <a:endParaRPr lang="en-US" sz="950" dirty="0"/>
+          </a:p>
+        </p:txBody>
+      </p:sp>
+      <p:sp>
+        <p:nvSpPr>
+          <p:cNvPr id="8" name="Shape 6"/>
           <p:cNvSpPr/>
           <p:nvPr/>
         </p:nvSpPr>
         <p:spPr>
           <a:xfrm>
-            <a:off x="457200" y="1828800"/>
-            <a:ext cx="2651760" cy="2651760"/>
-          </a:xfrm>
-          <a:prstGeom prst="roundRect">
-            <a:avLst>
-              <a:gd name="adj" fmla="val 3448"/>
-            </a:avLst>
-          </a:prstGeom>
-          <a:solidFill>
-            <a:schemeClr val="bg2"/>
-          </a:solidFill>
-          <a:ln w="12700">
+            <a:off x="457200" y="1984248"/>
+            <a:ext cx="8229600" cy="0"/>
+          </a:xfrm>
+          <a:prstGeom prst="line">
+            <a:avLst/>
+          </a:prstGeom>
+          <a:noFill/>
+          <a:ln w="9525">
             <a:solidFill>
-              <a:schemeClr val="bg2"/>
+              <a:srgbClr val="DCD9D0"/>
             </a:solidFill>
             <a:prstDash val="solid"/>
           </a:ln>
@@ -11615,14 +11292,14 @@
       </p:sp>
       <p:sp>
         <p:nvSpPr>
-          <p:cNvPr id="6" name="Text 4"/>
-          <p:cNvSpPr txBox="1"/>
-          <p:nvPr/>
-        </p:nvSpPr>
-        <p:spPr>
-          <a:xfrm>
-            <a:off x="685800" y="2011680"/>
-            <a:ext cx="2286000" cy="411480"/>
+          <p:cNvPr id="9" name="Text 7"/>
+          <p:cNvSpPr txBox="1"/>
+          <p:nvPr/>
+        </p:nvSpPr>
+        <p:spPr>
+          <a:xfrm>
+            <a:off x="457200" y="2057400"/>
+            <a:ext cx="1554480" cy="777240"/>
           </a:xfrm>
           <a:prstGeom prst="rect">
             <a:avLst/>
@@ -11638,38 +11315,41 @@
               <a:buNone/>
             </a:pPr>
             <a:r>
-              <a:rPr lang="en-US" sz="1800" b="1" dirty="0">
+              <a:rPr lang="en-US" sz="1700" b="1" dirty="0">
                 <a:solidFill>
                   <a:schemeClr val="tx2"/>
                 </a:solidFill>
               </a:rPr>
               <a:t>이지훈</a:t>
             </a:r>
-            <a:pPr indent="0" marL="0">
-              <a:buNone/>
-            </a:pPr>
-            <a:r>
-              <a:rPr lang="en-US" sz="1050" dirty="0">
+            <a:endParaRPr lang="en-US" sz="1700" dirty="0"/>
+          </a:p>
+          <a:p>
+            <a:pPr indent="0" marL="0">
+              <a:buNone/>
+            </a:pPr>
+            <a:r>
+              <a:rPr lang="en-US" sz="1000" dirty="0">
                 <a:solidFill>
                   <a:schemeClr val="accent5"/>
                 </a:solidFill>
               </a:rPr>
-              <a:t>  팀장</a:t>
-            </a:r>
-            <a:endParaRPr lang="en-US" sz="1800" dirty="0"/>
-          </a:p>
-        </p:txBody>
-      </p:sp>
-      <p:sp>
-        <p:nvSpPr>
-          <p:cNvPr id="7" name="Text 5"/>
-          <p:cNvSpPr txBox="1"/>
-          <p:nvPr/>
-        </p:nvSpPr>
-        <p:spPr>
-          <a:xfrm>
-            <a:off x="685800" y="2514600"/>
-            <a:ext cx="2194560" cy="228600"/>
+              <a:t>팀장</a:t>
+            </a:r>
+            <a:endParaRPr lang="en-US" sz="1700" dirty="0"/>
+          </a:p>
+        </p:txBody>
+      </p:sp>
+      <p:sp>
+        <p:nvSpPr>
+          <p:cNvPr id="10" name="Text 8"/>
+          <p:cNvSpPr txBox="1"/>
+          <p:nvPr/>
+        </p:nvSpPr>
+        <p:spPr>
+          <a:xfrm>
+            <a:off x="2011680" y="2057400"/>
+            <a:ext cx="4023360" cy="777240"/>
           </a:xfrm>
           <a:prstGeom prst="rect">
             <a:avLst/>
@@ -11682,47 +11362,10 @@
           <a:lstStyle/>
           <a:p>
             <a:pPr indent="0" marL="0">
-              <a:buNone/>
-            </a:pPr>
-            <a:r>
-              <a:rPr lang="en-US" sz="950" b="1" dirty="0">
-                <a:solidFill>
-                  <a:schemeClr val="accent5"/>
-                </a:solidFill>
-              </a:rPr>
-              <a:t>맡는 일</a:t>
-            </a:r>
-            <a:endParaRPr lang="en-US" sz="950" dirty="0"/>
-          </a:p>
-        </p:txBody>
-      </p:sp>
-      <p:sp>
-        <p:nvSpPr>
-          <p:cNvPr id="8" name="Text 6"/>
-          <p:cNvSpPr txBox="1"/>
-          <p:nvPr/>
-        </p:nvSpPr>
-        <p:spPr>
-          <a:xfrm>
-            <a:off x="685800" y="2743200"/>
-            <a:ext cx="2240280" cy="822960"/>
-          </a:xfrm>
-          <a:prstGeom prst="rect">
-            <a:avLst/>
-          </a:prstGeom>
-          <a:noFill/>
-          <a:ln/>
-        </p:spPr>
-        <p:txBody>
-          <a:bodyPr wrap="square" lIns="0" tIns="0" rIns="0" bIns="0" rtlCol="0" anchor="t"/>
-          <a:lstStyle/>
-          <a:p>
-            <a:pPr marL="152400" indent="-152400">
               <a:spcAft>
                 <a:spcPts val="300"/>
               </a:spcAft>
-              <a:buSzPct val="100000"/>
-              <a:buChar char="•"/>
+              <a:buNone/>
             </a:pPr>
             <a:r>
               <a:rPr lang="en-US" sz="1150" dirty="0">
@@ -11735,12 +11378,11 @@
             <a:endParaRPr lang="en-US" sz="1150" dirty="0"/>
           </a:p>
           <a:p>
-            <a:pPr marL="152400" indent="-152400">
+            <a:pPr indent="0" marL="0">
               <a:spcAft>
                 <a:spcPts val="300"/>
               </a:spcAft>
-              <a:buSzPct val="100000"/>
-              <a:buChar char="•"/>
+              <a:buNone/>
             </a:pPr>
             <a:r>
               <a:rPr lang="en-US" sz="1150" dirty="0">
@@ -11756,14 +11398,14 @@
       </p:sp>
       <p:sp>
         <p:nvSpPr>
-          <p:cNvPr id="9" name="Text 7"/>
-          <p:cNvSpPr txBox="1"/>
-          <p:nvPr/>
-        </p:nvSpPr>
-        <p:spPr>
-          <a:xfrm>
-            <a:off x="685800" y="3611880"/>
-            <a:ext cx="2194560" cy="228600"/>
+          <p:cNvPr id="11" name="Text 9"/>
+          <p:cNvSpPr txBox="1"/>
+          <p:nvPr/>
+        </p:nvSpPr>
+        <p:spPr>
+          <a:xfrm>
+            <a:off x="6217920" y="2057400"/>
+            <a:ext cx="2468880" cy="777240"/>
           </a:xfrm>
           <a:prstGeom prst="rect">
             <a:avLst/>
@@ -11779,48 +11421,12 @@
               <a:buNone/>
             </a:pPr>
             <a:r>
-              <a:rPr lang="en-US" sz="950" b="1" dirty="0">
-                <a:solidFill>
-                  <a:schemeClr val="accent5"/>
-                </a:solidFill>
-              </a:rPr>
-              <a:t>발표</a:t>
-            </a:r>
-            <a:endParaRPr lang="en-US" sz="950" dirty="0"/>
-          </a:p>
-        </p:txBody>
-      </p:sp>
-      <p:sp>
-        <p:nvSpPr>
-          <p:cNvPr id="10" name="Text 8"/>
-          <p:cNvSpPr txBox="1"/>
-          <p:nvPr/>
-        </p:nvSpPr>
-        <p:spPr>
-          <a:xfrm>
-            <a:off x="685800" y="3840480"/>
-            <a:ext cx="2240280" cy="457200"/>
-          </a:xfrm>
-          <a:prstGeom prst="rect">
-            <a:avLst/>
-          </a:prstGeom>
-          <a:noFill/>
-          <a:ln/>
-        </p:spPr>
-        <p:txBody>
-          <a:bodyPr wrap="square" lIns="0" tIns="0" rIns="0" bIns="0" rtlCol="0" anchor="t"/>
-          <a:lstStyle/>
-          <a:p>
-            <a:pPr indent="0" marL="0">
-              <a:buNone/>
-            </a:pPr>
-            <a:r>
               <a:rPr lang="en-US" sz="1150" b="1" dirty="0">
                 <a:solidFill>
                   <a:schemeClr val="tx2"/>
                 </a:solidFill>
               </a:rPr>
-              <a:t>발표 ① ~ ⑤ + 앱 시연</a:t>
+              <a:t>① ~ ⑤ + 앱 시연</a:t>
             </a:r>
             <a:endParaRPr lang="en-US" sz="1150" dirty="0"/>
           </a:p>
@@ -11828,26 +11434,22 @@
       </p:sp>
       <p:sp>
         <p:nvSpPr>
-          <p:cNvPr id="11" name="손유호 카드"/>
+          <p:cNvPr id="12" name="Shape 10"/>
           <p:cNvSpPr/>
           <p:nvPr/>
         </p:nvSpPr>
         <p:spPr>
           <a:xfrm>
-            <a:off x="3246120" y="1828800"/>
-            <a:ext cx="2651760" cy="2651760"/>
-          </a:xfrm>
-          <a:prstGeom prst="roundRect">
-            <a:avLst>
-              <a:gd name="adj" fmla="val 3448"/>
-            </a:avLst>
-          </a:prstGeom>
-          <a:solidFill>
-            <a:schemeClr val="bg2"/>
-          </a:solidFill>
-          <a:ln w="12700">
+            <a:off x="457200" y="2880360"/>
+            <a:ext cx="8229600" cy="0"/>
+          </a:xfrm>
+          <a:prstGeom prst="line">
+            <a:avLst/>
+          </a:prstGeom>
+          <a:noFill/>
+          <a:ln w="9525">
             <a:solidFill>
-              <a:schemeClr val="bg2"/>
+              <a:srgbClr val="DCD9D0"/>
             </a:solidFill>
             <a:prstDash val="solid"/>
           </a:ln>
@@ -11855,14 +11457,14 @@
       </p:sp>
       <p:sp>
         <p:nvSpPr>
-          <p:cNvPr id="12" name="Text 10"/>
-          <p:cNvSpPr txBox="1"/>
-          <p:nvPr/>
-        </p:nvSpPr>
-        <p:spPr>
-          <a:xfrm>
-            <a:off x="3474720" y="2011680"/>
-            <a:ext cx="2286000" cy="411480"/>
+          <p:cNvPr id="13" name="Text 11"/>
+          <p:cNvSpPr txBox="1"/>
+          <p:nvPr/>
+        </p:nvSpPr>
+        <p:spPr>
+          <a:xfrm>
+            <a:off x="457200" y="2926080"/>
+            <a:ext cx="1554480" cy="777240"/>
           </a:xfrm>
           <a:prstGeom prst="rect">
             <a:avLst/>
@@ -11878,38 +11480,41 @@
               <a:buNone/>
             </a:pPr>
             <a:r>
-              <a:rPr lang="en-US" sz="1800" b="1" dirty="0">
+              <a:rPr lang="en-US" sz="1700" b="1" dirty="0">
                 <a:solidFill>
                   <a:schemeClr val="tx2"/>
                 </a:solidFill>
               </a:rPr>
               <a:t>손유호</a:t>
             </a:r>
-            <a:pPr indent="0" marL="0">
-              <a:buNone/>
-            </a:pPr>
-            <a:r>
-              <a:rPr lang="en-US" sz="1050" dirty="0">
+            <a:endParaRPr lang="en-US" sz="1700" dirty="0"/>
+          </a:p>
+          <a:p>
+            <a:pPr indent="0" marL="0">
+              <a:buNone/>
+            </a:pPr>
+            <a:r>
+              <a:rPr lang="en-US" sz="1000" dirty="0">
                 <a:solidFill>
                   <a:schemeClr val="accent5"/>
                 </a:solidFill>
               </a:rPr>
-              <a:t>  팀원</a:t>
-            </a:r>
-            <a:endParaRPr lang="en-US" sz="1800" dirty="0"/>
-          </a:p>
-        </p:txBody>
-      </p:sp>
-      <p:sp>
-        <p:nvSpPr>
-          <p:cNvPr id="13" name="Text 11"/>
-          <p:cNvSpPr txBox="1"/>
-          <p:nvPr/>
-        </p:nvSpPr>
-        <p:spPr>
-          <a:xfrm>
-            <a:off x="3474720" y="2514600"/>
-            <a:ext cx="2194560" cy="228600"/>
+              <a:t>팀원</a:t>
+            </a:r>
+            <a:endParaRPr lang="en-US" sz="1700" dirty="0"/>
+          </a:p>
+        </p:txBody>
+      </p:sp>
+      <p:sp>
+        <p:nvSpPr>
+          <p:cNvPr id="14" name="Text 12"/>
+          <p:cNvSpPr txBox="1"/>
+          <p:nvPr/>
+        </p:nvSpPr>
+        <p:spPr>
+          <a:xfrm>
+            <a:off x="2011680" y="2926080"/>
+            <a:ext cx="4023360" cy="777240"/>
           </a:xfrm>
           <a:prstGeom prst="rect">
             <a:avLst/>
@@ -11922,47 +11527,10 @@
           <a:lstStyle/>
           <a:p>
             <a:pPr indent="0" marL="0">
-              <a:buNone/>
-            </a:pPr>
-            <a:r>
-              <a:rPr lang="en-US" sz="950" b="1" dirty="0">
-                <a:solidFill>
-                  <a:schemeClr val="accent5"/>
-                </a:solidFill>
-              </a:rPr>
-              <a:t>맡는 일</a:t>
-            </a:r>
-            <a:endParaRPr lang="en-US" sz="950" dirty="0"/>
-          </a:p>
-        </p:txBody>
-      </p:sp>
-      <p:sp>
-        <p:nvSpPr>
-          <p:cNvPr id="14" name="Text 12"/>
-          <p:cNvSpPr txBox="1"/>
-          <p:nvPr/>
-        </p:nvSpPr>
-        <p:spPr>
-          <a:xfrm>
-            <a:off x="3474720" y="2743200"/>
-            <a:ext cx="2240280" cy="822960"/>
-          </a:xfrm>
-          <a:prstGeom prst="rect">
-            <a:avLst/>
-          </a:prstGeom>
-          <a:noFill/>
-          <a:ln/>
-        </p:spPr>
-        <p:txBody>
-          <a:bodyPr wrap="square" lIns="0" tIns="0" rIns="0" bIns="0" rtlCol="0" anchor="t"/>
-          <a:lstStyle/>
-          <a:p>
-            <a:pPr marL="152400" indent="-152400">
               <a:spcAft>
                 <a:spcPts val="300"/>
               </a:spcAft>
-              <a:buSzPct val="100000"/>
-              <a:buChar char="•"/>
+              <a:buNone/>
             </a:pPr>
             <a:r>
               <a:rPr lang="en-US" sz="1150" dirty="0">
@@ -11975,12 +11543,11 @@
             <a:endParaRPr lang="en-US" sz="1150" dirty="0"/>
           </a:p>
           <a:p>
-            <a:pPr marL="152400" indent="-152400">
+            <a:pPr indent="0" marL="0">
               <a:spcAft>
                 <a:spcPts val="300"/>
               </a:spcAft>
-              <a:buSzPct val="100000"/>
-              <a:buChar char="•"/>
+              <a:buNone/>
             </a:pPr>
             <a:r>
               <a:rPr lang="en-US" sz="1150" dirty="0">
@@ -12002,8 +11569,8 @@
         </p:nvSpPr>
         <p:spPr>
           <a:xfrm>
-            <a:off x="3474720" y="3611880"/>
-            <a:ext cx="2194560" cy="228600"/>
+            <a:off x="6217920" y="2926080"/>
+            <a:ext cx="2468880" cy="777240"/>
           </a:xfrm>
           <a:prstGeom prst="rect">
             <a:avLst/>
@@ -12019,48 +11586,12 @@
               <a:buNone/>
             </a:pPr>
             <a:r>
-              <a:rPr lang="en-US" sz="950" b="1" dirty="0">
-                <a:solidFill>
-                  <a:schemeClr val="accent5"/>
-                </a:solidFill>
-              </a:rPr>
-              <a:t>발표</a:t>
-            </a:r>
-            <a:endParaRPr lang="en-US" sz="950" dirty="0"/>
-          </a:p>
-        </p:txBody>
-      </p:sp>
-      <p:sp>
-        <p:nvSpPr>
-          <p:cNvPr id="16" name="Text 14"/>
-          <p:cNvSpPr txBox="1"/>
-          <p:nvPr/>
-        </p:nvSpPr>
-        <p:spPr>
-          <a:xfrm>
-            <a:off x="3474720" y="3840480"/>
-            <a:ext cx="2240280" cy="457200"/>
-          </a:xfrm>
-          <a:prstGeom prst="rect">
-            <a:avLst/>
-          </a:prstGeom>
-          <a:noFill/>
-          <a:ln/>
-        </p:spPr>
-        <p:txBody>
-          <a:bodyPr wrap="square" lIns="0" tIns="0" rIns="0" bIns="0" rtlCol="0" anchor="t"/>
-          <a:lstStyle/>
-          <a:p>
-            <a:pPr indent="0" marL="0">
-              <a:buNone/>
-            </a:pPr>
-            <a:r>
               <a:rPr lang="en-US" sz="1150" b="1" dirty="0">
                 <a:solidFill>
                   <a:schemeClr val="tx2"/>
                 </a:solidFill>
               </a:rPr>
-              <a:t>발표 ⑥ 시장 분석 · 비즈니스 모델</a:t>
+              <a:t>⑥ 시장 분석 · 비즈니스 모델</a:t>
             </a:r>
             <a:endParaRPr lang="en-US" sz="1150" dirty="0"/>
           </a:p>
@@ -12068,26 +11599,22 @@
       </p:sp>
       <p:sp>
         <p:nvSpPr>
-          <p:cNvPr id="17" name="박명진 카드"/>
+          <p:cNvPr id="16" name="Shape 14"/>
           <p:cNvSpPr/>
           <p:nvPr/>
         </p:nvSpPr>
         <p:spPr>
           <a:xfrm>
-            <a:off x="6035040" y="1828800"/>
-            <a:ext cx="2651760" cy="2651760"/>
-          </a:xfrm>
-          <a:prstGeom prst="roundRect">
-            <a:avLst>
-              <a:gd name="adj" fmla="val 3448"/>
-            </a:avLst>
-          </a:prstGeom>
-          <a:solidFill>
-            <a:schemeClr val="bg2"/>
-          </a:solidFill>
-          <a:ln w="12700">
+            <a:off x="457200" y="3749040"/>
+            <a:ext cx="8229600" cy="0"/>
+          </a:xfrm>
+          <a:prstGeom prst="line">
+            <a:avLst/>
+          </a:prstGeom>
+          <a:noFill/>
+          <a:ln w="9525">
             <a:solidFill>
-              <a:schemeClr val="bg2"/>
+              <a:srgbClr val="DCD9D0"/>
             </a:solidFill>
             <a:prstDash val="solid"/>
           </a:ln>
@@ -12095,14 +11622,64 @@
       </p:sp>
       <p:sp>
         <p:nvSpPr>
+          <p:cNvPr id="17" name="Text 15"/>
+          <p:cNvSpPr txBox="1"/>
+          <p:nvPr/>
+        </p:nvSpPr>
+        <p:spPr>
+          <a:xfrm>
+            <a:off x="457200" y="3794760"/>
+            <a:ext cx="1554480" cy="777240"/>
+          </a:xfrm>
+          <a:prstGeom prst="rect">
+            <a:avLst/>
+          </a:prstGeom>
+          <a:noFill/>
+          <a:ln/>
+        </p:spPr>
+        <p:txBody>
+          <a:bodyPr wrap="square" lIns="0" tIns="0" rIns="0" bIns="0" rtlCol="0" anchor="ctr"/>
+          <a:lstStyle/>
+          <a:p>
+            <a:pPr indent="0" marL="0">
+              <a:buNone/>
+            </a:pPr>
+            <a:r>
+              <a:rPr lang="en-US" sz="1700" b="1" dirty="0">
+                <a:solidFill>
+                  <a:schemeClr val="tx2"/>
+                </a:solidFill>
+              </a:rPr>
+              <a:t>박명진</a:t>
+            </a:r>
+            <a:endParaRPr lang="en-US" sz="1700" dirty="0"/>
+          </a:p>
+          <a:p>
+            <a:pPr indent="0" marL="0">
+              <a:buNone/>
+            </a:pPr>
+            <a:r>
+              <a:rPr lang="en-US" sz="1000" dirty="0">
+                <a:solidFill>
+                  <a:schemeClr val="accent5"/>
+                </a:solidFill>
+              </a:rPr>
+              <a:t>팀원</a:t>
+            </a:r>
+            <a:endParaRPr lang="en-US" sz="1700" dirty="0"/>
+          </a:p>
+        </p:txBody>
+      </p:sp>
+      <p:sp>
+        <p:nvSpPr>
           <p:cNvPr id="18" name="Text 16"/>
           <p:cNvSpPr txBox="1"/>
           <p:nvPr/>
         </p:nvSpPr>
         <p:spPr>
           <a:xfrm>
-            <a:off x="6263640" y="2011680"/>
-            <a:ext cx="2286000" cy="411480"/>
+            <a:off x="2011680" y="3794760"/>
+            <a:ext cx="4023360" cy="777240"/>
           </a:xfrm>
           <a:prstGeom prst="rect">
             <a:avLst/>
@@ -12115,94 +11692,10 @@
           <a:lstStyle/>
           <a:p>
             <a:pPr indent="0" marL="0">
-              <a:buNone/>
-            </a:pPr>
-            <a:r>
-              <a:rPr lang="en-US" sz="1800" b="1" dirty="0">
-                <a:solidFill>
-                  <a:schemeClr val="tx2"/>
-                </a:solidFill>
-              </a:rPr>
-              <a:t>박명진</a:t>
-            </a:r>
-            <a:pPr indent="0" marL="0">
-              <a:buNone/>
-            </a:pPr>
-            <a:r>
-              <a:rPr lang="en-US" sz="1050" dirty="0">
-                <a:solidFill>
-                  <a:schemeClr val="accent5"/>
-                </a:solidFill>
-              </a:rPr>
-              <a:t>  팀원</a:t>
-            </a:r>
-            <a:endParaRPr lang="en-US" sz="1800" dirty="0"/>
-          </a:p>
-        </p:txBody>
-      </p:sp>
-      <p:sp>
-        <p:nvSpPr>
-          <p:cNvPr id="19" name="Text 17"/>
-          <p:cNvSpPr txBox="1"/>
-          <p:nvPr/>
-        </p:nvSpPr>
-        <p:spPr>
-          <a:xfrm>
-            <a:off x="6263640" y="2514600"/>
-            <a:ext cx="2194560" cy="228600"/>
-          </a:xfrm>
-          <a:prstGeom prst="rect">
-            <a:avLst/>
-          </a:prstGeom>
-          <a:noFill/>
-          <a:ln/>
-        </p:spPr>
-        <p:txBody>
-          <a:bodyPr wrap="square" lIns="0" tIns="0" rIns="0" bIns="0" rtlCol="0" anchor="ctr"/>
-          <a:lstStyle/>
-          <a:p>
-            <a:pPr indent="0" marL="0">
-              <a:buNone/>
-            </a:pPr>
-            <a:r>
-              <a:rPr lang="en-US" sz="950" b="1" dirty="0">
-                <a:solidFill>
-                  <a:schemeClr val="accent5"/>
-                </a:solidFill>
-              </a:rPr>
-              <a:t>맡는 일</a:t>
-            </a:r>
-            <a:endParaRPr lang="en-US" sz="950" dirty="0"/>
-          </a:p>
-        </p:txBody>
-      </p:sp>
-      <p:sp>
-        <p:nvSpPr>
-          <p:cNvPr id="20" name="Text 18"/>
-          <p:cNvSpPr txBox="1"/>
-          <p:nvPr/>
-        </p:nvSpPr>
-        <p:spPr>
-          <a:xfrm>
-            <a:off x="6263640" y="2743200"/>
-            <a:ext cx="2240280" cy="822960"/>
-          </a:xfrm>
-          <a:prstGeom prst="rect">
-            <a:avLst/>
-          </a:prstGeom>
-          <a:noFill/>
-          <a:ln/>
-        </p:spPr>
-        <p:txBody>
-          <a:bodyPr wrap="square" lIns="0" tIns="0" rIns="0" bIns="0" rtlCol="0" anchor="t"/>
-          <a:lstStyle/>
-          <a:p>
-            <a:pPr marL="152400" indent="-152400">
               <a:spcAft>
                 <a:spcPts val="300"/>
               </a:spcAft>
-              <a:buSzPct val="100000"/>
-              <a:buChar char="•"/>
+              <a:buNone/>
             </a:pPr>
             <a:r>
               <a:rPr lang="en-US" sz="1150" dirty="0">
@@ -12215,12 +11708,11 @@
             <a:endParaRPr lang="en-US" sz="1150" dirty="0"/>
           </a:p>
           <a:p>
-            <a:pPr marL="152400" indent="-152400">
+            <a:pPr indent="0" marL="0">
               <a:spcAft>
                 <a:spcPts val="300"/>
               </a:spcAft>
-              <a:buSzPct val="100000"/>
-              <a:buChar char="•"/>
+              <a:buNone/>
             </a:pPr>
             <a:r>
               <a:rPr lang="en-US" sz="1150" dirty="0">
@@ -12236,14 +11728,14 @@
       </p:sp>
       <p:sp>
         <p:nvSpPr>
-          <p:cNvPr id="21" name="Text 19"/>
-          <p:cNvSpPr txBox="1"/>
-          <p:nvPr/>
-        </p:nvSpPr>
-        <p:spPr>
-          <a:xfrm>
-            <a:off x="6263640" y="3611880"/>
-            <a:ext cx="2194560" cy="228600"/>
+          <p:cNvPr id="19" name="Text 17"/>
+          <p:cNvSpPr txBox="1"/>
+          <p:nvPr/>
+        </p:nvSpPr>
+        <p:spPr>
+          <a:xfrm>
+            <a:off x="6217920" y="3794760"/>
+            <a:ext cx="2468880" cy="777240"/>
           </a:xfrm>
           <a:prstGeom prst="rect">
             <a:avLst/>
@@ -12259,52 +11751,39 @@
               <a:buNone/>
             </a:pPr>
             <a:r>
-              <a:rPr lang="en-US" sz="950" b="1" dirty="0">
-                <a:solidFill>
-                  <a:schemeClr val="accent5"/>
-                </a:solidFill>
-              </a:rPr>
-              <a:t>발표</a:t>
-            </a:r>
-            <a:endParaRPr lang="en-US" sz="950" dirty="0"/>
-          </a:p>
-        </p:txBody>
-      </p:sp>
-      <p:sp>
-        <p:nvSpPr>
-          <p:cNvPr id="22" name="Text 20"/>
-          <p:cNvSpPr txBox="1"/>
-          <p:nvPr/>
-        </p:nvSpPr>
-        <p:spPr>
-          <a:xfrm>
-            <a:off x="6263640" y="3840480"/>
-            <a:ext cx="2240280" cy="457200"/>
-          </a:xfrm>
-          <a:prstGeom prst="rect">
-            <a:avLst/>
-          </a:prstGeom>
-          <a:noFill/>
-          <a:ln/>
-        </p:spPr>
-        <p:txBody>
-          <a:bodyPr wrap="square" lIns="0" tIns="0" rIns="0" bIns="0" rtlCol="0" anchor="t"/>
-          <a:lstStyle/>
-          <a:p>
-            <a:pPr indent="0" marL="0">
-              <a:buNone/>
-            </a:pPr>
-            <a:r>
               <a:rPr lang="en-US" sz="1150" b="1" dirty="0">
                 <a:solidFill>
                   <a:schemeClr val="tx2"/>
                 </a:solidFill>
               </a:rPr>
-              <a:t>발표 ⑦ 초기 검증 · ⑧ 향후 계획</a:t>
+              <a:t>⑦ 초기 검증 · ⑧ 향후 계획</a:t>
             </a:r>
             <a:endParaRPr lang="en-US" sz="1150" dirty="0"/>
           </a:p>
         </p:txBody>
+      </p:sp>
+      <p:sp>
+        <p:nvSpPr>
+          <p:cNvPr id="20" name="Shape 18"/>
+          <p:cNvSpPr/>
+          <p:nvPr/>
+        </p:nvSpPr>
+        <p:spPr>
+          <a:xfrm>
+            <a:off x="457200" y="4617720"/>
+            <a:ext cx="8229600" cy="0"/>
+          </a:xfrm>
+          <a:prstGeom prst="line">
+            <a:avLst/>
+          </a:prstGeom>
+          <a:noFill/>
+          <a:ln w="9525">
+            <a:solidFill>
+              <a:srgbClr val="DCD9D0"/>
+            </a:solidFill>
+            <a:prstDash val="solid"/>
+          </a:ln>
+        </p:spPr>
       </p:sp>
       <p:sp>
         <p:nvSpPr>
@@ -14804,13 +14283,6 @@
             </a:solidFill>
             <a:prstDash val="solid"/>
           </a:ln>
-          <a:effectLst>
-            <a:outerShdw sx="100000" sy="100000" kx="0" ky="0" algn="bl" rotWithShape="0" blurRad="76200" dist="25400" dir="5400000">
-              <a:srgbClr val="000000">
-                <a:alpha val="22000"/>
-              </a:srgbClr>
-            </a:outerShdw>
-          </a:effectLst>
         </p:spPr>
       </p:sp>
       <p:pic>
@@ -15019,13 +14491,6 @@
             </a:solidFill>
             <a:prstDash val="solid"/>
           </a:ln>
-          <a:effectLst>
-            <a:outerShdw sx="100000" sy="100000" kx="0" ky="0" algn="bl" rotWithShape="0" blurRad="76200" dist="25400" dir="5400000">
-              <a:srgbClr val="000000">
-                <a:alpha val="22000"/>
-              </a:srgbClr>
-            </a:outerShdw>
-          </a:effectLst>
         </p:spPr>
       </p:sp>
       <p:pic>
@@ -15234,13 +14699,6 @@
             </a:solidFill>
             <a:prstDash val="solid"/>
           </a:ln>
-          <a:effectLst>
-            <a:outerShdw sx="100000" sy="100000" kx="0" ky="0" algn="bl" rotWithShape="0" blurRad="76200" dist="25400" dir="5400000">
-              <a:srgbClr val="000000">
-                <a:alpha val="22000"/>
-              </a:srgbClr>
-            </a:outerShdw>
-          </a:effectLst>
         </p:spPr>
       </p:sp>
       <p:pic>

--- a/docs/06_중간발표_PPT.pptx
+++ b/docs/06_중간발표_PPT.pptx
@@ -124,50 +124,50 @@
   <p:extLst>
     <p:ext uri="{521415D9-36F7-43E2-AB2F-B90AF26B5E84}">
       <p14:sectionLst xmlns:p14="http://schemas.microsoft.com/office/powerpoint/2010/main">
-        <p14:section name="① 표지·팀 소개" id="{00f30a07-6cde-bf8c-133a-a53ed57f92cd}">
+        <p14:section name="① 표지·팀 소개" id="{f6653a63-983e-ba1d-f5a8-9e9141a5ac73}">
           <p14:sldIdLst>
             <p14:sldId id="256"/>
             <p14:sldId id="257"/>
           </p14:sldIdLst>
         </p14:section>
-        <p14:section name="② 문제 정의" id="{d9e2625e-c404-2906-64a9-138ed019873a}">
+        <p14:section name="② 문제 정의" id="{76d7920b-9e25-3314-c5e6-a1750b73970b}">
           <p14:sldIdLst>
             <p14:sldId id="258"/>
             <p14:sldId id="259"/>
           </p14:sldIdLst>
         </p14:section>
-        <p14:section name="③ 솔루션·핵심 가치" id="{110aceed-c3f9-c078-f204-fb0e2c3796cf}">
+        <p14:section name="③ 솔루션·핵심 가치" id="{2bbd8512-0fbe-d590-9616-a5e26b69ba77}">
           <p14:sldIdLst>
             <p14:sldId id="260"/>
             <p14:sldId id="261"/>
           </p14:sldIdLst>
         </p14:section>
-        <p14:section name="④ SW 기술 아키텍처" id="{06a8649f-b2a9-ce69-92b5-2ef6f1cc9860}">
+        <p14:section name="④ SW 기술 아키텍처" id="{84f1d226-86d5-3cbd-7f0d-9f18b6031956}">
           <p14:sldIdLst>
             <p14:sldId id="262"/>
             <p14:sldId id="263"/>
           </p14:sldIdLst>
         </p14:section>
-        <p14:section name="⑤ 개발 현황·MVP 시연" id="{4884c88c-75ec-7c6f-8dcf-52895c82d763}">
+        <p14:section name="⑤ 개발 현황·MVP 시연" id="{36cbe2a7-5b28-b124-dde6-78470d3be7f5}">
           <p14:sldIdLst>
             <p14:sldId id="264"/>
             <p14:sldId id="265"/>
             <p14:sldId id="266"/>
           </p14:sldIdLst>
         </p14:section>
-        <p14:section name="⑥ 시장 분석·비즈니스 모델" id="{f52636da-b05b-6281-393e-2c6b9069a5be}">
+        <p14:section name="⑥ 시장 분석·비즈니스 모델" id="{f7d63f55-bf81-65b5-0cd2-3b4186cf1894}">
           <p14:sldIdLst>
             <p14:sldId id="267"/>
             <p14:sldId id="268"/>
             <p14:sldId id="269"/>
           </p14:sldIdLst>
         </p14:section>
-        <p14:section name="⑦ 초기 시장 검증" id="{40f919de-6a4a-a20e-6d6b-3588b1c1e667}">
+        <p14:section name="⑦ 초기 시장 검증" id="{2bc10b59-b1ed-965f-16e1-dff99e36adc0}">
           <p14:sldIdLst>
             <p14:sldId id="270"/>
           </p14:sldIdLst>
         </p14:section>
-        <p14:section name="⑧ 향후 계획·팀 역량" id="{ab9e9136-e54a-4282-2f53-ad869e4e1d06}">
+        <p14:section name="⑧ 향후 계획·팀 역량" id="{dcc9561d-64f5-86cb-9670-5442638e6406}">
           <p14:sldIdLst>
             <p14:sldId id="271"/>
             <p14:sldId id="272"/>
@@ -2258,7 +2258,7 @@
           <a:p>
             <a:r>
               <a:rPr lang="en-US" dirty="0"/>
-              <a:t>왼쪽 폰 안에서 모든 계산이 끝나고, 서버로 가는 건 확인 번호뿐입니다. 기기 번호는 앱이 처음 열릴 때 만든 난수라 휴대전화 번호가 아닙니다. 앱이 쓰는 공개 키로는 넣기와 읽기만 되고, 걸어 놓고 뚫어 봤습니다. 2000년 시각을 보내도 서버 시각으로 들어가고, 수정 · 삭제는 401로 거부됩니다. 다만 운영자 권한으로는 고칠 수 있어서, 지금 막는 건 "사용자가 나중에 고쳐 쓰기"까지입니다. 운영자까지 못 고치게 하는 외부 시점확인은 비용 때문에 계획입니다. 오른쪽은 기록 하나가 남을 때의 흐름입니다. 지금 답하고 계신 설문도 같은 서버의 survey 표로 가고, 권한 원칙이 같습니다.</a:t>
+              <a:t>왼쪽 폰 안에서 모든 계산이 끝나고, 서버로 가는 건 확인 번호뿐입니다. 기기 번호는 처음 기록을 등록할 때 앱이 만든 난수라 휴대전화 번호가 아닙니다. 앱이 쓰는 공개 키로는 넣기와 읽기만 되고, 걸어 놓고 뚫어 봤습니다. 2000년 시각을 보내도 서버 시각으로 들어가고, 수정 · 삭제는 401로 거부됩니다. 다만 운영자 권한으로는 고칠 수 있어서, 지금 막는 건 "사용자가 나중에 고쳐 쓰기"까지입니다. 운영자까지 못 고치게 하는 외부 시점확인은 비용 때문에 계획입니다. 오른쪽은 기록 하나가 남을 때의 흐름입니다. 지금 답하고 계신 설문도 같은 서버의 survey 표로 가고, 권한 원칙이 같습니다.</a:t>
             </a:r>
             <a:endParaRPr lang="en-US" dirty="0"/>
           </a:p>
@@ -7366,7 +7366,7 @@
                   <a:schemeClr val="tx1"/>
                 </a:solidFill>
               </a:rPr>
-              <a:t>2025.9 임금체불 근절 대책(대지급금 확대), 2025.10.23 개정 근로기준법 시행(상습 체불 제재). 근거 자료를 갖추는 일의 가치가 커지는 시점</a:t>
+              <a:t>2025.9 임금체불 근절 대책(대지급금 확대), 2025.10 개정 근로기준법 시행(상습 체불 제재). 근거 자료를 갖추는 일의 가치가 커지는 시점</a:t>
             </a:r>
             <a:endParaRPr lang="en-US" sz="950" dirty="0"/>
           </a:p>

--- a/docs/06_중간발표_PPT.pptx
+++ b/docs/06_중간발표_PPT.pptx
@@ -124,50 +124,50 @@
   <p:extLst>
     <p:ext uri="{521415D9-36F7-43E2-AB2F-B90AF26B5E84}">
       <p14:sectionLst xmlns:p14="http://schemas.microsoft.com/office/powerpoint/2010/main">
-        <p14:section name="① 표지·팀 소개" id="{f6653a63-983e-ba1d-f5a8-9e9141a5ac73}">
+        <p14:section name="① 표지·팀 소개" id="{4e54b565-5026-c946-c09d-7dcaf1952f8a}">
           <p14:sldIdLst>
             <p14:sldId id="256"/>
             <p14:sldId id="257"/>
           </p14:sldIdLst>
         </p14:section>
-        <p14:section name="② 문제 정의" id="{76d7920b-9e25-3314-c5e6-a1750b73970b}">
+        <p14:section name="② 문제 정의" id="{3393b3af-61c6-ef93-9ca3-ea0b1a7685d0}">
           <p14:sldIdLst>
             <p14:sldId id="258"/>
             <p14:sldId id="259"/>
           </p14:sldIdLst>
         </p14:section>
-        <p14:section name="③ 솔루션·핵심 가치" id="{2bbd8512-0fbe-d590-9616-a5e26b69ba77}">
+        <p14:section name="③ 솔루션·핵심 가치" id="{eef788fa-9fd3-aa0e-c183-f6797f303e15}">
           <p14:sldIdLst>
             <p14:sldId id="260"/>
             <p14:sldId id="261"/>
           </p14:sldIdLst>
         </p14:section>
-        <p14:section name="④ SW 기술 아키텍처" id="{84f1d226-86d5-3cbd-7f0d-9f18b6031956}">
+        <p14:section name="④ SW 기술 아키텍처" id="{ad20dae2-33b7-2c5c-4a7d-57c8f6ff1cba}">
           <p14:sldIdLst>
             <p14:sldId id="262"/>
             <p14:sldId id="263"/>
           </p14:sldIdLst>
         </p14:section>
-        <p14:section name="⑤ 개발 현황·MVP 시연" id="{36cbe2a7-5b28-b124-dde6-78470d3be7f5}">
+        <p14:section name="⑤ 개발 현황·MVP 시연" id="{1173df3b-38fb-d172-600e-fc425580e4e3}">
           <p14:sldIdLst>
             <p14:sldId id="264"/>
             <p14:sldId id="265"/>
             <p14:sldId id="266"/>
           </p14:sldIdLst>
         </p14:section>
-        <p14:section name="⑥ 시장 분석·비즈니스 모델" id="{f7d63f55-bf81-65b5-0cd2-3b4186cf1894}">
+        <p14:section name="⑥ 시장 분석·비즈니스 모델" id="{e7d62880-2083-a186-f2c5-3353c0fd3c83}">
           <p14:sldIdLst>
             <p14:sldId id="267"/>
             <p14:sldId id="268"/>
             <p14:sldId id="269"/>
           </p14:sldIdLst>
         </p14:section>
-        <p14:section name="⑦ 초기 시장 검증" id="{2bc10b59-b1ed-965f-16e1-dff99e36adc0}">
+        <p14:section name="⑦ 초기 시장 검증" id="{98966700-ef8c-4223-14d3-9a4a61de660f}">
           <p14:sldIdLst>
             <p14:sldId id="270"/>
           </p14:sldIdLst>
         </p14:section>
-        <p14:section name="⑧ 향후 계획·팀 역량" id="{dcc9561d-64f5-86cb-9670-5442638e6406}">
+        <p14:section name="⑧ 향후 계획·팀 역량" id="{2e933a45-2a85-780b-1adb-81b53fbed138}">
           <p14:sldIdLst>
             <p14:sldId id="271"/>
             <p14:sldId id="272"/>
@@ -836,7 +836,7 @@
           <a:p>
             <a:r>
               <a:rPr lang="en-US" dirty="0"/>
-              <a:t>팀장이 엽니다. "알바비를 덜 받아도 모르고, 알아도 말을 못 하는 대학생을 위해, 기록 → 비교 → 요청까지 한 앱으로 잇는 알바가드입니다." 팀명은 후보 네 개를 보여 주고 발표 뒤 정한다고 말합니다.</a:t>
+              <a:t>팀장이 엽니다. "알바비를 덜 받아도 모르고, 알아도 말을 못 하는 대학생을 위해, 기록 → 비교 → 요청까지 한 앱으로 잇는 알바가드입니다." 팀명은 앱 이름과 같은 알바가드입니다.</a:t>
             </a:r>
             <a:endParaRPr lang="en-US" dirty="0"/>
           </a:p>
@@ -3341,7 +3341,7 @@
                   <a:schemeClr val="bg2"/>
                 </a:solidFill>
               </a:rPr>
-              <a:t>팀명 후보</a:t>
+              <a:t>팀명</a:t>
             </a:r>
             <a:endParaRPr lang="en-US" sz="1000" dirty="0"/>
           </a:p>
@@ -3372,14 +3372,14 @@
               <a:buNone/>
             </a:pPr>
             <a:r>
-              <a:rPr lang="en-US" sz="1250" b="1" dirty="0">
+              <a:rPr lang="en-US" sz="2400" b="1" dirty="0">
                 <a:solidFill>
                   <a:schemeClr val="bg1"/>
                 </a:solidFill>
               </a:rPr>
-              <a:t>기록조 · 온타임 · 페이체크 · 알바가드팀</a:t>
-            </a:r>
-            <a:endParaRPr lang="en-US" sz="1250" dirty="0"/>
+              <a:t>알바가드</a:t>
+            </a:r>
+            <a:endParaRPr lang="en-US" sz="2400" dirty="0"/>
           </a:p>
         </p:txBody>
       </p:sp>
@@ -3413,7 +3413,7 @@
                   <a:schemeClr val="bg2"/>
                 </a:solidFill>
               </a:rPr>
-              <a:t>발표 뒤 하나로 정합니다</a:t>
+              <a:t>4조 · 앱 이름과 같게 정했습니다</a:t>
             </a:r>
             <a:endParaRPr lang="en-US" sz="950" dirty="0"/>
           </a:p>
@@ -7366,7 +7366,7 @@
                   <a:schemeClr val="tx1"/>
                 </a:solidFill>
               </a:rPr>
-              <a:t>2025.9 임금체불 근절 대책(대지급금 확대), 2025.10 개정 근로기준법 시행(상습 체불 제재). 근거 자료를 갖추는 일의 가치가 커지는 시점</a:t>
+              <a:t>2025.9 임금체불 근절 대책(대지급금 확대), 2025.10 개정 근로기준법 시행(상습 체불 제재). 근거를 남겨 둔 사람이 돌려받기 쉬워지는 때</a:t>
             </a:r>
             <a:endParaRPr lang="en-US" sz="950" dirty="0"/>
           </a:p>
@@ -15291,7 +15291,7 @@
                   <a:schemeClr val="accent5"/>
                 </a:solidFill>
               </a:rPr>
-              <a:t>3명</a:t>
+              <a:t>셋이 나눔</a:t>
             </a:r>
             <a:endParaRPr lang="en-US" sz="1300" dirty="0"/>
           </a:p>
@@ -24572,7 +24572,7 @@
                   <a:schemeClr val="tx2"/>
                 </a:solidFill>
               </a:rPr>
-              <a:t>통장처럼 쌓이는 기록, 질문처럼 묻는 비교</a:t>
+              <a:t>네 화면: 캘린더, 설정, 증빙 묶음 PDF, 확인 페이지</a:t>
             </a:r>
             <a:endParaRPr lang="en-US" sz="2400" dirty="0"/>
           </a:p>

--- a/docs/06_중간발표_PPT.pptx
+++ b/docs/06_중간발표_PPT.pptx
@@ -124,50 +124,50 @@
   <p:extLst>
     <p:ext uri="{521415D9-36F7-43E2-AB2F-B90AF26B5E84}">
       <p14:sectionLst xmlns:p14="http://schemas.microsoft.com/office/powerpoint/2010/main">
-        <p14:section name="① 표지·팀 소개" id="{4e54b565-5026-c946-c09d-7dcaf1952f8a}">
+        <p14:section name="① 표지·팀 소개" id="{6adcec9e-fdad-f654-ee3f-691d989c9e2d}">
           <p14:sldIdLst>
             <p14:sldId id="256"/>
             <p14:sldId id="257"/>
           </p14:sldIdLst>
         </p14:section>
-        <p14:section name="② 문제 정의" id="{3393b3af-61c6-ef93-9ca3-ea0b1a7685d0}">
+        <p14:section name="② 문제 정의" id="{7dfd0d7a-d1f3-bf7d-725c-7915303a9971}">
           <p14:sldIdLst>
             <p14:sldId id="258"/>
             <p14:sldId id="259"/>
           </p14:sldIdLst>
         </p14:section>
-        <p14:section name="③ 솔루션·핵심 가치" id="{eef788fa-9fd3-aa0e-c183-f6797f303e15}">
+        <p14:section name="③ 솔루션·핵심 가치" id="{d6e647c4-9ad8-639d-25da-c44335e398bb}">
           <p14:sldIdLst>
             <p14:sldId id="260"/>
             <p14:sldId id="261"/>
           </p14:sldIdLst>
         </p14:section>
-        <p14:section name="④ SW 기술 아키텍처" id="{ad20dae2-33b7-2c5c-4a7d-57c8f6ff1cba}">
+        <p14:section name="④ SW 기술 아키텍처" id="{8157a3dc-5256-95ff-21a9-fbc835208215}">
           <p14:sldIdLst>
             <p14:sldId id="262"/>
             <p14:sldId id="263"/>
           </p14:sldIdLst>
         </p14:section>
-        <p14:section name="⑤ 개발 현황·MVP 시연" id="{1173df3b-38fb-d172-600e-fc425580e4e3}">
+        <p14:section name="⑤ 개발 현황·MVP 시연" id="{2b1f1dde-c198-87a6-8074-0b5f635775a1}">
           <p14:sldIdLst>
             <p14:sldId id="264"/>
             <p14:sldId id="265"/>
             <p14:sldId id="266"/>
           </p14:sldIdLst>
         </p14:section>
-        <p14:section name="⑥ 시장 분석·비즈니스 모델" id="{e7d62880-2083-a186-f2c5-3353c0fd3c83}">
+        <p14:section name="⑥ 시장 분석·비즈니스 모델" id="{8d5ee3a9-3065-1a45-421a-d7fa22b9d288}">
           <p14:sldIdLst>
             <p14:sldId id="267"/>
             <p14:sldId id="268"/>
             <p14:sldId id="269"/>
           </p14:sldIdLst>
         </p14:section>
-        <p14:section name="⑦ 초기 시장 검증" id="{98966700-ef8c-4223-14d3-9a4a61de660f}">
+        <p14:section name="⑦ 초기 시장 검증" id="{0cd959df-2bd2-7254-3765-df072be833a5}">
           <p14:sldIdLst>
             <p14:sldId id="270"/>
           </p14:sldIdLst>
         </p14:section>
-        <p14:section name="⑧ 향후 계획·팀 역량" id="{2e933a45-2a85-780b-1adb-81b53fbed138}">
+        <p14:section name="⑧ 향후 계획·팀 역량" id="{82fffc0f-63c7-9158-d82e-33d6a741ae70}">
           <p14:sldIdLst>
             <p14:sldId id="271"/>
             <p14:sldId id="272"/>
@@ -1730,7 +1730,7 @@
           <a:p>
             <a:r>
               <a:rPr lang="en-US" dirty="0"/>
-              <a:t>팀장. 교수님이 "다들 아직 구현 안 했을 것"이라 하셨는데, 저희는 배포까지 했습니다. 다만 사용자 검증은 아직이라 11월에 합니다. 오른쪽 QR은 앱과 설문입니다. 설문은 이름을 받지 않고 3분이라, 들으시면서 답해 주셔도 됩니다. 역할은 솔직하게: 지금까지는 제가 만들었고, 오늘부터 팀원이 시장과 검증을 맡습니다.</a:t>
+              <a:t>팀장. "교수님이 아직 구현 전일 거라 하셨는데, 저희는 웹앱이라 만드는 비용이 낮아서 먼저 만들어 보고 검증하는 순서를 택했습니다. 오늘 보여 드리는 건 완성품이 아니라 검증용 도구입니다." 사용자 검증은 11월에 합니다. 오른쪽 QR은 앱과 설문입니다. 설문은 이름을 받지 않고 3분이라, 들으시면서 답해 주셔도 됩니다. 역할은 솔직하게: 지금까지는 제가 만들었고, 오늘부터 팀원이 시장과 검증을 맡습니다.</a:t>
             </a:r>
             <a:endParaRPr lang="en-US" dirty="0"/>
           </a:p>
@@ -14987,7 +14987,7 @@
                   <a:schemeClr val="tx2"/>
                 </a:solidFill>
               </a:rPr>
-              <a:t>앱은 배포돼 있습니다. 오늘은 돌아가는 것을 보여 드립니다</a:t>
+              <a:t>먼저 만들어 봤습니다. 검증은 이제부터입니다</a:t>
             </a:r>
             <a:endParaRPr lang="en-US" sz="2400" dirty="0"/>
           </a:p>

--- a/docs/06_중간발표_PPT.pptx
+++ b/docs/06_중간발표_PPT.pptx
@@ -124,50 +124,50 @@
   <p:extLst>
     <p:ext uri="{521415D9-36F7-43E2-AB2F-B90AF26B5E84}">
       <p14:sectionLst xmlns:p14="http://schemas.microsoft.com/office/powerpoint/2010/main">
-        <p14:section name="① 표지·팀 소개" id="{6adcec9e-fdad-f654-ee3f-691d989c9e2d}">
+        <p14:section name="① 표지·팀 소개" id="{b9e57f7a-e469-4d96-1ff8-b263765c9e1c}">
           <p14:sldIdLst>
             <p14:sldId id="256"/>
             <p14:sldId id="257"/>
           </p14:sldIdLst>
         </p14:section>
-        <p14:section name="② 문제 정의" id="{7dfd0d7a-d1f3-bf7d-725c-7915303a9971}">
+        <p14:section name="② 문제 정의" id="{63f975fe-e5de-4bc4-be8c-8abac6b676ab}">
           <p14:sldIdLst>
             <p14:sldId id="258"/>
             <p14:sldId id="259"/>
           </p14:sldIdLst>
         </p14:section>
-        <p14:section name="③ 솔루션·핵심 가치" id="{d6e647c4-9ad8-639d-25da-c44335e398bb}">
+        <p14:section name="③ 솔루션·핵심 가치" id="{a81e829c-c8ae-47ff-6d0d-7c6b52a1f925}">
           <p14:sldIdLst>
             <p14:sldId id="260"/>
             <p14:sldId id="261"/>
           </p14:sldIdLst>
         </p14:section>
-        <p14:section name="④ SW 기술 아키텍처" id="{8157a3dc-5256-95ff-21a9-fbc835208215}">
+        <p14:section name="④ SW 기술 아키텍처" id="{13864d42-7b2c-592c-094a-5bf93f7796bf}">
           <p14:sldIdLst>
             <p14:sldId id="262"/>
             <p14:sldId id="263"/>
           </p14:sldIdLst>
         </p14:section>
-        <p14:section name="⑤ 개발 현황·MVP 시연" id="{2b1f1dde-c198-87a6-8074-0b5f635775a1}">
+        <p14:section name="⑤ 개발 현황·MVP 시연" id="{ba6c3f31-f904-9f69-7b75-a9ea50225a41}">
           <p14:sldIdLst>
             <p14:sldId id="264"/>
             <p14:sldId id="265"/>
             <p14:sldId id="266"/>
           </p14:sldIdLst>
         </p14:section>
-        <p14:section name="⑥ 시장 분석·비즈니스 모델" id="{8d5ee3a9-3065-1a45-421a-d7fa22b9d288}">
+        <p14:section name="⑥ 시장 분석·비즈니스 모델" id="{1c97dec4-5eee-a969-cc16-9a5b8a0b3401}">
           <p14:sldIdLst>
             <p14:sldId id="267"/>
             <p14:sldId id="268"/>
             <p14:sldId id="269"/>
           </p14:sldIdLst>
         </p14:section>
-        <p14:section name="⑦ 초기 시장 검증" id="{0cd959df-2bd2-7254-3765-df072be833a5}">
+        <p14:section name="⑦ 초기 시장 검증" id="{1807c99a-39db-fc39-acff-364a9a83046e}">
           <p14:sldIdLst>
             <p14:sldId id="270"/>
           </p14:sldIdLst>
         </p14:section>
-        <p14:section name="⑧ 향후 계획·팀 역량" id="{82fffc0f-63c7-9158-d82e-33d6a741ae70}">
+        <p14:section name="⑧ 향후 계획·팀 역량" id="{f713e2a2-fcda-e00c-fa19-72b107ca0197}">
           <p14:sldIdLst>
             <p14:sldId id="271"/>
             <p14:sldId id="272"/>
@@ -1012,7 +1012,7 @@
           <a:p>
             <a:r>
               <a:rPr lang="en-US" dirty="0"/>
-              <a:t>시연 직후에 보여 줍니다. "방금 보신 것이 8개 중 이만큼"입니다. 100%는 쓰지 않았습니다. 동그라미 세 칸은 컴퓨터 동작 · 실제 폰 · 사용자 검증이고, 지금은 모두 첫 칸만 찼습니다. 뒤 두 칸이 11월 일정입니다. 이 장이 끝나면 손유호에게 넘깁니다.</a:t>
+              <a:t>시연 직후에 보여 줍니다. "방금 보신 것이 8개 중 이만큼"입니다. 100%는 쓰지 않았습니다. 계획 기준은 10/13 MVP 기능 정의서의 포함 기능 8개와 제외 기능 6개(금액 자동 인식 · 푸시 알림 · AI 문구 · 광고 · 로그인 · 진정서)입니다. %는 구현 + 실제 폰 확인 + 사용자 검증을 100으로 보고 남은 일만큼 뺀 자체 평가이고, 동작은 컴퓨터의 폰 크기 화면에서, 실제 폰은 설치까지 확인했습니다. 동그라미 세 칸은 컴퓨터 동작 · 실제 폰 · 사용자 검증이고, 지금은 모두 첫 칸만 찼습니다. 뒤 두 칸이 11월 일정입니다. 이 장이 끝나면 손유호에게 넘깁니다.</a:t>
             </a:r>
             <a:endParaRPr lang="en-US" dirty="0"/>
           </a:p>
@@ -1100,7 +1100,7 @@
           <a:p>
             <a:r>
               <a:rPr lang="en-US" dirty="0"/>
-              <a:t>손유호. 임금체불은 2년 연속 2조 원이고 30인 미만 사업장에 몰려 있습니다. 타겟 규모는 어림이라 "약"을 붙여 말하고, 없는 숫자(지금 알바 중, 주 15시간 이상)는 미상으로 둡니다. "이 비율의 첫 조각은 지금 답하고 계신 설문에서 나옵니다. 다음 순서에서 박명진이 말씀드립니다." 출처: 고용노동부 노동포털 임금체불 통계현황, 알바천국 설문, 교육부 교육기본통계.</a:t>
+              <a:t>손유호. 임금체불은 2년 연속 2조 원이고 30인 미만 사업장에 몰려 있습니다. 타겟 규모는 어림이라 "약"을 붙여 말하고, 없는 숫자(지금 알바 중, 주 15시간 이상)는 미상으로 둡니다. 재적학생은 교육부 2026 교육기본통계(대학원 포함), 알바 경험률은 학교 단위 조사(동의대 316명 88%, 동국대 200명 67.5%)라 대표값이 아닙니다. 근절 대책은 대지급금을 3개월분에서 6개월분으로, 개정법은 상습 체불 사업주 신용 제재입니다. "이 비율의 첫 조각은 지금 답하고 계신 설문에서 나옵니다. 다음 순서에서 박명진이 말씀드립니다." 출처: 고용노동부 노동포털 임금체불 통계현황, 알바천국 설문, 교육부 교육기본통계.</a:t>
             </a:r>
             <a:endParaRPr lang="en-US" dirty="0"/>
           </a:p>
@@ -1276,7 +1276,7 @@
           <a:p>
             <a:r>
               <a:rPr lang="en-US" dirty="0"/>
-              <a:t>손유호. 알바비 앱에 왜 게임이 있나: 핵심 기능은 한 달에 한 번이라 매일 열 이유로 넣었고, 그 화면이 광고 자리입니다. 처음엔 근무 중에만 열렸는데 팀원 의견으로 10/25에 조건을 풀고 설정에서 숨길 수 있게 했습니다. 광고 형식은 웹앱이라 배너 · 전면이 기본이고 보상형은 승인이 필요합니다(린 캔버스와 같은 말). 2차 구독은 "기록이 폰에만 있다"는 약점을 돈 내고 없애는 선택 기능이라 "근무 내용은 폰 안에만" 원칙과 충돌하지 않습니다(원하는 사람만). 문서를 돈 받고 만들어 주는 건 법적 이유로 하지 않습니다. 운영 비용은 지금 0원이라 수익이 0이어도 서비스는 돌아갑니다.</a:t>
+              <a:t>손유호. 알바비 앱에 왜 게임이 있나: 핵심 기능은 한 달에 한 번이라 매일 열 이유로 넣었고, 그 화면이 광고 자리입니다. 처음엔 근무 중에만 열렸는데 팀원 의견으로 10/25에 조건을 풀고 설정에서 숨길 수 있게 했습니다. 광고 형식은 웹앱이라 배너 · 전면이 기본이고 보상형은 승인이 필요합니다(린 캔버스와 같은 말). 2차 구독은 "기록이 폰에만 있다"는 약점을 돈 내고 없애는 선택 기능이라 "근무 내용은 폰 안에만" 원칙과 충돌하지 않습니다(원하는 사람만). 문서를 돈 받고 만들어 주는 건 법적 이유로 하지 않습니다(웹 조사 기준, 전문가 검토 아님). 광고 가설은 설문의 "게임 화면 광고" 문항과 승인 뒤 게임 화면 열람 수로 확인합니다. 운영 비용은 지금 서버 0원 · 배포 0원이라 수익이 0이어도 서비스는 돌아가고, 인건비는 팀 3명입니다.</a:t>
             </a:r>
             <a:endParaRPr lang="en-US" dirty="0"/>
           </a:p>
@@ -1364,7 +1364,7 @@
           <a:p>
             <a:r>
               <a:rPr lang="en-US" dirty="0"/>
-              <a:t>박명진. 가설은 9월 기획서 문장 그대로입니다. 표의 기준은 팀이 정한 목표이지 데이터가 아닙니다. 기말 발표에서 마지막 칸에 결과를 채워 보고합니다. 응답 수는 슬라이드에 적지 않고 당일 아침 결과 페이지에서 읽습니다. 0명이면 0명이라고 말합니다. 조건부: 당일 아침 응답이 10명 이상이고, 강의실 인터넷이 되고, 교수님 양해를 받았으면 결과 페이지(survey-results.html)를 60초만 띄워 세 문항(주당 근무 시간 · 적게 받은 것 같았던 적 · 매달 받은 금액 직접 넣기)만 읽습니다. 자유 의견은 띄우지 않습니다. 아니면 당일 아침 캡처로 대신합니다. 테스트 응답 2건(10/23)은 미리 지워 둡니다. 결과는 사람 수로만 말하고 %는 30명을 넘을 때만 씁니다.</a:t>
+              <a:t>박명진. 가설은 9월 기획서 문장 그대로입니다. 표의 기준은 팀이 정한 목표이지 데이터가 아닙니다. 인터뷰 문항은 설문지 20~24번입니다. 지금까지 들은 것은 정식 조사가 아닙니다: 타겟 사용자 1명이 디자인 시안 12장 중 통장 구성을 골랐고, 링크 설문은 10/23에 공개했습니다. 기말 발표에서 마지막 칸에 결과를 채워 보고합니다. 응답 수는 슬라이드에 적지 않고 당일 아침 결과 페이지에서 읽습니다. 0명이면 0명이라고 말합니다. 조건부: 당일 아침 응답이 10명 이상이고, 강의실 인터넷이 되고, 교수님 양해를 받았으면 결과 페이지(survey-results.html)를 60초만 띄워 세 문항(주당 근무 시간 · 적게 받은 것 같았던 적 · 매달 받은 금액 직접 넣기)만 읽습니다. 자유 의견은 띄우지 않습니다. 아니면 당일 아침 캡처로 대신합니다. 테스트 응답 2건(10/23)은 미리 지워 둡니다. 결과는 사람 수로만 말하고 %는 30명을 넘을 때만 씁니다.</a:t>
             </a:r>
             <a:endParaRPr lang="en-US" dirty="0"/>
           </a:p>
@@ -1452,7 +1452,7 @@
           <a:p>
             <a:r>
               <a:rPr lang="en-US" dirty="0"/>
-              <a:t>박명진. 7주 일정이고 빨간 마름모가 마일스톤입니다. 설문은 오늘 이 자리에서 시작해 11/16까지 손유호가 30명을 모으고, 인터뷰 5명은 제가 11/3~11/9에 합니다. 11/23에 설문의 광고 문항 결과로 광고 실험과 새 게임 중 하나를 정합니다. 12/7 이후에는 코드를 바꾸지 않고 보고서와 발표를 준비합니다. 위험과 대안은 보고서 5.4에 적었습니다.</a:t>
+              <a:t>박명진. 7주 일정이고 빨간 마름모가 마일스톤입니다. 설문은 오늘 이 자리에서 시작해 11/16까지 손유호가 30명을 모으고, 인터뷰 5명은 제가 11/3~11/9에 합니다. 폰 검증은 아이폰은 팀장, 갤럭시는 제가 주관합니다. 광고 승인 신청은 손유호, 코드는 팀장입니다. 마일스톤: 11/9 설문 1차 집계 · 인터뷰 마감, 11/23 피드백 반영 배포와 광고 결정, 11/30 폰 검증 끝, 12/7 기록 등록 보강 배포와 기능 동결, 12/15 기말. 11/23에 설문의 광고 문항 결과로 광고 실험과 새 게임 중 하나를 정합니다. 12/7 이후에는 코드를 바꾸지 않고 보고서와 발표를 준비합니다. 위험과 대안은 보고서 5.4에 적었습니다.</a:t>
             </a:r>
             <a:endParaRPr lang="en-US" dirty="0"/>
           </a:p>
@@ -2082,7 +2082,7 @@
           <a:p>
             <a:r>
               <a:rPr lang="en-US" dirty="0"/>
-              <a:t>세 번째가 따라 하기 어려운 차별점입니다. 지금 확인 페이지는 번호의 서버 등록 시각까지 보여 주고, 기록 내용에서 번호를 다시 계산해 맞춰 보는 방법은 기말까지 만듭니다(그래서 9장에 70%). 약점은 먼저 말합니다. "법적 효력" 질문이 오면 보장하지 않는다고 답하고, 판단할 자료를 정리해 준다고 말합니다.</a:t>
+              <a:t>세 번째가 따라 하기 어려운 차별점입니다. 지금 확인 페이지는 번호의 서버 등록 시각까지 보여 주고, 기록 내용에서 번호를 다시 계산해 맞춰 보는 방법은 기말까지 만듭니다(그래서 9장에 70%). 근무지 · 시각 · 금액은 서버로 가지 않고, "그날 실제로 일했다"까지는 증명하지 못합니다. 약점은 먼저 말합니다. "법적 효력" 질문이 오면 보장하지 않는다고 답하고, 판단할 자료를 정리해 준다고 말합니다.</a:t>
             </a:r>
             <a:endParaRPr lang="en-US" dirty="0"/>
           </a:p>
@@ -2258,7 +2258,7 @@
           <a:p>
             <a:r>
               <a:rPr lang="en-US" dirty="0"/>
-              <a:t>왼쪽 폰 안에서 모든 계산이 끝나고, 서버로 가는 건 확인 번호뿐입니다. 기기 번호는 처음 기록을 등록할 때 앱이 만든 난수라 휴대전화 번호가 아닙니다. 앱이 쓰는 공개 키로는 넣기와 읽기만 되고, 걸어 놓고 뚫어 봤습니다. 2000년 시각을 보내도 서버 시각으로 들어가고, 수정 · 삭제는 401로 거부됩니다. 다만 운영자 권한으로는 고칠 수 있어서, 지금 막는 건 "사용자가 나중에 고쳐 쓰기"까지입니다. 운영자까지 못 고치게 하는 외부 시점확인은 비용 때문에 계획입니다. 오른쪽은 기록 하나가 남을 때의 흐름입니다. 지금 답하고 계신 설문도 같은 서버의 survey 표로 가고, 권한 원칙이 같습니다.</a:t>
+              <a:t>왼쪽 폰 안에서 모든 계산이 끝나고, 서버로 가는 건 확인 번호뿐입니다. 기기 번호는 처음 기록을 등록할 때 앱이 만든 난수라 휴대전화 번호가 아닙니다. 앱이 쓰는 공개 키로는 넣기와 읽기만 되고, 걸어 놓고 뚫어 봤습니다. 2000년 시각을 보내도 서버 시각으로 들어가고, 수정 · 삭제는 401로 거부됩니다. 다만 운영자 권한으로는 고칠 수 있어서, 지금 막는 건 "사용자가 나중에 고쳐 쓰기"까지입니다. 운영자까지 못 고치게 하는 외부 시점확인은 비용 때문에 계획입니다. 오른쪽은 기록 하나가 남을 때의 흐름입니다. 증빙 묶음 PDF 7번 표에 기록별 확인 번호와 등록 시각이 들어갑니다. 배포는 GitHub main에 올리면 Actions가 Pages로 자동 배포합니다. 지금 답하고 계신 설문도 같은 서버의 survey 표로 가고, 권한 원칙이 같습니다.</a:t>
             </a:r>
             <a:endParaRPr lang="en-US" dirty="0"/>
           </a:p>
@@ -4541,8 +4541,8 @@
         </p:nvSpPr>
         <p:spPr>
           <a:xfrm>
-            <a:off x="5852160" y="987552"/>
-            <a:ext cx="548640" cy="228600"/>
+            <a:off x="5788152" y="1024128"/>
+            <a:ext cx="603504" cy="237744"/>
           </a:xfrm>
           <a:prstGeom prst="rect">
             <a:avLst/>
@@ -4558,14 +4558,14 @@
               <a:buNone/>
             </a:pPr>
             <a:r>
-              <a:rPr lang="en-US" sz="750" b="1" dirty="0">
+              <a:rPr lang="en-US" sz="900" b="1" dirty="0">
                 <a:solidFill>
                   <a:schemeClr val="accent5"/>
                 </a:solidFill>
               </a:rPr>
               <a:t>동작</a:t>
             </a:r>
-            <a:endParaRPr lang="en-US" sz="750" dirty="0"/>
+            <a:endParaRPr lang="en-US" sz="900" dirty="0"/>
           </a:p>
         </p:txBody>
       </p:sp>
@@ -4577,8 +4577,8 @@
         </p:nvSpPr>
         <p:spPr>
           <a:xfrm>
-            <a:off x="6126480" y="987552"/>
-            <a:ext cx="548640" cy="228600"/>
+            <a:off x="6080760" y="1024128"/>
+            <a:ext cx="603504" cy="237744"/>
           </a:xfrm>
           <a:prstGeom prst="rect">
             <a:avLst/>
@@ -4594,14 +4594,14 @@
               <a:buNone/>
             </a:pPr>
             <a:r>
-              <a:rPr lang="en-US" sz="750" b="1" dirty="0">
+              <a:rPr lang="en-US" sz="900" b="1" dirty="0">
                 <a:solidFill>
                   <a:schemeClr val="accent5"/>
                 </a:solidFill>
               </a:rPr>
               <a:t>폰</a:t>
             </a:r>
-            <a:endParaRPr lang="en-US" sz="750" dirty="0"/>
+            <a:endParaRPr lang="en-US" sz="900" dirty="0"/>
           </a:p>
         </p:txBody>
       </p:sp>
@@ -4613,8 +4613,8 @@
         </p:nvSpPr>
         <p:spPr>
           <a:xfrm>
-            <a:off x="6400800" y="987552"/>
-            <a:ext cx="548640" cy="228600"/>
+            <a:off x="6373368" y="1024128"/>
+            <a:ext cx="603504" cy="237744"/>
           </a:xfrm>
           <a:prstGeom prst="rect">
             <a:avLst/>
@@ -4630,14 +4630,14 @@
               <a:buNone/>
             </a:pPr>
             <a:r>
-              <a:rPr lang="en-US" sz="750" b="1" dirty="0">
+              <a:rPr lang="en-US" sz="900" b="1" dirty="0">
                 <a:solidFill>
                   <a:schemeClr val="accent5"/>
                 </a:solidFill>
               </a:rPr>
               <a:t>사용자</a:t>
             </a:r>
-            <a:endParaRPr lang="en-US" sz="750" dirty="0"/>
+            <a:endParaRPr lang="en-US" sz="900" dirty="0"/>
           </a:p>
         </p:txBody>
       </p:sp>
@@ -4649,8 +4649,8 @@
         </p:nvSpPr>
         <p:spPr>
           <a:xfrm>
-            <a:off x="6903720" y="987552"/>
-            <a:ext cx="1783080" cy="228600"/>
+            <a:off x="6903720" y="1024128"/>
+            <a:ext cx="1783080" cy="237744"/>
           </a:xfrm>
           <a:prstGeom prst="rect">
             <a:avLst/>
@@ -4666,14 +4666,14 @@
               <a:buNone/>
             </a:pPr>
             <a:r>
-              <a:rPr lang="en-US" sz="750" b="1" dirty="0">
+              <a:rPr lang="en-US" sz="900" b="1" dirty="0">
                 <a:solidFill>
                   <a:schemeClr val="accent5"/>
                 </a:solidFill>
               </a:rPr>
               <a:t>남은 일</a:t>
             </a:r>
-            <a:endParaRPr lang="en-US" sz="750" dirty="0"/>
+            <a:endParaRPr lang="en-US" sz="900" dirty="0"/>
           </a:p>
         </p:txBody>
       </p:sp>
@@ -4685,8 +4685,8 @@
         </p:nvSpPr>
         <p:spPr>
           <a:xfrm>
-            <a:off x="457200" y="1261872"/>
-            <a:ext cx="3611880" cy="384048"/>
+            <a:off x="457200" y="1298448"/>
+            <a:ext cx="3383280" cy="384048"/>
           </a:xfrm>
           <a:prstGeom prst="rect">
             <a:avLst/>
@@ -4702,27 +4702,27 @@
               <a:buNone/>
             </a:pPr>
             <a:r>
-              <a:rPr lang="en-US" sz="1000" dirty="0">
+              <a:rPr lang="en-US" sz="1150" dirty="0">
                 <a:solidFill>
                   <a:schemeClr val="tx1"/>
                 </a:solidFill>
               </a:rPr>
-              <a:t>근무 기록 (수정 이력 · 직접 추가 · 퇴근 누락 보호)</a:t>
-            </a:r>
-            <a:endParaRPr lang="en-US" sz="1000" dirty="0"/>
-          </a:p>
-        </p:txBody>
-      </p:sp>
-      <p:sp>
-        <p:nvSpPr>
-          <p:cNvPr id="9" name="근무 기록 (수정 이력 · 직접 추가 · 퇴근 누락 보호) 바탕"/>
+              <a:t>근무 기록 (수정 이력 · 퇴근 누락 보호)</a:t>
+            </a:r>
+            <a:endParaRPr lang="en-US" sz="1150" dirty="0"/>
+          </a:p>
+        </p:txBody>
+      </p:sp>
+      <p:sp>
+        <p:nvSpPr>
+          <p:cNvPr id="9" name="근무 기록 (수정 이력 · 퇴근 누락 보호) 바탕"/>
           <p:cNvSpPr/>
           <p:nvPr/>
         </p:nvSpPr>
         <p:spPr>
           <a:xfrm>
-            <a:off x="4160520" y="1389888"/>
-            <a:ext cx="1280160" cy="128016"/>
+            <a:off x="3931920" y="1426464"/>
+            <a:ext cx="1371600" cy="128016"/>
           </a:xfrm>
           <a:prstGeom prst="roundRect">
             <a:avLst>
@@ -4742,14 +4742,14 @@
       </p:sp>
       <p:sp>
         <p:nvSpPr>
-          <p:cNvPr id="10" name="근무 기록 (수정 이력 · 직접 추가 · 퇴근 누락 보호) 진행"/>
+          <p:cNvPr id="10" name="근무 기록 (수정 이력 · 퇴근 누락 보호) 진행"/>
           <p:cNvSpPr/>
           <p:nvPr/>
         </p:nvSpPr>
         <p:spPr>
           <a:xfrm>
-            <a:off x="4160520" y="1389888"/>
-            <a:ext cx="1152144" cy="128016"/>
+            <a:off x="3931920" y="1426464"/>
+            <a:ext cx="1234440" cy="128016"/>
           </a:xfrm>
           <a:prstGeom prst="roundRect">
             <a:avLst>
@@ -4775,8 +4775,8 @@
         </p:nvSpPr>
         <p:spPr>
           <a:xfrm>
-            <a:off x="5495544" y="1261872"/>
-            <a:ext cx="411480" cy="384048"/>
+            <a:off x="5358384" y="1298448"/>
+            <a:ext cx="457200" cy="384048"/>
           </a:xfrm>
           <a:prstGeom prst="rect">
             <a:avLst/>
@@ -4792,27 +4792,27 @@
               <a:buNone/>
             </a:pPr>
             <a:r>
-              <a:rPr lang="en-US" sz="1000" b="1" dirty="0">
+              <a:rPr lang="en-US" sz="1100" b="1" dirty="0">
                 <a:solidFill>
                   <a:schemeClr val="tx2"/>
                 </a:solidFill>
               </a:rPr>
               <a:t>90%</a:t>
             </a:r>
-            <a:endParaRPr lang="en-US" sz="1000" dirty="0"/>
-          </a:p>
-        </p:txBody>
-      </p:sp>
-      <p:sp>
-        <p:nvSpPr>
-          <p:cNvPr id="12" name="근무 기록 (수정 이력 · 직접 추가 · 퇴근 누락 보호) 확인 0"/>
+            <a:endParaRPr lang="en-US" sz="1100" dirty="0"/>
+          </a:p>
+        </p:txBody>
+      </p:sp>
+      <p:sp>
+        <p:nvSpPr>
+          <p:cNvPr id="12" name="근무 기록 (수정 이력 · 퇴근 누락 보호) 확인 0"/>
           <p:cNvSpPr/>
           <p:nvPr/>
         </p:nvSpPr>
         <p:spPr>
           <a:xfrm>
-            <a:off x="6044184" y="1371600"/>
-            <a:ext cx="164592" cy="164592"/>
+            <a:off x="5998464" y="1399032"/>
+            <a:ext cx="182880" cy="182880"/>
           </a:xfrm>
           <a:prstGeom prst="ellipse">
             <a:avLst/>
@@ -4830,14 +4830,14 @@
       </p:sp>
       <p:sp>
         <p:nvSpPr>
-          <p:cNvPr id="13" name="근무 기록 (수정 이력 · 직접 추가 · 퇴근 누락 보호) 확인 1"/>
+          <p:cNvPr id="13" name="근무 기록 (수정 이력 · 퇴근 누락 보호) 확인 1"/>
           <p:cNvSpPr/>
           <p:nvPr/>
         </p:nvSpPr>
         <p:spPr>
           <a:xfrm>
-            <a:off x="6318504" y="1371600"/>
-            <a:ext cx="164592" cy="164592"/>
+            <a:off x="6291072" y="1399032"/>
+            <a:ext cx="182880" cy="182880"/>
           </a:xfrm>
           <a:prstGeom prst="ellipse">
             <a:avLst/>
@@ -4855,14 +4855,14 @@
       </p:sp>
       <p:sp>
         <p:nvSpPr>
-          <p:cNvPr id="14" name="근무 기록 (수정 이력 · 직접 추가 · 퇴근 누락 보호) 확인 2"/>
+          <p:cNvPr id="14" name="근무 기록 (수정 이력 · 퇴근 누락 보호) 확인 2"/>
           <p:cNvSpPr/>
           <p:nvPr/>
         </p:nvSpPr>
         <p:spPr>
           <a:xfrm>
-            <a:off x="6592824" y="1371600"/>
-            <a:ext cx="164592" cy="164592"/>
+            <a:off x="6583680" y="1399032"/>
+            <a:ext cx="182880" cy="182880"/>
           </a:xfrm>
           <a:prstGeom prst="ellipse">
             <a:avLst/>
@@ -4886,7 +4886,7 @@
         </p:nvSpPr>
         <p:spPr>
           <a:xfrm>
-            <a:off x="6903720" y="1261872"/>
+            <a:off x="6903720" y="1298448"/>
             <a:ext cx="1783080" cy="384048"/>
           </a:xfrm>
           <a:prstGeom prst="rect">
@@ -4903,14 +4903,14 @@
               <a:buNone/>
             </a:pPr>
             <a:r>
-              <a:rPr lang="en-US" sz="850" dirty="0">
+              <a:rPr lang="en-US" sz="1050" dirty="0">
                 <a:solidFill>
                   <a:schemeClr val="accent5"/>
                 </a:solidFill>
               </a:rPr>
-              <a:t>실제 폰에서 장기 사용 확인</a:t>
-            </a:r>
-            <a:endParaRPr lang="en-US" sz="850" dirty="0"/>
+              <a:t>실제 폰 장기 사용</a:t>
+            </a:r>
+            <a:endParaRPr lang="en-US" sz="1050" dirty="0"/>
           </a:p>
         </p:txBody>
       </p:sp>
@@ -4922,7 +4922,7 @@
         </p:nvSpPr>
         <p:spPr>
           <a:xfrm>
-            <a:off x="457200" y="1645920"/>
+            <a:off x="457200" y="1682496"/>
             <a:ext cx="8229600" cy="0"/>
           </a:xfrm>
           <a:prstGeom prst="line">
@@ -4945,8 +4945,8 @@
         </p:nvSpPr>
         <p:spPr>
           <a:xfrm>
-            <a:off x="457200" y="1645920"/>
-            <a:ext cx="3611880" cy="384048"/>
+            <a:off x="457200" y="1682496"/>
+            <a:ext cx="3383280" cy="384048"/>
           </a:xfrm>
           <a:prstGeom prst="rect">
             <a:avLst/>
@@ -4962,27 +4962,27 @@
               <a:buNone/>
             </a:pPr>
             <a:r>
-              <a:rPr lang="en-US" sz="1000" dirty="0">
+              <a:rPr lang="en-US" sz="1150" dirty="0">
                 <a:solidFill>
                   <a:schemeClr val="tx1"/>
                 </a:solidFill>
               </a:rPr>
-              <a:t>캘린더 (예정 vs 실제, 연장 · 대타 · 합의 휴무)</a:t>
-            </a:r>
-            <a:endParaRPr lang="en-US" sz="1000" dirty="0"/>
-          </a:p>
-        </p:txBody>
-      </p:sp>
-      <p:sp>
-        <p:nvSpPr>
-          <p:cNvPr id="18" name="캘린더 (예정 vs 실제, 연장 · 대타 · 합의 휴무) 바탕"/>
+              <a:t>캘린더 (예정 vs 실제, 연장 · 대타)</a:t>
+            </a:r>
+            <a:endParaRPr lang="en-US" sz="1150" dirty="0"/>
+          </a:p>
+        </p:txBody>
+      </p:sp>
+      <p:sp>
+        <p:nvSpPr>
+          <p:cNvPr id="18" name="캘린더 (예정 vs 실제, 연장 · 대타) 바탕"/>
           <p:cNvSpPr/>
           <p:nvPr/>
         </p:nvSpPr>
         <p:spPr>
           <a:xfrm>
-            <a:off x="4160520" y="1773936"/>
-            <a:ext cx="1280160" cy="128016"/>
+            <a:off x="3931920" y="1810512"/>
+            <a:ext cx="1371600" cy="128016"/>
           </a:xfrm>
           <a:prstGeom prst="roundRect">
             <a:avLst>
@@ -5002,14 +5002,14 @@
       </p:sp>
       <p:sp>
         <p:nvSpPr>
-          <p:cNvPr id="19" name="캘린더 (예정 vs 실제, 연장 · 대타 · 합의 휴무) 진행"/>
+          <p:cNvPr id="19" name="캘린더 (예정 vs 실제, 연장 · 대타) 진행"/>
           <p:cNvSpPr/>
           <p:nvPr/>
         </p:nvSpPr>
         <p:spPr>
           <a:xfrm>
-            <a:off x="4160520" y="1773936"/>
-            <a:ext cx="1088136" cy="128016"/>
+            <a:off x="3931920" y="1810512"/>
+            <a:ext cx="1165860" cy="128016"/>
           </a:xfrm>
           <a:prstGeom prst="roundRect">
             <a:avLst>
@@ -5035,8 +5035,8 @@
         </p:nvSpPr>
         <p:spPr>
           <a:xfrm>
-            <a:off x="5495544" y="1645920"/>
-            <a:ext cx="411480" cy="384048"/>
+            <a:off x="5358384" y="1682496"/>
+            <a:ext cx="457200" cy="384048"/>
           </a:xfrm>
           <a:prstGeom prst="rect">
             <a:avLst/>
@@ -5052,27 +5052,27 @@
               <a:buNone/>
             </a:pPr>
             <a:r>
-              <a:rPr lang="en-US" sz="1000" b="1" dirty="0">
+              <a:rPr lang="en-US" sz="1100" b="1" dirty="0">
                 <a:solidFill>
                   <a:schemeClr val="tx2"/>
                 </a:solidFill>
               </a:rPr>
               <a:t>85%</a:t>
             </a:r>
-            <a:endParaRPr lang="en-US" sz="1000" dirty="0"/>
-          </a:p>
-        </p:txBody>
-      </p:sp>
-      <p:sp>
-        <p:nvSpPr>
-          <p:cNvPr id="21" name="캘린더 (예정 vs 실제, 연장 · 대타 · 합의 휴무) 확인 0"/>
+            <a:endParaRPr lang="en-US" sz="1100" dirty="0"/>
+          </a:p>
+        </p:txBody>
+      </p:sp>
+      <p:sp>
+        <p:nvSpPr>
+          <p:cNvPr id="21" name="캘린더 (예정 vs 실제, 연장 · 대타) 확인 0"/>
           <p:cNvSpPr/>
           <p:nvPr/>
         </p:nvSpPr>
         <p:spPr>
           <a:xfrm>
-            <a:off x="6044184" y="1755648"/>
-            <a:ext cx="164592" cy="164592"/>
+            <a:off x="5998464" y="1783080"/>
+            <a:ext cx="182880" cy="182880"/>
           </a:xfrm>
           <a:prstGeom prst="ellipse">
             <a:avLst/>
@@ -5090,14 +5090,14 @@
       </p:sp>
       <p:sp>
         <p:nvSpPr>
-          <p:cNvPr id="22" name="캘린더 (예정 vs 실제, 연장 · 대타 · 합의 휴무) 확인 1"/>
+          <p:cNvPr id="22" name="캘린더 (예정 vs 실제, 연장 · 대타) 확인 1"/>
           <p:cNvSpPr/>
           <p:nvPr/>
         </p:nvSpPr>
         <p:spPr>
           <a:xfrm>
-            <a:off x="6318504" y="1755648"/>
-            <a:ext cx="164592" cy="164592"/>
+            <a:off x="6291072" y="1783080"/>
+            <a:ext cx="182880" cy="182880"/>
           </a:xfrm>
           <a:prstGeom prst="ellipse">
             <a:avLst/>
@@ -5115,14 +5115,14 @@
       </p:sp>
       <p:sp>
         <p:nvSpPr>
-          <p:cNvPr id="23" name="캘린더 (예정 vs 실제, 연장 · 대타 · 합의 휴무) 확인 2"/>
+          <p:cNvPr id="23" name="캘린더 (예정 vs 실제, 연장 · 대타) 확인 2"/>
           <p:cNvSpPr/>
           <p:nvPr/>
         </p:nvSpPr>
         <p:spPr>
           <a:xfrm>
-            <a:off x="6592824" y="1755648"/>
-            <a:ext cx="164592" cy="164592"/>
+            <a:off x="6583680" y="1783080"/>
+            <a:ext cx="182880" cy="182880"/>
           </a:xfrm>
           <a:prstGeom prst="ellipse">
             <a:avLst/>
@@ -5146,7 +5146,7 @@
         </p:nvSpPr>
         <p:spPr>
           <a:xfrm>
-            <a:off x="6903720" y="1645920"/>
+            <a:off x="6903720" y="1682496"/>
             <a:ext cx="1783080" cy="384048"/>
           </a:xfrm>
           <a:prstGeom prst="rect">
@@ -5163,14 +5163,14 @@
               <a:buNone/>
             </a:pPr>
             <a:r>
-              <a:rPr lang="en-US" sz="850" dirty="0">
+              <a:rPr lang="en-US" sz="1050" dirty="0">
                 <a:solidFill>
                   <a:schemeClr val="accent5"/>
                 </a:solidFill>
               </a:rPr>
-              <a:t>반복 스케줄 입력 편의</a:t>
-            </a:r>
-            <a:endParaRPr lang="en-US" sz="850" dirty="0"/>
+              <a:t>반복 스케줄 입력</a:t>
+            </a:r>
+            <a:endParaRPr lang="en-US" sz="1050" dirty="0"/>
           </a:p>
         </p:txBody>
       </p:sp>
@@ -5182,7 +5182,7 @@
         </p:nvSpPr>
         <p:spPr>
           <a:xfrm>
-            <a:off x="457200" y="2029968"/>
+            <a:off x="457200" y="2066544"/>
             <a:ext cx="8229600" cy="0"/>
           </a:xfrm>
           <a:prstGeom prst="line">
@@ -5205,8 +5205,8 @@
         </p:nvSpPr>
         <p:spPr>
           <a:xfrm>
-            <a:off x="457200" y="2029968"/>
-            <a:ext cx="3611880" cy="384048"/>
+            <a:off x="457200" y="2066544"/>
+            <a:ext cx="3383280" cy="384048"/>
           </a:xfrm>
           <a:prstGeom prst="rect">
             <a:avLst/>
@@ -5222,27 +5222,27 @@
               <a:buNone/>
             </a:pPr>
             <a:r>
-              <a:rPr lang="en-US" sz="1000" dirty="0">
+              <a:rPr lang="en-US" sz="1150" dirty="0">
                 <a:solidFill>
                   <a:schemeClr val="tx1"/>
                 </a:solidFill>
               </a:rPr>
-              <a:t>급여 계산 (주휴 · 야간 · 휴게 · 시급 이력 · 연도별 최저임금)</a:t>
-            </a:r>
-            <a:endParaRPr lang="en-US" sz="1000" dirty="0"/>
-          </a:p>
-        </p:txBody>
-      </p:sp>
-      <p:sp>
-        <p:nvSpPr>
-          <p:cNvPr id="27" name="급여 계산 (주휴 · 야간 · 휴게 · 시급 이력 · 연도별 최저임금) 바탕"/>
+              <a:t>급여 계산 (주휴 · 야간 · 최저임금)</a:t>
+            </a:r>
+            <a:endParaRPr lang="en-US" sz="1150" dirty="0"/>
+          </a:p>
+        </p:txBody>
+      </p:sp>
+      <p:sp>
+        <p:nvSpPr>
+          <p:cNvPr id="27" name="급여 계산 (주휴 · 야간 · 최저임금) 바탕"/>
           <p:cNvSpPr/>
           <p:nvPr/>
         </p:nvSpPr>
         <p:spPr>
           <a:xfrm>
-            <a:off x="4160520" y="2157984"/>
-            <a:ext cx="1280160" cy="128016"/>
+            <a:off x="3931920" y="2194560"/>
+            <a:ext cx="1371600" cy="128016"/>
           </a:xfrm>
           <a:prstGeom prst="roundRect">
             <a:avLst>
@@ -5262,14 +5262,14 @@
       </p:sp>
       <p:sp>
         <p:nvSpPr>
-          <p:cNvPr id="28" name="급여 계산 (주휴 · 야간 · 휴게 · 시급 이력 · 연도별 최저임금) 진행"/>
+          <p:cNvPr id="28" name="급여 계산 (주휴 · 야간 · 최저임금) 진행"/>
           <p:cNvSpPr/>
           <p:nvPr/>
         </p:nvSpPr>
         <p:spPr>
           <a:xfrm>
-            <a:off x="4160520" y="2157984"/>
-            <a:ext cx="1088136" cy="128016"/>
+            <a:off x="3931920" y="2194560"/>
+            <a:ext cx="1165860" cy="128016"/>
           </a:xfrm>
           <a:prstGeom prst="roundRect">
             <a:avLst>
@@ -5295,8 +5295,8 @@
         </p:nvSpPr>
         <p:spPr>
           <a:xfrm>
-            <a:off x="5495544" y="2029968"/>
-            <a:ext cx="411480" cy="384048"/>
+            <a:off x="5358384" y="2066544"/>
+            <a:ext cx="457200" cy="384048"/>
           </a:xfrm>
           <a:prstGeom prst="rect">
             <a:avLst/>
@@ -5312,27 +5312,27 @@
               <a:buNone/>
             </a:pPr>
             <a:r>
-              <a:rPr lang="en-US" sz="1000" b="1" dirty="0">
+              <a:rPr lang="en-US" sz="1100" b="1" dirty="0">
                 <a:solidFill>
                   <a:schemeClr val="tx2"/>
                 </a:solidFill>
               </a:rPr>
               <a:t>85%</a:t>
             </a:r>
-            <a:endParaRPr lang="en-US" sz="1000" dirty="0"/>
-          </a:p>
-        </p:txBody>
-      </p:sp>
-      <p:sp>
-        <p:nvSpPr>
-          <p:cNvPr id="30" name="급여 계산 (주휴 · 야간 · 휴게 · 시급 이력 · 연도별 최저임금) 확인 0"/>
+            <a:endParaRPr lang="en-US" sz="1100" dirty="0"/>
+          </a:p>
+        </p:txBody>
+      </p:sp>
+      <p:sp>
+        <p:nvSpPr>
+          <p:cNvPr id="30" name="급여 계산 (주휴 · 야간 · 최저임금) 확인 0"/>
           <p:cNvSpPr/>
           <p:nvPr/>
         </p:nvSpPr>
         <p:spPr>
           <a:xfrm>
-            <a:off x="6044184" y="2139696"/>
-            <a:ext cx="164592" cy="164592"/>
+            <a:off x="5998464" y="2167128"/>
+            <a:ext cx="182880" cy="182880"/>
           </a:xfrm>
           <a:prstGeom prst="ellipse">
             <a:avLst/>
@@ -5350,14 +5350,14 @@
       </p:sp>
       <p:sp>
         <p:nvSpPr>
-          <p:cNvPr id="31" name="급여 계산 (주휴 · 야간 · 휴게 · 시급 이력 · 연도별 최저임금) 확인 1"/>
+          <p:cNvPr id="31" name="급여 계산 (주휴 · 야간 · 최저임금) 확인 1"/>
           <p:cNvSpPr/>
           <p:nvPr/>
         </p:nvSpPr>
         <p:spPr>
           <a:xfrm>
-            <a:off x="6318504" y="2139696"/>
-            <a:ext cx="164592" cy="164592"/>
+            <a:off x="6291072" y="2167128"/>
+            <a:ext cx="182880" cy="182880"/>
           </a:xfrm>
           <a:prstGeom prst="ellipse">
             <a:avLst/>
@@ -5375,14 +5375,14 @@
       </p:sp>
       <p:sp>
         <p:nvSpPr>
-          <p:cNvPr id="32" name="급여 계산 (주휴 · 야간 · 휴게 · 시급 이력 · 연도별 최저임금) 확인 2"/>
+          <p:cNvPr id="32" name="급여 계산 (주휴 · 야간 · 최저임금) 확인 2"/>
           <p:cNvSpPr/>
           <p:nvPr/>
         </p:nvSpPr>
         <p:spPr>
           <a:xfrm>
-            <a:off x="6592824" y="2139696"/>
-            <a:ext cx="164592" cy="164592"/>
+            <a:off x="6583680" y="2167128"/>
+            <a:ext cx="182880" cy="182880"/>
           </a:xfrm>
           <a:prstGeom prst="ellipse">
             <a:avLst/>
@@ -5406,7 +5406,7 @@
         </p:nvSpPr>
         <p:spPr>
           <a:xfrm>
-            <a:off x="6903720" y="2029968"/>
+            <a:off x="6903720" y="2066544"/>
             <a:ext cx="1783080" cy="384048"/>
           </a:xfrm>
           <a:prstGeom prst="rect">
@@ -5423,14 +5423,14 @@
               <a:buNone/>
             </a:pPr>
             <a:r>
-              <a:rPr lang="en-US" sz="850" dirty="0">
+              <a:rPr lang="en-US" sz="1050" dirty="0">
                 <a:solidFill>
                   <a:schemeClr val="accent5"/>
                 </a:solidFill>
               </a:rPr>
-              <a:t>연장근로 가산 미반영</a:t>
-            </a:r>
-            <a:endParaRPr lang="en-US" sz="850" dirty="0"/>
+              <a:t>연장근로 가산</a:t>
+            </a:r>
+            <a:endParaRPr lang="en-US" sz="1050" dirty="0"/>
           </a:p>
         </p:txBody>
       </p:sp>
@@ -5442,7 +5442,7 @@
         </p:nvSpPr>
         <p:spPr>
           <a:xfrm>
-            <a:off x="457200" y="2414016"/>
+            <a:off x="457200" y="2450592"/>
             <a:ext cx="8229600" cy="0"/>
           </a:xfrm>
           <a:prstGeom prst="line">
@@ -5465,8 +5465,8 @@
         </p:nvSpPr>
         <p:spPr>
           <a:xfrm>
-            <a:off x="457200" y="2414016"/>
-            <a:ext cx="3611880" cy="384048"/>
+            <a:off x="457200" y="2450592"/>
+            <a:ext cx="3383280" cy="384048"/>
           </a:xfrm>
           <a:prstGeom prst="rect">
             <a:avLst/>
@@ -5482,27 +5482,27 @@
               <a:buNone/>
             </a:pPr>
             <a:r>
-              <a:rPr lang="en-US" sz="1000" dirty="0">
+              <a:rPr lang="en-US" sz="1150" dirty="0">
                 <a:solidFill>
                   <a:schemeClr val="tx1"/>
                 </a:solidFill>
               </a:rPr>
-              <a:t>입금액 비교 · 차액 알림 (여러 달 합계, 3.3% 세금)</a:t>
-            </a:r>
-            <a:endParaRPr lang="en-US" sz="1000" dirty="0"/>
-          </a:p>
-        </p:txBody>
-      </p:sp>
-      <p:sp>
-        <p:nvSpPr>
-          <p:cNvPr id="36" name="입금액 비교 · 차액 알림 (여러 달 합계, 3.3% 세금) 바탕"/>
+              <a:t>입금액 비교 · 차액 알림</a:t>
+            </a:r>
+            <a:endParaRPr lang="en-US" sz="1150" dirty="0"/>
+          </a:p>
+        </p:txBody>
+      </p:sp>
+      <p:sp>
+        <p:nvSpPr>
+          <p:cNvPr id="36" name="입금액 비교 · 차액 알림 바탕"/>
           <p:cNvSpPr/>
           <p:nvPr/>
         </p:nvSpPr>
         <p:spPr>
           <a:xfrm>
-            <a:off x="4160520" y="2542032"/>
-            <a:ext cx="1280160" cy="128016"/>
+            <a:off x="3931920" y="2578608"/>
+            <a:ext cx="1371600" cy="128016"/>
           </a:xfrm>
           <a:prstGeom prst="roundRect">
             <a:avLst>
@@ -5522,14 +5522,14 @@
       </p:sp>
       <p:sp>
         <p:nvSpPr>
-          <p:cNvPr id="37" name="입금액 비교 · 차액 알림 (여러 달 합계, 3.3% 세금) 진행"/>
+          <p:cNvPr id="37" name="입금액 비교 · 차액 알림 진행"/>
           <p:cNvSpPr/>
           <p:nvPr/>
         </p:nvSpPr>
         <p:spPr>
           <a:xfrm>
-            <a:off x="4160520" y="2542032"/>
-            <a:ext cx="1024128" cy="128016"/>
+            <a:off x="3931920" y="2578608"/>
+            <a:ext cx="1097280" cy="128016"/>
           </a:xfrm>
           <a:prstGeom prst="roundRect">
             <a:avLst>
@@ -5555,8 +5555,8 @@
         </p:nvSpPr>
         <p:spPr>
           <a:xfrm>
-            <a:off x="5495544" y="2414016"/>
-            <a:ext cx="411480" cy="384048"/>
+            <a:off x="5358384" y="2450592"/>
+            <a:ext cx="457200" cy="384048"/>
           </a:xfrm>
           <a:prstGeom prst="rect">
             <a:avLst/>
@@ -5572,27 +5572,27 @@
               <a:buNone/>
             </a:pPr>
             <a:r>
-              <a:rPr lang="en-US" sz="1000" b="1" dirty="0">
+              <a:rPr lang="en-US" sz="1100" b="1" dirty="0">
                 <a:solidFill>
                   <a:schemeClr val="tx2"/>
                 </a:solidFill>
               </a:rPr>
               <a:t>80%</a:t>
             </a:r>
-            <a:endParaRPr lang="en-US" sz="1000" dirty="0"/>
-          </a:p>
-        </p:txBody>
-      </p:sp>
-      <p:sp>
-        <p:nvSpPr>
-          <p:cNvPr id="39" name="입금액 비교 · 차액 알림 (여러 달 합계, 3.3% 세금) 확인 0"/>
+            <a:endParaRPr lang="en-US" sz="1100" dirty="0"/>
+          </a:p>
+        </p:txBody>
+      </p:sp>
+      <p:sp>
+        <p:nvSpPr>
+          <p:cNvPr id="39" name="입금액 비교 · 차액 알림 확인 0"/>
           <p:cNvSpPr/>
           <p:nvPr/>
         </p:nvSpPr>
         <p:spPr>
           <a:xfrm>
-            <a:off x="6044184" y="2523744"/>
-            <a:ext cx="164592" cy="164592"/>
+            <a:off x="5998464" y="2551176"/>
+            <a:ext cx="182880" cy="182880"/>
           </a:xfrm>
           <a:prstGeom prst="ellipse">
             <a:avLst/>
@@ -5610,14 +5610,14 @@
       </p:sp>
       <p:sp>
         <p:nvSpPr>
-          <p:cNvPr id="40" name="입금액 비교 · 차액 알림 (여러 달 합계, 3.3% 세금) 확인 1"/>
+          <p:cNvPr id="40" name="입금액 비교 · 차액 알림 확인 1"/>
           <p:cNvSpPr/>
           <p:nvPr/>
         </p:nvSpPr>
         <p:spPr>
           <a:xfrm>
-            <a:off x="6318504" y="2523744"/>
-            <a:ext cx="164592" cy="164592"/>
+            <a:off x="6291072" y="2551176"/>
+            <a:ext cx="182880" cy="182880"/>
           </a:xfrm>
           <a:prstGeom prst="ellipse">
             <a:avLst/>
@@ -5635,14 +5635,14 @@
       </p:sp>
       <p:sp>
         <p:nvSpPr>
-          <p:cNvPr id="41" name="입금액 비교 · 차액 알림 (여러 달 합계, 3.3% 세금) 확인 2"/>
+          <p:cNvPr id="41" name="입금액 비교 · 차액 알림 확인 2"/>
           <p:cNvSpPr/>
           <p:nvPr/>
         </p:nvSpPr>
         <p:spPr>
           <a:xfrm>
-            <a:off x="6592824" y="2523744"/>
-            <a:ext cx="164592" cy="164592"/>
+            <a:off x="6583680" y="2551176"/>
+            <a:ext cx="182880" cy="182880"/>
           </a:xfrm>
           <a:prstGeom prst="ellipse">
             <a:avLst/>
@@ -5666,7 +5666,7 @@
         </p:nvSpPr>
         <p:spPr>
           <a:xfrm>
-            <a:off x="6903720" y="2414016"/>
+            <a:off x="6903720" y="2450592"/>
             <a:ext cx="1783080" cy="384048"/>
           </a:xfrm>
           <a:prstGeom prst="rect">
@@ -5683,14 +5683,14 @@
               <a:buNone/>
             </a:pPr>
             <a:r>
-              <a:rPr lang="en-US" sz="850" dirty="0">
+              <a:rPr lang="en-US" sz="1050" dirty="0">
                 <a:solidFill>
                   <a:schemeClr val="accent5"/>
                 </a:solidFill>
               </a:rPr>
-              <a:t>입금 문자 · 명세서 사진 자동 인식은 보류</a:t>
-            </a:r>
-            <a:endParaRPr lang="en-US" sz="850" dirty="0"/>
+              <a:t>사진 자동 인식(보류)</a:t>
+            </a:r>
+            <a:endParaRPr lang="en-US" sz="1050" dirty="0"/>
           </a:p>
         </p:txBody>
       </p:sp>
@@ -5702,7 +5702,7 @@
         </p:nvSpPr>
         <p:spPr>
           <a:xfrm>
-            <a:off x="457200" y="2798064"/>
+            <a:off x="457200" y="2834640"/>
             <a:ext cx="8229600" cy="0"/>
           </a:xfrm>
           <a:prstGeom prst="line">
@@ -5725,8 +5725,8 @@
         </p:nvSpPr>
         <p:spPr>
           <a:xfrm>
-            <a:off x="457200" y="2798064"/>
-            <a:ext cx="3611880" cy="384048"/>
+            <a:off x="457200" y="2834640"/>
+            <a:ext cx="3383280" cy="384048"/>
           </a:xfrm>
           <a:prstGeom prst="rect">
             <a:avLst/>
@@ -5742,27 +5742,27 @@
               <a:buNone/>
             </a:pPr>
             <a:r>
-              <a:rPr lang="en-US" sz="1000" dirty="0">
+              <a:rPr lang="en-US" sz="1150" dirty="0">
                 <a:solidFill>
                   <a:schemeClr val="tx1"/>
                 </a:solidFill>
               </a:rPr>
-              <a:t>단계별 정산 요청 (메시지 · 내용증명 · 진정 안내, 보낸 날짜)</a:t>
-            </a:r>
-            <a:endParaRPr lang="en-US" sz="1000" dirty="0"/>
-          </a:p>
-        </p:txBody>
-      </p:sp>
-      <p:sp>
-        <p:nvSpPr>
-          <p:cNvPr id="45" name="단계별 정산 요청 (메시지 · 내용증명 · 진정 안내, 보낸 날짜) 바탕"/>
+              <a:t>단계별 정산 요청</a:t>
+            </a:r>
+            <a:endParaRPr lang="en-US" sz="1150" dirty="0"/>
+          </a:p>
+        </p:txBody>
+      </p:sp>
+      <p:sp>
+        <p:nvSpPr>
+          <p:cNvPr id="45" name="단계별 정산 요청 바탕"/>
           <p:cNvSpPr/>
           <p:nvPr/>
         </p:nvSpPr>
         <p:spPr>
           <a:xfrm>
-            <a:off x="4160520" y="2926080"/>
-            <a:ext cx="1280160" cy="128016"/>
+            <a:off x="3931920" y="2962656"/>
+            <a:ext cx="1371600" cy="128016"/>
           </a:xfrm>
           <a:prstGeom prst="roundRect">
             <a:avLst>
@@ -5782,14 +5782,14 @@
       </p:sp>
       <p:sp>
         <p:nvSpPr>
-          <p:cNvPr id="46" name="단계별 정산 요청 (메시지 · 내용증명 · 진정 안내, 보낸 날짜) 진행"/>
+          <p:cNvPr id="46" name="단계별 정산 요청 진행"/>
           <p:cNvSpPr/>
           <p:nvPr/>
         </p:nvSpPr>
         <p:spPr>
           <a:xfrm>
-            <a:off x="4160520" y="2926080"/>
-            <a:ext cx="960120" cy="128016"/>
+            <a:off x="3931920" y="2962656"/>
+            <a:ext cx="1028700" cy="128016"/>
           </a:xfrm>
           <a:prstGeom prst="roundRect">
             <a:avLst>
@@ -5815,8 +5815,8 @@
         </p:nvSpPr>
         <p:spPr>
           <a:xfrm>
-            <a:off x="5495544" y="2798064"/>
-            <a:ext cx="411480" cy="384048"/>
+            <a:off x="5358384" y="2834640"/>
+            <a:ext cx="457200" cy="384048"/>
           </a:xfrm>
           <a:prstGeom prst="rect">
             <a:avLst/>
@@ -5832,27 +5832,27 @@
               <a:buNone/>
             </a:pPr>
             <a:r>
-              <a:rPr lang="en-US" sz="1000" b="1" dirty="0">
+              <a:rPr lang="en-US" sz="1100" b="1" dirty="0">
                 <a:solidFill>
                   <a:schemeClr val="tx2"/>
                 </a:solidFill>
               </a:rPr>
               <a:t>75%</a:t>
             </a:r>
-            <a:endParaRPr lang="en-US" sz="1000" dirty="0"/>
-          </a:p>
-        </p:txBody>
-      </p:sp>
-      <p:sp>
-        <p:nvSpPr>
-          <p:cNvPr id="48" name="단계별 정산 요청 (메시지 · 내용증명 · 진정 안내, 보낸 날짜) 확인 0"/>
+            <a:endParaRPr lang="en-US" sz="1100" dirty="0"/>
+          </a:p>
+        </p:txBody>
+      </p:sp>
+      <p:sp>
+        <p:nvSpPr>
+          <p:cNvPr id="48" name="단계별 정산 요청 확인 0"/>
           <p:cNvSpPr/>
           <p:nvPr/>
         </p:nvSpPr>
         <p:spPr>
           <a:xfrm>
-            <a:off x="6044184" y="2907792"/>
-            <a:ext cx="164592" cy="164592"/>
+            <a:off x="5998464" y="2935224"/>
+            <a:ext cx="182880" cy="182880"/>
           </a:xfrm>
           <a:prstGeom prst="ellipse">
             <a:avLst/>
@@ -5870,14 +5870,14 @@
       </p:sp>
       <p:sp>
         <p:nvSpPr>
-          <p:cNvPr id="49" name="단계별 정산 요청 (메시지 · 내용증명 · 진정 안내, 보낸 날짜) 확인 1"/>
+          <p:cNvPr id="49" name="단계별 정산 요청 확인 1"/>
           <p:cNvSpPr/>
           <p:nvPr/>
         </p:nvSpPr>
         <p:spPr>
           <a:xfrm>
-            <a:off x="6318504" y="2907792"/>
-            <a:ext cx="164592" cy="164592"/>
+            <a:off x="6291072" y="2935224"/>
+            <a:ext cx="182880" cy="182880"/>
           </a:xfrm>
           <a:prstGeom prst="ellipse">
             <a:avLst/>
@@ -5895,14 +5895,14 @@
       </p:sp>
       <p:sp>
         <p:nvSpPr>
-          <p:cNvPr id="50" name="단계별 정산 요청 (메시지 · 내용증명 · 진정 안내, 보낸 날짜) 확인 2"/>
+          <p:cNvPr id="50" name="단계별 정산 요청 확인 2"/>
           <p:cNvSpPr/>
           <p:nvPr/>
         </p:nvSpPr>
         <p:spPr>
           <a:xfrm>
-            <a:off x="6592824" y="2907792"/>
-            <a:ext cx="164592" cy="164592"/>
+            <a:off x="6583680" y="2935224"/>
+            <a:ext cx="182880" cy="182880"/>
           </a:xfrm>
           <a:prstGeom prst="ellipse">
             <a:avLst/>
@@ -5926,7 +5926,7 @@
         </p:nvSpPr>
         <p:spPr>
           <a:xfrm>
-            <a:off x="6903720" y="2798064"/>
+            <a:off x="6903720" y="2834640"/>
             <a:ext cx="1783080" cy="384048"/>
           </a:xfrm>
           <a:prstGeom prst="rect">
@@ -5943,14 +5943,14 @@
               <a:buNone/>
             </a:pPr>
             <a:r>
-              <a:rPr lang="en-US" sz="850" dirty="0">
+              <a:rPr lang="en-US" sz="1050" dirty="0">
                 <a:solidFill>
                   <a:schemeClr val="accent5"/>
                 </a:solidFill>
               </a:rPr>
-              <a:t>문구 톤 사용자 검증, AI 문구는 선택</a:t>
-            </a:r>
-            <a:endParaRPr lang="en-US" sz="850" dirty="0"/>
+              <a:t>문구 톤 사용자 검증</a:t>
+            </a:r>
+            <a:endParaRPr lang="en-US" sz="1050" dirty="0"/>
           </a:p>
         </p:txBody>
       </p:sp>
@@ -5962,7 +5962,7 @@
         </p:nvSpPr>
         <p:spPr>
           <a:xfrm>
-            <a:off x="457200" y="3182112"/>
+            <a:off x="457200" y="3218688"/>
             <a:ext cx="8229600" cy="0"/>
           </a:xfrm>
           <a:prstGeom prst="line">
@@ -5985,8 +5985,8 @@
         </p:nvSpPr>
         <p:spPr>
           <a:xfrm>
-            <a:off x="457200" y="3182112"/>
-            <a:ext cx="3611880" cy="384048"/>
+            <a:off x="457200" y="3218688"/>
+            <a:ext cx="3383280" cy="384048"/>
           </a:xfrm>
           <a:prstGeom prst="rect">
             <a:avLst/>
@@ -6002,27 +6002,27 @@
               <a:buNone/>
             </a:pPr>
             <a:r>
-              <a:rPr lang="en-US" sz="1000" dirty="0">
+              <a:rPr lang="en-US" sz="1150" dirty="0">
                 <a:solidFill>
                   <a:schemeClr val="tx1"/>
                 </a:solidFill>
               </a:rPr>
-              <a:t>증빙 묶음 PDF (7개 항목, 첨부 사진)</a:t>
-            </a:r>
-            <a:endParaRPr lang="en-US" sz="1000" dirty="0"/>
-          </a:p>
-        </p:txBody>
-      </p:sp>
-      <p:sp>
-        <p:nvSpPr>
-          <p:cNvPr id="54" name="증빙 묶음 PDF (7개 항목, 첨부 사진) 바탕"/>
+              <a:t>증빙 묶음 PDF</a:t>
+            </a:r>
+            <a:endParaRPr lang="en-US" sz="1150" dirty="0"/>
+          </a:p>
+        </p:txBody>
+      </p:sp>
+      <p:sp>
+        <p:nvSpPr>
+          <p:cNvPr id="54" name="증빙 묶음 PDF 바탕"/>
           <p:cNvSpPr/>
           <p:nvPr/>
         </p:nvSpPr>
         <p:spPr>
           <a:xfrm>
-            <a:off x="4160520" y="3310128"/>
-            <a:ext cx="1280160" cy="128016"/>
+            <a:off x="3931920" y="3346704"/>
+            <a:ext cx="1371600" cy="128016"/>
           </a:xfrm>
           <a:prstGeom prst="roundRect">
             <a:avLst>
@@ -6042,14 +6042,14 @@
       </p:sp>
       <p:sp>
         <p:nvSpPr>
-          <p:cNvPr id="55" name="증빙 묶음 PDF (7개 항목, 첨부 사진) 진행"/>
+          <p:cNvPr id="55" name="증빙 묶음 PDF 진행"/>
           <p:cNvSpPr/>
           <p:nvPr/>
         </p:nvSpPr>
         <p:spPr>
           <a:xfrm>
-            <a:off x="4160520" y="3310128"/>
-            <a:ext cx="1024128" cy="128016"/>
+            <a:off x="3931920" y="3346704"/>
+            <a:ext cx="1097280" cy="128016"/>
           </a:xfrm>
           <a:prstGeom prst="roundRect">
             <a:avLst>
@@ -6075,8 +6075,8 @@
         </p:nvSpPr>
         <p:spPr>
           <a:xfrm>
-            <a:off x="5495544" y="3182112"/>
-            <a:ext cx="411480" cy="384048"/>
+            <a:off x="5358384" y="3218688"/>
+            <a:ext cx="457200" cy="384048"/>
           </a:xfrm>
           <a:prstGeom prst="rect">
             <a:avLst/>
@@ -6092,27 +6092,27 @@
               <a:buNone/>
             </a:pPr>
             <a:r>
-              <a:rPr lang="en-US" sz="1000" b="1" dirty="0">
+              <a:rPr lang="en-US" sz="1100" b="1" dirty="0">
                 <a:solidFill>
                   <a:schemeClr val="tx2"/>
                 </a:solidFill>
               </a:rPr>
               <a:t>80%</a:t>
             </a:r>
-            <a:endParaRPr lang="en-US" sz="1000" dirty="0"/>
-          </a:p>
-        </p:txBody>
-      </p:sp>
-      <p:sp>
-        <p:nvSpPr>
-          <p:cNvPr id="57" name="증빙 묶음 PDF (7개 항목, 첨부 사진) 확인 0"/>
+            <a:endParaRPr lang="en-US" sz="1100" dirty="0"/>
+          </a:p>
+        </p:txBody>
+      </p:sp>
+      <p:sp>
+        <p:nvSpPr>
+          <p:cNvPr id="57" name="증빙 묶음 PDF 확인 0"/>
           <p:cNvSpPr/>
           <p:nvPr/>
         </p:nvSpPr>
         <p:spPr>
           <a:xfrm>
-            <a:off x="6044184" y="3291840"/>
-            <a:ext cx="164592" cy="164592"/>
+            <a:off x="5998464" y="3319272"/>
+            <a:ext cx="182880" cy="182880"/>
           </a:xfrm>
           <a:prstGeom prst="ellipse">
             <a:avLst/>
@@ -6130,14 +6130,14 @@
       </p:sp>
       <p:sp>
         <p:nvSpPr>
-          <p:cNvPr id="58" name="증빙 묶음 PDF (7개 항목, 첨부 사진) 확인 1"/>
+          <p:cNvPr id="58" name="증빙 묶음 PDF 확인 1"/>
           <p:cNvSpPr/>
           <p:nvPr/>
         </p:nvSpPr>
         <p:spPr>
           <a:xfrm>
-            <a:off x="6318504" y="3291840"/>
-            <a:ext cx="164592" cy="164592"/>
+            <a:off x="6291072" y="3319272"/>
+            <a:ext cx="182880" cy="182880"/>
           </a:xfrm>
           <a:prstGeom prst="ellipse">
             <a:avLst/>
@@ -6155,14 +6155,14 @@
       </p:sp>
       <p:sp>
         <p:nvSpPr>
-          <p:cNvPr id="59" name="증빙 묶음 PDF (7개 항목, 첨부 사진) 확인 2"/>
+          <p:cNvPr id="59" name="증빙 묶음 PDF 확인 2"/>
           <p:cNvSpPr/>
           <p:nvPr/>
         </p:nvSpPr>
         <p:spPr>
           <a:xfrm>
-            <a:off x="6592824" y="3291840"/>
-            <a:ext cx="164592" cy="164592"/>
+            <a:off x="6583680" y="3319272"/>
+            <a:ext cx="182880" cy="182880"/>
           </a:xfrm>
           <a:prstGeom prst="ellipse">
             <a:avLst/>
@@ -6186,7 +6186,7 @@
         </p:nvSpPr>
         <p:spPr>
           <a:xfrm>
-            <a:off x="6903720" y="3182112"/>
+            <a:off x="6903720" y="3218688"/>
             <a:ext cx="1783080" cy="384048"/>
           </a:xfrm>
           <a:prstGeom prst="rect">
@@ -6203,14 +6203,14 @@
               <a:buNone/>
             </a:pPr>
             <a:r>
-              <a:rPr lang="en-US" sz="850" dirty="0">
+              <a:rPr lang="en-US" sz="1050" dirty="0">
                 <a:solidFill>
                   <a:schemeClr val="accent5"/>
                 </a:solidFill>
               </a:rPr>
-              <a:t>실제 폰에서 PDF 저장 확인</a:t>
-            </a:r>
-            <a:endParaRPr lang="en-US" sz="850" dirty="0"/>
+              <a:t>폰에서 PDF 저장</a:t>
+            </a:r>
+            <a:endParaRPr lang="en-US" sz="1050" dirty="0"/>
           </a:p>
         </p:txBody>
       </p:sp>
@@ -6222,7 +6222,7 @@
         </p:nvSpPr>
         <p:spPr>
           <a:xfrm>
-            <a:off x="457200" y="3566160"/>
+            <a:off x="457200" y="3602736"/>
             <a:ext cx="8229600" cy="0"/>
           </a:xfrm>
           <a:prstGeom prst="line">
@@ -6245,8 +6245,8 @@
         </p:nvSpPr>
         <p:spPr>
           <a:xfrm>
-            <a:off x="457200" y="3566160"/>
-            <a:ext cx="3611880" cy="384048"/>
+            <a:off x="457200" y="3602736"/>
+            <a:ext cx="3383280" cy="384048"/>
           </a:xfrm>
           <a:prstGeom prst="rect">
             <a:avLst/>
@@ -6262,27 +6262,27 @@
               <a:buNone/>
             </a:pPr>
             <a:r>
-              <a:rPr lang="en-US" sz="1000" dirty="0">
+              <a:rPr lang="en-US" sz="1150" dirty="0">
                 <a:solidFill>
                   <a:schemeClr val="tx1"/>
                 </a:solidFill>
               </a:rPr>
-              <a:t>기록 등록 (확인 번호 · 등록 시각, 확인 페이지)</a:t>
-            </a:r>
-            <a:endParaRPr lang="en-US" sz="1000" dirty="0"/>
-          </a:p>
-        </p:txBody>
-      </p:sp>
-      <p:sp>
-        <p:nvSpPr>
-          <p:cNvPr id="63" name="기록 등록 (확인 번호 · 등록 시각, 확인 페이지) 바탕"/>
+              <a:t>기록 등록 (확인 번호 · 등록 시각)</a:t>
+            </a:r>
+            <a:endParaRPr lang="en-US" sz="1150" dirty="0"/>
+          </a:p>
+        </p:txBody>
+      </p:sp>
+      <p:sp>
+        <p:nvSpPr>
+          <p:cNvPr id="63" name="기록 등록 (확인 번호 · 등록 시각) 바탕"/>
           <p:cNvSpPr/>
           <p:nvPr/>
         </p:nvSpPr>
         <p:spPr>
           <a:xfrm>
-            <a:off x="4160520" y="3694176"/>
-            <a:ext cx="1280160" cy="128016"/>
+            <a:off x="3931920" y="3730752"/>
+            <a:ext cx="1371600" cy="128016"/>
           </a:xfrm>
           <a:prstGeom prst="roundRect">
             <a:avLst>
@@ -6302,14 +6302,14 @@
       </p:sp>
       <p:sp>
         <p:nvSpPr>
-          <p:cNvPr id="64" name="기록 등록 (확인 번호 · 등록 시각, 확인 페이지) 진행"/>
+          <p:cNvPr id="64" name="기록 등록 (확인 번호 · 등록 시각) 진행"/>
           <p:cNvSpPr/>
           <p:nvPr/>
         </p:nvSpPr>
         <p:spPr>
           <a:xfrm>
-            <a:off x="4160520" y="3694176"/>
-            <a:ext cx="896112" cy="128016"/>
+            <a:off x="3931920" y="3730752"/>
+            <a:ext cx="960120" cy="128016"/>
           </a:xfrm>
           <a:prstGeom prst="roundRect">
             <a:avLst>
@@ -6335,8 +6335,8 @@
         </p:nvSpPr>
         <p:spPr>
           <a:xfrm>
-            <a:off x="5495544" y="3566160"/>
-            <a:ext cx="411480" cy="384048"/>
+            <a:off x="5358384" y="3602736"/>
+            <a:ext cx="457200" cy="384048"/>
           </a:xfrm>
           <a:prstGeom prst="rect">
             <a:avLst/>
@@ -6352,27 +6352,27 @@
               <a:buNone/>
             </a:pPr>
             <a:r>
-              <a:rPr lang="en-US" sz="1000" b="1" dirty="0">
+              <a:rPr lang="en-US" sz="1100" b="1" dirty="0">
                 <a:solidFill>
                   <a:schemeClr val="tx2"/>
                 </a:solidFill>
               </a:rPr>
               <a:t>70%</a:t>
             </a:r>
-            <a:endParaRPr lang="en-US" sz="1000" dirty="0"/>
-          </a:p>
-        </p:txBody>
-      </p:sp>
-      <p:sp>
-        <p:nvSpPr>
-          <p:cNvPr id="66" name="기록 등록 (확인 번호 · 등록 시각, 확인 페이지) 확인 0"/>
+            <a:endParaRPr lang="en-US" sz="1100" dirty="0"/>
+          </a:p>
+        </p:txBody>
+      </p:sp>
+      <p:sp>
+        <p:nvSpPr>
+          <p:cNvPr id="66" name="기록 등록 (확인 번호 · 등록 시각) 확인 0"/>
           <p:cNvSpPr/>
           <p:nvPr/>
         </p:nvSpPr>
         <p:spPr>
           <a:xfrm>
-            <a:off x="6044184" y="3675888"/>
-            <a:ext cx="164592" cy="164592"/>
+            <a:off x="5998464" y="3703320"/>
+            <a:ext cx="182880" cy="182880"/>
           </a:xfrm>
           <a:prstGeom prst="ellipse">
             <a:avLst/>
@@ -6390,14 +6390,14 @@
       </p:sp>
       <p:sp>
         <p:nvSpPr>
-          <p:cNvPr id="67" name="기록 등록 (확인 번호 · 등록 시각, 확인 페이지) 확인 1"/>
+          <p:cNvPr id="67" name="기록 등록 (확인 번호 · 등록 시각) 확인 1"/>
           <p:cNvSpPr/>
           <p:nvPr/>
         </p:nvSpPr>
         <p:spPr>
           <a:xfrm>
-            <a:off x="6318504" y="3675888"/>
-            <a:ext cx="164592" cy="164592"/>
+            <a:off x="6291072" y="3703320"/>
+            <a:ext cx="182880" cy="182880"/>
           </a:xfrm>
           <a:prstGeom prst="ellipse">
             <a:avLst/>
@@ -6415,14 +6415,14 @@
       </p:sp>
       <p:sp>
         <p:nvSpPr>
-          <p:cNvPr id="68" name="기록 등록 (확인 번호 · 등록 시각, 확인 페이지) 확인 2"/>
+          <p:cNvPr id="68" name="기록 등록 (확인 번호 · 등록 시각) 확인 2"/>
           <p:cNvSpPr/>
           <p:nvPr/>
         </p:nvSpPr>
         <p:spPr>
           <a:xfrm>
-            <a:off x="6592824" y="3675888"/>
-            <a:ext cx="164592" cy="164592"/>
+            <a:off x="6583680" y="3703320"/>
+            <a:ext cx="182880" cy="182880"/>
           </a:xfrm>
           <a:prstGeom prst="ellipse">
             <a:avLst/>
@@ -6446,7 +6446,7 @@
         </p:nvSpPr>
         <p:spPr>
           <a:xfrm>
-            <a:off x="6903720" y="3566160"/>
+            <a:off x="6903720" y="3602736"/>
             <a:ext cx="1783080" cy="384048"/>
           </a:xfrm>
           <a:prstGeom prst="rect">
@@ -6463,14 +6463,14 @@
               <a:buNone/>
             </a:pPr>
             <a:r>
-              <a:rPr lang="en-US" sz="850" dirty="0">
+              <a:rPr lang="en-US" sz="1050" dirty="0">
                 <a:solidFill>
                   <a:schemeClr val="accent5"/>
                 </a:solidFill>
               </a:rPr>
-              <a:t>제3자가 내용으로 번호를 다시 계산하는 방법</a:t>
-            </a:r>
-            <a:endParaRPr lang="en-US" sz="850" dirty="0"/>
+              <a:t>내용으로 번호 다시 계산</a:t>
+            </a:r>
+            <a:endParaRPr lang="en-US" sz="1050" dirty="0"/>
           </a:p>
         </p:txBody>
       </p:sp>
@@ -6482,7 +6482,7 @@
         </p:nvSpPr>
         <p:spPr>
           <a:xfrm>
-            <a:off x="457200" y="3950208"/>
+            <a:off x="457200" y="3986784"/>
             <a:ext cx="8229600" cy="0"/>
           </a:xfrm>
           <a:prstGeom prst="line">
@@ -6505,8 +6505,8 @@
         </p:nvSpPr>
         <p:spPr>
           <a:xfrm>
-            <a:off x="457200" y="3950208"/>
-            <a:ext cx="3611880" cy="384048"/>
+            <a:off x="457200" y="3986784"/>
+            <a:ext cx="3383280" cy="384048"/>
           </a:xfrm>
           <a:prstGeom prst="rect">
             <a:avLst/>
@@ -6522,14 +6522,14 @@
               <a:buNone/>
             </a:pPr>
             <a:r>
-              <a:rPr lang="en-US" sz="1000" dirty="0">
+              <a:rPr lang="en-US" sz="1150" dirty="0">
                 <a:solidFill>
                   <a:schemeClr val="tx1"/>
                 </a:solidFill>
               </a:rPr>
               <a:t>기록 백업 · 불러오기</a:t>
             </a:r>
-            <a:endParaRPr lang="en-US" sz="1000" dirty="0"/>
+            <a:endParaRPr lang="en-US" sz="1150" dirty="0"/>
           </a:p>
         </p:txBody>
       </p:sp>
@@ -6541,8 +6541,8 @@
         </p:nvSpPr>
         <p:spPr>
           <a:xfrm>
-            <a:off x="4160520" y="4078224"/>
-            <a:ext cx="1280160" cy="128016"/>
+            <a:off x="3931920" y="4114800"/>
+            <a:ext cx="1371600" cy="128016"/>
           </a:xfrm>
           <a:prstGeom prst="roundRect">
             <a:avLst>
@@ -6568,8 +6568,8 @@
         </p:nvSpPr>
         <p:spPr>
           <a:xfrm>
-            <a:off x="4160520" y="4078224"/>
-            <a:ext cx="1024128" cy="128016"/>
+            <a:off x="3931920" y="4114800"/>
+            <a:ext cx="1097280" cy="128016"/>
           </a:xfrm>
           <a:prstGeom prst="roundRect">
             <a:avLst>
@@ -6595,8 +6595,8 @@
         </p:nvSpPr>
         <p:spPr>
           <a:xfrm>
-            <a:off x="5495544" y="3950208"/>
-            <a:ext cx="411480" cy="384048"/>
+            <a:off x="5358384" y="3986784"/>
+            <a:ext cx="457200" cy="384048"/>
           </a:xfrm>
           <a:prstGeom prst="rect">
             <a:avLst/>
@@ -6612,14 +6612,14 @@
               <a:buNone/>
             </a:pPr>
             <a:r>
-              <a:rPr lang="en-US" sz="1000" b="1" dirty="0">
+              <a:rPr lang="en-US" sz="1100" b="1" dirty="0">
                 <a:solidFill>
                   <a:schemeClr val="tx2"/>
                 </a:solidFill>
               </a:rPr>
               <a:t>80%</a:t>
             </a:r>
-            <a:endParaRPr lang="en-US" sz="1000" dirty="0"/>
+            <a:endParaRPr lang="en-US" sz="1100" dirty="0"/>
           </a:p>
         </p:txBody>
       </p:sp>
@@ -6631,8 +6631,8 @@
         </p:nvSpPr>
         <p:spPr>
           <a:xfrm>
-            <a:off x="6044184" y="4059936"/>
-            <a:ext cx="164592" cy="164592"/>
+            <a:off x="5998464" y="4087368"/>
+            <a:ext cx="182880" cy="182880"/>
           </a:xfrm>
           <a:prstGeom prst="ellipse">
             <a:avLst/>
@@ -6656,8 +6656,8 @@
         </p:nvSpPr>
         <p:spPr>
           <a:xfrm>
-            <a:off x="6318504" y="4059936"/>
-            <a:ext cx="164592" cy="164592"/>
+            <a:off x="6291072" y="4087368"/>
+            <a:ext cx="182880" cy="182880"/>
           </a:xfrm>
           <a:prstGeom prst="ellipse">
             <a:avLst/>
@@ -6681,8 +6681,8 @@
         </p:nvSpPr>
         <p:spPr>
           <a:xfrm>
-            <a:off x="6592824" y="4059936"/>
-            <a:ext cx="164592" cy="164592"/>
+            <a:off x="6583680" y="4087368"/>
+            <a:ext cx="182880" cy="182880"/>
           </a:xfrm>
           <a:prstGeom prst="ellipse">
             <a:avLst/>
@@ -6706,7 +6706,7 @@
         </p:nvSpPr>
         <p:spPr>
           <a:xfrm>
-            <a:off x="6903720" y="3950208"/>
+            <a:off x="6903720" y="3986784"/>
             <a:ext cx="1783080" cy="384048"/>
           </a:xfrm>
           <a:prstGeom prst="rect">
@@ -6723,14 +6723,14 @@
               <a:buNone/>
             </a:pPr>
             <a:r>
-              <a:rPr lang="en-US" sz="850" dirty="0">
+              <a:rPr lang="en-US" sz="1050" dirty="0">
                 <a:solidFill>
                   <a:schemeClr val="accent5"/>
                 </a:solidFill>
               </a:rPr>
-              <a:t>실제 폰에서 파일 저장 확인</a:t>
-            </a:r>
-            <a:endParaRPr lang="en-US" sz="850" dirty="0"/>
+              <a:t>폰에서 파일 저장</a:t>
+            </a:r>
+            <a:endParaRPr lang="en-US" sz="1050" dirty="0"/>
           </a:p>
         </p:txBody>
       </p:sp>
@@ -6742,7 +6742,7 @@
         </p:nvSpPr>
         <p:spPr>
           <a:xfrm>
-            <a:off x="457200" y="4334256"/>
+            <a:off x="457200" y="4370832"/>
             <a:ext cx="8229600" cy="0"/>
           </a:xfrm>
           <a:prstGeom prst="line">
@@ -6765,27 +6765,24 @@
         </p:nvSpPr>
         <p:spPr>
           <a:xfrm>
-            <a:off x="457200" y="4389120"/>
-            <a:ext cx="8229600" cy="384048"/>
-          </a:xfrm>
-          <a:prstGeom prst="rect">
-            <a:avLst/>
-          </a:prstGeom>
-          <a:noFill/>
-          <a:ln/>
-        </p:spPr>
-        <p:txBody>
-          <a:bodyPr wrap="square" lIns="0" tIns="0" rIns="0" bIns="0" rtlCol="0" anchor="t"/>
+            <a:off x="457200" y="4434840"/>
+            <a:ext cx="8229600" cy="292608"/>
+          </a:xfrm>
+          <a:prstGeom prst="rect">
+            <a:avLst/>
+          </a:prstGeom>
+          <a:noFill/>
+          <a:ln/>
+        </p:spPr>
+        <p:txBody>
+          <a:bodyPr wrap="square" lIns="0" tIns="0" rIns="0" bIns="0" rtlCol="0" anchor="ctr"/>
           <a:lstStyle/>
           <a:p>
             <a:pPr indent="0" marL="0">
-              <a:spcAft>
-                <a:spcPts val="100"/>
-              </a:spcAft>
-              <a:buNone/>
-            </a:pPr>
-            <a:r>
-              <a:rPr lang="en-US" sz="850" b="1" dirty="0">
+              <a:buNone/>
+            </a:pPr>
+            <a:r>
+              <a:rPr lang="en-US" sz="1050" b="1" dirty="0">
                 <a:solidFill>
                   <a:schemeClr val="tx2"/>
                 </a:solidFill>
@@ -6793,30 +6790,21 @@
               <a:t>계획 기준  </a:t>
             </a:r>
             <a:pPr indent="0" marL="0">
-              <a:spcAft>
-                <a:spcPts val="100"/>
-              </a:spcAft>
-              <a:buNone/>
-            </a:pPr>
-            <a:r>
-              <a:rPr lang="en-US" sz="850" dirty="0">
+              <a:buNone/>
+            </a:pPr>
+            <a:r>
+              <a:rPr lang="en-US" sz="1050" dirty="0">
                 <a:solidFill>
                   <a:schemeClr val="tx1"/>
                 </a:solidFill>
               </a:rPr>
-              <a:t>10/13 MVP 기능 정의서의 포함 기능 8개(모두 동작)와 제외 기능 6개(금액 자동 인식 · 푸시 알림 · AI 문구 · 광고 · 로그인 · 진정서. 계획대로 넣지 않음)</a:t>
-            </a:r>
-            <a:endParaRPr lang="en-US" sz="850" dirty="0"/>
-          </a:p>
-          <a:p>
+              <a:t>10/13 MVP 정의서의 포함 8 · 제외 6      </a:t>
+            </a:r>
             <a:pPr indent="0" marL="0">
-              <a:spcAft>
-                <a:spcPts val="100"/>
-              </a:spcAft>
-              <a:buNone/>
-            </a:pPr>
-            <a:r>
-              <a:rPr lang="en-US" sz="850" b="1" dirty="0">
+              <a:buNone/>
+            </a:pPr>
+            <a:r>
+              <a:rPr lang="en-US" sz="1050" b="1" dirty="0">
                 <a:solidFill>
                   <a:schemeClr val="tx2"/>
                 </a:solidFill>
@@ -6824,20 +6812,17 @@
               <a:t>% 기준  </a:t>
             </a:r>
             <a:pPr indent="0" marL="0">
-              <a:spcAft>
-                <a:spcPts val="100"/>
-              </a:spcAft>
-              <a:buNone/>
-            </a:pPr>
-            <a:r>
-              <a:rPr lang="en-US" sz="850" dirty="0">
+              <a:buNone/>
+            </a:pPr>
+            <a:r>
+              <a:rPr lang="en-US" sz="1050" dirty="0">
                 <a:solidFill>
                   <a:schemeClr val="tx1"/>
                 </a:solidFill>
               </a:rPr>
-              <a:t>구현 + 실제 폰 확인 + 사용자 검증을 100으로 보고 남은 일만큼 뺀 자체 평가. 동작은 컴퓨터(폰 크기 화면)에서, 실제 폰은 설치까지 확인</a:t>
-            </a:r>
-            <a:endParaRPr lang="en-US" sz="850" dirty="0"/>
+              <a:t>구현 · 폰 확인 · 사용자 검증 중 남은 일만큼 뺀 자체 평가</a:t>
+            </a:r>
+            <a:endParaRPr lang="en-US" sz="1050" dirty="0"/>
           </a:p>
         </p:txBody>
       </p:sp>
@@ -7316,7 +7301,7 @@
               <a:buNone/>
             </a:pPr>
             <a:r>
-              <a:rPr lang="en-US" sz="950" b="1" dirty="0">
+              <a:rPr lang="en-US" sz="1050" b="1" dirty="0">
                 <a:solidFill>
                   <a:schemeClr val="tx2"/>
                 </a:solidFill>
@@ -7330,14 +7315,14 @@
               <a:buNone/>
             </a:pPr>
             <a:r>
-              <a:rPr lang="en-US" sz="950" dirty="0">
+              <a:rPr lang="en-US" sz="1050" dirty="0">
                 <a:solidFill>
                   <a:schemeClr val="tx1"/>
                 </a:solidFill>
               </a:rPr>
-              <a:t>재적학생 307만 명(교육부 2026, 대학원 포함) → 알바 경험 67~88%(학교 단위 조사, 대표값 아님) → 지금 알바 중 · 주 15시간 이상: 미상, 11월 설문으로. 경험 기준 상한 약 210~270만 명</a:t>
-            </a:r>
-            <a:endParaRPr lang="en-US" sz="950" dirty="0"/>
+              <a:t>재적학생 307만 명 → 알바 경험 67~88% → 지금 알바 중 · 주 15시간 이상은 11월 설문으로 (경험 기준 상한 약 210~270만 명)</a:t>
+            </a:r>
+            <a:endParaRPr lang="en-US" sz="1050" dirty="0"/>
           </a:p>
           <a:p>
             <a:pPr indent="0" marL="0">
@@ -7347,7 +7332,7 @@
               <a:buNone/>
             </a:pPr>
             <a:r>
-              <a:rPr lang="en-US" sz="950" b="1" dirty="0">
+              <a:rPr lang="en-US" sz="1050" b="1" dirty="0">
                 <a:solidFill>
                   <a:schemeClr val="tx2"/>
                 </a:solidFill>
@@ -7361,14 +7346,14 @@
               <a:buNone/>
             </a:pPr>
             <a:r>
-              <a:rPr lang="en-US" sz="950" dirty="0">
+              <a:rPr lang="en-US" sz="1050" dirty="0">
                 <a:solidFill>
                   <a:schemeClr val="tx1"/>
                 </a:solidFill>
               </a:rPr>
-              <a:t>2025.9 임금체불 근절 대책(대지급금 확대), 2025.10 개정 근로기준법 시행(상습 체불 제재). 근거를 남겨 둔 사람이 돌려받기 쉬워지는 때</a:t>
-            </a:r>
-            <a:endParaRPr lang="en-US" sz="950" dirty="0"/>
+              <a:t>2025.9 임금체불 근절 대책 · 2025.10 개정 근로기준법 시행. 근거를 남겨 둔 사람이 돌려받기 쉬워지는 때</a:t>
+            </a:r>
+            <a:endParaRPr lang="en-US" sz="1050" dirty="0"/>
           </a:p>
         </p:txBody>
       </p:sp>
@@ -8409,7 +8394,7 @@
         <p:spPr>
           <a:xfrm>
             <a:off x="457200" y="1508760"/>
-            <a:ext cx="6583680" cy="603504"/>
+            <a:ext cx="6583680" cy="585216"/>
           </a:xfrm>
           <a:prstGeom prst="rect">
             <a:avLst/>
@@ -8425,28 +8410,28 @@
               <a:buNone/>
             </a:pPr>
             <a:r>
-              <a:rPr lang="en-US" sz="1200" b="1" dirty="0">
+              <a:rPr lang="en-US" sz="1300" b="1" dirty="0">
                 <a:solidFill>
                   <a:schemeClr val="tx1"/>
                 </a:solidFill>
               </a:rPr>
               <a:t>핵심 화면: 기록 · 비교 · 요청 · 증빙</a:t>
             </a:r>
-            <a:endParaRPr lang="en-US" sz="1200" dirty="0"/>
+            <a:endParaRPr lang="en-US" sz="1300" dirty="0"/>
           </a:p>
           <a:p>
             <a:pPr indent="0" marL="0">
               <a:buNone/>
             </a:pPr>
             <a:r>
-              <a:rPr lang="en-US" sz="900" dirty="0">
+              <a:rPr lang="en-US" sz="1050" dirty="0">
                 <a:solidFill>
                   <a:schemeClr val="accent5"/>
                 </a:solidFill>
               </a:rPr>
-              <a:t>신뢰가 핵심인 화면에는 광고를 섞지 않는다. 사장님께 보낼 문서를 만드는 화면에 광고가 보이면 신뢰가 깎인다</a:t>
-            </a:r>
-            <a:endParaRPr lang="en-US" sz="1200" dirty="0"/>
+              <a:t>신뢰가 핵심인 화면에는 광고를 섞지 않는다</a:t>
+            </a:r>
+            <a:endParaRPr lang="en-US" sz="1300" dirty="0"/>
           </a:p>
         </p:txBody>
       </p:sp>
@@ -8459,7 +8444,7 @@
         <p:spPr>
           <a:xfrm>
             <a:off x="7040880" y="1508760"/>
-            <a:ext cx="1645920" cy="603504"/>
+            <a:ext cx="1645920" cy="585216"/>
           </a:xfrm>
           <a:prstGeom prst="rect">
             <a:avLst/>
@@ -8475,14 +8460,14 @@
               <a:buNone/>
             </a:pPr>
             <a:r>
-              <a:rPr lang="en-US" sz="1200" b="1" dirty="0">
+              <a:rPr lang="en-US" sz="1300" b="1" dirty="0">
                 <a:solidFill>
                   <a:schemeClr val="accent2"/>
                 </a:solidFill>
               </a:rPr>
               <a:t>무료 · 광고 없음</a:t>
             </a:r>
-            <a:endParaRPr lang="en-US" sz="1200" dirty="0"/>
+            <a:endParaRPr lang="en-US" sz="1300" dirty="0"/>
           </a:p>
         </p:txBody>
       </p:sp>
@@ -8494,7 +8479,7 @@
         </p:nvSpPr>
         <p:spPr>
           <a:xfrm>
-            <a:off x="457200" y="2112264"/>
+            <a:off x="457200" y="2093976"/>
             <a:ext cx="8229600" cy="0"/>
           </a:xfrm>
           <a:prstGeom prst="line">
@@ -8517,8 +8502,8 @@
         </p:nvSpPr>
         <p:spPr>
           <a:xfrm>
-            <a:off x="457200" y="2112264"/>
-            <a:ext cx="6583680" cy="603504"/>
+            <a:off x="457200" y="2093976"/>
+            <a:ext cx="6583680" cy="585216"/>
           </a:xfrm>
           <a:prstGeom prst="rect">
             <a:avLst/>
@@ -8534,28 +8519,28 @@
               <a:buNone/>
             </a:pPr>
             <a:r>
-              <a:rPr lang="en-US" sz="1200" b="1" dirty="0">
+              <a:rPr lang="en-US" sz="1300" b="1" dirty="0">
                 <a:solidFill>
                   <a:schemeClr val="tx1"/>
                 </a:solidFill>
               </a:rPr>
               <a:t>1차 (가설): 쉬는 틈 게임 화면 광고</a:t>
             </a:r>
-            <a:endParaRPr lang="en-US" sz="1200" dirty="0"/>
+            <a:endParaRPr lang="en-US" sz="1300" dirty="0"/>
           </a:p>
           <a:p>
             <a:pPr indent="0" marL="0">
               <a:buNone/>
             </a:pPr>
             <a:r>
-              <a:rPr lang="en-US" sz="900" dirty="0">
+              <a:rPr lang="en-US" sz="1050" dirty="0">
                 <a:solidFill>
                   <a:schemeClr val="accent5"/>
                 </a:solidFill>
               </a:rPr>
-              <a:t>웹앱이라 배너 · 전면이 기본, 보상형은 승인 뒤(미신청). 단가 · 체류 시간은 측정 전이라 매출 추정은 적지 않는다. 가설 확인: 설문 "게임 화면 광고" 문항, 승인 뒤 게임 화면 열람 수</a:t>
-            </a:r>
-            <a:endParaRPr lang="en-US" sz="1200" dirty="0"/>
+              <a:t>웹앱이라 배너 · 전면이 기본, 보상형은 승인 뒤. 단가를 모르니 매출 추정은 적지 않는다</a:t>
+            </a:r>
+            <a:endParaRPr lang="en-US" sz="1300" dirty="0"/>
           </a:p>
         </p:txBody>
       </p:sp>
@@ -8567,8 +8552,8 @@
         </p:nvSpPr>
         <p:spPr>
           <a:xfrm>
-            <a:off x="7040880" y="2112264"/>
-            <a:ext cx="1645920" cy="603504"/>
+            <a:off x="7040880" y="2093976"/>
+            <a:ext cx="1645920" cy="585216"/>
           </a:xfrm>
           <a:prstGeom prst="rect">
             <a:avLst/>
@@ -8584,14 +8569,14 @@
               <a:buNone/>
             </a:pPr>
             <a:r>
-              <a:rPr lang="en-US" sz="1200" b="1" dirty="0">
+              <a:rPr lang="en-US" sz="1300" b="1" dirty="0">
                 <a:solidFill>
                   <a:schemeClr val="tx2"/>
                 </a:solidFill>
               </a:rPr>
               <a:t>게임 화면만</a:t>
             </a:r>
-            <a:endParaRPr lang="en-US" sz="1200" dirty="0"/>
+            <a:endParaRPr lang="en-US" sz="1300" dirty="0"/>
           </a:p>
         </p:txBody>
       </p:sp>
@@ -8603,7 +8588,7 @@
         </p:nvSpPr>
         <p:spPr>
           <a:xfrm>
-            <a:off x="457200" y="2715768"/>
+            <a:off x="457200" y="2679192"/>
             <a:ext cx="8229600" cy="0"/>
           </a:xfrm>
           <a:prstGeom prst="line">
@@ -8626,8 +8611,8 @@
         </p:nvSpPr>
         <p:spPr>
           <a:xfrm>
-            <a:off x="457200" y="2715768"/>
-            <a:ext cx="6583680" cy="603504"/>
+            <a:off x="457200" y="2679192"/>
+            <a:ext cx="6583680" cy="585216"/>
           </a:xfrm>
           <a:prstGeom prst="rect">
             <a:avLst/>
@@ -8643,28 +8628,28 @@
               <a:buNone/>
             </a:pPr>
             <a:r>
-              <a:rPr lang="en-US" sz="1200" b="1" dirty="0">
+              <a:rPr lang="en-US" sz="1300" b="1" dirty="0">
                 <a:solidFill>
                   <a:schemeClr val="tx1"/>
                 </a:solidFill>
               </a:rPr>
               <a:t>2차 (후보): 편의 기능 구독</a:t>
             </a:r>
-            <a:endParaRPr lang="en-US" sz="1200" dirty="0"/>
+            <a:endParaRPr lang="en-US" sz="1300" dirty="0"/>
           </a:p>
           <a:p>
             <a:pPr indent="0" marL="0">
               <a:buNone/>
             </a:pPr>
             <a:r>
-              <a:rPr lang="en-US" sz="900" dirty="0">
+              <a:rPr lang="en-US" sz="1050" dirty="0">
                 <a:solidFill>
                   <a:schemeClr val="accent5"/>
                 </a:solidFill>
               </a:rPr>
-              <a:t>여러 폰 동기화 · 자동 백업: "기록이 폰에만 있다"는 약점을 돈 내고 없애는 선택 기능. 문서 · 법률과 무관</a:t>
-            </a:r>
-            <a:endParaRPr lang="en-US" sz="1200" dirty="0"/>
+              <a:t>"기록이 폰에만 있다"는 약점을 돈 내고 없애는 선택 기능 (동기화 · 자동 백업)</a:t>
+            </a:r>
+            <a:endParaRPr lang="en-US" sz="1300" dirty="0"/>
           </a:p>
         </p:txBody>
       </p:sp>
@@ -8676,8 +8661,8 @@
         </p:nvSpPr>
         <p:spPr>
           <a:xfrm>
-            <a:off x="7040880" y="2715768"/>
-            <a:ext cx="1645920" cy="603504"/>
+            <a:off x="7040880" y="2679192"/>
+            <a:ext cx="1645920" cy="585216"/>
           </a:xfrm>
           <a:prstGeom prst="rect">
             <a:avLst/>
@@ -8693,14 +8678,14 @@
               <a:buNone/>
             </a:pPr>
             <a:r>
-              <a:rPr lang="en-US" sz="1200" b="1" dirty="0">
+              <a:rPr lang="en-US" sz="1300" b="1" dirty="0">
                 <a:solidFill>
                   <a:schemeClr val="tx2"/>
                 </a:solidFill>
               </a:rPr>
               <a:t>구독</a:t>
             </a:r>
-            <a:endParaRPr lang="en-US" sz="1200" dirty="0"/>
+            <a:endParaRPr lang="en-US" sz="1300" dirty="0"/>
           </a:p>
         </p:txBody>
       </p:sp>
@@ -8712,7 +8697,7 @@
         </p:nvSpPr>
         <p:spPr>
           <a:xfrm>
-            <a:off x="457200" y="3319272"/>
+            <a:off x="457200" y="3264408"/>
             <a:ext cx="8229600" cy="0"/>
           </a:xfrm>
           <a:prstGeom prst="line">
@@ -8735,8 +8720,8 @@
         </p:nvSpPr>
         <p:spPr>
           <a:xfrm>
-            <a:off x="457200" y="3319272"/>
-            <a:ext cx="6583680" cy="603504"/>
+            <a:off x="457200" y="3264408"/>
+            <a:ext cx="6583680" cy="585216"/>
           </a:xfrm>
           <a:prstGeom prst="rect">
             <a:avLst/>
@@ -8752,28 +8737,28 @@
               <a:buNone/>
             </a:pPr>
             <a:r>
-              <a:rPr lang="en-US" sz="1200" b="1" dirty="0">
+              <a:rPr lang="en-US" sz="1300" b="1" dirty="0">
                 <a:solidFill>
                   <a:schemeClr val="accent3"/>
                 </a:solidFill>
               </a:rPr>
               <a:t>하지 않는 것: 정산 문구 · 내용증명 · 증빙 묶음 유료화</a:t>
             </a:r>
-            <a:endParaRPr lang="en-US" sz="1200" dirty="0"/>
+            <a:endParaRPr lang="en-US" sz="1300" dirty="0"/>
           </a:p>
           <a:p>
             <a:pPr indent="0" marL="0">
               <a:buNone/>
             </a:pPr>
             <a:r>
-              <a:rPr lang="en-US" sz="900" dirty="0">
+              <a:rPr lang="en-US" sz="1050" dirty="0">
                 <a:solidFill>
                   <a:schemeClr val="accent5"/>
                 </a:solidFill>
               </a:rPr>
-              <a:t>돈을 받고 문서를 만들어 주면 변호사법 · 공인노무사법 문제에 가까워진다 (웹 조사 기준). 비용은 지금 서버 0원 · 배포 0원, 인건비는 팀 3명</a:t>
-            </a:r>
-            <a:endParaRPr lang="en-US" sz="1200" dirty="0"/>
+              <a:t>돈을 받고 문서를 만들면 변호사법 · 공인노무사법 문제에 가까워진다</a:t>
+            </a:r>
+            <a:endParaRPr lang="en-US" sz="1300" dirty="0"/>
           </a:p>
         </p:txBody>
       </p:sp>
@@ -8785,8 +8770,8 @@
         </p:nvSpPr>
         <p:spPr>
           <a:xfrm>
-            <a:off x="7040880" y="3319272"/>
-            <a:ext cx="1645920" cy="603504"/>
+            <a:off x="7040880" y="3264408"/>
+            <a:ext cx="1645920" cy="585216"/>
           </a:xfrm>
           <a:prstGeom prst="rect">
             <a:avLst/>
@@ -8802,14 +8787,14 @@
               <a:buNone/>
             </a:pPr>
             <a:r>
-              <a:rPr lang="en-US" sz="1200" b="1" dirty="0">
+              <a:rPr lang="en-US" sz="1300" b="1" dirty="0">
                 <a:solidFill>
                   <a:schemeClr val="accent3"/>
                 </a:solidFill>
               </a:rPr>
               <a:t>유료화 안 함</a:t>
             </a:r>
-            <a:endParaRPr lang="en-US" sz="1200" dirty="0"/>
+            <a:endParaRPr lang="en-US" sz="1300" dirty="0"/>
           </a:p>
         </p:txBody>
       </p:sp>
@@ -8821,7 +8806,7 @@
         </p:nvSpPr>
         <p:spPr>
           <a:xfrm>
-            <a:off x="457200" y="3922776"/>
+            <a:off x="457200" y="3849624"/>
             <a:ext cx="8229600" cy="0"/>
           </a:xfrm>
           <a:prstGeom prst="line">
@@ -8897,14 +8882,14 @@
               <a:buNone/>
             </a:pPr>
             <a:r>
-              <a:rPr lang="en-US" sz="1000" dirty="0">
+              <a:rPr lang="en-US" sz="1100" dirty="0">
                 <a:solidFill>
                   <a:schemeClr val="tx1"/>
                 </a:solidFill>
               </a:rPr>
-              <a:t>링크 하나로 설치되니 에브리타임 · 학과 · 동아리 단톡 · 알바 커뮤니티에 링크로 전파. "주휴수당 계산법" 같은 짧은 영상으로 유입</a:t>
-            </a:r>
-            <a:endParaRPr lang="en-US" sz="1000" dirty="0"/>
+              <a:t>링크 하나로 설치되니 에브리타임 · 학과 단톡 · 알바 커뮤니티에 링크로. "주휴수당 계산법" 짧은 영상으로 유입</a:t>
+            </a:r>
+            <a:endParaRPr lang="en-US" sz="1100" dirty="0"/>
           </a:p>
         </p:txBody>
       </p:sp>
@@ -8969,14 +8954,14 @@
               <a:buNone/>
             </a:pPr>
             <a:r>
-              <a:rPr lang="en-US" sz="1000" b="1" dirty="0">
+              <a:rPr lang="en-US" sz="1100" b="1" dirty="0">
                 <a:solidFill>
                   <a:schemeClr val="tx2"/>
                 </a:solidFill>
               </a:rPr>
               <a:t>홈 화면 추가 → 첫 기록 → 받은 금액 입력 → 차액 발견 → 요청 보냄 → 실제로 받음 (인터뷰)</a:t>
             </a:r>
-            <a:endParaRPr lang="en-US" sz="1000" dirty="0"/>
+            <a:endParaRPr lang="en-US" sz="1100" dirty="0"/>
           </a:p>
         </p:txBody>
       </p:sp>
@@ -9196,12 +9181,11 @@
             <a:tbl>
               <a:tblPr/>
               <a:tblGrid>
+                <a:gridCol w="2743200"/>
+                <a:gridCol w="3108960"/>
                 <a:gridCol w="2377440"/>
-                <a:gridCol w="2286000"/>
-                <a:gridCol w="1554480"/>
-                <a:gridCol w="2011680"/>
               </a:tblGrid>
-              <a:tr h="274320">
+              <a:tr h="292608">
                 <a:tc>
                   <a:txBody>
                     <a:bodyPr/>
@@ -9211,17 +9195,17 @@
                         <a:buNone/>
                       </a:pPr>
                       <a:r>
-                        <a:rPr lang="en-US" sz="900" b="1" dirty="0">
+                        <a:rPr lang="en-US" sz="1000" b="1" dirty="0">
                           <a:solidFill>
                             <a:srgbClr val="5D636D"/>
                           </a:solidFill>
                         </a:rPr>
                         <a:t>재는 것</a:t>
                       </a:r>
-                      <a:endParaRPr lang="en-US" sz="900" dirty="0"/>
+                      <a:endParaRPr lang="en-US" sz="1000" dirty="0"/>
                     </a:p>
                   </a:txBody>
-                  <a:tcPr marL="54864" marR="54864" marT="18288" marB="18288" anchor="ctr">
+                  <a:tcPr marL="73152" marR="73152" marT="18288" marB="18288" anchor="ctr">
                     <a:lnL w="6350" cap="flat" cmpd="sng" algn="ctr">
                       <a:solidFill>
                         <a:srgbClr val="DCD9D0"/>
@@ -9272,17 +9256,17 @@
                         <a:buNone/>
                       </a:pPr>
                       <a:r>
-                        <a:rPr lang="en-US" sz="900" b="1" dirty="0">
+                        <a:rPr lang="en-US" sz="1000" b="1" dirty="0">
                           <a:solidFill>
                             <a:srgbClr val="5D636D"/>
                           </a:solidFill>
                         </a:rPr>
-                        <a:t>방법</a:t>
+                        <a:t>어떻게 · 기준 (팀이 정함)</a:t>
                       </a:r>
-                      <a:endParaRPr lang="en-US" sz="900" dirty="0"/>
+                      <a:endParaRPr lang="en-US" sz="1000" dirty="0"/>
                     </a:p>
                   </a:txBody>
-                  <a:tcPr marL="54864" marR="54864" marT="18288" marB="18288" anchor="ctr">
+                  <a:tcPr marL="73152" marR="73152" marT="18288" marB="18288" anchor="ctr">
                     <a:lnL w="6350" cap="flat" cmpd="sng" algn="ctr">
                       <a:solidFill>
                         <a:srgbClr val="DCD9D0"/>
@@ -9333,17 +9317,17 @@
                         <a:buNone/>
                       </a:pPr>
                       <a:r>
-                        <a:rPr lang="en-US" sz="900" b="1" dirty="0">
+                        <a:rPr lang="en-US" sz="1000" b="1" dirty="0">
                           <a:solidFill>
                             <a:srgbClr val="5D636D"/>
                           </a:solidFill>
                         </a:rPr>
-                        <a:t>기준 (팀이 정함)</a:t>
+                        <a:t>못 미치면</a:t>
                       </a:r>
-                      <a:endParaRPr lang="en-US" sz="900" dirty="0"/>
+                      <a:endParaRPr lang="en-US" sz="1000" dirty="0"/>
                     </a:p>
                   </a:txBody>
-                  <a:tcPr marL="54864" marR="54864" marT="18288" marB="18288" anchor="ctr">
+                  <a:tcPr marL="73152" marR="73152" marT="18288" marB="18288" anchor="ctr">
                     <a:lnL w="6350" cap="flat" cmpd="sng" algn="ctr">
                       <a:solidFill>
                         <a:srgbClr val="DCD9D0"/>
@@ -9385,6 +9369,8 @@
                     </a:solidFill>
                   </a:tcPr>
                 </a:tc>
+              </a:tr>
+              <a:tr h="347472">
                 <a:tc>
                   <a:txBody>
                     <a:bodyPr/>
@@ -9394,80 +9380,17 @@
                         <a:buNone/>
                       </a:pPr>
                       <a:r>
-                        <a:rPr lang="en-US" sz="900" b="1" dirty="0">
-                          <a:solidFill>
-                            <a:srgbClr val="5D636D"/>
-                          </a:solidFill>
-                        </a:rPr>
-                        <a:t>못 미치면</a:t>
-                      </a:r>
-                      <a:endParaRPr lang="en-US" sz="900" dirty="0"/>
-                    </a:p>
-                  </a:txBody>
-                  <a:tcPr marL="54864" marR="54864" marT="18288" marB="18288" anchor="ctr">
-                    <a:lnL w="6350" cap="flat" cmpd="sng" algn="ctr">
-                      <a:solidFill>
-                        <a:srgbClr val="DCD9D0"/>
-                      </a:solidFill>
-                      <a:prstDash val="solid"/>
-                      <a:round/>
-                      <a:headEnd type="none" w="med" len="med"/>
-                      <a:tailEnd type="none" w="med" len="med"/>
-                    </a:lnL>
-                    <a:lnR w="6350" cap="flat" cmpd="sng" algn="ctr">
-                      <a:solidFill>
-                        <a:srgbClr val="DCD9D0"/>
-                      </a:solidFill>
-                      <a:prstDash val="solid"/>
-                      <a:round/>
-                      <a:headEnd type="none" w="med" len="med"/>
-                      <a:tailEnd type="none" w="med" len="med"/>
-                    </a:lnR>
-                    <a:lnT w="6350" cap="flat" cmpd="sng" algn="ctr">
-                      <a:solidFill>
-                        <a:srgbClr val="DCD9D0"/>
-                      </a:solidFill>
-                      <a:prstDash val="solid"/>
-                      <a:round/>
-                      <a:headEnd type="none" w="med" len="med"/>
-                      <a:tailEnd type="none" w="med" len="med"/>
-                    </a:lnT>
-                    <a:lnB w="6350" cap="flat" cmpd="sng" algn="ctr">
-                      <a:solidFill>
-                        <a:srgbClr val="DCD9D0"/>
-                      </a:solidFill>
-                      <a:prstDash val="solid"/>
-                      <a:round/>
-                      <a:headEnd type="none" w="med" len="med"/>
-                      <a:tailEnd type="none" w="med" len="med"/>
-                    </a:lnB>
-                    <a:solidFill>
-                      <a:srgbClr val="F4F3EF"/>
-                    </a:solidFill>
-                  </a:tcPr>
-                </a:tc>
-              </a:tr>
-              <a:tr h="329184">
-                <a:tc>
-                  <a:txBody>
-                    <a:bodyPr/>
-                    <a:lstStyle/>
-                    <a:p>
-                      <a:pPr indent="0" marL="0">
-                        <a:buNone/>
-                      </a:pPr>
-                      <a:r>
-                        <a:rPr lang="en-US" sz="900" b="1" dirty="0">
+                        <a:rPr lang="en-US" sz="1050" b="1" dirty="0">
                           <a:solidFill>
                             <a:srgbClr val="15171A"/>
                           </a:solidFill>
                         </a:rPr>
                         <a:t>매달 받은 금액을 직접 넣는다</a:t>
                       </a:r>
-                      <a:endParaRPr lang="en-US" sz="900" dirty="0"/>
+                      <a:endParaRPr lang="en-US" sz="1050" dirty="0"/>
                     </a:p>
                   </a:txBody>
-                  <a:tcPr marL="54864" marR="54864" marT="18288" marB="18288" anchor="ctr">
+                  <a:tcPr marL="73152" marR="73152" marT="18288" marB="18288" anchor="ctr">
                     <a:lnL w="6350" cap="flat" cmpd="sng" algn="ctr">
                       <a:solidFill>
                         <a:srgbClr val="DCD9D0"/>
@@ -9515,17 +9438,17 @@
                         <a:buNone/>
                       </a:pPr>
                       <a:r>
-                        <a:rPr lang="en-US" sz="900" dirty="0">
+                        <a:rPr lang="en-US" sz="1050" dirty="0">
                           <a:solidFill>
                             <a:srgbClr val="15171A"/>
                           </a:solidFill>
                         </a:rPr>
-                        <a:t>인터뷰 5명(22번) + 설문 "매달 받은 금액 직접 넣기"</a:t>
+                        <a:t>인터뷰 5명 + 설문 · 5명 중 3명 "넣겠다"</a:t>
                       </a:r>
-                      <a:endParaRPr lang="en-US" sz="900" dirty="0"/>
+                      <a:endParaRPr lang="en-US" sz="1050" dirty="0"/>
                     </a:p>
                   </a:txBody>
-                  <a:tcPr marL="54864" marR="54864" marT="18288" marB="18288" anchor="ctr">
+                  <a:tcPr marL="73152" marR="73152" marT="18288" marB="18288" anchor="ctr">
                     <a:lnL w="6350" cap="flat" cmpd="sng" algn="ctr">
                       <a:solidFill>
                         <a:srgbClr val="DCD9D0"/>
@@ -9573,17 +9496,77 @@
                         <a:buNone/>
                       </a:pPr>
                       <a:r>
-                        <a:rPr lang="en-US" sz="900" dirty="0">
+                        <a:rPr lang="en-US" sz="1050" dirty="0">
                           <a:solidFill>
                             <a:srgbClr val="15171A"/>
                           </a:solidFill>
                         </a:rPr>
-                        <a:t>5명 중 3명 "넣겠다"</a:t>
+                        <a:t>입금 문자 자동 인식을 앞당긴다</a:t>
                       </a:r>
-                      <a:endParaRPr lang="en-US" sz="900" dirty="0"/>
+                      <a:endParaRPr lang="en-US" sz="1050" dirty="0"/>
                     </a:p>
                   </a:txBody>
-                  <a:tcPr marL="54864" marR="54864" marT="18288" marB="18288" anchor="ctr">
+                  <a:tcPr marL="73152" marR="73152" marT="18288" marB="18288" anchor="ctr">
+                    <a:lnL w="6350" cap="flat" cmpd="sng" algn="ctr">
+                      <a:solidFill>
+                        <a:srgbClr val="DCD9D0"/>
+                      </a:solidFill>
+                      <a:prstDash val="solid"/>
+                      <a:round/>
+                      <a:headEnd type="none" w="med" len="med"/>
+                      <a:tailEnd type="none" w="med" len="med"/>
+                    </a:lnL>
+                    <a:lnR w="6350" cap="flat" cmpd="sng" algn="ctr">
+                      <a:solidFill>
+                        <a:srgbClr val="DCD9D0"/>
+                      </a:solidFill>
+                      <a:prstDash val="solid"/>
+                      <a:round/>
+                      <a:headEnd type="none" w="med" len="med"/>
+                      <a:tailEnd type="none" w="med" len="med"/>
+                    </a:lnR>
+                    <a:lnT w="6350" cap="flat" cmpd="sng" algn="ctr">
+                      <a:solidFill>
+                        <a:srgbClr val="DCD9D0"/>
+                      </a:solidFill>
+                      <a:prstDash val="solid"/>
+                      <a:round/>
+                      <a:headEnd type="none" w="med" len="med"/>
+                      <a:tailEnd type="none" w="med" len="med"/>
+                    </a:lnT>
+                    <a:lnB w="6350" cap="flat" cmpd="sng" algn="ctr">
+                      <a:solidFill>
+                        <a:srgbClr val="DCD9D0"/>
+                      </a:solidFill>
+                      <a:prstDash val="solid"/>
+                      <a:round/>
+                      <a:headEnd type="none" w="med" len="med"/>
+                      <a:tailEnd type="none" w="med" len="med"/>
+                    </a:lnB>
+                  </a:tcPr>
+                </a:tc>
+              </a:tr>
+              <a:tr h="347472">
+                <a:tc>
+                  <a:txBody>
+                    <a:bodyPr/>
+                    <a:lstStyle/>
+                    <a:p>
+                      <a:pPr indent="0" marL="0">
+                        <a:buNone/>
+                      </a:pPr>
+                      <a:r>
+                        <a:rPr lang="en-US" sz="1050" b="1" dirty="0">
+                          <a:solidFill>
+                            <a:srgbClr val="15171A"/>
+                          </a:solidFill>
+                        </a:rPr>
+                        <a:t>요청 문구를 실제로 보낼 수 있다</a:t>
+                      </a:r>
+                      <a:endParaRPr lang="en-US" sz="1050" dirty="0"/>
+                    </a:p>
+                  </a:txBody>
+                  <a:tcPr marL="73152" marR="73152" marT="18288" marB="18288" anchor="ctr">
                     <a:lnL w="6350" cap="flat" cmpd="sng" algn="ctr">
                       <a:solidFill>
                         <a:srgbClr val="DCD9D0"/>
@@ -9631,77 +9614,17 @@
                         <a:buNone/>
                       </a:pPr>
                       <a:r>
-                        <a:rPr lang="en-US" sz="900" dirty="0">
+                        <a:rPr lang="en-US" sz="1050" dirty="0">
                           <a:solidFill>
                             <a:srgbClr val="15171A"/>
                           </a:solidFill>
                         </a:rPr>
-                        <a:t>보류한 입금 문자 · 명세서 자동 인식을 앞당긴다</a:t>
+                        <a:t>인터뷰(문구를 보여 주고) · 5명 중 3명</a:t>
                       </a:r>
-                      <a:endParaRPr lang="en-US" sz="900" dirty="0"/>
+                      <a:endParaRPr lang="en-US" sz="1050" dirty="0"/>
                     </a:p>
                   </a:txBody>
-                  <a:tcPr marL="54864" marR="54864" marT="18288" marB="18288" anchor="ctr">
-                    <a:lnL w="6350" cap="flat" cmpd="sng" algn="ctr">
-                      <a:solidFill>
-                        <a:srgbClr val="DCD9D0"/>
-                      </a:solidFill>
-                      <a:prstDash val="solid"/>
-                      <a:round/>
-                      <a:headEnd type="none" w="med" len="med"/>
-                      <a:tailEnd type="none" w="med" len="med"/>
-                    </a:lnL>
-                    <a:lnR w="6350" cap="flat" cmpd="sng" algn="ctr">
-                      <a:solidFill>
-                        <a:srgbClr val="DCD9D0"/>
-                      </a:solidFill>
-                      <a:prstDash val="solid"/>
-                      <a:round/>
-                      <a:headEnd type="none" w="med" len="med"/>
-                      <a:tailEnd type="none" w="med" len="med"/>
-                    </a:lnR>
-                    <a:lnT w="6350" cap="flat" cmpd="sng" algn="ctr">
-                      <a:solidFill>
-                        <a:srgbClr val="DCD9D0"/>
-                      </a:solidFill>
-                      <a:prstDash val="solid"/>
-                      <a:round/>
-                      <a:headEnd type="none" w="med" len="med"/>
-                      <a:tailEnd type="none" w="med" len="med"/>
-                    </a:lnT>
-                    <a:lnB w="6350" cap="flat" cmpd="sng" algn="ctr">
-                      <a:solidFill>
-                        <a:srgbClr val="DCD9D0"/>
-                      </a:solidFill>
-                      <a:prstDash val="solid"/>
-                      <a:round/>
-                      <a:headEnd type="none" w="med" len="med"/>
-                      <a:tailEnd type="none" w="med" len="med"/>
-                    </a:lnB>
-                  </a:tcPr>
-                </a:tc>
-              </a:tr>
-              <a:tr h="329184">
-                <a:tc>
-                  <a:txBody>
-                    <a:bodyPr/>
-                    <a:lstStyle/>
-                    <a:p>
-                      <a:pPr indent="0" marL="0">
-                        <a:buNone/>
-                      </a:pPr>
-                      <a:r>
-                        <a:rPr lang="en-US" sz="900" b="1" dirty="0">
-                          <a:solidFill>
-                            <a:srgbClr val="15171A"/>
-                          </a:solidFill>
-                        </a:rPr>
-                        <a:t>만든 요청 문구를 실제로 보낼 수 있다</a:t>
-                      </a:r>
-                      <a:endParaRPr lang="en-US" sz="900" dirty="0"/>
-                    </a:p>
-                  </a:txBody>
-                  <a:tcPr marL="54864" marR="54864" marT="18288" marB="18288" anchor="ctr">
+                  <a:tcPr marL="73152" marR="73152" marT="18288" marB="18288" anchor="ctr">
                     <a:lnL w="6350" cap="flat" cmpd="sng" algn="ctr">
                       <a:solidFill>
                         <a:srgbClr val="DCD9D0"/>
@@ -9749,17 +9672,77 @@
                         <a:buNone/>
                       </a:pPr>
                       <a:r>
-                        <a:rPr lang="en-US" sz="900" dirty="0">
+                        <a:rPr lang="en-US" sz="1050" dirty="0">
                           <a:solidFill>
                             <a:srgbClr val="15171A"/>
                           </a:solidFill>
                         </a:rPr>
-                        <a:t>인터뷰(문구를 보여 주고, 20번)</a:t>
+                        <a:t>문구 톤 · 단계를 다시 짠다</a:t>
                       </a:r>
-                      <a:endParaRPr lang="en-US" sz="900" dirty="0"/>
+                      <a:endParaRPr lang="en-US" sz="1050" dirty="0"/>
                     </a:p>
                   </a:txBody>
-                  <a:tcPr marL="54864" marR="54864" marT="18288" marB="18288" anchor="ctr">
+                  <a:tcPr marL="73152" marR="73152" marT="18288" marB="18288" anchor="ctr">
+                    <a:lnL w="6350" cap="flat" cmpd="sng" algn="ctr">
+                      <a:solidFill>
+                        <a:srgbClr val="DCD9D0"/>
+                      </a:solidFill>
+                      <a:prstDash val="solid"/>
+                      <a:round/>
+                      <a:headEnd type="none" w="med" len="med"/>
+                      <a:tailEnd type="none" w="med" len="med"/>
+                    </a:lnL>
+                    <a:lnR w="6350" cap="flat" cmpd="sng" algn="ctr">
+                      <a:solidFill>
+                        <a:srgbClr val="DCD9D0"/>
+                      </a:solidFill>
+                      <a:prstDash val="solid"/>
+                      <a:round/>
+                      <a:headEnd type="none" w="med" len="med"/>
+                      <a:tailEnd type="none" w="med" len="med"/>
+                    </a:lnR>
+                    <a:lnT w="6350" cap="flat" cmpd="sng" algn="ctr">
+                      <a:solidFill>
+                        <a:srgbClr val="DCD9D0"/>
+                      </a:solidFill>
+                      <a:prstDash val="solid"/>
+                      <a:round/>
+                      <a:headEnd type="none" w="med" len="med"/>
+                      <a:tailEnd type="none" w="med" len="med"/>
+                    </a:lnT>
+                    <a:lnB w="6350" cap="flat" cmpd="sng" algn="ctr">
+                      <a:solidFill>
+                        <a:srgbClr val="DCD9D0"/>
+                      </a:solidFill>
+                      <a:prstDash val="solid"/>
+                      <a:round/>
+                      <a:headEnd type="none" w="med" len="med"/>
+                      <a:tailEnd type="none" w="med" len="med"/>
+                    </a:lnB>
+                  </a:tcPr>
+                </a:tc>
+              </a:tr>
+              <a:tr h="347472">
+                <a:tc>
+                  <a:txBody>
+                    <a:bodyPr/>
+                    <a:lstStyle/>
+                    <a:p>
+                      <a:pPr indent="0" marL="0">
+                        <a:buNone/>
+                      </a:pPr>
+                      <a:r>
+                        <a:rPr lang="en-US" sz="1050" b="1" dirty="0">
+                          <a:solidFill>
+                            <a:srgbClr val="15171A"/>
+                          </a:solidFill>
+                        </a:rPr>
+                        <a:t>확인 번호 설명이 이해된다</a:t>
+                      </a:r>
+                      <a:endParaRPr lang="en-US" sz="1050" dirty="0"/>
+                    </a:p>
+                  </a:txBody>
+                  <a:tcPr marL="73152" marR="73152" marT="18288" marB="18288" anchor="ctr">
                     <a:lnL w="6350" cap="flat" cmpd="sng" algn="ctr">
                       <a:solidFill>
                         <a:srgbClr val="DCD9D0"/>
@@ -9807,17 +9790,17 @@
                         <a:buNone/>
                       </a:pPr>
                       <a:r>
-                        <a:rPr lang="en-US" sz="900" dirty="0">
+                        <a:rPr lang="en-US" sz="1050" dirty="0">
                           <a:solidFill>
                             <a:srgbClr val="15171A"/>
                           </a:solidFill>
                         </a:rPr>
-                        <a:t>5명 중 3명 "보내겠다"</a:t>
+                        <a:t>인터뷰 · 5명 중 4명</a:t>
                       </a:r>
-                      <a:endParaRPr lang="en-US" sz="900" dirty="0"/>
+                      <a:endParaRPr lang="en-US" sz="1050" dirty="0"/>
                     </a:p>
                   </a:txBody>
-                  <a:tcPr marL="54864" marR="54864" marT="18288" marB="18288" anchor="ctr">
+                  <a:tcPr marL="73152" marR="73152" marT="18288" marB="18288" anchor="ctr">
                     <a:lnL w="6350" cap="flat" cmpd="sng" algn="ctr">
                       <a:solidFill>
                         <a:srgbClr val="DCD9D0"/>
@@ -9865,17 +9848,17 @@
                         <a:buNone/>
                       </a:pPr>
                       <a:r>
-                        <a:rPr lang="en-US" sz="900" dirty="0">
+                        <a:rPr lang="en-US" sz="1050" dirty="0">
                           <a:solidFill>
                             <a:srgbClr val="15171A"/>
                           </a:solidFill>
                         </a:rPr>
-                        <a:t>문구 톤 · 단계를 다시 짠다 (11/10~)</a:t>
+                        <a:t>설정 · 증빙 문구를 고친다</a:t>
                       </a:r>
-                      <a:endParaRPr lang="en-US" sz="900" dirty="0"/>
+                      <a:endParaRPr lang="en-US" sz="1050" dirty="0"/>
                     </a:p>
                   </a:txBody>
-                  <a:tcPr marL="54864" marR="54864" marT="18288" marB="18288" anchor="ctr">
+                  <a:tcPr marL="73152" marR="73152" marT="18288" marB="18288" anchor="ctr">
                     <a:lnL w="6350" cap="flat" cmpd="sng" algn="ctr">
                       <a:solidFill>
                         <a:srgbClr val="DCD9D0"/>
@@ -9915,7 +9898,7 @@
                   </a:tcPr>
                 </a:tc>
               </a:tr>
-              <a:tr h="329184">
+              <a:tr h="347472">
                 <a:tc>
                   <a:txBody>
                     <a:bodyPr/>
@@ -9925,17 +9908,17 @@
                         <a:buNone/>
                       </a:pPr>
                       <a:r>
-                        <a:rPr lang="en-US" sz="900" b="1" dirty="0">
+                        <a:rPr lang="en-US" sz="1050" b="1" dirty="0">
                           <a:solidFill>
                             <a:srgbClr val="15171A"/>
                           </a:solidFill>
                         </a:rPr>
-                        <a:t>확인 번호 설명을 듣고 무엇인지 말할 수 있다</a:t>
+                        <a:t>타겟 중 주 15시간 이상이 다수다</a:t>
                       </a:r>
-                      <a:endParaRPr lang="en-US" sz="900" dirty="0"/>
+                      <a:endParaRPr lang="en-US" sz="1050" dirty="0"/>
                     </a:p>
                   </a:txBody>
-                  <a:tcPr marL="54864" marR="54864" marT="18288" marB="18288" anchor="ctr">
+                  <a:tcPr marL="73152" marR="73152" marT="18288" marB="18288" anchor="ctr">
                     <a:lnL w="6350" cap="flat" cmpd="sng" algn="ctr">
                       <a:solidFill>
                         <a:srgbClr val="DCD9D0"/>
@@ -9983,17 +9966,17 @@
                         <a:buNone/>
                       </a:pPr>
                       <a:r>
-                        <a:rPr lang="en-US" sz="900" dirty="0">
+                        <a:rPr lang="en-US" sz="1050" dirty="0">
                           <a:solidFill>
                             <a:srgbClr val="15171A"/>
                           </a:solidFill>
                         </a:rPr>
-                        <a:t>인터뷰(21번)</a:t>
+                        <a:t>설문 · 응답 30명 넘을 때 비율로</a:t>
                       </a:r>
-                      <a:endParaRPr lang="en-US" sz="900" dirty="0"/>
+                      <a:endParaRPr lang="en-US" sz="1050" dirty="0"/>
                     </a:p>
                   </a:txBody>
-                  <a:tcPr marL="54864" marR="54864" marT="18288" marB="18288" anchor="ctr">
+                  <a:tcPr marL="73152" marR="73152" marT="18288" marB="18288" anchor="ctr">
                     <a:lnL w="6350" cap="flat" cmpd="sng" algn="ctr">
                       <a:solidFill>
                         <a:srgbClr val="DCD9D0"/>
@@ -10041,17 +10024,77 @@
                         <a:buNone/>
                       </a:pPr>
                       <a:r>
-                        <a:rPr lang="en-US" sz="900" dirty="0">
+                        <a:rPr lang="en-US" sz="1050" dirty="0">
                           <a:solidFill>
                             <a:srgbClr val="15171A"/>
                           </a:solidFill>
                         </a:rPr>
-                        <a:t>5명 중 4명</a:t>
+                        <a:t>주휴수당 중심 메시지를 바꾼다</a:t>
                       </a:r>
-                      <a:endParaRPr lang="en-US" sz="900" dirty="0"/>
+                      <a:endParaRPr lang="en-US" sz="1050" dirty="0"/>
                     </a:p>
                   </a:txBody>
-                  <a:tcPr marL="54864" marR="54864" marT="18288" marB="18288" anchor="ctr">
+                  <a:tcPr marL="73152" marR="73152" marT="18288" marB="18288" anchor="ctr">
+                    <a:lnL w="6350" cap="flat" cmpd="sng" algn="ctr">
+                      <a:solidFill>
+                        <a:srgbClr val="DCD9D0"/>
+                      </a:solidFill>
+                      <a:prstDash val="solid"/>
+                      <a:round/>
+                      <a:headEnd type="none" w="med" len="med"/>
+                      <a:tailEnd type="none" w="med" len="med"/>
+                    </a:lnL>
+                    <a:lnR w="6350" cap="flat" cmpd="sng" algn="ctr">
+                      <a:solidFill>
+                        <a:srgbClr val="DCD9D0"/>
+                      </a:solidFill>
+                      <a:prstDash val="solid"/>
+                      <a:round/>
+                      <a:headEnd type="none" w="med" len="med"/>
+                      <a:tailEnd type="none" w="med" len="med"/>
+                    </a:lnR>
+                    <a:lnT w="6350" cap="flat" cmpd="sng" algn="ctr">
+                      <a:solidFill>
+                        <a:srgbClr val="DCD9D0"/>
+                      </a:solidFill>
+                      <a:prstDash val="solid"/>
+                      <a:round/>
+                      <a:headEnd type="none" w="med" len="med"/>
+                      <a:tailEnd type="none" w="med" len="med"/>
+                    </a:lnT>
+                    <a:lnB w="6350" cap="flat" cmpd="sng" algn="ctr">
+                      <a:solidFill>
+                        <a:srgbClr val="DCD9D0"/>
+                      </a:solidFill>
+                      <a:prstDash val="solid"/>
+                      <a:round/>
+                      <a:headEnd type="none" w="med" len="med"/>
+                      <a:tailEnd type="none" w="med" len="med"/>
+                    </a:lnB>
+                  </a:tcPr>
+                </a:tc>
+              </a:tr>
+              <a:tr h="347472">
+                <a:tc>
+                  <a:txBody>
+                    <a:bodyPr/>
+                    <a:lstStyle/>
+                    <a:p>
+                      <a:pPr indent="0" marL="0">
+                        <a:buNone/>
+                      </a:pPr>
+                      <a:r>
+                        <a:rPr lang="en-US" sz="1050" b="1" dirty="0">
+                          <a:solidFill>
+                            <a:srgbClr val="15171A"/>
+                          </a:solidFill>
+                        </a:rPr>
+                        <a:t>게임 화면 광고를 받아들인다</a:t>
+                      </a:r>
+                      <a:endParaRPr lang="en-US" sz="1050" dirty="0"/>
+                    </a:p>
+                  </a:txBody>
+                  <a:tcPr marL="73152" marR="73152" marT="18288" marB="18288" anchor="ctr">
                     <a:lnL w="6350" cap="flat" cmpd="sng" algn="ctr">
                       <a:solidFill>
                         <a:srgbClr val="DCD9D0"/>
@@ -10099,77 +10142,17 @@
                         <a:buNone/>
                       </a:pPr>
                       <a:r>
-                        <a:rPr lang="en-US" sz="900" dirty="0">
+                        <a:rPr lang="en-US" sz="1050" dirty="0">
                           <a:solidFill>
                             <a:srgbClr val="15171A"/>
                           </a:solidFill>
                         </a:rPr>
-                        <a:t>설정 · 증빙 문구를 고친다</a:t>
+                        <a:t>설문 + 인터뷰 · "싫다"가 반 미만</a:t>
                       </a:r>
-                      <a:endParaRPr lang="en-US" sz="900" dirty="0"/>
+                      <a:endParaRPr lang="en-US" sz="1050" dirty="0"/>
                     </a:p>
                   </a:txBody>
-                  <a:tcPr marL="54864" marR="54864" marT="18288" marB="18288" anchor="ctr">
-                    <a:lnL w="6350" cap="flat" cmpd="sng" algn="ctr">
-                      <a:solidFill>
-                        <a:srgbClr val="DCD9D0"/>
-                      </a:solidFill>
-                      <a:prstDash val="solid"/>
-                      <a:round/>
-                      <a:headEnd type="none" w="med" len="med"/>
-                      <a:tailEnd type="none" w="med" len="med"/>
-                    </a:lnL>
-                    <a:lnR w="6350" cap="flat" cmpd="sng" algn="ctr">
-                      <a:solidFill>
-                        <a:srgbClr val="DCD9D0"/>
-                      </a:solidFill>
-                      <a:prstDash val="solid"/>
-                      <a:round/>
-                      <a:headEnd type="none" w="med" len="med"/>
-                      <a:tailEnd type="none" w="med" len="med"/>
-                    </a:lnR>
-                    <a:lnT w="6350" cap="flat" cmpd="sng" algn="ctr">
-                      <a:solidFill>
-                        <a:srgbClr val="DCD9D0"/>
-                      </a:solidFill>
-                      <a:prstDash val="solid"/>
-                      <a:round/>
-                      <a:headEnd type="none" w="med" len="med"/>
-                      <a:tailEnd type="none" w="med" len="med"/>
-                    </a:lnT>
-                    <a:lnB w="6350" cap="flat" cmpd="sng" algn="ctr">
-                      <a:solidFill>
-                        <a:srgbClr val="DCD9D0"/>
-                      </a:solidFill>
-                      <a:prstDash val="solid"/>
-                      <a:round/>
-                      <a:headEnd type="none" w="med" len="med"/>
-                      <a:tailEnd type="none" w="med" len="med"/>
-                    </a:lnB>
-                  </a:tcPr>
-                </a:tc>
-              </a:tr>
-              <a:tr h="329184">
-                <a:tc>
-                  <a:txBody>
-                    <a:bodyPr/>
-                    <a:lstStyle/>
-                    <a:p>
-                      <a:pPr indent="0" marL="0">
-                        <a:buNone/>
-                      </a:pPr>
-                      <a:r>
-                        <a:rPr lang="en-US" sz="900" b="1" dirty="0">
-                          <a:solidFill>
-                            <a:srgbClr val="15171A"/>
-                          </a:solidFill>
-                        </a:rPr>
-                        <a:t>타겟 중 주 15시간 이상이 다수다</a:t>
-                      </a:r>
-                      <a:endParaRPr lang="en-US" sz="900" dirty="0"/>
-                    </a:p>
-                  </a:txBody>
-                  <a:tcPr marL="54864" marR="54864" marT="18288" marB="18288" anchor="ctr">
+                  <a:tcPr marL="73152" marR="73152" marT="18288" marB="18288" anchor="ctr">
                     <a:lnL w="6350" cap="flat" cmpd="sng" algn="ctr">
                       <a:solidFill>
                         <a:srgbClr val="DCD9D0"/>
@@ -10217,367 +10200,17 @@
                         <a:buNone/>
                       </a:pPr>
                       <a:r>
-                        <a:rPr lang="en-US" sz="900" dirty="0">
+                        <a:rPr lang="en-US" sz="1050" dirty="0">
                           <a:solidFill>
                             <a:srgbClr val="15171A"/>
                           </a:solidFill>
                         </a:rPr>
-                        <a:t>설문 "주당 근무 시간"</a:t>
+                        <a:t>11/23 광고 대신 새 게임으로</a:t>
                       </a:r>
-                      <a:endParaRPr lang="en-US" sz="900" dirty="0"/>
+                      <a:endParaRPr lang="en-US" sz="1050" dirty="0"/>
                     </a:p>
                   </a:txBody>
-                  <a:tcPr marL="54864" marR="54864" marT="18288" marB="18288" anchor="ctr">
-                    <a:lnL w="6350" cap="flat" cmpd="sng" algn="ctr">
-                      <a:solidFill>
-                        <a:srgbClr val="DCD9D0"/>
-                      </a:solidFill>
-                      <a:prstDash val="solid"/>
-                      <a:round/>
-                      <a:headEnd type="none" w="med" len="med"/>
-                      <a:tailEnd type="none" w="med" len="med"/>
-                    </a:lnL>
-                    <a:lnR w="6350" cap="flat" cmpd="sng" algn="ctr">
-                      <a:solidFill>
-                        <a:srgbClr val="DCD9D0"/>
-                      </a:solidFill>
-                      <a:prstDash val="solid"/>
-                      <a:round/>
-                      <a:headEnd type="none" w="med" len="med"/>
-                      <a:tailEnd type="none" w="med" len="med"/>
-                    </a:lnR>
-                    <a:lnT w="6350" cap="flat" cmpd="sng" algn="ctr">
-                      <a:solidFill>
-                        <a:srgbClr val="DCD9D0"/>
-                      </a:solidFill>
-                      <a:prstDash val="solid"/>
-                      <a:round/>
-                      <a:headEnd type="none" w="med" len="med"/>
-                      <a:tailEnd type="none" w="med" len="med"/>
-                    </a:lnT>
-                    <a:lnB w="6350" cap="flat" cmpd="sng" algn="ctr">
-                      <a:solidFill>
-                        <a:srgbClr val="DCD9D0"/>
-                      </a:solidFill>
-                      <a:prstDash val="solid"/>
-                      <a:round/>
-                      <a:headEnd type="none" w="med" len="med"/>
-                      <a:tailEnd type="none" w="med" len="med"/>
-                    </a:lnB>
-                  </a:tcPr>
-                </a:tc>
-                <a:tc>
-                  <a:txBody>
-                    <a:bodyPr/>
-                    <a:lstStyle/>
-                    <a:p>
-                      <a:pPr indent="0" marL="0">
-                        <a:buNone/>
-                      </a:pPr>
-                      <a:r>
-                        <a:rPr lang="en-US" sz="900" dirty="0">
-                          <a:solidFill>
-                            <a:srgbClr val="15171A"/>
-                          </a:solidFill>
-                        </a:rPr>
-                        <a:t>응답 30명 넘을 때 비율로</a:t>
-                      </a:r>
-                      <a:endParaRPr lang="en-US" sz="900" dirty="0"/>
-                    </a:p>
-                  </a:txBody>
-                  <a:tcPr marL="54864" marR="54864" marT="18288" marB="18288" anchor="ctr">
-                    <a:lnL w="6350" cap="flat" cmpd="sng" algn="ctr">
-                      <a:solidFill>
-                        <a:srgbClr val="DCD9D0"/>
-                      </a:solidFill>
-                      <a:prstDash val="solid"/>
-                      <a:round/>
-                      <a:headEnd type="none" w="med" len="med"/>
-                      <a:tailEnd type="none" w="med" len="med"/>
-                    </a:lnL>
-                    <a:lnR w="6350" cap="flat" cmpd="sng" algn="ctr">
-                      <a:solidFill>
-                        <a:srgbClr val="DCD9D0"/>
-                      </a:solidFill>
-                      <a:prstDash val="solid"/>
-                      <a:round/>
-                      <a:headEnd type="none" w="med" len="med"/>
-                      <a:tailEnd type="none" w="med" len="med"/>
-                    </a:lnR>
-                    <a:lnT w="6350" cap="flat" cmpd="sng" algn="ctr">
-                      <a:solidFill>
-                        <a:srgbClr val="DCD9D0"/>
-                      </a:solidFill>
-                      <a:prstDash val="solid"/>
-                      <a:round/>
-                      <a:headEnd type="none" w="med" len="med"/>
-                      <a:tailEnd type="none" w="med" len="med"/>
-                    </a:lnT>
-                    <a:lnB w="6350" cap="flat" cmpd="sng" algn="ctr">
-                      <a:solidFill>
-                        <a:srgbClr val="DCD9D0"/>
-                      </a:solidFill>
-                      <a:prstDash val="solid"/>
-                      <a:round/>
-                      <a:headEnd type="none" w="med" len="med"/>
-                      <a:tailEnd type="none" w="med" len="med"/>
-                    </a:lnB>
-                  </a:tcPr>
-                </a:tc>
-                <a:tc>
-                  <a:txBody>
-                    <a:bodyPr/>
-                    <a:lstStyle/>
-                    <a:p>
-                      <a:pPr indent="0" marL="0">
-                        <a:buNone/>
-                      </a:pPr>
-                      <a:r>
-                        <a:rPr lang="en-US" sz="900" dirty="0">
-                          <a:solidFill>
-                            <a:srgbClr val="15171A"/>
-                          </a:solidFill>
-                        </a:rPr>
-                        <a:t>주휴수당 중심 메시지를 바꾼다</a:t>
-                      </a:r>
-                      <a:endParaRPr lang="en-US" sz="900" dirty="0"/>
-                    </a:p>
-                  </a:txBody>
-                  <a:tcPr marL="54864" marR="54864" marT="18288" marB="18288" anchor="ctr">
-                    <a:lnL w="6350" cap="flat" cmpd="sng" algn="ctr">
-                      <a:solidFill>
-                        <a:srgbClr val="DCD9D0"/>
-                      </a:solidFill>
-                      <a:prstDash val="solid"/>
-                      <a:round/>
-                      <a:headEnd type="none" w="med" len="med"/>
-                      <a:tailEnd type="none" w="med" len="med"/>
-                    </a:lnL>
-                    <a:lnR w="6350" cap="flat" cmpd="sng" algn="ctr">
-                      <a:solidFill>
-                        <a:srgbClr val="DCD9D0"/>
-                      </a:solidFill>
-                      <a:prstDash val="solid"/>
-                      <a:round/>
-                      <a:headEnd type="none" w="med" len="med"/>
-                      <a:tailEnd type="none" w="med" len="med"/>
-                    </a:lnR>
-                    <a:lnT w="6350" cap="flat" cmpd="sng" algn="ctr">
-                      <a:solidFill>
-                        <a:srgbClr val="DCD9D0"/>
-                      </a:solidFill>
-                      <a:prstDash val="solid"/>
-                      <a:round/>
-                      <a:headEnd type="none" w="med" len="med"/>
-                      <a:tailEnd type="none" w="med" len="med"/>
-                    </a:lnT>
-                    <a:lnB w="6350" cap="flat" cmpd="sng" algn="ctr">
-                      <a:solidFill>
-                        <a:srgbClr val="DCD9D0"/>
-                      </a:solidFill>
-                      <a:prstDash val="solid"/>
-                      <a:round/>
-                      <a:headEnd type="none" w="med" len="med"/>
-                      <a:tailEnd type="none" w="med" len="med"/>
-                    </a:lnB>
-                  </a:tcPr>
-                </a:tc>
-              </a:tr>
-              <a:tr h="329184">
-                <a:tc>
-                  <a:txBody>
-                    <a:bodyPr/>
-                    <a:lstStyle/>
-                    <a:p>
-                      <a:pPr indent="0" marL="0">
-                        <a:buNone/>
-                      </a:pPr>
-                      <a:r>
-                        <a:rPr lang="en-US" sz="900" b="1" dirty="0">
-                          <a:solidFill>
-                            <a:srgbClr val="15171A"/>
-                          </a:solidFill>
-                        </a:rPr>
-                        <a:t>게임 화면 광고를 받아들인다</a:t>
-                      </a:r>
-                      <a:endParaRPr lang="en-US" sz="900" dirty="0"/>
-                    </a:p>
-                  </a:txBody>
-                  <a:tcPr marL="54864" marR="54864" marT="18288" marB="18288" anchor="ctr">
-                    <a:lnL w="6350" cap="flat" cmpd="sng" algn="ctr">
-                      <a:solidFill>
-                        <a:srgbClr val="DCD9D0"/>
-                      </a:solidFill>
-                      <a:prstDash val="solid"/>
-                      <a:round/>
-                      <a:headEnd type="none" w="med" len="med"/>
-                      <a:tailEnd type="none" w="med" len="med"/>
-                    </a:lnL>
-                    <a:lnR w="6350" cap="flat" cmpd="sng" algn="ctr">
-                      <a:solidFill>
-                        <a:srgbClr val="DCD9D0"/>
-                      </a:solidFill>
-                      <a:prstDash val="solid"/>
-                      <a:round/>
-                      <a:headEnd type="none" w="med" len="med"/>
-                      <a:tailEnd type="none" w="med" len="med"/>
-                    </a:lnR>
-                    <a:lnT w="6350" cap="flat" cmpd="sng" algn="ctr">
-                      <a:solidFill>
-                        <a:srgbClr val="DCD9D0"/>
-                      </a:solidFill>
-                      <a:prstDash val="solid"/>
-                      <a:round/>
-                      <a:headEnd type="none" w="med" len="med"/>
-                      <a:tailEnd type="none" w="med" len="med"/>
-                    </a:lnT>
-                    <a:lnB w="6350" cap="flat" cmpd="sng" algn="ctr">
-                      <a:solidFill>
-                        <a:srgbClr val="DCD9D0"/>
-                      </a:solidFill>
-                      <a:prstDash val="solid"/>
-                      <a:round/>
-                      <a:headEnd type="none" w="med" len="med"/>
-                      <a:tailEnd type="none" w="med" len="med"/>
-                    </a:lnB>
-                  </a:tcPr>
-                </a:tc>
-                <a:tc>
-                  <a:txBody>
-                    <a:bodyPr/>
-                    <a:lstStyle/>
-                    <a:p>
-                      <a:pPr indent="0" marL="0">
-                        <a:buNone/>
-                      </a:pPr>
-                      <a:r>
-                        <a:rPr lang="en-US" sz="900" dirty="0">
-                          <a:solidFill>
-                            <a:srgbClr val="15171A"/>
-                          </a:solidFill>
-                        </a:rPr>
-                        <a:t>설문 "게임 화면 광고" + 인터뷰(23 · 24번)</a:t>
-                      </a:r>
-                      <a:endParaRPr lang="en-US" sz="900" dirty="0"/>
-                    </a:p>
-                  </a:txBody>
-                  <a:tcPr marL="54864" marR="54864" marT="18288" marB="18288" anchor="ctr">
-                    <a:lnL w="6350" cap="flat" cmpd="sng" algn="ctr">
-                      <a:solidFill>
-                        <a:srgbClr val="DCD9D0"/>
-                      </a:solidFill>
-                      <a:prstDash val="solid"/>
-                      <a:round/>
-                      <a:headEnd type="none" w="med" len="med"/>
-                      <a:tailEnd type="none" w="med" len="med"/>
-                    </a:lnL>
-                    <a:lnR w="6350" cap="flat" cmpd="sng" algn="ctr">
-                      <a:solidFill>
-                        <a:srgbClr val="DCD9D0"/>
-                      </a:solidFill>
-                      <a:prstDash val="solid"/>
-                      <a:round/>
-                      <a:headEnd type="none" w="med" len="med"/>
-                      <a:tailEnd type="none" w="med" len="med"/>
-                    </a:lnR>
-                    <a:lnT w="6350" cap="flat" cmpd="sng" algn="ctr">
-                      <a:solidFill>
-                        <a:srgbClr val="DCD9D0"/>
-                      </a:solidFill>
-                      <a:prstDash val="solid"/>
-                      <a:round/>
-                      <a:headEnd type="none" w="med" len="med"/>
-                      <a:tailEnd type="none" w="med" len="med"/>
-                    </a:lnT>
-                    <a:lnB w="6350" cap="flat" cmpd="sng" algn="ctr">
-                      <a:solidFill>
-                        <a:srgbClr val="DCD9D0"/>
-                      </a:solidFill>
-                      <a:prstDash val="solid"/>
-                      <a:round/>
-                      <a:headEnd type="none" w="med" len="med"/>
-                      <a:tailEnd type="none" w="med" len="med"/>
-                    </a:lnB>
-                  </a:tcPr>
-                </a:tc>
-                <a:tc>
-                  <a:txBody>
-                    <a:bodyPr/>
-                    <a:lstStyle/>
-                    <a:p>
-                      <a:pPr indent="0" marL="0">
-                        <a:buNone/>
-                      </a:pPr>
-                      <a:r>
-                        <a:rPr lang="en-US" sz="900" dirty="0">
-                          <a:solidFill>
-                            <a:srgbClr val="15171A"/>
-                          </a:solidFill>
-                        </a:rPr>
-                        <a:t>"싫다"가 반을 넘지 않는다</a:t>
-                      </a:r>
-                      <a:endParaRPr lang="en-US" sz="900" dirty="0"/>
-                    </a:p>
-                  </a:txBody>
-                  <a:tcPr marL="54864" marR="54864" marT="18288" marB="18288" anchor="ctr">
-                    <a:lnL w="6350" cap="flat" cmpd="sng" algn="ctr">
-                      <a:solidFill>
-                        <a:srgbClr val="DCD9D0"/>
-                      </a:solidFill>
-                      <a:prstDash val="solid"/>
-                      <a:round/>
-                      <a:headEnd type="none" w="med" len="med"/>
-                      <a:tailEnd type="none" w="med" len="med"/>
-                    </a:lnL>
-                    <a:lnR w="6350" cap="flat" cmpd="sng" algn="ctr">
-                      <a:solidFill>
-                        <a:srgbClr val="DCD9D0"/>
-                      </a:solidFill>
-                      <a:prstDash val="solid"/>
-                      <a:round/>
-                      <a:headEnd type="none" w="med" len="med"/>
-                      <a:tailEnd type="none" w="med" len="med"/>
-                    </a:lnR>
-                    <a:lnT w="6350" cap="flat" cmpd="sng" algn="ctr">
-                      <a:solidFill>
-                        <a:srgbClr val="DCD9D0"/>
-                      </a:solidFill>
-                      <a:prstDash val="solid"/>
-                      <a:round/>
-                      <a:headEnd type="none" w="med" len="med"/>
-                      <a:tailEnd type="none" w="med" len="med"/>
-                    </a:lnT>
-                    <a:lnB w="6350" cap="flat" cmpd="sng" algn="ctr">
-                      <a:solidFill>
-                        <a:srgbClr val="DCD9D0"/>
-                      </a:solidFill>
-                      <a:prstDash val="solid"/>
-                      <a:round/>
-                      <a:headEnd type="none" w="med" len="med"/>
-                      <a:tailEnd type="none" w="med" len="med"/>
-                    </a:lnB>
-                  </a:tcPr>
-                </a:tc>
-                <a:tc>
-                  <a:txBody>
-                    <a:bodyPr/>
-                    <a:lstStyle/>
-                    <a:p>
-                      <a:pPr indent="0" marL="0">
-                        <a:buNone/>
-                      </a:pPr>
-                      <a:r>
-                        <a:rPr lang="en-US" sz="900" dirty="0">
-                          <a:solidFill>
-                            <a:srgbClr val="15171A"/>
-                          </a:solidFill>
-                        </a:rPr>
-                        <a:t>11/23 광고 실험 대신 새 게임으로</a:t>
-                      </a:r>
-                      <a:endParaRPr lang="en-US" sz="900" dirty="0"/>
-                    </a:p>
-                  </a:txBody>
-                  <a:tcPr marL="54864" marR="54864" marT="18288" marB="18288" anchor="ctr">
+                  <a:tcPr marL="73152" marR="73152" marT="18288" marB="18288" anchor="ctr">
                     <a:lnL w="6350" cap="flat" cmpd="sng" algn="ctr">
                       <a:solidFill>
                         <a:srgbClr val="DCD9D0"/>
@@ -10629,8 +10262,8 @@
         </p:nvSpPr>
         <p:spPr>
           <a:xfrm>
-            <a:off x="457200" y="3611880"/>
-            <a:ext cx="8229600" cy="365760"/>
+            <a:off x="457200" y="3703320"/>
+            <a:ext cx="8229600" cy="384048"/>
           </a:xfrm>
           <a:prstGeom prst="rect">
             <a:avLst/>
@@ -10646,14 +10279,14 @@
               <a:buNone/>
             </a:pPr>
             <a:r>
-              <a:rPr lang="en-US" sz="950" dirty="0">
+              <a:rPr lang="en-US" sz="1050" dirty="0">
                 <a:solidFill>
                   <a:schemeClr val="tx1"/>
                 </a:solidFill>
               </a:rPr>
-              <a:t>모집: 설문은 학과 · 동아리 단톡, 에브리타임, 그리고 오늘 이 자리(QR). 인터뷰 5명은 지인 중 지금 알바 중인 사람, 11/3~11/9, 1명당 20분</a:t>
-            </a:r>
-            <a:endParaRPr lang="en-US" sz="950" dirty="0"/>
+              <a:t>모집: 학과 · 동아리 단톡, 에브리타임, 오늘 이 자리(QR). 인터뷰 5명은 지인 중 알바 중인 사람, 11/3~11/9</a:t>
+            </a:r>
+            <a:endParaRPr lang="en-US" sz="1050" dirty="0"/>
           </a:p>
         </p:txBody>
       </p:sp>
@@ -10665,7 +10298,7 @@
         </p:nvSpPr>
         <p:spPr>
           <a:xfrm>
-            <a:off x="457200" y="3977640"/>
+            <a:off x="457200" y="4087368"/>
             <a:ext cx="8229600" cy="0"/>
           </a:xfrm>
           <a:prstGeom prst="line">
@@ -10688,8 +10321,8 @@
         </p:nvSpPr>
         <p:spPr>
           <a:xfrm>
-            <a:off x="457200" y="3977640"/>
-            <a:ext cx="8229600" cy="365760"/>
+            <a:off x="457200" y="4087368"/>
+            <a:ext cx="8229600" cy="384048"/>
           </a:xfrm>
           <a:prstGeom prst="rect">
             <a:avLst/>
@@ -10705,14 +10338,14 @@
               <a:buNone/>
             </a:pPr>
             <a:r>
-              <a:rPr lang="en-US" sz="950" dirty="0">
+              <a:rPr lang="en-US" sz="1050" dirty="0">
                 <a:solidFill>
                   <a:schemeClr val="tx1"/>
                 </a:solidFill>
               </a:rPr>
-              <a:t>들은 것(정식 조사 아님): 타겟 사용자 1명이 디자인 시안 12장 중 통장 구성을 골랐다 · 링크 설문은 10/23 공개, 응답 수는 발표 당일 결과 페이지에서 읽는다</a:t>
-            </a:r>
-            <a:endParaRPr lang="en-US" sz="950" dirty="0"/>
+              <a:t>왜 먼저 만들었나: 웹앱이라 만들어 보여 주는 게 가장 싼 검증. 설문에 앱 캡처 3장을 넣고 "실제로 있다면 쓰겠나"를 묻는다</a:t>
+            </a:r>
+            <a:endParaRPr lang="en-US" sz="1050" dirty="0"/>
           </a:p>
         </p:txBody>
       </p:sp>
@@ -10724,66 +10357,7 @@
         </p:nvSpPr>
         <p:spPr>
           <a:xfrm>
-            <a:off x="457200" y="4343400"/>
-            <a:ext cx="8229600" cy="0"/>
-          </a:xfrm>
-          <a:prstGeom prst="line">
-            <a:avLst/>
-          </a:prstGeom>
-          <a:noFill/>
-          <a:ln w="9525">
-            <a:solidFill>
-              <a:srgbClr val="DCD9D0"/>
-            </a:solidFill>
-            <a:prstDash val="solid"/>
-          </a:ln>
-        </p:spPr>
-      </p:sp>
-      <p:sp>
-        <p:nvSpPr>
-          <p:cNvPr id="10" name="Text 7"/>
-          <p:cNvSpPr txBox="1"/>
-          <p:nvPr/>
-        </p:nvSpPr>
-        <p:spPr>
-          <a:xfrm>
-            <a:off x="457200" y="4343400"/>
-            <a:ext cx="8229600" cy="365760"/>
-          </a:xfrm>
-          <a:prstGeom prst="rect">
-            <a:avLst/>
-          </a:prstGeom>
-          <a:noFill/>
-          <a:ln/>
-        </p:spPr>
-        <p:txBody>
-          <a:bodyPr wrap="square" lIns="0" tIns="0" rIns="0" bIns="0" rtlCol="0" anchor="ctr"/>
-          <a:lstStyle/>
-          <a:p>
-            <a:pPr indent="0" marL="0">
-              <a:buNone/>
-            </a:pPr>
-            <a:r>
-              <a:rPr lang="en-US" sz="950" dirty="0">
-                <a:solidFill>
-                  <a:schemeClr val="tx1"/>
-                </a:solidFill>
-              </a:rPr>
-              <a:t>왜 검증보다 개발이 먼저였나: 링크로 배포되는 웹앱이라 만들어 보여 주는 게 가장 싼 검증이었다. 설문에도 앱 캡처 3장을 넣고 "실제로 있다면 쓰겠나"를 묻는다</a:t>
-            </a:r>
-            <a:endParaRPr lang="en-US" sz="950" dirty="0"/>
-          </a:p>
-        </p:txBody>
-      </p:sp>
-      <p:sp>
-        <p:nvSpPr>
-          <p:cNvPr id="11" name="Shape 8"/>
-          <p:cNvSpPr/>
-          <p:nvPr/>
-        </p:nvSpPr>
-        <p:spPr>
-          <a:xfrm>
-            <a:off x="457200" y="4709160"/>
+            <a:off x="457200" y="4471416"/>
             <a:ext cx="8229600" cy="0"/>
           </a:xfrm>
           <a:prstGeom prst="line">
@@ -11000,8 +10574,8 @@
         </p:nvSpPr>
         <p:spPr>
           <a:xfrm>
-            <a:off x="4852851" y="1746504"/>
-            <a:ext cx="1463040" cy="164592"/>
+            <a:off x="4898571" y="1746504"/>
+            <a:ext cx="1371600" cy="182880"/>
           </a:xfrm>
           <a:prstGeom prst="rect">
             <a:avLst/>
@@ -11017,14 +10591,14 @@
               <a:buNone/>
             </a:pPr>
             <a:r>
-              <a:rPr lang="en-US" sz="700" b="1" dirty="0">
+              <a:rPr lang="en-US" sz="900" b="1" dirty="0">
                 <a:solidFill>
                   <a:schemeClr val="accent3"/>
                 </a:solidFill>
               </a:rPr>
-              <a:t>11/9 설문 1차 · 인터뷰</a:t>
-            </a:r>
-            <a:endParaRPr lang="en-US" sz="700" dirty="0"/>
+              <a:t>11/9 설문 · 인터뷰</a:t>
+            </a:r>
+            <a:endParaRPr lang="en-US" sz="900" dirty="0"/>
           </a:p>
         </p:txBody>
       </p:sp>
@@ -11061,8 +10635,8 @@
         </p:nvSpPr>
         <p:spPr>
           <a:xfrm>
-            <a:off x="6093823" y="1901952"/>
-            <a:ext cx="1463040" cy="164592"/>
+            <a:off x="6139543" y="1920240"/>
+            <a:ext cx="1371600" cy="182880"/>
           </a:xfrm>
           <a:prstGeom prst="rect">
             <a:avLst/>
@@ -11078,14 +10652,14 @@
               <a:buNone/>
             </a:pPr>
             <a:r>
-              <a:rPr lang="en-US" sz="700" b="1" dirty="0">
+              <a:rPr lang="en-US" sz="900" b="1" dirty="0">
                 <a:solidFill>
                   <a:schemeClr val="accent3"/>
                 </a:solidFill>
               </a:rPr>
-              <a:t>11/23 반영 배포 · 광고 결정</a:t>
-            </a:r>
-            <a:endParaRPr lang="en-US" sz="700" dirty="0"/>
+              <a:t>11/23 반영 배포</a:t>
+            </a:r>
+            <a:endParaRPr lang="en-US" sz="900" dirty="0"/>
           </a:p>
         </p:txBody>
       </p:sp>
@@ -11122,8 +10696,8 @@
         </p:nvSpPr>
         <p:spPr>
           <a:xfrm>
-            <a:off x="6714309" y="1746504"/>
-            <a:ext cx="1463040" cy="164592"/>
+            <a:off x="6760029" y="1746504"/>
+            <a:ext cx="1371600" cy="182880"/>
           </a:xfrm>
           <a:prstGeom prst="rect">
             <a:avLst/>
@@ -11139,14 +10713,14 @@
               <a:buNone/>
             </a:pPr>
             <a:r>
-              <a:rPr lang="en-US" sz="700" b="1" dirty="0">
+              <a:rPr lang="en-US" sz="900" b="1" dirty="0">
                 <a:solidFill>
                   <a:schemeClr val="accent3"/>
                 </a:solidFill>
               </a:rPr>
-              <a:t>11/30 폰 검증 끝</a:t>
-            </a:r>
-            <a:endParaRPr lang="en-US" sz="700" dirty="0"/>
+              <a:t>11/30 폰 검증</a:t>
+            </a:r>
+            <a:endParaRPr lang="en-US" sz="900" dirty="0"/>
           </a:p>
         </p:txBody>
       </p:sp>
@@ -11183,8 +10757,8 @@
         </p:nvSpPr>
         <p:spPr>
           <a:xfrm>
-            <a:off x="7334794" y="1901952"/>
-            <a:ext cx="1463040" cy="164592"/>
+            <a:off x="7380514" y="1920240"/>
+            <a:ext cx="1371600" cy="182880"/>
           </a:xfrm>
           <a:prstGeom prst="rect">
             <a:avLst/>
@@ -11200,14 +10774,14 @@
               <a:buNone/>
             </a:pPr>
             <a:r>
-              <a:rPr lang="en-US" sz="700" b="1" dirty="0">
+              <a:rPr lang="en-US" sz="900" b="1" dirty="0">
                 <a:solidFill>
                   <a:schemeClr val="accent3"/>
                 </a:solidFill>
               </a:rPr>
-              <a:t>12/7 기능 동결</a:t>
-            </a:r>
-            <a:endParaRPr lang="en-US" sz="700" dirty="0"/>
+              <a:t>12/7 동결</a:t>
+            </a:r>
+            <a:endParaRPr lang="en-US" sz="900" dirty="0"/>
           </a:p>
         </p:txBody>
       </p:sp>
@@ -11244,8 +10818,8 @@
         </p:nvSpPr>
         <p:spPr>
           <a:xfrm>
-            <a:off x="7955280" y="1746504"/>
-            <a:ext cx="1463040" cy="164592"/>
+            <a:off x="8001000" y="1746504"/>
+            <a:ext cx="1371600" cy="182880"/>
           </a:xfrm>
           <a:prstGeom prst="rect">
             <a:avLst/>
@@ -11261,14 +10835,14 @@
               <a:buNone/>
             </a:pPr>
             <a:r>
-              <a:rPr lang="en-US" sz="700" b="1" dirty="0">
+              <a:rPr lang="en-US" sz="900" b="1" dirty="0">
                 <a:solidFill>
                   <a:schemeClr val="accent3"/>
                 </a:solidFill>
               </a:rPr>
               <a:t>12/15 기말</a:t>
             </a:r>
-            <a:endParaRPr lang="en-US" sz="700" dirty="0"/>
+            <a:endParaRPr lang="en-US" sz="900" dirty="0"/>
           </a:p>
         </p:txBody>
       </p:sp>
@@ -11297,14 +10871,14 @@
               <a:buNone/>
             </a:pPr>
             <a:r>
-              <a:rPr lang="en-US" sz="800" b="1" dirty="0">
+              <a:rPr lang="en-US" sz="950" b="1" dirty="0">
                 <a:solidFill>
                   <a:schemeClr val="accent3"/>
                 </a:solidFill>
               </a:rPr>
               <a:t>마일스톤</a:t>
             </a:r>
-            <a:endParaRPr lang="en-US" sz="800" dirty="0"/>
+            <a:endParaRPr lang="en-US" sz="950" dirty="0"/>
           </a:p>
         </p:txBody>
       </p:sp>
@@ -11333,14 +10907,14 @@
               <a:buNone/>
             </a:pPr>
             <a:r>
-              <a:rPr lang="en-US" sz="900" b="1" dirty="0">
+              <a:rPr lang="en-US" sz="1000" b="1" dirty="0">
                 <a:solidFill>
                   <a:schemeClr val="accent5"/>
                 </a:solidFill>
               </a:rPr>
               <a:t>10/27</a:t>
             </a:r>
-            <a:endParaRPr lang="en-US" sz="900" dirty="0"/>
+            <a:endParaRPr lang="en-US" sz="1000" dirty="0"/>
           </a:p>
         </p:txBody>
       </p:sp>
@@ -11369,14 +10943,14 @@
               <a:buNone/>
             </a:pPr>
             <a:r>
-              <a:rPr lang="en-US" sz="900" b="1" dirty="0">
+              <a:rPr lang="en-US" sz="1000" b="1" dirty="0">
                 <a:solidFill>
                   <a:schemeClr val="accent5"/>
                 </a:solidFill>
               </a:rPr>
               <a:t>11/3</a:t>
             </a:r>
-            <a:endParaRPr lang="en-US" sz="900" dirty="0"/>
+            <a:endParaRPr lang="en-US" sz="1000" dirty="0"/>
           </a:p>
         </p:txBody>
       </p:sp>
@@ -11405,14 +10979,14 @@
               <a:buNone/>
             </a:pPr>
             <a:r>
-              <a:rPr lang="en-US" sz="900" b="1" dirty="0">
+              <a:rPr lang="en-US" sz="1000" b="1" dirty="0">
                 <a:solidFill>
                   <a:schemeClr val="accent5"/>
                 </a:solidFill>
               </a:rPr>
               <a:t>11/10</a:t>
             </a:r>
-            <a:endParaRPr lang="en-US" sz="900" dirty="0"/>
+            <a:endParaRPr lang="en-US" sz="1000" dirty="0"/>
           </a:p>
         </p:txBody>
       </p:sp>
@@ -11441,14 +11015,14 @@
               <a:buNone/>
             </a:pPr>
             <a:r>
-              <a:rPr lang="en-US" sz="900" b="1" dirty="0">
+              <a:rPr lang="en-US" sz="1000" b="1" dirty="0">
                 <a:solidFill>
                   <a:schemeClr val="accent5"/>
                 </a:solidFill>
               </a:rPr>
               <a:t>11/17</a:t>
             </a:r>
-            <a:endParaRPr lang="en-US" sz="900" dirty="0"/>
+            <a:endParaRPr lang="en-US" sz="1000" dirty="0"/>
           </a:p>
         </p:txBody>
       </p:sp>
@@ -11477,14 +11051,14 @@
               <a:buNone/>
             </a:pPr>
             <a:r>
-              <a:rPr lang="en-US" sz="900" b="1" dirty="0">
+              <a:rPr lang="en-US" sz="1000" b="1" dirty="0">
                 <a:solidFill>
                   <a:schemeClr val="accent5"/>
                 </a:solidFill>
               </a:rPr>
               <a:t>11/24</a:t>
             </a:r>
-            <a:endParaRPr lang="en-US" sz="900" dirty="0"/>
+            <a:endParaRPr lang="en-US" sz="1000" dirty="0"/>
           </a:p>
         </p:txBody>
       </p:sp>
@@ -11513,14 +11087,14 @@
               <a:buNone/>
             </a:pPr>
             <a:r>
-              <a:rPr lang="en-US" sz="900" b="1" dirty="0">
+              <a:rPr lang="en-US" sz="1000" b="1" dirty="0">
                 <a:solidFill>
                   <a:schemeClr val="accent5"/>
                 </a:solidFill>
               </a:rPr>
               <a:t>12/1</a:t>
             </a:r>
-            <a:endParaRPr lang="en-US" sz="900" dirty="0"/>
+            <a:endParaRPr lang="en-US" sz="1000" dirty="0"/>
           </a:p>
         </p:txBody>
       </p:sp>
@@ -11549,14 +11123,14 @@
               <a:buNone/>
             </a:pPr>
             <a:r>
-              <a:rPr lang="en-US" sz="900" b="1" dirty="0">
+              <a:rPr lang="en-US" sz="1000" b="1" dirty="0">
                 <a:solidFill>
                   <a:schemeClr val="accent5"/>
                 </a:solidFill>
               </a:rPr>
               <a:t>12/8</a:t>
             </a:r>
-            <a:endParaRPr lang="en-US" sz="900" dirty="0"/>
+            <a:endParaRPr lang="en-US" sz="1000" dirty="0"/>
           </a:p>
         </p:txBody>
       </p:sp>
@@ -11585,14 +11159,14 @@
               <a:buNone/>
             </a:pPr>
             <a:r>
-              <a:rPr lang="en-US" sz="900" b="1" dirty="0">
+              <a:rPr lang="en-US" sz="1000" b="1" dirty="0">
                 <a:solidFill>
                   <a:schemeClr val="accent5"/>
                 </a:solidFill>
               </a:rPr>
               <a:t>담당</a:t>
             </a:r>
-            <a:endParaRPr lang="en-US" sz="900" dirty="0"/>
+            <a:endParaRPr lang="en-US" sz="1000" dirty="0"/>
           </a:p>
         </p:txBody>
       </p:sp>
@@ -11644,14 +11218,14 @@
               <a:buNone/>
             </a:pPr>
             <a:r>
-              <a:rPr lang="en-US" sz="950" dirty="0">
+              <a:rPr lang="en-US" sz="1100" dirty="0">
                 <a:solidFill>
                   <a:schemeClr val="tx1"/>
                 </a:solidFill>
               </a:rPr>
               <a:t>설문 30명 수집 · 집계</a:t>
             </a:r>
-            <a:endParaRPr lang="en-US" sz="950" dirty="0"/>
+            <a:endParaRPr lang="en-US" sz="1100" dirty="0"/>
           </a:p>
         </p:txBody>
       </p:sp>
@@ -11680,14 +11254,14 @@
               <a:buNone/>
             </a:pPr>
             <a:r>
-              <a:rPr lang="en-US" sz="800" dirty="0">
+              <a:rPr lang="en-US" sz="950" dirty="0">
                 <a:solidFill>
                   <a:schemeClr val="accent5"/>
                 </a:solidFill>
               </a:rPr>
               <a:t>손유호</a:t>
             </a:r>
-            <a:endParaRPr lang="en-US" sz="800" dirty="0"/>
+            <a:endParaRPr lang="en-US" sz="950" dirty="0"/>
           </a:p>
         </p:txBody>
       </p:sp>
@@ -11927,14 +11501,14 @@
               <a:buNone/>
             </a:pPr>
             <a:r>
-              <a:rPr lang="en-US" sz="950" dirty="0">
+              <a:rPr lang="en-US" sz="1100" dirty="0">
                 <a:solidFill>
                   <a:schemeClr val="tx1"/>
                 </a:solidFill>
               </a:rPr>
               <a:t>직접 인터뷰 5명</a:t>
             </a:r>
-            <a:endParaRPr lang="en-US" sz="950" dirty="0"/>
+            <a:endParaRPr lang="en-US" sz="1100" dirty="0"/>
           </a:p>
         </p:txBody>
       </p:sp>
@@ -11963,14 +11537,14 @@
               <a:buNone/>
             </a:pPr>
             <a:r>
-              <a:rPr lang="en-US" sz="800" dirty="0">
+              <a:rPr lang="en-US" sz="950" dirty="0">
                 <a:solidFill>
                   <a:schemeClr val="accent5"/>
                 </a:solidFill>
               </a:rPr>
               <a:t>박명진</a:t>
             </a:r>
-            <a:endParaRPr lang="en-US" sz="800" dirty="0"/>
+            <a:endParaRPr lang="en-US" sz="950" dirty="0"/>
           </a:p>
         </p:txBody>
       </p:sp>
@@ -12210,14 +11784,14 @@
               <a:buNone/>
             </a:pPr>
             <a:r>
-              <a:rPr lang="en-US" sz="950" dirty="0">
+              <a:rPr lang="en-US" sz="1100" dirty="0">
                 <a:solidFill>
                   <a:schemeClr val="tx1"/>
                 </a:solidFill>
               </a:rPr>
-              <a:t>피드백 반영 1차 (문구 · 화면)</a:t>
-            </a:r>
-            <a:endParaRPr lang="en-US" sz="950" dirty="0"/>
+              <a:t>피드백 반영 1차</a:t>
+            </a:r>
+            <a:endParaRPr lang="en-US" sz="1100" dirty="0"/>
           </a:p>
         </p:txBody>
       </p:sp>
@@ -12246,14 +11820,14 @@
               <a:buNone/>
             </a:pPr>
             <a:r>
-              <a:rPr lang="en-US" sz="800" dirty="0">
+              <a:rPr lang="en-US" sz="950" dirty="0">
                 <a:solidFill>
                   <a:schemeClr val="accent5"/>
                 </a:solidFill>
               </a:rPr>
               <a:t>이지훈</a:t>
             </a:r>
-            <a:endParaRPr lang="en-US" sz="800" dirty="0"/>
+            <a:endParaRPr lang="en-US" sz="950" dirty="0"/>
           </a:p>
         </p:txBody>
       </p:sp>
@@ -12420,7 +11994,7 @@
       </p:sp>
       <p:sp>
         <p:nvSpPr>
-          <p:cNvPr id="56" name="피드백 반영 1차 (문구 · 화면) 막대"/>
+          <p:cNvPr id="56" name="피드백 반영 1차 막대"/>
           <p:cNvSpPr/>
           <p:nvPr/>
         </p:nvSpPr>
@@ -12493,14 +12067,14 @@
               <a:buNone/>
             </a:pPr>
             <a:r>
-              <a:rPr lang="en-US" sz="950" dirty="0">
+              <a:rPr lang="en-US" sz="1100" dirty="0">
                 <a:solidFill>
                   <a:schemeClr val="tx1"/>
                 </a:solidFill>
               </a:rPr>
               <a:t>실제 폰 검증 (아이폰 · 갤럭시)</a:t>
             </a:r>
-            <a:endParaRPr lang="en-US" sz="950" dirty="0"/>
+            <a:endParaRPr lang="en-US" sz="1100" dirty="0"/>
           </a:p>
         </p:txBody>
       </p:sp>
@@ -12529,14 +12103,14 @@
               <a:buNone/>
             </a:pPr>
             <a:r>
-              <a:rPr lang="en-US" sz="800" dirty="0">
+              <a:rPr lang="en-US" sz="950" dirty="0">
                 <a:solidFill>
                   <a:schemeClr val="accent5"/>
                 </a:solidFill>
               </a:rPr>
-              <a:t>이지훈(아이폰) · 박명진(갤럭시 주관)</a:t>
-            </a:r>
-            <a:endParaRPr lang="en-US" sz="800" dirty="0"/>
+              <a:t>이지훈 · 박명진</a:t>
+            </a:r>
+            <a:endParaRPr lang="en-US" sz="950" dirty="0"/>
           </a:p>
         </p:txBody>
       </p:sp>
@@ -12776,14 +12350,14 @@
               <a:buNone/>
             </a:pPr>
             <a:r>
-              <a:rPr lang="en-US" sz="950" dirty="0">
+              <a:rPr lang="en-US" sz="1100" dirty="0">
                 <a:solidFill>
                   <a:schemeClr val="tx1"/>
                 </a:solidFill>
               </a:rPr>
-              <a:t>기록 등록 보강 (내용으로 번호 다시 계산)</a:t>
-            </a:r>
-            <a:endParaRPr lang="en-US" sz="950" dirty="0"/>
+              <a:t>기록 등록 보강</a:t>
+            </a:r>
+            <a:endParaRPr lang="en-US" sz="1100" dirty="0"/>
           </a:p>
         </p:txBody>
       </p:sp>
@@ -12812,14 +12386,14 @@
               <a:buNone/>
             </a:pPr>
             <a:r>
-              <a:rPr lang="en-US" sz="800" dirty="0">
+              <a:rPr lang="en-US" sz="950" dirty="0">
                 <a:solidFill>
                   <a:schemeClr val="accent5"/>
                 </a:solidFill>
               </a:rPr>
               <a:t>이지훈</a:t>
             </a:r>
-            <a:endParaRPr lang="en-US" sz="800" dirty="0"/>
+            <a:endParaRPr lang="en-US" sz="950" dirty="0"/>
           </a:p>
         </p:txBody>
       </p:sp>
@@ -12986,7 +12560,7 @@
       </p:sp>
       <p:sp>
         <p:nvSpPr>
-          <p:cNvPr id="78" name="기록 등록 보강 (내용으로 번호 다시 계산) 막대"/>
+          <p:cNvPr id="78" name="기록 등록 보강 막대"/>
           <p:cNvSpPr/>
           <p:nvPr/>
         </p:nvSpPr>
@@ -13059,14 +12633,14 @@
               <a:buNone/>
             </a:pPr>
             <a:r>
-              <a:rPr lang="en-US" sz="950" dirty="0">
+              <a:rPr lang="en-US" sz="1100" dirty="0">
                 <a:solidFill>
                   <a:schemeClr val="tx1"/>
                 </a:solidFill>
               </a:rPr>
-              <a:t>광고 실험 또는 새 게임 (11/23 설문 결과로 하나를 정함)</a:t>
-            </a:r>
-            <a:endParaRPr lang="en-US" sz="950" dirty="0"/>
+              <a:t>광고 실험 또는 새 게임 (11/23 결정)</a:t>
+            </a:r>
+            <a:endParaRPr lang="en-US" sz="1100" dirty="0"/>
           </a:p>
         </p:txBody>
       </p:sp>
@@ -13095,14 +12669,14 @@
               <a:buNone/>
             </a:pPr>
             <a:r>
-              <a:rPr lang="en-US" sz="800" dirty="0">
+              <a:rPr lang="en-US" sz="950" dirty="0">
                 <a:solidFill>
                   <a:schemeClr val="accent5"/>
                 </a:solidFill>
               </a:rPr>
-              <a:t>손유호(승인 신청) · 이지훈(코드)</a:t>
-            </a:r>
-            <a:endParaRPr lang="en-US" sz="800" dirty="0"/>
+              <a:t>손유호 · 이지훈</a:t>
+            </a:r>
+            <a:endParaRPr lang="en-US" sz="950" dirty="0"/>
           </a:p>
         </p:txBody>
       </p:sp>
@@ -13269,7 +12843,7 @@
       </p:sp>
       <p:sp>
         <p:nvSpPr>
-          <p:cNvPr id="89" name="광고 실험 또는 새 게임 (11/23 설문 결과로 하나를 정함) 막대"/>
+          <p:cNvPr id="89" name="광고 실험 또는 새 게임 (11/23 결정) 막대"/>
           <p:cNvSpPr/>
           <p:nvPr/>
         </p:nvSpPr>
@@ -13342,14 +12916,14 @@
               <a:buNone/>
             </a:pPr>
             <a:r>
-              <a:rPr lang="en-US" sz="950" dirty="0">
+              <a:rPr lang="en-US" sz="1100" dirty="0">
                 <a:solidFill>
                   <a:schemeClr val="tx1"/>
                 </a:solidFill>
               </a:rPr>
               <a:t>최종 보고서 · 발표 준비</a:t>
             </a:r>
-            <a:endParaRPr lang="en-US" sz="950" dirty="0"/>
+            <a:endParaRPr lang="en-US" sz="1100" dirty="0"/>
           </a:p>
         </p:txBody>
       </p:sp>
@@ -13378,14 +12952,14 @@
               <a:buNone/>
             </a:pPr>
             <a:r>
-              <a:rPr lang="en-US" sz="800" dirty="0">
+              <a:rPr lang="en-US" sz="950" dirty="0">
                 <a:solidFill>
                   <a:schemeClr val="accent5"/>
                 </a:solidFill>
               </a:rPr>
               <a:t>전원</a:t>
             </a:r>
-            <a:endParaRPr lang="en-US" sz="800" dirty="0"/>
+            <a:endParaRPr lang="en-US" sz="950" dirty="0"/>
           </a:p>
         </p:txBody>
       </p:sp>
@@ -19924,7 +19498,7 @@
               <a:buNone/>
             </a:pPr>
             <a:r>
-              <a:rPr lang="en-US" sz="1050" b="1" dirty="0">
+              <a:rPr lang="en-US" sz="1150" b="1" dirty="0">
                 <a:solidFill>
                   <a:schemeClr val="tx2"/>
                 </a:solidFill>
@@ -19935,14 +19509,14 @@
               <a:buNone/>
             </a:pPr>
             <a:r>
-              <a:rPr lang="en-US" sz="1050" dirty="0">
+              <a:rPr lang="en-US" sz="1150" dirty="0">
                 <a:solidFill>
                   <a:schemeClr val="tx1"/>
                 </a:solidFill>
               </a:rPr>
-              <a:t>신고 창구가 없어서 덮이는 게 아니다. 말을 꺼낼 근거와 시점이 없어서 덮인다. 알바가드는 그 앞 단계를 채운다. 마지막 줄의 X는 일부러 비웠다  (각 앱 공식 소개 · 리뷰, 2026.9 기준)</a:t>
-            </a:r>
-            <a:endParaRPr lang="en-US" sz="1050" dirty="0"/>
+              <a:t>신고 창구가 없어서가 아니라 말을 꺼낼 근거가 없어서 덮인다. 알바가드는 그 앞 단계를 채운다. 마지막 줄 X는 일부러 비웠다  (공식 소개 · 리뷰, 2026.9)</a:t>
+            </a:r>
+            <a:endParaRPr lang="en-US" sz="1150" dirty="0"/>
           </a:p>
         </p:txBody>
       </p:sp>
@@ -20971,14 +20545,14 @@
               <a:buNone/>
             </a:pPr>
             <a:r>
-              <a:rPr lang="en-US" sz="1000" dirty="0">
+              <a:rPr lang="en-US" sz="1100" dirty="0">
                 <a:solidFill>
                   <a:schemeClr val="accent5"/>
                 </a:solidFill>
               </a:rPr>
               <a:t>근무지만 직접 등록. 기그처럼 사장이 가입할 필요가 없다</a:t>
             </a:r>
-            <a:endParaRPr lang="en-US" sz="1000" dirty="0"/>
+            <a:endParaRPr lang="en-US" sz="1100" dirty="0"/>
           </a:p>
         </p:txBody>
       </p:sp>
@@ -21138,14 +20712,14 @@
               <a:buNone/>
             </a:pPr>
             <a:r>
-              <a:rPr lang="en-US" sz="1000" dirty="0">
+              <a:rPr lang="en-US" sz="1100" dirty="0">
                 <a:solidFill>
                   <a:schemeClr val="accent5"/>
                 </a:solidFill>
               </a:rPr>
               <a:t>실제 받은 돈과 비교해 차액을 찾고, 요청 문구와 증빙 묶음까지 잇는다. 비교한 네 서비스 모두 없는 부분</a:t>
             </a:r>
-            <a:endParaRPr lang="en-US" sz="1000" dirty="0"/>
+            <a:endParaRPr lang="en-US" sz="1100" dirty="0"/>
           </a:p>
         </p:txBody>
       </p:sp>
@@ -21305,14 +20879,14 @@
               <a:buNone/>
             </a:pPr>
             <a:r>
-              <a:rPr lang="en-US" sz="1000" dirty="0">
+              <a:rPr lang="en-US" sz="1100" dirty="0">
                 <a:solidFill>
                   <a:schemeClr val="accent5"/>
                 </a:solidFill>
               </a:rPr>
-              <a:t>기록할 때마다 기록 내용으로 만든 확인 번호가 서버에 남고, 누구나 확인 페이지에서 그 번호의 서버 등록 시각을 볼 수 있다. 내용에서 번호를 다시 계산해 맞춰 보는 방법은 기말까지 만든다. 근무지 · 시각 · 금액은 서버로 가지 않고, "그날 실제로 일했다"까지는 증명하지 못한다</a:t>
-            </a:r>
-            <a:endParaRPr lang="en-US" sz="1000" dirty="0"/>
+              <a:t>기록할 때마다 확인 번호와 서버 등록 시각이 남고, 누구나 확인 페이지에서 등록 시각을 볼 수 있다. 내용으로 번호를 다시 계산하는 방법은 기말까지</a:t>
+            </a:r>
+            <a:endParaRPr lang="en-US" sz="1100" dirty="0"/>
           </a:p>
         </p:txBody>
       </p:sp>
@@ -23217,28 +22791,28 @@
               <a:buNone/>
             </a:pPr>
             <a:r>
-              <a:rPr lang="en-US" sz="1000" b="1" dirty="0">
+              <a:rPr lang="en-US" sz="1100" b="1" dirty="0">
                 <a:solidFill>
                   <a:schemeClr val="tx1"/>
                 </a:solidFill>
               </a:rPr>
               <a:t>화면 (React)</a:t>
             </a:r>
-            <a:endParaRPr lang="en-US" sz="1000" dirty="0"/>
+            <a:endParaRPr lang="en-US" sz="1100" dirty="0"/>
           </a:p>
           <a:p>
             <a:pPr algn="ctr" indent="0" marL="0">
               <a:buNone/>
             </a:pPr>
             <a:r>
-              <a:rPr lang="en-US" sz="900" dirty="0">
+              <a:rPr lang="en-US" sz="1000" dirty="0">
                 <a:solidFill>
                   <a:schemeClr val="accent5"/>
                 </a:solidFill>
               </a:rPr>
               <a:t>근무 기록 · 캘린더 · 급여 비교 · 정산 요청 · 설정</a:t>
             </a:r>
-            <a:endParaRPr lang="en-US" sz="1000" dirty="0"/>
+            <a:endParaRPr lang="en-US" sz="1100" dirty="0"/>
           </a:p>
         </p:txBody>
       </p:sp>
@@ -23318,28 +22892,28 @@
               <a:buNone/>
             </a:pPr>
             <a:r>
-              <a:rPr lang="en-US" sz="1000" b="1" dirty="0">
+              <a:rPr lang="en-US" sz="1100" b="1" dirty="0">
                 <a:solidFill>
                   <a:schemeClr val="tx1"/>
                 </a:solidFill>
               </a:rPr>
               <a:t>계산 모듈</a:t>
             </a:r>
-            <a:endParaRPr lang="en-US" sz="1000" dirty="0"/>
+            <a:endParaRPr lang="en-US" sz="1100" dirty="0"/>
           </a:p>
           <a:p>
             <a:pPr algn="ctr" indent="0" marL="0">
               <a:buNone/>
             </a:pPr>
             <a:r>
-              <a:rPr lang="en-US" sz="900" dirty="0">
+              <a:rPr lang="en-US" sz="1000" dirty="0">
                 <a:solidFill>
                   <a:schemeClr val="accent5"/>
                 </a:solidFill>
               </a:rPr>
-              <a:t>급여(주휴 · 야간) · 예정 vs 실제 · 요청 문구 · PDF · 확인 번호(SHA-256)</a:t>
-            </a:r>
-            <a:endParaRPr lang="en-US" sz="1000" dirty="0"/>
+              <a:t>급여(주휴 · 야간) · 예정 vs 실제 · 요청 문구 · PDF · 확인 번호</a:t>
+            </a:r>
+            <a:endParaRPr lang="en-US" sz="1100" dirty="0"/>
           </a:p>
         </p:txBody>
       </p:sp>
@@ -23419,28 +22993,28 @@
               <a:buNone/>
             </a:pPr>
             <a:r>
-              <a:rPr lang="en-US" sz="1000" b="1" dirty="0">
+              <a:rPr lang="en-US" sz="1100" b="1" dirty="0">
                 <a:solidFill>
                   <a:schemeClr val="tx1"/>
                 </a:solidFill>
               </a:rPr>
               <a:t>저장</a:t>
             </a:r>
-            <a:endParaRPr lang="en-US" sz="1000" dirty="0"/>
+            <a:endParaRPr lang="en-US" sz="1100" dirty="0"/>
           </a:p>
           <a:p>
             <a:pPr algn="ctr" indent="0" marL="0">
               <a:buNone/>
             </a:pPr>
             <a:r>
-              <a:rPr lang="en-US" sz="900" dirty="0">
+              <a:rPr lang="en-US" sz="1000" dirty="0">
                 <a:solidFill>
                   <a:schemeClr val="accent5"/>
                 </a:solidFill>
               </a:rPr>
-              <a:t>localStorage(기록 · 수정 이력) · IndexedDB(증빙 사진)</a:t>
-            </a:r>
-            <a:endParaRPr lang="en-US" sz="1000" dirty="0"/>
+              <a:t>localStorage(기록 · 수정 이력) · IndexedDB(사진)</a:t>
+            </a:r>
+            <a:endParaRPr lang="en-US" sz="1100" dirty="0"/>
           </a:p>
         </p:txBody>
       </p:sp>
@@ -23512,8 +23086,8 @@
         </p:nvSpPr>
         <p:spPr>
           <a:xfrm>
-            <a:off x="3611880" y="1828800"/>
-            <a:ext cx="1417320" cy="475488"/>
+            <a:off x="3611880" y="1783080"/>
+            <a:ext cx="1417320" cy="521208"/>
           </a:xfrm>
           <a:prstGeom prst="rect">
             <a:avLst/>
@@ -23529,28 +23103,28 @@
               <a:buNone/>
             </a:pPr>
             <a:r>
-              <a:rPr lang="en-US" sz="850" b="1" dirty="0">
+              <a:rPr lang="en-US" sz="950" b="1" dirty="0">
                 <a:solidFill>
                   <a:schemeClr val="tx2"/>
                 </a:solidFill>
               </a:rPr>
               <a:t>확인 번호 · 기록 번호</a:t>
             </a:r>
-            <a:endParaRPr lang="en-US" sz="850" dirty="0"/>
+            <a:endParaRPr lang="en-US" sz="950" dirty="0"/>
           </a:p>
           <a:p>
             <a:pPr algn="ctr" indent="0" marL="0">
               <a:buNone/>
             </a:pPr>
             <a:r>
-              <a:rPr lang="en-US" sz="850" b="1" dirty="0">
+              <a:rPr lang="en-US" sz="950" b="1" dirty="0">
                 <a:solidFill>
                   <a:schemeClr val="tx2"/>
                 </a:solidFill>
               </a:rPr>
               <a:t>· 무작위 기기 번호</a:t>
             </a:r>
-            <a:endParaRPr lang="en-US" sz="850" dirty="0"/>
+            <a:endParaRPr lang="en-US" sz="950" dirty="0"/>
           </a:p>
         </p:txBody>
       </p:sp>
@@ -23563,7 +23137,7 @@
         <p:spPr>
           <a:xfrm>
             <a:off x="3611880" y="2377440"/>
-            <a:ext cx="1417320" cy="457200"/>
+            <a:ext cx="1417320" cy="502920"/>
           </a:xfrm>
           <a:prstGeom prst="rect">
             <a:avLst/>
@@ -23579,28 +23153,28 @@
               <a:buNone/>
             </a:pPr>
             <a:r>
-              <a:rPr lang="en-US" sz="850" dirty="0">
+              <a:rPr lang="en-US" sz="950" dirty="0">
                 <a:solidFill>
                   <a:schemeClr val="accent3"/>
                 </a:solidFill>
               </a:rPr>
               <a:t>근무지 · 시각 · 금액은</a:t>
             </a:r>
-            <a:endParaRPr lang="en-US" sz="850" dirty="0"/>
+            <a:endParaRPr lang="en-US" sz="950" dirty="0"/>
           </a:p>
           <a:p>
             <a:pPr algn="ctr" indent="0" marL="0">
               <a:buNone/>
             </a:pPr>
             <a:r>
-              <a:rPr lang="en-US" sz="850" dirty="0">
+              <a:rPr lang="en-US" sz="950" dirty="0">
                 <a:solidFill>
                   <a:schemeClr val="accent3"/>
                 </a:solidFill>
               </a:rPr>
               <a:t>가지 않음</a:t>
             </a:r>
-            <a:endParaRPr lang="en-US" sz="850" dirty="0"/>
+            <a:endParaRPr lang="en-US" sz="950" dirty="0"/>
           </a:p>
         </p:txBody>
       </p:sp>
@@ -23659,14 +23233,14 @@
               <a:buNone/>
             </a:pPr>
             <a:r>
-              <a:rPr lang="en-US" sz="1050" b="1" dirty="0">
+              <a:rPr lang="en-US" sz="1100" b="1" dirty="0">
                 <a:solidFill>
                   <a:schemeClr val="tx2"/>
                 </a:solidFill>
               </a:rPr>
               <a:t>Supabase</a:t>
             </a:r>
-            <a:endParaRPr lang="en-US" sz="1050" dirty="0"/>
+            <a:endParaRPr lang="en-US" sz="1100" dirty="0"/>
           </a:p>
           <a:p>
             <a:pPr indent="0" marL="0">
@@ -23676,14 +23250,14 @@
               <a:buNone/>
             </a:pPr>
             <a:r>
-              <a:rPr lang="en-US" sz="1050" b="1" dirty="0">
+              <a:rPr lang="en-US" sz="1100" b="1" dirty="0">
                 <a:solidFill>
                   <a:schemeClr val="tx1"/>
                 </a:solidFill>
               </a:rPr>
               <a:t>stamps 표</a:t>
             </a:r>
-            <a:endParaRPr lang="en-US" sz="1050" dirty="0"/>
+            <a:endParaRPr lang="en-US" sz="1100" dirty="0"/>
           </a:p>
           <a:p>
             <a:pPr indent="0" marL="0">
@@ -23693,14 +23267,14 @@
               <a:buNone/>
             </a:pPr>
             <a:r>
-              <a:rPr lang="en-US" sz="900" dirty="0">
+              <a:rPr lang="en-US" sz="1000" dirty="0">
                 <a:solidFill>
                   <a:schemeClr val="accent5"/>
                 </a:solidFill>
               </a:rPr>
-              <a:t>확인 번호 · 기록 번호 · 무작위 기기 번호 · 서버 등록 시각</a:t>
-            </a:r>
-            <a:endParaRPr lang="en-US" sz="1050" dirty="0"/>
+              <a:t>확인 번호 · 기록 번호 · 기기 번호 · 등록 시각</a:t>
+            </a:r>
+            <a:endParaRPr lang="en-US" sz="1100" dirty="0"/>
           </a:p>
           <a:p>
             <a:pPr indent="0" marL="0">
@@ -23710,14 +23284,14 @@
               <a:buNone/>
             </a:pPr>
             <a:r>
-              <a:rPr lang="en-US" sz="900" dirty="0">
+              <a:rPr lang="en-US" sz="1000" dirty="0">
                 <a:solidFill>
                   <a:schemeClr val="accent5"/>
                 </a:solidFill>
               </a:rPr>
-              <a:t>공개 키로는 넣기 · 읽기만(RLS). 시각은 트리거가 서버 시각으로 강제</a:t>
-            </a:r>
-            <a:endParaRPr lang="en-US" sz="1050" dirty="0"/>
+              <a:t>공개 키로는 넣기 · 읽기만(RLS). 시각은 서버가 찍음</a:t>
+            </a:r>
+            <a:endParaRPr lang="en-US" sz="1100" dirty="0"/>
           </a:p>
           <a:p>
             <a:pPr indent="0" marL="0">
@@ -23727,14 +23301,14 @@
               <a:buNone/>
             </a:pPr>
             <a:r>
-              <a:rPr lang="en-US" sz="850" b="1" dirty="0">
+              <a:rPr lang="en-US" sz="950" b="1" dirty="0">
                 <a:solidFill>
                   <a:schemeClr val="accent2"/>
                 </a:solidFill>
               </a:rPr>
-              <a:t>확인함: 2000년 시각을 보내도 서버 시각으로 저장 · 수정 · 삭제 요청은 거부(401)</a:t>
-            </a:r>
-            <a:endParaRPr lang="en-US" sz="1050" dirty="0"/>
+              <a:t>확인함: 수정 · 삭제 요청은 401로 거부, 2000년 시각을 보내도 서버 시각</a:t>
+            </a:r>
+            <a:endParaRPr lang="en-US" sz="1100" dirty="0"/>
           </a:p>
         </p:txBody>
       </p:sp>
@@ -23850,28 +23424,28 @@
               <a:buNone/>
             </a:pPr>
             <a:r>
-              <a:rPr lang="en-US" sz="1050" b="1" dirty="0">
+              <a:rPr lang="en-US" sz="1100" b="1" dirty="0">
                 <a:solidFill>
                   <a:schemeClr val="tx2"/>
                 </a:solidFill>
               </a:rPr>
               <a:t>확인 페이지 (verify.html)</a:t>
             </a:r>
-            <a:endParaRPr lang="en-US" sz="1050" dirty="0"/>
+            <a:endParaRPr lang="en-US" sz="1100" dirty="0"/>
           </a:p>
           <a:p>
             <a:pPr indent="0" marL="0">
               <a:buNone/>
             </a:pPr>
             <a:r>
-              <a:rPr lang="en-US" sz="900" dirty="0">
+              <a:rPr lang="en-US" sz="1000" dirty="0">
                 <a:solidFill>
                   <a:schemeClr val="accent5"/>
                 </a:solidFill>
               </a:rPr>
-              <a:t>누구나 확인 번호 → 서버 등록 시각. 앱 데이터 없이 동작</a:t>
-            </a:r>
-            <a:endParaRPr lang="en-US" sz="1050" dirty="0"/>
+              <a:t>누구나 확인 번호 → 등록 시각. 앱 데이터 없이 동작</a:t>
+            </a:r>
+            <a:endParaRPr lang="en-US" sz="1100" dirty="0"/>
           </a:p>
         </p:txBody>
       </p:sp>
@@ -23919,8 +23493,8 @@
         </p:nvSpPr>
         <p:spPr>
           <a:xfrm>
-            <a:off x="7223760" y="1627632"/>
-            <a:ext cx="219456" cy="219456"/>
+            <a:off x="7223760" y="1664208"/>
+            <a:ext cx="237744" cy="237744"/>
           </a:xfrm>
           <a:prstGeom prst="ellipse">
             <a:avLst/>
@@ -23944,8 +23518,8 @@
         </p:nvSpPr>
         <p:spPr>
           <a:xfrm>
-            <a:off x="7223760" y="1627632"/>
-            <a:ext cx="219456" cy="219456"/>
+            <a:off x="7223760" y="1664208"/>
+            <a:ext cx="237744" cy="237744"/>
           </a:xfrm>
           <a:prstGeom prst="rect">
             <a:avLst/>
@@ -23961,14 +23535,14 @@
               <a:buNone/>
             </a:pPr>
             <a:r>
-              <a:rPr lang="en-US" sz="850" b="1" dirty="0">
+              <a:rPr lang="en-US" sz="900" b="1" dirty="0">
                 <a:solidFill>
                   <a:schemeClr val="bg1"/>
                 </a:solidFill>
               </a:rPr>
               <a:t>1</a:t>
             </a:r>
-            <a:endParaRPr lang="en-US" sz="850" dirty="0"/>
+            <a:endParaRPr lang="en-US" sz="900" dirty="0"/>
           </a:p>
         </p:txBody>
       </p:sp>
@@ -23980,8 +23554,8 @@
         </p:nvSpPr>
         <p:spPr>
           <a:xfrm>
-            <a:off x="7498080" y="1572768"/>
-            <a:ext cx="1280160" cy="548640"/>
+            <a:off x="7516368" y="1609344"/>
+            <a:ext cx="1234440" cy="777240"/>
           </a:xfrm>
           <a:prstGeom prst="rect">
             <a:avLst/>
@@ -23997,14 +23571,14 @@
               <a:buNone/>
             </a:pPr>
             <a:r>
-              <a:rPr lang="en-US" sz="850" dirty="0">
+              <a:rPr lang="en-US" sz="1000" dirty="0">
                 <a:solidFill>
                   <a:schemeClr val="tx1"/>
                 </a:solidFill>
               </a:rPr>
-              <a:t>출근 버튼: 기록 번호를 만들고 출근 시각 기록의 확인 번호 등록</a:t>
-            </a:r>
-            <a:endParaRPr lang="en-US" sz="850" dirty="0"/>
+              <a:t>출근 · 퇴근 버튼마다 확인 번호를 등록</a:t>
+            </a:r>
+            <a:endParaRPr lang="en-US" sz="1000" dirty="0"/>
           </a:p>
         </p:txBody>
       </p:sp>
@@ -24016,8 +23590,8 @@
         </p:nvSpPr>
         <p:spPr>
           <a:xfrm>
-            <a:off x="7223760" y="2194560"/>
-            <a:ext cx="219456" cy="219456"/>
+            <a:off x="7223760" y="2532888"/>
+            <a:ext cx="237744" cy="237744"/>
           </a:xfrm>
           <a:prstGeom prst="ellipse">
             <a:avLst/>
@@ -24041,8 +23615,8 @@
         </p:nvSpPr>
         <p:spPr>
           <a:xfrm>
-            <a:off x="7223760" y="2194560"/>
-            <a:ext cx="219456" cy="219456"/>
+            <a:off x="7223760" y="2532888"/>
+            <a:ext cx="237744" cy="237744"/>
           </a:xfrm>
           <a:prstGeom prst="rect">
             <a:avLst/>
@@ -24058,14 +23632,14 @@
               <a:buNone/>
             </a:pPr>
             <a:r>
-              <a:rPr lang="en-US" sz="850" b="1" dirty="0">
+              <a:rPr lang="en-US" sz="900" b="1" dirty="0">
                 <a:solidFill>
                   <a:schemeClr val="bg1"/>
                 </a:solidFill>
               </a:rPr>
               <a:t>2</a:t>
             </a:r>
-            <a:endParaRPr lang="en-US" sz="850" dirty="0"/>
+            <a:endParaRPr lang="en-US" sz="900" dirty="0"/>
           </a:p>
         </p:txBody>
       </p:sp>
@@ -24077,8 +23651,8 @@
         </p:nvSpPr>
         <p:spPr>
           <a:xfrm>
-            <a:off x="7498080" y="2139696"/>
-            <a:ext cx="1280160" cy="548640"/>
+            <a:off x="7516368" y="2478024"/>
+            <a:ext cx="1234440" cy="777240"/>
           </a:xfrm>
           <a:prstGeom prst="rect">
             <a:avLst/>
@@ -24094,14 +23668,14 @@
               <a:buNone/>
             </a:pPr>
             <a:r>
-              <a:rPr lang="en-US" sz="850" dirty="0">
+              <a:rPr lang="en-US" sz="1000" dirty="0">
                 <a:solidFill>
                   <a:schemeClr val="tx1"/>
                 </a:solidFill>
               </a:rPr>
-              <a:t>퇴근 버튼: 완성된 기록의 확인 번호 등록</a:t>
-            </a:r>
-            <a:endParaRPr lang="en-US" sz="850" dirty="0"/>
+              <a:t>고치면 새 내용으로 다시 등록 (줄이 늘어남)</a:t>
+            </a:r>
+            <a:endParaRPr lang="en-US" sz="1000" dirty="0"/>
           </a:p>
         </p:txBody>
       </p:sp>
@@ -24113,8 +23687,8 @@
         </p:nvSpPr>
         <p:spPr>
           <a:xfrm>
-            <a:off x="7223760" y="2761488"/>
-            <a:ext cx="219456" cy="219456"/>
+            <a:off x="7223760" y="3401568"/>
+            <a:ext cx="237744" cy="237744"/>
           </a:xfrm>
           <a:prstGeom prst="ellipse">
             <a:avLst/>
@@ -24138,8 +23712,8 @@
         </p:nvSpPr>
         <p:spPr>
           <a:xfrm>
-            <a:off x="7223760" y="2761488"/>
-            <a:ext cx="219456" cy="219456"/>
+            <a:off x="7223760" y="3401568"/>
+            <a:ext cx="237744" cy="237744"/>
           </a:xfrm>
           <a:prstGeom prst="rect">
             <a:avLst/>
@@ -24155,14 +23729,14 @@
               <a:buNone/>
             </a:pPr>
             <a:r>
-              <a:rPr lang="en-US" sz="850" b="1" dirty="0">
+              <a:rPr lang="en-US" sz="900" b="1" dirty="0">
                 <a:solidFill>
                   <a:schemeClr val="bg1"/>
                 </a:solidFill>
               </a:rPr>
               <a:t>3</a:t>
             </a:r>
-            <a:endParaRPr lang="en-US" sz="850" dirty="0"/>
+            <a:endParaRPr lang="en-US" sz="900" dirty="0"/>
           </a:p>
         </p:txBody>
       </p:sp>
@@ -24174,8 +23748,8 @@
         </p:nvSpPr>
         <p:spPr>
           <a:xfrm>
-            <a:off x="7498080" y="2706624"/>
-            <a:ext cx="1280160" cy="548640"/>
+            <a:off x="7516368" y="3346704"/>
+            <a:ext cx="1234440" cy="777240"/>
           </a:xfrm>
           <a:prstGeom prst="rect">
             <a:avLst/>
@@ -24191,244 +23765,14 @@
               <a:buNone/>
             </a:pPr>
             <a:r>
-              <a:rPr lang="en-US" sz="850" dirty="0">
+              <a:rPr lang="en-US" sz="1000" dirty="0">
                 <a:solidFill>
                   <a:schemeClr val="tx1"/>
                 </a:solidFill>
               </a:rPr>
-              <a:t>수정 · 삭제: 수정 이력이 붙은 새 내용으로 다시 등록 (줄이 늘어남)</a:t>
-            </a:r>
-            <a:endParaRPr lang="en-US" sz="850" dirty="0"/>
-          </a:p>
-        </p:txBody>
-      </p:sp>
-      <p:sp>
-        <p:nvSpPr>
-          <p:cNvPr id="34" name="번호 4"/>
-          <p:cNvSpPr/>
-          <p:nvPr/>
-        </p:nvSpPr>
-        <p:spPr>
-          <a:xfrm>
-            <a:off x="7223760" y="3328416"/>
-            <a:ext cx="219456" cy="219456"/>
-          </a:xfrm>
-          <a:prstGeom prst="ellipse">
-            <a:avLst/>
-          </a:prstGeom>
-          <a:solidFill>
-            <a:schemeClr val="accent1"/>
-          </a:solidFill>
-          <a:ln w="12700">
-            <a:solidFill>
-              <a:schemeClr val="accent1"/>
-            </a:solidFill>
-            <a:prstDash val="solid"/>
-          </a:ln>
-        </p:spPr>
-      </p:sp>
-      <p:sp>
-        <p:nvSpPr>
-          <p:cNvPr id="35" name="Text 33"/>
-          <p:cNvSpPr txBox="1"/>
-          <p:nvPr/>
-        </p:nvSpPr>
-        <p:spPr>
-          <a:xfrm>
-            <a:off x="7223760" y="3328416"/>
-            <a:ext cx="219456" cy="219456"/>
-          </a:xfrm>
-          <a:prstGeom prst="rect">
-            <a:avLst/>
-          </a:prstGeom>
-          <a:noFill/>
-          <a:ln/>
-        </p:spPr>
-        <p:txBody>
-          <a:bodyPr wrap="square" lIns="0" tIns="0" rIns="0" bIns="0" rtlCol="0" anchor="ctr"/>
-          <a:lstStyle/>
-          <a:p>
-            <a:pPr algn="ctr" indent="0" marL="0">
-              <a:buNone/>
-            </a:pPr>
-            <a:r>
-              <a:rPr lang="en-US" sz="850" b="1" dirty="0">
-                <a:solidFill>
-                  <a:schemeClr val="bg1"/>
-                </a:solidFill>
-              </a:rPr>
-              <a:t>4</a:t>
-            </a:r>
-            <a:endParaRPr lang="en-US" sz="850" dirty="0"/>
-          </a:p>
-        </p:txBody>
-      </p:sp>
-      <p:sp>
-        <p:nvSpPr>
-          <p:cNvPr id="36" name="Text 34"/>
-          <p:cNvSpPr txBox="1"/>
-          <p:nvPr/>
-        </p:nvSpPr>
-        <p:spPr>
-          <a:xfrm>
-            <a:off x="7498080" y="3273552"/>
-            <a:ext cx="1280160" cy="548640"/>
-          </a:xfrm>
-          <a:prstGeom prst="rect">
-            <a:avLst/>
-          </a:prstGeom>
-          <a:noFill/>
-          <a:ln/>
-        </p:spPr>
-        <p:txBody>
-          <a:bodyPr wrap="square" lIns="0" tIns="0" rIns="0" bIns="0" rtlCol="0" anchor="t"/>
-          <a:lstStyle/>
-          <a:p>
-            <a:pPr indent="0" marL="0">
-              <a:buNone/>
-            </a:pPr>
-            <a:r>
-              <a:rPr lang="en-US" sz="850" dirty="0">
-                <a:solidFill>
-                  <a:schemeClr val="tx1"/>
-                </a:solidFill>
-              </a:rPr>
-              <a:t>인터넷이 없으면 대기열에 두었다가 연결되면 전송</a:t>
-            </a:r>
-            <a:endParaRPr lang="en-US" sz="850" dirty="0"/>
-          </a:p>
-        </p:txBody>
-      </p:sp>
-      <p:sp>
-        <p:nvSpPr>
-          <p:cNvPr id="37" name="번호 5"/>
-          <p:cNvSpPr/>
-          <p:nvPr/>
-        </p:nvSpPr>
-        <p:spPr>
-          <a:xfrm>
-            <a:off x="7223760" y="3895344"/>
-            <a:ext cx="219456" cy="219456"/>
-          </a:xfrm>
-          <a:prstGeom prst="ellipse">
-            <a:avLst/>
-          </a:prstGeom>
-          <a:solidFill>
-            <a:schemeClr val="accent1"/>
-          </a:solidFill>
-          <a:ln w="12700">
-            <a:solidFill>
-              <a:schemeClr val="accent1"/>
-            </a:solidFill>
-            <a:prstDash val="solid"/>
-          </a:ln>
-        </p:spPr>
-      </p:sp>
-      <p:sp>
-        <p:nvSpPr>
-          <p:cNvPr id="38" name="Text 36"/>
-          <p:cNvSpPr txBox="1"/>
-          <p:nvPr/>
-        </p:nvSpPr>
-        <p:spPr>
-          <a:xfrm>
-            <a:off x="7223760" y="3895344"/>
-            <a:ext cx="219456" cy="219456"/>
-          </a:xfrm>
-          <a:prstGeom prst="rect">
-            <a:avLst/>
-          </a:prstGeom>
-          <a:noFill/>
-          <a:ln/>
-        </p:spPr>
-        <p:txBody>
-          <a:bodyPr wrap="square" lIns="0" tIns="0" rIns="0" bIns="0" rtlCol="0" anchor="ctr"/>
-          <a:lstStyle/>
-          <a:p>
-            <a:pPr algn="ctr" indent="0" marL="0">
-              <a:buNone/>
-            </a:pPr>
-            <a:r>
-              <a:rPr lang="en-US" sz="850" b="1" dirty="0">
-                <a:solidFill>
-                  <a:schemeClr val="bg1"/>
-                </a:solidFill>
-              </a:rPr>
-              <a:t>5</a:t>
-            </a:r>
-            <a:endParaRPr lang="en-US" sz="850" dirty="0"/>
-          </a:p>
-        </p:txBody>
-      </p:sp>
-      <p:sp>
-        <p:nvSpPr>
-          <p:cNvPr id="39" name="Text 37"/>
-          <p:cNvSpPr txBox="1"/>
-          <p:nvPr/>
-        </p:nvSpPr>
-        <p:spPr>
-          <a:xfrm>
-            <a:off x="7498080" y="3840480"/>
-            <a:ext cx="1280160" cy="548640"/>
-          </a:xfrm>
-          <a:prstGeom prst="rect">
-            <a:avLst/>
-          </a:prstGeom>
-          <a:noFill/>
-          <a:ln/>
-        </p:spPr>
-        <p:txBody>
-          <a:bodyPr wrap="square" lIns="0" tIns="0" rIns="0" bIns="0" rtlCol="0" anchor="t"/>
-          <a:lstStyle/>
-          <a:p>
-            <a:pPr indent="0" marL="0">
-              <a:buNone/>
-            </a:pPr>
-            <a:r>
-              <a:rPr lang="en-US" sz="850" dirty="0">
-                <a:solidFill>
-                  <a:schemeClr val="tx1"/>
-                </a:solidFill>
-              </a:rPr>
-              <a:t>증빙 묶음 PDF 7번 표에 기록별 확인 번호 · 등록 시각</a:t>
-            </a:r>
-            <a:endParaRPr lang="en-US" sz="850" dirty="0"/>
-          </a:p>
-        </p:txBody>
-      </p:sp>
-      <p:sp>
-        <p:nvSpPr>
-          <p:cNvPr id="40" name="Text 38"/>
-          <p:cNvSpPr txBox="1"/>
-          <p:nvPr/>
-        </p:nvSpPr>
-        <p:spPr>
-          <a:xfrm>
-            <a:off x="457200" y="4498848"/>
-            <a:ext cx="8229600" cy="256032"/>
-          </a:xfrm>
-          <a:prstGeom prst="rect">
-            <a:avLst/>
-          </a:prstGeom>
-          <a:noFill/>
-          <a:ln/>
-        </p:spPr>
-        <p:txBody>
-          <a:bodyPr wrap="square" lIns="0" tIns="0" rIns="0" bIns="0" rtlCol="0" anchor="t"/>
-          <a:lstStyle/>
-          <a:p>
-            <a:pPr indent="0" marL="0">
-              <a:buNone/>
-            </a:pPr>
-            <a:r>
-              <a:rPr lang="en-US" sz="900" dirty="0">
-                <a:solidFill>
-                  <a:schemeClr val="accent5"/>
-                </a:solidFill>
-              </a:rPr>
-              <a:t>배포: GitHub main → Actions → Pages (링크 하나로 설치)  ·  설문: survey.html → Supabase survey 표(넣기 · 읽기만) → 결과 페이지 자동 집계</a:t>
-            </a:r>
-            <a:endParaRPr lang="en-US" sz="900" dirty="0"/>
+              <a:t>인터넷이 없으면 대기열, 연결되면 전송</a:t>
+            </a:r>
+            <a:endParaRPr lang="en-US" sz="1000" dirty="0"/>
           </a:p>
         </p:txBody>
       </p:sp>

--- a/docs/06_중간발표_PPT.pptx
+++ b/docs/06_중간발표_PPT.pptx
@@ -124,50 +124,50 @@
   <p:extLst>
     <p:ext uri="{521415D9-36F7-43E2-AB2F-B90AF26B5E84}">
       <p14:sectionLst xmlns:p14="http://schemas.microsoft.com/office/powerpoint/2010/main">
-        <p14:section name="① 표지·팀 소개" id="{b9e57f7a-e469-4d96-1ff8-b263765c9e1c}">
+        <p14:section name="① 표지·팀 소개" id="{ec53a7be-408c-c374-ee0a-114eac084b8f}">
           <p14:sldIdLst>
             <p14:sldId id="256"/>
             <p14:sldId id="257"/>
           </p14:sldIdLst>
         </p14:section>
-        <p14:section name="② 문제 정의" id="{63f975fe-e5de-4bc4-be8c-8abac6b676ab}">
+        <p14:section name="② 문제 정의" id="{02ac60bc-af25-59f0-8fb1-b504c363dda2}">
           <p14:sldIdLst>
             <p14:sldId id="258"/>
             <p14:sldId id="259"/>
           </p14:sldIdLst>
         </p14:section>
-        <p14:section name="③ 솔루션·핵심 가치" id="{a81e829c-c8ae-47ff-6d0d-7c6b52a1f925}">
+        <p14:section name="③ 솔루션·핵심 가치" id="{d969fb83-84b1-d9d6-0d89-6fc30766b7d4}">
           <p14:sldIdLst>
             <p14:sldId id="260"/>
             <p14:sldId id="261"/>
           </p14:sldIdLst>
         </p14:section>
-        <p14:section name="④ SW 기술 아키텍처" id="{13864d42-7b2c-592c-094a-5bf93f7796bf}">
+        <p14:section name="④ SW 기술 아키텍처" id="{1bcb7e27-4481-b37f-59bd-307c9b08bed0}">
           <p14:sldIdLst>
             <p14:sldId id="262"/>
             <p14:sldId id="263"/>
           </p14:sldIdLst>
         </p14:section>
-        <p14:section name="⑤ 개발 현황·MVP 시연" id="{ba6c3f31-f904-9f69-7b75-a9ea50225a41}">
+        <p14:section name="⑤ 개발 현황·MVP 시연" id="{f0cb10e9-5550-7b43-ef12-e2af3cd7fa68}">
           <p14:sldIdLst>
             <p14:sldId id="264"/>
             <p14:sldId id="265"/>
             <p14:sldId id="266"/>
           </p14:sldIdLst>
         </p14:section>
-        <p14:section name="⑥ 시장 분석·비즈니스 모델" id="{1c97dec4-5eee-a969-cc16-9a5b8a0b3401}">
+        <p14:section name="⑥ 시장 분석·비즈니스 모델" id="{138b85e9-3568-6a1a-afb9-3fb7c7f4a211}">
           <p14:sldIdLst>
             <p14:sldId id="267"/>
             <p14:sldId id="268"/>
             <p14:sldId id="269"/>
           </p14:sldIdLst>
         </p14:section>
-        <p14:section name="⑦ 초기 시장 검증" id="{1807c99a-39db-fc39-acff-364a9a83046e}">
+        <p14:section name="⑦ 초기 시장 검증" id="{dd539450-a73a-433c-b60e-556700d51afd}">
           <p14:sldIdLst>
             <p14:sldId id="270"/>
           </p14:sldIdLst>
         </p14:section>
-        <p14:section name="⑧ 향후 계획·팀 역량" id="{f713e2a2-fcda-e00c-fa19-72b107ca0197}">
+        <p14:section name="⑧ 향후 계획·팀 역량" id="{13914e38-f9ed-c769-32db-203ebb4bcce0}">
           <p14:sldIdLst>
             <p14:sldId id="271"/>
             <p14:sldId id="272"/>
@@ -1452,7 +1452,7 @@
           <a:p>
             <a:r>
               <a:rPr lang="en-US" dirty="0"/>
-              <a:t>박명진. 7주 일정이고 빨간 마름모가 마일스톤입니다. 설문은 오늘 이 자리에서 시작해 11/16까지 손유호가 30명을 모으고, 인터뷰 5명은 제가 11/3~11/9에 합니다. 폰 검증은 아이폰은 팀장, 갤럭시는 제가 주관합니다. 광고 승인 신청은 손유호, 코드는 팀장입니다. 마일스톤: 11/9 설문 1차 집계 · 인터뷰 마감, 11/23 피드백 반영 배포와 광고 결정, 11/30 폰 검증 끝, 12/7 기록 등록 보강 배포와 기능 동결, 12/15 기말. 11/23에 설문의 광고 문항 결과로 광고 실험과 새 게임 중 하나를 정합니다. 12/7 이후에는 코드를 바꾸지 않고 보고서와 발표를 준비합니다. 위험과 대안은 보고서 5.4에 적었습니다.</a:t>
+              <a:t>박명진. 7주 일정이고 빨간 마름모가 마일스톤입니다. 설문은 오늘 이 자리에서 시작해 11/16까지 손유호가 30명을 모으고, 인터뷰 5명은 11/3~11/9에 손유호 3명, 제가 2명을 합니다. 폰 검증은 아이폰은 팀장, 갤럭시는 제가 주관합니다. 광고 승인 신청은 손유호, 코드는 팀장입니다. 마일스톤: 11/9 설문 1차 집계 · 인터뷰 마감, 11/23 피드백 반영 배포와 광고 결정, 11/30 폰 검증 끝, 12/7 기록 등록 보강 배포와 기능 동결, 12/15 기말. 11/23에 설문의 광고 문항 결과로 광고 실험과 새 게임 중 하나를 정합니다. 12/7 이후에는 코드를 바꾸지 않고 보고서와 발표를 준비합니다. 위험과 대안은 보고서 5.4에 적었습니다.</a:t>
             </a:r>
             <a:endParaRPr lang="en-US" dirty="0"/>
           </a:p>
@@ -1540,7 +1540,7 @@
           <a:p>
             <a:r>
               <a:rPr lang="en-US" dirty="0"/>
-              <a:t>박명진. 역할은 앞으로 맡는 일과 오늘 발표한 장이 같습니다. 솔직하게: 지금까지는 팀장이 만들었고, 오늘부터 셋이 나눠 맡습니다. 다음 장으로 넘겨 팀장이 마무리합니다.</a:t>
+              <a:t>박명진. 역할은 앞으로 맡는 일과 오늘 발표한 장이 같습니다. 개발은 팀장, 시장과 설문 · 인터뷰 3명은 손유호, 인터뷰 2명과 갤럭시 테스트 · 일정 · 보고서는 저입니다. 다음 장으로 넘겨 팀장이 마무리합니다.</a:t>
             </a:r>
             <a:endParaRPr lang="en-US" dirty="0"/>
           </a:p>
@@ -1642,7 +1642,7 @@
 · 같은 과 학생 설문이 무슨 의미? 편향 아닌가? → 맞다. "정식 조사 아님"을 적고 사람 수로만 말한다. 중복 응답도 막지 않았다(이름 · 기기 정보를 안 받는 대가). 11월 30명은 과 밖에서, 인터뷰 5명으로 이유를 듣는다.
 · 법률 서비스 아닌가? → 무료, 본인 기록을 정해진 양식에 채울 뿐, 개별 사안 검토 · 대행 없음, 진정은 1350 · 노동포털로 연결만.
 · 수익은? → 게임 화면 광고(가설). 운영 비용은 0원. 문서 유료화는 안 한다.
-· 팀원은 뭘 했나? → 지금까지는 이지훈이 개발. 오늘부터 시장 · 설문(손유호), 인터뷰 · 검증 · 일정(박명진).</a:t>
+· 팀원은 뭘 했나? → 개발은 이지훈. 시장 · 설문 · 인터뷰 3명은 손유호, 인터뷰 2명 · 갤럭시 테스트 · 일정 · 보고서는 박명진.</a:t>
             </a:r>
             <a:endParaRPr lang="en-US" dirty="0"/>
           </a:p>
@@ -1730,7 +1730,7 @@
           <a:p>
             <a:r>
               <a:rPr lang="en-US" dirty="0"/>
-              <a:t>팀장. "교수님이 아직 구현 전일 거라 하셨는데, 저희는 웹앱이라 만드는 비용이 낮아서 먼저 만들어 보고 검증하는 순서를 택했습니다. 오늘 보여 드리는 건 완성품이 아니라 검증용 도구입니다." 사용자 검증은 11월에 합니다. 오른쪽 QR은 앱과 설문입니다. 설문은 이름을 받지 않고 3분이라, 들으시면서 답해 주셔도 됩니다. 역할은 솔직하게: 지금까지는 제가 만들었고, 오늘부터 팀원이 시장과 검증을 맡습니다.</a:t>
+              <a:t>팀장. "교수님이 아직 구현 전일 거라 하셨는데, 저희는 웹앱이라 만드는 비용이 낮아서 먼저 만들어 보고 검증하는 순서를 택했습니다. 오늘 보여 드리는 건 완성품이 아니라 검증용 도구입니다." 사용자 검증은 11월에 합니다. 오른쪽 QR은 앱과 설문입니다. 설문은 이름을 받지 않고 3분이라, 들으시면서 답해 주셔도 됩니다. 역할은 개발 이지훈, 시장 · 수익 손유호, 검증 · 일정 박명진이고 발표도 그 순서입니다.</a:t>
             </a:r>
             <a:endParaRPr lang="en-US" dirty="0"/>
           </a:p>
@@ -3729,7 +3729,7 @@
                   <a:schemeClr val="tx2"/>
                 </a:solidFill>
               </a:rPr>
-              <a:t>지금 보여 드리는 것 (약 3분, 실제 배포된 앱으로)</a:t>
+              <a:t>시연 순서 (실제 배포된 앱으로, 약 3분)</a:t>
             </a:r>
             <a:endParaRPr lang="en-US" sz="2400" dirty="0"/>
           </a:p>
@@ -8112,16 +8112,16 @@
         <p:spPr>
           <a:xfrm>
             <a:off x="5943600" y="1371600"/>
-            <a:ext cx="2743200" cy="320040"/>
-          </a:xfrm>
-          <a:prstGeom prst="rect">
-            <a:avLst/>
-          </a:prstGeom>
-          <a:noFill/>
-          <a:ln/>
-        </p:spPr>
-        <p:txBody>
-          <a:bodyPr wrap="square" lIns="0" tIns="0" rIns="0" bIns="0" rtlCol="0" anchor="ctr"/>
+            <a:ext cx="2743200" cy="548640"/>
+          </a:xfrm>
+          <a:prstGeom prst="rect">
+            <a:avLst/>
+          </a:prstGeom>
+          <a:noFill/>
+          <a:ln/>
+        </p:spPr>
+        <p:txBody>
+          <a:bodyPr wrap="square" lIns="0" tIns="0" rIns="0" bIns="0" rtlCol="0" anchor="t"/>
           <a:lstStyle/>
           <a:p>
             <a:pPr indent="0" marL="0">
@@ -8133,7 +8133,7 @@
                   <a:schemeClr val="tx2"/>
                 </a:solidFill>
               </a:rPr>
-              <a:t>왼쪽 위가 비어 있다</a:t>
+              <a:t>혼자 쓰면서 대응까지 가는 서비스가 없다</a:t>
             </a:r>
             <a:endParaRPr lang="en-US" sz="1300" dirty="0"/>
           </a:p>
@@ -8147,8 +8147,8 @@
         </p:nvSpPr>
         <p:spPr>
           <a:xfrm>
-            <a:off x="5943600" y="1737360"/>
-            <a:ext cx="2743200" cy="2560320"/>
+            <a:off x="5943600" y="1965960"/>
+            <a:ext cx="2743200" cy="2377440"/>
           </a:xfrm>
           <a:prstGeom prst="rect">
             <a:avLst/>
@@ -8169,7 +8169,7 @@
                   <a:schemeClr val="tx1"/>
                 </a:solidFill>
               </a:rPr>
-              <a:t>혼자 쓰면서 대응까지 가는 서비스가 없다. 하우머치 · 계산기는 계산에서 멈추고, 기그는 사장이 있어야 하고, 진정24는 증거가 있어야 한다.</a:t>
+              <a:t>하우머치 · 계산기는 계산에서 멈추고, 기그는 사장이 있어야 하고, 진정24는 증거가 있어야 한다. 그래서 2×2의 왼쪽 위 칸이 비어 있다.</a:t>
             </a:r>
             <a:endParaRPr lang="en-US" sz="1050" dirty="0"/>
           </a:p>
@@ -9105,7 +9105,7 @@
                   <a:schemeClr val="tx2"/>
                 </a:solidFill>
               </a:rPr>
-              <a:t>확인할 가설 하나, 11월에 재는 법 다섯</a:t>
+              <a:t>검증 계획: 가설 하나를 11월에 다섯 가지로 잰다</a:t>
             </a:r>
             <a:endParaRPr lang="en-US" sz="2400" dirty="0"/>
           </a:p>
@@ -11542,7 +11542,7 @@
                   <a:schemeClr val="accent5"/>
                 </a:solidFill>
               </a:rPr>
-              <a:t>박명진</a:t>
+              <a:t>손유호 3 · 박명진 2</a:t>
             </a:r>
             <a:endParaRPr lang="en-US" sz="950" dirty="0"/>
           </a:p>
@@ -13399,7 +13399,7 @@
                   <a:schemeClr val="bg1"/>
                 </a:solidFill>
               </a:rPr>
-              <a:t>기획 · 개발 · 배포 (지금까지)</a:t>
+              <a:t>기획 · 개발 · 배포</a:t>
             </a:r>
             <a:endParaRPr lang="en-US" sz="1150" dirty="0"/>
           </a:p>
@@ -13417,7 +13417,7 @@
                   <a:schemeClr val="bg1"/>
                 </a:solidFill>
               </a:rPr>
-              <a:t>기록 등록 보강, 실제 폰 검증 (앞으로)</a:t>
+              <a:t>기록 등록 보강, 아이폰 검증</a:t>
             </a:r>
             <a:endParaRPr lang="en-US" sz="1150" dirty="0"/>
           </a:p>
@@ -13435,7 +13435,7 @@
                   <a:schemeClr val="bg1"/>
                 </a:solidFill>
               </a:rPr>
-              <a:t>기술 · 차별점 · 법적 효력 질의응답</a:t>
+              <a:t>기술 · 법적 효력 질의응답</a:t>
             </a:r>
             <a:endParaRPr lang="en-US" sz="1150" dirty="0"/>
           </a:p>
@@ -13507,7 +13507,7 @@
                   <a:schemeClr val="bg2"/>
                 </a:solidFill>
               </a:rPr>
-              <a:t>  시장 · 수익</a:t>
+              <a:t>  시장 · 검증</a:t>
             </a:r>
             <a:endParaRPr lang="en-US" sz="1800" dirty="0"/>
           </a:p>
@@ -13547,7 +13547,7 @@
                   <a:schemeClr val="bg1"/>
                 </a:solidFill>
               </a:rPr>
-              <a:t>설문 30명 모으기 · 집계</a:t>
+              <a:t>설문 30명 · 집계, 인터뷰 3명</a:t>
             </a:r>
             <a:endParaRPr lang="en-US" sz="1150" dirty="0"/>
           </a:p>
@@ -13655,7 +13655,7 @@
                   <a:schemeClr val="bg2"/>
                 </a:solidFill>
               </a:rPr>
-              <a:t>  검증 · 운영</a:t>
+              <a:t>  운영 · 검증</a:t>
             </a:r>
             <a:endParaRPr lang="en-US" sz="1800" dirty="0"/>
           </a:p>
@@ -13695,7 +13695,7 @@
                   <a:schemeClr val="bg1"/>
                 </a:solidFill>
               </a:rPr>
-              <a:t>사용자 인터뷰 5명 · 검증</a:t>
+              <a:t>인터뷰 2명, 갤럭시 설치 · 테스트</a:t>
             </a:r>
             <a:endParaRPr lang="en-US" sz="1150" dirty="0"/>
           </a:p>
@@ -13713,7 +13713,7 @@
                   <a:schemeClr val="bg1"/>
                 </a:solidFill>
               </a:rPr>
-              <a:t>실제 폰 검증 주관 (갤럭시)</a:t>
+              <a:t>일정 관리, 마일스톤 점검</a:t>
             </a:r>
             <a:endParaRPr lang="en-US" sz="1150" dirty="0"/>
           </a:p>
@@ -13731,7 +13731,7 @@
                   <a:schemeClr val="bg1"/>
                 </a:solidFill>
               </a:rPr>
-              <a:t>일정 관리, 보고서 편집</a:t>
+              <a:t>보고서 편집</a:t>
             </a:r>
             <a:endParaRPr lang="en-US" sz="1150" dirty="0"/>
           </a:p>
@@ -13767,7 +13767,7 @@
                   <a:schemeClr val="bg2"/>
                 </a:solidFill>
               </a:rPr>
-              <a:t>지금까지는 팀장이 만들었고, 오늘부터 셋이 나눠 맡습니다</a:t>
+              <a:t>각자 맡은 일이 오늘 발표한 장과 같습니다</a:t>
             </a:r>
             <a:endParaRPr lang="en-US" sz="1200" dirty="0"/>
           </a:p>
@@ -14561,7 +14561,7 @@
                   <a:schemeClr val="tx2"/>
                 </a:solidFill>
               </a:rPr>
-              <a:t>먼저 만들어 봤습니다. 검증은 이제부터입니다</a:t>
+              <a:t>지금 상태: 앱은 배포됐고, 사용자 검증은 11월부터</a:t>
             </a:r>
             <a:endParaRPr lang="en-US" sz="2400" dirty="0"/>
           </a:p>
@@ -14815,7 +14815,7 @@
                   <a:schemeClr val="tx1"/>
                 </a:solidFill>
               </a:rPr>
-              <a:t>지금까지 기획 · 개발 · 배포는 팀장이</a:t>
+              <a:t>역할: 개발 이지훈 · 시장 손유호 · 검증 박명진</a:t>
             </a:r>
             <a:endParaRPr lang="en-US" sz="1300" dirty="0"/>
           </a:p>
@@ -14829,7 +14829,7 @@
                   <a:schemeClr val="accent5"/>
                 </a:solidFill>
               </a:rPr>
-              <a:t>10/27부터 시장 · 수익(손유호), 검증 · 일정(박명진)을 나눠 맡는다</a:t>
+              <a:t>발표도 같은 순서로 나눠서 합니다</a:t>
             </a:r>
             <a:endParaRPr lang="en-US" sz="1300" dirty="0"/>
           </a:p>
@@ -14865,7 +14865,7 @@
                   <a:schemeClr val="accent5"/>
                 </a:solidFill>
               </a:rPr>
-              <a:t>셋이 나눔</a:t>
+              <a:t>3명</a:t>
             </a:r>
             <a:endParaRPr lang="en-US" sz="1300" dirty="0"/>
           </a:p>
@@ -16452,7 +16452,7 @@
                   <a:schemeClr val="tx2"/>
                 </a:solidFill>
               </a:rPr>
-              <a:t>"얼마 받아야 하나"까지는 있다. "어떻게 받아내나"는 없다</a:t>
+              <a:t>기존 서비스: 계산까지는 있지만, 비교와 대응은 없다</a:t>
             </a:r>
             <a:endParaRPr lang="en-US" sz="2400" dirty="0"/>
           </a:p>
@@ -20406,7 +20406,7 @@
                   <a:schemeClr val="tx2"/>
                 </a:solidFill>
               </a:rPr>
-              <a:t>차별점 셋, 그리고 먼저 인정하는 약점 하나</a:t>
+              <a:t>차별점 세 가지와 한계 한 가지</a:t>
             </a:r>
             <a:endParaRPr lang="en-US" sz="2400" dirty="0"/>
           </a:p>
@@ -20970,7 +20970,7 @@
                   <a:schemeClr val="accent3"/>
                 </a:solidFill>
               </a:rPr>
-              <a:t>먼저 인정하는 약점</a:t>
+              <a:t>한계</a:t>
             </a:r>
             <a:endParaRPr lang="en-US" sz="1100" dirty="0"/>
           </a:p>
@@ -21238,7 +21238,7 @@
                   <a:schemeClr val="tx2"/>
                 </a:solidFill>
               </a:rPr>
-              <a:t>서버 없이 시작하고, 서버는 "확인 번호"에만 쓴다</a:t>
+              <a:t>기술 스택: 앱은 폰에서, 서버는 확인 번호 등록에만</a:t>
             </a:r>
             <a:endParaRPr lang="en-US" sz="2400" dirty="0"/>
           </a:p>

--- a/docs/06_중간발표_PPT.pptx
+++ b/docs/06_중간발표_PPT.pptx
@@ -124,50 +124,50 @@
   <p:extLst>
     <p:ext uri="{521415D9-36F7-43E2-AB2F-B90AF26B5E84}">
       <p14:sectionLst xmlns:p14="http://schemas.microsoft.com/office/powerpoint/2010/main">
-        <p14:section name="① 표지·팀 소개" id="{ec53a7be-408c-c374-ee0a-114eac084b8f}">
+        <p14:section name="① 표지·팀 소개" id="{6e965294-8947-f9da-5b41-bc3a7d7c3dd2}">
           <p14:sldIdLst>
             <p14:sldId id="256"/>
             <p14:sldId id="257"/>
           </p14:sldIdLst>
         </p14:section>
-        <p14:section name="② 문제 정의" id="{02ac60bc-af25-59f0-8fb1-b504c363dda2}">
+        <p14:section name="② 문제 정의" id="{65e5de21-ab32-1707-d0c6-fc3e84a500e3}">
           <p14:sldIdLst>
             <p14:sldId id="258"/>
             <p14:sldId id="259"/>
           </p14:sldIdLst>
         </p14:section>
-        <p14:section name="③ 솔루션·핵심 가치" id="{d969fb83-84b1-d9d6-0d89-6fc30766b7d4}">
+        <p14:section name="③ 솔루션·핵심 가치" id="{6b97fe7e-6d2b-0bd7-a4bd-6b1ee2f322d7}">
           <p14:sldIdLst>
             <p14:sldId id="260"/>
             <p14:sldId id="261"/>
           </p14:sldIdLst>
         </p14:section>
-        <p14:section name="④ SW 기술 아키텍처" id="{1bcb7e27-4481-b37f-59bd-307c9b08bed0}">
+        <p14:section name="④ SW 기술 아키텍처" id="{a466a510-9781-72e6-7019-c7eba63be1a7}">
           <p14:sldIdLst>
             <p14:sldId id="262"/>
             <p14:sldId id="263"/>
           </p14:sldIdLst>
         </p14:section>
-        <p14:section name="⑤ 개발 현황·MVP 시연" id="{f0cb10e9-5550-7b43-ef12-e2af3cd7fa68}">
+        <p14:section name="⑤ 개발 현황·MVP 시연" id="{8f4d1fe0-8378-b0ce-20b8-6854ab314567}">
           <p14:sldIdLst>
             <p14:sldId id="264"/>
             <p14:sldId id="265"/>
             <p14:sldId id="266"/>
           </p14:sldIdLst>
         </p14:section>
-        <p14:section name="⑥ 시장 분석·비즈니스 모델" id="{138b85e9-3568-6a1a-afb9-3fb7c7f4a211}">
+        <p14:section name="⑥ 시장 분석·비즈니스 모델" id="{fd0f84f6-292e-acac-b56b-c602fb8c6cb2}">
           <p14:sldIdLst>
             <p14:sldId id="267"/>
             <p14:sldId id="268"/>
             <p14:sldId id="269"/>
           </p14:sldIdLst>
         </p14:section>
-        <p14:section name="⑦ 초기 시장 검증" id="{dd539450-a73a-433c-b60e-556700d51afd}">
+        <p14:section name="⑦ 초기 시장 검증" id="{4aabdea1-655c-a2e7-5db7-182f3f691cdf}">
           <p14:sldIdLst>
             <p14:sldId id="270"/>
           </p14:sldIdLst>
         </p14:section>
-        <p14:section name="⑧ 향후 계획·팀 역량" id="{13914e38-f9ed-c769-32db-203ebb4bcce0}">
+        <p14:section name="⑧ 향후 계획·팀 역량" id="{d981f802-ffc5-27a8-0d7a-c60b0b6e1f3c}">
           <p14:sldIdLst>
             <p14:sldId id="271"/>
             <p14:sldId id="272"/>
@@ -1642,7 +1642,7 @@
 · 같은 과 학생 설문이 무슨 의미? 편향 아닌가? → 맞다. "정식 조사 아님"을 적고 사람 수로만 말한다. 중복 응답도 막지 않았다(이름 · 기기 정보를 안 받는 대가). 11월 30명은 과 밖에서, 인터뷰 5명으로 이유를 듣는다.
 · 법률 서비스 아닌가? → 무료, 본인 기록을 정해진 양식에 채울 뿐, 개별 사안 검토 · 대행 없음, 진정은 1350 · 노동포털로 연결만.
 · 수익은? → 게임 화면 광고(가설). 운영 비용은 0원. 문서 유료화는 안 한다.
-· 팀원은 뭘 했나? → 개발은 이지훈. 시장 · 설문 · 인터뷰 3명은 손유호, 인터뷰 2명 · 갤럭시 테스트 · 일정 · 보고서는 박명진.</a:t>
+· 팀원은 뭘 했나? → 개발은 이지훈. 손유호는 수업 시간의 계획서 일부를 썼고(내용은 팀장이 반영), 앞으로 시장 · 설문 · 인터뷰 3명. 박명진은 지금까지 의견을 낸 정도이고, 앞으로 인터뷰 2명 · 갤럭시 테스트 · 일정 · 보고서 편집.</a:t>
             </a:r>
             <a:endParaRPr lang="en-US" dirty="0"/>
           </a:p>
@@ -13533,6 +13533,24 @@
         <p:txBody>
           <a:bodyPr wrap="square" lIns="0" tIns="0" rIns="0" bIns="0" rtlCol="0" anchor="t"/>
           <a:lstStyle/>
+          <a:p>
+            <a:pPr marL="152400" indent="-152400">
+              <a:spcAft>
+                <a:spcPts val="400"/>
+              </a:spcAft>
+              <a:buSzPct val="100000"/>
+              <a:buChar char="•"/>
+            </a:pPr>
+            <a:r>
+              <a:rPr lang="en-US" sz="1150" dirty="0">
+                <a:solidFill>
+                  <a:schemeClr val="bg1"/>
+                </a:solidFill>
+              </a:rPr>
+              <a:t>수업 계획서 일부 작성(지금까지)</a:t>
+            </a:r>
+            <a:endParaRPr lang="en-US" sz="1150" dirty="0"/>
+          </a:p>
           <a:p>
             <a:pPr marL="152400" indent="-152400">
               <a:spcAft>

--- a/docs/06_중간발표_PPT.pptx
+++ b/docs/06_중간발표_PPT.pptx
@@ -124,50 +124,50 @@
   <p:extLst>
     <p:ext uri="{521415D9-36F7-43E2-AB2F-B90AF26B5E84}">
       <p14:sectionLst xmlns:p14="http://schemas.microsoft.com/office/powerpoint/2010/main">
-        <p14:section name="① 표지·팀 소개" id="{6e965294-8947-f9da-5b41-bc3a7d7c3dd2}">
+        <p14:section name="① 표지·팀 소개" id="{e13474a1-1623-ee4c-ce6d-240f00ce43e6}">
           <p14:sldIdLst>
             <p14:sldId id="256"/>
             <p14:sldId id="257"/>
           </p14:sldIdLst>
         </p14:section>
-        <p14:section name="② 문제 정의" id="{65e5de21-ab32-1707-d0c6-fc3e84a500e3}">
+        <p14:section name="② 문제 정의" id="{2cf1d759-b2bd-beae-71b2-52e761b3921e}">
           <p14:sldIdLst>
             <p14:sldId id="258"/>
             <p14:sldId id="259"/>
           </p14:sldIdLst>
         </p14:section>
-        <p14:section name="③ 솔루션·핵심 가치" id="{6b97fe7e-6d2b-0bd7-a4bd-6b1ee2f322d7}">
+        <p14:section name="③ 솔루션·핵심 가치" id="{c191d4f8-b836-8761-4324-902a639c37ed}">
           <p14:sldIdLst>
             <p14:sldId id="260"/>
             <p14:sldId id="261"/>
           </p14:sldIdLst>
         </p14:section>
-        <p14:section name="④ SW 기술 아키텍처" id="{a466a510-9781-72e6-7019-c7eba63be1a7}">
+        <p14:section name="④ SW 기술 아키텍처" id="{ad3a1daa-2a7d-3339-5706-33409f855a40}">
           <p14:sldIdLst>
             <p14:sldId id="262"/>
             <p14:sldId id="263"/>
           </p14:sldIdLst>
         </p14:section>
-        <p14:section name="⑤ 개발 현황·MVP 시연" id="{8f4d1fe0-8378-b0ce-20b8-6854ab314567}">
+        <p14:section name="⑤ 개발 현황·MVP 시연" id="{800c552e-a29e-383a-b681-1d01c1880a92}">
           <p14:sldIdLst>
             <p14:sldId id="264"/>
             <p14:sldId id="265"/>
             <p14:sldId id="266"/>
           </p14:sldIdLst>
         </p14:section>
-        <p14:section name="⑥ 시장 분석·비즈니스 모델" id="{fd0f84f6-292e-acac-b56b-c602fb8c6cb2}">
+        <p14:section name="⑥ 시장 분석·비즈니스 모델" id="{9f37067d-7322-33e3-d53c-ec93398f5b50}">
           <p14:sldIdLst>
             <p14:sldId id="267"/>
             <p14:sldId id="268"/>
             <p14:sldId id="269"/>
           </p14:sldIdLst>
         </p14:section>
-        <p14:section name="⑦ 초기 시장 검증" id="{4aabdea1-655c-a2e7-5db7-182f3f691cdf}">
+        <p14:section name="⑦ 초기 시장 검증" id="{0d822b01-de42-2754-b959-aedb3b8027f1}">
           <p14:sldIdLst>
             <p14:sldId id="270"/>
           </p14:sldIdLst>
         </p14:section>
-        <p14:section name="⑧ 향후 계획·팀 역량" id="{d981f802-ffc5-27a8-0d7a-c60b0b6e1f3c}">
+        <p14:section name="⑧ 향후 계획·팀 역량" id="{d6aa8837-97ef-0aba-c966-68bd50371a93}">
           <p14:sldIdLst>
             <p14:sldId id="271"/>
             <p14:sldId id="272"/>
@@ -13533,24 +13533,6 @@
         <p:txBody>
           <a:bodyPr wrap="square" lIns="0" tIns="0" rIns="0" bIns="0" rtlCol="0" anchor="t"/>
           <a:lstStyle/>
-          <a:p>
-            <a:pPr marL="152400" indent="-152400">
-              <a:spcAft>
-                <a:spcPts val="400"/>
-              </a:spcAft>
-              <a:buSzPct val="100000"/>
-              <a:buChar char="•"/>
-            </a:pPr>
-            <a:r>
-              <a:rPr lang="en-US" sz="1150" dirty="0">
-                <a:solidFill>
-                  <a:schemeClr val="bg1"/>
-                </a:solidFill>
-              </a:rPr>
-              <a:t>수업 계획서 일부 작성(지금까지)</a:t>
-            </a:r>
-            <a:endParaRPr lang="en-US" sz="1150" dirty="0"/>
-          </a:p>
           <a:p>
             <a:pPr marL="152400" indent="-152400">
               <a:spcAft>

--- a/docs/06_중간발표_PPT.pptx
+++ b/docs/06_중간발표_PPT.pptx
@@ -125,31 +125,31 @@
   <p:extLst>
     <p:ext uri="{521415D9-36F7-43E2-AB2F-B90AF26B5E84}">
       <p14:sectionLst xmlns:p14="http://schemas.microsoft.com/office/powerpoint/2010/main">
-        <p14:section name="① 표지·팀 소개" id="{238e0bcc-f4c5-916e-72ac-5626fdf2cd7f}">
+        <p14:section name="① 표지·팀 소개" id="{71137faa-9724-fe7c-a676-4bed64b4bb01}">
           <p14:sldIdLst>
             <p14:sldId id="256"/>
             <p14:sldId id="257"/>
           </p14:sldIdLst>
         </p14:section>
-        <p14:section name="② 문제 정의" id="{0b7fe8f8-458a-be9d-3481-8d340f92a990}">
+        <p14:section name="② 문제 정의" id="{2b9cd49a-1de1-9e05-f17d-e38ea5910c54}">
           <p14:sldIdLst>
             <p14:sldId id="258"/>
             <p14:sldId id="259"/>
           </p14:sldIdLst>
         </p14:section>
-        <p14:section name="③ 솔루션·핵심 가치" id="{480a3472-04b6-21ba-e7d9-5664ebb873a4}">
+        <p14:section name="③ 솔루션·핵심 가치" id="{f03443b4-39a6-4f72-d735-9a4b38f616b3}">
           <p14:sldIdLst>
             <p14:sldId id="260"/>
             <p14:sldId id="261"/>
           </p14:sldIdLst>
         </p14:section>
-        <p14:section name="④ SW 기술 아키텍처" id="{0b025003-34bc-ebe1-05b1-1144d2165b3a}">
+        <p14:section name="④ SW 기술 아키텍처" id="{2c139cca-0e1a-de6e-084a-7b3e81ac194c}">
           <p14:sldIdLst>
             <p14:sldId id="262"/>
             <p14:sldId id="263"/>
           </p14:sldIdLst>
         </p14:section>
-        <p14:section name="⑤ 개발 현황·MVP 시연" id="{816a43a9-5f2e-c064-93f9-df1766db1fff}">
+        <p14:section name="⑤ 개발 현황·MVP 시연" id="{0cef33bd-06d0-b53f-1b44-c332dba2c995}">
           <p14:sldIdLst>
             <p14:sldId id="264"/>
             <p14:sldId id="265"/>
@@ -157,19 +157,19 @@
             <p14:sldId id="267"/>
           </p14:sldIdLst>
         </p14:section>
-        <p14:section name="⑥ 시장 분석·비즈니스 모델" id="{640a367a-5247-ac58-fd17-ace505d348e6}">
+        <p14:section name="⑥ 시장 분석·비즈니스 모델" id="{ddc4af77-8d7b-3e74-bd8e-938fd26740e2}">
           <p14:sldIdLst>
             <p14:sldId id="268"/>
             <p14:sldId id="269"/>
             <p14:sldId id="270"/>
           </p14:sldIdLst>
         </p14:section>
-        <p14:section name="⑦ 초기 시장 검증" id="{0696db5f-2b8e-48e5-4943-3987db0021d8}">
+        <p14:section name="⑦ 초기 시장 검증" id="{151a79ff-0783-f073-c4b3-3a71a54aec35}">
           <p14:sldIdLst>
             <p14:sldId id="271"/>
           </p14:sldIdLst>
         </p14:section>
-        <p14:section name="⑧ 향후 계획·팀 역량" id="{d4e27ca6-717c-4273-9961-5c0684e8ac12}">
+        <p14:section name="⑧ 향후 계획·팀 역량" id="{dcf1587c-cd76-629b-d6c2-71556058f9b3}">
           <p14:sldIdLst>
             <p14:sldId id="272"/>
             <p14:sldId id="273"/>
@@ -1190,7 +1190,7 @@
           <a:p>
             <a:r>
               <a:rPr lang="en-US" dirty="0"/>
-              <a:t>손유호. 임금체불은 2년 연속 2조 원이고 30인 미만 사업장에 몰려 있습니다. 타겟 규모는 어림이라 "약"을 붙여 말하고, 없는 숫자(지금 알바 중, 주 15시간 이상)는 미상으로 둡니다. 재적학생은 교육부 2026 교육기본통계(대학원 포함), 알바 경험률은 학교 단위 조사(동의대 316명 88%, 동국대 200명 67.5%)라 대표값이 아닙니다. 근절 대책은 대지급금을 3개월분에서 6개월분으로, 개정법은 상습 체불 사업주 신용 제재입니다. "이 비율의 첫 조각은 지금 답하고 계신 설문에서 나옵니다. 다음 순서에서 박명진이 말씀드립니다." 출처: 고용노동부 노동포털 임금체불 통계현황, 알바천국 설문, 교육부 교육기본통계.</a:t>
+              <a:t>손유호. 임금체불은 2년 연속 2조 원이고 30인 미만 사업장에 몰려 있습니다. 타겟 규모는 어림이라 "약"을 붙여 말하고, 없는 숫자(지금 알바 중, 주 15시간 이상)는 미상으로 둡니다. 재적학생은 교육부 2026 교육기본통계(대학원 포함), 알바 경험률은 알바몬 설문(1,193명, 여름방학 알바 88.9%, 2023)과 동대신문 설문(200명, 67.5%)이라 대표값이 아닙니다. 근절 대책은 대지급금을 3개월분에서 6개월분으로, 개정법은 상습 체불 사업주 신용 제재입니다. "이 비율의 첫 조각은 지금 답하고 계신 설문에서 나옵니다. 다음 순서에서 박명진이 말씀드립니다." 출처: 고용노동부 노동포털 임금체불 통계현황, 알바천국 설문, 교육부 교육기본통계.</a:t>
             </a:r>
             <a:endParaRPr lang="en-US" dirty="0"/>
           </a:p>
@@ -7591,7 +7591,7 @@
                   <a:schemeClr val="tx1"/>
                 </a:solidFill>
               </a:rPr>
-              <a:t>재적학생 307만 명 → 알바 경험 67~88% → 지금 알바 중 · 주 15시간 이상은 11월 설문으로 (경험 기준 상한 약 210~270만 명)</a:t>
+              <a:t>재적학생 307만 명 → 알바 경험 67~89% → 지금 알바 중 · 주 15시간 이상은 11월 설문으로 (경험 기준 상한 약 210~270만 명)</a:t>
             </a:r>
             <a:endParaRPr lang="en-US" sz="1050" dirty="0"/>
           </a:p>
@@ -7622,7 +7622,7 @@
                   <a:schemeClr val="tx1"/>
                 </a:solidFill>
               </a:rPr>
-              <a:t>2025.9 임금체불 근절 대책 · 2025.10 개정 근로기준법 시행. 근거를 남겨 둔 사람이 돌려받기 쉬워지는 때</a:t>
+              <a:t>2025.9 임금체불 근절 대책 · 2025.10.23 개정 근로기준법 시행. 근거를 남겨 둔 사람이 돌려받기 쉬워지는 때</a:t>
             </a:r>
             <a:endParaRPr lang="en-US" sz="1050" dirty="0"/>
           </a:p>

--- a/docs/06_중간발표_PPT.pptx
+++ b/docs/06_중간발표_PPT.pptx
@@ -125,31 +125,31 @@
   <p:extLst>
     <p:ext uri="{521415D9-36F7-43E2-AB2F-B90AF26B5E84}">
       <p14:sectionLst xmlns:p14="http://schemas.microsoft.com/office/powerpoint/2010/main">
-        <p14:section name="① 표지·팀 소개" id="{71137faa-9724-fe7c-a676-4bed64b4bb01}">
+        <p14:section name="① 표지·팀 소개" id="{9fc44300-850b-e83c-011a-e13619690a7e}">
           <p14:sldIdLst>
             <p14:sldId id="256"/>
             <p14:sldId id="257"/>
           </p14:sldIdLst>
         </p14:section>
-        <p14:section name="② 문제 정의" id="{2b9cd49a-1de1-9e05-f17d-e38ea5910c54}">
+        <p14:section name="② 문제 정의" id="{599e9023-a513-6c85-1ea3-6fd0dc10a4a9}">
           <p14:sldIdLst>
             <p14:sldId id="258"/>
             <p14:sldId id="259"/>
           </p14:sldIdLst>
         </p14:section>
-        <p14:section name="③ 솔루션·핵심 가치" id="{f03443b4-39a6-4f72-d735-9a4b38f616b3}">
+        <p14:section name="③ 솔루션·핵심 가치" id="{252b278a-0cf9-927e-349f-c5d8865d4c5d}">
           <p14:sldIdLst>
             <p14:sldId id="260"/>
             <p14:sldId id="261"/>
           </p14:sldIdLst>
         </p14:section>
-        <p14:section name="④ SW 기술 아키텍처" id="{2c139cca-0e1a-de6e-084a-7b3e81ac194c}">
+        <p14:section name="④ SW 기술 아키텍처" id="{71c75c0c-ef04-d3d9-abce-a9400d2be507}">
           <p14:sldIdLst>
             <p14:sldId id="262"/>
             <p14:sldId id="263"/>
           </p14:sldIdLst>
         </p14:section>
-        <p14:section name="⑤ 개발 현황·MVP 시연" id="{0cef33bd-06d0-b53f-1b44-c332dba2c995}">
+        <p14:section name="⑤ 개발 현황·MVP 시연" id="{c609016a-8ce1-9fb9-09b5-e6f874c6ba5a}">
           <p14:sldIdLst>
             <p14:sldId id="264"/>
             <p14:sldId id="265"/>
@@ -157,19 +157,19 @@
             <p14:sldId id="267"/>
           </p14:sldIdLst>
         </p14:section>
-        <p14:section name="⑥ 시장 분석·비즈니스 모델" id="{ddc4af77-8d7b-3e74-bd8e-938fd26740e2}">
+        <p14:section name="⑥ 시장 분석·비즈니스 모델" id="{3aeac20f-6d68-c3dd-eaad-5a4d6f2f452b}">
           <p14:sldIdLst>
             <p14:sldId id="268"/>
             <p14:sldId id="269"/>
             <p14:sldId id="270"/>
           </p14:sldIdLst>
         </p14:section>
-        <p14:section name="⑦ 초기 시장 검증" id="{151a79ff-0783-f073-c4b3-3a71a54aec35}">
+        <p14:section name="⑦ 초기 시장 검증" id="{61716ad5-a243-b45d-1bd8-1e17f17814a7}">
           <p14:sldIdLst>
             <p14:sldId id="271"/>
           </p14:sldIdLst>
         </p14:section>
-        <p14:section name="⑧ 향후 계획·팀 역량" id="{dcf1587c-cd76-629b-d6c2-71556058f9b3}">
+        <p14:section name="⑧ 향후 계획·팀 역량" id="{d0db7389-3cb0-24c1-fcd1-565a95f8f874}">
           <p14:sldIdLst>
             <p14:sldId id="272"/>
             <p14:sldId id="273"/>
@@ -926,7 +926,7 @@
           <a:p>
             <a:r>
               <a:rPr lang="en-US" dirty="0"/>
-              <a:t>네 단계가 차별점과 1:1입니다. 등록 → 비교 → 요청 · 증빙 → 확인. 예시 데이터는 발표 전에 미리 넣어 둡니다(오늘 날짜는 비어 있어 출근 · 퇴근이 그대로 됩니다). 7번 표에는 시연 중 남긴 2건만 나옵니다. 예시 데이터는 진짜 시각이 아니라 등록하지 않기 때문입니다. 시연은 다음 장의 녹화 영상(1분 39초)으로 하고, 단계마다 멈춰서 설명하면 약 3분입니다. 영상은 배포된 앱을 실제로 눌러 찍은 것이라 서버 등록과 확인 번호가 진짜입니다(10/26 녹화. 화면의 시각은 녹화한 시각). 인터넷이 되고 시간이 남으면 같은 순서를 실제 앱으로 한 번 더 보여 줘도 됩니다. 전날 할 일: Supabase 대시보드에서 프로젝트 상태를 확인하고(잠들어 있으면 Restore) 앱에서 출근 · 퇴근을 눌러 설정 탭에 "2건 등록됨"이 뜨는지 본다.</a:t>
+              <a:t>네 단계가 차별점과 1:1입니다. 등록 → 비교 → 요청 · 증빙 → 확인. 예시 데이터는 발표 전에 미리 넣어 둡니다(오늘 날짜는 비어 있어 출근 · 퇴근이 그대로 됩니다). 7번 표에는 시연 중 남긴 2건만 나옵니다. 예시 데이터는 진짜 시각이 아니라 등록하지 않기 때문입니다. 시연은 다음 장의 녹화 영상(1분 39초)으로 하고, 단계마다 멈춰서 설명하면 약 3분입니다. 영상은 배포된 앱을 실제로 눌러 찍은 것이라 서버 등록과 확인 번호가 진짜입니다(10/26 녹화. 화면의 시각은 녹화한 시각). 질문이 오면 실제 앱으로 1단계(출근 · 퇴근 → "2건 등록됨")만 보여 줍니다. 전날 할 일: Supabase 대시보드에서 프로젝트 상태를 확인하고(잠들어 있으면 Restore) 앱에서 출근 · 퇴근을 눌러 설정 탭에 "2건 등록됨"이 뜨는지 본다. 그다음 폰의 와이파이를 끄고 데이터로 확인 페이지(jihooni217.github.io/albaguard/verify.html?h=92f6228a4349bdc8)를 열어 등록 시각이 나오는지 본다. 당일 아침에도 한 번 더.</a:t>
             </a:r>
             <a:endParaRPr lang="en-US" dirty="0"/>
           </a:p>
@@ -1014,7 +1014,7 @@
           <a:p>
             <a:r>
               <a:rPr lang="en-US" dirty="0"/>
-              <a:t>영상을 누르면 재생됩니다. 왼쪽이 폰 화면, 오른쪽이 단계 자막입니다. 1 출근 · 퇴근 → 설정 "2건 등록됨"(약 0:08~0:27), 2 받은 금액 입력 → 빨간 차액(0:27~0:47), 3 메시지 생성 → 증빙 묶음 PDF 7번 표(0:47~1:25), 4 확인 페이지 → 서버 등록 시각(1:25~1:39). 단계가 바뀔 때 멈추고 한두 문장씩 설명합니다. 영상이 안 열리면 docs/08_시연_영상.mp4를 따로 틀어도 됩니다.</a:t>
+              <a:t>재생 전에 한 문장: "보실 것 하나만 말씀드리면 마지막 장면의 등록 시각입니다. 지금 서버에 그대로 있는 값입니다." 영상을 누르면 재생됩니다. 왼쪽이 폰 화면, 오른쪽이 단계 자막입니다. 1 출근 · 퇴근 → 설정 "2건 등록됨"(약 0:08~0:27), 2 받은 금액 입력 → 빨간 차액(0:27~0:47), 3 메시지 생성 → 증빙 묶음 PDF 7번 표(0:47~1:25), 4 확인 페이지 → 서버 등록 시각(1:25~1:39). 단계가 바뀔 때 멈추고 한두 문장씩 설명합니다. 영상이 안 열리면 docs/08_시연_영상.mp4를 따로 틀어도 됩니다. 영상 마지막에 나오는 확인 번호는 92f6228a4349bdc8입니다. "녹화라서 못 믿겠다"는 질문이 오면 "지금 폰으로 jihooni217.github.io/albaguard/verify.html?h=92f6228a4349bdc8 를 열어 보셔도 됩니다. 서버가 찍은 시각이 녹화 시각(10/26)과 같습니다"라고 답합니다.</a:t>
             </a:r>
             <a:endParaRPr lang="en-US" dirty="0"/>
           </a:p>
@@ -1102,7 +1102,7 @@
           <a:p>
             <a:r>
               <a:rPr lang="en-US" dirty="0"/>
-              <a:t>시연 직후에 보여 줍니다. "방금 보신 것이 8개 중 이만큼"입니다. 100%는 쓰지 않았습니다. 계획 기준은 10/13 MVP 기능 정의서의 포함 기능 8개와 제외 기능 6개(금액 자동 인식 · 푸시 알림 · AI 문구 · 광고 · 로그인 · 진정서)입니다. %는 구현 + 실제 폰 확인 + 사용자 검증을 100으로 보고 남은 일만큼 뺀 자체 평가이고, 동작은 컴퓨터의 폰 크기 화면에서, 실제 폰은 설치까지 확인했습니다. 동그라미 세 칸은 컴퓨터 동작 · 실제 폰 · 사용자 검증이고, 지금은 모두 첫 칸만 찼습니다. 뒤 두 칸이 11월 일정입니다. 이 장이 끝나면 손유호에게 넘깁니다.</a:t>
+              <a:t>시연 직후에 보여 줍니다. "방금 보신 것이 8개 중 이만큼"입니다. 100%는 쓰지 않았습니다. 계획 기준은 10/13 MVP 기능 정의서의 포함 기능 8개와 제외 기능 6개(금액 자동 인식 · 푸시 알림 · AI 문구 · 광고 · 로그인 · 진정서)입니다. %는 구현 + 실제 폰 확인 + 사용자 검증을 100으로 보고 남은 일만큼 뺀 자체 평가이고, 동작은 컴퓨터의 폰 크기 화면에서, 실제 폰은 설치까지 확인했습니다. 동그라미 세 칸은 컴퓨터 동작 · 실제 폰 · 사용자 검증이고, 지금은 모두 첫 칸만 찼습니다. 뒤 두 칸이 11월 일정입니다. 세 칸 중 첫 칸만 찼는데 왜 80~90%냐고 물으시면, %는 칸 수가 아니라 남은 일의 크기로 어림한 것이고 11월 검증에서 큰 수정이 나오면 내려갈 수 있다고 답합니다. 이 장이 끝나면 손유호에게 넘깁니다.</a:t>
             </a:r>
             <a:endParaRPr lang="en-US" dirty="0"/>
           </a:p>
@@ -1190,7 +1190,7 @@
           <a:p>
             <a:r>
               <a:rPr lang="en-US" dirty="0"/>
-              <a:t>손유호. 임금체불은 2년 연속 2조 원이고 30인 미만 사업장에 몰려 있습니다. 타겟 규모는 어림이라 "약"을 붙여 말하고, 없는 숫자(지금 알바 중, 주 15시간 이상)는 미상으로 둡니다. 재적학생은 교육부 2026 교육기본통계(대학원 포함), 알바 경험률은 알바몬 설문(1,193명, 여름방학 알바 88.9%, 2023)과 동대신문 설문(200명, 67.5%)이라 대표값이 아닙니다. 근절 대책은 대지급금을 3개월분에서 6개월분으로, 개정법은 상습 체불 사업주 신용 제재입니다. "이 비율의 첫 조각은 지금 답하고 계신 설문에서 나옵니다. 다음 순서에서 박명진이 말씀드립니다." 출처: 고용노동부 노동포털 임금체불 통계현황, 알바천국 설문, 교육부 교육기본통계.</a:t>
+              <a:t>손유호. 임금체불은 2년 연속 2조 원이고 30인 미만 사업장에 몰려 있습니다. 타겟 규모는 어림이라 "약"을 붙여 말하고, 없는 숫자(지금 알바 중, 주 15시간 이상)는 미상으로 둡니다. 재적학생은 교육부 2026 교육기본통계(대학원 포함), 알바 경험률은 알바몬 설문(1,193명, 여름방학 알바 88.9%, 2023)과 동대신문 설문(200명, 67.5%)이라 대표값이 아닙니다. 근절 대책은 대지급금을 3개월분에서 6개월분으로, 개정법은 상습 체불 사업주 신용 제재입니다. 체불 통계는 문제의 크기이지 알바 시장의 크기가 아닙니다. 알바생 몫은 이 통계에서 알 수 없어 미상으로 둡니다. "주 15시간 이상이 다수인지의 첫 조각은 지금 답하고 계신 설문에서 나오지만, 규모 추정이 아니라 메시지를 정하는 참고값입니다. 다음 순서에서 박명진이 말씀드립니다." 출처: 고용노동부 노동포털 임금체불 통계현황, 알바천국 설문, 교육부 교육기본통계.</a:t>
             </a:r>
             <a:endParaRPr lang="en-US" dirty="0"/>
           </a:p>
@@ -1278,7 +1278,7 @@
           <a:p>
             <a:r>
               <a:rPr lang="en-US" dirty="0"/>
-              <a:t>손유호. 2×2에서 알바가드는 "혼자 쓴다 × 대응까지"에 있습니다. 경쟁 서비스 정보는 2026년 9월 각 앱의 공식 소개와 리뷰 기준입니다.</a:t>
+              <a:t>손유호. 2×2에서 알바가드는 "혼자 쓴다 × 대응까지"에 있습니다. 오른쪽 열은 혼자서는 시작할 수 없는 서비스입니다. 기그는 사장이 가입해야 하고, 진정24는 증거가 먼저 있어야 합니다. 경쟁 서비스 정보는 2026년 9월 각 앱의 공식 소개와 리뷰 기준입니다.</a:t>
             </a:r>
             <a:endParaRPr lang="en-US" dirty="0"/>
           </a:p>
@@ -1366,7 +1366,7 @@
           <a:p>
             <a:r>
               <a:rPr lang="en-US" dirty="0"/>
-              <a:t>손유호. 알바비 앱에 왜 게임이 있나: 핵심 기능은 한 달에 한 번이라 매일 열 이유로 넣었고, 그 화면이 광고 자리입니다. 처음엔 근무 중에만 열렸는데 팀원 의견으로 10/25에 조건을 풀고 설정에서 숨길 수 있게 했습니다. 광고 형식은 웹앱이라 배너 · 전면이 기본이고 보상형은 승인이 필요합니다(린 캔버스와 같은 말). 2차 구독은 "기록이 폰에만 있다"는 약점을 돈 내고 없애는 선택 기능이라 "근무 내용은 폰 안에만" 원칙과 충돌하지 않습니다(원하는 사람만). 문서를 돈 받고 만들어 주는 건 법적 이유로 하지 않습니다(웹 조사 기준, 전문가 검토 아님). 광고 가설은 설문의 "게임 화면 광고" 문항과 승인 뒤 게임 화면 열람 수로 확인합니다. 운영 비용은 지금 서버 0원 · 배포 0원이라 수익이 0이어도 서비스는 돌아가고, 인건비는 팀 3명입니다.</a:t>
+              <a:t>손유호. 알바비 앱에 왜 게임이 있나: 출퇴근은 일하는 날마다 누르지만 보람은 급여일에 한 번이라, 그 사이에도 머물 이유로 넣었고 그 화면이 광고 자리입니다. 처음엔 근무 중에만 열렸는데 팀원 의견으로 10/25에 조건을 풀고 설정에서 숨길 수 있게 했습니다. 광고 형식은 웹앱이라 배너 · 전면이 기본이고 보상형은 승인이 필요합니다(린 캔버스와 같은 말). 2차 구독은 "기록이 폰에만 있다"는 약점을 돈 내고 없애는 선택 기능이라 "근무 내용은 폰 안에만" 원칙과 충돌하지 않습니다(원하는 사람만). 문서를 돈 받고 만들어 주는 건 법적 이유로 하지 않습니다(웹 조사 기준, 전문가 검토 아님). 광고 가설은 설문의 "게임 화면 광고" 문항과 승인 뒤 게임 화면 열람 수로 확인합니다. 운영 비용은 지금 서버 0원 · 배포 0원이라 수익이 0이어도 서비스는 돌아가고, 인건비는 팀 3명입니다.</a:t>
             </a:r>
             <a:endParaRPr lang="en-US" dirty="0"/>
           </a:p>
@@ -1454,7 +1454,7 @@
           <a:p>
             <a:r>
               <a:rPr lang="en-US" dirty="0"/>
-              <a:t>박명진. 가설은 9월 기획서 문장 그대로입니다. 표의 기준은 팀이 정한 목표이지 데이터가 아닙니다. 인터뷰 문항은 설문지 20~24번입니다. 지금까지 들은 것은 정식 조사가 아닙니다: 타겟 사용자 1명이 디자인 시안 12장 중 통장 구성을 골랐고, 링크 설문은 10/23에 공개했습니다. 기말 발표에서 마지막 칸에 결과를 채워 보고합니다. 응답 수는 슬라이드에 적지 않고 당일 아침 결과 페이지에서 읽습니다. 0명이면 0명이라고 말합니다. 조건부: 당일 아침 응답이 10명 이상이고, 강의실 인터넷이 되고, 교수님 양해를 받았으면 결과 페이지(survey-results.html)를 60초만 띄워 세 문항(주당 근무 시간 · 적게 받은 것 같았던 적 · 매달 받은 금액 직접 넣기)만 읽습니다. 자유 의견은 띄우지 않습니다. 아니면 당일 아침 캡처로 대신합니다. 테스트 응답 2건(10/23)은 미리 지워 둡니다. 결과는 사람 수로만 말하고 %는 30명을 넘을 때만 씁니다.</a:t>
+              <a:t>박명진. 가설은 9월 기획서 문장 그대로입니다. 표의 기준은 팀이 정한 목표이지 데이터가 아닙니다. 인터뷰 문항은 설문지 20~24번입니다. 지금까지 들은 것은 정식 조사가 아닙니다: 타겟 사용자 1명이 디자인 시안 12장 중 통장 구성을 골랐고, 링크 설문은 10/23에 공개했습니다. 기말 발표에서 마지막 칸에 결과를 채워 보고합니다. 응답 수는 슬라이드에 적지 않고 당일 아침 결과 페이지에서 읽습니다. 0명이면 0명이라고 말합니다. 조건부: 당일 아침 응답이 10명 이상이고, 강의실 인터넷이 되고, 교수님 양해를 받았으면 결과 페이지(survey-results.html)를 60초만 띄워 세 문항(주당 근무 시간 · 적게 받은 것 같았던 적 · 매달 받은 금액 직접 넣기)만 읽습니다. 자유 의견은 띄우지 않습니다. 아니면 당일 아침 캡처로 대신합니다. 테스트 응답 2건(10/23)은 미리 지워 둡니다. 결과는 사람 수로만 말하고 %는 30명을 넘을 때만 씁니다. 1행은 의향을 묻는 것이라 한계가 있습니다. 인터뷰 때 앱을 설치하게 하고, 실제로 넣는지는 급여일이 지난 뒤 따로 봅니다(기말 이후까지 걸릴 수 있음). 지인은 호의적으로 답하기 쉬워서 "넣겠다"를 그대로 믿지 않습니다.</a:t>
             </a:r>
             <a:endParaRPr lang="en-US" dirty="0"/>
           </a:p>
@@ -1719,20 +1719,31 @@
             <a:r>
               <a:rPr lang="en-US" dirty="0"/>
               <a:t>팀장 마무리(20초): "저희가 여쭙고 싶은 것 두 가지입니다. 문서 유료화를 피하면서 가능한 수익 모델이 더 있을지, 그리고 설문 30명 · 인터뷰 5명이면 충분한지입니다. 질문 받겠습니다." 이 장은 질의응답 내내 띄워 둔다.
-예상 질문
-· 법적 효력 있나? → 보장하지 않는다. 판단은 감독관 · 법원. 우리는 판단할 자료를 정리하고, 수정 이력과 확인 번호로 "나중에 고친 게 아니다"까지 보여 준다. 통장 내역 · 카톡과 함께 내야 한다고 앱에도 적어 뒀다.
-· 서버는 여러분이 관리하는데 고치면 그만 아닌가? → 맞다. 공개 키로는 넣기 · 읽기만 되고 시각은 서버가 찍는 것까지 확인했지만, 프로젝트 소유자 권한으로는 고칠 수 있다. 한계로 인정한다. 지금 막는 건 "사용자 본인이 나중에 고쳐 쓰기"까지. 운영자까지 못 고치게 하는 외부 공인 시점확인은 비용 때문에 계획. 서버에는 번호만 있어서 운영자가 서버를 고쳐도 폰의 근무 내용 자체는 못 바꾼다. (확인 페이지 본문의 "고치거나 지울 수 없습니다"는 "앱 쪽에서는"이라고 범위를 붙여 말할 것)
-· 확인 번호가 그 기록에서 나온 건지 어떻게 아나? → 지금은 번호와 서버 등록 시각까지 보여 주고, 기록 내용에서 번호를 다시 계산해 맞춰 보는 방법은 기말까지 만든다(그래서 70%). 지금은 앱 · 백업 파일을 함께 봐야 한다.
-· 본인이 쓴 기록을 믿을 수 있나? → 거짓 기록은 막을 수 없다고 인정. 막는 건 "나중에 고쳐 쓰기". 영세 사업장은 기록이 없는 경우가 많아 알바생 기록이 거의 유일한 자료가 되기 쉽다. 사장에게는 임금대장 · 계약 서류 보존 의무가 있다(근로기준법 48 · 42조).
-· 앱 계산이 틀리면 분쟁이 커지는 것 아닌가? 책임은? → 계산을 단정으로 내놓지 않는다. 항목별 · 주별 이유를 펼쳐 보여 주고, 안 넣은 것(연장근로 가산)과 유리하게 본 것(합의 휴무)은 화면에 적었다. 1단계 문구는 청구서가 아니라 "제가 계산을 잘 몰라서 여쭤본다"는 확인 요청. 법률 자문 아님을 적어 두었고 1350 확인을 안내한다.
-· 고객 검증도 전에 왜 먼저 만들었나? → 맞다. 다만 링크로 배포되는 웹앱이라 만들어 보여 주는 것이 가장 싸고 정확한 검증이었다. 9월 경쟁 앱 리뷰로 빈자리를 확인하고 10/13 정의서로 범위를 8개로 잘랐다. 설문에 캡처 3장을 넣고 "실제로 있다면 쓰겠나"를 묻는다. 12/7까지는 고치는 기간.
-· 받은 금액을 매달 직접 넣어야 하는데 넣을까? → 가장 큰 가설이라 인터뷰 1번. 첫 화면에서 "9월 급여 받으셨나요?"라고 묻고 넣는 순간 덜 받은 돈이 보이게 했다. 5명 중 3명이 아니면 자동 인식을 앞당긴다.
-· 하우머치가 따라 하면? → 비교 기능은 따라올 수 있다. 그래서 확인 번호(기록 신뢰성)와 요청 · 증빙까지 잇는 흐름이 차별점.
-· 급여 앱에 게임이 왜? 근무 중에 게임을 권하나? → 핵심 기능은 한 달에 한 번이라 매일 열 이유. 처음엔 근무 중에만이었는데 팀원 의견으로 10/25 조건을 풀고 설정에서 숨길 수 있게 했다. 게임 기록은 문서에 안 섞인다. 안 되면 게임을 빼도 기록 → 비교 → 요청은 그대로.
-· 같은 과 학생 설문이 무슨 의미? 편향 아닌가? → 맞다. "정식 조사 아님"을 적고 사람 수로만 말한다. 중복 응답도 막지 않았다(이름 · 기기 정보를 안 받는 대가). 11월 30명은 과 밖에서, 인터뷰 5명으로 이유를 듣는다.
-· 법률 서비스 아닌가? → 무료, 본인 기록을 정해진 양식에 채울 뿐, 개별 사안 검토 · 대행 없음, 진정은 1350 · 노동포털로 연결만.
-· 수익은? → 게임 화면 광고(가설). 운영 비용은 0원. 문서 유료화는 안 한다.
-· 팀원은 뭘 했나? → 개발은 이지훈. 손유호는 수업 시간의 계획서 일부를 썼고(내용은 팀장이 반영), 앞으로 시장 · 설문 · 인터뷰 3명. 박명진은 지금까지 의견을 낸 정도이고, 앞으로 인터뷰 2명 · 갤럭시 테스트 · 일정 · 보고서 편집.</a:t>
+예상 질문 (이름 붙은 사람이 먼저 답하고, 모자라면 팀장이 보탠다)
+· [이지훈] 법적 효력 있나? → 보장하지 않는다. 판단은 감독관 · 법원. 우리는 판단할 자료를 정리하고, 수정 이력과 확인 번호로 "나중에 고친 게 아니다"까지 보여 준다. 통장 내역 · 카톡과 함께 내야 한다고 앱에도 적어 뒀다.
+· [이지훈] 서버는 여러분이 관리하는데 고치면 그만 아닌가? → 맞다. 공개 키로는 넣기 · 읽기만 되고 시각은 서버가 찍는 것까지 확인했지만, 프로젝트 소유자 권한으로는 고칠 수 있다. 한계로 인정한다. 지금 막는 건 "사용자 본인이 나중에 고쳐 쓰기"까지. 운영자까지 못 고치게 하는 외부 공인 시점확인은 비용 때문에 계획. 서버에는 번호만 있어서 운영자가 서버를 고쳐도 폰의 근무 내용 자체는 못 바꾼다. (확인 페이지 본문의 "고치거나 지울 수 없습니다"는 "앱 쪽에서는"이라고 범위를 붙여 말할 것)
+· [이지훈] 확인 번호가 그 기록에서 나온 건지 어떻게 아나? → 지금은 번호와 서버 등록 시각까지 보여 주고, 기록 내용에서 번호를 다시 계산해 맞춰 보는 방법은 기말까지 만든다(그래서 70%). 지금은 앱 · 백업 파일을 함께 봐야 한다.
+· [이지훈] 본인이 쓴 기록을 믿을 수 있나? → 거짓 기록은 막을 수 없다고 인정. 막는 건 "나중에 고쳐 쓰기". 영세 사업장은 기록이 없는 경우가 많아 알바생 기록이 거의 유일한 자료가 되기 쉽다. 사장에게는 임금대장 · 계약 서류 보존 의무가 있다(근로기준법 48 · 42조).
+· [이지훈] 앱 계산이 틀리면 분쟁이 커지는 것 아닌가? 책임은? → 계산을 단정으로 내놓지 않는다. 항목별 · 주별 이유를 펼쳐 보여 주고, 안 넣은 것(연장근로 가산)과 유리하게 본 것(합의 휴무)은 화면에 적었다. 1단계 문구는 청구서가 아니라 "제가 계산을 잘 몰라서 여쭤본다"는 확인 요청. 법률 자문 아님을 적어 두었고 1350 확인을 안내한다.
+· [이지훈] 고객 검증도 전에 왜 먼저 만들었나? → 맞다. 다만 링크로 배포되는 웹앱이라 만들어 보여 주는 것이 가장 싸고 정확한 검증이었다. 9월 경쟁 앱 리뷰로 빈자리를 확인하고 10/13 정의서로 범위를 8개로 잘랐다. 설문에 캡처 3장을 넣고 "실제로 있다면 쓰겠나"를 묻는다. 12/7까지는 고치는 기간.
+· [박명진] 받은 금액을 매달 직접 넣어야 하는데 넣을까? → 가장 큰 가설이라 인터뷰 1번. 첫 화면에서 "9월 급여 받으셨나요?"라고 묻고 넣는 순간 덜 받은 돈이 보이게 했다. 5명 중 3명이 아니면 자동 인식을 앞당긴다.
+· [이지훈] 하우머치가 따라 하면? → 비교 기능은 따라올 수 있다. 해시를 서버에 넣는 기술 자체도 어렵지 않다고 인정한다. 어려운 것은 그 번호가 뜻이 있게 기록 구조를 짜는 일이다. 사유 없이 못 고치고, 삭제도 흔적이 남고, 고칠 때마다 다시 등록돼야 "몇 번 고쳤나"가 보인다. 기존 앱이 따라오려면 기록을 마음대로 고치던 방식을 바꿔야 해서 쉽게 따라오지 않는다고 본다. 그래도 따라오면 요청 · 증빙까지 잇는 흐름으로 간다. 우리도 "내용으로 번호 다시 계산"이 남아 70%다.
+· [손유호] 급여 앱에 게임이 왜? 근무 중에 게임을 권하나? → 출퇴근은 일하는 날마다 누르지만 보람은 급여일에 한 번이라, 그 사이에도 머물 이유로 넣은 것. 처음엔 근무 중에만이었는데 팀원 의견으로 10/25 조건을 풀고 설정에서 숨길 수 있게 했다. 게임 기록은 문서에 안 섞인다. 안 되면 게임을 빼도 기록 → 비교 → 요청은 그대로.
+· [박명진] 같은 과 학생 설문이 무슨 의미? 편향 아닌가? → 맞다. "정식 조사 아님"을 적고 사람 수로만 말한다. 중복 응답도 막지 않았다(이름 · 기기 정보를 안 받는 대가). 11월 30명은 과 밖에서, 인터뷰 5명으로 이유를 듣는다.
+· [이지훈] 법률 서비스 아닌가? → 무료, 본인 기록을 정해진 양식에 채울 뿐, 개별 사안 검토 · 대행 없음, 진정은 1350 · 노동포털로 연결만.
+· [손유호] 수익은? → 게임 화면 광고(가설). 운영 비용은 0원. 문서 유료화는 안 한다.
+· [이지훈] 정의서를 개발 중에 썼는데 계획 대비가 의미 있나? → 맞다. 원래 계획은 9월 기획서의 기능 4개(기록 · 비교 · 요청 · 증빙)다. 10/13 정의서는 만들면서 필요해진 것(기록 등록 · 백업)을 더해 8개로 고정하고, 넣지 않을 6개를 정한 문서다. 그 뒤 포함 기능을 늘리지 않았고 뺀 6개는 지금도 없다. 8/8은 "다 했다"가 아니라 "범위를 지켰다"로 읽어 달라.
+· [이지훈] 등록 시각이 출근 시각인가? 인터넷이 없을 때 기록하면? → 아니다. 등록 시각은 확인 번호가 서버에 도착한 시각이고, 보여 주는 것은 "늦어도 이 시각에는 이 내용이 있었다"까지다. 인터넷이 없으면 대기열에 있다가 연결될 때 보내지므로 그만큼 늦어진다. "나중에 입력"한 기록도 입력한 때 등록되고, 기록 안에 나중에 입력했다는 표시와 사유가 같이 남는다. 출근 시각 자체를 증명하는 것은 아니다.
+· [이지훈] 아무 번호나 넣으면? 두 기록이 같은 번호가 될 수 있나? → 확인 페이지는 앞 16자와 64자 전체를 둘 다 받고, 서버에 없는 번호는 등록된 것이 없다고 나온다. 서버 표에서 번호는 중복을 허용하지 않는다. 재료에 기록 번호와 만든 시각이 들어가서 서로 다른 기록이 같은 번호가 될 일은 사실상 없다.
+· [이지훈] 카톡 나에게 보내기로 매일 적으면 같지 않나? → 시각만 보면 카톡이 더 세다. 카카오가 찍은 시각이라 우리와 무관하다. 다른 점은 둘이다. 카톡은 고치면 새 메시지가 하나 더 생길 뿐 무엇을 왜 고쳤는지 안 남고, 그 기록으로 계산 · 비교 · 요청 · 증빙 묶음까지 이어지지 않는다. 그래서 카톡에 적던 사람이 첫 타겟이고, 카톡 캡처는 함께 내라고 앱에도 적었다.
+· [이지훈] AI는 어디에 썼나? Claude 문구는 실제로 써 봤나? → 앱 기능으로는 정산 요청 문구 생성 하나이고 선택 사항이다. 배포 앱은 API 키 없이 근무 기록과 계산 내역을 채운 정해진 문장으로 만든다. 기본을 끈 이유는 기록 내용이 폰 밖으로 나가면 개인정보 안내와 동의가 먼저 필요해서다. 키가 없어 Claude 문구를 실제로 돌려 본 적은 아직 없다.
+· [이지훈] 코드는 누가 짰고 이해하고 있나? → (사실대로. 틀: 개발 도구로 AI 코딩 도우미를 썼다. 기능 범위 8개, 계산 규칙(주휴 · 야간 · 휴게시간 · 연도별 최저임금), 기록 구조(수정 이력, 삭제 흔적, 사유 없이는 저장 안 됨), 법적 문구 원칙은 팀장이 정하고 하나씩 확인하며 올렸다. 서버 권한은 2000년 시각과 수정 · 삭제 요청을 직접 보내 확인했다.)
+· [이지훈] 왜 Supabase인가? 설문은 서버에 두면서 근무 기록은 왜 안 두나? → 서버 코드 없이 REST로 표에 넣고 읽을 수 있고, 표 단위 권한(RLS)과 트리거로 "시각은 서버가 찍는다"를 걸 수 있어서다. 일주일 요청이 없으면 멈추는 단점은 알고 있다. 설문은 이름 없는 답 묶음이고 근무 기록은 근무지 · 시각 · 금액이라 민감도가 다르다. 권한 원칙은 두 표가 같다.
+· [이지훈] 폰을 바꾸거나 서비스가 없어지면 기록은? → 폰을 바꾸면 백업 파일로 옮긴다(설정 탭). 서비스가 없어져도 폰의 기록, 백업 파일, 저장해 둔 증빙 묶음 PDF는 사용자 손에 남는다. 이 약점이 2차 구독(동기화 · 자동 백업)의 자리다.
+· [이지훈] 개인정보는? 동의는? → 로그인이 없고 서버에는 이름 · 근무지 · 시각 · 금액이 가지 않는다. 가는 것은 확인 번호 · 기록 번호 · 무작위 기기 번호뿐이고, 무엇이 가는지 설정 탭에 적고 끌 수 있게 했다. 설문도 이름 · 연락처를 받지 않는다. 기록 내용을 밖으로 보내는 기능을 켜면 그때 안내와 동의가 필요하다.
+· [박명진] 왜 설문 30명 · 인터뷰 5명인가? → 9월 기획서는 인터뷰 10~15명이었다. 수는 링크 설문으로 채우고, 앱을 써 보게 하는 20분 인터뷰는 7주 안에 셋이 할 수 있는 5명으로 줄였다. 충분한지는 마지막에 여쭙는 것 중 하나다.
+· [손유호] 광고 수익이 생기면 "무료라서 괜찮다"가 깨지지 않나? → 광고는 게임 화면에만 나오고 문서 기능과 떼어 놓았다. 문서를 만든 대가로 받는 돈이 아니게 구조를 잡은 것이다. 다만 웹 조사 기준 판단이고 전문가 검토는 아니다.
+· [박명진 → 손유호 순으로 각자] 팀원은 뭘 했나? → 개발은 이지훈. 손유호는 수업 시간의 계획서 일부를 썼고(내용은 팀장이 반영), 앞으로 시장 · 설문 · 인터뷰 3명. 박명진은 지금까지 의견을 낸 정도이고, 앞으로 인터뷰 2명 · 갤럭시 테스트 · 일정 · 보고서 편집.</a:t>
             </a:r>
             <a:endParaRPr lang="en-US" dirty="0"/>
           </a:p>
@@ -2172,7 +2183,7 @@
           <a:p>
             <a:r>
               <a:rPr lang="en-US" dirty="0"/>
-              <a:t>세 번째가 따라 하기 어려운 차별점입니다. 지금 확인 페이지는 번호의 서버 등록 시각까지 보여 주고, 기록 내용에서 번호를 다시 계산해 맞춰 보는 방법은 기말까지 만듭니다(그래서 현황 장에 70%). 근무지 · 시각 · 금액은 서버로 가지 않고, "그날 실제로 일했다"까지는 증명하지 못합니다. 약점은 먼저 말합니다. "법적 효력" 질문이 오면 보장하지 않는다고 답하고, 판단할 자료를 정리해 준다고 말합니다.</a:t>
+              <a:t>세 번째가 따라 하기 어려운 차별점입니다. 기능 하나가 아니라 기록 구조라서, 사유 없이는 못 고치고 삭제해도 흔적이 남고 고치면 다시 등록됩니다. 기존 급여 앱이 넣으려면 사용자가 기록을 마음대로 고치던 방식을 포기해야 합니다. 지금 확인 페이지는 번호의 서버 등록 시각까지 보여 주고, 기록 내용에서 번호를 다시 계산해 맞춰 보는 방법은 기말까지 만듭니다(그래서 현황 장에 70%). 근무지 · 시각 · 금액은 서버로 가지 않고, "그날 실제로 일했다"까지는 증명하지 못합니다. 약점은 먼저 말합니다. "법적 효력" 질문이 오면 보장하지 않는다고 답하고, 판단할 자료를 정리해 준다고 말합니다.</a:t>
             </a:r>
             <a:endParaRPr lang="en-US" dirty="0"/>
           </a:p>
@@ -3819,7 +3830,7 @@
                   <a:schemeClr val="tx2"/>
                 </a:solidFill>
               </a:rPr>
-              <a:t>시연 순서 (배포된 앱을 녹화한 영상, 약 3분)</a:t>
+              <a:t>시연 순서 (녹화 영상 1분 39초, 멈춰 설명하며 약 3분)</a:t>
             </a:r>
             <a:endParaRPr lang="en-US" sz="2400" dirty="0"/>
           </a:p>
@@ -3952,7 +3963,7 @@
                   <a:schemeClr val="accent5"/>
                 </a:solidFill>
               </a:rPr>
-              <a:t>기록할 때마다 서버에 확인 번호가 남는다. 예시 데이터는 등록되지 않으니 오늘 남긴 2건만 보인다</a:t>
+              <a:t>기록할 때마다 서버에 확인 번호가 남는다. 예시 데이터는 등록되지 않으니 시연 중 남긴 2건만 보인다</a:t>
             </a:r>
             <a:endParaRPr lang="en-US" sz="1000" dirty="0"/>
           </a:p>
@@ -4472,24 +4483,6 @@
                 </a:solidFill>
               </a:rPr>
               <a:t>영상은 다음 장. 단계마다 멈추고 설명한다</a:t>
-            </a:r>
-            <a:endParaRPr lang="en-US" sz="1000" dirty="0"/>
-          </a:p>
-          <a:p>
-            <a:pPr marL="127000" indent="-127000">
-              <a:spcAft>
-                <a:spcPts val="300"/>
-              </a:spcAft>
-              <a:buSzPct val="100000"/>
-              <a:buChar char="•"/>
-            </a:pPr>
-            <a:r>
-              <a:rPr lang="en-US" sz="1000" dirty="0">
-                <a:solidFill>
-                  <a:schemeClr val="tx1"/>
-                </a:solidFill>
-              </a:rPr>
-              <a:t>인터넷이 되면 같은 순서를 실제 앱으로도 보여 줄 수 있다</a:t>
             </a:r>
             <a:endParaRPr lang="en-US" sz="1000" dirty="0"/>
           </a:p>
@@ -5959,7 +5952,7 @@
                   <a:schemeClr val="accent5"/>
                 </a:solidFill>
               </a:rPr>
-              <a:t>사진 자동 인식(보류)</a:t>
+              <a:t>매달 넣을지 검증(가설 1)</a:t>
             </a:r>
             <a:endParaRPr lang="en-US" sz="1050" dirty="0"/>
           </a:p>
@@ -7069,7 +7062,7 @@
                   <a:schemeClr val="tx1"/>
                 </a:solidFill>
               </a:rPr>
-              <a:t>10/13 MVP 정의서의 포함 8 · 제외 6      </a:t>
+              <a:t>9월 기획서 4개 → 10/13 포함 8 · 제외 6으로 고정      </a:t>
             </a:r>
             <a:pPr indent="0" marL="0">
               <a:buNone/>
@@ -7420,7 +7413,7 @@
                   <a:schemeClr val="accent5"/>
                 </a:solidFill>
               </a:rPr>
-              <a:t>2025년 체불액 중 30인 미만 사업장 (1조 4,012억 원). 카페 · 편의점 · 음식점이 여기에</a:t>
+              <a:t>2025년 체불액 중 30인 미만 사업장 (1조 4,012억 원). 카페 · 편의점 · 음식점이 여기에. 알바생 몫은 따로 알 수 없다</a:t>
             </a:r>
             <a:endParaRPr lang="en-US" sz="1000" dirty="0"/>
           </a:p>
@@ -7591,7 +7584,7 @@
                   <a:schemeClr val="tx1"/>
                 </a:solidFill>
               </a:rPr>
-              <a:t>재적학생 307만 명 → 알바 경험 67~89% → 지금 알바 중 · 주 15시간 이상은 11월 설문으로 (경험 기준 상한 약 210~270만 명)</a:t>
+              <a:t>재적학생 307만 명 → 알바 경험 67~89% → 지금 알바 중 · 주 15시간 이상: 미상 (경험 기준 상한 약 210~270만 명. 11월 설문은 참고값)</a:t>
             </a:r>
             <a:endParaRPr lang="en-US" sz="1050" dirty="0"/>
           </a:p>
@@ -7911,7 +7904,7 @@
                   <a:schemeClr val="accent5"/>
                 </a:solidFill>
               </a:rPr>
-              <a:t>사장과 함께</a:t>
+              <a:t>사장 가입 · 증거가 먼저</a:t>
             </a:r>
             <a:endParaRPr lang="en-US" sz="900" dirty="0"/>
           </a:p>
@@ -8440,7 +8433,7 @@
                   <a:schemeClr val="tx1"/>
                 </a:solidFill>
               </a:rPr>
-              <a:t>하우머치 · 계산기는 계산에서 멈추고, 기그는 사장이 있어야 하고, 진정24는 증거가 있어야 한다. 그래서 2×2의 왼쪽 위 칸이 비어 있다.</a:t>
+              <a:t>하우머치 · 계산기는 계산에서 멈추고, 기그는 사장이 있어야 하고, 진정24는 증거가 있어야 한다. 그래서 2×2의 왼쪽 위 칸에는 알바가드뿐이다.</a:t>
             </a:r>
             <a:endParaRPr lang="en-US" sz="1050" dirty="0"/>
           </a:p>
@@ -8650,7 +8643,7 @@
                   <a:schemeClr val="tx1"/>
                 </a:solidFill>
               </a:rPr>
-              <a:t>핵심 기능은 한 달에 한 번, 급여일에 쓴다. 매일 열 이유를 만들려고 쉬는 틈 게임을 넣었고, 그 화면이 광고 자리다.</a:t>
+              <a:t>출퇴근은 날마다 누르지만 보람은 급여일에 한 번. 그 사이 머물 이유로 게임을 넣었고, 그 화면이 광고 자리다.</a:t>
             </a:r>
             <a:endParaRPr lang="en-US" sz="1100" dirty="0"/>
           </a:p>
@@ -10242,7 +10235,7 @@
                             <a:srgbClr val="15171A"/>
                           </a:solidFill>
                         </a:rPr>
-                        <a:t>설문 · 응답 30명 넘을 때 비율로</a:t>
+                        <a:t>설문 · 응답 30명 넘을 때, 알바 중인 응답자의 반 이상</a:t>
                       </a:r>
                       <a:endParaRPr lang="en-US" sz="1050" dirty="0"/>
                     </a:p>
@@ -10867,7 +10860,7 @@
                   <a:schemeClr val="accent3"/>
                 </a:solidFill>
               </a:rPr>
-              <a:t>11/9 설문 · 인터뷰</a:t>
+              <a:t>11/9 인터뷰 · 설문 1차</a:t>
             </a:r>
             <a:endParaRPr lang="en-US" sz="900" dirty="0"/>
           </a:p>
@@ -13778,7 +13771,7 @@
                   <a:schemeClr val="bg2"/>
                 </a:solidFill>
               </a:rPr>
-              <a:t>  시장 · 검증</a:t>
+              <a:t>  시장 · 수익</a:t>
             </a:r>
             <a:endParaRPr lang="en-US" sz="1800" dirty="0"/>
           </a:p>
@@ -13926,7 +13919,7 @@
                   <a:schemeClr val="bg2"/>
                 </a:solidFill>
               </a:rPr>
-              <a:t>  운영 · 검증</a:t>
+              <a:t>  검증 · 일정</a:t>
             </a:r>
             <a:endParaRPr lang="en-US" sz="1800" dirty="0"/>
           </a:p>
@@ -14202,6 +14195,20 @@
             </a:r>
             <a:endParaRPr lang="en-US" sz="1100" dirty="0"/>
           </a:p>
+          <a:p>
+            <a:pPr algn="r" indent="0" marL="0">
+              <a:buNone/>
+            </a:pPr>
+            <a:r>
+              <a:rPr lang="en-US" sz="1100" dirty="0">
+                <a:solidFill>
+                  <a:schemeClr val="bg2"/>
+                </a:solidFill>
+              </a:rPr>
+              <a:t>시연 기록 확인 번호 92f6228a4349bdc8</a:t>
+            </a:r>
+            <a:endParaRPr lang="en-US" sz="1100" dirty="0"/>
+          </a:p>
         </p:txBody>
       </p:sp>
       <p:sp>
@@ -15743,7 +15750,7 @@
                   <a:schemeClr val="tx1"/>
                 </a:solidFill>
               </a:rPr>
-              <a:t>주 15시간 이상 일하는 만 19~26세 시급제 알바 대학생 (카페 · 편의점 · 음식점). 근로계약서가 없거나 사본이 없고, 통장 총액만 확인하고, 사장님께 말을 꺼내기 부담스러워한다</a:t>
+              <a:t>주 15시간 이상(주휴수당 기준) 일하는 만 19~26세 시급제 알바 대학생 (카페 · 편의점 · 음식점). 근로계약서가 없거나 사본이 없고, 통장 총액만 확인하고, 사장님께 말을 꺼내기 부담스러워한다</a:t>
             </a:r>
             <a:endParaRPr lang="en-US" sz="1150" dirty="0"/>
           </a:p>
@@ -20821,7 +20828,7 @@
                   <a:schemeClr val="accent5"/>
                 </a:solidFill>
               </a:rPr>
-              <a:t>근무지만 직접 등록. 기그처럼 사장이 가입할 필요가 없다</a:t>
+              <a:t>근무지만 직접 등록. 기그와 달리 사장 가입 없이, 2 · 3의 전제</a:t>
             </a:r>
             <a:endParaRPr lang="en-US" sz="1100" dirty="0"/>
           </a:p>
@@ -20952,7 +20959,7 @@
                   <a:schemeClr val="accent5"/>
                 </a:solidFill>
               </a:rPr>
-              <a:t>   문제 1 · 2의 답</a:t>
+              <a:t>   비교 1 · 2, 요청 3의 답</a:t>
             </a:r>
             <a:endParaRPr lang="en-US" sz="1350" dirty="0"/>
           </a:p>
@@ -21119,7 +21126,7 @@
                   <a:schemeClr val="accent5"/>
                 </a:solidFill>
               </a:rPr>
-              <a:t>   문제 3의 답</a:t>
+              <a:t>   문제 3의 근거</a:t>
             </a:r>
             <a:endParaRPr lang="en-US" sz="1350" dirty="0"/>
           </a:p>
@@ -21277,7 +21284,7 @@
                   <a:schemeClr val="tx1"/>
                 </a:solidFill>
               </a:rPr>
-              <a:t>비교 기능은 하우머치가 "받은 금액 입력" 칸 하나로 따라올 수 있다. 그래서 다음 단계는 기록의 신뢰성, 즉 3번이다.</a:t>
+              <a:t>비교 기능은 하우머치가 "받은 금액 입력" 칸 하나로 따라올 수 있다. 3번은 칸 하나가 아니라 기록 구조(사유 없이 못 고침 · 삭제도 흔적 · 고치면 다시 등록)라서 따라오기 어렵다.</a:t>
             </a:r>
             <a:endParaRPr lang="en-US" sz="1100" dirty="0"/>
           </a:p>
@@ -22284,7 +22291,7 @@
                             <a:srgbClr val="15171A"/>
                           </a:solidFill>
                         </a:rPr>
-                        <a:t>인프라</a:t>
+                        <a:t>클라우드 · 인프라</a:t>
                       </a:r>
                       <a:endParaRPr lang="en-US" sz="1050" dirty="0"/>
                     </a:p>
@@ -22636,7 +22643,7 @@
                             <a:srgbClr val="15171A"/>
                           </a:solidFill>
                         </a:rPr>
-                        <a:t>분석</a:t>
+                        <a:t>SaaS · 분석</a:t>
                       </a:r>
                       <a:endParaRPr lang="en-US" sz="1050" dirty="0"/>
                     </a:p>

--- a/docs/06_중간발표_PPT.pptx
+++ b/docs/06_중간발표_PPT.pptx
@@ -125,31 +125,31 @@
   <p:extLst>
     <p:ext uri="{521415D9-36F7-43E2-AB2F-B90AF26B5E84}">
       <p14:sectionLst xmlns:p14="http://schemas.microsoft.com/office/powerpoint/2010/main">
-        <p14:section name="① 표지·팀 소개" id="{9fc44300-850b-e83c-011a-e13619690a7e}">
+        <p14:section name="① 표지·팀 소개" id="{4ea39e88-8018-e68f-bff0-b9484a0cc736}">
           <p14:sldIdLst>
             <p14:sldId id="256"/>
             <p14:sldId id="257"/>
           </p14:sldIdLst>
         </p14:section>
-        <p14:section name="② 문제 정의" id="{599e9023-a513-6c85-1ea3-6fd0dc10a4a9}">
+        <p14:section name="② 문제 정의" id="{0ed92ce7-d8ab-067a-9dca-5af7df28aa18}">
           <p14:sldIdLst>
             <p14:sldId id="258"/>
             <p14:sldId id="259"/>
           </p14:sldIdLst>
         </p14:section>
-        <p14:section name="③ 솔루션·핵심 가치" id="{252b278a-0cf9-927e-349f-c5d8865d4c5d}">
+        <p14:section name="③ 솔루션·핵심 가치" id="{900bccbd-18a5-2d6b-62fb-2000535cea1b}">
           <p14:sldIdLst>
             <p14:sldId id="260"/>
             <p14:sldId id="261"/>
           </p14:sldIdLst>
         </p14:section>
-        <p14:section name="④ SW 기술 아키텍처" id="{71c75c0c-ef04-d3d9-abce-a9400d2be507}">
+        <p14:section name="④ SW 기술 아키텍처" id="{dff71ed8-1e60-d420-10bb-6216ae27583e}">
           <p14:sldIdLst>
             <p14:sldId id="262"/>
             <p14:sldId id="263"/>
           </p14:sldIdLst>
         </p14:section>
-        <p14:section name="⑤ 개발 현황·MVP 시연" id="{c609016a-8ce1-9fb9-09b5-e6f874c6ba5a}">
+        <p14:section name="⑤ 개발 현황·MVP 시연" id="{56ca0f7c-64d5-7094-4745-c9e543d1a1a2}">
           <p14:sldIdLst>
             <p14:sldId id="264"/>
             <p14:sldId id="265"/>
@@ -157,19 +157,19 @@
             <p14:sldId id="267"/>
           </p14:sldIdLst>
         </p14:section>
-        <p14:section name="⑥ 시장 분석·비즈니스 모델" id="{3aeac20f-6d68-c3dd-eaad-5a4d6f2f452b}">
+        <p14:section name="⑥ 시장 분석·비즈니스 모델" id="{1ae3d1c0-27de-1173-fbb9-e384a47200dc}">
           <p14:sldIdLst>
             <p14:sldId id="268"/>
             <p14:sldId id="269"/>
             <p14:sldId id="270"/>
           </p14:sldIdLst>
         </p14:section>
-        <p14:section name="⑦ 초기 시장 검증" id="{61716ad5-a243-b45d-1bd8-1e17f17814a7}">
+        <p14:section name="⑦ 초기 시장 검증" id="{47e82983-0e02-16cf-99dc-89fe6e73acf8}">
           <p14:sldIdLst>
             <p14:sldId id="271"/>
           </p14:sldIdLst>
         </p14:section>
-        <p14:section name="⑧ 향후 계획·팀 역량" id="{d0db7389-3cb0-24c1-fcd1-565a95f8f874}">
+        <p14:section name="⑧ 향후 계획·팀 역량" id="{cfe78e56-cf10-eca5-9a51-0d6d98aff297}">
           <p14:sldIdLst>
             <p14:sldId id="272"/>
             <p14:sldId id="273"/>
@@ -7584,7 +7584,7 @@
                   <a:schemeClr val="tx1"/>
                 </a:solidFill>
               </a:rPr>
-              <a:t>재적학생 307만 명 → 알바 경험 67~89% → 지금 알바 중 · 주 15시간 이상: 미상 (경험 기준 상한 약 210~270만 명. 11월 설문은 참고값)</a:t>
+              <a:t>재적학생 307만 명 → 알바 경험 67~89% → 지금 알바 중 · 주 15시간 이상: 미상 (경험 기준 상한 약 210~270만 명)</a:t>
             </a:r>
             <a:endParaRPr lang="en-US" sz="1050" dirty="0"/>
           </a:p>
@@ -7882,8 +7882,8 @@
         </p:nvSpPr>
         <p:spPr>
           <a:xfrm>
-            <a:off x="4389120" y="2560320"/>
-            <a:ext cx="1097280" cy="274320"/>
+            <a:off x="3749040" y="2560320"/>
+            <a:ext cx="1737360" cy="274320"/>
           </a:xfrm>
           <a:prstGeom prst="rect">
             <a:avLst/>
@@ -8397,7 +8397,7 @@
                   <a:schemeClr val="tx2"/>
                 </a:solidFill>
               </a:rPr>
-              <a:t>혼자 쓰면서 대응까지 가는 서비스가 없다</a:t>
+              <a:t>혼자 쓰고 대응까지: 알바가드뿐</a:t>
             </a:r>
             <a:endParaRPr lang="en-US" sz="1300" dirty="0"/>
           </a:p>
@@ -8433,7 +8433,7 @@
                   <a:schemeClr val="tx1"/>
                 </a:solidFill>
               </a:rPr>
-              <a:t>하우머치 · 계산기는 계산에서 멈추고, 기그는 사장이 있어야 하고, 진정24는 증거가 있어야 한다. 그래서 2×2의 왼쪽 위 칸에는 알바가드뿐이다.</a:t>
+              <a:t>하우머치 · 계산기는 계산에서 멈추고, 기그는 사장이 있어야 하고, 진정24는 증거가 있어야 한다. 그래서 왼쪽 위 칸은 알바가드뿐이다.</a:t>
             </a:r>
             <a:endParaRPr lang="en-US" sz="1050" dirty="0"/>
           </a:p>
@@ -10235,7 +10235,7 @@
                             <a:srgbClr val="15171A"/>
                           </a:solidFill>
                         </a:rPr>
-                        <a:t>설문 · 응답 30명 넘을 때, 알바 중인 응답자의 반 이상</a:t>
+                        <a:t>설문 · 30명 넘으면, 알바 중 반 이상</a:t>
                       </a:r>
                       <a:endParaRPr lang="en-US" sz="1050" dirty="0"/>
                     </a:p>
@@ -14889,7 +14889,7 @@
                   <a:schemeClr val="accent5"/>
                 </a:solidFill>
               </a:rPr>
-              <a:t>10/13 MVP 기능 정의서 기준. 완성도 평균 약 80%</a:t>
+              <a:t>9월 기획서 4개 → 10/13 정의서 8개로 고정. 완성도 평균 약 80%</a:t>
             </a:r>
             <a:endParaRPr lang="en-US" sz="1300" dirty="0"/>
           </a:p>
@@ -21865,7 +21865,7 @@
                             <a:srgbClr val="15171A"/>
                           </a:solidFill>
                         </a:rPr>
-                        <a:t>스토어 없이 링크로 배포. 의견을 듣고 바로 고쳐 다시 배포</a:t>
+                        <a:t>스토어 없이 링크로 배포. 의견을 듣고 바로 고친다</a:t>
                       </a:r>
                       <a:endParaRPr lang="en-US" sz="1050" dirty="0"/>
                     </a:p>
@@ -22231,7 +22231,7 @@
                             <a:srgbClr val="15171A"/>
                           </a:solidFill>
                         </a:rPr>
-                        <a:t>기록 소유권은 사용자에게. 공개 키로는 넣기 · 읽기만(RLS), 시각은 서버가 찍음. 운영자 조작까지 막는 건 아님(외부 시점확인은 계획)</a:t>
+                        <a:t>기록은 사용자 폰에. 공개 키로는 넣기 · 읽기만(RLS), 시각은 서버가 찍음. 운영자 조작은 못 막음</a:t>
                       </a:r>
                       <a:endParaRPr lang="en-US" sz="1050" dirty="0"/>
                     </a:p>
@@ -23951,7 +23951,7 @@
                   <a:schemeClr val="tx1"/>
                 </a:solidFill>
               </a:rPr>
-              <a:t>고치면 새 내용으로 다시 등록 (줄이 늘어남)</a:t>
+              <a:t>고치면 새 내용으로 다시 등록</a:t>
             </a:r>
             <a:endParaRPr lang="en-US" sz="1000" dirty="0"/>
           </a:p>

--- a/docs/06_중간발표_PPT.pptx
+++ b/docs/06_중간발표_PPT.pptx
@@ -125,31 +125,31 @@
   <p:extLst>
     <p:ext uri="{521415D9-36F7-43E2-AB2F-B90AF26B5E84}">
       <p14:sectionLst xmlns:p14="http://schemas.microsoft.com/office/powerpoint/2010/main">
-        <p14:section name="① 표지·팀 소개" id="{4ea39e88-8018-e68f-bff0-b9484a0cc736}">
+        <p14:section name="① 표지·팀 소개" id="{962fc448-f092-49af-e6e6-45df8b621556}">
           <p14:sldIdLst>
             <p14:sldId id="256"/>
             <p14:sldId id="257"/>
           </p14:sldIdLst>
         </p14:section>
-        <p14:section name="② 문제 정의" id="{0ed92ce7-d8ab-067a-9dca-5af7df28aa18}">
+        <p14:section name="② 문제 정의" id="{46a8dcf2-9b20-68b8-eb24-09ef09904f03}">
           <p14:sldIdLst>
             <p14:sldId id="258"/>
             <p14:sldId id="259"/>
           </p14:sldIdLst>
         </p14:section>
-        <p14:section name="③ 솔루션·핵심 가치" id="{900bccbd-18a5-2d6b-62fb-2000535cea1b}">
+        <p14:section name="③ 솔루션·핵심 가치" id="{edd19090-8060-b52d-f580-71a8b04ea113}">
           <p14:sldIdLst>
             <p14:sldId id="260"/>
             <p14:sldId id="261"/>
           </p14:sldIdLst>
         </p14:section>
-        <p14:section name="④ SW 기술 아키텍처" id="{dff71ed8-1e60-d420-10bb-6216ae27583e}">
+        <p14:section name="④ SW 기술 아키텍처" id="{5525b197-401b-6766-5bac-5040f1a53077}">
           <p14:sldIdLst>
             <p14:sldId id="262"/>
             <p14:sldId id="263"/>
           </p14:sldIdLst>
         </p14:section>
-        <p14:section name="⑤ 개발 현황·MVP 시연" id="{56ca0f7c-64d5-7094-4745-c9e543d1a1a2}">
+        <p14:section name="⑤ 개발 현황·MVP 시연" id="{1598b395-089a-a9b7-ea04-686421aaf048}">
           <p14:sldIdLst>
             <p14:sldId id="264"/>
             <p14:sldId id="265"/>
@@ -157,19 +157,19 @@
             <p14:sldId id="267"/>
           </p14:sldIdLst>
         </p14:section>
-        <p14:section name="⑥ 시장 분석·비즈니스 모델" id="{1ae3d1c0-27de-1173-fbb9-e384a47200dc}">
+        <p14:section name="⑥ 시장 분석·비즈니스 모델" id="{bf08979f-470b-0ce7-23f0-fe60bf721d87}">
           <p14:sldIdLst>
             <p14:sldId id="268"/>
             <p14:sldId id="269"/>
             <p14:sldId id="270"/>
           </p14:sldIdLst>
         </p14:section>
-        <p14:section name="⑦ 초기 시장 검증" id="{47e82983-0e02-16cf-99dc-89fe6e73acf8}">
+        <p14:section name="⑦ 초기 시장 검증" id="{7c24158c-9bc9-3c7f-ff3c-b4e79b6d01fa}">
           <p14:sldIdLst>
             <p14:sldId id="271"/>
           </p14:sldIdLst>
         </p14:section>
-        <p14:section name="⑧ 향후 계획·팀 역량" id="{cfe78e56-cf10-eca5-9a51-0d6d98aff297}">
+        <p14:section name="⑧ 향후 계획·팀 역량" id="{363ad47a-b9a6-2629-8132-282550806894}">
           <p14:sldIdLst>
             <p14:sldId id="272"/>
             <p14:sldId id="273"/>
@@ -926,7 +926,7 @@
           <a:p>
             <a:r>
               <a:rPr lang="en-US" dirty="0"/>
-              <a:t>네 단계가 차별점과 1:1입니다. 등록 → 비교 → 요청 · 증빙 → 확인. 예시 데이터는 발표 전에 미리 넣어 둡니다(오늘 날짜는 비어 있어 출근 · 퇴근이 그대로 됩니다). 7번 표에는 시연 중 남긴 2건만 나옵니다. 예시 데이터는 진짜 시각이 아니라 등록하지 않기 때문입니다. 시연은 다음 장의 녹화 영상(1분 39초)으로 하고, 단계마다 멈춰서 설명하면 약 3분입니다. 영상은 배포된 앱을 실제로 눌러 찍은 것이라 서버 등록과 확인 번호가 진짜입니다(10/26 녹화. 화면의 시각은 녹화한 시각). 질문이 오면 실제 앱으로 1단계(출근 · 퇴근 → "2건 등록됨")만 보여 줍니다. 전날 할 일: Supabase 대시보드에서 프로젝트 상태를 확인하고(잠들어 있으면 Restore) 앱에서 출근 · 퇴근을 눌러 설정 탭에 "2건 등록됨"이 뜨는지 본다. 그다음 폰의 와이파이를 끄고 데이터로 확인 페이지(jihooni217.github.io/albaguard/verify.html?h=92f6228a4349bdc8)를 열어 등록 시각이 나오는지 본다. 당일 아침에도 한 번 더.</a:t>
+              <a:t>네 단계가 차별점과 1:1입니다. 영상에 안 나오는 것은 말로 짚습니다: 캘린더의 연장 · 대타 표시(9장 캡처), 3단계 진정 안내(1350 · 노동포털 연결, 진정서는 만들지 않음). 등록 → 비교 → 요청 · 증빙 → 확인. 예시 데이터는 발표 전에 미리 넣어 둡니다(오늘 날짜는 비어 있어 출근 · 퇴근이 그대로 됩니다). 7번 표에는 시연 중 남긴 2건만 나옵니다. 예시 데이터는 진짜 시각이 아니라 등록하지 않기 때문입니다. 시연은 다음 장의 녹화 영상(1분 39초)으로 하고, 단계마다 멈춰서 설명하면 약 3분입니다. 영상은 배포된 앱을 실제로 눌러 찍은 것이라 서버 등록과 확인 번호가 진짜입니다(10/26 녹화. 화면의 시각은 녹화한 시각). 질문이 오면 실제 앱으로 1단계(출근 · 퇴근 → "2건 등록됨")만 보여 줍니다. 전날 할 일: Supabase 대시보드에서 프로젝트 상태를 확인하고(잠들어 있으면 Restore) 앱에서 출근 · 퇴근을 눌러 설정 탭에 "2건 등록됨"이 뜨는지 본다. 그다음 폰의 와이파이를 끄고 데이터로 확인 페이지(jihooni217.github.io/albaguard/verify.html?h=92f6228a4349bdc8)를 열어 등록 시각이 나오는지 본다. 당일 아침에도 한 번 더.</a:t>
             </a:r>
             <a:endParaRPr lang="en-US" dirty="0"/>
           </a:p>
@@ -3906,7 +3906,7 @@
         <p:spPr>
           <a:xfrm>
             <a:off x="896112" y="1325880"/>
-            <a:ext cx="5120640" cy="384048"/>
+            <a:ext cx="7772400" cy="384048"/>
           </a:xfrm>
           <a:prstGeom prst="rect">
             <a:avLst/>
@@ -3942,7 +3942,7 @@
         <p:spPr>
           <a:xfrm>
             <a:off x="896112" y="1691640"/>
-            <a:ext cx="5120640" cy="365760"/>
+            <a:ext cx="7772400" cy="365760"/>
           </a:xfrm>
           <a:prstGeom prst="rect">
             <a:avLst/>
@@ -4039,7 +4039,7 @@
         <p:spPr>
           <a:xfrm>
             <a:off x="896112" y="2112264"/>
-            <a:ext cx="5120640" cy="384048"/>
+            <a:ext cx="7772400" cy="384048"/>
           </a:xfrm>
           <a:prstGeom prst="rect">
             <a:avLst/>
@@ -4075,7 +4075,7 @@
         <p:spPr>
           <a:xfrm>
             <a:off x="896112" y="2478024"/>
-            <a:ext cx="5120640" cy="365760"/>
+            <a:ext cx="7772400" cy="365760"/>
           </a:xfrm>
           <a:prstGeom prst="rect">
             <a:avLst/>
@@ -4172,7 +4172,7 @@
         <p:spPr>
           <a:xfrm>
             <a:off x="896112" y="2898648"/>
-            <a:ext cx="5120640" cy="384048"/>
+            <a:ext cx="7772400" cy="384048"/>
           </a:xfrm>
           <a:prstGeom prst="rect">
             <a:avLst/>
@@ -4208,7 +4208,7 @@
         <p:spPr>
           <a:xfrm>
             <a:off x="896112" y="3264408"/>
-            <a:ext cx="5120640" cy="365760"/>
+            <a:ext cx="7772400" cy="365760"/>
           </a:xfrm>
           <a:prstGeom prst="rect">
             <a:avLst/>
@@ -4305,7 +4305,7 @@
         <p:spPr>
           <a:xfrm>
             <a:off x="896112" y="3685032"/>
-            <a:ext cx="5120640" cy="384048"/>
+            <a:ext cx="7772400" cy="384048"/>
           </a:xfrm>
           <a:prstGeom prst="rect">
             <a:avLst/>
@@ -4341,7 +4341,7 @@
         <p:spPr>
           <a:xfrm>
             <a:off x="896112" y="4050792"/>
-            <a:ext cx="5120640" cy="365760"/>
+            <a:ext cx="7772400" cy="365760"/>
           </a:xfrm>
           <a:prstGeom prst="rect">
             <a:avLst/>
@@ -4363,126 +4363,6 @@
                 </a:solidFill>
               </a:rPr>
               <a:t>앱 밖의 별도 페이지. 제3자도 열 수 있다</a:t>
-            </a:r>
-            <a:endParaRPr lang="en-US" sz="1000" dirty="0"/>
-          </a:p>
-        </p:txBody>
-      </p:sp>
-      <p:sp>
-        <p:nvSpPr>
-          <p:cNvPr id="20" name="말로 대신 칸"/>
-          <p:cNvSpPr/>
-          <p:nvPr/>
-        </p:nvSpPr>
-        <p:spPr>
-          <a:xfrm>
-            <a:off x="6309360" y="1325880"/>
-            <a:ext cx="2377440" cy="1920240"/>
-          </a:xfrm>
-          <a:prstGeom prst="roundRect">
-            <a:avLst>
-              <a:gd name="adj" fmla="val 4762"/>
-            </a:avLst>
-          </a:prstGeom>
-          <a:solidFill>
-            <a:schemeClr val="bg2"/>
-          </a:solidFill>
-          <a:ln w="12700">
-            <a:solidFill>
-              <a:schemeClr val="bg2"/>
-            </a:solidFill>
-            <a:prstDash val="solid"/>
-          </a:ln>
-        </p:spPr>
-      </p:sp>
-      <p:sp>
-        <p:nvSpPr>
-          <p:cNvPr id="21" name="Text 19"/>
-          <p:cNvSpPr txBox="1"/>
-          <p:nvPr/>
-        </p:nvSpPr>
-        <p:spPr>
-          <a:xfrm>
-            <a:off x="6492240" y="1417320"/>
-            <a:ext cx="2103120" cy="1783080"/>
-          </a:xfrm>
-          <a:prstGeom prst="rect">
-            <a:avLst/>
-          </a:prstGeom>
-          <a:noFill/>
-          <a:ln/>
-        </p:spPr>
-        <p:txBody>
-          <a:bodyPr wrap="square" lIns="0" tIns="0" rIns="0" bIns="0" rtlCol="0" anchor="t"/>
-          <a:lstStyle/>
-          <a:p>
-            <a:pPr indent="0" marL="0">
-              <a:spcAft>
-                <a:spcPts val="300"/>
-              </a:spcAft>
-              <a:buNone/>
-            </a:pPr>
-            <a:r>
-              <a:rPr lang="en-US" sz="1000" b="1" dirty="0">
-                <a:solidFill>
-                  <a:schemeClr val="tx2"/>
-                </a:solidFill>
-              </a:rPr>
-              <a:t>말로 대신하는 것</a:t>
-            </a:r>
-            <a:endParaRPr lang="en-US" sz="1000" dirty="0"/>
-          </a:p>
-          <a:p>
-            <a:pPr marL="127000" indent="-127000">
-              <a:spcAft>
-                <a:spcPts val="300"/>
-              </a:spcAft>
-              <a:buSzPct val="100000"/>
-              <a:buChar char="•"/>
-            </a:pPr>
-            <a:r>
-              <a:rPr lang="en-US" sz="1000" dirty="0">
-                <a:solidFill>
-                  <a:schemeClr val="tx1"/>
-                </a:solidFill>
-              </a:rPr>
-              <a:t>캘린더의 연장 · 대타 표시</a:t>
-            </a:r>
-            <a:endParaRPr lang="en-US" sz="1000" dirty="0"/>
-          </a:p>
-          <a:p>
-            <a:pPr marL="127000" indent="-127000">
-              <a:spcAft>
-                <a:spcPts val="300"/>
-              </a:spcAft>
-              <a:buSzPct val="100000"/>
-              <a:buChar char="•"/>
-            </a:pPr>
-            <a:r>
-              <a:rPr lang="en-US" sz="1000" dirty="0">
-                <a:solidFill>
-                  <a:schemeClr val="tx1"/>
-                </a:solidFill>
-              </a:rPr>
-              <a:t>3단계 진정 안내: 1350 · 노동포털 연결. 진정서는 만들지 않는다</a:t>
-            </a:r>
-            <a:endParaRPr lang="en-US" sz="1000" dirty="0"/>
-          </a:p>
-          <a:p>
-            <a:pPr marL="127000" indent="-127000">
-              <a:spcAft>
-                <a:spcPts val="300"/>
-              </a:spcAft>
-              <a:buSzPct val="100000"/>
-              <a:buChar char="•"/>
-            </a:pPr>
-            <a:r>
-              <a:rPr lang="en-US" sz="1000" dirty="0">
-                <a:solidFill>
-                  <a:schemeClr val="tx1"/>
-                </a:solidFill>
-              </a:rPr>
-              <a:t>영상은 다음 장. 단계마다 멈추고 설명한다</a:t>
             </a:r>
             <a:endParaRPr lang="en-US" sz="1000" dirty="0"/>
           </a:p>

--- a/docs/06_중간발표_PPT.pptx
+++ b/docs/06_중간발표_PPT.pptx
@@ -125,31 +125,31 @@
   <p:extLst>
     <p:ext uri="{521415D9-36F7-43E2-AB2F-B90AF26B5E84}">
       <p14:sectionLst xmlns:p14="http://schemas.microsoft.com/office/powerpoint/2010/main">
-        <p14:section name="① 표지·팀 소개" id="{962fc448-f092-49af-e6e6-45df8b621556}">
+        <p14:section name="① 표지·팀 소개" id="{2d641da7-39fa-1ca6-12e4-accebd56b6bb}">
           <p14:sldIdLst>
             <p14:sldId id="256"/>
             <p14:sldId id="257"/>
           </p14:sldIdLst>
         </p14:section>
-        <p14:section name="② 문제 정의" id="{46a8dcf2-9b20-68b8-eb24-09ef09904f03}">
+        <p14:section name="② 문제 정의" id="{57af116c-358b-6b49-01a6-97ef97df5f70}">
           <p14:sldIdLst>
             <p14:sldId id="258"/>
             <p14:sldId id="259"/>
           </p14:sldIdLst>
         </p14:section>
-        <p14:section name="③ 솔루션·핵심 가치" id="{edd19090-8060-b52d-f580-71a8b04ea113}">
+        <p14:section name="③ 솔루션·핵심 가치" id="{002d09bf-0284-94fc-156b-7c83c34bb623}">
           <p14:sldIdLst>
             <p14:sldId id="260"/>
             <p14:sldId id="261"/>
           </p14:sldIdLst>
         </p14:section>
-        <p14:section name="④ SW 기술 아키텍처" id="{5525b197-401b-6766-5bac-5040f1a53077}">
+        <p14:section name="④ SW 기술 아키텍처" id="{4c230316-6cc6-8e82-6297-34b5348b08a7}">
           <p14:sldIdLst>
             <p14:sldId id="262"/>
             <p14:sldId id="263"/>
           </p14:sldIdLst>
         </p14:section>
-        <p14:section name="⑤ 개발 현황·MVP 시연" id="{1598b395-089a-a9b7-ea04-686421aaf048}">
+        <p14:section name="⑤ 개발 현황·MVP 시연" id="{0ba07ff5-8c58-245b-c248-d7384d68733e}">
           <p14:sldIdLst>
             <p14:sldId id="264"/>
             <p14:sldId id="265"/>
@@ -157,19 +157,19 @@
             <p14:sldId id="267"/>
           </p14:sldIdLst>
         </p14:section>
-        <p14:section name="⑥ 시장 분석·비즈니스 모델" id="{bf08979f-470b-0ce7-23f0-fe60bf721d87}">
+        <p14:section name="⑥ 시장 분석·비즈니스 모델" id="{8cdddec2-f18d-7a1d-6fa4-ae903ad5ac50}">
           <p14:sldIdLst>
             <p14:sldId id="268"/>
             <p14:sldId id="269"/>
             <p14:sldId id="270"/>
           </p14:sldIdLst>
         </p14:section>
-        <p14:section name="⑦ 초기 시장 검증" id="{7c24158c-9bc9-3c7f-ff3c-b4e79b6d01fa}">
+        <p14:section name="⑦ 초기 시장 검증" id="{a5793568-501f-07d5-b95d-bd7c17bc19e1}">
           <p14:sldIdLst>
             <p14:sldId id="271"/>
           </p14:sldIdLst>
         </p14:section>
-        <p14:section name="⑧ 향후 계획·팀 역량" id="{363ad47a-b9a6-2629-8132-282550806894}">
+        <p14:section name="⑧ 향후 계획·팀 역량" id="{af89ff22-50bf-f4ad-d939-e9c8ff024ff4}">
           <p14:sldIdLst>
             <p14:sldId id="272"/>
             <p14:sldId id="273"/>
@@ -1725,7 +1725,7 @@
 · [이지훈] 확인 번호가 그 기록에서 나온 건지 어떻게 아나? → 지금은 번호와 서버 등록 시각까지 보여 주고, 기록 내용에서 번호를 다시 계산해 맞춰 보는 방법은 기말까지 만든다(그래서 70%). 지금은 앱 · 백업 파일을 함께 봐야 한다.
 · [이지훈] 본인이 쓴 기록을 믿을 수 있나? → 거짓 기록은 막을 수 없다고 인정. 막는 건 "나중에 고쳐 쓰기". 영세 사업장은 기록이 없는 경우가 많아 알바생 기록이 거의 유일한 자료가 되기 쉽다. 사장에게는 임금대장 · 계약 서류 보존 의무가 있다(근로기준법 48 · 42조).
 · [이지훈] 앱 계산이 틀리면 분쟁이 커지는 것 아닌가? 책임은? → 계산을 단정으로 내놓지 않는다. 항목별 · 주별 이유를 펼쳐 보여 주고, 안 넣은 것(연장근로 가산)과 유리하게 본 것(합의 휴무)은 화면에 적었다. 1단계 문구는 청구서가 아니라 "제가 계산을 잘 몰라서 여쭤본다"는 확인 요청. 법률 자문 아님을 적어 두었고 1350 확인을 안내한다.
-· [이지훈] 고객 검증도 전에 왜 먼저 만들었나? → 맞다. 다만 링크로 배포되는 웹앱이라 만들어 보여 주는 것이 가장 싸고 정확한 검증이었다. 9월 경쟁 앱 리뷰로 빈자리를 확인하고 10/13 정의서로 범위를 8개로 잘랐다. 설문에 캡처 3장을 넣고 "실제로 있다면 쓰겠나"를 묻는다. 12/7까지는 고치는 기간.
+· [이지훈] 고객 검증도 전에 왜 먼저 만들었나? → 맞다. 다만 링크로 배포되는 웹앱이라 빨리 만들 수 있었고, 말로 설명하기보다 화면을 보여 주며 물어야 정확한 답을 듣는다고 봤다. 9월 경쟁 앱 리뷰로 빈자리를 확인하고 10/13 정의서로 범위를 8개로 잘랐다. 설문에 캡처 3장을 넣고 "실제로 있다면 쓰겠나"를 묻는다. 12/7까지는 고치는 기간.
 · [박명진] 받은 금액을 매달 직접 넣어야 하는데 넣을까? → 가장 큰 가설이라 인터뷰 1번. 첫 화면에서 "9월 급여 받으셨나요?"라고 묻고 넣는 순간 덜 받은 돈이 보이게 했다. 5명 중 3명이 아니면 자동 인식을 앞당긴다.
 · [이지훈] 하우머치가 따라 하면? → 비교 기능은 따라올 수 있다. 해시를 서버에 넣는 기술 자체도 어렵지 않다고 인정한다. 어려운 것은 그 번호가 뜻이 있게 기록 구조를 짜는 일이다. 사유 없이 못 고치고, 삭제도 흔적이 남고, 고칠 때마다 다시 등록돼야 "몇 번 고쳤나"가 보인다. 기존 앱이 따라오려면 기록을 마음대로 고치던 방식을 바꿔야 해서 쉽게 따라오지 않는다고 본다. 그래도 따라오면 요청 · 증빙까지 잇는 흐름으로 간다. 우리도 "내용으로 번호 다시 계산"이 남아 70%다.
 · [손유호] 급여 앱에 게임이 왜? 근무 중에 게임을 권하나? → 출퇴근은 일하는 날마다 누르지만 보람은 급여일에 한 번이라, 그 사이에도 머물 이유로 넣은 것. 처음엔 근무 중에만이었는데 팀원 의견으로 10/25 조건을 풀고 설정에서 숨길 수 있게 했다. 게임 기록은 문서에 안 섞인다. 안 되면 게임을 빼도 기록 → 비교 → 요청은 그대로.
@@ -1831,7 +1831,7 @@
           <a:p>
             <a:r>
               <a:rPr lang="en-US" dirty="0"/>
-              <a:t>팀장. "교수님이 아직 구현 전일 거라 하셨는데, 저희는 웹앱이라 만드는 비용이 낮아서 먼저 만들어 보고 검증하는 순서를 택했습니다. 오늘 보여 드리는 건 완성품이 아니라 검증용 도구입니다." 사용자 검증은 11월에 합니다. 오른쪽 QR은 앱과 설문입니다. 설문은 이름을 받지 않고 3분이라, 들으시면서 답해 주셔도 됩니다. 역할은 개발 이지훈, 시장 · 수익 손유호, 검증 · 일정 박명진이고 발표도 그 순서입니다.</a:t>
+              <a:t>팀장. "교수님이 아직 구현 전일 거라 하셨는데, 저희는 웹앱이라 빨리 만들 수 있어서, 화면을 먼저 만들고 그걸 보여 주며 묻는 순서를 택했습니다. 오늘 보여 드리는 건 완성품이 아니라 검증용 도구입니다." 사용자 검증은 11월에 합니다. 오른쪽 QR은 앱과 설문입니다. 설문은 이름을 받지 않고 3분이라, 들으시면서 답해 주셔도 됩니다. 역할은 개발 이지훈, 시장 · 수익 손유호, 검증 · 일정 박명진이고 발표도 그 순서입니다.</a:t>
             </a:r>
             <a:endParaRPr lang="en-US" dirty="0"/>
           </a:p>
@@ -9249,7 +9249,7 @@
                   <a:schemeClr val="tx2"/>
                 </a:solidFill>
               </a:rPr>
-              <a:t>검증 계획: 가설 하나를 11월에 다섯 가지로 잰다</a:t>
+              <a:t>검증 계획: 11월에 설문 · 인터뷰로 다섯 가지를 확인한다</a:t>
             </a:r>
             <a:endParaRPr lang="en-US" sz="2400" dirty="0"/>
           </a:p>
@@ -10487,7 +10487,7 @@
                   <a:schemeClr val="tx1"/>
                 </a:solidFill>
               </a:rPr>
-              <a:t>왜 먼저 만들었나: 웹앱이라 만들어 보여 주는 게 가장 싼 검증. 설문에 앱 캡처 3장을 넣고 "실제로 있다면 쓰겠나"를 묻는다</a:t>
+              <a:t>왜 먼저 만들었나: 웹앱이라 빨리 만들 수 있고, 화면을 보여 주며 물어야 답이 정확하다</a:t>
             </a:r>
             <a:endParaRPr lang="en-US" sz="1050" dirty="0"/>
           </a:p>

--- a/docs/06_중간발표_PPT.pptx
+++ b/docs/06_중간발표_PPT.pptx
@@ -125,31 +125,31 @@
   <p:extLst>
     <p:ext uri="{521415D9-36F7-43E2-AB2F-B90AF26B5E84}">
       <p14:sectionLst xmlns:p14="http://schemas.microsoft.com/office/powerpoint/2010/main">
-        <p14:section name="① 표지·팀 소개" id="{2d641da7-39fa-1ca6-12e4-accebd56b6bb}">
+        <p14:section name="① 표지·팀 소개" id="{bb90c784-6bc1-d411-0778-c19351c74f88}">
           <p14:sldIdLst>
             <p14:sldId id="256"/>
             <p14:sldId id="257"/>
           </p14:sldIdLst>
         </p14:section>
-        <p14:section name="② 문제 정의" id="{57af116c-358b-6b49-01a6-97ef97df5f70}">
+        <p14:section name="② 문제 정의" id="{7edc7939-b92d-9433-bc07-7ea9ebaafc8f}">
           <p14:sldIdLst>
             <p14:sldId id="258"/>
             <p14:sldId id="259"/>
           </p14:sldIdLst>
         </p14:section>
-        <p14:section name="③ 솔루션·핵심 가치" id="{002d09bf-0284-94fc-156b-7c83c34bb623}">
+        <p14:section name="③ 솔루션·핵심 가치" id="{29ab8970-f842-7f64-5a97-862a33db709c}">
           <p14:sldIdLst>
             <p14:sldId id="260"/>
             <p14:sldId id="261"/>
           </p14:sldIdLst>
         </p14:section>
-        <p14:section name="④ SW 기술 아키텍처" id="{4c230316-6cc6-8e82-6297-34b5348b08a7}">
+        <p14:section name="④ SW 기술 아키텍처" id="{608677c2-af49-91e0-34c4-2a6d84a8d64e}">
           <p14:sldIdLst>
             <p14:sldId id="262"/>
             <p14:sldId id="263"/>
           </p14:sldIdLst>
         </p14:section>
-        <p14:section name="⑤ 개발 현황·MVP 시연" id="{0ba07ff5-8c58-245b-c248-d7384d68733e}">
+        <p14:section name="⑤ 개발 현황·MVP 시연" id="{b29302a2-9c62-c99b-0970-fc464b55ccaa}">
           <p14:sldIdLst>
             <p14:sldId id="264"/>
             <p14:sldId id="265"/>
@@ -157,19 +157,19 @@
             <p14:sldId id="267"/>
           </p14:sldIdLst>
         </p14:section>
-        <p14:section name="⑥ 시장 분석·비즈니스 모델" id="{8cdddec2-f18d-7a1d-6fa4-ae903ad5ac50}">
+        <p14:section name="⑥ 시장 분석·비즈니스 모델" id="{46cca61b-ed67-a17e-05ca-91c082d9e78b}">
           <p14:sldIdLst>
             <p14:sldId id="268"/>
             <p14:sldId id="269"/>
             <p14:sldId id="270"/>
           </p14:sldIdLst>
         </p14:section>
-        <p14:section name="⑦ 초기 시장 검증" id="{a5793568-501f-07d5-b95d-bd7c17bc19e1}">
+        <p14:section name="⑦ 초기 시장 검증" id="{24f8a8f7-44cc-378f-3d16-22956b62cc3f}">
           <p14:sldIdLst>
             <p14:sldId id="271"/>
           </p14:sldIdLst>
         </p14:section>
-        <p14:section name="⑧ 향후 계획·팀 역량" id="{af89ff22-50bf-f4ad-d939-e9c8ff024ff4}">
+        <p14:section name="⑧ 향후 계획·팀 역량" id="{412e167c-c75f-7bf4-dfc2-82f49a6fabf2}">
           <p14:sldIdLst>
             <p14:sldId id="272"/>
             <p14:sldId id="273"/>
@@ -9344,7 +9344,7 @@
                             <a:srgbClr val="5D636D"/>
                           </a:solidFill>
                         </a:rPr>
-                        <a:t>재는 것</a:t>
+                        <a:t>확인할 것</a:t>
                       </a:r>
                       <a:endParaRPr lang="en-US" sz="1000" dirty="0"/>
                     </a:p>

--- a/docs/06_중간발표_PPT.pptx
+++ b/docs/06_중간발표_PPT.pptx
@@ -125,31 +125,31 @@
   <p:extLst>
     <p:ext uri="{521415D9-36F7-43E2-AB2F-B90AF26B5E84}">
       <p14:sectionLst xmlns:p14="http://schemas.microsoft.com/office/powerpoint/2010/main">
-        <p14:section name="① 표지·팀 소개" id="{bb90c784-6bc1-d411-0778-c19351c74f88}">
+        <p14:section name="① 표지·팀 소개" id="{85f33245-4643-8513-29d7-71ccf1a85a0d}">
           <p14:sldIdLst>
             <p14:sldId id="256"/>
             <p14:sldId id="257"/>
           </p14:sldIdLst>
         </p14:section>
-        <p14:section name="② 문제 정의" id="{7edc7939-b92d-9433-bc07-7ea9ebaafc8f}">
+        <p14:section name="② 문제 정의" id="{e9a2fa2f-a592-fd19-6798-2acdbc0ededc}">
           <p14:sldIdLst>
             <p14:sldId id="258"/>
             <p14:sldId id="259"/>
           </p14:sldIdLst>
         </p14:section>
-        <p14:section name="③ 솔루션·핵심 가치" id="{29ab8970-f842-7f64-5a97-862a33db709c}">
+        <p14:section name="③ 솔루션·핵심 가치" id="{44e73011-ece5-e6a3-0d98-35a72cce64ab}">
           <p14:sldIdLst>
             <p14:sldId id="260"/>
             <p14:sldId id="261"/>
           </p14:sldIdLst>
         </p14:section>
-        <p14:section name="④ SW 기술 아키텍처" id="{608677c2-af49-91e0-34c4-2a6d84a8d64e}">
+        <p14:section name="④ SW 기술 아키텍처" id="{645363d8-0e7c-84b8-51e4-cdd52e18b073}">
           <p14:sldIdLst>
             <p14:sldId id="262"/>
             <p14:sldId id="263"/>
           </p14:sldIdLst>
         </p14:section>
-        <p14:section name="⑤ 개발 현황·MVP 시연" id="{b29302a2-9c62-c99b-0970-fc464b55ccaa}">
+        <p14:section name="⑤ 개발 현황·MVP 시연" id="{289e918a-622d-f10a-5762-56ab86d73bf7}">
           <p14:sldIdLst>
             <p14:sldId id="264"/>
             <p14:sldId id="265"/>
@@ -157,19 +157,19 @@
             <p14:sldId id="267"/>
           </p14:sldIdLst>
         </p14:section>
-        <p14:section name="⑥ 시장 분석·비즈니스 모델" id="{46cca61b-ed67-a17e-05ca-91c082d9e78b}">
+        <p14:section name="⑥ 시장 분석·비즈니스 모델" id="{f7aacdb5-1f1d-14a3-b22a-e8f29d456a17}">
           <p14:sldIdLst>
             <p14:sldId id="268"/>
             <p14:sldId id="269"/>
             <p14:sldId id="270"/>
           </p14:sldIdLst>
         </p14:section>
-        <p14:section name="⑦ 초기 시장 검증" id="{24f8a8f7-44cc-378f-3d16-22956b62cc3f}">
+        <p14:section name="⑦ 초기 시장 검증" id="{d7a7128e-b8fc-1a7e-bd27-83e36f96f924}">
           <p14:sldIdLst>
             <p14:sldId id="271"/>
           </p14:sldIdLst>
         </p14:section>
-        <p14:section name="⑧ 향후 계획·팀 역량" id="{412e167c-c75f-7bf4-dfc2-82f49a6fabf2}">
+        <p14:section name="⑧ 향후 계획·팀 역량" id="{c2f0c8d6-7890-319a-d6d6-7e31e5c381b1}">
           <p14:sldIdLst>
             <p14:sldId id="272"/>
             <p14:sldId id="273"/>
@@ -1366,7 +1366,7 @@
           <a:p>
             <a:r>
               <a:rPr lang="en-US" dirty="0"/>
-              <a:t>손유호. 알바비 앱에 왜 게임이 있나: 출퇴근은 일하는 날마다 누르지만 보람은 급여일에 한 번이라, 그 사이에도 머물 이유로 넣었고 그 화면이 광고 자리입니다. 처음엔 근무 중에만 열렸는데 팀원 의견으로 10/25에 조건을 풀고 설정에서 숨길 수 있게 했습니다. 광고 형식은 웹앱이라 배너 · 전면이 기본이고 보상형은 승인이 필요합니다(린 캔버스와 같은 말). 2차 구독은 "기록이 폰에만 있다"는 약점을 돈 내고 없애는 선택 기능이라 "근무 내용은 폰 안에만" 원칙과 충돌하지 않습니다(원하는 사람만). 문서를 돈 받고 만들어 주는 건 법적 이유로 하지 않습니다(웹 조사 기준, 전문가 검토 아님). 광고 가설은 설문의 "게임 화면 광고" 문항과 승인 뒤 게임 화면 열람 수로 확인합니다. 운영 비용은 지금 서버 0원 · 배포 0원이라 수익이 0이어도 서비스는 돌아가고, 인건비는 팀 3명입니다.</a:t>
+              <a:t>손유호. 알바비 앱에 왜 게임이 있나: 출퇴근은 일하는 날마다 누르지만 보람은 급여일에 한 번이라, 그 사이에도 머물 이유로 넣었고 그 화면이 광고 자리입니다. 처음엔 근무 중에만 열렸는데 팀원 의견으로 10/25에 조건을 풀고 설정에서 숨길 수 있게 했습니다. 광고 형식은 웹앱이라 배너 · 전면이 기본이고 보상형은 승인이 필요합니다(린 캔버스와 같은 말). 2차 구독은 폰을 바꾸거나 잃어버려도 기록이 남게 하는 선택 기능이고, 원하는 사람만 쓰므로 "근무 내용은 폰 안에만" 원칙과 부딪히지 않습니다. 문서를 돈 받고 만들어 주는 건 법적 이유로 하지 않습니다(웹 조사 기준, 전문가 검토 아님). 광고 가설은 설문의 "게임 화면 광고" 문항과 승인 뒤 게임 화면 열람 수로 확인합니다. 운영 비용은 지금 서버 0원 · 배포 0원이라 수익이 0이어도 서비스는 돌아가고, 인건비는 팀 3명입니다.</a:t>
             </a:r>
             <a:endParaRPr lang="en-US" dirty="0"/>
           </a:p>
@@ -8791,7 +8791,7 @@
                   <a:schemeClr val="accent5"/>
                 </a:solidFill>
               </a:rPr>
-              <a:t>"기록이 폰에만 있다"는 약점을 돈 내고 없애는 선택 기능 (동기화 · 자동 백업)</a:t>
+              <a:t>폰을 바꾸거나 잃어버려도 기록이 남게 하는 선택 기능 (동기화 · 자동 백업)</a:t>
             </a:r>
             <a:endParaRPr lang="en-US" sz="1300" dirty="0"/>
           </a:p>

--- a/docs/06_중간발표_PPT.pptx
+++ b/docs/06_중간발표_PPT.pptx
@@ -125,31 +125,31 @@
   <p:extLst>
     <p:ext uri="{521415D9-36F7-43E2-AB2F-B90AF26B5E84}">
       <p14:sectionLst xmlns:p14="http://schemas.microsoft.com/office/powerpoint/2010/main">
-        <p14:section name="① 표지·팀 소개" id="{85f33245-4643-8513-29d7-71ccf1a85a0d}">
+        <p14:section name="① 표지·팀 소개" id="{8c4ea9c0-4f4b-3b79-ac36-1bc964759854}">
           <p14:sldIdLst>
             <p14:sldId id="256"/>
             <p14:sldId id="257"/>
           </p14:sldIdLst>
         </p14:section>
-        <p14:section name="② 문제 정의" id="{e9a2fa2f-a592-fd19-6798-2acdbc0ededc}">
+        <p14:section name="② 문제 정의" id="{742ff0cd-760a-99c1-7495-7fa8fb2758cc}">
           <p14:sldIdLst>
             <p14:sldId id="258"/>
             <p14:sldId id="259"/>
           </p14:sldIdLst>
         </p14:section>
-        <p14:section name="③ 솔루션·핵심 가치" id="{44e73011-ece5-e6a3-0d98-35a72cce64ab}">
+        <p14:section name="③ 솔루션·핵심 가치" id="{71cd2068-0cea-c705-a2f5-c71f5f31e037}">
           <p14:sldIdLst>
             <p14:sldId id="260"/>
             <p14:sldId id="261"/>
           </p14:sldIdLst>
         </p14:section>
-        <p14:section name="④ SW 기술 아키텍처" id="{645363d8-0e7c-84b8-51e4-cdd52e18b073}">
+        <p14:section name="④ SW 기술 아키텍처" id="{d467c2f7-0cf2-f17f-4ec2-fef50fac4211}">
           <p14:sldIdLst>
             <p14:sldId id="262"/>
             <p14:sldId id="263"/>
           </p14:sldIdLst>
         </p14:section>
-        <p14:section name="⑤ 개발 현황·MVP 시연" id="{289e918a-622d-f10a-5762-56ab86d73bf7}">
+        <p14:section name="⑤ 개발 현황·MVP 시연" id="{634484ae-7efe-e92d-a8b1-fe5965593401}">
           <p14:sldIdLst>
             <p14:sldId id="264"/>
             <p14:sldId id="265"/>
@@ -157,19 +157,19 @@
             <p14:sldId id="267"/>
           </p14:sldIdLst>
         </p14:section>
-        <p14:section name="⑥ 시장 분석·비즈니스 모델" id="{f7aacdb5-1f1d-14a3-b22a-e8f29d456a17}">
+        <p14:section name="⑥ 시장 분석·비즈니스 모델" id="{de83ad09-4063-3a5c-a637-8578a9036e10}">
           <p14:sldIdLst>
             <p14:sldId id="268"/>
             <p14:sldId id="269"/>
             <p14:sldId id="270"/>
           </p14:sldIdLst>
         </p14:section>
-        <p14:section name="⑦ 초기 시장 검증" id="{d7a7128e-b8fc-1a7e-bd27-83e36f96f924}">
+        <p14:section name="⑦ 초기 시장 검증" id="{8e9ba9da-6774-2b34-295e-32024fbe4ccc}">
           <p14:sldIdLst>
             <p14:sldId id="271"/>
           </p14:sldIdLst>
         </p14:section>
-        <p14:section name="⑧ 향후 계획·팀 역량" id="{c2f0c8d6-7890-319a-d6d6-7e31e5c381b1}">
+        <p14:section name="⑧ 향후 계획·팀 역량" id="{d2a6af5e-dbbf-2cd6-efd8-f579843de70e}">
           <p14:sldIdLst>
             <p14:sldId id="272"/>
             <p14:sldId id="273"/>
@@ -2007,7 +2007,7 @@
           <a:p>
             <a:r>
               <a:rPr lang="en-US" dirty="0"/>
-              <a:t>무료 앱의 진짜 경쟁자는 다른 앱이 아니라 메모장과 통장 확인입니다. 그래서 첫 열에 넣었습니다. 하우머치는 혼자 쓸 수 있지만 예상 급여에서 멈추고, 기그는 사장 연동이 필요하고, 계산기는 기록이 없고, 진정24는 증거가 있어야 시작합니다. 가운데 세 줄이 전부 X인 자리가 저희 자리입니다. 마지막 줄 진정 접수는 저희가 일부러 안 합니다. 1350과 노동포털로 연결만 합니다.</a:t>
+              <a:t>무료 앱이 실제로 겨루는 상대는 다른 앱보다 메모장과 통장 확인입니다. 그래서 첫 열에 넣었습니다. 하우머치는 혼자 쓸 수 있지만 예상 급여에서 멈추고, 기그는 사장 연동이 필요하고, 계산기는 기록이 없고, 진정24는 증거가 있어야 시작합니다. 가운데 세 줄이 전부 X인 자리가 저희 자리입니다. 마지막 줄 진정 접수는 저희가 일부러 안 합니다. 1350과 노동포털로 연결만 합니다.</a:t>
             </a:r>
             <a:endParaRPr lang="en-US" dirty="0"/>
           </a:p>
@@ -19672,7 +19672,7 @@
                   <a:schemeClr val="tx1"/>
                 </a:solidFill>
               </a:rPr>
-              <a:t>신고 창구가 없어서가 아니라 말을 꺼낼 근거가 없어서 덮인다. 알바가드는 그 앞 단계를 채운다. 마지막 줄 X는 일부러 비웠다  (공식 소개 · 리뷰, 2026.9)</a:t>
+              <a:t>가운데 세 줄(비교 · 요청 · 등록 시각)은 다른 서비스가 모두 X다. 알바가드가 채우는 칸이다. 진정 접수는 일부러 연결만 한다  (공식 소개 · 리뷰, 2026.9)</a:t>
             </a:r>
             <a:endParaRPr lang="en-US" sz="1150" dirty="0"/>
           </a:p>
@@ -20564,7 +20564,7 @@
                   <a:schemeClr val="tx2"/>
                 </a:solidFill>
               </a:rPr>
-              <a:t>차별점 세 가지와 한계 한 가지</a:t>
+              <a:t>차별점과 한계</a:t>
             </a:r>
             <a:endParaRPr lang="en-US" sz="2400" dirty="0"/>
           </a:p>

--- a/docs/06_중간발표_PPT.pptx
+++ b/docs/06_중간발표_PPT.pptx
@@ -125,31 +125,31 @@
   <p:extLst>
     <p:ext uri="{521415D9-36F7-43E2-AB2F-B90AF26B5E84}">
       <p14:sectionLst xmlns:p14="http://schemas.microsoft.com/office/powerpoint/2010/main">
-        <p14:section name="① 표지·팀 소개" id="{8c4ea9c0-4f4b-3b79-ac36-1bc964759854}">
+        <p14:section name="① 표지·팀 소개" id="{57f74495-d371-46be-0460-4f1c9909b357}">
           <p14:sldIdLst>
             <p14:sldId id="256"/>
             <p14:sldId id="257"/>
           </p14:sldIdLst>
         </p14:section>
-        <p14:section name="② 문제 정의" id="{742ff0cd-760a-99c1-7495-7fa8fb2758cc}">
+        <p14:section name="② 문제 정의" id="{7d276e9f-99cf-b45e-9949-476f1043e9f0}">
           <p14:sldIdLst>
             <p14:sldId id="258"/>
             <p14:sldId id="259"/>
           </p14:sldIdLst>
         </p14:section>
-        <p14:section name="③ 솔루션·핵심 가치" id="{71cd2068-0cea-c705-a2f5-c71f5f31e037}">
+        <p14:section name="③ 솔루션·핵심 가치" id="{d691fa29-fb4d-54fc-6642-636bcd897f50}">
           <p14:sldIdLst>
             <p14:sldId id="260"/>
             <p14:sldId id="261"/>
           </p14:sldIdLst>
         </p14:section>
-        <p14:section name="④ SW 기술 아키텍처" id="{d467c2f7-0cf2-f17f-4ec2-fef50fac4211}">
+        <p14:section name="④ SW 기술 아키텍처" id="{b985658a-57aa-bd88-87e1-33ee656425e7}">
           <p14:sldIdLst>
             <p14:sldId id="262"/>
             <p14:sldId id="263"/>
           </p14:sldIdLst>
         </p14:section>
-        <p14:section name="⑤ 개발 현황·MVP 시연" id="{634484ae-7efe-e92d-a8b1-fe5965593401}">
+        <p14:section name="⑤ 개발 현황·MVP 시연" id="{69411d00-95a5-bfe1-11c5-27aba381a516}">
           <p14:sldIdLst>
             <p14:sldId id="264"/>
             <p14:sldId id="265"/>
@@ -157,19 +157,19 @@
             <p14:sldId id="267"/>
           </p14:sldIdLst>
         </p14:section>
-        <p14:section name="⑥ 시장 분석·비즈니스 모델" id="{de83ad09-4063-3a5c-a637-8578a9036e10}">
+        <p14:section name="⑥ 시장 분석·비즈니스 모델" id="{e2dfeca1-f57a-c0aa-b48c-d56ebe94b9ec}">
           <p14:sldIdLst>
             <p14:sldId id="268"/>
             <p14:sldId id="269"/>
             <p14:sldId id="270"/>
           </p14:sldIdLst>
         </p14:section>
-        <p14:section name="⑦ 초기 시장 검증" id="{8e9ba9da-6774-2b34-295e-32024fbe4ccc}">
+        <p14:section name="⑦ 초기 시장 검증" id="{f8665c0c-f173-db42-22e1-f85807587ba4}">
           <p14:sldIdLst>
             <p14:sldId id="271"/>
           </p14:sldIdLst>
         </p14:section>
-        <p14:section name="⑧ 향후 계획·팀 역량" id="{d2a6af5e-dbbf-2cd6-efd8-f579843de70e}">
+        <p14:section name="⑧ 향후 계획·팀 역량" id="{831f7b68-afdd-bf4a-89be-f8bff7553283}">
           <p14:sldIdLst>
             <p14:sldId id="272"/>
             <p14:sldId id="273"/>
@@ -1366,7 +1366,7 @@
           <a:p>
             <a:r>
               <a:rPr lang="en-US" dirty="0"/>
-              <a:t>손유호. 알바비 앱에 왜 게임이 있나: 출퇴근은 일하는 날마다 누르지만 보람은 급여일에 한 번이라, 그 사이에도 머물 이유로 넣었고 그 화면이 광고 자리입니다. 처음엔 근무 중에만 열렸는데 팀원 의견으로 10/25에 조건을 풀고 설정에서 숨길 수 있게 했습니다. 광고 형식은 웹앱이라 배너 · 전면이 기본이고 보상형은 승인이 필요합니다(린 캔버스와 같은 말). 2차 구독은 폰을 바꾸거나 잃어버려도 기록이 남게 하는 선택 기능이고, 원하는 사람만 쓰므로 "근무 내용은 폰 안에만" 원칙과 부딪히지 않습니다. 문서를 돈 받고 만들어 주는 건 법적 이유로 하지 않습니다(웹 조사 기준, 전문가 검토 아님). 광고 가설은 설문의 "게임 화면 광고" 문항과 승인 뒤 게임 화면 열람 수로 확인합니다. 운영 비용은 지금 서버 0원 · 배포 0원이라 수익이 0이어도 서비스는 돌아가고, 인건비는 팀 3명입니다.</a:t>
+              <a:t>손유호. 알바비 앱에 왜 게임이 있나: 출퇴근은 일하는 날마다 누르지만 돈을 확인하는 건 급여일에 한 번이라, 그 사이에도 앱을 열 이유로 넣었고 그 화면이 광고 자리입니다. 처음엔 근무 중에만 열렸는데 팀원 의견으로 10/25에 조건을 풀고 설정에서 숨길 수 있게 했습니다. 광고 형식은 웹앱이라 배너 · 전면이 기본이고 보상형은 승인이 필요합니다(린 캔버스와 같은 말). 2차 구독은 폰을 바꾸거나 잃어버려도 기록이 남게 하는 선택 기능이고, 원하는 사람만 쓰므로 "근무 내용은 폰 안에만" 원칙과 부딪히지 않습니다. 문서를 돈 받고 만들어 주는 건 법적 이유로 하지 않습니다(웹 조사 기준, 전문가 검토 아님). 광고 가설은 설문의 "게임 화면 광고" 문항과 승인 뒤 게임 화면 열람 수로 확인합니다. 운영 비용은 지금 서버 0원 · 배포 0원이라 수익이 0이어도 서비스는 돌아가고, 인건비는 팀 3명입니다.</a:t>
             </a:r>
             <a:endParaRPr lang="en-US" dirty="0"/>
           </a:p>
@@ -1728,7 +1728,7 @@
 · [이지훈] 고객 검증도 전에 왜 먼저 만들었나? → 맞다. 다만 링크로 배포되는 웹앱이라 빨리 만들 수 있었고, 말로 설명하기보다 화면을 보여 주며 물어야 정확한 답을 듣는다고 봤다. 9월 경쟁 앱 리뷰로 빈자리를 확인하고 10/13 정의서로 범위를 8개로 잘랐다. 설문에 캡처 3장을 넣고 "실제로 있다면 쓰겠나"를 묻는다. 12/7까지는 고치는 기간.
 · [박명진] 받은 금액을 매달 직접 넣어야 하는데 넣을까? → 가장 큰 가설이라 인터뷰 1번. 첫 화면에서 "9월 급여 받으셨나요?"라고 묻고 넣는 순간 덜 받은 돈이 보이게 했다. 5명 중 3명이 아니면 자동 인식을 앞당긴다.
 · [이지훈] 하우머치가 따라 하면? → 비교 기능은 따라올 수 있다. 해시를 서버에 넣는 기술 자체도 어렵지 않다고 인정한다. 어려운 것은 그 번호가 뜻이 있게 기록 구조를 짜는 일이다. 사유 없이 못 고치고, 삭제도 흔적이 남고, 고칠 때마다 다시 등록돼야 "몇 번 고쳤나"가 보인다. 기존 앱이 따라오려면 기록을 마음대로 고치던 방식을 바꿔야 해서 쉽게 따라오지 않는다고 본다. 그래도 따라오면 요청 · 증빙까지 잇는 흐름으로 간다. 우리도 "내용으로 번호 다시 계산"이 남아 70%다.
-· [손유호] 급여 앱에 게임이 왜? 근무 중에 게임을 권하나? → 출퇴근은 일하는 날마다 누르지만 보람은 급여일에 한 번이라, 그 사이에도 머물 이유로 넣은 것. 처음엔 근무 중에만이었는데 팀원 의견으로 10/25 조건을 풀고 설정에서 숨길 수 있게 했다. 게임 기록은 문서에 안 섞인다. 안 되면 게임을 빼도 기록 → 비교 → 요청은 그대로.
+· [손유호] 급여 앱에 게임이 왜? 근무 중에 게임을 권하나? → 출퇴근은 일하는 날마다 누르지만 돈을 확인하는 건 급여일에 한 번이라, 그 사이에도 앱을 열 이유로 넣은 것. 처음엔 근무 중에만이었는데 팀원 의견으로 10/25 조건을 풀고 설정에서 숨길 수 있게 했다. 게임 기록은 문서에 안 섞인다. 안 되면 게임을 빼도 기록 → 비교 → 요청은 그대로.
 · [박명진] 같은 과 학생 설문이 무슨 의미? 편향 아닌가? → 맞다. "정식 조사 아님"을 적고 사람 수로만 말한다. 중복 응답도 막지 않았다(이름 · 기기 정보를 안 받는 대가). 11월 30명은 과 밖에서, 인터뷰 5명으로 이유를 듣는다.
 · [이지훈] 법률 서비스 아닌가? → 무료, 본인 기록을 정해진 양식에 채울 뿐, 개별 사안 검토 · 대행 없음, 진정은 1350 · 노동포털로 연결만.
 · [손유호] 수익은? → 게임 화면 광고(가설). 운영 비용은 0원. 문서 유료화는 안 한다.
@@ -7293,7 +7293,7 @@
                   <a:schemeClr val="accent5"/>
                 </a:solidFill>
               </a:rPr>
-              <a:t>2025년 체불액 중 30인 미만 사업장 (1조 4,012억 원). 카페 · 편의점 · 음식점이 여기에. 알바생 몫은 따로 알 수 없다</a:t>
+              <a:t>2025년 체불액 중 30인 미만 사업장 (1조 4,012억 원). 카페 · 편의점 · 음식점이 여기 속한다. 알바생 몫은 따로 알 수 없다</a:t>
             </a:r>
             <a:endParaRPr lang="en-US" sz="1000" dirty="0"/>
           </a:p>
@@ -8341,7 +8341,7 @@
                   <a:schemeClr val="tx1"/>
                 </a:solidFill>
               </a:rPr>
-              <a:t>먼저 노리는 사람은 하우머치 사용자가 아니다. 카톡 · 메모에 적거나 아예 안 적고 통장 총액만 보는 학생이다. 하우머치가 비교 칸을 넣으면 따라올 수 있으니, 따라 하기 어려운 쪽(기록 등록)을 키운다.</a:t>
+              <a:t>첫 사용자로 보는 사람은 하우머치 사용자가 아니다. 카톡 · 메모에 적거나 아예 안 적고 통장 총액만 보는 학생이다. 하우머치가 비교 칸을 넣으면 따라올 수 있으니, 따라 하기 어려운 쪽(기록 등록)을 키운다.</a:t>
             </a:r>
             <a:endParaRPr lang="en-US" sz="1050" dirty="0"/>
           </a:p>
@@ -8523,7 +8523,7 @@
                   <a:schemeClr val="tx1"/>
                 </a:solidFill>
               </a:rPr>
-              <a:t>출퇴근은 날마다 누르지만 보람은 급여일에 한 번. 그 사이 머물 이유로 게임을 넣었고, 그 화면이 광고 자리다.</a:t>
+              <a:t>출퇴근은 날마다 누르지만 돈을 확인하는 건 급여일에 한 번. 그 사이 앱을 열 이유로 게임을 넣었고, 그 화면이 광고 자리다.</a:t>
             </a:r>
             <a:endParaRPr lang="en-US" sz="1100" dirty="0"/>
           </a:p>
@@ -9031,7 +9031,7 @@
                   <a:schemeClr val="tx1"/>
                 </a:solidFill>
               </a:rPr>
-              <a:t>링크 하나로 설치되니 에브리타임 · 학과 단톡 · 알바 커뮤니티에 링크로. "주휴수당 계산법" 짧은 영상으로 유입</a:t>
+              <a:t>에브리타임 · 학과 단톡 · 알바 커뮤니티에 링크를 올린다. "주휴수당 계산법" 짧은 영상도 만든다</a:t>
             </a:r>
             <a:endParaRPr lang="en-US" sz="1100" dirty="0"/>
           </a:p>
@@ -14914,7 +14914,7 @@
                   <a:schemeClr val="accent5"/>
                 </a:solidFill>
               </a:rPr>
-              <a:t>시작 단계</a:t>
+              <a:t>설문 열림</a:t>
             </a:r>
             <a:endParaRPr lang="en-US" sz="1300" dirty="0"/>
           </a:p>
@@ -15908,7 +15908,7 @@
                   <a:schemeClr val="accent5"/>
                 </a:solidFill>
               </a:rPr>
-              <a:t>수당은 안내조차 안 되고, 주휴 · 야간 계산 기준은 더 모른다. 계산기는 있어도 넣을 기록이 없다</a:t>
+              <a:t>수당 안내를 못 받는 경우가 많고, 주휴 · 야간 계산 기준은 알기 어렵다. 계산기는 있어도 넣을 기록이 없다</a:t>
             </a:r>
             <a:endParaRPr lang="en-US" sz="1050" dirty="0"/>
           </a:p>
@@ -19780,7 +19780,7 @@
                   <a:schemeClr val="accent5"/>
                 </a:solidFill>
               </a:rPr>
-              <a:t>③ 솔루션 · 서비스 개요   ·   문제 1 · 2 → 비교, 문제 3 → 요청, 기록은 셋의 바탕</a:t>
+              <a:t>③ 솔루션 · 서비스 개요   ·   문제 1 · 2는 비교로, 문제 3은 요청으로 푼다. 기록이 그 바탕</a:t>
             </a:r>
             <a:endParaRPr lang="en-US" sz="1050" dirty="0"/>
           </a:p>
@@ -20672,7 +20672,7 @@
                   <a:schemeClr val="accent5"/>
                 </a:solidFill>
               </a:rPr>
-              <a:t>   타겟: 사장 협조 없이</a:t>
+              <a:t>   사장 협조가 없어도</a:t>
             </a:r>
             <a:endParaRPr lang="en-US" sz="1350" dirty="0"/>
           </a:p>
@@ -20708,7 +20708,7 @@
                   <a:schemeClr val="accent5"/>
                 </a:solidFill>
               </a:rPr>
-              <a:t>근무지만 직접 등록. 기그와 달리 사장 가입 없이, 2 · 3의 전제</a:t>
+              <a:t>근무지만 직접 등록한다. 기그와 달리 사장이 가입하지 않아도 된다</a:t>
             </a:r>
             <a:endParaRPr lang="en-US" sz="1100" dirty="0"/>
           </a:p>
@@ -20839,7 +20839,7 @@
                   <a:schemeClr val="accent5"/>
                 </a:solidFill>
               </a:rPr>
-              <a:t>   비교 1 · 2, 요청 3의 답</a:t>
+              <a:t>   문제 1 · 2 · 3의 답</a:t>
             </a:r>
             <a:endParaRPr lang="en-US" sz="1350" dirty="0"/>
           </a:p>
@@ -20875,7 +20875,7 @@
                   <a:schemeClr val="accent5"/>
                 </a:solidFill>
               </a:rPr>
-              <a:t>실제 받은 돈과 비교해 차액을 찾고, 요청 문구와 증빙 묶음까지 잇는다. 비교한 네 서비스 모두 없는 부분</a:t>
+              <a:t>실제 받은 돈과 비교해 차액을 찾고, 요청 문구와 증빙 묶음까지 잇는다. 네 서비스 모두 없는 부분</a:t>
             </a:r>
             <a:endParaRPr lang="en-US" sz="1100" dirty="0"/>
           </a:p>
@@ -21042,7 +21042,7 @@
                   <a:schemeClr val="accent5"/>
                 </a:solidFill>
               </a:rPr>
-              <a:t>기록할 때마다 확인 번호와 서버 등록 시각이 남고, 누구나 확인 페이지에서 등록 시각을 볼 수 있다. 내용으로 번호를 다시 계산하는 방법은 기말까지</a:t>
+              <a:t>기록할 때마다 확인 번호와 서버 등록 시각이 남고, 누구나 확인 페이지에서 등록 시각을 볼 수 있다. 내용으로 번호를 다시 계산하는 방법은 기말까지 만든다</a:t>
             </a:r>
             <a:endParaRPr lang="en-US" sz="1100" dirty="0"/>
           </a:p>

--- a/docs/06_중간발표_PPT.pptx
+++ b/docs/06_중간발표_PPT.pptx
@@ -125,31 +125,31 @@
   <p:extLst>
     <p:ext uri="{521415D9-36F7-43E2-AB2F-B90AF26B5E84}">
       <p14:sectionLst xmlns:p14="http://schemas.microsoft.com/office/powerpoint/2010/main">
-        <p14:section name="① 표지·팀 소개" id="{57f74495-d371-46be-0460-4f1c9909b357}">
+        <p14:section name="① 표지·팀 소개" id="{8cb69191-ff25-244d-1bd8-1c4250249a85}">
           <p14:sldIdLst>
             <p14:sldId id="256"/>
             <p14:sldId id="257"/>
           </p14:sldIdLst>
         </p14:section>
-        <p14:section name="② 문제 정의" id="{7d276e9f-99cf-b45e-9949-476f1043e9f0}">
+        <p14:section name="② 문제 정의" id="{d038dd58-4a7f-ae87-b48e-f7daab49618b}">
           <p14:sldIdLst>
             <p14:sldId id="258"/>
             <p14:sldId id="259"/>
           </p14:sldIdLst>
         </p14:section>
-        <p14:section name="③ 솔루션·핵심 가치" id="{d691fa29-fb4d-54fc-6642-636bcd897f50}">
+        <p14:section name="③ 솔루션·핵심 가치" id="{c434f3d7-a85a-479f-a8cc-8b9e68bb7d20}">
           <p14:sldIdLst>
             <p14:sldId id="260"/>
             <p14:sldId id="261"/>
           </p14:sldIdLst>
         </p14:section>
-        <p14:section name="④ SW 기술 아키텍처" id="{b985658a-57aa-bd88-87e1-33ee656425e7}">
+        <p14:section name="④ SW 기술 아키텍처" id="{b109b847-506b-d5da-337c-b47afdcb9fe9}">
           <p14:sldIdLst>
             <p14:sldId id="262"/>
             <p14:sldId id="263"/>
           </p14:sldIdLst>
         </p14:section>
-        <p14:section name="⑤ 개발 현황·MVP 시연" id="{69411d00-95a5-bfe1-11c5-27aba381a516}">
+        <p14:section name="⑤ 개발 현황·MVP 시연" id="{b80d5f22-29ec-a689-9263-cb009d7ce924}">
           <p14:sldIdLst>
             <p14:sldId id="264"/>
             <p14:sldId id="265"/>
@@ -157,19 +157,19 @@
             <p14:sldId id="267"/>
           </p14:sldIdLst>
         </p14:section>
-        <p14:section name="⑥ 시장 분석·비즈니스 모델" id="{e2dfeca1-f57a-c0aa-b48c-d56ebe94b9ec}">
+        <p14:section name="⑥ 시장 분석·비즈니스 모델" id="{4af3e9d9-7611-beb4-60b9-ecbbad4bb643}">
           <p14:sldIdLst>
             <p14:sldId id="268"/>
             <p14:sldId id="269"/>
             <p14:sldId id="270"/>
           </p14:sldIdLst>
         </p14:section>
-        <p14:section name="⑦ 초기 시장 검증" id="{f8665c0c-f173-db42-22e1-f85807587ba4}">
+        <p14:section name="⑦ 초기 시장 검증" id="{02e97832-2fad-e9d7-bc0f-bcca86f7ceff}">
           <p14:sldIdLst>
             <p14:sldId id="271"/>
           </p14:sldIdLst>
         </p14:section>
-        <p14:section name="⑧ 향후 계획·팀 역량" id="{831f7b68-afdd-bf4a-89be-f8bff7553283}">
+        <p14:section name="⑧ 향후 계획·팀 역량" id="{24780e2f-19e7-543d-22d5-d59bf03043eb}">
           <p14:sldIdLst>
             <p14:sldId id="272"/>
             <p14:sldId id="273"/>
@@ -926,7 +926,7 @@
           <a:p>
             <a:r>
               <a:rPr lang="en-US" dirty="0"/>
-              <a:t>네 단계가 차별점과 1:1입니다. 영상에 안 나오는 것은 말로 짚습니다: 캘린더의 연장 · 대타 표시(9장 캡처), 3단계 진정 안내(1350 · 노동포털 연결, 진정서는 만들지 않음). 등록 → 비교 → 요청 · 증빙 → 확인. 예시 데이터는 발표 전에 미리 넣어 둡니다(오늘 날짜는 비어 있어 출근 · 퇴근이 그대로 됩니다). 7번 표에는 시연 중 남긴 2건만 나옵니다. 예시 데이터는 진짜 시각이 아니라 등록하지 않기 때문입니다. 시연은 다음 장의 녹화 영상(1분 39초)으로 하고, 단계마다 멈춰서 설명하면 약 3분입니다. 영상은 배포된 앱을 실제로 눌러 찍은 것이라 서버 등록과 확인 번호가 진짜입니다(10/26 녹화. 화면의 시각은 녹화한 시각). 질문이 오면 실제 앱으로 1단계(출근 · 퇴근 → "2건 등록됨")만 보여 줍니다. 전날 할 일: Supabase 대시보드에서 프로젝트 상태를 확인하고(잠들어 있으면 Restore) 앱에서 출근 · 퇴근을 눌러 설정 탭에 "2건 등록됨"이 뜨는지 본다. 그다음 폰의 와이파이를 끄고 데이터로 확인 페이지(jihooni217.github.io/albaguard/verify.html?h=92f6228a4349bdc8)를 열어 등록 시각이 나오는지 본다. 당일 아침에도 한 번 더.</a:t>
+              <a:t>네 단계(등록 → 비교 → 요청 · 증빙 → 확인)가 차별점과 하나씩 맞물립니다. 영상에 안 나오는 것은 말로 짚습니다: 캘린더의 연장 · 대타 표시(9장 캡처), 3단계 진정 안내(1350 · 노동포털 연결, 진정서는 만들지 않음). 예시 데이터는 발표 전에 미리 넣어 둡니다(오늘 날짜는 비어 있어 출근 · 퇴근이 그대로 됩니다). 7번 표에는 시연 중 남긴 2건만 나옵니다. 예시 데이터는 진짜 시각이 아니라 등록하지 않기 때문입니다. 시연은 다음 장의 녹화 영상(1분 39초)으로 하고, 단계마다 멈춰서 설명하면 약 3분입니다. 영상은 배포된 앱을 실제로 눌러 찍은 것이라 서버 등록과 확인 번호가 진짜입니다(10/26 녹화. 화면의 시각은 녹화한 시각). 질문이 오면 실제 앱으로 1단계(출근 · 퇴근 → "2건 등록됨")만 보여 줍니다. 전날 할 일: Supabase 대시보드에서 프로젝트 상태를 확인하고(잠들어 있으면 Restore) 앱에서 출근 · 퇴근을 눌러 설정 탭에 "2건 등록됨"이 뜨는지 본다. 그다음 폰의 와이파이를 끄고 데이터로 확인 페이지(jihooni217.github.io/albaguard/verify.html?h=92f6228a4349bdc8)를 열어 등록 시각이 나오는지 본다. 당일 아침에도 한 번 더.</a:t>
             </a:r>
             <a:endParaRPr lang="en-US" dirty="0"/>
           </a:p>
@@ -1102,7 +1102,7 @@
           <a:p>
             <a:r>
               <a:rPr lang="en-US" dirty="0"/>
-              <a:t>시연 직후에 보여 줍니다. "방금 보신 것이 8개 중 이만큼"입니다. 100%는 쓰지 않았습니다. 계획 기준은 10/13 MVP 기능 정의서의 포함 기능 8개와 제외 기능 6개(금액 자동 인식 · 푸시 알림 · AI 문구 · 광고 · 로그인 · 진정서)입니다. %는 구현 + 실제 폰 확인 + 사용자 검증을 100으로 보고 남은 일만큼 뺀 자체 평가이고, 동작은 컴퓨터의 폰 크기 화면에서, 실제 폰은 설치까지 확인했습니다. 동그라미 세 칸은 컴퓨터 동작 · 실제 폰 · 사용자 검증이고, 지금은 모두 첫 칸만 찼습니다. 뒤 두 칸이 11월 일정입니다. 세 칸 중 첫 칸만 찼는데 왜 80~90%냐고 물으시면, %는 칸 수가 아니라 남은 일의 크기로 어림한 것이고 11월 검증에서 큰 수정이 나오면 내려갈 수 있다고 답합니다. 이 장이 끝나면 손유호에게 넘깁니다.</a:t>
+              <a:t>시연 직후에 보여 줍니다. "방금 보신 것이 8개 중 이만큼"입니다. 100%는 쓰지 않았습니다. 계획 기준은 9월 기획서의 기능 4개에서 출발해, 10/13 MVP 기능 정의서에서 포함 8개 · 제외 6개(금액 자동 인식 · 푸시 알림 · AI 문구 · 광고 · 로그인 · 진정서)로 고정한 것입니다. %는 구현 + 실제 폰 확인 + 사용자 검증을 100으로 보고 남은 일만큼 뺀 자체 평가이고, 동작은 컴퓨터의 폰 크기 화면에서, 실제 폰은 설치까지 확인했습니다. 동그라미 세 칸은 컴퓨터 동작 · 실제 폰 · 사용자 검증이고, 지금은 모두 첫 칸만 찼습니다. 뒤 두 칸이 11월 일정입니다. 세 칸 중 첫 칸만 찼는데 왜 80~90%냐고 물으시면, %는 칸 수가 아니라 남은 일의 크기로 어림한 것이고 11월 검증에서 큰 수정이 나오면 내려갈 수 있다고 답합니다. 이 장이 끝나면 손유호에게 넘깁니다.</a:t>
             </a:r>
             <a:endParaRPr lang="en-US" dirty="0"/>
           </a:p>
@@ -1190,7 +1190,7 @@
           <a:p>
             <a:r>
               <a:rPr lang="en-US" dirty="0"/>
-              <a:t>손유호. 임금체불은 2년 연속 2조 원이고 30인 미만 사업장에 몰려 있습니다. 타겟 규모는 어림이라 "약"을 붙여 말하고, 없는 숫자(지금 알바 중, 주 15시간 이상)는 미상으로 둡니다. 재적학생은 교육부 2026 교육기본통계(대학원 포함), 알바 경험률은 알바몬 설문(1,193명, 여름방학 알바 88.9%, 2023)과 동대신문 설문(200명, 67.5%)이라 대표값이 아닙니다. 근절 대책은 대지급금을 3개월분에서 6개월분으로, 개정법은 상습 체불 사업주 신용 제재입니다. 체불 통계는 문제의 크기이지 알바 시장의 크기가 아닙니다. 알바생 몫은 이 통계에서 알 수 없어 미상으로 둡니다. "주 15시간 이상이 다수인지의 첫 조각은 지금 답하고 계신 설문에서 나오지만, 규모 추정이 아니라 메시지를 정하는 참고값입니다. 다음 순서에서 박명진이 말씀드립니다." 출처: 고용노동부 노동포털 임금체불 통계현황, 알바천국 설문, 교육부 교육기본통계.</a:t>
+              <a:t>손유호. 임금체불은 2년 연속 2조 원이고 30인 미만 사업장에 몰려 있습니다. 타겟 규모는 어림이라 "약"을 붙여 말하고, 없는 숫자(지금 알바 중, 주 15시간 이상)는 미상으로 둡니다. 재적학생은 교육부 2026 교육기본통계(대학원 포함), 알바 경험률은 알바몬 설문(1,193명, 여름방학 알바 88.9%, 2023)과 동대신문 설문(200명, 67.5%)이라 대표값이 아닙니다. 근절 대책은 대지급금을 3개월분에서 6개월분으로 늘렸고, 개정법은 상습 체불 사업주에게 신용 제재를 겁니다. 체불 통계는 문제의 크기이지 알바 시장의 크기가 아닙니다. 알바생 몫은 이 통계에서 알 수 없어 미상으로 둡니다. "주 15시간 이상이 다수인지의 첫 조각은 지금 답하고 계신 설문에서 나오지만, 규모 추정이 아니라 메시지를 정하는 참고값입니다. 다음 순서에서 박명진이 말씀드립니다." 출처: 고용노동부 노동포털 임금체불 통계현황, 알바천국 설문, 교육부 교육기본통계.</a:t>
             </a:r>
             <a:endParaRPr lang="en-US" dirty="0"/>
           </a:p>
@@ -1366,7 +1366,7 @@
           <a:p>
             <a:r>
               <a:rPr lang="en-US" dirty="0"/>
-              <a:t>손유호. 알바비 앱에 왜 게임이 있나: 출퇴근은 일하는 날마다 누르지만 돈을 확인하는 건 급여일에 한 번이라, 그 사이에도 앱을 열 이유로 넣었고 그 화면이 광고 자리입니다. 처음엔 근무 중에만 열렸는데 팀원 의견으로 10/25에 조건을 풀고 설정에서 숨길 수 있게 했습니다. 광고 형식은 웹앱이라 배너 · 전면이 기본이고 보상형은 승인이 필요합니다(린 캔버스와 같은 말). 2차 구독은 폰을 바꾸거나 잃어버려도 기록이 남게 하는 선택 기능이고, 원하는 사람만 쓰므로 "근무 내용은 폰 안에만" 원칙과 부딪히지 않습니다. 문서를 돈 받고 만들어 주는 건 법적 이유로 하지 않습니다(웹 조사 기준, 전문가 검토 아님). 광고 가설은 설문의 "게임 화면 광고" 문항과 승인 뒤 게임 화면 열람 수로 확인합니다. 운영 비용은 지금 서버 0원 · 배포 0원이라 수익이 0이어도 서비스는 돌아가고, 인건비는 팀 3명입니다.</a:t>
+              <a:t>손유호. 알바비 앱에 왜 게임이 있나: 출퇴근은 일하는 날마다 누르지만 돈을 확인하는 건 급여일에 한 번이라, 그 사이에도 앱을 열 이유로 넣었고 그 화면이 광고 자리입니다. 처음엔 근무 중에만 열렸는데 팀원 의견으로 10/25에 조건을 풀고 설정에서 숨길 수 있게 했습니다. 광고 형식은 웹앱이라 배너 · 전면이 기본이고 보상형은 승인이 필요합니다. 2차 구독은 폰을 바꾸거나 잃어버려도 기록이 남게 하는 선택 기능이고, 원하는 사람만 쓰므로 "근무 내용은 폰 안에만" 원칙과 부딪히지 않습니다. 문서를 돈 받고 만들어 주는 건 법적 이유로 하지 않습니다(웹 조사 기준, 전문가 검토 아님). 광고 가설은 설문의 "게임 화면 광고" 문항과 승인 뒤 게임 화면 열람 수로 확인합니다. 운영 비용은 지금 서버 0원 · 배포 0원이라 수익이 0이어도 서비스는 돌아가고, 인건비는 팀 3명입니다.</a:t>
             </a:r>
             <a:endParaRPr lang="en-US" dirty="0"/>
           </a:p>
@@ -1454,7 +1454,7 @@
           <a:p>
             <a:r>
               <a:rPr lang="en-US" dirty="0"/>
-              <a:t>박명진. 가설은 9월 기획서 문장 그대로입니다. 표의 기준은 팀이 정한 목표이지 데이터가 아닙니다. 인터뷰 문항은 설문지 20~24번입니다. 지금까지 들은 것은 정식 조사가 아닙니다: 타겟 사용자 1명이 디자인 시안 12장 중 통장 구성을 골랐고, 링크 설문은 10/23에 공개했습니다. 기말 발표에서 마지막 칸에 결과를 채워 보고합니다. 응답 수는 슬라이드에 적지 않고 당일 아침 결과 페이지에서 읽습니다. 0명이면 0명이라고 말합니다. 조건부: 당일 아침 응답이 10명 이상이고, 강의실 인터넷이 되고, 교수님 양해를 받았으면 결과 페이지(survey-results.html)를 60초만 띄워 세 문항(주당 근무 시간 · 적게 받은 것 같았던 적 · 매달 받은 금액 직접 넣기)만 읽습니다. 자유 의견은 띄우지 않습니다. 아니면 당일 아침 캡처로 대신합니다. 테스트 응답 2건(10/23)은 미리 지워 둡니다. 결과는 사람 수로만 말하고 %는 30명을 넘을 때만 씁니다. 1행은 의향을 묻는 것이라 한계가 있습니다. 인터뷰 때 앱을 설치하게 하고, 실제로 넣는지는 급여일이 지난 뒤 따로 봅니다(기말 이후까지 걸릴 수 있음). 지인은 호의적으로 답하기 쉬워서 "넣겠다"를 그대로 믿지 않습니다.</a:t>
+              <a:t>박명진. 가설은 9월 기획서 문장 그대로입니다. 표의 기준은 팀이 정한 목표이지 데이터가 아닙니다. 인터뷰 문항은 설문지 20~24번입니다. 지금까지 들은 것은 정식 조사가 아닙니다: 타겟 사용자 1명이 디자인 시안 12장 중 통장 구성을 골랐고, 링크 설문은 10/23에 공개했습니다. 기말 발표에서 이 표에 결과를 더해 보고합니다. 응답 수는 슬라이드에 적지 않고 당일 아침 결과 페이지에서 읽습니다. 0명이면 0명이라고 말합니다. 다만 당일 아침 응답이 10명 이상이고, 강의실 인터넷이 되고, 교수님 양해를 받았으면 결과 페이지(survey-results.html)를 60초만 띄워 세 문항(주당 근무 시간 · 적게 받은 것 같았던 적 · 매달 받은 금액 직접 넣기)만 읽습니다. 자유 의견은 띄우지 않습니다. 아니면 당일 아침 캡처로 대신합니다. 테스트 응답 2건(10/23)은 미리 지워 둡니다. 결과는 사람 수로만 말하고 %는 30명을 넘을 때만 씁니다. 1행은 의향을 묻는 것이라 한계가 있습니다. 인터뷰 때 앱을 설치하게 하고, 실제로 넣는지는 급여일이 지난 뒤 따로 봅니다(기말 이후까지 걸릴 수 있음). 지인은 호의적으로 답하기 쉬워서 "넣겠다"를 그대로 믿지 않습니다.</a:t>
             </a:r>
             <a:endParaRPr lang="en-US" dirty="0"/>
           </a:p>
@@ -1630,7 +1630,7 @@
           <a:p>
             <a:r>
               <a:rPr lang="en-US" dirty="0"/>
-              <a:t>박명진. 역할은 앞으로 맡는 일과 오늘 발표한 장이 같습니다. 개발은 팀장, 시장과 설문 · 인터뷰 3명은 손유호, 인터뷰 2명과 갤럭시 테스트 · 일정 · 보고서는 저입니다. 다음 장으로 넘겨 팀장이 마무리합니다.</a:t>
+              <a:t>박명진. 앞으로 맡는 일은 오늘 각자 발표한 장과 같습니다. 개발은 팀장, 시장과 설문 · 인터뷰 3명은 손유호, 인터뷰 2명과 갤럭시 테스트 · 일정 · 보고서는 저입니다. 다음 장으로 넘겨 팀장이 마무리합니다.</a:t>
             </a:r>
             <a:endParaRPr lang="en-US" dirty="0"/>
           </a:p>
@@ -1735,13 +1735,13 @@
 · [이지훈] 정의서를 개발 중에 썼는데 계획 대비가 의미 있나? → 맞다. 원래 계획은 9월 기획서의 기능 4개(기록 · 비교 · 요청 · 증빙)다. 10/13 정의서는 만들면서 필요해진 것(기록 등록 · 백업)을 더해 8개로 고정하고, 넣지 않을 6개를 정한 문서다. 그 뒤 포함 기능을 늘리지 않았고 뺀 6개는 지금도 없다. 8/8은 "다 했다"가 아니라 "범위를 지켰다"로 읽어 달라.
 · [이지훈] 등록 시각이 출근 시각인가? 인터넷이 없을 때 기록하면? → 아니다. 등록 시각은 확인 번호가 서버에 도착한 시각이고, 보여 주는 것은 "늦어도 이 시각에는 이 내용이 있었다"까지다. 인터넷이 없으면 대기열에 있다가 연결될 때 보내지므로 그만큼 늦어진다. "나중에 입력"한 기록도 입력한 때 등록되고, 기록 안에 나중에 입력했다는 표시와 사유가 같이 남는다. 출근 시각 자체를 증명하는 것은 아니다.
 · [이지훈] 아무 번호나 넣으면? 두 기록이 같은 번호가 될 수 있나? → 확인 페이지는 앞 16자와 64자 전체를 둘 다 받고, 서버에 없는 번호는 등록된 것이 없다고 나온다. 서버 표에서 번호는 중복을 허용하지 않는다. 재료에 기록 번호와 만든 시각이 들어가서 서로 다른 기록이 같은 번호가 될 일은 사실상 없다.
-· [이지훈] 카톡 나에게 보내기로 매일 적으면 같지 않나? → 시각만 보면 카톡이 더 세다. 카카오가 찍은 시각이라 우리와 무관하다. 다른 점은 둘이다. 카톡은 고치면 새 메시지가 하나 더 생길 뿐 무엇을 왜 고쳤는지 안 남고, 그 기록으로 계산 · 비교 · 요청 · 증빙 묶음까지 이어지지 않는다. 그래서 카톡에 적던 사람이 첫 타겟이고, 카톡 캡처는 함께 내라고 앱에도 적었다.
+· [이지훈] 카톡 나에게 보내기로 매일 적으면 같지 않나? → 시각만 보면 카톡이 더 믿을 만하다. 카카오가 찍은 시각이라 우리와 무관하다. 다른 점은 둘이다. 카톡은 고치면 새 메시지가 하나 더 생길 뿐 무엇을 왜 고쳤는지 안 남고, 그 기록으로 계산 · 비교 · 요청 · 증빙 묶음까지 이어지지 않는다. 그래서 카톡에 적던 사람이 첫 타겟이고, 카톡 캡처는 함께 내라고 앱에도 적었다.
 · [이지훈] AI는 어디에 썼나? Claude 문구는 실제로 써 봤나? → 앱 기능으로는 정산 요청 문구 생성 하나이고 선택 사항이다. 배포 앱은 API 키 없이 근무 기록과 계산 내역을 채운 정해진 문장으로 만든다. 기본을 끈 이유는 기록 내용이 폰 밖으로 나가면 개인정보 안내와 동의가 먼저 필요해서다. 키가 없어 Claude 문구를 실제로 돌려 본 적은 아직 없다.
 · [이지훈] 코드는 누가 짰고 이해하고 있나? → (사실대로. 틀: 개발 도구로 AI 코딩 도우미를 썼다. 기능 범위 8개, 계산 규칙(주휴 · 야간 · 휴게시간 · 연도별 최저임금), 기록 구조(수정 이력, 삭제 흔적, 사유 없이는 저장 안 됨), 법적 문구 원칙은 팀장이 정하고 하나씩 확인하며 올렸다. 서버 권한은 2000년 시각과 수정 · 삭제 요청을 직접 보내 확인했다.)
 · [이지훈] 왜 Supabase인가? 설문은 서버에 두면서 근무 기록은 왜 안 두나? → 서버 코드 없이 REST로 표에 넣고 읽을 수 있고, 표 단위 권한(RLS)과 트리거로 "시각은 서버가 찍는다"를 걸 수 있어서다. 일주일 요청이 없으면 멈추는 단점은 알고 있다. 설문은 이름 없는 답 묶음이고 근무 기록은 근무지 · 시각 · 금액이라 민감도가 다르다. 권한 원칙은 두 표가 같다.
-· [이지훈] 폰을 바꾸거나 서비스가 없어지면 기록은? → 폰을 바꾸면 백업 파일로 옮긴다(설정 탭). 서비스가 없어져도 폰의 기록, 백업 파일, 저장해 둔 증빙 묶음 PDF는 사용자 손에 남는다. 이 약점이 2차 구독(동기화 · 자동 백업)의 자리다.
+· [이지훈] 폰을 바꾸거나 서비스가 없어지면 기록은? → 폰을 바꾸면 백업 파일로 옮긴다(설정 탭). 서비스가 없어져도 폰의 기록, 백업 파일, 저장해 둔 증빙 묶음 PDF는 사용자 손에 남는다. 이 문제를 푸는 것이 2차 구독(동기화 · 자동 백업)이다.
 · [이지훈] 개인정보는? 동의는? → 로그인이 없고 서버에는 이름 · 근무지 · 시각 · 금액이 가지 않는다. 가는 것은 확인 번호 · 기록 번호 · 무작위 기기 번호뿐이고, 무엇이 가는지 설정 탭에 적고 끌 수 있게 했다. 설문도 이름 · 연락처를 받지 않는다. 기록 내용을 밖으로 보내는 기능을 켜면 그때 안내와 동의가 필요하다.
-· [박명진] 왜 설문 30명 · 인터뷰 5명인가? → 9월 기획서는 인터뷰 10~15명이었다. 수는 링크 설문으로 채우고, 앱을 써 보게 하는 20분 인터뷰는 7주 안에 셋이 할 수 있는 5명으로 줄였다. 충분한지는 마지막에 여쭙는 것 중 하나다.
+· [박명진] 왜 설문 30명 · 인터뷰 5명인가? → 9월 기획서는 인터뷰 10~15명이었다. 사람 수는 링크 설문으로 채우고, 앱을 써 보게 하는 20분 인터뷰는 7주 안에 셋이 할 수 있는 5명으로 줄였다. 충분한지는 마지막에 여쭙는 것 중 하나다.
 · [손유호] 광고 수익이 생기면 "무료라서 괜찮다"가 깨지지 않나? → 광고는 게임 화면에만 나오고 문서 기능과 떼어 놓았다. 문서를 만든 대가로 받는 돈이 아니게 구조를 잡은 것이다. 다만 웹 조사 기준 판단이고 전문가 검토는 아니다.
 · [박명진 → 손유호 순으로 각자] 팀원은 뭘 했나? → 개발은 이지훈. 손유호는 수업 시간의 계획서 일부를 썼고(내용은 팀장이 반영), 앞으로 시장 · 설문 · 인터뷰 3명. 박명진은 지금까지 의견을 낸 정도이고, 앞으로 인터뷰 2명 · 갤럭시 테스트 · 일정 · 보고서 편집.</a:t>
             </a:r>
@@ -2007,7 +2007,7 @@
           <a:p>
             <a:r>
               <a:rPr lang="en-US" dirty="0"/>
-              <a:t>무료 앱이 실제로 겨루는 상대는 다른 앱보다 메모장과 통장 확인입니다. 그래서 첫 열에 넣었습니다. 하우머치는 혼자 쓸 수 있지만 예상 급여에서 멈추고, 기그는 사장 연동이 필요하고, 계산기는 기록이 없고, 진정24는 증거가 있어야 시작합니다. 가운데 세 줄이 전부 X인 자리가 저희 자리입니다. 마지막 줄 진정 접수는 저희가 일부러 안 합니다. 1350과 노동포털로 연결만 합니다.</a:t>
+              <a:t>무료 앱이 실제로 겨루는 상대는 다른 앱보다 메모장과 통장 확인입니다. 그래서 첫 열에 넣었습니다. 하우머치는 혼자 쓸 수 있지만 예상 급여에서 멈추고, 기그는 사장 연동이 필요하고, 계산기는 기록이 없고, 진정24는 증거가 있어야 시작합니다. 가운데 세 줄은 다른 서비스가 모두 X이고 알바가드만 O입니다. 그 세 줄이 저희가 채우는 부분입니다. 마지막 줄 진정 접수는 저희가 일부러 안 합니다. 1350과 노동포털로 연결만 합니다.</a:t>
             </a:r>
             <a:endParaRPr lang="en-US" dirty="0"/>
           </a:p>
@@ -2183,7 +2183,7 @@
           <a:p>
             <a:r>
               <a:rPr lang="en-US" dirty="0"/>
-              <a:t>세 번째가 따라 하기 어려운 차별점입니다. 기능 하나가 아니라 기록 구조라서, 사유 없이는 못 고치고 삭제해도 흔적이 남고 고치면 다시 등록됩니다. 기존 급여 앱이 넣으려면 사용자가 기록을 마음대로 고치던 방식을 포기해야 합니다. 지금 확인 페이지는 번호의 서버 등록 시각까지 보여 주고, 기록 내용에서 번호를 다시 계산해 맞춰 보는 방법은 기말까지 만듭니다(그래서 현황 장에 70%). 근무지 · 시각 · 금액은 서버로 가지 않고, "그날 실제로 일했다"까지는 증명하지 못합니다. 약점은 먼저 말합니다. "법적 효력" 질문이 오면 보장하지 않는다고 답하고, 판단할 자료를 정리해 준다고 말합니다.</a:t>
+              <a:t>세 번째가 따라 하기 어려운 차별점입니다. 기능 하나가 아니라 기록 구조라서, 사유 없이는 못 고치고 삭제해도 흔적이 남고 고치면 다시 등록됩니다. 기존 급여 앱이 넣으려면 사용자가 기록을 마음대로 고치던 방식을 포기해야 합니다. 지금 확인 페이지는 번호의 서버 등록 시각까지 보여 주고, 기록 내용에서 번호를 다시 계산해 맞춰 보는 방법은 기말까지 만듭니다(그래서 12장에서 70%). 근무지 · 시각 · 금액은 서버로 가지 않고, "그날 실제로 일했다"까지는 증명하지 못합니다. 한계는 먼저 말합니다. "법적 효력" 질문이 오면 보장하지 않는다고 답하고, 판단할 자료를 정리해 준다고 말합니다.</a:t>
             </a:r>
             <a:endParaRPr lang="en-US" dirty="0"/>
           </a:p>
@@ -2359,7 +2359,7 @@
           <a:p>
             <a:r>
               <a:rPr lang="en-US" dirty="0"/>
-              <a:t>왼쪽 폰 안에서 모든 계산이 끝나고, 서버로 가는 건 확인 번호뿐입니다. 기기 번호는 처음 기록을 등록할 때 앱이 만든 난수라 휴대전화 번호가 아닙니다. 앱이 쓰는 공개 키로는 넣기와 읽기만 되고, 걸어 놓고 뚫어 봤습니다. 2000년 시각을 보내도 서버 시각으로 들어가고, 수정 · 삭제는 401로 거부됩니다. 다만 운영자 권한으로는 고칠 수 있어서, 지금 막는 건 "사용자가 나중에 고쳐 쓰기"까지입니다. 운영자까지 못 고치게 하는 외부 시점확인은 비용 때문에 계획입니다. 오른쪽은 기록 하나가 남을 때의 흐름입니다. 증빙 묶음 PDF 7번 표에 기록별 확인 번호와 등록 시각이 들어갑니다. 배포는 GitHub main에 올리면 Actions가 Pages로 자동 배포합니다. 지금 답하고 계신 설문도 같은 서버의 survey 표로 가고, 권한 원칙이 같습니다.</a:t>
+              <a:t>왼쪽 폰 안에서 모든 계산이 끝나고, 서버로 가는 건 확인 번호뿐입니다. 기기 번호는 처음 기록을 등록할 때 앱이 만든 난수라 휴대전화 번호가 아닙니다. 앱이 쓰는 공개 키로는 넣기와 읽기만 되고, 직접 요청을 보내 확인했습니다. 2000년 시각을 보내도 서버 시각으로 들어가고, 수정 · 삭제는 401로 거부됩니다. 다만 운영자 권한으로는 고칠 수 있어서, 지금 막는 건 "사용자가 나중에 고쳐 쓰기"까지입니다. 운영자까지 못 고치게 하는 외부 시점확인은 비용 때문에 계획입니다. 오른쪽은 기록 하나가 남을 때의 흐름입니다. 증빙 묶음 PDF 7번 표에 기록별 확인 번호와 등록 시각이 들어갑니다. 배포는 GitHub main에 올리면 Actions가 Pages로 자동 배포합니다. 지금 답하고 계신 설문도 같은 서버의 survey 표로 가고, 권한 원칙이 같습니다.</a:t>
             </a:r>
             <a:endParaRPr lang="en-US" dirty="0"/>
           </a:p>
@@ -7641,7 +7641,7 @@
                   <a:schemeClr val="tx2"/>
                 </a:solidFill>
               </a:rPr>
-              <a:t>경쟁 서비스 사이의 빈자리</a:t>
+              <a:t>경쟁 서비스 위치</a:t>
             </a:r>
             <a:endParaRPr lang="en-US" sz="2400" dirty="0"/>
           </a:p>
@@ -19661,7 +19661,7 @@
                   <a:schemeClr val="tx2"/>
                 </a:solidFill>
               </a:rPr>
-              <a:t>빈자리  </a:t>
+              <a:t>알바가드만 O  </a:t>
             </a:r>
             <a:pPr indent="0" marL="0">
               <a:buNone/>
@@ -19672,7 +19672,7 @@
                   <a:schemeClr val="tx1"/>
                 </a:solidFill>
               </a:rPr>
-              <a:t>가운데 세 줄(비교 · 요청 · 등록 시각)은 다른 서비스가 모두 X다. 알바가드가 채우는 칸이다. 진정 접수는 일부러 연결만 한다  (공식 소개 · 리뷰, 2026.9)</a:t>
+              <a:t>가운데 세 줄(비교 · 요청 · 등록 시각)은 다른 서비스가 모두 X다. 진정 접수는 일부러 연결만 한다 (2026.9 기준)</a:t>
             </a:r>
             <a:endParaRPr lang="en-US" sz="1150" dirty="0"/>
           </a:p>

--- a/docs/06_중간발표_PPT.pptx
+++ b/docs/06_중간발표_PPT.pptx
@@ -125,31 +125,31 @@
   <p:extLst>
     <p:ext uri="{521415D9-36F7-43E2-AB2F-B90AF26B5E84}">
       <p14:sectionLst xmlns:p14="http://schemas.microsoft.com/office/powerpoint/2010/main">
-        <p14:section name="① 표지·팀 소개" id="{8cb69191-ff25-244d-1bd8-1c4250249a85}">
+        <p14:section name="① 표지·팀 소개" id="{b01dc83a-109e-d35f-d0ad-a9b8796e425d}">
           <p14:sldIdLst>
             <p14:sldId id="256"/>
             <p14:sldId id="257"/>
           </p14:sldIdLst>
         </p14:section>
-        <p14:section name="② 문제 정의" id="{d038dd58-4a7f-ae87-b48e-f7daab49618b}">
+        <p14:section name="② 문제 정의" id="{a44195f4-de1a-98b3-2f93-89233607659b}">
           <p14:sldIdLst>
             <p14:sldId id="258"/>
             <p14:sldId id="259"/>
           </p14:sldIdLst>
         </p14:section>
-        <p14:section name="③ 솔루션·핵심 가치" id="{c434f3d7-a85a-479f-a8cc-8b9e68bb7d20}">
+        <p14:section name="③ 솔루션·핵심 가치" id="{a595d8f6-490a-d3d5-c37b-116ba97d5740}">
           <p14:sldIdLst>
             <p14:sldId id="260"/>
             <p14:sldId id="261"/>
           </p14:sldIdLst>
         </p14:section>
-        <p14:section name="④ SW 기술 아키텍처" id="{b109b847-506b-d5da-337c-b47afdcb9fe9}">
+        <p14:section name="④ SW 기술 아키텍처" id="{d36a9862-135c-9210-be7d-f5dbcd21c191}">
           <p14:sldIdLst>
             <p14:sldId id="262"/>
             <p14:sldId id="263"/>
           </p14:sldIdLst>
         </p14:section>
-        <p14:section name="⑤ 개발 현황·MVP 시연" id="{b80d5f22-29ec-a689-9263-cb009d7ce924}">
+        <p14:section name="⑤ 개발 현황·MVP 시연" id="{23b7b29f-8900-ea68-e79d-3bae7f36d7ad}">
           <p14:sldIdLst>
             <p14:sldId id="264"/>
             <p14:sldId id="265"/>
@@ -157,19 +157,19 @@
             <p14:sldId id="267"/>
           </p14:sldIdLst>
         </p14:section>
-        <p14:section name="⑥ 시장 분석·비즈니스 모델" id="{4af3e9d9-7611-beb4-60b9-ecbbad4bb643}">
+        <p14:section name="⑥ 시장 분석·비즈니스 모델" id="{913e9752-a0f2-fe10-24a5-6d0123349cf6}">
           <p14:sldIdLst>
             <p14:sldId id="268"/>
             <p14:sldId id="269"/>
             <p14:sldId id="270"/>
           </p14:sldIdLst>
         </p14:section>
-        <p14:section name="⑦ 초기 시장 검증" id="{02e97832-2fad-e9d7-bc0f-bcca86f7ceff}">
+        <p14:section name="⑦ 초기 시장 검증" id="{1693adda-152b-a382-5ba9-dda1f7bfe4d6}">
           <p14:sldIdLst>
             <p14:sldId id="271"/>
           </p14:sldIdLst>
         </p14:section>
-        <p14:section name="⑧ 향후 계획·팀 역량" id="{24780e2f-19e7-543d-22d5-d59bf03043eb}">
+        <p14:section name="⑧ 향후 계획·팀 역량" id="{12d46672-6837-3422-d7a2-43363c432b0a}">
           <p14:sldIdLst>
             <p14:sldId id="272"/>
             <p14:sldId id="273"/>
@@ -19672,7 +19672,7 @@
                   <a:schemeClr val="tx1"/>
                 </a:solidFill>
               </a:rPr>
-              <a:t>가운데 세 줄(비교 · 요청 · 등록 시각)은 다른 서비스가 모두 X다. 진정 접수는 일부러 연결만 한다 (2026.9 기준)</a:t>
+              <a:t>가운데 세 줄(비교 · 요청 · 등록 시각)은 다른 서비스가 모두 X다. 진정 접수는 일부러 연결만 한다</a:t>
             </a:r>
             <a:endParaRPr lang="en-US" sz="1150" dirty="0"/>
           </a:p>

--- a/docs/06_중간발표_PPT.pptx
+++ b/docs/06_중간발표_PPT.pptx
@@ -125,31 +125,31 @@
   <p:extLst>
     <p:ext uri="{521415D9-36F7-43E2-AB2F-B90AF26B5E84}">
       <p14:sectionLst xmlns:p14="http://schemas.microsoft.com/office/powerpoint/2010/main">
-        <p14:section name="① 표지·팀 소개" id="{b01dc83a-109e-d35f-d0ad-a9b8796e425d}">
+        <p14:section name="① 표지·팀 소개" id="{c7edffe0-8bf9-3493-63aa-e4b8b61dc1c8}">
           <p14:sldIdLst>
             <p14:sldId id="256"/>
             <p14:sldId id="257"/>
           </p14:sldIdLst>
         </p14:section>
-        <p14:section name="② 문제 정의" id="{a44195f4-de1a-98b3-2f93-89233607659b}">
+        <p14:section name="② 문제 정의" id="{e929de16-6de7-2c29-b530-1a7baf28aa74}">
           <p14:sldIdLst>
             <p14:sldId id="258"/>
             <p14:sldId id="259"/>
           </p14:sldIdLst>
         </p14:section>
-        <p14:section name="③ 솔루션·핵심 가치" id="{a595d8f6-490a-d3d5-c37b-116ba97d5740}">
+        <p14:section name="③ 솔루션·핵심 가치" id="{6c07fed3-7e30-a78e-17e1-3b7e723886fd}">
           <p14:sldIdLst>
             <p14:sldId id="260"/>
             <p14:sldId id="261"/>
           </p14:sldIdLst>
         </p14:section>
-        <p14:section name="④ SW 기술 아키텍처" id="{d36a9862-135c-9210-be7d-f5dbcd21c191}">
+        <p14:section name="④ SW 기술 아키텍처" id="{1c88b602-f1b2-a197-6f04-1f1c13495cd9}">
           <p14:sldIdLst>
             <p14:sldId id="262"/>
             <p14:sldId id="263"/>
           </p14:sldIdLst>
         </p14:section>
-        <p14:section name="⑤ 개발 현황·MVP 시연" id="{23b7b29f-8900-ea68-e79d-3bae7f36d7ad}">
+        <p14:section name="⑤ 개발 현황·MVP 시연" id="{a9fe717d-876d-02d2-43bf-15d7cab8f3ef}">
           <p14:sldIdLst>
             <p14:sldId id="264"/>
             <p14:sldId id="265"/>
@@ -157,19 +157,19 @@
             <p14:sldId id="267"/>
           </p14:sldIdLst>
         </p14:section>
-        <p14:section name="⑥ 시장 분석·비즈니스 모델" id="{913e9752-a0f2-fe10-24a5-6d0123349cf6}">
+        <p14:section name="⑥ 시장 분석·비즈니스 모델" id="{f316ad09-093c-d6aa-4873-3718e316eeef}">
           <p14:sldIdLst>
             <p14:sldId id="268"/>
             <p14:sldId id="269"/>
             <p14:sldId id="270"/>
           </p14:sldIdLst>
         </p14:section>
-        <p14:section name="⑦ 초기 시장 검증" id="{1693adda-152b-a382-5ba9-dda1f7bfe4d6}">
+        <p14:section name="⑦ 초기 시장 검증" id="{a6695a5a-eeba-ab44-e8e4-9d23b2bc8f2a}">
           <p14:sldIdLst>
             <p14:sldId id="271"/>
           </p14:sldIdLst>
         </p14:section>
-        <p14:section name="⑧ 향후 계획·팀 역량" id="{12d46672-6837-3422-d7a2-43363c432b0a}">
+        <p14:section name="⑧ 향후 계획·팀 역량" id="{7b65dd63-e5e9-b5ab-f7ce-fb0d01e0ee0f}">
           <p14:sldIdLst>
             <p14:sldId id="272"/>
             <p14:sldId id="273"/>
@@ -926,7 +926,7 @@
           <a:p>
             <a:r>
               <a:rPr lang="en-US" dirty="0"/>
-              <a:t>네 단계(등록 → 비교 → 요청 · 증빙 → 확인)가 차별점과 하나씩 맞물립니다. 영상에 안 나오는 것은 말로 짚습니다: 캘린더의 연장 · 대타 표시(9장 캡처), 3단계 진정 안내(1350 · 노동포털 연결, 진정서는 만들지 않음). 예시 데이터는 발표 전에 미리 넣어 둡니다(오늘 날짜는 비어 있어 출근 · 퇴근이 그대로 됩니다). 7번 표에는 시연 중 남긴 2건만 나옵니다. 예시 데이터는 진짜 시각이 아니라 등록하지 않기 때문입니다. 시연은 다음 장의 녹화 영상(1분 39초)으로 하고, 단계마다 멈춰서 설명하면 약 3분입니다. 영상은 배포된 앱을 실제로 눌러 찍은 것이라 서버 등록과 확인 번호가 진짜입니다(10/26 녹화. 화면의 시각은 녹화한 시각). 질문이 오면 실제 앱으로 1단계(출근 · 퇴근 → "2건 등록됨")만 보여 줍니다. 전날 할 일: Supabase 대시보드에서 프로젝트 상태를 확인하고(잠들어 있으면 Restore) 앱에서 출근 · 퇴근을 눌러 설정 탭에 "2건 등록됨"이 뜨는지 본다. 그다음 폰의 와이파이를 끄고 데이터로 확인 페이지(jihooni217.github.io/albaguard/verify.html?h=92f6228a4349bdc8)를 열어 등록 시각이 나오는지 본다. 당일 아침에도 한 번 더.</a:t>
+              <a:t>네 단계(등록 → 비교 → 요청 · 증빙 → 확인)가 차별점과 하나씩 맞물립니다. 영상에 안 나오는 것은 말로 짚습니다: 캘린더의 연장 · 대타 표시(9장 캡처), 3단계 진정 안내(1350 · 노동포털 연결, 진정서는 만들지 않음). 예시 데이터는 발표 전에 미리 넣어 둡니다(오늘 날짜는 비어 있어 출근 · 퇴근이 그대로 됩니다). 7번 표에는 시연 중 남긴 2건만 나옵니다. 예시 데이터는 진짜 시각이 아니라 등록하지 않기 때문입니다. 시연은 다음 장의 녹화 영상(1분 46초)으로 하고, 단계마다 멈춰서 설명하면 약 3분입니다. 영상은 배포된 앱을 실제로 눌러 찍은 것이라 서버 등록과 확인 번호가 진짜입니다(10/26 오전 9시 36분 녹화. 화면의 시각은 녹화한 시각). 질문이 오면 실제 앱으로 1단계(출근 · 퇴근 → "2건 등록됨")만 보여 줍니다. 전날 할 일: Supabase 대시보드에서 프로젝트 상태를 확인하고(잠들어 있으면 Restore) 앱에서 출근 · 퇴근을 눌러 설정 탭에 "2건 등록됨"이 뜨는지 본다. 그다음 폰의 와이파이를 끄고 데이터로 확인 페이지(jihooni217.github.io/albaguard/verify.html?h=da3e2a7ad7e298db)를 열어 등록 시각이 나오는지 본다. 당일 아침에도 한 번 더.</a:t>
             </a:r>
             <a:endParaRPr lang="en-US" dirty="0"/>
           </a:p>
@@ -1014,7 +1014,7 @@
           <a:p>
             <a:r>
               <a:rPr lang="en-US" dirty="0"/>
-              <a:t>재생 전에 한 문장: "보실 것 하나만 말씀드리면 마지막 장면의 등록 시각입니다. 지금 서버에 그대로 있는 값입니다." 영상을 누르면 재생됩니다. 왼쪽이 폰 화면, 오른쪽이 단계 자막입니다. 1 출근 · 퇴근 → 설정 "2건 등록됨"(약 0:08~0:27), 2 받은 금액 입력 → 빨간 차액(0:27~0:47), 3 메시지 생성 → 증빙 묶음 PDF 7번 표(0:47~1:25), 4 확인 페이지 → 서버 등록 시각(1:25~1:39). 단계가 바뀔 때 멈추고 한두 문장씩 설명합니다. 영상이 안 열리면 docs/08_시연_영상.mp4를 따로 틀어도 됩니다. 영상 마지막에 나오는 확인 번호는 92f6228a4349bdc8입니다. "녹화라서 못 믿겠다"는 질문이 오면 "지금 폰으로 jihooni217.github.io/albaguard/verify.html?h=92f6228a4349bdc8 를 열어 보셔도 됩니다. 서버가 찍은 시각이 녹화 시각(10/26)과 같습니다"라고 답합니다.</a:t>
+              <a:t>재생 전에 한 문장: "보실 것 하나만 말씀드리면 마지막 장면의 등록 시각입니다. 지금 서버에 그대로 있는 값입니다." 영상을 누르면 재생됩니다. 왼쪽이 폰 화면, 오른쪽 위는 지금 단계(기록 · 비교 · 요청 · 확인), 그 아래가 자막입니다. 1 출근 · 퇴근 → 설정 "2건 등록됨"(0:10~0:30), 2 받은 금액 입력 → 빨간 차액(0:30~0:50), 3 메시지 생성 → 증빙 묶음 PDF 7번 표(0:50~1:28), 4 확인 페이지 → 서버 등록 시각(1:28~1:42). 시작 3초는 제목 화면, 끝 4초는 확인 페이지 주소와 확인 번호 화면입니다. 단계가 바뀔 때 멈추고 한두 문장씩 설명합니다. 영상이 안 열리면 docs/08_시연_영상.mp4를 따로 틀어도 됩니다. 영상 마지막에 나오는 확인 번호는 da3e2a7ad7e298db입니다. "녹화라서 못 믿겠다"는 질문이 오면 "지금 폰으로 jihooni217.github.io/albaguard/verify.html?h=da3e2a7ad7e298db 를 열어 보셔도 됩니다. 서버가 찍은 시각이 녹화 시각(10/26)과 같습니다"라고 답합니다.</a:t>
             </a:r>
             <a:endParaRPr lang="en-US" dirty="0"/>
           </a:p>
@@ -3830,7 +3830,7 @@
                   <a:schemeClr val="tx2"/>
                 </a:solidFill>
               </a:rPr>
-              <a:t>시연 순서 (녹화 영상 1분 39초, 멈춰 설명하며 약 3분)</a:t>
+              <a:t>시연 순서 (녹화 영상 1분 46초, 멈춰 설명하며 약 3분)</a:t>
             </a:r>
             <a:endParaRPr lang="en-US" sz="2400" dirty="0"/>
           </a:p>
@@ -7495,7 +7495,7 @@
                   <a:schemeClr val="tx1"/>
                 </a:solidFill>
               </a:rPr>
-              <a:t>2025.9 임금체불 근절 대책 · 2025.10.23 개정 근로기준법 시행. 근거를 남겨 둔 사람이 돌려받기 쉬워지는 때</a:t>
+              <a:t>2025.9 임금체불 근절 대책 · 2025.10.23 개정 근로기준법 시행. 체불 제재가 세졌고, 근거를 남긴 사람이 받아 내기 쉬워졌다</a:t>
             </a:r>
             <a:endParaRPr lang="en-US" sz="1050" dirty="0"/>
           </a:p>
@@ -8277,7 +8277,7 @@
                   <a:schemeClr val="tx2"/>
                 </a:solidFill>
               </a:rPr>
-              <a:t>혼자 쓰고 대응까지: 알바가드뿐</a:t>
+              <a:t>혼자 대응까지 가는 건 알바가드뿐</a:t>
             </a:r>
             <a:endParaRPr lang="en-US" sz="1300" dirty="0"/>
           </a:p>
@@ -14085,7 +14085,7 @@
                   <a:schemeClr val="bg2"/>
                 </a:solidFill>
               </a:rPr>
-              <a:t>시연 기록 확인 번호 92f6228a4349bdc8</a:t>
+              <a:t>시연 기록 확인 번호 da3e2a7ad7e298db</a:t>
             </a:r>
             <a:endParaRPr lang="en-US" sz="1100" dirty="0"/>
           </a:p>
@@ -21164,7 +21164,7 @@
                   <a:schemeClr val="tx1"/>
                 </a:solidFill>
               </a:rPr>
-              <a:t>비교 기능은 하우머치가 "받은 금액 입력" 칸 하나로 따라올 수 있다. 3번은 칸 하나가 아니라 기록 구조(사유 없이 못 고침 · 삭제도 흔적 · 고치면 다시 등록)라서 따라오기 어렵다.</a:t>
+              <a:t>비교 기능은 하우머치가 "받은 금액 입력" 칸 하나로 따라올 수 있다. 3번은 기록 구조 자체(사유 없이 못 고침 · 삭제도 흔적 · 고치면 다시 등록)라 따라오기 어렵다.</a:t>
             </a:r>
             <a:endParaRPr lang="en-US" sz="1100" dirty="0"/>
           </a:p>

--- a/docs/06_중간발표_PPT.pptx
+++ b/docs/06_중간발표_PPT.pptx
@@ -125,31 +125,31 @@
   <p:extLst>
     <p:ext uri="{521415D9-36F7-43E2-AB2F-B90AF26B5E84}">
       <p14:sectionLst xmlns:p14="http://schemas.microsoft.com/office/powerpoint/2010/main">
-        <p14:section name="① 표지·팀 소개" id="{c7edffe0-8bf9-3493-63aa-e4b8b61dc1c8}">
+        <p14:section name="① 표지·팀 소개" id="{0c57daaa-a738-08dd-803f-244d4a96f928}">
           <p14:sldIdLst>
             <p14:sldId id="256"/>
             <p14:sldId id="257"/>
           </p14:sldIdLst>
         </p14:section>
-        <p14:section name="② 문제 정의" id="{e929de16-6de7-2c29-b530-1a7baf28aa74}">
+        <p14:section name="② 문제 정의" id="{91f2b062-c9b9-22f8-ef47-9fa6a387cbc7}">
           <p14:sldIdLst>
             <p14:sldId id="258"/>
             <p14:sldId id="259"/>
           </p14:sldIdLst>
         </p14:section>
-        <p14:section name="③ 솔루션·핵심 가치" id="{6c07fed3-7e30-a78e-17e1-3b7e723886fd}">
+        <p14:section name="③ 솔루션·핵심 가치" id="{20afb40f-b649-1042-0547-d2531ff4d786}">
           <p14:sldIdLst>
             <p14:sldId id="260"/>
             <p14:sldId id="261"/>
           </p14:sldIdLst>
         </p14:section>
-        <p14:section name="④ SW 기술 아키텍처" id="{1c88b602-f1b2-a197-6f04-1f1c13495cd9}">
+        <p14:section name="④ SW 기술 아키텍처" id="{8031f7f1-a872-b7e3-12f2-10fdb9a0bf90}">
           <p14:sldIdLst>
             <p14:sldId id="262"/>
             <p14:sldId id="263"/>
           </p14:sldIdLst>
         </p14:section>
-        <p14:section name="⑤ 개발 현황·MVP 시연" id="{a9fe717d-876d-02d2-43bf-15d7cab8f3ef}">
+        <p14:section name="⑤ 개발 현황·MVP 시연" id="{f4bf8f63-a79b-1c5d-bc84-bdc450f4448d}">
           <p14:sldIdLst>
             <p14:sldId id="264"/>
             <p14:sldId id="265"/>
@@ -157,19 +157,19 @@
             <p14:sldId id="267"/>
           </p14:sldIdLst>
         </p14:section>
-        <p14:section name="⑥ 시장 분석·비즈니스 모델" id="{f316ad09-093c-d6aa-4873-3718e316eeef}">
+        <p14:section name="⑥ 시장 분석·비즈니스 모델" id="{633d2418-61cd-7250-632b-cbdbebe97653}">
           <p14:sldIdLst>
             <p14:sldId id="268"/>
             <p14:sldId id="269"/>
             <p14:sldId id="270"/>
           </p14:sldIdLst>
         </p14:section>
-        <p14:section name="⑦ 초기 시장 검증" id="{a6695a5a-eeba-ab44-e8e4-9d23b2bc8f2a}">
+        <p14:section name="⑦ 초기 시장 검증" id="{281af760-bf07-758e-5398-c8745d11e15a}">
           <p14:sldIdLst>
             <p14:sldId id="271"/>
           </p14:sldIdLst>
         </p14:section>
-        <p14:section name="⑧ 향후 계획·팀 역량" id="{7b65dd63-e5e9-b5ab-f7ce-fb0d01e0ee0f}">
+        <p14:section name="⑧ 향후 계획·팀 역량" id="{a5a4305b-a99e-1b49-fee1-b5e9fcb0fb90}">
           <p14:sldIdLst>
             <p14:sldId id="272"/>
             <p14:sldId id="273"/>

--- a/docs/06_중간발표_PPT.pptx
+++ b/docs/06_중간발표_PPT.pptx
@@ -125,31 +125,31 @@
   <p:extLst>
     <p:ext uri="{521415D9-36F7-43E2-AB2F-B90AF26B5E84}">
       <p14:sectionLst xmlns:p14="http://schemas.microsoft.com/office/powerpoint/2010/main">
-        <p14:section name="① 표지·팀 소개" id="{0c57daaa-a738-08dd-803f-244d4a96f928}">
+        <p14:section name="① 표지·팀 소개" id="{eda0a71f-1d90-de7c-1efc-9315bdd53303}">
           <p14:sldIdLst>
             <p14:sldId id="256"/>
             <p14:sldId id="257"/>
           </p14:sldIdLst>
         </p14:section>
-        <p14:section name="② 문제 정의" id="{91f2b062-c9b9-22f8-ef47-9fa6a387cbc7}">
+        <p14:section name="② 문제 정의" id="{3b34af3b-242a-d64b-5da8-9b8db54599ca}">
           <p14:sldIdLst>
             <p14:sldId id="258"/>
             <p14:sldId id="259"/>
           </p14:sldIdLst>
         </p14:section>
-        <p14:section name="③ 솔루션·핵심 가치" id="{20afb40f-b649-1042-0547-d2531ff4d786}">
+        <p14:section name="③ 솔루션·핵심 가치" id="{aef5cf51-cdad-31eb-466c-e4b61cfd7aa2}">
           <p14:sldIdLst>
             <p14:sldId id="260"/>
             <p14:sldId id="261"/>
           </p14:sldIdLst>
         </p14:section>
-        <p14:section name="④ SW 기술 아키텍처" id="{8031f7f1-a872-b7e3-12f2-10fdb9a0bf90}">
+        <p14:section name="④ SW 기술 아키텍처" id="{1f516f9b-c468-cde3-6289-e9c09797cd4d}">
           <p14:sldIdLst>
             <p14:sldId id="262"/>
             <p14:sldId id="263"/>
           </p14:sldIdLst>
         </p14:section>
-        <p14:section name="⑤ 개발 현황·MVP 시연" id="{f4bf8f63-a79b-1c5d-bc84-bdc450f4448d}">
+        <p14:section name="⑤ 개발 현황·MVP 시연" id="{4b77e6a7-5642-08c5-c331-c880ea5af9d7}">
           <p14:sldIdLst>
             <p14:sldId id="264"/>
             <p14:sldId id="265"/>
@@ -157,19 +157,19 @@
             <p14:sldId id="267"/>
           </p14:sldIdLst>
         </p14:section>
-        <p14:section name="⑥ 시장 분석·비즈니스 모델" id="{633d2418-61cd-7250-632b-cbdbebe97653}">
+        <p14:section name="⑥ 시장 분석·비즈니스 모델" id="{0eb722b8-7bf9-1d53-947b-e29189d22c89}">
           <p14:sldIdLst>
             <p14:sldId id="268"/>
             <p14:sldId id="269"/>
             <p14:sldId id="270"/>
           </p14:sldIdLst>
         </p14:section>
-        <p14:section name="⑦ 초기 시장 검증" id="{281af760-bf07-758e-5398-c8745d11e15a}">
+        <p14:section name="⑦ 초기 시장 검증" id="{18d58d97-f0ce-994d-9d19-2449b2724920}">
           <p14:sldIdLst>
             <p14:sldId id="271"/>
           </p14:sldIdLst>
         </p14:section>
-        <p14:section name="⑧ 향후 계획·팀 역량" id="{a5a4305b-a99e-1b49-fee1-b5e9fcb0fb90}">
+        <p14:section name="⑧ 향후 계획·팀 역량" id="{6477938f-fc79-1506-d643-4c7b11cd363c}">
           <p14:sldIdLst>
             <p14:sldId id="272"/>
             <p14:sldId id="273"/>

--- a/docs/06_중간발표_PPT.pptx
+++ b/docs/06_중간발표_PPT.pptx
@@ -125,31 +125,31 @@
   <p:extLst>
     <p:ext uri="{521415D9-36F7-43E2-AB2F-B90AF26B5E84}">
       <p14:sectionLst xmlns:p14="http://schemas.microsoft.com/office/powerpoint/2010/main">
-        <p14:section name="① 표지·팀 소개" id="{eda0a71f-1d90-de7c-1efc-9315bdd53303}">
+        <p14:section name="① 표지·팀 소개" id="{d9d8ad16-c7f2-2594-d7fa-0ba4117c8bc7}">
           <p14:sldIdLst>
             <p14:sldId id="256"/>
             <p14:sldId id="257"/>
           </p14:sldIdLst>
         </p14:section>
-        <p14:section name="② 문제 정의" id="{3b34af3b-242a-d64b-5da8-9b8db54599ca}">
+        <p14:section name="② 문제 정의" id="{c62b9f44-a4fb-4d17-867d-b42d9ddfb950}">
           <p14:sldIdLst>
             <p14:sldId id="258"/>
             <p14:sldId id="259"/>
           </p14:sldIdLst>
         </p14:section>
-        <p14:section name="③ 솔루션·핵심 가치" id="{aef5cf51-cdad-31eb-466c-e4b61cfd7aa2}">
+        <p14:section name="③ 솔루션·핵심 가치" id="{e7c31a10-9e4c-31a6-0ea1-25db622604d9}">
           <p14:sldIdLst>
             <p14:sldId id="260"/>
             <p14:sldId id="261"/>
           </p14:sldIdLst>
         </p14:section>
-        <p14:section name="④ SW 기술 아키텍처" id="{1f516f9b-c468-cde3-6289-e9c09797cd4d}">
+        <p14:section name="④ SW 기술 아키텍처" id="{36cebb7e-30ff-b229-361f-39302b8075ae}">
           <p14:sldIdLst>
             <p14:sldId id="262"/>
             <p14:sldId id="263"/>
           </p14:sldIdLst>
         </p14:section>
-        <p14:section name="⑤ 개발 현황·MVP 시연" id="{4b77e6a7-5642-08c5-c331-c880ea5af9d7}">
+        <p14:section name="⑤ 개발 현황·MVP 시연" id="{d390b720-454e-ae94-b51d-0a3387e5d75e}">
           <p14:sldIdLst>
             <p14:sldId id="264"/>
             <p14:sldId id="265"/>
@@ -157,19 +157,19 @@
             <p14:sldId id="267"/>
           </p14:sldIdLst>
         </p14:section>
-        <p14:section name="⑥ 시장 분석·비즈니스 모델" id="{0eb722b8-7bf9-1d53-947b-e29189d22c89}">
+        <p14:section name="⑥ 시장 분석·비즈니스 모델" id="{0f23bb2a-4ce8-2df7-a009-74e93dea819b}">
           <p14:sldIdLst>
             <p14:sldId id="268"/>
             <p14:sldId id="269"/>
             <p14:sldId id="270"/>
           </p14:sldIdLst>
         </p14:section>
-        <p14:section name="⑦ 초기 시장 검증" id="{18d58d97-f0ce-994d-9d19-2449b2724920}">
+        <p14:section name="⑦ 초기 시장 검증" id="{b48a05d0-e43e-17ff-3cc1-080bd43b2bf9}">
           <p14:sldIdLst>
             <p14:sldId id="271"/>
           </p14:sldIdLst>
         </p14:section>
-        <p14:section name="⑧ 향후 계획·팀 역량" id="{6477938f-fc79-1506-d643-4c7b11cd363c}">
+        <p14:section name="⑧ 향후 계획·팀 역량" id="{108f784f-4f4f-8c3f-ef62-da4748bcd282}">
           <p14:sldIdLst>
             <p14:sldId id="272"/>
             <p14:sldId id="273"/>
@@ -1014,7 +1014,7 @@
           <a:p>
             <a:r>
               <a:rPr lang="en-US" dirty="0"/>
-              <a:t>재생 전에 한 문장: "보실 것 하나만 말씀드리면 마지막 장면의 등록 시각입니다. 지금 서버에 그대로 있는 값입니다." 영상을 누르면 재생됩니다. 왼쪽이 폰 화면, 오른쪽 위는 지금 단계(기록 · 비교 · 요청 · 확인), 그 아래가 자막입니다. 1 출근 · 퇴근 → 설정 "2건 등록됨"(0:10~0:30), 2 받은 금액 입력 → 빨간 차액(0:30~0:50), 3 메시지 생성 → 증빙 묶음 PDF 7번 표(0:50~1:28), 4 확인 페이지 → 서버 등록 시각(1:28~1:42). 시작 3초는 제목 화면, 끝 4초는 확인 페이지 주소와 확인 번호 화면입니다. 단계가 바뀔 때 멈추고 한두 문장씩 설명합니다. 영상이 안 열리면 docs/08_시연_영상.mp4를 따로 틀어도 됩니다. 영상 마지막에 나오는 확인 번호는 da3e2a7ad7e298db입니다. "녹화라서 못 믿겠다"는 질문이 오면 "지금 폰으로 jihooni217.github.io/albaguard/verify.html?h=da3e2a7ad7e298db 를 열어 보셔도 됩니다. 서버가 찍은 시각이 녹화 시각(10/26)과 같습니다"라고 답합니다.</a:t>
+              <a:t>재생 전에 한 문장: "보실 것 하나만 말씀드리면 마지막 장면의 등록 시각입니다. 지금 서버에 그대로 있는 값입니다." 영상을 누르면 재생됩니다. 왼쪽이 폰 화면, 오른쪽 위는 지금 단계(기록 · 비교 · 요청 · 확인), 그 아래가 자막입니다. 1 출근 · 퇴근 → 설정 "2건 등록됨"(0:10~0:30), 2 받은 금액 입력 → 빨간 차액(0:30~0:50), 3 메시지 생성 → 증빙 묶음 PDF 7번 표(0:50~1:28), 4 확인 페이지 → 서버 등록 시각(1:28~1:42). 시작 3초는 제목 화면, 끝 4초는 확인 페이지 주소와 확인 번호 화면입니다. 단계가 바뀔 때 멈추고 한두 문장씩 설명합니다. 영상이 안 열리면 docs/08_시연_영상.mp4를 따로 틀어도 됩니다. 영상 마지막에 나오는 확인 번호는 da3e2a7ad7e298db입니다. "녹화라서 못 믿겠다"라는 질문이 오면 "지금 폰으로 jihooni217.github.io/albaguard/verify.html?h=da3e2a7ad7e298db 를 열어 보셔도 됩니다. 서버가 찍은 시각이 녹화 시각(10/26)과 같습니다"라고 답합니다.</a:t>
             </a:r>
             <a:endParaRPr lang="en-US" dirty="0"/>
           </a:p>
@@ -1102,7 +1102,7 @@
           <a:p>
             <a:r>
               <a:rPr lang="en-US" dirty="0"/>
-              <a:t>시연 직후에 보여 줍니다. "방금 보신 것이 8개 중 이만큼"입니다. 100%는 쓰지 않았습니다. 계획 기준은 9월 기획서의 기능 4개에서 출발해, 10/13 MVP 기능 정의서에서 포함 8개 · 제외 6개(금액 자동 인식 · 푸시 알림 · AI 문구 · 광고 · 로그인 · 진정서)로 고정한 것입니다. %는 구현 + 실제 폰 확인 + 사용자 검증을 100으로 보고 남은 일만큼 뺀 자체 평가이고, 동작은 컴퓨터의 폰 크기 화면에서, 실제 폰은 설치까지 확인했습니다. 동그라미 세 칸은 컴퓨터 동작 · 실제 폰 · 사용자 검증이고, 지금은 모두 첫 칸만 찼습니다. 뒤 두 칸이 11월 일정입니다. 세 칸 중 첫 칸만 찼는데 왜 80~90%냐고 물으시면, %는 칸 수가 아니라 남은 일의 크기로 어림한 것이고 11월 검증에서 큰 수정이 나오면 내려갈 수 있다고 답합니다. 이 장이 끝나면 손유호에게 넘깁니다.</a:t>
+              <a:t>시연 직후에 보여 줍니다. "방금 보신 것이 8개 중 이만큼"입니다. 100%는 쓰지 않았습니다. 계획 기준은 9월 기획서의 기능 4개에서 출발해, 10/13 MVP 기능 정의서에서 포함 8개 · 제외 6개(금액 자동 인식 · 푸시 알림 · AI 문구 · 광고 · 로그인 · 진정서)로 고정한 것입니다. %는 구현 + 실제 폰 확인 + 사용자 검증을 100으로 보고 남은 일만큼 뺀 자체 평가이고, 동작은 컴퓨터의 폰 크기 화면에서, 실제 폰은 설치까지 확인했습니다. 동그라미 세 칸은 컴퓨터 동작 · 실제 폰 · 사용자 검증이고, 지금은 모두 첫 칸만 찼습니다. 뒤 두 칸이 11월 일정입니다. 세 칸 중 첫 칸만 찼는데 왜 80~90%냐고 물으시면, %는 칸수가 아니라 남은 일의 크기로 어림한 것이고 11월 검증에서 큰 수정이 나오면 내려갈 수 있다고 답합니다. 이 장이 끝나면 손유호에게 넘깁니다.</a:t>
             </a:r>
             <a:endParaRPr lang="en-US" dirty="0"/>
           </a:p>
@@ -1190,7 +1190,7 @@
           <a:p>
             <a:r>
               <a:rPr lang="en-US" dirty="0"/>
-              <a:t>손유호. 임금체불은 2년 연속 2조 원이고 30인 미만 사업장에 몰려 있습니다. 타겟 규모는 어림이라 "약"을 붙여 말하고, 없는 숫자(지금 알바 중, 주 15시간 이상)는 미상으로 둡니다. 재적학생은 교육부 2026 교육기본통계(대학원 포함), 알바 경험률은 알바몬 설문(1,193명, 여름방학 알바 88.9%, 2023)과 동대신문 설문(200명, 67.5%)이라 대표값이 아닙니다. 근절 대책은 대지급금을 3개월분에서 6개월분으로 늘렸고, 개정법은 상습 체불 사업주에게 신용 제재를 겁니다. 체불 통계는 문제의 크기이지 알바 시장의 크기가 아닙니다. 알바생 몫은 이 통계에서 알 수 없어 미상으로 둡니다. "주 15시간 이상이 다수인지의 첫 조각은 지금 답하고 계신 설문에서 나오지만, 규모 추정이 아니라 메시지를 정하는 참고값입니다. 다음 순서에서 박명진이 말씀드립니다." 출처: 고용노동부 노동포털 임금체불 통계현황, 알바천국 설문, 교육부 교육기본통계.</a:t>
+              <a:t>손유호. 임금체불은 2년 연속 2조 원이고 30인 미만 사업장에 몰려 있습니다. 타깃 규모는 어림이라 "약"을 붙여 말하고, 없는 숫자(지금 알바 중, 주 15시간 이상)는 미상으로 둡니다. 재적학생은 교육부 2026 교육기본통계(대학원 포함), 알바 경험률은 알바몬 설문(1,193명, 여름방학 알바 88.9%, 2023)과 동대신문 설문(200명, 67.5%)이라 대푯값이 아닙니다. 근절 대책은 대지급금을 3개월분에서 6개월분으로 늘렸고, 개정법은 상습 체불 사업주에게 신용 제재를 겁니다. 체불 통계는 문제의 크기이지 알바 시장의 크기가 아닙니다. 알바생 몫은 이 통계에서 알 수 없어 미상으로 둡니다. "주 15시간 이상이 다수인지의 첫 조각은 지금 답하고 계신 설문에서 나오지만, 규모 추정이 아니라 메시지를 정하는 참고값입니다. 다음 순서에서 박명진이 말씀드립니다." 출처: 고용노동부 노동포털 임금체불 통계현황, 알바천국 설문, 교육부 교육기본통계.</a:t>
             </a:r>
             <a:endParaRPr lang="en-US" dirty="0"/>
           </a:p>
@@ -1366,7 +1366,7 @@
           <a:p>
             <a:r>
               <a:rPr lang="en-US" dirty="0"/>
-              <a:t>손유호. 알바비 앱에 왜 게임이 있나: 출퇴근은 일하는 날마다 누르지만 돈을 확인하는 건 급여일에 한 번이라, 그 사이에도 앱을 열 이유로 넣었고 그 화면이 광고 자리입니다. 처음엔 근무 중에만 열렸는데 팀원 의견으로 10/25에 조건을 풀고 설정에서 숨길 수 있게 했습니다. 광고 형식은 웹앱이라 배너 · 전면이 기본이고 보상형은 승인이 필요합니다. 2차 구독은 폰을 바꾸거나 잃어버려도 기록이 남게 하는 선택 기능이고, 원하는 사람만 쓰므로 "근무 내용은 폰 안에만" 원칙과 부딪히지 않습니다. 문서를 돈 받고 만들어 주는 건 법적 이유로 하지 않습니다(웹 조사 기준, 전문가 검토 아님). 광고 가설은 설문의 "게임 화면 광고" 문항과 승인 뒤 게임 화면 열람 수로 확인합니다. 운영 비용은 지금 서버 0원 · 배포 0원이라 수익이 0이어도 서비스는 돌아가고, 인건비는 팀 3명입니다.</a:t>
+              <a:t>손유호. 알바비 앱에 왜 게임이 있나: 출퇴근은 일하는 날마다 누르지만, 돈을 확인하는 건 급여일에 한 번이라, 그 사이에도 앱을 열 이유로 넣었고 그 화면이 광고 자리입니다. 처음엔 근무 중에만 열렸는데 팀원 의견으로 10/25에 조건을 풀고 설정에서 숨길 수 있게 했습니다. 광고 형식은 웹앱이라 배너 · 전면이 기본이고 보상형은 승인이 필요합니다. 2차 구독은 폰을 바꾸거나 잃어버려도 기록이 남게 하는 선택 기능이고, 원하는 사람만 쓰므로 "근무 내용은 폰 안에만" 원칙과 부딪히지 않습니다. 문서를 돈 받고 만들어 주는 건 법적 이유로 하지 않습니다(웹 조사 기준, 전문가 검토 아님). 광고 가설은 설문의 "게임 화면 광고" 문항과 승인 뒤 게임 화면 열람 수로 확인합니다. 운영 비용은 지금 서버 0원 · 배포 0원이라 수익이 0이어도 서비스는 돌아가고, 인건비는 팀 3명입니다.</a:t>
             </a:r>
             <a:endParaRPr lang="en-US" dirty="0"/>
           </a:p>
@@ -1454,7 +1454,7 @@
           <a:p>
             <a:r>
               <a:rPr lang="en-US" dirty="0"/>
-              <a:t>박명진. 가설은 9월 기획서 문장 그대로입니다. 표의 기준은 팀이 정한 목표이지 데이터가 아닙니다. 인터뷰 문항은 설문지 20~24번입니다. 지금까지 들은 것은 정식 조사가 아닙니다: 타겟 사용자 1명이 디자인 시안 12장 중 통장 구성을 골랐고, 링크 설문은 10/23에 공개했습니다. 기말 발표에서 이 표에 결과를 더해 보고합니다. 응답 수는 슬라이드에 적지 않고 당일 아침 결과 페이지에서 읽습니다. 0명이면 0명이라고 말합니다. 다만 당일 아침 응답이 10명 이상이고, 강의실 인터넷이 되고, 교수님 양해를 받았으면 결과 페이지(survey-results.html)를 60초만 띄워 세 문항(주당 근무 시간 · 적게 받은 것 같았던 적 · 매달 받은 금액 직접 넣기)만 읽습니다. 자유 의견은 띄우지 않습니다. 아니면 당일 아침 캡처로 대신합니다. 테스트 응답 2건(10/23)은 미리 지워 둡니다. 결과는 사람 수로만 말하고 %는 30명을 넘을 때만 씁니다. 1행은 의향을 묻는 것이라 한계가 있습니다. 인터뷰 때 앱을 설치하게 하고, 실제로 넣는지는 급여일이 지난 뒤 따로 봅니다(기말 이후까지 걸릴 수 있음). 지인은 호의적으로 답하기 쉬워서 "넣겠다"를 그대로 믿지 않습니다.</a:t>
+              <a:t>박명진. 가설은 9월 기획서 문장 그대로입니다. 표의 기준은 팀이 정한 목표이지 데이터가 아닙니다. 인터뷰 문항은 설문지 20~24번입니다. 지금까지 들은 것은 정식 조사가 아닙니다: 타깃 사용자 1명이 디자인 시안 12장 중 통장 구성을 골랐고, 링크 설문은 10/23에 공개했습니다. 기말 발표에서 이 표에 결과를 더해 보고합니다. 응답 수는 슬라이드에 적지 않고 당일 아침 결과 페이지에서 읽습니다. 0명이면 0명이라고 말합니다. 다만 당일 아침 응답이 10명 이상이고, 강의실 인터넷이 되고, 교수님 양해를 받았으면 결과 페이지(survey-results.html)를 60초만 띄워 세 문항(주당 근무 시간 · 적게 받은 것 같았던 적 · 매달 받은 금액 직접 넣기)만 읽습니다. 자유 의견은 띄우지 않습니다. 아니면 당일 아침 캡처로 대신합니다. 테스트 응답 2건(10/23)은 미리 지워 둡니다. 결과는 사람 수로만 말하고 %는 30명을 넘을 때만 씁니다. 1행은 의향을 묻는 것이라 한계가 있습니다. 인터뷰 때 앱을 설치하게 하고, 실제로 넣는지는 급여일이 지난 뒤 따로 봅니다(기말 이후까지 걸릴 수 있음). 지인은 호의적으로 답하기 쉬워서 "넣겠다"를 그대로 믿지 않습니다.</a:t>
             </a:r>
             <a:endParaRPr lang="en-US" dirty="0"/>
           </a:p>
@@ -1718,24 +1718,24 @@
           <a:p>
             <a:r>
               <a:rPr lang="en-US" dirty="0"/>
-              <a:t>팀장 마무리(20초): "저희가 여쭙고 싶은 것 두 가지입니다. 문서 유료화를 피하면서 가능한 수익 모델이 더 있을지, 그리고 설문 30명 · 인터뷰 5명이면 충분한지입니다. 질문 받겠습니다." 이 장은 질의응답 내내 띄워 둔다.
+              <a:t>팀장 마무리(20초): "저희가 여쭙고 싶은 것 두 가지입니다. 문서 유료화를 피하면서 가능한 수익 모델이 더 있을지, 그리고 설문 30명 · 인터뷰 5명이면 충분한지입니다. 질문받겠습니다." 이 장은 질의응답 내내 띄워 둔다.
 예상 질문 (이름 붙은 사람이 먼저 답하고, 모자라면 팀장이 보탠다)
 · [이지훈] 법적 효력 있나? → 보장하지 않는다. 판단은 감독관 · 법원. 우리는 판단할 자료를 정리하고, 수정 이력과 확인 번호로 "나중에 고친 게 아니다"까지 보여 준다. 통장 내역 · 카톡과 함께 내야 한다고 앱에도 적어 뒀다.
-· [이지훈] 서버는 여러분이 관리하는데 고치면 그만 아닌가? → 맞다. 공개 키로는 넣기 · 읽기만 되고 시각은 서버가 찍는 것까지 확인했지만, 프로젝트 소유자 권한으로는 고칠 수 있다. 한계로 인정한다. 지금 막는 건 "사용자 본인이 나중에 고쳐 쓰기"까지. 운영자까지 못 고치게 하는 외부 공인 시점확인은 비용 때문에 계획. 서버에는 번호만 있어서 운영자가 서버를 고쳐도 폰의 근무 내용 자체는 못 바꾼다. (확인 페이지 본문의 "고치거나 지울 수 없습니다"는 "앱 쪽에서는"이라고 범위를 붙여 말할 것)
+· [이지훈] 서버는 여러분이 관리하는데 고치면 그만 아닌가? → 맞다. 공개키로는 넣기 · 읽기만 되고 시각은 서버가 찍는 것까지 확인했지만, 프로젝트 소유자 권한으로는 고칠 수 있다. 한계로 인정한다. 지금 막는 건 "사용자 본인이 나중에 고쳐 쓰기"까지. 운영자까지 못 고치게 하는 외부 공인 시점 확인은 비용 때문에 계획. 서버에는 번호만 있어서 운영자가 서버를 고쳐도 폰의 근무 내용 자체는 못 바꾼다. (확인 페이지 본문의 "고치거나 지울 수 없습니다"는 "앱 쪽에서는"이라고 범위를 붙여 말할 것)
 · [이지훈] 확인 번호가 그 기록에서 나온 건지 어떻게 아나? → 지금은 번호와 서버 등록 시각까지 보여 주고, 기록 내용에서 번호를 다시 계산해 맞춰 보는 방법은 기말까지 만든다(그래서 70%). 지금은 앱 · 백업 파일을 함께 봐야 한다.
 · [이지훈] 본인이 쓴 기록을 믿을 수 있나? → 거짓 기록은 막을 수 없다고 인정. 막는 건 "나중에 고쳐 쓰기". 영세 사업장은 기록이 없는 경우가 많아 알바생 기록이 거의 유일한 자료가 되기 쉽다. 사장에게는 임금대장 · 계약 서류 보존 의무가 있다(근로기준법 48 · 42조).
-· [이지훈] 앱 계산이 틀리면 분쟁이 커지는 것 아닌가? 책임은? → 계산을 단정으로 내놓지 않는다. 항목별 · 주별 이유를 펼쳐 보여 주고, 안 넣은 것(연장근로 가산)과 유리하게 본 것(합의 휴무)은 화면에 적었다. 1단계 문구는 청구서가 아니라 "제가 계산을 잘 몰라서 여쭤본다"는 확인 요청. 법률 자문 아님을 적어 두었고 1350 확인을 안내한다.
+· [이지훈] 앱 계산이 틀리면 분쟁이 커지는 것 아닌가? 책임은? → 계산을 단정으로 내놓지 않는다. 항목별 · 주별 이유를 펼쳐 보여 주고, 안 넣은 것(연장근로 가산)과 유리하게 본 것(합의 휴무)은 화면에 적었다. 1단계 문구는 청구서가 아니라 "제가 계산을 잘 몰라서 여쭤본다"라는 확인 요청. 법률 자문 아님을 적어 두었고 1350 확인을 안내한다.
 · [이지훈] 고객 검증도 전에 왜 먼저 만들었나? → 맞다. 다만 링크로 배포되는 웹앱이라 빨리 만들 수 있었고, 말로 설명하기보다 화면을 보여 주며 물어야 정확한 답을 듣는다고 봤다. 9월 경쟁 앱 리뷰로 빈자리를 확인하고 10/13 정의서로 범위를 8개로 잘랐다. 설문에 캡처 3장을 넣고 "실제로 있다면 쓰겠나"를 묻는다. 12/7까지는 고치는 기간.
 · [박명진] 받은 금액을 매달 직접 넣어야 하는데 넣을까? → 가장 큰 가설이라 인터뷰 1번. 첫 화면에서 "9월 급여 받으셨나요?"라고 묻고 넣는 순간 덜 받은 돈이 보이게 했다. 5명 중 3명이 아니면 자동 인식을 앞당긴다.
 · [이지훈] 하우머치가 따라 하면? → 비교 기능은 따라올 수 있다. 해시를 서버에 넣는 기술 자체도 어렵지 않다고 인정한다. 어려운 것은 그 번호가 뜻이 있게 기록 구조를 짜는 일이다. 사유 없이 못 고치고, 삭제도 흔적이 남고, 고칠 때마다 다시 등록돼야 "몇 번 고쳤나"가 보인다. 기존 앱이 따라오려면 기록을 마음대로 고치던 방식을 바꿔야 해서 쉽게 따라오지 않는다고 본다. 그래도 따라오면 요청 · 증빙까지 잇는 흐름으로 간다. 우리도 "내용으로 번호 다시 계산"이 남아 70%다.
-· [손유호] 급여 앱에 게임이 왜? 근무 중에 게임을 권하나? → 출퇴근은 일하는 날마다 누르지만 돈을 확인하는 건 급여일에 한 번이라, 그 사이에도 앱을 열 이유로 넣은 것. 처음엔 근무 중에만이었는데 팀원 의견으로 10/25 조건을 풀고 설정에서 숨길 수 있게 했다. 게임 기록은 문서에 안 섞인다. 안 되면 게임을 빼도 기록 → 비교 → 요청은 그대로.
+· [손유호] 급여 앱에 게임이 왜? 근무 중에 게임을 권하나? → 출퇴근은 일하는 날마다 누르지만, 돈을 확인하는 건 급여일에 한 번이라, 그 사이에도 앱을 열 이유로 넣은 것. 처음엔 근무 중에만이었는데 팀원 의견으로 10/25 조건을 풀고 설정에서 숨길 수 있게 했다. 게임 기록은 문서에 안 섞인다. 안 되면 게임을 빼도 기록 → 비교 → 요청은 그대로.
 · [박명진] 같은 과 학생 설문이 무슨 의미? 편향 아닌가? → 맞다. "정식 조사 아님"을 적고 사람 수로만 말한다. 중복 응답도 막지 않았다(이름 · 기기 정보를 안 받는 대가). 11월 30명은 과 밖에서, 인터뷰 5명으로 이유를 듣는다.
 · [이지훈] 법률 서비스 아닌가? → 무료, 본인 기록을 정해진 양식에 채울 뿐, 개별 사안 검토 · 대행 없음, 진정은 1350 · 노동포털로 연결만.
 · [손유호] 수익은? → 게임 화면 광고(가설). 운영 비용은 0원. 문서 유료화는 안 한다.
 · [이지훈] 정의서를 개발 중에 썼는데 계획 대비가 의미 있나? → 맞다. 원래 계획은 9월 기획서의 기능 4개(기록 · 비교 · 요청 · 증빙)다. 10/13 정의서는 만들면서 필요해진 것(기록 등록 · 백업)을 더해 8개로 고정하고, 넣지 않을 6개를 정한 문서다. 그 뒤 포함 기능을 늘리지 않았고 뺀 6개는 지금도 없다. 8/8은 "다 했다"가 아니라 "범위를 지켰다"로 읽어 달라.
-· [이지훈] 등록 시각이 출근 시각인가? 인터넷이 없을 때 기록하면? → 아니다. 등록 시각은 확인 번호가 서버에 도착한 시각이고, 보여 주는 것은 "늦어도 이 시각에는 이 내용이 있었다"까지다. 인터넷이 없으면 대기열에 있다가 연결될 때 보내지므로 그만큼 늦어진다. "나중에 입력"한 기록도 입력한 때 등록되고, 기록 안에 나중에 입력했다는 표시와 사유가 같이 남는다. 출근 시각 자체를 증명하는 것은 아니다.
+· [이지훈] 등록 시각이 출근 시각인가? 인터넷이 없을 때 기록하면? → 아니다. 등록 시각은 확인 번호가 서버에 도착한 시각이고, 보여 주는 것은 "늦어도 이 시각에는 이 내용이 있었다"까지다. 인터넷이 없으면 대기열에 있다가 연결될 때 보내지므로 그만큼 늦어진다. "나중에 입력"한 기록도 입력했을 때 등록되고, 기록 안에 나중에 입력했다는 표시와 사유가 같이 남는다. 출근 시각 자체를 증명하는 것은 아니다.
 · [이지훈] 아무 번호나 넣으면? 두 기록이 같은 번호가 될 수 있나? → 확인 페이지는 앞 16자와 64자 전체를 둘 다 받고, 서버에 없는 번호는 등록된 것이 없다고 나온다. 서버 표에서 번호는 중복을 허용하지 않는다. 재료에 기록 번호와 만든 시각이 들어가서 서로 다른 기록이 같은 번호가 될 일은 사실상 없다.
-· [이지훈] 카톡 나에게 보내기로 매일 적으면 같지 않나? → 시각만 보면 카톡이 더 믿을 만하다. 카카오가 찍은 시각이라 우리와 무관하다. 다른 점은 둘이다. 카톡은 고치면 새 메시지가 하나 더 생길 뿐 무엇을 왜 고쳤는지 안 남고, 그 기록으로 계산 · 비교 · 요청 · 증빙 묶음까지 이어지지 않는다. 그래서 카톡에 적던 사람이 첫 타겟이고, 카톡 캡처는 함께 내라고 앱에도 적었다.
+· [이지훈] 카톡 나에게 보내기로 매일 적으면 같지 않나? → 시각만 보면 카톡이 더 믿을 만하다. 카카오가 찍은 시각이라 우리와 무관하다. 다른 점은 둘이다. 카톡은 고치면 새 메시지가 하나 더 생길 뿐 무엇을 왜 고쳤는지 안 남고, 그 기록으로 계산 · 비교 · 요청 · 증빙 묶음까지 이어지지 않는다. 그래서 카톡에 적던 사람이 첫 타깃이고, 카톡 캡처는 함께 내라고 앱에도 적었다.
 · [이지훈] AI는 어디에 썼나? Claude 문구는 실제로 써 봤나? → 앱 기능으로는 정산 요청 문구 생성 하나이고 선택 사항이다. 배포 앱은 API 키 없이 근무 기록과 계산 내역을 채운 정해진 문장으로 만든다. 기본을 끈 이유는 기록 내용이 폰 밖으로 나가면 개인정보 안내와 동의가 먼저 필요해서다. 키가 없어 Claude 문구를 실제로 돌려 본 적은 아직 없다.
 · [이지훈] 코드는 누가 짰고 이해하고 있나? → (사실대로. 틀: 개발 도구로 AI 코딩 도우미를 썼다. 기능 범위 8개, 계산 규칙(주휴 · 야간 · 휴게시간 · 연도별 최저임금), 기록 구조(수정 이력, 삭제 흔적, 사유 없이는 저장 안 됨), 법적 문구 원칙은 팀장이 정하고 하나씩 확인하며 올렸다. 서버 권한은 2000년 시각과 수정 · 삭제 요청을 직접 보내 확인했다.)
 · [이지훈] 왜 Supabase인가? 설문은 서버에 두면서 근무 기록은 왜 안 두나? → 서버 코드 없이 REST로 표에 넣고 읽을 수 있고, 표 단위 권한(RLS)과 트리거로 "시각은 서버가 찍는다"를 걸 수 있어서다. 일주일 요청이 없으면 멈추는 단점은 알고 있다. 설문은 이름 없는 답 묶음이고 근무 기록은 근무지 · 시각 · 금액이라 민감도가 다르다. 권한 원칙은 두 표가 같다.
@@ -2359,7 +2359,7 @@
           <a:p>
             <a:r>
               <a:rPr lang="en-US" dirty="0"/>
-              <a:t>왼쪽 폰 안에서 모든 계산이 끝나고, 서버로 가는 건 확인 번호뿐입니다. 기기 번호는 처음 기록을 등록할 때 앱이 만든 난수라 휴대전화 번호가 아닙니다. 앱이 쓰는 공개 키로는 넣기와 읽기만 되고, 직접 요청을 보내 확인했습니다. 2000년 시각을 보내도 서버 시각으로 들어가고, 수정 · 삭제는 401로 거부됩니다. 다만 운영자 권한으로는 고칠 수 있어서, 지금 막는 건 "사용자가 나중에 고쳐 쓰기"까지입니다. 운영자까지 못 고치게 하는 외부 시점확인은 비용 때문에 계획입니다. 오른쪽은 기록 하나가 남을 때의 흐름입니다. 증빙 묶음 PDF 7번 표에 기록별 확인 번호와 등록 시각이 들어갑니다. 배포는 GitHub main에 올리면 Actions가 Pages로 자동 배포합니다. 지금 답하고 계신 설문도 같은 서버의 survey 표로 가고, 권한 원칙이 같습니다.</a:t>
+              <a:t>왼쪽 폰 안에서 모든 계산이 끝나고, 서버로 가는 건 확인 번호뿐입니다. 기기 번호는 처음 기록을 등록할 때 앱이 만든 난수라 휴대전화 번호가 아닙니다. 앱이 쓰는 공개키로는 넣기와 읽기만 되고, 직접 요청을 보내 확인했습니다. 2000년 시각을 보내도 서버 시각으로 들어가고, 수정 · 삭제는 401로 거부됩니다. 다만 운영자 권한으로는 고칠 수 있어서, 지금 막는 건 "사용자가 나중에 고쳐 쓰기"까지입니다. 운영자까지 못 고치게 하는 외부 시점 확인은 비용 때문에 계획입니다. 오른쪽은 기록 하나가 남을 때의 흐름입니다. 증빙 묶음 PDF 7번 표에 기록별 확인 번호와 등록 시각이 들어갑니다. 배포는 GitHub main에 올리면 Actions가 Pages로 자동 배포합니다. 지금 답하고 계신 설문도 같은 서버의 survey 표로 가고, 권한 원칙이 같습니다.</a:t>
             </a:r>
             <a:endParaRPr lang="en-US" dirty="0"/>
           </a:p>
@@ -2447,7 +2447,7 @@
           <a:p>
             <a:r>
               <a:rPr lang="en-US" dirty="0"/>
-              <a:t>디자인은 타겟 사용자(하우머치를 쓰는 친구)가 시안 12장 중 고른 통장 구성입니다. 잉크 남색은 "기록을 잉크로 남긴다"는 뜻입니다. 증빙 묶음은 인쇄 창에서 PDF로 저장합니다.</a:t>
+              <a:t>디자인은 타깃 사용자(하우머치를 쓰는 친구)가 시안 12장 중 고른 통장 구성입니다. 잉크 남색은 "기록을 잉크로 남긴다"라는 뜻입니다. 증빙 묶음은 인쇄 창에서 PDF로 저장합니다.</a:t>
             </a:r>
             <a:endParaRPr lang="en-US" dirty="0"/>
           </a:p>
@@ -7450,7 +7450,7 @@
                   <a:schemeClr val="tx2"/>
                 </a:solidFill>
               </a:rPr>
-              <a:t>타겟 규모(어림)  </a:t>
+              <a:t>타깃 규모(어림)  </a:t>
             </a:r>
             <a:pPr indent="0" marL="0">
               <a:spcAft>
@@ -8523,7 +8523,7 @@
                   <a:schemeClr val="tx1"/>
                 </a:solidFill>
               </a:rPr>
-              <a:t>출퇴근은 날마다 누르지만 돈을 확인하는 건 급여일에 한 번. 그 사이 앱을 열 이유로 게임을 넣었고, 그 화면이 광고 자리다.</a:t>
+              <a:t>출퇴근은 날마다 누르지만, 돈을 확인하는 건 급여일에 한 번. 그 사이 앱을 열 이유로 게임을 넣었고, 그 화면이 광고 자리다.</a:t>
             </a:r>
             <a:endParaRPr lang="en-US" sz="1100" dirty="0"/>
           </a:p>
@@ -10057,7 +10057,7 @@
                             <a:srgbClr val="15171A"/>
                           </a:solidFill>
                         </a:rPr>
-                        <a:t>타겟 중 주 15시간 이상이 다수다</a:t>
+                        <a:t>타깃 중 주 15시간 이상이 다수다</a:t>
                       </a:r>
                       <a:endParaRPr lang="en-US" sz="1050" dirty="0"/>
                     </a:p>
@@ -13348,7 +13348,7 @@
                   <a:schemeClr val="accent5"/>
                 </a:solidFill>
               </a:rPr>
-              <a:t>중간 발표 10/27 (화) → 기말 발표 12/15 (화) 예정</a:t>
+              <a:t>중간발표 10/27 (화) → 기말 발표 12/15 (화) 예정</a:t>
             </a:r>
             <a:endParaRPr lang="en-US" sz="950" dirty="0"/>
           </a:p>
@@ -15564,7 +15564,7 @@
       </p:sp>
       <p:sp>
         <p:nvSpPr>
-          <p:cNvPr id="4" name="타겟 칸"/>
+          <p:cNvPr id="4" name="타깃 칸"/>
           <p:cNvSpPr/>
           <p:nvPr/>
         </p:nvSpPr>
@@ -15619,7 +15619,7 @@
                   <a:schemeClr val="tx2"/>
                 </a:solidFill>
               </a:rPr>
-              <a:t>타겟  </a:t>
+              <a:t>타깃  </a:t>
             </a:r>
             <a:pPr indent="0" marL="0">
               <a:buNone/>
@@ -16464,7 +16464,7 @@
                   <a:schemeClr val="accent5"/>
                 </a:solidFill>
               </a:rPr>
-              <a:t>관계 걱정, 작은 금액, 근거 없음. 메모장 기록은 "나중에 지어낸 것 아니냐" 한마디에 무너진다</a:t>
+              <a:t>관계 걱정, 작은 금액, 근거 없음. 메모장 기록은 "나중에 지어낸 것 아니냐?" 한마디에 무너진다</a:t>
             </a:r>
             <a:endParaRPr lang="en-US" sz="1050" dirty="0"/>
           </a:p>
@@ -22111,7 +22111,7 @@
                             <a:srgbClr val="15171A"/>
                           </a:solidFill>
                         </a:rPr>
-                        <a:t>기록은 사용자 폰에. 공개 키로는 넣기 · 읽기만(RLS), 시각은 서버가 찍음. 운영자 조작은 못 막음</a:t>
+                        <a:t>기록은 사용자 폰에. 공개키로는 넣기 · 읽기만(RLS), 시각은 서버가 찍음. 운영자 조작은 못 막음</a:t>
                       </a:r>
                       <a:endParaRPr lang="en-US" sz="1050" dirty="0"/>
                     </a:p>
@@ -23447,7 +23447,7 @@
                   <a:schemeClr val="accent5"/>
                 </a:solidFill>
               </a:rPr>
-              <a:t>공개 키로는 넣기 · 읽기만(RLS). 시각은 서버가 찍음</a:t>
+              <a:t>공개키로는 넣기 · 읽기만(RLS). 시각은 서버가 찍음</a:t>
             </a:r>
             <a:endParaRPr lang="en-US" sz="1100" dirty="0"/>
           </a:p>

--- a/docs/06_중간발표_PPT.pptx
+++ b/docs/06_중간발표_PPT.pptx
@@ -125,31 +125,31 @@
   <p:extLst>
     <p:ext uri="{521415D9-36F7-43E2-AB2F-B90AF26B5E84}">
       <p14:sectionLst xmlns:p14="http://schemas.microsoft.com/office/powerpoint/2010/main">
-        <p14:section name="① 표지·팀 소개" id="{d9d8ad16-c7f2-2594-d7fa-0ba4117c8bc7}">
+        <p14:section name="① 표지·팀 소개" id="{4e72c584-e189-f720-ef48-c5135617dd0c}">
           <p14:sldIdLst>
             <p14:sldId id="256"/>
             <p14:sldId id="257"/>
           </p14:sldIdLst>
         </p14:section>
-        <p14:section name="② 문제 정의" id="{c62b9f44-a4fb-4d17-867d-b42d9ddfb950}">
+        <p14:section name="② 문제 정의" id="{5b072e54-5912-4794-0d0b-d77da0d69b57}">
           <p14:sldIdLst>
             <p14:sldId id="258"/>
             <p14:sldId id="259"/>
           </p14:sldIdLst>
         </p14:section>
-        <p14:section name="③ 솔루션·핵심 가치" id="{e7c31a10-9e4c-31a6-0ea1-25db622604d9}">
+        <p14:section name="③ 솔루션·핵심 가치" id="{6594b607-1845-7d83-c92b-4dc36c5d762a}">
           <p14:sldIdLst>
             <p14:sldId id="260"/>
             <p14:sldId id="261"/>
           </p14:sldIdLst>
         </p14:section>
-        <p14:section name="④ SW 기술 아키텍처" id="{36cebb7e-30ff-b229-361f-39302b8075ae}">
+        <p14:section name="④ SW 기술 아키텍처" id="{ef3736eb-b41c-28ce-b0c9-ff760c4cd6c6}">
           <p14:sldIdLst>
             <p14:sldId id="262"/>
             <p14:sldId id="263"/>
           </p14:sldIdLst>
         </p14:section>
-        <p14:section name="⑤ 개발 현황·MVP 시연" id="{d390b720-454e-ae94-b51d-0a3387e5d75e}">
+        <p14:section name="⑤ 개발 현황·MVP 시연" id="{71a9db5d-f077-5cc2-b5a2-b7e4a0830ded}">
           <p14:sldIdLst>
             <p14:sldId id="264"/>
             <p14:sldId id="265"/>
@@ -157,19 +157,19 @@
             <p14:sldId id="267"/>
           </p14:sldIdLst>
         </p14:section>
-        <p14:section name="⑥ 시장 분석·비즈니스 모델" id="{0f23bb2a-4ce8-2df7-a009-74e93dea819b}">
+        <p14:section name="⑥ 시장 분석·비즈니스 모델" id="{6e95d965-cf68-d8d3-d557-ab818da714c0}">
           <p14:sldIdLst>
             <p14:sldId id="268"/>
             <p14:sldId id="269"/>
             <p14:sldId id="270"/>
           </p14:sldIdLst>
         </p14:section>
-        <p14:section name="⑦ 초기 시장 검증" id="{b48a05d0-e43e-17ff-3cc1-080bd43b2bf9}">
+        <p14:section name="⑦ 초기 시장 검증" id="{01416b1e-bee9-5ee8-8528-40b478a40614}">
           <p14:sldIdLst>
             <p14:sldId id="271"/>
           </p14:sldIdLst>
         </p14:section>
-        <p14:section name="⑧ 향후 계획·팀 역량" id="{108f784f-4f4f-8c3f-ef62-da4748bcd282}">
+        <p14:section name="⑧ 향후 계획·팀 역량" id="{d7c58001-cd2d-c2cc-8146-3fd4feaff0b7}">
           <p14:sldIdLst>
             <p14:sldId id="272"/>
             <p14:sldId id="273"/>

--- a/docs/06_중간발표_PPT.pptx
+++ b/docs/06_중간발표_PPT.pptx
@@ -125,31 +125,31 @@
   <p:extLst>
     <p:ext uri="{521415D9-36F7-43E2-AB2F-B90AF26B5E84}">
       <p14:sectionLst xmlns:p14="http://schemas.microsoft.com/office/powerpoint/2010/main">
-        <p14:section name="① 표지·팀 소개" id="{4e72c584-e189-f720-ef48-c5135617dd0c}">
+        <p14:section name="① 표지·팀 소개" id="{fce89d31-c6f1-27ec-974c-54a75c42af54}">
           <p14:sldIdLst>
             <p14:sldId id="256"/>
             <p14:sldId id="257"/>
           </p14:sldIdLst>
         </p14:section>
-        <p14:section name="② 문제 정의" id="{5b072e54-5912-4794-0d0b-d77da0d69b57}">
+        <p14:section name="② 문제 정의" id="{e436359c-393a-b6f5-3f30-22595e83d87b}">
           <p14:sldIdLst>
             <p14:sldId id="258"/>
             <p14:sldId id="259"/>
           </p14:sldIdLst>
         </p14:section>
-        <p14:section name="③ 솔루션·핵심 가치" id="{6594b607-1845-7d83-c92b-4dc36c5d762a}">
+        <p14:section name="③ 솔루션·핵심 가치" id="{39ae458f-f71f-cda9-fbd5-0257db57b2e1}">
           <p14:sldIdLst>
             <p14:sldId id="260"/>
             <p14:sldId id="261"/>
           </p14:sldIdLst>
         </p14:section>
-        <p14:section name="④ SW 기술 아키텍처" id="{ef3736eb-b41c-28ce-b0c9-ff760c4cd6c6}">
+        <p14:section name="④ SW 기술 아키텍처" id="{3bd3914a-5986-66ec-9e61-aa87aa648563}">
           <p14:sldIdLst>
             <p14:sldId id="262"/>
             <p14:sldId id="263"/>
           </p14:sldIdLst>
         </p14:section>
-        <p14:section name="⑤ 개발 현황·MVP 시연" id="{71a9db5d-f077-5cc2-b5a2-b7e4a0830ded}">
+        <p14:section name="⑤ 개발 현황·MVP 시연" id="{27e775fd-0cf6-15fa-47f4-17620fb837da}">
           <p14:sldIdLst>
             <p14:sldId id="264"/>
             <p14:sldId id="265"/>
@@ -157,19 +157,19 @@
             <p14:sldId id="267"/>
           </p14:sldIdLst>
         </p14:section>
-        <p14:section name="⑥ 시장 분석·비즈니스 모델" id="{6e95d965-cf68-d8d3-d557-ab818da714c0}">
+        <p14:section name="⑥ 시장 분석·비즈니스 모델" id="{efbbbf35-4f8d-7df4-9150-8fd249a4bf12}">
           <p14:sldIdLst>
             <p14:sldId id="268"/>
             <p14:sldId id="269"/>
             <p14:sldId id="270"/>
           </p14:sldIdLst>
         </p14:section>
-        <p14:section name="⑦ 초기 시장 검증" id="{01416b1e-bee9-5ee8-8528-40b478a40614}">
+        <p14:section name="⑦ 초기 시장 검증" id="{2a7850f0-3664-4cf7-5974-e2e8b4ec3767}">
           <p14:sldIdLst>
             <p14:sldId id="271"/>
           </p14:sldIdLst>
         </p14:section>
-        <p14:section name="⑧ 향후 계획·팀 역량" id="{d7c58001-cd2d-c2cc-8146-3fd4feaff0b7}">
+        <p14:section name="⑧ 향후 계획·팀 역량" id="{d91efa97-1abf-e914-a90e-da5883905e41}">
           <p14:sldIdLst>
             <p14:sldId id="272"/>
             <p14:sldId id="273"/>
@@ -1733,7 +1733,7 @@
 · [이지훈] 법률 서비스 아닌가? → 무료, 본인 기록을 정해진 양식에 채울 뿐, 개별 사안 검토 · 대행 없음, 진정은 1350 · 노동포털로 연결만.
 · [손유호] 수익은? → 게임 화면 광고(가설). 운영 비용은 0원. 문서 유료화는 안 한다.
 · [이지훈] 정의서를 개발 중에 썼는데 계획 대비가 의미 있나? → 맞다. 원래 계획은 9월 기획서의 기능 4개(기록 · 비교 · 요청 · 증빙)다. 10/13 정의서는 만들면서 필요해진 것(기록 등록 · 백업)을 더해 8개로 고정하고, 넣지 않을 6개를 정한 문서다. 그 뒤 포함 기능을 늘리지 않았고 뺀 6개는 지금도 없다. 8/8은 "다 했다"가 아니라 "범위를 지켰다"로 읽어 달라.
-· [이지훈] 등록 시각이 출근 시각인가? 인터넷이 없을 때 기록하면? → 아니다. 등록 시각은 확인 번호가 서버에 도착한 시각이고, 보여 주는 것은 "늦어도 이 시각에는 이 내용이 있었다"까지다. 인터넷이 없으면 대기열에 있다가 연결될 때 보내지므로 그만큼 늦어진다. "나중에 입력"한 기록도 입력했을 때 등록되고, 기록 안에 나중에 입력했다는 표시와 사유가 같이 남는다. 출근 시각 자체를 증명하는 것은 아니다.
+· [이지훈] 등록 시각이 출근 시각인가? 인터넷이 없을 때 기록하면? → 아니다. 등록 시각은 확인 번호가 서버에 도착한 시각이고, 보여 주는 것은 "늦어도 이 시각에는 이 내용이 있었다"까지다. 인터넷이 없으면 대기열에 있다가 연결될 때 보내지므로 그만큼 늦어진다. "나중에 입력"한 기록도 입력했을 때 등록되고, 기록에는 나중에 입력했다는 표시와 사유가 같이 남는다. 출근 시각 자체를 증명하는 것은 아니다.
 · [이지훈] 아무 번호나 넣으면? 두 기록이 같은 번호가 될 수 있나? → 확인 페이지는 앞 16자와 64자 전체를 둘 다 받고, 서버에 없는 번호는 등록된 것이 없다고 나온다. 서버 표에서 번호는 중복을 허용하지 않는다. 재료에 기록 번호와 만든 시각이 들어가서 서로 다른 기록이 같은 번호가 될 일은 사실상 없다.
 · [이지훈] 카톡 나에게 보내기로 매일 적으면 같지 않나? → 시각만 보면 카톡이 더 믿을 만하다. 카카오가 찍은 시각이라 우리와 무관하다. 다른 점은 둘이다. 카톡은 고치면 새 메시지가 하나 더 생길 뿐 무엇을 왜 고쳤는지 안 남고, 그 기록으로 계산 · 비교 · 요청 · 증빙 묶음까지 이어지지 않는다. 그래서 카톡에 적던 사람이 첫 타깃이고, 카톡 캡처는 함께 내라고 앱에도 적었다.
 · [이지훈] AI는 어디에 썼나? Claude 문구는 실제로 써 봤나? → 앱 기능으로는 정산 요청 문구 생성 하나이고 선택 사항이다. 배포 앱은 API 키 없이 근무 기록과 계산 내역을 채운 정해진 문장으로 만든다. 기본을 끈 이유는 기록 내용이 폰 밖으로 나가면 개인정보 안내와 동의가 먼저 필요해서다. 키가 없어 Claude 문구를 실제로 돌려 본 적은 아직 없다.

--- a/docs/06_중간발표_PPT.pptx
+++ b/docs/06_중간발표_PPT.pptx
@@ -125,31 +125,31 @@
   <p:extLst>
     <p:ext uri="{521415D9-36F7-43E2-AB2F-B90AF26B5E84}">
       <p14:sectionLst xmlns:p14="http://schemas.microsoft.com/office/powerpoint/2010/main">
-        <p14:section name="① 표지·팀 소개" id="{fce89d31-c6f1-27ec-974c-54a75c42af54}">
+        <p14:section name="① 표지·팀 소개" id="{f53780b8-fe22-615f-045d-83ba86d484af}">
           <p14:sldIdLst>
             <p14:sldId id="256"/>
             <p14:sldId id="257"/>
           </p14:sldIdLst>
         </p14:section>
-        <p14:section name="② 문제 정의" id="{e436359c-393a-b6f5-3f30-22595e83d87b}">
+        <p14:section name="② 문제 정의" id="{f0191486-eb3c-3c79-230a-67522785f184}">
           <p14:sldIdLst>
             <p14:sldId id="258"/>
             <p14:sldId id="259"/>
           </p14:sldIdLst>
         </p14:section>
-        <p14:section name="③ 솔루션·핵심 가치" id="{39ae458f-f71f-cda9-fbd5-0257db57b2e1}">
+        <p14:section name="③ 솔루션·핵심 가치" id="{a82ee068-0c7a-688d-0820-226e2b11866e}">
           <p14:sldIdLst>
             <p14:sldId id="260"/>
             <p14:sldId id="261"/>
           </p14:sldIdLst>
         </p14:section>
-        <p14:section name="④ SW 기술 아키텍처" id="{3bd3914a-5986-66ec-9e61-aa87aa648563}">
+        <p14:section name="④ SW 기술 아키텍처" id="{e2542366-7496-2381-f835-a94273d00f20}">
           <p14:sldIdLst>
             <p14:sldId id="262"/>
             <p14:sldId id="263"/>
           </p14:sldIdLst>
         </p14:section>
-        <p14:section name="⑤ 개발 현황·MVP 시연" id="{27e775fd-0cf6-15fa-47f4-17620fb837da}">
+        <p14:section name="⑤ 개발 현황·MVP 시연" id="{f4f69dec-8014-e2da-dc0c-7f9646c27805}">
           <p14:sldIdLst>
             <p14:sldId id="264"/>
             <p14:sldId id="265"/>
@@ -157,19 +157,19 @@
             <p14:sldId id="267"/>
           </p14:sldIdLst>
         </p14:section>
-        <p14:section name="⑥ 시장 분석·비즈니스 모델" id="{efbbbf35-4f8d-7df4-9150-8fd249a4bf12}">
+        <p14:section name="⑥ 시장 분석·비즈니스 모델" id="{b74bb134-4891-4a20-58bb-51ea095d7564}">
           <p14:sldIdLst>
             <p14:sldId id="268"/>
             <p14:sldId id="269"/>
             <p14:sldId id="270"/>
           </p14:sldIdLst>
         </p14:section>
-        <p14:section name="⑦ 초기 시장 검증" id="{2a7850f0-3664-4cf7-5974-e2e8b4ec3767}">
+        <p14:section name="⑦ 초기 시장 검증" id="{4176ccb1-5af9-9f77-73c6-44fb812744f7}">
           <p14:sldIdLst>
             <p14:sldId id="271"/>
           </p14:sldIdLst>
         </p14:section>
-        <p14:section name="⑧ 향후 계획·팀 역량" id="{d91efa97-1abf-e914-a90e-da5883905e41}">
+        <p14:section name="⑧ 향후 계획·팀 역량" id="{36dc1bca-dd30-29f6-8a56-a917f8c121f6}">
           <p14:sldIdLst>
             <p14:sldId id="272"/>
             <p14:sldId id="273"/>
@@ -21629,7 +21629,7 @@
                             <a:srgbClr val="15171A"/>
                           </a:solidFill>
                         </a:rPr>
-                        <a:t>프론트엔드</a:t>
+                        <a:t>프런트엔드</a:t>
                       </a:r>
                       <a:endParaRPr lang="en-US" sz="1050" dirty="0"/>
                     </a:p>

--- a/docs/06_중간발표_PPT.pptx
+++ b/docs/06_중간발표_PPT.pptx
@@ -125,31 +125,31 @@
   <p:extLst>
     <p:ext uri="{521415D9-36F7-43E2-AB2F-B90AF26B5E84}">
       <p14:sectionLst xmlns:p14="http://schemas.microsoft.com/office/powerpoint/2010/main">
-        <p14:section name="① 표지·팀 소개" id="{f53780b8-fe22-615f-045d-83ba86d484af}">
+        <p14:section name="① 표지·팀 소개" id="{2a56a04b-185b-1184-ee0a-2fe3ba18be6b}">
           <p14:sldIdLst>
             <p14:sldId id="256"/>
             <p14:sldId id="257"/>
           </p14:sldIdLst>
         </p14:section>
-        <p14:section name="② 문제 정의" id="{f0191486-eb3c-3c79-230a-67522785f184}">
+        <p14:section name="② 문제 정의" id="{9184dbb3-81f2-f931-0f56-d6f55755bd1f}">
           <p14:sldIdLst>
             <p14:sldId id="258"/>
             <p14:sldId id="259"/>
           </p14:sldIdLst>
         </p14:section>
-        <p14:section name="③ 솔루션·핵심 가치" id="{a82ee068-0c7a-688d-0820-226e2b11866e}">
+        <p14:section name="③ 솔루션·핵심 가치" id="{aa6f14d5-6117-ea73-6cce-bcccb66fc94e}">
           <p14:sldIdLst>
             <p14:sldId id="260"/>
             <p14:sldId id="261"/>
           </p14:sldIdLst>
         </p14:section>
-        <p14:section name="④ SW 기술 아키텍처" id="{e2542366-7496-2381-f835-a94273d00f20}">
+        <p14:section name="④ SW 기술 아키텍처" id="{51f8c2d9-00bd-f336-dc9a-d61025cc1832}">
           <p14:sldIdLst>
             <p14:sldId id="262"/>
             <p14:sldId id="263"/>
           </p14:sldIdLst>
         </p14:section>
-        <p14:section name="⑤ 개발 현황·MVP 시연" id="{f4f69dec-8014-e2da-dc0c-7f9646c27805}">
+        <p14:section name="⑤ 개발 현황·MVP 시연" id="{f9c886e6-007c-3022-c59c-7cd284dd4469}">
           <p14:sldIdLst>
             <p14:sldId id="264"/>
             <p14:sldId id="265"/>
@@ -157,19 +157,19 @@
             <p14:sldId id="267"/>
           </p14:sldIdLst>
         </p14:section>
-        <p14:section name="⑥ 시장 분석·비즈니스 모델" id="{b74bb134-4891-4a20-58bb-51ea095d7564}">
+        <p14:section name="⑥ 시장 분석·비즈니스 모델" id="{2ea7ca1b-97f3-69ff-4cb1-6085843441a0}">
           <p14:sldIdLst>
             <p14:sldId id="268"/>
             <p14:sldId id="269"/>
             <p14:sldId id="270"/>
           </p14:sldIdLst>
         </p14:section>
-        <p14:section name="⑦ 초기 시장 검증" id="{4176ccb1-5af9-9f77-73c6-44fb812744f7}">
+        <p14:section name="⑦ 초기 시장 검증" id="{d8be92f9-6f7a-6484-6cf1-62036222c5ae}">
           <p14:sldIdLst>
             <p14:sldId id="271"/>
           </p14:sldIdLst>
         </p14:section>
-        <p14:section name="⑧ 향후 계획·팀 역량" id="{36dc1bca-dd30-29f6-8a56-a917f8c121f6}">
+        <p14:section name="⑧ 향후 계획·팀 역량" id="{27ce228b-3b88-6187-1f86-9df231a7deae}">
           <p14:sldIdLst>
             <p14:sldId id="272"/>
             <p14:sldId id="273"/>
@@ -1278,7 +1278,7 @@
           <a:p>
             <a:r>
               <a:rPr lang="en-US" dirty="0"/>
-              <a:t>손유호. 2×2에서 알바가드는 "혼자 쓴다 × 대응까지"에 있습니다. 오른쪽 열은 혼자서는 시작할 수 없는 서비스입니다. 기그는 사장이 가입해야 하고, 진정24는 증거가 먼저 있어야 합니다. 경쟁 서비스 정보는 2026년 9월 각 앱의 공식 소개와 리뷰 기준입니다.</a:t>
+              <a:t>손유호. 첫 사용자로 보는 사람은 하우머치 사용자가 아니라, 카톡 · 메모에 적거나 아예 안 적고 통장 총액만 보는 학생입니다. 하우머치가 비교 칸을 넣으면 따라올 수 있으니, 따라 하기 어려운 쪽(기록 등록)을 키웁니다. 2×2에서 알바가드는 "혼자 쓴다 × 대응까지"에 있습니다. 오른쪽 열은 혼자서는 시작할 수 없는 서비스입니다. 기그는 사장이 가입해야 하고, 진정24는 증거가 먼저 있어야 합니다. 경쟁 서비스 정보는 2026년 9월 각 앱의 공식 소개와 리뷰 기준입니다.</a:t>
             </a:r>
             <a:endParaRPr lang="en-US" dirty="0"/>
           </a:p>
@@ -1366,7 +1366,7 @@
           <a:p>
             <a:r>
               <a:rPr lang="en-US" dirty="0"/>
-              <a:t>손유호. 알바비 앱에 왜 게임이 있나: 출퇴근은 일하는 날마다 누르지만, 돈을 확인하는 건 급여일에 한 번이라, 그 사이에도 앱을 열 이유로 넣었고 그 화면이 광고 자리입니다. 처음엔 근무 중에만 열렸는데 팀원 의견으로 10/25에 조건을 풀고 설정에서 숨길 수 있게 했습니다. 광고 형식은 웹앱이라 배너 · 전면이 기본이고 보상형은 승인이 필요합니다. 2차 구독은 폰을 바꾸거나 잃어버려도 기록이 남게 하는 선택 기능이고, 원하는 사람만 쓰므로 "근무 내용은 폰 안에만" 원칙과 부딪히지 않습니다. 문서를 돈 받고 만들어 주는 건 법적 이유로 하지 않습니다(웹 조사 기준, 전문가 검토 아님). 광고 가설은 설문의 "게임 화면 광고" 문항과 승인 뒤 게임 화면 열람 수로 확인합니다. 운영 비용은 지금 서버 0원 · 배포 0원이라 수익이 0이어도 서비스는 돌아가고, 인건비는 팀 3명입니다.</a:t>
+              <a:t>손유호. 핵심 화면은 신뢰가 핵심이라 광고를 섞지 않습니다. 단가를 모르니 매출 추정은 적지 않았습니다. 정산 문구 · 내용증명 · 증빙 묶음을 돈 받고 만들면 변호사법 · 공인노무사법 문제에 가까워져서 유료화하지 않습니다. 유저 확보는 에브리타임 · 학과 단톡 · 알바 커뮤니티에 링크를 올리고, "주휴수당 계산법" 같은 짧은 영상을 만듭니다. 알바비 앱에 왜 게임이 있나: 출퇴근은 일하는 날마다 누르지만, 돈을 확인하는 건 급여일에 한 번이라, 그 사이에도 앱을 열 이유로 넣었고 그 화면이 광고 자리입니다. 처음엔 근무 중에만 열렸는데 팀원 의견으로 10/25에 조건을 풀고 설정에서 숨길 수 있게 했습니다. 광고 형식은 웹앱이라 배너 · 전면이 기본이고 보상형은 승인이 필요합니다. 2차 구독은 폰을 바꾸거나 잃어버려도 기록이 남게 하는 선택 기능이고, 원하는 사람만 쓰므로 "근무 내용은 폰 안에만" 원칙과 부딪히지 않습니다. 문서를 돈 받고 만들어 주는 건 법적 이유로 하지 않습니다(웹 조사 기준, 전문가 검토 아님). 광고 가설은 설문의 "게임 화면 광고" 문항과 승인 뒤 게임 화면 열람 수로 확인합니다. 운영 비용은 지금 서버 0원 · 배포 0원이라 수익이 0이어도 서비스는 돌아가고, 인건비는 팀 3명입니다.</a:t>
             </a:r>
             <a:endParaRPr lang="en-US" dirty="0"/>
           </a:p>
@@ -1454,7 +1454,7 @@
           <a:p>
             <a:r>
               <a:rPr lang="en-US" dirty="0"/>
-              <a:t>박명진. 가설은 9월 기획서 문장 그대로입니다. 표의 기준은 팀이 정한 목표이지 데이터가 아닙니다. 인터뷰 문항은 설문지 20~24번입니다. 지금까지 들은 것은 정식 조사가 아닙니다: 타깃 사용자 1명이 디자인 시안 12장 중 통장 구성을 골랐고, 링크 설문은 10/23에 공개했습니다. 기말 발표에서 이 표에 결과를 더해 보고합니다. 응답 수는 슬라이드에 적지 않고 당일 아침 결과 페이지에서 읽습니다. 0명이면 0명이라고 말합니다. 다만 당일 아침 응답이 10명 이상이고, 강의실 인터넷이 되고, 교수님 양해를 받았으면 결과 페이지(survey-results.html)를 60초만 띄워 세 문항(주당 근무 시간 · 적게 받은 것 같았던 적 · 매달 받은 금액 직접 넣기)만 읽습니다. 자유 의견은 띄우지 않습니다. 아니면 당일 아침 캡처로 대신합니다. 테스트 응답 2건(10/23)은 미리 지워 둡니다. 결과는 사람 수로만 말하고 %는 30명을 넘을 때만 씁니다. 1행은 의향을 묻는 것이라 한계가 있습니다. 인터뷰 때 앱을 설치하게 하고, 실제로 넣는지는 급여일이 지난 뒤 따로 봅니다(기말 이후까지 걸릴 수 있음). 지인은 호의적으로 답하기 쉬워서 "넣겠다"를 그대로 믿지 않습니다.</a:t>
+              <a:t>박명진. 모집은 학과 · 동아리 단톡, 에브리타임, 그리고 오늘 이 자리(QR)입니다. 인터뷰 5명은 지인 중 지금 알바 중인 사람으로 11/3~11/9에 합니다. 왜 먼저 만들었나: 웹앱이라 빨리 만들 수 있고, 화면을 보여 주며 물어야 답이 정확하다고 봤습니다. 가설은 9월 기획서 문장 그대로입니다. 표의 기준은 팀이 정한 목표이지 데이터가 아닙니다. 인터뷰 문항은 설문지 20~24번입니다. 지금까지 들은 것은 정식 조사가 아닙니다: 타깃 사용자 1명이 디자인 시안 12장 중 통장 구성을 골랐고, 링크 설문은 10/23에 공개했습니다. 기말 발표에서 이 표에 결과를 더해 보고합니다. 응답 수는 슬라이드에 적지 않고 당일 아침 결과 페이지에서 읽습니다. 0명이면 0명이라고 말합니다. 다만 당일 아침 응답이 10명 이상이고, 강의실 인터넷이 되고, 교수님 양해를 받았으면 결과 페이지(survey-results.html)를 60초만 띄워 세 문항(주당 근무 시간 · 적게 받은 것 같았던 적 · 매달 받은 금액 직접 넣기)만 읽습니다. 자유 의견은 띄우지 않습니다. 아니면 당일 아침 캡처로 대신합니다. 테스트 응답 2건(10/23)은 미리 지워 둡니다. 결과는 사람 수로만 말하고 %는 30명을 넘을 때만 씁니다. 1행은 의향을 묻는 것이라 한계가 있습니다. 인터뷰 때 앱을 설치하게 하고, 실제로 넣는지는 급여일이 지난 뒤 따로 봅니다(기말 이후까지 걸릴 수 있음). 지인은 호의적으로 답하기 쉬워서 "넣겠다"를 그대로 믿지 않습니다.</a:t>
             </a:r>
             <a:endParaRPr lang="en-US" dirty="0"/>
           </a:p>
@@ -1919,7 +1919,7 @@
           <a:p>
             <a:r>
               <a:rPr lang="en-US" dirty="0"/>
-              <a:t>세 문제를 숫자로 보여 줍니다. 모두 알바천국 설문이라 "플랫폼 설문"이라는 점을 말하고, 그래서 우리도 직접 설문을 돌리고 있다고 잇습니다. 33.2%는 노동절 수당 안내에 대한 숫자라 "수당 자체가 안내되지 않는다"까지만 말하고, 주휴 · 야간 계산 자신감은 우리 설문 문항으로 직접 묻고 있다고 덧붙입니다.</a:t>
+              <a:t>타깃: 근로계약서가 없거나 사본이 없고, 통장 총액만 확인하고, 사장님께 말을 꺼내기 부담스러워하는 학생입니다. 주 15시간은 주휴수당이 생기는 선입니다. 문제 1: 수당 안내를 못 받는 경우가 많고 주휴 · 야간 계산 기준은 알기 어렵습니다. 계산기는 있어도 넣을 기록이 없습니다. 문제 2: 통장에 들어온 총액만 보고 넘어가고, 계약서가 없어 시급도 증명하기 어렵습니다. 문제 3: 관계 걱정, 작은 금액, 근거 없음이 겹치고, 메모장 기록은 "나중에 지어낸 것 아니냐?" 한마디에 무너집니다. 세 문제를 숫자로 보여 줍니다. 모두 알바천국 설문이라 "플랫폼 설문"이라는 점을 말하고, 그래서 우리도 직접 설문을 돌리고 있다고 잇습니다. 33.2%는 노동절 수당 안내에 대한 숫자라 "수당 자체가 안내되지 않는다"까지만 말하고, 주휴 · 야간 계산 자신감은 우리 설문 문항으로 직접 묻고 있다고 덧붙입니다.</a:t>
             </a:r>
             <a:endParaRPr lang="en-US" dirty="0"/>
           </a:p>
@@ -2183,7 +2183,7 @@
           <a:p>
             <a:r>
               <a:rPr lang="en-US" dirty="0"/>
-              <a:t>세 번째가 따라 하기 어려운 차별점입니다. 기능 하나가 아니라 기록 구조라서, 사유 없이는 못 고치고 삭제해도 흔적이 남고 고치면 다시 등록됩니다. 기존 급여 앱이 넣으려면 사용자가 기록을 마음대로 고치던 방식을 포기해야 합니다. 지금 확인 페이지는 번호의 서버 등록 시각까지 보여 주고, 기록 내용에서 번호를 다시 계산해 맞춰 보는 방법은 기말까지 만듭니다(그래서 12장에서 70%). 근무지 · 시각 · 금액은 서버로 가지 않고, "그날 실제로 일했다"까지는 증명하지 못합니다. 한계는 먼저 말합니다. "법적 효력" 질문이 오면 보장하지 않는다고 답하고, 판단할 자료를 정리해 준다고 말합니다.</a:t>
+              <a:t>1번은 기그와 달리 사장이 가입하지 않아도 된다는 뜻입니다. 2번은 실제 받은 돈과 비교해 차액을 찾고 요청 문구와 증빙 묶음까지 잇는 것으로, 비교한 네 서비스 모두 없습니다. 3번은 누구나 확인 페이지에서 등록 시각을 볼 수 있고, 내용으로 번호를 다시 계산하는 방법은 기말까지 만듭니다. 한계 상자의 "기록 구조"는 사유 없이 못 고침 · 삭제도 흔적 · 고치면 다시 등록입니다. 통장 내역 · 메시지와 함께 내야 힘이 생긴다는 말은 앱의 증빙 문서 맨 아래에도 적혀 있습니다. 법적 효력을 보장한다고 말하지 않고, 근로감독관 · 법원이 판단할 자료를 정리해 준다고 말합니다. 세 번째가 따라 하기 어려운 차별점입니다. 기능 하나가 아니라 기록 구조라서, 사유 없이는 못 고치고 삭제해도 흔적이 남고 고치면 다시 등록됩니다. 기존 급여 앱이 넣으려면 사용자가 기록을 마음대로 고치던 방식을 포기해야 합니다. 지금 확인 페이지는 번호의 서버 등록 시각까지 보여 주고, 기록 내용에서 번호를 다시 계산해 맞춰 보는 방법은 기말까지 만듭니다(그래서 12장에서 70%). 근무지 · 시각 · 금액은 서버로 가지 않고, "그날 실제로 일했다"까지는 증명하지 못합니다. 한계는 먼저 말합니다. "법적 효력" 질문이 오면 보장하지 않는다고 답하고, 판단할 자료를 정리해 준다고 말합니다.</a:t>
             </a:r>
             <a:endParaRPr lang="en-US" dirty="0"/>
           </a:p>
@@ -8292,7 +8292,7 @@
         <p:spPr>
           <a:xfrm>
             <a:off x="5943600" y="1965960"/>
-            <a:ext cx="2743200" cy="2377440"/>
+            <a:ext cx="2743200" cy="1280160"/>
           </a:xfrm>
           <a:prstGeom prst="rect">
             <a:avLst/>
@@ -8308,42 +8308,14 @@
               <a:buNone/>
             </a:pPr>
             <a:r>
-              <a:rPr lang="en-US" sz="1050" dirty="0">
+              <a:rPr lang="en-US" sz="1200" dirty="0">
                 <a:solidFill>
                   <a:schemeClr val="tx1"/>
                 </a:solidFill>
               </a:rPr>
-              <a:t>하우머치 · 계산기는 계산에서 멈추고, 기그는 사장이 있어야 하고, 진정24는 증거가 있어야 한다. 그래서 왼쪽 위 칸은 알바가드뿐이다.</a:t>
-            </a:r>
-            <a:endParaRPr lang="en-US" sz="1050" dirty="0"/>
-          </a:p>
-          <a:p>
-            <a:pPr indent="0" marL="0">
-              <a:buNone/>
-            </a:pPr>
-            <a:r>
-              <a:rPr lang="en-US" sz="600" dirty="0">
-                <a:solidFill>
-                  <a:schemeClr val="tx1"/>
-                </a:solidFill>
-              </a:rPr>
-              <a:t> </a:t>
-            </a:r>
-            <a:endParaRPr lang="en-US" sz="1050" dirty="0"/>
-          </a:p>
-          <a:p>
-            <a:pPr indent="0" marL="0">
-              <a:buNone/>
-            </a:pPr>
-            <a:r>
-              <a:rPr lang="en-US" sz="1050" dirty="0">
-                <a:solidFill>
-                  <a:schemeClr val="tx1"/>
-                </a:solidFill>
-              </a:rPr>
-              <a:t>첫 사용자로 보는 사람은 하우머치 사용자가 아니다. 카톡 · 메모에 적거나 아예 안 적고 통장 총액만 보는 학생이다. 하우머치가 비교 칸을 넣으면 따라올 수 있으니, 따라 하기 어려운 쪽(기록 등록)을 키운다.</a:t>
-            </a:r>
-            <a:endParaRPr lang="en-US" sz="1050" dirty="0"/>
+              <a:t>계산기는 계산에서 멈추고, 기그는 사장이, 진정24는 증거가 있어야 시작한다.</a:t>
+            </a:r>
+            <a:endParaRPr lang="en-US" sz="1200" dirty="0"/>
           </a:p>
         </p:txBody>
       </p:sp>
@@ -8538,7 +8510,7 @@
         <p:spPr>
           <a:xfrm>
             <a:off x="457200" y="1508760"/>
-            <a:ext cx="6583680" cy="585216"/>
+            <a:ext cx="6583680" cy="512064"/>
           </a:xfrm>
           <a:prstGeom prst="rect">
             <a:avLst/>
@@ -8554,28 +8526,14 @@
               <a:buNone/>
             </a:pPr>
             <a:r>
-              <a:rPr lang="en-US" sz="1300" b="1" dirty="0">
+              <a:rPr lang="en-US" sz="1400" b="1" dirty="0">
                 <a:solidFill>
                   <a:schemeClr val="tx1"/>
                 </a:solidFill>
               </a:rPr>
               <a:t>핵심 화면: 기록 · 비교 · 요청 · 증빙</a:t>
             </a:r>
-            <a:endParaRPr lang="en-US" sz="1300" dirty="0"/>
-          </a:p>
-          <a:p>
-            <a:pPr indent="0" marL="0">
-              <a:buNone/>
-            </a:pPr>
-            <a:r>
-              <a:rPr lang="en-US" sz="1050" dirty="0">
-                <a:solidFill>
-                  <a:schemeClr val="accent5"/>
-                </a:solidFill>
-              </a:rPr>
-              <a:t>신뢰가 핵심인 화면에는 광고를 섞지 않는다</a:t>
-            </a:r>
-            <a:endParaRPr lang="en-US" sz="1300" dirty="0"/>
+            <a:endParaRPr lang="en-US" sz="1400" dirty="0"/>
           </a:p>
         </p:txBody>
       </p:sp>
@@ -8588,7 +8546,7 @@
         <p:spPr>
           <a:xfrm>
             <a:off x="7040880" y="1508760"/>
-            <a:ext cx="1645920" cy="585216"/>
+            <a:ext cx="1645920" cy="512064"/>
           </a:xfrm>
           <a:prstGeom prst="rect">
             <a:avLst/>
@@ -8604,14 +8562,14 @@
               <a:buNone/>
             </a:pPr>
             <a:r>
-              <a:rPr lang="en-US" sz="1300" b="1" dirty="0">
+              <a:rPr lang="en-US" sz="1400" b="1" dirty="0">
                 <a:solidFill>
                   <a:schemeClr val="accent2"/>
                 </a:solidFill>
               </a:rPr>
               <a:t>무료 · 광고 없음</a:t>
             </a:r>
-            <a:endParaRPr lang="en-US" sz="1300" dirty="0"/>
+            <a:endParaRPr lang="en-US" sz="1400" dirty="0"/>
           </a:p>
         </p:txBody>
       </p:sp>
@@ -8623,7 +8581,7 @@
         </p:nvSpPr>
         <p:spPr>
           <a:xfrm>
-            <a:off x="457200" y="2093976"/>
+            <a:off x="457200" y="2020824"/>
             <a:ext cx="8229600" cy="0"/>
           </a:xfrm>
           <a:prstGeom prst="line">
@@ -8646,8 +8604,8 @@
         </p:nvSpPr>
         <p:spPr>
           <a:xfrm>
-            <a:off x="457200" y="2093976"/>
-            <a:ext cx="6583680" cy="585216"/>
+            <a:off x="457200" y="2020824"/>
+            <a:ext cx="6583680" cy="512064"/>
           </a:xfrm>
           <a:prstGeom prst="rect">
             <a:avLst/>
@@ -8663,28 +8621,14 @@
               <a:buNone/>
             </a:pPr>
             <a:r>
-              <a:rPr lang="en-US" sz="1300" b="1" dirty="0">
+              <a:rPr lang="en-US" sz="1400" b="1" dirty="0">
                 <a:solidFill>
                   <a:schemeClr val="tx1"/>
                 </a:solidFill>
               </a:rPr>
               <a:t>1차 (가설): 쉬는 틈 게임 화면 광고</a:t>
             </a:r>
-            <a:endParaRPr lang="en-US" sz="1300" dirty="0"/>
-          </a:p>
-          <a:p>
-            <a:pPr indent="0" marL="0">
-              <a:buNone/>
-            </a:pPr>
-            <a:r>
-              <a:rPr lang="en-US" sz="1050" dirty="0">
-                <a:solidFill>
-                  <a:schemeClr val="accent5"/>
-                </a:solidFill>
-              </a:rPr>
-              <a:t>웹앱이라 배너 · 전면이 기본, 보상형은 승인 뒤. 단가를 모르니 매출 추정은 적지 않는다</a:t>
-            </a:r>
-            <a:endParaRPr lang="en-US" sz="1300" dirty="0"/>
+            <a:endParaRPr lang="en-US" sz="1400" dirty="0"/>
           </a:p>
         </p:txBody>
       </p:sp>
@@ -8696,8 +8640,8 @@
         </p:nvSpPr>
         <p:spPr>
           <a:xfrm>
-            <a:off x="7040880" y="2093976"/>
-            <a:ext cx="1645920" cy="585216"/>
+            <a:off x="7040880" y="2020824"/>
+            <a:ext cx="1645920" cy="512064"/>
           </a:xfrm>
           <a:prstGeom prst="rect">
             <a:avLst/>
@@ -8713,14 +8657,14 @@
               <a:buNone/>
             </a:pPr>
             <a:r>
-              <a:rPr lang="en-US" sz="1300" b="1" dirty="0">
+              <a:rPr lang="en-US" sz="1400" b="1" dirty="0">
                 <a:solidFill>
                   <a:schemeClr val="tx2"/>
                 </a:solidFill>
               </a:rPr>
               <a:t>게임 화면만</a:t>
             </a:r>
-            <a:endParaRPr lang="en-US" sz="1300" dirty="0"/>
+            <a:endParaRPr lang="en-US" sz="1400" dirty="0"/>
           </a:p>
         </p:txBody>
       </p:sp>
@@ -8732,7 +8676,7 @@
         </p:nvSpPr>
         <p:spPr>
           <a:xfrm>
-            <a:off x="457200" y="2679192"/>
+            <a:off x="457200" y="2532888"/>
             <a:ext cx="8229600" cy="0"/>
           </a:xfrm>
           <a:prstGeom prst="line">
@@ -8755,8 +8699,8 @@
         </p:nvSpPr>
         <p:spPr>
           <a:xfrm>
-            <a:off x="457200" y="2679192"/>
-            <a:ext cx="6583680" cy="585216"/>
+            <a:off x="457200" y="2532888"/>
+            <a:ext cx="6583680" cy="512064"/>
           </a:xfrm>
           <a:prstGeom prst="rect">
             <a:avLst/>
@@ -8772,28 +8716,14 @@
               <a:buNone/>
             </a:pPr>
             <a:r>
-              <a:rPr lang="en-US" sz="1300" b="1" dirty="0">
+              <a:rPr lang="en-US" sz="1400" b="1" dirty="0">
                 <a:solidFill>
                   <a:schemeClr val="tx1"/>
                 </a:solidFill>
               </a:rPr>
-              <a:t>2차 (후보): 편의 기능 구독</a:t>
-            </a:r>
-            <a:endParaRPr lang="en-US" sz="1300" dirty="0"/>
-          </a:p>
-          <a:p>
-            <a:pPr indent="0" marL="0">
-              <a:buNone/>
-            </a:pPr>
-            <a:r>
-              <a:rPr lang="en-US" sz="1050" dirty="0">
-                <a:solidFill>
-                  <a:schemeClr val="accent5"/>
-                </a:solidFill>
-              </a:rPr>
-              <a:t>폰을 바꾸거나 잃어버려도 기록이 남게 하는 선택 기능 (동기화 · 자동 백업)</a:t>
-            </a:r>
-            <a:endParaRPr lang="en-US" sz="1300" dirty="0"/>
+              <a:t>2차 (후보): 동기화 · 자동 백업 구독</a:t>
+            </a:r>
+            <a:endParaRPr lang="en-US" sz="1400" dirty="0"/>
           </a:p>
         </p:txBody>
       </p:sp>
@@ -8805,8 +8735,8 @@
         </p:nvSpPr>
         <p:spPr>
           <a:xfrm>
-            <a:off x="7040880" y="2679192"/>
-            <a:ext cx="1645920" cy="585216"/>
+            <a:off x="7040880" y="2532888"/>
+            <a:ext cx="1645920" cy="512064"/>
           </a:xfrm>
           <a:prstGeom prst="rect">
             <a:avLst/>
@@ -8822,14 +8752,14 @@
               <a:buNone/>
             </a:pPr>
             <a:r>
-              <a:rPr lang="en-US" sz="1300" b="1" dirty="0">
+              <a:rPr lang="en-US" sz="1400" b="1" dirty="0">
                 <a:solidFill>
                   <a:schemeClr val="tx2"/>
                 </a:solidFill>
               </a:rPr>
               <a:t>구독</a:t>
             </a:r>
-            <a:endParaRPr lang="en-US" sz="1300" dirty="0"/>
+            <a:endParaRPr lang="en-US" sz="1400" dirty="0"/>
           </a:p>
         </p:txBody>
       </p:sp>
@@ -8841,7 +8771,7 @@
         </p:nvSpPr>
         <p:spPr>
           <a:xfrm>
-            <a:off x="457200" y="3264408"/>
+            <a:off x="457200" y="3044952"/>
             <a:ext cx="8229600" cy="0"/>
           </a:xfrm>
           <a:prstGeom prst="line">
@@ -8864,8 +8794,8 @@
         </p:nvSpPr>
         <p:spPr>
           <a:xfrm>
-            <a:off x="457200" y="3264408"/>
-            <a:ext cx="6583680" cy="585216"/>
+            <a:off x="457200" y="3044952"/>
+            <a:ext cx="6583680" cy="512064"/>
           </a:xfrm>
           <a:prstGeom prst="rect">
             <a:avLst/>
@@ -8881,28 +8811,14 @@
               <a:buNone/>
             </a:pPr>
             <a:r>
-              <a:rPr lang="en-US" sz="1300" b="1" dirty="0">
+              <a:rPr lang="en-US" sz="1400" b="1" dirty="0">
                 <a:solidFill>
                   <a:schemeClr val="accent3"/>
                 </a:solidFill>
               </a:rPr>
               <a:t>하지 않는 것: 정산 문구 · 내용증명 · 증빙 묶음 유료화</a:t>
             </a:r>
-            <a:endParaRPr lang="en-US" sz="1300" dirty="0"/>
-          </a:p>
-          <a:p>
-            <a:pPr indent="0" marL="0">
-              <a:buNone/>
-            </a:pPr>
-            <a:r>
-              <a:rPr lang="en-US" sz="1050" dirty="0">
-                <a:solidFill>
-                  <a:schemeClr val="accent5"/>
-                </a:solidFill>
-              </a:rPr>
-              <a:t>돈을 받고 문서를 만들면 변호사법 · 공인노무사법 문제에 가까워진다</a:t>
-            </a:r>
-            <a:endParaRPr lang="en-US" sz="1300" dirty="0"/>
+            <a:endParaRPr lang="en-US" sz="1400" dirty="0"/>
           </a:p>
         </p:txBody>
       </p:sp>
@@ -8914,8 +8830,8 @@
         </p:nvSpPr>
         <p:spPr>
           <a:xfrm>
-            <a:off x="7040880" y="3264408"/>
-            <a:ext cx="1645920" cy="585216"/>
+            <a:off x="7040880" y="3044952"/>
+            <a:ext cx="1645920" cy="512064"/>
           </a:xfrm>
           <a:prstGeom prst="rect">
             <a:avLst/>
@@ -8931,14 +8847,14 @@
               <a:buNone/>
             </a:pPr>
             <a:r>
-              <a:rPr lang="en-US" sz="1300" b="1" dirty="0">
+              <a:rPr lang="en-US" sz="1400" b="1" dirty="0">
                 <a:solidFill>
                   <a:schemeClr val="accent3"/>
                 </a:solidFill>
               </a:rPr>
               <a:t>유료화 안 함</a:t>
             </a:r>
-            <a:endParaRPr lang="en-US" sz="1300" dirty="0"/>
+            <a:endParaRPr lang="en-US" sz="1400" dirty="0"/>
           </a:p>
         </p:txBody>
       </p:sp>
@@ -8950,7 +8866,7 @@
         </p:nvSpPr>
         <p:spPr>
           <a:xfrm>
-            <a:off x="457200" y="3849624"/>
+            <a:off x="457200" y="3557016"/>
             <a:ext cx="8229600" cy="0"/>
           </a:xfrm>
           <a:prstGeom prst="line">
@@ -8973,7 +8889,7 @@
         </p:nvSpPr>
         <p:spPr>
           <a:xfrm>
-            <a:off x="457200" y="4023360"/>
+            <a:off x="457200" y="3794760"/>
             <a:ext cx="1188720" cy="320040"/>
           </a:xfrm>
           <a:prstGeom prst="rect">
@@ -9009,7 +8925,7 @@
         </p:nvSpPr>
         <p:spPr>
           <a:xfrm>
-            <a:off x="1645920" y="4023360"/>
+            <a:off x="1645920" y="3794760"/>
             <a:ext cx="7040880" cy="347472"/>
           </a:xfrm>
           <a:prstGeom prst="rect">
@@ -9031,7 +8947,7 @@
                   <a:schemeClr val="tx1"/>
                 </a:solidFill>
               </a:rPr>
-              <a:t>에브리타임 · 학과 단톡 · 알바 커뮤니티에 링크를 올린다. "주휴수당 계산법" 짧은 영상도 만든다</a:t>
+              <a:t>에브리타임 · 학과 단톡 · 알바 커뮤니티에 링크, 짧은 영상</a:t>
             </a:r>
             <a:endParaRPr lang="en-US" sz="1100" dirty="0"/>
           </a:p>
@@ -9045,7 +8961,7 @@
         </p:nvSpPr>
         <p:spPr>
           <a:xfrm>
-            <a:off x="457200" y="4407408"/>
+            <a:off x="457200" y="4206240"/>
             <a:ext cx="1188720" cy="320040"/>
           </a:xfrm>
           <a:prstGeom prst="rect">
@@ -9081,7 +8997,7 @@
         </p:nvSpPr>
         <p:spPr>
           <a:xfrm>
-            <a:off x="1645920" y="4407408"/>
+            <a:off x="1645920" y="4206240"/>
             <a:ext cx="7040880" cy="320040"/>
           </a:xfrm>
           <a:prstGeom prst="rect">
@@ -9317,7 +9233,7 @@
           </p:nvPr>
         </p:nvGraphicFramePr>
         <p:xfrm>
-          <a:off x="457200" y="1572768"/>
+          <a:off x="457200" y="1691640"/>
           <a:ext cx="8229600" cy="914400"/>
         </p:xfrm>
         <a:graphic>
@@ -9329,7 +9245,7 @@
                 <a:gridCol w="3108960"/>
                 <a:gridCol w="2377440"/>
               </a:tblGrid>
-              <a:tr h="292608">
+              <a:tr h="384048">
                 <a:tc>
                   <a:txBody>
                     <a:bodyPr/>
@@ -9339,14 +9255,14 @@
                         <a:buNone/>
                       </a:pPr>
                       <a:r>
-                        <a:rPr lang="en-US" sz="1000" b="1" dirty="0">
+                        <a:rPr lang="en-US" sz="1100" b="1" dirty="0">
                           <a:solidFill>
                             <a:srgbClr val="5D636D"/>
                           </a:solidFill>
                         </a:rPr>
                         <a:t>확인할 것</a:t>
                       </a:r>
-                      <a:endParaRPr lang="en-US" sz="1000" dirty="0"/>
+                      <a:endParaRPr lang="en-US" sz="1100" dirty="0"/>
                     </a:p>
                   </a:txBody>
                   <a:tcPr marL="73152" marR="73152" marT="18288" marB="18288" anchor="ctr">
@@ -9400,14 +9316,14 @@
                         <a:buNone/>
                       </a:pPr>
                       <a:r>
-                        <a:rPr lang="en-US" sz="1000" b="1" dirty="0">
+                        <a:rPr lang="en-US" sz="1100" b="1" dirty="0">
                           <a:solidFill>
                             <a:srgbClr val="5D636D"/>
                           </a:solidFill>
                         </a:rPr>
                         <a:t>어떻게 · 기준 (팀이 정함)</a:t>
                       </a:r>
-                      <a:endParaRPr lang="en-US" sz="1000" dirty="0"/>
+                      <a:endParaRPr lang="en-US" sz="1100" dirty="0"/>
                     </a:p>
                   </a:txBody>
                   <a:tcPr marL="73152" marR="73152" marT="18288" marB="18288" anchor="ctr">
@@ -9461,14 +9377,14 @@
                         <a:buNone/>
                       </a:pPr>
                       <a:r>
-                        <a:rPr lang="en-US" sz="1000" b="1" dirty="0">
+                        <a:rPr lang="en-US" sz="1100" b="1" dirty="0">
                           <a:solidFill>
                             <a:srgbClr val="5D636D"/>
                           </a:solidFill>
                         </a:rPr>
                         <a:t>못 미치면</a:t>
                       </a:r>
-                      <a:endParaRPr lang="en-US" sz="1000" dirty="0"/>
+                      <a:endParaRPr lang="en-US" sz="1100" dirty="0"/>
                     </a:p>
                   </a:txBody>
                   <a:tcPr marL="73152" marR="73152" marT="18288" marB="18288" anchor="ctr">
@@ -9514,7 +9430,7 @@
                   </a:tcPr>
                 </a:tc>
               </a:tr>
-              <a:tr h="347472">
+              <a:tr h="475488">
                 <a:tc>
                   <a:txBody>
                     <a:bodyPr/>
@@ -9524,14 +9440,14 @@
                         <a:buNone/>
                       </a:pPr>
                       <a:r>
-                        <a:rPr lang="en-US" sz="1050" b="1" dirty="0">
+                        <a:rPr lang="en-US" sz="1200" b="1" dirty="0">
                           <a:solidFill>
                             <a:srgbClr val="15171A"/>
                           </a:solidFill>
                         </a:rPr>
                         <a:t>매달 받은 금액을 직접 넣는다</a:t>
                       </a:r>
-                      <a:endParaRPr lang="en-US" sz="1050" dirty="0"/>
+                      <a:endParaRPr lang="en-US" sz="1200" dirty="0"/>
                     </a:p>
                   </a:txBody>
                   <a:tcPr marL="73152" marR="73152" marT="18288" marB="18288" anchor="ctr">
@@ -9582,14 +9498,14 @@
                         <a:buNone/>
                       </a:pPr>
                       <a:r>
-                        <a:rPr lang="en-US" sz="1050" dirty="0">
+                        <a:rPr lang="en-US" sz="1200" dirty="0">
                           <a:solidFill>
                             <a:srgbClr val="15171A"/>
                           </a:solidFill>
                         </a:rPr>
                         <a:t>인터뷰 5명 + 설문 · 5명 중 3명 "넣겠다"</a:t>
                       </a:r>
-                      <a:endParaRPr lang="en-US" sz="1050" dirty="0"/>
+                      <a:endParaRPr lang="en-US" sz="1200" dirty="0"/>
                     </a:p>
                   </a:txBody>
                   <a:tcPr marL="73152" marR="73152" marT="18288" marB="18288" anchor="ctr">
@@ -9640,14 +9556,14 @@
                         <a:buNone/>
                       </a:pPr>
                       <a:r>
-                        <a:rPr lang="en-US" sz="1050" dirty="0">
+                        <a:rPr lang="en-US" sz="1200" dirty="0">
                           <a:solidFill>
                             <a:srgbClr val="15171A"/>
                           </a:solidFill>
                         </a:rPr>
                         <a:t>입금 문자 자동 인식을 앞당긴다</a:t>
                       </a:r>
-                      <a:endParaRPr lang="en-US" sz="1050" dirty="0"/>
+                      <a:endParaRPr lang="en-US" sz="1200" dirty="0"/>
                     </a:p>
                   </a:txBody>
                   <a:tcPr marL="73152" marR="73152" marT="18288" marB="18288" anchor="ctr">
@@ -9690,7 +9606,7 @@
                   </a:tcPr>
                 </a:tc>
               </a:tr>
-              <a:tr h="347472">
+              <a:tr h="475488">
                 <a:tc>
                   <a:txBody>
                     <a:bodyPr/>
@@ -9700,14 +9616,14 @@
                         <a:buNone/>
                       </a:pPr>
                       <a:r>
-                        <a:rPr lang="en-US" sz="1050" b="1" dirty="0">
+                        <a:rPr lang="en-US" sz="1200" b="1" dirty="0">
                           <a:solidFill>
                             <a:srgbClr val="15171A"/>
                           </a:solidFill>
                         </a:rPr>
                         <a:t>요청 문구를 실제로 보낼 수 있다</a:t>
                       </a:r>
-                      <a:endParaRPr lang="en-US" sz="1050" dirty="0"/>
+                      <a:endParaRPr lang="en-US" sz="1200" dirty="0"/>
                     </a:p>
                   </a:txBody>
                   <a:tcPr marL="73152" marR="73152" marT="18288" marB="18288" anchor="ctr">
@@ -9758,14 +9674,14 @@
                         <a:buNone/>
                       </a:pPr>
                       <a:r>
-                        <a:rPr lang="en-US" sz="1050" dirty="0">
+                        <a:rPr lang="en-US" sz="1200" dirty="0">
                           <a:solidFill>
                             <a:srgbClr val="15171A"/>
                           </a:solidFill>
                         </a:rPr>
                         <a:t>인터뷰(문구를 보여 주고) · 5명 중 3명</a:t>
                       </a:r>
-                      <a:endParaRPr lang="en-US" sz="1050" dirty="0"/>
+                      <a:endParaRPr lang="en-US" sz="1200" dirty="0"/>
                     </a:p>
                   </a:txBody>
                   <a:tcPr marL="73152" marR="73152" marT="18288" marB="18288" anchor="ctr">
@@ -9816,14 +9732,14 @@
                         <a:buNone/>
                       </a:pPr>
                       <a:r>
-                        <a:rPr lang="en-US" sz="1050" dirty="0">
+                        <a:rPr lang="en-US" sz="1200" dirty="0">
                           <a:solidFill>
                             <a:srgbClr val="15171A"/>
                           </a:solidFill>
                         </a:rPr>
                         <a:t>문구 톤 · 단계를 다시 짠다</a:t>
                       </a:r>
-                      <a:endParaRPr lang="en-US" sz="1050" dirty="0"/>
+                      <a:endParaRPr lang="en-US" sz="1200" dirty="0"/>
                     </a:p>
                   </a:txBody>
                   <a:tcPr marL="73152" marR="73152" marT="18288" marB="18288" anchor="ctr">
@@ -9866,7 +9782,7 @@
                   </a:tcPr>
                 </a:tc>
               </a:tr>
-              <a:tr h="347472">
+              <a:tr h="475488">
                 <a:tc>
                   <a:txBody>
                     <a:bodyPr/>
@@ -9876,14 +9792,14 @@
                         <a:buNone/>
                       </a:pPr>
                       <a:r>
-                        <a:rPr lang="en-US" sz="1050" b="1" dirty="0">
+                        <a:rPr lang="en-US" sz="1200" b="1" dirty="0">
                           <a:solidFill>
                             <a:srgbClr val="15171A"/>
                           </a:solidFill>
                         </a:rPr>
                         <a:t>확인 번호 설명이 이해된다</a:t>
                       </a:r>
-                      <a:endParaRPr lang="en-US" sz="1050" dirty="0"/>
+                      <a:endParaRPr lang="en-US" sz="1200" dirty="0"/>
                     </a:p>
                   </a:txBody>
                   <a:tcPr marL="73152" marR="73152" marT="18288" marB="18288" anchor="ctr">
@@ -9934,14 +9850,14 @@
                         <a:buNone/>
                       </a:pPr>
                       <a:r>
-                        <a:rPr lang="en-US" sz="1050" dirty="0">
+                        <a:rPr lang="en-US" sz="1200" dirty="0">
                           <a:solidFill>
                             <a:srgbClr val="15171A"/>
                           </a:solidFill>
                         </a:rPr>
                         <a:t>인터뷰 · 5명 중 4명</a:t>
                       </a:r>
-                      <a:endParaRPr lang="en-US" sz="1050" dirty="0"/>
+                      <a:endParaRPr lang="en-US" sz="1200" dirty="0"/>
                     </a:p>
                   </a:txBody>
                   <a:tcPr marL="73152" marR="73152" marT="18288" marB="18288" anchor="ctr">
@@ -9992,14 +9908,14 @@
                         <a:buNone/>
                       </a:pPr>
                       <a:r>
-                        <a:rPr lang="en-US" sz="1050" dirty="0">
+                        <a:rPr lang="en-US" sz="1200" dirty="0">
                           <a:solidFill>
                             <a:srgbClr val="15171A"/>
                           </a:solidFill>
                         </a:rPr>
                         <a:t>설정 · 증빙 문구를 고친다</a:t>
                       </a:r>
-                      <a:endParaRPr lang="en-US" sz="1050" dirty="0"/>
+                      <a:endParaRPr lang="en-US" sz="1200" dirty="0"/>
                     </a:p>
                   </a:txBody>
                   <a:tcPr marL="73152" marR="73152" marT="18288" marB="18288" anchor="ctr">
@@ -10042,7 +9958,7 @@
                   </a:tcPr>
                 </a:tc>
               </a:tr>
-              <a:tr h="347472">
+              <a:tr h="475488">
                 <a:tc>
                   <a:txBody>
                     <a:bodyPr/>
@@ -10052,14 +9968,14 @@
                         <a:buNone/>
                       </a:pPr>
                       <a:r>
-                        <a:rPr lang="en-US" sz="1050" b="1" dirty="0">
+                        <a:rPr lang="en-US" sz="1200" b="1" dirty="0">
                           <a:solidFill>
                             <a:srgbClr val="15171A"/>
                           </a:solidFill>
                         </a:rPr>
                         <a:t>타깃 중 주 15시간 이상이 다수다</a:t>
                       </a:r>
-                      <a:endParaRPr lang="en-US" sz="1050" dirty="0"/>
+                      <a:endParaRPr lang="en-US" sz="1200" dirty="0"/>
                     </a:p>
                   </a:txBody>
                   <a:tcPr marL="73152" marR="73152" marT="18288" marB="18288" anchor="ctr">
@@ -10110,14 +10026,14 @@
                         <a:buNone/>
                       </a:pPr>
                       <a:r>
-                        <a:rPr lang="en-US" sz="1050" dirty="0">
+                        <a:rPr lang="en-US" sz="1200" dirty="0">
                           <a:solidFill>
                             <a:srgbClr val="15171A"/>
                           </a:solidFill>
                         </a:rPr>
                         <a:t>설문 · 30명 넘으면, 알바 중 반 이상</a:t>
                       </a:r>
-                      <a:endParaRPr lang="en-US" sz="1050" dirty="0"/>
+                      <a:endParaRPr lang="en-US" sz="1200" dirty="0"/>
                     </a:p>
                   </a:txBody>
                   <a:tcPr marL="73152" marR="73152" marT="18288" marB="18288" anchor="ctr">
@@ -10168,14 +10084,14 @@
                         <a:buNone/>
                       </a:pPr>
                       <a:r>
-                        <a:rPr lang="en-US" sz="1050" dirty="0">
+                        <a:rPr lang="en-US" sz="1200" dirty="0">
                           <a:solidFill>
                             <a:srgbClr val="15171A"/>
                           </a:solidFill>
                         </a:rPr>
                         <a:t>주휴수당 중심 메시지를 바꾼다</a:t>
                       </a:r>
-                      <a:endParaRPr lang="en-US" sz="1050" dirty="0"/>
+                      <a:endParaRPr lang="en-US" sz="1200" dirty="0"/>
                     </a:p>
                   </a:txBody>
                   <a:tcPr marL="73152" marR="73152" marT="18288" marB="18288" anchor="ctr">
@@ -10218,7 +10134,7 @@
                   </a:tcPr>
                 </a:tc>
               </a:tr>
-              <a:tr h="347472">
+              <a:tr h="475488">
                 <a:tc>
                   <a:txBody>
                     <a:bodyPr/>
@@ -10228,14 +10144,14 @@
                         <a:buNone/>
                       </a:pPr>
                       <a:r>
-                        <a:rPr lang="en-US" sz="1050" b="1" dirty="0">
+                        <a:rPr lang="en-US" sz="1200" b="1" dirty="0">
                           <a:solidFill>
                             <a:srgbClr val="15171A"/>
                           </a:solidFill>
                         </a:rPr>
                         <a:t>게임 화면 광고를 받아들인다</a:t>
                       </a:r>
-                      <a:endParaRPr lang="en-US" sz="1050" dirty="0"/>
+                      <a:endParaRPr lang="en-US" sz="1200" dirty="0"/>
                     </a:p>
                   </a:txBody>
                   <a:tcPr marL="73152" marR="73152" marT="18288" marB="18288" anchor="ctr">
@@ -10286,14 +10202,14 @@
                         <a:buNone/>
                       </a:pPr>
                       <a:r>
-                        <a:rPr lang="en-US" sz="1050" dirty="0">
+                        <a:rPr lang="en-US" sz="1200" dirty="0">
                           <a:solidFill>
                             <a:srgbClr val="15171A"/>
                           </a:solidFill>
                         </a:rPr>
                         <a:t>설문 + 인터뷰 · "싫다"가 반 미만</a:t>
                       </a:r>
-                      <a:endParaRPr lang="en-US" sz="1050" dirty="0"/>
+                      <a:endParaRPr lang="en-US" sz="1200" dirty="0"/>
                     </a:p>
                   </a:txBody>
                   <a:tcPr marL="73152" marR="73152" marT="18288" marB="18288" anchor="ctr">
@@ -10344,14 +10260,14 @@
                         <a:buNone/>
                       </a:pPr>
                       <a:r>
-                        <a:rPr lang="en-US" sz="1050" dirty="0">
+                        <a:rPr lang="en-US" sz="1200" dirty="0">
                           <a:solidFill>
                             <a:srgbClr val="15171A"/>
                           </a:solidFill>
                         </a:rPr>
                         <a:t>11/23 광고 대신 새 게임으로</a:t>
                       </a:r>
-                      <a:endParaRPr lang="en-US" sz="1050" dirty="0"/>
+                      <a:endParaRPr lang="en-US" sz="1200" dirty="0"/>
                     </a:p>
                   </a:txBody>
                   <a:tcPr marL="73152" marR="73152" marT="18288" marB="18288" anchor="ctr">
@@ -10398,124 +10314,6 @@
           </a:graphicData>
         </a:graphic>
       </p:graphicFrame>
-      <p:sp>
-        <p:nvSpPr>
-          <p:cNvPr id="6" name="Text 3"/>
-          <p:cNvSpPr txBox="1"/>
-          <p:nvPr/>
-        </p:nvSpPr>
-        <p:spPr>
-          <a:xfrm>
-            <a:off x="457200" y="3703320"/>
-            <a:ext cx="8229600" cy="384048"/>
-          </a:xfrm>
-          <a:prstGeom prst="rect">
-            <a:avLst/>
-          </a:prstGeom>
-          <a:noFill/>
-          <a:ln/>
-        </p:spPr>
-        <p:txBody>
-          <a:bodyPr wrap="square" lIns="0" tIns="0" rIns="0" bIns="0" rtlCol="0" anchor="ctr"/>
-          <a:lstStyle/>
-          <a:p>
-            <a:pPr indent="0" marL="0">
-              <a:buNone/>
-            </a:pPr>
-            <a:r>
-              <a:rPr lang="en-US" sz="1050" dirty="0">
-                <a:solidFill>
-                  <a:schemeClr val="tx1"/>
-                </a:solidFill>
-              </a:rPr>
-              <a:t>모집: 학과 · 동아리 단톡, 에브리타임, 오늘 이 자리(QR). 인터뷰 5명은 지인 중 알바 중인 사람, 11/3~11/9</a:t>
-            </a:r>
-            <a:endParaRPr lang="en-US" sz="1050" dirty="0"/>
-          </a:p>
-        </p:txBody>
-      </p:sp>
-      <p:sp>
-        <p:nvSpPr>
-          <p:cNvPr id="7" name="Shape 4"/>
-          <p:cNvSpPr/>
-          <p:nvPr/>
-        </p:nvSpPr>
-        <p:spPr>
-          <a:xfrm>
-            <a:off x="457200" y="4087368"/>
-            <a:ext cx="8229600" cy="0"/>
-          </a:xfrm>
-          <a:prstGeom prst="line">
-            <a:avLst/>
-          </a:prstGeom>
-          <a:noFill/>
-          <a:ln w="9525">
-            <a:solidFill>
-              <a:srgbClr val="DCD9D0"/>
-            </a:solidFill>
-            <a:prstDash val="solid"/>
-          </a:ln>
-        </p:spPr>
-      </p:sp>
-      <p:sp>
-        <p:nvSpPr>
-          <p:cNvPr id="8" name="Text 5"/>
-          <p:cNvSpPr txBox="1"/>
-          <p:nvPr/>
-        </p:nvSpPr>
-        <p:spPr>
-          <a:xfrm>
-            <a:off x="457200" y="4087368"/>
-            <a:ext cx="8229600" cy="384048"/>
-          </a:xfrm>
-          <a:prstGeom prst="rect">
-            <a:avLst/>
-          </a:prstGeom>
-          <a:noFill/>
-          <a:ln/>
-        </p:spPr>
-        <p:txBody>
-          <a:bodyPr wrap="square" lIns="0" tIns="0" rIns="0" bIns="0" rtlCol="0" anchor="ctr"/>
-          <a:lstStyle/>
-          <a:p>
-            <a:pPr indent="0" marL="0">
-              <a:buNone/>
-            </a:pPr>
-            <a:r>
-              <a:rPr lang="en-US" sz="1050" dirty="0">
-                <a:solidFill>
-                  <a:schemeClr val="tx1"/>
-                </a:solidFill>
-              </a:rPr>
-              <a:t>왜 먼저 만들었나: 웹앱이라 빨리 만들 수 있고, 화면을 보여 주며 물어야 답이 정확하다</a:t>
-            </a:r>
-            <a:endParaRPr lang="en-US" sz="1050" dirty="0"/>
-          </a:p>
-        </p:txBody>
-      </p:sp>
-      <p:sp>
-        <p:nvSpPr>
-          <p:cNvPr id="9" name="Shape 6"/>
-          <p:cNvSpPr/>
-          <p:nvPr/>
-        </p:nvSpPr>
-        <p:spPr>
-          <a:xfrm>
-            <a:off x="457200" y="4471416"/>
-            <a:ext cx="8229600" cy="0"/>
-          </a:xfrm>
-          <a:prstGeom prst="line">
-            <a:avLst/>
-          </a:prstGeom>
-          <a:noFill/>
-          <a:ln w="9525">
-            <a:solidFill>
-              <a:srgbClr val="DCD9D0"/>
-            </a:solidFill>
-            <a:prstDash val="solid"/>
-          </a:ln>
-        </p:spPr>
-      </p:sp>
       <p:sp>
         <p:nvSpPr>
           <p:cNvPr id="25" name="Slide Number Placeholder 0"/>
@@ -15630,7 +15428,7 @@
                   <a:schemeClr val="tx1"/>
                 </a:solidFill>
               </a:rPr>
-              <a:t>주 15시간 이상(주휴수당 기준) 일하는 만 19~26세 시급제 알바 대학생 (카페 · 편의점 · 음식점). 근로계약서가 없거나 사본이 없고, 통장 총액만 확인하고, 사장님께 말을 꺼내기 부담스러워한다</a:t>
+              <a:t>주 15시간 이상 일하는 만 19~26세 시급제 알바 대학생 · 계약서 없음 · 통장 총액만 확인 · 말 꺼내기 부담</a:t>
             </a:r>
             <a:endParaRPr lang="en-US" sz="1150" dirty="0"/>
           </a:p>
@@ -15644,8 +15442,8 @@
         </p:nvSpPr>
         <p:spPr>
           <a:xfrm>
-            <a:off x="457200" y="1920240"/>
-            <a:ext cx="2651760" cy="640080"/>
+            <a:off x="457200" y="2057400"/>
+            <a:ext cx="2651760" cy="685800"/>
           </a:xfrm>
           <a:prstGeom prst="rect">
             <a:avLst/>
@@ -15661,14 +15459,14 @@
               <a:buNone/>
             </a:pPr>
             <a:r>
-              <a:rPr lang="en-US" sz="3600" b="1" dirty="0">
+              <a:rPr lang="en-US" sz="4000" b="1" dirty="0">
                 <a:solidFill>
                   <a:schemeClr val="accent3"/>
                 </a:solidFill>
               </a:rPr>
               <a:t>33.2%</a:t>
             </a:r>
-            <a:endParaRPr lang="en-US" sz="3600" dirty="0"/>
+            <a:endParaRPr lang="en-US" sz="4000" dirty="0"/>
           </a:p>
         </p:txBody>
       </p:sp>
@@ -15680,7 +15478,7 @@
         </p:nvSpPr>
         <p:spPr>
           <a:xfrm>
-            <a:off x="457200" y="2578608"/>
+            <a:off x="457200" y="2761488"/>
             <a:ext cx="2651760" cy="457200"/>
           </a:xfrm>
           <a:prstGeom prst="rect">
@@ -15716,7 +15514,7 @@
         </p:nvSpPr>
         <p:spPr>
           <a:xfrm>
-            <a:off x="457200" y="3017520"/>
+            <a:off x="457200" y="3200400"/>
             <a:ext cx="2651760" cy="228600"/>
           </a:xfrm>
           <a:prstGeom prst="rect">
@@ -15752,7 +15550,7 @@
         </p:nvSpPr>
         <p:spPr>
           <a:xfrm>
-            <a:off x="457200" y="3310128"/>
+            <a:off x="457200" y="3520440"/>
             <a:ext cx="2651760" cy="0"/>
           </a:xfrm>
           <a:prstGeom prst="line">
@@ -15775,8 +15573,8 @@
         </p:nvSpPr>
         <p:spPr>
           <a:xfrm>
-            <a:off x="457200" y="3456432"/>
-            <a:ext cx="274320" cy="274320"/>
+            <a:off x="457200" y="3703320"/>
+            <a:ext cx="310896" cy="310896"/>
           </a:xfrm>
           <a:prstGeom prst="ellipse">
             <a:avLst/>
@@ -15800,8 +15598,8 @@
         </p:nvSpPr>
         <p:spPr>
           <a:xfrm>
-            <a:off x="457200" y="3456432"/>
-            <a:ext cx="274320" cy="274320"/>
+            <a:off x="457200" y="3703320"/>
+            <a:ext cx="310896" cy="310896"/>
           </a:xfrm>
           <a:prstGeom prst="rect">
             <a:avLst/>
@@ -15817,14 +15615,14 @@
               <a:buNone/>
             </a:pPr>
             <a:r>
-              <a:rPr lang="en-US" sz="1000" b="1" dirty="0">
+              <a:rPr lang="en-US" sz="1100" b="1" dirty="0">
                 <a:solidFill>
                   <a:schemeClr val="bg1"/>
                 </a:solidFill>
               </a:rPr>
               <a:t>1</a:t>
             </a:r>
-            <a:endParaRPr lang="en-US" sz="1000" dirty="0"/>
+            <a:endParaRPr lang="en-US" sz="1100" dirty="0"/>
           </a:p>
         </p:txBody>
       </p:sp>
@@ -15836,8 +15634,8 @@
         </p:nvSpPr>
         <p:spPr>
           <a:xfrm>
-            <a:off x="822960" y="3401568"/>
-            <a:ext cx="2286000" cy="548640"/>
+            <a:off x="868680" y="3648456"/>
+            <a:ext cx="2240280" cy="603504"/>
           </a:xfrm>
           <a:prstGeom prst="rect">
             <a:avLst/>
@@ -15853,28 +15651,28 @@
               <a:buNone/>
             </a:pPr>
             <a:r>
-              <a:rPr lang="en-US" sz="1300" b="1" dirty="0">
+              <a:rPr lang="en-US" sz="1400" b="1" dirty="0">
                 <a:solidFill>
                   <a:schemeClr val="tx2"/>
                 </a:solidFill>
               </a:rPr>
               <a:t>얼마를 받아야 하는지</a:t>
             </a:r>
-            <a:endParaRPr lang="en-US" sz="1300" dirty="0"/>
+            <a:endParaRPr lang="en-US" sz="1400" dirty="0"/>
           </a:p>
           <a:p>
             <a:pPr indent="0" marL="0">
               <a:buNone/>
             </a:pPr>
             <a:r>
-              <a:rPr lang="en-US" sz="1300" b="1" dirty="0">
+              <a:rPr lang="en-US" sz="1400" b="1" dirty="0">
                 <a:solidFill>
                   <a:schemeClr val="tx2"/>
                 </a:solidFill>
               </a:rPr>
               <a:t>계산하기 어렵다</a:t>
             </a:r>
-            <a:endParaRPr lang="en-US" sz="1300" dirty="0"/>
+            <a:endParaRPr lang="en-US" sz="1400" dirty="0"/>
           </a:p>
         </p:txBody>
       </p:sp>
@@ -15886,31 +15684,31 @@
         </p:nvSpPr>
         <p:spPr>
           <a:xfrm>
-            <a:off x="457200" y="4005072"/>
-            <a:ext cx="2651760" cy="640080"/>
-          </a:xfrm>
-          <a:prstGeom prst="rect">
-            <a:avLst/>
-          </a:prstGeom>
-          <a:noFill/>
-          <a:ln/>
-        </p:spPr>
-        <p:txBody>
-          <a:bodyPr wrap="square" lIns="0" tIns="0" rIns="0" bIns="0" rtlCol="0" anchor="t"/>
+            <a:off x="3246120" y="2057400"/>
+            <a:ext cx="2651760" cy="685800"/>
+          </a:xfrm>
+          <a:prstGeom prst="rect">
+            <a:avLst/>
+          </a:prstGeom>
+          <a:noFill/>
+          <a:ln/>
+        </p:spPr>
+        <p:txBody>
+          <a:bodyPr wrap="square" lIns="0" tIns="0" rIns="0" bIns="0" rtlCol="0" anchor="b"/>
           <a:lstStyle/>
           <a:p>
             <a:pPr indent="0" marL="0">
               <a:buNone/>
             </a:pPr>
             <a:r>
-              <a:rPr lang="en-US" sz="1050" dirty="0">
-                <a:solidFill>
-                  <a:schemeClr val="accent5"/>
-                </a:solidFill>
-              </a:rPr>
-              <a:t>수당 안내를 못 받는 경우가 많고, 주휴 · 야간 계산 기준은 알기 어렵다. 계산기는 있어도 넣을 기록이 없다</a:t>
-            </a:r>
-            <a:endParaRPr lang="en-US" sz="1050" dirty="0"/>
+              <a:rPr lang="en-US" sz="4000" b="1" dirty="0">
+                <a:solidFill>
+                  <a:schemeClr val="accent3"/>
+                </a:solidFill>
+              </a:rPr>
+              <a:t>48.0%</a:t>
+            </a:r>
+            <a:endParaRPr lang="en-US" sz="4000" dirty="0"/>
           </a:p>
         </p:txBody>
       </p:sp>
@@ -15922,31 +15720,31 @@
         </p:nvSpPr>
         <p:spPr>
           <a:xfrm>
-            <a:off x="3246120" y="1920240"/>
-            <a:ext cx="2651760" cy="640080"/>
-          </a:xfrm>
-          <a:prstGeom prst="rect">
-            <a:avLst/>
-          </a:prstGeom>
-          <a:noFill/>
-          <a:ln/>
-        </p:spPr>
-        <p:txBody>
-          <a:bodyPr wrap="square" lIns="0" tIns="0" rIns="0" bIns="0" rtlCol="0" anchor="b"/>
+            <a:off x="3246120" y="2761488"/>
+            <a:ext cx="2651760" cy="457200"/>
+          </a:xfrm>
+          <a:prstGeom prst="rect">
+            <a:avLst/>
+          </a:prstGeom>
+          <a:noFill/>
+          <a:ln/>
+        </p:spPr>
+        <p:txBody>
+          <a:bodyPr wrap="square" lIns="0" tIns="0" rIns="0" bIns="0" rtlCol="0" anchor="t"/>
           <a:lstStyle/>
           <a:p>
             <a:pPr indent="0" marL="0">
               <a:buNone/>
             </a:pPr>
             <a:r>
-              <a:rPr lang="en-US" sz="3600" b="1" dirty="0">
-                <a:solidFill>
-                  <a:schemeClr val="accent3"/>
-                </a:solidFill>
-              </a:rPr>
-              <a:t>48.0%</a:t>
-            </a:r>
-            <a:endParaRPr lang="en-US" sz="3600" dirty="0"/>
+              <a:rPr lang="en-US" sz="1050" dirty="0">
+                <a:solidFill>
+                  <a:schemeClr val="tx1"/>
+                </a:solidFill>
+              </a:rPr>
+              <a:t>임금 관련 문제를 겪었다 (수당 미지급 · 지연 37.3%)</a:t>
+            </a:r>
+            <a:endParaRPr lang="en-US" sz="1050" dirty="0"/>
           </a:p>
         </p:txBody>
       </p:sp>
@@ -15958,8 +15756,8 @@
         </p:nvSpPr>
         <p:spPr>
           <a:xfrm>
-            <a:off x="3246120" y="2578608"/>
-            <a:ext cx="2651760" cy="457200"/>
+            <a:off x="3246120" y="3200400"/>
+            <a:ext cx="2651760" cy="228600"/>
           </a:xfrm>
           <a:prstGeom prst="rect">
             <a:avLst/>
@@ -15975,42 +15773,6 @@
               <a:buNone/>
             </a:pPr>
             <a:r>
-              <a:rPr lang="en-US" sz="1050" dirty="0">
-                <a:solidFill>
-                  <a:schemeClr val="tx1"/>
-                </a:solidFill>
-              </a:rPr>
-              <a:t>임금 관련 문제를 겪었다 (수당 미지급 · 지연 37.3%)</a:t>
-            </a:r>
-            <a:endParaRPr lang="en-US" sz="1050" dirty="0"/>
-          </a:p>
-        </p:txBody>
-      </p:sp>
-      <p:sp>
-        <p:nvSpPr>
-          <p:cNvPr id="16" name="Text 14"/>
-          <p:cNvSpPr txBox="1"/>
-          <p:nvPr/>
-        </p:nvSpPr>
-        <p:spPr>
-          <a:xfrm>
-            <a:off x="3246120" y="3017520"/>
-            <a:ext cx="2651760" cy="228600"/>
-          </a:xfrm>
-          <a:prstGeom prst="rect">
-            <a:avLst/>
-          </a:prstGeom>
-          <a:noFill/>
-          <a:ln/>
-        </p:spPr>
-        <p:txBody>
-          <a:bodyPr wrap="square" lIns="0" tIns="0" rIns="0" bIns="0" rtlCol="0" anchor="t"/>
-          <a:lstStyle/>
-          <a:p>
-            <a:pPr indent="0" marL="0">
-              <a:buNone/>
-            </a:pPr>
-            <a:r>
               <a:rPr lang="en-US" sz="850" dirty="0">
                 <a:solidFill>
                   <a:schemeClr val="accent5"/>
@@ -16024,13 +15786,13 @@
       </p:sp>
       <p:sp>
         <p:nvSpPr>
-          <p:cNvPr id="17" name="Shape 15"/>
+          <p:cNvPr id="16" name="Shape 14"/>
           <p:cNvSpPr/>
           <p:nvPr/>
         </p:nvSpPr>
         <p:spPr>
           <a:xfrm>
-            <a:off x="3246120" y="3310128"/>
+            <a:off x="3246120" y="3520440"/>
             <a:ext cx="2651760" cy="0"/>
           </a:xfrm>
           <a:prstGeom prst="line">
@@ -16047,14 +15809,14 @@
       </p:sp>
       <p:sp>
         <p:nvSpPr>
-          <p:cNvPr id="18" name="번호 2"/>
+          <p:cNvPr id="17" name="번호 2"/>
           <p:cNvSpPr/>
           <p:nvPr/>
         </p:nvSpPr>
         <p:spPr>
           <a:xfrm>
-            <a:off x="3246120" y="3456432"/>
-            <a:ext cx="274320" cy="274320"/>
+            <a:off x="3246120" y="3703320"/>
+            <a:ext cx="310896" cy="310896"/>
           </a:xfrm>
           <a:prstGeom prst="ellipse">
             <a:avLst/>
@@ -16072,37 +15834,87 @@
       </p:sp>
       <p:sp>
         <p:nvSpPr>
+          <p:cNvPr id="18" name="Text 16"/>
+          <p:cNvSpPr txBox="1"/>
+          <p:nvPr/>
+        </p:nvSpPr>
+        <p:spPr>
+          <a:xfrm>
+            <a:off x="3246120" y="3703320"/>
+            <a:ext cx="310896" cy="310896"/>
+          </a:xfrm>
+          <a:prstGeom prst="rect">
+            <a:avLst/>
+          </a:prstGeom>
+          <a:noFill/>
+          <a:ln/>
+        </p:spPr>
+        <p:txBody>
+          <a:bodyPr wrap="square" lIns="0" tIns="0" rIns="0" bIns="0" rtlCol="0" anchor="ctr"/>
+          <a:lstStyle/>
+          <a:p>
+            <a:pPr algn="ctr" indent="0" marL="0">
+              <a:buNone/>
+            </a:pPr>
+            <a:r>
+              <a:rPr lang="en-US" sz="1100" b="1" dirty="0">
+                <a:solidFill>
+                  <a:schemeClr val="bg1"/>
+                </a:solidFill>
+              </a:rPr>
+              <a:t>2</a:t>
+            </a:r>
+            <a:endParaRPr lang="en-US" sz="1100" dirty="0"/>
+          </a:p>
+        </p:txBody>
+      </p:sp>
+      <p:sp>
+        <p:nvSpPr>
           <p:cNvPr id="19" name="Text 17"/>
           <p:cNvSpPr txBox="1"/>
           <p:nvPr/>
         </p:nvSpPr>
         <p:spPr>
           <a:xfrm>
-            <a:off x="3246120" y="3456432"/>
-            <a:ext cx="274320" cy="274320"/>
-          </a:xfrm>
-          <a:prstGeom prst="rect">
-            <a:avLst/>
-          </a:prstGeom>
-          <a:noFill/>
-          <a:ln/>
-        </p:spPr>
-        <p:txBody>
-          <a:bodyPr wrap="square" lIns="0" tIns="0" rIns="0" bIns="0" rtlCol="0" anchor="ctr"/>
-          <a:lstStyle/>
-          <a:p>
-            <a:pPr algn="ctr" indent="0" marL="0">
-              <a:buNone/>
-            </a:pPr>
-            <a:r>
-              <a:rPr lang="en-US" sz="1000" b="1" dirty="0">
-                <a:solidFill>
-                  <a:schemeClr val="bg1"/>
-                </a:solidFill>
-              </a:rPr>
-              <a:t>2</a:t>
-            </a:r>
-            <a:endParaRPr lang="en-US" sz="1000" dirty="0"/>
+            <a:off x="3657600" y="3648456"/>
+            <a:ext cx="2240280" cy="603504"/>
+          </a:xfrm>
+          <a:prstGeom prst="rect">
+            <a:avLst/>
+          </a:prstGeom>
+          <a:noFill/>
+          <a:ln/>
+        </p:spPr>
+        <p:txBody>
+          <a:bodyPr wrap="square" lIns="0" tIns="0" rIns="0" bIns="0" rtlCol="0" anchor="t"/>
+          <a:lstStyle/>
+          <a:p>
+            <a:pPr indent="0" marL="0">
+              <a:buNone/>
+            </a:pPr>
+            <a:r>
+              <a:rPr lang="en-US" sz="1400" b="1" dirty="0">
+                <a:solidFill>
+                  <a:schemeClr val="tx2"/>
+                </a:solidFill>
+              </a:rPr>
+              <a:t>덜 받아도</a:t>
+            </a:r>
+            <a:endParaRPr lang="en-US" sz="1400" dirty="0"/>
+          </a:p>
+          <a:p>
+            <a:pPr indent="0" marL="0">
+              <a:buNone/>
+            </a:pPr>
+            <a:r>
+              <a:rPr lang="en-US" sz="1400" b="1" dirty="0">
+                <a:solidFill>
+                  <a:schemeClr val="tx2"/>
+                </a:solidFill>
+              </a:rPr>
+              <a:t>알아채기 어렵다</a:t>
+            </a:r>
+            <a:endParaRPr lang="en-US" sz="1400" dirty="0"/>
           </a:p>
         </p:txBody>
       </p:sp>
@@ -16114,45 +15926,31 @@
         </p:nvSpPr>
         <p:spPr>
           <a:xfrm>
-            <a:off x="3611880" y="3401568"/>
-            <a:ext cx="2286000" cy="548640"/>
-          </a:xfrm>
-          <a:prstGeom prst="rect">
-            <a:avLst/>
-          </a:prstGeom>
-          <a:noFill/>
-          <a:ln/>
-        </p:spPr>
-        <p:txBody>
-          <a:bodyPr wrap="square" lIns="0" tIns="0" rIns="0" bIns="0" rtlCol="0" anchor="t"/>
+            <a:off x="6035040" y="2057400"/>
+            <a:ext cx="2651760" cy="685800"/>
+          </a:xfrm>
+          <a:prstGeom prst="rect">
+            <a:avLst/>
+          </a:prstGeom>
+          <a:noFill/>
+          <a:ln/>
+        </p:spPr>
+        <p:txBody>
+          <a:bodyPr wrap="square" lIns="0" tIns="0" rIns="0" bIns="0" rtlCol="0" anchor="b"/>
           <a:lstStyle/>
           <a:p>
             <a:pPr indent="0" marL="0">
               <a:buNone/>
             </a:pPr>
             <a:r>
-              <a:rPr lang="en-US" sz="1300" b="1" dirty="0">
-                <a:solidFill>
-                  <a:schemeClr val="tx2"/>
-                </a:solidFill>
-              </a:rPr>
-              <a:t>덜 받아도</a:t>
-            </a:r>
-            <a:endParaRPr lang="en-US" sz="1300" dirty="0"/>
-          </a:p>
-          <a:p>
-            <a:pPr indent="0" marL="0">
-              <a:buNone/>
-            </a:pPr>
-            <a:r>
-              <a:rPr lang="en-US" sz="1300" b="1" dirty="0">
-                <a:solidFill>
-                  <a:schemeClr val="tx2"/>
-                </a:solidFill>
-              </a:rPr>
-              <a:t>알아채기 어렵다</a:t>
-            </a:r>
-            <a:endParaRPr lang="en-US" sz="1300" dirty="0"/>
+              <a:rPr lang="en-US" sz="4000" b="1" dirty="0">
+                <a:solidFill>
+                  <a:schemeClr val="accent3"/>
+                </a:solidFill>
+              </a:rPr>
+              <a:t>49.3%</a:t>
+            </a:r>
+            <a:endParaRPr lang="en-US" sz="4000" dirty="0"/>
           </a:p>
         </p:txBody>
       </p:sp>
@@ -16164,8 +15962,8 @@
         </p:nvSpPr>
         <p:spPr>
           <a:xfrm>
-            <a:off x="3246120" y="4005072"/>
-            <a:ext cx="2651760" cy="640080"/>
+            <a:off x="6035040" y="2761488"/>
+            <a:ext cx="2651760" cy="457200"/>
           </a:xfrm>
           <a:prstGeom prst="rect">
             <a:avLst/>
@@ -16183,10 +15981,10 @@
             <a:r>
               <a:rPr lang="en-US" sz="1050" dirty="0">
                 <a:solidFill>
-                  <a:schemeClr val="accent5"/>
-                </a:solidFill>
-              </a:rPr>
-              <a:t>통장에 들어온 총액만 보고 넘어간다. 계약서가 없어 시급도 증명하기 어렵다</a:t>
+                  <a:schemeClr val="tx1"/>
+                </a:solidFill>
+              </a:rPr>
+              <a:t>최저시급 미달인데 아무 대응도 하지 않았다</a:t>
             </a:r>
             <a:endParaRPr lang="en-US" sz="1050" dirty="0"/>
           </a:p>
@@ -16200,95 +15998,23 @@
         </p:nvSpPr>
         <p:spPr>
           <a:xfrm>
-            <a:off x="6035040" y="1920240"/>
-            <a:ext cx="2651760" cy="640080"/>
-          </a:xfrm>
-          <a:prstGeom prst="rect">
-            <a:avLst/>
-          </a:prstGeom>
-          <a:noFill/>
-          <a:ln/>
-        </p:spPr>
-        <p:txBody>
-          <a:bodyPr wrap="square" lIns="0" tIns="0" rIns="0" bIns="0" rtlCol="0" anchor="b"/>
+            <a:off x="6035040" y="3200400"/>
+            <a:ext cx="2651760" cy="228600"/>
+          </a:xfrm>
+          <a:prstGeom prst="rect">
+            <a:avLst/>
+          </a:prstGeom>
+          <a:noFill/>
+          <a:ln/>
+        </p:spPr>
+        <p:txBody>
+          <a:bodyPr wrap="square" lIns="0" tIns="0" rIns="0" bIns="0" rtlCol="0" anchor="t"/>
           <a:lstStyle/>
           <a:p>
             <a:pPr indent="0" marL="0">
               <a:buNone/>
             </a:pPr>
             <a:r>
-              <a:rPr lang="en-US" sz="3600" b="1" dirty="0">
-                <a:solidFill>
-                  <a:schemeClr val="accent3"/>
-                </a:solidFill>
-              </a:rPr>
-              <a:t>49.3%</a:t>
-            </a:r>
-            <a:endParaRPr lang="en-US" sz="3600" dirty="0"/>
-          </a:p>
-        </p:txBody>
-      </p:sp>
-      <p:sp>
-        <p:nvSpPr>
-          <p:cNvPr id="23" name="Text 21"/>
-          <p:cNvSpPr txBox="1"/>
-          <p:nvPr/>
-        </p:nvSpPr>
-        <p:spPr>
-          <a:xfrm>
-            <a:off x="6035040" y="2578608"/>
-            <a:ext cx="2651760" cy="457200"/>
-          </a:xfrm>
-          <a:prstGeom prst="rect">
-            <a:avLst/>
-          </a:prstGeom>
-          <a:noFill/>
-          <a:ln/>
-        </p:spPr>
-        <p:txBody>
-          <a:bodyPr wrap="square" lIns="0" tIns="0" rIns="0" bIns="0" rtlCol="0" anchor="t"/>
-          <a:lstStyle/>
-          <a:p>
-            <a:pPr indent="0" marL="0">
-              <a:buNone/>
-            </a:pPr>
-            <a:r>
-              <a:rPr lang="en-US" sz="1050" dirty="0">
-                <a:solidFill>
-                  <a:schemeClr val="tx1"/>
-                </a:solidFill>
-              </a:rPr>
-              <a:t>최저시급 미달인데 아무 대응도 하지 않았다</a:t>
-            </a:r>
-            <a:endParaRPr lang="en-US" sz="1050" dirty="0"/>
-          </a:p>
-        </p:txBody>
-      </p:sp>
-      <p:sp>
-        <p:nvSpPr>
-          <p:cNvPr id="24" name="Text 22"/>
-          <p:cNvSpPr txBox="1"/>
-          <p:nvPr/>
-        </p:nvSpPr>
-        <p:spPr>
-          <a:xfrm>
-            <a:off x="6035040" y="3017520"/>
-            <a:ext cx="2651760" cy="228600"/>
-          </a:xfrm>
-          <a:prstGeom prst="rect">
-            <a:avLst/>
-          </a:prstGeom>
-          <a:noFill/>
-          <a:ln/>
-        </p:spPr>
-        <p:txBody>
-          <a:bodyPr wrap="square" lIns="0" tIns="0" rIns="0" bIns="0" rtlCol="0" anchor="t"/>
-          <a:lstStyle/>
-          <a:p>
-            <a:pPr indent="0" marL="0">
-              <a:buNone/>
-            </a:pPr>
-            <a:r>
               <a:rPr lang="en-US" sz="850" dirty="0">
                 <a:solidFill>
                   <a:schemeClr val="accent5"/>
@@ -16302,13 +16028,13 @@
       </p:sp>
       <p:sp>
         <p:nvSpPr>
-          <p:cNvPr id="25" name="Shape 23"/>
+          <p:cNvPr id="23" name="Shape 21"/>
           <p:cNvSpPr/>
           <p:nvPr/>
         </p:nvSpPr>
         <p:spPr>
           <a:xfrm>
-            <a:off x="6035040" y="3310128"/>
+            <a:off x="6035040" y="3520440"/>
             <a:ext cx="2651760" cy="0"/>
           </a:xfrm>
           <a:prstGeom prst="line">
@@ -16325,14 +16051,14 @@
       </p:sp>
       <p:sp>
         <p:nvSpPr>
-          <p:cNvPr id="26" name="번호 3"/>
+          <p:cNvPr id="24" name="번호 3"/>
           <p:cNvSpPr/>
           <p:nvPr/>
         </p:nvSpPr>
         <p:spPr>
           <a:xfrm>
-            <a:off x="6035040" y="3456432"/>
-            <a:ext cx="274320" cy="274320"/>
+            <a:off x="6035040" y="3703320"/>
+            <a:ext cx="310896" cy="310896"/>
           </a:xfrm>
           <a:prstGeom prst="ellipse">
             <a:avLst/>
@@ -16350,14 +16076,14 @@
       </p:sp>
       <p:sp>
         <p:nvSpPr>
-          <p:cNvPr id="27" name="Text 25"/>
+          <p:cNvPr id="25" name="Text 23"/>
           <p:cNvSpPr txBox="1"/>
           <p:nvPr/>
         </p:nvSpPr>
         <p:spPr>
           <a:xfrm>
-            <a:off x="6035040" y="3456432"/>
-            <a:ext cx="274320" cy="274320"/>
+            <a:off x="6035040" y="3703320"/>
+            <a:ext cx="310896" cy="310896"/>
           </a:xfrm>
           <a:prstGeom prst="rect">
             <a:avLst/>
@@ -16373,27 +16099,27 @@
               <a:buNone/>
             </a:pPr>
             <a:r>
-              <a:rPr lang="en-US" sz="1000" b="1" dirty="0">
+              <a:rPr lang="en-US" sz="1100" b="1" dirty="0">
                 <a:solidFill>
                   <a:schemeClr val="bg1"/>
                 </a:solidFill>
               </a:rPr>
               <a:t>3</a:t>
             </a:r>
-            <a:endParaRPr lang="en-US" sz="1000" dirty="0"/>
-          </a:p>
-        </p:txBody>
-      </p:sp>
-      <p:sp>
-        <p:nvSpPr>
-          <p:cNvPr id="28" name="Text 26"/>
+            <a:endParaRPr lang="en-US" sz="1100" dirty="0"/>
+          </a:p>
+        </p:txBody>
+      </p:sp>
+      <p:sp>
+        <p:nvSpPr>
+          <p:cNvPr id="26" name="Text 24"/>
           <p:cNvSpPr txBox="1"/>
           <p:nvPr/>
         </p:nvSpPr>
         <p:spPr>
           <a:xfrm>
-            <a:off x="6400800" y="3401568"/>
-            <a:ext cx="2286000" cy="548640"/>
+            <a:off x="6446520" y="3648456"/>
+            <a:ext cx="2240280" cy="603504"/>
           </a:xfrm>
           <a:prstGeom prst="rect">
             <a:avLst/>
@@ -16409,64 +16135,28 @@
               <a:buNone/>
             </a:pPr>
             <a:r>
-              <a:rPr lang="en-US" sz="1300" b="1" dirty="0">
+              <a:rPr lang="en-US" sz="1400" b="1" dirty="0">
                 <a:solidFill>
                   <a:schemeClr val="tx2"/>
                 </a:solidFill>
               </a:rPr>
               <a:t>알아도</a:t>
             </a:r>
-            <a:endParaRPr lang="en-US" sz="1300" dirty="0"/>
+            <a:endParaRPr lang="en-US" sz="1400" dirty="0"/>
           </a:p>
           <a:p>
             <a:pPr indent="0" marL="0">
               <a:buNone/>
             </a:pPr>
             <a:r>
-              <a:rPr lang="en-US" sz="1300" b="1" dirty="0">
+              <a:rPr lang="en-US" sz="1400" b="1" dirty="0">
                 <a:solidFill>
                   <a:schemeClr val="tx2"/>
                 </a:solidFill>
               </a:rPr>
               <a:t>말을 꺼내기 어렵다</a:t>
             </a:r>
-            <a:endParaRPr lang="en-US" sz="1300" dirty="0"/>
-          </a:p>
-        </p:txBody>
-      </p:sp>
-      <p:sp>
-        <p:nvSpPr>
-          <p:cNvPr id="29" name="Text 27"/>
-          <p:cNvSpPr txBox="1"/>
-          <p:nvPr/>
-        </p:nvSpPr>
-        <p:spPr>
-          <a:xfrm>
-            <a:off x="6035040" y="4005072"/>
-            <a:ext cx="2651760" cy="640080"/>
-          </a:xfrm>
-          <a:prstGeom prst="rect">
-            <a:avLst/>
-          </a:prstGeom>
-          <a:noFill/>
-          <a:ln/>
-        </p:spPr>
-        <p:txBody>
-          <a:bodyPr wrap="square" lIns="0" tIns="0" rIns="0" bIns="0" rtlCol="0" anchor="t"/>
-          <a:lstStyle/>
-          <a:p>
-            <a:pPr indent="0" marL="0">
-              <a:buNone/>
-            </a:pPr>
-            <a:r>
-              <a:rPr lang="en-US" sz="1050" dirty="0">
-                <a:solidFill>
-                  <a:schemeClr val="accent5"/>
-                </a:solidFill>
-              </a:rPr>
-              <a:t>관계 걱정, 작은 금액, 근거 없음. 메모장 기록은 "나중에 지어낸 것 아니냐?" 한마디에 무너진다</a:t>
-            </a:r>
-            <a:endParaRPr lang="en-US" sz="1050" dirty="0"/>
+            <a:endParaRPr lang="en-US" sz="1400" dirty="0"/>
           </a:p>
         </p:txBody>
       </p:sp>
@@ -20686,8 +20376,8 @@
         </p:nvSpPr>
         <p:spPr>
           <a:xfrm>
-            <a:off x="914400" y="1664208"/>
-            <a:ext cx="4480560" cy="603504"/>
+            <a:off x="914400" y="1700784"/>
+            <a:ext cx="4480560" cy="365760"/>
           </a:xfrm>
           <a:prstGeom prst="rect">
             <a:avLst/>
@@ -20703,14 +20393,14 @@
               <a:buNone/>
             </a:pPr>
             <a:r>
-              <a:rPr lang="en-US" sz="1100" dirty="0">
+              <a:rPr lang="en-US" sz="1150" dirty="0">
                 <a:solidFill>
                   <a:schemeClr val="accent5"/>
                 </a:solidFill>
               </a:rPr>
-              <a:t>근무지만 직접 등록한다. 기그와 달리 사장이 가입하지 않아도 된다</a:t>
-            </a:r>
-            <a:endParaRPr lang="en-US" sz="1100" dirty="0"/>
+              <a:t>근무지만 직접 등록한다. 사장 가입이 필요 없다</a:t>
+            </a:r>
+            <a:endParaRPr lang="en-US" sz="1150" dirty="0"/>
           </a:p>
         </p:txBody>
       </p:sp>
@@ -20853,8 +20543,8 @@
         </p:nvSpPr>
         <p:spPr>
           <a:xfrm>
-            <a:off x="914400" y="2688336"/>
-            <a:ext cx="4480560" cy="603504"/>
+            <a:off x="914400" y="2724912"/>
+            <a:ext cx="4480560" cy="365760"/>
           </a:xfrm>
           <a:prstGeom prst="rect">
             <a:avLst/>
@@ -20870,14 +20560,14 @@
               <a:buNone/>
             </a:pPr>
             <a:r>
-              <a:rPr lang="en-US" sz="1100" dirty="0">
+              <a:rPr lang="en-US" sz="1150" dirty="0">
                 <a:solidFill>
                   <a:schemeClr val="accent5"/>
                 </a:solidFill>
               </a:rPr>
-              <a:t>실제 받은 돈과 비교해 차액을 찾고, 요청 문구와 증빙 묶음까지 잇는다. 네 서비스 모두 없는 부분</a:t>
-            </a:r>
-            <a:endParaRPr lang="en-US" sz="1100" dirty="0"/>
+              <a:t>실제 받은 돈과 비교해 요청 문구 · 증빙까지. 네 서비스 모두 없음</a:t>
+            </a:r>
+            <a:endParaRPr lang="en-US" sz="1150" dirty="0"/>
           </a:p>
         </p:txBody>
       </p:sp>
@@ -21020,8 +20710,8 @@
         </p:nvSpPr>
         <p:spPr>
           <a:xfrm>
-            <a:off x="914400" y="3712464"/>
-            <a:ext cx="4480560" cy="603504"/>
+            <a:off x="914400" y="3749040"/>
+            <a:ext cx="4480560" cy="365760"/>
           </a:xfrm>
           <a:prstGeom prst="rect">
             <a:avLst/>
@@ -21037,14 +20727,14 @@
               <a:buNone/>
             </a:pPr>
             <a:r>
-              <a:rPr lang="en-US" sz="1100" dirty="0">
+              <a:rPr lang="en-US" sz="1150" dirty="0">
                 <a:solidFill>
                   <a:schemeClr val="accent5"/>
                 </a:solidFill>
               </a:rPr>
-              <a:t>기록할 때마다 확인 번호와 서버 등록 시각이 남고, 누구나 확인 페이지에서 등록 시각을 볼 수 있다. 내용으로 번호를 다시 계산하는 방법은 기말까지 만든다</a:t>
-            </a:r>
-            <a:endParaRPr lang="en-US" sz="1100" dirty="0"/>
+              <a:t>기록할 때마다 확인 번호와 서버 등록 시각이 남는다</a:t>
+            </a:r>
+            <a:endParaRPr lang="en-US" sz="1150" dirty="0"/>
           </a:p>
         </p:txBody>
       </p:sp>
@@ -21080,11 +20770,11 @@
         <p:spPr>
           <a:xfrm>
             <a:off x="5852160" y="1280160"/>
-            <a:ext cx="2834640" cy="1600200"/>
+            <a:ext cx="2834640" cy="1188720"/>
           </a:xfrm>
           <a:prstGeom prst="roundRect">
             <a:avLst>
-              <a:gd name="adj" fmla="val 5714"/>
+              <a:gd name="adj" fmla="val 7692"/>
             </a:avLst>
           </a:prstGeom>
           <a:solidFill>
@@ -21159,14 +20849,14 @@
               <a:buNone/>
             </a:pPr>
             <a:r>
-              <a:rPr lang="en-US" sz="1100" dirty="0">
+              <a:rPr lang="en-US" sz="1200" dirty="0">
                 <a:solidFill>
                   <a:schemeClr val="tx1"/>
                 </a:solidFill>
               </a:rPr>
-              <a:t>비교 기능은 하우머치가 "받은 금액 입력" 칸 하나로 따라올 수 있다. 3번은 기록 구조 자체(사유 없이 못 고침 · 삭제도 흔적 · 고치면 다시 등록)라 따라오기 어렵다.</a:t>
-            </a:r>
-            <a:endParaRPr lang="en-US" sz="1100" dirty="0"/>
+              <a:t>비교 기능은 하우머치가 칸 하나로 따라올 수 있다. 3번은 기록 구조 자체라 따라오기 어렵다.</a:t>
+            </a:r>
+            <a:endParaRPr lang="en-US" sz="1200" dirty="0"/>
           </a:p>
         </p:txBody>
       </p:sp>
@@ -21178,7 +20868,7 @@
         </p:nvSpPr>
         <p:spPr>
           <a:xfrm>
-            <a:off x="5852160" y="3063240"/>
+            <a:off x="5852160" y="2651760"/>
             <a:ext cx="2834640" cy="640080"/>
           </a:xfrm>
           <a:prstGeom prst="rect">
@@ -21201,56 +20891,6 @@
                 </a:solidFill>
               </a:rPr>
               <a:t>통장 내역 · 메시지와 함께 내야 힘이 생긴다</a:t>
-            </a:r>
-            <a:endParaRPr lang="en-US" sz="1050" dirty="0"/>
-          </a:p>
-          <a:p>
-            <a:pPr indent="0" marL="0">
-              <a:buNone/>
-            </a:pPr>
-            <a:r>
-              <a:rPr lang="en-US" sz="950" dirty="0">
-                <a:solidFill>
-                  <a:schemeClr val="accent5"/>
-                </a:solidFill>
-              </a:rPr>
-              <a:t>앱의 증빙 문서 맨 아래에 그렇게 적어 두었다</a:t>
-            </a:r>
-            <a:endParaRPr lang="en-US" sz="1050" dirty="0"/>
-          </a:p>
-        </p:txBody>
-      </p:sp>
-      <p:sp>
-        <p:nvSpPr>
-          <p:cNvPr id="23" name="Text 21"/>
-          <p:cNvSpPr txBox="1"/>
-          <p:nvPr/>
-        </p:nvSpPr>
-        <p:spPr>
-          <a:xfrm>
-            <a:off x="457200" y="4389120"/>
-            <a:ext cx="8229600" cy="320040"/>
-          </a:xfrm>
-          <a:prstGeom prst="rect">
-            <a:avLst/>
-          </a:prstGeom>
-          <a:noFill/>
-          <a:ln/>
-        </p:spPr>
-        <p:txBody>
-          <a:bodyPr wrap="square" lIns="0" tIns="0" rIns="0" bIns="0" rtlCol="0" anchor="ctr"/>
-          <a:lstStyle/>
-          <a:p>
-            <a:pPr indent="0" marL="0">
-              <a:buNone/>
-            </a:pPr>
-            <a:r>
-              <a:rPr lang="en-US" sz="1050" i="1" dirty="0">
-                <a:solidFill>
-                  <a:schemeClr val="accent5"/>
-                </a:solidFill>
-              </a:rPr>
-              <a:t>법적 효력을 보장한다고 말하지 않는다. 근로감독관 · 법원이 판단할 자료를 정리해 준다.</a:t>
             </a:r>
             <a:endParaRPr lang="en-US" sz="1050" dirty="0"/>
           </a:p>

--- a/docs/06_중간발표_PPT.pptx
+++ b/docs/06_중간발표_PPT.pptx
@@ -125,31 +125,31 @@
   <p:extLst>
     <p:ext uri="{521415D9-36F7-43E2-AB2F-B90AF26B5E84}">
       <p14:sectionLst xmlns:p14="http://schemas.microsoft.com/office/powerpoint/2010/main">
-        <p14:section name="① 표지·팀 소개" id="{2a56a04b-185b-1184-ee0a-2fe3ba18be6b}">
+        <p14:section name="① 표지·팀 소개" id="{e7d288c3-0361-35a1-4b0c-8a74b05872b6}">
           <p14:sldIdLst>
             <p14:sldId id="256"/>
             <p14:sldId id="257"/>
           </p14:sldIdLst>
         </p14:section>
-        <p14:section name="② 문제 정의" id="{9184dbb3-81f2-f931-0f56-d6f55755bd1f}">
+        <p14:section name="② 문제 정의" id="{1479644c-9c61-324a-022d-e62c43cf08c3}">
           <p14:sldIdLst>
             <p14:sldId id="258"/>
             <p14:sldId id="259"/>
           </p14:sldIdLst>
         </p14:section>
-        <p14:section name="③ 솔루션·핵심 가치" id="{aa6f14d5-6117-ea73-6cce-bcccb66fc94e}">
+        <p14:section name="③ 솔루션·핵심 가치" id="{153e4016-be10-1880-4cf0-83ef913cc55f}">
           <p14:sldIdLst>
             <p14:sldId id="260"/>
             <p14:sldId id="261"/>
           </p14:sldIdLst>
         </p14:section>
-        <p14:section name="④ SW 기술 아키텍처" id="{51f8c2d9-00bd-f336-dc9a-d61025cc1832}">
+        <p14:section name="④ SW 기술 아키텍처" id="{61814e0f-efc5-b40e-ba47-65ab9e68a611}">
           <p14:sldIdLst>
             <p14:sldId id="262"/>
             <p14:sldId id="263"/>
           </p14:sldIdLst>
         </p14:section>
-        <p14:section name="⑤ 개발 현황·MVP 시연" id="{f9c886e6-007c-3022-c59c-7cd284dd4469}">
+        <p14:section name="⑤ 개발 현황·MVP 시연" id="{39c1ef8c-c2b4-7fbb-4d20-b518d3eaf207}">
           <p14:sldIdLst>
             <p14:sldId id="264"/>
             <p14:sldId id="265"/>
@@ -157,19 +157,19 @@
             <p14:sldId id="267"/>
           </p14:sldIdLst>
         </p14:section>
-        <p14:section name="⑥ 시장 분석·비즈니스 모델" id="{2ea7ca1b-97f3-69ff-4cb1-6085843441a0}">
+        <p14:section name="⑥ 시장 분석·비즈니스 모델" id="{d4f165c5-10b4-21b8-68e5-4abf08d1d13b}">
           <p14:sldIdLst>
             <p14:sldId id="268"/>
             <p14:sldId id="269"/>
             <p14:sldId id="270"/>
           </p14:sldIdLst>
         </p14:section>
-        <p14:section name="⑦ 초기 시장 검증" id="{d8be92f9-6f7a-6484-6cf1-62036222c5ae}">
+        <p14:section name="⑦ 초기 시장 검증" id="{773894f4-a283-298d-47b0-a911f76deb5d}">
           <p14:sldIdLst>
             <p14:sldId id="271"/>
           </p14:sldIdLst>
         </p14:section>
-        <p14:section name="⑧ 향후 계획·팀 역량" id="{27ce228b-3b88-6187-1f86-9df231a7deae}">
+        <p14:section name="⑧ 향후 계획·팀 역량" id="{7abda316-f843-b66f-0e29-02ad88872ebf}">
           <p14:sldIdLst>
             <p14:sldId id="272"/>
             <p14:sldId id="273"/>
@@ -1190,7 +1190,7 @@
           <a:p>
             <a:r>
               <a:rPr lang="en-US" dirty="0"/>
-              <a:t>손유호. 임금체불은 2년 연속 2조 원이고 30인 미만 사업장에 몰려 있습니다. 타깃 규모는 어림이라 "약"을 붙여 말하고, 없는 숫자(지금 알바 중, 주 15시간 이상)는 미상으로 둡니다. 재적학생은 교육부 2026 교육기본통계(대학원 포함), 알바 경험률은 알바몬 설문(1,193명, 여름방학 알바 88.9%, 2023)과 동대신문 설문(200명, 67.5%)이라 대푯값이 아닙니다. 근절 대책은 대지급금을 3개월분에서 6개월분으로 늘렸고, 개정법은 상습 체불 사업주에게 신용 제재를 겁니다. 체불 통계는 문제의 크기이지 알바 시장의 크기가 아닙니다. 알바생 몫은 이 통계에서 알 수 없어 미상으로 둡니다. "주 15시간 이상이 다수인지의 첫 조각은 지금 답하고 계신 설문에서 나오지만, 규모 추정이 아니라 메시지를 정하는 참고값입니다. 다음 순서에서 박명진이 말씀드립니다." 출처: 고용노동부 노동포털 임금체불 통계현황, 알바천국 설문, 교육부 교육기본통계.</a:t>
+              <a:t>손유호. 타깃 규모에서 지금 알바 중인 사람과 주 15시간 이상인 사람은 공식 통계가 없어 미상입니다. 상한 210~270만 명은 알바 경험 기준입니다. 타이밍: 2025년 9월 임금체불 근절 대책과 10월 23일 개정 근로기준법 시행으로 체불 제재가 세졌고, 근거를 남긴 사람이 받아 내기 쉬워졌습니다. 임금체불은 2년 연속 2조 원이고 30인 미만 사업장에 몰려 있습니다. 타깃 규모는 어림이라 "약"을 붙여 말하고, 없는 숫자(지금 알바 중, 주 15시간 이상)는 미상으로 둡니다. 재적학생은 교육부 2026 교육기본통계(대학원 포함), 알바 경험률은 알바몬 설문(1,193명, 여름방학 알바 88.9%, 2023)과 동대신문 설문(200명, 67.5%)이라 대푯값이 아닙니다. 근절 대책은 대지급금을 3개월분에서 6개월분으로 늘렸고, 개정법은 상습 체불 사업주에게 신용 제재를 겁니다. 체불 통계는 문제의 크기이지 알바 시장의 크기가 아닙니다. 알바생 몫은 이 통계에서 알 수 없어 미상으로 둡니다. "주 15시간 이상이 다수인지의 첫 조각은 지금 답하고 계신 설문에서 나오지만, 규모 추정이 아니라 메시지를 정하는 참고값입니다. 다음 순서에서 박명진이 말씀드립니다." 출처: 고용노동부 노동포털 임금체불 통계현황, 알바천국 설문, 교육부 교육기본통계.</a:t>
             </a:r>
             <a:endParaRPr lang="en-US" dirty="0"/>
           </a:p>
@@ -2271,7 +2271,7 @@
           <a:p>
             <a:r>
               <a:rPr lang="en-US" dirty="0"/>
-              <a:t>한 학기 안에 혼자 만들 수 있는 구성입니다. 서버를 최소로 둔 이유는 개인정보와 비용 둘 다입니다. 배포는 링크 하나라 사용자 의견을 듣고 바로 고칠 수 있습니다.</a:t>
+              <a:t>표의 이유를 풀면: 스토어 심사 없이 링크로 배포해 의견을 듣고 바로 고칩니다. 서버는 확인 번호 등록과 설문 수집에만 씁니다. 공개키로는 넣기 · 읽기만 되고(RLS) 시각은 서버가 찍지만, 운영자 조작까지 막지는 못합니다. main에 올리면 GitHub Actions가 자동으로 빌드 · 배포합니다. 배포 앱은 API 키 없이 정해진 문구로 동작합니다. 한 학기 안에 혼자 만들 수 있는 구성입니다. 서버를 최소로 둔 이유는 개인정보와 비용 둘 다입니다. 배포는 링크 하나라 사용자 의견을 듣고 바로 고칠 수 있습니다.</a:t>
             </a:r>
             <a:endParaRPr lang="en-US" dirty="0"/>
           </a:p>
@@ -2359,7 +2359,7 @@
           <a:p>
             <a:r>
               <a:rPr lang="en-US" dirty="0"/>
-              <a:t>왼쪽 폰 안에서 모든 계산이 끝나고, 서버로 가는 건 확인 번호뿐입니다. 기기 번호는 처음 기록을 등록할 때 앱이 만든 난수라 휴대전화 번호가 아닙니다. 앱이 쓰는 공개키로는 넣기와 읽기만 되고, 직접 요청을 보내 확인했습니다. 2000년 시각을 보내도 서버 시각으로 들어가고, 수정 · 삭제는 401로 거부됩니다. 다만 운영자 권한으로는 고칠 수 있어서, 지금 막는 건 "사용자가 나중에 고쳐 쓰기"까지입니다. 운영자까지 못 고치게 하는 외부 시점 확인은 비용 때문에 계획입니다. 오른쪽은 기록 하나가 남을 때의 흐름입니다. 증빙 묶음 PDF 7번 표에 기록별 확인 번호와 등록 시각이 들어갑니다. 배포는 GitHub main에 올리면 Actions가 Pages로 자동 배포합니다. 지금 답하고 계신 설문도 같은 서버의 survey 표로 가고, 권한 원칙이 같습니다.</a:t>
+              <a:t>상자를 풀면: 화면은 근무 기록 · 캘린더 · 급여 비교 · 정산 요청 · 설정, 계산 모듈은 급여(주휴 · 야간) · 예정 vs 실제 · 요청 문구 · PDF · 확인 번호, 저장은 localStorage(기록 · 수정 이력)와 IndexedDB(사진)입니다. stamps 표에는 확인 번호 · 기록 번호 · 무작위 기기 번호 · 등록 시각이 들어갑니다. 확인함: 공개키로 수정 · 삭제 요청을 보내면 401로 거부되고, 2000년 시각을 보내도 서버 시각으로 저장됩니다. 확인 페이지는 앱 데이터 없이 동작합니다. 왼쪽 폰 안에서 모든 계산이 끝나고, 서버로 가는 건 확인 번호뿐입니다. 기기 번호는 처음 기록을 등록할 때 앱이 만든 난수라 휴대전화 번호가 아닙니다. 앱이 쓰는 공개키로는 넣기와 읽기만 되고, 직접 요청을 보내 확인했습니다. 2000년 시각을 보내도 서버 시각으로 들어가고, 수정 · 삭제는 401로 거부됩니다. 다만 운영자 권한으로는 고칠 수 있어서, 지금 막는 건 "사용자가 나중에 고쳐 쓰기"까지입니다. 운영자까지 못 고치게 하는 외부 시점 확인은 비용 때문에 계획입니다. 오른쪽은 기록 하나가 남을 때의 흐름입니다. 증빙 묶음 PDF 7번 표에 기록별 확인 번호와 등록 시각이 들어갑니다. 배포는 GitHub main에 올리면 Actions가 Pages로 자동 배포합니다. 지금 답하고 계신 설문도 같은 서버의 survey 표로 가고, 권한 원칙이 같습니다.</a:t>
             </a:r>
             <a:endParaRPr lang="en-US" dirty="0"/>
           </a:p>
@@ -6942,7 +6942,7 @@
                   <a:schemeClr val="tx1"/>
                 </a:solidFill>
               </a:rPr>
-              <a:t>9월 기획서 4개 → 10/13 포함 8 · 제외 6으로 고정      </a:t>
+              <a:t>정의서 기능 8개      </a:t>
             </a:r>
             <a:pPr indent="0" marL="0">
               <a:buNone/>
@@ -6964,7 +6964,7 @@
                   <a:schemeClr val="tx1"/>
                 </a:solidFill>
               </a:rPr>
-              <a:t>구현 · 폰 확인 · 사용자 검증 중 남은 일만큼 뺀 자체 평가</a:t>
+              <a:t>남은 일만큼 뺀 자체 평가</a:t>
             </a:r>
             <a:endParaRPr lang="en-US" sz="1050" dirty="0"/>
           </a:p>
@@ -7464,7 +7464,7 @@
                   <a:schemeClr val="tx1"/>
                 </a:solidFill>
               </a:rPr>
-              <a:t>재적학생 307만 명 → 알바 경험 67~89% → 지금 알바 중 · 주 15시간 이상: 미상 (경험 기준 상한 약 210~270만 명)</a:t>
+              <a:t>재적학생 307만 명 → 알바 경험 67~89% → 상한 약 210~270만 명</a:t>
             </a:r>
             <a:endParaRPr lang="en-US" sz="1050" dirty="0"/>
           </a:p>
@@ -7495,7 +7495,7 @@
                   <a:schemeClr val="tx1"/>
                 </a:solidFill>
               </a:rPr>
-              <a:t>2025.9 임금체불 근절 대책 · 2025.10.23 개정 근로기준법 시행. 체불 제재가 세졌고, 근거를 남긴 사람이 받아 내기 쉬워졌다</a:t>
+              <a:t>2025.9 근절 대책 · 2025.10.23 개정 근로기준법 시행</a:t>
             </a:r>
             <a:endParaRPr lang="en-US" sz="1050" dirty="0"/>
           </a:p>
@@ -21065,11 +21065,11 @@
             <a:tbl>
               <a:tblPr/>
               <a:tblGrid>
-                <a:gridCol w="1280160"/>
-                <a:gridCol w="3291840"/>
-                <a:gridCol w="3657600"/>
+                <a:gridCol w="1600200"/>
+                <a:gridCol w="3703320"/>
+                <a:gridCol w="2926080"/>
               </a:tblGrid>
-              <a:tr h="329184">
+              <a:tr h="365760">
                 <a:tc>
                   <a:txBody>
                     <a:bodyPr/>
@@ -21079,14 +21079,14 @@
                         <a:buNone/>
                       </a:pPr>
                       <a:r>
-                        <a:rPr lang="en-US" sz="1050" b="1" dirty="0">
+                        <a:rPr lang="en-US" sz="1100" b="1" dirty="0">
                           <a:solidFill>
                             <a:srgbClr val="5D636D"/>
                           </a:solidFill>
                         </a:rPr>
                         <a:t>구분</a:t>
                       </a:r>
-                      <a:endParaRPr lang="en-US" sz="1050" dirty="0"/>
+                      <a:endParaRPr lang="en-US" sz="1100" dirty="0"/>
                     </a:p>
                   </a:txBody>
                   <a:tcPr marL="91440" marR="91440" marT="36576" marB="36576" anchor="ctr">
@@ -21140,14 +21140,14 @@
                         <a:buNone/>
                       </a:pPr>
                       <a:r>
-                        <a:rPr lang="en-US" sz="1050" b="1" dirty="0">
+                        <a:rPr lang="en-US" sz="1100" b="1" dirty="0">
                           <a:solidFill>
                             <a:srgbClr val="5D636D"/>
                           </a:solidFill>
                         </a:rPr>
                         <a:t>선택</a:t>
                       </a:r>
-                      <a:endParaRPr lang="en-US" sz="1050" dirty="0"/>
+                      <a:endParaRPr lang="en-US" sz="1100" dirty="0"/>
                     </a:p>
                   </a:txBody>
                   <a:tcPr marL="91440" marR="91440" marT="36576" marB="36576" anchor="ctr">
@@ -21201,14 +21201,14 @@
                         <a:buNone/>
                       </a:pPr>
                       <a:r>
-                        <a:rPr lang="en-US" sz="1050" b="1" dirty="0">
+                        <a:rPr lang="en-US" sz="1100" b="1" dirty="0">
                           <a:solidFill>
                             <a:srgbClr val="5D636D"/>
                           </a:solidFill>
                         </a:rPr>
                         <a:t>이유</a:t>
                       </a:r>
-                      <a:endParaRPr lang="en-US" sz="1050" dirty="0"/>
+                      <a:endParaRPr lang="en-US" sz="1100" dirty="0"/>
                     </a:p>
                   </a:txBody>
                   <a:tcPr marL="91440" marR="91440" marT="36576" marB="36576" anchor="ctr">
@@ -21254,7 +21254,7 @@
                   </a:tcPr>
                 </a:tc>
               </a:tr>
-              <a:tr h="457200">
+              <a:tr h="475488">
                 <a:tc>
                   <a:txBody>
                     <a:bodyPr/>
@@ -21264,14 +21264,14 @@
                         <a:buNone/>
                       </a:pPr>
                       <a:r>
-                        <a:rPr lang="en-US" sz="1050" b="1" dirty="0">
+                        <a:rPr lang="en-US" sz="1150" b="1" dirty="0">
                           <a:solidFill>
                             <a:srgbClr val="15171A"/>
                           </a:solidFill>
                         </a:rPr>
                         <a:t>프런트엔드</a:t>
                       </a:r>
-                      <a:endParaRPr lang="en-US" sz="1050" dirty="0"/>
+                      <a:endParaRPr lang="en-US" sz="1150" dirty="0"/>
                     </a:p>
                   </a:txBody>
                   <a:tcPr marL="91440" marR="91440" marT="36576" marB="36576" anchor="ctr">
@@ -21322,14 +21322,14 @@
                         <a:buNone/>
                       </a:pPr>
                       <a:r>
-                        <a:rPr lang="en-US" sz="1050" dirty="0">
+                        <a:rPr lang="en-US" sz="1150" dirty="0">
                           <a:solidFill>
                             <a:srgbClr val="15171A"/>
                           </a:solidFill>
                         </a:rPr>
                         <a:t>React + Vite, PWA (홈 화면에 추가, 오프라인 실행)</a:t>
                       </a:r>
-                      <a:endParaRPr lang="en-US" sz="1050" dirty="0"/>
+                      <a:endParaRPr lang="en-US" sz="1150" dirty="0"/>
                     </a:p>
                   </a:txBody>
                   <a:tcPr marL="91440" marR="91440" marT="36576" marB="36576" anchor="ctr">
@@ -21380,14 +21380,14 @@
                         <a:buNone/>
                       </a:pPr>
                       <a:r>
-                        <a:rPr lang="en-US" sz="1050" dirty="0">
+                        <a:rPr lang="en-US" sz="1150" dirty="0">
                           <a:solidFill>
                             <a:srgbClr val="15171A"/>
                           </a:solidFill>
                         </a:rPr>
-                        <a:t>스토어 없이 링크로 배포. 의견을 듣고 바로 고친다</a:t>
+                        <a:t>스토어 없이 링크로 바로 배포</a:t>
                       </a:r>
-                      <a:endParaRPr lang="en-US" sz="1050" dirty="0"/>
+                      <a:endParaRPr lang="en-US" sz="1150" dirty="0"/>
                     </a:p>
                   </a:txBody>
                   <a:tcPr marL="91440" marR="91440" marT="36576" marB="36576" anchor="ctr">
@@ -21430,7 +21430,7 @@
                   </a:tcPr>
                 </a:tc>
               </a:tr>
-              <a:tr h="457200">
+              <a:tr h="475488">
                 <a:tc>
                   <a:txBody>
                     <a:bodyPr/>
@@ -21440,14 +21440,14 @@
                         <a:buNone/>
                       </a:pPr>
                       <a:r>
-                        <a:rPr lang="en-US" sz="1050" b="1" dirty="0">
+                        <a:rPr lang="en-US" sz="1150" b="1" dirty="0">
                           <a:solidFill>
                             <a:srgbClr val="15171A"/>
                           </a:solidFill>
                         </a:rPr>
                         <a:t>백엔드</a:t>
                       </a:r>
-                      <a:endParaRPr lang="en-US" sz="1050" dirty="0"/>
+                      <a:endParaRPr lang="en-US" sz="1150" dirty="0"/>
                     </a:p>
                   </a:txBody>
                   <a:tcPr marL="91440" marR="91440" marT="36576" marB="36576" anchor="ctr">
@@ -21498,14 +21498,14 @@
                         <a:buNone/>
                       </a:pPr>
                       <a:r>
-                        <a:rPr lang="en-US" sz="1050" dirty="0">
+                        <a:rPr lang="en-US" sz="1150" dirty="0">
                           <a:solidFill>
                             <a:srgbClr val="15171A"/>
                           </a:solidFill>
                         </a:rPr>
                         <a:t>별도 서버 없음 + Supabase REST</a:t>
                       </a:r>
-                      <a:endParaRPr lang="en-US" sz="1050" dirty="0"/>
+                      <a:endParaRPr lang="en-US" sz="1150" dirty="0"/>
                     </a:p>
                   </a:txBody>
                   <a:tcPr marL="91440" marR="91440" marT="36576" marB="36576" anchor="ctr">
@@ -21556,14 +21556,14 @@
                         <a:buNone/>
                       </a:pPr>
                       <a:r>
-                        <a:rPr lang="en-US" sz="1050" dirty="0">
+                        <a:rPr lang="en-US" sz="1150" dirty="0">
                           <a:solidFill>
                             <a:srgbClr val="15171A"/>
                           </a:solidFill>
                         </a:rPr>
-                        <a:t>근무 내용은 폰 밖으로 안 나감. 서버는 확인 번호 등록 · 설문 수집에만</a:t>
+                        <a:t>근무 내용은 폰 안에만</a:t>
                       </a:r>
-                      <a:endParaRPr lang="en-US" sz="1050" dirty="0"/>
+                      <a:endParaRPr lang="en-US" sz="1150" dirty="0"/>
                     </a:p>
                   </a:txBody>
                   <a:tcPr marL="91440" marR="91440" marT="36576" marB="36576" anchor="ctr">
@@ -21616,14 +21616,14 @@
                         <a:buNone/>
                       </a:pPr>
                       <a:r>
-                        <a:rPr lang="en-US" sz="1050" b="1" dirty="0">
+                        <a:rPr lang="en-US" sz="1150" b="1" dirty="0">
                           <a:solidFill>
                             <a:srgbClr val="15171A"/>
                           </a:solidFill>
                         </a:rPr>
                         <a:t>데이터베이스</a:t>
                       </a:r>
-                      <a:endParaRPr lang="en-US" sz="1050" dirty="0"/>
+                      <a:endParaRPr lang="en-US" sz="1150" dirty="0"/>
                     </a:p>
                   </a:txBody>
                   <a:tcPr marL="91440" marR="91440" marT="36576" marB="36576" anchor="ctr">
@@ -21674,28 +21674,28 @@
                         <a:buNone/>
                       </a:pPr>
                       <a:r>
-                        <a:rPr lang="en-US" sz="1050" dirty="0">
+                        <a:rPr lang="en-US" sz="1150" dirty="0">
                           <a:solidFill>
                             <a:srgbClr val="15171A"/>
                           </a:solidFill>
                         </a:rPr>
                         <a:t>폰: localStorage(기록) · IndexedDB(사진)</a:t>
                       </a:r>
-                      <a:endParaRPr lang="en-US" sz="1050" dirty="0"/>
+                      <a:endParaRPr lang="en-US" sz="1150" dirty="0"/>
                     </a:p>
                     <a:p>
                       <a:pPr indent="0" marL="0">
                         <a:buNone/>
                       </a:pPr>
                       <a:r>
-                        <a:rPr lang="en-US" sz="1050" dirty="0">
+                        <a:rPr lang="en-US" sz="1150" dirty="0">
                           <a:solidFill>
                             <a:srgbClr val="15171A"/>
                           </a:solidFill>
                         </a:rPr>
                         <a:t>서버: Supabase PostgreSQL (stamps · survey)</a:t>
                       </a:r>
-                      <a:endParaRPr lang="en-US" sz="1050" dirty="0"/>
+                      <a:endParaRPr lang="en-US" sz="1150" dirty="0"/>
                     </a:p>
                   </a:txBody>
                   <a:tcPr marL="91440" marR="91440" marT="36576" marB="36576" anchor="ctr">
@@ -21746,190 +21746,28 @@
                         <a:buNone/>
                       </a:pPr>
                       <a:r>
-                        <a:rPr lang="en-US" sz="1050" dirty="0">
+                        <a:rPr lang="en-US" sz="1150" dirty="0">
                           <a:solidFill>
                             <a:srgbClr val="15171A"/>
                           </a:solidFill>
                         </a:rPr>
-                        <a:t>기록은 사용자 폰에. 공개키로는 넣기 · 읽기만(RLS), 시각은 서버가 찍음. 운영자 조작은 못 막음</a:t>
+                        <a:t>공개키로는 넣기 · 읽기만</a:t>
                       </a:r>
-                      <a:endParaRPr lang="en-US" sz="1050" dirty="0"/>
+                      <a:endParaRPr lang="en-US" sz="1150" dirty="0"/>
                     </a:p>
-                  </a:txBody>
-                  <a:tcPr marL="91440" marR="91440" marT="36576" marB="36576" anchor="ctr">
-                    <a:lnL w="6350" cap="flat" cmpd="sng" algn="ctr">
-                      <a:solidFill>
-                        <a:srgbClr val="DCD9D0"/>
-                      </a:solidFill>
-                      <a:prstDash val="solid"/>
-                      <a:round/>
-                      <a:headEnd type="none" w="med" len="med"/>
-                      <a:tailEnd type="none" w="med" len="med"/>
-                    </a:lnL>
-                    <a:lnR w="6350" cap="flat" cmpd="sng" algn="ctr">
-                      <a:solidFill>
-                        <a:srgbClr val="DCD9D0"/>
-                      </a:solidFill>
-                      <a:prstDash val="solid"/>
-                      <a:round/>
-                      <a:headEnd type="none" w="med" len="med"/>
-                      <a:tailEnd type="none" w="med" len="med"/>
-                    </a:lnR>
-                    <a:lnT w="6350" cap="flat" cmpd="sng" algn="ctr">
-                      <a:solidFill>
-                        <a:srgbClr val="DCD9D0"/>
-                      </a:solidFill>
-                      <a:prstDash val="solid"/>
-                      <a:round/>
-                      <a:headEnd type="none" w="med" len="med"/>
-                      <a:tailEnd type="none" w="med" len="med"/>
-                    </a:lnT>
-                    <a:lnB w="6350" cap="flat" cmpd="sng" algn="ctr">
-                      <a:solidFill>
-                        <a:srgbClr val="DCD9D0"/>
-                      </a:solidFill>
-                      <a:prstDash val="solid"/>
-                      <a:round/>
-                      <a:headEnd type="none" w="med" len="med"/>
-                      <a:tailEnd type="none" w="med" len="med"/>
-                    </a:lnB>
-                  </a:tcPr>
-                </a:tc>
-              </a:tr>
-              <a:tr h="384048">
-                <a:tc>
-                  <a:txBody>
-                    <a:bodyPr/>
-                    <a:lstStyle/>
                     <a:p>
                       <a:pPr indent="0" marL="0">
                         <a:buNone/>
                       </a:pPr>
                       <a:r>
-                        <a:rPr lang="en-US" sz="1050" b="1" dirty="0">
+                        <a:rPr lang="en-US" sz="1150" dirty="0">
                           <a:solidFill>
                             <a:srgbClr val="15171A"/>
                           </a:solidFill>
                         </a:rPr>
-                        <a:t>클라우드 · 인프라</a:t>
+                        <a:t>시각은 서버가 찍음</a:t>
                       </a:r>
-                      <a:endParaRPr lang="en-US" sz="1050" dirty="0"/>
-                    </a:p>
-                  </a:txBody>
-                  <a:tcPr marL="91440" marR="91440" marT="36576" marB="36576" anchor="ctr">
-                    <a:lnL w="6350" cap="flat" cmpd="sng" algn="ctr">
-                      <a:solidFill>
-                        <a:srgbClr val="DCD9D0"/>
-                      </a:solidFill>
-                      <a:prstDash val="solid"/>
-                      <a:round/>
-                      <a:headEnd type="none" w="med" len="med"/>
-                      <a:tailEnd type="none" w="med" len="med"/>
-                    </a:lnL>
-                    <a:lnR w="6350" cap="flat" cmpd="sng" algn="ctr">
-                      <a:solidFill>
-                        <a:srgbClr val="DCD9D0"/>
-                      </a:solidFill>
-                      <a:prstDash val="solid"/>
-                      <a:round/>
-                      <a:headEnd type="none" w="med" len="med"/>
-                      <a:tailEnd type="none" w="med" len="med"/>
-                    </a:lnR>
-                    <a:lnT w="6350" cap="flat" cmpd="sng" algn="ctr">
-                      <a:solidFill>
-                        <a:srgbClr val="DCD9D0"/>
-                      </a:solidFill>
-                      <a:prstDash val="solid"/>
-                      <a:round/>
-                      <a:headEnd type="none" w="med" len="med"/>
-                      <a:tailEnd type="none" w="med" len="med"/>
-                    </a:lnT>
-                    <a:lnB w="6350" cap="flat" cmpd="sng" algn="ctr">
-                      <a:solidFill>
-                        <a:srgbClr val="DCD9D0"/>
-                      </a:solidFill>
-                      <a:prstDash val="solid"/>
-                      <a:round/>
-                      <a:headEnd type="none" w="med" len="med"/>
-                      <a:tailEnd type="none" w="med" len="med"/>
-                    </a:lnB>
-                  </a:tcPr>
-                </a:tc>
-                <a:tc>
-                  <a:txBody>
-                    <a:bodyPr/>
-                    <a:lstStyle/>
-                    <a:p>
-                      <a:pPr indent="0" marL="0">
-                        <a:buNone/>
-                      </a:pPr>
-                      <a:r>
-                        <a:rPr lang="en-US" sz="1050" dirty="0">
-                          <a:solidFill>
-                            <a:srgbClr val="15171A"/>
-                          </a:solidFill>
-                        </a:rPr>
-                        <a:t>GitHub Pages + GitHub Actions</a:t>
-                      </a:r>
-                      <a:endParaRPr lang="en-US" sz="1050" dirty="0"/>
-                    </a:p>
-                  </a:txBody>
-                  <a:tcPr marL="91440" marR="91440" marT="36576" marB="36576" anchor="ctr">
-                    <a:lnL w="6350" cap="flat" cmpd="sng" algn="ctr">
-                      <a:solidFill>
-                        <a:srgbClr val="DCD9D0"/>
-                      </a:solidFill>
-                      <a:prstDash val="solid"/>
-                      <a:round/>
-                      <a:headEnd type="none" w="med" len="med"/>
-                      <a:tailEnd type="none" w="med" len="med"/>
-                    </a:lnL>
-                    <a:lnR w="6350" cap="flat" cmpd="sng" algn="ctr">
-                      <a:solidFill>
-                        <a:srgbClr val="DCD9D0"/>
-                      </a:solidFill>
-                      <a:prstDash val="solid"/>
-                      <a:round/>
-                      <a:headEnd type="none" w="med" len="med"/>
-                      <a:tailEnd type="none" w="med" len="med"/>
-                    </a:lnR>
-                    <a:lnT w="6350" cap="flat" cmpd="sng" algn="ctr">
-                      <a:solidFill>
-                        <a:srgbClr val="DCD9D0"/>
-                      </a:solidFill>
-                      <a:prstDash val="solid"/>
-                      <a:round/>
-                      <a:headEnd type="none" w="med" len="med"/>
-                      <a:tailEnd type="none" w="med" len="med"/>
-                    </a:lnT>
-                    <a:lnB w="6350" cap="flat" cmpd="sng" algn="ctr">
-                      <a:solidFill>
-                        <a:srgbClr val="DCD9D0"/>
-                      </a:solidFill>
-                      <a:prstDash val="solid"/>
-                      <a:round/>
-                      <a:headEnd type="none" w="med" len="med"/>
-                      <a:tailEnd type="none" w="med" len="med"/>
-                    </a:lnB>
-                  </a:tcPr>
-                </a:tc>
-                <a:tc>
-                  <a:txBody>
-                    <a:bodyPr/>
-                    <a:lstStyle/>
-                    <a:p>
-                      <a:pPr indent="0" marL="0">
-                        <a:buNone/>
-                      </a:pPr>
-                      <a:r>
-                        <a:rPr lang="en-US" sz="1050" dirty="0">
-                          <a:solidFill>
-                            <a:srgbClr val="15171A"/>
-                          </a:solidFill>
-                        </a:rPr>
-                        <a:t>main에 올리면 자동 빌드 · 배포</a:t>
-                      </a:r>
-                      <a:endParaRPr lang="en-US" sz="1050" dirty="0"/>
+                      <a:endParaRPr lang="en-US" sz="1150" dirty="0"/>
                     </a:p>
                   </a:txBody>
                   <a:tcPr marL="91440" marR="91440" marT="36576" marB="36576" anchor="ctr">
@@ -21982,14 +21820,14 @@
                         <a:buNone/>
                       </a:pPr>
                       <a:r>
-                        <a:rPr lang="en-US" sz="1050" b="1" dirty="0">
+                        <a:rPr lang="en-US" sz="1150" b="1" dirty="0">
                           <a:solidFill>
                             <a:srgbClr val="15171A"/>
                           </a:solidFill>
                         </a:rPr>
-                        <a:t>AI</a:t>
+                        <a:t>클라우드 · 인프라</a:t>
                       </a:r>
-                      <a:endParaRPr lang="en-US" sz="1050" dirty="0"/>
+                      <a:endParaRPr lang="en-US" sz="1150" dirty="0"/>
                     </a:p>
                   </a:txBody>
                   <a:tcPr marL="91440" marR="91440" marT="36576" marB="36576" anchor="ctr">
@@ -22040,14 +21878,14 @@
                         <a:buNone/>
                       </a:pPr>
                       <a:r>
-                        <a:rPr lang="en-US" sz="1050" dirty="0">
+                        <a:rPr lang="en-US" sz="1150" dirty="0">
                           <a:solidFill>
                             <a:srgbClr val="15171A"/>
                           </a:solidFill>
                         </a:rPr>
-                        <a:t>Claude API (선택, 개발 환경에서만)</a:t>
+                        <a:t>GitHub Pages + GitHub Actions</a:t>
                       </a:r>
-                      <a:endParaRPr lang="en-US" sz="1050" dirty="0"/>
+                      <a:endParaRPr lang="en-US" sz="1150" dirty="0"/>
                     </a:p>
                   </a:txBody>
                   <a:tcPr marL="91440" marR="91440" marT="36576" marB="36576" anchor="ctr">
@@ -22098,14 +21936,14 @@
                         <a:buNone/>
                       </a:pPr>
                       <a:r>
-                        <a:rPr lang="en-US" sz="1050" dirty="0">
+                        <a:rPr lang="en-US" sz="1150" dirty="0">
                           <a:solidFill>
                             <a:srgbClr val="15171A"/>
                           </a:solidFill>
                         </a:rPr>
-                        <a:t>배포 앱은 API 키 없이 정해진 문구로 동작. 기록을 밖으로 안 보내려고 기본은 끔</a:t>
+                        <a:t>올리면 자동 배포</a:t>
                       </a:r>
-                      <a:endParaRPr lang="en-US" sz="1050" dirty="0"/>
+                      <a:endParaRPr lang="en-US" sz="1150" dirty="0"/>
                     </a:p>
                   </a:txBody>
                   <a:tcPr marL="91440" marR="91440" marT="36576" marB="36576" anchor="ctr">
@@ -22148,7 +21986,7 @@
                   </a:tcPr>
                 </a:tc>
               </a:tr>
-              <a:tr h="457200">
+              <a:tr h="475488">
                 <a:tc>
                   <a:txBody>
                     <a:bodyPr/>
@@ -22158,14 +21996,14 @@
                         <a:buNone/>
                       </a:pPr>
                       <a:r>
-                        <a:rPr lang="en-US" sz="1050" b="1" dirty="0">
+                        <a:rPr lang="en-US" sz="1150" b="1" dirty="0">
                           <a:solidFill>
                             <a:srgbClr val="15171A"/>
                           </a:solidFill>
                         </a:rPr>
-                        <a:t>SaaS · 분석</a:t>
+                        <a:t>AI</a:t>
                       </a:r>
-                      <a:endParaRPr lang="en-US" sz="1050" dirty="0"/>
+                      <a:endParaRPr lang="en-US" sz="1150" dirty="0"/>
                     </a:p>
                   </a:txBody>
                   <a:tcPr marL="91440" marR="91440" marT="36576" marB="36576" anchor="ctr">
@@ -22216,14 +22054,14 @@
                         <a:buNone/>
                       </a:pPr>
                       <a:r>
-                        <a:rPr lang="en-US" sz="1050" dirty="0">
+                        <a:rPr lang="en-US" sz="1150" dirty="0">
                           <a:solidFill>
                             <a:srgbClr val="15171A"/>
                           </a:solidFill>
                         </a:rPr>
-                        <a:t>설문 페이지 + 자동 집계 페이지, 직접 인터뷰</a:t>
+                        <a:t>Claude API (선택, 개발 환경에서만)</a:t>
                       </a:r>
-                      <a:endParaRPr lang="en-US" sz="1050" dirty="0"/>
+                      <a:endParaRPr lang="en-US" sz="1150" dirty="0"/>
                     </a:p>
                   </a:txBody>
                   <a:tcPr marL="91440" marR="91440" marT="36576" marB="36576" anchor="ctr">
@@ -22274,14 +22112,190 @@
                         <a:buNone/>
                       </a:pPr>
                       <a:r>
-                        <a:rPr lang="en-US" sz="1050" dirty="0">
+                        <a:rPr lang="en-US" sz="1150" dirty="0">
                           <a:solidFill>
                             <a:srgbClr val="15171A"/>
                           </a:solidFill>
                         </a:rPr>
-                        <a:t>로그인이 없어 사용 로그 대신 설문 · 인터뷰로 측정</a:t>
+                        <a:t>기록을 밖으로 안 보내려고 기본은 끔</a:t>
                       </a:r>
-                      <a:endParaRPr lang="en-US" sz="1050" dirty="0"/>
+                      <a:endParaRPr lang="en-US" sz="1150" dirty="0"/>
+                    </a:p>
+                  </a:txBody>
+                  <a:tcPr marL="91440" marR="91440" marT="36576" marB="36576" anchor="ctr">
+                    <a:lnL w="6350" cap="flat" cmpd="sng" algn="ctr">
+                      <a:solidFill>
+                        <a:srgbClr val="DCD9D0"/>
+                      </a:solidFill>
+                      <a:prstDash val="solid"/>
+                      <a:round/>
+                      <a:headEnd type="none" w="med" len="med"/>
+                      <a:tailEnd type="none" w="med" len="med"/>
+                    </a:lnL>
+                    <a:lnR w="6350" cap="flat" cmpd="sng" algn="ctr">
+                      <a:solidFill>
+                        <a:srgbClr val="DCD9D0"/>
+                      </a:solidFill>
+                      <a:prstDash val="solid"/>
+                      <a:round/>
+                      <a:headEnd type="none" w="med" len="med"/>
+                      <a:tailEnd type="none" w="med" len="med"/>
+                    </a:lnR>
+                    <a:lnT w="6350" cap="flat" cmpd="sng" algn="ctr">
+                      <a:solidFill>
+                        <a:srgbClr val="DCD9D0"/>
+                      </a:solidFill>
+                      <a:prstDash val="solid"/>
+                      <a:round/>
+                      <a:headEnd type="none" w="med" len="med"/>
+                      <a:tailEnd type="none" w="med" len="med"/>
+                    </a:lnT>
+                    <a:lnB w="6350" cap="flat" cmpd="sng" algn="ctr">
+                      <a:solidFill>
+                        <a:srgbClr val="DCD9D0"/>
+                      </a:solidFill>
+                      <a:prstDash val="solid"/>
+                      <a:round/>
+                      <a:headEnd type="none" w="med" len="med"/>
+                      <a:tailEnd type="none" w="med" len="med"/>
+                    </a:lnB>
+                  </a:tcPr>
+                </a:tc>
+              </a:tr>
+              <a:tr h="475488">
+                <a:tc>
+                  <a:txBody>
+                    <a:bodyPr/>
+                    <a:lstStyle/>
+                    <a:p>
+                      <a:pPr indent="0" marL="0">
+                        <a:buNone/>
+                      </a:pPr>
+                      <a:r>
+                        <a:rPr lang="en-US" sz="1150" b="1" dirty="0">
+                          <a:solidFill>
+                            <a:srgbClr val="15171A"/>
+                          </a:solidFill>
+                        </a:rPr>
+                        <a:t>SaaS · 분석</a:t>
+                      </a:r>
+                      <a:endParaRPr lang="en-US" sz="1150" dirty="0"/>
+                    </a:p>
+                  </a:txBody>
+                  <a:tcPr marL="91440" marR="91440" marT="36576" marB="36576" anchor="ctr">
+                    <a:lnL w="6350" cap="flat" cmpd="sng" algn="ctr">
+                      <a:solidFill>
+                        <a:srgbClr val="DCD9D0"/>
+                      </a:solidFill>
+                      <a:prstDash val="solid"/>
+                      <a:round/>
+                      <a:headEnd type="none" w="med" len="med"/>
+                      <a:tailEnd type="none" w="med" len="med"/>
+                    </a:lnL>
+                    <a:lnR w="6350" cap="flat" cmpd="sng" algn="ctr">
+                      <a:solidFill>
+                        <a:srgbClr val="DCD9D0"/>
+                      </a:solidFill>
+                      <a:prstDash val="solid"/>
+                      <a:round/>
+                      <a:headEnd type="none" w="med" len="med"/>
+                      <a:tailEnd type="none" w="med" len="med"/>
+                    </a:lnR>
+                    <a:lnT w="6350" cap="flat" cmpd="sng" algn="ctr">
+                      <a:solidFill>
+                        <a:srgbClr val="DCD9D0"/>
+                      </a:solidFill>
+                      <a:prstDash val="solid"/>
+                      <a:round/>
+                      <a:headEnd type="none" w="med" len="med"/>
+                      <a:tailEnd type="none" w="med" len="med"/>
+                    </a:lnT>
+                    <a:lnB w="6350" cap="flat" cmpd="sng" algn="ctr">
+                      <a:solidFill>
+                        <a:srgbClr val="DCD9D0"/>
+                      </a:solidFill>
+                      <a:prstDash val="solid"/>
+                      <a:round/>
+                      <a:headEnd type="none" w="med" len="med"/>
+                      <a:tailEnd type="none" w="med" len="med"/>
+                    </a:lnB>
+                  </a:tcPr>
+                </a:tc>
+                <a:tc>
+                  <a:txBody>
+                    <a:bodyPr/>
+                    <a:lstStyle/>
+                    <a:p>
+                      <a:pPr indent="0" marL="0">
+                        <a:buNone/>
+                      </a:pPr>
+                      <a:r>
+                        <a:rPr lang="en-US" sz="1150" dirty="0">
+                          <a:solidFill>
+                            <a:srgbClr val="15171A"/>
+                          </a:solidFill>
+                        </a:rPr>
+                        <a:t>설문 페이지 + 자동 집계 페이지, 직접 인터뷰</a:t>
+                      </a:r>
+                      <a:endParaRPr lang="en-US" sz="1150" dirty="0"/>
+                    </a:p>
+                  </a:txBody>
+                  <a:tcPr marL="91440" marR="91440" marT="36576" marB="36576" anchor="ctr">
+                    <a:lnL w="6350" cap="flat" cmpd="sng" algn="ctr">
+                      <a:solidFill>
+                        <a:srgbClr val="DCD9D0"/>
+                      </a:solidFill>
+                      <a:prstDash val="solid"/>
+                      <a:round/>
+                      <a:headEnd type="none" w="med" len="med"/>
+                      <a:tailEnd type="none" w="med" len="med"/>
+                    </a:lnL>
+                    <a:lnR w="6350" cap="flat" cmpd="sng" algn="ctr">
+                      <a:solidFill>
+                        <a:srgbClr val="DCD9D0"/>
+                      </a:solidFill>
+                      <a:prstDash val="solid"/>
+                      <a:round/>
+                      <a:headEnd type="none" w="med" len="med"/>
+                      <a:tailEnd type="none" w="med" len="med"/>
+                    </a:lnR>
+                    <a:lnT w="6350" cap="flat" cmpd="sng" algn="ctr">
+                      <a:solidFill>
+                        <a:srgbClr val="DCD9D0"/>
+                      </a:solidFill>
+                      <a:prstDash val="solid"/>
+                      <a:round/>
+                      <a:headEnd type="none" w="med" len="med"/>
+                      <a:tailEnd type="none" w="med" len="med"/>
+                    </a:lnT>
+                    <a:lnB w="6350" cap="flat" cmpd="sng" algn="ctr">
+                      <a:solidFill>
+                        <a:srgbClr val="DCD9D0"/>
+                      </a:solidFill>
+                      <a:prstDash val="solid"/>
+                      <a:round/>
+                      <a:headEnd type="none" w="med" len="med"/>
+                      <a:tailEnd type="none" w="med" len="med"/>
+                    </a:lnB>
+                  </a:tcPr>
+                </a:tc>
+                <a:tc>
+                  <a:txBody>
+                    <a:bodyPr/>
+                    <a:lstStyle/>
+                    <a:p>
+                      <a:pPr indent="0" marL="0">
+                        <a:buNone/>
+                      </a:pPr>
+                      <a:r>
+                        <a:rPr lang="en-US" sz="1150" dirty="0">
+                          <a:solidFill>
+                            <a:srgbClr val="15171A"/>
+                          </a:solidFill>
+                        </a:rPr>
+                        <a:t>로그인이 없어 설문 · 인터뷰로 측정</a:t>
+                      </a:r>
+                      <a:endParaRPr lang="en-US" sz="1150" dirty="0"/>
                     </a:p>
                   </a:txBody>
                   <a:tcPr marL="91440" marR="91440" marT="36576" marB="36576" anchor="ctr">
@@ -22608,7 +22622,7 @@
                   <a:schemeClr val="accent5"/>
                 </a:solidFill>
               </a:rPr>
-              <a:t>근무 기록 · 캘린더 · 급여 비교 · 정산 요청 · 설정</a:t>
+              <a:t>기록 · 캘린더 · 비교 · 요청</a:t>
             </a:r>
             <a:endParaRPr lang="en-US" sz="1100" dirty="0"/>
           </a:p>
@@ -22709,7 +22723,7 @@
                   <a:schemeClr val="accent5"/>
                 </a:solidFill>
               </a:rPr>
-              <a:t>급여(주휴 · 야간) · 예정 vs 실제 · 요청 문구 · PDF · 확인 번호</a:t>
+              <a:t>급여 · 요청 문구 · PDF · 확인 번호</a:t>
             </a:r>
             <a:endParaRPr lang="en-US" sz="1100" dirty="0"/>
           </a:p>
@@ -22810,7 +22824,7 @@
                   <a:schemeClr val="accent5"/>
                 </a:solidFill>
               </a:rPr>
-              <a:t>localStorage(기록 · 수정 이력) · IndexedDB(사진)</a:t>
+              <a:t>localStorage · IndexedDB</a:t>
             </a:r>
             <a:endParaRPr lang="en-US" sz="1100" dirty="0"/>
           </a:p>
@@ -23031,14 +23045,14 @@
               <a:buNone/>
             </a:pPr>
             <a:r>
-              <a:rPr lang="en-US" sz="1100" b="1" dirty="0">
+              <a:rPr lang="en-US" sz="1250" b="1" dirty="0">
                 <a:solidFill>
                   <a:schemeClr val="tx2"/>
                 </a:solidFill>
               </a:rPr>
               <a:t>Supabase</a:t>
             </a:r>
-            <a:endParaRPr lang="en-US" sz="1100" dirty="0"/>
+            <a:endParaRPr lang="en-US" sz="1250" dirty="0"/>
           </a:p>
           <a:p>
             <a:pPr indent="0" marL="0">
@@ -23048,14 +23062,14 @@
               <a:buNone/>
             </a:pPr>
             <a:r>
-              <a:rPr lang="en-US" sz="1100" b="1" dirty="0">
+              <a:rPr lang="en-US" sz="1250" b="1" dirty="0">
                 <a:solidFill>
                   <a:schemeClr val="tx1"/>
                 </a:solidFill>
               </a:rPr>
               <a:t>stamps 표</a:t>
             </a:r>
-            <a:endParaRPr lang="en-US" sz="1100" dirty="0"/>
+            <a:endParaRPr lang="en-US" sz="1250" dirty="0"/>
           </a:p>
           <a:p>
             <a:pPr indent="0" marL="0">
@@ -23065,14 +23079,14 @@
               <a:buNone/>
             </a:pPr>
             <a:r>
-              <a:rPr lang="en-US" sz="1000" dirty="0">
+              <a:rPr lang="en-US" sz="1150" dirty="0">
                 <a:solidFill>
                   <a:schemeClr val="accent5"/>
                 </a:solidFill>
               </a:rPr>
-              <a:t>확인 번호 · 기록 번호 · 기기 번호 · 등록 시각</a:t>
-            </a:r>
-            <a:endParaRPr lang="en-US" sz="1100" dirty="0"/>
+              <a:t>확인 번호 · 등록 시각</a:t>
+            </a:r>
+            <a:endParaRPr lang="en-US" sz="1250" dirty="0"/>
           </a:p>
           <a:p>
             <a:pPr indent="0" marL="0">
@@ -23082,14 +23096,14 @@
               <a:buNone/>
             </a:pPr>
             <a:r>
-              <a:rPr lang="en-US" sz="1000" dirty="0">
+              <a:rPr lang="en-US" sz="1150" dirty="0">
                 <a:solidFill>
                   <a:schemeClr val="accent5"/>
                 </a:solidFill>
               </a:rPr>
-              <a:t>공개키로는 넣기 · 읽기만(RLS). 시각은 서버가 찍음</a:t>
-            </a:r>
-            <a:endParaRPr lang="en-US" sz="1100" dirty="0"/>
+              <a:t>시각은 서버가 찍음</a:t>
+            </a:r>
+            <a:endParaRPr lang="en-US" sz="1250" dirty="0"/>
           </a:p>
           <a:p>
             <a:pPr indent="0" marL="0">
@@ -23099,14 +23113,14 @@
               <a:buNone/>
             </a:pPr>
             <a:r>
-              <a:rPr lang="en-US" sz="950" b="1" dirty="0">
+              <a:rPr lang="en-US" sz="1150" b="1" dirty="0">
                 <a:solidFill>
                   <a:schemeClr val="accent2"/>
                 </a:solidFill>
               </a:rPr>
-              <a:t>확인함: 수정 · 삭제 요청은 401로 거부, 2000년 시각을 보내도 서버 시각</a:t>
-            </a:r>
-            <a:endParaRPr lang="en-US" sz="1100" dirty="0"/>
+              <a:t>수정 · 삭제 안 됨</a:t>
+            </a:r>
+            <a:endParaRPr lang="en-US" sz="1250" dirty="0"/>
           </a:p>
         </p:txBody>
       </p:sp>
@@ -23241,7 +23255,7 @@
                   <a:schemeClr val="accent5"/>
                 </a:solidFill>
               </a:rPr>
-              <a:t>누구나 확인 번호 → 등록 시각. 앱 데이터 없이 동작</a:t>
+              <a:t>누구나 번호로 등록 시각 확인</a:t>
             </a:r>
             <a:endParaRPr lang="en-US" sz="1100" dirty="0"/>
           </a:p>
@@ -23374,7 +23388,7 @@
                   <a:schemeClr val="tx1"/>
                 </a:solidFill>
               </a:rPr>
-              <a:t>출근 · 퇴근 버튼마다 확인 번호를 등록</a:t>
+              <a:t>출근 · 퇴근마다 등록</a:t>
             </a:r>
             <a:endParaRPr lang="en-US" sz="1000" dirty="0"/>
           </a:p>
@@ -23471,7 +23485,7 @@
                   <a:schemeClr val="tx1"/>
                 </a:solidFill>
               </a:rPr>
-              <a:t>고치면 새 내용으로 다시 등록</a:t>
+              <a:t>고치면 다시 등록</a:t>
             </a:r>
             <a:endParaRPr lang="en-US" sz="1000" dirty="0"/>
           </a:p>
@@ -23568,7 +23582,7 @@
                   <a:schemeClr val="tx1"/>
                 </a:solidFill>
               </a:rPr>
-              <a:t>인터넷이 없으면 대기열, 연결되면 전송</a:t>
+              <a:t>인터넷이 없으면 나중에 전송</a:t>
             </a:r>
             <a:endParaRPr lang="en-US" sz="1000" dirty="0"/>
           </a:p>

--- a/docs/06_중간발표_PPT.pptx
+++ b/docs/06_중간발표_PPT.pptx
@@ -125,31 +125,31 @@
   <p:extLst>
     <p:ext uri="{521415D9-36F7-43E2-AB2F-B90AF26B5E84}">
       <p14:sectionLst xmlns:p14="http://schemas.microsoft.com/office/powerpoint/2010/main">
-        <p14:section name="① 표지·팀 소개" id="{e7d288c3-0361-35a1-4b0c-8a74b05872b6}">
+        <p14:section name="① 표지·팀 소개" id="{54bcb598-5a85-d93c-270a-3b8a2a85b7ee}">
           <p14:sldIdLst>
             <p14:sldId id="256"/>
             <p14:sldId id="257"/>
           </p14:sldIdLst>
         </p14:section>
-        <p14:section name="② 문제 정의" id="{1479644c-9c61-324a-022d-e62c43cf08c3}">
+        <p14:section name="② 문제 정의" id="{767f9cbe-21c1-94f9-baa0-1b427523e7f2}">
           <p14:sldIdLst>
             <p14:sldId id="258"/>
             <p14:sldId id="259"/>
           </p14:sldIdLst>
         </p14:section>
-        <p14:section name="③ 솔루션·핵심 가치" id="{153e4016-be10-1880-4cf0-83ef913cc55f}">
+        <p14:section name="③ 솔루션·핵심 가치" id="{ccee92e1-d26b-8852-e52b-29cae8c95201}">
           <p14:sldIdLst>
             <p14:sldId id="260"/>
             <p14:sldId id="261"/>
           </p14:sldIdLst>
         </p14:section>
-        <p14:section name="④ SW 기술 아키텍처" id="{61814e0f-efc5-b40e-ba47-65ab9e68a611}">
+        <p14:section name="④ SW 기술 아키텍처" id="{a3b08505-6cba-a46d-fd02-8c36934531ca}">
           <p14:sldIdLst>
             <p14:sldId id="262"/>
             <p14:sldId id="263"/>
           </p14:sldIdLst>
         </p14:section>
-        <p14:section name="⑤ 개발 현황·MVP 시연" id="{39c1ef8c-c2b4-7fbb-4d20-b518d3eaf207}">
+        <p14:section name="⑤ 개발 현황·MVP 시연" id="{eaab7e32-537b-726c-f06e-aafc64c4f779}">
           <p14:sldIdLst>
             <p14:sldId id="264"/>
             <p14:sldId id="265"/>
@@ -157,19 +157,19 @@
             <p14:sldId id="267"/>
           </p14:sldIdLst>
         </p14:section>
-        <p14:section name="⑥ 시장 분석·비즈니스 모델" id="{d4f165c5-10b4-21b8-68e5-4abf08d1d13b}">
+        <p14:section name="⑥ 시장 분석·비즈니스 모델" id="{9f2f84bd-54e2-1729-ec58-6c19b8a7decd}">
           <p14:sldIdLst>
             <p14:sldId id="268"/>
             <p14:sldId id="269"/>
             <p14:sldId id="270"/>
           </p14:sldIdLst>
         </p14:section>
-        <p14:section name="⑦ 초기 시장 검증" id="{773894f4-a283-298d-47b0-a911f76deb5d}">
+        <p14:section name="⑦ 초기 시장 검증" id="{1d06d188-13a1-144e-61c2-8bdb98d3eea1}">
           <p14:sldIdLst>
             <p14:sldId id="271"/>
           </p14:sldIdLst>
         </p14:section>
-        <p14:section name="⑧ 향후 계획·팀 역량" id="{7abda316-f843-b66f-0e29-02ad88872ebf}">
+        <p14:section name="⑧ 향후 계획·팀 역량" id="{d3be6aa4-2255-3527-4c35-9029d3b56df2}">
           <p14:sldIdLst>
             <p14:sldId id="272"/>
             <p14:sldId id="273"/>
@@ -1190,7 +1190,7 @@
           <a:p>
             <a:r>
               <a:rPr lang="en-US" dirty="0"/>
-              <a:t>손유호. 타깃 규모에서 지금 알바 중인 사람과 주 15시간 이상인 사람은 공식 통계가 없어 미상입니다. 상한 210~270만 명은 알바 경험 기준입니다. 타이밍: 2025년 9월 임금체불 근절 대책과 10월 23일 개정 근로기준법 시행으로 체불 제재가 세졌고, 근거를 남긴 사람이 받아 내기 쉬워졌습니다. 임금체불은 2년 연속 2조 원이고 30인 미만 사업장에 몰려 있습니다. 타깃 규모는 어림이라 "약"을 붙여 말하고, 없는 숫자(지금 알바 중, 주 15시간 이상)는 미상으로 둡니다. 재적학생은 교육부 2026 교육기본통계(대학원 포함), 알바 경험률은 알바몬 설문(1,193명, 여름방학 알바 88.9%, 2023)과 동대신문 설문(200명, 67.5%)이라 대푯값이 아닙니다. 근절 대책은 대지급금을 3개월분에서 6개월분으로 늘렸고, 개정법은 상습 체불 사업주에게 신용 제재를 겁니다. 체불 통계는 문제의 크기이지 알바 시장의 크기가 아닙니다. 알바생 몫은 이 통계에서 알 수 없어 미상으로 둡니다. "주 15시간 이상이 다수인지의 첫 조각은 지금 답하고 계신 설문에서 나오지만, 규모 추정이 아니라 메시지를 정하는 참고값입니다. 다음 순서에서 박명진이 말씀드립니다." 출처: 고용노동부 노동포털 임금체불 통계현황, 알바천국 설문, 교육부 교육기본통계.</a:t>
+              <a:t>손유호. 임금체불은 2년 연속 2조 원이고 30인 미만 사업장에 몰려 있습니다. 체불 통계는 문제의 크기이지 알바 시장의 크기가 아니고, 알바생 몫은 이 통계에서 알 수 없습니다. 타깃 규모는 어림이라 "약"을 붙여 말합니다. 상한 210~270만 명은 알바 경험 기준이고, 지금 알바 중인 사람과 주 15시간 이상인 사람은 공식 통계가 없어 미상으로 둡니다. 재적학생은 교육부 2026 교육기본통계(대학원 포함), 알바 경험률은 알바몬 설문(1,193명, 여름방학 알바 88.9%, 2023)과 동대신문 설문(200명, 67.5%)이라 대푯값이 아닙니다. 타이밍: 2025년 9월 임금체불 근절 대책은 대지급금을 3개월분에서 6개월분으로 늘렸고, 10월 23일 시행된 개정 근로기준법은 상습 체불 사업주에게 신용 제재를 겁니다. 체불 제재가 세졌습니다. 출처: 고용노동부 노동포털 임금체불 통계현황, 알바천국 설문, 교육부 교육기본통계.</a:t>
             </a:r>
             <a:endParaRPr lang="en-US" dirty="0"/>
           </a:p>
@@ -1366,7 +1366,7 @@
           <a:p>
             <a:r>
               <a:rPr lang="en-US" dirty="0"/>
-              <a:t>손유호. 핵심 화면은 신뢰가 핵심이라 광고를 섞지 않습니다. 단가를 모르니 매출 추정은 적지 않았습니다. 정산 문구 · 내용증명 · 증빙 묶음을 돈 받고 만들면 변호사법 · 공인노무사법 문제에 가까워져서 유료화하지 않습니다. 유저 확보는 에브리타임 · 학과 단톡 · 알바 커뮤니티에 링크를 올리고, "주휴수당 계산법" 같은 짧은 영상을 만듭니다. 알바비 앱에 왜 게임이 있나: 출퇴근은 일하는 날마다 누르지만, 돈을 확인하는 건 급여일에 한 번이라, 그 사이에도 앱을 열 이유로 넣었고 그 화면이 광고 자리입니다. 처음엔 근무 중에만 열렸는데 팀원 의견으로 10/25에 조건을 풀고 설정에서 숨길 수 있게 했습니다. 광고 형식은 웹앱이라 배너 · 전면이 기본이고 보상형은 승인이 필요합니다. 2차 구독은 폰을 바꾸거나 잃어버려도 기록이 남게 하는 선택 기능이고, 원하는 사람만 쓰므로 "근무 내용은 폰 안에만" 원칙과 부딪히지 않습니다. 문서를 돈 받고 만들어 주는 건 법적 이유로 하지 않습니다(웹 조사 기준, 전문가 검토 아님). 광고 가설은 설문의 "게임 화면 광고" 문항과 승인 뒤 게임 화면 열람 수로 확인합니다. 운영 비용은 지금 서버 0원 · 배포 0원이라 수익이 0이어도 서비스는 돌아가고, 인건비는 팀 3명입니다.</a:t>
+              <a:t>손유호. 기록 · 비교 · 요청 화면은 믿고 쓰는 것이 중요해서 광고를 섞지 않습니다. 단가를 모르니 매출 추정은 적지 않았습니다. 정산 문구 · 내용증명 · 증빙 묶음을 돈 받고 만들면 변호사법 · 공인노무사법 문제에 가까워져서 유료화하지 않습니다(웹 조사 기준, 전문가 검토 아님). 유저 확보는 에브리타임 · 학과 단톡 · 알바 커뮤니티에 링크를 올리고, "주휴수당 계산법" 같은 짧은 영상을 만듭니다. 알바비 앱에 왜 게임이 있나: 출퇴근은 일하는 날마다 누르지만, 돈을 확인하는 건 급여일에 한 번이라, 그 사이에도 앱을 열 이유로 넣었고 그 화면이 광고 자리입니다. 처음엔 근무 중에만 열렸는데 팀원 의견으로 10/25에 조건을 풀고 설정에서 숨길 수 있게 했습니다. 광고 형식은 웹앱이라 배너 · 전면이 기본이고 보상형은 승인이 필요합니다. 2차 구독은 폰을 바꾸거나 잃어버려도 기록이 남게 하는 선택 기능이고, 원하는 사람만 쓰므로 "근무 내용은 폰 안에만" 원칙과 부딪히지 않습니다. 광고 가설은 설문의 "게임 화면 광고" 문항과 승인 뒤 게임 화면 열람 수로 확인합니다. 운영 비용은 지금 서버 0원 · 배포 0원이라 수익이 0이어도 서비스는 돌아가고, 인건비는 팀 3명입니다. 넘길 때: "주 15시간 이상이 다수인지는 지금 답하고 계신 설문에서 첫 조각이 나옵니다. 검증 계획은 박명진이 말씀드립니다."</a:t>
             </a:r>
             <a:endParaRPr lang="en-US" dirty="0"/>
           </a:p>
@@ -2007,7 +2007,7 @@
           <a:p>
             <a:r>
               <a:rPr lang="en-US" dirty="0"/>
-              <a:t>무료 앱이 실제로 겨루는 상대는 다른 앱보다 메모장과 통장 확인입니다. 그래서 첫 열에 넣었습니다. 하우머치는 혼자 쓸 수 있지만 예상 급여에서 멈추고, 기그는 사장 연동이 필요하고, 계산기는 기록이 없고, 진정24는 증거가 있어야 시작합니다. 가운데 세 줄은 다른 서비스가 모두 X이고 알바가드만 O입니다. 그 세 줄이 저희가 채우는 부분입니다. 마지막 줄 진정 접수는 저희가 일부러 안 합니다. 1350과 노동포털로 연결만 합니다.</a:t>
+              <a:t>무료 앱이 실제로 겨루는 상대는 다른 앱이 아니라 메모장과 통장 확인입니다. 그래서 첫 열에 넣었습니다. 하우머치는 혼자 쓸 수 있지만 예상 급여에서 멈추고, 기그는 사장 연동이 필요하고, 계산기는 기록이 없고, 진정24는 증거가 있어야 시작합니다. 가운데 세 줄은 알바가드에만 있습니다. 카톡은 보낸 시각이 남지만 무엇을 왜 고쳤는지는 남지 않아 △입니다. 그 세 줄이 저희가 채우는 부분입니다. 마지막 줄 진정 접수는 저희가 일부러 안 합니다. 1350과 노동포털로 연결만 합니다.</a:t>
             </a:r>
             <a:endParaRPr lang="en-US" dirty="0"/>
           </a:p>
@@ -2183,7 +2183,7 @@
           <a:p>
             <a:r>
               <a:rPr lang="en-US" dirty="0"/>
-              <a:t>1번은 기그와 달리 사장이 가입하지 않아도 된다는 뜻입니다. 2번은 실제 받은 돈과 비교해 차액을 찾고 요청 문구와 증빙 묶음까지 잇는 것으로, 비교한 네 서비스 모두 없습니다. 3번은 누구나 확인 페이지에서 등록 시각을 볼 수 있고, 내용으로 번호를 다시 계산하는 방법은 기말까지 만듭니다. 한계 상자의 "기록 구조"는 사유 없이 못 고침 · 삭제도 흔적 · 고치면 다시 등록입니다. 통장 내역 · 메시지와 함께 내야 힘이 생긴다는 말은 앱의 증빙 문서 맨 아래에도 적혀 있습니다. 법적 효력을 보장한다고 말하지 않고, 근로감독관 · 법원이 판단할 자료를 정리해 준다고 말합니다. 세 번째가 따라 하기 어려운 차별점입니다. 기능 하나가 아니라 기록 구조라서, 사유 없이는 못 고치고 삭제해도 흔적이 남고 고치면 다시 등록됩니다. 기존 급여 앱이 넣으려면 사용자가 기록을 마음대로 고치던 방식을 포기해야 합니다. 지금 확인 페이지는 번호의 서버 등록 시각까지 보여 주고, 기록 내용에서 번호를 다시 계산해 맞춰 보는 방법은 기말까지 만듭니다(그래서 12장에서 70%). 근무지 · 시각 · 금액은 서버로 가지 않고, "그날 실제로 일했다"까지는 증명하지 못합니다. 한계는 먼저 말합니다. "법적 효력" 질문이 오면 보장하지 않는다고 답하고, 판단할 자료를 정리해 준다고 말합니다.</a:t>
+              <a:t>1번은 기그와 달리 사장이 가입하지 않아도 된다는 뜻입니다. 2번은 실제 받은 돈과 비교해 차액을 찾고 요청 문구와 증빙 묶음까지 잇는 것으로, 비교한 네 서비스 모두 없습니다. 3번이 따라 하기 어려운 차별점입니다. 기능 하나가 아니라 기록 구조라서, 사유 없이는 못 고치고 삭제해도 흔적이 남고 고치면 다시 등록됩니다. 기존 급여 앱이 넣으려면 사용자가 기록을 마음대로 고치던 방식을 포기해야 합니다. 지금 확인 페이지는 번호의 서버 등록 시각까지 보여 주고, 기록 내용에서 번호를 다시 계산해 맞춰 보는 방법은 기말까지 만듭니다(그래서 12장에서 70%). 근무지 · 시각 · 금액은 서버로 가지 않고, "그날 실제로 일했다"까지는 증명하지 못합니다. 한계는 먼저 말합니다. 통장 내역 · 메시지와 함께 내야 힘이 생긴다는 말은 앱의 증빙 문서 맨 아래에도 적혀 있습니다. "법적 효력" 질문이 오면 보장하지 않는다고 답하고, 근로감독관 · 법원이 판단할 자료를 정리해 준다고 말합니다.</a:t>
             </a:r>
             <a:endParaRPr lang="en-US" dirty="0"/>
           </a:p>
@@ -2271,7 +2271,7 @@
           <a:p>
             <a:r>
               <a:rPr lang="en-US" dirty="0"/>
-              <a:t>표의 이유를 풀면: 스토어 심사 없이 링크로 배포해 의견을 듣고 바로 고칩니다. 서버는 확인 번호 등록과 설문 수집에만 씁니다. 공개키로는 넣기 · 읽기만 되고(RLS) 시각은 서버가 찍지만, 운영자 조작까지 막지는 못합니다. main에 올리면 GitHub Actions가 자동으로 빌드 · 배포합니다. 배포 앱은 API 키 없이 정해진 문구로 동작합니다. 한 학기 안에 혼자 만들 수 있는 구성입니다. 서버를 최소로 둔 이유는 개인정보와 비용 둘 다입니다. 배포는 링크 하나라 사용자 의견을 듣고 바로 고칠 수 있습니다.</a:t>
+              <a:t>표의 이유를 풀면: 스토어 심사 없이 링크로 배포해서, 사용자 의견을 듣고 바로 고칠 수 있습니다. 서버는 확인 번호 등록과 설문 수집에만 씁니다. 서버를 최소로 둔 이유는 개인정보와 비용 둘 다입니다. 공개키로는 넣기 · 읽기만 되고(RLS) 시각은 서버가 찍지만, 운영자 조작까지 막지는 못합니다. main에 올리면 GitHub Actions가 자동으로 빌드 · 배포합니다. 배포 앱은 API 키 없이 정해진 문구로 동작합니다. 한 학기 안에 혼자 만들 수 있는 구성입니다.</a:t>
             </a:r>
             <a:endParaRPr lang="en-US" dirty="0"/>
           </a:p>
@@ -2359,7 +2359,7 @@
           <a:p>
             <a:r>
               <a:rPr lang="en-US" dirty="0"/>
-              <a:t>상자를 풀면: 화면은 근무 기록 · 캘린더 · 급여 비교 · 정산 요청 · 설정, 계산 모듈은 급여(주휴 · 야간) · 예정 vs 실제 · 요청 문구 · PDF · 확인 번호, 저장은 localStorage(기록 · 수정 이력)와 IndexedDB(사진)입니다. stamps 표에는 확인 번호 · 기록 번호 · 무작위 기기 번호 · 등록 시각이 들어갑니다. 확인함: 공개키로 수정 · 삭제 요청을 보내면 401로 거부되고, 2000년 시각을 보내도 서버 시각으로 저장됩니다. 확인 페이지는 앱 데이터 없이 동작합니다. 왼쪽 폰 안에서 모든 계산이 끝나고, 서버로 가는 건 확인 번호뿐입니다. 기기 번호는 처음 기록을 등록할 때 앱이 만든 난수라 휴대전화 번호가 아닙니다. 앱이 쓰는 공개키로는 넣기와 읽기만 되고, 직접 요청을 보내 확인했습니다. 2000년 시각을 보내도 서버 시각으로 들어가고, 수정 · 삭제는 401로 거부됩니다. 다만 운영자 권한으로는 고칠 수 있어서, 지금 막는 건 "사용자가 나중에 고쳐 쓰기"까지입니다. 운영자까지 못 고치게 하는 외부 시점 확인은 비용 때문에 계획입니다. 오른쪽은 기록 하나가 남을 때의 흐름입니다. 증빙 묶음 PDF 7번 표에 기록별 확인 번호와 등록 시각이 들어갑니다. 배포는 GitHub main에 올리면 Actions가 Pages로 자동 배포합니다. 지금 답하고 계신 설문도 같은 서버의 survey 표로 가고, 권한 원칙이 같습니다.</a:t>
+              <a:t>상자를 풀면: 화면은 근무 기록 · 캘린더 · 급여 비교 · 정산 요청 · 설정, 계산 모듈은 급여(주휴 · 야간) · 예정 vs 실제 · 요청 문구 · PDF · 확인 번호, 저장은 localStorage(기록 · 수정 이력)와 IndexedDB(사진)입니다. 왼쪽 폰 안에서 모든 계산이 끝나고, 서버로 가는 건 확인 번호 · 기록 번호 · 무작위 기기 번호뿐입니다. 기기 번호는 처음 기록을 등록할 때 앱이 만든 난수라 휴대전화 번호가 아닙니다. 앱이 쓰는 공개키로는 넣기와 읽기만 되고, 직접 요청을 보내 확인했습니다. 2000년 시각을 보내도 서버 시각으로 들어가고, 수정 · 삭제는 401로 거부됩니다. 다만 운영자 권한으로는 고칠 수 있어서, 지금 막는 건 "사용자가 나중에 고쳐 쓰기"까지입니다. 운영자까지 못 고치게 하는 외부 시점 확인은 비용 때문에 계획입니다. 오른쪽은 기록 하나가 남을 때의 흐름입니다. 증빙 묶음 PDF 7번 표에 기록별 확인 번호와 등록 시각이 들어가고, 확인 페이지는 앱 데이터 없이 동작합니다. 지금 답하고 계신 설문도 같은 서버의 survey 표로 가고, 권한 원칙이 같습니다.</a:t>
             </a:r>
             <a:endParaRPr lang="en-US" dirty="0"/>
           </a:p>
@@ -5832,7 +5832,7 @@
                   <a:schemeClr val="accent5"/>
                 </a:solidFill>
               </a:rPr>
-              <a:t>매달 넣을지 검증(가설 1)</a:t>
+              <a:t>매달 넣을지 검증(16장 1행)</a:t>
             </a:r>
             <a:endParaRPr lang="en-US" sz="1050" dirty="0"/>
           </a:p>
@@ -7293,7 +7293,7 @@
                   <a:schemeClr val="accent5"/>
                 </a:solidFill>
               </a:rPr>
-              <a:t>2025년 체불액 중 30인 미만 사업장 (1조 4,012억 원). 카페 · 편의점 · 음식점이 여기 속한다. 알바생 몫은 따로 알 수 없다</a:t>
+              <a:t>2025년 체불액 중 30인 미만 사업장 (1조 4,012억 원). 카페 · 편의점 · 음식점은 대개 여기 속한다. 알바생 몫은 따로 알 수 없다</a:t>
             </a:r>
             <a:endParaRPr lang="en-US" sz="1000" dirty="0"/>
           </a:p>
@@ -8313,7 +8313,7 @@
                   <a:schemeClr val="tx1"/>
                 </a:solidFill>
               </a:rPr>
-              <a:t>계산기는 계산에서 멈추고, 기그는 사장이, 진정24는 증거가 있어야 시작한다.</a:t>
+              <a:t>계산기는 계산에서 멈추고, 기그는 사장이 가입해야, 진정24는 증거가 있어야 시작한다.</a:t>
             </a:r>
             <a:endParaRPr lang="en-US" sz="1200" dirty="0"/>
           </a:p>
@@ -8495,7 +8495,7 @@
                   <a:schemeClr val="tx1"/>
                 </a:solidFill>
               </a:rPr>
-              <a:t>출퇴근은 날마다 누르지만, 돈을 확인하는 건 급여일에 한 번. 그 사이 앱을 열 이유로 게임을 넣었고, 그 화면이 광고 자리다.</a:t>
+              <a:t>출퇴근은 일하는 날마다 누르지만, 돈을 확인하는 건 급여일에 한 번. 그 사이 앱을 열 이유로 게임을 넣었고, 그 화면이 광고 자리다.</a:t>
             </a:r>
             <a:endParaRPr lang="en-US" sz="1100" dirty="0"/>
           </a:p>
@@ -10031,7 +10031,7 @@
                             <a:srgbClr val="15171A"/>
                           </a:solidFill>
                         </a:rPr>
-                        <a:t>설문 · 30명 넘으면, 알바 중 반 이상</a:t>
+                        <a:t>설문 30명 이상 · 알바 중 반 이상</a:t>
                       </a:r>
                       <a:endParaRPr lang="en-US" sz="1200" dirty="0"/>
                     </a:p>
@@ -14662,7 +14662,7 @@
                   <a:schemeClr val="tx1"/>
                 </a:solidFill>
               </a:rPr>
-              <a:t>실제 사용자 검증은 11월부터</a:t>
+              <a:t>사용자 검증</a:t>
             </a:r>
             <a:endParaRPr lang="en-US" sz="1300" dirty="0"/>
           </a:p>
@@ -19362,7 +19362,7 @@
                   <a:schemeClr val="tx1"/>
                 </a:solidFill>
               </a:rPr>
-              <a:t>가운데 세 줄(비교 · 요청 · 등록 시각)은 다른 서비스가 모두 X다. 진정 접수는 일부러 연결만 한다</a:t>
+              <a:t>가운데 세 줄(비교 · 요청 · 등록 시각)은 알바가드에만 있다. 진정 접수는 일부러 연결만 한다</a:t>
             </a:r>
             <a:endParaRPr lang="en-US" sz="1150" dirty="0"/>
           </a:p>
@@ -21036,7 +21036,7 @@
                   <a:schemeClr val="tx2"/>
                 </a:solidFill>
               </a:rPr>
-              <a:t>기술 스택: 앱은 폰에서, 서버는 확인 번호 등록에만</a:t>
+              <a:t>기술 스택: 앱은 폰에서, 서버는 확인 번호 · 설문에만</a:t>
             </a:r>
             <a:endParaRPr lang="en-US" sz="2400" dirty="0"/>
           </a:p>
@@ -23851,7 +23851,7 @@
                   <a:schemeClr val="accent5"/>
                 </a:solidFill>
               </a:rPr>
-              <a:t>예정과 실제를 비교해 연장 · 대타만 글자로</a:t>
+              <a:t>예정과 다른 날만 글자로 (연장 · 대타 · 단축)</a:t>
             </a:r>
             <a:endParaRPr lang="en-US" sz="900" dirty="0"/>
           </a:p>

--- a/docs/06_중간발표_PPT.pptx
+++ b/docs/06_중간발표_PPT.pptx
@@ -125,31 +125,31 @@
   <p:extLst>
     <p:ext uri="{521415D9-36F7-43E2-AB2F-B90AF26B5E84}">
       <p14:sectionLst xmlns:p14="http://schemas.microsoft.com/office/powerpoint/2010/main">
-        <p14:section name="① 표지·팀 소개" id="{54bcb598-5a85-d93c-270a-3b8a2a85b7ee}">
+        <p14:section name="① 표지·팀 소개" id="{209ac366-90ee-544b-c3b6-5b61d6559ee8}">
           <p14:sldIdLst>
             <p14:sldId id="256"/>
             <p14:sldId id="257"/>
           </p14:sldIdLst>
         </p14:section>
-        <p14:section name="② 문제 정의" id="{767f9cbe-21c1-94f9-baa0-1b427523e7f2}">
+        <p14:section name="② 문제 정의" id="{3aa183fe-1bde-8561-8fd6-12cfc94a8030}">
           <p14:sldIdLst>
             <p14:sldId id="258"/>
             <p14:sldId id="259"/>
           </p14:sldIdLst>
         </p14:section>
-        <p14:section name="③ 솔루션·핵심 가치" id="{ccee92e1-d26b-8852-e52b-29cae8c95201}">
+        <p14:section name="③ 솔루션·핵심 가치" id="{ad62a073-8743-50e8-d43b-6b88a1134377}">
           <p14:sldIdLst>
             <p14:sldId id="260"/>
             <p14:sldId id="261"/>
           </p14:sldIdLst>
         </p14:section>
-        <p14:section name="④ SW 기술 아키텍처" id="{a3b08505-6cba-a46d-fd02-8c36934531ca}">
+        <p14:section name="④ SW 기술 아키텍처" id="{24bf7f77-9d6b-982a-a9fd-85de0cdf0786}">
           <p14:sldIdLst>
             <p14:sldId id="262"/>
             <p14:sldId id="263"/>
           </p14:sldIdLst>
         </p14:section>
-        <p14:section name="⑤ 개발 현황·MVP 시연" id="{eaab7e32-537b-726c-f06e-aafc64c4f779}">
+        <p14:section name="⑤ 개발 현황·MVP 시연" id="{4b65dccf-99f2-c004-93e9-713bb7b813a9}">
           <p14:sldIdLst>
             <p14:sldId id="264"/>
             <p14:sldId id="265"/>
@@ -157,19 +157,19 @@
             <p14:sldId id="267"/>
           </p14:sldIdLst>
         </p14:section>
-        <p14:section name="⑥ 시장 분석·비즈니스 모델" id="{9f2f84bd-54e2-1729-ec58-6c19b8a7decd}">
+        <p14:section name="⑥ 시장 분석·비즈니스 모델" id="{639f57a6-8ff1-ce68-82e6-1b43292575f8}">
           <p14:sldIdLst>
             <p14:sldId id="268"/>
             <p14:sldId id="269"/>
             <p14:sldId id="270"/>
           </p14:sldIdLst>
         </p14:section>
-        <p14:section name="⑦ 초기 시장 검증" id="{1d06d188-13a1-144e-61c2-8bdb98d3eea1}">
+        <p14:section name="⑦ 초기 시장 검증" id="{06bc8bae-f4aa-ca7f-23a0-4c8e5ff12192}">
           <p14:sldIdLst>
             <p14:sldId id="271"/>
           </p14:sldIdLst>
         </p14:section>
-        <p14:section name="⑧ 향후 계획·팀 역량" id="{d3be6aa4-2255-3527-4c35-9029d3b56df2}">
+        <p14:section name="⑧ 향후 계획·팀 역량" id="{b8ea9007-bb32-6fe8-5df8-c5f558e9d23c}">
           <p14:sldIdLst>
             <p14:sldId id="272"/>
             <p14:sldId id="273"/>
@@ -3514,7 +3514,7 @@
                   <a:schemeClr val="bg2"/>
                 </a:solidFill>
               </a:rPr>
-              <a:t>4조 · 앱 이름과 같게 정했습니다</a:t>
+              <a:t>4조 · 앱 이름과 같게 정함</a:t>
             </a:r>
             <a:endParaRPr lang="en-US" sz="950" dirty="0"/>
           </a:p>
@@ -3963,7 +3963,7 @@
                   <a:schemeClr val="accent5"/>
                 </a:solidFill>
               </a:rPr>
-              <a:t>기록할 때마다 서버에 확인 번호가 남는다. 예시 데이터는 등록되지 않으니 시연 중 남긴 2건만 보인다</a:t>
+              <a:t>기록할 때마다 서버에 확인 번호가 남음. 예시 데이터는 등록되지 않아 시연 중 남긴 2건만 보임</a:t>
             </a:r>
             <a:endParaRPr lang="en-US" sz="1000" dirty="0"/>
           </a:p>
@@ -4096,7 +4096,7 @@
                   <a:schemeClr val="accent5"/>
                 </a:solidFill>
               </a:rPr>
-              <a:t>덜 받은 돈이 빨간 숫자로 바뀐다</a:t>
+              <a:t>덜 받은 돈이 빨간 숫자로 바뀜</a:t>
             </a:r>
             <a:endParaRPr lang="en-US" sz="1000" dirty="0"/>
           </a:p>
@@ -4362,7 +4362,7 @@
                   <a:schemeClr val="accent5"/>
                 </a:solidFill>
               </a:rPr>
-              <a:t>앱 밖의 별도 페이지. 제3자도 열 수 있다</a:t>
+              <a:t>앱 밖의 별도 페이지. 제3자도 열 수 있음</a:t>
             </a:r>
             <a:endParaRPr lang="en-US" sz="1000" dirty="0"/>
           </a:p>
@@ -7293,7 +7293,7 @@
                   <a:schemeClr val="accent5"/>
                 </a:solidFill>
               </a:rPr>
-              <a:t>2025년 체불액 중 30인 미만 사업장 (1조 4,012억 원). 카페 · 편의점 · 음식점은 대개 여기 속한다. 알바생 몫은 따로 알 수 없다</a:t>
+              <a:t>2025년 체불액 중 30인 미만 사업장 (1조 4,012억 원). 카페 · 편의점 · 음식점은 대개 여기 속함. 알바생 몫은 따로 알 수 없음</a:t>
             </a:r>
             <a:endParaRPr lang="en-US" sz="1000" dirty="0"/>
           </a:p>
@@ -7748,7 +7748,7 @@
                   <a:schemeClr val="accent5"/>
                 </a:solidFill>
               </a:rPr>
-              <a:t>혼자 쓴다</a:t>
+              <a:t>혼자 씀</a:t>
             </a:r>
             <a:endParaRPr lang="en-US" sz="900" dirty="0"/>
           </a:p>
@@ -8313,7 +8313,7 @@
                   <a:schemeClr val="tx1"/>
                 </a:solidFill>
               </a:rPr>
-              <a:t>계산기는 계산에서 멈추고, 기그는 사장이 가입해야, 진정24는 증거가 있어야 시작한다.</a:t>
+              <a:t>계산기는 계산에서 멈추고, 기그는 사장이 가입해야, 진정24는 증거가 있어야 시작함</a:t>
             </a:r>
             <a:endParaRPr lang="en-US" sz="1200" dirty="0"/>
           </a:p>
@@ -8495,7 +8495,7 @@
                   <a:schemeClr val="tx1"/>
                 </a:solidFill>
               </a:rPr>
-              <a:t>출퇴근은 일하는 날마다 누르지만, 돈을 확인하는 건 급여일에 한 번. 그 사이 앱을 열 이유로 게임을 넣었고, 그 화면이 광고 자리다.</a:t>
+              <a:t>출퇴근은 일하는 날마다 누르지만, 돈을 확인하는 건 급여일에 한 번. 그 사이 앱을 열 이유로 게임을 넣었고, 그 화면이 광고 자리</a:t>
             </a:r>
             <a:endParaRPr lang="en-US" sz="1100" dirty="0"/>
           </a:p>
@@ -9165,7 +9165,7 @@
                   <a:schemeClr val="tx2"/>
                 </a:solidFill>
               </a:rPr>
-              <a:t>검증 계획: 11월에 설문 · 인터뷰로 다섯 가지를 확인한다</a:t>
+              <a:t>검증 계획: 11월 설문 · 인터뷰로 다섯 가지 확인</a:t>
             </a:r>
             <a:endParaRPr lang="en-US" sz="2400" dirty="0"/>
           </a:p>
@@ -9445,7 +9445,7 @@
                             <a:srgbClr val="15171A"/>
                           </a:solidFill>
                         </a:rPr>
-                        <a:t>매달 받은 금액을 직접 넣는다</a:t>
+                        <a:t>매달 받은 금액을 직접 넣음</a:t>
                       </a:r>
                       <a:endParaRPr lang="en-US" sz="1200" dirty="0"/>
                     </a:p>
@@ -9561,7 +9561,7 @@
                             <a:srgbClr val="15171A"/>
                           </a:solidFill>
                         </a:rPr>
-                        <a:t>입금 문자 자동 인식을 앞당긴다</a:t>
+                        <a:t>입금 문자 자동 인식을 앞당김</a:t>
                       </a:r>
                       <a:endParaRPr lang="en-US" sz="1200" dirty="0"/>
                     </a:p>
@@ -9621,7 +9621,7 @@
                             <a:srgbClr val="15171A"/>
                           </a:solidFill>
                         </a:rPr>
-                        <a:t>요청 문구를 실제로 보낼 수 있다</a:t>
+                        <a:t>요청 문구를 실제로 보낼 수 있음</a:t>
                       </a:r>
                       <a:endParaRPr lang="en-US" sz="1200" dirty="0"/>
                     </a:p>
@@ -9737,7 +9737,7 @@
                             <a:srgbClr val="15171A"/>
                           </a:solidFill>
                         </a:rPr>
-                        <a:t>문구 톤 · 단계를 다시 짠다</a:t>
+                        <a:t>문구 톤 · 단계를 다시 짬</a:t>
                       </a:r>
                       <a:endParaRPr lang="en-US" sz="1200" dirty="0"/>
                     </a:p>
@@ -9797,7 +9797,7 @@
                             <a:srgbClr val="15171A"/>
                           </a:solidFill>
                         </a:rPr>
-                        <a:t>확인 번호 설명이 이해된다</a:t>
+                        <a:t>확인 번호 설명이 이해됨</a:t>
                       </a:r>
                       <a:endParaRPr lang="en-US" sz="1200" dirty="0"/>
                     </a:p>
@@ -9913,7 +9913,7 @@
                             <a:srgbClr val="15171A"/>
                           </a:solidFill>
                         </a:rPr>
-                        <a:t>설정 · 증빙 문구를 고친다</a:t>
+                        <a:t>설정 · 증빙 문구 수정</a:t>
                       </a:r>
                       <a:endParaRPr lang="en-US" sz="1200" dirty="0"/>
                     </a:p>
@@ -9973,7 +9973,7 @@
                             <a:srgbClr val="15171A"/>
                           </a:solidFill>
                         </a:rPr>
-                        <a:t>타깃 중 주 15시간 이상이 다수다</a:t>
+                        <a:t>타깃 중 주 15시간 이상이 다수</a:t>
                       </a:r>
                       <a:endParaRPr lang="en-US" sz="1200" dirty="0"/>
                     </a:p>
@@ -10089,7 +10089,7 @@
                             <a:srgbClr val="15171A"/>
                           </a:solidFill>
                         </a:rPr>
-                        <a:t>주휴수당 중심 메시지를 바꾼다</a:t>
+                        <a:t>주휴수당 중심 메시지 변경</a:t>
                       </a:r>
                       <a:endParaRPr lang="en-US" sz="1200" dirty="0"/>
                     </a:p>
@@ -10149,7 +10149,7 @@
                             <a:srgbClr val="15171A"/>
                           </a:solidFill>
                         </a:rPr>
-                        <a:t>게임 화면 광고를 받아들인다</a:t>
+                        <a:t>게임 화면 광고를 받아들임</a:t>
                       </a:r>
                       <a:endParaRPr lang="en-US" sz="1200" dirty="0"/>
                     </a:p>
@@ -13709,7 +13709,7 @@
                   <a:schemeClr val="bg2"/>
                 </a:solidFill>
               </a:rPr>
-              <a:t>각자 맡은 일이 오늘 발표한 장과 같습니다</a:t>
+              <a:t>각자 맡은 일은 오늘 발표한 장과 같음</a:t>
             </a:r>
             <a:endParaRPr lang="en-US" sz="1200" dirty="0"/>
           </a:p>
@@ -14380,7 +14380,7 @@
                   <a:schemeClr val="bg2"/>
                 </a:solidFill>
               </a:rPr>
-              <a:t>지금 답해 주시면 기말 발표 때 결과로 보여 드립니다</a:t>
+              <a:t>지금 답하면 기말 발표 때 결과로 공개</a:t>
             </a:r>
             <a:endParaRPr lang="en-US" sz="1300" dirty="0"/>
           </a:p>
@@ -14785,7 +14785,7 @@
                   <a:schemeClr val="accent5"/>
                 </a:solidFill>
               </a:rPr>
-              <a:t>발표도 같은 순서로 나눠서 합니다</a:t>
+              <a:t>발표도 같은 순서로 나눠서 함</a:t>
             </a:r>
             <a:endParaRPr lang="en-US" sz="1300" dirty="0"/>
           </a:p>
@@ -14952,7 +14952,7 @@
                   <a:schemeClr val="accent5"/>
                 </a:solidFill>
               </a:rPr>
-              <a:t>질문은 끝나고 한 번에 받겠습니다</a:t>
+              <a:t>질문은 발표 뒤 한 번에</a:t>
             </a:r>
             <a:endParaRPr lang="en-US" sz="1000" dirty="0"/>
           </a:p>
@@ -15172,7 +15172,7 @@
                   <a:schemeClr val="accent5"/>
                 </a:solidFill>
               </a:rPr>
-              <a:t>들으시면서 답해도 됩니다</a:t>
+              <a:t>들으면서 답해도 됨</a:t>
             </a:r>
             <a:endParaRPr lang="en-US" sz="900" dirty="0"/>
           </a:p>
@@ -15354,7 +15354,7 @@
                   <a:schemeClr val="tx2"/>
                 </a:solidFill>
               </a:rPr>
-              <a:t>덜 받아도 모르고, 알아도 말하지 못한다</a:t>
+              <a:t>덜 받아도 모르고, 알아도 말하지 못함</a:t>
             </a:r>
             <a:endParaRPr lang="en-US" sz="2400" dirty="0"/>
           </a:p>
@@ -15670,7 +15670,7 @@
                   <a:schemeClr val="tx2"/>
                 </a:solidFill>
               </a:rPr>
-              <a:t>계산하기 어렵다</a:t>
+              <a:t>계산하기 어려움</a:t>
             </a:r>
             <a:endParaRPr lang="en-US" sz="1400" dirty="0"/>
           </a:p>
@@ -15742,7 +15742,7 @@
                   <a:schemeClr val="tx1"/>
                 </a:solidFill>
               </a:rPr>
-              <a:t>임금 관련 문제를 겪었다 (수당 미지급 · 지연 37.3%)</a:t>
+              <a:t>임금 관련 문제를 겪음 (수당 미지급 · 지연 37.3%)</a:t>
             </a:r>
             <a:endParaRPr lang="en-US" sz="1050" dirty="0"/>
           </a:p>
@@ -15912,7 +15912,7 @@
                   <a:schemeClr val="tx2"/>
                 </a:solidFill>
               </a:rPr>
-              <a:t>알아채기 어렵다</a:t>
+              <a:t>알아채기 어려움</a:t>
             </a:r>
             <a:endParaRPr lang="en-US" sz="1400" dirty="0"/>
           </a:p>
@@ -15984,7 +15984,7 @@
                   <a:schemeClr val="tx1"/>
                 </a:solidFill>
               </a:rPr>
-              <a:t>최저시급 미달인데 아무 대응도 하지 않았다</a:t>
+              <a:t>최저시급 미달인데 아무 대응도 안 함</a:t>
             </a:r>
             <a:endParaRPr lang="en-US" sz="1050" dirty="0"/>
           </a:p>
@@ -16154,7 +16154,7 @@
                   <a:schemeClr val="tx2"/>
                 </a:solidFill>
               </a:rPr>
-              <a:t>말을 꺼내기 어렵다</a:t>
+              <a:t>말을 꺼내기 어려움</a:t>
             </a:r>
             <a:endParaRPr lang="en-US" sz="1400" dirty="0"/>
           </a:p>
@@ -16300,7 +16300,7 @@
                   <a:schemeClr val="tx2"/>
                 </a:solidFill>
               </a:rPr>
-              <a:t>기존 서비스: 계산까지는 있지만, 비교와 대응은 없다</a:t>
+              <a:t>기존 서비스: 계산까지는 있지만, 비교와 대응은 없음</a:t>
             </a:r>
             <a:endParaRPr lang="en-US" sz="2400" dirty="0"/>
           </a:p>
@@ -19362,7 +19362,7 @@
                   <a:schemeClr val="tx1"/>
                 </a:solidFill>
               </a:rPr>
-              <a:t>가운데 세 줄(비교 · 요청 · 등록 시각)은 알바가드에만 있다. 진정 접수는 일부러 연결만 한다</a:t>
+              <a:t>가운데 세 줄(비교 · 요청 · 등록 시각)은 알바가드에만 있음. 진정 접수는 일부러 연결만</a:t>
             </a:r>
             <a:endParaRPr lang="en-US" sz="1150" dirty="0"/>
           </a:p>
@@ -19470,7 +19470,7 @@
                   <a:schemeClr val="accent5"/>
                 </a:solidFill>
               </a:rPr>
-              <a:t>③ 솔루션 · 서비스 개요   ·   문제 1 · 2는 비교로, 문제 3은 요청으로 푼다. 기록이 그 바탕</a:t>
+              <a:t>③ 솔루션 · 서비스 개요   ·   문제 1 · 2는 비교로, 문제 3은 요청으로. 기록이 그 바탕</a:t>
             </a:r>
             <a:endParaRPr lang="en-US" sz="1050" dirty="0"/>
           </a:p>
@@ -19508,7 +19508,7 @@
                   <a:schemeClr val="tx2"/>
                 </a:solidFill>
               </a:rPr>
-              <a:t>기록 → 비교 → 요청, 신고 이전 단계를 채운다</a:t>
+              <a:t>기록 → 비교 → 요청, 신고 이전 단계를 채움</a:t>
             </a:r>
             <a:endParaRPr lang="en-US" sz="2400" dirty="0"/>
           </a:p>
@@ -19641,7 +19641,7 @@
                   <a:schemeClr val="tx1"/>
                 </a:solidFill>
               </a:rPr>
-              <a:t>출근 · 퇴근 버튼 하나. 고치면 수정 전후와 사유가 남고, 삭제도 흔적이 남는다</a:t>
+              <a:t>출근 · 퇴근 버튼 하나. 고치면 수정 전후와 사유가 남고, 삭제도 흔적이 남음</a:t>
             </a:r>
             <a:endParaRPr lang="en-US" sz="1050" dirty="0"/>
           </a:p>
@@ -19849,7 +19849,7 @@
                   <a:schemeClr val="tx1"/>
                 </a:solidFill>
               </a:rPr>
-              <a:t>기본급 + 주휴 + 야간수당으로 "받았어야 할 돈"을 계산하고, 실제 받은 돈과의 차액을 보여 준다</a:t>
+              <a:t>기본급 + 주휴 + 야간수당으로 "받았어야 할 돈"을 계산하고, 실제 받은 돈과의 차액 표시</a:t>
             </a:r>
             <a:endParaRPr lang="en-US" sz="1050" dirty="0"/>
           </a:p>
@@ -20057,7 +20057,7 @@
                   <a:schemeClr val="tx1"/>
                 </a:solidFill>
               </a:rPr>
-              <a:t>정중한 메시지 → 내용증명 초안 → 진정 절차 안내(1350 · 노동포털). 대화로 먼저 푼다</a:t>
+              <a:t>정중한 메시지 → 내용증명 초안 → 진정 절차 안내(1350 · 노동포털). 대화로 먼저 해결</a:t>
             </a:r>
             <a:endParaRPr lang="en-US" sz="1050" dirty="0"/>
           </a:p>
@@ -20351,7 +20351,7 @@
                   <a:schemeClr val="tx2"/>
                 </a:solidFill>
               </a:rPr>
-              <a:t>사장 연동 없이 혼자 쓴다</a:t>
+              <a:t>사장 연동 없이 혼자 씀</a:t>
             </a:r>
             <a:pPr indent="0" marL="0">
               <a:buNone/>
@@ -20398,7 +20398,7 @@
                   <a:schemeClr val="accent5"/>
                 </a:solidFill>
               </a:rPr>
-              <a:t>근무지만 직접 등록한다. 사장 가입이 필요 없다</a:t>
+              <a:t>근무지만 직접 등록. 사장 가입 필요 없음</a:t>
             </a:r>
             <a:endParaRPr lang="en-US" sz="1150" dirty="0"/>
           </a:p>
@@ -20732,7 +20732,7 @@
                   <a:schemeClr val="accent5"/>
                 </a:solidFill>
               </a:rPr>
-              <a:t>기록할 때마다 확인 번호와 서버 등록 시각이 남는다</a:t>
+              <a:t>기록할 때마다 확인 번호와 서버 등록 시각이 남음</a:t>
             </a:r>
             <a:endParaRPr lang="en-US" sz="1150" dirty="0"/>
           </a:p>
@@ -20854,7 +20854,7 @@
                   <a:schemeClr val="tx1"/>
                 </a:solidFill>
               </a:rPr>
-              <a:t>비교 기능은 하우머치가 칸 하나로 따라올 수 있다. 3번은 기록 구조 자체라 따라오기 어렵다.</a:t>
+              <a:t>비교 기능은 하우머치가 칸 하나로 따라올 수 있음. 3번은 기록 구조 자체라 따라오기 어려움</a:t>
             </a:r>
             <a:endParaRPr lang="en-US" sz="1200" dirty="0"/>
           </a:p>
@@ -20890,7 +20890,7 @@
                   <a:schemeClr val="tx2"/>
                 </a:solidFill>
               </a:rPr>
-              <a:t>통장 내역 · 메시지와 함께 내야 힘이 생긴다</a:t>
+              <a:t>통장 내역 · 메시지와 함께 내야 힘이 생김</a:t>
             </a:r>
             <a:endParaRPr lang="en-US" sz="1050" dirty="0"/>
           </a:p>
@@ -23690,7 +23690,7 @@
                   <a:schemeClr val="accent5"/>
                 </a:solidFill>
               </a:rPr>
-              <a:t>⑤ 개발 현황 · MVP 화면   ·   예시 데이터, 2026.10.25 기준. 모두 배포 주소에서 지금 열린다</a:t>
+              <a:t>⑤ 개발 현황 · MVP 화면   ·   예시 데이터, 2026.10.25 기준. 모두 배포 주소에서 바로 열림</a:t>
             </a:r>
             <a:endParaRPr lang="en-US" sz="1050" dirty="0"/>
           </a:p>
@@ -24220,7 +24220,7 @@
                   <a:schemeClr val="accent5"/>
                 </a:solidFill>
               </a:rPr>
-              <a:t>확인 번호를 넣으면 서버 등록 시각이 나온다</a:t>
+              <a:t>확인 번호를 넣으면 서버 등록 시각이 나옴</a:t>
             </a:r>
             <a:endParaRPr lang="en-US" sz="900" dirty="0"/>
           </a:p>

--- a/docs/06_중간발표_PPT.pptx
+++ b/docs/06_중간발표_PPT.pptx
@@ -125,31 +125,31 @@
   <p:extLst>
     <p:ext uri="{521415D9-36F7-43E2-AB2F-B90AF26B5E84}">
       <p14:sectionLst xmlns:p14="http://schemas.microsoft.com/office/powerpoint/2010/main">
-        <p14:section name="① 표지·팀 소개" id="{209ac366-90ee-544b-c3b6-5b61d6559ee8}">
+        <p14:section name="① 표지·팀 소개" id="{7c0e5ccc-2940-e94c-d7b8-ba0fccde3f1e}">
           <p14:sldIdLst>
             <p14:sldId id="256"/>
             <p14:sldId id="257"/>
           </p14:sldIdLst>
         </p14:section>
-        <p14:section name="② 문제 정의" id="{3aa183fe-1bde-8561-8fd6-12cfc94a8030}">
+        <p14:section name="② 문제 정의" id="{ce21861f-5316-66d5-8c0b-6e92722abea5}">
           <p14:sldIdLst>
             <p14:sldId id="258"/>
             <p14:sldId id="259"/>
           </p14:sldIdLst>
         </p14:section>
-        <p14:section name="③ 솔루션·핵심 가치" id="{ad62a073-8743-50e8-d43b-6b88a1134377}">
+        <p14:section name="③ 솔루션·핵심 가치" id="{bcd74881-e389-2d3d-49b2-9b0193f5321a}">
           <p14:sldIdLst>
             <p14:sldId id="260"/>
             <p14:sldId id="261"/>
           </p14:sldIdLst>
         </p14:section>
-        <p14:section name="④ SW 기술 아키텍처" id="{24bf7f77-9d6b-982a-a9fd-85de0cdf0786}">
+        <p14:section name="④ SW 기술 아키텍처" id="{da65644e-9ef3-3986-0718-bb19bc42c405}">
           <p14:sldIdLst>
             <p14:sldId id="262"/>
             <p14:sldId id="263"/>
           </p14:sldIdLst>
         </p14:section>
-        <p14:section name="⑤ 개발 현황·MVP 시연" id="{4b65dccf-99f2-c004-93e9-713bb7b813a9}">
+        <p14:section name="⑤ 개발 현황·MVP 시연" id="{de6cf47e-f6af-b02d-ddd7-82361471ac27}">
           <p14:sldIdLst>
             <p14:sldId id="264"/>
             <p14:sldId id="265"/>
@@ -157,19 +157,19 @@
             <p14:sldId id="267"/>
           </p14:sldIdLst>
         </p14:section>
-        <p14:section name="⑥ 시장 분석·비즈니스 모델" id="{639f57a6-8ff1-ce68-82e6-1b43292575f8}">
+        <p14:section name="⑥ 시장 분석·비즈니스 모델" id="{294bcb0b-9dbd-1b77-e878-06bd69dc3262}">
           <p14:sldIdLst>
             <p14:sldId id="268"/>
             <p14:sldId id="269"/>
             <p14:sldId id="270"/>
           </p14:sldIdLst>
         </p14:section>
-        <p14:section name="⑦ 초기 시장 검증" id="{06bc8bae-f4aa-ca7f-23a0-4c8e5ff12192}">
+        <p14:section name="⑦ 초기 시장 검증" id="{64957f80-3483-5916-bbd1-c37aac505393}">
           <p14:sldIdLst>
             <p14:sldId id="271"/>
           </p14:sldIdLst>
         </p14:section>
-        <p14:section name="⑧ 향후 계획·팀 역량" id="{b8ea9007-bb32-6fe8-5df8-c5f558e9d23c}">
+        <p14:section name="⑧ 향후 계획·팀 역량" id="{28bd5c43-496a-b990-57b3-71fd310b44d9}">
           <p14:sldIdLst>
             <p14:sldId id="272"/>
             <p14:sldId id="273"/>

--- a/docs/06_중간발표_PPT.pptx
+++ b/docs/06_중간발표_PPT.pptx
@@ -125,31 +125,31 @@
   <p:extLst>
     <p:ext uri="{521415D9-36F7-43E2-AB2F-B90AF26B5E84}">
       <p14:sectionLst xmlns:p14="http://schemas.microsoft.com/office/powerpoint/2010/main">
-        <p14:section name="① 표지·팀 소개" id="{7c0e5ccc-2940-e94c-d7b8-ba0fccde3f1e}">
+        <p14:section name="① 표지·팀 소개" id="{364df51c-cc9a-f1af-cf0a-c26e305840eb}">
           <p14:sldIdLst>
             <p14:sldId id="256"/>
             <p14:sldId id="257"/>
           </p14:sldIdLst>
         </p14:section>
-        <p14:section name="② 문제 정의" id="{ce21861f-5316-66d5-8c0b-6e92722abea5}">
+        <p14:section name="② 문제 정의" id="{e9b69243-0b9e-388d-515c-205c92da1123}">
           <p14:sldIdLst>
             <p14:sldId id="258"/>
             <p14:sldId id="259"/>
           </p14:sldIdLst>
         </p14:section>
-        <p14:section name="③ 솔루션·핵심 가치" id="{bcd74881-e389-2d3d-49b2-9b0193f5321a}">
+        <p14:section name="③ 솔루션·핵심 가치" id="{4d48d6ae-efcd-9ca3-eef8-0135824d5496}">
           <p14:sldIdLst>
             <p14:sldId id="260"/>
             <p14:sldId id="261"/>
           </p14:sldIdLst>
         </p14:section>
-        <p14:section name="④ SW 기술 아키텍처" id="{da65644e-9ef3-3986-0718-bb19bc42c405}">
+        <p14:section name="④ SW 기술 아키텍처" id="{4d5babb8-bdaa-8ef4-6dfc-5e2cbd304f8e}">
           <p14:sldIdLst>
             <p14:sldId id="262"/>
             <p14:sldId id="263"/>
           </p14:sldIdLst>
         </p14:section>
-        <p14:section name="⑤ 개발 현황·MVP 시연" id="{de6cf47e-f6af-b02d-ddd7-82361471ac27}">
+        <p14:section name="⑤ 개발 현황·MVP 시연" id="{0ff4aa96-2f1d-7261-2162-62e54d56ced3}">
           <p14:sldIdLst>
             <p14:sldId id="264"/>
             <p14:sldId id="265"/>
@@ -157,19 +157,19 @@
             <p14:sldId id="267"/>
           </p14:sldIdLst>
         </p14:section>
-        <p14:section name="⑥ 시장 분석·비즈니스 모델" id="{294bcb0b-9dbd-1b77-e878-06bd69dc3262}">
+        <p14:section name="⑥ 시장 분석·비즈니스 모델" id="{7221c64b-6120-4408-fda4-1634b2255132}">
           <p14:sldIdLst>
             <p14:sldId id="268"/>
             <p14:sldId id="269"/>
             <p14:sldId id="270"/>
           </p14:sldIdLst>
         </p14:section>
-        <p14:section name="⑦ 초기 시장 검증" id="{64957f80-3483-5916-bbd1-c37aac505393}">
+        <p14:section name="⑦ 초기 시장 검증" id="{932e1d02-e5c5-911e-0fe3-f8e3ee8b8c1c}">
           <p14:sldIdLst>
             <p14:sldId id="271"/>
           </p14:sldIdLst>
         </p14:section>
-        <p14:section name="⑧ 향후 계획·팀 역량" id="{28bd5c43-496a-b990-57b3-71fd310b44d9}">
+        <p14:section name="⑧ 향후 계획·팀 역량" id="{75bed4ff-c930-a3b1-d00a-f9999e2b5026}">
           <p14:sldIdLst>
             <p14:sldId id="272"/>
             <p14:sldId id="273"/>
@@ -19849,7 +19849,7 @@
                   <a:schemeClr val="tx1"/>
                 </a:solidFill>
               </a:rPr>
-              <a:t>기본급 + 주휴 + 야간수당으로 "받았어야 할 돈"을 계산하고, 실제 받은 돈과의 차액 표시</a:t>
+              <a:t>"받았어야 할 돈"(기본급 · 주휴 · 야간)과 실제 받은 돈의 차액 표시</a:t>
             </a:r>
             <a:endParaRPr lang="en-US" sz="1050" dirty="0"/>
           </a:p>
@@ -22482,7 +22482,7 @@
                   <a:schemeClr val="tx2"/>
                 </a:solidFill>
               </a:rPr>
-              <a:t>근무 내용은 폰 안에, 서버에는 확인 번호와 등록 시각만</a:t>
+              <a:t>근무 내용은 폰 안에, 서버에는 번호와 등록 시각만</a:t>
             </a:r>
             <a:endParaRPr lang="en-US" sz="2400" dirty="0"/>
           </a:p>
@@ -23582,7 +23582,7 @@
                   <a:schemeClr val="tx1"/>
                 </a:solidFill>
               </a:rPr>
-              <a:t>인터넷이 없으면 나중에 전송</a:t>
+              <a:t>끊기면 나중에 전송</a:t>
             </a:r>
             <a:endParaRPr lang="en-US" sz="1000" dirty="0"/>
           </a:p>
@@ -24097,7 +24097,21 @@
                   <a:schemeClr val="accent5"/>
                 </a:solidFill>
               </a:rPr>
-              <a:t>근무 기록 · 수정 이력 · 계산 · 입금 · 사진 · 등록 확인</a:t>
+              <a:t>기록 · 수정 이력 · 계산</a:t>
+            </a:r>
+            <a:endParaRPr lang="en-US" sz="900" dirty="0"/>
+          </a:p>
+          <a:p>
+            <a:pPr algn="ctr" indent="0" marL="0">
+              <a:buNone/>
+            </a:pPr>
+            <a:r>
+              <a:rPr lang="en-US" sz="900" dirty="0">
+                <a:solidFill>
+                  <a:schemeClr val="accent5"/>
+                </a:solidFill>
+              </a:rPr>
+              <a:t>입금 · 사진 · 등록 확인</a:t>
             </a:r>
             <a:endParaRPr lang="en-US" sz="900" dirty="0"/>
           </a:p>
@@ -24220,7 +24234,7 @@
                   <a:schemeClr val="accent5"/>
                 </a:solidFill>
               </a:rPr>
-              <a:t>확인 번호를 넣으면 서버 등록 시각이 나옴</a:t>
+              <a:t>확인 번호 → 서버 등록 시각</a:t>
             </a:r>
             <a:endParaRPr lang="en-US" sz="900" dirty="0"/>
           </a:p>

--- a/docs/06_중간발표_PPT.pptx
+++ b/docs/06_중간발표_PPT.pptx
@@ -125,31 +125,31 @@
   <p:extLst>
     <p:ext uri="{521415D9-36F7-43E2-AB2F-B90AF26B5E84}">
       <p14:sectionLst xmlns:p14="http://schemas.microsoft.com/office/powerpoint/2010/main">
-        <p14:section name="① 표지·팀 소개" id="{364df51c-cc9a-f1af-cf0a-c26e305840eb}">
+        <p14:section name="① 표지·팀 소개" id="{cb98607d-ab3c-72b3-311d-271ed558c3f7}">
           <p14:sldIdLst>
             <p14:sldId id="256"/>
             <p14:sldId id="257"/>
           </p14:sldIdLst>
         </p14:section>
-        <p14:section name="② 문제 정의" id="{e9b69243-0b9e-388d-515c-205c92da1123}">
+        <p14:section name="② 문제 정의" id="{3b30eed6-9895-52c9-acc1-96b99ad035d7}">
           <p14:sldIdLst>
             <p14:sldId id="258"/>
             <p14:sldId id="259"/>
           </p14:sldIdLst>
         </p14:section>
-        <p14:section name="③ 솔루션·핵심 가치" id="{4d48d6ae-efcd-9ca3-eef8-0135824d5496}">
+        <p14:section name="③ 솔루션·핵심 가치" id="{6ec71c9e-3e1b-cf1e-5cd3-c6bdd9826ea2}">
           <p14:sldIdLst>
             <p14:sldId id="260"/>
             <p14:sldId id="261"/>
           </p14:sldIdLst>
         </p14:section>
-        <p14:section name="④ SW 기술 아키텍처" id="{4d5babb8-bdaa-8ef4-6dfc-5e2cbd304f8e}">
+        <p14:section name="④ SW 기술 아키텍처" id="{a55081bf-8351-6828-dcb1-dcbc2ece9ba9}">
           <p14:sldIdLst>
             <p14:sldId id="262"/>
             <p14:sldId id="263"/>
           </p14:sldIdLst>
         </p14:section>
-        <p14:section name="⑤ 개발 현황·MVP 시연" id="{0ff4aa96-2f1d-7261-2162-62e54d56ced3}">
+        <p14:section name="⑤ 개발 현황·MVP 시연" id="{3d359fb9-509c-0a89-1f0e-43ced7bc503e}">
           <p14:sldIdLst>
             <p14:sldId id="264"/>
             <p14:sldId id="265"/>
@@ -157,19 +157,19 @@
             <p14:sldId id="267"/>
           </p14:sldIdLst>
         </p14:section>
-        <p14:section name="⑥ 시장 분석·비즈니스 모델" id="{7221c64b-6120-4408-fda4-1634b2255132}">
+        <p14:section name="⑥ 시장 분석·비즈니스 모델" id="{ee7c33f2-787d-ca26-be76-419c44ac0507}">
           <p14:sldIdLst>
             <p14:sldId id="268"/>
             <p14:sldId id="269"/>
             <p14:sldId id="270"/>
           </p14:sldIdLst>
         </p14:section>
-        <p14:section name="⑦ 초기 시장 검증" id="{932e1d02-e5c5-911e-0fe3-f8e3ee8b8c1c}">
+        <p14:section name="⑦ 초기 시장 검증" id="{0dcf0754-875c-f967-73c1-baf1912f1dba}">
           <p14:sldIdLst>
             <p14:sldId id="271"/>
           </p14:sldIdLst>
         </p14:section>
-        <p14:section name="⑧ 향후 계획·팀 역량" id="{75bed4ff-c930-a3b1-d00a-f9999e2b5026}">
+        <p14:section name="⑧ 향후 계획·팀 역량" id="{53bfe07b-b8d7-c620-1168-927e7cfe6998}">
           <p14:sldIdLst>
             <p14:sldId id="272"/>
             <p14:sldId id="273"/>
@@ -926,7 +926,7 @@
           <a:p>
             <a:r>
               <a:rPr lang="en-US" dirty="0"/>
-              <a:t>네 단계(등록 → 비교 → 요청 · 증빙 → 확인)가 차별점과 하나씩 맞물립니다. 영상에 안 나오는 것은 말로 짚습니다: 캘린더의 연장 · 대타 표시(9장 캡처), 3단계 진정 안내(1350 · 노동포털 연결, 진정서는 만들지 않음). 예시 데이터는 발표 전에 미리 넣어 둡니다(오늘 날짜는 비어 있어 출근 · 퇴근이 그대로 됩니다). 7번 표에는 시연 중 남긴 2건만 나옵니다. 예시 데이터는 진짜 시각이 아니라 등록하지 않기 때문입니다. 시연은 다음 장의 녹화 영상(1분 46초)으로 하고, 단계마다 멈춰서 설명하면 약 3분입니다. 영상은 배포된 앱을 실제로 눌러 찍은 것이라 서버 등록과 확인 번호가 진짜입니다(10/26 오전 9시 36분 녹화. 화면의 시각은 녹화한 시각). 질문이 오면 실제 앱으로 1단계(출근 · 퇴근 → "2건 등록됨")만 보여 줍니다. 전날 할 일: Supabase 대시보드에서 프로젝트 상태를 확인하고(잠들어 있으면 Restore) 앱에서 출근 · 퇴근을 눌러 설정 탭에 "2건 등록됨"이 뜨는지 본다. 그다음 폰의 와이파이를 끄고 데이터로 확인 페이지(jihooni217.github.io/albaguard/verify.html?h=da3e2a7ad7e298db)를 열어 등록 시각이 나오는지 본다. 당일 아침에도 한 번 더.</a:t>
+              <a:t>네 단계(기록 → 비교 → 요청 → 확인)가 차별점과 하나씩 맞물립니다. 영상에 안 나오는 것은 말로 짚습니다: 캘린더의 연장 · 대타 표시(9장 캡처), 3단계 진정 안내(1350 · 노동포털 연결, 진정서는 만들지 않음). 예시 데이터는 발표 전에 미리 넣어 둡니다(오늘 날짜는 비어 있어 출근 · 퇴근이 그대로 됩니다). 7번 표에는 시연 중 남긴 2건만 나옵니다. 예시 데이터는 진짜 시각이 아니라 등록하지 않기 때문입니다. 시연은 다음 장의 녹화 영상(1분 46초)으로 하고, 단계마다 멈춰서 설명하면 약 3분입니다. 영상은 배포된 앱을 실제로 눌러 찍은 것이라 서버 등록과 확인 번호가 진짜입니다(10/26 오전 9시 36분 녹화. 화면의 시각은 녹화한 시각). 질문이 오면 실제 앱으로 1단계(출근 · 퇴근 → "2건 등록됨")만 보여 줍니다. 전날 할 일: Supabase 대시보드에서 프로젝트 상태를 확인하고(잠들어 있으면 Restore) 앱에서 출근 · 퇴근을 눌러 설정 탭에 "2건 등록됨"이 뜨는지 본다. 그다음 폰의 와이파이를 끄고 데이터로 확인 페이지(jihooni217.github.io/albaguard/verify.html?h=da3e2a7ad7e298db)를 열어 등록 시각이 나오는지 본다. 당일 아침에도 한 번 더.</a:t>
             </a:r>
             <a:endParaRPr lang="en-US" dirty="0"/>
           </a:p>
@@ -1102,7 +1102,7 @@
           <a:p>
             <a:r>
               <a:rPr lang="en-US" dirty="0"/>
-              <a:t>시연 직후에 보여 줍니다. "방금 보신 것이 8개 중 이만큼"입니다. 100%는 쓰지 않았습니다. 계획 기준은 9월 기획서의 기능 4개에서 출발해, 10/13 MVP 기능 정의서에서 포함 8개 · 제외 6개(금액 자동 인식 · 푸시 알림 · AI 문구 · 광고 · 로그인 · 진정서)로 고정한 것입니다. %는 구현 + 실제 폰 확인 + 사용자 검증을 100으로 보고 남은 일만큼 뺀 자체 평가이고, 동작은 컴퓨터의 폰 크기 화면에서, 실제 폰은 설치까지 확인했습니다. 동그라미 세 칸은 컴퓨터 동작 · 실제 폰 · 사용자 검증이고, 지금은 모두 첫 칸만 찼습니다. 뒤 두 칸이 11월 일정입니다. 세 칸 중 첫 칸만 찼는데 왜 80~90%냐고 물으시면, %는 칸수가 아니라 남은 일의 크기로 어림한 것이고 11월 검증에서 큰 수정이 나오면 내려갈 수 있다고 답합니다. 이 장이 끝나면 손유호에게 넘깁니다.</a:t>
+              <a:t>시연 직후에 보여 줍니다. "방금 보신 것이 8개 중 이만큼"입니다. 100%는 쓰지 않았습니다. 계획 기준은 9월 기획서의 기능 4개에서 출발해, 10/13 MVP 기능 정의서에서 포함 8개 · 제외 6개(금액 자동 인식 · 푸시 알림 · AI 문구 · 광고 · 로그인 · 진정서)로 고정한 것입니다. %는 구현 + 실제 폰 확인 + 사용자 검증을 100으로 보고 남은 일만큼 뺀 자체 평가이고, 동작은 컴퓨터의 폰 크기 화면에서, 실제 폰은 설치까지 확인했습니다. 동그라미 세 칸은 컴퓨터 동작 · 실제 폰 · 사용자 검증이고, 지금은 모두 첫 칸만 찼습니다. 뒤 두 칸이 11월 일정입니다. 세 칸 중 첫 칸만 찼는데 왜 70~90%냐고 물으시면, %는 칸수가 아니라 남은 일의 크기로 어림한 것이고 11월 검증에서 큰 수정이 나오면 내려갈 수 있다고 답합니다. 이 장이 끝나면 손유호에게 넘깁니다.</a:t>
             </a:r>
             <a:endParaRPr lang="en-US" dirty="0"/>
           </a:p>
@@ -1278,7 +1278,7 @@
           <a:p>
             <a:r>
               <a:rPr lang="en-US" dirty="0"/>
-              <a:t>손유호. 첫 사용자로 보는 사람은 하우머치 사용자가 아니라, 카톡 · 메모에 적거나 아예 안 적고 통장 총액만 보는 학생입니다. 하우머치가 비교 칸을 넣으면 따라올 수 있으니, 따라 하기 어려운 쪽(기록 등록)을 키웁니다. 2×2에서 알바가드는 "혼자 쓴다 × 대응까지"에 있습니다. 오른쪽 열은 혼자서는 시작할 수 없는 서비스입니다. 기그는 사장이 가입해야 하고, 진정24는 증거가 먼저 있어야 합니다. 경쟁 서비스 정보는 2026년 9월 각 앱의 공식 소개와 리뷰 기준입니다.</a:t>
+              <a:t>손유호. 첫 사용자로 보는 사람은 하우머치 사용자가 아니라, 카톡 · 메모에 적거나 아예 안 적고 통장 총액만 보는 학생입니다. 하우머치가 비교 칸을 넣으면 따라올 수 있으니, 따라 하기 어려운 쪽(기록 등록)을 키웁니다. 2×2에서 알바가드는 "혼자 씀 × 대응까지"에 있습니다. 오른쪽 열은 혼자서는 시작할 수 없는 서비스입니다. 기그는 사장이 가입해야 하고, 진정24는 증거가 먼저 있어야 합니다. 경쟁 서비스 정보는 2026년 9월 각 앱의 공식 소개와 리뷰 기준입니다.</a:t>
             </a:r>
             <a:endParaRPr lang="en-US" dirty="0"/>
           </a:p>
@@ -1366,7 +1366,7 @@
           <a:p>
             <a:r>
               <a:rPr lang="en-US" dirty="0"/>
-              <a:t>손유호. 기록 · 비교 · 요청 화면은 믿고 쓰는 것이 중요해서 광고를 섞지 않습니다. 단가를 모르니 매출 추정은 적지 않았습니다. 정산 문구 · 내용증명 · 증빙 묶음을 돈 받고 만들면 변호사법 · 공인노무사법 문제에 가까워져서 유료화하지 않습니다(웹 조사 기준, 전문가 검토 아님). 유저 확보는 에브리타임 · 학과 단톡 · 알바 커뮤니티에 링크를 올리고, "주휴수당 계산법" 같은 짧은 영상을 만듭니다. 알바비 앱에 왜 게임이 있나: 출퇴근은 일하는 날마다 누르지만, 돈을 확인하는 건 급여일에 한 번이라, 그 사이에도 앱을 열 이유로 넣었고 그 화면이 광고 자리입니다. 처음엔 근무 중에만 열렸는데 팀원 의견으로 10/25에 조건을 풀고 설정에서 숨길 수 있게 했습니다. 광고 형식은 웹앱이라 배너 · 전면이 기본이고 보상형은 승인이 필요합니다. 2차 구독은 폰을 바꾸거나 잃어버려도 기록이 남게 하는 선택 기능이고, 원하는 사람만 쓰므로 "근무 내용은 폰 안에만" 원칙과 부딪히지 않습니다. 광고 가설은 설문의 "게임 화면 광고" 문항과 승인 뒤 게임 화면 열람 수로 확인합니다. 운영 비용은 지금 서버 0원 · 배포 0원이라 수익이 0이어도 서비스는 돌아가고, 인건비는 팀 3명입니다. 넘길 때: "주 15시간 이상이 다수인지는 지금 답하고 계신 설문에서 첫 조각이 나옵니다. 검증 계획은 박명진이 말씀드립니다."</a:t>
+              <a:t>손유호. 기록 · 비교 · 요청 화면은 믿고 쓰는 것이 중요해서 광고를 섞지 않습니다. 단가를 모르니 매출 추정은 적지 않았습니다. 정산 문구 · 내용증명 · 증빙 묶음을 돈 받고 만들면 변호사법 · 공인노무사법 문제에 가까워져서 유료화하지 않습니다(웹 조사 기준, 전문가 검토 아님). 유저 확보는 에브리타임 · 학과 단톡 · 알바 커뮤니티에 링크를 올리고, "주휴수당 계산법" 같은 짧은 영상을 만듭니다. 알바비 앱에 왜 게임이 있나: 출퇴근은 일하는 날마다 누르지만, 돈을 확인하는 건 급여일에 한 번이라, 그 사이에도 앱을 열 이유로 넣었고 그 화면이 광고 자리입니다. 처음엔 근무 중에만 열렸는데 팀원 의견으로 10/25에 조건을 풀고 설정에서 숨길 수 있게 했습니다. 광고 형식은 웹앱이라 배너 · 전면이 기본이고 보상형은 승인이 필요합니다. 2차 구독은 폰을 바꾸거나 잃어버려도 기록이 남게 하는 선택 기능이고, 원하는 사람만 쓰므로 "근무 내용은 폰 안에만" 원칙과 부딪히지 않습니다. 광고 가설은 설문의 "게임 화면 광고" 문항과 승인 뒤 게임 화면 열람 수로 확인합니다. 운영 비용은 지금 서버 0원 · 배포 0원이라 수익이 0이어도 서비스는 돌아가고, 인건비는 팀 3명입니다. 넘길 때: "주 15시간 이상 일하는 사람이 많은지는 지금 답하고 계신 설문으로 처음 확인합니다. 검증 계획은 박명진이 말씀드립니다."</a:t>
             </a:r>
             <a:endParaRPr lang="en-US" dirty="0"/>
           </a:p>
@@ -1454,7 +1454,7 @@
           <a:p>
             <a:r>
               <a:rPr lang="en-US" dirty="0"/>
-              <a:t>박명진. 모집은 학과 · 동아리 단톡, 에브리타임, 그리고 오늘 이 자리(QR)입니다. 인터뷰 5명은 지인 중 지금 알바 중인 사람으로 11/3~11/9에 합니다. 왜 먼저 만들었나: 웹앱이라 빨리 만들 수 있고, 화면을 보여 주며 물어야 답이 정확하다고 봤습니다. 가설은 9월 기획서 문장 그대로입니다. 표의 기준은 팀이 정한 목표이지 데이터가 아닙니다. 인터뷰 문항은 설문지 20~24번입니다. 지금까지 들은 것은 정식 조사가 아닙니다: 타깃 사용자 1명이 디자인 시안 12장 중 통장 구성을 골랐고, 링크 설문은 10/23에 공개했습니다. 기말 발표에서 이 표에 결과를 더해 보고합니다. 응답 수는 슬라이드에 적지 않고 당일 아침 결과 페이지에서 읽습니다. 0명이면 0명이라고 말합니다. 다만 당일 아침 응답이 10명 이상이고, 강의실 인터넷이 되고, 교수님 양해를 받았으면 결과 페이지(survey-results.html)를 60초만 띄워 세 문항(주당 근무 시간 · 적게 받은 것 같았던 적 · 매달 받은 금액 직접 넣기)만 읽습니다. 자유 의견은 띄우지 않습니다. 아니면 당일 아침 캡처로 대신합니다. 테스트 응답 2건(10/23)은 미리 지워 둡니다. 결과는 사람 수로만 말하고 %는 30명을 넘을 때만 씁니다. 1행은 의향을 묻는 것이라 한계가 있습니다. 인터뷰 때 앱을 설치하게 하고, 실제로 넣는지는 급여일이 지난 뒤 따로 봅니다(기말 이후까지 걸릴 수 있음). 지인은 호의적으로 답하기 쉬워서 "넣겠다"를 그대로 믿지 않습니다.</a:t>
+              <a:t>박명진. 모집은 학과 · 동아리 단톡, 에브리타임, 그리고 오늘 이 자리(QR)입니다. 인터뷰 5명은 지인 중 지금 알바 중인 사람으로 11/3~11/9에 합니다. 왜 먼저 만들었나: 웹앱이라 빨리 만들 수 있고, 화면을 보여 주며 물어야 답이 정확하다고 봤습니다. 가설은 9월 기획서 문장 그대로입니다. 표의 기준은 팀이 정한 목표이지 데이터가 아닙니다. 인터뷰 문항은 설문지 20~24번입니다. 지금까지 들은 의견은 정식 조사가 아닙니다. 타깃 사용자 1명이 디자인 시안 12장 중 통장 구성을 골랐습니다. 링크 설문은 10/23에 열었습니다. 기말 발표에서 이 표에 결과를 더해 보고합니다. 응답 수는 슬라이드에 적지 않고 당일 아침 결과 페이지에서 읽습니다. 0명이면 0명이라고 말합니다. 다만 당일 아침 응답이 10명 이상이고, 강의실 인터넷이 되고, 교수님 양해를 받았으면 결과 페이지(survey-results.html)를 60초만 띄워 세 문항(주당 근무 시간 · 적게 받은 것 같았던 적 · 매달 받은 금액 직접 넣기)만 읽습니다. 자유 의견은 띄우지 않습니다. 아니면 당일 아침 캡처로 대신합니다. 테스트 응답 2건(10/23)은 미리 지워 둡니다. 결과는 사람 수로만 말하고 %는 30명을 넘을 때만 씁니다. 1행은 의향을 묻는 것이라 한계가 있습니다. 인터뷰 때 앱을 설치하게 하고, 실제로 넣는지는 급여일이 지난 뒤 따로 봅니다(기말 이후까지 걸릴 수 있음). 지인은 호의적으로 답하기 쉬워서 "넣겠다"를 그대로 믿지 않습니다.</a:t>
             </a:r>
             <a:endParaRPr lang="en-US" dirty="0"/>
           </a:p>
@@ -1542,7 +1542,7 @@
           <a:p>
             <a:r>
               <a:rPr lang="en-US" dirty="0"/>
-              <a:t>박명진. 7주 일정이고 빨간 마름모가 마일스톤입니다. 설문은 오늘 이 자리에서 시작해 11/16까지 손유호가 30명을 모으고, 인터뷰 5명은 11/3~11/9에 손유호 3명, 제가 2명을 합니다. 폰 검증은 아이폰은 팀장, 갤럭시는 제가 주관합니다. 광고 승인 신청은 손유호, 코드는 팀장입니다. 마일스톤: 11/9 설문 1차 집계 · 인터뷰 마감, 11/23 피드백 반영 배포와 광고 결정, 11/30 폰 검증 끝, 12/7 기록 등록 보강 배포와 기능 동결, 12/15 기말. 11/23에 설문의 광고 문항 결과로 광고 실험과 새 게임 중 하나를 정합니다. 12/7 이후에는 코드를 바꾸지 않고 보고서와 발표를 준비합니다. 위험과 대안은 보고서 5.4에 적었습니다.</a:t>
+              <a:t>박명진. 7주 일정이고 빨간 마름모가 마일스톤입니다. 설문은 10/23에 열었고, 오늘부터 본격적으로 모아 11/16까지 손유호가 30명을 채우고, 인터뷰 5명은 11/3~11/9에 손유호 3명, 제가 2명을 합니다. 폰 검증은 아이폰은 팀장, 갤럭시는 제가 주관합니다. 광고 승인 신청은 손유호, 코드는 팀장입니다. 마일스톤: 11/9 설문 1차 집계 · 인터뷰 마감, 11/23 피드백 반영 배포와 광고 결정, 11/30 폰 검증 끝, 12/7 기록 등록 보강 배포와 기능 동결, 12/15 기말. 11/23에 설문의 광고 문항 결과로 광고 실험과 새 게임 중 하나를 정합니다. 12/7 이후에는 코드를 바꾸지 않고 보고서와 발표를 준비합니다. 위험과 대안은 보고서 5.4에 적었습니다.</a:t>
             </a:r>
             <a:endParaRPr lang="en-US" dirty="0"/>
           </a:p>
@@ -1725,14 +1725,14 @@
 · [이지훈] 확인 번호가 그 기록에서 나온 건지 어떻게 아나? → 지금은 번호와 서버 등록 시각까지 보여 주고, 기록 내용에서 번호를 다시 계산해 맞춰 보는 방법은 기말까지 만든다(그래서 70%). 지금은 앱 · 백업 파일을 함께 봐야 한다.
 · [이지훈] 본인이 쓴 기록을 믿을 수 있나? → 거짓 기록은 막을 수 없다고 인정. 막는 건 "나중에 고쳐 쓰기". 영세 사업장은 기록이 없는 경우가 많아 알바생 기록이 거의 유일한 자료가 되기 쉽다. 사장에게는 임금대장 · 계약 서류 보존 의무가 있다(근로기준법 48 · 42조).
 · [이지훈] 앱 계산이 틀리면 분쟁이 커지는 것 아닌가? 책임은? → 계산을 단정으로 내놓지 않는다. 항목별 · 주별 이유를 펼쳐 보여 주고, 안 넣은 것(연장근로 가산)과 유리하게 본 것(합의 휴무)은 화면에 적었다. 1단계 문구는 청구서가 아니라 "제가 계산을 잘 몰라서 여쭤본다"라는 확인 요청. 법률 자문 아님을 적어 두었고 1350 확인을 안내한다.
-· [이지훈] 고객 검증도 전에 왜 먼저 만들었나? → 맞다. 다만 링크로 배포되는 웹앱이라 빨리 만들 수 있었고, 말로 설명하기보다 화면을 보여 주며 물어야 정확한 답을 듣는다고 봤다. 9월 경쟁 앱 리뷰로 빈자리를 확인하고 10/13 정의서로 범위를 8개로 잘랐다. 설문에 캡처 3장을 넣고 "실제로 있다면 쓰겠나"를 묻는다. 12/7까지는 고치는 기간.
-· [박명진] 받은 금액을 매달 직접 넣어야 하는데 넣을까? → 가장 큰 가설이라 인터뷰 1번. 첫 화면에서 "9월 급여 받으셨나요?"라고 묻고 넣는 순간 덜 받은 돈이 보이게 했다. 5명 중 3명이 아니면 자동 인식을 앞당긴다.
-· [이지훈] 하우머치가 따라 하면? → 비교 기능은 따라올 수 있다. 해시를 서버에 넣는 기술 자체도 어렵지 않다고 인정한다. 어려운 것은 그 번호가 뜻이 있게 기록 구조를 짜는 일이다. 사유 없이 못 고치고, 삭제도 흔적이 남고, 고칠 때마다 다시 등록돼야 "몇 번 고쳤나"가 보인다. 기존 앱이 따라오려면 기록을 마음대로 고치던 방식을 바꿔야 해서 쉽게 따라오지 않는다고 본다. 그래도 따라오면 요청 · 증빙까지 잇는 흐름으로 간다. 우리도 "내용으로 번호 다시 계산"이 남아 70%다.
+· [이지훈] 고객 검증도 전에 왜 먼저 만들었나? → 지적은 맞습니다. 다만 링크로 배포되는 웹앱이라 빨리 만들 수 있었고, 말로 설명하기보다 화면을 보여 주며 물어야 정확한 답을 듣는다고 봤다. 9월 경쟁 앱 리뷰로 빈자리를 확인하고 10/13 정의서로 범위를 8개로 잘랐다. 설문에 캡처 3장을 넣고 "실제로 있다면 쓰겠나"를 묻는다. 12/7까지는 고치는 기간.
+· [박명진] 받은 금액을 매달 직접 넣어야 하는데 넣을까? → 가장 큰 가설이라 검증 표 첫 줄. 첫 화면에서 "9월 급여 받으셨나요?"라고 묻고 넣는 순간 덜 받은 돈이 보이게 했다. 5명 중 3명이 아니면 자동 인식을 앞당긴다.
+· [이지훈] 하우머치가 따라 하면? → 비교 기능은 따라올 수 있다. 확인 번호를 서버에 넣는 기술 자체도 어렵지 않다고 인정한다. 어려운 것은 그 번호가 뜻이 있게 기록 구조를 짜는 일이다. 사유 없이 못 고치고, 삭제도 흔적이 남고, 고칠 때마다 다시 등록돼야 "몇 번 고쳤나"가 보인다. 기존 앱이 따라오려면 기록을 마음대로 고치던 방식을 바꿔야 해서 쉽게 따라오지 않는다고 본다. 그래도 따라오면 요청 · 증빙까지 잇는 흐름으로 간다. 우리도 "내용으로 번호 다시 계산"이 남아 70%다.
 · [손유호] 급여 앱에 게임이 왜? 근무 중에 게임을 권하나? → 출퇴근은 일하는 날마다 누르지만, 돈을 확인하는 건 급여일에 한 번이라, 그 사이에도 앱을 열 이유로 넣은 것. 처음엔 근무 중에만이었는데 팀원 의견으로 10/25 조건을 풀고 설정에서 숨길 수 있게 했다. 게임 기록은 문서에 안 섞인다. 안 되면 게임을 빼도 기록 → 비교 → 요청은 그대로.
-· [박명진] 같은 과 학생 설문이 무슨 의미? 편향 아닌가? → 맞다. "정식 조사 아님"을 적고 사람 수로만 말한다. 중복 응답도 막지 않았다(이름 · 기기 정보를 안 받는 대가). 11월 30명은 과 밖에서, 인터뷰 5명으로 이유를 듣는다.
+· [박명진] 같은 과 학생 설문이 무슨 의미? 편향 아닌가? → 맞다. "정식 조사 아님"을 적고 사람 수로만 말한다. 중복 응답도 막지 않았다(이름 · 기기 정보를 안 받는 대가). 11월 30명은 학과 밖(동아리 · 에브리타임)까지 넓혀 모으고, 인터뷰 5명으로 이유를 듣는다.
 · [이지훈] 법률 서비스 아닌가? → 무료, 본인 기록을 정해진 양식에 채울 뿐, 개별 사안 검토 · 대행 없음, 진정은 1350 · 노동포털로 연결만.
 · [손유호] 수익은? → 게임 화면 광고(가설). 운영 비용은 0원. 문서 유료화는 안 한다.
-· [이지훈] 정의서를 개발 중에 썼는데 계획 대비가 의미 있나? → 맞다. 원래 계획은 9월 기획서의 기능 4개(기록 · 비교 · 요청 · 증빙)다. 10/13 정의서는 만들면서 필요해진 것(기록 등록 · 백업)을 더해 8개로 고정하고, 넣지 않을 6개를 정한 문서다. 그 뒤 포함 기능을 늘리지 않았고 뺀 6개는 지금도 없다. 8/8은 "다 했다"가 아니라 "범위를 지켰다"로 읽어 달라.
+· [이지훈] 정의서를 개발 중에 썼는데 계획 대비가 의미 있나? → 지적은 맞습니다. 원래 계획은 9월 기획서의 기능 4개(기록 · 비교 · 요청 · 증빙)다. 10/13 정의서는 만들면서 필요해진 것(기록 등록 · 백업)을 더해 8개로 고정하고, 넣지 않을 6개를 정한 문서다. 그 뒤 포함 기능을 늘리지 않았고 뺀 6개는 지금도 없다. 8/8은 "다 했다"가 아니라 "범위를 지켰다"로 읽어 달라.
 · [이지훈] 등록 시각이 출근 시각인가? 인터넷이 없을 때 기록하면? → 아니다. 등록 시각은 확인 번호가 서버에 도착한 시각이고, 보여 주는 것은 "늦어도 이 시각에는 이 내용이 있었다"까지다. 인터넷이 없으면 대기열에 있다가 연결될 때 보내지므로 그만큼 늦어진다. "나중에 입력"한 기록도 입력했을 때 등록되고, 기록에는 나중에 입력했다는 표시와 사유가 같이 남는다. 출근 시각 자체를 증명하는 것은 아니다.
 · [이지훈] 아무 번호나 넣으면? 두 기록이 같은 번호가 될 수 있나? → 확인 페이지는 앞 16자와 64자 전체를 둘 다 받고, 서버에 없는 번호는 등록된 것이 없다고 나온다. 서버 표에서 번호는 중복을 허용하지 않는다. 재료에 기록 번호와 만든 시각이 들어가서 서로 다른 기록이 같은 번호가 될 일은 사실상 없다.
 · [이지훈] 카톡 나에게 보내기로 매일 적으면 같지 않나? → 시각만 보면 카톡이 더 믿을 만하다. 카카오가 찍은 시각이라 우리와 무관하다. 다른 점은 둘이다. 카톡은 고치면 새 메시지가 하나 더 생길 뿐 무엇을 왜 고쳤는지 안 남고, 그 기록으로 계산 · 비교 · 요청 · 증빙 묶음까지 이어지지 않는다. 그래서 카톡에 적던 사람이 첫 타깃이고, 카톡 캡처는 함께 내라고 앱에도 적었다.
@@ -1919,7 +1919,7 @@
           <a:p>
             <a:r>
               <a:rPr lang="en-US" dirty="0"/>
-              <a:t>타깃: 근로계약서가 없거나 사본이 없고, 통장 총액만 확인하고, 사장님께 말을 꺼내기 부담스러워하는 학생입니다. 주 15시간은 주휴수당이 생기는 선입니다. 문제 1: 수당 안내를 못 받는 경우가 많고 주휴 · 야간 계산 기준은 알기 어렵습니다. 계산기는 있어도 넣을 기록이 없습니다. 문제 2: 통장에 들어온 총액만 보고 넘어가고, 계약서가 없어 시급도 증명하기 어렵습니다. 문제 3: 관계 걱정, 작은 금액, 근거 없음이 겹치고, 메모장 기록은 "나중에 지어낸 것 아니냐?" 한마디에 무너집니다. 세 문제를 숫자로 보여 줍니다. 모두 알바천국 설문이라 "플랫폼 설문"이라는 점을 말하고, 그래서 우리도 직접 설문을 돌리고 있다고 잇습니다. 33.2%는 노동절 수당 안내에 대한 숫자라 "수당 자체가 안내되지 않는다"까지만 말하고, 주휴 · 야간 계산 자신감은 우리 설문 문항으로 직접 묻고 있다고 덧붙입니다.</a:t>
+              <a:t>타깃: 근로계약서가 없거나 사본이 없고, 통장 총액만 확인하고, 사장님께 말을 꺼내기 부담스러워하는 학생입니다. 주 15시간은 주휴수당이 생기는 선입니다. 문제 1: 수당 안내를 못 받는 경우가 많고 주휴 · 야간 계산 기준은 알기 어렵습니다. 계산기는 있어도 넣을 기록이 없습니다. 문제 2: 통장에 들어온 총액만 보고 넘어가고, 계약서가 없어 시급도 증명하기 어렵습니다. 문제 3: 관계 걱정, 작은 금액, 근거 없음이 겹치고, 메모장 기록은 "나중에 지어낸 것 아니냐?" 한마디에 무너집니다. 세 문제를 숫자로 보여 줍니다. 모두 알바천국 설문이라 "플랫폼 설문"이라는 점을 말하고, 그래서 우리도 직접 설문을 돌리고 있다고 잇습니다. 33.2%는 노동절 수당 안내에 대한 숫자라 "노동절 수당조차 안내받지 못하는 경우가 있다"까지만 말하고, 주휴 · 야간 계산 자신감은 우리 설문 문항으로 직접 묻고 있다고 덧붙입니다.</a:t>
             </a:r>
             <a:endParaRPr lang="en-US" dirty="0"/>
           </a:p>

--- a/docs/06_중간발표_PPT.pptx
+++ b/docs/06_중간발표_PPT.pptx
@@ -125,31 +125,31 @@
   <p:extLst>
     <p:ext uri="{521415D9-36F7-43E2-AB2F-B90AF26B5E84}">
       <p14:sectionLst xmlns:p14="http://schemas.microsoft.com/office/powerpoint/2010/main">
-        <p14:section name="① 표지·팀 소개" id="{cb98607d-ab3c-72b3-311d-271ed558c3f7}">
+        <p14:section name="① 표지·팀 소개" id="{06f2e708-3376-d667-98eb-0336a0b2920f}">
           <p14:sldIdLst>
             <p14:sldId id="256"/>
             <p14:sldId id="257"/>
           </p14:sldIdLst>
         </p14:section>
-        <p14:section name="② 문제 정의" id="{3b30eed6-9895-52c9-acc1-96b99ad035d7}">
+        <p14:section name="② 문제 정의" id="{12de3170-4ee8-3293-d9df-c862a0e90f55}">
           <p14:sldIdLst>
             <p14:sldId id="258"/>
             <p14:sldId id="259"/>
           </p14:sldIdLst>
         </p14:section>
-        <p14:section name="③ 솔루션·핵심 가치" id="{6ec71c9e-3e1b-cf1e-5cd3-c6bdd9826ea2}">
+        <p14:section name="③ 솔루션·핵심 가치" id="{7bb7016f-ccbf-6011-0886-23715940adf6}">
           <p14:sldIdLst>
             <p14:sldId id="260"/>
             <p14:sldId id="261"/>
           </p14:sldIdLst>
         </p14:section>
-        <p14:section name="④ SW 기술 아키텍처" id="{a55081bf-8351-6828-dcb1-dcbc2ece9ba9}">
+        <p14:section name="④ SW 기술 아키텍처" id="{fa48ce6e-81b1-f4b3-16e4-018b7ef072e4}">
           <p14:sldIdLst>
             <p14:sldId id="262"/>
             <p14:sldId id="263"/>
           </p14:sldIdLst>
         </p14:section>
-        <p14:section name="⑤ 개발 현황·MVP 시연" id="{3d359fb9-509c-0a89-1f0e-43ced7bc503e}">
+        <p14:section name="⑤ 개발 현황·MVP 시연" id="{f72ce59e-e3f9-371d-3b9b-aebeaa5ef23f}">
           <p14:sldIdLst>
             <p14:sldId id="264"/>
             <p14:sldId id="265"/>
@@ -157,19 +157,19 @@
             <p14:sldId id="267"/>
           </p14:sldIdLst>
         </p14:section>
-        <p14:section name="⑥ 시장 분석·비즈니스 모델" id="{ee7c33f2-787d-ca26-be76-419c44ac0507}">
+        <p14:section name="⑥ 시장 분석·비즈니스 모델" id="{58a44363-b7c6-ca44-6767-c615144d7dd8}">
           <p14:sldIdLst>
             <p14:sldId id="268"/>
             <p14:sldId id="269"/>
             <p14:sldId id="270"/>
           </p14:sldIdLst>
         </p14:section>
-        <p14:section name="⑦ 초기 시장 검증" id="{0dcf0754-875c-f967-73c1-baf1912f1dba}">
+        <p14:section name="⑦ 초기 시장 검증" id="{5009f18b-7efe-2bb2-e37c-236595e336bd}">
           <p14:sldIdLst>
             <p14:sldId id="271"/>
           </p14:sldIdLst>
         </p14:section>
-        <p14:section name="⑧ 향후 계획·팀 역량" id="{53bfe07b-b8d7-c620-1168-927e7cfe6998}">
+        <p14:section name="⑧ 향후 계획·팀 역량" id="{30cfebb8-a9a4-ffd6-6c2d-7a634d28c459}">
           <p14:sldIdLst>
             <p14:sldId id="272"/>
             <p14:sldId id="273"/>
@@ -8495,7 +8495,7 @@
                   <a:schemeClr val="tx1"/>
                 </a:solidFill>
               </a:rPr>
-              <a:t>출퇴근은 일하는 날마다 누르지만, 돈을 확인하는 건 급여일에 한 번. 그 사이 앱을 열 이유로 게임을 넣었고, 그 화면이 광고 자리</a:t>
+              <a:t>출퇴근은 일하는 날마다, 돈 확인은 급여일에 한 번. 그 사이 열 이유로 게임 = 광고 자리</a:t>
             </a:r>
             <a:endParaRPr lang="en-US" sz="1100" dirty="0"/>
           </a:p>
@@ -15428,7 +15428,7 @@
                   <a:schemeClr val="tx1"/>
                 </a:solidFill>
               </a:rPr>
-              <a:t>주 15시간 이상 일하는 만 19~26세 시급제 알바 대학생 · 계약서 없음 · 통장 총액만 확인 · 말 꺼내기 부담</a:t>
+              <a:t>주 15시간 이상 · 만 19~26세 시급제 알바 대학생 · 계약서 없음 · 통장 총액만 확인</a:t>
             </a:r>
             <a:endParaRPr lang="en-US" sz="1150" dirty="0"/>
           </a:p>

--- a/docs/06_중간발표_PPT.pptx
+++ b/docs/06_중간발표_PPT.pptx
@@ -125,31 +125,31 @@
   <p:extLst>
     <p:ext uri="{521415D9-36F7-43E2-AB2F-B90AF26B5E84}">
       <p14:sectionLst xmlns:p14="http://schemas.microsoft.com/office/powerpoint/2010/main">
-        <p14:section name="① 표지·팀 소개" id="{06f2e708-3376-d667-98eb-0336a0b2920f}">
+        <p14:section name="① 표지·팀 소개" id="{156bb4b6-521a-5d93-4be9-2272ca530236}">
           <p14:sldIdLst>
             <p14:sldId id="256"/>
             <p14:sldId id="257"/>
           </p14:sldIdLst>
         </p14:section>
-        <p14:section name="② 문제 정의" id="{12de3170-4ee8-3293-d9df-c862a0e90f55}">
+        <p14:section name="② 문제 정의" id="{7d0a66d6-dc4c-28e8-6faa-eeea28c6288a}">
           <p14:sldIdLst>
             <p14:sldId id="258"/>
             <p14:sldId id="259"/>
           </p14:sldIdLst>
         </p14:section>
-        <p14:section name="③ 솔루션·핵심 가치" id="{7bb7016f-ccbf-6011-0886-23715940adf6}">
+        <p14:section name="③ 솔루션·핵심 가치" id="{79152eee-6db7-bbb6-6bf4-21fc032c6a63}">
           <p14:sldIdLst>
             <p14:sldId id="260"/>
             <p14:sldId id="261"/>
           </p14:sldIdLst>
         </p14:section>
-        <p14:section name="④ SW 기술 아키텍처" id="{fa48ce6e-81b1-f4b3-16e4-018b7ef072e4}">
+        <p14:section name="④ SW 기술 아키텍처" id="{9c4d2f7f-61c8-0a3b-0369-365a8af601a8}">
           <p14:sldIdLst>
             <p14:sldId id="262"/>
             <p14:sldId id="263"/>
           </p14:sldIdLst>
         </p14:section>
-        <p14:section name="⑤ 개발 현황·MVP 시연" id="{f72ce59e-e3f9-371d-3b9b-aebeaa5ef23f}">
+        <p14:section name="⑤ 개발 현황·MVP 시연" id="{cd53fce4-a68a-5ac2-cd33-ba778dfbdb5a}">
           <p14:sldIdLst>
             <p14:sldId id="264"/>
             <p14:sldId id="265"/>
@@ -157,19 +157,19 @@
             <p14:sldId id="267"/>
           </p14:sldIdLst>
         </p14:section>
-        <p14:section name="⑥ 시장 분석·비즈니스 모델" id="{58a44363-b7c6-ca44-6767-c615144d7dd8}">
+        <p14:section name="⑥ 시장 분석·비즈니스 모델" id="{d260c910-2460-6892-0c27-487e8ca17eb2}">
           <p14:sldIdLst>
             <p14:sldId id="268"/>
             <p14:sldId id="269"/>
             <p14:sldId id="270"/>
           </p14:sldIdLst>
         </p14:section>
-        <p14:section name="⑦ 초기 시장 검증" id="{5009f18b-7efe-2bb2-e37c-236595e336bd}">
+        <p14:section name="⑦ 초기 시장 검증" id="{9dc31123-7ecd-b277-8663-e0ff1bfecb71}">
           <p14:sldIdLst>
             <p14:sldId id="271"/>
           </p14:sldIdLst>
         </p14:section>
-        <p14:section name="⑧ 향후 계획·팀 역량" id="{30cfebb8-a9a4-ffd6-6c2d-7a634d28c459}">
+        <p14:section name="⑧ 향후 계획·팀 역량" id="{f2a58000-2c1d-b7a0-acdc-725e08a4984f}">
           <p14:sldIdLst>
             <p14:sldId id="272"/>
             <p14:sldId id="273"/>

--- a/docs/06_중간발표_PPT.pptx
+++ b/docs/06_중간발표_PPT.pptx
@@ -125,31 +125,31 @@
   <p:extLst>
     <p:ext uri="{521415D9-36F7-43E2-AB2F-B90AF26B5E84}">
       <p14:sectionLst xmlns:p14="http://schemas.microsoft.com/office/powerpoint/2010/main">
-        <p14:section name="① 표지·팀 소개" id="{156bb4b6-521a-5d93-4be9-2272ca530236}">
+        <p14:section name="① 표지·팀 소개" id="{32c379ae-3219-2b41-9799-195d9e802efd}">
           <p14:sldIdLst>
             <p14:sldId id="256"/>
             <p14:sldId id="257"/>
           </p14:sldIdLst>
         </p14:section>
-        <p14:section name="② 문제 정의" id="{7d0a66d6-dc4c-28e8-6faa-eeea28c6288a}">
+        <p14:section name="② 문제 정의" id="{b9aa2901-63f0-fa32-c29a-2c7cb86aeb7a}">
           <p14:sldIdLst>
             <p14:sldId id="258"/>
             <p14:sldId id="259"/>
           </p14:sldIdLst>
         </p14:section>
-        <p14:section name="③ 솔루션·핵심 가치" id="{79152eee-6db7-bbb6-6bf4-21fc032c6a63}">
+        <p14:section name="③ 솔루션·핵심 가치" id="{8d7c2fdd-371d-1017-99c9-3a0fb9736b7c}">
           <p14:sldIdLst>
             <p14:sldId id="260"/>
             <p14:sldId id="261"/>
           </p14:sldIdLst>
         </p14:section>
-        <p14:section name="④ SW 기술 아키텍처" id="{9c4d2f7f-61c8-0a3b-0369-365a8af601a8}">
+        <p14:section name="④ SW 기술 아키텍처" id="{beb9ed25-3744-fc06-fba2-15c75bad1411}">
           <p14:sldIdLst>
             <p14:sldId id="262"/>
             <p14:sldId id="263"/>
           </p14:sldIdLst>
         </p14:section>
-        <p14:section name="⑤ 개발 현황·MVP 시연" id="{cd53fce4-a68a-5ac2-cd33-ba778dfbdb5a}">
+        <p14:section name="⑤ 개발 현황·MVP 시연" id="{020651e9-c7b0-3b75-3d15-6606018d1d25}">
           <p14:sldIdLst>
             <p14:sldId id="264"/>
             <p14:sldId id="265"/>
@@ -157,19 +157,19 @@
             <p14:sldId id="267"/>
           </p14:sldIdLst>
         </p14:section>
-        <p14:section name="⑥ 시장 분석·비즈니스 모델" id="{d260c910-2460-6892-0c27-487e8ca17eb2}">
+        <p14:section name="⑥ 시장 분석·비즈니스 모델" id="{806d86d5-1ea1-cb58-8a4c-89c4200a35cc}">
           <p14:sldIdLst>
             <p14:sldId id="268"/>
             <p14:sldId id="269"/>
             <p14:sldId id="270"/>
           </p14:sldIdLst>
         </p14:section>
-        <p14:section name="⑦ 초기 시장 검증" id="{9dc31123-7ecd-b277-8663-e0ff1bfecb71}">
+        <p14:section name="⑦ 초기 시장 검증" id="{5fc55066-7ba4-c886-8a09-55c67e7add75}">
           <p14:sldIdLst>
             <p14:sldId id="271"/>
           </p14:sldIdLst>
         </p14:section>
-        <p14:section name="⑧ 향후 계획·팀 역량" id="{f2a58000-2c1d-b7a0-acdc-725e08a4984f}">
+        <p14:section name="⑧ 향후 계획·팀 역량" id="{3f5c0db6-3400-9c52-520f-a57a0832e4c4}">
           <p14:sldIdLst>
             <p14:sldId id="272"/>
             <p14:sldId id="273"/>
@@ -1454,7 +1454,7 @@
           <a:p>
             <a:r>
               <a:rPr lang="en-US" dirty="0"/>
-              <a:t>박명진. 모집은 학과 · 동아리 단톡, 에브리타임, 그리고 오늘 이 자리(QR)입니다. 인터뷰 5명은 지인 중 지금 알바 중인 사람으로 11/3~11/9에 합니다. 왜 먼저 만들었나: 웹앱이라 빨리 만들 수 있고, 화면을 보여 주며 물어야 답이 정확하다고 봤습니다. 가설은 9월 기획서 문장 그대로입니다. 표의 기준은 팀이 정한 목표이지 데이터가 아닙니다. 인터뷰 문항은 설문지 20~24번입니다. 지금까지 들은 의견은 정식 조사가 아닙니다. 타깃 사용자 1명이 디자인 시안 12장 중 통장 구성을 골랐습니다. 링크 설문은 10/23에 열었습니다. 기말 발표에서 이 표에 결과를 더해 보고합니다. 응답 수는 슬라이드에 적지 않고 당일 아침 결과 페이지에서 읽습니다. 0명이면 0명이라고 말합니다. 다만 당일 아침 응답이 10명 이상이고, 강의실 인터넷이 되고, 교수님 양해를 받았으면 결과 페이지(survey-results.html)를 60초만 띄워 세 문항(주당 근무 시간 · 적게 받은 것 같았던 적 · 매달 받은 금액 직접 넣기)만 읽습니다. 자유 의견은 띄우지 않습니다. 아니면 당일 아침 캡처로 대신합니다. 테스트 응답 2건(10/23)은 미리 지워 둡니다. 결과는 사람 수로만 말하고 %는 30명을 넘을 때만 씁니다. 1행은 의향을 묻는 것이라 한계가 있습니다. 인터뷰 때 앱을 설치하게 하고, 실제로 넣는지는 급여일이 지난 뒤 따로 봅니다(기말 이후까지 걸릴 수 있음). 지인은 호의적으로 답하기 쉬워서 "넣겠다"를 그대로 믿지 않습니다.</a:t>
+              <a:t>박명진. 모집은 학과 · 동아리 단톡, 에브리타임, 그리고 오늘 이 자리(QR)입니다. 인터뷰 5명은 지인 중 지금 알바 중인 사람으로 11/3~11/9에 합니다. 왜 먼저 만들었나: 웹앱이라 빨리 만들 수 있고, 화면을 보여 주며 물어야 답이 정확하다고 봤습니다. 가설은 9월 기획서 문장 그대로입니다. 표의 기준은 팀이 정한 목표이지 데이터가 아닙니다. 인터뷰 문항은 설문지 20~24번입니다. 지금까지 들은 의견은 정식 조사가 아닙니다. 타깃 사용자 1명이 디자인 시안 12장 중 통장 구성을 골랐습니다. 링크 설문은 10/23에 열었습니다. 기말 발표에서 이 표에 결과를 더해 보고합니다. 응답 수는 슬라이드에 적지 않고 당일 아침 결과 페이지에서 읽습니다. 0명이면 0명이라고 말합니다. 다만 당일 아침 응답이 10명 이상이고, 강의실 인터넷이 되고, 교수님 양해를 받았으면 결과 페이지(survey-results.html)를 60초만 띄워 세 문항(주당 근무 시간 · 적게 받은 것 같았던 적 · 매달 받은 금액 직접 넣기)만 읽습니다. 자유 의견은 띄우지 않습니다. 아니면 당일 아침 캡처로 대신합니다. 테스트 응답 2건(10/23)은 미리 지워 둡니다. 결과는 사람 수로만 말하고 %는 30명 이상일 때만 씁니다. 1행은 의향을 묻는 것이라 한계가 있습니다. 인터뷰 때 앱을 설치하게 하고, 실제로 넣는지는 급여일이 지난 뒤 따로 봅니다(기말 이후까지 걸릴 수 있음). 지인은 호의적으로 답하기 쉬워서 "넣겠다"를 그대로 믿지 않습니다.</a:t>
             </a:r>
             <a:endParaRPr lang="en-US" dirty="0"/>
           </a:p>

--- a/docs/06_중간발표_PPT.pptx
+++ b/docs/06_중간발표_PPT.pptx
@@ -125,31 +125,31 @@
   <p:extLst>
     <p:ext uri="{521415D9-36F7-43E2-AB2F-B90AF26B5E84}">
       <p14:sectionLst xmlns:p14="http://schemas.microsoft.com/office/powerpoint/2010/main">
-        <p14:section name="① 표지·팀 소개" id="{32c379ae-3219-2b41-9799-195d9e802efd}">
+        <p14:section name="① 표지·팀 소개" id="{2b649c41-147c-a0b0-e3af-9272dd6f5834}">
           <p14:sldIdLst>
             <p14:sldId id="256"/>
             <p14:sldId id="257"/>
           </p14:sldIdLst>
         </p14:section>
-        <p14:section name="② 문제 정의" id="{b9aa2901-63f0-fa32-c29a-2c7cb86aeb7a}">
+        <p14:section name="② 문제 정의" id="{597fb892-0403-eebb-403e-da65b9482cce}">
           <p14:sldIdLst>
             <p14:sldId id="258"/>
             <p14:sldId id="259"/>
           </p14:sldIdLst>
         </p14:section>
-        <p14:section name="③ 솔루션·핵심 가치" id="{8d7c2fdd-371d-1017-99c9-3a0fb9736b7c}">
+        <p14:section name="③ 솔루션·핵심 가치" id="{61e1136c-863c-c90b-a20d-78c01eed8230}">
           <p14:sldIdLst>
             <p14:sldId id="260"/>
             <p14:sldId id="261"/>
           </p14:sldIdLst>
         </p14:section>
-        <p14:section name="④ SW 기술 아키텍처" id="{beb9ed25-3744-fc06-fba2-15c75bad1411}">
+        <p14:section name="④ SW 기술 아키텍처" id="{4c1ecc44-3e34-e7a8-286e-01dfac635052}">
           <p14:sldIdLst>
             <p14:sldId id="262"/>
             <p14:sldId id="263"/>
           </p14:sldIdLst>
         </p14:section>
-        <p14:section name="⑤ 개발 현황·MVP 시연" id="{020651e9-c7b0-3b75-3d15-6606018d1d25}">
+        <p14:section name="⑤ 개발 현황·MVP 시연" id="{6db3170d-e4ef-0d6d-5238-d67b2f710517}">
           <p14:sldIdLst>
             <p14:sldId id="264"/>
             <p14:sldId id="265"/>
@@ -157,19 +157,19 @@
             <p14:sldId id="267"/>
           </p14:sldIdLst>
         </p14:section>
-        <p14:section name="⑥ 시장 분석·비즈니스 모델" id="{806d86d5-1ea1-cb58-8a4c-89c4200a35cc}">
+        <p14:section name="⑥ 시장 분석·비즈니스 모델" id="{1c5dadd6-d39e-c025-213b-45301720b84b}">
           <p14:sldIdLst>
             <p14:sldId id="268"/>
             <p14:sldId id="269"/>
             <p14:sldId id="270"/>
           </p14:sldIdLst>
         </p14:section>
-        <p14:section name="⑦ 초기 시장 검증" id="{5fc55066-7ba4-c886-8a09-55c67e7add75}">
+        <p14:section name="⑦ 초기 시장 검증" id="{5598c3bc-fb6f-15c0-105e-65333a0cf177}">
           <p14:sldIdLst>
             <p14:sldId id="271"/>
           </p14:sldIdLst>
         </p14:section>
-        <p14:section name="⑧ 향후 계획·팀 역량" id="{3f5c0db6-3400-9c52-520f-a57a0832e4c4}">
+        <p14:section name="⑧ 향후 계획·팀 역량" id="{2b68ccd6-7efd-1ea8-207c-fcdb3da70e7d}">
           <p14:sldIdLst>
             <p14:sldId id="272"/>
             <p14:sldId id="273"/>
@@ -8241,7 +8241,7 @@
                   <a:schemeClr val="bg2"/>
                 </a:solidFill>
               </a:rPr>
-              <a:t>혼자 기록 → 비교 → 요청 → 증빙</a:t>
+              <a:t>기록 → 비교 → 요청 → 증빙</a:t>
             </a:r>
             <a:endParaRPr lang="en-US" sz="1050" dirty="0"/>
           </a:p>
@@ -8313,7 +8313,35 @@
                   <a:schemeClr val="tx1"/>
                 </a:solidFill>
               </a:rPr>
-              <a:t>계산기는 계산에서 멈추고, 기그는 사장이 가입해야, 진정24는 증거가 있어야 시작함</a:t>
+              <a:t>계산기는 계산에서 멈추고,</a:t>
+            </a:r>
+            <a:endParaRPr lang="en-US" sz="1200" dirty="0"/>
+          </a:p>
+          <a:p>
+            <a:pPr indent="0" marL="0">
+              <a:buNone/>
+            </a:pPr>
+            <a:r>
+              <a:rPr lang="en-US" sz="1200" dirty="0">
+                <a:solidFill>
+                  <a:schemeClr val="tx1"/>
+                </a:solidFill>
+              </a:rPr>
+              <a:t>기그는 사장이 가입해야,</a:t>
+            </a:r>
+            <a:endParaRPr lang="en-US" sz="1200" dirty="0"/>
+          </a:p>
+          <a:p>
+            <a:pPr indent="0" marL="0">
+              <a:buNone/>
+            </a:pPr>
+            <a:r>
+              <a:rPr lang="en-US" sz="1200" dirty="0">
+                <a:solidFill>
+                  <a:schemeClr val="tx1"/>
+                </a:solidFill>
+              </a:rPr>
+              <a:t>진정24는 증거가 있어야 시작함</a:t>
             </a:r>
             <a:endParaRPr lang="en-US" sz="1200" dirty="0"/>
           </a:p>
@@ -16020,7 +16048,7 @@
                   <a:schemeClr val="accent5"/>
                 </a:solidFill>
               </a:rPr>
-              <a:t>최저시급 미달 경험자 기준 · 알바천국 2026.6 (응답 1,804명)</a:t>
+              <a:t>미달 경험자 기준 · 알바천국 2026.6 (1,804명)</a:t>
             </a:r>
             <a:endParaRPr lang="en-US" sz="850" dirty="0"/>
           </a:p>
@@ -19849,7 +19877,21 @@
                   <a:schemeClr val="tx1"/>
                 </a:solidFill>
               </a:rPr>
-              <a:t>"받았어야 할 돈"(기본급 · 주휴 · 야간)과 실제 받은 돈의 차액 표시</a:t>
+              <a:t>"받았어야 할 돈"(기본급 · 주휴 · 야간)과</a:t>
+            </a:r>
+            <a:endParaRPr lang="en-US" sz="1050" dirty="0"/>
+          </a:p>
+          <a:p>
+            <a:pPr indent="0" marL="0">
+              <a:buNone/>
+            </a:pPr>
+            <a:r>
+              <a:rPr lang="en-US" sz="1050" dirty="0">
+                <a:solidFill>
+                  <a:schemeClr val="tx1"/>
+                </a:solidFill>
+              </a:rPr>
+              <a:t>실제 받은 돈의 차액 표시</a:t>
             </a:r>
             <a:endParaRPr lang="en-US" sz="1050" dirty="0"/>
           </a:p>
@@ -20057,7 +20099,21 @@
                   <a:schemeClr val="tx1"/>
                 </a:solidFill>
               </a:rPr>
-              <a:t>정중한 메시지 → 내용증명 초안 → 진정 절차 안내(1350 · 노동포털). 대화로 먼저 해결</a:t>
+              <a:t>정중한 메시지 → 내용증명 → 진정 안내</a:t>
+            </a:r>
+            <a:endParaRPr lang="en-US" sz="1050" dirty="0"/>
+          </a:p>
+          <a:p>
+            <a:pPr indent="0" marL="0">
+              <a:buNone/>
+            </a:pPr>
+            <a:r>
+              <a:rPr lang="en-US" sz="1050" dirty="0">
+                <a:solidFill>
+                  <a:schemeClr val="tx1"/>
+                </a:solidFill>
+              </a:rPr>
+              <a:t>1350 · 노동포털 연결. 대화로 먼저 해결</a:t>
             </a:r>
             <a:endParaRPr lang="en-US" sz="1050" dirty="0"/>
           </a:p>
@@ -23851,7 +23907,21 @@
                   <a:schemeClr val="accent5"/>
                 </a:solidFill>
               </a:rPr>
-              <a:t>예정과 다른 날만 글자로 (연장 · 대타 · 단축)</a:t>
+              <a:t>예정과 다른 날만 글자로</a:t>
+            </a:r>
+            <a:endParaRPr lang="en-US" sz="900" dirty="0"/>
+          </a:p>
+          <a:p>
+            <a:pPr algn="ctr" indent="0" marL="0">
+              <a:buNone/>
+            </a:pPr>
+            <a:r>
+              <a:rPr lang="en-US" sz="900" dirty="0">
+                <a:solidFill>
+                  <a:schemeClr val="accent5"/>
+                </a:solidFill>
+              </a:rPr>
+              <a:t>(연장 · 대타 · 단축)</a:t>
             </a:r>
             <a:endParaRPr lang="en-US" sz="900" dirty="0"/>
           </a:p>
@@ -23974,7 +24044,21 @@
                   <a:schemeClr val="accent5"/>
                 </a:solidFill>
               </a:rPr>
-              <a:t>기록 등록 건수 · 무엇이 서버로 가는지 · 백업</a:t>
+              <a:t>기록 등록 건수 · 백업</a:t>
+            </a:r>
+            <a:endParaRPr lang="en-US" sz="900" dirty="0"/>
+          </a:p>
+          <a:p>
+            <a:pPr algn="ctr" indent="0" marL="0">
+              <a:buNone/>
+            </a:pPr>
+            <a:r>
+              <a:rPr lang="en-US" sz="900" dirty="0">
+                <a:solidFill>
+                  <a:schemeClr val="accent5"/>
+                </a:solidFill>
+              </a:rPr>
+              <a:t>무엇이 서버로 가는지</a:t>
             </a:r>
             <a:endParaRPr lang="en-US" sz="900" dirty="0"/>
           </a:p>

--- a/docs/06_중간발표_PPT.pptx
+++ b/docs/06_중간발표_PPT.pptx
@@ -125,31 +125,31 @@
   <p:extLst>
     <p:ext uri="{521415D9-36F7-43E2-AB2F-B90AF26B5E84}">
       <p14:sectionLst xmlns:p14="http://schemas.microsoft.com/office/powerpoint/2010/main">
-        <p14:section name="① 표지·팀 소개" id="{2b649c41-147c-a0b0-e3af-9272dd6f5834}">
+        <p14:section name="① 표지·팀 소개" id="{4bafb02b-29ee-6810-28f1-b391b49eacda}">
           <p14:sldIdLst>
             <p14:sldId id="256"/>
             <p14:sldId id="257"/>
           </p14:sldIdLst>
         </p14:section>
-        <p14:section name="② 문제 정의" id="{597fb892-0403-eebb-403e-da65b9482cce}">
+        <p14:section name="② 문제 정의" id="{106b90ff-328d-7607-4e8c-23cb0d578de7}">
           <p14:sldIdLst>
             <p14:sldId id="258"/>
             <p14:sldId id="259"/>
           </p14:sldIdLst>
         </p14:section>
-        <p14:section name="③ 솔루션·핵심 가치" id="{61e1136c-863c-c90b-a20d-78c01eed8230}">
+        <p14:section name="③ 솔루션·핵심 가치" id="{f9a78ba7-962f-41a1-5e4f-256480a2e450}">
           <p14:sldIdLst>
             <p14:sldId id="260"/>
             <p14:sldId id="261"/>
           </p14:sldIdLst>
         </p14:section>
-        <p14:section name="④ SW 기술 아키텍처" id="{4c1ecc44-3e34-e7a8-286e-01dfac635052}">
+        <p14:section name="④ SW 기술 아키텍처" id="{482c20d8-b1c5-ffea-a4e2-cb5077a026eb}">
           <p14:sldIdLst>
             <p14:sldId id="262"/>
             <p14:sldId id="263"/>
           </p14:sldIdLst>
         </p14:section>
-        <p14:section name="⑤ 개발 현황·MVP 시연" id="{6db3170d-e4ef-0d6d-5238-d67b2f710517}">
+        <p14:section name="⑤ 개발 현황·MVP 시연" id="{3bb709f4-af13-3f9a-c1fd-6599df249862}">
           <p14:sldIdLst>
             <p14:sldId id="264"/>
             <p14:sldId id="265"/>
@@ -157,19 +157,19 @@
             <p14:sldId id="267"/>
           </p14:sldIdLst>
         </p14:section>
-        <p14:section name="⑥ 시장 분석·비즈니스 모델" id="{1c5dadd6-d39e-c025-213b-45301720b84b}">
+        <p14:section name="⑥ 시장 분석·비즈니스 모델" id="{09d44b13-3ac8-38c3-960b-68f8ffb0db15}">
           <p14:sldIdLst>
             <p14:sldId id="268"/>
             <p14:sldId id="269"/>
             <p14:sldId id="270"/>
           </p14:sldIdLst>
         </p14:section>
-        <p14:section name="⑦ 초기 시장 검증" id="{5598c3bc-fb6f-15c0-105e-65333a0cf177}">
+        <p14:section name="⑦ 초기 시장 검증" id="{5ea302cf-7027-2708-f862-88cd8c5af3ca}">
           <p14:sldIdLst>
             <p14:sldId id="271"/>
           </p14:sldIdLst>
         </p14:section>
-        <p14:section name="⑧ 향후 계획·팀 역량" id="{2b68ccd6-7efd-1ea8-207c-fcdb3da70e7d}">
+        <p14:section name="⑧ 향후 계획·팀 역량" id="{bc1aacec-9f5d-b2bf-7f2a-1c7c06041655}">
           <p14:sldIdLst>
             <p14:sldId id="272"/>
             <p14:sldId id="273"/>
@@ -1542,7 +1542,7 @@
           <a:p>
             <a:r>
               <a:rPr lang="en-US" dirty="0"/>
-              <a:t>박명진. 7주 일정이고 빨간 마름모가 마일스톤입니다. 설문은 10/23에 열었고, 오늘부터 본격적으로 모아 11/16까지 손유호가 30명을 채우고, 인터뷰 5명은 11/3~11/9에 손유호 3명, 제가 2명을 합니다. 폰 검증은 아이폰은 팀장, 갤럭시는 제가 주관합니다. 광고 승인 신청은 손유호, 코드는 팀장입니다. 마일스톤: 11/9 설문 1차 집계 · 인터뷰 마감, 11/23 피드백 반영 배포와 광고 결정, 11/30 폰 검증 끝, 12/7 기록 등록 보강 배포와 기능 동결, 12/15 기말. 11/23에 설문의 광고 문항 결과로 광고 실험과 새 게임 중 하나를 정합니다. 12/7 이후에는 코드를 바꾸지 않고 보고서와 발표를 준비합니다. 위험과 대안은 보고서 5.4에 적었습니다.</a:t>
+              <a:t>박명진. 7주 일정이고 빨간 마름모가 마일스톤입니다. 설문은 10/23에 열었고, 오늘부터 본격적으로 모읍니다. 11/16까지 손유호가 30명을 채우고, 인터뷰 5명은 11/3~11/9에 손유호 3명, 제가 2명을 합니다. 폰 검증은 아이폰은 팀장, 갤럭시는 제가 주관합니다. 광고 승인 신청은 손유호, 코드는 팀장입니다. 마일스톤: 11/9 설문 1차 집계 · 인터뷰 마감, 11/23 피드백 반영 배포와 광고 결정, 11/30 폰 검증 끝, 12/7 기록 등록 보강 배포와 기능 동결, 12/15 기말. 11/23에 설문의 광고 문항 결과로 광고 실험과 새 게임 중 하나를 정합니다. 12/7 이후에는 코드를 바꾸지 않고 보고서와 발표를 준비합니다. 위험과 대안은 보고서 5.4에 적었습니다.</a:t>
             </a:r>
             <a:endParaRPr lang="en-US" dirty="0"/>
           </a:p>
@@ -1725,14 +1725,14 @@
 · [이지훈] 확인 번호가 그 기록에서 나온 건지 어떻게 아나? → 지금은 번호와 서버 등록 시각까지 보여 주고, 기록 내용에서 번호를 다시 계산해 맞춰 보는 방법은 기말까지 만든다(그래서 70%). 지금은 앱 · 백업 파일을 함께 봐야 한다.
 · [이지훈] 본인이 쓴 기록을 믿을 수 있나? → 거짓 기록은 막을 수 없다고 인정. 막는 건 "나중에 고쳐 쓰기". 영세 사업장은 기록이 없는 경우가 많아 알바생 기록이 거의 유일한 자료가 되기 쉽다. 사장에게는 임금대장 · 계약 서류 보존 의무가 있다(근로기준법 48 · 42조).
 · [이지훈] 앱 계산이 틀리면 분쟁이 커지는 것 아닌가? 책임은? → 계산을 단정으로 내놓지 않는다. 항목별 · 주별 이유를 펼쳐 보여 주고, 안 넣은 것(연장근로 가산)과 유리하게 본 것(합의 휴무)은 화면에 적었다. 1단계 문구는 청구서가 아니라 "제가 계산을 잘 몰라서 여쭤본다"라는 확인 요청. 법률 자문 아님을 적어 두었고 1350 확인을 안내한다.
-· [이지훈] 고객 검증도 전에 왜 먼저 만들었나? → 지적은 맞습니다. 다만 링크로 배포되는 웹앱이라 빨리 만들 수 있었고, 말로 설명하기보다 화면을 보여 주며 물어야 정확한 답을 듣는다고 봤다. 9월 경쟁 앱 리뷰로 빈자리를 확인하고 10/13 정의서로 범위를 8개로 잘랐다. 설문에 캡처 3장을 넣고 "실제로 있다면 쓰겠나"를 묻는다. 12/7까지는 고치는 기간.
+· [이지훈] 고객 검증도 전에 왜 먼저 만들었나? → 지적은 맞다. 다만 링크로 배포되는 웹앱이라 빨리 만들 수 있었고, 말로 설명하기보다 화면을 보여 주며 물어야 정확한 답을 듣는다고 봤다. 9월 경쟁 앱 리뷰로 빈자리를 확인하고 10/13 정의서로 범위를 8개로 잘랐다. 설문에 캡처 3장을 넣고 "실제로 있다면 쓰겠나"를 묻는다. 12/7까지는 고치는 기간.
 · [박명진] 받은 금액을 매달 직접 넣어야 하는데 넣을까? → 가장 큰 가설이라 검증 표 첫 줄. 첫 화면에서 "9월 급여 받으셨나요?"라고 묻고 넣는 순간 덜 받은 돈이 보이게 했다. 5명 중 3명이 아니면 자동 인식을 앞당긴다.
 · [이지훈] 하우머치가 따라 하면? → 비교 기능은 따라올 수 있다. 확인 번호를 서버에 넣는 기술 자체도 어렵지 않다고 인정한다. 어려운 것은 그 번호가 뜻이 있게 기록 구조를 짜는 일이다. 사유 없이 못 고치고, 삭제도 흔적이 남고, 고칠 때마다 다시 등록돼야 "몇 번 고쳤나"가 보인다. 기존 앱이 따라오려면 기록을 마음대로 고치던 방식을 바꿔야 해서 쉽게 따라오지 않는다고 본다. 그래도 따라오면 요청 · 증빙까지 잇는 흐름으로 간다. 우리도 "내용으로 번호 다시 계산"이 남아 70%다.
 · [손유호] 급여 앱에 게임이 왜? 근무 중에 게임을 권하나? → 출퇴근은 일하는 날마다 누르지만, 돈을 확인하는 건 급여일에 한 번이라, 그 사이에도 앱을 열 이유로 넣은 것. 처음엔 근무 중에만이었는데 팀원 의견으로 10/25 조건을 풀고 설정에서 숨길 수 있게 했다. 게임 기록은 문서에 안 섞인다. 안 되면 게임을 빼도 기록 → 비교 → 요청은 그대로.
 · [박명진] 같은 과 학생 설문이 무슨 의미? 편향 아닌가? → 맞다. "정식 조사 아님"을 적고 사람 수로만 말한다. 중복 응답도 막지 않았다(이름 · 기기 정보를 안 받는 대가). 11월 30명은 학과 밖(동아리 · 에브리타임)까지 넓혀 모으고, 인터뷰 5명으로 이유를 듣는다.
 · [이지훈] 법률 서비스 아닌가? → 무료, 본인 기록을 정해진 양식에 채울 뿐, 개별 사안 검토 · 대행 없음, 진정은 1350 · 노동포털로 연결만.
 · [손유호] 수익은? → 게임 화면 광고(가설). 운영 비용은 0원. 문서 유료화는 안 한다.
-· [이지훈] 정의서를 개발 중에 썼는데 계획 대비가 의미 있나? → 지적은 맞습니다. 원래 계획은 9월 기획서의 기능 4개(기록 · 비교 · 요청 · 증빙)다. 10/13 정의서는 만들면서 필요해진 것(기록 등록 · 백업)을 더해 8개로 고정하고, 넣지 않을 6개를 정한 문서다. 그 뒤 포함 기능을 늘리지 않았고 뺀 6개는 지금도 없다. 8/8은 "다 했다"가 아니라 "범위를 지켰다"로 읽어 달라.
+· [이지훈] 정의서를 개발 중에 썼는데 계획 대비가 의미 있나? → 지적은 맞다. 원래 계획은 9월 기획서의 기능 4개(기록 · 비교 · 요청 · 증빙)다. 10/13 정의서는 만들면서 필요해진 것(기록 등록 · 백업)을 더해 8개로 고정하고, 넣지 않을 6개를 정한 문서다. 그 뒤 포함 기능을 늘리지 않았고 뺀 6개는 지금도 없다. 8/8은 "다 했다"가 아니라 "범위를 지켰다"로 읽어 달라.
 · [이지훈] 등록 시각이 출근 시각인가? 인터넷이 없을 때 기록하면? → 아니다. 등록 시각은 확인 번호가 서버에 도착한 시각이고, 보여 주는 것은 "늦어도 이 시각에는 이 내용이 있었다"까지다. 인터넷이 없으면 대기열에 있다가 연결될 때 보내지므로 그만큼 늦어진다. "나중에 입력"한 기록도 입력했을 때 등록되고, 기록에는 나중에 입력했다는 표시와 사유가 같이 남는다. 출근 시각 자체를 증명하는 것은 아니다.
 · [이지훈] 아무 번호나 넣으면? 두 기록이 같은 번호가 될 수 있나? → 확인 페이지는 앞 16자와 64자 전체를 둘 다 받고, 서버에 없는 번호는 등록된 것이 없다고 나온다. 서버 표에서 번호는 중복을 허용하지 않는다. 재료에 기록 번호와 만든 시각이 들어가서 서로 다른 기록이 같은 번호가 될 일은 사실상 없다.
 · [이지훈] 카톡 나에게 보내기로 매일 적으면 같지 않나? → 시각만 보면 카톡이 더 믿을 만하다. 카카오가 찍은 시각이라 우리와 무관하다. 다른 점은 둘이다. 카톡은 고치면 새 메시지가 하나 더 생길 뿐 무엇을 왜 고쳤는지 안 남고, 그 기록으로 계산 · 비교 · 요청 · 증빙 묶음까지 이어지지 않는다. 그래서 카톡에 적던 사람이 첫 타깃이고, 카톡 캡처는 함께 내라고 앱에도 적었다.
@@ -2183,7 +2183,7 @@
           <a:p>
             <a:r>
               <a:rPr lang="en-US" dirty="0"/>
-              <a:t>1번은 기그와 달리 사장이 가입하지 않아도 된다는 뜻입니다. 2번은 실제 받은 돈과 비교해 차액을 찾고 요청 문구와 증빙 묶음까지 잇는 것으로, 비교한 네 서비스 모두 없습니다. 3번이 따라 하기 어려운 차별점입니다. 기능 하나가 아니라 기록 구조라서, 사유 없이는 못 고치고 삭제해도 흔적이 남고 고치면 다시 등록됩니다. 기존 급여 앱이 넣으려면 사용자가 기록을 마음대로 고치던 방식을 포기해야 합니다. 지금 확인 페이지는 번호의 서버 등록 시각까지 보여 주고, 기록 내용에서 번호를 다시 계산해 맞춰 보는 방법은 기말까지 만듭니다(그래서 12장에서 70%). 근무지 · 시각 · 금액은 서버로 가지 않고, "그날 실제로 일했다"까지는 증명하지 못합니다. 한계는 먼저 말합니다. 통장 내역 · 메시지와 함께 내야 힘이 생긴다는 말은 앱의 증빙 문서 맨 아래에도 적혀 있습니다. "법적 효력" 질문이 오면 보장하지 않는다고 답하고, 근로감독관 · 법원이 판단할 자료를 정리해 준다고 말합니다.</a:t>
+              <a:t>1번은 기그와 달리 사장이 가입하지 않아도 된다는 뜻입니다. 2번은 실제 받은 돈과 비교해 차액을 찾고 요청 문구와 증빙 묶음까지 잇는 것으로, 비교한 네 서비스 모두에 없습니다. 3번이 따라 하기 어려운 차별점입니다. 기능 하나가 아니라 기록 구조라서, 사유 없이는 못 고치고 삭제해도 흔적이 남고 고치면 다시 등록됩니다. 기존 급여 앱이 넣으려면 사용자가 기록을 마음대로 고치던 방식을 포기해야 합니다. 지금 확인 페이지는 번호의 서버 등록 시각까지 보여 주고, 기록 내용에서 번호를 다시 계산해 맞춰 보는 방법은 기말까지 만듭니다(그래서 12장에서 70%). 근무지 · 시각 · 금액은 서버로 가지 않고, "그날 실제로 일했다"까지는 증명하지 못합니다. 한계는 먼저 말합니다. 통장 내역 · 메시지와 함께 내야 힘이 생긴다는 말은 앱의 증빙 문서 맨 아래에도 적혀 있습니다. "법적 효력" 질문이 오면 보장하지 않는다고 답하고, 근로감독관 · 법원이 판단할 자료를 정리해 준다고 말합니다.</a:t>
             </a:r>
             <a:endParaRPr lang="en-US" dirty="0"/>
           </a:p>

--- a/docs/06_중간발표_PPT.pptx
+++ b/docs/06_중간발표_PPT.pptx
@@ -125,31 +125,31 @@
   <p:extLst>
     <p:ext uri="{521415D9-36F7-43E2-AB2F-B90AF26B5E84}">
       <p14:sectionLst xmlns:p14="http://schemas.microsoft.com/office/powerpoint/2010/main">
-        <p14:section name="① 표지·팀 소개" id="{4bafb02b-29ee-6810-28f1-b391b49eacda}">
+        <p14:section name="① 표지·팀 소개" id="{ce90fbb3-1841-7036-31c4-22fb6598b9d2}">
           <p14:sldIdLst>
             <p14:sldId id="256"/>
             <p14:sldId id="257"/>
           </p14:sldIdLst>
         </p14:section>
-        <p14:section name="② 문제 정의" id="{106b90ff-328d-7607-4e8c-23cb0d578de7}">
+        <p14:section name="② 문제 정의" id="{8ba202eb-59a1-2f31-df13-329d3faefd19}">
           <p14:sldIdLst>
             <p14:sldId id="258"/>
             <p14:sldId id="259"/>
           </p14:sldIdLst>
         </p14:section>
-        <p14:section name="③ 솔루션·핵심 가치" id="{f9a78ba7-962f-41a1-5e4f-256480a2e450}">
+        <p14:section name="③ 솔루션·핵심 가치" id="{8cfc72c0-5ddf-0087-bec0-917c181ae024}">
           <p14:sldIdLst>
             <p14:sldId id="260"/>
             <p14:sldId id="261"/>
           </p14:sldIdLst>
         </p14:section>
-        <p14:section name="④ SW 기술 아키텍처" id="{482c20d8-b1c5-ffea-a4e2-cb5077a026eb}">
+        <p14:section name="④ SW 기술 아키텍처" id="{6e348217-c4cd-f113-5a6d-bf3731b67000}">
           <p14:sldIdLst>
             <p14:sldId id="262"/>
             <p14:sldId id="263"/>
           </p14:sldIdLst>
         </p14:section>
-        <p14:section name="⑤ 개발 현황·MVP 시연" id="{3bb709f4-af13-3f9a-c1fd-6599df249862}">
+        <p14:section name="⑤ 개발 현황·MVP 시연" id="{a51f50c5-6b38-4d2d-4dbd-a0876d82d903}">
           <p14:sldIdLst>
             <p14:sldId id="264"/>
             <p14:sldId id="265"/>
@@ -157,19 +157,19 @@
             <p14:sldId id="267"/>
           </p14:sldIdLst>
         </p14:section>
-        <p14:section name="⑥ 시장 분석·비즈니스 모델" id="{09d44b13-3ac8-38c3-960b-68f8ffb0db15}">
+        <p14:section name="⑥ 시장 분석·비즈니스 모델" id="{abd4ec88-5242-64ed-796f-2071d4e6bd5e}">
           <p14:sldIdLst>
             <p14:sldId id="268"/>
             <p14:sldId id="269"/>
             <p14:sldId id="270"/>
           </p14:sldIdLst>
         </p14:section>
-        <p14:section name="⑦ 초기 시장 검증" id="{5ea302cf-7027-2708-f862-88cd8c5af3ca}">
+        <p14:section name="⑦ 초기 시장 검증" id="{e5c523f7-0d4e-8f54-a048-b8d3040a1faa}">
           <p14:sldIdLst>
             <p14:sldId id="271"/>
           </p14:sldIdLst>
         </p14:section>
-        <p14:section name="⑧ 향후 계획·팀 역량" id="{bc1aacec-9f5d-b2bf-7f2a-1c7c06041655}">
+        <p14:section name="⑧ 향후 계획·팀 역량" id="{c665d29c-05df-6147-3d6c-12c12615ccae}">
           <p14:sldIdLst>
             <p14:sldId id="272"/>
             <p14:sldId id="273"/>
@@ -1721,7 +1721,7 @@
               <a:t>팀장 마무리(20초): "저희가 여쭙고 싶은 것 두 가지입니다. 문서 유료화를 피하면서 가능한 수익 모델이 더 있을지, 그리고 설문 30명 · 인터뷰 5명이면 충분한지입니다. 질문받겠습니다." 이 장은 질의응답 내내 띄워 둔다.
 예상 질문 (이름 붙은 사람이 먼저 답하고, 모자라면 팀장이 보탠다)
 · [이지훈] 법적 효력 있나? → 보장하지 않는다. 판단은 감독관 · 법원. 우리는 판단할 자료를 정리하고, 수정 이력과 확인 번호로 "나중에 고친 게 아니다"까지 보여 준다. 통장 내역 · 카톡과 함께 내야 한다고 앱에도 적어 뒀다.
-· [이지훈] 서버는 여러분이 관리하는데 고치면 그만 아닌가? → 맞다. 공개키로는 넣기 · 읽기만 되고 시각은 서버가 찍는 것까지 확인했지만, 프로젝트 소유자 권한으로는 고칠 수 있다. 한계로 인정한다. 지금 막는 건 "사용자 본인이 나중에 고쳐 쓰기"까지. 운영자까지 못 고치게 하는 외부 공인 시점 확인은 비용 때문에 계획. 서버에는 번호만 있어서 운영자가 서버를 고쳐도 폰의 근무 내용 자체는 못 바꾼다. (확인 페이지 본문의 "고치거나 지울 수 없습니다"는 "앱 쪽에서는"이라고 범위를 붙여 말할 것)
+· [이지훈] 서버는 여러분이 관리하는데 고치면 그만 아닌가? → 맞다. 공개키로는 넣기 · 읽기만 되고 시각은 서버가 찍는 것까지 확인했지만, 프로젝트 소유자 권한으로는 고칠 수 있다. 한계로 인정한다. 지금 막는 건 "사용자 본인이 나중에 고쳐 쓰기"까지. 운영자까지 못 고치게 하는 외부 공인 시점 확인은 비용 때문에 계획. 서버에는 번호만 있어서 운영자가 서버를 고쳐도 폰의 근무 내용 자체는 못 바꾼다. (확인 페이지에도 "앱에서 고치거나 지울 수 없음, 운영자 권한으로는 가능"이라고 적어 두었다)
 · [이지훈] 확인 번호가 그 기록에서 나온 건지 어떻게 아나? → 지금은 번호와 서버 등록 시각까지 보여 주고, 기록 내용에서 번호를 다시 계산해 맞춰 보는 방법은 기말까지 만든다(그래서 70%). 지금은 앱 · 백업 파일을 함께 봐야 한다.
 · [이지훈] 본인이 쓴 기록을 믿을 수 있나? → 거짓 기록은 막을 수 없다고 인정. 막는 건 "나중에 고쳐 쓰기". 영세 사업장은 기록이 없는 경우가 많아 알바생 기록이 거의 유일한 자료가 되기 쉽다. 사장에게는 임금대장 · 계약 서류 보존 의무가 있다(근로기준법 48 · 42조).
 · [이지훈] 앱 계산이 틀리면 분쟁이 커지는 것 아닌가? 책임은? → 계산을 단정으로 내놓지 않는다. 항목별 · 주별 이유를 펼쳐 보여 주고, 안 넣은 것(연장근로 가산)과 유리하게 본 것(합의 휴무)은 화면에 적었다. 1단계 문구는 청구서가 아니라 "제가 계산을 잘 몰라서 여쭤본다"라는 확인 요청. 법률 자문 아님을 적어 두었고 1350 확인을 안내한다.
@@ -23174,7 +23174,7 @@
                   <a:schemeClr val="accent2"/>
                 </a:solidFill>
               </a:rPr>
-              <a:t>수정 · 삭제 안 됨</a:t>
+              <a:t>앱에서 수정 · 삭제 안 됨</a:t>
             </a:r>
             <a:endParaRPr lang="en-US" sz="1250" dirty="0"/>
           </a:p>

--- a/docs/06_중간발표_PPT.pptx
+++ b/docs/06_중간발표_PPT.pptx
@@ -125,31 +125,31 @@
   <p:extLst>
     <p:ext uri="{521415D9-36F7-43E2-AB2F-B90AF26B5E84}">
       <p14:sectionLst xmlns:p14="http://schemas.microsoft.com/office/powerpoint/2010/main">
-        <p14:section name="① 표지·팀 소개" id="{ce90fbb3-1841-7036-31c4-22fb6598b9d2}">
+        <p14:section name="① 표지·팀 소개" id="{9d66fa56-3a17-a956-880e-f942bee7db01}">
           <p14:sldIdLst>
             <p14:sldId id="256"/>
             <p14:sldId id="257"/>
           </p14:sldIdLst>
         </p14:section>
-        <p14:section name="② 문제 정의" id="{8ba202eb-59a1-2f31-df13-329d3faefd19}">
+        <p14:section name="② 문제 정의" id="{f5f4d743-a477-4798-c017-0c2d20d4d57f}">
           <p14:sldIdLst>
             <p14:sldId id="258"/>
             <p14:sldId id="259"/>
           </p14:sldIdLst>
         </p14:section>
-        <p14:section name="③ 솔루션·핵심 가치" id="{8cfc72c0-5ddf-0087-bec0-917c181ae024}">
+        <p14:section name="③ 솔루션·핵심 가치" id="{3058ee3c-e0ad-d086-b302-4664f04a51d5}">
           <p14:sldIdLst>
             <p14:sldId id="260"/>
             <p14:sldId id="261"/>
           </p14:sldIdLst>
         </p14:section>
-        <p14:section name="④ SW 기술 아키텍처" id="{6e348217-c4cd-f113-5a6d-bf3731b67000}">
+        <p14:section name="④ SW 기술 아키텍처" id="{163eb983-be8e-ee5e-a09d-7d59227dbffb}">
           <p14:sldIdLst>
             <p14:sldId id="262"/>
             <p14:sldId id="263"/>
           </p14:sldIdLst>
         </p14:section>
-        <p14:section name="⑤ 개발 현황·MVP 시연" id="{a51f50c5-6b38-4d2d-4dbd-a0876d82d903}">
+        <p14:section name="⑤ 개발 현황·MVP 시연" id="{ec0e9e09-347f-8e6c-d7b2-64c238ba9c92}">
           <p14:sldIdLst>
             <p14:sldId id="264"/>
             <p14:sldId id="265"/>
@@ -157,19 +157,19 @@
             <p14:sldId id="267"/>
           </p14:sldIdLst>
         </p14:section>
-        <p14:section name="⑥ 시장 분석·비즈니스 모델" id="{abd4ec88-5242-64ed-796f-2071d4e6bd5e}">
+        <p14:section name="⑥ 시장 분석·비즈니스 모델" id="{3878fbbe-7bb5-6c9a-51f9-871fe3d0f194}">
           <p14:sldIdLst>
             <p14:sldId id="268"/>
             <p14:sldId id="269"/>
             <p14:sldId id="270"/>
           </p14:sldIdLst>
         </p14:section>
-        <p14:section name="⑦ 초기 시장 검증" id="{e5c523f7-0d4e-8f54-a048-b8d3040a1faa}">
+        <p14:section name="⑦ 초기 시장 검증" id="{953867f8-5741-d40e-9e2b-98a46279bddc}">
           <p14:sldIdLst>
             <p14:sldId id="271"/>
           </p14:sldIdLst>
         </p14:section>
-        <p14:section name="⑧ 향후 계획·팀 역량" id="{c665d29c-05df-6147-3d6c-12c12615ccae}">
+        <p14:section name="⑧ 향후 계획·팀 역량" id="{3b7577a8-b59b-4144-a519-cade05f56beb}">
           <p14:sldIdLst>
             <p14:sldId id="272"/>
             <p14:sldId id="273"/>
@@ -3699,7 +3699,7 @@
                   <a:schemeClr val="bg2"/>
                 </a:solidFill>
               </a:rPr>
-              <a:t>컴퓨터소프트웨어 __학번</a:t>
+              <a:t>컴퓨터소프트웨어 18학번</a:t>
             </a:r>
             <a:endParaRPr lang="en-US" sz="1250" dirty="0"/>
           </a:p>

--- a/docs/06_중간발표_PPT.pptx
+++ b/docs/06_중간발표_PPT.pptx
@@ -125,31 +125,31 @@
   <p:extLst>
     <p:ext uri="{521415D9-36F7-43E2-AB2F-B90AF26B5E84}">
       <p14:sectionLst xmlns:p14="http://schemas.microsoft.com/office/powerpoint/2010/main">
-        <p14:section name="① 표지·팀 소개" id="{9d66fa56-3a17-a956-880e-f942bee7db01}">
+        <p14:section name="① 표지·팀 소개" id="{8cf310ad-0ec3-e69d-81d1-cf45ffa5a690}">
           <p14:sldIdLst>
             <p14:sldId id="256"/>
             <p14:sldId id="257"/>
           </p14:sldIdLst>
         </p14:section>
-        <p14:section name="② 문제 정의" id="{f5f4d743-a477-4798-c017-0c2d20d4d57f}">
+        <p14:section name="② 문제 정의" id="{f07cfc4c-ac2a-43f8-eac4-575d2b981105}">
           <p14:sldIdLst>
             <p14:sldId id="258"/>
             <p14:sldId id="259"/>
           </p14:sldIdLst>
         </p14:section>
-        <p14:section name="③ 솔루션·핵심 가치" id="{3058ee3c-e0ad-d086-b302-4664f04a51d5}">
+        <p14:section name="③ 솔루션·핵심 가치" id="{45164184-4273-f72c-1517-8f3511d0f04b}">
           <p14:sldIdLst>
             <p14:sldId id="260"/>
             <p14:sldId id="261"/>
           </p14:sldIdLst>
         </p14:section>
-        <p14:section name="④ SW 기술 아키텍처" id="{163eb983-be8e-ee5e-a09d-7d59227dbffb}">
+        <p14:section name="④ SW 기술 아키텍처" id="{385663f7-7b43-97c0-0ee8-2bd1eecf46ba}">
           <p14:sldIdLst>
             <p14:sldId id="262"/>
             <p14:sldId id="263"/>
           </p14:sldIdLst>
         </p14:section>
-        <p14:section name="⑤ 개발 현황·MVP 시연" id="{ec0e9e09-347f-8e6c-d7b2-64c238ba9c92}">
+        <p14:section name="⑤ 개발 현황·MVP 시연" id="{fb220bcd-412d-22f4-2725-b6addb727a66}">
           <p14:sldIdLst>
             <p14:sldId id="264"/>
             <p14:sldId id="265"/>
@@ -157,19 +157,19 @@
             <p14:sldId id="267"/>
           </p14:sldIdLst>
         </p14:section>
-        <p14:section name="⑥ 시장 분석·비즈니스 모델" id="{3878fbbe-7bb5-6c9a-51f9-871fe3d0f194}">
+        <p14:section name="⑥ 시장 분석·비즈니스 모델" id="{07611d14-6f03-8774-a9ec-9a140ab3f9ef}">
           <p14:sldIdLst>
             <p14:sldId id="268"/>
             <p14:sldId id="269"/>
             <p14:sldId id="270"/>
           </p14:sldIdLst>
         </p14:section>
-        <p14:section name="⑦ 초기 시장 검증" id="{953867f8-5741-d40e-9e2b-98a46279bddc}">
+        <p14:section name="⑦ 초기 시장 검증" id="{daf6281c-f6f2-8c00-8075-f1da00942a7c}">
           <p14:sldIdLst>
             <p14:sldId id="271"/>
           </p14:sldIdLst>
         </p14:section>
-        <p14:section name="⑧ 향후 계획·팀 역량" id="{3b7577a8-b59b-4144-a519-cade05f56beb}">
+        <p14:section name="⑧ 향후 계획·팀 역량" id="{321f8fb2-70dd-2067-164b-16b188500cb7}">
           <p14:sldIdLst>
             <p14:sldId id="272"/>
             <p14:sldId id="273"/>
@@ -3665,7 +3665,7 @@
                   <a:schemeClr val="bg2"/>
                 </a:solidFill>
               </a:rPr>
-              <a:t>컴퓨터소프트웨어 __학번</a:t>
+              <a:t>컴퓨터소프트웨어 20학번</a:t>
             </a:r>
             <a:endParaRPr lang="en-US" sz="1250" dirty="0"/>
           </a:p>

--- a/docs/06_중간발표_PPT.pptx
+++ b/docs/06_중간발표_PPT.pptx
@@ -125,31 +125,31 @@
   <p:extLst>
     <p:ext uri="{521415D9-36F7-43E2-AB2F-B90AF26B5E84}">
       <p14:sectionLst xmlns:p14="http://schemas.microsoft.com/office/powerpoint/2010/main">
-        <p14:section name="① 표지·팀 소개" id="{8cf310ad-0ec3-e69d-81d1-cf45ffa5a690}">
+        <p14:section name="① 표지·팀 소개" id="{03817992-d076-5847-9284-cfef453756f6}">
           <p14:sldIdLst>
             <p14:sldId id="256"/>
             <p14:sldId id="257"/>
           </p14:sldIdLst>
         </p14:section>
-        <p14:section name="② 문제 정의" id="{f07cfc4c-ac2a-43f8-eac4-575d2b981105}">
+        <p14:section name="② 문제 정의" id="{4ad97b28-d351-9fe4-21ec-dce101f09501}">
           <p14:sldIdLst>
             <p14:sldId id="258"/>
             <p14:sldId id="259"/>
           </p14:sldIdLst>
         </p14:section>
-        <p14:section name="③ 솔루션·핵심 가치" id="{45164184-4273-f72c-1517-8f3511d0f04b}">
+        <p14:section name="③ 솔루션·핵심 가치" id="{a4fe279d-0a48-e26f-cfbf-162a3be7868c}">
           <p14:sldIdLst>
             <p14:sldId id="260"/>
             <p14:sldId id="261"/>
           </p14:sldIdLst>
         </p14:section>
-        <p14:section name="④ SW 기술 아키텍처" id="{385663f7-7b43-97c0-0ee8-2bd1eecf46ba}">
+        <p14:section name="④ SW 기술 아키텍처" id="{5d729d77-4db3-e8ab-a851-067476993ef5}">
           <p14:sldIdLst>
             <p14:sldId id="262"/>
             <p14:sldId id="263"/>
           </p14:sldIdLst>
         </p14:section>
-        <p14:section name="⑤ 개발 현황·MVP 시연" id="{fb220bcd-412d-22f4-2725-b6addb727a66}">
+        <p14:section name="⑤ 개발 현황·MVP 시연" id="{93ff6ead-6420-cf76-7fb4-4d1c27c394fa}">
           <p14:sldIdLst>
             <p14:sldId id="264"/>
             <p14:sldId id="265"/>
@@ -157,19 +157,19 @@
             <p14:sldId id="267"/>
           </p14:sldIdLst>
         </p14:section>
-        <p14:section name="⑥ 시장 분석·비즈니스 모델" id="{07611d14-6f03-8774-a9ec-9a140ab3f9ef}">
+        <p14:section name="⑥ 시장 분석·비즈니스 모델" id="{b6d2fd5c-a359-e3a7-552d-9f3e2f5614d7}">
           <p14:sldIdLst>
             <p14:sldId id="268"/>
             <p14:sldId id="269"/>
             <p14:sldId id="270"/>
           </p14:sldIdLst>
         </p14:section>
-        <p14:section name="⑦ 초기 시장 검증" id="{daf6281c-f6f2-8c00-8075-f1da00942a7c}">
+        <p14:section name="⑦ 초기 시장 검증" id="{024f4fb9-af23-0106-5b2e-e77c5c945481}">
           <p14:sldIdLst>
             <p14:sldId id="271"/>
           </p14:sldIdLst>
         </p14:section>
-        <p14:section name="⑧ 향후 계획·팀 역량" id="{321f8fb2-70dd-2067-164b-16b188500cb7}">
+        <p14:section name="⑧ 향후 계획·팀 역량" id="{6e72373e-fe7b-47e1-c0d8-095861816dcc}">
           <p14:sldIdLst>
             <p14:sldId id="272"/>
             <p14:sldId id="273"/>
@@ -1454,7 +1454,7 @@
           <a:p>
             <a:r>
               <a:rPr lang="en-US" dirty="0"/>
-              <a:t>박명진. 모집은 학과 · 동아리 단톡, 에브리타임, 그리고 오늘 이 자리(QR)입니다. 인터뷰 5명은 지인 중 지금 알바 중인 사람으로 11/3~11/9에 합니다. 왜 먼저 만들었나: 웹앱이라 빨리 만들 수 있고, 화면을 보여 주며 물어야 답이 정확하다고 봤습니다. 가설은 9월 기획서 문장 그대로입니다. 표의 기준은 팀이 정한 목표이지 데이터가 아닙니다. 인터뷰 문항은 설문지 20~24번입니다. 지금까지 들은 의견은 정식 조사가 아닙니다. 타깃 사용자 1명이 디자인 시안 12장 중 통장 구성을 골랐습니다. 링크 설문은 10/23에 열었습니다. 기말 발표에서 이 표에 결과를 더해 보고합니다. 응답 수는 슬라이드에 적지 않고 당일 아침 결과 페이지에서 읽습니다. 0명이면 0명이라고 말합니다. 다만 당일 아침 응답이 10명 이상이고, 강의실 인터넷이 되고, 교수님 양해를 받았으면 결과 페이지(survey-results.html)를 60초만 띄워 세 문항(주당 근무 시간 · 적게 받은 것 같았던 적 · 매달 받은 금액 직접 넣기)만 읽습니다. 자유 의견은 띄우지 않습니다. 아니면 당일 아침 캡처로 대신합니다. 테스트 응답 2건(10/23)은 미리 지워 둡니다. 결과는 사람 수로만 말하고 %는 30명 이상일 때만 씁니다. 1행은 의향을 묻는 것이라 한계가 있습니다. 인터뷰 때 앱을 설치하게 하고, 실제로 넣는지는 급여일이 지난 뒤 따로 봅니다(기말 이후까지 걸릴 수 있음). 지인은 호의적으로 답하기 쉬워서 "넣겠다"를 그대로 믿지 않습니다.</a:t>
+              <a:t>박명진. 가설은 9월 기획서 문장 그대로입니다. 표의 기준은 팀이 정한 목표이지 데이터가 아닙니다. 오른쪽 끝 칸이 10/26까지 받은 설문 12명의 중간 결과입니다(지금 알바 중 2 · 예전에 했음 9 · 한 적 없음 1, 지인 중심이라 정식 조사가 아닙니다). 매달 받은 금액을 넣겠다는 사람이 12명 중 10명("할 만하다" 4, "귀찮지만 할 것 같다" 6), 게임 화면 광고를 싫다고 한 사람은 4명이었습니다. 주 15시간 기준은 지금 알바 중인 응답자가 2명뿐이라 판단을 미룹니다. 요청 문구와 확인 번호는 인터뷰 문항이라 11월에 확인합니다. 문제 쪽도 확인됐습니다. 급여 때 "내 계산이 맞는지"가 걱정이라는 사람이 12명 중 8명, 통장 총액만 본다는 사람이 11명 중 7명입니다. 불리한 결과도 말합니다. 가장 쓸모 있는 기능으로 정산 요청 메시지와 기록 등록을 고른 사람은 없었고(덜 받은 돈 알려 주기 6명, 출퇴근 기록 4명), 미니게임은 "안 쓸 것 같은 기능" 1위(6명)였습니다. 그래서 인터뷰에서 문구와 확인 번호를 직접 보여 주고 반응을 봅니다. 모집은 학과 · 동아리 단톡, 에브리타임, 그리고 오늘 이 자리(QR)입니다. 인터뷰 5명은 지인 중 지금 알바 중인 사람으로 11/3~11/9에 합니다. 결과는 사람 수로만 말하고 %는 30명 이상일 때만 씁니다. 당일 아침 응답이 더 늘었으면 결과 페이지(survey-results.html)의 숫자로 "지금은 N명"이라고 덧붙입니다. 강의실 인터넷이 되고 교수님 양해를 받으면 결과 페이지를 60초만 띄울 수 있습니다(자유 의견은 띄우지 않음). 1행은 의향을 묻는 것이라 한계가 있습니다. 실제로 넣는지는 인터뷰 때 앱을 설치하게 하고 급여일이 지난 뒤 따로 봅니다(기말 이후까지 걸릴 수 있음). 지인은 호의적으로 답하기 쉬워서 "넣겠다"를 그대로 믿지 않습니다.</a:t>
             </a:r>
             <a:endParaRPr lang="en-US" dirty="0"/>
           </a:p>
@@ -1742,6 +1742,8 @@
 · [이지훈] 폰을 바꾸거나 서비스가 없어지면 기록은? → 폰을 바꾸면 백업 파일로 옮긴다(설정 탭). 서비스가 없어져도 폰의 기록, 백업 파일, 저장해 둔 증빙 묶음 PDF는 사용자 손에 남는다. 이 문제를 푸는 것이 2차 구독(동기화 · 자동 백업)이다.
 · [이지훈] 개인정보는? 동의는? → 로그인이 없고 서버에는 이름 · 근무지 · 시각 · 금액이 가지 않는다. 가는 것은 확인 번호 · 기록 번호 · 무작위 기기 번호뿐이고, 무엇이 가는지 설정 탭에 적고 끌 수 있게 했다. 설문도 이름 · 연락처를 받지 않는다. 기록 내용을 밖으로 보내는 기능을 켜면 그때 안내와 동의가 필요하다.
 · [박명진] 왜 설문 30명 · 인터뷰 5명인가? → 9월 기획서는 인터뷰 10~15명이었다. 사람 수는 링크 설문으로 채우고, 앱을 써 보게 하는 20분 인터뷰는 7주 안에 셋이 할 수 있는 5명으로 줄였다. 충분한지는 마지막에 여쭙는 것 중 하나다.
+· [손유호] 설문에서 게임을 안 쓰겠다는 사람이 제일 많던데? → 맞다. 12명 중 6명이 "안 쓸 것 같은 기능"으로 골랐다. 광고 자체를 싫다는 사람은 4명이라 광고 자리는 남지만, 게임을 쓰는 사람이 적으면 광고도 약하다. 그래서 11/23에 설문 결과로 광고 실험과 새 게임 중 하나를 정하고, 게임은 설정에서 숨길 수 있게 해 두었다.
+· [이지훈] 기록 등록(확인 번호)을 쓸모 있다고 고른 사람이 없던데 차별점이 맞나? → 설문에서는 0명이었고, 안 쓸 것 같다는 사람도 1명뿐이었다. 덜 받은 상황에서 "나중에 지어낸 것 아니냐"는 말을 들을 때 쓸모가 생기는 기능이라 아직 와닿지 않는다고 본다. 인터뷰에서 그 상황을 설명하고 반응을 본다(검증 표 3행). 반응이 약하면 발표 · 홍보에서 앞세우는 순서를 다시 정한다.
 · [손유호] 광고 수익이 생기면 "무료라서 괜찮다"가 깨지지 않나? → 광고는 게임 화면에만 나오고 문서 기능과 떼어 놓았다. 문서를 만든 대가로 받는 돈이 아니게 구조를 잡은 것이다. 다만 웹 조사 기준 판단이고 전문가 검토는 아니다.
 · [박명진 → 손유호 순으로 각자] 팀원은 뭘 했나? → 개발은 이지훈. 손유호는 수업 시간의 계획서 일부를 썼고(내용은 팀장이 반영), 앞으로 시장 · 설문 · 인터뷰 3명. 박명진은 지금까지 의견을 낸 정도이고, 앞으로 인터뷰 2명 · 갤럭시 테스트 · 일정 · 보고서 편집.</a:t>
             </a:r>
@@ -9193,7 +9195,7 @@
                   <a:schemeClr val="tx2"/>
                 </a:solidFill>
               </a:rPr>
-              <a:t>검증 계획: 11월 설문 · 인터뷰로 다섯 가지 확인</a:t>
+              <a:t>검증: 설문 12명 중간 결과, 11월에 다섯 가지 확인</a:t>
             </a:r>
             <a:endParaRPr lang="en-US" sz="2400" dirty="0"/>
           </a:p>
@@ -9269,9 +9271,10 @@
             <a:tbl>
               <a:tblPr/>
               <a:tblGrid>
-                <a:gridCol w="2743200"/>
-                <a:gridCol w="3108960"/>
-                <a:gridCol w="2377440"/>
+                <a:gridCol w="2240280"/>
+                <a:gridCol w="2514600"/>
+                <a:gridCol w="1920240"/>
+                <a:gridCol w="1554480"/>
               </a:tblGrid>
               <a:tr h="384048">
                 <a:tc>
@@ -9457,6 +9460,67 @@
                     </a:solidFill>
                   </a:tcPr>
                 </a:tc>
+                <a:tc>
+                  <a:txBody>
+                    <a:bodyPr/>
+                    <a:lstStyle/>
+                    <a:p>
+                      <a:pPr indent="0" marL="0">
+                        <a:buNone/>
+                      </a:pPr>
+                      <a:r>
+                        <a:rPr lang="en-US" sz="1100" b="1" dirty="0">
+                          <a:solidFill>
+                            <a:srgbClr val="5D636D"/>
+                          </a:solidFill>
+                        </a:rPr>
+                        <a:t>중간 결과 (설문 12명)</a:t>
+                      </a:r>
+                      <a:endParaRPr lang="en-US" sz="1100" dirty="0"/>
+                    </a:p>
+                  </a:txBody>
+                  <a:tcPr marL="73152" marR="73152" marT="18288" marB="18288" anchor="ctr">
+                    <a:lnL w="6350" cap="flat" cmpd="sng" algn="ctr">
+                      <a:solidFill>
+                        <a:srgbClr val="DCD9D0"/>
+                      </a:solidFill>
+                      <a:prstDash val="solid"/>
+                      <a:round/>
+                      <a:headEnd type="none" w="med" len="med"/>
+                      <a:tailEnd type="none" w="med" len="med"/>
+                    </a:lnL>
+                    <a:lnR w="6350" cap="flat" cmpd="sng" algn="ctr">
+                      <a:solidFill>
+                        <a:srgbClr val="DCD9D0"/>
+                      </a:solidFill>
+                      <a:prstDash val="solid"/>
+                      <a:round/>
+                      <a:headEnd type="none" w="med" len="med"/>
+                      <a:tailEnd type="none" w="med" len="med"/>
+                    </a:lnR>
+                    <a:lnT w="6350" cap="flat" cmpd="sng" algn="ctr">
+                      <a:solidFill>
+                        <a:srgbClr val="DCD9D0"/>
+                      </a:solidFill>
+                      <a:prstDash val="solid"/>
+                      <a:round/>
+                      <a:headEnd type="none" w="med" len="med"/>
+                      <a:tailEnd type="none" w="med" len="med"/>
+                    </a:lnT>
+                    <a:lnB w="6350" cap="flat" cmpd="sng" algn="ctr">
+                      <a:solidFill>
+                        <a:srgbClr val="DCD9D0"/>
+                      </a:solidFill>
+                      <a:prstDash val="solid"/>
+                      <a:round/>
+                      <a:headEnd type="none" w="med" len="med"/>
+                      <a:tailEnd type="none" w="med" len="med"/>
+                    </a:lnB>
+                    <a:solidFill>
+                      <a:srgbClr val="F4F3EF"/>
+                    </a:solidFill>
+                  </a:tcPr>
+                </a:tc>
               </a:tr>
               <a:tr h="475488">
                 <a:tc>
@@ -9468,14 +9532,14 @@
                         <a:buNone/>
                       </a:pPr>
                       <a:r>
-                        <a:rPr lang="en-US" sz="1200" b="1" dirty="0">
+                        <a:rPr lang="en-US" sz="1100" b="1" dirty="0">
                           <a:solidFill>
                             <a:srgbClr val="15171A"/>
                           </a:solidFill>
                         </a:rPr>
                         <a:t>매달 받은 금액을 직접 넣음</a:t>
                       </a:r>
-                      <a:endParaRPr lang="en-US" sz="1200" dirty="0"/>
+                      <a:endParaRPr lang="en-US" sz="1100" dirty="0"/>
                     </a:p>
                   </a:txBody>
                   <a:tcPr marL="73152" marR="73152" marT="18288" marB="18288" anchor="ctr">
@@ -9526,14 +9590,14 @@
                         <a:buNone/>
                       </a:pPr>
                       <a:r>
-                        <a:rPr lang="en-US" sz="1200" dirty="0">
+                        <a:rPr lang="en-US" sz="1100" dirty="0">
                           <a:solidFill>
                             <a:srgbClr val="15171A"/>
                           </a:solidFill>
                         </a:rPr>
-                        <a:t>인터뷰 5명 + 설문 · 5명 중 3명 "넣겠다"</a:t>
+                        <a:t>인터뷰 + 설문 · 5명 중 3명</a:t>
                       </a:r>
-                      <a:endParaRPr lang="en-US" sz="1200" dirty="0"/>
+                      <a:endParaRPr lang="en-US" sz="1100" dirty="0"/>
                     </a:p>
                   </a:txBody>
                   <a:tcPr marL="73152" marR="73152" marT="18288" marB="18288" anchor="ctr">
@@ -9584,14 +9648,72 @@
                         <a:buNone/>
                       </a:pPr>
                       <a:r>
-                        <a:rPr lang="en-US" sz="1200" dirty="0">
+                        <a:rPr lang="en-US" sz="1100" dirty="0">
                           <a:solidFill>
                             <a:srgbClr val="15171A"/>
                           </a:solidFill>
                         </a:rPr>
-                        <a:t>입금 문자 자동 인식을 앞당김</a:t>
+                        <a:t>입금 문자 자동 인식 앞당김</a:t>
                       </a:r>
-                      <a:endParaRPr lang="en-US" sz="1200" dirty="0"/>
+                      <a:endParaRPr lang="en-US" sz="1100" dirty="0"/>
+                    </a:p>
+                  </a:txBody>
+                  <a:tcPr marL="73152" marR="73152" marT="18288" marB="18288" anchor="ctr">
+                    <a:lnL w="6350" cap="flat" cmpd="sng" algn="ctr">
+                      <a:solidFill>
+                        <a:srgbClr val="DCD9D0"/>
+                      </a:solidFill>
+                      <a:prstDash val="solid"/>
+                      <a:round/>
+                      <a:headEnd type="none" w="med" len="med"/>
+                      <a:tailEnd type="none" w="med" len="med"/>
+                    </a:lnL>
+                    <a:lnR w="6350" cap="flat" cmpd="sng" algn="ctr">
+                      <a:solidFill>
+                        <a:srgbClr val="DCD9D0"/>
+                      </a:solidFill>
+                      <a:prstDash val="solid"/>
+                      <a:round/>
+                      <a:headEnd type="none" w="med" len="med"/>
+                      <a:tailEnd type="none" w="med" len="med"/>
+                    </a:lnR>
+                    <a:lnT w="6350" cap="flat" cmpd="sng" algn="ctr">
+                      <a:solidFill>
+                        <a:srgbClr val="DCD9D0"/>
+                      </a:solidFill>
+                      <a:prstDash val="solid"/>
+                      <a:round/>
+                      <a:headEnd type="none" w="med" len="med"/>
+                      <a:tailEnd type="none" w="med" len="med"/>
+                    </a:lnT>
+                    <a:lnB w="6350" cap="flat" cmpd="sng" algn="ctr">
+                      <a:solidFill>
+                        <a:srgbClr val="DCD9D0"/>
+                      </a:solidFill>
+                      <a:prstDash val="solid"/>
+                      <a:round/>
+                      <a:headEnd type="none" w="med" len="med"/>
+                      <a:tailEnd type="none" w="med" len="med"/>
+                    </a:lnB>
+                  </a:tcPr>
+                </a:tc>
+                <a:tc>
+                  <a:txBody>
+                    <a:bodyPr/>
+                    <a:lstStyle/>
+                    <a:p>
+                      <a:pPr indent="0" marL="0">
+                        <a:buNone/>
+                      </a:pPr>
+                      <a:r>
+                        <a:rPr lang="en-US" sz="1100" b="1" dirty="0">
+                          <a:solidFill>
+                            <a:srgbClr val="0F7A55"/>
+                          </a:solidFill>
+                        </a:rPr>
+                        <a:t>10명 "넣겠다"</a:t>
+                      </a:r>
+                      <a:endParaRPr lang="en-US" sz="1100" dirty="0"/>
                     </a:p>
                   </a:txBody>
                   <a:tcPr marL="73152" marR="73152" marT="18288" marB="18288" anchor="ctr">
@@ -9644,14 +9766,14 @@
                         <a:buNone/>
                       </a:pPr>
                       <a:r>
-                        <a:rPr lang="en-US" sz="1200" b="1" dirty="0">
+                        <a:rPr lang="en-US" sz="1100" b="1" dirty="0">
                           <a:solidFill>
                             <a:srgbClr val="15171A"/>
                           </a:solidFill>
                         </a:rPr>
                         <a:t>요청 문구를 실제로 보낼 수 있음</a:t>
                       </a:r>
-                      <a:endParaRPr lang="en-US" sz="1200" dirty="0"/>
+                      <a:endParaRPr lang="en-US" sz="1100" dirty="0"/>
                     </a:p>
                   </a:txBody>
                   <a:tcPr marL="73152" marR="73152" marT="18288" marB="18288" anchor="ctr">
@@ -9702,14 +9824,14 @@
                         <a:buNone/>
                       </a:pPr>
                       <a:r>
-                        <a:rPr lang="en-US" sz="1200" dirty="0">
+                        <a:rPr lang="en-US" sz="1100" dirty="0">
                           <a:solidFill>
                             <a:srgbClr val="15171A"/>
                           </a:solidFill>
                         </a:rPr>
-                        <a:t>인터뷰(문구를 보여 주고) · 5명 중 3명</a:t>
+                        <a:t>인터뷰 · 5명 중 3명</a:t>
                       </a:r>
-                      <a:endParaRPr lang="en-US" sz="1200" dirty="0"/>
+                      <a:endParaRPr lang="en-US" sz="1100" dirty="0"/>
                     </a:p>
                   </a:txBody>
                   <a:tcPr marL="73152" marR="73152" marT="18288" marB="18288" anchor="ctr">
@@ -9760,14 +9882,72 @@
                         <a:buNone/>
                       </a:pPr>
                       <a:r>
-                        <a:rPr lang="en-US" sz="1200" dirty="0">
+                        <a:rPr lang="en-US" sz="1100" dirty="0">
                           <a:solidFill>
                             <a:srgbClr val="15171A"/>
                           </a:solidFill>
                         </a:rPr>
                         <a:t>문구 톤 · 단계를 다시 짬</a:t>
                       </a:r>
-                      <a:endParaRPr lang="en-US" sz="1200" dirty="0"/>
+                      <a:endParaRPr lang="en-US" sz="1100" dirty="0"/>
+                    </a:p>
+                  </a:txBody>
+                  <a:tcPr marL="73152" marR="73152" marT="18288" marB="18288" anchor="ctr">
+                    <a:lnL w="6350" cap="flat" cmpd="sng" algn="ctr">
+                      <a:solidFill>
+                        <a:srgbClr val="DCD9D0"/>
+                      </a:solidFill>
+                      <a:prstDash val="solid"/>
+                      <a:round/>
+                      <a:headEnd type="none" w="med" len="med"/>
+                      <a:tailEnd type="none" w="med" len="med"/>
+                    </a:lnL>
+                    <a:lnR w="6350" cap="flat" cmpd="sng" algn="ctr">
+                      <a:solidFill>
+                        <a:srgbClr val="DCD9D0"/>
+                      </a:solidFill>
+                      <a:prstDash val="solid"/>
+                      <a:round/>
+                      <a:headEnd type="none" w="med" len="med"/>
+                      <a:tailEnd type="none" w="med" len="med"/>
+                    </a:lnR>
+                    <a:lnT w="6350" cap="flat" cmpd="sng" algn="ctr">
+                      <a:solidFill>
+                        <a:srgbClr val="DCD9D0"/>
+                      </a:solidFill>
+                      <a:prstDash val="solid"/>
+                      <a:round/>
+                      <a:headEnd type="none" w="med" len="med"/>
+                      <a:tailEnd type="none" w="med" len="med"/>
+                    </a:lnT>
+                    <a:lnB w="6350" cap="flat" cmpd="sng" algn="ctr">
+                      <a:solidFill>
+                        <a:srgbClr val="DCD9D0"/>
+                      </a:solidFill>
+                      <a:prstDash val="solid"/>
+                      <a:round/>
+                      <a:headEnd type="none" w="med" len="med"/>
+                      <a:tailEnd type="none" w="med" len="med"/>
+                    </a:lnB>
+                  </a:tcPr>
+                </a:tc>
+                <a:tc>
+                  <a:txBody>
+                    <a:bodyPr/>
+                    <a:lstStyle/>
+                    <a:p>
+                      <a:pPr indent="0" marL="0">
+                        <a:buNone/>
+                      </a:pPr>
+                      <a:r>
+                        <a:rPr lang="en-US" sz="1100" dirty="0">
+                          <a:solidFill>
+                            <a:srgbClr val="5D636D"/>
+                          </a:solidFill>
+                        </a:rPr>
+                        <a:t>11월 인터뷰</a:t>
+                      </a:r>
+                      <a:endParaRPr lang="en-US" sz="1100" dirty="0"/>
                     </a:p>
                   </a:txBody>
                   <a:tcPr marL="73152" marR="73152" marT="18288" marB="18288" anchor="ctr">
@@ -9820,14 +10000,14 @@
                         <a:buNone/>
                       </a:pPr>
                       <a:r>
-                        <a:rPr lang="en-US" sz="1200" b="1" dirty="0">
+                        <a:rPr lang="en-US" sz="1100" b="1" dirty="0">
                           <a:solidFill>
                             <a:srgbClr val="15171A"/>
                           </a:solidFill>
                         </a:rPr>
                         <a:t>확인 번호 설명이 이해됨</a:t>
                       </a:r>
-                      <a:endParaRPr lang="en-US" sz="1200" dirty="0"/>
+                      <a:endParaRPr lang="en-US" sz="1100" dirty="0"/>
                     </a:p>
                   </a:txBody>
                   <a:tcPr marL="73152" marR="73152" marT="18288" marB="18288" anchor="ctr">
@@ -9878,14 +10058,14 @@
                         <a:buNone/>
                       </a:pPr>
                       <a:r>
-                        <a:rPr lang="en-US" sz="1200" dirty="0">
+                        <a:rPr lang="en-US" sz="1100" dirty="0">
                           <a:solidFill>
                             <a:srgbClr val="15171A"/>
                           </a:solidFill>
                         </a:rPr>
                         <a:t>인터뷰 · 5명 중 4명</a:t>
                       </a:r>
-                      <a:endParaRPr lang="en-US" sz="1200" dirty="0"/>
+                      <a:endParaRPr lang="en-US" sz="1100" dirty="0"/>
                     </a:p>
                   </a:txBody>
                   <a:tcPr marL="73152" marR="73152" marT="18288" marB="18288" anchor="ctr">
@@ -9936,14 +10116,72 @@
                         <a:buNone/>
                       </a:pPr>
                       <a:r>
-                        <a:rPr lang="en-US" sz="1200" dirty="0">
+                        <a:rPr lang="en-US" sz="1100" dirty="0">
                           <a:solidFill>
                             <a:srgbClr val="15171A"/>
                           </a:solidFill>
                         </a:rPr>
                         <a:t>설정 · 증빙 문구 수정</a:t>
                       </a:r>
-                      <a:endParaRPr lang="en-US" sz="1200" dirty="0"/>
+                      <a:endParaRPr lang="en-US" sz="1100" dirty="0"/>
+                    </a:p>
+                  </a:txBody>
+                  <a:tcPr marL="73152" marR="73152" marT="18288" marB="18288" anchor="ctr">
+                    <a:lnL w="6350" cap="flat" cmpd="sng" algn="ctr">
+                      <a:solidFill>
+                        <a:srgbClr val="DCD9D0"/>
+                      </a:solidFill>
+                      <a:prstDash val="solid"/>
+                      <a:round/>
+                      <a:headEnd type="none" w="med" len="med"/>
+                      <a:tailEnd type="none" w="med" len="med"/>
+                    </a:lnL>
+                    <a:lnR w="6350" cap="flat" cmpd="sng" algn="ctr">
+                      <a:solidFill>
+                        <a:srgbClr val="DCD9D0"/>
+                      </a:solidFill>
+                      <a:prstDash val="solid"/>
+                      <a:round/>
+                      <a:headEnd type="none" w="med" len="med"/>
+                      <a:tailEnd type="none" w="med" len="med"/>
+                    </a:lnR>
+                    <a:lnT w="6350" cap="flat" cmpd="sng" algn="ctr">
+                      <a:solidFill>
+                        <a:srgbClr val="DCD9D0"/>
+                      </a:solidFill>
+                      <a:prstDash val="solid"/>
+                      <a:round/>
+                      <a:headEnd type="none" w="med" len="med"/>
+                      <a:tailEnd type="none" w="med" len="med"/>
+                    </a:lnT>
+                    <a:lnB w="6350" cap="flat" cmpd="sng" algn="ctr">
+                      <a:solidFill>
+                        <a:srgbClr val="DCD9D0"/>
+                      </a:solidFill>
+                      <a:prstDash val="solid"/>
+                      <a:round/>
+                      <a:headEnd type="none" w="med" len="med"/>
+                      <a:tailEnd type="none" w="med" len="med"/>
+                    </a:lnB>
+                  </a:tcPr>
+                </a:tc>
+                <a:tc>
+                  <a:txBody>
+                    <a:bodyPr/>
+                    <a:lstStyle/>
+                    <a:p>
+                      <a:pPr indent="0" marL="0">
+                        <a:buNone/>
+                      </a:pPr>
+                      <a:r>
+                        <a:rPr lang="en-US" sz="1100" dirty="0">
+                          <a:solidFill>
+                            <a:srgbClr val="5D636D"/>
+                          </a:solidFill>
+                        </a:rPr>
+                        <a:t>11월 인터뷰</a:t>
+                      </a:r>
+                      <a:endParaRPr lang="en-US" sz="1100" dirty="0"/>
                     </a:p>
                   </a:txBody>
                   <a:tcPr marL="73152" marR="73152" marT="18288" marB="18288" anchor="ctr">
@@ -9996,14 +10234,14 @@
                         <a:buNone/>
                       </a:pPr>
                       <a:r>
-                        <a:rPr lang="en-US" sz="1200" b="1" dirty="0">
+                        <a:rPr lang="en-US" sz="1100" b="1" dirty="0">
                           <a:solidFill>
                             <a:srgbClr val="15171A"/>
                           </a:solidFill>
                         </a:rPr>
                         <a:t>타깃 중 주 15시간 이상이 다수</a:t>
                       </a:r>
-                      <a:endParaRPr lang="en-US" sz="1200" dirty="0"/>
+                      <a:endParaRPr lang="en-US" sz="1100" dirty="0"/>
                     </a:p>
                   </a:txBody>
                   <a:tcPr marL="73152" marR="73152" marT="18288" marB="18288" anchor="ctr">
@@ -10054,14 +10292,14 @@
                         <a:buNone/>
                       </a:pPr>
                       <a:r>
-                        <a:rPr lang="en-US" sz="1200" dirty="0">
+                        <a:rPr lang="en-US" sz="1100" dirty="0">
                           <a:solidFill>
                             <a:srgbClr val="15171A"/>
                           </a:solidFill>
                         </a:rPr>
                         <a:t>설문 30명 이상 · 알바 중 반 이상</a:t>
                       </a:r>
-                      <a:endParaRPr lang="en-US" sz="1200" dirty="0"/>
+                      <a:endParaRPr lang="en-US" sz="1100" dirty="0"/>
                     </a:p>
                   </a:txBody>
                   <a:tcPr marL="73152" marR="73152" marT="18288" marB="18288" anchor="ctr">
@@ -10112,14 +10350,72 @@
                         <a:buNone/>
                       </a:pPr>
                       <a:r>
-                        <a:rPr lang="en-US" sz="1200" dirty="0">
+                        <a:rPr lang="en-US" sz="1100" dirty="0">
                           <a:solidFill>
                             <a:srgbClr val="15171A"/>
                           </a:solidFill>
                         </a:rPr>
                         <a:t>주휴수당 중심 메시지 변경</a:t>
                       </a:r>
-                      <a:endParaRPr lang="en-US" sz="1200" dirty="0"/>
+                      <a:endParaRPr lang="en-US" sz="1100" dirty="0"/>
+                    </a:p>
+                  </a:txBody>
+                  <a:tcPr marL="73152" marR="73152" marT="18288" marB="18288" anchor="ctr">
+                    <a:lnL w="6350" cap="flat" cmpd="sng" algn="ctr">
+                      <a:solidFill>
+                        <a:srgbClr val="DCD9D0"/>
+                      </a:solidFill>
+                      <a:prstDash val="solid"/>
+                      <a:round/>
+                      <a:headEnd type="none" w="med" len="med"/>
+                      <a:tailEnd type="none" w="med" len="med"/>
+                    </a:lnL>
+                    <a:lnR w="6350" cap="flat" cmpd="sng" algn="ctr">
+                      <a:solidFill>
+                        <a:srgbClr val="DCD9D0"/>
+                      </a:solidFill>
+                      <a:prstDash val="solid"/>
+                      <a:round/>
+                      <a:headEnd type="none" w="med" len="med"/>
+                      <a:tailEnd type="none" w="med" len="med"/>
+                    </a:lnR>
+                    <a:lnT w="6350" cap="flat" cmpd="sng" algn="ctr">
+                      <a:solidFill>
+                        <a:srgbClr val="DCD9D0"/>
+                      </a:solidFill>
+                      <a:prstDash val="solid"/>
+                      <a:round/>
+                      <a:headEnd type="none" w="med" len="med"/>
+                      <a:tailEnd type="none" w="med" len="med"/>
+                    </a:lnT>
+                    <a:lnB w="6350" cap="flat" cmpd="sng" algn="ctr">
+                      <a:solidFill>
+                        <a:srgbClr val="DCD9D0"/>
+                      </a:solidFill>
+                      <a:prstDash val="solid"/>
+                      <a:round/>
+                      <a:headEnd type="none" w="med" len="med"/>
+                      <a:tailEnd type="none" w="med" len="med"/>
+                    </a:lnB>
+                  </a:tcPr>
+                </a:tc>
+                <a:tc>
+                  <a:txBody>
+                    <a:bodyPr/>
+                    <a:lstStyle/>
+                    <a:p>
+                      <a:pPr indent="0" marL="0">
+                        <a:buNone/>
+                      </a:pPr>
+                      <a:r>
+                        <a:rPr lang="en-US" sz="1100" dirty="0">
+                          <a:solidFill>
+                            <a:srgbClr val="5D636D"/>
+                          </a:solidFill>
+                        </a:rPr>
+                        <a:t>알바 중 2명, 보류</a:t>
+                      </a:r>
+                      <a:endParaRPr lang="en-US" sz="1100" dirty="0"/>
                     </a:p>
                   </a:txBody>
                   <a:tcPr marL="73152" marR="73152" marT="18288" marB="18288" anchor="ctr">
@@ -10172,14 +10468,14 @@
                         <a:buNone/>
                       </a:pPr>
                       <a:r>
-                        <a:rPr lang="en-US" sz="1200" b="1" dirty="0">
+                        <a:rPr lang="en-US" sz="1100" b="1" dirty="0">
                           <a:solidFill>
                             <a:srgbClr val="15171A"/>
                           </a:solidFill>
                         </a:rPr>
                         <a:t>게임 화면 광고를 받아들임</a:t>
                       </a:r>
-                      <a:endParaRPr lang="en-US" sz="1200" dirty="0"/>
+                      <a:endParaRPr lang="en-US" sz="1100" dirty="0"/>
                     </a:p>
                   </a:txBody>
                   <a:tcPr marL="73152" marR="73152" marT="18288" marB="18288" anchor="ctr">
@@ -10230,14 +10526,14 @@
                         <a:buNone/>
                       </a:pPr>
                       <a:r>
-                        <a:rPr lang="en-US" sz="1200" dirty="0">
+                        <a:rPr lang="en-US" sz="1100" dirty="0">
                           <a:solidFill>
                             <a:srgbClr val="15171A"/>
                           </a:solidFill>
                         </a:rPr>
                         <a:t>설문 + 인터뷰 · "싫다"가 반 미만</a:t>
                       </a:r>
-                      <a:endParaRPr lang="en-US" sz="1200" dirty="0"/>
+                      <a:endParaRPr lang="en-US" sz="1100" dirty="0"/>
                     </a:p>
                   </a:txBody>
                   <a:tcPr marL="73152" marR="73152" marT="18288" marB="18288" anchor="ctr">
@@ -10288,14 +10584,72 @@
                         <a:buNone/>
                       </a:pPr>
                       <a:r>
-                        <a:rPr lang="en-US" sz="1200" dirty="0">
+                        <a:rPr lang="en-US" sz="1100" dirty="0">
                           <a:solidFill>
                             <a:srgbClr val="15171A"/>
                           </a:solidFill>
                         </a:rPr>
-                        <a:t>11/23 광고 대신 새 게임으로</a:t>
+                        <a:t>11/23 새 게임으로 전환</a:t>
                       </a:r>
-                      <a:endParaRPr lang="en-US" sz="1200" dirty="0"/>
+                      <a:endParaRPr lang="en-US" sz="1100" dirty="0"/>
+                    </a:p>
+                  </a:txBody>
+                  <a:tcPr marL="73152" marR="73152" marT="18288" marB="18288" anchor="ctr">
+                    <a:lnL w="6350" cap="flat" cmpd="sng" algn="ctr">
+                      <a:solidFill>
+                        <a:srgbClr val="DCD9D0"/>
+                      </a:solidFill>
+                      <a:prstDash val="solid"/>
+                      <a:round/>
+                      <a:headEnd type="none" w="med" len="med"/>
+                      <a:tailEnd type="none" w="med" len="med"/>
+                    </a:lnL>
+                    <a:lnR w="6350" cap="flat" cmpd="sng" algn="ctr">
+                      <a:solidFill>
+                        <a:srgbClr val="DCD9D0"/>
+                      </a:solidFill>
+                      <a:prstDash val="solid"/>
+                      <a:round/>
+                      <a:headEnd type="none" w="med" len="med"/>
+                      <a:tailEnd type="none" w="med" len="med"/>
+                    </a:lnR>
+                    <a:lnT w="6350" cap="flat" cmpd="sng" algn="ctr">
+                      <a:solidFill>
+                        <a:srgbClr val="DCD9D0"/>
+                      </a:solidFill>
+                      <a:prstDash val="solid"/>
+                      <a:round/>
+                      <a:headEnd type="none" w="med" len="med"/>
+                      <a:tailEnd type="none" w="med" len="med"/>
+                    </a:lnT>
+                    <a:lnB w="6350" cap="flat" cmpd="sng" algn="ctr">
+                      <a:solidFill>
+                        <a:srgbClr val="DCD9D0"/>
+                      </a:solidFill>
+                      <a:prstDash val="solid"/>
+                      <a:round/>
+                      <a:headEnd type="none" w="med" len="med"/>
+                      <a:tailEnd type="none" w="med" len="med"/>
+                    </a:lnB>
+                  </a:tcPr>
+                </a:tc>
+                <a:tc>
+                  <a:txBody>
+                    <a:bodyPr/>
+                    <a:lstStyle/>
+                    <a:p>
+                      <a:pPr indent="0" marL="0">
+                        <a:buNone/>
+                      </a:pPr>
+                      <a:r>
+                        <a:rPr lang="en-US" sz="1100" b="1" dirty="0">
+                          <a:solidFill>
+                            <a:srgbClr val="0F7A55"/>
+                          </a:solidFill>
+                        </a:rPr>
+                        <a:t>"싫다" 4명</a:t>
+                      </a:r>
+                      <a:endParaRPr lang="en-US" sz="1100" dirty="0"/>
                     </a:p>
                   </a:txBody>
                   <a:tcPr marL="73152" marR="73152" marT="18288" marB="18288" anchor="ctr">
@@ -10342,6 +10696,42 @@
           </a:graphicData>
         </a:graphic>
       </p:graphicFrame>
+      <p:sp>
+        <p:nvSpPr>
+          <p:cNvPr id="6" name="Text 3"/>
+          <p:cNvSpPr txBox="1"/>
+          <p:nvPr/>
+        </p:nvSpPr>
+        <p:spPr>
+          <a:xfrm>
+            <a:off x="457200" y="4526280"/>
+            <a:ext cx="8229600" cy="228600"/>
+          </a:xfrm>
+          <a:prstGeom prst="rect">
+            <a:avLst/>
+          </a:prstGeom>
+          <a:noFill/>
+          <a:ln/>
+        </p:spPr>
+        <p:txBody>
+          <a:bodyPr wrap="square" lIns="0" tIns="0" rIns="0" bIns="0" rtlCol="0" anchor="ctr"/>
+          <a:lstStyle/>
+          <a:p>
+            <a:pPr indent="0" marL="0">
+              <a:buNone/>
+            </a:pPr>
+            <a:r>
+              <a:rPr lang="en-US" sz="950" dirty="0">
+                <a:solidFill>
+                  <a:schemeClr val="accent5"/>
+                </a:solidFill>
+              </a:rPr>
+              <a:t>10/26 기준 · 지금 알바 중 2 · 예전에 했음 9 · 한 적 없음 1 · 지인 중심이라 정식 조사 아님 · 사람 수로만 표기</a:t>
+            </a:r>
+            <a:endParaRPr lang="en-US" sz="950" dirty="0"/>
+          </a:p>
+        </p:txBody>
+      </p:sp>
       <p:sp>
         <p:nvSpPr>
           <p:cNvPr id="25" name="Slide Number Placeholder 0"/>
@@ -14740,7 +15130,7 @@
                   <a:schemeClr val="accent5"/>
                 </a:solidFill>
               </a:rPr>
-              <a:t>설문 열림</a:t>
+              <a:t>설문 12명</a:t>
             </a:r>
             <a:endParaRPr lang="en-US" sz="1300" dirty="0"/>
           </a:p>

--- a/docs/06_중간발표_PPT.pptx
+++ b/docs/06_중간발표_PPT.pptx
@@ -125,31 +125,31 @@
   <p:extLst>
     <p:ext uri="{521415D9-36F7-43E2-AB2F-B90AF26B5E84}">
       <p14:sectionLst xmlns:p14="http://schemas.microsoft.com/office/powerpoint/2010/main">
-        <p14:section name="① 표지·팀 소개" id="{03817992-d076-5847-9284-cfef453756f6}">
+        <p14:section name="① 표지·팀 소개" id="{2b011ceb-c159-aa1d-2430-e3c8708a8101}">
           <p14:sldIdLst>
             <p14:sldId id="256"/>
             <p14:sldId id="257"/>
           </p14:sldIdLst>
         </p14:section>
-        <p14:section name="② 문제 정의" id="{4ad97b28-d351-9fe4-21ec-dce101f09501}">
+        <p14:section name="② 문제 정의" id="{13ebd470-1af7-313b-29e8-223ad20478d8}">
           <p14:sldIdLst>
             <p14:sldId id="258"/>
             <p14:sldId id="259"/>
           </p14:sldIdLst>
         </p14:section>
-        <p14:section name="③ 솔루션·핵심 가치" id="{a4fe279d-0a48-e26f-cfbf-162a3be7868c}">
+        <p14:section name="③ 솔루션·핵심 가치" id="{fc47d59b-61ba-40fa-c574-76b766786115}">
           <p14:sldIdLst>
             <p14:sldId id="260"/>
             <p14:sldId id="261"/>
           </p14:sldIdLst>
         </p14:section>
-        <p14:section name="④ SW 기술 아키텍처" id="{5d729d77-4db3-e8ab-a851-067476993ef5}">
+        <p14:section name="④ SW 기술 아키텍처" id="{6e022a3c-176e-f458-ee2a-cc58bad4ca08}">
           <p14:sldIdLst>
             <p14:sldId id="262"/>
             <p14:sldId id="263"/>
           </p14:sldIdLst>
         </p14:section>
-        <p14:section name="⑤ 개발 현황·MVP 시연" id="{93ff6ead-6420-cf76-7fb4-4d1c27c394fa}">
+        <p14:section name="⑤ 개발 현황·MVP 시연" id="{9e720d25-6816-f70a-84a8-37bb84d62f0e}">
           <p14:sldIdLst>
             <p14:sldId id="264"/>
             <p14:sldId id="265"/>
@@ -157,19 +157,19 @@
             <p14:sldId id="267"/>
           </p14:sldIdLst>
         </p14:section>
-        <p14:section name="⑥ 시장 분석·비즈니스 모델" id="{b6d2fd5c-a359-e3a7-552d-9f3e2f5614d7}">
+        <p14:section name="⑥ 시장 분석·비즈니스 모델" id="{69a23f5b-0faf-2a28-b2ae-db66710bb21e}">
           <p14:sldIdLst>
             <p14:sldId id="268"/>
             <p14:sldId id="269"/>
             <p14:sldId id="270"/>
           </p14:sldIdLst>
         </p14:section>
-        <p14:section name="⑦ 초기 시장 검증" id="{024f4fb9-af23-0106-5b2e-e77c5c945481}">
+        <p14:section name="⑦ 초기 시장 검증" id="{4188b23a-64d7-8a4a-4730-2dcc29f069ab}">
           <p14:sldIdLst>
             <p14:sldId id="271"/>
           </p14:sldIdLst>
         </p14:section>
-        <p14:section name="⑧ 향후 계획·팀 역량" id="{6e72373e-fe7b-47e1-c0d8-095861816dcc}">
+        <p14:section name="⑧ 향후 계획·팀 역량" id="{cf0b0a25-1faa-d0e8-ca29-f3d3a7ccb4cd}">
           <p14:sldIdLst>
             <p14:sldId id="272"/>
             <p14:sldId id="273"/>
@@ -926,7 +926,7 @@
           <a:p>
             <a:r>
               <a:rPr lang="en-US" dirty="0"/>
-              <a:t>네 단계(기록 → 비교 → 요청 → 확인)가 차별점과 하나씩 맞물립니다. 영상에 안 나오는 것은 말로 짚습니다: 캘린더의 연장 · 대타 표시(9장 캡처), 3단계 진정 안내(1350 · 노동포털 연결, 진정서는 만들지 않음). 예시 데이터는 발표 전에 미리 넣어 둡니다(오늘 날짜는 비어 있어 출근 · 퇴근이 그대로 됩니다). 7번 표에는 시연 중 남긴 2건만 나옵니다. 예시 데이터는 진짜 시각이 아니라 등록하지 않기 때문입니다. 시연은 다음 장의 녹화 영상(1분 46초)으로 하고, 단계마다 멈춰서 설명하면 약 3분입니다. 영상은 배포된 앱을 실제로 눌러 찍은 것이라 서버 등록과 확인 번호가 진짜입니다(10/26 오전 9시 36분 녹화. 화면의 시각은 녹화한 시각). 질문이 오면 실제 앱으로 1단계(출근 · 퇴근 → "2건 등록됨")만 보여 줍니다. 전날 할 일: Supabase 대시보드에서 프로젝트 상태를 확인하고(잠들어 있으면 Restore) 앱에서 출근 · 퇴근을 눌러 설정 탭에 "2건 등록됨"이 뜨는지 본다. 그다음 폰의 와이파이를 끄고 데이터로 확인 페이지(jihooni217.github.io/albaguard/verify.html?h=da3e2a7ad7e298db)를 열어 등록 시각이 나오는지 본다. 당일 아침에도 한 번 더.</a:t>
+              <a:t>네 단계(기록 → 비교 → 요청 → 확인)가 차별점과 하나씩 맞물립니다. 영상에 안 나오는 것은 말로 짚습니다: 캘린더의 연장 · 대타 표시(9장 캡처), 3단계 진정 안내(1350 · 노동포털 연결, 진정서는 만들지 않음). 예시 데이터는 발표 전에 미리 넣어 둡니다(오늘 날짜는 비어 있어 출근 · 퇴근이 그대로 됩니다). 7번 표에는 시연 중 남긴 2건만 나옵니다. 예시 데이터는 진짜 시각이 아니라 등록하지 않기 때문입니다. 시연은 다음 장의 녹화 영상(1분 46초)으로 하고, 단계마다 멈춰서 설명하면 약 3분입니다. 영상은 배포된 앱을 실제로 눌러 찍은 것이라 서버 등록과 확인 번호가 진짜입니다(10/26 오전 9시 36분 녹화. 화면의 시각은 녹화한 시각). 질문이 오면 실제 앱으로 1단계(출근 · 퇴근 → "2건 등록됨")만 보여 줍니다. 전날 할 일: Supabase 대시보드에서 프로젝트 상태를 확인하고(잠들어 있으면 Restore) 앱에서 출근 · 퇴근을 눌러 설정 탭에 "2건 등록됨"이 뜨는지 봅니다. 그다음 폰의 와이파이를 끄고 데이터로 확인 페이지(jihooni217.github.io/albaguard/verify.html?h=da3e2a7ad7e298db)를 열어 등록 시각이 나오는지 봅니다. 당일 아침에도 한 번 더.</a:t>
             </a:r>
             <a:endParaRPr lang="en-US" dirty="0"/>
           </a:p>
@@ -1454,7 +1454,7 @@
           <a:p>
             <a:r>
               <a:rPr lang="en-US" dirty="0"/>
-              <a:t>박명진. 가설은 9월 기획서 문장 그대로입니다. 표의 기준은 팀이 정한 목표이지 데이터가 아닙니다. 오른쪽 끝 칸이 10/26까지 받은 설문 12명의 중간 결과입니다(지금 알바 중 2 · 예전에 했음 9 · 한 적 없음 1, 지인 중심이라 정식 조사가 아닙니다). 매달 받은 금액을 넣겠다는 사람이 12명 중 10명("할 만하다" 4, "귀찮지만 할 것 같다" 6), 게임 화면 광고를 싫다고 한 사람은 4명이었습니다. 주 15시간 기준은 지금 알바 중인 응답자가 2명뿐이라 판단을 미룹니다. 요청 문구와 확인 번호는 인터뷰 문항이라 11월에 확인합니다. 문제 쪽도 확인됐습니다. 급여 때 "내 계산이 맞는지"가 걱정이라는 사람이 12명 중 8명, 통장 총액만 본다는 사람이 11명 중 7명입니다. 불리한 결과도 말합니다. 가장 쓸모 있는 기능으로 정산 요청 메시지와 기록 등록을 고른 사람은 없었고(덜 받은 돈 알려 주기 6명, 출퇴근 기록 4명), 미니게임은 "안 쓸 것 같은 기능" 1위(6명)였습니다. 그래서 인터뷰에서 문구와 확인 번호를 직접 보여 주고 반응을 봅니다. 모집은 학과 · 동아리 단톡, 에브리타임, 그리고 오늘 이 자리(QR)입니다. 인터뷰 5명은 지인 중 지금 알바 중인 사람으로 11/3~11/9에 합니다. 결과는 사람 수로만 말하고 %는 30명 이상일 때만 씁니다. 당일 아침 응답이 더 늘었으면 결과 페이지(survey-results.html)의 숫자로 "지금은 N명"이라고 덧붙입니다. 강의실 인터넷이 되고 교수님 양해를 받으면 결과 페이지를 60초만 띄울 수 있습니다(자유 의견은 띄우지 않음). 1행은 의향을 묻는 것이라 한계가 있습니다. 실제로 넣는지는 인터뷰 때 앱을 설치하게 하고 급여일이 지난 뒤 따로 봅니다(기말 이후까지 걸릴 수 있음). 지인은 호의적으로 답하기 쉬워서 "넣겠다"를 그대로 믿지 않습니다.</a:t>
+              <a:t>박명진. 가설은 9월 기획서의 문장입니다. 표의 기준은 팀이 정한 목표이지 데이터가 아닙니다. 오른쪽 끝 칸이 10/26까지 받은 설문 12명의 중간 결과입니다(지금 알바 중 2 · 예전에 했음 9 · 한 적 없음 1, 지인 중심이라 정식 조사가 아닙니다). 매달 받은 금액을 넣겠다는 사람이 12명 중 10명("할 만하다" 4, "귀찮지만 할 것 같다" 6), 게임 화면 광고를 싫다고 한 사람은 4명이었습니다. 주 15시간 기준은 지금 알바 중인 응답자가 2명뿐이라 판단을 미룹니다. 요청 문구와 확인 번호는 인터뷰 문항이라 11월에 확인합니다. 문제 쪽도 확인됐습니다. 급여 때 "내 계산이 맞는지"가 걱정이라는 사람이 12명 중 8명, 통장 총액만 본다는 사람이 11명 중 7명입니다. 불리한 결과도 말합니다. 가장 쓸모 있는 기능으로 정산 요청 메시지와 기록 등록을 고른 사람은 없었고(덜 받은 돈 알려 주기 6명, 출퇴근 기록 4명), 미니게임은 "안 쓸 것 같은 기능" 1위(6명)였습니다. 그래서 인터뷰에서 문구와 확인 번호를 직접 보여 주고 반응을 봅니다. 모집은 학과 · 동아리 단톡, 에브리타임, 그리고 오늘 이 자리(QR)입니다. 인터뷰 5명은 지인 중 지금 알바 중인 사람으로 11/3~11/9에 합니다. 결과는 사람 수로만 말하고 %는 30명 이상일 때만 씁니다. 당일 아침 응답이 더 늘었으면 결과 페이지(survey-results.html)의 숫자로 "지금은 N명"이라고 덧붙입니다. 강의실 인터넷이 되고 교수님 양해를 받으면 결과 페이지를 60초만 띄울 수 있습니다(자유 의견은 띄우지 않음). 1행은 의향을 묻는 것이라 한계가 있습니다. 실제로 넣는지는 인터뷰 때 앱을 설치하게 하고 급여일이 지난 뒤 따로 봅니다(기말 이후까지 걸릴 수 있음). 지인은 호의적으로 답하기 쉬워서 "넣겠다"를 그대로 믿지 않습니다.</a:t>
             </a:r>
             <a:endParaRPr lang="en-US" dirty="0"/>
           </a:p>
@@ -1718,8 +1718,8 @@
           <a:p>
             <a:r>
               <a:rPr lang="en-US" dirty="0"/>
-              <a:t>팀장 마무리(20초): "저희가 여쭙고 싶은 것 두 가지입니다. 문서 유료화를 피하면서 가능한 수익 모델이 더 있을지, 그리고 설문 30명 · 인터뷰 5명이면 충분한지입니다. 질문받겠습니다." 이 장은 질의응답 내내 띄워 둔다.
-예상 질문 (이름 붙은 사람이 먼저 답하고, 모자라면 팀장이 보탠다)
+              <a:t>팀장 마무리(20초): "저희가 여쭙고 싶은 것 두 가지입니다. 문서 유료화를 피하면서 가능한 수익 모델이 더 있을지, 그리고 설문 30명 · 인터뷰 5명이면 충분한지입니다. 질문받겠습니다." 이 장은 질의응답 내내 띄워 둡니다.
+예상 질문 (이름 붙은 사람이 먼저 답하고, 모자라면 팀장이 보탭니다. 답은 짧은 메모이니 말할 때는 "~습니다"로)
 · [이지훈] 법적 효력 있나? → 보장하지 않는다. 판단은 감독관 · 법원. 우리는 판단할 자료를 정리하고, 수정 이력과 확인 번호로 "나중에 고친 게 아니다"까지 보여 준다. 통장 내역 · 카톡과 함께 내야 한다고 앱에도 적어 뒀다.
 · [이지훈] 서버는 여러분이 관리하는데 고치면 그만 아닌가? → 맞다. 공개키로는 넣기 · 읽기만 되고 시각은 서버가 찍는 것까지 확인했지만, 프로젝트 소유자 권한으로는 고칠 수 있다. 한계로 인정한다. 지금 막는 건 "사용자 본인이 나중에 고쳐 쓰기"까지. 운영자까지 못 고치게 하는 외부 공인 시점 확인은 비용 때문에 계획. 서버에는 번호만 있어서 운영자가 서버를 고쳐도 폰의 근무 내용 자체는 못 바꾼다. (확인 페이지에도 "앱에서 고치거나 지울 수 없음, 운영자 권한으로는 가능"이라고 적어 두었다)
 · [이지훈] 확인 번호가 그 기록에서 나온 건지 어떻게 아나? → 지금은 번호와 서버 등록 시각까지 보여 주고, 기록 내용에서 번호를 다시 계산해 맞춰 보는 방법은 기말까지 만든다(그래서 70%). 지금은 앱 · 백업 파일을 함께 봐야 한다.
@@ -9242,7 +9242,7 @@
                   <a:schemeClr val="tx1"/>
                 </a:solidFill>
               </a:rPr>
-              <a:t>알바생은 자신의 근무 기록을 근거로 한 정산 요청 문구가 있으면, 사장에게 말을 꺼낼 수 있다고 느끼고 쓸 것이다</a:t>
+              <a:t>알바생은 자신의 근무 기록을 근거로 한 정산 요청 문구가 있으면, 사장에게 말을 꺼낼 수 있다고 느끼고 쓸 것</a:t>
             </a:r>
             <a:endParaRPr lang="en-US" sz="1100" dirty="0"/>
           </a:p>

--- a/docs/06_중간발표_PPT.pptx
+++ b/docs/06_중간발표_PPT.pptx
@@ -125,31 +125,31 @@
   <p:extLst>
     <p:ext uri="{521415D9-36F7-43E2-AB2F-B90AF26B5E84}">
       <p14:sectionLst xmlns:p14="http://schemas.microsoft.com/office/powerpoint/2010/main">
-        <p14:section name="① 표지·팀 소개" id="{2b011ceb-c159-aa1d-2430-e3c8708a8101}">
+        <p14:section name="① 표지·팀 소개" id="{1820d38a-f5e8-1f33-a79c-be8ffee59386}">
           <p14:sldIdLst>
             <p14:sldId id="256"/>
             <p14:sldId id="257"/>
           </p14:sldIdLst>
         </p14:section>
-        <p14:section name="② 문제 정의" id="{13ebd470-1af7-313b-29e8-223ad20478d8}">
+        <p14:section name="② 문제 정의" id="{72c4b054-62f0-8d28-ed70-2792158f7f16}">
           <p14:sldIdLst>
             <p14:sldId id="258"/>
             <p14:sldId id="259"/>
           </p14:sldIdLst>
         </p14:section>
-        <p14:section name="③ 솔루션·핵심 가치" id="{fc47d59b-61ba-40fa-c574-76b766786115}">
+        <p14:section name="③ 솔루션·핵심 가치" id="{aebe56d7-6535-7c40-281a-0186735c581b}">
           <p14:sldIdLst>
             <p14:sldId id="260"/>
             <p14:sldId id="261"/>
           </p14:sldIdLst>
         </p14:section>
-        <p14:section name="④ SW 기술 아키텍처" id="{6e022a3c-176e-f458-ee2a-cc58bad4ca08}">
+        <p14:section name="④ SW 기술 아키텍처" id="{f25ddcb7-8407-7d96-1b8d-843555d59db5}">
           <p14:sldIdLst>
             <p14:sldId id="262"/>
             <p14:sldId id="263"/>
           </p14:sldIdLst>
         </p14:section>
-        <p14:section name="⑤ 개발 현황·MVP 시연" id="{9e720d25-6816-f70a-84a8-37bb84d62f0e}">
+        <p14:section name="⑤ 개발 현황·MVP 시연" id="{e50ed5aa-f028-89e2-44a8-135326f6133f}">
           <p14:sldIdLst>
             <p14:sldId id="264"/>
             <p14:sldId id="265"/>
@@ -157,19 +157,19 @@
             <p14:sldId id="267"/>
           </p14:sldIdLst>
         </p14:section>
-        <p14:section name="⑥ 시장 분석·비즈니스 모델" id="{69a23f5b-0faf-2a28-b2ae-db66710bb21e}">
+        <p14:section name="⑥ 시장 분석·비즈니스 모델" id="{9cb49f2a-dc68-dfba-2416-6519fc8687ff}">
           <p14:sldIdLst>
             <p14:sldId id="268"/>
             <p14:sldId id="269"/>
             <p14:sldId id="270"/>
           </p14:sldIdLst>
         </p14:section>
-        <p14:section name="⑦ 초기 시장 검증" id="{4188b23a-64d7-8a4a-4730-2dcc29f069ab}">
+        <p14:section name="⑦ 초기 시장 검증" id="{1c648978-27b0-aea9-5357-c4b4b30441a1}">
           <p14:sldIdLst>
             <p14:sldId id="271"/>
           </p14:sldIdLst>
         </p14:section>
-        <p14:section name="⑧ 향후 계획·팀 역량" id="{cf0b0a25-1faa-d0e8-ca29-f3d3a7ccb4cd}">
+        <p14:section name="⑧ 향후 계획·팀 역량" id="{be55b65b-824e-1131-8c6b-35346e975d28}">
           <p14:sldIdLst>
             <p14:sldId id="272"/>
             <p14:sldId id="273"/>
@@ -1366,7 +1366,7 @@
           <a:p>
             <a:r>
               <a:rPr lang="en-US" dirty="0"/>
-              <a:t>손유호. 기록 · 비교 · 요청 화면은 믿고 쓰는 것이 중요해서 광고를 섞지 않습니다. 단가를 모르니 매출 추정은 적지 않았습니다. 정산 문구 · 내용증명 · 증빙 묶음을 돈 받고 만들면 변호사법 · 공인노무사법 문제에 가까워져서 유료화하지 않습니다(웹 조사 기준, 전문가 검토 아님). 유저 확보는 에브리타임 · 학과 단톡 · 알바 커뮤니티에 링크를 올리고, "주휴수당 계산법" 같은 짧은 영상을 만듭니다. 알바비 앱에 왜 게임이 있나: 출퇴근은 일하는 날마다 누르지만, 돈을 확인하는 건 급여일에 한 번이라, 그 사이에도 앱을 열 이유로 넣었고 그 화면이 광고 자리입니다. 처음엔 근무 중에만 열렸는데 팀원 의견으로 10/25에 조건을 풀고 설정에서 숨길 수 있게 했습니다. 광고 형식은 웹앱이라 배너 · 전면이 기본이고 보상형은 승인이 필요합니다. 2차 구독은 폰을 바꾸거나 잃어버려도 기록이 남게 하는 선택 기능이고, 원하는 사람만 쓰므로 "근무 내용은 폰 안에만" 원칙과 부딪히지 않습니다. 광고 가설은 설문의 "게임 화면 광고" 문항과 승인 뒤 게임 화면 열람 수로 확인합니다. 운영 비용은 지금 서버 0원 · 배포 0원이라 수익이 0이어도 서비스는 돌아가고, 인건비는 팀 3명입니다. 넘길 때: "주 15시간 이상 일하는 사람이 많은지는 지금 답하고 계신 설문으로 처음 확인합니다. 검증 계획은 박명진이 말씀드립니다."</a:t>
+              <a:t>손유호. 기록 · 비교 · 요청 화면은 믿고 쓰는 것이 중요해서 광고를 섞지 않습니다. 단가를 모르니 매출 추정은 적지 않았습니다. 정산 문구 · 내용증명 · 증빙 묶음을 돈 받고 만들면 변호사법 · 공인노무사법 문제에 가까워져서 유료화하지 않습니다(웹 조사 기준, 전문가 검토 아님). 유저 확보는 에브리타임 · 학과 단톡 · 알바 커뮤니티에 링크를 올리고, "주휴수당 계산법" 같은 짧은 영상을 만듭니다. 알바비 앱에 왜 게임이 있나: 출퇴근은 일하는 날마다 누르지만, 돈을 확인하는 건 급여일에 한 번이라, 그 사이에도 앱을 열 이유로 넣었고 그 화면이 광고 자리입니다. 처음엔 근무 중에만 열렸는데 팀원 의견으로 10/25에 조건을 풀고 설정에서 숨길 수 있게 했습니다. 광고 형식은 웹앱이라 배너 · 전면이 기본이고 보상형은 승인이 필요합니다. 2차 구독은 폰을 바꾸거나 잃어버려도 기록이 남게 하는 선택 기능이고, 원하는 사람만 쓰므로 "근무 내용은 폰 안에만" 원칙과 부딪히지 않습니다. 광고 가설은 설문의 "게임 화면 광고" 문항(지금까지 12명 중 "싫다" 4명)과 승인 뒤 게임 화면 열람 수로 확인합니다. 운영 비용은 지금 서버 0원 · 배포 0원이라 수익이 0이어도 서비스는 돌아가고, 인건비는 팀 3명입니다. 넘길 때: "주 15시간 이상 일하는 사람이 많은지는 설문으로 확인하고 있습니다. 지금까지 12명이 답했고, 결과와 검증 계획은 박명진이 말씀드립니다."</a:t>
             </a:r>
             <a:endParaRPr lang="en-US" dirty="0"/>
           </a:p>
@@ -1542,7 +1542,7 @@
           <a:p>
             <a:r>
               <a:rPr lang="en-US" dirty="0"/>
-              <a:t>박명진. 7주 일정이고 빨간 마름모가 마일스톤입니다. 설문은 10/23에 열었고, 오늘부터 본격적으로 모읍니다. 11/16까지 손유호가 30명을 채우고, 인터뷰 5명은 11/3~11/9에 손유호 3명, 제가 2명을 합니다. 폰 검증은 아이폰은 팀장, 갤럭시는 제가 주관합니다. 광고 승인 신청은 손유호, 코드는 팀장입니다. 마일스톤: 11/9 설문 1차 집계 · 인터뷰 마감, 11/23 피드백 반영 배포와 광고 결정, 11/30 폰 검증 끝, 12/7 기록 등록 보강 배포와 기능 동결, 12/15 기말. 11/23에 설문의 광고 문항 결과로 광고 실험과 새 게임 중 하나를 정합니다. 12/7 이후에는 코드를 바꾸지 않고 보고서와 발표를 준비합니다. 위험과 대안은 보고서 5.4에 적었습니다.</a:t>
+              <a:t>박명진. 7주 일정이고 빨간 마름모가 마일스톤입니다. 설문은 10/23에 열어 지금 12명이고, 11/16까지 손유호가 30명을 채웁니다. 그리고 인터뷰 5명은 11/3~11/9에 손유호 3명, 제가 2명을 합니다. 폰 검증은 아이폰은 팀장, 갤럭시는 제가 주관합니다. 광고 승인 신청은 손유호, 코드는 팀장입니다. 마일스톤: 11/9 설문 1차 집계 · 인터뷰 마감, 11/23 피드백 반영 배포와 광고 결정, 11/30 폰 검증 끝, 12/7 기록 등록 보강 배포와 기능 동결, 12/15 기말. 11/23에 설문의 광고 문항 결과로 광고 실험과 새 게임 중 하나를 정합니다. 12/7 이후에는 코드를 바꾸지 않고 보고서와 발표를 준비합니다. 위험과 대안은 보고서 5.4에 적었습니다.</a:t>
             </a:r>
             <a:endParaRPr lang="en-US" dirty="0"/>
           </a:p>
@@ -1725,8 +1725,8 @@
 · [이지훈] 확인 번호가 그 기록에서 나온 건지 어떻게 아나? → 지금은 번호와 서버 등록 시각까지 보여 주고, 기록 내용에서 번호를 다시 계산해 맞춰 보는 방법은 기말까지 만든다(그래서 70%). 지금은 앱 · 백업 파일을 함께 봐야 한다.
 · [이지훈] 본인이 쓴 기록을 믿을 수 있나? → 거짓 기록은 막을 수 없다고 인정. 막는 건 "나중에 고쳐 쓰기". 영세 사업장은 기록이 없는 경우가 많아 알바생 기록이 거의 유일한 자료가 되기 쉽다. 사장에게는 임금대장 · 계약 서류 보존 의무가 있다(근로기준법 48 · 42조).
 · [이지훈] 앱 계산이 틀리면 분쟁이 커지는 것 아닌가? 책임은? → 계산을 단정으로 내놓지 않는다. 항목별 · 주별 이유를 펼쳐 보여 주고, 안 넣은 것(연장근로 가산)과 유리하게 본 것(합의 휴무)은 화면에 적었다. 1단계 문구는 청구서가 아니라 "제가 계산을 잘 몰라서 여쭤본다"라는 확인 요청. 법률 자문 아님을 적어 두었고 1350 확인을 안내한다.
-· [이지훈] 고객 검증도 전에 왜 먼저 만들었나? → 지적은 맞다. 다만 링크로 배포되는 웹앱이라 빨리 만들 수 있었고, 말로 설명하기보다 화면을 보여 주며 물어야 정확한 답을 듣는다고 봤다. 9월 경쟁 앱 리뷰로 빈자리를 확인하고 10/13 정의서로 범위를 8개로 잘랐다. 설문에 캡처 3장을 넣고 "실제로 있다면 쓰겠나"를 묻는다. 12/7까지는 고치는 기간.
-· [박명진] 받은 금액을 매달 직접 넣어야 하는데 넣을까? → 가장 큰 가설이라 검증 표 첫 줄. 첫 화면에서 "9월 급여 받으셨나요?"라고 묻고 넣는 순간 덜 받은 돈이 보이게 했다. 5명 중 3명이 아니면 자동 인식을 앞당긴다.
+· [이지훈] 고객 검증도 전에 왜 먼저 만들었나? → 지적은 맞다. 다만 링크로 배포되는 웹앱이라 빨리 만들 수 있었고, 말로 설명하기보다 화면을 보여 주며 물어야 정확한 답을 듣는다고 봤다. 9월 경쟁 앱 리뷰로 빈자리를 확인하고 10/13 정의서로 범위를 8개로 잘랐다. 설문에 캡처 3장을 넣고 "실제로 있다면 쓰겠나"를 물었더니 12명 중 "안 쓴다"는 0명이었다. 12/7까지는 고치는 기간.
+· [박명진] 받은 금액을 매달 직접 넣어야 하는데 넣을까? → 가장 큰 가설이라 검증 표 첫 줄. 설문에서는 12명 중 10명이 넣겠다고 했지만 의향이라 인터뷰와 급여일 뒤 실제 입력으로 다시 본다. 첫 화면에서 "9월 급여 받으셨나요?"라고 묻고 넣는 순간 덜 받은 돈이 보이게 했다. 5명 중 3명이 아니면 자동 인식을 앞당긴다.
 · [이지훈] 하우머치가 따라 하면? → 비교 기능은 따라올 수 있다. 확인 번호를 서버에 넣는 기술 자체도 어렵지 않다고 인정한다. 어려운 것은 그 번호가 뜻이 있게 기록 구조를 짜는 일이다. 사유 없이 못 고치고, 삭제도 흔적이 남고, 고칠 때마다 다시 등록돼야 "몇 번 고쳤나"가 보인다. 기존 앱이 따라오려면 기록을 마음대로 고치던 방식을 바꿔야 해서 쉽게 따라오지 않는다고 본다. 그래도 따라오면 요청 · 증빙까지 잇는 흐름으로 간다. 우리도 "내용으로 번호 다시 계산"이 남아 70%다.
 · [손유호] 급여 앱에 게임이 왜? 근무 중에 게임을 권하나? → 출퇴근은 일하는 날마다 누르지만, 돈을 확인하는 건 급여일에 한 번이라, 그 사이에도 앱을 열 이유로 넣은 것. 처음엔 근무 중에만이었는데 팀원 의견으로 10/25 조건을 풀고 설정에서 숨길 수 있게 했다. 게임 기록은 문서에 안 섞인다. 안 되면 게임을 빼도 기록 → 비교 → 요청은 그대로.
 · [박명진] 같은 과 학생 설문이 무슨 의미? 편향 아닌가? → 맞다. "정식 조사 아님"을 적고 사람 수로만 말한다. 중복 응답도 막지 않았다(이름 · 기기 정보를 안 받는 대가). 11월 30명은 학과 밖(동아리 · 에브리타임)까지 넓혀 모으고, 인터뷰 5명으로 이유를 듣는다.
@@ -1833,7 +1833,7 @@
           <a:p>
             <a:r>
               <a:rPr lang="en-US" dirty="0"/>
-              <a:t>팀장. "교수님이 아직 구현 전일 거라 하셨는데, 저희는 웹앱이라 빨리 만들 수 있어서, 화면을 먼저 만들고 그걸 보여 주며 묻는 순서를 택했습니다. 오늘 보여 드리는 건 완성품이 아니라 검증용 도구입니다." 사용자 검증은 11월에 합니다. 오른쪽 QR은 앱과 설문입니다. 설문은 이름을 받지 않고 3분이라, 들으시면서 답해 주셔도 됩니다. 역할은 개발 이지훈, 시장 · 수익 손유호, 검증 · 일정 박명진이고 발표도 그 순서입니다.</a:t>
+              <a:t>팀장. "교수님이 아직 구현 전일 거라 하셨는데, 저희는 웹앱이라 빨리 만들 수 있어서, 화면을 먼저 만들고 그걸 보여 주며 묻는 순서를 택했습니다. 오늘 보여 드리는 건 완성품이 아니라 검증용 도구입니다." 설문은 지금까지 12명이 답했고, 앱을 직접 써 보게 하는 인터뷰는 11월에 합니다. 오른쪽 QR은 앱과 설문입니다. 설문은 이름을 받지 않고 3분이라, 들으시면서 답해 주셔도 됩니다. 역할은 개발 이지훈, 시장 · 수익 손유호, 검증 · 일정 박명진이고 발표도 그 순서입니다.</a:t>
             </a:r>
             <a:endParaRPr lang="en-US" dirty="0"/>
           </a:p>
@@ -1921,7 +1921,7 @@
           <a:p>
             <a:r>
               <a:rPr lang="en-US" dirty="0"/>
-              <a:t>타깃: 근로계약서가 없거나 사본이 없고, 통장 총액만 확인하고, 사장님께 말을 꺼내기 부담스러워하는 학생입니다. 주 15시간은 주휴수당이 생기는 선입니다. 문제 1: 수당 안내를 못 받는 경우가 많고 주휴 · 야간 계산 기준은 알기 어렵습니다. 계산기는 있어도 넣을 기록이 없습니다. 문제 2: 통장에 들어온 총액만 보고 넘어가고, 계약서가 없어 시급도 증명하기 어렵습니다. 문제 3: 관계 걱정, 작은 금액, 근거 없음이 겹치고, 메모장 기록은 "나중에 지어낸 것 아니냐?" 한마디에 무너집니다. 세 문제를 숫자로 보여 줍니다. 모두 알바천국 설문이라 "플랫폼 설문"이라는 점을 말하고, 그래서 우리도 직접 설문을 돌리고 있다고 잇습니다. 33.2%는 노동절 수당 안내에 대한 숫자라 "노동절 수당조차 안내받지 못하는 경우가 있다"까지만 말하고, 주휴 · 야간 계산 자신감은 우리 설문 문항으로 직접 묻고 있다고 덧붙입니다.</a:t>
+              <a:t>타깃: 근로계약서가 없거나 사본이 없고, 통장 총액만 확인하고, 사장님께 말을 꺼내기 부담스러워하는 학생입니다. 주 15시간은 주휴수당이 생기는 선입니다. 문제 1: 수당 안내를 못 받는 경우가 많고 주휴 · 야간 계산 기준은 알기 어렵습니다. 계산기는 있어도 넣을 기록이 없습니다. 문제 2: 통장에 들어온 총액만 보고 넘어가고, 계약서가 없어 시급도 증명하기 어렵습니다. 문제 3: 관계 걱정, 작은 금액, 근거 없음이 겹치고, 메모장 기록은 "나중에 지어낸 것 아니냐?" 한마디에 무너집니다. 세 문제를 숫자로 보여 줍니다. 모두 알바천국 설문이라 "플랫폼 설문"이라는 점을 말하고, 그래서 우리도 직접 설문을 돌리고 있다고 잇습니다. 33.2%는 노동절 수당 안내에 대한 숫자라 "노동절 수당조차 안내받지 못하는 경우가 있다"까지만 말하고, 우리 설문(12명)에서도 주휴 · 야간 계산에 자신 있다는 사람은 4명뿐이었다고 덧붙입니다.</a:t>
             </a:r>
             <a:endParaRPr lang="en-US" dirty="0"/>
           </a:p>
@@ -14398,7 +14398,7 @@
                   <a:schemeClr val="bg2"/>
                 </a:solidFill>
               </a:rPr>
-              <a:t>완성도 평균 약 80%, 사용자 검증은 11월</a:t>
+              <a:t>완성도 평균 약 80% · 설문 12명 응답</a:t>
             </a:r>
             <a:endParaRPr lang="en-US" sz="1100" dirty="0"/>
           </a:p>
@@ -14935,7 +14935,7 @@
                   <a:schemeClr val="tx2"/>
                 </a:solidFill>
               </a:rPr>
-              <a:t>지금 상태: 앱은 배포됐고, 사용자 검증은 11월부터</a:t>
+              <a:t>지금 상태: 앱은 배포, 설문 12명 응답, 인터뷰는 11월</a:t>
             </a:r>
             <a:endParaRPr lang="en-US" sz="2400" dirty="0"/>
           </a:p>

--- a/docs/06_중간발표_PPT.pptx
+++ b/docs/06_중간발표_PPT.pptx
@@ -125,31 +125,31 @@
   <p:extLst>
     <p:ext uri="{521415D9-36F7-43E2-AB2F-B90AF26B5E84}">
       <p14:sectionLst xmlns:p14="http://schemas.microsoft.com/office/powerpoint/2010/main">
-        <p14:section name="① 표지·팀 소개" id="{1820d38a-f5e8-1f33-a79c-be8ffee59386}">
+        <p14:section name="① 표지·팀 소개" id="{5f1cbe77-5160-2bbd-4094-f51ec8d0fa7f}">
           <p14:sldIdLst>
             <p14:sldId id="256"/>
             <p14:sldId id="257"/>
           </p14:sldIdLst>
         </p14:section>
-        <p14:section name="② 문제 정의" id="{72c4b054-62f0-8d28-ed70-2792158f7f16}">
+        <p14:section name="② 문제 정의" id="{662f2aed-1ab1-8843-0ee6-cc4c4e3aa299}">
           <p14:sldIdLst>
             <p14:sldId id="258"/>
             <p14:sldId id="259"/>
           </p14:sldIdLst>
         </p14:section>
-        <p14:section name="③ 솔루션·핵심 가치" id="{aebe56d7-6535-7c40-281a-0186735c581b}">
+        <p14:section name="③ 솔루션·핵심 가치" id="{1b79aeb6-d094-9b35-5854-26837a0210bc}">
           <p14:sldIdLst>
             <p14:sldId id="260"/>
             <p14:sldId id="261"/>
           </p14:sldIdLst>
         </p14:section>
-        <p14:section name="④ SW 기술 아키텍처" id="{f25ddcb7-8407-7d96-1b8d-843555d59db5}">
+        <p14:section name="④ SW 기술 아키텍처" id="{f6a62829-4324-38f4-4ae4-d70444c2a303}">
           <p14:sldIdLst>
             <p14:sldId id="262"/>
             <p14:sldId id="263"/>
           </p14:sldIdLst>
         </p14:section>
-        <p14:section name="⑤ 개발 현황·MVP 시연" id="{e50ed5aa-f028-89e2-44a8-135326f6133f}">
+        <p14:section name="⑤ 개발 현황·MVP 시연" id="{ea2accc3-e785-2837-0f43-e506736b1b8b}">
           <p14:sldIdLst>
             <p14:sldId id="264"/>
             <p14:sldId id="265"/>
@@ -157,19 +157,19 @@
             <p14:sldId id="267"/>
           </p14:sldIdLst>
         </p14:section>
-        <p14:section name="⑥ 시장 분석·비즈니스 모델" id="{9cb49f2a-dc68-dfba-2416-6519fc8687ff}">
+        <p14:section name="⑥ 시장 분석·비즈니스 모델" id="{6fbf05ed-c5b6-6d73-eb71-1c0a9729c260}">
           <p14:sldIdLst>
             <p14:sldId id="268"/>
             <p14:sldId id="269"/>
             <p14:sldId id="270"/>
           </p14:sldIdLst>
         </p14:section>
-        <p14:section name="⑦ 초기 시장 검증" id="{1c648978-27b0-aea9-5357-c4b4b30441a1}">
+        <p14:section name="⑦ 초기 시장 검증" id="{95ae43e5-969a-68fe-c042-ef38d25909c1}">
           <p14:sldIdLst>
             <p14:sldId id="271"/>
           </p14:sldIdLst>
         </p14:section>
-        <p14:section name="⑧ 향후 계획·팀 역량" id="{be55b65b-824e-1131-8c6b-35346e975d28}">
+        <p14:section name="⑧ 향후 계획·팀 역량" id="{15346879-1e96-fcea-8fd1-90aa9c2934a2}">
           <p14:sldIdLst>
             <p14:sldId id="272"/>
             <p14:sldId id="273"/>
@@ -1366,7 +1366,7 @@
           <a:p>
             <a:r>
               <a:rPr lang="en-US" dirty="0"/>
-              <a:t>손유호. 기록 · 비교 · 요청 화면은 믿고 쓰는 것이 중요해서 광고를 섞지 않습니다. 단가를 모르니 매출 추정은 적지 않았습니다. 정산 문구 · 내용증명 · 증빙 묶음을 돈 받고 만들면 변호사법 · 공인노무사법 문제에 가까워져서 유료화하지 않습니다(웹 조사 기준, 전문가 검토 아님). 유저 확보는 에브리타임 · 학과 단톡 · 알바 커뮤니티에 링크를 올리고, "주휴수당 계산법" 같은 짧은 영상을 만듭니다. 알바비 앱에 왜 게임이 있나: 출퇴근은 일하는 날마다 누르지만, 돈을 확인하는 건 급여일에 한 번이라, 그 사이에도 앱을 열 이유로 넣었고 그 화면이 광고 자리입니다. 처음엔 근무 중에만 열렸는데 팀원 의견으로 10/25에 조건을 풀고 설정에서 숨길 수 있게 했습니다. 광고 형식은 웹앱이라 배너 · 전면이 기본이고 보상형은 승인이 필요합니다. 2차 구독은 폰을 바꾸거나 잃어버려도 기록이 남게 하는 선택 기능이고, 원하는 사람만 쓰므로 "근무 내용은 폰 안에만" 원칙과 부딪히지 않습니다. 광고 가설은 설문의 "게임 화면 광고" 문항(지금까지 12명 중 "싫다" 4명)과 승인 뒤 게임 화면 열람 수로 확인합니다. 운영 비용은 지금 서버 0원 · 배포 0원이라 수익이 0이어도 서비스는 돌아가고, 인건비는 팀 3명입니다. 넘길 때: "주 15시간 이상 일하는 사람이 많은지는 설문으로 확인하고 있습니다. 지금까지 12명이 답했고, 결과와 검증 계획은 박명진이 말씀드립니다."</a:t>
+              <a:t>손유호. 기록 · 비교 · 요청 화면은 믿고 쓰는 것이 중요해서 광고를 섞지 않습니다. 단가를 모르니 매출 추정은 적지 않았습니다. 정산 문구 · 내용증명 · 증빙 묶음을 돈 받고 만들면 변호사법 · 공인노무사법 문제에 가까워져서 유료화하지 않습니다(웹 조사 기준, 전문가 검토 아님). 유저 확보는 에브리타임 · 학과 단톡 · 알바 커뮤니티에 링크를 올리고, "주휴수당 계산법" 같은 짧은 영상을 만듭니다. 알바비 앱에 왜 게임이 있나: 출퇴근은 일하는 날마다 누르지만, 돈을 확인하는 건 급여일에 한 번이라, 그 사이에도 앱을 열 이유로 넣었고 그 화면이 광고 자리입니다. 처음엔 근무 중에만 열렸는데 팀원 의견으로 10/25에 조건을 풀고 설정에서 숨길 수 있게 했습니다. 광고 형식은 웹앱이라 배너 · 전면이 기본이고 보상형은 승인이 필요합니다. 2차 구독은 폰을 바꾸거나 잃어버려도 기록이 남게 하는 선택 기능이고, 원하는 사람만 쓰므로 "근무 내용은 폰 안에만" 원칙과 부딪히지 않습니다. 광고 가설은 설문의 "게임 화면 광고" 문항(지금까지 13명 중 "싫다" 4명)과 승인 뒤 게임 화면 열람 수로 확인합니다. 운영 비용은 지금 서버 0원 · 배포 0원이라 수익이 0이어도 서비스는 돌아가고, 인건비는 팀 3명입니다. 넘길 때: "주 15시간 이상 일하는 사람이 많은지는 설문으로 확인하고 있습니다. 지금까지 13명이 답했고, 결과와 검증 계획은 박명진이 말씀드립니다."</a:t>
             </a:r>
             <a:endParaRPr lang="en-US" dirty="0"/>
           </a:p>
@@ -1454,7 +1454,7 @@
           <a:p>
             <a:r>
               <a:rPr lang="en-US" dirty="0"/>
-              <a:t>박명진. 가설은 9월 기획서의 문장입니다. 표의 기준은 팀이 정한 목표이지 데이터가 아닙니다. 오른쪽 끝 칸이 10/26까지 받은 설문 12명의 중간 결과입니다(지금 알바 중 2 · 예전에 했음 9 · 한 적 없음 1, 지인 중심이라 정식 조사가 아닙니다). 매달 받은 금액을 넣겠다는 사람이 12명 중 10명("할 만하다" 4, "귀찮지만 할 것 같다" 6), 게임 화면 광고를 싫다고 한 사람은 4명이었습니다. 주 15시간 기준은 지금 알바 중인 응답자가 2명뿐이라 판단을 미룹니다. 요청 문구와 확인 번호는 인터뷰 문항이라 11월에 확인합니다. 문제 쪽도 확인됐습니다. 급여 때 "내 계산이 맞는지"가 걱정이라는 사람이 12명 중 8명, 통장 총액만 본다는 사람이 11명 중 7명입니다. 불리한 결과도 말합니다. 가장 쓸모 있는 기능으로 정산 요청 메시지와 기록 등록을 고른 사람은 없었고(덜 받은 돈 알려 주기 6명, 출퇴근 기록 4명), 미니게임은 "안 쓸 것 같은 기능" 1위(6명)였습니다. 그래서 인터뷰에서 문구와 확인 번호를 직접 보여 주고 반응을 봅니다. 모집은 학과 · 동아리 단톡, 에브리타임, 그리고 오늘 이 자리(QR)입니다. 인터뷰 5명은 지인 중 지금 알바 중인 사람으로 11/3~11/9에 합니다. 결과는 사람 수로만 말하고 %는 30명 이상일 때만 씁니다. 당일 아침 응답이 더 늘었으면 결과 페이지(survey-results.html)의 숫자로 "지금은 N명"이라고 덧붙입니다. 강의실 인터넷이 되고 교수님 양해를 받으면 결과 페이지를 60초만 띄울 수 있습니다(자유 의견은 띄우지 않음). 1행은 의향을 묻는 것이라 한계가 있습니다. 실제로 넣는지는 인터뷰 때 앱을 설치하게 하고 급여일이 지난 뒤 따로 봅니다(기말 이후까지 걸릴 수 있음). 지인은 호의적으로 답하기 쉬워서 "넣겠다"를 그대로 믿지 않습니다.</a:t>
+              <a:t>박명진. 가설은 9월 기획서의 문장입니다. 표의 기준은 팀이 정한 목표이지 데이터가 아닙니다. 오른쪽 끝 칸이 10/26까지 받은 설문 13명의 중간 결과입니다(지금 알바 중 2 · 예전에 했음 10 · 한 적 없음 1, 지인 중심이라 정식 조사가 아닙니다). 매달 받은 금액을 넣겠다는 사람이 13명 중 11명("할 만하다" 4, "귀찮지만 할 것 같다" 7), 게임 화면 광고를 싫다고 한 사람은 4명이었습니다. 주 15시간 기준은 지금 알바 중인 응답자가 2명뿐이라 판단을 미룹니다. 요청 문구와 확인 번호는 인터뷰 문항이라 11월에 확인합니다. 문제 쪽도 확인됐습니다. 급여 때 "내 계산이 맞는지"가 걱정이라는 사람이 13명 중 8명, 통장 총액만 본다는 사람이 12명 중 7명입니다. 불리한 결과도 말합니다. 가장 쓸모 있는 기능으로 정산 요청 메시지와 기록 등록을 고른 사람은 없었고(덜 받은 돈 알려 주기 7명, 출퇴근 기록 4명), 미니게임은 "안 쓸 것 같은 기능" 1위(6명)였습니다. 그래서 인터뷰에서 문구와 확인 번호를 직접 보여 주고 반응을 봅니다. 모집은 학과 · 동아리 단톡, 에브리타임, 그리고 오늘 이 자리(QR)입니다. 인터뷰 5명은 지인 중 지금 알바 중인 사람으로 11/3~11/9에 합니다. 결과는 사람 수로만 말하고 %는 30명 이상일 때만 씁니다. 당일 아침 응답이 더 늘었으면 결과 페이지(survey-results.html)의 숫자로 "지금은 N명"이라고 덧붙입니다. 강의실 인터넷이 되고 교수님 양해를 받으면 결과 페이지를 60초만 띄울 수 있습니다(자유 의견은 띄우지 않음). 1행은 의향을 묻는 것이라 한계가 있습니다. 실제로 넣는지는 인터뷰 때 앱을 설치하게 하고 급여일이 지난 뒤 따로 봅니다(기말 이후까지 걸릴 수 있음). 지인은 호의적으로 답하기 쉬워서 "넣겠다"를 그대로 믿지 않습니다.</a:t>
             </a:r>
             <a:endParaRPr lang="en-US" dirty="0"/>
           </a:p>
@@ -1542,7 +1542,7 @@
           <a:p>
             <a:r>
               <a:rPr lang="en-US" dirty="0"/>
-              <a:t>박명진. 7주 일정이고 빨간 마름모가 마일스톤입니다. 설문은 10/23에 열어 지금 12명이고, 11/16까지 손유호가 30명을 채웁니다. 그리고 인터뷰 5명은 11/3~11/9에 손유호 3명, 제가 2명을 합니다. 폰 검증은 아이폰은 팀장, 갤럭시는 제가 주관합니다. 광고 승인 신청은 손유호, 코드는 팀장입니다. 마일스톤: 11/9 설문 1차 집계 · 인터뷰 마감, 11/23 피드백 반영 배포와 광고 결정, 11/30 폰 검증 끝, 12/7 기록 등록 보강 배포와 기능 동결, 12/15 기말. 11/23에 설문의 광고 문항 결과로 광고 실험과 새 게임 중 하나를 정합니다. 12/7 이후에는 코드를 바꾸지 않고 보고서와 발표를 준비합니다. 위험과 대안은 보고서 5.4에 적었습니다.</a:t>
+              <a:t>박명진. 7주 일정이고 빨간 마름모가 마일스톤입니다. 설문은 10/23에 열어 지금 13명이고, 11/16까지 손유호가 30명을 채웁니다. 그리고 인터뷰 5명은 11/3~11/9에 손유호 3명, 제가 2명을 합니다. 폰 검증은 아이폰은 팀장, 갤럭시는 제가 주관합니다. 광고 승인 신청은 손유호, 코드는 팀장입니다. 마일스톤: 11/9 설문 1차 집계 · 인터뷰 마감, 11/23 피드백 반영 배포와 광고 결정, 11/30 폰 검증 끝, 12/7 기록 등록 보강 배포와 기능 동결, 12/15 기말. 11/23에 설문의 광고 문항 결과로 광고 실험과 새 게임 중 하나를 정합니다. 12/7 이후에는 코드를 바꾸지 않고 보고서와 발표를 준비합니다. 위험과 대안은 보고서 5.4에 적었습니다.</a:t>
             </a:r>
             <a:endParaRPr lang="en-US" dirty="0"/>
           </a:p>
@@ -1725,8 +1725,8 @@
 · [이지훈] 확인 번호가 그 기록에서 나온 건지 어떻게 아나? → 지금은 번호와 서버 등록 시각까지 보여 주고, 기록 내용에서 번호를 다시 계산해 맞춰 보는 방법은 기말까지 만든다(그래서 70%). 지금은 앱 · 백업 파일을 함께 봐야 한다.
 · [이지훈] 본인이 쓴 기록을 믿을 수 있나? → 거짓 기록은 막을 수 없다고 인정. 막는 건 "나중에 고쳐 쓰기". 영세 사업장은 기록이 없는 경우가 많아 알바생 기록이 거의 유일한 자료가 되기 쉽다. 사장에게는 임금대장 · 계약 서류 보존 의무가 있다(근로기준법 48 · 42조).
 · [이지훈] 앱 계산이 틀리면 분쟁이 커지는 것 아닌가? 책임은? → 계산을 단정으로 내놓지 않는다. 항목별 · 주별 이유를 펼쳐 보여 주고, 안 넣은 것(연장근로 가산)과 유리하게 본 것(합의 휴무)은 화면에 적었다. 1단계 문구는 청구서가 아니라 "제가 계산을 잘 몰라서 여쭤본다"라는 확인 요청. 법률 자문 아님을 적어 두었고 1350 확인을 안내한다.
-· [이지훈] 고객 검증도 전에 왜 먼저 만들었나? → 지적은 맞다. 다만 링크로 배포되는 웹앱이라 빨리 만들 수 있었고, 말로 설명하기보다 화면을 보여 주며 물어야 정확한 답을 듣는다고 봤다. 9월 경쟁 앱 리뷰로 빈자리를 확인하고 10/13 정의서로 범위를 8개로 잘랐다. 설문에 캡처 3장을 넣고 "실제로 있다면 쓰겠나"를 물었더니 12명 중 "안 쓴다"는 0명이었다. 12/7까지는 고치는 기간.
-· [박명진] 받은 금액을 매달 직접 넣어야 하는데 넣을까? → 가장 큰 가설이라 검증 표 첫 줄. 설문에서는 12명 중 10명이 넣겠다고 했지만 의향이라 인터뷰와 급여일 뒤 실제 입력으로 다시 본다. 첫 화면에서 "9월 급여 받으셨나요?"라고 묻고 넣는 순간 덜 받은 돈이 보이게 했다. 5명 중 3명이 아니면 자동 인식을 앞당긴다.
+· [이지훈] 고객 검증도 전에 왜 먼저 만들었나? → 지적은 맞다. 다만 링크로 배포되는 웹앱이라 빨리 만들 수 있었고, 말로 설명하기보다 화면을 보여 주며 물어야 정확한 답을 듣는다고 봤다. 9월 경쟁 앱 리뷰로 빈자리를 확인하고 10/13 정의서로 범위를 8개로 잘랐다. 설문에 캡처 3장을 넣고 "실제로 있다면 쓰겠나"를 물었더니 13명 중 "안 쓴다"는 0명이었다. 12/7까지는 고치는 기간.
+· [박명진] 받은 금액을 매달 직접 넣어야 하는데 넣을까? → 가장 큰 가설이라 검증 표 첫 줄. 설문에서는 13명 중 11명이 넣겠다고 했지만 의향이라 인터뷰와 급여일 뒤 실제 입력으로 다시 본다. 첫 화면에서 "9월 급여 받으셨나요?"라고 묻고 넣는 순간 덜 받은 돈이 보이게 했다. 5명 중 3명이 아니면 자동 인식을 앞당긴다.
 · [이지훈] 하우머치가 따라 하면? → 비교 기능은 따라올 수 있다. 확인 번호를 서버에 넣는 기술 자체도 어렵지 않다고 인정한다. 어려운 것은 그 번호가 뜻이 있게 기록 구조를 짜는 일이다. 사유 없이 못 고치고, 삭제도 흔적이 남고, 고칠 때마다 다시 등록돼야 "몇 번 고쳤나"가 보인다. 기존 앱이 따라오려면 기록을 마음대로 고치던 방식을 바꿔야 해서 쉽게 따라오지 않는다고 본다. 그래도 따라오면 요청 · 증빙까지 잇는 흐름으로 간다. 우리도 "내용으로 번호 다시 계산"이 남아 70%다.
 · [손유호] 급여 앱에 게임이 왜? 근무 중에 게임을 권하나? → 출퇴근은 일하는 날마다 누르지만, 돈을 확인하는 건 급여일에 한 번이라, 그 사이에도 앱을 열 이유로 넣은 것. 처음엔 근무 중에만이었는데 팀원 의견으로 10/25 조건을 풀고 설정에서 숨길 수 있게 했다. 게임 기록은 문서에 안 섞인다. 안 되면 게임을 빼도 기록 → 비교 → 요청은 그대로.
 · [박명진] 같은 과 학생 설문이 무슨 의미? 편향 아닌가? → 맞다. "정식 조사 아님"을 적고 사람 수로만 말한다. 중복 응답도 막지 않았다(이름 · 기기 정보를 안 받는 대가). 11월 30명은 학과 밖(동아리 · 에브리타임)까지 넓혀 모으고, 인터뷰 5명으로 이유를 듣는다.
@@ -1742,7 +1742,7 @@
 · [이지훈] 폰을 바꾸거나 서비스가 없어지면 기록은? → 폰을 바꾸면 백업 파일로 옮긴다(설정 탭). 서비스가 없어져도 폰의 기록, 백업 파일, 저장해 둔 증빙 묶음 PDF는 사용자 손에 남는다. 이 문제를 푸는 것이 2차 구독(동기화 · 자동 백업)이다.
 · [이지훈] 개인정보는? 동의는? → 로그인이 없고 서버에는 이름 · 근무지 · 시각 · 금액이 가지 않는다. 가는 것은 확인 번호 · 기록 번호 · 무작위 기기 번호뿐이고, 무엇이 가는지 설정 탭에 적고 끌 수 있게 했다. 설문도 이름 · 연락처를 받지 않는다. 기록 내용을 밖으로 보내는 기능을 켜면 그때 안내와 동의가 필요하다.
 · [박명진] 왜 설문 30명 · 인터뷰 5명인가? → 9월 기획서는 인터뷰 10~15명이었다. 사람 수는 링크 설문으로 채우고, 앱을 써 보게 하는 20분 인터뷰는 7주 안에 셋이 할 수 있는 5명으로 줄였다. 충분한지는 마지막에 여쭙는 것 중 하나다.
-· [손유호] 설문에서 게임을 안 쓰겠다는 사람이 제일 많던데? → 맞다. 12명 중 6명이 "안 쓸 것 같은 기능"으로 골랐다. 광고 자체를 싫다는 사람은 4명이라 광고 자리는 남지만, 게임을 쓰는 사람이 적으면 광고도 약하다. 그래서 11/23에 설문 결과로 광고 실험과 새 게임 중 하나를 정하고, 게임은 설정에서 숨길 수 있게 해 두었다.
+· [손유호] 설문에서 게임을 안 쓰겠다는 사람이 제일 많던데? → 맞다. 13명 중 6명이 "안 쓸 것 같은 기능"으로 골랐다. 광고 자체를 싫다는 사람은 4명이라 광고 자리는 남지만, 게임을 쓰는 사람이 적으면 광고도 약하다. 그래서 11/23에 설문 결과로 광고 실험과 새 게임 중 하나를 정하고, 게임은 설정에서 숨길 수 있게 해 두었다.
 · [이지훈] 기록 등록(확인 번호)을 쓸모 있다고 고른 사람이 없던데 차별점이 맞나? → 설문에서는 0명이었고, 안 쓸 것 같다는 사람도 1명뿐이었다. 덜 받은 상황에서 "나중에 지어낸 것 아니냐"는 말을 들을 때 쓸모가 생기는 기능이라 아직 와닿지 않는다고 본다. 인터뷰에서 그 상황을 설명하고 반응을 본다(검증 표 3행). 반응이 약하면 발표 · 홍보에서 앞세우는 순서를 다시 정한다.
 · [손유호] 광고 수익이 생기면 "무료라서 괜찮다"가 깨지지 않나? → 광고는 게임 화면에만 나오고 문서 기능과 떼어 놓았다. 문서를 만든 대가로 받는 돈이 아니게 구조를 잡은 것이다. 다만 웹 조사 기준 판단이고 전문가 검토는 아니다.
 · [박명진 → 손유호 순으로 각자] 팀원은 뭘 했나? → 개발은 이지훈. 손유호는 수업 시간의 계획서 일부를 썼고(내용은 팀장이 반영), 앞으로 시장 · 설문 · 인터뷰 3명. 박명진은 지금까지 의견을 낸 정도이고, 앞으로 인터뷰 2명 · 갤럭시 테스트 · 일정 · 보고서 편집.</a:t>
@@ -1833,7 +1833,7 @@
           <a:p>
             <a:r>
               <a:rPr lang="en-US" dirty="0"/>
-              <a:t>팀장. "교수님이 아직 구현 전일 거라 하셨는데, 저희는 웹앱이라 빨리 만들 수 있어서, 화면을 먼저 만들고 그걸 보여 주며 묻는 순서를 택했습니다. 오늘 보여 드리는 건 완성품이 아니라 검증용 도구입니다." 설문은 지금까지 12명이 답했고, 앱을 직접 써 보게 하는 인터뷰는 11월에 합니다. 오른쪽 QR은 앱과 설문입니다. 설문은 이름을 받지 않고 3분이라, 들으시면서 답해 주셔도 됩니다. 역할은 개발 이지훈, 시장 · 수익 손유호, 검증 · 일정 박명진이고 발표도 그 순서입니다.</a:t>
+              <a:t>팀장. "교수님이 아직 구현 전일 거라 하셨는데, 저희는 웹앱이라 빨리 만들 수 있어서, 화면을 먼저 만들고 그걸 보여 주며 묻는 순서를 택했습니다. 오늘 보여 드리는 건 완성품이 아니라 검증용 도구입니다." 설문은 지금까지 13명이 답했고, 앱을 직접 써 보게 하는 인터뷰는 11월에 합니다. 오른쪽 QR은 앱과 설문입니다. 설문은 이름을 받지 않고 3분이라, 들으시면서 답해 주셔도 됩니다. 역할은 개발 이지훈, 시장 · 수익 손유호, 검증 · 일정 박명진이고 발표도 그 순서입니다.</a:t>
             </a:r>
             <a:endParaRPr lang="en-US" dirty="0"/>
           </a:p>
@@ -1921,7 +1921,7 @@
           <a:p>
             <a:r>
               <a:rPr lang="en-US" dirty="0"/>
-              <a:t>타깃: 근로계약서가 없거나 사본이 없고, 통장 총액만 확인하고, 사장님께 말을 꺼내기 부담스러워하는 학생입니다. 주 15시간은 주휴수당이 생기는 선입니다. 문제 1: 수당 안내를 못 받는 경우가 많고 주휴 · 야간 계산 기준은 알기 어렵습니다. 계산기는 있어도 넣을 기록이 없습니다. 문제 2: 통장에 들어온 총액만 보고 넘어가고, 계약서가 없어 시급도 증명하기 어렵습니다. 문제 3: 관계 걱정, 작은 금액, 근거 없음이 겹치고, 메모장 기록은 "나중에 지어낸 것 아니냐?" 한마디에 무너집니다. 세 문제를 숫자로 보여 줍니다. 모두 알바천국 설문이라 "플랫폼 설문"이라는 점을 말하고, 그래서 우리도 직접 설문을 돌리고 있다고 잇습니다. 33.2%는 노동절 수당 안내에 대한 숫자라 "노동절 수당조차 안내받지 못하는 경우가 있다"까지만 말하고, 우리 설문(12명)에서도 주휴 · 야간 계산에 자신 있다는 사람은 4명뿐이었다고 덧붙입니다.</a:t>
+              <a:t>타깃: 근로계약서가 없거나 사본이 없고, 통장 총액만 확인하고, 사장님께 말을 꺼내기 부담스러워하는 학생입니다. 주 15시간은 주휴수당이 생기는 선입니다. 문제 1: 수당 안내를 못 받는 경우가 많고 주휴 · 야간 계산 기준은 알기 어렵습니다. 계산기는 있어도 넣을 기록이 없습니다. 문제 2: 통장에 들어온 총액만 보고 넘어가고, 계약서가 없어 시급도 증명하기 어렵습니다. 문제 3: 관계 걱정, 작은 금액, 근거 없음이 겹치고, 메모장 기록은 "나중에 지어낸 것 아니냐?" 한마디에 무너집니다. 세 문제를 숫자로 보여 줍니다. 모두 알바천국 설문이라 "플랫폼 설문"이라는 점을 말하고, 그래서 우리도 직접 설문을 돌리고 있다고 잇습니다. 33.2%는 노동절 수당 안내에 대한 숫자라 "노동절 수당조차 안내받지 못하는 경우가 있다"까지만 말하고, 우리 설문(13명)에서도 주휴 · 야간 계산에 자신 있다는 사람은 4명뿐이었다고 덧붙입니다.</a:t>
             </a:r>
             <a:endParaRPr lang="en-US" dirty="0"/>
           </a:p>
@@ -9195,7 +9195,7 @@
                   <a:schemeClr val="tx2"/>
                 </a:solidFill>
               </a:rPr>
-              <a:t>검증: 설문 12명 중간 결과, 11월에 다섯 가지 확인</a:t>
+              <a:t>검증: 설문 13명 중간 결과, 11월에 다섯 가지 확인</a:t>
             </a:r>
             <a:endParaRPr lang="en-US" sz="2400" dirty="0"/>
           </a:p>
@@ -9474,7 +9474,7 @@
                             <a:srgbClr val="5D636D"/>
                           </a:solidFill>
                         </a:rPr>
-                        <a:t>중간 결과 (설문 12명)</a:t>
+                        <a:t>중간 결과 (설문 13명)</a:t>
                       </a:r>
                       <a:endParaRPr lang="en-US" sz="1100" dirty="0"/>
                     </a:p>
@@ -9711,7 +9711,7 @@
                             <a:srgbClr val="0F7A55"/>
                           </a:solidFill>
                         </a:rPr>
-                        <a:t>10명 "넣겠다"</a:t>
+                        <a:t>11명 "넣겠다"</a:t>
                       </a:r>
                       <a:endParaRPr lang="en-US" sz="1100" dirty="0"/>
                     </a:p>
@@ -10726,7 +10726,7 @@
                   <a:schemeClr val="accent5"/>
                 </a:solidFill>
               </a:rPr>
-              <a:t>10/26 기준 · 지금 알바 중 2 · 예전에 했음 9 · 한 적 없음 1 · 지인 중심이라 정식 조사 아님 · 사람 수로만 표기</a:t>
+              <a:t>10/26 기준 · 지금 알바 중 2 · 예전에 했음 10 · 한 적 없음 1 · 지인 중심이라 정식 조사 아님 · 사람 수로만 표기</a:t>
             </a:r>
             <a:endParaRPr lang="en-US" sz="950" dirty="0"/>
           </a:p>
@@ -14398,7 +14398,7 @@
                   <a:schemeClr val="bg2"/>
                 </a:solidFill>
               </a:rPr>
-              <a:t>완성도 평균 약 80% · 설문 12명 응답</a:t>
+              <a:t>완성도 평균 약 80% · 설문 13명 응답</a:t>
             </a:r>
             <a:endParaRPr lang="en-US" sz="1100" dirty="0"/>
           </a:p>
@@ -14935,7 +14935,7 @@
                   <a:schemeClr val="tx2"/>
                 </a:solidFill>
               </a:rPr>
-              <a:t>지금 상태: 앱은 배포, 설문 12명 응답, 인터뷰는 11월</a:t>
+              <a:t>지금 상태: 앱은 배포, 설문 13명 응답, 인터뷰는 11월</a:t>
             </a:r>
             <a:endParaRPr lang="en-US" sz="2400" dirty="0"/>
           </a:p>
@@ -15130,7 +15130,7 @@
                   <a:schemeClr val="accent5"/>
                 </a:solidFill>
               </a:rPr>
-              <a:t>설문 12명</a:t>
+              <a:t>설문 13명</a:t>
             </a:r>
             <a:endParaRPr lang="en-US" sz="1300" dirty="0"/>
           </a:p>

--- a/docs/06_중간발표_PPT.pptx
+++ b/docs/06_중간발표_PPT.pptx
@@ -125,31 +125,31 @@
   <p:extLst>
     <p:ext uri="{521415D9-36F7-43E2-AB2F-B90AF26B5E84}">
       <p14:sectionLst xmlns:p14="http://schemas.microsoft.com/office/powerpoint/2010/main">
-        <p14:section name="① 표지·팀 소개" id="{5f1cbe77-5160-2bbd-4094-f51ec8d0fa7f}">
+        <p14:section name="① 표지·팀 소개" id="{fb51b58e-5a95-957b-d906-8efba4e9594b}">
           <p14:sldIdLst>
             <p14:sldId id="256"/>
             <p14:sldId id="257"/>
           </p14:sldIdLst>
         </p14:section>
-        <p14:section name="② 문제 정의" id="{662f2aed-1ab1-8843-0ee6-cc4c4e3aa299}">
+        <p14:section name="② 문제 정의" id="{9d5ee7d8-1c06-72a8-208d-a6b81074feb5}">
           <p14:sldIdLst>
             <p14:sldId id="258"/>
             <p14:sldId id="259"/>
           </p14:sldIdLst>
         </p14:section>
-        <p14:section name="③ 솔루션·핵심 가치" id="{1b79aeb6-d094-9b35-5854-26837a0210bc}">
+        <p14:section name="③ 솔루션·핵심 가치" id="{adada2f1-1849-0604-6007-fd5fd350fc1d}">
           <p14:sldIdLst>
             <p14:sldId id="260"/>
             <p14:sldId id="261"/>
           </p14:sldIdLst>
         </p14:section>
-        <p14:section name="④ SW 기술 아키텍처" id="{f6a62829-4324-38f4-4ae4-d70444c2a303}">
+        <p14:section name="④ SW 기술 아키텍처" id="{280e737a-040d-c1f0-ba50-9734faa5d6cb}">
           <p14:sldIdLst>
             <p14:sldId id="262"/>
             <p14:sldId id="263"/>
           </p14:sldIdLst>
         </p14:section>
-        <p14:section name="⑤ 개발 현황·MVP 시연" id="{ea2accc3-e785-2837-0f43-e506736b1b8b}">
+        <p14:section name="⑤ 개발 현황·MVP 시연" id="{5d998bcc-f1f4-913f-b75f-8495cb61814b}">
           <p14:sldIdLst>
             <p14:sldId id="264"/>
             <p14:sldId id="265"/>
@@ -157,19 +157,19 @@
             <p14:sldId id="267"/>
           </p14:sldIdLst>
         </p14:section>
-        <p14:section name="⑥ 시장 분석·비즈니스 모델" id="{6fbf05ed-c5b6-6d73-eb71-1c0a9729c260}">
+        <p14:section name="⑥ 시장 분석·비즈니스 모델" id="{c4443a6a-9514-be46-ac57-48621fe16379}">
           <p14:sldIdLst>
             <p14:sldId id="268"/>
             <p14:sldId id="269"/>
             <p14:sldId id="270"/>
           </p14:sldIdLst>
         </p14:section>
-        <p14:section name="⑦ 초기 시장 검증" id="{95ae43e5-969a-68fe-c042-ef38d25909c1}">
+        <p14:section name="⑦ 초기 시장 검증" id="{955c16f8-a62c-c270-b425-1b9a349ae3b2}">
           <p14:sldIdLst>
             <p14:sldId id="271"/>
           </p14:sldIdLst>
         </p14:section>
-        <p14:section name="⑧ 향후 계획·팀 역량" id="{15346879-1e96-fcea-8fd1-90aa9c2934a2}">
+        <p14:section name="⑧ 향후 계획·팀 역량" id="{a29615aa-1c28-8adb-a057-bd64f92c3bf8}">
           <p14:sldIdLst>
             <p14:sldId id="272"/>
             <p14:sldId id="273"/>
@@ -838,7 +838,7 @@
           <a:p>
             <a:r>
               <a:rPr lang="en-US" dirty="0"/>
-              <a:t>팀장이 엽니다. "알바비를 덜 받아도 모르고, 알아도 말을 못 하는 대학생을 위해, 기록 → 비교 → 요청까지 한 앱으로 잇는 알바가드입니다." 팀명은 앱 이름과 같은 알바가드입니다.</a:t>
+              <a:t>팀장이 엽니다. "화면의 269,352원은 앱 예시 데이터에서 두 달 동안 덜 받은 돈입니다. 통장 총액만 봐서는 보이지 않는 돈입니다. 알바비를 덜 받아도 모르고, 알아도 말을 못 하는 대학생을 위해, 기록 → 비교 → 요청까지 한 앱으로 잇는 알바가드입니다." 팀명은 앱 이름과 같은 알바가드입니다.</a:t>
             </a:r>
             <a:endParaRPr lang="en-US" dirty="0"/>
           </a:p>
@@ -926,7 +926,7 @@
           <a:p>
             <a:r>
               <a:rPr lang="en-US" dirty="0"/>
-              <a:t>네 단계(기록 → 비교 → 요청 → 확인)가 차별점과 하나씩 맞물립니다. 영상에 안 나오는 것은 말로 짚습니다: 캘린더의 연장 · 대타 표시(9장 캡처), 3단계 진정 안내(1350 · 노동포털 연결, 진정서는 만들지 않음). 예시 데이터는 발표 전에 미리 넣어 둡니다(오늘 날짜는 비어 있어 출근 · 퇴근이 그대로 됩니다). 7번 표에는 시연 중 남긴 2건만 나옵니다. 예시 데이터는 진짜 시각이 아니라 등록하지 않기 때문입니다. 시연은 다음 장의 녹화 영상(1분 46초)으로 하고, 단계마다 멈춰서 설명하면 약 3분입니다. 영상은 배포된 앱을 실제로 눌러 찍은 것이라 서버 등록과 확인 번호가 진짜입니다(10/26 오전 9시 36분 녹화. 화면의 시각은 녹화한 시각). 질문이 오면 실제 앱으로 1단계(출근 · 퇴근 → "2건 등록됨")만 보여 줍니다. 전날 할 일: Supabase 대시보드에서 프로젝트 상태를 확인하고(잠들어 있으면 Restore) 앱에서 출근 · 퇴근을 눌러 설정 탭에 "2건 등록됨"이 뜨는지 봅니다. 그다음 폰의 와이파이를 끄고 데이터로 확인 페이지(jihooni217.github.io/albaguard/verify.html?h=da3e2a7ad7e298db)를 열어 등록 시각이 나오는지 봅니다. 당일 아침에도 한 번 더.</a:t>
+              <a:t>네 단계(기록 → 비교 → 요청 → 확인)가 차별점과 하나씩 맞물립니다. 영상에 안 나오는 것은 말로 짚습니다: 캘린더의 연장 · 대타 표시(9장 캡처), 3단계 진정 안내(1350 · 노동포털 연결, 진정서는 만들지 않음). 예시 데이터는 발표 전에 미리 넣어 둡니다(오늘 날짜는 비어 있어 출근 · 퇴근이 그대로 됩니다). 7번 표에는 시연 중 남긴 2건만 나옵니다. 예시 데이터는 진짜 시각이 아니라 등록하지 않기 때문입니다. 시연은 다음 장의 녹화 영상(1분 46초)으로 하고, 단계마다 멈춰서 설명하면 약 3분입니다. 영상은 배포된 앱을 실제로 눌러 찍은 것이라 서버 등록과 확인 번호가 진짜입니다(10/26 오전 9시 36분 녹화. 화면의 시각은 녹화한 시각). 질문이 오면 실제 앱에서 출근 · 퇴근을 눌러, 설정의 등록 건수가 2건 늘어나는 것만 보여 줍니다. (전날 · 당일 준비는 팀원 요약의 팀장 체크리스트에)</a:t>
             </a:r>
             <a:endParaRPr lang="en-US" dirty="0"/>
           </a:p>
@@ -1454,7 +1454,7 @@
           <a:p>
             <a:r>
               <a:rPr lang="en-US" dirty="0"/>
-              <a:t>박명진. 가설은 9월 기획서의 문장입니다. 표의 기준은 팀이 정한 목표이지 데이터가 아닙니다. 오른쪽 끝 칸이 10/26까지 받은 설문 13명의 중간 결과입니다(지금 알바 중 2 · 예전에 했음 10 · 한 적 없음 1, 지인 중심이라 정식 조사가 아닙니다). 매달 받은 금액을 넣겠다는 사람이 13명 중 11명("할 만하다" 4, "귀찮지만 할 것 같다" 7), 게임 화면 광고를 싫다고 한 사람은 4명이었습니다. 주 15시간 기준은 지금 알바 중인 응답자가 2명뿐이라 판단을 미룹니다. 요청 문구와 확인 번호는 인터뷰 문항이라 11월에 확인합니다. 문제 쪽도 확인됐습니다. 급여 때 "내 계산이 맞는지"가 걱정이라는 사람이 13명 중 8명, 통장 총액만 본다는 사람이 12명 중 7명입니다. 불리한 결과도 말합니다. 가장 쓸모 있는 기능으로 정산 요청 메시지와 기록 등록을 고른 사람은 없었고(덜 받은 돈 알려 주기 7명, 출퇴근 기록 4명), 미니게임은 "안 쓸 것 같은 기능" 1위(6명)였습니다. 그래서 인터뷰에서 문구와 확인 번호를 직접 보여 주고 반응을 봅니다. 모집은 학과 · 동아리 단톡, 에브리타임, 그리고 오늘 이 자리(QR)입니다. 인터뷰 5명은 지인 중 지금 알바 중인 사람으로 11/3~11/9에 합니다. 결과는 사람 수로만 말하고 %는 30명 이상일 때만 씁니다. 당일 아침 응답이 더 늘었으면 결과 페이지(survey-results.html)의 숫자로 "지금은 N명"이라고 덧붙입니다. 강의실 인터넷이 되고 교수님 양해를 받으면 결과 페이지를 60초만 띄울 수 있습니다(자유 의견은 띄우지 않음). 1행은 의향을 묻는 것이라 한계가 있습니다. 실제로 넣는지는 인터뷰 때 앱을 설치하게 하고 급여일이 지난 뒤 따로 봅니다(기말 이후까지 걸릴 수 있음). 지인은 호의적으로 답하기 쉬워서 "넣겠다"를 그대로 믿지 않습니다.</a:t>
+              <a:t>박명진. 가설은 9월 기획서의 문장입니다. 표의 기준은 팀이 정한 목표이지 데이터가 아닙니다. 오른쪽 끝 칸이 10/26까지 받은 설문 13명의 중간 결과입니다(지금 알바 중 2 · 예전에 했음 10 · 한 적 없음 1, 지인 중심이라 정식 조사가 아닙니다). 매달 받은 금액을 넣겠다는 사람이 13명 중 11명("할 만하다" 4, "귀찮지만 할 것 같다" 7), 게임 화면 광고를 싫다고 한 사람은 4명이었습니다. 주 15시간 기준은 지금 알바 중인 응답자가 2명뿐이라 판단을 미룹니다. 요청 문구와 확인 번호는 인터뷰 문항이라 11월에 확인합니다. 문제 쪽도 확인됐습니다. 급여 때 "내 계산이 맞는지"가 걱정이라는 사람이 13명 중 8명, 통장 총액만 본다는 사람이 12명 중 7명입니다. 불리한 결과도 말합니다. 가장 쓸모 있는 기능으로 정산 요청 메시지와 기록 등록을 고른 사람은 없었고(덜 받은 돈 알려 주기 7명, 출퇴근 기록 4명), 미니게임은 "안 쓸 것 같은 기능" 1위(6명)였습니다. 그래서 인터뷰에서 문구와 확인 번호를 직접 보여 주고 반응을 봅니다. 모집은 학과 · 동아리 단톡, 에브리타임, 그리고 오늘 이 자리(QR)입니다. 인터뷰 5명은 지인 중 지금 알바 중인 사람으로 11/3~11/9에 합니다. 결과는 사람 수로만 말하고 %는 30명 이상일 때만 씁니다. 당일 아침 응답이 늘었으면 결과 페이지의 숫자로 "지금은 N명"이라고 덧붙입니다. 1행은 의향을 물은 것이라, 실제로 넣는지는 인터뷰 때 앱을 설치하게 하고 급여일 뒤에 따로 봅니다. 지인이라 호의적으로 답하기 쉬워서 "넣겠다"를 그대로 믿지 않습니다.</a:t>
             </a:r>
             <a:endParaRPr lang="en-US" dirty="0"/>
           </a:p>
@@ -1718,9 +1718,9 @@
           <a:p>
             <a:r>
               <a:rPr lang="en-US" dirty="0"/>
-              <a:t>팀장 마무리(20초): "저희가 여쭙고 싶은 것 두 가지입니다. 문서 유료화를 피하면서 가능한 수익 모델이 더 있을지, 그리고 설문 30명 · 인터뷰 5명이면 충분한지입니다. 질문받겠습니다." 이 장은 질의응답 내내 띄워 둡니다.
+              <a:t>팀장 마무리(25초): "처음 보여 드린 269,352원처럼, 통장만 봐서는 안 보이던 돈을 기록으로 꺼내는 것이 알바가드입니다. 저희가 여쭙고 싶은 것 두 가지입니다. 문서 유료화를 피하면서 가능한 수익 모델이 더 있을지, 그리고 설문 30명 · 인터뷰 5명이면 충분한지입니다. 질문받겠습니다." 이 장은 질의응답 내내 띄워 둡니다.
 예상 질문 (이름 붙은 사람이 먼저 답하고, 모자라면 팀장이 보탭니다. 답은 짧은 메모이니 말할 때는 "~습니다"로)
-· [이지훈] 법적 효력 있나? → 보장하지 않는다. 판단은 감독관 · 법원. 우리는 판단할 자료를 정리하고, 수정 이력과 확인 번호로 "나중에 고친 게 아니다"까지 보여 준다. 통장 내역 · 카톡과 함께 내야 한다고 앱에도 적어 뒀다.
+· [이지훈] 법적 효력 있나? → 보장하지 않는다. 판단은 감독관 · 법원. 우리는 판단할 자료를 정리하고, 수정 이력으로 무엇을 언제 왜 고쳤는지, 확인 번호로 그 번호가 언제 서버에 들어왔는지 보여 준다(내용과 맞춰 보는 방법은 기말까지). 통장 내역 · 카톡과 함께 내야 한다고 앱에도 적어 뒀다.
 · [이지훈] 서버는 여러분이 관리하는데 고치면 그만 아닌가? → 맞다. 공개키로는 넣기 · 읽기만 되고 시각은 서버가 찍는 것까지 확인했지만, 프로젝트 소유자 권한으로는 고칠 수 있다. 한계로 인정한다. 지금 막는 건 "사용자 본인이 나중에 고쳐 쓰기"까지. 운영자까지 못 고치게 하는 외부 공인 시점 확인은 비용 때문에 계획. 서버에는 번호만 있어서 운영자가 서버를 고쳐도 폰의 근무 내용 자체는 못 바꾼다. (확인 페이지에도 "앱에서 고치거나 지울 수 없음, 운영자 권한으로는 가능"이라고 적어 두었다)
 · [이지훈] 확인 번호가 그 기록에서 나온 건지 어떻게 아나? → 지금은 번호와 서버 등록 시각까지 보여 주고, 기록 내용에서 번호를 다시 계산해 맞춰 보는 방법은 기말까지 만든다(그래서 70%). 지금은 앱 · 백업 파일을 함께 봐야 한다.
 · [이지훈] 본인이 쓴 기록을 믿을 수 있나? → 거짓 기록은 막을 수 없다고 인정. 막는 건 "나중에 고쳐 쓰기". 영세 사업장은 기록이 없는 경우가 많아 알바생 기록이 거의 유일한 자료가 되기 쉽다. 사장에게는 임금대장 · 계약 서류 보존 의무가 있다(근로기준법 48 · 42조).
@@ -1740,7 +1740,7 @@
 · [이지훈] 코드는 누가 짰고 이해하고 있나? → (사실대로. 틀: 개발 도구로 AI 코딩 도우미를 썼다. 기능 범위 8개, 계산 규칙(주휴 · 야간 · 휴게시간 · 연도별 최저임금), 기록 구조(수정 이력, 삭제 흔적, 사유 없이는 저장 안 됨), 법적 문구 원칙은 팀장이 정하고 하나씩 확인하며 올렸다. 서버 권한은 2000년 시각과 수정 · 삭제 요청을 직접 보내 확인했다.)
 · [이지훈] 왜 Supabase인가? 설문은 서버에 두면서 근무 기록은 왜 안 두나? → 서버 코드 없이 REST로 표에 넣고 읽을 수 있고, 표 단위 권한(RLS)과 트리거로 "시각은 서버가 찍는다"를 걸 수 있어서다. 일주일 요청이 없으면 멈추는 단점은 알고 있다. 설문은 이름 없는 답 묶음이고 근무 기록은 근무지 · 시각 · 금액이라 민감도가 다르다. 권한 원칙은 두 표가 같다.
 · [이지훈] 폰을 바꾸거나 서비스가 없어지면 기록은? → 폰을 바꾸면 백업 파일로 옮긴다(설정 탭). 서비스가 없어져도 폰의 기록, 백업 파일, 저장해 둔 증빙 묶음 PDF는 사용자 손에 남는다. 이 문제를 푸는 것이 2차 구독(동기화 · 자동 백업)이다.
-· [이지훈] 개인정보는? 동의는? → 로그인이 없고 서버에는 이름 · 근무지 · 시각 · 금액이 가지 않는다. 가는 것은 확인 번호 · 기록 번호 · 무작위 기기 번호뿐이고, 무엇이 가는지 설정 탭에 적고 끌 수 있게 했다. 설문도 이름 · 연락처를 받지 않는다. 기록 내용을 밖으로 보내는 기능을 켜면 그때 안내와 동의가 필요하다.
+· [이지훈] 개인정보는? 동의는? → 로그인이 없고 서버에는 이름 · 근무지 · 시각 · 금액이 가지 않는다. 가는 것은 확인 번호 · 기록 번호 · 무작위 기기 번호뿐이고, 무엇이 가는지 설정 탭에 적고 끌 수 있게 했다. 설문도 이름 · 연락처를 받지 않는다. 기록 내용을 밖으로 보내는 기능을 켜면 그때 안내와 동의가 필요하다. 단, 등록 시각으로 기록한 때는 짐작할 수 있다(기기 번호는 무작위라 이름과 이어지지 않음).
 · [박명진] 왜 설문 30명 · 인터뷰 5명인가? → 9월 기획서는 인터뷰 10~15명이었다. 사람 수는 링크 설문으로 채우고, 앱을 써 보게 하는 20분 인터뷰는 7주 안에 셋이 할 수 있는 5명으로 줄였다. 충분한지는 마지막에 여쭙는 것 중 하나다.
 · [손유호] 설문에서 게임을 안 쓰겠다는 사람이 제일 많던데? → 맞다. 13명 중 6명이 "안 쓸 것 같은 기능"으로 골랐다. 광고 자체를 싫다는 사람은 4명이라 광고 자리는 남지만, 게임을 쓰는 사람이 적으면 광고도 약하다. 그래서 11/23에 설문 결과로 광고 실험과 새 게임 중 하나를 정하고, 게임은 설정에서 숨길 수 있게 해 두었다.
 · [이지훈] 기록 등록(확인 번호)을 쓸모 있다고 고른 사람이 없던데 차별점이 맞나? → 설문에서는 0명이었고, 안 쓸 것 같다는 사람도 1명뿐이었다. 덜 받은 상황에서 "나중에 지어낸 것 아니냐"는 말을 들을 때 쓸모가 생기는 기능이라 아직 와닿지 않는다고 본다. 인터뷰에서 그 상황을 설명하고 반응을 본다(검증 표 3행). 반응이 약하면 발표 · 홍보에서 앞세우는 순서를 다시 정한다.
@@ -1833,7 +1833,7 @@
           <a:p>
             <a:r>
               <a:rPr lang="en-US" dirty="0"/>
-              <a:t>팀장. "교수님이 아직 구현 전일 거라 하셨는데, 저희는 웹앱이라 빨리 만들 수 있어서, 화면을 먼저 만들고 그걸 보여 주며 묻는 순서를 택했습니다. 오늘 보여 드리는 건 완성품이 아니라 검증용 도구입니다." 설문은 지금까지 13명이 답했고, 앱을 직접 써 보게 하는 인터뷰는 11월에 합니다. 오른쪽 QR은 앱과 설문입니다. 설문은 이름을 받지 않고 3분이라, 들으시면서 답해 주셔도 됩니다. 역할은 개발 이지훈, 시장 · 수익 손유호, 검증 · 일정 박명진이고 발표도 그 순서입니다.</a:t>
+              <a:t>팀장. "교수님이 아직 구현 전일 거라 하셨는데, 저희는 웹앱이라 빨리 만들 수 있어서, 화면을 먼저 만들고 그걸 보여 주며 묻는 순서를 택했습니다. 오늘 보여 드리는 건 완성품이 아니라 검증용 도구입니다." 설문은 지금까지 13명이 답했고, 앱을 직접 써 보게 하는 인터뷰는 11월에 합니다. 오른쪽 QR은 앱과 설문입니다. 설문은 이름을 받지 않고 3분이라, 교수님께서 괜찮으시면 발표가 끝난 뒤 질의응답 시간에 답해 주셔도 됩니다. 역할은 개발 이지훈, 시장 · 수익 손유호, 검증 · 일정 박명진이고 발표도 그 순서입니다.</a:t>
             </a:r>
             <a:endParaRPr lang="en-US" dirty="0"/>
           </a:p>
@@ -1921,7 +1921,7 @@
           <a:p>
             <a:r>
               <a:rPr lang="en-US" dirty="0"/>
-              <a:t>타깃: 근로계약서가 없거나 사본이 없고, 통장 총액만 확인하고, 사장님께 말을 꺼내기 부담스러워하는 학생입니다. 주 15시간은 주휴수당이 생기는 선입니다. 문제 1: 수당 안내를 못 받는 경우가 많고 주휴 · 야간 계산 기준은 알기 어렵습니다. 계산기는 있어도 넣을 기록이 없습니다. 문제 2: 통장에 들어온 총액만 보고 넘어가고, 계약서가 없어 시급도 증명하기 어렵습니다. 문제 3: 관계 걱정, 작은 금액, 근거 없음이 겹치고, 메모장 기록은 "나중에 지어낸 것 아니냐?" 한마디에 무너집니다. 세 문제를 숫자로 보여 줍니다. 모두 알바천국 설문이라 "플랫폼 설문"이라는 점을 말하고, 그래서 우리도 직접 설문을 돌리고 있다고 잇습니다. 33.2%는 노동절 수당 안내에 대한 숫자라 "노동절 수당조차 안내받지 못하는 경우가 있다"까지만 말하고, 우리 설문(13명)에서도 주휴 · 야간 계산에 자신 있다는 사람은 4명뿐이었다고 덧붙입니다.</a:t>
+              <a:t>타깃: 근로계약서가 없거나 사본이 없고, 통장 총액만 확인하고, 사장님께 말을 꺼내기 부담스러워하는 학생입니다. 주 15시간은 주휴수당이 생기는 선입니다. 문제 1: 수당 안내를 못 받는 경우가 많고 주휴 · 야간 계산 기준은 알기 어렵습니다. 계산기는 있어도 넣을 기록이 없습니다. 문제 2: 통장에 들어온 총액만 보고 넘어가고, 계약서가 없어 시급도 증명하기 어렵습니다. 문제 3: 관계 걱정, 작은 금액, 근거 없음이 겹치고, 메모장 기록은 "나중에 지어낸 것 아니냐?" 한마디에 무너집니다. 세 문제를 숫자로 보여 줍니다. 모두 알바천국 설문이라 "플랫폼 설문"이라는 점을 말하고, 그래서 우리도 직접 설문을 돌리고 있다고 잇습니다. 33.2%는 노동절 수당 안내에 대한 숫자라 "노동절 수당조차 안내받지 못하는 경우가 있다"까지만 말하고, 우리 설문(13명)에서도 주휴 · 야간 계산에 자신 있다는 사람은 4명뿐이었다고 덧붙입니다. 48.0%는 알아챈 사람만 센 숫자라, "알아채기 어렵다"의 근거로는 저희 설문에서 통장 총액만 본다는 12명 중 7명을 같이 말씀드립니다.</a:t>
             </a:r>
             <a:endParaRPr lang="en-US" dirty="0"/>
           </a:p>
@@ -2361,7 +2361,7 @@
           <a:p>
             <a:r>
               <a:rPr lang="en-US" dirty="0"/>
-              <a:t>상자를 풀면: 화면은 근무 기록 · 캘린더 · 급여 비교 · 정산 요청 · 설정, 계산 모듈은 급여(주휴 · 야간) · 예정 vs 실제 · 요청 문구 · PDF · 확인 번호, 저장은 localStorage(기록 · 수정 이력)와 IndexedDB(사진)입니다. 왼쪽 폰 안에서 모든 계산이 끝나고, 서버로 가는 건 확인 번호 · 기록 번호 · 무작위 기기 번호뿐입니다. 기기 번호는 처음 기록을 등록할 때 앱이 만든 난수라 휴대전화 번호가 아닙니다. 앱이 쓰는 공개키로는 넣기와 읽기만 되고, 직접 요청을 보내 확인했습니다. 2000년 시각을 보내도 서버 시각으로 들어가고, 수정 · 삭제는 401로 거부됩니다. 다만 운영자 권한으로는 고칠 수 있어서, 지금 막는 건 "사용자가 나중에 고쳐 쓰기"까지입니다. 운영자까지 못 고치게 하는 외부 시점 확인은 비용 때문에 계획입니다. 오른쪽은 기록 하나가 남을 때의 흐름입니다. 증빙 묶음 PDF 7번 표에 기록별 확인 번호와 등록 시각이 들어가고, 확인 페이지는 앱 데이터 없이 동작합니다. 지금 답하고 계신 설문도 같은 서버의 survey 표로 가고, 권한 원칙이 같습니다.</a:t>
+              <a:t>왼쪽 폰 안에서 모든 계산이 끝나고, 서버로 가는 건 확인 번호 · 기록 번호 · 무작위 기기 번호뿐입니다. 기기 번호는 처음 기록을 등록할 때 앱이 만든 난수라 휴대전화 번호가 아닙니다. 다만 출근 · 퇴근을 누를 때 바로 등록되므로, 등록 시각을 보면 언제쯤 기록했는지는 서버에서도 짐작할 수 있습니다. 기기 번호는 무작위라 이름과 이어지지는 않습니다. 앱이 쓰는 공개키로는 넣기와 읽기만 되고, 직접 요청을 보내 확인했습니다. 2000년 시각을 보내도 서버 시각으로 들어가고, 수정 · 삭제는 401로 거부됩니다. 다만 운영자 권한으로는 고칠 수 있어서, 지금 막는 건 "사용자가 나중에 고쳐 쓰기"까지입니다. 운영자까지 못 고치게 하는 외부 시점 확인은 비용 때문에 계획입니다. 오른쪽은 기록 하나가 남을 때의 흐름입니다. 증빙 묶음 PDF 7번 표에 기록별 확인 번호와 등록 시각이 들어가고, 확인 페이지는 앱 데이터 없이 동작합니다. 지금 답하고 계신 설문도 같은 서버의 survey 표로 가고, 권한 원칙이 같습니다.</a:t>
             </a:r>
             <a:endParaRPr lang="en-US" dirty="0"/>
           </a:p>
@@ -9945,6 +9945,20 @@
                             <a:srgbClr val="5D636D"/>
                           </a:solidFill>
                         </a:rPr>
+                        <a:t>가장 쓸모 0명</a:t>
+                      </a:r>
+                      <a:endParaRPr lang="en-US" sz="1100" dirty="0"/>
+                    </a:p>
+                    <a:p>
+                      <a:pPr indent="0" marL="0">
+                        <a:buNone/>
+                      </a:pPr>
+                      <a:r>
+                        <a:rPr lang="en-US" sz="1100" dirty="0">
+                          <a:solidFill>
+                            <a:srgbClr val="5D636D"/>
+                          </a:solidFill>
+                        </a:rPr>
                         <a:t>11월 인터뷰</a:t>
                       </a:r>
                       <a:endParaRPr lang="en-US" sz="1100" dirty="0"/>
@@ -10179,6 +10193,20 @@
                             <a:srgbClr val="5D636D"/>
                           </a:solidFill>
                         </a:rPr>
+                        <a:t>가장 쓸모 0명</a:t>
+                      </a:r>
+                      <a:endParaRPr lang="en-US" sz="1100" dirty="0"/>
+                    </a:p>
+                    <a:p>
+                      <a:pPr indent="0" marL="0">
+                        <a:buNone/>
+                      </a:pPr>
+                      <a:r>
+                        <a:rPr lang="en-US" sz="1100" dirty="0">
+                          <a:solidFill>
+                            <a:srgbClr val="5D636D"/>
+                          </a:solidFill>
+                        </a:rPr>
                         <a:t>11월 인터뷰</a:t>
                       </a:r>
                       <a:endParaRPr lang="en-US" sz="1100" dirty="0"/>
@@ -10651,6 +10679,20 @@
                       </a:r>
                       <a:endParaRPr lang="en-US" sz="1100" dirty="0"/>
                     </a:p>
+                    <a:p>
+                      <a:pPr indent="0" marL="0">
+                        <a:buNone/>
+                      </a:pPr>
+                      <a:r>
+                        <a:rPr lang="en-US" sz="1100" b="1" dirty="0">
+                          <a:solidFill>
+                            <a:srgbClr val="0F7A55"/>
+                          </a:solidFill>
+                        </a:rPr>
+                        <a:t>안 쓸 기능 1위(6명)</a:t>
+                      </a:r>
+                      <a:endParaRPr lang="en-US" sz="1100" dirty="0"/>
+                    </a:p>
                   </a:txBody>
                   <a:tcPr marL="73152" marR="73152" marT="18288" marB="18288" anchor="ctr">
                     <a:lnL w="6350" cap="flat" cmpd="sng" algn="ctr">
@@ -15590,7 +15632,7 @@
                   <a:schemeClr val="accent5"/>
                 </a:solidFill>
               </a:rPr>
-              <a:t>들으면서 답해도 됨</a:t>
+              <a:t>발표 뒤 답해도 됨</a:t>
             </a:r>
             <a:endParaRPr lang="en-US" sz="900" dirty="0"/>
           </a:p>
@@ -16197,6 +16239,20 @@
                 </a:solidFill>
               </a:rPr>
               <a:t>알바생 2,457명, 알바천국 2025.1</a:t>
+            </a:r>
+            <a:endParaRPr lang="en-US" sz="850" dirty="0"/>
+          </a:p>
+          <a:p>
+            <a:pPr indent="0" marL="0">
+              <a:buNone/>
+            </a:pPr>
+            <a:r>
+              <a:rPr lang="en-US" sz="850" dirty="0">
+                <a:solidFill>
+                  <a:schemeClr val="accent5"/>
+                </a:solidFill>
+              </a:rPr>
+              <a:t>우리 설문: 통장 총액만 봄 12명 중 7명</a:t>
             </a:r>
             <a:endParaRPr lang="en-US" sz="850" dirty="0"/>
           </a:p>

--- a/docs/06_중간발표_PPT.pptx
+++ b/docs/06_중간발표_PPT.pptx
@@ -125,31 +125,31 @@
   <p:extLst>
     <p:ext uri="{521415D9-36F7-43E2-AB2F-B90AF26B5E84}">
       <p14:sectionLst xmlns:p14="http://schemas.microsoft.com/office/powerpoint/2010/main">
-        <p14:section name="① 표지·팀 소개" id="{fb51b58e-5a95-957b-d906-8efba4e9594b}">
+        <p14:section name="① 표지·팀 소개" id="{72c38253-11b5-8a02-c52b-904c9c0f9c92}">
           <p14:sldIdLst>
             <p14:sldId id="256"/>
             <p14:sldId id="257"/>
           </p14:sldIdLst>
         </p14:section>
-        <p14:section name="② 문제 정의" id="{9d5ee7d8-1c06-72a8-208d-a6b81074feb5}">
+        <p14:section name="② 문제 정의" id="{030643e4-edf9-6a1c-f572-d4586aee0572}">
           <p14:sldIdLst>
             <p14:sldId id="258"/>
             <p14:sldId id="259"/>
           </p14:sldIdLst>
         </p14:section>
-        <p14:section name="③ 솔루션·핵심 가치" id="{adada2f1-1849-0604-6007-fd5fd350fc1d}">
+        <p14:section name="③ 솔루션·핵심 가치" id="{6c2b4ac5-2ffd-2ed1-41f0-6ecfd01392e8}">
           <p14:sldIdLst>
             <p14:sldId id="260"/>
             <p14:sldId id="261"/>
           </p14:sldIdLst>
         </p14:section>
-        <p14:section name="④ SW 기술 아키텍처" id="{280e737a-040d-c1f0-ba50-9734faa5d6cb}">
+        <p14:section name="④ SW 기술 아키텍처" id="{726faa72-4081-5457-bd47-6fb572f60d1a}">
           <p14:sldIdLst>
             <p14:sldId id="262"/>
             <p14:sldId id="263"/>
           </p14:sldIdLst>
         </p14:section>
-        <p14:section name="⑤ 개발 현황·MVP 시연" id="{5d998bcc-f1f4-913f-b75f-8495cb61814b}">
+        <p14:section name="⑤ 개발 현황·MVP 시연" id="{34d1e676-1394-2b82-1866-99d92dd020e6}">
           <p14:sldIdLst>
             <p14:sldId id="264"/>
             <p14:sldId id="265"/>
@@ -157,19 +157,19 @@
             <p14:sldId id="267"/>
           </p14:sldIdLst>
         </p14:section>
-        <p14:section name="⑥ 시장 분석·비즈니스 모델" id="{c4443a6a-9514-be46-ac57-48621fe16379}">
+        <p14:section name="⑥ 시장 분석·비즈니스 모델" id="{8af87b27-3d29-e2b9-6e95-4ee8ca170e19}">
           <p14:sldIdLst>
             <p14:sldId id="268"/>
             <p14:sldId id="269"/>
             <p14:sldId id="270"/>
           </p14:sldIdLst>
         </p14:section>
-        <p14:section name="⑦ 초기 시장 검증" id="{955c16f8-a62c-c270-b425-1b9a349ae3b2}">
+        <p14:section name="⑦ 초기 시장 검증" id="{295fff2b-341a-fac1-0d00-ba3febe59557}">
           <p14:sldIdLst>
             <p14:sldId id="271"/>
           </p14:sldIdLst>
         </p14:section>
-        <p14:section name="⑧ 향후 계획·팀 역량" id="{a29615aa-1c28-8adb-a057-bd64f92c3bf8}">
+        <p14:section name="⑧ 향후 계획·팀 역량" id="{e6ec1c08-a621-2b69-a295-866ae37dafef}">
           <p14:sldIdLst>
             <p14:sldId id="272"/>
             <p14:sldId id="273"/>
@@ -17062,7 +17062,21 @@
                             <a:srgbClr val="5D636D"/>
                           </a:solidFill>
                         </a:rPr>
-                        <a:t>알바천국 · 알바몬 계산기</a:t>
+                        <a:t>알바천국 ·</a:t>
+                      </a:r>
+                      <a:endParaRPr lang="en-US" sz="950" dirty="0"/>
+                    </a:p>
+                    <a:p>
+                      <a:pPr algn="ctr" indent="0" marL="0">
+                        <a:buNone/>
+                      </a:pPr>
+                      <a:r>
+                        <a:rPr lang="en-US" sz="950" b="1" dirty="0">
+                          <a:solidFill>
+                            <a:srgbClr val="5D636D"/>
+                          </a:solidFill>
+                        </a:rPr>
+                        <a:t>알바몬 계산기</a:t>
                       </a:r>
                       <a:endParaRPr lang="en-US" sz="950" dirty="0"/>
                     </a:p>
@@ -17123,7 +17137,21 @@
                             <a:srgbClr val="5D636D"/>
                           </a:solidFill>
                         </a:rPr>
-                        <a:t>진정24 · 노동포털</a:t>
+                        <a:t>진정24 ·</a:t>
+                      </a:r>
+                      <a:endParaRPr lang="en-US" sz="950" dirty="0"/>
+                    </a:p>
+                    <a:p>
+                      <a:pPr algn="ctr" indent="0" marL="0">
+                        <a:buNone/>
+                      </a:pPr>
+                      <a:r>
+                        <a:rPr lang="en-US" sz="950" b="1" dirty="0">
+                          <a:solidFill>
+                            <a:srgbClr val="5D636D"/>
+                          </a:solidFill>
+                        </a:rPr>
+                        <a:t>노동포털</a:t>
                       </a:r>
                       <a:endParaRPr lang="en-US" sz="950" dirty="0"/>
                     </a:p>
@@ -17427,7 +17455,7 @@
                         <a:buNone/>
                       </a:pPr>
                       <a:r>
-                        <a:rPr lang="en-US" sz="800" dirty="0">
+                        <a:rPr lang="en-US" sz="900" dirty="0">
                           <a:solidFill>
                             <a:srgbClr val="5D636D"/>
                           </a:solidFill>
@@ -17907,7 +17935,7 @@
                         <a:buNone/>
                       </a:pPr>
                       <a:r>
-                        <a:rPr lang="en-US" sz="800" dirty="0">
+                        <a:rPr lang="en-US" sz="900" dirty="0">
                           <a:solidFill>
                             <a:srgbClr val="5D636D"/>
                           </a:solidFill>
@@ -18034,7 +18062,7 @@
                         <a:buNone/>
                       </a:pPr>
                       <a:r>
-                        <a:rPr lang="en-US" sz="800" dirty="0">
+                        <a:rPr lang="en-US" sz="900" dirty="0">
                           <a:solidFill>
                             <a:srgbClr val="5D636D"/>
                           </a:solidFill>
@@ -18809,7 +18837,7 @@
                         <a:buNone/>
                       </a:pPr>
                       <a:r>
-                        <a:rPr lang="en-US" sz="800" dirty="0">
+                        <a:rPr lang="en-US" sz="900" dirty="0">
                           <a:solidFill>
                             <a:srgbClr val="5D636D"/>
                           </a:solidFill>
@@ -18999,7 +19027,7 @@
                         <a:buNone/>
                       </a:pPr>
                       <a:r>
-                        <a:rPr lang="en-US" sz="800" dirty="0">
+                        <a:rPr lang="en-US" sz="900" dirty="0">
                           <a:solidFill>
                             <a:srgbClr val="5D636D"/>
                           </a:solidFill>
@@ -19711,7 +19739,7 @@
                         <a:buNone/>
                       </a:pPr>
                       <a:r>
-                        <a:rPr lang="en-US" sz="800" dirty="0">
+                        <a:rPr lang="en-US" sz="900" dirty="0">
                           <a:solidFill>
                             <a:srgbClr val="5D636D"/>
                           </a:solidFill>
@@ -23659,7 +23687,7 @@
         <p:spPr>
           <a:xfrm>
             <a:off x="6144768" y="3429000"/>
-            <a:ext cx="914400" cy="274320"/>
+            <a:ext cx="1005840" cy="274320"/>
           </a:xfrm>
           <a:prstGeom prst="rect">
             <a:avLst/>
@@ -23675,14 +23703,14 @@
               <a:buNone/>
             </a:pPr>
             <a:r>
-              <a:rPr lang="en-US" sz="850" dirty="0">
+              <a:rPr lang="en-US" sz="900" dirty="0">
                 <a:solidFill>
                   <a:schemeClr val="tx2"/>
                 </a:solidFill>
               </a:rPr>
               <a:t>등록 시각 조회</a:t>
             </a:r>
-            <a:endParaRPr lang="en-US" sz="850" dirty="0"/>
+            <a:endParaRPr lang="en-US" sz="900" dirty="0"/>
           </a:p>
         </p:txBody>
       </p:sp>

--- a/docs/06_중간발표_PPT.pptx
+++ b/docs/06_중간발표_PPT.pptx
@@ -125,31 +125,31 @@
   <p:extLst>
     <p:ext uri="{521415D9-36F7-43E2-AB2F-B90AF26B5E84}">
       <p14:sectionLst xmlns:p14="http://schemas.microsoft.com/office/powerpoint/2010/main">
-        <p14:section name="① 표지·팀 소개" id="{72c38253-11b5-8a02-c52b-904c9c0f9c92}">
+        <p14:section name="① 표지·팀 소개" id="{b334472c-d47f-1125-54d8-0926bd9a2d88}">
           <p14:sldIdLst>
             <p14:sldId id="256"/>
             <p14:sldId id="257"/>
           </p14:sldIdLst>
         </p14:section>
-        <p14:section name="② 문제 정의" id="{030643e4-edf9-6a1c-f572-d4586aee0572}">
+        <p14:section name="② 문제 정의" id="{7ee5264c-0603-768b-8839-bfb9c3dbaa0d}">
           <p14:sldIdLst>
             <p14:sldId id="258"/>
             <p14:sldId id="259"/>
           </p14:sldIdLst>
         </p14:section>
-        <p14:section name="③ 솔루션·핵심 가치" id="{6c2b4ac5-2ffd-2ed1-41f0-6ecfd01392e8}">
+        <p14:section name="③ 솔루션·핵심 가치" id="{b1879bb0-104f-d8c4-be83-21d101eecf0d}">
           <p14:sldIdLst>
             <p14:sldId id="260"/>
             <p14:sldId id="261"/>
           </p14:sldIdLst>
         </p14:section>
-        <p14:section name="④ SW 기술 아키텍처" id="{726faa72-4081-5457-bd47-6fb572f60d1a}">
+        <p14:section name="④ SW 기술 아키텍처" id="{dda6699a-82cd-96a4-692c-4f384b13e956}">
           <p14:sldIdLst>
             <p14:sldId id="262"/>
             <p14:sldId id="263"/>
           </p14:sldIdLst>
         </p14:section>
-        <p14:section name="⑤ 개발 현황·MVP 시연" id="{34d1e676-1394-2b82-1866-99d92dd020e6}">
+        <p14:section name="⑤ 개발 현황·MVP 시연" id="{885d4f33-31f6-56ef-c355-f0efe6172902}">
           <p14:sldIdLst>
             <p14:sldId id="264"/>
             <p14:sldId id="265"/>
@@ -157,19 +157,19 @@
             <p14:sldId id="267"/>
           </p14:sldIdLst>
         </p14:section>
-        <p14:section name="⑥ 시장 분석·비즈니스 모델" id="{8af87b27-3d29-e2b9-6e95-4ee8ca170e19}">
+        <p14:section name="⑥ 시장 분석·비즈니스 모델" id="{ef060a24-4dd6-4a62-94f5-6ffa7a0b8658}">
           <p14:sldIdLst>
             <p14:sldId id="268"/>
             <p14:sldId id="269"/>
             <p14:sldId id="270"/>
           </p14:sldIdLst>
         </p14:section>
-        <p14:section name="⑦ 초기 시장 검증" id="{295fff2b-341a-fac1-0d00-ba3febe59557}">
+        <p14:section name="⑦ 초기 시장 검증" id="{78b80d4e-656c-a8d8-5f4b-f33789ae5318}">
           <p14:sldIdLst>
             <p14:sldId id="271"/>
           </p14:sldIdLst>
         </p14:section>
-        <p14:section name="⑧ 향후 계획·팀 역량" id="{e6ec1c08-a621-2b69-a295-866ae37dafef}">
+        <p14:section name="⑧ 향후 계획·팀 역량" id="{ea342422-42b2-ed68-8a6d-916dc538d0f7}">
           <p14:sldIdLst>
             <p14:sldId id="272"/>
             <p14:sldId id="273"/>
@@ -1726,7 +1726,7 @@
 · [이지훈] 본인이 쓴 기록을 믿을 수 있나? → 거짓 기록은 막을 수 없다고 인정. 막는 건 "나중에 고쳐 쓰기". 영세 사업장은 기록이 없는 경우가 많아 알바생 기록이 거의 유일한 자료가 되기 쉽다. 사장에게는 임금대장 · 계약 서류 보존 의무가 있다(근로기준법 48 · 42조).
 · [이지훈] 앱 계산이 틀리면 분쟁이 커지는 것 아닌가? 책임은? → 계산을 단정으로 내놓지 않는다. 항목별 · 주별 이유를 펼쳐 보여 주고, 안 넣은 것(연장근로 가산)과 유리하게 본 것(합의 휴무)은 화면에 적었다. 1단계 문구는 청구서가 아니라 "제가 계산을 잘 몰라서 여쭤본다"라는 확인 요청. 법률 자문 아님을 적어 두었고 1350 확인을 안내한다.
 · [이지훈] 고객 검증도 전에 왜 먼저 만들었나? → 지적은 맞다. 다만 링크로 배포되는 웹앱이라 빨리 만들 수 있었고, 말로 설명하기보다 화면을 보여 주며 물어야 정확한 답을 듣는다고 봤다. 9월 경쟁 앱 리뷰로 빈자리를 확인하고 10/13 정의서로 범위를 8개로 잘랐다. 설문에 캡처 3장을 넣고 "실제로 있다면 쓰겠나"를 물었더니 13명 중 "안 쓴다"는 0명이었다. 12/7까지는 고치는 기간.
-· [박명진] 받은 금액을 매달 직접 넣어야 하는데 넣을까? → 가장 큰 가설이라 검증 표 첫 줄. 설문에서는 13명 중 11명이 넣겠다고 했지만 의향이라 인터뷰와 급여일 뒤 실제 입력으로 다시 본다. 첫 화면에서 "9월 급여 받으셨나요?"라고 묻고 넣는 순간 덜 받은 돈이 보이게 했다. 5명 중 3명이 아니면 자동 인식을 앞당긴다.
+· [박명진] 받은 금액을 매달 직접 넣어야 하는데 넣을까? → 가장 큰 가설이라 검증표 첫 줄. 설문에서는 13명 중 11명이 넣겠다고 했지만 의향이라 인터뷰와 급여일 뒤 실제 입력으로 다시 본다. 첫 화면에서 "9월 급여 받으셨나요?"라고 묻고 넣는 순간 덜 받은 돈이 보이게 했다. 5명 중 3명이 아니면 자동 인식을 앞당긴다.
 · [이지훈] 하우머치가 따라 하면? → 비교 기능은 따라올 수 있다. 확인 번호를 서버에 넣는 기술 자체도 어렵지 않다고 인정한다. 어려운 것은 그 번호가 뜻이 있게 기록 구조를 짜는 일이다. 사유 없이 못 고치고, 삭제도 흔적이 남고, 고칠 때마다 다시 등록돼야 "몇 번 고쳤나"가 보인다. 기존 앱이 따라오려면 기록을 마음대로 고치던 방식을 바꿔야 해서 쉽게 따라오지 않는다고 본다. 그래도 따라오면 요청 · 증빙까지 잇는 흐름으로 간다. 우리도 "내용으로 번호 다시 계산"이 남아 70%다.
 · [손유호] 급여 앱에 게임이 왜? 근무 중에 게임을 권하나? → 출퇴근은 일하는 날마다 누르지만, 돈을 확인하는 건 급여일에 한 번이라, 그 사이에도 앱을 열 이유로 넣은 것. 처음엔 근무 중에만이었는데 팀원 의견으로 10/25 조건을 풀고 설정에서 숨길 수 있게 했다. 게임 기록은 문서에 안 섞인다. 안 되면 게임을 빼도 기록 → 비교 → 요청은 그대로.
 · [박명진] 같은 과 학생 설문이 무슨 의미? 편향 아닌가? → 맞다. "정식 조사 아님"을 적고 사람 수로만 말한다. 중복 응답도 막지 않았다(이름 · 기기 정보를 안 받는 대가). 11월 30명은 학과 밖(동아리 · 에브리타임)까지 넓혀 모으고, 인터뷰 5명으로 이유를 듣는다.
@@ -1740,10 +1740,10 @@
 · [이지훈] 코드는 누가 짰고 이해하고 있나? → (사실대로. 틀: 개발 도구로 AI 코딩 도우미를 썼다. 기능 범위 8개, 계산 규칙(주휴 · 야간 · 휴게시간 · 연도별 최저임금), 기록 구조(수정 이력, 삭제 흔적, 사유 없이는 저장 안 됨), 법적 문구 원칙은 팀장이 정하고 하나씩 확인하며 올렸다. 서버 권한은 2000년 시각과 수정 · 삭제 요청을 직접 보내 확인했다.)
 · [이지훈] 왜 Supabase인가? 설문은 서버에 두면서 근무 기록은 왜 안 두나? → 서버 코드 없이 REST로 표에 넣고 읽을 수 있고, 표 단위 권한(RLS)과 트리거로 "시각은 서버가 찍는다"를 걸 수 있어서다. 일주일 요청이 없으면 멈추는 단점은 알고 있다. 설문은 이름 없는 답 묶음이고 근무 기록은 근무지 · 시각 · 금액이라 민감도가 다르다. 권한 원칙은 두 표가 같다.
 · [이지훈] 폰을 바꾸거나 서비스가 없어지면 기록은? → 폰을 바꾸면 백업 파일로 옮긴다(설정 탭). 서비스가 없어져도 폰의 기록, 백업 파일, 저장해 둔 증빙 묶음 PDF는 사용자 손에 남는다. 이 문제를 푸는 것이 2차 구독(동기화 · 자동 백업)이다.
-· [이지훈] 개인정보는? 동의는? → 로그인이 없고 서버에는 이름 · 근무지 · 시각 · 금액이 가지 않는다. 가는 것은 확인 번호 · 기록 번호 · 무작위 기기 번호뿐이고, 무엇이 가는지 설정 탭에 적고 끌 수 있게 했다. 설문도 이름 · 연락처를 받지 않는다. 기록 내용을 밖으로 보내는 기능을 켜면 그때 안내와 동의가 필요하다. 단, 등록 시각으로 기록한 때는 짐작할 수 있다(기기 번호는 무작위라 이름과 이어지지 않음).
+· [이지훈] 개인정보는? 동의는? → 로그인이 없고 서버에는 이름 · 근무지 · 시각 · 금액이 가지 않는다. 가는 것은 확인 번호 · 기록 번호 · 무작위 기기 번호뿐이고, 무엇이 가는지 설정 탭에 적고 끌 수 있게 했다. 설문도 이름 · 연락처를 받지 않는다. 기록 내용을 밖으로 보내는 기능을 켜면 그때 안내와 동의가 필요하다. 단, 등록 시각으로 언제 기록했는지는 짐작할 수 있다(기기 번호는 무작위라 이름과 이어지지 않음).
 · [박명진] 왜 설문 30명 · 인터뷰 5명인가? → 9월 기획서는 인터뷰 10~15명이었다. 사람 수는 링크 설문으로 채우고, 앱을 써 보게 하는 20분 인터뷰는 7주 안에 셋이 할 수 있는 5명으로 줄였다. 충분한지는 마지막에 여쭙는 것 중 하나다.
 · [손유호] 설문에서 게임을 안 쓰겠다는 사람이 제일 많던데? → 맞다. 13명 중 6명이 "안 쓸 것 같은 기능"으로 골랐다. 광고 자체를 싫다는 사람은 4명이라 광고 자리는 남지만, 게임을 쓰는 사람이 적으면 광고도 약하다. 그래서 11/23에 설문 결과로 광고 실험과 새 게임 중 하나를 정하고, 게임은 설정에서 숨길 수 있게 해 두었다.
-· [이지훈] 기록 등록(확인 번호)을 쓸모 있다고 고른 사람이 없던데 차별점이 맞나? → 설문에서는 0명이었고, 안 쓸 것 같다는 사람도 1명뿐이었다. 덜 받은 상황에서 "나중에 지어낸 것 아니냐"는 말을 들을 때 쓸모가 생기는 기능이라 아직 와닿지 않는다고 본다. 인터뷰에서 그 상황을 설명하고 반응을 본다(검증 표 3행). 반응이 약하면 발표 · 홍보에서 앞세우는 순서를 다시 정한다.
+· [이지훈] 기록 등록(확인 번호)을 쓸모 있다고 고른 사람이 없던데 차별점이 맞나? → 설문에서는 0명이었고, 안 쓸 것 같다는 사람도 1명뿐이었다. 덜 받은 상황에서 "나중에 지어낸 것 아니냐"라는 말을 들을 때 쓸모가 생기는 기능이라 아직 와닿지 않는다고 본다. 인터뷰에서 그 상황을 설명하고 반응을 본다(검증표 3행). 반응이 약하면 발표 · 홍보에서 앞세우는 순서를 다시 정한다.
 · [손유호] 광고 수익이 생기면 "무료라서 괜찮다"가 깨지지 않나? → 광고는 게임 화면에만 나오고 문서 기능과 떼어 놓았다. 문서를 만든 대가로 받는 돈이 아니게 구조를 잡은 것이다. 다만 웹 조사 기준 판단이고 전문가 검토는 아니다.
 · [박명진 → 손유호 순으로 각자] 팀원은 뭘 했나? → 개발은 이지훈. 손유호는 수업 시간의 계획서 일부를 썼고(내용은 팀장이 반영), 앞으로 시장 · 설문 · 인터뷰 3명. 박명진은 지금까지 의견을 낸 정도이고, 앞으로 인터뷰 2명 · 갤럭시 테스트 · 일정 · 보고서 편집.</a:t>
             </a:r>

--- a/docs/06_중간발표_PPT.pptx
+++ b/docs/06_중간발표_PPT.pptx
@@ -125,31 +125,31 @@
   <p:extLst>
     <p:ext uri="{521415D9-36F7-43E2-AB2F-B90AF26B5E84}">
       <p14:sectionLst xmlns:p14="http://schemas.microsoft.com/office/powerpoint/2010/main">
-        <p14:section name="① 표지·팀 소개" id="{b334472c-d47f-1125-54d8-0926bd9a2d88}">
+        <p14:section name="① 표지·팀 소개" id="{1a9d35b9-a985-d17c-b8b6-007cea92870d}">
           <p14:sldIdLst>
             <p14:sldId id="256"/>
             <p14:sldId id="257"/>
           </p14:sldIdLst>
         </p14:section>
-        <p14:section name="② 문제 정의" id="{7ee5264c-0603-768b-8839-bfb9c3dbaa0d}">
+        <p14:section name="② 문제 정의" id="{3e2535c3-b866-b8c3-2453-5802419064c2}">
           <p14:sldIdLst>
             <p14:sldId id="258"/>
             <p14:sldId id="259"/>
           </p14:sldIdLst>
         </p14:section>
-        <p14:section name="③ 솔루션·핵심 가치" id="{b1879bb0-104f-d8c4-be83-21d101eecf0d}">
+        <p14:section name="③ 솔루션·핵심 가치" id="{656ffe6b-08ee-451b-64af-375c4fbf0f82}">
           <p14:sldIdLst>
             <p14:sldId id="260"/>
             <p14:sldId id="261"/>
           </p14:sldIdLst>
         </p14:section>
-        <p14:section name="④ SW 기술 아키텍처" id="{dda6699a-82cd-96a4-692c-4f384b13e956}">
+        <p14:section name="④ SW 기술 아키텍처" id="{0c897d08-2df4-e7d2-00f4-dab724a36756}">
           <p14:sldIdLst>
             <p14:sldId id="262"/>
             <p14:sldId id="263"/>
           </p14:sldIdLst>
         </p14:section>
-        <p14:section name="⑤ 개발 현황·MVP 시연" id="{885d4f33-31f6-56ef-c355-f0efe6172902}">
+        <p14:section name="⑤ 개발 현황·MVP 시연" id="{a8c64c2d-c1cb-d779-18b7-a64c7adb2faa}">
           <p14:sldIdLst>
             <p14:sldId id="264"/>
             <p14:sldId id="265"/>
@@ -157,19 +157,19 @@
             <p14:sldId id="267"/>
           </p14:sldIdLst>
         </p14:section>
-        <p14:section name="⑥ 시장 분석·비즈니스 모델" id="{ef060a24-4dd6-4a62-94f5-6ffa7a0b8658}">
+        <p14:section name="⑥ 시장 분석·비즈니스 모델" id="{94ce352d-9ef0-40a6-4eb7-4408bf35944d}">
           <p14:sldIdLst>
             <p14:sldId id="268"/>
             <p14:sldId id="269"/>
             <p14:sldId id="270"/>
           </p14:sldIdLst>
         </p14:section>
-        <p14:section name="⑦ 초기 시장 검증" id="{78b80d4e-656c-a8d8-5f4b-f33789ae5318}">
+        <p14:section name="⑦ 초기 시장 검증" id="{b01d13a2-6358-03d1-11b2-fdcccd8d1077}">
           <p14:sldIdLst>
             <p14:sldId id="271"/>
           </p14:sldIdLst>
         </p14:section>
-        <p14:section name="⑧ 향후 계획·팀 역량" id="{ea342422-42b2-ed68-8a6d-916dc538d0f7}">
+        <p14:section name="⑧ 향후 계획·팀 역량" id="{267a8146-db8d-a02e-f4b9-be411b64343b}">
           <p14:sldIdLst>
             <p14:sldId id="272"/>
             <p14:sldId id="273"/>
@@ -1740,7 +1740,7 @@
 · [이지훈] 코드는 누가 짰고 이해하고 있나? → (사실대로. 틀: 개발 도구로 AI 코딩 도우미를 썼다. 기능 범위 8개, 계산 규칙(주휴 · 야간 · 휴게시간 · 연도별 최저임금), 기록 구조(수정 이력, 삭제 흔적, 사유 없이는 저장 안 됨), 법적 문구 원칙은 팀장이 정하고 하나씩 확인하며 올렸다. 서버 권한은 2000년 시각과 수정 · 삭제 요청을 직접 보내 확인했다.)
 · [이지훈] 왜 Supabase인가? 설문은 서버에 두면서 근무 기록은 왜 안 두나? → 서버 코드 없이 REST로 표에 넣고 읽을 수 있고, 표 단위 권한(RLS)과 트리거로 "시각은 서버가 찍는다"를 걸 수 있어서다. 일주일 요청이 없으면 멈추는 단점은 알고 있다. 설문은 이름 없는 답 묶음이고 근무 기록은 근무지 · 시각 · 금액이라 민감도가 다르다. 권한 원칙은 두 표가 같다.
 · [이지훈] 폰을 바꾸거나 서비스가 없어지면 기록은? → 폰을 바꾸면 백업 파일로 옮긴다(설정 탭). 서비스가 없어져도 폰의 기록, 백업 파일, 저장해 둔 증빙 묶음 PDF는 사용자 손에 남는다. 이 문제를 푸는 것이 2차 구독(동기화 · 자동 백업)이다.
-· [이지훈] 개인정보는? 동의는? → 로그인이 없고 서버에는 이름 · 근무지 · 시각 · 금액이 가지 않는다. 가는 것은 확인 번호 · 기록 번호 · 무작위 기기 번호뿐이고, 무엇이 가는지 설정 탭에 적고 끌 수 있게 했다. 설문도 이름 · 연락처를 받지 않는다. 기록 내용을 밖으로 보내는 기능을 켜면 그때 안내와 동의가 필요하다. 단, 등록 시각으로 언제 기록했는지는 짐작할 수 있다(기기 번호는 무작위라 이름과 이어지지 않음).
+· [이지훈] 개인정보는? 동의는? → 로그인이 없고 서버에는 이름 · 근무지 · 시각 · 금액이 가지 않는다. 가는 것은 확인 번호 · 기록 번호 · 무작위 기기 번호뿐이고, 무엇이 가는지 설정 탭에 적고 끌 수 있게 했다. 설문도 이름 · 연락처를 받지 않는다. 기록 내용을 밖으로 보내는 기능을 켜면 그때 안내와 동의가 필요하다. 단, 등록 시각으로 언제 기록했는지는 짐작할 수 있다(기기 번호는 무작위라 이름과 이어지지 않음). 무엇이 어디에 얼마나 보관되는지는 개인정보 처리방침 페이지(jihooni217.github.io/albaguard/privacy.html)에 적어 두었다.
 · [박명진] 왜 설문 30명 · 인터뷰 5명인가? → 9월 기획서는 인터뷰 10~15명이었다. 사람 수는 링크 설문으로 채우고, 앱을 써 보게 하는 20분 인터뷰는 7주 안에 셋이 할 수 있는 5명으로 줄였다. 충분한지는 마지막에 여쭙는 것 중 하나다.
 · [손유호] 설문에서 게임을 안 쓰겠다는 사람이 제일 많던데? → 맞다. 13명 중 6명이 "안 쓸 것 같은 기능"으로 골랐다. 광고 자체를 싫다는 사람은 4명이라 광고 자리는 남지만, 게임을 쓰는 사람이 적으면 광고도 약하다. 그래서 11/23에 설문 결과로 광고 실험과 새 게임 중 하나를 정하고, 게임은 설정에서 숨길 수 있게 해 두었다.
 · [이지훈] 기록 등록(확인 번호)을 쓸모 있다고 고른 사람이 없던데 차별점이 맞나? → 설문에서는 0명이었고, 안 쓸 것 같다는 사람도 1명뿐이었다. 덜 받은 상황에서 "나중에 지어낸 것 아니냐"라는 말을 들을 때 쓸모가 생기는 기능이라 아직 와닿지 않는다고 본다. 인터뷰에서 그 상황을 설명하고 반응을 본다(검증표 3행). 반응이 약하면 발표 · 홍보에서 앞세우는 순서를 다시 정한다.

--- a/docs/06_중간발표_PPT.pptx
+++ b/docs/06_중간발표_PPT.pptx
@@ -4,6 +4,9 @@
   <p:sldMasterIdLst>
     <p:sldMasterId id="2147483648" r:id="rId1"/>
   </p:sldMasterIdLst>
+  <p:notesMasterIdLst>
+    <p:notesMasterId r:id="rId21"/>
+  </p:notesMasterIdLst>
   <p:sldIdLst>
     <p:sldId id="256" r:id="rId2"/>
     <p:sldId id="257" r:id="rId3"/>
@@ -25,10 +28,7 @@
     <p:sldId id="273" r:id="rId19"/>
     <p:sldId id="274" r:id="rId20"/>
   </p:sldIdLst>
-  <p:notesMasterIdLst>
-    <p:notesMasterId r:id="rId21"/>
-  </p:notesMasterIdLst>
-  <p:sldSz cx="9144000" cy="5143500"/>
+  <p:sldSz cx="9144000" cy="5143500" type="screen16x9"/>
   <p:notesSz cx="5143500" cy="9144000"/>
   <p:defaultTextStyle>
     <a:lvl1pPr marL="0" algn="l" defTabSz="914400" rtl="0" eaLnBrk="1" latinLnBrk="0" hangingPunct="1">
@@ -125,31 +125,31 @@
   <p:extLst>
     <p:ext uri="{521415D9-36F7-43E2-AB2F-B90AF26B5E84}">
       <p14:sectionLst xmlns:p14="http://schemas.microsoft.com/office/powerpoint/2010/main">
-        <p14:section name="① 표지·팀 소개" id="{1a9d35b9-a985-d17c-b8b6-007cea92870d}">
+        <p14:section name="① 표지·팀 소개" id="{1A9D35B9-A985-D17C-B8B6-007CEA92870D}">
           <p14:sldIdLst>
             <p14:sldId id="256"/>
             <p14:sldId id="257"/>
           </p14:sldIdLst>
         </p14:section>
-        <p14:section name="② 문제 정의" id="{3e2535c3-b866-b8c3-2453-5802419064c2}">
+        <p14:section name="② 문제 정의" id="{3E2535C3-B866-B8C3-2453-5802419064C2}">
           <p14:sldIdLst>
             <p14:sldId id="258"/>
             <p14:sldId id="259"/>
           </p14:sldIdLst>
         </p14:section>
-        <p14:section name="③ 솔루션·핵심 가치" id="{656ffe6b-08ee-451b-64af-375c4fbf0f82}">
+        <p14:section name="③ 솔루션·핵심 가치" id="{656FFE6B-08EE-451B-64AF-375C4FBF0F82}">
           <p14:sldIdLst>
             <p14:sldId id="260"/>
             <p14:sldId id="261"/>
           </p14:sldIdLst>
         </p14:section>
-        <p14:section name="④ SW 기술 아키텍처" id="{0c897d08-2df4-e7d2-00f4-dab724a36756}">
+        <p14:section name="④ SW 기술 아키텍처" id="{0C897D08-2DF4-E7D2-00F4-DAB724A36756}">
           <p14:sldIdLst>
             <p14:sldId id="262"/>
             <p14:sldId id="263"/>
           </p14:sldIdLst>
         </p14:section>
-        <p14:section name="⑤ 개발 현황·MVP 시연" id="{a8c64c2d-c1cb-d779-18b7-a64c7adb2faa}">
+        <p14:section name="⑤ 개발 현황·MVP 시연" id="{A8C64C2D-C1CB-D779-18B7-A64C7ADB2FAA}">
           <p14:sldIdLst>
             <p14:sldId id="264"/>
             <p14:sldId id="265"/>
@@ -157,19 +157,19 @@
             <p14:sldId id="267"/>
           </p14:sldIdLst>
         </p14:section>
-        <p14:section name="⑥ 시장 분석·비즈니스 모델" id="{94ce352d-9ef0-40a6-4eb7-4408bf35944d}">
+        <p14:section name="⑥ 시장 분석·비즈니스 모델" id="{94CE352D-9EF0-40A6-4EB7-4408BF35944D}">
           <p14:sldIdLst>
             <p14:sldId id="268"/>
             <p14:sldId id="269"/>
             <p14:sldId id="270"/>
           </p14:sldIdLst>
         </p14:section>
-        <p14:section name="⑦ 초기 시장 검증" id="{b01d13a2-6358-03d1-11b2-fdcccd8d1077}">
+        <p14:section name="⑦ 초기 시장 검증" id="{B01D13A2-6358-03D1-11B2-FDCCCD8D1077}">
           <p14:sldIdLst>
             <p14:sldId id="271"/>
           </p14:sldIdLst>
         </p14:section>
-        <p14:section name="⑧ 향후 계획·팀 역량" id="{267a8146-db8d-a02e-f4b9-be411b64343b}">
+        <p14:section name="⑧ 향후 계획·팀 역량" id="{267A8146-DB8D-A02E-F4B9-BE411B64343B}">
           <p14:sldIdLst>
             <p14:sldId id="272"/>
             <p14:sldId id="273"/>
@@ -186,9 +186,11 @@
 </file>
 
 <file path=ppt/charts/chart1.xml><?xml version="1.0" encoding="utf-8"?>
-<c:chartSpace xmlns:c="http://schemas.openxmlformats.org/drawingml/2006/chart" xmlns:a="http://schemas.openxmlformats.org/drawingml/2006/main" xmlns:r="http://schemas.openxmlformats.org/officeDocument/2006/relationships">
+<c:chartSpace xmlns:c="http://schemas.openxmlformats.org/drawingml/2006/chart" xmlns:a="http://schemas.openxmlformats.org/drawingml/2006/main" xmlns:r="http://schemas.openxmlformats.org/officeDocument/2006/relationships" xmlns:c16r2="http://schemas.microsoft.com/office/drawing/2015/06/chart">
   <c:date1904 val="0"/>
+  <c:lang val="ko-KR"/>
   <c:roundedCorners val="1"/>
+  <c:style val="2"/>
   <c:chart>
     <c:title>
       <c:tx>
@@ -216,7 +218,6 @@
           </a:p>
         </c:rich>
       </c:tx>
-      <c:layout/>
       <c:overlay val="0"/>
     </c:title>
     <c:autoTitleDeleted val="0"/>
@@ -249,18 +250,26 @@
           <c:invertIfNegative val="0"/>
           <c:dLbls>
             <c:numFmt formatCode="#,##0" sourceLinked="0"/>
+            <c:spPr>
+              <a:noFill/>
+              <a:ln>
+                <a:noFill/>
+              </a:ln>
+              <a:effectLst/>
+            </c:spPr>
             <c:txPr>
               <a:bodyPr/>
               <a:lstStyle/>
               <a:p>
                 <a:pPr>
-                  <a:defRPr b="0" i="0" strike="noStrike" sz="1100" u="none">
+                  <a:defRPr sz="1100" b="0" i="0" u="none" strike="noStrike">
                     <a:solidFill>
                       <a:srgbClr val="15171A"/>
                     </a:solidFill>
                     <a:latin typeface="+mn-lt"/>
                   </a:defRPr>
                 </a:pPr>
+                <a:endParaRPr lang="ko-KR"/>
               </a:p>
             </c:txPr>
             <c:showLegendKey val="0"/>
@@ -270,25 +279,28 @@
             <c:showPercent val="0"/>
             <c:showBubbleSize val="0"/>
             <c:showLeaderLines val="0"/>
+            <c:extLst>
+              <c:ext xmlns:c15="http://schemas.microsoft.com/office/drawing/2012/chart" uri="{CE6537A1-D6FC-4f65-9D91-7224C49458BB}">
+                <c15:showLeaderLines val="0"/>
+              </c:ext>
+            </c:extLst>
           </c:dLbls>
           <c:cat>
-            <c:multiLvlStrRef>
+            <c:strRef>
               <c:f>Sheet1!$A$2:$A$4</c:f>
-              <c:multiLvlStrCache>
+              <c:strCache>
                 <c:ptCount val="3"/>
-                <c:lvl>
-                  <c:pt idx="0">
-                    <c:v>2023</c:v>
-                  </c:pt>
-                  <c:pt idx="1">
-                    <c:v>2024</c:v>
-                  </c:pt>
-                  <c:pt idx="2">
-                    <c:v>2025</c:v>
-                  </c:pt>
-                </c:lvl>
-              </c:multiLvlStrCache>
-            </c:multiLvlStrRef>
+                <c:pt idx="0">
+                  <c:v>2023</c:v>
+                </c:pt>
+                <c:pt idx="1">
+                  <c:v>2024</c:v>
+                </c:pt>
+                <c:pt idx="2">
+                  <c:v>2025</c:v>
+                </c:pt>
+              </c:strCache>
+            </c:strRef>
           </c:cat>
           <c:val>
             <c:numRef>
@@ -308,36 +320,23 @@
               </c:numCache>
             </c:numRef>
           </c:val>
+          <c:extLst>
+            <c:ext xmlns:c16="http://schemas.microsoft.com/office/drawing/2014/chart" uri="{C3380CC4-5D6E-409C-BE32-E72D297353CC}">
+              <c16:uniqueId val="{00000000-C599-4E45-A850-F8815EE27813}"/>
+            </c:ext>
+          </c:extLst>
         </c:ser>
         <c:dLbls>
-          <c:numFmt formatCode="#,##0" sourceLinked="0"/>
-          <c:txPr>
-            <a:bodyPr/>
-            <a:lstStyle/>
-            <a:p>
-              <a:pPr>
-                <a:defRPr b="0" i="0" strike="noStrike" sz="1100" u="none">
-                  <a:solidFill>
-                    <a:srgbClr val="15171A"/>
-                  </a:solidFill>
-                  <a:latin typeface="+mn-lt"/>
-                </a:defRPr>
-              </a:pPr>
-            </a:p>
-          </c:txPr>
           <c:showLegendKey val="0"/>
           <c:showVal val="1"/>
           <c:showCatName val="0"/>
           <c:showSerName val="0"/>
           <c:showPercent val="0"/>
           <c:showBubbleSize val="0"/>
-          <c:showLeaderLines val="0"/>
         </c:dLbls>
         <c:gapWidth val="70"/>
-        <c:overlap val="0"/>
         <c:axId val="2094734554"/>
         <c:axId val="2094734552"/>
-        <c:axId val="2094734556"/>
       </c:barChart>
       <c:catAx>
         <c:axId val="2094734554"/>
@@ -376,6 +375,7 @@
         <c:crosses val="autoZero"/>
         <c:auto val="1"/>
         <c:lblAlgn val="ctr"/>
+        <c:lblOffset val="100"/>
         <c:noMultiLvlLbl val="1"/>
       </c:catAx>
       <c:valAx>
@@ -391,30 +391,6 @@
         <c:majorTickMark val="out"/>
         <c:minorTickMark val="none"/>
         <c:tickLblPos val="nextTo"/>
-        <c:spPr>
-          <a:ln w="12700" cap="flat">
-            <a:solidFill>
-              <a:srgbClr val="888888"/>
-            </a:solidFill>
-            <a:prstDash val="solid"/>
-            <a:round/>
-          </a:ln>
-        </c:spPr>
-        <c:txPr>
-          <a:bodyPr/>
-          <a:lstStyle/>
-          <a:p>
-            <a:pPr>
-              <a:defRPr sz="1200" b="0" i="0" u="none" strike="noStrike">
-                <a:solidFill>
-                  <a:srgbClr val="000000"/>
-                </a:solidFill>
-                <a:latin typeface="Arial"/>
-              </a:defRPr>
-            </a:pPr>
-            <a:endParaRPr lang="en-US"/>
-          </a:p>
-        </c:txPr>
         <c:crossAx val="2094734554"/>
         <c:crosses val="autoZero"/>
         <c:crossBetween val="between"/>
@@ -429,6 +405,7 @@
     </c:plotArea>
     <c:plotVisOnly val="1"/>
     <c:dispBlanksAs val="span"/>
+    <c:showDLblsOverMax val="1"/>
   </c:chart>
   <c:spPr>
     <a:noFill/>
@@ -465,240 +442,16 @@
           <a:chExt cx="0" cy="0"/>
         </a:xfrm>
       </p:grpSpPr>
-      <p:sp>
-        <p:nvSpPr>
-          <p:cNvPr id="2" name="Header Placeholder 1"/>
-          <p:cNvSpPr>
-            <a:spLocks noGrp="1"/>
-          </p:cNvSpPr>
-          <p:nvPr>
-            <p:ph type="hdr" sz="quarter"/>
-          </p:nvPr>
-        </p:nvSpPr>
-        <p:spPr>
-          <a:xfrm>
-            <a:off x="0" y="0"/>
-            <a:ext cx="2971800" cy="458788"/>
-          </a:xfrm>
-          <a:prstGeom prst="rect">
-            <a:avLst/>
-          </a:prstGeom>
-        </p:spPr>
-        <p:txBody>
-          <a:bodyPr vert="horz" lIns="91440" tIns="45720" rIns="91440" bIns="45720" rtlCol="0"/>
-          <a:lstStyle>
-            <a:lvl1pPr algn="l">
-              <a:defRPr sz="1200"/>
-            </a:lvl1pPr>
-          </a:lstStyle>
-          <a:p>
-            <a:endParaRPr lang="en-US"/>
-          </a:p>
-        </p:txBody>
-      </p:sp>
-      <p:sp>
-        <p:nvSpPr>
-          <p:cNvPr id="3" name="Date Placeholder 2"/>
-          <p:cNvSpPr>
-            <a:spLocks noGrp="1"/>
-          </p:cNvSpPr>
-          <p:nvPr>
-            <p:ph type="dt" idx="1"/>
-          </p:nvPr>
-        </p:nvSpPr>
-        <p:spPr>
-          <a:xfrm>
-            <a:off x="3884613" y="0"/>
-            <a:ext cx="2971800" cy="458788"/>
-          </a:xfrm>
-          <a:prstGeom prst="rect">
-            <a:avLst/>
-          </a:prstGeom>
-        </p:spPr>
-        <p:txBody>
-          <a:bodyPr vert="horz" lIns="91440" tIns="45720" rIns="91440" bIns="45720" rtlCol="0"/>
-          <a:lstStyle>
-            <a:lvl1pPr algn="r">
-              <a:defRPr sz="1200"/>
-            </a:lvl1pPr>
-          </a:lstStyle>
-          <a:p>
-            <a:fld id="{5282F153-3F37-0F45-9E97-73ACFA13230C}" type="datetimeFigureOut">
-              <a:rPr lang="en-US"/>
-              <a:t>7/23/19</a:t>
-            </a:fld>
-            <a:endParaRPr lang="en-US"/>
-          </a:p>
-        </p:txBody>
-      </p:sp>
-      <p:sp>
-        <p:nvSpPr>
-          <p:cNvPr id="4" name="Slide Image Placeholder 3"/>
-          <p:cNvSpPr>
-            <a:spLocks noGrp="1" noRot="1" noChangeAspect="1"/>
-          </p:cNvSpPr>
-          <p:nvPr>
-            <p:ph type="sldImg" idx="2"/>
-          </p:nvPr>
-        </p:nvSpPr>
-        <p:spPr>
-          <a:xfrm>
-            <a:off x="685800" y="1143000"/>
-            <a:ext cx="5486400" cy="3086100"/>
-          </a:xfrm>
-          <a:prstGeom prst="rect">
-            <a:avLst/>
-          </a:prstGeom>
-          <a:noFill/>
-          <a:ln w="12700">
-            <a:solidFill>
-              <a:prstClr val="black"/>
-            </a:solidFill>
-          </a:ln>
-        </p:spPr>
-        <p:txBody>
-          <a:bodyPr vert="horz" lIns="91440" tIns="45720" rIns="91440" bIns="45720" rtlCol="0" anchor="ctr"/>
-          <a:lstStyle/>
-          <a:p>
-            <a:endParaRPr lang="en-US"/>
-          </a:p>
-        </p:txBody>
-      </p:sp>
-      <p:sp>
-        <p:nvSpPr>
-          <p:cNvPr id="5" name="Notes Placeholder 4"/>
-          <p:cNvSpPr>
-            <a:spLocks noGrp="1"/>
-          </p:cNvSpPr>
-          <p:nvPr>
-            <p:ph type="body" sz="quarter" idx="3"/>
-          </p:nvPr>
-        </p:nvSpPr>
-        <p:spPr>
-          <a:xfrm>
-            <a:off x="685800" y="4400550"/>
-            <a:ext cx="5486400" cy="3600450"/>
-          </a:xfrm>
-          <a:prstGeom prst="rect">
-            <a:avLst/>
-          </a:prstGeom>
-        </p:spPr>
-        <p:txBody>
-          <a:bodyPr vert="horz" lIns="91440" tIns="45720" rIns="91440" bIns="45720" rtlCol="0"/>
-          <a:lstStyle/>
-          <a:p>
-            <a:pPr lvl="0"/>
-            <a:r>
-              <a:rPr lang="en-US"/>
-              <a:t>Click to edit Master text styles</a:t>
-            </a:r>
-          </a:p>
-          <a:p>
-            <a:pPr lvl="1"/>
-            <a:r>
-              <a:rPr lang="en-US"/>
-              <a:t>Second level</a:t>
-            </a:r>
-          </a:p>
-          <a:p>
-            <a:pPr lvl="2"/>
-            <a:r>
-              <a:rPr lang="en-US"/>
-              <a:t>Third level</a:t>
-            </a:r>
-          </a:p>
-          <a:p>
-            <a:pPr lvl="3"/>
-            <a:r>
-              <a:rPr lang="en-US"/>
-              <a:t>Fourth level</a:t>
-            </a:r>
-          </a:p>
-          <a:p>
-            <a:pPr lvl="4"/>
-            <a:r>
-              <a:rPr lang="en-US"/>
-              <a:t>Fifth level</a:t>
-            </a:r>
-          </a:p>
-        </p:txBody>
-      </p:sp>
-      <p:sp>
-        <p:nvSpPr>
-          <p:cNvPr id="6" name="Footer Placeholder 5"/>
-          <p:cNvSpPr>
-            <a:spLocks noGrp="1"/>
-          </p:cNvSpPr>
-          <p:nvPr>
-            <p:ph type="ftr" sz="quarter" idx="4"/>
-          </p:nvPr>
-        </p:nvSpPr>
-        <p:spPr>
-          <a:xfrm>
-            <a:off x="0" y="8685213"/>
-            <a:ext cx="2971800" cy="458787"/>
-          </a:xfrm>
-          <a:prstGeom prst="rect">
-            <a:avLst/>
-          </a:prstGeom>
-        </p:spPr>
-        <p:txBody>
-          <a:bodyPr vert="horz" lIns="91440" tIns="45720" rIns="91440" bIns="45720" rtlCol="0" anchor="b"/>
-          <a:lstStyle>
-            <a:lvl1pPr algn="l">
-              <a:defRPr sz="1200"/>
-            </a:lvl1pPr>
-          </a:lstStyle>
-          <a:p>
-            <a:endParaRPr lang="en-US"/>
-          </a:p>
-        </p:txBody>
-      </p:sp>
-      <p:sp>
-        <p:nvSpPr>
-          <p:cNvPr id="7" name="Slide Number Placeholder 6"/>
-          <p:cNvSpPr>
-            <a:spLocks noGrp="1"/>
-          </p:cNvSpPr>
-          <p:nvPr>
-            <p:ph type="sldNum" sz="quarter" idx="5"/>
-          </p:nvPr>
-        </p:nvSpPr>
-        <p:spPr>
-          <a:xfrm>
-            <a:off x="3884613" y="8685213"/>
-            <a:ext cx="2971800" cy="458787"/>
-          </a:xfrm>
-          <a:prstGeom prst="rect">
-            <a:avLst/>
-          </a:prstGeom>
-        </p:spPr>
-        <p:txBody>
-          <a:bodyPr vert="horz" lIns="91440" tIns="45720" rIns="91440" bIns="45720" rtlCol="0" anchor="b"/>
-          <a:lstStyle>
-            <a:lvl1pPr algn="r">
-              <a:defRPr sz="1200"/>
-            </a:lvl1pPr>
-          </a:lstStyle>
-          <a:p>
-            <a:fld id="{CE5E9CC1-C706-0F49-92D6-E571CC5EEA8F}" type="slidenum">
-              <a:rPr lang="en-US"/>
-              <a:t>‹#›</a:t>
-            </a:fld>
-            <a:endParaRPr lang="en-US"/>
-          </a:p>
-        </p:txBody>
-      </p:sp>
     </p:spTree>
     <p:extLst>
       <p:ext uri="{BB962C8B-B14F-4D97-AF65-F5344CB8AC3E}">
-        <p14:creationId xmlns:p14="http://schemas.microsoft.com/office/powerpoint/2010/main" val="1024086991"/>
+        <p14:creationId xmlns:p14="http://schemas.microsoft.com/office/powerpoint/2010/main" val="889522396"/>
       </p:ext>
     </p:extLst>
   </p:cSld>
   <p:clrMap bg1="lt1" tx1="dk1" bg2="lt2" tx2="dk2" accent1="accent1" accent2="accent2" accent3="accent3" accent4="accent4" accent5="accent5" accent6="accent6" hlink="hlink" folHlink="folHlink"/>
   <p:notesStyle>
-    <a:lvl1pPr marL="0" algn="l" defTabSz="914400" rtl="0" eaLnBrk="1" latinLnBrk="0" hangingPunct="1">
+    <a:lvl1pPr marL="0" algn="l" defTabSz="914400" rtl="0" eaLnBrk="1" latinLnBrk="1" hangingPunct="1">
       <a:defRPr sz="1200" kern="1200">
         <a:solidFill>
           <a:schemeClr val="tx1"/>
@@ -708,7 +461,7 @@
         <a:cs typeface="+mn-cs"/>
       </a:defRPr>
     </a:lvl1pPr>
-    <a:lvl2pPr marL="457200" algn="l" defTabSz="914400" rtl="0" eaLnBrk="1" latinLnBrk="0" hangingPunct="1">
+    <a:lvl2pPr marL="457200" algn="l" defTabSz="914400" rtl="0" eaLnBrk="1" latinLnBrk="1" hangingPunct="1">
       <a:defRPr sz="1200" kern="1200">
         <a:solidFill>
           <a:schemeClr val="tx1"/>
@@ -718,7 +471,7 @@
         <a:cs typeface="+mn-cs"/>
       </a:defRPr>
     </a:lvl2pPr>
-    <a:lvl3pPr marL="914400" algn="l" defTabSz="914400" rtl="0" eaLnBrk="1" latinLnBrk="0" hangingPunct="1">
+    <a:lvl3pPr marL="914400" algn="l" defTabSz="914400" rtl="0" eaLnBrk="1" latinLnBrk="1" hangingPunct="1">
       <a:defRPr sz="1200" kern="1200">
         <a:solidFill>
           <a:schemeClr val="tx1"/>
@@ -728,7 +481,7 @@
         <a:cs typeface="+mn-cs"/>
       </a:defRPr>
     </a:lvl3pPr>
-    <a:lvl4pPr marL="1371600" algn="l" defTabSz="914400" rtl="0" eaLnBrk="1" latinLnBrk="0" hangingPunct="1">
+    <a:lvl4pPr marL="1371600" algn="l" defTabSz="914400" rtl="0" eaLnBrk="1" latinLnBrk="1" hangingPunct="1">
       <a:defRPr sz="1200" kern="1200">
         <a:solidFill>
           <a:schemeClr val="tx1"/>
@@ -738,7 +491,7 @@
         <a:cs typeface="+mn-cs"/>
       </a:defRPr>
     </a:lvl4pPr>
-    <a:lvl5pPr marL="1828800" algn="l" defTabSz="914400" rtl="0" eaLnBrk="1" latinLnBrk="0" hangingPunct="1">
+    <a:lvl5pPr marL="1828800" algn="l" defTabSz="914400" rtl="0" eaLnBrk="1" latinLnBrk="1" hangingPunct="1">
       <a:defRPr sz="1200" kern="1200">
         <a:solidFill>
           <a:schemeClr val="tx1"/>
@@ -748,7 +501,7 @@
         <a:cs typeface="+mn-cs"/>
       </a:defRPr>
     </a:lvl5pPr>
-    <a:lvl6pPr marL="2286000" algn="l" defTabSz="914400" rtl="0" eaLnBrk="1" latinLnBrk="0" hangingPunct="1">
+    <a:lvl6pPr marL="2286000" algn="l" defTabSz="914400" rtl="0" eaLnBrk="1" latinLnBrk="1" hangingPunct="1">
       <a:defRPr sz="1200" kern="1200">
         <a:solidFill>
           <a:schemeClr val="tx1"/>
@@ -758,7 +511,7 @@
         <a:cs typeface="+mn-cs"/>
       </a:defRPr>
     </a:lvl6pPr>
-    <a:lvl7pPr marL="2743200" algn="l" defTabSz="914400" rtl="0" eaLnBrk="1" latinLnBrk="0" hangingPunct="1">
+    <a:lvl7pPr marL="2743200" algn="l" defTabSz="914400" rtl="0" eaLnBrk="1" latinLnBrk="1" hangingPunct="1">
       <a:defRPr sz="1200" kern="1200">
         <a:solidFill>
           <a:schemeClr val="tx1"/>
@@ -768,7 +521,7 @@
         <a:cs typeface="+mn-cs"/>
       </a:defRPr>
     </a:lvl7pPr>
-    <a:lvl8pPr marL="3200400" algn="l" defTabSz="914400" rtl="0" eaLnBrk="1" latinLnBrk="0" hangingPunct="1">
+    <a:lvl8pPr marL="3200400" algn="l" defTabSz="914400" rtl="0" eaLnBrk="1" latinLnBrk="1" hangingPunct="1">
       <a:defRPr sz="1200" kern="1200">
         <a:solidFill>
           <a:schemeClr val="tx1"/>
@@ -778,7 +531,7 @@
         <a:cs typeface="+mn-cs"/>
       </a:defRPr>
     </a:lvl8pPr>
-    <a:lvl9pPr marL="3657600" algn="l" defTabSz="914400" rtl="0" eaLnBrk="1" latinLnBrk="0" hangingPunct="1">
+    <a:lvl9pPr marL="3657600" algn="l" defTabSz="914400" rtl="0" eaLnBrk="1" latinLnBrk="1" hangingPunct="1">
       <a:defRPr sz="1200" kern="1200">
         <a:solidFill>
           <a:schemeClr val="tx1"/>
@@ -840,7 +593,6 @@
               <a:rPr lang="en-US" dirty="0"/>
               <a:t>팀장이 엽니다. "화면의 269,352원은 앱 예시 데이터에서 두 달 동안 덜 받은 돈입니다. 통장 총액만 봐서는 보이지 않는 돈입니다. 알바비를 덜 받아도 모르고, 알아도 말을 못 하는 대학생을 위해, 기록 → 비교 → 요청까지 한 앱으로 잇는 알바가드입니다." 팀명은 앱 이름과 같은 알바가드입니다.</a:t>
             </a:r>
-            <a:endParaRPr lang="en-US" dirty="0"/>
           </a:p>
         </p:txBody>
       </p:sp>
@@ -928,7 +680,6 @@
               <a:rPr lang="en-US" dirty="0"/>
               <a:t>네 단계(기록 → 비교 → 요청 → 확인)가 차별점과 하나씩 맞물립니다. 영상에 안 나오는 것은 말로 짚습니다: 캘린더의 연장 · 대타 표시(9장 캡처), 3단계 진정 안내(1350 · 노동포털 연결, 진정서는 만들지 않음). 예시 데이터는 발표 전에 미리 넣어 둡니다(오늘 날짜는 비어 있어 출근 · 퇴근이 그대로 됩니다). 7번 표에는 시연 중 남긴 2건만 나옵니다. 예시 데이터는 진짜 시각이 아니라 등록하지 않기 때문입니다. 시연은 다음 장의 녹화 영상(1분 46초)으로 하고, 단계마다 멈춰서 설명하면 약 3분입니다. 영상은 배포된 앱을 실제로 눌러 찍은 것이라 서버 등록과 확인 번호가 진짜입니다(10/26 오전 9시 36분 녹화. 화면의 시각은 녹화한 시각). 질문이 오면 실제 앱에서 출근 · 퇴근을 눌러, 설정의 등록 건수가 2건 늘어나는 것만 보여 줍니다. (전날 · 당일 준비는 팀원 요약의 팀장 체크리스트에)</a:t>
             </a:r>
-            <a:endParaRPr lang="en-US" dirty="0"/>
           </a:p>
         </p:txBody>
       </p:sp>
@@ -1016,7 +767,6 @@
               <a:rPr lang="en-US" dirty="0"/>
               <a:t>재생 전에 한 문장: "보실 것 하나만 말씀드리면 마지막 장면의 등록 시각입니다. 지금 서버에 그대로 있는 값입니다." 영상을 누르면 재생됩니다. 왼쪽이 폰 화면, 오른쪽 위는 지금 단계(기록 · 비교 · 요청 · 확인), 그 아래가 자막입니다. 1 출근 · 퇴근 → 설정 "2건 등록됨"(0:10~0:30), 2 받은 금액 입력 → 빨간 차액(0:30~0:50), 3 메시지 생성 → 증빙 묶음 PDF 7번 표(0:50~1:28), 4 확인 페이지 → 서버 등록 시각(1:28~1:42). 시작 3초는 제목 화면, 끝 4초는 확인 페이지 주소와 확인 번호 화면입니다. 단계가 바뀔 때 멈추고 한두 문장씩 설명합니다. 영상이 안 열리면 docs/08_시연_영상.mp4를 따로 틀어도 됩니다. 영상 마지막에 나오는 확인 번호는 da3e2a7ad7e298db입니다. "녹화라서 못 믿겠다"라는 질문이 오면 "지금 폰으로 jihooni217.github.io/albaguard/verify.html?h=da3e2a7ad7e298db 를 열어 보셔도 됩니다. 서버가 찍은 시각이 녹화 시각(10/26)과 같습니다"라고 답합니다.</a:t>
             </a:r>
-            <a:endParaRPr lang="en-US" dirty="0"/>
           </a:p>
         </p:txBody>
       </p:sp>
@@ -1104,7 +854,6 @@
               <a:rPr lang="en-US" dirty="0"/>
               <a:t>시연 직후에 보여 줍니다. "방금 보신 것이 8개 중 이만큼"입니다. 100%는 쓰지 않았습니다. 계획 기준은 9월 기획서의 기능 4개에서 출발해, 10/13 MVP 기능 정의서에서 포함 8개 · 제외 6개(금액 자동 인식 · 푸시 알림 · AI 문구 · 광고 · 로그인 · 진정서)로 고정한 것입니다. %는 구현 + 실제 폰 확인 + 사용자 검증을 100으로 보고 남은 일만큼 뺀 자체 평가이고, 동작은 컴퓨터의 폰 크기 화면에서, 실제 폰은 설치까지 확인했습니다. 동그라미 세 칸은 컴퓨터 동작 · 실제 폰 · 사용자 검증이고, 지금은 모두 첫 칸만 찼습니다. 뒤 두 칸이 11월 일정입니다. 세 칸 중 첫 칸만 찼는데 왜 70~90%냐고 물으시면, %는 칸수가 아니라 남은 일의 크기로 어림한 것이고 11월 검증에서 큰 수정이 나오면 내려갈 수 있다고 답합니다. 이 장이 끝나면 손유호에게 넘깁니다.</a:t>
             </a:r>
-            <a:endParaRPr lang="en-US" dirty="0"/>
           </a:p>
         </p:txBody>
       </p:sp>
@@ -1192,7 +941,6 @@
               <a:rPr lang="en-US" dirty="0"/>
               <a:t>손유호. 임금체불은 2년 연속 2조 원이고 30인 미만 사업장에 몰려 있습니다. 체불 통계는 문제의 크기이지 알바 시장의 크기가 아니고, 알바생 몫은 이 통계에서 알 수 없습니다. 타깃 규모는 어림이라 "약"을 붙여 말합니다. 상한 210~270만 명은 알바 경험 기준이고, 지금 알바 중인 사람과 주 15시간 이상인 사람은 공식 통계가 없어 미상으로 둡니다. 재적학생은 교육부 2026 교육기본통계(대학원 포함), 알바 경험률은 알바몬 설문(1,193명, 여름방학 알바 88.9%, 2023)과 동대신문 설문(200명, 67.5%)이라 대푯값이 아닙니다. 타이밍: 2025년 9월 임금체불 근절 대책은 대지급금을 3개월분에서 6개월분으로 늘렸고, 10월 23일 시행된 개정 근로기준법은 상습 체불 사업주에게 신용 제재를 겁니다. 체불 제재가 세졌습니다. 출처: 고용노동부 노동포털 임금체불 통계현황, 알바천국 설문, 교육부 교육기본통계.</a:t>
             </a:r>
-            <a:endParaRPr lang="en-US" dirty="0"/>
           </a:p>
         </p:txBody>
       </p:sp>
@@ -1280,7 +1028,6 @@
               <a:rPr lang="en-US" dirty="0"/>
               <a:t>손유호. 첫 사용자로 보는 사람은 하우머치 사용자가 아니라, 카톡 · 메모에 적거나 아예 안 적고 통장 총액만 보는 학생입니다. 하우머치가 비교 칸을 넣으면 따라올 수 있으니, 따라 하기 어려운 쪽(기록 등록)을 키웁니다. 2×2에서 알바가드는 "혼자 씀 × 대응까지"에 있습니다. 오른쪽 열은 혼자서는 시작할 수 없는 서비스입니다. 기그는 사장이 가입해야 하고, 진정24는 증거가 먼저 있어야 합니다. 경쟁 서비스 정보는 2026년 9월 각 앱의 공식 소개와 리뷰 기준입니다.</a:t>
             </a:r>
-            <a:endParaRPr lang="en-US" dirty="0"/>
           </a:p>
         </p:txBody>
       </p:sp>
@@ -1368,7 +1115,6 @@
               <a:rPr lang="en-US" dirty="0"/>
               <a:t>손유호. 기록 · 비교 · 요청 화면은 믿고 쓰는 것이 중요해서 광고를 섞지 않습니다. 단가를 모르니 매출 추정은 적지 않았습니다. 정산 문구 · 내용증명 · 증빙 묶음을 돈 받고 만들면 변호사법 · 공인노무사법 문제에 가까워져서 유료화하지 않습니다(웹 조사 기준, 전문가 검토 아님). 유저 확보는 에브리타임 · 학과 단톡 · 알바 커뮤니티에 링크를 올리고, "주휴수당 계산법" 같은 짧은 영상을 만듭니다. 알바비 앱에 왜 게임이 있나: 출퇴근은 일하는 날마다 누르지만, 돈을 확인하는 건 급여일에 한 번이라, 그 사이에도 앱을 열 이유로 넣었고 그 화면이 광고 자리입니다. 처음엔 근무 중에만 열렸는데 팀원 의견으로 10/25에 조건을 풀고 설정에서 숨길 수 있게 했습니다. 광고 형식은 웹앱이라 배너 · 전면이 기본이고 보상형은 승인이 필요합니다. 2차 구독은 폰을 바꾸거나 잃어버려도 기록이 남게 하는 선택 기능이고, 원하는 사람만 쓰므로 "근무 내용은 폰 안에만" 원칙과 부딪히지 않습니다. 광고 가설은 설문의 "게임 화면 광고" 문항(지금까지 13명 중 "싫다" 4명)과 승인 뒤 게임 화면 열람 수로 확인합니다. 운영 비용은 지금 서버 0원 · 배포 0원이라 수익이 0이어도 서비스는 돌아가고, 인건비는 팀 3명입니다. 넘길 때: "주 15시간 이상 일하는 사람이 많은지는 설문으로 확인하고 있습니다. 지금까지 13명이 답했고, 결과와 검증 계획은 박명진이 말씀드립니다."</a:t>
             </a:r>
-            <a:endParaRPr lang="en-US" dirty="0"/>
           </a:p>
         </p:txBody>
       </p:sp>
@@ -1456,7 +1202,6 @@
               <a:rPr lang="en-US" dirty="0"/>
               <a:t>박명진. 가설은 9월 기획서의 문장입니다. 표의 기준은 팀이 정한 목표이지 데이터가 아닙니다. 오른쪽 끝 칸이 10/26까지 받은 설문 13명의 중간 결과입니다(지금 알바 중 2 · 예전에 했음 10 · 한 적 없음 1, 지인 중심이라 정식 조사가 아닙니다). 매달 받은 금액을 넣겠다는 사람이 13명 중 11명("할 만하다" 4, "귀찮지만 할 것 같다" 7), 게임 화면 광고를 싫다고 한 사람은 4명이었습니다. 주 15시간 기준은 지금 알바 중인 응답자가 2명뿐이라 판단을 미룹니다. 요청 문구와 확인 번호는 인터뷰 문항이라 11월에 확인합니다. 문제 쪽도 확인됐습니다. 급여 때 "내 계산이 맞는지"가 걱정이라는 사람이 13명 중 8명, 통장 총액만 본다는 사람이 12명 중 7명입니다. 불리한 결과도 말합니다. 가장 쓸모 있는 기능으로 정산 요청 메시지와 기록 등록을 고른 사람은 없었고(덜 받은 돈 알려 주기 7명, 출퇴근 기록 4명), 미니게임은 "안 쓸 것 같은 기능" 1위(6명)였습니다. 그래서 인터뷰에서 문구와 확인 번호를 직접 보여 주고 반응을 봅니다. 모집은 학과 · 동아리 단톡, 에브리타임, 그리고 오늘 이 자리(QR)입니다. 인터뷰 5명은 지인 중 지금 알바 중인 사람으로 11/3~11/9에 합니다. 결과는 사람 수로만 말하고 %는 30명 이상일 때만 씁니다. 당일 아침 응답이 늘었으면 결과 페이지의 숫자로 "지금은 N명"이라고 덧붙입니다. 1행은 의향을 물은 것이라, 실제로 넣는지는 인터뷰 때 앱을 설치하게 하고 급여일 뒤에 따로 봅니다. 지인이라 호의적으로 답하기 쉬워서 "넣겠다"를 그대로 믿지 않습니다.</a:t>
             </a:r>
-            <a:endParaRPr lang="en-US" dirty="0"/>
           </a:p>
         </p:txBody>
       </p:sp>
@@ -1544,7 +1289,6 @@
               <a:rPr lang="en-US" dirty="0"/>
               <a:t>박명진. 7주 일정이고 빨간 마름모가 마일스톤입니다. 설문은 10/23에 열어 지금 13명이고, 11/16까지 손유호가 30명을 채웁니다. 그리고 인터뷰 5명은 11/3~11/9에 손유호 3명, 제가 2명을 합니다. 폰 검증은 아이폰은 팀장, 갤럭시는 제가 주관합니다. 광고 승인 신청은 손유호, 코드는 팀장입니다. 마일스톤: 11/9 설문 1차 집계 · 인터뷰 마감, 11/23 피드백 반영 배포와 광고 결정, 11/30 폰 검증 끝, 12/7 기록 등록 보강 배포와 기능 동결, 12/15 기말. 11/23에 설문의 광고 문항 결과로 광고 실험과 새 게임 중 하나를 정합니다. 12/7 이후에는 코드를 바꾸지 않고 보고서와 발표를 준비합니다. 위험과 대안은 보고서 5.4에 적었습니다.</a:t>
             </a:r>
-            <a:endParaRPr lang="en-US" dirty="0"/>
           </a:p>
         </p:txBody>
       </p:sp>
@@ -1632,7 +1376,6 @@
               <a:rPr lang="en-US" dirty="0"/>
               <a:t>박명진. 앞으로 맡는 일은 오늘 각자 발표한 장과 같습니다. 개발은 팀장, 시장과 설문 · 인터뷰 3명은 손유호, 인터뷰 2명과 갤럭시 테스트 · 일정 · 보고서는 저입니다. 다음 장으로 넘겨 팀장이 마무리합니다.</a:t>
             </a:r>
-            <a:endParaRPr lang="en-US" dirty="0"/>
           </a:p>
         </p:txBody>
       </p:sp>
@@ -1747,7 +1490,6 @@
 · [손유호] 광고 수익이 생기면 "무료라서 괜찮다"가 깨지지 않나? → 광고는 게임 화면에만 나오고 문서 기능과 떼어 놓았다. 문서를 만든 대가로 받는 돈이 아니게 구조를 잡은 것이다. 다만 웹 조사 기준 판단이고 전문가 검토는 아니다.
 · [박명진 → 손유호 순으로 각자] 팀원은 뭘 했나? → 개발은 이지훈. 손유호는 수업 시간의 계획서 일부를 썼고(내용은 팀장이 반영), 앞으로 시장 · 설문 · 인터뷰 3명. 박명진은 지금까지 의견을 낸 정도이고, 앞으로 인터뷰 2명 · 갤럭시 테스트 · 일정 · 보고서 편집.</a:t>
             </a:r>
-            <a:endParaRPr lang="en-US" dirty="0"/>
           </a:p>
         </p:txBody>
       </p:sp>
@@ -1835,7 +1577,6 @@
               <a:rPr lang="en-US" dirty="0"/>
               <a:t>팀장. "교수님이 아직 구현 전일 거라 하셨는데, 저희는 웹앱이라 빨리 만들 수 있어서, 화면을 먼저 만들고 그걸 보여 주며 묻는 순서를 택했습니다. 오늘 보여 드리는 건 완성품이 아니라 검증용 도구입니다." 설문은 지금까지 13명이 답했고, 앱을 직접 써 보게 하는 인터뷰는 11월에 합니다. 오른쪽 QR은 앱과 설문입니다. 설문은 이름을 받지 않고 3분이라, 교수님께서 괜찮으시면 발표가 끝난 뒤 질의응답 시간에 답해 주셔도 됩니다. 역할은 개발 이지훈, 시장 · 수익 손유호, 검증 · 일정 박명진이고 발표도 그 순서입니다.</a:t>
             </a:r>
-            <a:endParaRPr lang="en-US" dirty="0"/>
           </a:p>
         </p:txBody>
       </p:sp>
@@ -1923,7 +1664,6 @@
               <a:rPr lang="en-US" dirty="0"/>
               <a:t>타깃: 근로계약서가 없거나 사본이 없고, 통장 총액만 확인하고, 사장님께 말을 꺼내기 부담스러워하는 학생입니다. 주 15시간은 주휴수당이 생기는 선입니다. 문제 1: 수당 안내를 못 받는 경우가 많고 주휴 · 야간 계산 기준은 알기 어렵습니다. 계산기는 있어도 넣을 기록이 없습니다. 문제 2: 통장에 들어온 총액만 보고 넘어가고, 계약서가 없어 시급도 증명하기 어렵습니다. 문제 3: 관계 걱정, 작은 금액, 근거 없음이 겹치고, 메모장 기록은 "나중에 지어낸 것 아니냐?" 한마디에 무너집니다. 세 문제를 숫자로 보여 줍니다. 모두 알바천국 설문이라 "플랫폼 설문"이라는 점을 말하고, 그래서 우리도 직접 설문을 돌리고 있다고 잇습니다. 33.2%는 노동절 수당 안내에 대한 숫자라 "노동절 수당조차 안내받지 못하는 경우가 있다"까지만 말하고, 우리 설문(13명)에서도 주휴 · 야간 계산에 자신 있다는 사람은 4명뿐이었다고 덧붙입니다. 48.0%는 알아챈 사람만 센 숫자라, "알아채기 어렵다"의 근거로는 저희 설문에서 통장 총액만 본다는 12명 중 7명을 같이 말씀드립니다.</a:t>
             </a:r>
-            <a:endParaRPr lang="en-US" dirty="0"/>
           </a:p>
         </p:txBody>
       </p:sp>
@@ -2011,7 +1751,6 @@
               <a:rPr lang="en-US" dirty="0"/>
               <a:t>무료 앱이 실제로 겨루는 상대는 다른 앱이 아니라 메모장과 통장 확인입니다. 그래서 첫 열에 넣었습니다. 하우머치는 혼자 쓸 수 있지만 예상 급여에서 멈추고, 기그는 사장 연동이 필요하고, 계산기는 기록이 없고, 진정24는 증거가 있어야 시작합니다. 가운데 세 줄은 알바가드에만 있습니다. 카톡은 보낸 시각이 남지만 무엇을 왜 고쳤는지는 남지 않아 △입니다. 그 세 줄이 저희가 채우는 부분입니다. 마지막 줄 진정 접수는 저희가 일부러 안 합니다. 1350과 노동포털로 연결만 합니다.</a:t>
             </a:r>
-            <a:endParaRPr lang="en-US" dirty="0"/>
           </a:p>
         </p:txBody>
       </p:sp>
@@ -2099,7 +1838,6 @@
               <a:rPr lang="en-US" dirty="0"/>
               <a:t>세 단계를 한 앱에서 잇는 것이 핵심입니다. 사장 연동 없이, 로그인 없이, 근무 내용은 폰 안에만 둡니다. 화면은 통장처럼 "일하면 돈이 쌓인다"가 보이게 만들었습니다.</a:t>
             </a:r>
-            <a:endParaRPr lang="en-US" dirty="0"/>
           </a:p>
         </p:txBody>
       </p:sp>
@@ -2187,7 +1925,6 @@
               <a:rPr lang="en-US" dirty="0"/>
               <a:t>1번은 기그와 달리 사장이 가입하지 않아도 된다는 뜻입니다. 2번은 실제 받은 돈과 비교해 차액을 찾고 요청 문구와 증빙 묶음까지 잇는 것으로, 비교한 네 서비스 모두에 없습니다. 3번이 따라 하기 어려운 차별점입니다. 기능 하나가 아니라 기록 구조라서, 사유 없이는 못 고치고 삭제해도 흔적이 남고 고치면 다시 등록됩니다. 기존 급여 앱이 넣으려면 사용자가 기록을 마음대로 고치던 방식을 포기해야 합니다. 지금 확인 페이지는 번호의 서버 등록 시각까지 보여 주고, 기록 내용에서 번호를 다시 계산해 맞춰 보는 방법은 기말까지 만듭니다(그래서 12장에서 70%). 근무지 · 시각 · 금액은 서버로 가지 않고, "그날 실제로 일했다"까지는 증명하지 못합니다. 한계는 먼저 말합니다. 통장 내역 · 메시지와 함께 내야 힘이 생긴다는 말은 앱의 증빙 문서 맨 아래에도 적혀 있습니다. "법적 효력" 질문이 오면 보장하지 않는다고 답하고, 근로감독관 · 법원이 판단할 자료를 정리해 준다고 말합니다.</a:t>
             </a:r>
-            <a:endParaRPr lang="en-US" dirty="0"/>
           </a:p>
         </p:txBody>
       </p:sp>
@@ -2275,7 +2012,6 @@
               <a:rPr lang="en-US" dirty="0"/>
               <a:t>표의 이유를 풀면: 스토어 심사 없이 링크로 배포해서, 사용자 의견을 듣고 바로 고칠 수 있습니다. 서버는 확인 번호 등록과 설문 수집에만 씁니다. 서버를 최소로 둔 이유는 개인정보와 비용 둘 다입니다. 공개키로는 넣기 · 읽기만 되고(RLS) 시각은 서버가 찍지만, 운영자 조작까지 막지는 못합니다. main에 올리면 GitHub Actions가 자동으로 빌드 · 배포합니다. 배포 앱은 API 키 없이 정해진 문구로 동작합니다. 한 학기 안에 혼자 만들 수 있는 구성입니다.</a:t>
             </a:r>
-            <a:endParaRPr lang="en-US" dirty="0"/>
           </a:p>
         </p:txBody>
       </p:sp>
@@ -2363,7 +2099,6 @@
               <a:rPr lang="en-US" dirty="0"/>
               <a:t>왼쪽 폰 안에서 모든 계산이 끝나고, 서버로 가는 건 확인 번호 · 기록 번호 · 무작위 기기 번호뿐입니다. 기기 번호는 처음 기록을 등록할 때 앱이 만든 난수라 휴대전화 번호가 아닙니다. 다만 출근 · 퇴근을 누를 때 바로 등록되므로, 등록 시각을 보면 언제쯤 기록했는지는 서버에서도 짐작할 수 있습니다. 기기 번호는 무작위라 이름과 이어지지는 않습니다. 앱이 쓰는 공개키로는 넣기와 읽기만 되고, 직접 요청을 보내 확인했습니다. 2000년 시각을 보내도 서버 시각으로 들어가고, 수정 · 삭제는 401로 거부됩니다. 다만 운영자 권한으로는 고칠 수 있어서, 지금 막는 건 "사용자가 나중에 고쳐 쓰기"까지입니다. 운영자까지 못 고치게 하는 외부 시점 확인은 비용 때문에 계획입니다. 오른쪽은 기록 하나가 남을 때의 흐름입니다. 증빙 묶음 PDF 7번 표에 기록별 확인 번호와 등록 시각이 들어가고, 확인 페이지는 앱 데이터 없이 동작합니다. 지금 답하고 계신 설문도 같은 서버의 survey 표로 가고, 권한 원칙이 같습니다.</a:t>
             </a:r>
-            <a:endParaRPr lang="en-US" dirty="0"/>
           </a:p>
         </p:txBody>
       </p:sp>
@@ -2451,7 +2186,6 @@
               <a:rPr lang="en-US" dirty="0"/>
               <a:t>디자인은 타깃 사용자(하우머치를 쓰는 친구)가 시안 12장 중 고른 통장 구성입니다. 잉크 남색은 "기록을 잉크로 남긴다"라는 뜻입니다. 증빙 묶음은 인쇄 창에서 PDF로 저장합니다.</a:t>
             </a:r>
-            <a:endParaRPr lang="en-US" dirty="0"/>
           </a:p>
         </p:txBody>
       </p:sp>
@@ -2529,6 +2263,7 @@
         <a:solidFill>
           <a:srgbClr val="FFFFFF"/>
         </a:solidFill>
+        <a:effectLst/>
       </p:bgPr>
     </p:bg>
     <p:spTree>
@@ -2566,7 +2301,7 @@
           <a:bodyPr wrap="square" lIns="0" tIns="0" rIns="0" bIns="0" rtlCol="0" anchor="ctr"/>
           <a:lstStyle/>
           <a:p>
-            <a:pPr indent="0" marL="0">
+            <a:pPr marL="0" indent="0">
               <a:buNone/>
             </a:pPr>
             <a:r>
@@ -2584,9 +2319,11 @@
       <p:sp>
         <p:nvSpPr>
           <p:cNvPr id="3" name="Text 1"/>
-          <p:cNvSpPr/>
+          <p:cNvSpPr>
+            <a:spLocks noGrp="1"/>
+          </p:cNvSpPr>
           <p:nvPr>
-            <p:ph idx="101" type="body" hasCustomPrompt="1"/>
+            <p:ph type="body" idx="101" hasCustomPrompt="1"/>
           </p:nvPr>
         </p:nvSpPr>
         <p:spPr>
@@ -2603,7 +2340,7 @@
         <p:txBody>
           <a:bodyPr wrap="square" rtlCol="0"/>
           <a:lstStyle>
-            <a:lvl1pPr indent="0" marL="0">
+            <a:lvl1pPr marL="0" indent="0">
               <a:buNone/>
               <a:defRPr lang="en-US" sz="1050" b="1" dirty="0">
                 <a:solidFill>
@@ -2613,7 +2350,7 @@
             </a:lvl1pPr>
           </a:lstStyle>
           <a:p>
-            <a:pPr indent="0" marL="0">
+            <a:pPr marL="0" indent="0">
               <a:buNone/>
             </a:pPr>
             <a:endParaRPr lang="en-US" sz="1050" dirty="0"/>
@@ -2623,9 +2360,11 @@
       <p:sp>
         <p:nvSpPr>
           <p:cNvPr id="4" name="Text 1"/>
-          <p:cNvSpPr/>
+          <p:cNvSpPr>
+            <a:spLocks noGrp="1"/>
+          </p:cNvSpPr>
           <p:nvPr>
-            <p:ph idx="102" type="title" hasCustomPrompt="1"/>
+            <p:ph type="title" idx="102" hasCustomPrompt="1"/>
           </p:nvPr>
         </p:nvSpPr>
         <p:spPr>
@@ -2642,7 +2381,7 @@
         <p:txBody>
           <a:bodyPr wrap="square" rtlCol="0"/>
           <a:lstStyle>
-            <a:lvl1pPr algn="l" indent="0" marL="0">
+            <a:lvl1pPr marL="0" indent="0" algn="l">
               <a:buNone/>
               <a:defRPr lang="en-US" sz="2400" b="1" dirty="0">
                 <a:solidFill>
@@ -2652,7 +2391,7 @@
             </a:lvl1pPr>
           </a:lstStyle>
           <a:p>
-            <a:pPr algn="l" indent="0" marL="0">
+            <a:pPr marL="0" indent="0" algn="l">
               <a:buNone/>
             </a:pPr>
             <a:endParaRPr lang="en-US" sz="2400" dirty="0"/>
@@ -2679,7 +2418,7 @@
           </a:prstGeom>
           <a:extLst>
             <a:ext uri="{C572A759-6A51-4108-AA02-DFA0A04FC94B}">
-              <ma14:wrappingTextBoxFlag xmlns:ma14="http://schemas.microsoft.com/office/mac/drawingml/2011/main" val="0"/>
+              <ma14:wrappingTextBoxFlag xmlns:ma14="http://schemas.microsoft.com/office/mac/drawingml/2011/main" xmlns="" val="0"/>
             </a:ext>
           </a:extLst>
         </p:spPr>
@@ -2697,8 +2436,8 @@
           <a:p>
             <a:pPr algn="r"/>
             <a:fld id="{F7021451-1387-4CA6-816F-3879F97B5CBC}" type="slidenum">
-              <a:rPr b="0" lang="en-US"/>
-              <a:t>1002</a:t>
+              <a:rPr lang="en-US" b="0"/>
+              <a:t>‹#›</a:t>
             </a:fld>
             <a:endParaRPr lang="en-US"/>
           </a:p>
@@ -2720,6 +2459,7 @@
         <a:solidFill>
           <a:srgbClr val="2A3193"/>
         </a:solidFill>
+        <a:effectLst/>
       </p:bgPr>
     </p:bg>
     <p:spTree>
@@ -2739,9 +2479,11 @@
       <p:sp>
         <p:nvSpPr>
           <p:cNvPr id="2" name="Text 0"/>
-          <p:cNvSpPr/>
+          <p:cNvSpPr>
+            <a:spLocks noGrp="1"/>
+          </p:cNvSpPr>
           <p:nvPr>
-            <p:ph idx="100" type="title" hasCustomPrompt="1"/>
+            <p:ph type="title" idx="100" hasCustomPrompt="1"/>
           </p:nvPr>
         </p:nvSpPr>
         <p:spPr>
@@ -2758,7 +2500,7 @@
         <p:txBody>
           <a:bodyPr wrap="square" rtlCol="0"/>
           <a:lstStyle>
-            <a:lvl1pPr algn="l" indent="0" marL="0">
+            <a:lvl1pPr marL="0" indent="0" algn="l">
               <a:buNone/>
               <a:defRPr lang="en-US" sz="3000" b="1" dirty="0">
                 <a:solidFill>
@@ -2768,7 +2510,7 @@
             </a:lvl1pPr>
           </a:lstStyle>
           <a:p>
-            <a:pPr algn="l" indent="0" marL="0">
+            <a:pPr marL="0" indent="0" algn="l">
               <a:buNone/>
             </a:pPr>
             <a:endParaRPr lang="en-US" sz="3000" dirty="0"/>
@@ -2786,6 +2528,11 @@
 <file path=ppt/slideMasters/slideMaster1.xml><?xml version="1.0" encoding="utf-8"?>
 <p:sldMaster xmlns:a="http://schemas.openxmlformats.org/drawingml/2006/main" xmlns:r="http://schemas.openxmlformats.org/officeDocument/2006/relationships" xmlns:p="http://schemas.openxmlformats.org/presentationml/2006/main">
   <p:cSld>
+    <p:bg>
+      <p:bgRef idx="1001">
+        <a:schemeClr val="bg1"/>
+      </p:bgRef>
+    </p:bg>
     <p:spTree>
       <p:nvGrpSpPr>
         <p:cNvPr id="1" name=""/>
@@ -2820,7 +2567,7 @@
           </a:prstGeom>
           <a:extLst>
             <a:ext uri="{C572A759-6A51-4108-AA02-DFA0A04FC94B}">
-              <ma14:wrappingTextBoxFlag xmlns:ma14="http://schemas.microsoft.com/office/mac/drawingml/2011/main" val="0"/>
+              <ma14:wrappingTextBoxFlag xmlns:ma14="http://schemas.microsoft.com/office/mac/drawingml/2011/main" xmlns="" val="0"/>
             </a:ext>
           </a:extLst>
         </p:spPr>
@@ -2838,8 +2585,8 @@
           <a:p>
             <a:pPr algn="r"/>
             <a:fld id="{F7021451-1387-4CA6-816F-3879F97B5CBC}" type="slidenum">
-              <a:rPr b="0" lang="en-US"/>
-              <a:t>null</a:t>
+              <a:rPr lang="en-US" b="0"/>
+              <a:t>‹#›</a:t>
             </a:fld>
             <a:endParaRPr lang="en-US"/>
           </a:p>
@@ -3126,14 +2873,14 @@
       </p:grpSpPr>
       <p:pic>
         <p:nvPicPr>
-          <p:cNvPr id="2" name="앱 아이콘" descr="C:\Users\user\Desktop\albaguard기술창업\public\icon-512.png">    </p:cNvPr>
+          <p:cNvPr id="2" name="앱 아이콘" descr="C:\Users\user\Desktop\albaguard기술창업\public\icon-512.png"/>
           <p:cNvPicPr>
             <a:picLocks noChangeAspect="1"/>
           </p:cNvPicPr>
           <p:nvPr/>
         </p:nvPicPr>
         <p:blipFill>
-          <a:blip r:embed="rId1"/>
+          <a:blip r:embed="rId3"/>
           <a:stretch>
             <a:fillRect/>
           </a:stretch>
@@ -3169,7 +2916,7 @@
           <a:bodyPr wrap="square" lIns="0" tIns="0" rIns="0" bIns="0" rtlCol="0" anchor="ctr"/>
           <a:lstStyle/>
           <a:p>
-            <a:pPr indent="0" marL="0">
+            <a:pPr marL="0" indent="0">
               <a:buNone/>
             </a:pPr>
             <a:r>
@@ -3205,7 +2952,7 @@
           <a:bodyPr wrap="square" lIns="0" tIns="0" rIns="0" bIns="0" rtlCol="0" anchor="ctr"/>
           <a:lstStyle/>
           <a:p>
-            <a:pPr indent="0" marL="0">
+            <a:pPr marL="0" indent="0">
               <a:buNone/>
             </a:pPr>
             <a:r>
@@ -3266,7 +3013,7 @@
           <a:bodyPr wrap="square" lIns="0" tIns="0" rIns="0" bIns="0" rtlCol="0" anchor="ctr"/>
           <a:lstStyle/>
           <a:p>
-            <a:pPr indent="0" marL="0">
+            <a:pPr marL="0" indent="0">
               <a:buNone/>
             </a:pPr>
             <a:r>
@@ -3302,7 +3049,7 @@
           <a:bodyPr wrap="square" lIns="0" tIns="0" rIns="0" bIns="0" rtlCol="0" anchor="ctr"/>
           <a:lstStyle/>
           <a:p>
-            <a:pPr algn="r" indent="0" marL="0">
+            <a:pPr marL="0" indent="0" algn="r">
               <a:buNone/>
             </a:pPr>
             <a:r>
@@ -3363,7 +3110,7 @@
           <a:bodyPr wrap="square" lIns="0" tIns="0" rIns="0" bIns="0" rtlCol="0" anchor="ctr"/>
           <a:lstStyle/>
           <a:p>
-            <a:pPr indent="0" marL="0">
+            <a:pPr marL="0" indent="0">
               <a:buNone/>
             </a:pPr>
             <a:r>
@@ -3399,7 +3146,7 @@
           <a:bodyPr wrap="square" lIns="0" tIns="0" rIns="0" bIns="0" rtlCol="0" anchor="ctr"/>
           <a:lstStyle/>
           <a:p>
-            <a:pPr indent="0" marL="0">
+            <a:pPr marL="0" indent="0">
               <a:buNone/>
             </a:pPr>
             <a:r>
@@ -3435,7 +3182,7 @@
           <a:bodyPr wrap="square" lIns="0" tIns="0" rIns="0" bIns="0" rtlCol="0" anchor="ctr"/>
           <a:lstStyle/>
           <a:p>
-            <a:pPr indent="0" marL="0">
+            <a:pPr marL="0" indent="0">
               <a:buNone/>
             </a:pPr>
             <a:r>
@@ -3471,7 +3218,7 @@
           <a:bodyPr wrap="square" lIns="0" tIns="0" rIns="0" bIns="0" rtlCol="0" anchor="ctr"/>
           <a:lstStyle/>
           <a:p>
-            <a:pPr indent="0" marL="0">
+            <a:pPr marL="0" indent="0">
               <a:buNone/>
             </a:pPr>
             <a:r>
@@ -3507,7 +3254,7 @@
           <a:bodyPr wrap="square" lIns="0" tIns="0" rIns="0" bIns="0" rtlCol="0" anchor="ctr"/>
           <a:lstStyle/>
           <a:p>
-            <a:pPr indent="0" marL="0">
+            <a:pPr marL="0" indent="0">
               <a:buNone/>
             </a:pPr>
             <a:r>
@@ -3568,7 +3315,7 @@
           <a:bodyPr wrap="square" lIns="0" tIns="0" rIns="0" bIns="0" rtlCol="0" anchor="ctr"/>
           <a:lstStyle/>
           <a:p>
-            <a:pPr indent="0" marL="0">
+            <a:pPr marL="0" indent="0">
               <a:buNone/>
             </a:pPr>
             <a:r>
@@ -3604,7 +3351,7 @@
           <a:bodyPr wrap="square" lIns="0" tIns="0" rIns="0" bIns="0" rtlCol="0" anchor="t"/>
           <a:lstStyle/>
           <a:p>
-            <a:pPr indent="0" marL="0">
+            <a:pPr marL="0" indent="0">
               <a:spcAft>
                 <a:spcPts val="200"/>
               </a:spcAft>
@@ -3621,7 +3368,7 @@
             <a:endParaRPr lang="en-US" sz="1250" dirty="0"/>
           </a:p>
           <a:p>
-            <a:pPr indent="0" marL="0">
+            <a:pPr marL="0" indent="0">
               <a:spcAft>
                 <a:spcPts val="200"/>
               </a:spcAft>
@@ -3638,7 +3385,7 @@
             <a:endParaRPr lang="en-US" sz="1250" dirty="0"/>
           </a:p>
           <a:p>
-            <a:pPr indent="0" marL="0">
+            <a:pPr marL="0" indent="0">
               <a:spcAft>
                 <a:spcPts val="200"/>
               </a:spcAft>
@@ -3655,7 +3402,7 @@
             <a:endParaRPr lang="en-US" sz="1250" dirty="0"/>
           </a:p>
           <a:p>
-            <a:pPr indent="0" marL="0">
+            <a:pPr marL="0" indent="0">
               <a:spcAft>
                 <a:spcPts val="200"/>
               </a:spcAft>
@@ -3672,7 +3419,7 @@
             <a:endParaRPr lang="en-US" sz="1250" dirty="0"/>
           </a:p>
           <a:p>
-            <a:pPr indent="0" marL="0">
+            <a:pPr marL="0" indent="0">
               <a:spcAft>
                 <a:spcPts val="200"/>
               </a:spcAft>
@@ -3689,7 +3436,7 @@
             <a:endParaRPr lang="en-US" sz="1250" dirty="0"/>
           </a:p>
           <a:p>
-            <a:pPr indent="0" marL="0">
+            <a:pPr marL="0" indent="0">
               <a:spcAft>
                 <a:spcPts val="200"/>
               </a:spcAft>
@@ -3704,36 +3451,6 @@
               <a:t>컴퓨터소프트웨어 18학번</a:t>
             </a:r>
             <a:endParaRPr lang="en-US" sz="1250" dirty="0"/>
-          </a:p>
-        </p:txBody>
-      </p:sp>
-      <p:sp>
-        <p:nvSpPr>
-          <p:cNvPr id="18" name="Text 0"/>
-          <p:cNvSpPr/>
-          <p:nvPr>
-            <p:ph idx="100" type="title" hasCustomPrompt="1"/>
-          </p:nvPr>
-        </p:nvSpPr>
-        <p:spPr>
-          <a:xfrm>
-            <a:off x="548640" y="457200"/>
-            <a:ext cx="8046720" cy="731520"/>
-          </a:xfrm>
-          <a:prstGeom prst="rect">
-            <a:avLst/>
-          </a:prstGeom>
-          <a:noFill/>
-          <a:ln/>
-        </p:spPr>
-        <p:txBody>
-          <a:bodyPr wrap="square" lIns="0" tIns="0" rIns="0" bIns="0" rtlCol="0" anchor="t"/>
-          <a:lstStyle/>
-          <a:p>
-            <a:pPr algn="l" indent="0" marL="0">
-              <a:buNone/>
-            </a:pPr>
-            <a:endParaRPr lang="en-US" sz="3000" dirty="0"/>
           </a:p>
         </p:txBody>
       </p:sp>
@@ -3765,9 +3482,11 @@
       <p:sp>
         <p:nvSpPr>
           <p:cNvPr id="2" name="Text 1"/>
-          <p:cNvSpPr/>
+          <p:cNvSpPr>
+            <a:spLocks noGrp="1"/>
+          </p:cNvSpPr>
           <p:nvPr>
-            <p:ph idx="101" type="body" hasCustomPrompt="1"/>
+            <p:ph type="body" idx="101" hasCustomPrompt="1"/>
           </p:nvPr>
         </p:nvSpPr>
         <p:spPr>
@@ -3785,7 +3504,7 @@
           <a:bodyPr wrap="square" lIns="0" tIns="0" rIns="0" bIns="0" rtlCol="0"/>
           <a:lstStyle/>
           <a:p>
-            <a:pPr indent="0" marL="0">
+            <a:pPr marL="0" indent="0">
               <a:buNone/>
             </a:pPr>
             <a:r>
@@ -3803,9 +3522,11 @@
       <p:sp>
         <p:nvSpPr>
           <p:cNvPr id="3" name="Text 1"/>
-          <p:cNvSpPr/>
+          <p:cNvSpPr>
+            <a:spLocks noGrp="1"/>
+          </p:cNvSpPr>
           <p:nvPr>
-            <p:ph idx="102" type="title" hasCustomPrompt="1"/>
+            <p:ph type="title" idx="102" hasCustomPrompt="1"/>
           </p:nvPr>
         </p:nvSpPr>
         <p:spPr>
@@ -3823,7 +3544,7 @@
           <a:bodyPr wrap="square" lIns="0" tIns="0" rIns="0" bIns="0" rtlCol="0" anchor="t"/>
           <a:lstStyle/>
           <a:p>
-            <a:pPr algn="l" indent="0" marL="0">
+            <a:pPr marL="0" indent="0" algn="l">
               <a:buNone/>
             </a:pPr>
             <a:r>
@@ -3884,7 +3605,7 @@
           <a:bodyPr wrap="square" lIns="0" tIns="0" rIns="0" bIns="0" rtlCol="0" anchor="ctr"/>
           <a:lstStyle/>
           <a:p>
-            <a:pPr algn="ctr" indent="0" marL="0">
+            <a:pPr marL="0" indent="0" algn="ctr">
               <a:buNone/>
             </a:pPr>
             <a:r>
@@ -3920,7 +3641,7 @@
           <a:bodyPr wrap="square" lIns="0" tIns="0" rIns="0" bIns="0" rtlCol="0" anchor="ctr"/>
           <a:lstStyle/>
           <a:p>
-            <a:pPr indent="0" marL="0">
+            <a:pPr marL="0" indent="0">
               <a:buNone/>
             </a:pPr>
             <a:r>
@@ -3956,7 +3677,7 @@
           <a:bodyPr wrap="square" lIns="0" tIns="0" rIns="0" bIns="0" rtlCol="0" anchor="t"/>
           <a:lstStyle/>
           <a:p>
-            <a:pPr indent="0" marL="0">
+            <a:pPr marL="0" indent="0">
               <a:buNone/>
             </a:pPr>
             <a:r>
@@ -4017,7 +3738,7 @@
           <a:bodyPr wrap="square" lIns="0" tIns="0" rIns="0" bIns="0" rtlCol="0" anchor="ctr"/>
           <a:lstStyle/>
           <a:p>
-            <a:pPr algn="ctr" indent="0" marL="0">
+            <a:pPr marL="0" indent="0" algn="ctr">
               <a:buNone/>
             </a:pPr>
             <a:r>
@@ -4053,7 +3774,7 @@
           <a:bodyPr wrap="square" lIns="0" tIns="0" rIns="0" bIns="0" rtlCol="0" anchor="ctr"/>
           <a:lstStyle/>
           <a:p>
-            <a:pPr indent="0" marL="0">
+            <a:pPr marL="0" indent="0">
               <a:buNone/>
             </a:pPr>
             <a:r>
@@ -4089,7 +3810,7 @@
           <a:bodyPr wrap="square" lIns="0" tIns="0" rIns="0" bIns="0" rtlCol="0" anchor="t"/>
           <a:lstStyle/>
           <a:p>
-            <a:pPr indent="0" marL="0">
+            <a:pPr marL="0" indent="0">
               <a:buNone/>
             </a:pPr>
             <a:r>
@@ -4150,7 +3871,7 @@
           <a:bodyPr wrap="square" lIns="0" tIns="0" rIns="0" bIns="0" rtlCol="0" anchor="ctr"/>
           <a:lstStyle/>
           <a:p>
-            <a:pPr algn="ctr" indent="0" marL="0">
+            <a:pPr marL="0" indent="0" algn="ctr">
               <a:buNone/>
             </a:pPr>
             <a:r>
@@ -4186,7 +3907,7 @@
           <a:bodyPr wrap="square" lIns="0" tIns="0" rIns="0" bIns="0" rtlCol="0" anchor="ctr"/>
           <a:lstStyle/>
           <a:p>
-            <a:pPr indent="0" marL="0">
+            <a:pPr marL="0" indent="0">
               <a:buNone/>
             </a:pPr>
             <a:r>
@@ -4222,7 +3943,7 @@
           <a:bodyPr wrap="square" lIns="0" tIns="0" rIns="0" bIns="0" rtlCol="0" anchor="t"/>
           <a:lstStyle/>
           <a:p>
-            <a:pPr indent="0" marL="0">
+            <a:pPr marL="0" indent="0">
               <a:buNone/>
             </a:pPr>
             <a:r>
@@ -4283,7 +4004,7 @@
           <a:bodyPr wrap="square" lIns="0" tIns="0" rIns="0" bIns="0" rtlCol="0" anchor="ctr"/>
           <a:lstStyle/>
           <a:p>
-            <a:pPr algn="ctr" indent="0" marL="0">
+            <a:pPr marL="0" indent="0" algn="ctr">
               <a:buNone/>
             </a:pPr>
             <a:r>
@@ -4319,7 +4040,7 @@
           <a:bodyPr wrap="square" lIns="0" tIns="0" rIns="0" bIns="0" rtlCol="0" anchor="ctr"/>
           <a:lstStyle/>
           <a:p>
-            <a:pPr indent="0" marL="0">
+            <a:pPr marL="0" indent="0">
               <a:buNone/>
             </a:pPr>
             <a:r>
@@ -4355,7 +4076,7 @@
           <a:bodyPr wrap="square" lIns="0" tIns="0" rIns="0" bIns="0" rtlCol="0" anchor="t"/>
           <a:lstStyle/>
           <a:p>
-            <a:pPr indent="0" marL="0">
+            <a:pPr marL="0" indent="0">
               <a:buNone/>
             </a:pPr>
             <a:r>
@@ -4390,7 +4111,7 @@
           </a:prstGeom>
           <a:extLst>
             <a:ext uri="{C572A759-6A51-4108-AA02-DFA0A04FC94B}">
-              <ma14:wrappingTextBoxFlag xmlns:ma14="http://schemas.microsoft.com/office/mac/drawingml/2011/main" val="0"/>
+              <ma14:wrappingTextBoxFlag xmlns:ma14="http://schemas.microsoft.com/office/mac/drawingml/2011/main" xmlns="" val="0"/>
             </a:ext>
           </a:extLst>
         </p:spPr>
@@ -4408,7 +4129,7 @@
           <a:p>
             <a:pPr algn="r"/>
             <a:fld id="{F7021451-1387-4CA6-816F-3879F97B5CBC}" type="slidenum">
-              <a:rPr b="0" lang="en-US"/>
+              <a:rPr lang="en-US" b="0"/>
               <a:t>10</a:t>
             </a:fld>
             <a:endParaRPr lang="en-US"/>
@@ -4449,16 +4170,16 @@
             <a:picLocks noChangeAspect="1"/>
           </p:cNvPicPr>
           <p:nvPr>
-            <a:videoFile r:link="rId1"/>
+            <a:videoFile r:link="rId2"/>
             <p:extLst>
               <p:ext uri="{DAA4B4D4-6D71-4841-9C94-3DE7FCFB9230}">
-                <p14:media xmlns:p14="http://schemas.microsoft.com/office/powerpoint/2010/main" r:embed="rId2"/>
+                <p14:media xmlns:p14="http://schemas.microsoft.com/office/powerpoint/2010/main" r:embed="rId1"/>
               </p:ext>
             </p:extLst>
           </p:nvPr>
         </p:nvPicPr>
         <p:blipFill>
-          <a:blip r:embed="rId3"/>
+          <a:blip r:embed="rId5"/>
           <a:stretch>
             <a:fillRect/>
           </a:stretch>
@@ -4473,66 +4194,6 @@
           </a:prstGeom>
         </p:spPr>
       </p:pic>
-      <p:sp>
-        <p:nvSpPr>
-          <p:cNvPr id="4" name="Text 1"/>
-          <p:cNvSpPr/>
-          <p:nvPr>
-            <p:ph idx="101" type="body" hasCustomPrompt="1"/>
-          </p:nvPr>
-        </p:nvSpPr>
-        <p:spPr>
-          <a:xfrm>
-            <a:off x="457200" y="274320"/>
-            <a:ext cx="7772400" cy="256032"/>
-          </a:xfrm>
-          <a:prstGeom prst="rect">
-            <a:avLst/>
-          </a:prstGeom>
-          <a:noFill/>
-          <a:ln/>
-        </p:spPr>
-        <p:txBody>
-          <a:bodyPr wrap="square" lIns="0" tIns="0" rIns="0" bIns="0" rtlCol="0"/>
-          <a:lstStyle/>
-          <a:p>
-            <a:pPr indent="0" marL="0">
-              <a:buNone/>
-            </a:pPr>
-            <a:endParaRPr lang="en-US" sz="1050" dirty="0"/>
-          </a:p>
-        </p:txBody>
-      </p:sp>
-      <p:sp>
-        <p:nvSpPr>
-          <p:cNvPr id="5" name="Text 1"/>
-          <p:cNvSpPr/>
-          <p:nvPr>
-            <p:ph idx="102" type="title" hasCustomPrompt="1"/>
-          </p:nvPr>
-        </p:nvSpPr>
-        <p:spPr>
-          <a:xfrm>
-            <a:off x="457200" y="502920"/>
-            <a:ext cx="8229600" cy="566928"/>
-          </a:xfrm>
-          <a:prstGeom prst="rect">
-            <a:avLst/>
-          </a:prstGeom>
-          <a:noFill/>
-          <a:ln/>
-        </p:spPr>
-        <p:txBody>
-          <a:bodyPr wrap="square" lIns="0" tIns="0" rIns="0" bIns="0" rtlCol="0" anchor="t"/>
-          <a:lstStyle/>
-          <a:p>
-            <a:pPr algn="l" indent="0" marL="0">
-              <a:buNone/>
-            </a:pPr>
-            <a:endParaRPr lang="en-US" sz="2400" dirty="0"/>
-          </a:p>
-        </p:txBody>
-      </p:sp>
       <p:sp>
         <p:nvSpPr>
           <p:cNvPr id="25" name="Slide Number Placeholder 0"/>
@@ -4553,7 +4214,7 @@
           </a:prstGeom>
           <a:extLst>
             <a:ext uri="{C572A759-6A51-4108-AA02-DFA0A04FC94B}">
-              <ma14:wrappingTextBoxFlag xmlns:ma14="http://schemas.microsoft.com/office/mac/drawingml/2011/main" val="0"/>
+              <ma14:wrappingTextBoxFlag xmlns:ma14="http://schemas.microsoft.com/office/mac/drawingml/2011/main" xmlns="" val="0"/>
             </a:ext>
           </a:extLst>
         </p:spPr>
@@ -4571,7 +4232,7 @@
           <a:p>
             <a:pPr algn="r"/>
             <a:fld id="{F7021451-1387-4CA6-816F-3879F97B5CBC}" type="slidenum">
-              <a:rPr b="0" lang="en-US"/>
+              <a:rPr lang="en-US" b="0"/>
               <a:t>11</a:t>
             </a:fld>
             <a:endParaRPr lang="en-US"/>
@@ -4606,9 +4267,11 @@
       <p:sp>
         <p:nvSpPr>
           <p:cNvPr id="2" name="Text 1"/>
-          <p:cNvSpPr/>
+          <p:cNvSpPr>
+            <a:spLocks noGrp="1"/>
+          </p:cNvSpPr>
           <p:nvPr>
-            <p:ph idx="101" type="body" hasCustomPrompt="1"/>
+            <p:ph type="body" idx="101" hasCustomPrompt="1"/>
           </p:nvPr>
         </p:nvSpPr>
         <p:spPr>
@@ -4626,7 +4289,7 @@
           <a:bodyPr wrap="square" lIns="0" tIns="0" rIns="0" bIns="0" rtlCol="0"/>
           <a:lstStyle/>
           <a:p>
-            <a:pPr indent="0" marL="0">
+            <a:pPr marL="0" indent="0">
               <a:buNone/>
             </a:pPr>
             <a:r>
@@ -4644,9 +4307,11 @@
       <p:sp>
         <p:nvSpPr>
           <p:cNvPr id="3" name="Text 1"/>
-          <p:cNvSpPr/>
+          <p:cNvSpPr>
+            <a:spLocks noGrp="1"/>
+          </p:cNvSpPr>
           <p:nvPr>
-            <p:ph idx="102" type="title" hasCustomPrompt="1"/>
+            <p:ph type="title" idx="102" hasCustomPrompt="1"/>
           </p:nvPr>
         </p:nvSpPr>
         <p:spPr>
@@ -4664,7 +4329,7 @@
           <a:bodyPr wrap="square" lIns="0" tIns="0" rIns="0" bIns="0" rtlCol="0" anchor="t"/>
           <a:lstStyle/>
           <a:p>
-            <a:pPr algn="l" indent="0" marL="0">
+            <a:pPr marL="0" indent="0" algn="l">
               <a:buNone/>
             </a:pPr>
             <a:r>
@@ -4700,7 +4365,7 @@
           <a:bodyPr wrap="square" lIns="0" tIns="0" rIns="0" bIns="0" rtlCol="0" anchor="ctr"/>
           <a:lstStyle/>
           <a:p>
-            <a:pPr algn="ctr" indent="0" marL="0">
+            <a:pPr marL="0" indent="0" algn="ctr">
               <a:buNone/>
             </a:pPr>
             <a:r>
@@ -4736,7 +4401,7 @@
           <a:bodyPr wrap="square" lIns="0" tIns="0" rIns="0" bIns="0" rtlCol="0" anchor="ctr"/>
           <a:lstStyle/>
           <a:p>
-            <a:pPr algn="ctr" indent="0" marL="0">
+            <a:pPr marL="0" indent="0" algn="ctr">
               <a:buNone/>
             </a:pPr>
             <a:r>
@@ -4772,7 +4437,7 @@
           <a:bodyPr wrap="square" lIns="0" tIns="0" rIns="0" bIns="0" rtlCol="0" anchor="ctr"/>
           <a:lstStyle/>
           <a:p>
-            <a:pPr algn="ctr" indent="0" marL="0">
+            <a:pPr marL="0" indent="0" algn="ctr">
               <a:buNone/>
             </a:pPr>
             <a:r>
@@ -4808,7 +4473,7 @@
           <a:bodyPr wrap="square" lIns="0" tIns="0" rIns="0" bIns="0" rtlCol="0" anchor="ctr"/>
           <a:lstStyle/>
           <a:p>
-            <a:pPr indent="0" marL="0">
+            <a:pPr marL="0" indent="0">
               <a:buNone/>
             </a:pPr>
             <a:r>
@@ -4844,7 +4509,7 @@
           <a:bodyPr wrap="square" lIns="0" tIns="0" rIns="0" bIns="0" rtlCol="0" anchor="ctr"/>
           <a:lstStyle/>
           <a:p>
-            <a:pPr indent="0" marL="0">
+            <a:pPr marL="0" indent="0">
               <a:buNone/>
             </a:pPr>
             <a:r>
@@ -4934,7 +4599,7 @@
           <a:bodyPr wrap="square" lIns="0" tIns="0" rIns="0" bIns="0" rtlCol="0" anchor="ctr"/>
           <a:lstStyle/>
           <a:p>
-            <a:pPr indent="0" marL="0">
+            <a:pPr marL="0" indent="0">
               <a:buNone/>
             </a:pPr>
             <a:r>
@@ -5045,7 +4710,7 @@
           <a:bodyPr wrap="square" lIns="0" tIns="0" rIns="0" bIns="0" rtlCol="0" anchor="ctr"/>
           <a:lstStyle/>
           <a:p>
-            <a:pPr indent="0" marL="0">
+            <a:pPr marL="0" indent="0">
               <a:buNone/>
             </a:pPr>
             <a:r>
@@ -5104,7 +4769,7 @@
           <a:bodyPr wrap="square" lIns="0" tIns="0" rIns="0" bIns="0" rtlCol="0" anchor="ctr"/>
           <a:lstStyle/>
           <a:p>
-            <a:pPr indent="0" marL="0">
+            <a:pPr marL="0" indent="0">
               <a:buNone/>
             </a:pPr>
             <a:r>
@@ -5194,7 +4859,7 @@
           <a:bodyPr wrap="square" lIns="0" tIns="0" rIns="0" bIns="0" rtlCol="0" anchor="ctr"/>
           <a:lstStyle/>
           <a:p>
-            <a:pPr indent="0" marL="0">
+            <a:pPr marL="0" indent="0">
               <a:buNone/>
             </a:pPr>
             <a:r>
@@ -5305,7 +4970,7 @@
           <a:bodyPr wrap="square" lIns="0" tIns="0" rIns="0" bIns="0" rtlCol="0" anchor="ctr"/>
           <a:lstStyle/>
           <a:p>
-            <a:pPr indent="0" marL="0">
+            <a:pPr marL="0" indent="0">
               <a:buNone/>
             </a:pPr>
             <a:r>
@@ -5364,7 +5029,7 @@
           <a:bodyPr wrap="square" lIns="0" tIns="0" rIns="0" bIns="0" rtlCol="0" anchor="ctr"/>
           <a:lstStyle/>
           <a:p>
-            <a:pPr indent="0" marL="0">
+            <a:pPr marL="0" indent="0">
               <a:buNone/>
             </a:pPr>
             <a:r>
@@ -5454,7 +5119,7 @@
           <a:bodyPr wrap="square" lIns="0" tIns="0" rIns="0" bIns="0" rtlCol="0" anchor="ctr"/>
           <a:lstStyle/>
           <a:p>
-            <a:pPr indent="0" marL="0">
+            <a:pPr marL="0" indent="0">
               <a:buNone/>
             </a:pPr>
             <a:r>
@@ -5565,7 +5230,7 @@
           <a:bodyPr wrap="square" lIns="0" tIns="0" rIns="0" bIns="0" rtlCol="0" anchor="ctr"/>
           <a:lstStyle/>
           <a:p>
-            <a:pPr indent="0" marL="0">
+            <a:pPr marL="0" indent="0">
               <a:buNone/>
             </a:pPr>
             <a:r>
@@ -5624,7 +5289,7 @@
           <a:bodyPr wrap="square" lIns="0" tIns="0" rIns="0" bIns="0" rtlCol="0" anchor="ctr"/>
           <a:lstStyle/>
           <a:p>
-            <a:pPr indent="0" marL="0">
+            <a:pPr marL="0" indent="0">
               <a:buNone/>
             </a:pPr>
             <a:r>
@@ -5714,7 +5379,7 @@
           <a:bodyPr wrap="square" lIns="0" tIns="0" rIns="0" bIns="0" rtlCol="0" anchor="ctr"/>
           <a:lstStyle/>
           <a:p>
-            <a:pPr indent="0" marL="0">
+            <a:pPr marL="0" indent="0">
               <a:buNone/>
             </a:pPr>
             <a:r>
@@ -5825,7 +5490,7 @@
           <a:bodyPr wrap="square" lIns="0" tIns="0" rIns="0" bIns="0" rtlCol="0" anchor="ctr"/>
           <a:lstStyle/>
           <a:p>
-            <a:pPr indent="0" marL="0">
+            <a:pPr marL="0" indent="0">
               <a:buNone/>
             </a:pPr>
             <a:r>
@@ -5884,7 +5549,7 @@
           <a:bodyPr wrap="square" lIns="0" tIns="0" rIns="0" bIns="0" rtlCol="0" anchor="ctr"/>
           <a:lstStyle/>
           <a:p>
-            <a:pPr indent="0" marL="0">
+            <a:pPr marL="0" indent="0">
               <a:buNone/>
             </a:pPr>
             <a:r>
@@ -5974,7 +5639,7 @@
           <a:bodyPr wrap="square" lIns="0" tIns="0" rIns="0" bIns="0" rtlCol="0" anchor="ctr"/>
           <a:lstStyle/>
           <a:p>
-            <a:pPr indent="0" marL="0">
+            <a:pPr marL="0" indent="0">
               <a:buNone/>
             </a:pPr>
             <a:r>
@@ -6085,7 +5750,7 @@
           <a:bodyPr wrap="square" lIns="0" tIns="0" rIns="0" bIns="0" rtlCol="0" anchor="ctr"/>
           <a:lstStyle/>
           <a:p>
-            <a:pPr indent="0" marL="0">
+            <a:pPr marL="0" indent="0">
               <a:buNone/>
             </a:pPr>
             <a:r>
@@ -6144,7 +5809,7 @@
           <a:bodyPr wrap="square" lIns="0" tIns="0" rIns="0" bIns="0" rtlCol="0" anchor="ctr"/>
           <a:lstStyle/>
           <a:p>
-            <a:pPr indent="0" marL="0">
+            <a:pPr marL="0" indent="0">
               <a:buNone/>
             </a:pPr>
             <a:r>
@@ -6234,7 +5899,7 @@
           <a:bodyPr wrap="square" lIns="0" tIns="0" rIns="0" bIns="0" rtlCol="0" anchor="ctr"/>
           <a:lstStyle/>
           <a:p>
-            <a:pPr indent="0" marL="0">
+            <a:pPr marL="0" indent="0">
               <a:buNone/>
             </a:pPr>
             <a:r>
@@ -6345,7 +6010,7 @@
           <a:bodyPr wrap="square" lIns="0" tIns="0" rIns="0" bIns="0" rtlCol="0" anchor="ctr"/>
           <a:lstStyle/>
           <a:p>
-            <a:pPr indent="0" marL="0">
+            <a:pPr marL="0" indent="0">
               <a:buNone/>
             </a:pPr>
             <a:r>
@@ -6404,7 +6069,7 @@
           <a:bodyPr wrap="square" lIns="0" tIns="0" rIns="0" bIns="0" rtlCol="0" anchor="ctr"/>
           <a:lstStyle/>
           <a:p>
-            <a:pPr indent="0" marL="0">
+            <a:pPr marL="0" indent="0">
               <a:buNone/>
             </a:pPr>
             <a:r>
@@ -6494,7 +6159,7 @@
           <a:bodyPr wrap="square" lIns="0" tIns="0" rIns="0" bIns="0" rtlCol="0" anchor="ctr"/>
           <a:lstStyle/>
           <a:p>
-            <a:pPr indent="0" marL="0">
+            <a:pPr marL="0" indent="0">
               <a:buNone/>
             </a:pPr>
             <a:r>
@@ -6605,7 +6270,7 @@
           <a:bodyPr wrap="square" lIns="0" tIns="0" rIns="0" bIns="0" rtlCol="0" anchor="ctr"/>
           <a:lstStyle/>
           <a:p>
-            <a:pPr indent="0" marL="0">
+            <a:pPr marL="0" indent="0">
               <a:buNone/>
             </a:pPr>
             <a:r>
@@ -6664,7 +6329,7 @@
           <a:bodyPr wrap="square" lIns="0" tIns="0" rIns="0" bIns="0" rtlCol="0" anchor="ctr"/>
           <a:lstStyle/>
           <a:p>
-            <a:pPr indent="0" marL="0">
+            <a:pPr marL="0" indent="0">
               <a:buNone/>
             </a:pPr>
             <a:r>
@@ -6754,7 +6419,7 @@
           <a:bodyPr wrap="square" lIns="0" tIns="0" rIns="0" bIns="0" rtlCol="0" anchor="ctr"/>
           <a:lstStyle/>
           <a:p>
-            <a:pPr indent="0" marL="0">
+            <a:pPr marL="0" indent="0">
               <a:buNone/>
             </a:pPr>
             <a:r>
@@ -6865,7 +6530,7 @@
           <a:bodyPr wrap="square" lIns="0" tIns="0" rIns="0" bIns="0" rtlCol="0" anchor="ctr"/>
           <a:lstStyle/>
           <a:p>
-            <a:pPr indent="0" marL="0">
+            <a:pPr marL="0" indent="0">
               <a:buNone/>
             </a:pPr>
             <a:r>
@@ -6924,7 +6589,7 @@
           <a:bodyPr wrap="square" lIns="0" tIns="0" rIns="0" bIns="0" rtlCol="0" anchor="ctr"/>
           <a:lstStyle/>
           <a:p>
-            <a:pPr indent="0" marL="0">
+            <a:pPr marL="0" indent="0">
               <a:buNone/>
             </a:pPr>
             <a:r>
@@ -6935,9 +6600,6 @@
               </a:rPr>
               <a:t>계획 기준  </a:t>
             </a:r>
-            <a:pPr indent="0" marL="0">
-              <a:buNone/>
-            </a:pPr>
             <a:r>
               <a:rPr lang="en-US" sz="1050" dirty="0">
                 <a:solidFill>
@@ -6946,9 +6608,6 @@
               </a:rPr>
               <a:t>정의서 기능 8개      </a:t>
             </a:r>
-            <a:pPr indent="0" marL="0">
-              <a:buNone/>
-            </a:pPr>
             <a:r>
               <a:rPr lang="en-US" sz="1050" b="1" dirty="0">
                 <a:solidFill>
@@ -6957,9 +6616,6 @@
               </a:rPr>
               <a:t>% 기준  </a:t>
             </a:r>
-            <a:pPr indent="0" marL="0">
-              <a:buNone/>
-            </a:pPr>
             <a:r>
               <a:rPr lang="en-US" sz="1050" dirty="0">
                 <a:solidFill>
@@ -6974,7 +6630,7 @@
       </p:sp>
       <p:sp>
         <p:nvSpPr>
-          <p:cNvPr id="25" name="Slide Number Placeholder 0"/>
+          <p:cNvPr id="81" name="Slide Number Placeholder 0"/>
           <p:cNvSpPr>
             <a:spLocks noGrp="1"/>
           </p:cNvSpPr>
@@ -6992,7 +6648,7 @@
           </a:prstGeom>
           <a:extLst>
             <a:ext uri="{C572A759-6A51-4108-AA02-DFA0A04FC94B}">
-              <ma14:wrappingTextBoxFlag xmlns:ma14="http://schemas.microsoft.com/office/mac/drawingml/2011/main" val="0"/>
+              <ma14:wrappingTextBoxFlag xmlns:ma14="http://schemas.microsoft.com/office/mac/drawingml/2011/main" xmlns="" val="0"/>
             </a:ext>
           </a:extLst>
         </p:spPr>
@@ -7010,7 +6666,7 @@
           <a:p>
             <a:pPr algn="r"/>
             <a:fld id="{F7021451-1387-4CA6-816F-3879F97B5CBC}" type="slidenum">
-              <a:rPr b="0" lang="en-US"/>
+              <a:rPr lang="en-US" b="0"/>
               <a:t>12</a:t>
             </a:fld>
             <a:endParaRPr lang="en-US"/>
@@ -7045,9 +6701,11 @@
       <p:sp>
         <p:nvSpPr>
           <p:cNvPr id="2" name="Text 1"/>
-          <p:cNvSpPr/>
+          <p:cNvSpPr>
+            <a:spLocks noGrp="1"/>
+          </p:cNvSpPr>
           <p:nvPr>
-            <p:ph idx="101" type="body" hasCustomPrompt="1"/>
+            <p:ph type="body" idx="101" hasCustomPrompt="1"/>
           </p:nvPr>
         </p:nvSpPr>
         <p:spPr>
@@ -7065,7 +6723,7 @@
           <a:bodyPr wrap="square" lIns="0" tIns="0" rIns="0" bIns="0" rtlCol="0"/>
           <a:lstStyle/>
           <a:p>
-            <a:pPr indent="0" marL="0">
+            <a:pPr marL="0" indent="0">
               <a:buNone/>
             </a:pPr>
             <a:r>
@@ -7083,9 +6741,11 @@
       <p:sp>
         <p:nvSpPr>
           <p:cNvPr id="3" name="Text 1"/>
-          <p:cNvSpPr/>
+          <p:cNvSpPr>
+            <a:spLocks noGrp="1"/>
+          </p:cNvSpPr>
           <p:nvPr>
-            <p:ph idx="102" type="title" hasCustomPrompt="1"/>
+            <p:ph type="title" idx="102" hasCustomPrompt="1"/>
           </p:nvPr>
         </p:nvSpPr>
         <p:spPr>
@@ -7103,7 +6763,7 @@
           <a:bodyPr wrap="square" lIns="0" tIns="0" rIns="0" bIns="0" rtlCol="0" anchor="t"/>
           <a:lstStyle/>
           <a:p>
-            <a:pPr algn="l" indent="0" marL="0">
+            <a:pPr marL="0" indent="0" algn="l">
               <a:buNone/>
             </a:pPr>
             <a:r>
@@ -7120,7 +6780,7 @@
       </p:sp>
       <p:graphicFrame>
         <p:nvGraphicFramePr>
-          <p:cNvPr id="4" name="Chart 0" descr=""/>
+          <p:cNvPr id="4" name="Chart 0"/>
           <p:cNvGraphicFramePr/>
           <p:nvPr/>
         </p:nvGraphicFramePr>
@@ -7128,9 +6788,9 @@
           <a:off x="457200" y="1234440"/>
           <a:ext cx="3840480" cy="2880360"/>
         </p:xfrm>
-        <a:graphic xmlns:a="http://schemas.openxmlformats.org/drawingml/2006/main">
+        <a:graphic>
           <a:graphicData uri="http://schemas.openxmlformats.org/drawingml/2006/chart">
-            <c:chart xmlns:c="http://schemas.openxmlformats.org/drawingml/2006/chart" r:id="rId1"/>
+            <c:chart xmlns:c="http://schemas.openxmlformats.org/drawingml/2006/chart" xmlns:r="http://schemas.openxmlformats.org/officeDocument/2006/relationships" r:id="rId3"/>
           </a:graphicData>
         </a:graphic>
       </p:graphicFrame>
@@ -7155,7 +6815,7 @@
           <a:bodyPr wrap="square" lIns="0" tIns="0" rIns="0" bIns="0" rtlCol="0" anchor="b"/>
           <a:lstStyle/>
           <a:p>
-            <a:pPr indent="0" marL="0">
+            <a:pPr marL="0" indent="0">
               <a:buNone/>
             </a:pPr>
             <a:r>
@@ -7191,7 +6851,7 @@
           <a:bodyPr wrap="square" lIns="0" tIns="0" rIns="0" bIns="0" rtlCol="0" anchor="t"/>
           <a:lstStyle/>
           <a:p>
-            <a:pPr indent="0" marL="0">
+            <a:pPr marL="0" indent="0">
               <a:buNone/>
             </a:pPr>
             <a:r>
@@ -7250,7 +6910,7 @@
           <a:bodyPr wrap="square" lIns="0" tIns="0" rIns="0" bIns="0" rtlCol="0" anchor="b"/>
           <a:lstStyle/>
           <a:p>
-            <a:pPr indent="0" marL="0">
+            <a:pPr marL="0" indent="0">
               <a:buNone/>
             </a:pPr>
             <a:r>
@@ -7286,7 +6946,7 @@
           <a:bodyPr wrap="square" lIns="0" tIns="0" rIns="0" bIns="0" rtlCol="0" anchor="t"/>
           <a:lstStyle/>
           <a:p>
-            <a:pPr indent="0" marL="0">
+            <a:pPr marL="0" indent="0">
               <a:buNone/>
             </a:pPr>
             <a:r>
@@ -7345,7 +7005,7 @@
           <a:bodyPr wrap="square" lIns="0" tIns="0" rIns="0" bIns="0" rtlCol="0" anchor="b"/>
           <a:lstStyle/>
           <a:p>
-            <a:pPr indent="0" marL="0">
+            <a:pPr marL="0" indent="0">
               <a:buNone/>
             </a:pPr>
             <a:r>
@@ -7381,7 +7041,7 @@
           <a:bodyPr wrap="square" lIns="0" tIns="0" rIns="0" bIns="0" rtlCol="0" anchor="t"/>
           <a:lstStyle/>
           <a:p>
-            <a:pPr indent="0" marL="0">
+            <a:pPr marL="0" indent="0">
               <a:buNone/>
             </a:pPr>
             <a:r>
@@ -7440,7 +7100,7 @@
           <a:bodyPr wrap="square" lIns="0" tIns="0" rIns="0" bIns="0" rtlCol="0" anchor="t"/>
           <a:lstStyle/>
           <a:p>
-            <a:pPr indent="0" marL="0">
+            <a:pPr marL="0" indent="0">
               <a:spcAft>
                 <a:spcPts val="100"/>
               </a:spcAft>
@@ -7454,30 +7114,24 @@
               </a:rPr>
               <a:t>타깃 규모(어림)  </a:t>
             </a:r>
-            <a:pPr indent="0" marL="0">
+            <a:r>
+              <a:rPr lang="en-US" sz="1050" dirty="0">
+                <a:solidFill>
+                  <a:schemeClr val="tx1"/>
+                </a:solidFill>
+              </a:rPr>
+              <a:t>재적학생 307만 명 → 알바 경험 67~89% → 상한 약 210~270만 명</a:t>
+            </a:r>
+            <a:endParaRPr lang="en-US" sz="1050" dirty="0"/>
+          </a:p>
+          <a:p>
+            <a:pPr marL="0" indent="0">
               <a:spcAft>
                 <a:spcPts val="100"/>
               </a:spcAft>
               <a:buNone/>
             </a:pPr>
             <a:r>
-              <a:rPr lang="en-US" sz="1050" dirty="0">
-                <a:solidFill>
-                  <a:schemeClr val="tx1"/>
-                </a:solidFill>
-              </a:rPr>
-              <a:t>재적학생 307만 명 → 알바 경험 67~89% → 상한 약 210~270만 명</a:t>
-            </a:r>
-            <a:endParaRPr lang="en-US" sz="1050" dirty="0"/>
-          </a:p>
-          <a:p>
-            <a:pPr indent="0" marL="0">
-              <a:spcAft>
-                <a:spcPts val="100"/>
-              </a:spcAft>
-              <a:buNone/>
-            </a:pPr>
-            <a:r>
               <a:rPr lang="en-US" sz="1050" b="1" dirty="0">
                 <a:solidFill>
                   <a:schemeClr val="tx2"/>
@@ -7485,12 +7139,6 @@
               </a:rPr>
               <a:t>타이밍  </a:t>
             </a:r>
-            <a:pPr indent="0" marL="0">
-              <a:spcAft>
-                <a:spcPts val="100"/>
-              </a:spcAft>
-              <a:buNone/>
-            </a:pPr>
             <a:r>
               <a:rPr lang="en-US" sz="1050" dirty="0">
                 <a:solidFill>
@@ -7523,7 +7171,7 @@
           </a:prstGeom>
           <a:extLst>
             <a:ext uri="{C572A759-6A51-4108-AA02-DFA0A04FC94B}">
-              <ma14:wrappingTextBoxFlag xmlns:ma14="http://schemas.microsoft.com/office/mac/drawingml/2011/main" val="0"/>
+              <ma14:wrappingTextBoxFlag xmlns:ma14="http://schemas.microsoft.com/office/mac/drawingml/2011/main" xmlns="" val="0"/>
             </a:ext>
           </a:extLst>
         </p:spPr>
@@ -7541,7 +7189,7 @@
           <a:p>
             <a:pPr algn="r"/>
             <a:fld id="{F7021451-1387-4CA6-816F-3879F97B5CBC}" type="slidenum">
-              <a:rPr b="0" lang="en-US"/>
+              <a:rPr lang="en-US" b="0"/>
               <a:t>13</a:t>
             </a:fld>
             <a:endParaRPr lang="en-US"/>
@@ -7576,9 +7224,11 @@
       <p:sp>
         <p:nvSpPr>
           <p:cNvPr id="2" name="Text 1"/>
-          <p:cNvSpPr/>
+          <p:cNvSpPr>
+            <a:spLocks noGrp="1"/>
+          </p:cNvSpPr>
           <p:nvPr>
-            <p:ph idx="101" type="body" hasCustomPrompt="1"/>
+            <p:ph type="body" idx="101" hasCustomPrompt="1"/>
           </p:nvPr>
         </p:nvSpPr>
         <p:spPr>
@@ -7596,7 +7246,7 @@
           <a:bodyPr wrap="square" lIns="0" tIns="0" rIns="0" bIns="0" rtlCol="0"/>
           <a:lstStyle/>
           <a:p>
-            <a:pPr indent="0" marL="0">
+            <a:pPr marL="0" indent="0">
               <a:buNone/>
             </a:pPr>
             <a:r>
@@ -7614,9 +7264,11 @@
       <p:sp>
         <p:nvSpPr>
           <p:cNvPr id="3" name="Text 1"/>
-          <p:cNvSpPr/>
+          <p:cNvSpPr>
+            <a:spLocks noGrp="1"/>
+          </p:cNvSpPr>
           <p:nvPr>
-            <p:ph idx="102" type="title" hasCustomPrompt="1"/>
+            <p:ph type="title" idx="102" hasCustomPrompt="1"/>
           </p:nvPr>
         </p:nvSpPr>
         <p:spPr>
@@ -7634,7 +7286,7 @@
           <a:bodyPr wrap="square" lIns="0" tIns="0" rIns="0" bIns="0" rtlCol="0" anchor="t"/>
           <a:lstStyle/>
           <a:p>
-            <a:pPr algn="l" indent="0" marL="0">
+            <a:pPr marL="0" indent="0" algn="l">
               <a:buNone/>
             </a:pPr>
             <a:r>
@@ -7741,7 +7393,7 @@
           <a:bodyPr wrap="square" lIns="0" tIns="0" rIns="0" bIns="0" rtlCol="0" anchor="ctr"/>
           <a:lstStyle/>
           <a:p>
-            <a:pPr indent="0" marL="0">
+            <a:pPr marL="0" indent="0">
               <a:buNone/>
             </a:pPr>
             <a:r>
@@ -7777,7 +7429,7 @@
           <a:bodyPr wrap="square" lIns="0" tIns="0" rIns="0" bIns="0" rtlCol="0" anchor="ctr"/>
           <a:lstStyle/>
           <a:p>
-            <a:pPr algn="r" indent="0" marL="0">
+            <a:pPr marL="0" indent="0" algn="r">
               <a:buNone/>
             </a:pPr>
             <a:r>
@@ -7813,7 +7465,7 @@
           <a:bodyPr wrap="square" lIns="0" tIns="0" rIns="0" bIns="0" rtlCol="0" anchor="ctr"/>
           <a:lstStyle/>
           <a:p>
-            <a:pPr indent="0" marL="0">
+            <a:pPr marL="0" indent="0">
               <a:buNone/>
             </a:pPr>
             <a:r>
@@ -7849,7 +7501,7 @@
           <a:bodyPr wrap="square" lIns="0" tIns="0" rIns="0" bIns="0" rtlCol="0" anchor="ctr"/>
           <a:lstStyle/>
           <a:p>
-            <a:pPr indent="0" marL="0">
+            <a:pPr marL="0" indent="0">
               <a:buNone/>
             </a:pPr>
             <a:r>
@@ -7912,7 +7564,7 @@
           <a:bodyPr wrap="square" lIns="0" tIns="0" rIns="0" bIns="0" rtlCol="0" anchor="ctr"/>
           <a:lstStyle/>
           <a:p>
-            <a:pPr algn="ctr" indent="0" marL="0">
+            <a:pPr marL="0" indent="0" algn="ctr">
               <a:buNone/>
             </a:pPr>
             <a:r>
@@ -7926,7 +7578,7 @@
             <a:endParaRPr lang="en-US" sz="1050" dirty="0"/>
           </a:p>
           <a:p>
-            <a:pPr algn="ctr" indent="0" marL="0">
+            <a:pPr marL="0" indent="0" algn="ctr">
               <a:buNone/>
             </a:pPr>
             <a:r>
@@ -7989,7 +7641,7 @@
           <a:bodyPr wrap="square" lIns="0" tIns="0" rIns="0" bIns="0" rtlCol="0" anchor="ctr"/>
           <a:lstStyle/>
           <a:p>
-            <a:pPr algn="ctr" indent="0" marL="0">
+            <a:pPr marL="0" indent="0" algn="ctr">
               <a:buNone/>
             </a:pPr>
             <a:r>
@@ -8003,7 +7655,7 @@
             <a:endParaRPr lang="en-US" sz="1050" dirty="0"/>
           </a:p>
           <a:p>
-            <a:pPr algn="ctr" indent="0" marL="0">
+            <a:pPr marL="0" indent="0" algn="ctr">
               <a:buNone/>
             </a:pPr>
             <a:r>
@@ -8066,7 +7718,7 @@
           <a:bodyPr wrap="square" lIns="0" tIns="0" rIns="0" bIns="0" rtlCol="0" anchor="ctr"/>
           <a:lstStyle/>
           <a:p>
-            <a:pPr algn="ctr" indent="0" marL="0">
+            <a:pPr marL="0" indent="0" algn="ctr">
               <a:buNone/>
             </a:pPr>
             <a:r>
@@ -8080,7 +7732,7 @@
             <a:endParaRPr lang="en-US" sz="1050" dirty="0"/>
           </a:p>
           <a:p>
-            <a:pPr algn="ctr" indent="0" marL="0">
+            <a:pPr marL="0" indent="0" algn="ctr">
               <a:buNone/>
             </a:pPr>
             <a:r>
@@ -8143,7 +7795,7 @@
           <a:bodyPr wrap="square" lIns="0" tIns="0" rIns="0" bIns="0" rtlCol="0" anchor="ctr"/>
           <a:lstStyle/>
           <a:p>
-            <a:pPr algn="ctr" indent="0" marL="0">
+            <a:pPr marL="0" indent="0" algn="ctr">
               <a:buNone/>
             </a:pPr>
             <a:r>
@@ -8157,7 +7809,7 @@
             <a:endParaRPr lang="en-US" sz="1050" dirty="0"/>
           </a:p>
           <a:p>
-            <a:pPr algn="ctr" indent="0" marL="0">
+            <a:pPr marL="0" indent="0" algn="ctr">
               <a:buNone/>
             </a:pPr>
             <a:r>
@@ -8220,7 +7872,7 @@
           <a:bodyPr wrap="square" lIns="0" tIns="0" rIns="0" bIns="0" rtlCol="0" anchor="ctr"/>
           <a:lstStyle/>
           <a:p>
-            <a:pPr algn="ctr" indent="0" marL="0">
+            <a:pPr marL="0" indent="0" algn="ctr">
               <a:buNone/>
             </a:pPr>
             <a:r>
@@ -8234,7 +7886,7 @@
             <a:endParaRPr lang="en-US" sz="1050" dirty="0"/>
           </a:p>
           <a:p>
-            <a:pPr algn="ctr" indent="0" marL="0">
+            <a:pPr marL="0" indent="0" algn="ctr">
               <a:buNone/>
             </a:pPr>
             <a:r>
@@ -8270,7 +7922,7 @@
           <a:bodyPr wrap="square" lIns="0" tIns="0" rIns="0" bIns="0" rtlCol="0" anchor="t"/>
           <a:lstStyle/>
           <a:p>
-            <a:pPr indent="0" marL="0">
+            <a:pPr marL="0" indent="0">
               <a:buNone/>
             </a:pPr>
             <a:r>
@@ -8306,7 +7958,7 @@
           <a:bodyPr wrap="square" lIns="0" tIns="0" rIns="0" bIns="0" rtlCol="0" anchor="t"/>
           <a:lstStyle/>
           <a:p>
-            <a:pPr indent="0" marL="0">
+            <a:pPr marL="0" indent="0">
               <a:buNone/>
             </a:pPr>
             <a:r>
@@ -8320,7 +7972,7 @@
             <a:endParaRPr lang="en-US" sz="1200" dirty="0"/>
           </a:p>
           <a:p>
-            <a:pPr indent="0" marL="0">
+            <a:pPr marL="0" indent="0">
               <a:buNone/>
             </a:pPr>
             <a:r>
@@ -8334,7 +7986,7 @@
             <a:endParaRPr lang="en-US" sz="1200" dirty="0"/>
           </a:p>
           <a:p>
-            <a:pPr indent="0" marL="0">
+            <a:pPr marL="0" indent="0">
               <a:buNone/>
             </a:pPr>
             <a:r>
@@ -8369,7 +8021,7 @@
           </a:prstGeom>
           <a:extLst>
             <a:ext uri="{C572A759-6A51-4108-AA02-DFA0A04FC94B}">
-              <ma14:wrappingTextBoxFlag xmlns:ma14="http://schemas.microsoft.com/office/mac/drawingml/2011/main" val="0"/>
+              <ma14:wrappingTextBoxFlag xmlns:ma14="http://schemas.microsoft.com/office/mac/drawingml/2011/main" xmlns="" val="0"/>
             </a:ext>
           </a:extLst>
         </p:spPr>
@@ -8387,7 +8039,7 @@
           <a:p>
             <a:pPr algn="r"/>
             <a:fld id="{F7021451-1387-4CA6-816F-3879F97B5CBC}" type="slidenum">
-              <a:rPr b="0" lang="en-US"/>
+              <a:rPr lang="en-US" b="0"/>
               <a:t>14</a:t>
             </a:fld>
             <a:endParaRPr lang="en-US"/>
@@ -8422,9 +8074,11 @@
       <p:sp>
         <p:nvSpPr>
           <p:cNvPr id="2" name="Text 1"/>
-          <p:cNvSpPr/>
+          <p:cNvSpPr>
+            <a:spLocks noGrp="1"/>
+          </p:cNvSpPr>
           <p:nvPr>
-            <p:ph idx="101" type="body" hasCustomPrompt="1"/>
+            <p:ph type="body" idx="101" hasCustomPrompt="1"/>
           </p:nvPr>
         </p:nvSpPr>
         <p:spPr>
@@ -8442,7 +8096,7 @@
           <a:bodyPr wrap="square" lIns="0" tIns="0" rIns="0" bIns="0" rtlCol="0"/>
           <a:lstStyle/>
           <a:p>
-            <a:pPr indent="0" marL="0">
+            <a:pPr marL="0" indent="0">
               <a:buNone/>
             </a:pPr>
             <a:r>
@@ -8460,9 +8114,11 @@
       <p:sp>
         <p:nvSpPr>
           <p:cNvPr id="3" name="Text 1"/>
-          <p:cNvSpPr/>
+          <p:cNvSpPr>
+            <a:spLocks noGrp="1"/>
+          </p:cNvSpPr>
           <p:nvPr>
-            <p:ph idx="102" type="title" hasCustomPrompt="1"/>
+            <p:ph type="title" idx="102" hasCustomPrompt="1"/>
           </p:nvPr>
         </p:nvSpPr>
         <p:spPr>
@@ -8480,7 +8136,7 @@
           <a:bodyPr wrap="square" lIns="0" tIns="0" rIns="0" bIns="0" rtlCol="0" anchor="t"/>
           <a:lstStyle/>
           <a:p>
-            <a:pPr algn="l" indent="0" marL="0">
+            <a:pPr marL="0" indent="0" algn="l">
               <a:buNone/>
             </a:pPr>
             <a:r>
@@ -8516,7 +8172,7 @@
           <a:bodyPr wrap="square" lIns="0" tIns="0" rIns="0" bIns="0" rtlCol="0" anchor="ctr"/>
           <a:lstStyle/>
           <a:p>
-            <a:pPr indent="0" marL="0">
+            <a:pPr marL="0" indent="0">
               <a:buNone/>
             </a:pPr>
             <a:r>
@@ -8552,7 +8208,7 @@
           <a:bodyPr wrap="square" lIns="0" tIns="0" rIns="0" bIns="0" rtlCol="0" anchor="ctr"/>
           <a:lstStyle/>
           <a:p>
-            <a:pPr indent="0" marL="0">
+            <a:pPr marL="0" indent="0">
               <a:buNone/>
             </a:pPr>
             <a:r>
@@ -8588,7 +8244,7 @@
           <a:bodyPr wrap="square" lIns="0" tIns="0" rIns="0" bIns="0" rtlCol="0" anchor="ctr"/>
           <a:lstStyle/>
           <a:p>
-            <a:pPr algn="r" indent="0" marL="0">
+            <a:pPr marL="0" indent="0" algn="r">
               <a:buNone/>
             </a:pPr>
             <a:r>
@@ -8647,7 +8303,7 @@
           <a:bodyPr wrap="square" lIns="0" tIns="0" rIns="0" bIns="0" rtlCol="0" anchor="ctr"/>
           <a:lstStyle/>
           <a:p>
-            <a:pPr indent="0" marL="0">
+            <a:pPr marL="0" indent="0">
               <a:buNone/>
             </a:pPr>
             <a:r>
@@ -8683,7 +8339,7 @@
           <a:bodyPr wrap="square" lIns="0" tIns="0" rIns="0" bIns="0" rtlCol="0" anchor="ctr"/>
           <a:lstStyle/>
           <a:p>
-            <a:pPr algn="r" indent="0" marL="0">
+            <a:pPr marL="0" indent="0" algn="r">
               <a:buNone/>
             </a:pPr>
             <a:r>
@@ -8742,7 +8398,7 @@
           <a:bodyPr wrap="square" lIns="0" tIns="0" rIns="0" bIns="0" rtlCol="0" anchor="ctr"/>
           <a:lstStyle/>
           <a:p>
-            <a:pPr indent="0" marL="0">
+            <a:pPr marL="0" indent="0">
               <a:buNone/>
             </a:pPr>
             <a:r>
@@ -8778,7 +8434,7 @@
           <a:bodyPr wrap="square" lIns="0" tIns="0" rIns="0" bIns="0" rtlCol="0" anchor="ctr"/>
           <a:lstStyle/>
           <a:p>
-            <a:pPr algn="r" indent="0" marL="0">
+            <a:pPr marL="0" indent="0" algn="r">
               <a:buNone/>
             </a:pPr>
             <a:r>
@@ -8837,7 +8493,7 @@
           <a:bodyPr wrap="square" lIns="0" tIns="0" rIns="0" bIns="0" rtlCol="0" anchor="ctr"/>
           <a:lstStyle/>
           <a:p>
-            <a:pPr indent="0" marL="0">
+            <a:pPr marL="0" indent="0">
               <a:buNone/>
             </a:pPr>
             <a:r>
@@ -8873,7 +8529,7 @@
           <a:bodyPr wrap="square" lIns="0" tIns="0" rIns="0" bIns="0" rtlCol="0" anchor="ctr"/>
           <a:lstStyle/>
           <a:p>
-            <a:pPr algn="r" indent="0" marL="0">
+            <a:pPr marL="0" indent="0" algn="r">
               <a:buNone/>
             </a:pPr>
             <a:r>
@@ -8932,7 +8588,7 @@
           <a:bodyPr wrap="square" lIns="0" tIns="0" rIns="0" bIns="0" rtlCol="0" anchor="ctr"/>
           <a:lstStyle/>
           <a:p>
-            <a:pPr indent="0" marL="0">
+            <a:pPr marL="0" indent="0">
               <a:buNone/>
             </a:pPr>
             <a:r>
@@ -8968,7 +8624,7 @@
           <a:bodyPr wrap="square" lIns="0" tIns="0" rIns="0" bIns="0" rtlCol="0" anchor="t"/>
           <a:lstStyle/>
           <a:p>
-            <a:pPr indent="0" marL="0">
+            <a:pPr marL="0" indent="0">
               <a:buNone/>
             </a:pPr>
             <a:r>
@@ -9004,7 +8660,7 @@
           <a:bodyPr wrap="square" lIns="0" tIns="0" rIns="0" bIns="0" rtlCol="0" anchor="ctr"/>
           <a:lstStyle/>
           <a:p>
-            <a:pPr indent="0" marL="0">
+            <a:pPr marL="0" indent="0">
               <a:buNone/>
             </a:pPr>
             <a:r>
@@ -9040,7 +8696,7 @@
           <a:bodyPr wrap="square" lIns="0" tIns="0" rIns="0" bIns="0" rtlCol="0" anchor="t"/>
           <a:lstStyle/>
           <a:p>
-            <a:pPr indent="0" marL="0">
+            <a:pPr marL="0" indent="0">
               <a:buNone/>
             </a:pPr>
             <a:r>
@@ -9075,7 +8731,7 @@
           </a:prstGeom>
           <a:extLst>
             <a:ext uri="{C572A759-6A51-4108-AA02-DFA0A04FC94B}">
-              <ma14:wrappingTextBoxFlag xmlns:ma14="http://schemas.microsoft.com/office/mac/drawingml/2011/main" val="0"/>
+              <ma14:wrappingTextBoxFlag xmlns:ma14="http://schemas.microsoft.com/office/mac/drawingml/2011/main" xmlns="" val="0"/>
             </a:ext>
           </a:extLst>
         </p:spPr>
@@ -9093,7 +8749,7 @@
           <a:p>
             <a:pPr algn="r"/>
             <a:fld id="{F7021451-1387-4CA6-816F-3879F97B5CBC}" type="slidenum">
-              <a:rPr b="0" lang="en-US"/>
+              <a:rPr lang="en-US" b="0"/>
               <a:t>15</a:t>
             </a:fld>
             <a:endParaRPr lang="en-US"/>
@@ -9128,9 +8784,11 @@
       <p:sp>
         <p:nvSpPr>
           <p:cNvPr id="2" name="Text 1"/>
-          <p:cNvSpPr/>
+          <p:cNvSpPr>
+            <a:spLocks noGrp="1"/>
+          </p:cNvSpPr>
           <p:nvPr>
-            <p:ph idx="101" type="body" hasCustomPrompt="1"/>
+            <p:ph type="body" idx="101" hasCustomPrompt="1"/>
           </p:nvPr>
         </p:nvSpPr>
         <p:spPr>
@@ -9148,7 +8806,7 @@
           <a:bodyPr wrap="square" lIns="0" tIns="0" rIns="0" bIns="0" rtlCol="0"/>
           <a:lstStyle/>
           <a:p>
-            <a:pPr indent="0" marL="0">
+            <a:pPr marL="0" indent="0">
               <a:buNone/>
             </a:pPr>
             <a:r>
@@ -9166,9 +8824,11 @@
       <p:sp>
         <p:nvSpPr>
           <p:cNvPr id="3" name="Text 1"/>
-          <p:cNvSpPr/>
+          <p:cNvSpPr>
+            <a:spLocks noGrp="1"/>
+          </p:cNvSpPr>
           <p:nvPr>
-            <p:ph idx="102" type="title" hasCustomPrompt="1"/>
+            <p:ph type="title" idx="102" hasCustomPrompt="1"/>
           </p:nvPr>
         </p:nvSpPr>
         <p:spPr>
@@ -9186,7 +8846,7 @@
           <a:bodyPr wrap="square" lIns="0" tIns="0" rIns="0" bIns="0" rtlCol="0" anchor="t"/>
           <a:lstStyle/>
           <a:p>
-            <a:pPr algn="l" indent="0" marL="0">
+            <a:pPr marL="0" indent="0" algn="l">
               <a:buNone/>
             </a:pPr>
             <a:r>
@@ -9222,7 +8882,7 @@
           <a:bodyPr wrap="square" lIns="0" tIns="0" rIns="0" bIns="0" rtlCol="0" anchor="ctr"/>
           <a:lstStyle/>
           <a:p>
-            <a:pPr indent="0" marL="0">
+            <a:pPr marL="0" indent="0">
               <a:buNone/>
             </a:pPr>
             <a:r>
@@ -9233,9 +8893,6 @@
               </a:rPr>
               <a:t>가설  </a:t>
             </a:r>
-            <a:pPr indent="0" marL="0">
-              <a:buNone/>
-            </a:pPr>
             <a:r>
               <a:rPr lang="en-US" sz="1100" dirty="0">
                 <a:solidFill>
@@ -9271,10 +8928,34 @@
             <a:tbl>
               <a:tblPr/>
               <a:tblGrid>
-                <a:gridCol w="2240280"/>
-                <a:gridCol w="2514600"/>
-                <a:gridCol w="1920240"/>
-                <a:gridCol w="1554480"/>
+                <a:gridCol w="2240280">
+                  <a:extLst>
+                    <a:ext uri="{9D8B030D-6E8A-4147-A177-3AD203B41FA5}">
+                      <a16:colId xmlns:a16="http://schemas.microsoft.com/office/drawing/2014/main" val="20000"/>
+                    </a:ext>
+                  </a:extLst>
+                </a:gridCol>
+                <a:gridCol w="2514600">
+                  <a:extLst>
+                    <a:ext uri="{9D8B030D-6E8A-4147-A177-3AD203B41FA5}">
+                      <a16:colId xmlns:a16="http://schemas.microsoft.com/office/drawing/2014/main" val="20001"/>
+                    </a:ext>
+                  </a:extLst>
+                </a:gridCol>
+                <a:gridCol w="1920240">
+                  <a:extLst>
+                    <a:ext uri="{9D8B030D-6E8A-4147-A177-3AD203B41FA5}">
+                      <a16:colId xmlns:a16="http://schemas.microsoft.com/office/drawing/2014/main" val="20002"/>
+                    </a:ext>
+                  </a:extLst>
+                </a:gridCol>
+                <a:gridCol w="1554480">
+                  <a:extLst>
+                    <a:ext uri="{9D8B030D-6E8A-4147-A177-3AD203B41FA5}">
+                      <a16:colId xmlns:a16="http://schemas.microsoft.com/office/drawing/2014/main" val="20003"/>
+                    </a:ext>
+                  </a:extLst>
+                </a:gridCol>
               </a:tblGrid>
               <a:tr h="384048">
                 <a:tc>
@@ -9282,7 +8963,7 @@
                     <a:bodyPr/>
                     <a:lstStyle/>
                     <a:p>
-                      <a:pPr indent="0" marL="0">
+                      <a:pPr marL="0" indent="0">
                         <a:buNone/>
                       </a:pPr>
                       <a:r>
@@ -9343,7 +9024,7 @@
                     <a:bodyPr/>
                     <a:lstStyle/>
                     <a:p>
-                      <a:pPr indent="0" marL="0">
+                      <a:pPr marL="0" indent="0">
                         <a:buNone/>
                       </a:pPr>
                       <a:r>
@@ -9404,7 +9085,7 @@
                     <a:bodyPr/>
                     <a:lstStyle/>
                     <a:p>
-                      <a:pPr indent="0" marL="0">
+                      <a:pPr marL="0" indent="0">
                         <a:buNone/>
                       </a:pPr>
                       <a:r>
@@ -9465,7 +9146,7 @@
                     <a:bodyPr/>
                     <a:lstStyle/>
                     <a:p>
-                      <a:pPr indent="0" marL="0">
+                      <a:pPr marL="0" indent="0">
                         <a:buNone/>
                       </a:pPr>
                       <a:r>
@@ -9521,6 +9202,11 @@
                     </a:solidFill>
                   </a:tcPr>
                 </a:tc>
+                <a:extLst>
+                  <a:ext uri="{0D108BD9-81ED-4DB2-BD59-A6C34878D82A}">
+                    <a16:rowId xmlns:a16="http://schemas.microsoft.com/office/drawing/2014/main" val="10000"/>
+                  </a:ext>
+                </a:extLst>
               </a:tr>
               <a:tr h="475488">
                 <a:tc>
@@ -9528,7 +9214,7 @@
                     <a:bodyPr/>
                     <a:lstStyle/>
                     <a:p>
-                      <a:pPr indent="0" marL="0">
+                      <a:pPr marL="0" indent="0">
                         <a:buNone/>
                       </a:pPr>
                       <a:r>
@@ -9586,7 +9272,7 @@
                     <a:bodyPr/>
                     <a:lstStyle/>
                     <a:p>
-                      <a:pPr indent="0" marL="0">
+                      <a:pPr marL="0" indent="0">
                         <a:buNone/>
                       </a:pPr>
                       <a:r>
@@ -9644,7 +9330,7 @@
                     <a:bodyPr/>
                     <a:lstStyle/>
                     <a:p>
-                      <a:pPr indent="0" marL="0">
+                      <a:pPr marL="0" indent="0">
                         <a:buNone/>
                       </a:pPr>
                       <a:r>
@@ -9702,7 +9388,7 @@
                     <a:bodyPr/>
                     <a:lstStyle/>
                     <a:p>
-                      <a:pPr indent="0" marL="0">
+                      <a:pPr marL="0" indent="0">
                         <a:buNone/>
                       </a:pPr>
                       <a:r>
@@ -9755,6 +9441,11 @@
                     </a:lnB>
                   </a:tcPr>
                 </a:tc>
+                <a:extLst>
+                  <a:ext uri="{0D108BD9-81ED-4DB2-BD59-A6C34878D82A}">
+                    <a16:rowId xmlns:a16="http://schemas.microsoft.com/office/drawing/2014/main" val="10001"/>
+                  </a:ext>
+                </a:extLst>
               </a:tr>
               <a:tr h="475488">
                 <a:tc>
@@ -9762,7 +9453,7 @@
                     <a:bodyPr/>
                     <a:lstStyle/>
                     <a:p>
-                      <a:pPr indent="0" marL="0">
+                      <a:pPr marL="0" indent="0">
                         <a:buNone/>
                       </a:pPr>
                       <a:r>
@@ -9820,7 +9511,7 @@
                     <a:bodyPr/>
                     <a:lstStyle/>
                     <a:p>
-                      <a:pPr indent="0" marL="0">
+                      <a:pPr marL="0" indent="0">
                         <a:buNone/>
                       </a:pPr>
                       <a:r>
@@ -9878,7 +9569,7 @@
                     <a:bodyPr/>
                     <a:lstStyle/>
                     <a:p>
-                      <a:pPr indent="0" marL="0">
+                      <a:pPr marL="0" indent="0">
                         <a:buNone/>
                       </a:pPr>
                       <a:r>
@@ -9936,7 +9627,7 @@
                     <a:bodyPr/>
                     <a:lstStyle/>
                     <a:p>
-                      <a:pPr indent="0" marL="0">
+                      <a:pPr marL="0" indent="0">
                         <a:buNone/>
                       </a:pPr>
                       <a:r>
@@ -9950,7 +9641,7 @@
                       <a:endParaRPr lang="en-US" sz="1100" dirty="0"/>
                     </a:p>
                     <a:p>
-                      <a:pPr indent="0" marL="0">
+                      <a:pPr marL="0" indent="0">
                         <a:buNone/>
                       </a:pPr>
                       <a:r>
@@ -10003,6 +9694,11 @@
                     </a:lnB>
                   </a:tcPr>
                 </a:tc>
+                <a:extLst>
+                  <a:ext uri="{0D108BD9-81ED-4DB2-BD59-A6C34878D82A}">
+                    <a16:rowId xmlns:a16="http://schemas.microsoft.com/office/drawing/2014/main" val="10002"/>
+                  </a:ext>
+                </a:extLst>
               </a:tr>
               <a:tr h="475488">
                 <a:tc>
@@ -10010,7 +9706,7 @@
                     <a:bodyPr/>
                     <a:lstStyle/>
                     <a:p>
-                      <a:pPr indent="0" marL="0">
+                      <a:pPr marL="0" indent="0">
                         <a:buNone/>
                       </a:pPr>
                       <a:r>
@@ -10068,7 +9764,7 @@
                     <a:bodyPr/>
                     <a:lstStyle/>
                     <a:p>
-                      <a:pPr indent="0" marL="0">
+                      <a:pPr marL="0" indent="0">
                         <a:buNone/>
                       </a:pPr>
                       <a:r>
@@ -10126,7 +9822,7 @@
                     <a:bodyPr/>
                     <a:lstStyle/>
                     <a:p>
-                      <a:pPr indent="0" marL="0">
+                      <a:pPr marL="0" indent="0">
                         <a:buNone/>
                       </a:pPr>
                       <a:r>
@@ -10184,7 +9880,7 @@
                     <a:bodyPr/>
                     <a:lstStyle/>
                     <a:p>
-                      <a:pPr indent="0" marL="0">
+                      <a:pPr marL="0" indent="0">
                         <a:buNone/>
                       </a:pPr>
                       <a:r>
@@ -10198,7 +9894,7 @@
                       <a:endParaRPr lang="en-US" sz="1100" dirty="0"/>
                     </a:p>
                     <a:p>
-                      <a:pPr indent="0" marL="0">
+                      <a:pPr marL="0" indent="0">
                         <a:buNone/>
                       </a:pPr>
                       <a:r>
@@ -10251,6 +9947,11 @@
                     </a:lnB>
                   </a:tcPr>
                 </a:tc>
+                <a:extLst>
+                  <a:ext uri="{0D108BD9-81ED-4DB2-BD59-A6C34878D82A}">
+                    <a16:rowId xmlns:a16="http://schemas.microsoft.com/office/drawing/2014/main" val="10003"/>
+                  </a:ext>
+                </a:extLst>
               </a:tr>
               <a:tr h="475488">
                 <a:tc>
@@ -10258,7 +9959,7 @@
                     <a:bodyPr/>
                     <a:lstStyle/>
                     <a:p>
-                      <a:pPr indent="0" marL="0">
+                      <a:pPr marL="0" indent="0">
                         <a:buNone/>
                       </a:pPr>
                       <a:r>
@@ -10316,7 +10017,7 @@
                     <a:bodyPr/>
                     <a:lstStyle/>
                     <a:p>
-                      <a:pPr indent="0" marL="0">
+                      <a:pPr marL="0" indent="0">
                         <a:buNone/>
                       </a:pPr>
                       <a:r>
@@ -10374,7 +10075,7 @@
                     <a:bodyPr/>
                     <a:lstStyle/>
                     <a:p>
-                      <a:pPr indent="0" marL="0">
+                      <a:pPr marL="0" indent="0">
                         <a:buNone/>
                       </a:pPr>
                       <a:r>
@@ -10432,7 +10133,7 @@
                     <a:bodyPr/>
                     <a:lstStyle/>
                     <a:p>
-                      <a:pPr indent="0" marL="0">
+                      <a:pPr marL="0" indent="0">
                         <a:buNone/>
                       </a:pPr>
                       <a:r>
@@ -10485,6 +10186,11 @@
                     </a:lnB>
                   </a:tcPr>
                 </a:tc>
+                <a:extLst>
+                  <a:ext uri="{0D108BD9-81ED-4DB2-BD59-A6C34878D82A}">
+                    <a16:rowId xmlns:a16="http://schemas.microsoft.com/office/drawing/2014/main" val="10004"/>
+                  </a:ext>
+                </a:extLst>
               </a:tr>
               <a:tr h="475488">
                 <a:tc>
@@ -10492,7 +10198,7 @@
                     <a:bodyPr/>
                     <a:lstStyle/>
                     <a:p>
-                      <a:pPr indent="0" marL="0">
+                      <a:pPr marL="0" indent="0">
                         <a:buNone/>
                       </a:pPr>
                       <a:r>
@@ -10550,7 +10256,7 @@
                     <a:bodyPr/>
                     <a:lstStyle/>
                     <a:p>
-                      <a:pPr indent="0" marL="0">
+                      <a:pPr marL="0" indent="0">
                         <a:buNone/>
                       </a:pPr>
                       <a:r>
@@ -10608,7 +10314,7 @@
                     <a:bodyPr/>
                     <a:lstStyle/>
                     <a:p>
-                      <a:pPr indent="0" marL="0">
+                      <a:pPr marL="0" indent="0">
                         <a:buNone/>
                       </a:pPr>
                       <a:r>
@@ -10666,7 +10372,7 @@
                     <a:bodyPr/>
                     <a:lstStyle/>
                     <a:p>
-                      <a:pPr indent="0" marL="0">
+                      <a:pPr marL="0" indent="0">
                         <a:buNone/>
                       </a:pPr>
                       <a:r>
@@ -10680,7 +10386,7 @@
                       <a:endParaRPr lang="en-US" sz="1100" dirty="0"/>
                     </a:p>
                     <a:p>
-                      <a:pPr indent="0" marL="0">
+                      <a:pPr marL="0" indent="0">
                         <a:buNone/>
                       </a:pPr>
                       <a:r>
@@ -10733,6 +10439,11 @@
                     </a:lnB>
                   </a:tcPr>
                 </a:tc>
+                <a:extLst>
+                  <a:ext uri="{0D108BD9-81ED-4DB2-BD59-A6C34878D82A}">
+                    <a16:rowId xmlns:a16="http://schemas.microsoft.com/office/drawing/2014/main" val="10005"/>
+                  </a:ext>
+                </a:extLst>
               </a:tr>
             </a:tbl>
           </a:graphicData>
@@ -10759,7 +10470,7 @@
           <a:bodyPr wrap="square" lIns="0" tIns="0" rIns="0" bIns="0" rtlCol="0" anchor="ctr"/>
           <a:lstStyle/>
           <a:p>
-            <a:pPr indent="0" marL="0">
+            <a:pPr marL="0" indent="0">
               <a:buNone/>
             </a:pPr>
             <a:r>
@@ -10794,7 +10505,7 @@
           </a:prstGeom>
           <a:extLst>
             <a:ext uri="{C572A759-6A51-4108-AA02-DFA0A04FC94B}">
-              <ma14:wrappingTextBoxFlag xmlns:ma14="http://schemas.microsoft.com/office/mac/drawingml/2011/main" val="0"/>
+              <ma14:wrappingTextBoxFlag xmlns:ma14="http://schemas.microsoft.com/office/mac/drawingml/2011/main" xmlns="" val="0"/>
             </a:ext>
           </a:extLst>
         </p:spPr>
@@ -10812,7 +10523,7 @@
           <a:p>
             <a:pPr algn="r"/>
             <a:fld id="{F7021451-1387-4CA6-816F-3879F97B5CBC}" type="slidenum">
-              <a:rPr b="0" lang="en-US"/>
+              <a:rPr lang="en-US" b="0"/>
               <a:t>16</a:t>
             </a:fld>
             <a:endParaRPr lang="en-US"/>
@@ -10847,9 +10558,11 @@
       <p:sp>
         <p:nvSpPr>
           <p:cNvPr id="2" name="Text 1"/>
-          <p:cNvSpPr/>
+          <p:cNvSpPr>
+            <a:spLocks noGrp="1"/>
+          </p:cNvSpPr>
           <p:nvPr>
-            <p:ph idx="101" type="body" hasCustomPrompt="1"/>
+            <p:ph type="body" idx="101" hasCustomPrompt="1"/>
           </p:nvPr>
         </p:nvSpPr>
         <p:spPr>
@@ -10867,7 +10580,7 @@
           <a:bodyPr wrap="square" lIns="0" tIns="0" rIns="0" bIns="0" rtlCol="0"/>
           <a:lstStyle/>
           <a:p>
-            <a:pPr indent="0" marL="0">
+            <a:pPr marL="0" indent="0">
               <a:buNone/>
             </a:pPr>
             <a:r>
@@ -10885,9 +10598,11 @@
       <p:sp>
         <p:nvSpPr>
           <p:cNvPr id="3" name="Text 1"/>
-          <p:cNvSpPr/>
+          <p:cNvSpPr>
+            <a:spLocks noGrp="1"/>
+          </p:cNvSpPr>
           <p:nvPr>
-            <p:ph idx="102" type="title" hasCustomPrompt="1"/>
+            <p:ph type="title" idx="102" hasCustomPrompt="1"/>
           </p:nvPr>
         </p:nvSpPr>
         <p:spPr>
@@ -10905,7 +10620,7 @@
           <a:bodyPr wrap="square" lIns="0" tIns="0" rIns="0" bIns="0" rtlCol="0" anchor="t"/>
           <a:lstStyle/>
           <a:p>
-            <a:pPr algn="l" indent="0" marL="0">
+            <a:pPr marL="0" indent="0" algn="l">
               <a:buNone/>
             </a:pPr>
             <a:r>
@@ -10989,7 +10704,7 @@
           <a:bodyPr wrap="square" lIns="0" tIns="0" rIns="0" bIns="0" rtlCol="0" anchor="t"/>
           <a:lstStyle/>
           <a:p>
-            <a:pPr algn="ctr" indent="0" marL="0">
+            <a:pPr marL="0" indent="0" algn="ctr">
               <a:buNone/>
             </a:pPr>
             <a:r>
@@ -11050,7 +10765,7 @@
           <a:bodyPr wrap="square" lIns="0" tIns="0" rIns="0" bIns="0" rtlCol="0" anchor="t"/>
           <a:lstStyle/>
           <a:p>
-            <a:pPr algn="ctr" indent="0" marL="0">
+            <a:pPr marL="0" indent="0" algn="ctr">
               <a:buNone/>
             </a:pPr>
             <a:r>
@@ -11111,7 +10826,7 @@
           <a:bodyPr wrap="square" lIns="0" tIns="0" rIns="0" bIns="0" rtlCol="0" anchor="t"/>
           <a:lstStyle/>
           <a:p>
-            <a:pPr algn="ctr" indent="0" marL="0">
+            <a:pPr marL="0" indent="0" algn="ctr">
               <a:buNone/>
             </a:pPr>
             <a:r>
@@ -11172,7 +10887,7 @@
           <a:bodyPr wrap="square" lIns="0" tIns="0" rIns="0" bIns="0" rtlCol="0" anchor="t"/>
           <a:lstStyle/>
           <a:p>
-            <a:pPr algn="ctr" indent="0" marL="0">
+            <a:pPr marL="0" indent="0" algn="ctr">
               <a:buNone/>
             </a:pPr>
             <a:r>
@@ -11233,7 +10948,7 @@
           <a:bodyPr wrap="square" lIns="0" tIns="0" rIns="0" bIns="0" rtlCol="0" anchor="t"/>
           <a:lstStyle/>
           <a:p>
-            <a:pPr algn="ctr" indent="0" marL="0">
+            <a:pPr marL="0" indent="0" algn="ctr">
               <a:buNone/>
             </a:pPr>
             <a:r>
@@ -11269,7 +10984,7 @@
           <a:bodyPr wrap="square" lIns="0" tIns="0" rIns="0" bIns="0" rtlCol="0" anchor="ctr"/>
           <a:lstStyle/>
           <a:p>
-            <a:pPr indent="0" marL="0">
+            <a:pPr marL="0" indent="0">
               <a:buNone/>
             </a:pPr>
             <a:r>
@@ -11305,7 +11020,7 @@
           <a:bodyPr wrap="square" lIns="0" tIns="0" rIns="0" bIns="0" rtlCol="0" anchor="ctr"/>
           <a:lstStyle/>
           <a:p>
-            <a:pPr algn="ctr" indent="0" marL="0">
+            <a:pPr marL="0" indent="0" algn="ctr">
               <a:buNone/>
             </a:pPr>
             <a:r>
@@ -11341,7 +11056,7 @@
           <a:bodyPr wrap="square" lIns="0" tIns="0" rIns="0" bIns="0" rtlCol="0" anchor="ctr"/>
           <a:lstStyle/>
           <a:p>
-            <a:pPr algn="ctr" indent="0" marL="0">
+            <a:pPr marL="0" indent="0" algn="ctr">
               <a:buNone/>
             </a:pPr>
             <a:r>
@@ -11377,7 +11092,7 @@
           <a:bodyPr wrap="square" lIns="0" tIns="0" rIns="0" bIns="0" rtlCol="0" anchor="ctr"/>
           <a:lstStyle/>
           <a:p>
-            <a:pPr algn="ctr" indent="0" marL="0">
+            <a:pPr marL="0" indent="0" algn="ctr">
               <a:buNone/>
             </a:pPr>
             <a:r>
@@ -11413,7 +11128,7 @@
           <a:bodyPr wrap="square" lIns="0" tIns="0" rIns="0" bIns="0" rtlCol="0" anchor="ctr"/>
           <a:lstStyle/>
           <a:p>
-            <a:pPr algn="ctr" indent="0" marL="0">
+            <a:pPr marL="0" indent="0" algn="ctr">
               <a:buNone/>
             </a:pPr>
             <a:r>
@@ -11449,7 +11164,7 @@
           <a:bodyPr wrap="square" lIns="0" tIns="0" rIns="0" bIns="0" rtlCol="0" anchor="ctr"/>
           <a:lstStyle/>
           <a:p>
-            <a:pPr algn="ctr" indent="0" marL="0">
+            <a:pPr marL="0" indent="0" algn="ctr">
               <a:buNone/>
             </a:pPr>
             <a:r>
@@ -11485,7 +11200,7 @@
           <a:bodyPr wrap="square" lIns="0" tIns="0" rIns="0" bIns="0" rtlCol="0" anchor="ctr"/>
           <a:lstStyle/>
           <a:p>
-            <a:pPr algn="ctr" indent="0" marL="0">
+            <a:pPr marL="0" indent="0" algn="ctr">
               <a:buNone/>
             </a:pPr>
             <a:r>
@@ -11521,7 +11236,7 @@
           <a:bodyPr wrap="square" lIns="0" tIns="0" rIns="0" bIns="0" rtlCol="0" anchor="ctr"/>
           <a:lstStyle/>
           <a:p>
-            <a:pPr algn="ctr" indent="0" marL="0">
+            <a:pPr marL="0" indent="0" algn="ctr">
               <a:buNone/>
             </a:pPr>
             <a:r>
@@ -11557,7 +11272,7 @@
           <a:bodyPr wrap="square" lIns="0" tIns="0" rIns="0" bIns="0" rtlCol="0" anchor="ctr"/>
           <a:lstStyle/>
           <a:p>
-            <a:pPr indent="0" marL="0">
+            <a:pPr marL="0" indent="0">
               <a:buNone/>
             </a:pPr>
             <a:r>
@@ -11616,7 +11331,7 @@
           <a:bodyPr wrap="square" lIns="0" tIns="0" rIns="0" bIns="0" rtlCol="0" anchor="ctr"/>
           <a:lstStyle/>
           <a:p>
-            <a:pPr indent="0" marL="0">
+            <a:pPr marL="0" indent="0">
               <a:buNone/>
             </a:pPr>
             <a:r>
@@ -11652,7 +11367,7 @@
           <a:bodyPr wrap="square" lIns="0" tIns="0" rIns="0" bIns="0" rtlCol="0" anchor="ctr"/>
           <a:lstStyle/>
           <a:p>
-            <a:pPr indent="0" marL="0">
+            <a:pPr marL="0" indent="0">
               <a:buNone/>
             </a:pPr>
             <a:r>
@@ -11899,7 +11614,7 @@
           <a:bodyPr wrap="square" lIns="0" tIns="0" rIns="0" bIns="0" rtlCol="0" anchor="ctr"/>
           <a:lstStyle/>
           <a:p>
-            <a:pPr indent="0" marL="0">
+            <a:pPr marL="0" indent="0">
               <a:buNone/>
             </a:pPr>
             <a:r>
@@ -11935,7 +11650,7 @@
           <a:bodyPr wrap="square" lIns="0" tIns="0" rIns="0" bIns="0" rtlCol="0" anchor="ctr"/>
           <a:lstStyle/>
           <a:p>
-            <a:pPr indent="0" marL="0">
+            <a:pPr marL="0" indent="0">
               <a:buNone/>
             </a:pPr>
             <a:r>
@@ -12182,7 +11897,7 @@
           <a:bodyPr wrap="square" lIns="0" tIns="0" rIns="0" bIns="0" rtlCol="0" anchor="ctr"/>
           <a:lstStyle/>
           <a:p>
-            <a:pPr indent="0" marL="0">
+            <a:pPr marL="0" indent="0">
               <a:buNone/>
             </a:pPr>
             <a:r>
@@ -12218,7 +11933,7 @@
           <a:bodyPr wrap="square" lIns="0" tIns="0" rIns="0" bIns="0" rtlCol="0" anchor="ctr"/>
           <a:lstStyle/>
           <a:p>
-            <a:pPr indent="0" marL="0">
+            <a:pPr marL="0" indent="0">
               <a:buNone/>
             </a:pPr>
             <a:r>
@@ -12465,7 +12180,7 @@
           <a:bodyPr wrap="square" lIns="0" tIns="0" rIns="0" bIns="0" rtlCol="0" anchor="ctr"/>
           <a:lstStyle/>
           <a:p>
-            <a:pPr indent="0" marL="0">
+            <a:pPr marL="0" indent="0">
               <a:buNone/>
             </a:pPr>
             <a:r>
@@ -12501,7 +12216,7 @@
           <a:bodyPr wrap="square" lIns="0" tIns="0" rIns="0" bIns="0" rtlCol="0" anchor="ctr"/>
           <a:lstStyle/>
           <a:p>
-            <a:pPr indent="0" marL="0">
+            <a:pPr marL="0" indent="0">
               <a:buNone/>
             </a:pPr>
             <a:r>
@@ -12748,7 +12463,7 @@
           <a:bodyPr wrap="square" lIns="0" tIns="0" rIns="0" bIns="0" rtlCol="0" anchor="ctr"/>
           <a:lstStyle/>
           <a:p>
-            <a:pPr indent="0" marL="0">
+            <a:pPr marL="0" indent="0">
               <a:buNone/>
             </a:pPr>
             <a:r>
@@ -12784,7 +12499,7 @@
           <a:bodyPr wrap="square" lIns="0" tIns="0" rIns="0" bIns="0" rtlCol="0" anchor="ctr"/>
           <a:lstStyle/>
           <a:p>
-            <a:pPr indent="0" marL="0">
+            <a:pPr marL="0" indent="0">
               <a:buNone/>
             </a:pPr>
             <a:r>
@@ -13031,7 +12746,7 @@
           <a:bodyPr wrap="square" lIns="0" tIns="0" rIns="0" bIns="0" rtlCol="0" anchor="ctr"/>
           <a:lstStyle/>
           <a:p>
-            <a:pPr indent="0" marL="0">
+            <a:pPr marL="0" indent="0">
               <a:buNone/>
             </a:pPr>
             <a:r>
@@ -13067,7 +12782,7 @@
           <a:bodyPr wrap="square" lIns="0" tIns="0" rIns="0" bIns="0" rtlCol="0" anchor="ctr"/>
           <a:lstStyle/>
           <a:p>
-            <a:pPr indent="0" marL="0">
+            <a:pPr marL="0" indent="0">
               <a:buNone/>
             </a:pPr>
             <a:r>
@@ -13314,7 +13029,7 @@
           <a:bodyPr wrap="square" lIns="0" tIns="0" rIns="0" bIns="0" rtlCol="0" anchor="ctr"/>
           <a:lstStyle/>
           <a:p>
-            <a:pPr indent="0" marL="0">
+            <a:pPr marL="0" indent="0">
               <a:buNone/>
             </a:pPr>
             <a:r>
@@ -13350,7 +13065,7 @@
           <a:bodyPr wrap="square" lIns="0" tIns="0" rIns="0" bIns="0" rtlCol="0" anchor="ctr"/>
           <a:lstStyle/>
           <a:p>
-            <a:pPr indent="0" marL="0">
+            <a:pPr marL="0" indent="0">
               <a:buNone/>
             </a:pPr>
             <a:r>
@@ -13597,7 +13312,7 @@
           <a:bodyPr wrap="square" lIns="0" tIns="0" rIns="0" bIns="0" rtlCol="0" anchor="ctr"/>
           <a:lstStyle/>
           <a:p>
-            <a:pPr indent="0" marL="0">
+            <a:pPr marL="0" indent="0">
               <a:buNone/>
             </a:pPr>
             <a:r>
@@ -13614,7 +13329,7 @@
       </p:sp>
       <p:sp>
         <p:nvSpPr>
-          <p:cNvPr id="25" name="Slide Number Placeholder 0"/>
+          <p:cNvPr id="103" name="Slide Number Placeholder 0"/>
           <p:cNvSpPr>
             <a:spLocks noGrp="1"/>
           </p:cNvSpPr>
@@ -13632,7 +13347,7 @@
           </a:prstGeom>
           <a:extLst>
             <a:ext uri="{C572A759-6A51-4108-AA02-DFA0A04FC94B}">
-              <ma14:wrappingTextBoxFlag xmlns:ma14="http://schemas.microsoft.com/office/mac/drawingml/2011/main" val="0"/>
+              <ma14:wrappingTextBoxFlag xmlns:ma14="http://schemas.microsoft.com/office/mac/drawingml/2011/main" xmlns="" val="0"/>
             </a:ext>
           </a:extLst>
         </p:spPr>
@@ -13650,7 +13365,7 @@
           <a:p>
             <a:pPr algn="r"/>
             <a:fld id="{F7021451-1387-4CA6-816F-3879F97B5CBC}" type="slidenum">
-              <a:rPr b="0" lang="en-US"/>
+              <a:rPr lang="en-US" b="0"/>
               <a:t>17</a:t>
             </a:fld>
             <a:endParaRPr lang="en-US"/>
@@ -13685,9 +13400,11 @@
       <p:sp>
         <p:nvSpPr>
           <p:cNvPr id="2" name="Text 0"/>
-          <p:cNvSpPr/>
+          <p:cNvSpPr>
+            <a:spLocks noGrp="1"/>
+          </p:cNvSpPr>
           <p:nvPr>
-            <p:ph idx="100" type="title" hasCustomPrompt="1"/>
+            <p:ph type="title" idx="100" hasCustomPrompt="1"/>
           </p:nvPr>
         </p:nvSpPr>
         <p:spPr>
@@ -13705,7 +13422,7 @@
           <a:bodyPr wrap="square" lIns="0" tIns="0" rIns="0" bIns="0" rtlCol="0" anchor="t"/>
           <a:lstStyle/>
           <a:p>
-            <a:pPr algn="l" indent="0" marL="0">
+            <a:pPr marL="0" indent="0" algn="l">
               <a:buNone/>
             </a:pPr>
             <a:r>
@@ -13741,7 +13458,7 @@
           <a:bodyPr wrap="square" lIns="0" tIns="0" rIns="0" bIns="0" rtlCol="0" anchor="ctr"/>
           <a:lstStyle/>
           <a:p>
-            <a:pPr indent="0" marL="0">
+            <a:pPr marL="0" indent="0">
               <a:buNone/>
             </a:pPr>
             <a:r>
@@ -13752,9 +13469,6 @@
               </a:rPr>
               <a:t>이지훈</a:t>
             </a:r>
-            <a:pPr indent="0" marL="0">
-              <a:buNone/>
-            </a:pPr>
             <a:r>
               <a:rPr lang="en-US" sz="1000" dirty="0">
                 <a:solidFill>
@@ -13889,7 +13603,7 @@
           <a:bodyPr wrap="square" lIns="0" tIns="0" rIns="0" bIns="0" rtlCol="0" anchor="ctr"/>
           <a:lstStyle/>
           <a:p>
-            <a:pPr indent="0" marL="0">
+            <a:pPr marL="0" indent="0">
               <a:buNone/>
             </a:pPr>
             <a:r>
@@ -13900,9 +13614,6 @@
               </a:rPr>
               <a:t>손유호</a:t>
             </a:r>
-            <a:pPr indent="0" marL="0">
-              <a:buNone/>
-            </a:pPr>
             <a:r>
               <a:rPr lang="en-US" sz="1000" dirty="0">
                 <a:solidFill>
@@ -14037,7 +13748,7 @@
           <a:bodyPr wrap="square" lIns="0" tIns="0" rIns="0" bIns="0" rtlCol="0" anchor="ctr"/>
           <a:lstStyle/>
           <a:p>
-            <a:pPr indent="0" marL="0">
+            <a:pPr marL="0" indent="0">
               <a:buNone/>
             </a:pPr>
             <a:r>
@@ -14048,9 +13759,6 @@
               </a:rPr>
               <a:t>박명진</a:t>
             </a:r>
-            <a:pPr indent="0" marL="0">
-              <a:buNone/>
-            </a:pPr>
             <a:r>
               <a:rPr lang="en-US" sz="1000" dirty="0">
                 <a:solidFill>
@@ -14160,7 +13868,7 @@
           <a:bodyPr wrap="square" lIns="0" tIns="0" rIns="0" bIns="0" rtlCol="0" anchor="ctr"/>
           <a:lstStyle/>
           <a:p>
-            <a:pPr indent="0" marL="0">
+            <a:pPr marL="0" indent="0">
               <a:buNone/>
             </a:pPr>
             <a:r>
@@ -14203,9 +13911,11 @@
       <p:sp>
         <p:nvSpPr>
           <p:cNvPr id="2" name="Text 0"/>
-          <p:cNvSpPr/>
+          <p:cNvSpPr>
+            <a:spLocks noGrp="1"/>
+          </p:cNvSpPr>
           <p:nvPr>
-            <p:ph idx="100" type="title" hasCustomPrompt="1"/>
+            <p:ph type="title" idx="100" hasCustomPrompt="1"/>
           </p:nvPr>
         </p:nvSpPr>
         <p:spPr>
@@ -14223,7 +13933,7 @@
           <a:bodyPr wrap="square" lIns="0" tIns="0" rIns="0" bIns="0" rtlCol="0" anchor="t"/>
           <a:lstStyle/>
           <a:p>
-            <a:pPr algn="l" indent="0" marL="0">
+            <a:pPr marL="0" indent="0" algn="l">
               <a:buNone/>
             </a:pPr>
             <a:r>
@@ -14284,7 +13994,7 @@
           <a:bodyPr wrap="square" lIns="0" tIns="0" rIns="0" bIns="0" rtlCol="0" anchor="ctr"/>
           <a:lstStyle/>
           <a:p>
-            <a:pPr indent="0" marL="0">
+            <a:pPr marL="0" indent="0">
               <a:buNone/>
             </a:pPr>
             <a:r>
@@ -14320,7 +14030,7 @@
           <a:bodyPr wrap="square" lIns="0" tIns="0" rIns="0" bIns="0" rtlCol="0" anchor="ctr"/>
           <a:lstStyle/>
           <a:p>
-            <a:pPr algn="r" indent="0" marL="0">
+            <a:pPr marL="0" indent="0" algn="r">
               <a:buNone/>
             </a:pPr>
             <a:r>
@@ -14334,7 +14044,7 @@
             <a:endParaRPr lang="en-US" sz="1100" dirty="0"/>
           </a:p>
           <a:p>
-            <a:pPr algn="r" indent="0" marL="0">
+            <a:pPr marL="0" indent="0" algn="r">
               <a:buNone/>
             </a:pPr>
             <a:r>
@@ -14395,7 +14105,7 @@
           <a:bodyPr wrap="square" lIns="0" tIns="0" rIns="0" bIns="0" rtlCol="0" anchor="ctr"/>
           <a:lstStyle/>
           <a:p>
-            <a:pPr indent="0" marL="0">
+            <a:pPr marL="0" indent="0">
               <a:buNone/>
             </a:pPr>
             <a:r>
@@ -14431,7 +14141,7 @@
           <a:bodyPr wrap="square" lIns="0" tIns="0" rIns="0" bIns="0" rtlCol="0" anchor="ctr"/>
           <a:lstStyle/>
           <a:p>
-            <a:pPr algn="r" indent="0" marL="0">
+            <a:pPr marL="0" indent="0" algn="r">
               <a:buNone/>
             </a:pPr>
             <a:r>
@@ -14492,7 +14202,7 @@
           <a:bodyPr wrap="square" lIns="0" tIns="0" rIns="0" bIns="0" rtlCol="0" anchor="ctr"/>
           <a:lstStyle/>
           <a:p>
-            <a:pPr indent="0" marL="0">
+            <a:pPr marL="0" indent="0">
               <a:buNone/>
             </a:pPr>
             <a:r>
@@ -14528,7 +14238,7 @@
           <a:bodyPr wrap="square" lIns="0" tIns="0" rIns="0" bIns="0" rtlCol="0" anchor="ctr"/>
           <a:lstStyle/>
           <a:p>
-            <a:pPr algn="r" indent="0" marL="0">
+            <a:pPr marL="0" indent="0" algn="r">
               <a:buNone/>
             </a:pPr>
             <a:r>
@@ -14595,14 +14305,14 @@
       </p:sp>
       <p:pic>
         <p:nvPicPr>
-          <p:cNvPr id="14" name="앱 설치" descr="C:\Users\user\Desktop\albaguard기술창업\docs\report_src\qr_app.png">    </p:cNvPr>
+          <p:cNvPr id="14" name="앱 설치" descr="C:\Users\user\Desktop\albaguard기술창업\docs\report_src\qr_app.png"/>
           <p:cNvPicPr>
             <a:picLocks noChangeAspect="1"/>
           </p:cNvPicPr>
           <p:nvPr/>
         </p:nvPicPr>
         <p:blipFill>
-          <a:blip r:embed="rId1"/>
+          <a:blip r:embed="rId3"/>
           <a:stretch>
             <a:fillRect/>
           </a:stretch>
@@ -14638,7 +14348,7 @@
           <a:bodyPr wrap="square" lIns="0" tIns="0" rIns="0" bIns="0" rtlCol="0" anchor="ctr"/>
           <a:lstStyle/>
           <a:p>
-            <a:pPr algn="ctr" indent="0" marL="0">
+            <a:pPr marL="0" indent="0" algn="ctr">
               <a:buNone/>
             </a:pPr>
             <a:r>
@@ -14674,7 +14384,7 @@
           <a:bodyPr wrap="square" lIns="0" tIns="0" rIns="0" bIns="0" rtlCol="0" anchor="t"/>
           <a:lstStyle/>
           <a:p>
-            <a:pPr algn="ctr" indent="0" marL="0">
+            <a:pPr marL="0" indent="0" algn="ctr">
               <a:buNone/>
             </a:pPr>
             <a:r>
@@ -14716,14 +14426,14 @@
       </p:sp>
       <p:pic>
         <p:nvPicPr>
-          <p:cNvPr id="18" name="설문 3분" descr="C:\Users\user\Desktop\albaguard기술창업\docs\report_src\qr_survey.png">    </p:cNvPr>
+          <p:cNvPr id="18" name="설문 3분" descr="C:\Users\user\Desktop\albaguard기술창업\docs\report_src\qr_survey.png"/>
           <p:cNvPicPr>
             <a:picLocks noChangeAspect="1"/>
           </p:cNvPicPr>
           <p:nvPr/>
         </p:nvPicPr>
         <p:blipFill>
-          <a:blip r:embed="rId2"/>
+          <a:blip r:embed="rId4"/>
           <a:stretch>
             <a:fillRect/>
           </a:stretch>
@@ -14759,7 +14469,7 @@
           <a:bodyPr wrap="square" lIns="0" tIns="0" rIns="0" bIns="0" rtlCol="0" anchor="ctr"/>
           <a:lstStyle/>
           <a:p>
-            <a:pPr algn="ctr" indent="0" marL="0">
+            <a:pPr marL="0" indent="0" algn="ctr">
               <a:buNone/>
             </a:pPr>
             <a:r>
@@ -14795,7 +14505,7 @@
           <a:bodyPr wrap="square" lIns="0" tIns="0" rIns="0" bIns="0" rtlCol="0" anchor="t"/>
           <a:lstStyle/>
           <a:p>
-            <a:pPr algn="ctr" indent="0" marL="0">
+            <a:pPr marL="0" indent="0" algn="ctr">
               <a:buNone/>
             </a:pPr>
             <a:r>
@@ -14831,7 +14541,7 @@
           <a:bodyPr wrap="square" lIns="0" tIns="0" rIns="0" bIns="0" rtlCol="0" anchor="ctr"/>
           <a:lstStyle/>
           <a:p>
-            <a:pPr indent="0" marL="0">
+            <a:pPr marL="0" indent="0">
               <a:buNone/>
             </a:pPr>
             <a:r>
@@ -14867,7 +14577,7 @@
           <a:bodyPr wrap="square" lIns="0" tIns="0" rIns="0" bIns="0" rtlCol="0" anchor="ctr"/>
           <a:lstStyle/>
           <a:p>
-            <a:pPr indent="0" marL="0">
+            <a:pPr marL="0" indent="0">
               <a:buNone/>
             </a:pPr>
             <a:r>
@@ -14910,9 +14620,11 @@
       <p:sp>
         <p:nvSpPr>
           <p:cNvPr id="2" name="Text 1"/>
-          <p:cNvSpPr/>
+          <p:cNvSpPr>
+            <a:spLocks noGrp="1"/>
+          </p:cNvSpPr>
           <p:nvPr>
-            <p:ph idx="101" type="body" hasCustomPrompt="1"/>
+            <p:ph type="body" idx="101" hasCustomPrompt="1"/>
           </p:nvPr>
         </p:nvSpPr>
         <p:spPr>
@@ -14930,7 +14642,7 @@
           <a:bodyPr wrap="square" lIns="0" tIns="0" rIns="0" bIns="0" rtlCol="0"/>
           <a:lstStyle/>
           <a:p>
-            <a:pPr indent="0" marL="0">
+            <a:pPr marL="0" indent="0">
               <a:buNone/>
             </a:pPr>
             <a:r>
@@ -14948,9 +14660,11 @@
       <p:sp>
         <p:nvSpPr>
           <p:cNvPr id="3" name="Text 1"/>
-          <p:cNvSpPr/>
+          <p:cNvSpPr>
+            <a:spLocks noGrp="1"/>
+          </p:cNvSpPr>
           <p:nvPr>
-            <p:ph idx="102" type="title" hasCustomPrompt="1"/>
+            <p:ph type="title" idx="102" hasCustomPrompt="1"/>
           </p:nvPr>
         </p:nvSpPr>
         <p:spPr>
@@ -14968,7 +14682,7 @@
           <a:bodyPr wrap="square" lIns="0" tIns="0" rIns="0" bIns="0" rtlCol="0" anchor="t"/>
           <a:lstStyle/>
           <a:p>
-            <a:pPr algn="l" indent="0" marL="0">
+            <a:pPr marL="0" indent="0" algn="l">
               <a:buNone/>
             </a:pPr>
             <a:r>
@@ -15004,7 +14718,7 @@
           <a:bodyPr wrap="square" lIns="0" tIns="0" rIns="0" bIns="0" rtlCol="0" anchor="ctr"/>
           <a:lstStyle/>
           <a:p>
-            <a:pPr indent="0" marL="0">
+            <a:pPr marL="0" indent="0">
               <a:buNone/>
             </a:pPr>
             <a:r>
@@ -15018,7 +14732,7 @@
             <a:endParaRPr lang="en-US" sz="1300" dirty="0"/>
           </a:p>
           <a:p>
-            <a:pPr indent="0" marL="0">
+            <a:pPr marL="0" indent="0">
               <a:buNone/>
             </a:pPr>
             <a:r>
@@ -15054,7 +14768,7 @@
           <a:bodyPr wrap="square" lIns="0" tIns="0" rIns="0" bIns="0" rtlCol="0" anchor="ctr"/>
           <a:lstStyle/>
           <a:p>
-            <a:pPr algn="r" indent="0" marL="0">
+            <a:pPr marL="0" indent="0" algn="r">
               <a:buNone/>
             </a:pPr>
             <a:r>
@@ -15113,7 +14827,7 @@
           <a:bodyPr wrap="square" lIns="0" tIns="0" rIns="0" bIns="0" rtlCol="0" anchor="ctr"/>
           <a:lstStyle/>
           <a:p>
-            <a:pPr indent="0" marL="0">
+            <a:pPr marL="0" indent="0">
               <a:buNone/>
             </a:pPr>
             <a:r>
@@ -15127,7 +14841,7 @@
             <a:endParaRPr lang="en-US" sz="1300" dirty="0"/>
           </a:p>
           <a:p>
-            <a:pPr indent="0" marL="0">
+            <a:pPr marL="0" indent="0">
               <a:buNone/>
             </a:pPr>
             <a:r>
@@ -15163,7 +14877,7 @@
           <a:bodyPr wrap="square" lIns="0" tIns="0" rIns="0" bIns="0" rtlCol="0" anchor="ctr"/>
           <a:lstStyle/>
           <a:p>
-            <a:pPr algn="r" indent="0" marL="0">
+            <a:pPr marL="0" indent="0" algn="r">
               <a:buNone/>
             </a:pPr>
             <a:r>
@@ -15222,7 +14936,7 @@
           <a:bodyPr wrap="square" lIns="0" tIns="0" rIns="0" bIns="0" rtlCol="0" anchor="ctr"/>
           <a:lstStyle/>
           <a:p>
-            <a:pPr indent="0" marL="0">
+            <a:pPr marL="0" indent="0">
               <a:buNone/>
             </a:pPr>
             <a:r>
@@ -15236,7 +14950,7 @@
             <a:endParaRPr lang="en-US" sz="1300" dirty="0"/>
           </a:p>
           <a:p>
-            <a:pPr indent="0" marL="0">
+            <a:pPr marL="0" indent="0">
               <a:buNone/>
             </a:pPr>
             <a:r>
@@ -15272,7 +14986,7 @@
           <a:bodyPr wrap="square" lIns="0" tIns="0" rIns="0" bIns="0" rtlCol="0" anchor="ctr"/>
           <a:lstStyle/>
           <a:p>
-            <a:pPr algn="r" indent="0" marL="0">
+            <a:pPr marL="0" indent="0" algn="r">
               <a:buNone/>
             </a:pPr>
             <a:r>
@@ -15331,7 +15045,7 @@
           <a:bodyPr wrap="square" lIns="0" tIns="0" rIns="0" bIns="0" rtlCol="0" anchor="ctr"/>
           <a:lstStyle/>
           <a:p>
-            <a:pPr indent="0" marL="0">
+            <a:pPr marL="0" indent="0">
               <a:buNone/>
             </a:pPr>
             <a:r>
@@ -15367,7 +15081,7 @@
           <a:bodyPr wrap="square" lIns="0" tIns="0" rIns="0" bIns="0" rtlCol="0" anchor="ctr"/>
           <a:lstStyle/>
           <a:p>
-            <a:pPr indent="0" marL="0">
+            <a:pPr marL="0" indent="0">
               <a:buNone/>
             </a:pPr>
             <a:r>
@@ -15403,7 +15117,7 @@
           <a:bodyPr wrap="square" lIns="0" tIns="0" rIns="0" bIns="0" rtlCol="0" anchor="ctr"/>
           <a:lstStyle/>
           <a:p>
-            <a:pPr indent="0" marL="0">
+            <a:pPr marL="0" indent="0">
               <a:buNone/>
             </a:pPr>
             <a:r>
@@ -15420,14 +15134,14 @@
       </p:sp>
       <p:pic>
         <p:nvPicPr>
-          <p:cNvPr id="16" name="앱 설치" descr="C:\Users\user\Desktop\albaguard기술창업\docs\report_src\qr_app.png">    </p:cNvPr>
+          <p:cNvPr id="16" name="앱 설치" descr="C:\Users\user\Desktop\albaguard기술창업\docs\report_src\qr_app.png"/>
           <p:cNvPicPr>
             <a:picLocks noChangeAspect="1"/>
           </p:cNvPicPr>
           <p:nvPr/>
         </p:nvPicPr>
         <p:blipFill>
-          <a:blip r:embed="rId1"/>
+          <a:blip r:embed="rId3"/>
           <a:stretch>
             <a:fillRect/>
           </a:stretch>
@@ -15463,7 +15177,7 @@
           <a:bodyPr wrap="square" lIns="0" tIns="0" rIns="0" bIns="0" rtlCol="0" anchor="ctr"/>
           <a:lstStyle/>
           <a:p>
-            <a:pPr algn="ctr" indent="0" marL="0">
+            <a:pPr marL="0" indent="0" algn="ctr">
               <a:buNone/>
             </a:pPr>
             <a:r>
@@ -15499,7 +15213,7 @@
           <a:bodyPr wrap="square" lIns="0" tIns="0" rIns="0" bIns="0" rtlCol="0" anchor="t"/>
           <a:lstStyle/>
           <a:p>
-            <a:pPr algn="ctr" indent="0" marL="0">
+            <a:pPr marL="0" indent="0" algn="ctr">
               <a:buNone/>
             </a:pPr>
             <a:r>
@@ -15513,7 +15227,7 @@
             <a:endParaRPr lang="en-US" sz="900" dirty="0"/>
           </a:p>
           <a:p>
-            <a:pPr algn="ctr" indent="0" marL="0">
+            <a:pPr marL="0" indent="0" algn="ctr">
               <a:buNone/>
             </a:pPr>
             <a:r>
@@ -15530,14 +15244,14 @@
       </p:sp>
       <p:pic>
         <p:nvPicPr>
-          <p:cNvPr id="19" name="설문 3분" descr="C:\Users\user\Desktop\albaguard기술창업\docs\report_src\qr_survey.png">    </p:cNvPr>
+          <p:cNvPr id="19" name="설문 3분" descr="C:\Users\user\Desktop\albaguard기술창업\docs\report_src\qr_survey.png"/>
           <p:cNvPicPr>
             <a:picLocks noChangeAspect="1"/>
           </p:cNvPicPr>
           <p:nvPr/>
         </p:nvPicPr>
         <p:blipFill>
-          <a:blip r:embed="rId2"/>
+          <a:blip r:embed="rId4"/>
           <a:stretch>
             <a:fillRect/>
           </a:stretch>
@@ -15573,7 +15287,7 @@
           <a:bodyPr wrap="square" lIns="0" tIns="0" rIns="0" bIns="0" rtlCol="0" anchor="ctr"/>
           <a:lstStyle/>
           <a:p>
-            <a:pPr algn="ctr" indent="0" marL="0">
+            <a:pPr marL="0" indent="0" algn="ctr">
               <a:buNone/>
             </a:pPr>
             <a:r>
@@ -15609,7 +15323,7 @@
           <a:bodyPr wrap="square" lIns="0" tIns="0" rIns="0" bIns="0" rtlCol="0" anchor="t"/>
           <a:lstStyle/>
           <a:p>
-            <a:pPr algn="ctr" indent="0" marL="0">
+            <a:pPr marL="0" indent="0" algn="ctr">
               <a:buNone/>
             </a:pPr>
             <a:r>
@@ -15623,7 +15337,7 @@
             <a:endParaRPr lang="en-US" sz="900" dirty="0"/>
           </a:p>
           <a:p>
-            <a:pPr algn="ctr" indent="0" marL="0">
+            <a:pPr marL="0" indent="0" algn="ctr">
               <a:buNone/>
             </a:pPr>
             <a:r>
@@ -15659,7 +15373,7 @@
           <a:bodyPr wrap="square" lIns="0" tIns="0" rIns="0" bIns="0" rtlCol="0" anchor="ctr"/>
           <a:lstStyle/>
           <a:p>
-            <a:pPr algn="ctr" indent="0" marL="0">
+            <a:pPr marL="0" indent="0" algn="ctr">
               <a:buNone/>
             </a:pPr>
             <a:r>
@@ -15694,7 +15408,7 @@
           </a:prstGeom>
           <a:extLst>
             <a:ext uri="{C572A759-6A51-4108-AA02-DFA0A04FC94B}">
-              <ma14:wrappingTextBoxFlag xmlns:ma14="http://schemas.microsoft.com/office/mac/drawingml/2011/main" val="0"/>
+              <ma14:wrappingTextBoxFlag xmlns:ma14="http://schemas.microsoft.com/office/mac/drawingml/2011/main" xmlns="" val="0"/>
             </a:ext>
           </a:extLst>
         </p:spPr>
@@ -15712,7 +15426,7 @@
           <a:p>
             <a:pPr algn="r"/>
             <a:fld id="{F7021451-1387-4CA6-816F-3879F97B5CBC}" type="slidenum">
-              <a:rPr b="0" lang="en-US"/>
+              <a:rPr lang="en-US" b="0"/>
               <a:t>2</a:t>
             </a:fld>
             <a:endParaRPr lang="en-US"/>
@@ -15747,9 +15461,11 @@
       <p:sp>
         <p:nvSpPr>
           <p:cNvPr id="2" name="Text 1"/>
-          <p:cNvSpPr/>
+          <p:cNvSpPr>
+            <a:spLocks noGrp="1"/>
+          </p:cNvSpPr>
           <p:nvPr>
-            <p:ph idx="101" type="body" hasCustomPrompt="1"/>
+            <p:ph type="body" idx="101" hasCustomPrompt="1"/>
           </p:nvPr>
         </p:nvSpPr>
         <p:spPr>
@@ -15767,7 +15483,7 @@
           <a:bodyPr wrap="square" lIns="0" tIns="0" rIns="0" bIns="0" rtlCol="0"/>
           <a:lstStyle/>
           <a:p>
-            <a:pPr indent="0" marL="0">
+            <a:pPr marL="0" indent="0">
               <a:buNone/>
             </a:pPr>
             <a:r>
@@ -15785,9 +15501,11 @@
       <p:sp>
         <p:nvSpPr>
           <p:cNvPr id="3" name="Text 1"/>
-          <p:cNvSpPr/>
+          <p:cNvSpPr>
+            <a:spLocks noGrp="1"/>
+          </p:cNvSpPr>
           <p:nvPr>
-            <p:ph idx="102" type="title" hasCustomPrompt="1"/>
+            <p:ph type="title" idx="102" hasCustomPrompt="1"/>
           </p:nvPr>
         </p:nvSpPr>
         <p:spPr>
@@ -15805,7 +15523,7 @@
           <a:bodyPr wrap="square" lIns="0" tIns="0" rIns="0" bIns="0" rtlCol="0" anchor="t"/>
           <a:lstStyle/>
           <a:p>
-            <a:pPr algn="l" indent="0" marL="0">
+            <a:pPr marL="0" indent="0" algn="l">
               <a:buNone/>
             </a:pPr>
             <a:r>
@@ -15868,7 +15586,7 @@
           <a:bodyPr wrap="square" lIns="0" tIns="0" rIns="0" bIns="0" rtlCol="0" anchor="ctr"/>
           <a:lstStyle/>
           <a:p>
-            <a:pPr indent="0" marL="0">
+            <a:pPr marL="0" indent="0">
               <a:buNone/>
             </a:pPr>
             <a:r>
@@ -15879,9 +15597,6 @@
               </a:rPr>
               <a:t>타깃  </a:t>
             </a:r>
-            <a:pPr indent="0" marL="0">
-              <a:buNone/>
-            </a:pPr>
             <a:r>
               <a:rPr lang="en-US" sz="1150" dirty="0">
                 <a:solidFill>
@@ -15915,7 +15630,7 @@
           <a:bodyPr wrap="square" lIns="0" tIns="0" rIns="0" bIns="0" rtlCol="0" anchor="b"/>
           <a:lstStyle/>
           <a:p>
-            <a:pPr indent="0" marL="0">
+            <a:pPr marL="0" indent="0">
               <a:buNone/>
             </a:pPr>
             <a:r>
@@ -15951,7 +15666,7 @@
           <a:bodyPr wrap="square" lIns="0" tIns="0" rIns="0" bIns="0" rtlCol="0" anchor="t"/>
           <a:lstStyle/>
           <a:p>
-            <a:pPr indent="0" marL="0">
+            <a:pPr marL="0" indent="0">
               <a:buNone/>
             </a:pPr>
             <a:r>
@@ -15987,7 +15702,7 @@
           <a:bodyPr wrap="square" lIns="0" tIns="0" rIns="0" bIns="0" rtlCol="0" anchor="t"/>
           <a:lstStyle/>
           <a:p>
-            <a:pPr indent="0" marL="0">
+            <a:pPr marL="0" indent="0">
               <a:buNone/>
             </a:pPr>
             <a:r>
@@ -16071,7 +15786,7 @@
           <a:bodyPr wrap="square" lIns="0" tIns="0" rIns="0" bIns="0" rtlCol="0" anchor="ctr"/>
           <a:lstStyle/>
           <a:p>
-            <a:pPr algn="ctr" indent="0" marL="0">
+            <a:pPr marL="0" indent="0" algn="ctr">
               <a:buNone/>
             </a:pPr>
             <a:r>
@@ -16107,7 +15822,7 @@
           <a:bodyPr wrap="square" lIns="0" tIns="0" rIns="0" bIns="0" rtlCol="0" anchor="t"/>
           <a:lstStyle/>
           <a:p>
-            <a:pPr indent="0" marL="0">
+            <a:pPr marL="0" indent="0">
               <a:buNone/>
             </a:pPr>
             <a:r>
@@ -16121,7 +15836,7 @@
             <a:endParaRPr lang="en-US" sz="1400" dirty="0"/>
           </a:p>
           <a:p>
-            <a:pPr indent="0" marL="0">
+            <a:pPr marL="0" indent="0">
               <a:buNone/>
             </a:pPr>
             <a:r>
@@ -16157,7 +15872,7 @@
           <a:bodyPr wrap="square" lIns="0" tIns="0" rIns="0" bIns="0" rtlCol="0" anchor="b"/>
           <a:lstStyle/>
           <a:p>
-            <a:pPr indent="0" marL="0">
+            <a:pPr marL="0" indent="0">
               <a:buNone/>
             </a:pPr>
             <a:r>
@@ -16193,7 +15908,7 @@
           <a:bodyPr wrap="square" lIns="0" tIns="0" rIns="0" bIns="0" rtlCol="0" anchor="t"/>
           <a:lstStyle/>
           <a:p>
-            <a:pPr indent="0" marL="0">
+            <a:pPr marL="0" indent="0">
               <a:buNone/>
             </a:pPr>
             <a:r>
@@ -16229,7 +15944,7 @@
           <a:bodyPr wrap="square" lIns="0" tIns="0" rIns="0" bIns="0" rtlCol="0" anchor="t"/>
           <a:lstStyle/>
           <a:p>
-            <a:pPr indent="0" marL="0">
+            <a:pPr marL="0" indent="0">
               <a:buNone/>
             </a:pPr>
             <a:r>
@@ -16243,7 +15958,7 @@
             <a:endParaRPr lang="en-US" sz="850" dirty="0"/>
           </a:p>
           <a:p>
-            <a:pPr indent="0" marL="0">
+            <a:pPr marL="0" indent="0">
               <a:buNone/>
             </a:pPr>
             <a:r>
@@ -16327,7 +16042,7 @@
           <a:bodyPr wrap="square" lIns="0" tIns="0" rIns="0" bIns="0" rtlCol="0" anchor="ctr"/>
           <a:lstStyle/>
           <a:p>
-            <a:pPr algn="ctr" indent="0" marL="0">
+            <a:pPr marL="0" indent="0" algn="ctr">
               <a:buNone/>
             </a:pPr>
             <a:r>
@@ -16363,7 +16078,7 @@
           <a:bodyPr wrap="square" lIns="0" tIns="0" rIns="0" bIns="0" rtlCol="0" anchor="t"/>
           <a:lstStyle/>
           <a:p>
-            <a:pPr indent="0" marL="0">
+            <a:pPr marL="0" indent="0">
               <a:buNone/>
             </a:pPr>
             <a:r>
@@ -16377,7 +16092,7 @@
             <a:endParaRPr lang="en-US" sz="1400" dirty="0"/>
           </a:p>
           <a:p>
-            <a:pPr indent="0" marL="0">
+            <a:pPr marL="0" indent="0">
               <a:buNone/>
             </a:pPr>
             <a:r>
@@ -16413,7 +16128,7 @@
           <a:bodyPr wrap="square" lIns="0" tIns="0" rIns="0" bIns="0" rtlCol="0" anchor="b"/>
           <a:lstStyle/>
           <a:p>
-            <a:pPr indent="0" marL="0">
+            <a:pPr marL="0" indent="0">
               <a:buNone/>
             </a:pPr>
             <a:r>
@@ -16449,7 +16164,7 @@
           <a:bodyPr wrap="square" lIns="0" tIns="0" rIns="0" bIns="0" rtlCol="0" anchor="t"/>
           <a:lstStyle/>
           <a:p>
-            <a:pPr indent="0" marL="0">
+            <a:pPr marL="0" indent="0">
               <a:buNone/>
             </a:pPr>
             <a:r>
@@ -16485,7 +16200,7 @@
           <a:bodyPr wrap="square" lIns="0" tIns="0" rIns="0" bIns="0" rtlCol="0" anchor="t"/>
           <a:lstStyle/>
           <a:p>
-            <a:pPr indent="0" marL="0">
+            <a:pPr marL="0" indent="0">
               <a:buNone/>
             </a:pPr>
             <a:r>
@@ -16569,7 +16284,7 @@
           <a:bodyPr wrap="square" lIns="0" tIns="0" rIns="0" bIns="0" rtlCol="0" anchor="ctr"/>
           <a:lstStyle/>
           <a:p>
-            <a:pPr algn="ctr" indent="0" marL="0">
+            <a:pPr marL="0" indent="0" algn="ctr">
               <a:buNone/>
             </a:pPr>
             <a:r>
@@ -16605,7 +16320,7 @@
           <a:bodyPr wrap="square" lIns="0" tIns="0" rIns="0" bIns="0" rtlCol="0" anchor="t"/>
           <a:lstStyle/>
           <a:p>
-            <a:pPr indent="0" marL="0">
+            <a:pPr marL="0" indent="0">
               <a:buNone/>
             </a:pPr>
             <a:r>
@@ -16619,7 +16334,7 @@
             <a:endParaRPr lang="en-US" sz="1400" dirty="0"/>
           </a:p>
           <a:p>
-            <a:pPr indent="0" marL="0">
+            <a:pPr marL="0" indent="0">
               <a:buNone/>
             </a:pPr>
             <a:r>
@@ -16636,7 +16351,7 @@
       </p:sp>
       <p:sp>
         <p:nvSpPr>
-          <p:cNvPr id="25" name="Slide Number Placeholder 0"/>
+          <p:cNvPr id="27" name="Slide Number Placeholder 0"/>
           <p:cNvSpPr>
             <a:spLocks noGrp="1"/>
           </p:cNvSpPr>
@@ -16654,7 +16369,7 @@
           </a:prstGeom>
           <a:extLst>
             <a:ext uri="{C572A759-6A51-4108-AA02-DFA0A04FC94B}">
-              <ma14:wrappingTextBoxFlag xmlns:ma14="http://schemas.microsoft.com/office/mac/drawingml/2011/main" val="0"/>
+              <ma14:wrappingTextBoxFlag xmlns:ma14="http://schemas.microsoft.com/office/mac/drawingml/2011/main" xmlns="" val="0"/>
             </a:ext>
           </a:extLst>
         </p:spPr>
@@ -16672,7 +16387,7 @@
           <a:p>
             <a:pPr algn="r"/>
             <a:fld id="{F7021451-1387-4CA6-816F-3879F97B5CBC}" type="slidenum">
-              <a:rPr b="0" lang="en-US"/>
+              <a:rPr lang="en-US" b="0"/>
               <a:t>3</a:t>
             </a:fld>
             <a:endParaRPr lang="en-US"/>
@@ -16707,9 +16422,11 @@
       <p:sp>
         <p:nvSpPr>
           <p:cNvPr id="2" name="Text 1"/>
-          <p:cNvSpPr/>
+          <p:cNvSpPr>
+            <a:spLocks noGrp="1"/>
+          </p:cNvSpPr>
           <p:nvPr>
-            <p:ph idx="101" type="body" hasCustomPrompt="1"/>
+            <p:ph type="body" idx="101" hasCustomPrompt="1"/>
           </p:nvPr>
         </p:nvSpPr>
         <p:spPr>
@@ -16727,7 +16444,7 @@
           <a:bodyPr wrap="square" lIns="0" tIns="0" rIns="0" bIns="0" rtlCol="0"/>
           <a:lstStyle/>
           <a:p>
-            <a:pPr indent="0" marL="0">
+            <a:pPr marL="0" indent="0">
               <a:buNone/>
             </a:pPr>
             <a:r>
@@ -16745,9 +16462,11 @@
       <p:sp>
         <p:nvSpPr>
           <p:cNvPr id="3" name="Text 1"/>
-          <p:cNvSpPr/>
+          <p:cNvSpPr>
+            <a:spLocks noGrp="1"/>
+          </p:cNvSpPr>
           <p:nvPr>
-            <p:ph idx="102" type="title" hasCustomPrompt="1"/>
+            <p:ph type="title" idx="102" hasCustomPrompt="1"/>
           </p:nvPr>
         </p:nvSpPr>
         <p:spPr>
@@ -16765,7 +16484,7 @@
           <a:bodyPr wrap="square" lIns="0" tIns="0" rIns="0" bIns="0" rtlCol="0" anchor="t"/>
           <a:lstStyle/>
           <a:p>
-            <a:pPr algn="l" indent="0" marL="0">
+            <a:pPr marL="0" indent="0" algn="l">
               <a:buNone/>
             </a:pPr>
             <a:r>
@@ -16803,13 +16522,55 @@
             <a:tbl>
               <a:tblPr/>
               <a:tblGrid>
-                <a:gridCol w="1920240"/>
-                <a:gridCol w="1051560"/>
-                <a:gridCol w="1051560"/>
-                <a:gridCol w="1051560"/>
-                <a:gridCol w="1051560"/>
-                <a:gridCol w="1051560"/>
-                <a:gridCol w="1051560"/>
+                <a:gridCol w="1920240">
+                  <a:extLst>
+                    <a:ext uri="{9D8B030D-6E8A-4147-A177-3AD203B41FA5}">
+                      <a16:colId xmlns:a16="http://schemas.microsoft.com/office/drawing/2014/main" val="20000"/>
+                    </a:ext>
+                  </a:extLst>
+                </a:gridCol>
+                <a:gridCol w="1051560">
+                  <a:extLst>
+                    <a:ext uri="{9D8B030D-6E8A-4147-A177-3AD203B41FA5}">
+                      <a16:colId xmlns:a16="http://schemas.microsoft.com/office/drawing/2014/main" val="20001"/>
+                    </a:ext>
+                  </a:extLst>
+                </a:gridCol>
+                <a:gridCol w="1051560">
+                  <a:extLst>
+                    <a:ext uri="{9D8B030D-6E8A-4147-A177-3AD203B41FA5}">
+                      <a16:colId xmlns:a16="http://schemas.microsoft.com/office/drawing/2014/main" val="20002"/>
+                    </a:ext>
+                  </a:extLst>
+                </a:gridCol>
+                <a:gridCol w="1051560">
+                  <a:extLst>
+                    <a:ext uri="{9D8B030D-6E8A-4147-A177-3AD203B41FA5}">
+                      <a16:colId xmlns:a16="http://schemas.microsoft.com/office/drawing/2014/main" val="20003"/>
+                    </a:ext>
+                  </a:extLst>
+                </a:gridCol>
+                <a:gridCol w="1051560">
+                  <a:extLst>
+                    <a:ext uri="{9D8B030D-6E8A-4147-A177-3AD203B41FA5}">
+                      <a16:colId xmlns:a16="http://schemas.microsoft.com/office/drawing/2014/main" val="20004"/>
+                    </a:ext>
+                  </a:extLst>
+                </a:gridCol>
+                <a:gridCol w="1051560">
+                  <a:extLst>
+                    <a:ext uri="{9D8B030D-6E8A-4147-A177-3AD203B41FA5}">
+                      <a16:colId xmlns:a16="http://schemas.microsoft.com/office/drawing/2014/main" val="20005"/>
+                    </a:ext>
+                  </a:extLst>
+                </a:gridCol>
+                <a:gridCol w="1051560">
+                  <a:extLst>
+                    <a:ext uri="{9D8B030D-6E8A-4147-A177-3AD203B41FA5}">
+                      <a16:colId xmlns:a16="http://schemas.microsoft.com/office/drawing/2014/main" val="20006"/>
+                    </a:ext>
+                  </a:extLst>
+                </a:gridCol>
               </a:tblGrid>
               <a:tr h="365760">
                 <a:tc>
@@ -16817,7 +16578,7 @@
                     <a:bodyPr/>
                     <a:lstStyle/>
                     <a:p>
-                      <a:pPr algn="l" indent="0" marL="0">
+                      <a:pPr marL="0" indent="0" algn="l">
                         <a:buNone/>
                       </a:pPr>
                       <a:endParaRPr lang="en-US" sz="950" dirty="0"/>
@@ -16870,7 +16631,7 @@
                     <a:bodyPr/>
                     <a:lstStyle/>
                     <a:p>
-                      <a:pPr algn="ctr" indent="0" marL="0">
+                      <a:pPr marL="0" indent="0" algn="ctr">
                         <a:buNone/>
                       </a:pPr>
                       <a:r>
@@ -16931,7 +16692,7 @@
                     <a:bodyPr/>
                     <a:lstStyle/>
                     <a:p>
-                      <a:pPr algn="ctr" indent="0" marL="0">
+                      <a:pPr marL="0" indent="0" algn="ctr">
                         <a:buNone/>
                       </a:pPr>
                       <a:r>
@@ -16992,7 +16753,7 @@
                     <a:bodyPr/>
                     <a:lstStyle/>
                     <a:p>
-                      <a:pPr algn="ctr" indent="0" marL="0">
+                      <a:pPr marL="0" indent="0" algn="ctr">
                         <a:buNone/>
                       </a:pPr>
                       <a:r>
@@ -17053,7 +16814,7 @@
                     <a:bodyPr/>
                     <a:lstStyle/>
                     <a:p>
-                      <a:pPr algn="ctr" indent="0" marL="0">
+                      <a:pPr marL="0" indent="0" algn="ctr">
                         <a:buNone/>
                       </a:pPr>
                       <a:r>
@@ -17067,7 +16828,7 @@
                       <a:endParaRPr lang="en-US" sz="950" dirty="0"/>
                     </a:p>
                     <a:p>
-                      <a:pPr algn="ctr" indent="0" marL="0">
+                      <a:pPr marL="0" indent="0" algn="ctr">
                         <a:buNone/>
                       </a:pPr>
                       <a:r>
@@ -17128,7 +16889,7 @@
                     <a:bodyPr/>
                     <a:lstStyle/>
                     <a:p>
-                      <a:pPr algn="ctr" indent="0" marL="0">
+                      <a:pPr marL="0" indent="0" algn="ctr">
                         <a:buNone/>
                       </a:pPr>
                       <a:r>
@@ -17142,7 +16903,7 @@
                       <a:endParaRPr lang="en-US" sz="950" dirty="0"/>
                     </a:p>
                     <a:p>
-                      <a:pPr algn="ctr" indent="0" marL="0">
+                      <a:pPr marL="0" indent="0" algn="ctr">
                         <a:buNone/>
                       </a:pPr>
                       <a:r>
@@ -17203,7 +16964,7 @@
                     <a:bodyPr/>
                     <a:lstStyle/>
                     <a:p>
-                      <a:pPr algn="ctr" indent="0" marL="0">
+                      <a:pPr marL="0" indent="0" algn="ctr">
                         <a:buNone/>
                       </a:pPr>
                       <a:r>
@@ -17259,6 +17020,11 @@
                     </a:solidFill>
                   </a:tcPr>
                 </a:tc>
+                <a:extLst>
+                  <a:ext uri="{0D108BD9-81ED-4DB2-BD59-A6C34878D82A}">
+                    <a16:rowId xmlns:a16="http://schemas.microsoft.com/office/drawing/2014/main" val="10000"/>
+                  </a:ext>
+                </a:extLst>
               </a:tr>
               <a:tr h="384048">
                 <a:tc>
@@ -17266,7 +17032,7 @@
                     <a:bodyPr/>
                     <a:lstStyle/>
                     <a:p>
-                      <a:pPr indent="0" marL="0">
+                      <a:pPr marL="0" indent="0">
                         <a:buNone/>
                       </a:pPr>
                       <a:r>
@@ -17324,7 +17090,7 @@
                     <a:bodyPr/>
                     <a:lstStyle/>
                     <a:p>
-                      <a:pPr algn="ctr" indent="0" marL="0">
+                      <a:pPr marL="0" indent="0" algn="ctr">
                         <a:buNone/>
                       </a:pPr>
                       <a:r>
@@ -17382,7 +17148,7 @@
                     <a:bodyPr/>
                     <a:lstStyle/>
                     <a:p>
-                      <a:pPr algn="ctr" indent="0" marL="0">
+                      <a:pPr marL="0" indent="0" algn="ctr">
                         <a:buNone/>
                       </a:pPr>
                       <a:r>
@@ -17440,7 +17206,7 @@
                     <a:bodyPr/>
                     <a:lstStyle/>
                     <a:p>
-                      <a:pPr algn="ctr" indent="0" marL="0">
+                      <a:pPr marL="0" indent="0" algn="ctr">
                         <a:buNone/>
                       </a:pPr>
                       <a:r>
@@ -17451,9 +17217,6 @@
                         </a:rPr>
                         <a:t>X</a:t>
                       </a:r>
-                      <a:pPr algn="ctr" indent="0" marL="0">
-                        <a:buNone/>
-                      </a:pPr>
                       <a:r>
                         <a:rPr lang="en-US" sz="900" dirty="0">
                           <a:solidFill>
@@ -17509,7 +17272,7 @@
                     <a:bodyPr/>
                     <a:lstStyle/>
                     <a:p>
-                      <a:pPr algn="ctr" indent="0" marL="0">
+                      <a:pPr marL="0" indent="0" algn="ctr">
                         <a:buNone/>
                       </a:pPr>
                       <a:r>
@@ -17567,7 +17330,7 @@
                     <a:bodyPr/>
                     <a:lstStyle/>
                     <a:p>
-                      <a:pPr algn="ctr" indent="0" marL="0">
+                      <a:pPr marL="0" indent="0" algn="ctr">
                         <a:buNone/>
                       </a:pPr>
                       <a:r>
@@ -17625,7 +17388,7 @@
                     <a:bodyPr/>
                     <a:lstStyle/>
                     <a:p>
-                      <a:pPr algn="ctr" indent="0" marL="0">
+                      <a:pPr marL="0" indent="0" algn="ctr">
                         <a:buNone/>
                       </a:pPr>
                       <a:r>
@@ -17681,6 +17444,11 @@
                     </a:solidFill>
                   </a:tcPr>
                 </a:tc>
+                <a:extLst>
+                  <a:ext uri="{0D108BD9-81ED-4DB2-BD59-A6C34878D82A}">
+                    <a16:rowId xmlns:a16="http://schemas.microsoft.com/office/drawing/2014/main" val="10001"/>
+                  </a:ext>
+                </a:extLst>
               </a:tr>
               <a:tr h="384048">
                 <a:tc>
@@ -17688,7 +17456,7 @@
                     <a:bodyPr/>
                     <a:lstStyle/>
                     <a:p>
-                      <a:pPr indent="0" marL="0">
+                      <a:pPr marL="0" indent="0">
                         <a:buNone/>
                       </a:pPr>
                       <a:r>
@@ -17746,7 +17514,7 @@
                     <a:bodyPr/>
                     <a:lstStyle/>
                     <a:p>
-                      <a:pPr algn="ctr" indent="0" marL="0">
+                      <a:pPr marL="0" indent="0" algn="ctr">
                         <a:buNone/>
                       </a:pPr>
                       <a:r>
@@ -17804,7 +17572,7 @@
                     <a:bodyPr/>
                     <a:lstStyle/>
                     <a:p>
-                      <a:pPr algn="ctr" indent="0" marL="0">
+                      <a:pPr marL="0" indent="0" algn="ctr">
                         <a:buNone/>
                       </a:pPr>
                       <a:r>
@@ -17862,7 +17630,7 @@
                     <a:bodyPr/>
                     <a:lstStyle/>
                     <a:p>
-                      <a:pPr algn="ctr" indent="0" marL="0">
+                      <a:pPr marL="0" indent="0" algn="ctr">
                         <a:buNone/>
                       </a:pPr>
                       <a:r>
@@ -17920,7 +17688,7 @@
                     <a:bodyPr/>
                     <a:lstStyle/>
                     <a:p>
-                      <a:pPr algn="ctr" indent="0" marL="0">
+                      <a:pPr marL="0" indent="0" algn="ctr">
                         <a:buNone/>
                       </a:pPr>
                       <a:r>
@@ -17931,9 +17699,6 @@
                         </a:rPr>
                         <a:t>O</a:t>
                       </a:r>
-                      <a:pPr algn="ctr" indent="0" marL="0">
-                        <a:buNone/>
-                      </a:pPr>
                       <a:r>
                         <a:rPr lang="en-US" sz="900" dirty="0">
                           <a:solidFill>
@@ -17989,7 +17754,7 @@
                     <a:bodyPr/>
                     <a:lstStyle/>
                     <a:p>
-                      <a:pPr algn="ctr" indent="0" marL="0">
+                      <a:pPr marL="0" indent="0" algn="ctr">
                         <a:buNone/>
                       </a:pPr>
                       <a:r>
@@ -18047,7 +17812,7 @@
                     <a:bodyPr/>
                     <a:lstStyle/>
                     <a:p>
-                      <a:pPr algn="ctr" indent="0" marL="0">
+                      <a:pPr marL="0" indent="0" algn="ctr">
                         <a:buNone/>
                       </a:pPr>
                       <a:r>
@@ -18058,9 +17823,6 @@
                         </a:rPr>
                         <a:t>O</a:t>
                       </a:r>
-                      <a:pPr algn="ctr" indent="0" marL="0">
-                        <a:buNone/>
-                      </a:pPr>
                       <a:r>
                         <a:rPr lang="en-US" sz="900" dirty="0">
                           <a:solidFill>
@@ -18114,6 +17876,11 @@
                     </a:solidFill>
                   </a:tcPr>
                 </a:tc>
+                <a:extLst>
+                  <a:ext uri="{0D108BD9-81ED-4DB2-BD59-A6C34878D82A}">
+                    <a16:rowId xmlns:a16="http://schemas.microsoft.com/office/drawing/2014/main" val="10002"/>
+                  </a:ext>
+                </a:extLst>
               </a:tr>
               <a:tr h="384048">
                 <a:tc>
@@ -18121,7 +17888,7 @@
                     <a:bodyPr/>
                     <a:lstStyle/>
                     <a:p>
-                      <a:pPr indent="0" marL="0">
+                      <a:pPr marL="0" indent="0">
                         <a:buNone/>
                       </a:pPr>
                       <a:r>
@@ -18179,7 +17946,7 @@
                     <a:bodyPr/>
                     <a:lstStyle/>
                     <a:p>
-                      <a:pPr algn="ctr" indent="0" marL="0">
+                      <a:pPr marL="0" indent="0" algn="ctr">
                         <a:buNone/>
                       </a:pPr>
                       <a:r>
@@ -18237,7 +18004,7 @@
                     <a:bodyPr/>
                     <a:lstStyle/>
                     <a:p>
-                      <a:pPr algn="ctr" indent="0" marL="0">
+                      <a:pPr marL="0" indent="0" algn="ctr">
                         <a:buNone/>
                       </a:pPr>
                       <a:r>
@@ -18295,7 +18062,7 @@
                     <a:bodyPr/>
                     <a:lstStyle/>
                     <a:p>
-                      <a:pPr algn="ctr" indent="0" marL="0">
+                      <a:pPr marL="0" indent="0" algn="ctr">
                         <a:buNone/>
                       </a:pPr>
                       <a:r>
@@ -18353,7 +18120,7 @@
                     <a:bodyPr/>
                     <a:lstStyle/>
                     <a:p>
-                      <a:pPr algn="ctr" indent="0" marL="0">
+                      <a:pPr marL="0" indent="0" algn="ctr">
                         <a:buNone/>
                       </a:pPr>
                       <a:r>
@@ -18411,7 +18178,7 @@
                     <a:bodyPr/>
                     <a:lstStyle/>
                     <a:p>
-                      <a:pPr algn="ctr" indent="0" marL="0">
+                      <a:pPr marL="0" indent="0" algn="ctr">
                         <a:buNone/>
                       </a:pPr>
                       <a:r>
@@ -18469,7 +18236,7 @@
                     <a:bodyPr/>
                     <a:lstStyle/>
                     <a:p>
-                      <a:pPr algn="ctr" indent="0" marL="0">
+                      <a:pPr marL="0" indent="0" algn="ctr">
                         <a:buNone/>
                       </a:pPr>
                       <a:r>
@@ -18525,6 +18292,11 @@
                     </a:solidFill>
                   </a:tcPr>
                 </a:tc>
+                <a:extLst>
+                  <a:ext uri="{0D108BD9-81ED-4DB2-BD59-A6C34878D82A}">
+                    <a16:rowId xmlns:a16="http://schemas.microsoft.com/office/drawing/2014/main" val="10003"/>
+                  </a:ext>
+                </a:extLst>
               </a:tr>
               <a:tr h="384048">
                 <a:tc>
@@ -18532,7 +18304,7 @@
                     <a:bodyPr/>
                     <a:lstStyle/>
                     <a:p>
-                      <a:pPr indent="0" marL="0">
+                      <a:pPr marL="0" indent="0">
                         <a:buNone/>
                       </a:pPr>
                       <a:r>
@@ -18590,7 +18362,7 @@
                     <a:bodyPr/>
                     <a:lstStyle/>
                     <a:p>
-                      <a:pPr algn="ctr" indent="0" marL="0">
+                      <a:pPr marL="0" indent="0" algn="ctr">
                         <a:buNone/>
                       </a:pPr>
                       <a:r>
@@ -18648,7 +18420,7 @@
                     <a:bodyPr/>
                     <a:lstStyle/>
                     <a:p>
-                      <a:pPr algn="ctr" indent="0" marL="0">
+                      <a:pPr marL="0" indent="0" algn="ctr">
                         <a:buNone/>
                       </a:pPr>
                       <a:r>
@@ -18706,7 +18478,7 @@
                     <a:bodyPr/>
                     <a:lstStyle/>
                     <a:p>
-                      <a:pPr algn="ctr" indent="0" marL="0">
+                      <a:pPr marL="0" indent="0" algn="ctr">
                         <a:buNone/>
                       </a:pPr>
                       <a:r>
@@ -18764,7 +18536,7 @@
                     <a:bodyPr/>
                     <a:lstStyle/>
                     <a:p>
-                      <a:pPr algn="ctr" indent="0" marL="0">
+                      <a:pPr marL="0" indent="0" algn="ctr">
                         <a:buNone/>
                       </a:pPr>
                       <a:r>
@@ -18822,7 +18594,7 @@
                     <a:bodyPr/>
                     <a:lstStyle/>
                     <a:p>
-                      <a:pPr algn="ctr" indent="0" marL="0">
+                      <a:pPr marL="0" indent="0" algn="ctr">
                         <a:buNone/>
                       </a:pPr>
                       <a:r>
@@ -18833,9 +18605,6 @@
                         </a:rPr>
                         <a:t>X</a:t>
                       </a:r>
-                      <a:pPr algn="ctr" indent="0" marL="0">
-                        <a:buNone/>
-                      </a:pPr>
                       <a:r>
                         <a:rPr lang="en-US" sz="900" dirty="0">
                           <a:solidFill>
@@ -18891,7 +18660,7 @@
                     <a:bodyPr/>
                     <a:lstStyle/>
                     <a:p>
-                      <a:pPr algn="ctr" indent="0" marL="0">
+                      <a:pPr marL="0" indent="0" algn="ctr">
                         <a:buNone/>
                       </a:pPr>
                       <a:r>
@@ -18947,6 +18716,11 @@
                     </a:solidFill>
                   </a:tcPr>
                 </a:tc>
+                <a:extLst>
+                  <a:ext uri="{0D108BD9-81ED-4DB2-BD59-A6C34878D82A}">
+                    <a16:rowId xmlns:a16="http://schemas.microsoft.com/office/drawing/2014/main" val="10004"/>
+                  </a:ext>
+                </a:extLst>
               </a:tr>
               <a:tr h="384048">
                 <a:tc>
@@ -18954,7 +18728,7 @@
                     <a:bodyPr/>
                     <a:lstStyle/>
                     <a:p>
-                      <a:pPr indent="0" marL="0">
+                      <a:pPr marL="0" indent="0">
                         <a:buNone/>
                       </a:pPr>
                       <a:r>
@@ -19012,7 +18786,7 @@
                     <a:bodyPr/>
                     <a:lstStyle/>
                     <a:p>
-                      <a:pPr algn="ctr" indent="0" marL="0">
+                      <a:pPr marL="0" indent="0" algn="ctr">
                         <a:buNone/>
                       </a:pPr>
                       <a:r>
@@ -19023,9 +18797,6 @@
                         </a:rPr>
                         <a:t>△</a:t>
                       </a:r>
-                      <a:pPr algn="ctr" indent="0" marL="0">
-                        <a:buNone/>
-                      </a:pPr>
                       <a:r>
                         <a:rPr lang="en-US" sz="900" dirty="0">
                           <a:solidFill>
@@ -19081,7 +18852,7 @@
                     <a:bodyPr/>
                     <a:lstStyle/>
                     <a:p>
-                      <a:pPr algn="ctr" indent="0" marL="0">
+                      <a:pPr marL="0" indent="0" algn="ctr">
                         <a:buNone/>
                       </a:pPr>
                       <a:r>
@@ -19139,7 +18910,7 @@
                     <a:bodyPr/>
                     <a:lstStyle/>
                     <a:p>
-                      <a:pPr algn="ctr" indent="0" marL="0">
+                      <a:pPr marL="0" indent="0" algn="ctr">
                         <a:buNone/>
                       </a:pPr>
                       <a:r>
@@ -19197,7 +18968,7 @@
                     <a:bodyPr/>
                     <a:lstStyle/>
                     <a:p>
-                      <a:pPr algn="ctr" indent="0" marL="0">
+                      <a:pPr marL="0" indent="0" algn="ctr">
                         <a:buNone/>
                       </a:pPr>
                       <a:r>
@@ -19255,7 +19026,7 @@
                     <a:bodyPr/>
                     <a:lstStyle/>
                     <a:p>
-                      <a:pPr algn="ctr" indent="0" marL="0">
+                      <a:pPr marL="0" indent="0" algn="ctr">
                         <a:buNone/>
                       </a:pPr>
                       <a:r>
@@ -19313,7 +19084,7 @@
                     <a:bodyPr/>
                     <a:lstStyle/>
                     <a:p>
-                      <a:pPr algn="ctr" indent="0" marL="0">
+                      <a:pPr marL="0" indent="0" algn="ctr">
                         <a:buNone/>
                       </a:pPr>
                       <a:r>
@@ -19369,6 +19140,11 @@
                     </a:solidFill>
                   </a:tcPr>
                 </a:tc>
+                <a:extLst>
+                  <a:ext uri="{0D108BD9-81ED-4DB2-BD59-A6C34878D82A}">
+                    <a16:rowId xmlns:a16="http://schemas.microsoft.com/office/drawing/2014/main" val="10005"/>
+                  </a:ext>
+                </a:extLst>
               </a:tr>
               <a:tr h="384048">
                 <a:tc>
@@ -19376,7 +19152,7 @@
                     <a:bodyPr/>
                     <a:lstStyle/>
                     <a:p>
-                      <a:pPr indent="0" marL="0">
+                      <a:pPr marL="0" indent="0">
                         <a:buNone/>
                       </a:pPr>
                       <a:r>
@@ -19434,7 +19210,7 @@
                     <a:bodyPr/>
                     <a:lstStyle/>
                     <a:p>
-                      <a:pPr algn="ctr" indent="0" marL="0">
+                      <a:pPr marL="0" indent="0" algn="ctr">
                         <a:buNone/>
                       </a:pPr>
                       <a:r>
@@ -19492,7 +19268,7 @@
                     <a:bodyPr/>
                     <a:lstStyle/>
                     <a:p>
-                      <a:pPr algn="ctr" indent="0" marL="0">
+                      <a:pPr marL="0" indent="0" algn="ctr">
                         <a:buNone/>
                       </a:pPr>
                       <a:r>
@@ -19550,7 +19326,7 @@
                     <a:bodyPr/>
                     <a:lstStyle/>
                     <a:p>
-                      <a:pPr algn="ctr" indent="0" marL="0">
+                      <a:pPr marL="0" indent="0" algn="ctr">
                         <a:buNone/>
                       </a:pPr>
                       <a:r>
@@ -19608,7 +19384,7 @@
                     <a:bodyPr/>
                     <a:lstStyle/>
                     <a:p>
-                      <a:pPr algn="ctr" indent="0" marL="0">
+                      <a:pPr marL="0" indent="0" algn="ctr">
                         <a:buNone/>
                       </a:pPr>
                       <a:r>
@@ -19666,7 +19442,7 @@
                     <a:bodyPr/>
                     <a:lstStyle/>
                     <a:p>
-                      <a:pPr algn="ctr" indent="0" marL="0">
+                      <a:pPr marL="0" indent="0" algn="ctr">
                         <a:buNone/>
                       </a:pPr>
                       <a:r>
@@ -19724,7 +19500,7 @@
                     <a:bodyPr/>
                     <a:lstStyle/>
                     <a:p>
-                      <a:pPr algn="ctr" indent="0" marL="0">
+                      <a:pPr marL="0" indent="0" algn="ctr">
                         <a:buNone/>
                       </a:pPr>
                       <a:r>
@@ -19735,9 +19511,6 @@
                         </a:rPr>
                         <a:t>X</a:t>
                       </a:r>
-                      <a:pPr algn="ctr" indent="0" marL="0">
-                        <a:buNone/>
-                      </a:pPr>
                       <a:r>
                         <a:rPr lang="en-US" sz="900" dirty="0">
                           <a:solidFill>
@@ -19791,6 +19564,11 @@
                     </a:solidFill>
                   </a:tcPr>
                 </a:tc>
+                <a:extLst>
+                  <a:ext uri="{0D108BD9-81ED-4DB2-BD59-A6C34878D82A}">
+                    <a16:rowId xmlns:a16="http://schemas.microsoft.com/office/drawing/2014/main" val="10006"/>
+                  </a:ext>
+                </a:extLst>
               </a:tr>
             </a:tbl>
           </a:graphicData>
@@ -19798,7 +19576,7 @@
       </p:graphicFrame>
       <p:sp>
         <p:nvSpPr>
-          <p:cNvPr id="5" name="결론 칸"/>
+          <p:cNvPr id="4" name="결론 칸"/>
           <p:cNvSpPr/>
           <p:nvPr/>
         </p:nvSpPr>
@@ -19844,7 +19622,7 @@
           <a:bodyPr wrap="square" lIns="0" tIns="0" rIns="0" bIns="0" rtlCol="0" anchor="ctr"/>
           <a:lstStyle/>
           <a:p>
-            <a:pPr indent="0" marL="0">
+            <a:pPr marL="0" indent="0">
               <a:buNone/>
             </a:pPr>
             <a:r>
@@ -19855,9 +19633,6 @@
               </a:rPr>
               <a:t>알바가드만 O  </a:t>
             </a:r>
-            <a:pPr indent="0" marL="0">
-              <a:buNone/>
-            </a:pPr>
             <a:r>
               <a:rPr lang="en-US" sz="1150" dirty="0">
                 <a:solidFill>
@@ -19890,7 +19665,7 @@
           </a:prstGeom>
           <a:extLst>
             <a:ext uri="{C572A759-6A51-4108-AA02-DFA0A04FC94B}">
-              <ma14:wrappingTextBoxFlag xmlns:ma14="http://schemas.microsoft.com/office/mac/drawingml/2011/main" val="0"/>
+              <ma14:wrappingTextBoxFlag xmlns:ma14="http://schemas.microsoft.com/office/mac/drawingml/2011/main" xmlns="" val="0"/>
             </a:ext>
           </a:extLst>
         </p:spPr>
@@ -19908,7 +19683,7 @@
           <a:p>
             <a:pPr algn="r"/>
             <a:fld id="{F7021451-1387-4CA6-816F-3879F97B5CBC}" type="slidenum">
-              <a:rPr b="0" lang="en-US"/>
+              <a:rPr lang="en-US" b="0"/>
               <a:t>4</a:t>
             </a:fld>
             <a:endParaRPr lang="en-US"/>
@@ -19943,9 +19718,11 @@
       <p:sp>
         <p:nvSpPr>
           <p:cNvPr id="2" name="Text 1"/>
-          <p:cNvSpPr/>
+          <p:cNvSpPr>
+            <a:spLocks noGrp="1"/>
+          </p:cNvSpPr>
           <p:nvPr>
-            <p:ph idx="101" type="body" hasCustomPrompt="1"/>
+            <p:ph type="body" idx="101" hasCustomPrompt="1"/>
           </p:nvPr>
         </p:nvSpPr>
         <p:spPr>
@@ -19963,7 +19740,7 @@
           <a:bodyPr wrap="square" lIns="0" tIns="0" rIns="0" bIns="0" rtlCol="0"/>
           <a:lstStyle/>
           <a:p>
-            <a:pPr indent="0" marL="0">
+            <a:pPr marL="0" indent="0">
               <a:buNone/>
             </a:pPr>
             <a:r>
@@ -19981,9 +19758,11 @@
       <p:sp>
         <p:nvSpPr>
           <p:cNvPr id="3" name="Text 1"/>
-          <p:cNvSpPr/>
+          <p:cNvSpPr>
+            <a:spLocks noGrp="1"/>
+          </p:cNvSpPr>
           <p:nvPr>
-            <p:ph idx="102" type="title" hasCustomPrompt="1"/>
+            <p:ph type="title" idx="102" hasCustomPrompt="1"/>
           </p:nvPr>
         </p:nvSpPr>
         <p:spPr>
@@ -20001,7 +19780,7 @@
           <a:bodyPr wrap="square" lIns="0" tIns="0" rIns="0" bIns="0" rtlCol="0" anchor="t"/>
           <a:lstStyle/>
           <a:p>
-            <a:pPr algn="l" indent="0" marL="0">
+            <a:pPr marL="0" indent="0" algn="l">
               <a:buNone/>
             </a:pPr>
             <a:r>
@@ -20062,7 +19841,7 @@
           <a:bodyPr wrap="square" lIns="0" tIns="0" rIns="0" bIns="0" rtlCol="0" anchor="ctr"/>
           <a:lstStyle/>
           <a:p>
-            <a:pPr algn="ctr" indent="0" marL="0">
+            <a:pPr marL="0" indent="0" algn="ctr">
               <a:buNone/>
             </a:pPr>
             <a:r>
@@ -20098,7 +19877,7 @@
           <a:bodyPr wrap="square" lIns="0" tIns="0" rIns="0" bIns="0" rtlCol="0" anchor="ctr"/>
           <a:lstStyle/>
           <a:p>
-            <a:pPr indent="0" marL="0">
+            <a:pPr marL="0" indent="0">
               <a:buNone/>
             </a:pPr>
             <a:r>
@@ -20134,7 +19913,7 @@
           <a:bodyPr wrap="square" lIns="0" tIns="0" rIns="0" bIns="0" rtlCol="0" anchor="t"/>
           <a:lstStyle/>
           <a:p>
-            <a:pPr indent="0" marL="0">
+            <a:pPr marL="0" indent="0">
               <a:buNone/>
             </a:pPr>
             <a:r>
@@ -20178,14 +19957,14 @@
       </p:sp>
       <p:pic>
         <p:nvPicPr>
-          <p:cNvPr id="9" name="기록 화면" descr="C:\Users\user\Desktop\albaguard기술창업\docs\screenshots\1-home.jpg">    </p:cNvPr>
+          <p:cNvPr id="9" name="기록 화면" descr="C:\Users\user\Desktop\albaguard기술창업\docs\screenshots\1-home.jpg"/>
           <p:cNvPicPr>
             <a:picLocks noChangeAspect="1"/>
           </p:cNvPicPr>
           <p:nvPr/>
         </p:nvPicPr>
         <p:blipFill>
-          <a:blip r:embed="rId1"/>
+          <a:blip r:embed="rId3"/>
           <a:stretch>
             <a:fillRect/>
           </a:stretch>
@@ -20270,7 +20049,7 @@
           <a:bodyPr wrap="square" lIns="0" tIns="0" rIns="0" bIns="0" rtlCol="0" anchor="ctr"/>
           <a:lstStyle/>
           <a:p>
-            <a:pPr algn="ctr" indent="0" marL="0">
+            <a:pPr marL="0" indent="0" algn="ctr">
               <a:buNone/>
             </a:pPr>
             <a:r>
@@ -20306,7 +20085,7 @@
           <a:bodyPr wrap="square" lIns="0" tIns="0" rIns="0" bIns="0" rtlCol="0" anchor="ctr"/>
           <a:lstStyle/>
           <a:p>
-            <a:pPr indent="0" marL="0">
+            <a:pPr marL="0" indent="0">
               <a:buNone/>
             </a:pPr>
             <a:r>
@@ -20342,7 +20121,7 @@
           <a:bodyPr wrap="square" lIns="0" tIns="0" rIns="0" bIns="0" rtlCol="0" anchor="t"/>
           <a:lstStyle/>
           <a:p>
-            <a:pPr indent="0" marL="0">
+            <a:pPr marL="0" indent="0">
               <a:buNone/>
             </a:pPr>
             <a:r>
@@ -20356,7 +20135,7 @@
             <a:endParaRPr lang="en-US" sz="1050" dirty="0"/>
           </a:p>
           <a:p>
-            <a:pPr indent="0" marL="0">
+            <a:pPr marL="0" indent="0">
               <a:buNone/>
             </a:pPr>
             <a:r>
@@ -20400,14 +20179,14 @@
       </p:sp>
       <p:pic>
         <p:nvPicPr>
-          <p:cNvPr id="16" name="비교 화면" descr="C:\Users\user\Desktop\albaguard기술창업\docs\screenshots\3-pay.jpg">    </p:cNvPr>
+          <p:cNvPr id="16" name="비교 화면" descr="C:\Users\user\Desktop\albaguard기술창업\docs\screenshots\3-pay.jpg"/>
           <p:cNvPicPr>
             <a:picLocks noChangeAspect="1"/>
           </p:cNvPicPr>
           <p:nvPr/>
         </p:nvPicPr>
         <p:blipFill>
-          <a:blip r:embed="rId2"/>
+          <a:blip r:embed="rId4"/>
           <a:stretch>
             <a:fillRect/>
           </a:stretch>
@@ -20492,7 +20271,7 @@
           <a:bodyPr wrap="square" lIns="0" tIns="0" rIns="0" bIns="0" rtlCol="0" anchor="ctr"/>
           <a:lstStyle/>
           <a:p>
-            <a:pPr algn="ctr" indent="0" marL="0">
+            <a:pPr marL="0" indent="0" algn="ctr">
               <a:buNone/>
             </a:pPr>
             <a:r>
@@ -20528,7 +20307,7 @@
           <a:bodyPr wrap="square" lIns="0" tIns="0" rIns="0" bIns="0" rtlCol="0" anchor="ctr"/>
           <a:lstStyle/>
           <a:p>
-            <a:pPr indent="0" marL="0">
+            <a:pPr marL="0" indent="0">
               <a:buNone/>
             </a:pPr>
             <a:r>
@@ -20564,7 +20343,7 @@
           <a:bodyPr wrap="square" lIns="0" tIns="0" rIns="0" bIns="0" rtlCol="0" anchor="t"/>
           <a:lstStyle/>
           <a:p>
-            <a:pPr indent="0" marL="0">
+            <a:pPr marL="0" indent="0">
               <a:buNone/>
             </a:pPr>
             <a:r>
@@ -20578,7 +20357,7 @@
             <a:endParaRPr lang="en-US" sz="1050" dirty="0"/>
           </a:p>
           <a:p>
-            <a:pPr indent="0" marL="0">
+            <a:pPr marL="0" indent="0">
               <a:buNone/>
             </a:pPr>
             <a:r>
@@ -20622,14 +20401,14 @@
       </p:sp>
       <p:pic>
         <p:nvPicPr>
-          <p:cNvPr id="23" name="요청 화면" descr="C:\Users\user\Desktop\albaguard기술창업\docs\screenshots\4-request.jpg">    </p:cNvPr>
+          <p:cNvPr id="23" name="요청 화면" descr="C:\Users\user\Desktop\albaguard기술창업\docs\screenshots\4-request.jpg"/>
           <p:cNvPicPr>
             <a:picLocks noChangeAspect="1"/>
           </p:cNvPicPr>
           <p:nvPr/>
         </p:nvPicPr>
         <p:blipFill>
-          <a:blip r:embed="rId3"/>
+          <a:blip r:embed="rId5"/>
           <a:stretch>
             <a:fillRect/>
           </a:stretch>
@@ -20664,7 +20443,7 @@
           </a:prstGeom>
           <a:extLst>
             <a:ext uri="{C572A759-6A51-4108-AA02-DFA0A04FC94B}">
-              <ma14:wrappingTextBoxFlag xmlns:ma14="http://schemas.microsoft.com/office/mac/drawingml/2011/main" val="0"/>
+              <ma14:wrappingTextBoxFlag xmlns:ma14="http://schemas.microsoft.com/office/mac/drawingml/2011/main" xmlns="" val="0"/>
             </a:ext>
           </a:extLst>
         </p:spPr>
@@ -20682,7 +20461,7 @@
           <a:p>
             <a:pPr algn="r"/>
             <a:fld id="{F7021451-1387-4CA6-816F-3879F97B5CBC}" type="slidenum">
-              <a:rPr b="0" lang="en-US"/>
+              <a:rPr lang="en-US" b="0"/>
               <a:t>5</a:t>
             </a:fld>
             <a:endParaRPr lang="en-US"/>
@@ -20717,9 +20496,11 @@
       <p:sp>
         <p:nvSpPr>
           <p:cNvPr id="2" name="Text 1"/>
-          <p:cNvSpPr/>
+          <p:cNvSpPr>
+            <a:spLocks noGrp="1"/>
+          </p:cNvSpPr>
           <p:nvPr>
-            <p:ph idx="101" type="body" hasCustomPrompt="1"/>
+            <p:ph type="body" idx="101" hasCustomPrompt="1"/>
           </p:nvPr>
         </p:nvSpPr>
         <p:spPr>
@@ -20737,7 +20518,7 @@
           <a:bodyPr wrap="square" lIns="0" tIns="0" rIns="0" bIns="0" rtlCol="0"/>
           <a:lstStyle/>
           <a:p>
-            <a:pPr indent="0" marL="0">
+            <a:pPr marL="0" indent="0">
               <a:buNone/>
             </a:pPr>
             <a:r>
@@ -20755,9 +20536,11 @@
       <p:sp>
         <p:nvSpPr>
           <p:cNvPr id="3" name="Text 1"/>
-          <p:cNvSpPr/>
+          <p:cNvSpPr>
+            <a:spLocks noGrp="1"/>
+          </p:cNvSpPr>
           <p:nvPr>
-            <p:ph idx="102" type="title" hasCustomPrompt="1"/>
+            <p:ph type="title" idx="102" hasCustomPrompt="1"/>
           </p:nvPr>
         </p:nvSpPr>
         <p:spPr>
@@ -20775,7 +20558,7 @@
           <a:bodyPr wrap="square" lIns="0" tIns="0" rIns="0" bIns="0" rtlCol="0" anchor="t"/>
           <a:lstStyle/>
           <a:p>
-            <a:pPr algn="l" indent="0" marL="0">
+            <a:pPr marL="0" indent="0" algn="l">
               <a:buNone/>
             </a:pPr>
             <a:r>
@@ -20836,7 +20619,7 @@
           <a:bodyPr wrap="square" lIns="0" tIns="0" rIns="0" bIns="0" rtlCol="0" anchor="ctr"/>
           <a:lstStyle/>
           <a:p>
-            <a:pPr algn="ctr" indent="0" marL="0">
+            <a:pPr marL="0" indent="0" algn="ctr">
               <a:buNone/>
             </a:pPr>
             <a:r>
@@ -20872,7 +20655,7 @@
           <a:bodyPr wrap="square" lIns="0" tIns="0" rIns="0" bIns="0" rtlCol="0" anchor="ctr"/>
           <a:lstStyle/>
           <a:p>
-            <a:pPr indent="0" marL="0">
+            <a:pPr marL="0" indent="0">
               <a:buNone/>
             </a:pPr>
             <a:r>
@@ -20883,9 +20666,6 @@
               </a:rPr>
               <a:t>사장 연동 없이 혼자 씀</a:t>
             </a:r>
-            <a:pPr indent="0" marL="0">
-              <a:buNone/>
-            </a:pPr>
             <a:r>
               <a:rPr lang="en-US" sz="900" dirty="0">
                 <a:solidFill>
@@ -20919,7 +20699,7 @@
           <a:bodyPr wrap="square" lIns="0" tIns="0" rIns="0" bIns="0" rtlCol="0" anchor="t"/>
           <a:lstStyle/>
           <a:p>
-            <a:pPr indent="0" marL="0">
+            <a:pPr marL="0" indent="0">
               <a:buNone/>
             </a:pPr>
             <a:r>
@@ -21003,7 +20783,7 @@
           <a:bodyPr wrap="square" lIns="0" tIns="0" rIns="0" bIns="0" rtlCol="0" anchor="ctr"/>
           <a:lstStyle/>
           <a:p>
-            <a:pPr algn="ctr" indent="0" marL="0">
+            <a:pPr marL="0" indent="0" algn="ctr">
               <a:buNone/>
             </a:pPr>
             <a:r>
@@ -21039,7 +20819,7 @@
           <a:bodyPr wrap="square" lIns="0" tIns="0" rIns="0" bIns="0" rtlCol="0" anchor="ctr"/>
           <a:lstStyle/>
           <a:p>
-            <a:pPr indent="0" marL="0">
+            <a:pPr marL="0" indent="0">
               <a:buNone/>
             </a:pPr>
             <a:r>
@@ -21050,9 +20830,6 @@
               </a:rPr>
               <a:t>입금액 비교 → 차액 → 요청 · 증빙까지</a:t>
             </a:r>
-            <a:pPr indent="0" marL="0">
-              <a:buNone/>
-            </a:pPr>
             <a:r>
               <a:rPr lang="en-US" sz="900" dirty="0">
                 <a:solidFill>
@@ -21086,7 +20863,7 @@
           <a:bodyPr wrap="square" lIns="0" tIns="0" rIns="0" bIns="0" rtlCol="0" anchor="t"/>
           <a:lstStyle/>
           <a:p>
-            <a:pPr indent="0" marL="0">
+            <a:pPr marL="0" indent="0">
               <a:buNone/>
             </a:pPr>
             <a:r>
@@ -21170,7 +20947,7 @@
           <a:bodyPr wrap="square" lIns="0" tIns="0" rIns="0" bIns="0" rtlCol="0" anchor="ctr"/>
           <a:lstStyle/>
           <a:p>
-            <a:pPr algn="ctr" indent="0" marL="0">
+            <a:pPr marL="0" indent="0" algn="ctr">
               <a:buNone/>
             </a:pPr>
             <a:r>
@@ -21206,7 +20983,7 @@
           <a:bodyPr wrap="square" lIns="0" tIns="0" rIns="0" bIns="0" rtlCol="0" anchor="ctr"/>
           <a:lstStyle/>
           <a:p>
-            <a:pPr indent="0" marL="0">
+            <a:pPr marL="0" indent="0">
               <a:buNone/>
             </a:pPr>
             <a:r>
@@ -21217,9 +20994,6 @@
               </a:rPr>
               <a:t>기록 등록: 확인 번호 + 등록 시각</a:t>
             </a:r>
-            <a:pPr indent="0" marL="0">
-              <a:buNone/>
-            </a:pPr>
             <a:r>
               <a:rPr lang="en-US" sz="900" dirty="0">
                 <a:solidFill>
@@ -21253,7 +21027,7 @@
           <a:bodyPr wrap="square" lIns="0" tIns="0" rIns="0" bIns="0" rtlCol="0" anchor="t"/>
           <a:lstStyle/>
           <a:p>
-            <a:pPr indent="0" marL="0">
+            <a:pPr marL="0" indent="0">
               <a:buNone/>
             </a:pPr>
             <a:r>
@@ -21339,7 +21113,7 @@
           <a:bodyPr wrap="square" lIns="0" tIns="0" rIns="0" bIns="0" rtlCol="0" anchor="ctr"/>
           <a:lstStyle/>
           <a:p>
-            <a:pPr indent="0" marL="0">
+            <a:pPr marL="0" indent="0">
               <a:buNone/>
             </a:pPr>
             <a:r>
@@ -21375,7 +21149,7 @@
           <a:bodyPr wrap="square" lIns="0" tIns="0" rIns="0" bIns="0" rtlCol="0" anchor="t"/>
           <a:lstStyle/>
           <a:p>
-            <a:pPr indent="0" marL="0">
+            <a:pPr marL="0" indent="0">
               <a:buNone/>
             </a:pPr>
             <a:r>
@@ -21411,7 +21185,7 @@
           <a:bodyPr wrap="square" lIns="0" tIns="0" rIns="0" bIns="0" rtlCol="0" anchor="t"/>
           <a:lstStyle/>
           <a:p>
-            <a:pPr indent="0" marL="0">
+            <a:pPr marL="0" indent="0">
               <a:buNone/>
             </a:pPr>
             <a:r>
@@ -21446,7 +21220,7 @@
           </a:prstGeom>
           <a:extLst>
             <a:ext uri="{C572A759-6A51-4108-AA02-DFA0A04FC94B}">
-              <ma14:wrappingTextBoxFlag xmlns:ma14="http://schemas.microsoft.com/office/mac/drawingml/2011/main" val="0"/>
+              <ma14:wrappingTextBoxFlag xmlns:ma14="http://schemas.microsoft.com/office/mac/drawingml/2011/main" xmlns="" val="0"/>
             </a:ext>
           </a:extLst>
         </p:spPr>
@@ -21464,7 +21238,7 @@
           <a:p>
             <a:pPr algn="r"/>
             <a:fld id="{F7021451-1387-4CA6-816F-3879F97B5CBC}" type="slidenum">
-              <a:rPr b="0" lang="en-US"/>
+              <a:rPr lang="en-US" b="0"/>
               <a:t>6</a:t>
             </a:fld>
             <a:endParaRPr lang="en-US"/>
@@ -21499,9 +21273,11 @@
       <p:sp>
         <p:nvSpPr>
           <p:cNvPr id="2" name="Text 1"/>
-          <p:cNvSpPr/>
+          <p:cNvSpPr>
+            <a:spLocks noGrp="1"/>
+          </p:cNvSpPr>
           <p:nvPr>
-            <p:ph idx="101" type="body" hasCustomPrompt="1"/>
+            <p:ph type="body" idx="101" hasCustomPrompt="1"/>
           </p:nvPr>
         </p:nvSpPr>
         <p:spPr>
@@ -21519,7 +21295,7 @@
           <a:bodyPr wrap="square" lIns="0" tIns="0" rIns="0" bIns="0" rtlCol="0"/>
           <a:lstStyle/>
           <a:p>
-            <a:pPr indent="0" marL="0">
+            <a:pPr marL="0" indent="0">
               <a:buNone/>
             </a:pPr>
             <a:r>
@@ -21537,9 +21313,11 @@
       <p:sp>
         <p:nvSpPr>
           <p:cNvPr id="3" name="Text 1"/>
-          <p:cNvSpPr/>
+          <p:cNvSpPr>
+            <a:spLocks noGrp="1"/>
+          </p:cNvSpPr>
           <p:nvPr>
-            <p:ph idx="102" type="title" hasCustomPrompt="1"/>
+            <p:ph type="title" idx="102" hasCustomPrompt="1"/>
           </p:nvPr>
         </p:nvSpPr>
         <p:spPr>
@@ -21557,7 +21335,7 @@
           <a:bodyPr wrap="square" lIns="0" tIns="0" rIns="0" bIns="0" rtlCol="0" anchor="t"/>
           <a:lstStyle/>
           <a:p>
-            <a:pPr algn="l" indent="0" marL="0">
+            <a:pPr marL="0" indent="0" algn="l">
               <a:buNone/>
             </a:pPr>
             <a:r>
@@ -21588,16 +21366,34 @@
         </p:nvGraphicFramePr>
         <p:xfrm>
           <a:off x="457200" y="1234440"/>
-          <a:ext cx="8229600" cy="914400"/>
+          <a:ext cx="8229600" cy="3474720"/>
         </p:xfrm>
         <a:graphic>
           <a:graphicData uri="http://schemas.openxmlformats.org/drawingml/2006/table">
             <a:tbl>
               <a:tblPr/>
               <a:tblGrid>
-                <a:gridCol w="1600200"/>
-                <a:gridCol w="3703320"/>
-                <a:gridCol w="2926080"/>
+                <a:gridCol w="1600200">
+                  <a:extLst>
+                    <a:ext uri="{9D8B030D-6E8A-4147-A177-3AD203B41FA5}">
+                      <a16:colId xmlns:a16="http://schemas.microsoft.com/office/drawing/2014/main" val="20000"/>
+                    </a:ext>
+                  </a:extLst>
+                </a:gridCol>
+                <a:gridCol w="3703320">
+                  <a:extLst>
+                    <a:ext uri="{9D8B030D-6E8A-4147-A177-3AD203B41FA5}">
+                      <a16:colId xmlns:a16="http://schemas.microsoft.com/office/drawing/2014/main" val="20001"/>
+                    </a:ext>
+                  </a:extLst>
+                </a:gridCol>
+                <a:gridCol w="2926080">
+                  <a:extLst>
+                    <a:ext uri="{9D8B030D-6E8A-4147-A177-3AD203B41FA5}">
+                      <a16:colId xmlns:a16="http://schemas.microsoft.com/office/drawing/2014/main" val="20002"/>
+                    </a:ext>
+                  </a:extLst>
+                </a:gridCol>
               </a:tblGrid>
               <a:tr h="365760">
                 <a:tc>
@@ -21605,7 +21401,7 @@
                     <a:bodyPr/>
                     <a:lstStyle/>
                     <a:p>
-                      <a:pPr indent="0" marL="0">
+                      <a:pPr marL="0" indent="0">
                         <a:buNone/>
                       </a:pPr>
                       <a:r>
@@ -21619,7 +21415,7 @@
                       <a:endParaRPr lang="en-US" sz="1100" dirty="0"/>
                     </a:p>
                   </a:txBody>
-                  <a:tcPr marL="91440" marR="91440" marT="36576" marB="36576" anchor="ctr">
+                  <a:tcPr marT="36576" marB="36576" anchor="ctr">
                     <a:lnL w="6350" cap="flat" cmpd="sng" algn="ctr">
                       <a:solidFill>
                         <a:srgbClr val="DCD9D0"/>
@@ -21666,7 +21462,7 @@
                     <a:bodyPr/>
                     <a:lstStyle/>
                     <a:p>
-                      <a:pPr indent="0" marL="0">
+                      <a:pPr marL="0" indent="0">
                         <a:buNone/>
                       </a:pPr>
                       <a:r>
@@ -21680,7 +21476,7 @@
                       <a:endParaRPr lang="en-US" sz="1100" dirty="0"/>
                     </a:p>
                   </a:txBody>
-                  <a:tcPr marL="91440" marR="91440" marT="36576" marB="36576" anchor="ctr">
+                  <a:tcPr marT="36576" marB="36576" anchor="ctr">
                     <a:lnL w="6350" cap="flat" cmpd="sng" algn="ctr">
                       <a:solidFill>
                         <a:srgbClr val="DCD9D0"/>
@@ -21727,7 +21523,7 @@
                     <a:bodyPr/>
                     <a:lstStyle/>
                     <a:p>
-                      <a:pPr indent="0" marL="0">
+                      <a:pPr marL="0" indent="0">
                         <a:buNone/>
                       </a:pPr>
                       <a:r>
@@ -21741,7 +21537,7 @@
                       <a:endParaRPr lang="en-US" sz="1100" dirty="0"/>
                     </a:p>
                   </a:txBody>
-                  <a:tcPr marL="91440" marR="91440" marT="36576" marB="36576" anchor="ctr">
+                  <a:tcPr marT="36576" marB="36576" anchor="ctr">
                     <a:lnL w="6350" cap="flat" cmpd="sng" algn="ctr">
                       <a:solidFill>
                         <a:srgbClr val="DCD9D0"/>
@@ -21783,6 +21579,11 @@
                     </a:solidFill>
                   </a:tcPr>
                 </a:tc>
+                <a:extLst>
+                  <a:ext uri="{0D108BD9-81ED-4DB2-BD59-A6C34878D82A}">
+                    <a16:rowId xmlns:a16="http://schemas.microsoft.com/office/drawing/2014/main" val="10000"/>
+                  </a:ext>
+                </a:extLst>
               </a:tr>
               <a:tr h="475488">
                 <a:tc>
@@ -21790,7 +21591,7 @@
                     <a:bodyPr/>
                     <a:lstStyle/>
                     <a:p>
-                      <a:pPr indent="0" marL="0">
+                      <a:pPr marL="0" indent="0">
                         <a:buNone/>
                       </a:pPr>
                       <a:r>
@@ -21804,7 +21605,7 @@
                       <a:endParaRPr lang="en-US" sz="1150" dirty="0"/>
                     </a:p>
                   </a:txBody>
-                  <a:tcPr marL="91440" marR="91440" marT="36576" marB="36576" anchor="ctr">
+                  <a:tcPr marT="36576" marB="36576" anchor="ctr">
                     <a:lnL w="6350" cap="flat" cmpd="sng" algn="ctr">
                       <a:solidFill>
                         <a:srgbClr val="DCD9D0"/>
@@ -21848,7 +21649,7 @@
                     <a:bodyPr/>
                     <a:lstStyle/>
                     <a:p>
-                      <a:pPr indent="0" marL="0">
+                      <a:pPr marL="0" indent="0">
                         <a:buNone/>
                       </a:pPr>
                       <a:r>
@@ -21862,7 +21663,7 @@
                       <a:endParaRPr lang="en-US" sz="1150" dirty="0"/>
                     </a:p>
                   </a:txBody>
-                  <a:tcPr marL="91440" marR="91440" marT="36576" marB="36576" anchor="ctr">
+                  <a:tcPr marT="36576" marB="36576" anchor="ctr">
                     <a:lnL w="6350" cap="flat" cmpd="sng" algn="ctr">
                       <a:solidFill>
                         <a:srgbClr val="DCD9D0"/>
@@ -21906,7 +21707,7 @@
                     <a:bodyPr/>
                     <a:lstStyle/>
                     <a:p>
-                      <a:pPr indent="0" marL="0">
+                      <a:pPr marL="0" indent="0">
                         <a:buNone/>
                       </a:pPr>
                       <a:r>
@@ -21920,7 +21721,7 @@
                       <a:endParaRPr lang="en-US" sz="1150" dirty="0"/>
                     </a:p>
                   </a:txBody>
-                  <a:tcPr marL="91440" marR="91440" marT="36576" marB="36576" anchor="ctr">
+                  <a:tcPr marT="36576" marB="36576" anchor="ctr">
                     <a:lnL w="6350" cap="flat" cmpd="sng" algn="ctr">
                       <a:solidFill>
                         <a:srgbClr val="DCD9D0"/>
@@ -21959,6 +21760,11 @@
                     </a:lnB>
                   </a:tcPr>
                 </a:tc>
+                <a:extLst>
+                  <a:ext uri="{0D108BD9-81ED-4DB2-BD59-A6C34878D82A}">
+                    <a16:rowId xmlns:a16="http://schemas.microsoft.com/office/drawing/2014/main" val="10001"/>
+                  </a:ext>
+                </a:extLst>
               </a:tr>
               <a:tr h="475488">
                 <a:tc>
@@ -21966,7 +21772,7 @@
                     <a:bodyPr/>
                     <a:lstStyle/>
                     <a:p>
-                      <a:pPr indent="0" marL="0">
+                      <a:pPr marL="0" indent="0">
                         <a:buNone/>
                       </a:pPr>
                       <a:r>
@@ -21980,7 +21786,7 @@
                       <a:endParaRPr lang="en-US" sz="1150" dirty="0"/>
                     </a:p>
                   </a:txBody>
-                  <a:tcPr marL="91440" marR="91440" marT="36576" marB="36576" anchor="ctr">
+                  <a:tcPr marT="36576" marB="36576" anchor="ctr">
                     <a:lnL w="6350" cap="flat" cmpd="sng" algn="ctr">
                       <a:solidFill>
                         <a:srgbClr val="DCD9D0"/>
@@ -22024,7 +21830,7 @@
                     <a:bodyPr/>
                     <a:lstStyle/>
                     <a:p>
-                      <a:pPr indent="0" marL="0">
+                      <a:pPr marL="0" indent="0">
                         <a:buNone/>
                       </a:pPr>
                       <a:r>
@@ -22038,7 +21844,7 @@
                       <a:endParaRPr lang="en-US" sz="1150" dirty="0"/>
                     </a:p>
                   </a:txBody>
-                  <a:tcPr marL="91440" marR="91440" marT="36576" marB="36576" anchor="ctr">
+                  <a:tcPr marT="36576" marB="36576" anchor="ctr">
                     <a:lnL w="6350" cap="flat" cmpd="sng" algn="ctr">
                       <a:solidFill>
                         <a:srgbClr val="DCD9D0"/>
@@ -22082,7 +21888,7 @@
                     <a:bodyPr/>
                     <a:lstStyle/>
                     <a:p>
-                      <a:pPr indent="0" marL="0">
+                      <a:pPr marL="0" indent="0">
                         <a:buNone/>
                       </a:pPr>
                       <a:r>
@@ -22096,7 +21902,7 @@
                       <a:endParaRPr lang="en-US" sz="1150" dirty="0"/>
                     </a:p>
                   </a:txBody>
-                  <a:tcPr marL="91440" marR="91440" marT="36576" marB="36576" anchor="ctr">
+                  <a:tcPr marT="36576" marB="36576" anchor="ctr">
                     <a:lnL w="6350" cap="flat" cmpd="sng" algn="ctr">
                       <a:solidFill>
                         <a:srgbClr val="DCD9D0"/>
@@ -22135,6 +21941,11 @@
                     </a:lnB>
                   </a:tcPr>
                 </a:tc>
+                <a:extLst>
+                  <a:ext uri="{0D108BD9-81ED-4DB2-BD59-A6C34878D82A}">
+                    <a16:rowId xmlns:a16="http://schemas.microsoft.com/office/drawing/2014/main" val="10002"/>
+                  </a:ext>
+                </a:extLst>
               </a:tr>
               <a:tr h="731520">
                 <a:tc>
@@ -22142,7 +21953,7 @@
                     <a:bodyPr/>
                     <a:lstStyle/>
                     <a:p>
-                      <a:pPr indent="0" marL="0">
+                      <a:pPr marL="0" indent="0">
                         <a:buNone/>
                       </a:pPr>
                       <a:r>
@@ -22156,7 +21967,7 @@
                       <a:endParaRPr lang="en-US" sz="1150" dirty="0"/>
                     </a:p>
                   </a:txBody>
-                  <a:tcPr marL="91440" marR="91440" marT="36576" marB="36576" anchor="ctr">
+                  <a:tcPr marT="36576" marB="36576" anchor="ctr">
                     <a:lnL w="6350" cap="flat" cmpd="sng" algn="ctr">
                       <a:solidFill>
                         <a:srgbClr val="DCD9D0"/>
@@ -22200,7 +22011,7 @@
                     <a:bodyPr/>
                     <a:lstStyle/>
                     <a:p>
-                      <a:pPr indent="0" marL="0">
+                      <a:pPr marL="0" indent="0">
                         <a:buNone/>
                       </a:pPr>
                       <a:r>
@@ -22214,7 +22025,7 @@
                       <a:endParaRPr lang="en-US" sz="1150" dirty="0"/>
                     </a:p>
                     <a:p>
-                      <a:pPr indent="0" marL="0">
+                      <a:pPr marL="0" indent="0">
                         <a:buNone/>
                       </a:pPr>
                       <a:r>
@@ -22228,7 +22039,7 @@
                       <a:endParaRPr lang="en-US" sz="1150" dirty="0"/>
                     </a:p>
                   </a:txBody>
-                  <a:tcPr marL="91440" marR="91440" marT="36576" marB="36576" anchor="ctr">
+                  <a:tcPr marT="36576" marB="36576" anchor="ctr">
                     <a:lnL w="6350" cap="flat" cmpd="sng" algn="ctr">
                       <a:solidFill>
                         <a:srgbClr val="DCD9D0"/>
@@ -22272,7 +22083,7 @@
                     <a:bodyPr/>
                     <a:lstStyle/>
                     <a:p>
-                      <a:pPr indent="0" marL="0">
+                      <a:pPr marL="0" indent="0">
                         <a:buNone/>
                       </a:pPr>
                       <a:r>
@@ -22286,7 +22097,7 @@
                       <a:endParaRPr lang="en-US" sz="1150" dirty="0"/>
                     </a:p>
                     <a:p>
-                      <a:pPr indent="0" marL="0">
+                      <a:pPr marL="0" indent="0">
                         <a:buNone/>
                       </a:pPr>
                       <a:r>
@@ -22300,7 +22111,7 @@
                       <a:endParaRPr lang="en-US" sz="1150" dirty="0"/>
                     </a:p>
                   </a:txBody>
-                  <a:tcPr marL="91440" marR="91440" marT="36576" marB="36576" anchor="ctr">
+                  <a:tcPr marT="36576" marB="36576" anchor="ctr">
                     <a:lnL w="6350" cap="flat" cmpd="sng" algn="ctr">
                       <a:solidFill>
                         <a:srgbClr val="DCD9D0"/>
@@ -22339,6 +22150,11 @@
                     </a:lnB>
                   </a:tcPr>
                 </a:tc>
+                <a:extLst>
+                  <a:ext uri="{0D108BD9-81ED-4DB2-BD59-A6C34878D82A}">
+                    <a16:rowId xmlns:a16="http://schemas.microsoft.com/office/drawing/2014/main" val="10003"/>
+                  </a:ext>
+                </a:extLst>
               </a:tr>
               <a:tr h="475488">
                 <a:tc>
@@ -22346,7 +22162,7 @@
                     <a:bodyPr/>
                     <a:lstStyle/>
                     <a:p>
-                      <a:pPr indent="0" marL="0">
+                      <a:pPr marL="0" indent="0">
                         <a:buNone/>
                       </a:pPr>
                       <a:r>
@@ -22360,7 +22176,7 @@
                       <a:endParaRPr lang="en-US" sz="1150" dirty="0"/>
                     </a:p>
                   </a:txBody>
-                  <a:tcPr marL="91440" marR="91440" marT="36576" marB="36576" anchor="ctr">
+                  <a:tcPr marT="36576" marB="36576" anchor="ctr">
                     <a:lnL w="6350" cap="flat" cmpd="sng" algn="ctr">
                       <a:solidFill>
                         <a:srgbClr val="DCD9D0"/>
@@ -22404,7 +22220,7 @@
                     <a:bodyPr/>
                     <a:lstStyle/>
                     <a:p>
-                      <a:pPr indent="0" marL="0">
+                      <a:pPr marL="0" indent="0">
                         <a:buNone/>
                       </a:pPr>
                       <a:r>
@@ -22418,7 +22234,7 @@
                       <a:endParaRPr lang="en-US" sz="1150" dirty="0"/>
                     </a:p>
                   </a:txBody>
-                  <a:tcPr marL="91440" marR="91440" marT="36576" marB="36576" anchor="ctr">
+                  <a:tcPr marT="36576" marB="36576" anchor="ctr">
                     <a:lnL w="6350" cap="flat" cmpd="sng" algn="ctr">
                       <a:solidFill>
                         <a:srgbClr val="DCD9D0"/>
@@ -22462,7 +22278,7 @@
                     <a:bodyPr/>
                     <a:lstStyle/>
                     <a:p>
-                      <a:pPr indent="0" marL="0">
+                      <a:pPr marL="0" indent="0">
                         <a:buNone/>
                       </a:pPr>
                       <a:r>
@@ -22476,7 +22292,7 @@
                       <a:endParaRPr lang="en-US" sz="1150" dirty="0"/>
                     </a:p>
                   </a:txBody>
-                  <a:tcPr marL="91440" marR="91440" marT="36576" marB="36576" anchor="ctr">
+                  <a:tcPr marT="36576" marB="36576" anchor="ctr">
                     <a:lnL w="6350" cap="flat" cmpd="sng" algn="ctr">
                       <a:solidFill>
                         <a:srgbClr val="DCD9D0"/>
@@ -22515,6 +22331,11 @@
                     </a:lnB>
                   </a:tcPr>
                 </a:tc>
+                <a:extLst>
+                  <a:ext uri="{0D108BD9-81ED-4DB2-BD59-A6C34878D82A}">
+                    <a16:rowId xmlns:a16="http://schemas.microsoft.com/office/drawing/2014/main" val="10004"/>
+                  </a:ext>
+                </a:extLst>
               </a:tr>
               <a:tr h="475488">
                 <a:tc>
@@ -22522,7 +22343,7 @@
                     <a:bodyPr/>
                     <a:lstStyle/>
                     <a:p>
-                      <a:pPr indent="0" marL="0">
+                      <a:pPr marL="0" indent="0">
                         <a:buNone/>
                       </a:pPr>
                       <a:r>
@@ -22536,7 +22357,7 @@
                       <a:endParaRPr lang="en-US" sz="1150" dirty="0"/>
                     </a:p>
                   </a:txBody>
-                  <a:tcPr marL="91440" marR="91440" marT="36576" marB="36576" anchor="ctr">
+                  <a:tcPr marT="36576" marB="36576" anchor="ctr">
                     <a:lnL w="6350" cap="flat" cmpd="sng" algn="ctr">
                       <a:solidFill>
                         <a:srgbClr val="DCD9D0"/>
@@ -22580,7 +22401,7 @@
                     <a:bodyPr/>
                     <a:lstStyle/>
                     <a:p>
-                      <a:pPr indent="0" marL="0">
+                      <a:pPr marL="0" indent="0">
                         <a:buNone/>
                       </a:pPr>
                       <a:r>
@@ -22594,7 +22415,7 @@
                       <a:endParaRPr lang="en-US" sz="1150" dirty="0"/>
                     </a:p>
                   </a:txBody>
-                  <a:tcPr marL="91440" marR="91440" marT="36576" marB="36576" anchor="ctr">
+                  <a:tcPr marT="36576" marB="36576" anchor="ctr">
                     <a:lnL w="6350" cap="flat" cmpd="sng" algn="ctr">
                       <a:solidFill>
                         <a:srgbClr val="DCD9D0"/>
@@ -22638,7 +22459,7 @@
                     <a:bodyPr/>
                     <a:lstStyle/>
                     <a:p>
-                      <a:pPr indent="0" marL="0">
+                      <a:pPr marL="0" indent="0">
                         <a:buNone/>
                       </a:pPr>
                       <a:r>
@@ -22652,7 +22473,7 @@
                       <a:endParaRPr lang="en-US" sz="1150" dirty="0"/>
                     </a:p>
                   </a:txBody>
-                  <a:tcPr marL="91440" marR="91440" marT="36576" marB="36576" anchor="ctr">
+                  <a:tcPr marT="36576" marB="36576" anchor="ctr">
                     <a:lnL w="6350" cap="flat" cmpd="sng" algn="ctr">
                       <a:solidFill>
                         <a:srgbClr val="DCD9D0"/>
@@ -22691,6 +22512,11 @@
                     </a:lnB>
                   </a:tcPr>
                 </a:tc>
+                <a:extLst>
+                  <a:ext uri="{0D108BD9-81ED-4DB2-BD59-A6C34878D82A}">
+                    <a16:rowId xmlns:a16="http://schemas.microsoft.com/office/drawing/2014/main" val="10005"/>
+                  </a:ext>
+                </a:extLst>
               </a:tr>
               <a:tr h="475488">
                 <a:tc>
@@ -22698,7 +22524,7 @@
                     <a:bodyPr/>
                     <a:lstStyle/>
                     <a:p>
-                      <a:pPr indent="0" marL="0">
+                      <a:pPr marL="0" indent="0">
                         <a:buNone/>
                       </a:pPr>
                       <a:r>
@@ -22712,7 +22538,7 @@
                       <a:endParaRPr lang="en-US" sz="1150" dirty="0"/>
                     </a:p>
                   </a:txBody>
-                  <a:tcPr marL="91440" marR="91440" marT="36576" marB="36576" anchor="ctr">
+                  <a:tcPr marT="36576" marB="36576" anchor="ctr">
                     <a:lnL w="6350" cap="flat" cmpd="sng" algn="ctr">
                       <a:solidFill>
                         <a:srgbClr val="DCD9D0"/>
@@ -22756,7 +22582,7 @@
                     <a:bodyPr/>
                     <a:lstStyle/>
                     <a:p>
-                      <a:pPr indent="0" marL="0">
+                      <a:pPr marL="0" indent="0">
                         <a:buNone/>
                       </a:pPr>
                       <a:r>
@@ -22770,7 +22596,7 @@
                       <a:endParaRPr lang="en-US" sz="1150" dirty="0"/>
                     </a:p>
                   </a:txBody>
-                  <a:tcPr marL="91440" marR="91440" marT="36576" marB="36576" anchor="ctr">
+                  <a:tcPr marT="36576" marB="36576" anchor="ctr">
                     <a:lnL w="6350" cap="flat" cmpd="sng" algn="ctr">
                       <a:solidFill>
                         <a:srgbClr val="DCD9D0"/>
@@ -22814,7 +22640,7 @@
                     <a:bodyPr/>
                     <a:lstStyle/>
                     <a:p>
-                      <a:pPr indent="0" marL="0">
+                      <a:pPr marL="0" indent="0">
                         <a:buNone/>
                       </a:pPr>
                       <a:r>
@@ -22828,7 +22654,7 @@
                       <a:endParaRPr lang="en-US" sz="1150" dirty="0"/>
                     </a:p>
                   </a:txBody>
-                  <a:tcPr marL="91440" marR="91440" marT="36576" marB="36576" anchor="ctr">
+                  <a:tcPr marT="36576" marB="36576" anchor="ctr">
                     <a:lnL w="6350" cap="flat" cmpd="sng" algn="ctr">
                       <a:solidFill>
                         <a:srgbClr val="DCD9D0"/>
@@ -22867,6 +22693,11 @@
                     </a:lnB>
                   </a:tcPr>
                 </a:tc>
+                <a:extLst>
+                  <a:ext uri="{0D108BD9-81ED-4DB2-BD59-A6C34878D82A}">
+                    <a16:rowId xmlns:a16="http://schemas.microsoft.com/office/drawing/2014/main" val="10006"/>
+                  </a:ext>
+                </a:extLst>
               </a:tr>
             </a:tbl>
           </a:graphicData>
@@ -22892,7 +22723,7 @@
           </a:prstGeom>
           <a:extLst>
             <a:ext uri="{C572A759-6A51-4108-AA02-DFA0A04FC94B}">
-              <ma14:wrappingTextBoxFlag xmlns:ma14="http://schemas.microsoft.com/office/mac/drawingml/2011/main" val="0"/>
+              <ma14:wrappingTextBoxFlag xmlns:ma14="http://schemas.microsoft.com/office/mac/drawingml/2011/main" xmlns="" val="0"/>
             </a:ext>
           </a:extLst>
         </p:spPr>
@@ -22910,7 +22741,7 @@
           <a:p>
             <a:pPr algn="r"/>
             <a:fld id="{F7021451-1387-4CA6-816F-3879F97B5CBC}" type="slidenum">
-              <a:rPr b="0" lang="en-US"/>
+              <a:rPr lang="en-US" b="0"/>
               <a:t>7</a:t>
             </a:fld>
             <a:endParaRPr lang="en-US"/>
@@ -22945,9 +22776,11 @@
       <p:sp>
         <p:nvSpPr>
           <p:cNvPr id="2" name="Text 1"/>
-          <p:cNvSpPr/>
+          <p:cNvSpPr>
+            <a:spLocks noGrp="1"/>
+          </p:cNvSpPr>
           <p:nvPr>
-            <p:ph idx="101" type="body" hasCustomPrompt="1"/>
+            <p:ph type="body" idx="101" hasCustomPrompt="1"/>
           </p:nvPr>
         </p:nvSpPr>
         <p:spPr>
@@ -22965,7 +22798,7 @@
           <a:bodyPr wrap="square" lIns="0" tIns="0" rIns="0" bIns="0" rtlCol="0"/>
           <a:lstStyle/>
           <a:p>
-            <a:pPr indent="0" marL="0">
+            <a:pPr marL="0" indent="0">
               <a:buNone/>
             </a:pPr>
             <a:r>
@@ -22983,9 +22816,11 @@
       <p:sp>
         <p:nvSpPr>
           <p:cNvPr id="3" name="Text 1"/>
-          <p:cNvSpPr/>
+          <p:cNvSpPr>
+            <a:spLocks noGrp="1"/>
+          </p:cNvSpPr>
           <p:nvPr>
-            <p:ph idx="102" type="title" hasCustomPrompt="1"/>
+            <p:ph type="title" idx="102" hasCustomPrompt="1"/>
           </p:nvPr>
         </p:nvSpPr>
         <p:spPr>
@@ -23003,7 +22838,7 @@
           <a:bodyPr wrap="square" lIns="0" tIns="0" rIns="0" bIns="0" rtlCol="0" anchor="t"/>
           <a:lstStyle/>
           <a:p>
-            <a:pPr algn="l" indent="0" marL="0">
+            <a:pPr marL="0" indent="0" algn="l">
               <a:buNone/>
             </a:pPr>
             <a:r>
@@ -23066,7 +22901,7 @@
           <a:bodyPr wrap="square" lIns="0" tIns="0" rIns="0" bIns="0" rtlCol="0" anchor="ctr"/>
           <a:lstStyle/>
           <a:p>
-            <a:pPr indent="0" marL="0">
+            <a:pPr marL="0" indent="0">
               <a:buNone/>
             </a:pPr>
             <a:r>
@@ -23129,7 +22964,7 @@
           <a:bodyPr wrap="square" lIns="0" tIns="0" rIns="0" bIns="0" rtlCol="0" anchor="ctr"/>
           <a:lstStyle/>
           <a:p>
-            <a:pPr algn="ctr" indent="0" marL="0">
+            <a:pPr marL="0" indent="0" algn="ctr">
               <a:buNone/>
             </a:pPr>
             <a:r>
@@ -23143,7 +22978,7 @@
             <a:endParaRPr lang="en-US" sz="1100" dirty="0"/>
           </a:p>
           <a:p>
-            <a:pPr algn="ctr" indent="0" marL="0">
+            <a:pPr marL="0" indent="0" algn="ctr">
               <a:buNone/>
             </a:pPr>
             <a:r>
@@ -23230,7 +23065,7 @@
           <a:bodyPr wrap="square" lIns="0" tIns="0" rIns="0" bIns="0" rtlCol="0" anchor="ctr"/>
           <a:lstStyle/>
           <a:p>
-            <a:pPr algn="ctr" indent="0" marL="0">
+            <a:pPr marL="0" indent="0" algn="ctr">
               <a:buNone/>
             </a:pPr>
             <a:r>
@@ -23244,7 +23079,7 @@
             <a:endParaRPr lang="en-US" sz="1100" dirty="0"/>
           </a:p>
           <a:p>
-            <a:pPr algn="ctr" indent="0" marL="0">
+            <a:pPr marL="0" indent="0" algn="ctr">
               <a:buNone/>
             </a:pPr>
             <a:r>
@@ -23331,7 +23166,7 @@
           <a:bodyPr wrap="square" lIns="0" tIns="0" rIns="0" bIns="0" rtlCol="0" anchor="ctr"/>
           <a:lstStyle/>
           <a:p>
-            <a:pPr algn="ctr" indent="0" marL="0">
+            <a:pPr marL="0" indent="0" algn="ctr">
               <a:buNone/>
             </a:pPr>
             <a:r>
@@ -23345,7 +23180,7 @@
             <a:endParaRPr lang="en-US" sz="1100" dirty="0"/>
           </a:p>
           <a:p>
-            <a:pPr algn="ctr" indent="0" marL="0">
+            <a:pPr marL="0" indent="0" algn="ctr">
               <a:buNone/>
             </a:pPr>
             <a:r>
@@ -23381,7 +23216,7 @@
           <a:bodyPr wrap="square" lIns="0" tIns="0" rIns="0" bIns="0" rtlCol="0" anchor="ctr"/>
           <a:lstStyle/>
           <a:p>
-            <a:pPr algn="ctr" indent="0" marL="0">
+            <a:pPr marL="0" indent="0" algn="ctr">
               <a:buNone/>
             </a:pPr>
             <a:r>
@@ -23441,7 +23276,7 @@
           <a:bodyPr wrap="square" lIns="0" tIns="0" rIns="0" bIns="0" rtlCol="0" anchor="b"/>
           <a:lstStyle/>
           <a:p>
-            <a:pPr algn="ctr" indent="0" marL="0">
+            <a:pPr marL="0" indent="0" algn="ctr">
               <a:buNone/>
             </a:pPr>
             <a:r>
@@ -23455,7 +23290,7 @@
             <a:endParaRPr lang="en-US" sz="950" dirty="0"/>
           </a:p>
           <a:p>
-            <a:pPr algn="ctr" indent="0" marL="0">
+            <a:pPr marL="0" indent="0" algn="ctr">
               <a:buNone/>
             </a:pPr>
             <a:r>
@@ -23491,7 +23326,7 @@
           <a:bodyPr wrap="square" lIns="0" tIns="0" rIns="0" bIns="0" rtlCol="0" anchor="t"/>
           <a:lstStyle/>
           <a:p>
-            <a:pPr algn="ctr" indent="0" marL="0">
+            <a:pPr marL="0" indent="0" algn="ctr">
               <a:buNone/>
             </a:pPr>
             <a:r>
@@ -23505,7 +23340,7 @@
             <a:endParaRPr lang="en-US" sz="950" dirty="0"/>
           </a:p>
           <a:p>
-            <a:pPr algn="ctr" indent="0" marL="0">
+            <a:pPr marL="0" indent="0" algn="ctr">
               <a:buNone/>
             </a:pPr>
             <a:r>
@@ -23568,7 +23403,7 @@
           <a:bodyPr wrap="square" lIns="0" tIns="0" rIns="0" bIns="0" rtlCol="0" anchor="t"/>
           <a:lstStyle/>
           <a:p>
-            <a:pPr indent="0" marL="0">
+            <a:pPr marL="0" indent="0">
               <a:spcAft>
                 <a:spcPts val="200"/>
               </a:spcAft>
@@ -23585,7 +23420,7 @@
             <a:endParaRPr lang="en-US" sz="1250" dirty="0"/>
           </a:p>
           <a:p>
-            <a:pPr indent="0" marL="0">
+            <a:pPr marL="0" indent="0">
               <a:spcAft>
                 <a:spcPts val="200"/>
               </a:spcAft>
@@ -23602,7 +23437,7 @@
             <a:endParaRPr lang="en-US" sz="1250" dirty="0"/>
           </a:p>
           <a:p>
-            <a:pPr indent="0" marL="0">
+            <a:pPr marL="0" indent="0">
               <a:spcAft>
                 <a:spcPts val="200"/>
               </a:spcAft>
@@ -23619,7 +23454,7 @@
             <a:endParaRPr lang="en-US" sz="1250" dirty="0"/>
           </a:p>
           <a:p>
-            <a:pPr indent="0" marL="0">
+            <a:pPr marL="0" indent="0">
               <a:spcAft>
                 <a:spcPts val="200"/>
               </a:spcAft>
@@ -23636,7 +23471,7 @@
             <a:endParaRPr lang="en-US" sz="1250" dirty="0"/>
           </a:p>
           <a:p>
-            <a:pPr indent="0" marL="0">
+            <a:pPr marL="0" indent="0">
               <a:spcAft>
                 <a:spcPts val="200"/>
               </a:spcAft>
@@ -23699,7 +23534,7 @@
           <a:bodyPr wrap="square" lIns="0" tIns="0" rIns="0" bIns="0" rtlCol="0" anchor="ctr"/>
           <a:lstStyle/>
           <a:p>
-            <a:pPr indent="0" marL="0">
+            <a:pPr marL="0" indent="0">
               <a:buNone/>
             </a:pPr>
             <a:r>
@@ -23762,7 +23597,7 @@
           <a:bodyPr wrap="square" lIns="0" tIns="0" rIns="0" bIns="0" rtlCol="0" anchor="ctr"/>
           <a:lstStyle/>
           <a:p>
-            <a:pPr indent="0" marL="0">
+            <a:pPr marL="0" indent="0">
               <a:buNone/>
             </a:pPr>
             <a:r>
@@ -23776,7 +23611,7 @@
             <a:endParaRPr lang="en-US" sz="1100" dirty="0"/>
           </a:p>
           <a:p>
-            <a:pPr indent="0" marL="0">
+            <a:pPr marL="0" indent="0">
               <a:buNone/>
             </a:pPr>
             <a:r>
@@ -23812,7 +23647,7 @@
           <a:bodyPr wrap="square" lIns="0" tIns="0" rIns="0" bIns="0" rtlCol="0" anchor="ctr"/>
           <a:lstStyle/>
           <a:p>
-            <a:pPr indent="0" marL="0">
+            <a:pPr marL="0" indent="0">
               <a:buNone/>
             </a:pPr>
             <a:r>
@@ -23873,7 +23708,7 @@
           <a:bodyPr wrap="square" lIns="0" tIns="0" rIns="0" bIns="0" rtlCol="0" anchor="ctr"/>
           <a:lstStyle/>
           <a:p>
-            <a:pPr algn="ctr" indent="0" marL="0">
+            <a:pPr marL="0" indent="0" algn="ctr">
               <a:buNone/>
             </a:pPr>
             <a:r>
@@ -23909,7 +23744,7 @@
           <a:bodyPr wrap="square" lIns="0" tIns="0" rIns="0" bIns="0" rtlCol="0" anchor="t"/>
           <a:lstStyle/>
           <a:p>
-            <a:pPr indent="0" marL="0">
+            <a:pPr marL="0" indent="0">
               <a:buNone/>
             </a:pPr>
             <a:r>
@@ -23970,7 +23805,7 @@
           <a:bodyPr wrap="square" lIns="0" tIns="0" rIns="0" bIns="0" rtlCol="0" anchor="ctr"/>
           <a:lstStyle/>
           <a:p>
-            <a:pPr algn="ctr" indent="0" marL="0">
+            <a:pPr marL="0" indent="0" algn="ctr">
               <a:buNone/>
             </a:pPr>
             <a:r>
@@ -24006,7 +23841,7 @@
           <a:bodyPr wrap="square" lIns="0" tIns="0" rIns="0" bIns="0" rtlCol="0" anchor="t"/>
           <a:lstStyle/>
           <a:p>
-            <a:pPr indent="0" marL="0">
+            <a:pPr marL="0" indent="0">
               <a:buNone/>
             </a:pPr>
             <a:r>
@@ -24067,7 +23902,7 @@
           <a:bodyPr wrap="square" lIns="0" tIns="0" rIns="0" bIns="0" rtlCol="0" anchor="ctr"/>
           <a:lstStyle/>
           <a:p>
-            <a:pPr algn="ctr" indent="0" marL="0">
+            <a:pPr marL="0" indent="0" algn="ctr">
               <a:buNone/>
             </a:pPr>
             <a:r>
@@ -24103,7 +23938,7 @@
           <a:bodyPr wrap="square" lIns="0" tIns="0" rIns="0" bIns="0" rtlCol="0" anchor="t"/>
           <a:lstStyle/>
           <a:p>
-            <a:pPr indent="0" marL="0">
+            <a:pPr marL="0" indent="0">
               <a:buNone/>
             </a:pPr>
             <a:r>
@@ -24120,7 +23955,7 @@
       </p:sp>
       <p:sp>
         <p:nvSpPr>
-          <p:cNvPr id="25" name="Slide Number Placeholder 0"/>
+          <p:cNvPr id="34" name="Slide Number Placeholder 0"/>
           <p:cNvSpPr>
             <a:spLocks noGrp="1"/>
           </p:cNvSpPr>
@@ -24138,7 +23973,7 @@
           </a:prstGeom>
           <a:extLst>
             <a:ext uri="{C572A759-6A51-4108-AA02-DFA0A04FC94B}">
-              <ma14:wrappingTextBoxFlag xmlns:ma14="http://schemas.microsoft.com/office/mac/drawingml/2011/main" val="0"/>
+              <ma14:wrappingTextBoxFlag xmlns:ma14="http://schemas.microsoft.com/office/mac/drawingml/2011/main" xmlns="" val="0"/>
             </a:ext>
           </a:extLst>
         </p:spPr>
@@ -24156,7 +23991,7 @@
           <a:p>
             <a:pPr algn="r"/>
             <a:fld id="{F7021451-1387-4CA6-816F-3879F97B5CBC}" type="slidenum">
-              <a:rPr b="0" lang="en-US"/>
+              <a:rPr lang="en-US" b="0"/>
               <a:t>8</a:t>
             </a:fld>
             <a:endParaRPr lang="en-US"/>
@@ -24191,9 +24026,11 @@
       <p:sp>
         <p:nvSpPr>
           <p:cNvPr id="2" name="Text 1"/>
-          <p:cNvSpPr/>
+          <p:cNvSpPr>
+            <a:spLocks noGrp="1"/>
+          </p:cNvSpPr>
           <p:nvPr>
-            <p:ph idx="101" type="body" hasCustomPrompt="1"/>
+            <p:ph type="body" idx="101" hasCustomPrompt="1"/>
           </p:nvPr>
         </p:nvSpPr>
         <p:spPr>
@@ -24211,7 +24048,7 @@
           <a:bodyPr wrap="square" lIns="0" tIns="0" rIns="0" bIns="0" rtlCol="0"/>
           <a:lstStyle/>
           <a:p>
-            <a:pPr indent="0" marL="0">
+            <a:pPr marL="0" indent="0">
               <a:buNone/>
             </a:pPr>
             <a:r>
@@ -24229,9 +24066,11 @@
       <p:sp>
         <p:nvSpPr>
           <p:cNvPr id="3" name="Text 1"/>
-          <p:cNvSpPr/>
+          <p:cNvSpPr>
+            <a:spLocks noGrp="1"/>
+          </p:cNvSpPr>
           <p:nvPr>
-            <p:ph idx="102" type="title" hasCustomPrompt="1"/>
+            <p:ph type="title" idx="102" hasCustomPrompt="1"/>
           </p:nvPr>
         </p:nvSpPr>
         <p:spPr>
@@ -24249,7 +24088,7 @@
           <a:bodyPr wrap="square" lIns="0" tIns="0" rIns="0" bIns="0" rtlCol="0" anchor="t"/>
           <a:lstStyle/>
           <a:p>
-            <a:pPr algn="l" indent="0" marL="0">
+            <a:pPr marL="0" indent="0" algn="l">
               <a:buNone/>
             </a:pPr>
             <a:r>
@@ -24293,14 +24132,14 @@
       </p:sp>
       <p:pic>
         <p:nvPicPr>
-          <p:cNvPr id="5" name="캘린더" descr="C:\Users\user\Desktop\albaguard기술창업\docs\screenshots\2-calendar.jpg">    </p:cNvPr>
+          <p:cNvPr id="5" name="캘린더" descr="C:\Users\user\Desktop\albaguard기술창업\docs\screenshots\2-calendar.jpg"/>
           <p:cNvPicPr>
             <a:picLocks noChangeAspect="1"/>
           </p:cNvPicPr>
           <p:nvPr/>
         </p:nvPicPr>
         <p:blipFill>
-          <a:blip r:embed="rId1"/>
+          <a:blip r:embed="rId3"/>
           <a:stretch>
             <a:fillRect/>
           </a:stretch>
@@ -24336,7 +24175,7 @@
           <a:bodyPr wrap="square" lIns="0" tIns="0" rIns="0" bIns="0" rtlCol="0" anchor="ctr"/>
           <a:lstStyle/>
           <a:p>
-            <a:pPr algn="ctr" indent="0" marL="0">
+            <a:pPr marL="0" indent="0" algn="ctr">
               <a:buNone/>
             </a:pPr>
             <a:r>
@@ -24372,7 +24211,7 @@
           <a:bodyPr wrap="square" lIns="0" tIns="0" rIns="0" bIns="0" rtlCol="0" anchor="t"/>
           <a:lstStyle/>
           <a:p>
-            <a:pPr algn="ctr" indent="0" marL="0">
+            <a:pPr marL="0" indent="0" algn="ctr">
               <a:buNone/>
             </a:pPr>
             <a:r>
@@ -24386,7 +24225,7 @@
             <a:endParaRPr lang="en-US" sz="900" dirty="0"/>
           </a:p>
           <a:p>
-            <a:pPr algn="ctr" indent="0" marL="0">
+            <a:pPr marL="0" indent="0" algn="ctr">
               <a:buNone/>
             </a:pPr>
             <a:r>
@@ -24430,14 +24269,14 @@
       </p:sp>
       <p:pic>
         <p:nvPicPr>
-          <p:cNvPr id="9" name="설정" descr="C:\Users\user\Desktop\albaguard기술창업\docs\screenshots\10-settings.jpg">    </p:cNvPr>
+          <p:cNvPr id="9" name="설정" descr="C:\Users\user\Desktop\albaguard기술창업\docs\screenshots\10-settings.jpg"/>
           <p:cNvPicPr>
             <a:picLocks noChangeAspect="1"/>
           </p:cNvPicPr>
           <p:nvPr/>
         </p:nvPicPr>
         <p:blipFill>
-          <a:blip r:embed="rId2"/>
+          <a:blip r:embed="rId4"/>
           <a:stretch>
             <a:fillRect/>
           </a:stretch>
@@ -24473,7 +24312,7 @@
           <a:bodyPr wrap="square" lIns="0" tIns="0" rIns="0" bIns="0" rtlCol="0" anchor="ctr"/>
           <a:lstStyle/>
           <a:p>
-            <a:pPr algn="ctr" indent="0" marL="0">
+            <a:pPr marL="0" indent="0" algn="ctr">
               <a:buNone/>
             </a:pPr>
             <a:r>
@@ -24509,7 +24348,7 @@
           <a:bodyPr wrap="square" lIns="0" tIns="0" rIns="0" bIns="0" rtlCol="0" anchor="t"/>
           <a:lstStyle/>
           <a:p>
-            <a:pPr algn="ctr" indent="0" marL="0">
+            <a:pPr marL="0" indent="0" algn="ctr">
               <a:buNone/>
             </a:pPr>
             <a:r>
@@ -24523,7 +24362,7 @@
             <a:endParaRPr lang="en-US" sz="900" dirty="0"/>
           </a:p>
           <a:p>
-            <a:pPr algn="ctr" indent="0" marL="0">
+            <a:pPr marL="0" indent="0" algn="ctr">
               <a:buNone/>
             </a:pPr>
             <a:r>
@@ -24567,14 +24406,14 @@
       </p:sp>
       <p:pic>
         <p:nvPicPr>
-          <p:cNvPr id="13" name="증빙 묶음 PDF" descr="C:\Users\user\Desktop\albaguard기술창업\docs\screenshots\8-evidence.jpg">    </p:cNvPr>
+          <p:cNvPr id="13" name="증빙 묶음 PDF" descr="C:\Users\user\Desktop\albaguard기술창업\docs\screenshots\8-evidence.jpg"/>
           <p:cNvPicPr>
             <a:picLocks noChangeAspect="1"/>
           </p:cNvPicPr>
           <p:nvPr/>
         </p:nvPicPr>
         <p:blipFill>
-          <a:blip r:embed="rId3"/>
+          <a:blip r:embed="rId5"/>
           <a:stretch>
             <a:fillRect/>
           </a:stretch>
@@ -24610,7 +24449,7 @@
           <a:bodyPr wrap="square" lIns="0" tIns="0" rIns="0" bIns="0" rtlCol="0" anchor="ctr"/>
           <a:lstStyle/>
           <a:p>
-            <a:pPr algn="ctr" indent="0" marL="0">
+            <a:pPr marL="0" indent="0" algn="ctr">
               <a:buNone/>
             </a:pPr>
             <a:r>
@@ -24646,7 +24485,7 @@
           <a:bodyPr wrap="square" lIns="0" tIns="0" rIns="0" bIns="0" rtlCol="0" anchor="t"/>
           <a:lstStyle/>
           <a:p>
-            <a:pPr algn="ctr" indent="0" marL="0">
+            <a:pPr marL="0" indent="0" algn="ctr">
               <a:buNone/>
             </a:pPr>
             <a:r>
@@ -24660,7 +24499,7 @@
             <a:endParaRPr lang="en-US" sz="900" dirty="0"/>
           </a:p>
           <a:p>
-            <a:pPr algn="ctr" indent="0" marL="0">
+            <a:pPr marL="0" indent="0" algn="ctr">
               <a:buNone/>
             </a:pPr>
             <a:r>
@@ -24704,14 +24543,14 @@
       </p:sp>
       <p:pic>
         <p:nvPicPr>
-          <p:cNvPr id="17" name="확인 페이지" descr="C:\Users\user\Desktop\albaguard기술창업\docs\screenshots\9-verify.jpg">    </p:cNvPr>
+          <p:cNvPr id="17" name="확인 페이지" descr="C:\Users\user\Desktop\albaguard기술창업\docs\screenshots\9-verify.jpg"/>
           <p:cNvPicPr>
             <a:picLocks noChangeAspect="1"/>
           </p:cNvPicPr>
           <p:nvPr/>
         </p:nvPicPr>
         <p:blipFill>
-          <a:blip r:embed="rId4"/>
+          <a:blip r:embed="rId6"/>
           <a:stretch>
             <a:fillRect/>
           </a:stretch>
@@ -24747,7 +24586,7 @@
           <a:bodyPr wrap="square" lIns="0" tIns="0" rIns="0" bIns="0" rtlCol="0" anchor="ctr"/>
           <a:lstStyle/>
           <a:p>
-            <a:pPr algn="ctr" indent="0" marL="0">
+            <a:pPr marL="0" indent="0" algn="ctr">
               <a:buNone/>
             </a:pPr>
             <a:r>
@@ -24783,7 +24622,7 @@
           <a:bodyPr wrap="square" lIns="0" tIns="0" rIns="0" bIns="0" rtlCol="0" anchor="t"/>
           <a:lstStyle/>
           <a:p>
-            <a:pPr algn="ctr" indent="0" marL="0">
+            <a:pPr marL="0" indent="0" algn="ctr">
               <a:buNone/>
             </a:pPr>
             <a:r>
@@ -24818,7 +24657,7 @@
           </a:prstGeom>
           <a:extLst>
             <a:ext uri="{C572A759-6A51-4108-AA02-DFA0A04FC94B}">
-              <ma14:wrappingTextBoxFlag xmlns:ma14="http://schemas.microsoft.com/office/mac/drawingml/2011/main" val="0"/>
+              <ma14:wrappingTextBoxFlag xmlns:ma14="http://schemas.microsoft.com/office/mac/drawingml/2011/main" xmlns="" val="0"/>
             </a:ext>
           </a:extLst>
         </p:spPr>
@@ -24836,7 +24675,7 @@
           <a:p>
             <a:pPr algn="r"/>
             <a:fld id="{F7021451-1387-4CA6-816F-3879F97B5CBC}" type="slidenum">
-              <a:rPr b="0" lang="en-US"/>
+              <a:rPr lang="en-US" b="0"/>
               <a:t>9</a:t>
             </a:fld>
             <a:endParaRPr lang="en-US"/>
@@ -25144,4 +24983,299 @@
     </a:ext>
   </a:extLst>
 </a:theme>
+</file>
+
+<file path=ppt/theme/theme2.xml><?xml version="1.0" encoding="utf-8"?>
+<a:theme xmlns:a="http://schemas.openxmlformats.org/drawingml/2006/main" name="Office 테마">
+  <a:themeElements>
+    <a:clrScheme name="Office">
+      <a:dk1>
+        <a:sysClr val="windowText" lastClr="000000"/>
+      </a:dk1>
+      <a:lt1>
+        <a:sysClr val="window" lastClr="FFFFFF"/>
+      </a:lt1>
+      <a:dk2>
+        <a:srgbClr val="44546A"/>
+      </a:dk2>
+      <a:lt2>
+        <a:srgbClr val="E7E6E6"/>
+      </a:lt2>
+      <a:accent1>
+        <a:srgbClr val="4472C4"/>
+      </a:accent1>
+      <a:accent2>
+        <a:srgbClr val="ED7D31"/>
+      </a:accent2>
+      <a:accent3>
+        <a:srgbClr val="A5A5A5"/>
+      </a:accent3>
+      <a:accent4>
+        <a:srgbClr val="FFC000"/>
+      </a:accent4>
+      <a:accent5>
+        <a:srgbClr val="5B9BD5"/>
+      </a:accent5>
+      <a:accent6>
+        <a:srgbClr val="70AD47"/>
+      </a:accent6>
+      <a:hlink>
+        <a:srgbClr val="0563C1"/>
+      </a:hlink>
+      <a:folHlink>
+        <a:srgbClr val="954F72"/>
+      </a:folHlink>
+    </a:clrScheme>
+    <a:fontScheme name="Office">
+      <a:majorFont>
+        <a:latin typeface="맑은 고딕" panose="020F0302020204030204"/>
+        <a:ea typeface=""/>
+        <a:cs typeface=""/>
+        <a:font script="Jpan" typeface="游ゴシック Light"/>
+        <a:font script="Hang" typeface="맑은 고딕"/>
+        <a:font script="Hans" typeface="等线 Light"/>
+        <a:font script="Hant" typeface="新細明體"/>
+        <a:font script="Arab" typeface="Times New Roman"/>
+        <a:font script="Hebr" typeface="Times New Roman"/>
+        <a:font script="Thai" typeface="Angsana New"/>
+        <a:font script="Ethi" typeface="Nyala"/>
+        <a:font script="Beng" typeface="Vrinda"/>
+        <a:font script="Gujr" typeface="Shruti"/>
+        <a:font script="Khmr" typeface="MoolBoran"/>
+        <a:font script="Knda" typeface="Tunga"/>
+        <a:font script="Guru" typeface="Raavi"/>
+        <a:font script="Cans" typeface="Euphemia"/>
+        <a:font script="Cher" typeface="Plantagenet Cherokee"/>
+        <a:font script="Yiii" typeface="Microsoft Yi Baiti"/>
+        <a:font script="Tibt" typeface="Microsoft Himalaya"/>
+        <a:font script="Thaa" typeface="MV Boli"/>
+        <a:font script="Deva" typeface="Mangal"/>
+        <a:font script="Telu" typeface="Gautami"/>
+        <a:font script="Taml" typeface="Latha"/>
+        <a:font script="Syrc" typeface="Estrangelo Edessa"/>
+        <a:font script="Orya" typeface="Kalinga"/>
+        <a:font script="Mlym" typeface="Kartika"/>
+        <a:font script="Laoo" typeface="DokChampa"/>
+        <a:font script="Sinh" typeface="Iskoola Pota"/>
+        <a:font script="Mong" typeface="Mongolian Baiti"/>
+        <a:font script="Viet" typeface="Times New Roman"/>
+        <a:font script="Uigh" typeface="Microsoft Uighur"/>
+        <a:font script="Geor" typeface="Sylfaen"/>
+        <a:font script="Armn" typeface="Arial"/>
+        <a:font script="Bugi" typeface="Leelawadee UI"/>
+        <a:font script="Bopo" typeface="Microsoft JhengHei"/>
+        <a:font script="Java" typeface="Javanese Text"/>
+        <a:font script="Lisu" typeface="Segoe UI"/>
+        <a:font script="Mymr" typeface="Myanmar Text"/>
+        <a:font script="Nkoo" typeface="Ebrima"/>
+        <a:font script="Olck" typeface="Nirmala UI"/>
+        <a:font script="Osma" typeface="Ebrima"/>
+        <a:font script="Phag" typeface="Phagspa"/>
+        <a:font script="Syrn" typeface="Estrangelo Edessa"/>
+        <a:font script="Syrj" typeface="Estrangelo Edessa"/>
+        <a:font script="Syre" typeface="Estrangelo Edessa"/>
+        <a:font script="Sora" typeface="Nirmala UI"/>
+        <a:font script="Tale" typeface="Microsoft Tai Le"/>
+        <a:font script="Talu" typeface="Microsoft New Tai Lue"/>
+        <a:font script="Tfng" typeface="Ebrima"/>
+      </a:majorFont>
+      <a:minorFont>
+        <a:latin typeface="맑은 고딕" panose="020F0502020204030204"/>
+        <a:ea typeface=""/>
+        <a:cs typeface=""/>
+        <a:font script="Jpan" typeface="游ゴシック"/>
+        <a:font script="Hang" typeface="맑은 고딕"/>
+        <a:font script="Hans" typeface="等线"/>
+        <a:font script="Hant" typeface="新細明體"/>
+        <a:font script="Arab" typeface="Arial"/>
+        <a:font script="Hebr" typeface="Arial"/>
+        <a:font script="Thai" typeface="Cordia New"/>
+        <a:font script="Ethi" typeface="Nyala"/>
+        <a:font script="Beng" typeface="Vrinda"/>
+        <a:font script="Gujr" typeface="Shruti"/>
+        <a:font script="Khmr" typeface="DaunPenh"/>
+        <a:font script="Knda" typeface="Tunga"/>
+        <a:font script="Guru" typeface="Raavi"/>
+        <a:font script="Cans" typeface="Euphemia"/>
+        <a:font script="Cher" typeface="Plantagenet Cherokee"/>
+        <a:font script="Yiii" typeface="Microsoft Yi Baiti"/>
+        <a:font script="Tibt" typeface="Microsoft Himalaya"/>
+        <a:font script="Thaa" typeface="MV Boli"/>
+        <a:font script="Deva" typeface="Mangal"/>
+        <a:font script="Telu" typeface="Gautami"/>
+        <a:font script="Taml" typeface="Latha"/>
+        <a:font script="Syrc" typeface="Estrangelo Edessa"/>
+        <a:font script="Orya" typeface="Kalinga"/>
+        <a:font script="Mlym" typeface="Kartika"/>
+        <a:font script="Laoo" typeface="DokChampa"/>
+        <a:font script="Sinh" typeface="Iskoola Pota"/>
+        <a:font script="Mong" typeface="Mongolian Baiti"/>
+        <a:font script="Viet" typeface="Arial"/>
+        <a:font script="Uigh" typeface="Microsoft Uighur"/>
+        <a:font script="Geor" typeface="Sylfaen"/>
+        <a:font script="Armn" typeface="Arial"/>
+        <a:font script="Bugi" typeface="Leelawadee UI"/>
+        <a:font script="Bopo" typeface="Microsoft JhengHei"/>
+        <a:font script="Java" typeface="Javanese Text"/>
+        <a:font script="Lisu" typeface="Segoe UI"/>
+        <a:font script="Mymr" typeface="Myanmar Text"/>
+        <a:font script="Nkoo" typeface="Ebrima"/>
+        <a:font script="Olck" typeface="Nirmala UI"/>
+        <a:font script="Osma" typeface="Ebrima"/>
+        <a:font script="Phag" typeface="Phagspa"/>
+        <a:font script="Syrn" typeface="Estrangelo Edessa"/>
+        <a:font script="Syrj" typeface="Estrangelo Edessa"/>
+        <a:font script="Syre" typeface="Estrangelo Edessa"/>
+        <a:font script="Sora" typeface="Nirmala UI"/>
+        <a:font script="Tale" typeface="Microsoft Tai Le"/>
+        <a:font script="Talu" typeface="Microsoft New Tai Lue"/>
+        <a:font script="Tfng" typeface="Ebrima"/>
+      </a:minorFont>
+    </a:fontScheme>
+    <a:fmtScheme name="Office">
+      <a:fillStyleLst>
+        <a:solidFill>
+          <a:schemeClr val="phClr"/>
+        </a:solidFill>
+        <a:gradFill rotWithShape="1">
+          <a:gsLst>
+            <a:gs pos="0">
+              <a:schemeClr val="phClr">
+                <a:lumMod val="110000"/>
+                <a:satMod val="105000"/>
+                <a:tint val="67000"/>
+              </a:schemeClr>
+            </a:gs>
+            <a:gs pos="50000">
+              <a:schemeClr val="phClr">
+                <a:lumMod val="105000"/>
+                <a:satMod val="103000"/>
+                <a:tint val="73000"/>
+              </a:schemeClr>
+            </a:gs>
+            <a:gs pos="100000">
+              <a:schemeClr val="phClr">
+                <a:lumMod val="105000"/>
+                <a:satMod val="109000"/>
+                <a:tint val="81000"/>
+              </a:schemeClr>
+            </a:gs>
+          </a:gsLst>
+          <a:lin ang="5400000" scaled="0"/>
+        </a:gradFill>
+        <a:gradFill rotWithShape="1">
+          <a:gsLst>
+            <a:gs pos="0">
+              <a:schemeClr val="phClr">
+                <a:satMod val="103000"/>
+                <a:lumMod val="102000"/>
+                <a:tint val="94000"/>
+              </a:schemeClr>
+            </a:gs>
+            <a:gs pos="50000">
+              <a:schemeClr val="phClr">
+                <a:satMod val="110000"/>
+                <a:lumMod val="100000"/>
+                <a:shade val="100000"/>
+              </a:schemeClr>
+            </a:gs>
+            <a:gs pos="100000">
+              <a:schemeClr val="phClr">
+                <a:lumMod val="99000"/>
+                <a:satMod val="120000"/>
+                <a:shade val="78000"/>
+              </a:schemeClr>
+            </a:gs>
+          </a:gsLst>
+          <a:lin ang="5400000" scaled="0"/>
+        </a:gradFill>
+      </a:fillStyleLst>
+      <a:lnStyleLst>
+        <a:ln w="6350" cap="flat" cmpd="sng" algn="ctr">
+          <a:solidFill>
+            <a:schemeClr val="phClr"/>
+          </a:solidFill>
+          <a:prstDash val="solid"/>
+          <a:miter lim="800000"/>
+        </a:ln>
+        <a:ln w="12700" cap="flat" cmpd="sng" algn="ctr">
+          <a:solidFill>
+            <a:schemeClr val="phClr"/>
+          </a:solidFill>
+          <a:prstDash val="solid"/>
+          <a:miter lim="800000"/>
+        </a:ln>
+        <a:ln w="19050" cap="flat" cmpd="sng" algn="ctr">
+          <a:solidFill>
+            <a:schemeClr val="phClr"/>
+          </a:solidFill>
+          <a:prstDash val="solid"/>
+          <a:miter lim="800000"/>
+        </a:ln>
+      </a:lnStyleLst>
+      <a:effectStyleLst>
+        <a:effectStyle>
+          <a:effectLst/>
+        </a:effectStyle>
+        <a:effectStyle>
+          <a:effectLst/>
+        </a:effectStyle>
+        <a:effectStyle>
+          <a:effectLst>
+            <a:outerShdw blurRad="57150" dist="19050" dir="5400000" algn="ctr" rotWithShape="0">
+              <a:srgbClr val="000000">
+                <a:alpha val="63000"/>
+              </a:srgbClr>
+            </a:outerShdw>
+          </a:effectLst>
+        </a:effectStyle>
+      </a:effectStyleLst>
+      <a:bgFillStyleLst>
+        <a:solidFill>
+          <a:schemeClr val="phClr"/>
+        </a:solidFill>
+        <a:solidFill>
+          <a:schemeClr val="phClr">
+            <a:tint val="95000"/>
+            <a:satMod val="170000"/>
+          </a:schemeClr>
+        </a:solidFill>
+        <a:gradFill rotWithShape="1">
+          <a:gsLst>
+            <a:gs pos="0">
+              <a:schemeClr val="phClr">
+                <a:tint val="93000"/>
+                <a:satMod val="150000"/>
+                <a:shade val="98000"/>
+                <a:lumMod val="102000"/>
+              </a:schemeClr>
+            </a:gs>
+            <a:gs pos="50000">
+              <a:schemeClr val="phClr">
+                <a:tint val="98000"/>
+                <a:satMod val="130000"/>
+                <a:shade val="90000"/>
+                <a:lumMod val="103000"/>
+              </a:schemeClr>
+            </a:gs>
+            <a:gs pos="100000">
+              <a:schemeClr val="phClr">
+                <a:shade val="63000"/>
+                <a:satMod val="120000"/>
+              </a:schemeClr>
+            </a:gs>
+          </a:gsLst>
+          <a:lin ang="5400000" scaled="0"/>
+        </a:gradFill>
+      </a:bgFillStyleLst>
+    </a:fmtScheme>
+  </a:themeElements>
+  <a:objectDefaults/>
+  <a:extraClrSchemeLst/>
+  <a:extLst>
+    <a:ext uri="{05A4C25C-085E-4340-85A3-A5531E510DB2}">
+      <thm15:themeFamily xmlns:thm15="http://schemas.microsoft.com/office/thememl/2012/main" name="Office Theme" id="{62F939B6-93AF-4DB8-9C6B-D6C7DFDC589F}" vid="{4A3C46E8-61CC-4603-A589-7422A47A8E4A}"/>
+    </a:ext>
+  </a:extLst>
+</a:theme>
 </file>
--- a/docs/06_중간발표_PPT.pptx
+++ b/docs/06_중간발표_PPT.pptx
@@ -4,9 +4,6 @@
   <p:sldMasterIdLst>
     <p:sldMasterId id="2147483648" r:id="rId1"/>
   </p:sldMasterIdLst>
-  <p:notesMasterIdLst>
-    <p:notesMasterId r:id="rId21"/>
-  </p:notesMasterIdLst>
   <p:sldIdLst>
     <p:sldId id="256" r:id="rId2"/>
     <p:sldId id="257" r:id="rId3"/>
@@ -28,7 +25,10 @@
     <p:sldId id="273" r:id="rId19"/>
     <p:sldId id="274" r:id="rId20"/>
   </p:sldIdLst>
-  <p:sldSz cx="9144000" cy="5143500" type="screen16x9"/>
+  <p:notesMasterIdLst>
+    <p:notesMasterId r:id="rId21"/>
+  </p:notesMasterIdLst>
+  <p:sldSz cx="9144000" cy="5143500"/>
   <p:notesSz cx="5143500" cy="9144000"/>
   <p:defaultTextStyle>
     <a:lvl1pPr marL="0" algn="l" defTabSz="914400" rtl="0" eaLnBrk="1" latinLnBrk="0" hangingPunct="1">
@@ -125,31 +125,31 @@
   <p:extLst>
     <p:ext uri="{521415D9-36F7-43E2-AB2F-B90AF26B5E84}">
       <p14:sectionLst xmlns:p14="http://schemas.microsoft.com/office/powerpoint/2010/main">
-        <p14:section name="① 표지·팀 소개" id="{1A9D35B9-A985-D17C-B8B6-007CEA92870D}">
+        <p14:section name="① 표지·팀 소개" id="{5dfe561a-8659-22f8-0ab9-818f751bf68f}">
           <p14:sldIdLst>
             <p14:sldId id="256"/>
             <p14:sldId id="257"/>
           </p14:sldIdLst>
         </p14:section>
-        <p14:section name="② 문제 정의" id="{3E2535C3-B866-B8C3-2453-5802419064C2}">
+        <p14:section name="② 문제 정의" id="{2ba8bc19-c49f-0b04-238f-b0c89fd1af1b}">
           <p14:sldIdLst>
             <p14:sldId id="258"/>
             <p14:sldId id="259"/>
           </p14:sldIdLst>
         </p14:section>
-        <p14:section name="③ 솔루션·핵심 가치" id="{656FFE6B-08EE-451B-64AF-375C4FBF0F82}">
+        <p14:section name="③ 솔루션·핵심 가치" id="{2b61e57a-fe1a-8c46-c078-d01885f9f97c}">
           <p14:sldIdLst>
             <p14:sldId id="260"/>
             <p14:sldId id="261"/>
           </p14:sldIdLst>
         </p14:section>
-        <p14:section name="④ SW 기술 아키텍처" id="{0C897D08-2DF4-E7D2-00F4-DAB724A36756}">
+        <p14:section name="④ SW 기술 아키텍처" id="{8d28315e-f4e2-1ef8-ccb6-f186f4d1166b}">
           <p14:sldIdLst>
             <p14:sldId id="262"/>
             <p14:sldId id="263"/>
           </p14:sldIdLst>
         </p14:section>
-        <p14:section name="⑤ 개발 현황·MVP 시연" id="{A8C64C2D-C1CB-D779-18B7-A64C7ADB2FAA}">
+        <p14:section name="⑤ 개발 현황·MVP 시연" id="{6c5ae00f-0234-9d1f-217c-04f3c0510fcc}">
           <p14:sldIdLst>
             <p14:sldId id="264"/>
             <p14:sldId id="265"/>
@@ -157,19 +157,19 @@
             <p14:sldId id="267"/>
           </p14:sldIdLst>
         </p14:section>
-        <p14:section name="⑥ 시장 분석·비즈니스 모델" id="{94CE352D-9EF0-40A6-4EB7-4408BF35944D}">
+        <p14:section name="⑥ 시장 분석·비즈니스 모델" id="{065fb490-5460-446b-8a96-be4288737d56}">
           <p14:sldIdLst>
             <p14:sldId id="268"/>
             <p14:sldId id="269"/>
             <p14:sldId id="270"/>
           </p14:sldIdLst>
         </p14:section>
-        <p14:section name="⑦ 초기 시장 검증" id="{B01D13A2-6358-03D1-11B2-FDCCCD8D1077}">
+        <p14:section name="⑦ 초기 시장 검증" id="{75e3e25d-78c6-c9dd-3e1a-daa16354b729}">
           <p14:sldIdLst>
             <p14:sldId id="271"/>
           </p14:sldIdLst>
         </p14:section>
-        <p14:section name="⑧ 향후 계획·팀 역량" id="{267A8146-DB8D-A02E-F4B9-BE411B64343B}">
+        <p14:section name="⑧ 향후 계획·팀 역량" id="{1b94bdb3-4fbe-c4df-abcc-122ac5132909}">
           <p14:sldIdLst>
             <p14:sldId id="272"/>
             <p14:sldId id="273"/>
@@ -186,11 +186,9 @@
 </file>
 
 <file path=ppt/charts/chart1.xml><?xml version="1.0" encoding="utf-8"?>
-<c:chartSpace xmlns:c="http://schemas.openxmlformats.org/drawingml/2006/chart" xmlns:a="http://schemas.openxmlformats.org/drawingml/2006/main" xmlns:r="http://schemas.openxmlformats.org/officeDocument/2006/relationships" xmlns:c16r2="http://schemas.microsoft.com/office/drawing/2015/06/chart">
+<c:chartSpace xmlns:c="http://schemas.openxmlformats.org/drawingml/2006/chart" xmlns:a="http://schemas.openxmlformats.org/drawingml/2006/main" xmlns:r="http://schemas.openxmlformats.org/officeDocument/2006/relationships">
   <c:date1904 val="0"/>
-  <c:lang val="ko-KR"/>
   <c:roundedCorners val="1"/>
-  <c:style val="2"/>
   <c:chart>
     <c:title>
       <c:tx>
@@ -218,6 +216,7 @@
           </a:p>
         </c:rich>
       </c:tx>
+      <c:layout/>
       <c:overlay val="0"/>
     </c:title>
     <c:autoTitleDeleted val="0"/>
@@ -250,26 +249,18 @@
           <c:invertIfNegative val="0"/>
           <c:dLbls>
             <c:numFmt formatCode="#,##0" sourceLinked="0"/>
-            <c:spPr>
-              <a:noFill/>
-              <a:ln>
-                <a:noFill/>
-              </a:ln>
-              <a:effectLst/>
-            </c:spPr>
             <c:txPr>
               <a:bodyPr/>
               <a:lstStyle/>
               <a:p>
                 <a:pPr>
-                  <a:defRPr sz="1100" b="0" i="0" u="none" strike="noStrike">
+                  <a:defRPr b="0" i="0" strike="noStrike" sz="1100" u="none">
                     <a:solidFill>
                       <a:srgbClr val="15171A"/>
                     </a:solidFill>
                     <a:latin typeface="+mn-lt"/>
                   </a:defRPr>
                 </a:pPr>
-                <a:endParaRPr lang="ko-KR"/>
               </a:p>
             </c:txPr>
             <c:showLegendKey val="0"/>
@@ -279,28 +270,25 @@
             <c:showPercent val="0"/>
             <c:showBubbleSize val="0"/>
             <c:showLeaderLines val="0"/>
-            <c:extLst>
-              <c:ext xmlns:c15="http://schemas.microsoft.com/office/drawing/2012/chart" uri="{CE6537A1-D6FC-4f65-9D91-7224C49458BB}">
-                <c15:showLeaderLines val="0"/>
-              </c:ext>
-            </c:extLst>
           </c:dLbls>
           <c:cat>
-            <c:strRef>
+            <c:multiLvlStrRef>
               <c:f>Sheet1!$A$2:$A$4</c:f>
-              <c:strCache>
+              <c:multiLvlStrCache>
                 <c:ptCount val="3"/>
-                <c:pt idx="0">
-                  <c:v>2023</c:v>
-                </c:pt>
-                <c:pt idx="1">
-                  <c:v>2024</c:v>
-                </c:pt>
-                <c:pt idx="2">
-                  <c:v>2025</c:v>
-                </c:pt>
-              </c:strCache>
-            </c:strRef>
+                <c:lvl>
+                  <c:pt idx="0">
+                    <c:v>2023</c:v>
+                  </c:pt>
+                  <c:pt idx="1">
+                    <c:v>2024</c:v>
+                  </c:pt>
+                  <c:pt idx="2">
+                    <c:v>2025</c:v>
+                  </c:pt>
+                </c:lvl>
+              </c:multiLvlStrCache>
+            </c:multiLvlStrRef>
           </c:cat>
           <c:val>
             <c:numRef>
@@ -320,23 +308,36 @@
               </c:numCache>
             </c:numRef>
           </c:val>
-          <c:extLst>
-            <c:ext xmlns:c16="http://schemas.microsoft.com/office/drawing/2014/chart" uri="{C3380CC4-5D6E-409C-BE32-E72D297353CC}">
-              <c16:uniqueId val="{00000000-C599-4E45-A850-F8815EE27813}"/>
-            </c:ext>
-          </c:extLst>
         </c:ser>
         <c:dLbls>
+          <c:numFmt formatCode="#,##0" sourceLinked="0"/>
+          <c:txPr>
+            <a:bodyPr/>
+            <a:lstStyle/>
+            <a:p>
+              <a:pPr>
+                <a:defRPr b="0" i="0" strike="noStrike" sz="1100" u="none">
+                  <a:solidFill>
+                    <a:srgbClr val="15171A"/>
+                  </a:solidFill>
+                  <a:latin typeface="+mn-lt"/>
+                </a:defRPr>
+              </a:pPr>
+            </a:p>
+          </c:txPr>
           <c:showLegendKey val="0"/>
           <c:showVal val="1"/>
           <c:showCatName val="0"/>
           <c:showSerName val="0"/>
           <c:showPercent val="0"/>
           <c:showBubbleSize val="0"/>
+          <c:showLeaderLines val="0"/>
         </c:dLbls>
         <c:gapWidth val="70"/>
+        <c:overlap val="0"/>
         <c:axId val="2094734554"/>
         <c:axId val="2094734552"/>
+        <c:axId val="2094734556"/>
       </c:barChart>
       <c:catAx>
         <c:axId val="2094734554"/>
@@ -375,7 +376,6 @@
         <c:crosses val="autoZero"/>
         <c:auto val="1"/>
         <c:lblAlgn val="ctr"/>
-        <c:lblOffset val="100"/>
         <c:noMultiLvlLbl val="1"/>
       </c:catAx>
       <c:valAx>
@@ -391,6 +391,30 @@
         <c:majorTickMark val="out"/>
         <c:minorTickMark val="none"/>
         <c:tickLblPos val="nextTo"/>
+        <c:spPr>
+          <a:ln w="12700" cap="flat">
+            <a:solidFill>
+              <a:srgbClr val="888888"/>
+            </a:solidFill>
+            <a:prstDash val="solid"/>
+            <a:round/>
+          </a:ln>
+        </c:spPr>
+        <c:txPr>
+          <a:bodyPr/>
+          <a:lstStyle/>
+          <a:p>
+            <a:pPr>
+              <a:defRPr sz="1200" b="0" i="0" u="none" strike="noStrike">
+                <a:solidFill>
+                  <a:srgbClr val="000000"/>
+                </a:solidFill>
+                <a:latin typeface="Arial"/>
+              </a:defRPr>
+            </a:pPr>
+            <a:endParaRPr lang="en-US"/>
+          </a:p>
+        </c:txPr>
         <c:crossAx val="2094734554"/>
         <c:crosses val="autoZero"/>
         <c:crossBetween val="between"/>
@@ -405,7 +429,6 @@
     </c:plotArea>
     <c:plotVisOnly val="1"/>
     <c:dispBlanksAs val="span"/>
-    <c:showDLblsOverMax val="1"/>
   </c:chart>
   <c:spPr>
     <a:noFill/>
@@ -442,16 +465,240 @@
           <a:chExt cx="0" cy="0"/>
         </a:xfrm>
       </p:grpSpPr>
+      <p:sp>
+        <p:nvSpPr>
+          <p:cNvPr id="2" name="Header Placeholder 1"/>
+          <p:cNvSpPr>
+            <a:spLocks noGrp="1"/>
+          </p:cNvSpPr>
+          <p:nvPr>
+            <p:ph type="hdr" sz="quarter"/>
+          </p:nvPr>
+        </p:nvSpPr>
+        <p:spPr>
+          <a:xfrm>
+            <a:off x="0" y="0"/>
+            <a:ext cx="2971800" cy="458788"/>
+          </a:xfrm>
+          <a:prstGeom prst="rect">
+            <a:avLst/>
+          </a:prstGeom>
+        </p:spPr>
+        <p:txBody>
+          <a:bodyPr vert="horz" lIns="91440" tIns="45720" rIns="91440" bIns="45720" rtlCol="0"/>
+          <a:lstStyle>
+            <a:lvl1pPr algn="l">
+              <a:defRPr sz="1200"/>
+            </a:lvl1pPr>
+          </a:lstStyle>
+          <a:p>
+            <a:endParaRPr lang="en-US"/>
+          </a:p>
+        </p:txBody>
+      </p:sp>
+      <p:sp>
+        <p:nvSpPr>
+          <p:cNvPr id="3" name="Date Placeholder 2"/>
+          <p:cNvSpPr>
+            <a:spLocks noGrp="1"/>
+          </p:cNvSpPr>
+          <p:nvPr>
+            <p:ph type="dt" idx="1"/>
+          </p:nvPr>
+        </p:nvSpPr>
+        <p:spPr>
+          <a:xfrm>
+            <a:off x="3884613" y="0"/>
+            <a:ext cx="2971800" cy="458788"/>
+          </a:xfrm>
+          <a:prstGeom prst="rect">
+            <a:avLst/>
+          </a:prstGeom>
+        </p:spPr>
+        <p:txBody>
+          <a:bodyPr vert="horz" lIns="91440" tIns="45720" rIns="91440" bIns="45720" rtlCol="0"/>
+          <a:lstStyle>
+            <a:lvl1pPr algn="r">
+              <a:defRPr sz="1200"/>
+            </a:lvl1pPr>
+          </a:lstStyle>
+          <a:p>
+            <a:fld id="{5282F153-3F37-0F45-9E97-73ACFA13230C}" type="datetimeFigureOut">
+              <a:rPr lang="en-US"/>
+              <a:t>7/23/19</a:t>
+            </a:fld>
+            <a:endParaRPr lang="en-US"/>
+          </a:p>
+        </p:txBody>
+      </p:sp>
+      <p:sp>
+        <p:nvSpPr>
+          <p:cNvPr id="4" name="Slide Image Placeholder 3"/>
+          <p:cNvSpPr>
+            <a:spLocks noGrp="1" noRot="1" noChangeAspect="1"/>
+          </p:cNvSpPr>
+          <p:nvPr>
+            <p:ph type="sldImg" idx="2"/>
+          </p:nvPr>
+        </p:nvSpPr>
+        <p:spPr>
+          <a:xfrm>
+            <a:off x="685800" y="1143000"/>
+            <a:ext cx="5486400" cy="3086100"/>
+          </a:xfrm>
+          <a:prstGeom prst="rect">
+            <a:avLst/>
+          </a:prstGeom>
+          <a:noFill/>
+          <a:ln w="12700">
+            <a:solidFill>
+              <a:prstClr val="black"/>
+            </a:solidFill>
+          </a:ln>
+        </p:spPr>
+        <p:txBody>
+          <a:bodyPr vert="horz" lIns="91440" tIns="45720" rIns="91440" bIns="45720" rtlCol="0" anchor="ctr"/>
+          <a:lstStyle/>
+          <a:p>
+            <a:endParaRPr lang="en-US"/>
+          </a:p>
+        </p:txBody>
+      </p:sp>
+      <p:sp>
+        <p:nvSpPr>
+          <p:cNvPr id="5" name="Notes Placeholder 4"/>
+          <p:cNvSpPr>
+            <a:spLocks noGrp="1"/>
+          </p:cNvSpPr>
+          <p:nvPr>
+            <p:ph type="body" sz="quarter" idx="3"/>
+          </p:nvPr>
+        </p:nvSpPr>
+        <p:spPr>
+          <a:xfrm>
+            <a:off x="685800" y="4400550"/>
+            <a:ext cx="5486400" cy="3600450"/>
+          </a:xfrm>
+          <a:prstGeom prst="rect">
+            <a:avLst/>
+          </a:prstGeom>
+        </p:spPr>
+        <p:txBody>
+          <a:bodyPr vert="horz" lIns="91440" tIns="45720" rIns="91440" bIns="45720" rtlCol="0"/>
+          <a:lstStyle/>
+          <a:p>
+            <a:pPr lvl="0"/>
+            <a:r>
+              <a:rPr lang="en-US"/>
+              <a:t>Click to edit Master text styles</a:t>
+            </a:r>
+          </a:p>
+          <a:p>
+            <a:pPr lvl="1"/>
+            <a:r>
+              <a:rPr lang="en-US"/>
+              <a:t>Second level</a:t>
+            </a:r>
+          </a:p>
+          <a:p>
+            <a:pPr lvl="2"/>
+            <a:r>
+              <a:rPr lang="en-US"/>
+              <a:t>Third level</a:t>
+            </a:r>
+          </a:p>
+          <a:p>
+            <a:pPr lvl="3"/>
+            <a:r>
+              <a:rPr lang="en-US"/>
+              <a:t>Fourth level</a:t>
+            </a:r>
+          </a:p>
+          <a:p>
+            <a:pPr lvl="4"/>
+            <a:r>
+              <a:rPr lang="en-US"/>
+              <a:t>Fifth level</a:t>
+            </a:r>
+          </a:p>
+        </p:txBody>
+      </p:sp>
+      <p:sp>
+        <p:nvSpPr>
+          <p:cNvPr id="6" name="Footer Placeholder 5"/>
+          <p:cNvSpPr>
+            <a:spLocks noGrp="1"/>
+          </p:cNvSpPr>
+          <p:nvPr>
+            <p:ph type="ftr" sz="quarter" idx="4"/>
+          </p:nvPr>
+        </p:nvSpPr>
+        <p:spPr>
+          <a:xfrm>
+            <a:off x="0" y="8685213"/>
+            <a:ext cx="2971800" cy="458787"/>
+          </a:xfrm>
+          <a:prstGeom prst="rect">
+            <a:avLst/>
+          </a:prstGeom>
+        </p:spPr>
+        <p:txBody>
+          <a:bodyPr vert="horz" lIns="91440" tIns="45720" rIns="91440" bIns="45720" rtlCol="0" anchor="b"/>
+          <a:lstStyle>
+            <a:lvl1pPr algn="l">
+              <a:defRPr sz="1200"/>
+            </a:lvl1pPr>
+          </a:lstStyle>
+          <a:p>
+            <a:endParaRPr lang="en-US"/>
+          </a:p>
+        </p:txBody>
+      </p:sp>
+      <p:sp>
+        <p:nvSpPr>
+          <p:cNvPr id="7" name="Slide Number Placeholder 6"/>
+          <p:cNvSpPr>
+            <a:spLocks noGrp="1"/>
+          </p:cNvSpPr>
+          <p:nvPr>
+            <p:ph type="sldNum" sz="quarter" idx="5"/>
+          </p:nvPr>
+        </p:nvSpPr>
+        <p:spPr>
+          <a:xfrm>
+            <a:off x="3884613" y="8685213"/>
+            <a:ext cx="2971800" cy="458787"/>
+          </a:xfrm>
+          <a:prstGeom prst="rect">
+            <a:avLst/>
+          </a:prstGeom>
+        </p:spPr>
+        <p:txBody>
+          <a:bodyPr vert="horz" lIns="91440" tIns="45720" rIns="91440" bIns="45720" rtlCol="0" anchor="b"/>
+          <a:lstStyle>
+            <a:lvl1pPr algn="r">
+              <a:defRPr sz="1200"/>
+            </a:lvl1pPr>
+          </a:lstStyle>
+          <a:p>
+            <a:fld id="{CE5E9CC1-C706-0F49-92D6-E571CC5EEA8F}" type="slidenum">
+              <a:rPr lang="en-US"/>
+              <a:t>‹#›</a:t>
+            </a:fld>
+            <a:endParaRPr lang="en-US"/>
+          </a:p>
+        </p:txBody>
+      </p:sp>
     </p:spTree>
     <p:extLst>
       <p:ext uri="{BB962C8B-B14F-4D97-AF65-F5344CB8AC3E}">
-        <p14:creationId xmlns:p14="http://schemas.microsoft.com/office/powerpoint/2010/main" val="889522396"/>
+        <p14:creationId xmlns:p14="http://schemas.microsoft.com/office/powerpoint/2010/main" val="1024086991"/>
       </p:ext>
     </p:extLst>
   </p:cSld>
   <p:clrMap bg1="lt1" tx1="dk1" bg2="lt2" tx2="dk2" accent1="accent1" accent2="accent2" accent3="accent3" accent4="accent4" accent5="accent5" accent6="accent6" hlink="hlink" folHlink="folHlink"/>
   <p:notesStyle>
-    <a:lvl1pPr marL="0" algn="l" defTabSz="914400" rtl="0" eaLnBrk="1" latinLnBrk="1" hangingPunct="1">
+    <a:lvl1pPr marL="0" algn="l" defTabSz="914400" rtl="0" eaLnBrk="1" latinLnBrk="0" hangingPunct="1">
       <a:defRPr sz="1200" kern="1200">
         <a:solidFill>
           <a:schemeClr val="tx1"/>
@@ -461,7 +708,7 @@
         <a:cs typeface="+mn-cs"/>
       </a:defRPr>
     </a:lvl1pPr>
-    <a:lvl2pPr marL="457200" algn="l" defTabSz="914400" rtl="0" eaLnBrk="1" latinLnBrk="1" hangingPunct="1">
+    <a:lvl2pPr marL="457200" algn="l" defTabSz="914400" rtl="0" eaLnBrk="1" latinLnBrk="0" hangingPunct="1">
       <a:defRPr sz="1200" kern="1200">
         <a:solidFill>
           <a:schemeClr val="tx1"/>
@@ -471,7 +718,7 @@
         <a:cs typeface="+mn-cs"/>
       </a:defRPr>
     </a:lvl2pPr>
-    <a:lvl3pPr marL="914400" algn="l" defTabSz="914400" rtl="0" eaLnBrk="1" latinLnBrk="1" hangingPunct="1">
+    <a:lvl3pPr marL="914400" algn="l" defTabSz="914400" rtl="0" eaLnBrk="1" latinLnBrk="0" hangingPunct="1">
       <a:defRPr sz="1200" kern="1200">
         <a:solidFill>
           <a:schemeClr val="tx1"/>
@@ -481,7 +728,7 @@
         <a:cs typeface="+mn-cs"/>
       </a:defRPr>
     </a:lvl3pPr>
-    <a:lvl4pPr marL="1371600" algn="l" defTabSz="914400" rtl="0" eaLnBrk="1" latinLnBrk="1" hangingPunct="1">
+    <a:lvl4pPr marL="1371600" algn="l" defTabSz="914400" rtl="0" eaLnBrk="1" latinLnBrk="0" hangingPunct="1">
       <a:defRPr sz="1200" kern="1200">
         <a:solidFill>
           <a:schemeClr val="tx1"/>
@@ -491,7 +738,7 @@
         <a:cs typeface="+mn-cs"/>
       </a:defRPr>
     </a:lvl4pPr>
-    <a:lvl5pPr marL="1828800" algn="l" defTabSz="914400" rtl="0" eaLnBrk="1" latinLnBrk="1" hangingPunct="1">
+    <a:lvl5pPr marL="1828800" algn="l" defTabSz="914400" rtl="0" eaLnBrk="1" latinLnBrk="0" hangingPunct="1">
       <a:defRPr sz="1200" kern="1200">
         <a:solidFill>
           <a:schemeClr val="tx1"/>
@@ -501,7 +748,7 @@
         <a:cs typeface="+mn-cs"/>
       </a:defRPr>
     </a:lvl5pPr>
-    <a:lvl6pPr marL="2286000" algn="l" defTabSz="914400" rtl="0" eaLnBrk="1" latinLnBrk="1" hangingPunct="1">
+    <a:lvl6pPr marL="2286000" algn="l" defTabSz="914400" rtl="0" eaLnBrk="1" latinLnBrk="0" hangingPunct="1">
       <a:defRPr sz="1200" kern="1200">
         <a:solidFill>
           <a:schemeClr val="tx1"/>
@@ -511,7 +758,7 @@
         <a:cs typeface="+mn-cs"/>
       </a:defRPr>
     </a:lvl6pPr>
-    <a:lvl7pPr marL="2743200" algn="l" defTabSz="914400" rtl="0" eaLnBrk="1" latinLnBrk="1" hangingPunct="1">
+    <a:lvl7pPr marL="2743200" algn="l" defTabSz="914400" rtl="0" eaLnBrk="1" latinLnBrk="0" hangingPunct="1">
       <a:defRPr sz="1200" kern="1200">
         <a:solidFill>
           <a:schemeClr val="tx1"/>
@@ -521,7 +768,7 @@
         <a:cs typeface="+mn-cs"/>
       </a:defRPr>
     </a:lvl7pPr>
-    <a:lvl8pPr marL="3200400" algn="l" defTabSz="914400" rtl="0" eaLnBrk="1" latinLnBrk="1" hangingPunct="1">
+    <a:lvl8pPr marL="3200400" algn="l" defTabSz="914400" rtl="0" eaLnBrk="1" latinLnBrk="0" hangingPunct="1">
       <a:defRPr sz="1200" kern="1200">
         <a:solidFill>
           <a:schemeClr val="tx1"/>
@@ -531,7 +778,7 @@
         <a:cs typeface="+mn-cs"/>
       </a:defRPr>
     </a:lvl8pPr>
-    <a:lvl9pPr marL="3657600" algn="l" defTabSz="914400" rtl="0" eaLnBrk="1" latinLnBrk="1" hangingPunct="1">
+    <a:lvl9pPr marL="3657600" algn="l" defTabSz="914400" rtl="0" eaLnBrk="1" latinLnBrk="0" hangingPunct="1">
       <a:defRPr sz="1200" kern="1200">
         <a:solidFill>
           <a:schemeClr val="tx1"/>
@@ -591,8 +838,9 @@
           <a:p>
             <a:r>
               <a:rPr lang="en-US" dirty="0"/>
-              <a:t>팀장이 엽니다. "화면의 269,352원은 앱 예시 데이터에서 두 달 동안 덜 받은 돈입니다. 통장 총액만 봐서는 보이지 않는 돈입니다. 알바비를 덜 받아도 모르고, 알아도 말을 못 하는 대학생을 위해, 기록 → 비교 → 요청까지 한 앱으로 잇는 알바가드입니다." 팀명은 앱 이름과 같은 알바가드입니다.</a:t>
-            </a:r>
+              <a:t>안녕하세요, 4조 알바가드입니다. 화면의 269,352원은 저희 앱 예시 데이터에서 두 달 동안 덜 받은 돈입니다. 통장 총액만 봐서는 보이지 않는 돈입니다. 알바가드는 알바비를 덜 받아도 모르고, 알아도 말을 못 하는 대학생을 위해 기록, 비교, 요청을 한 앱으로 잇는 서비스입니다. 팀명도 앱 이름과 같은 알바가드이고, 저는 팀장 이지훈입니다.</a:t>
+            </a:r>
+            <a:endParaRPr lang="en-US" dirty="0"/>
           </a:p>
         </p:txBody>
       </p:sp>
@@ -678,8 +926,9 @@
           <a:p>
             <a:r>
               <a:rPr lang="en-US" dirty="0"/>
-              <a:t>네 단계(기록 → 비교 → 요청 → 확인)가 차별점과 하나씩 맞물립니다. 영상에 안 나오는 것은 말로 짚습니다: 캘린더의 연장 · 대타 표시(9장 캡처), 3단계 진정 안내(1350 · 노동포털 연결, 진정서는 만들지 않음). 예시 데이터는 발표 전에 미리 넣어 둡니다(오늘 날짜는 비어 있어 출근 · 퇴근이 그대로 됩니다). 7번 표에는 시연 중 남긴 2건만 나옵니다. 예시 데이터는 진짜 시각이 아니라 등록하지 않기 때문입니다. 시연은 다음 장의 녹화 영상(1분 46초)으로 하고, 단계마다 멈춰서 설명하면 약 3분입니다. 영상은 배포된 앱을 실제로 눌러 찍은 것이라 서버 등록과 확인 번호가 진짜입니다(10/26 오전 9시 36분 녹화. 화면의 시각은 녹화한 시각). 질문이 오면 실제 앱에서 출근 · 퇴근을 눌러, 설정의 등록 건수가 2건 늘어나는 것만 보여 줍니다. (전날 · 당일 준비는 팀원 요약의 팀장 체크리스트에)</a:t>
-            </a:r>
+              <a:t>이제 시연을 보여 드리겠습니다. 배포된 앱을 실제로 눌러서 녹화한 영상이고, 출근 · 퇴근, 받은 금액 입력, 요청 메시지와 증빙 PDF, 확인 페이지 순서입니다.</a:t>
+            </a:r>
+            <a:endParaRPr lang="en-US" dirty="0"/>
           </a:p>
         </p:txBody>
       </p:sp>
@@ -765,8 +1014,14 @@
           <a:p>
             <a:r>
               <a:rPr lang="en-US" dirty="0"/>
-              <a:t>재생 전에 한 문장: "보실 것 하나만 말씀드리면 마지막 장면의 등록 시각입니다. 지금 서버에 그대로 있는 값입니다." 영상을 누르면 재생됩니다. 왼쪽이 폰 화면, 오른쪽 위는 지금 단계(기록 · 비교 · 요청 · 확인), 그 아래가 자막입니다. 1 출근 · 퇴근 → 설정 "2건 등록됨"(0:10~0:30), 2 받은 금액 입력 → 빨간 차액(0:30~0:50), 3 메시지 생성 → 증빙 묶음 PDF 7번 표(0:50~1:28), 4 확인 페이지 → 서버 등록 시각(1:28~1:42). 시작 3초는 제목 화면, 끝 4초는 확인 페이지 주소와 확인 번호 화면입니다. 단계가 바뀔 때 멈추고 한두 문장씩 설명합니다. 영상이 안 열리면 docs/08_시연_영상.mp4를 따로 틀어도 됩니다. 영상 마지막에 나오는 확인 번호는 da3e2a7ad7e298db입니다. "녹화라서 못 믿겠다"라는 질문이 오면 "지금 폰으로 jihooni217.github.io/albaguard/verify.html?h=da3e2a7ad7e298db 를 열어 보셔도 됩니다. 서버가 찍은 시각이 녹화 시각(10/26)과 같습니다"라고 답합니다.</a:t>
-            </a:r>
+              <a:t>(재생 전) 마지막 장면의 등록 시각을 봐 주세요. 지금도 서버에 그대로 있는 값입니다.
+(영상을 멈출 때마다 한 문장씩. 시간이 모자라면 멈추지 않고 그대로 틉니다)
+① 출근 · 퇴근을 누르자 서버에 2건이 등록됐습니다.
+② 받은 금액을 넣으니 덜 받은 돈이 빨간 숫자로 나옵니다.
+③ 덜 받은 석 달을 합쳐 사장님께 보낼 메시지를 만들고, 증빙 PDF 7번 표에 방금 등록된 확인 번호가 들어갑니다.
+④ 확인 페이지에 번호를 넣으면 서버가 찍은 등록 시각이 나옵니다.</a:t>
+            </a:r>
+            <a:endParaRPr lang="en-US" dirty="0"/>
           </a:p>
         </p:txBody>
       </p:sp>
@@ -852,8 +1107,9 @@
           <a:p>
             <a:r>
               <a:rPr lang="en-US" dirty="0"/>
-              <a:t>시연 직후에 보여 줍니다. "방금 보신 것이 8개 중 이만큼"입니다. 100%는 쓰지 않았습니다. 계획 기준은 9월 기획서의 기능 4개에서 출발해, 10/13 MVP 기능 정의서에서 포함 8개 · 제외 6개(금액 자동 인식 · 푸시 알림 · AI 문구 · 광고 · 로그인 · 진정서)로 고정한 것입니다. %는 구현 + 실제 폰 확인 + 사용자 검증을 100으로 보고 남은 일만큼 뺀 자체 평가이고, 동작은 컴퓨터의 폰 크기 화면에서, 실제 폰은 설치까지 확인했습니다. 동그라미 세 칸은 컴퓨터 동작 · 실제 폰 · 사용자 검증이고, 지금은 모두 첫 칸만 찼습니다. 뒤 두 칸이 11월 일정입니다. 세 칸 중 첫 칸만 찼는데 왜 70~90%냐고 물으시면, %는 칸수가 아니라 남은 일의 크기로 어림한 것이고 11월 검증에서 큰 수정이 나오면 내려갈 수 있다고 답합니다. 이 장이 끝나면 손유호에게 넘깁니다.</a:t>
-            </a:r>
+              <a:t>방금 보신 기능을 포함해 계획한 8개가 모두 동작합니다. 다만 100%라고 하지는 않았습니다. 오른쪽 동그라미는 컴퓨터 동작, 실제 폰, 사용자 검증인데, 지금은 첫 칸만 찼고 나머지 두 칸이 11월 일정입니다. 그래서 완성도는 평균 약 80%로 잡았습니다. 이어서 시장과 수익은 손유호님이 말씀드리겠습니다.</a:t>
+            </a:r>
+            <a:endParaRPr lang="en-US" dirty="0"/>
           </a:p>
         </p:txBody>
       </p:sp>
@@ -939,8 +1195,9 @@
           <a:p>
             <a:r>
               <a:rPr lang="en-US" dirty="0"/>
-              <a:t>손유호. 임금체불은 2년 연속 2조 원이고 30인 미만 사업장에 몰려 있습니다. 체불 통계는 문제의 크기이지 알바 시장의 크기가 아니고, 알바생 몫은 이 통계에서 알 수 없습니다. 타깃 규모는 어림이라 "약"을 붙여 말합니다. 상한 210~270만 명은 알바 경험 기준이고, 지금 알바 중인 사람과 주 15시간 이상인 사람은 공식 통계가 없어 미상으로 둡니다. 재적학생은 교육부 2026 교육기본통계(대학원 포함), 알바 경험률은 알바몬 설문(1,193명, 여름방학 알바 88.9%, 2023)과 동대신문 설문(200명, 67.5%)이라 대푯값이 아닙니다. 타이밍: 2025년 9월 임금체불 근절 대책은 대지급금을 3개월분에서 6개월분으로 늘렸고, 10월 23일 시행된 개정 근로기준법은 상습 체불 사업주에게 신용 제재를 겁니다. 체불 제재가 세졌습니다. 출처: 고용노동부 노동포털 임금체불 통계현황, 알바천국 설문, 교육부 교육기본통계.</a:t>
-            </a:r>
+              <a:t>시장과 수익을 맡은 손유호입니다. 임금체불은 2023년 1조 7천억 원대에서 2년 연속 2조 원을 넘었습니다. 그중 67.8%가 30인 미만 사업장에서 나왔는데, 알바생이 많이 일하는 카페, 편의점, 음식점은 대개 이 규모입니다. 타깃 규모는 대학 재적생 307만 명 중 알바 경험이 있는 사람으로 어림해서, 약 210만에서 270만 명을 상한으로 봤습니다. 지금 알바 중인 사람과 주 15시간 이상인 사람은 공식 통계가 없어 설문으로 확인하고 있습니다. 작년 9월 임금체불 근절 대책과 10월 개정 근로기준법으로 체불 제재도 세졌습니다.</a:t>
+            </a:r>
+            <a:endParaRPr lang="en-US" dirty="0"/>
           </a:p>
         </p:txBody>
       </p:sp>
@@ -1026,8 +1283,9 @@
           <a:p>
             <a:r>
               <a:rPr lang="en-US" dirty="0"/>
-              <a:t>손유호. 첫 사용자로 보는 사람은 하우머치 사용자가 아니라, 카톡 · 메모에 적거나 아예 안 적고 통장 총액만 보는 학생입니다. 하우머치가 비교 칸을 넣으면 따라올 수 있으니, 따라 하기 어려운 쪽(기록 등록)을 키웁니다. 2×2에서 알바가드는 "혼자 씀 × 대응까지"에 있습니다. 오른쪽 열은 혼자서는 시작할 수 없는 서비스입니다. 기그는 사장이 가입해야 하고, 진정24는 증거가 먼저 있어야 합니다. 경쟁 서비스 정보는 2026년 9월 각 앱의 공식 소개와 리뷰 기준입니다.</a:t>
-            </a:r>
+              <a:t>경쟁 서비스 위치입니다. 가로는 혼자 쓸 수 있는지, 세로는 대응까지 가는지입니다. 계산기는 계산에서 멈추고, 기그는 사장님이 가입해야 하고, 진정24는 증거가 있어야 시작합니다. 혼자 쓰면서 대응까지 가는 칸에는 알바가드뿐입니다. 하우머치가 비교 기능을 넣으면 따라올 수 있어서, 저희는 따라 하기 어려운 기록 등록 쪽을 키우려고 합니다.</a:t>
+            </a:r>
+            <a:endParaRPr lang="en-US" dirty="0"/>
           </a:p>
         </p:txBody>
       </p:sp>
@@ -1113,8 +1371,9 @@
           <a:p>
             <a:r>
               <a:rPr lang="en-US" dirty="0"/>
-              <a:t>손유호. 기록 · 비교 · 요청 화면은 믿고 쓰는 것이 중요해서 광고를 섞지 않습니다. 단가를 모르니 매출 추정은 적지 않았습니다. 정산 문구 · 내용증명 · 증빙 묶음을 돈 받고 만들면 변호사법 · 공인노무사법 문제에 가까워져서 유료화하지 않습니다(웹 조사 기준, 전문가 검토 아님). 유저 확보는 에브리타임 · 학과 단톡 · 알바 커뮤니티에 링크를 올리고, "주휴수당 계산법" 같은 짧은 영상을 만듭니다. 알바비 앱에 왜 게임이 있나: 출퇴근은 일하는 날마다 누르지만, 돈을 확인하는 건 급여일에 한 번이라, 그 사이에도 앱을 열 이유로 넣었고 그 화면이 광고 자리입니다. 처음엔 근무 중에만 열렸는데 팀원 의견으로 10/25에 조건을 풀고 설정에서 숨길 수 있게 했습니다. 광고 형식은 웹앱이라 배너 · 전면이 기본이고 보상형은 승인이 필요합니다. 2차 구독은 폰을 바꾸거나 잃어버려도 기록이 남게 하는 선택 기능이고, 원하는 사람만 쓰므로 "근무 내용은 폰 안에만" 원칙과 부딪히지 않습니다. 광고 가설은 설문의 "게임 화면 광고" 문항(지금까지 13명 중 "싫다" 4명)과 승인 뒤 게임 화면 열람 수로 확인합니다. 운영 비용은 지금 서버 0원 · 배포 0원이라 수익이 0이어도 서비스는 돌아가고, 인건비는 팀 3명입니다. 넘길 때: "주 15시간 이상 일하는 사람이 많은지는 설문으로 확인하고 있습니다. 지금까지 13명이 답했고, 결과와 검증 계획은 박명진이 말씀드립니다."</a:t>
-            </a:r>
+              <a:t>비즈니스 모델입니다. 기록, 비교, 요청, 증빙 같은 핵심 화면은 무료이고 광고도 넣지 않습니다. 믿고 써야 하는 화면이기 때문입니다. 수익은 쉬는 틈 게임 화면 광고가 1차 가설입니다. 출퇴근은 일하는 날마다 누르지만 돈을 확인하는 건 급여일에 한 번이라, 그 사이 앱을 열 이유로 게임을 넣었고 그 화면이 광고 자리입니다. 2차 후보는 폰을 바꿔도 기록이 남는 동기화와 자동 백업 구독입니다. 정산 문구나 증빙 문서를 돈 받고 만들면 변호사법과 공인노무사법 문제가 생길 수 있어 유료화하지 않습니다. 사용자는 에브리타임, 학과 단톡, 알바 커뮤니티와 짧은 영상으로 모으겠습니다. 주 15시간 이상 일하는 사람이 많은지는 설문으로 확인하고 있는데, 결과와 검증 계획은 박명진님이 말씀드리겠습니다.</a:t>
+            </a:r>
+            <a:endParaRPr lang="en-US" dirty="0"/>
           </a:p>
         </p:txBody>
       </p:sp>
@@ -1200,8 +1459,9 @@
           <a:p>
             <a:r>
               <a:rPr lang="en-US" dirty="0"/>
-              <a:t>박명진. 가설은 9월 기획서의 문장입니다. 표의 기준은 팀이 정한 목표이지 데이터가 아닙니다. 오른쪽 끝 칸이 10/26까지 받은 설문 13명의 중간 결과입니다(지금 알바 중 2 · 예전에 했음 10 · 한 적 없음 1, 지인 중심이라 정식 조사가 아닙니다). 매달 받은 금액을 넣겠다는 사람이 13명 중 11명("할 만하다" 4, "귀찮지만 할 것 같다" 7), 게임 화면 광고를 싫다고 한 사람은 4명이었습니다. 주 15시간 기준은 지금 알바 중인 응답자가 2명뿐이라 판단을 미룹니다. 요청 문구와 확인 번호는 인터뷰 문항이라 11월에 확인합니다. 문제 쪽도 확인됐습니다. 급여 때 "내 계산이 맞는지"가 걱정이라는 사람이 13명 중 8명, 통장 총액만 본다는 사람이 12명 중 7명입니다. 불리한 결과도 말합니다. 가장 쓸모 있는 기능으로 정산 요청 메시지와 기록 등록을 고른 사람은 없었고(덜 받은 돈 알려 주기 7명, 출퇴근 기록 4명), 미니게임은 "안 쓸 것 같은 기능" 1위(6명)였습니다. 그래서 인터뷰에서 문구와 확인 번호를 직접 보여 주고 반응을 봅니다. 모집은 학과 · 동아리 단톡, 에브리타임, 그리고 오늘 이 자리(QR)입니다. 인터뷰 5명은 지인 중 지금 알바 중인 사람으로 11/3~11/9에 합니다. 결과는 사람 수로만 말하고 %는 30명 이상일 때만 씁니다. 당일 아침 응답이 늘었으면 결과 페이지의 숫자로 "지금은 N명"이라고 덧붙입니다. 1행은 의향을 물은 것이라, 실제로 넣는지는 인터뷰 때 앱을 설치하게 하고 급여일 뒤에 따로 봅니다. 지인이라 호의적으로 답하기 쉬워서 "넣겠다"를 그대로 믿지 않습니다.</a:t>
-            </a:r>
+              <a:t>검증을 맡은 박명진입니다. 저희 가설은, 근무 기록을 근거로 한 요청 문구가 있으면 알바생이 사장님께 말을 꺼낼 수 있다고 느끼고 쓸 것이라는 것입니다. 11월에 설문 30명과 인터뷰 5명으로 표의 다섯 가지를 확인합니다. 오른쪽 끝 칸은 10월 26일까지 받은 설문 13명의 중간 결과입니다. 매달 받은 금액을 넣겠다는 사람이 11명, 게임 화면 광고를 싫다는 사람은 4명이었습니다. 다만 지인 중심이라 정식 조사는 아니고, 지금 알바 중인 사람은 2명뿐이라 주 15시간 기준은 판단을 미룹니다. 불리한 결과도 있었습니다. 정산 요청 메시지와 기록 등록을 가장 쓸모 있다고 고른 사람은 없었고, 미니게임은 안 쓸 것 같은 기능 1위였습니다. 그래서 11월 인터뷰에서 요청 문구와 확인 번호를 직접 보여 주고 반응을 보겠습니다.</a:t>
+            </a:r>
+            <a:endParaRPr lang="en-US" dirty="0"/>
           </a:p>
         </p:txBody>
       </p:sp>
@@ -1287,8 +1547,9 @@
           <a:p>
             <a:r>
               <a:rPr lang="en-US" dirty="0"/>
-              <a:t>박명진. 7주 일정이고 빨간 마름모가 마일스톤입니다. 설문은 10/23에 열어 지금 13명이고, 11/16까지 손유호가 30명을 채웁니다. 그리고 인터뷰 5명은 11/3~11/9에 손유호 3명, 제가 2명을 합니다. 폰 검증은 아이폰은 팀장, 갤럭시는 제가 주관합니다. 광고 승인 신청은 손유호, 코드는 팀장입니다. 마일스톤: 11/9 설문 1차 집계 · 인터뷰 마감, 11/23 피드백 반영 배포와 광고 결정, 11/30 폰 검증 끝, 12/7 기록 등록 보강 배포와 기능 동결, 12/15 기말. 11/23에 설문의 광고 문항 결과로 광고 실험과 새 게임 중 하나를 정합니다. 12/7 이후에는 코드를 바꾸지 않고 보고서와 발표를 준비합니다. 위험과 대안은 보고서 5.4에 적었습니다.</a:t>
-            </a:r>
+              <a:t>기말 발표인 12월 15일까지 7주 일정입니다. 빨간 마름모가 마일스톤입니다. 11월 9일에 인터뷰와 설문 1차 정리, 11월 23일에 피드백을 반영해 배포하고, 11월 30일에 실제 폰 검증을 마칩니다. 12월 7일에 기능을 동결하고, 그 뒤에는 보고서와 발표를 준비합니다. 인터뷰는 손유호님이 3명, 제가 2명을 맡고, 갤럭시 폰 검증도 제가 맡습니다.</a:t>
+            </a:r>
+            <a:endParaRPr lang="en-US" dirty="0"/>
           </a:p>
         </p:txBody>
       </p:sp>
@@ -1374,8 +1635,9 @@
           <a:p>
             <a:r>
               <a:rPr lang="en-US" dirty="0"/>
-              <a:t>박명진. 앞으로 맡는 일은 오늘 각자 발표한 장과 같습니다. 개발은 팀장, 시장과 설문 · 인터뷰 3명은 손유호, 인터뷰 2명과 갤럭시 테스트 · 일정 · 보고서는 저입니다. 다음 장으로 넘겨 팀장이 마무리합니다.</a:t>
-            </a:r>
+              <a:t>팀원별 역할입니다. 앞으로 맡는 일은 오늘 각자 발표한 장과 같습니다. 개발은 팀장 이지훈, 시장과 설문, 인터뷰 3명은 손유호, 인터뷰 2명과 갤럭시 테스트, 일정 관리와 보고서 편집은 제가 맡습니다. 마무리는 팀장이 하겠습니다.</a:t>
+            </a:r>
+            <a:endParaRPr lang="en-US" dirty="0"/>
           </a:p>
         </p:txBody>
       </p:sp>
@@ -1461,7 +1723,7 @@
           <a:p>
             <a:r>
               <a:rPr lang="en-US" dirty="0"/>
-              <a:t>팀장 마무리(25초): "처음 보여 드린 269,352원처럼, 통장만 봐서는 안 보이던 돈을 기록으로 꺼내는 것이 알바가드입니다. 저희가 여쭙고 싶은 것 두 가지입니다. 문서 유료화를 피하면서 가능한 수익 모델이 더 있을지, 그리고 설문 30명 · 인터뷰 5명이면 충분한지입니다. 질문받겠습니다." 이 장은 질의응답 내내 띄워 둡니다.
+              <a:t>팀장 마무리: 처음 보여 드린 269,352원처럼, 통장만 봐서는 보이지 않던 돈을 기록으로 찾아 주는 것이 알바가드입니다. 마지막으로 여쭙고 싶은 것이 두 가지 있습니다. 문서를 유료화하지 않으면서 가능한 수익 모델이 더 있을지, 그리고 설문 30명과 인터뷰 5명이면 검증에 충분할지입니다. 감사합니다. 질문 받겠습니다.
 예상 질문 (이름 붙은 사람이 먼저 답하고, 모자라면 팀장이 보탭니다. 답은 짧은 메모이니 말할 때는 "~습니다"로)
 · [이지훈] 법적 효력 있나? → 보장하지 않는다. 판단은 감독관 · 법원. 우리는 판단할 자료를 정리하고, 수정 이력으로 무엇을 언제 왜 고쳤는지, 확인 번호로 그 번호가 언제 서버에 들어왔는지 보여 준다(내용과 맞춰 보는 방법은 기말까지). 통장 내역 · 카톡과 함께 내야 한다고 앱에도 적어 뒀다.
 · [이지훈] 서버는 여러분이 관리하는데 고치면 그만 아닌가? → 맞다. 공개키로는 넣기 · 읽기만 되고 시각은 서버가 찍는 것까지 확인했지만, 프로젝트 소유자 권한으로는 고칠 수 있다. 한계로 인정한다. 지금 막는 건 "사용자 본인이 나중에 고쳐 쓰기"까지. 운영자까지 못 고치게 하는 외부 공인 시점 확인은 비용 때문에 계획. 서버에는 번호만 있어서 운영자가 서버를 고쳐도 폰의 근무 내용 자체는 못 바꾼다. (확인 페이지에도 "앱에서 고치거나 지울 수 없음, 운영자 권한으로는 가능"이라고 적어 두었다)
@@ -1490,6 +1752,7 @@
 · [손유호] 광고 수익이 생기면 "무료라서 괜찮다"가 깨지지 않나? → 광고는 게임 화면에만 나오고 문서 기능과 떼어 놓았다. 문서를 만든 대가로 받는 돈이 아니게 구조를 잡은 것이다. 다만 웹 조사 기준 판단이고 전문가 검토는 아니다.
 · [박명진 → 손유호 순으로 각자] 팀원은 뭘 했나? → 개발은 이지훈. 손유호는 수업 시간의 계획서 일부를 썼고(내용은 팀장이 반영), 앞으로 시장 · 설문 · 인터뷰 3명. 박명진은 지금까지 의견을 낸 정도이고, 앞으로 인터뷰 2명 · 갤럭시 테스트 · 일정 · 보고서 편집.</a:t>
             </a:r>
+            <a:endParaRPr lang="en-US" dirty="0"/>
           </a:p>
         </p:txBody>
       </p:sp>
@@ -1575,8 +1838,9 @@
           <a:p>
             <a:r>
               <a:rPr lang="en-US" dirty="0"/>
-              <a:t>팀장. "교수님이 아직 구현 전일 거라 하셨는데, 저희는 웹앱이라 빨리 만들 수 있어서, 화면을 먼저 만들고 그걸 보여 주며 묻는 순서를 택했습니다. 오늘 보여 드리는 건 완성품이 아니라 검증용 도구입니다." 설문은 지금까지 13명이 답했고, 앱을 직접 써 보게 하는 인터뷰는 11월에 합니다. 오른쪽 QR은 앱과 설문입니다. 설문은 이름을 받지 않고 3분이라, 교수님께서 괜찮으시면 발표가 끝난 뒤 질의응답 시간에 답해 주셔도 됩니다. 역할은 개발 이지훈, 시장 · 수익 손유호, 검증 · 일정 박명진이고 발표도 그 순서입니다.</a:t>
-            </a:r>
+              <a:t>먼저 지금 상태부터 말씀드리겠습니다. 계획한 기능 8개는 모두 동작하는 상태로 배포했고, 완성도는 평균 약 80%입니다. 설문은 지금까지 13명이 답했고, 앱을 직접 써 보게 하는 인터뷰는 11월에 합니다. 오른쪽 QR은 앱과 설문입니다. 설문은 이름 없이 3분이면 끝나니, 발표가 끝난 뒤에 답해 주시면 감사하겠습니다. 발표는 문제, 솔루션, 기술, 시연, 시장과 수익, 검증과 일정 순서로 셋이 나눠서 하겠습니다.</a:t>
+            </a:r>
+            <a:endParaRPr lang="en-US" dirty="0"/>
           </a:p>
         </p:txBody>
       </p:sp>
@@ -1662,8 +1926,9 @@
           <a:p>
             <a:r>
               <a:rPr lang="en-US" dirty="0"/>
-              <a:t>타깃: 근로계약서가 없거나 사본이 없고, 통장 총액만 확인하고, 사장님께 말을 꺼내기 부담스러워하는 학생입니다. 주 15시간은 주휴수당이 생기는 선입니다. 문제 1: 수당 안내를 못 받는 경우가 많고 주휴 · 야간 계산 기준은 알기 어렵습니다. 계산기는 있어도 넣을 기록이 없습니다. 문제 2: 통장에 들어온 총액만 보고 넘어가고, 계약서가 없어 시급도 증명하기 어렵습니다. 문제 3: 관계 걱정, 작은 금액, 근거 없음이 겹치고, 메모장 기록은 "나중에 지어낸 것 아니냐?" 한마디에 무너집니다. 세 문제를 숫자로 보여 줍니다. 모두 알바천국 설문이라 "플랫폼 설문"이라는 점을 말하고, 그래서 우리도 직접 설문을 돌리고 있다고 잇습니다. 33.2%는 노동절 수당 안내에 대한 숫자라 "노동절 수당조차 안내받지 못하는 경우가 있다"까지만 말하고, 우리 설문(13명)에서도 주휴 · 야간 계산에 자신 있다는 사람은 4명뿐이었다고 덧붙입니다. 48.0%는 알아챈 사람만 센 숫자라, "알아채기 어렵다"의 근거로는 저희 설문에서 통장 총액만 본다는 12명 중 7명을 같이 말씀드립니다.</a:t>
-            </a:r>
+              <a:t>알바생의 문제는 세 가지입니다. 첫째, 얼마를 받아야 하는지 계산하기 어렵습니다. 노동절에 일한 알바생의 33.2%는 수당을 받는지 안내받지 못해 모르겠다고 답했습니다. 둘째, 덜 받아도 알아채기 어렵습니다. 알바생의 48.0%가 임금 문제를 겪었는데, 저희 설문에서도 12명 중 7명이 통장에 들어온 총액만 본다고 답했습니다. 셋째, 알아도 말을 꺼내기 어렵습니다. 최저시급보다 덜 받은 사람의 49.3%는 아무 대응도 하지 않았습니다. 기록이 없으니 "나중에 지어낸 것 아니냐"는 말 한마디에 무너지기 때문입니다. 이 숫자들은 알바천국 설문이라, 저희도 직접 설문을 돌리고 있습니다.</a:t>
+            </a:r>
+            <a:endParaRPr lang="en-US" dirty="0"/>
           </a:p>
         </p:txBody>
       </p:sp>
@@ -1749,8 +2014,9 @@
           <a:p>
             <a:r>
               <a:rPr lang="en-US" dirty="0"/>
-              <a:t>무료 앱이 실제로 겨루는 상대는 다른 앱이 아니라 메모장과 통장 확인입니다. 그래서 첫 열에 넣었습니다. 하우머치는 혼자 쓸 수 있지만 예상 급여에서 멈추고, 기그는 사장 연동이 필요하고, 계산기는 기록이 없고, 진정24는 증거가 있어야 시작합니다. 가운데 세 줄은 알바가드에만 있습니다. 카톡은 보낸 시각이 남지만 무엇을 왜 고쳤는지는 남지 않아 △입니다. 그 세 줄이 저희가 채우는 부분입니다. 마지막 줄 진정 접수는 저희가 일부러 안 합니다. 1350과 노동포털로 연결만 합니다.</a:t>
-            </a:r>
+              <a:t>기존 서비스와 비교해 보겠습니다. 알바생들이 실제로 많이 쓰는 건 앱보다 메모장과 카톡이라 첫 열에 넣었습니다. 하우머치는 혼자 기록할 수 있지만 예상 급여에서 멈추고, 기그는 사장님이 가입해야 하고, 알바천국 계산기는 기록이 남지 않고, 진정24는 증거가 이미 있어야 시작합니다. 가운데 세 줄, 실제 받은 돈과의 비교, 요청 문구와 증빙, 수정 이력과 등록 시각은 알바가드에만 있습니다. 진정 접수는 저희가 일부러 하지 않고, 1350과 노동포털로 연결만 합니다.</a:t>
+            </a:r>
+            <a:endParaRPr lang="en-US" dirty="0"/>
           </a:p>
         </p:txBody>
       </p:sp>
@@ -1836,8 +2102,9 @@
           <a:p>
             <a:r>
               <a:rPr lang="en-US" dirty="0"/>
-              <a:t>세 단계를 한 앱에서 잇는 것이 핵심입니다. 사장 연동 없이, 로그인 없이, 근무 내용은 폰 안에만 둡니다. 화면은 통장처럼 "일하면 돈이 쌓인다"가 보이게 만들었습니다.</a:t>
-            </a:r>
+              <a:t>그래서 알바가드는 기록, 비교, 요청 세 단계를 한 앱으로 잇습니다. 출근 · 퇴근 버튼으로 기록하고, 고치면 수정 전후와 사유가 남습니다. 받았어야 할 돈과 실제 받은 돈의 차이를 보여 주고, 덜 받았다면 정중한 메시지부터 내용증명 초안, 진정 절차 안내까지 단계별로 돕습니다. 사장님 연동도, 로그인도 없고, 근무 내용은 폰 안에만 둡니다.</a:t>
+            </a:r>
+            <a:endParaRPr lang="en-US" dirty="0"/>
           </a:p>
         </p:txBody>
       </p:sp>
@@ -1923,8 +2190,9 @@
           <a:p>
             <a:r>
               <a:rPr lang="en-US" dirty="0"/>
-              <a:t>1번은 기그와 달리 사장이 가입하지 않아도 된다는 뜻입니다. 2번은 실제 받은 돈과 비교해 차액을 찾고 요청 문구와 증빙 묶음까지 잇는 것으로, 비교한 네 서비스 모두에 없습니다. 3번이 따라 하기 어려운 차별점입니다. 기능 하나가 아니라 기록 구조라서, 사유 없이는 못 고치고 삭제해도 흔적이 남고 고치면 다시 등록됩니다. 기존 급여 앱이 넣으려면 사용자가 기록을 마음대로 고치던 방식을 포기해야 합니다. 지금 확인 페이지는 번호의 서버 등록 시각까지 보여 주고, 기록 내용에서 번호를 다시 계산해 맞춰 보는 방법은 기말까지 만듭니다(그래서 12장에서 70%). 근무지 · 시각 · 금액은 서버로 가지 않고, "그날 실제로 일했다"까지는 증명하지 못합니다. 한계는 먼저 말합니다. 통장 내역 · 메시지와 함께 내야 힘이 생긴다는 말은 앱의 증빙 문서 맨 아래에도 적혀 있습니다. "법적 효력" 질문이 오면 보장하지 않는다고 답하고, 근로감독관 · 법원이 판단할 자료를 정리해 준다고 말합니다.</a:t>
-            </a:r>
+              <a:t>차별점은 세 가지입니다. 첫째, 사장님 가입 없이 혼자 씁니다. 둘째, 실제 받은 돈과 비교해서 요청 문구와 증빙까지 이어 줍니다. 셋째가 따라 하기 어려운 부분인데, 기록할 때마다 확인 번호와 서버 등록 시각이 남습니다. 사유 없이는 못 고치고, 지워도 흔적이 남고, 고치면 다시 등록됩니다. 한계도 먼저 말씀드리면, 비교 기능은 다른 앱이 따라올 수 있습니다. 그리고 이 기록이 법적 효력을 보장하지는 않습니다. 통장 내역이나 메시지와 함께 내야 힘이 생기고, 판단은 근로감독관과 법원이 합니다.</a:t>
+            </a:r>
+            <a:endParaRPr lang="en-US" dirty="0"/>
           </a:p>
         </p:txBody>
       </p:sp>
@@ -2010,8 +2278,9 @@
           <a:p>
             <a:r>
               <a:rPr lang="en-US" dirty="0"/>
-              <a:t>표의 이유를 풀면: 스토어 심사 없이 링크로 배포해서, 사용자 의견을 듣고 바로 고칠 수 있습니다. 서버는 확인 번호 등록과 설문 수집에만 씁니다. 서버를 최소로 둔 이유는 개인정보와 비용 둘 다입니다. 공개키로는 넣기 · 읽기만 되고(RLS) 시각은 서버가 찍지만, 운영자 조작까지 막지는 못합니다. main에 올리면 GitHub Actions가 자동으로 빌드 · 배포합니다. 배포 앱은 API 키 없이 정해진 문구로 동작합니다. 한 학기 안에 혼자 만들 수 있는 구성입니다.</a:t>
-            </a:r>
+              <a:t>기술 스택입니다. 앱은 React와 Vite로 만든 웹앱이고, 홈 화면에 추가하면 앱처럼 쓰고 인터넷 없이도 열립니다. 별도 서버는 두지 않았고, Supabase는 확인 번호 등록과 설문 수집에만 씁니다. 배포는 GitHub Pages로, 코드를 올리면 자동으로 배포됩니다. 서버를 최소로 둔 이유는 개인정보와 비용 때문입니다.</a:t>
+            </a:r>
+            <a:endParaRPr lang="en-US" dirty="0"/>
           </a:p>
         </p:txBody>
       </p:sp>
@@ -2097,8 +2366,9 @@
           <a:p>
             <a:r>
               <a:rPr lang="en-US" dirty="0"/>
-              <a:t>왼쪽 폰 안에서 모든 계산이 끝나고, 서버로 가는 건 확인 번호 · 기록 번호 · 무작위 기기 번호뿐입니다. 기기 번호는 처음 기록을 등록할 때 앱이 만든 난수라 휴대전화 번호가 아닙니다. 다만 출근 · 퇴근을 누를 때 바로 등록되므로, 등록 시각을 보면 언제쯤 기록했는지는 서버에서도 짐작할 수 있습니다. 기기 번호는 무작위라 이름과 이어지지는 않습니다. 앱이 쓰는 공개키로는 넣기와 읽기만 되고, 직접 요청을 보내 확인했습니다. 2000년 시각을 보내도 서버 시각으로 들어가고, 수정 · 삭제는 401로 거부됩니다. 다만 운영자 권한으로는 고칠 수 있어서, 지금 막는 건 "사용자가 나중에 고쳐 쓰기"까지입니다. 운영자까지 못 고치게 하는 외부 시점 확인은 비용 때문에 계획입니다. 오른쪽은 기록 하나가 남을 때의 흐름입니다. 증빙 묶음 PDF 7번 표에 기록별 확인 번호와 등록 시각이 들어가고, 확인 페이지는 앱 데이터 없이 동작합니다. 지금 답하고 계신 설문도 같은 서버의 survey 표로 가고, 권한 원칙이 같습니다.</a:t>
-            </a:r>
+              <a:t>구성도입니다. 왼쪽 폰 안에서 화면, 계산, 저장이 모두 끝납니다. 서버로 가는 건 확인 번호와 기록 번호, 무작위 기기 번호뿐이고, 근무지나 시각, 금액은 가지 않습니다. 등록 시각은 서버가 직접 찍고, 앱에서는 고치거나 지울 수 없습니다. 실제로 2000년 시각을 보내 봐도 서버 시각으로 들어가고, 수정이나 삭제 요청은 거부되는 것을 확인했습니다. 다만 운영자 권한으로는 고칠 수 있어서, 지금 막는 것은 사용자가 나중에 고쳐 쓰는 것까지입니다.</a:t>
+            </a:r>
+            <a:endParaRPr lang="en-US" dirty="0"/>
           </a:p>
         </p:txBody>
       </p:sp>
@@ -2184,8 +2454,9 @@
           <a:p>
             <a:r>
               <a:rPr lang="en-US" dirty="0"/>
-              <a:t>디자인은 타깃 사용자(하우머치를 쓰는 친구)가 시안 12장 중 고른 통장 구성입니다. 잉크 남색은 "기록을 잉크로 남긴다"라는 뜻입니다. 증빙 묶음은 인쇄 창에서 PDF로 저장합니다.</a:t>
-            </a:r>
+              <a:t>실제 화면입니다. 캘린더는 예정과 다른 날을 표시하고, 설정에서는 무엇이 서버로 가는지 보고 끌 수 있습니다. 증빙 묶음 PDF에는 기록, 수정 이력, 계산 근거가 한 문서로 들어가고, 확인 페이지에서는 누구나 확인 번호로 등록 시각을 볼 수 있습니다. 모두 지금 배포 주소에서 열리는 화면입니다.</a:t>
+            </a:r>
+            <a:endParaRPr lang="en-US" dirty="0"/>
           </a:p>
         </p:txBody>
       </p:sp>
@@ -2263,7 +2534,6 @@
         <a:solidFill>
           <a:srgbClr val="FFFFFF"/>
         </a:solidFill>
-        <a:effectLst/>
       </p:bgPr>
     </p:bg>
     <p:spTree>
@@ -2301,7 +2571,7 @@
           <a:bodyPr wrap="square" lIns="0" tIns="0" rIns="0" bIns="0" rtlCol="0" anchor="ctr"/>
           <a:lstStyle/>
           <a:p>
-            <a:pPr marL="0" indent="0">
+            <a:pPr indent="0" marL="0">
               <a:buNone/>
             </a:pPr>
             <a:r>
@@ -2319,11 +2589,9 @@
       <p:sp>
         <p:nvSpPr>
           <p:cNvPr id="3" name="Text 1"/>
-          <p:cNvSpPr>
-            <a:spLocks noGrp="1"/>
-          </p:cNvSpPr>
+          <p:cNvSpPr/>
           <p:nvPr>
-            <p:ph type="body" idx="101" hasCustomPrompt="1"/>
+            <p:ph idx="101" type="body" hasCustomPrompt="1"/>
           </p:nvPr>
         </p:nvSpPr>
         <p:spPr>
@@ -2340,7 +2608,7 @@
         <p:txBody>
           <a:bodyPr wrap="square" rtlCol="0"/>
           <a:lstStyle>
-            <a:lvl1pPr marL="0" indent="0">
+            <a:lvl1pPr indent="0" marL="0">
               <a:buNone/>
               <a:defRPr lang="en-US" sz="1050" b="1" dirty="0">
                 <a:solidFill>
@@ -2350,7 +2618,7 @@
             </a:lvl1pPr>
           </a:lstStyle>
           <a:p>
-            <a:pPr marL="0" indent="0">
+            <a:pPr indent="0" marL="0">
               <a:buNone/>
             </a:pPr>
             <a:endParaRPr lang="en-US" sz="1050" dirty="0"/>
@@ -2360,11 +2628,9 @@
       <p:sp>
         <p:nvSpPr>
           <p:cNvPr id="4" name="Text 1"/>
-          <p:cNvSpPr>
-            <a:spLocks noGrp="1"/>
-          </p:cNvSpPr>
+          <p:cNvSpPr/>
           <p:nvPr>
-            <p:ph type="title" idx="102" hasCustomPrompt="1"/>
+            <p:ph idx="102" type="title" hasCustomPrompt="1"/>
           </p:nvPr>
         </p:nvSpPr>
         <p:spPr>
@@ -2381,7 +2647,7 @@
         <p:txBody>
           <a:bodyPr wrap="square" rtlCol="0"/>
           <a:lstStyle>
-            <a:lvl1pPr marL="0" indent="0" algn="l">
+            <a:lvl1pPr algn="l" indent="0" marL="0">
               <a:buNone/>
               <a:defRPr lang="en-US" sz="2400" b="1" dirty="0">
                 <a:solidFill>
@@ -2391,7 +2657,7 @@
             </a:lvl1pPr>
           </a:lstStyle>
           <a:p>
-            <a:pPr marL="0" indent="0" algn="l">
+            <a:pPr algn="l" indent="0" marL="0">
               <a:buNone/>
             </a:pPr>
             <a:endParaRPr lang="en-US" sz="2400" dirty="0"/>
@@ -2418,7 +2684,7 @@
           </a:prstGeom>
           <a:extLst>
             <a:ext uri="{C572A759-6A51-4108-AA02-DFA0A04FC94B}">
-              <ma14:wrappingTextBoxFlag xmlns:ma14="http://schemas.microsoft.com/office/mac/drawingml/2011/main" xmlns="" val="0"/>
+              <ma14:wrappingTextBoxFlag xmlns:ma14="http://schemas.microsoft.com/office/mac/drawingml/2011/main" val="0"/>
             </a:ext>
           </a:extLst>
         </p:spPr>
@@ -2436,8 +2702,8 @@
           <a:p>
             <a:pPr algn="r"/>
             <a:fld id="{F7021451-1387-4CA6-816F-3879F97B5CBC}" type="slidenum">
-              <a:rPr lang="en-US" b="0"/>
-              <a:t>‹#›</a:t>
+              <a:rPr b="0" lang="en-US"/>
+              <a:t>1002</a:t>
             </a:fld>
             <a:endParaRPr lang="en-US"/>
           </a:p>
@@ -2459,7 +2725,6 @@
         <a:solidFill>
           <a:srgbClr val="2A3193"/>
         </a:solidFill>
-        <a:effectLst/>
       </p:bgPr>
     </p:bg>
     <p:spTree>
@@ -2479,11 +2744,9 @@
       <p:sp>
         <p:nvSpPr>
           <p:cNvPr id="2" name="Text 0"/>
-          <p:cNvSpPr>
-            <a:spLocks noGrp="1"/>
-          </p:cNvSpPr>
+          <p:cNvSpPr/>
           <p:nvPr>
-            <p:ph type="title" idx="100" hasCustomPrompt="1"/>
+            <p:ph idx="100" type="title" hasCustomPrompt="1"/>
           </p:nvPr>
         </p:nvSpPr>
         <p:spPr>
@@ -2500,7 +2763,7 @@
         <p:txBody>
           <a:bodyPr wrap="square" rtlCol="0"/>
           <a:lstStyle>
-            <a:lvl1pPr marL="0" indent="0" algn="l">
+            <a:lvl1pPr algn="l" indent="0" marL="0">
               <a:buNone/>
               <a:defRPr lang="en-US" sz="3000" b="1" dirty="0">
                 <a:solidFill>
@@ -2510,7 +2773,7 @@
             </a:lvl1pPr>
           </a:lstStyle>
           <a:p>
-            <a:pPr marL="0" indent="0" algn="l">
+            <a:pPr algn="l" indent="0" marL="0">
               <a:buNone/>
             </a:pPr>
             <a:endParaRPr lang="en-US" sz="3000" dirty="0"/>
@@ -2528,11 +2791,6 @@
 <file path=ppt/slideMasters/slideMaster1.xml><?xml version="1.0" encoding="utf-8"?>
 <p:sldMaster xmlns:a="http://schemas.openxmlformats.org/drawingml/2006/main" xmlns:r="http://schemas.openxmlformats.org/officeDocument/2006/relationships" xmlns:p="http://schemas.openxmlformats.org/presentationml/2006/main">
   <p:cSld>
-    <p:bg>
-      <p:bgRef idx="1001">
-        <a:schemeClr val="bg1"/>
-      </p:bgRef>
-    </p:bg>
     <p:spTree>
       <p:nvGrpSpPr>
         <p:cNvPr id="1" name=""/>
@@ -2567,7 +2825,7 @@
           </a:prstGeom>
           <a:extLst>
             <a:ext uri="{C572A759-6A51-4108-AA02-DFA0A04FC94B}">
-              <ma14:wrappingTextBoxFlag xmlns:ma14="http://schemas.microsoft.com/office/mac/drawingml/2011/main" xmlns="" val="0"/>
+              <ma14:wrappingTextBoxFlag xmlns:ma14="http://schemas.microsoft.com/office/mac/drawingml/2011/main" val="0"/>
             </a:ext>
           </a:extLst>
         </p:spPr>
@@ -2585,8 +2843,8 @@
           <a:p>
             <a:pPr algn="r"/>
             <a:fld id="{F7021451-1387-4CA6-816F-3879F97B5CBC}" type="slidenum">
-              <a:rPr lang="en-US" b="0"/>
-              <a:t>‹#›</a:t>
+              <a:rPr b="0" lang="en-US"/>
+              <a:t>null</a:t>
             </a:fld>
             <a:endParaRPr lang="en-US"/>
           </a:p>
@@ -2873,14 +3131,14 @@
       </p:grpSpPr>
       <p:pic>
         <p:nvPicPr>
-          <p:cNvPr id="2" name="앱 아이콘" descr="C:\Users\user\Desktop\albaguard기술창업\public\icon-512.png"/>
+          <p:cNvPr id="2" name="앱 아이콘" descr="C:\Users\user\Desktop\albaguard기술창업\public\icon-512.png">    </p:cNvPr>
           <p:cNvPicPr>
             <a:picLocks noChangeAspect="1"/>
           </p:cNvPicPr>
           <p:nvPr/>
         </p:nvPicPr>
         <p:blipFill>
-          <a:blip r:embed="rId3"/>
+          <a:blip r:embed="rId1"/>
           <a:stretch>
             <a:fillRect/>
           </a:stretch>
@@ -2916,7 +3174,7 @@
           <a:bodyPr wrap="square" lIns="0" tIns="0" rIns="0" bIns="0" rtlCol="0" anchor="ctr"/>
           <a:lstStyle/>
           <a:p>
-            <a:pPr marL="0" indent="0">
+            <a:pPr indent="0" marL="0">
               <a:buNone/>
             </a:pPr>
             <a:r>
@@ -2952,7 +3210,7 @@
           <a:bodyPr wrap="square" lIns="0" tIns="0" rIns="0" bIns="0" rtlCol="0" anchor="ctr"/>
           <a:lstStyle/>
           <a:p>
-            <a:pPr marL="0" indent="0">
+            <a:pPr indent="0" marL="0">
               <a:buNone/>
             </a:pPr>
             <a:r>
@@ -3013,7 +3271,7 @@
           <a:bodyPr wrap="square" lIns="0" tIns="0" rIns="0" bIns="0" rtlCol="0" anchor="ctr"/>
           <a:lstStyle/>
           <a:p>
-            <a:pPr marL="0" indent="0">
+            <a:pPr indent="0" marL="0">
               <a:buNone/>
             </a:pPr>
             <a:r>
@@ -3049,7 +3307,7 @@
           <a:bodyPr wrap="square" lIns="0" tIns="0" rIns="0" bIns="0" rtlCol="0" anchor="ctr"/>
           <a:lstStyle/>
           <a:p>
-            <a:pPr marL="0" indent="0" algn="r">
+            <a:pPr algn="r" indent="0" marL="0">
               <a:buNone/>
             </a:pPr>
             <a:r>
@@ -3110,7 +3368,7 @@
           <a:bodyPr wrap="square" lIns="0" tIns="0" rIns="0" bIns="0" rtlCol="0" anchor="ctr"/>
           <a:lstStyle/>
           <a:p>
-            <a:pPr marL="0" indent="0">
+            <a:pPr indent="0" marL="0">
               <a:buNone/>
             </a:pPr>
             <a:r>
@@ -3146,7 +3404,7 @@
           <a:bodyPr wrap="square" lIns="0" tIns="0" rIns="0" bIns="0" rtlCol="0" anchor="ctr"/>
           <a:lstStyle/>
           <a:p>
-            <a:pPr marL="0" indent="0">
+            <a:pPr indent="0" marL="0">
               <a:buNone/>
             </a:pPr>
             <a:r>
@@ -3182,7 +3440,7 @@
           <a:bodyPr wrap="square" lIns="0" tIns="0" rIns="0" bIns="0" rtlCol="0" anchor="ctr"/>
           <a:lstStyle/>
           <a:p>
-            <a:pPr marL="0" indent="0">
+            <a:pPr indent="0" marL="0">
               <a:buNone/>
             </a:pPr>
             <a:r>
@@ -3218,7 +3476,7 @@
           <a:bodyPr wrap="square" lIns="0" tIns="0" rIns="0" bIns="0" rtlCol="0" anchor="ctr"/>
           <a:lstStyle/>
           <a:p>
-            <a:pPr marL="0" indent="0">
+            <a:pPr indent="0" marL="0">
               <a:buNone/>
             </a:pPr>
             <a:r>
@@ -3254,7 +3512,7 @@
           <a:bodyPr wrap="square" lIns="0" tIns="0" rIns="0" bIns="0" rtlCol="0" anchor="ctr"/>
           <a:lstStyle/>
           <a:p>
-            <a:pPr marL="0" indent="0">
+            <a:pPr indent="0" marL="0">
               <a:buNone/>
             </a:pPr>
             <a:r>
@@ -3315,7 +3573,7 @@
           <a:bodyPr wrap="square" lIns="0" tIns="0" rIns="0" bIns="0" rtlCol="0" anchor="ctr"/>
           <a:lstStyle/>
           <a:p>
-            <a:pPr marL="0" indent="0">
+            <a:pPr indent="0" marL="0">
               <a:buNone/>
             </a:pPr>
             <a:r>
@@ -3351,7 +3609,7 @@
           <a:bodyPr wrap="square" lIns="0" tIns="0" rIns="0" bIns="0" rtlCol="0" anchor="t"/>
           <a:lstStyle/>
           <a:p>
-            <a:pPr marL="0" indent="0">
+            <a:pPr indent="0" marL="0">
               <a:spcAft>
                 <a:spcPts val="200"/>
               </a:spcAft>
@@ -3368,7 +3626,7 @@
             <a:endParaRPr lang="en-US" sz="1250" dirty="0"/>
           </a:p>
           <a:p>
-            <a:pPr marL="0" indent="0">
+            <a:pPr indent="0" marL="0">
               <a:spcAft>
                 <a:spcPts val="200"/>
               </a:spcAft>
@@ -3385,7 +3643,7 @@
             <a:endParaRPr lang="en-US" sz="1250" dirty="0"/>
           </a:p>
           <a:p>
-            <a:pPr marL="0" indent="0">
+            <a:pPr indent="0" marL="0">
               <a:spcAft>
                 <a:spcPts val="200"/>
               </a:spcAft>
@@ -3402,7 +3660,7 @@
             <a:endParaRPr lang="en-US" sz="1250" dirty="0"/>
           </a:p>
           <a:p>
-            <a:pPr marL="0" indent="0">
+            <a:pPr indent="0" marL="0">
               <a:spcAft>
                 <a:spcPts val="200"/>
               </a:spcAft>
@@ -3419,7 +3677,7 @@
             <a:endParaRPr lang="en-US" sz="1250" dirty="0"/>
           </a:p>
           <a:p>
-            <a:pPr marL="0" indent="0">
+            <a:pPr indent="0" marL="0">
               <a:spcAft>
                 <a:spcPts val="200"/>
               </a:spcAft>
@@ -3436,7 +3694,7 @@
             <a:endParaRPr lang="en-US" sz="1250" dirty="0"/>
           </a:p>
           <a:p>
-            <a:pPr marL="0" indent="0">
+            <a:pPr indent="0" marL="0">
               <a:spcAft>
                 <a:spcPts val="200"/>
               </a:spcAft>
@@ -3451,6 +3709,36 @@
               <a:t>컴퓨터소프트웨어 18학번</a:t>
             </a:r>
             <a:endParaRPr lang="en-US" sz="1250" dirty="0"/>
+          </a:p>
+        </p:txBody>
+      </p:sp>
+      <p:sp>
+        <p:nvSpPr>
+          <p:cNvPr id="18" name="Text 0"/>
+          <p:cNvSpPr/>
+          <p:nvPr>
+            <p:ph idx="100" type="title" hasCustomPrompt="1"/>
+          </p:nvPr>
+        </p:nvSpPr>
+        <p:spPr>
+          <a:xfrm>
+            <a:off x="548640" y="457200"/>
+            <a:ext cx="8046720" cy="731520"/>
+          </a:xfrm>
+          <a:prstGeom prst="rect">
+            <a:avLst/>
+          </a:prstGeom>
+          <a:noFill/>
+          <a:ln/>
+        </p:spPr>
+        <p:txBody>
+          <a:bodyPr wrap="square" lIns="0" tIns="0" rIns="0" bIns="0" rtlCol="0" anchor="t"/>
+          <a:lstStyle/>
+          <a:p>
+            <a:pPr algn="l" indent="0" marL="0">
+              <a:buNone/>
+            </a:pPr>
+            <a:endParaRPr lang="en-US" sz="3000" dirty="0"/>
           </a:p>
         </p:txBody>
       </p:sp>
@@ -3482,11 +3770,9 @@
       <p:sp>
         <p:nvSpPr>
           <p:cNvPr id="2" name="Text 1"/>
-          <p:cNvSpPr>
-            <a:spLocks noGrp="1"/>
-          </p:cNvSpPr>
+          <p:cNvSpPr/>
           <p:nvPr>
-            <p:ph type="body" idx="101" hasCustomPrompt="1"/>
+            <p:ph idx="101" type="body" hasCustomPrompt="1"/>
           </p:nvPr>
         </p:nvSpPr>
         <p:spPr>
@@ -3504,7 +3790,7 @@
           <a:bodyPr wrap="square" lIns="0" tIns="0" rIns="0" bIns="0" rtlCol="0"/>
           <a:lstStyle/>
           <a:p>
-            <a:pPr marL="0" indent="0">
+            <a:pPr indent="0" marL="0">
               <a:buNone/>
             </a:pPr>
             <a:r>
@@ -3522,11 +3808,9 @@
       <p:sp>
         <p:nvSpPr>
           <p:cNvPr id="3" name="Text 1"/>
-          <p:cNvSpPr>
-            <a:spLocks noGrp="1"/>
-          </p:cNvSpPr>
+          <p:cNvSpPr/>
           <p:nvPr>
-            <p:ph type="title" idx="102" hasCustomPrompt="1"/>
+            <p:ph idx="102" type="title" hasCustomPrompt="1"/>
           </p:nvPr>
         </p:nvSpPr>
         <p:spPr>
@@ -3544,7 +3828,7 @@
           <a:bodyPr wrap="square" lIns="0" tIns="0" rIns="0" bIns="0" rtlCol="0" anchor="t"/>
           <a:lstStyle/>
           <a:p>
-            <a:pPr marL="0" indent="0" algn="l">
+            <a:pPr algn="l" indent="0" marL="0">
               <a:buNone/>
             </a:pPr>
             <a:r>
@@ -3605,7 +3889,7 @@
           <a:bodyPr wrap="square" lIns="0" tIns="0" rIns="0" bIns="0" rtlCol="0" anchor="ctr"/>
           <a:lstStyle/>
           <a:p>
-            <a:pPr marL="0" indent="0" algn="ctr">
+            <a:pPr algn="ctr" indent="0" marL="0">
               <a:buNone/>
             </a:pPr>
             <a:r>
@@ -3641,7 +3925,7 @@
           <a:bodyPr wrap="square" lIns="0" tIns="0" rIns="0" bIns="0" rtlCol="0" anchor="ctr"/>
           <a:lstStyle/>
           <a:p>
-            <a:pPr marL="0" indent="0">
+            <a:pPr indent="0" marL="0">
               <a:buNone/>
             </a:pPr>
             <a:r>
@@ -3677,7 +3961,7 @@
           <a:bodyPr wrap="square" lIns="0" tIns="0" rIns="0" bIns="0" rtlCol="0" anchor="t"/>
           <a:lstStyle/>
           <a:p>
-            <a:pPr marL="0" indent="0">
+            <a:pPr indent="0" marL="0">
               <a:buNone/>
             </a:pPr>
             <a:r>
@@ -3738,7 +4022,7 @@
           <a:bodyPr wrap="square" lIns="0" tIns="0" rIns="0" bIns="0" rtlCol="0" anchor="ctr"/>
           <a:lstStyle/>
           <a:p>
-            <a:pPr marL="0" indent="0" algn="ctr">
+            <a:pPr algn="ctr" indent="0" marL="0">
               <a:buNone/>
             </a:pPr>
             <a:r>
@@ -3774,7 +4058,7 @@
           <a:bodyPr wrap="square" lIns="0" tIns="0" rIns="0" bIns="0" rtlCol="0" anchor="ctr"/>
           <a:lstStyle/>
           <a:p>
-            <a:pPr marL="0" indent="0">
+            <a:pPr indent="0" marL="0">
               <a:buNone/>
             </a:pPr>
             <a:r>
@@ -3810,7 +4094,7 @@
           <a:bodyPr wrap="square" lIns="0" tIns="0" rIns="0" bIns="0" rtlCol="0" anchor="t"/>
           <a:lstStyle/>
           <a:p>
-            <a:pPr marL="0" indent="0">
+            <a:pPr indent="0" marL="0">
               <a:buNone/>
             </a:pPr>
             <a:r>
@@ -3871,7 +4155,7 @@
           <a:bodyPr wrap="square" lIns="0" tIns="0" rIns="0" bIns="0" rtlCol="0" anchor="ctr"/>
           <a:lstStyle/>
           <a:p>
-            <a:pPr marL="0" indent="0" algn="ctr">
+            <a:pPr algn="ctr" indent="0" marL="0">
               <a:buNone/>
             </a:pPr>
             <a:r>
@@ -3907,7 +4191,7 @@
           <a:bodyPr wrap="square" lIns="0" tIns="0" rIns="0" bIns="0" rtlCol="0" anchor="ctr"/>
           <a:lstStyle/>
           <a:p>
-            <a:pPr marL="0" indent="0">
+            <a:pPr indent="0" marL="0">
               <a:buNone/>
             </a:pPr>
             <a:r>
@@ -3943,7 +4227,7 @@
           <a:bodyPr wrap="square" lIns="0" tIns="0" rIns="0" bIns="0" rtlCol="0" anchor="t"/>
           <a:lstStyle/>
           <a:p>
-            <a:pPr marL="0" indent="0">
+            <a:pPr indent="0" marL="0">
               <a:buNone/>
             </a:pPr>
             <a:r>
@@ -4004,7 +4288,7 @@
           <a:bodyPr wrap="square" lIns="0" tIns="0" rIns="0" bIns="0" rtlCol="0" anchor="ctr"/>
           <a:lstStyle/>
           <a:p>
-            <a:pPr marL="0" indent="0" algn="ctr">
+            <a:pPr algn="ctr" indent="0" marL="0">
               <a:buNone/>
             </a:pPr>
             <a:r>
@@ -4040,7 +4324,7 @@
           <a:bodyPr wrap="square" lIns="0" tIns="0" rIns="0" bIns="0" rtlCol="0" anchor="ctr"/>
           <a:lstStyle/>
           <a:p>
-            <a:pPr marL="0" indent="0">
+            <a:pPr indent="0" marL="0">
               <a:buNone/>
             </a:pPr>
             <a:r>
@@ -4076,7 +4360,7 @@
           <a:bodyPr wrap="square" lIns="0" tIns="0" rIns="0" bIns="0" rtlCol="0" anchor="t"/>
           <a:lstStyle/>
           <a:p>
-            <a:pPr marL="0" indent="0">
+            <a:pPr indent="0" marL="0">
               <a:buNone/>
             </a:pPr>
             <a:r>
@@ -4111,7 +4395,7 @@
           </a:prstGeom>
           <a:extLst>
             <a:ext uri="{C572A759-6A51-4108-AA02-DFA0A04FC94B}">
-              <ma14:wrappingTextBoxFlag xmlns:ma14="http://schemas.microsoft.com/office/mac/drawingml/2011/main" xmlns="" val="0"/>
+              <ma14:wrappingTextBoxFlag xmlns:ma14="http://schemas.microsoft.com/office/mac/drawingml/2011/main" val="0"/>
             </a:ext>
           </a:extLst>
         </p:spPr>
@@ -4129,7 +4413,7 @@
           <a:p>
             <a:pPr algn="r"/>
             <a:fld id="{F7021451-1387-4CA6-816F-3879F97B5CBC}" type="slidenum">
-              <a:rPr lang="en-US" b="0"/>
+              <a:rPr b="0" lang="en-US"/>
               <a:t>10</a:t>
             </a:fld>
             <a:endParaRPr lang="en-US"/>
@@ -4170,16 +4454,16 @@
             <a:picLocks noChangeAspect="1"/>
           </p:cNvPicPr>
           <p:nvPr>
-            <a:videoFile r:link="rId2"/>
+            <a:videoFile r:link="rId1"/>
             <p:extLst>
               <p:ext uri="{DAA4B4D4-6D71-4841-9C94-3DE7FCFB9230}">
-                <p14:media xmlns:p14="http://schemas.microsoft.com/office/powerpoint/2010/main" r:embed="rId1"/>
+                <p14:media xmlns:p14="http://schemas.microsoft.com/office/powerpoint/2010/main" r:embed="rId2"/>
               </p:ext>
             </p:extLst>
           </p:nvPr>
         </p:nvPicPr>
         <p:blipFill>
-          <a:blip r:embed="rId5"/>
+          <a:blip r:embed="rId3"/>
           <a:stretch>
             <a:fillRect/>
           </a:stretch>
@@ -4194,6 +4478,66 @@
           </a:prstGeom>
         </p:spPr>
       </p:pic>
+      <p:sp>
+        <p:nvSpPr>
+          <p:cNvPr id="4" name="Text 1"/>
+          <p:cNvSpPr/>
+          <p:nvPr>
+            <p:ph idx="101" type="body" hasCustomPrompt="1"/>
+          </p:nvPr>
+        </p:nvSpPr>
+        <p:spPr>
+          <a:xfrm>
+            <a:off x="457200" y="274320"/>
+            <a:ext cx="7772400" cy="256032"/>
+          </a:xfrm>
+          <a:prstGeom prst="rect">
+            <a:avLst/>
+          </a:prstGeom>
+          <a:noFill/>
+          <a:ln/>
+        </p:spPr>
+        <p:txBody>
+          <a:bodyPr wrap="square" lIns="0" tIns="0" rIns="0" bIns="0" rtlCol="0"/>
+          <a:lstStyle/>
+          <a:p>
+            <a:pPr indent="0" marL="0">
+              <a:buNone/>
+            </a:pPr>
+            <a:endParaRPr lang="en-US" sz="1050" dirty="0"/>
+          </a:p>
+        </p:txBody>
+      </p:sp>
+      <p:sp>
+        <p:nvSpPr>
+          <p:cNvPr id="5" name="Text 1"/>
+          <p:cNvSpPr/>
+          <p:nvPr>
+            <p:ph idx="102" type="title" hasCustomPrompt="1"/>
+          </p:nvPr>
+        </p:nvSpPr>
+        <p:spPr>
+          <a:xfrm>
+            <a:off x="457200" y="502920"/>
+            <a:ext cx="8229600" cy="566928"/>
+          </a:xfrm>
+          <a:prstGeom prst="rect">
+            <a:avLst/>
+          </a:prstGeom>
+          <a:noFill/>
+          <a:ln/>
+        </p:spPr>
+        <p:txBody>
+          <a:bodyPr wrap="square" lIns="0" tIns="0" rIns="0" bIns="0" rtlCol="0" anchor="t"/>
+          <a:lstStyle/>
+          <a:p>
+            <a:pPr algn="l" indent="0" marL="0">
+              <a:buNone/>
+            </a:pPr>
+            <a:endParaRPr lang="en-US" sz="2400" dirty="0"/>
+          </a:p>
+        </p:txBody>
+      </p:sp>
       <p:sp>
         <p:nvSpPr>
           <p:cNvPr id="25" name="Slide Number Placeholder 0"/>
@@ -4214,7 +4558,7 @@
           </a:prstGeom>
           <a:extLst>
             <a:ext uri="{C572A759-6A51-4108-AA02-DFA0A04FC94B}">
-              <ma14:wrappingTextBoxFlag xmlns:ma14="http://schemas.microsoft.com/office/mac/drawingml/2011/main" xmlns="" val="0"/>
+              <ma14:wrappingTextBoxFlag xmlns:ma14="http://schemas.microsoft.com/office/mac/drawingml/2011/main" val="0"/>
             </a:ext>
           </a:extLst>
         </p:spPr>
@@ -4232,7 +4576,7 @@
           <a:p>
             <a:pPr algn="r"/>
             <a:fld id="{F7021451-1387-4CA6-816F-3879F97B5CBC}" type="slidenum">
-              <a:rPr lang="en-US" b="0"/>
+              <a:rPr b="0" lang="en-US"/>
               <a:t>11</a:t>
             </a:fld>
             <a:endParaRPr lang="en-US"/>
@@ -4267,11 +4611,9 @@
       <p:sp>
         <p:nvSpPr>
           <p:cNvPr id="2" name="Text 1"/>
-          <p:cNvSpPr>
-            <a:spLocks noGrp="1"/>
-          </p:cNvSpPr>
+          <p:cNvSpPr/>
           <p:nvPr>
-            <p:ph type="body" idx="101" hasCustomPrompt="1"/>
+            <p:ph idx="101" type="body" hasCustomPrompt="1"/>
           </p:nvPr>
         </p:nvSpPr>
         <p:spPr>
@@ -4289,7 +4631,7 @@
           <a:bodyPr wrap="square" lIns="0" tIns="0" rIns="0" bIns="0" rtlCol="0"/>
           <a:lstStyle/>
           <a:p>
-            <a:pPr marL="0" indent="0">
+            <a:pPr indent="0" marL="0">
               <a:buNone/>
             </a:pPr>
             <a:r>
@@ -4307,11 +4649,9 @@
       <p:sp>
         <p:nvSpPr>
           <p:cNvPr id="3" name="Text 1"/>
-          <p:cNvSpPr>
-            <a:spLocks noGrp="1"/>
-          </p:cNvSpPr>
+          <p:cNvSpPr/>
           <p:nvPr>
-            <p:ph type="title" idx="102" hasCustomPrompt="1"/>
+            <p:ph idx="102" type="title" hasCustomPrompt="1"/>
           </p:nvPr>
         </p:nvSpPr>
         <p:spPr>
@@ -4329,7 +4669,7 @@
           <a:bodyPr wrap="square" lIns="0" tIns="0" rIns="0" bIns="0" rtlCol="0" anchor="t"/>
           <a:lstStyle/>
           <a:p>
-            <a:pPr marL="0" indent="0" algn="l">
+            <a:pPr algn="l" indent="0" marL="0">
               <a:buNone/>
             </a:pPr>
             <a:r>
@@ -4365,7 +4705,7 @@
           <a:bodyPr wrap="square" lIns="0" tIns="0" rIns="0" bIns="0" rtlCol="0" anchor="ctr"/>
           <a:lstStyle/>
           <a:p>
-            <a:pPr marL="0" indent="0" algn="ctr">
+            <a:pPr algn="ctr" indent="0" marL="0">
               <a:buNone/>
             </a:pPr>
             <a:r>
@@ -4401,7 +4741,7 @@
           <a:bodyPr wrap="square" lIns="0" tIns="0" rIns="0" bIns="0" rtlCol="0" anchor="ctr"/>
           <a:lstStyle/>
           <a:p>
-            <a:pPr marL="0" indent="0" algn="ctr">
+            <a:pPr algn="ctr" indent="0" marL="0">
               <a:buNone/>
             </a:pPr>
             <a:r>
@@ -4437,7 +4777,7 @@
           <a:bodyPr wrap="square" lIns="0" tIns="0" rIns="0" bIns="0" rtlCol="0" anchor="ctr"/>
           <a:lstStyle/>
           <a:p>
-            <a:pPr marL="0" indent="0" algn="ctr">
+            <a:pPr algn="ctr" indent="0" marL="0">
               <a:buNone/>
             </a:pPr>
             <a:r>
@@ -4473,7 +4813,7 @@
           <a:bodyPr wrap="square" lIns="0" tIns="0" rIns="0" bIns="0" rtlCol="0" anchor="ctr"/>
           <a:lstStyle/>
           <a:p>
-            <a:pPr marL="0" indent="0">
+            <a:pPr indent="0" marL="0">
               <a:buNone/>
             </a:pPr>
             <a:r>
@@ -4509,7 +4849,7 @@
           <a:bodyPr wrap="square" lIns="0" tIns="0" rIns="0" bIns="0" rtlCol="0" anchor="ctr"/>
           <a:lstStyle/>
           <a:p>
-            <a:pPr marL="0" indent="0">
+            <a:pPr indent="0" marL="0">
               <a:buNone/>
             </a:pPr>
             <a:r>
@@ -4599,7 +4939,7 @@
           <a:bodyPr wrap="square" lIns="0" tIns="0" rIns="0" bIns="0" rtlCol="0" anchor="ctr"/>
           <a:lstStyle/>
           <a:p>
-            <a:pPr marL="0" indent="0">
+            <a:pPr indent="0" marL="0">
               <a:buNone/>
             </a:pPr>
             <a:r>
@@ -4710,7 +5050,7 @@
           <a:bodyPr wrap="square" lIns="0" tIns="0" rIns="0" bIns="0" rtlCol="0" anchor="ctr"/>
           <a:lstStyle/>
           <a:p>
-            <a:pPr marL="0" indent="0">
+            <a:pPr indent="0" marL="0">
               <a:buNone/>
             </a:pPr>
             <a:r>
@@ -4769,7 +5109,7 @@
           <a:bodyPr wrap="square" lIns="0" tIns="0" rIns="0" bIns="0" rtlCol="0" anchor="ctr"/>
           <a:lstStyle/>
           <a:p>
-            <a:pPr marL="0" indent="0">
+            <a:pPr indent="0" marL="0">
               <a:buNone/>
             </a:pPr>
             <a:r>
@@ -4859,7 +5199,7 @@
           <a:bodyPr wrap="square" lIns="0" tIns="0" rIns="0" bIns="0" rtlCol="0" anchor="ctr"/>
           <a:lstStyle/>
           <a:p>
-            <a:pPr marL="0" indent="0">
+            <a:pPr indent="0" marL="0">
               <a:buNone/>
             </a:pPr>
             <a:r>
@@ -4970,7 +5310,7 @@
           <a:bodyPr wrap="square" lIns="0" tIns="0" rIns="0" bIns="0" rtlCol="0" anchor="ctr"/>
           <a:lstStyle/>
           <a:p>
-            <a:pPr marL="0" indent="0">
+            <a:pPr indent="0" marL="0">
               <a:buNone/>
             </a:pPr>
             <a:r>
@@ -5029,7 +5369,7 @@
           <a:bodyPr wrap="square" lIns="0" tIns="0" rIns="0" bIns="0" rtlCol="0" anchor="ctr"/>
           <a:lstStyle/>
           <a:p>
-            <a:pPr marL="0" indent="0">
+            <a:pPr indent="0" marL="0">
               <a:buNone/>
             </a:pPr>
             <a:r>
@@ -5119,7 +5459,7 @@
           <a:bodyPr wrap="square" lIns="0" tIns="0" rIns="0" bIns="0" rtlCol="0" anchor="ctr"/>
           <a:lstStyle/>
           <a:p>
-            <a:pPr marL="0" indent="0">
+            <a:pPr indent="0" marL="0">
               <a:buNone/>
             </a:pPr>
             <a:r>
@@ -5230,7 +5570,7 @@
           <a:bodyPr wrap="square" lIns="0" tIns="0" rIns="0" bIns="0" rtlCol="0" anchor="ctr"/>
           <a:lstStyle/>
           <a:p>
-            <a:pPr marL="0" indent="0">
+            <a:pPr indent="0" marL="0">
               <a:buNone/>
             </a:pPr>
             <a:r>
@@ -5289,7 +5629,7 @@
           <a:bodyPr wrap="square" lIns="0" tIns="0" rIns="0" bIns="0" rtlCol="0" anchor="ctr"/>
           <a:lstStyle/>
           <a:p>
-            <a:pPr marL="0" indent="0">
+            <a:pPr indent="0" marL="0">
               <a:buNone/>
             </a:pPr>
             <a:r>
@@ -5379,7 +5719,7 @@
           <a:bodyPr wrap="square" lIns="0" tIns="0" rIns="0" bIns="0" rtlCol="0" anchor="ctr"/>
           <a:lstStyle/>
           <a:p>
-            <a:pPr marL="0" indent="0">
+            <a:pPr indent="0" marL="0">
               <a:buNone/>
             </a:pPr>
             <a:r>
@@ -5490,7 +5830,7 @@
           <a:bodyPr wrap="square" lIns="0" tIns="0" rIns="0" bIns="0" rtlCol="0" anchor="ctr"/>
           <a:lstStyle/>
           <a:p>
-            <a:pPr marL="0" indent="0">
+            <a:pPr indent="0" marL="0">
               <a:buNone/>
             </a:pPr>
             <a:r>
@@ -5549,7 +5889,7 @@
           <a:bodyPr wrap="square" lIns="0" tIns="0" rIns="0" bIns="0" rtlCol="0" anchor="ctr"/>
           <a:lstStyle/>
           <a:p>
-            <a:pPr marL="0" indent="0">
+            <a:pPr indent="0" marL="0">
               <a:buNone/>
             </a:pPr>
             <a:r>
@@ -5639,7 +5979,7 @@
           <a:bodyPr wrap="square" lIns="0" tIns="0" rIns="0" bIns="0" rtlCol="0" anchor="ctr"/>
           <a:lstStyle/>
           <a:p>
-            <a:pPr marL="0" indent="0">
+            <a:pPr indent="0" marL="0">
               <a:buNone/>
             </a:pPr>
             <a:r>
@@ -5750,7 +6090,7 @@
           <a:bodyPr wrap="square" lIns="0" tIns="0" rIns="0" bIns="0" rtlCol="0" anchor="ctr"/>
           <a:lstStyle/>
           <a:p>
-            <a:pPr marL="0" indent="0">
+            <a:pPr indent="0" marL="0">
               <a:buNone/>
             </a:pPr>
             <a:r>
@@ -5809,7 +6149,7 @@
           <a:bodyPr wrap="square" lIns="0" tIns="0" rIns="0" bIns="0" rtlCol="0" anchor="ctr"/>
           <a:lstStyle/>
           <a:p>
-            <a:pPr marL="0" indent="0">
+            <a:pPr indent="0" marL="0">
               <a:buNone/>
             </a:pPr>
             <a:r>
@@ -5899,7 +6239,7 @@
           <a:bodyPr wrap="square" lIns="0" tIns="0" rIns="0" bIns="0" rtlCol="0" anchor="ctr"/>
           <a:lstStyle/>
           <a:p>
-            <a:pPr marL="0" indent="0">
+            <a:pPr indent="0" marL="0">
               <a:buNone/>
             </a:pPr>
             <a:r>
@@ -6010,7 +6350,7 @@
           <a:bodyPr wrap="square" lIns="0" tIns="0" rIns="0" bIns="0" rtlCol="0" anchor="ctr"/>
           <a:lstStyle/>
           <a:p>
-            <a:pPr marL="0" indent="0">
+            <a:pPr indent="0" marL="0">
               <a:buNone/>
             </a:pPr>
             <a:r>
@@ -6069,7 +6409,7 @@
           <a:bodyPr wrap="square" lIns="0" tIns="0" rIns="0" bIns="0" rtlCol="0" anchor="ctr"/>
           <a:lstStyle/>
           <a:p>
-            <a:pPr marL="0" indent="0">
+            <a:pPr indent="0" marL="0">
               <a:buNone/>
             </a:pPr>
             <a:r>
@@ -6159,7 +6499,7 @@
           <a:bodyPr wrap="square" lIns="0" tIns="0" rIns="0" bIns="0" rtlCol="0" anchor="ctr"/>
           <a:lstStyle/>
           <a:p>
-            <a:pPr marL="0" indent="0">
+            <a:pPr indent="0" marL="0">
               <a:buNone/>
             </a:pPr>
             <a:r>
@@ -6270,7 +6610,7 @@
           <a:bodyPr wrap="square" lIns="0" tIns="0" rIns="0" bIns="0" rtlCol="0" anchor="ctr"/>
           <a:lstStyle/>
           <a:p>
-            <a:pPr marL="0" indent="0">
+            <a:pPr indent="0" marL="0">
               <a:buNone/>
             </a:pPr>
             <a:r>
@@ -6329,7 +6669,7 @@
           <a:bodyPr wrap="square" lIns="0" tIns="0" rIns="0" bIns="0" rtlCol="0" anchor="ctr"/>
           <a:lstStyle/>
           <a:p>
-            <a:pPr marL="0" indent="0">
+            <a:pPr indent="0" marL="0">
               <a:buNone/>
             </a:pPr>
             <a:r>
@@ -6419,7 +6759,7 @@
           <a:bodyPr wrap="square" lIns="0" tIns="0" rIns="0" bIns="0" rtlCol="0" anchor="ctr"/>
           <a:lstStyle/>
           <a:p>
-            <a:pPr marL="0" indent="0">
+            <a:pPr indent="0" marL="0">
               <a:buNone/>
             </a:pPr>
             <a:r>
@@ -6530,7 +6870,7 @@
           <a:bodyPr wrap="square" lIns="0" tIns="0" rIns="0" bIns="0" rtlCol="0" anchor="ctr"/>
           <a:lstStyle/>
           <a:p>
-            <a:pPr marL="0" indent="0">
+            <a:pPr indent="0" marL="0">
               <a:buNone/>
             </a:pPr>
             <a:r>
@@ -6589,7 +6929,7 @@
           <a:bodyPr wrap="square" lIns="0" tIns="0" rIns="0" bIns="0" rtlCol="0" anchor="ctr"/>
           <a:lstStyle/>
           <a:p>
-            <a:pPr marL="0" indent="0">
+            <a:pPr indent="0" marL="0">
               <a:buNone/>
             </a:pPr>
             <a:r>
@@ -6600,6 +6940,9 @@
               </a:rPr>
               <a:t>계획 기준  </a:t>
             </a:r>
+            <a:pPr indent="0" marL="0">
+              <a:buNone/>
+            </a:pPr>
             <a:r>
               <a:rPr lang="en-US" sz="1050" dirty="0">
                 <a:solidFill>
@@ -6608,6 +6951,9 @@
               </a:rPr>
               <a:t>정의서 기능 8개      </a:t>
             </a:r>
+            <a:pPr indent="0" marL="0">
+              <a:buNone/>
+            </a:pPr>
             <a:r>
               <a:rPr lang="en-US" sz="1050" b="1" dirty="0">
                 <a:solidFill>
@@ -6616,6 +6962,9 @@
               </a:rPr>
               <a:t>% 기준  </a:t>
             </a:r>
+            <a:pPr indent="0" marL="0">
+              <a:buNone/>
+            </a:pPr>
             <a:r>
               <a:rPr lang="en-US" sz="1050" dirty="0">
                 <a:solidFill>
@@ -6630,7 +6979,7 @@
       </p:sp>
       <p:sp>
         <p:nvSpPr>
-          <p:cNvPr id="81" name="Slide Number Placeholder 0"/>
+          <p:cNvPr id="25" name="Slide Number Placeholder 0"/>
           <p:cNvSpPr>
             <a:spLocks noGrp="1"/>
           </p:cNvSpPr>
@@ -6648,7 +6997,7 @@
           </a:prstGeom>
           <a:extLst>
             <a:ext uri="{C572A759-6A51-4108-AA02-DFA0A04FC94B}">
-              <ma14:wrappingTextBoxFlag xmlns:ma14="http://schemas.microsoft.com/office/mac/drawingml/2011/main" xmlns="" val="0"/>
+              <ma14:wrappingTextBoxFlag xmlns:ma14="http://schemas.microsoft.com/office/mac/drawingml/2011/main" val="0"/>
             </a:ext>
           </a:extLst>
         </p:spPr>
@@ -6666,7 +7015,7 @@
           <a:p>
             <a:pPr algn="r"/>
             <a:fld id="{F7021451-1387-4CA6-816F-3879F97B5CBC}" type="slidenum">
-              <a:rPr lang="en-US" b="0"/>
+              <a:rPr b="0" lang="en-US"/>
               <a:t>12</a:t>
             </a:fld>
             <a:endParaRPr lang="en-US"/>
@@ -6701,11 +7050,9 @@
       <p:sp>
         <p:nvSpPr>
           <p:cNvPr id="2" name="Text 1"/>
-          <p:cNvSpPr>
-            <a:spLocks noGrp="1"/>
-          </p:cNvSpPr>
+          <p:cNvSpPr/>
           <p:nvPr>
-            <p:ph type="body" idx="101" hasCustomPrompt="1"/>
+            <p:ph idx="101" type="body" hasCustomPrompt="1"/>
           </p:nvPr>
         </p:nvSpPr>
         <p:spPr>
@@ -6723,7 +7070,7 @@
           <a:bodyPr wrap="square" lIns="0" tIns="0" rIns="0" bIns="0" rtlCol="0"/>
           <a:lstStyle/>
           <a:p>
-            <a:pPr marL="0" indent="0">
+            <a:pPr indent="0" marL="0">
               <a:buNone/>
             </a:pPr>
             <a:r>
@@ -6741,11 +7088,9 @@
       <p:sp>
         <p:nvSpPr>
           <p:cNvPr id="3" name="Text 1"/>
-          <p:cNvSpPr>
-            <a:spLocks noGrp="1"/>
-          </p:cNvSpPr>
+          <p:cNvSpPr/>
           <p:nvPr>
-            <p:ph type="title" idx="102" hasCustomPrompt="1"/>
+            <p:ph idx="102" type="title" hasCustomPrompt="1"/>
           </p:nvPr>
         </p:nvSpPr>
         <p:spPr>
@@ -6763,7 +7108,7 @@
           <a:bodyPr wrap="square" lIns="0" tIns="0" rIns="0" bIns="0" rtlCol="0" anchor="t"/>
           <a:lstStyle/>
           <a:p>
-            <a:pPr marL="0" indent="0" algn="l">
+            <a:pPr algn="l" indent="0" marL="0">
               <a:buNone/>
             </a:pPr>
             <a:r>
@@ -6780,7 +7125,7 @@
       </p:sp>
       <p:graphicFrame>
         <p:nvGraphicFramePr>
-          <p:cNvPr id="4" name="Chart 0"/>
+          <p:cNvPr id="4" name="Chart 0" descr=""/>
           <p:cNvGraphicFramePr/>
           <p:nvPr/>
         </p:nvGraphicFramePr>
@@ -6788,9 +7133,9 @@
           <a:off x="457200" y="1234440"/>
           <a:ext cx="3840480" cy="2880360"/>
         </p:xfrm>
-        <a:graphic>
+        <a:graphic xmlns:a="http://schemas.openxmlformats.org/drawingml/2006/main">
           <a:graphicData uri="http://schemas.openxmlformats.org/drawingml/2006/chart">
-            <c:chart xmlns:c="http://schemas.openxmlformats.org/drawingml/2006/chart" xmlns:r="http://schemas.openxmlformats.org/officeDocument/2006/relationships" r:id="rId3"/>
+            <c:chart xmlns:c="http://schemas.openxmlformats.org/drawingml/2006/chart" r:id="rId1"/>
           </a:graphicData>
         </a:graphic>
       </p:graphicFrame>
@@ -6815,7 +7160,7 @@
           <a:bodyPr wrap="square" lIns="0" tIns="0" rIns="0" bIns="0" rtlCol="0" anchor="b"/>
           <a:lstStyle/>
           <a:p>
-            <a:pPr marL="0" indent="0">
+            <a:pPr indent="0" marL="0">
               <a:buNone/>
             </a:pPr>
             <a:r>
@@ -6851,7 +7196,7 @@
           <a:bodyPr wrap="square" lIns="0" tIns="0" rIns="0" bIns="0" rtlCol="0" anchor="t"/>
           <a:lstStyle/>
           <a:p>
-            <a:pPr marL="0" indent="0">
+            <a:pPr indent="0" marL="0">
               <a:buNone/>
             </a:pPr>
             <a:r>
@@ -6910,7 +7255,7 @@
           <a:bodyPr wrap="square" lIns="0" tIns="0" rIns="0" bIns="0" rtlCol="0" anchor="b"/>
           <a:lstStyle/>
           <a:p>
-            <a:pPr marL="0" indent="0">
+            <a:pPr indent="0" marL="0">
               <a:buNone/>
             </a:pPr>
             <a:r>
@@ -6946,7 +7291,7 @@
           <a:bodyPr wrap="square" lIns="0" tIns="0" rIns="0" bIns="0" rtlCol="0" anchor="t"/>
           <a:lstStyle/>
           <a:p>
-            <a:pPr marL="0" indent="0">
+            <a:pPr indent="0" marL="0">
               <a:buNone/>
             </a:pPr>
             <a:r>
@@ -7005,7 +7350,7 @@
           <a:bodyPr wrap="square" lIns="0" tIns="0" rIns="0" bIns="0" rtlCol="0" anchor="b"/>
           <a:lstStyle/>
           <a:p>
-            <a:pPr marL="0" indent="0">
+            <a:pPr indent="0" marL="0">
               <a:buNone/>
             </a:pPr>
             <a:r>
@@ -7041,7 +7386,7 @@
           <a:bodyPr wrap="square" lIns="0" tIns="0" rIns="0" bIns="0" rtlCol="0" anchor="t"/>
           <a:lstStyle/>
           <a:p>
-            <a:pPr marL="0" indent="0">
+            <a:pPr indent="0" marL="0">
               <a:buNone/>
             </a:pPr>
             <a:r>
@@ -7100,7 +7445,7 @@
           <a:bodyPr wrap="square" lIns="0" tIns="0" rIns="0" bIns="0" rtlCol="0" anchor="t"/>
           <a:lstStyle/>
           <a:p>
-            <a:pPr marL="0" indent="0">
+            <a:pPr indent="0" marL="0">
               <a:spcAft>
                 <a:spcPts val="100"/>
               </a:spcAft>
@@ -7114,24 +7459,30 @@
               </a:rPr>
               <a:t>타깃 규모(어림)  </a:t>
             </a:r>
-            <a:r>
-              <a:rPr lang="en-US" sz="1050" dirty="0">
-                <a:solidFill>
-                  <a:schemeClr val="tx1"/>
-                </a:solidFill>
-              </a:rPr>
-              <a:t>재적학생 307만 명 → 알바 경험 67~89% → 상한 약 210~270만 명</a:t>
-            </a:r>
-            <a:endParaRPr lang="en-US" sz="1050" dirty="0"/>
-          </a:p>
-          <a:p>
-            <a:pPr marL="0" indent="0">
+            <a:pPr indent="0" marL="0">
               <a:spcAft>
                 <a:spcPts val="100"/>
               </a:spcAft>
               <a:buNone/>
             </a:pPr>
             <a:r>
+              <a:rPr lang="en-US" sz="1050" dirty="0">
+                <a:solidFill>
+                  <a:schemeClr val="tx1"/>
+                </a:solidFill>
+              </a:rPr>
+              <a:t>재적학생 307만 명 → 알바 경험 67~89% → 상한 약 210~270만 명</a:t>
+            </a:r>
+            <a:endParaRPr lang="en-US" sz="1050" dirty="0"/>
+          </a:p>
+          <a:p>
+            <a:pPr indent="0" marL="0">
+              <a:spcAft>
+                <a:spcPts val="100"/>
+              </a:spcAft>
+              <a:buNone/>
+            </a:pPr>
+            <a:r>
               <a:rPr lang="en-US" sz="1050" b="1" dirty="0">
                 <a:solidFill>
                   <a:schemeClr val="tx2"/>
@@ -7139,6 +7490,12 @@
               </a:rPr>
               <a:t>타이밍  </a:t>
             </a:r>
+            <a:pPr indent="0" marL="0">
+              <a:spcAft>
+                <a:spcPts val="100"/>
+              </a:spcAft>
+              <a:buNone/>
+            </a:pPr>
             <a:r>
               <a:rPr lang="en-US" sz="1050" dirty="0">
                 <a:solidFill>
@@ -7171,7 +7528,7 @@
           </a:prstGeom>
           <a:extLst>
             <a:ext uri="{C572A759-6A51-4108-AA02-DFA0A04FC94B}">
-              <ma14:wrappingTextBoxFlag xmlns:ma14="http://schemas.microsoft.com/office/mac/drawingml/2011/main" xmlns="" val="0"/>
+              <ma14:wrappingTextBoxFlag xmlns:ma14="http://schemas.microsoft.com/office/mac/drawingml/2011/main" val="0"/>
             </a:ext>
           </a:extLst>
         </p:spPr>
@@ -7189,7 +7546,7 @@
           <a:p>
             <a:pPr algn="r"/>
             <a:fld id="{F7021451-1387-4CA6-816F-3879F97B5CBC}" type="slidenum">
-              <a:rPr lang="en-US" b="0"/>
+              <a:rPr b="0" lang="en-US"/>
               <a:t>13</a:t>
             </a:fld>
             <a:endParaRPr lang="en-US"/>
@@ -7224,11 +7581,9 @@
       <p:sp>
         <p:nvSpPr>
           <p:cNvPr id="2" name="Text 1"/>
-          <p:cNvSpPr>
-            <a:spLocks noGrp="1"/>
-          </p:cNvSpPr>
+          <p:cNvSpPr/>
           <p:nvPr>
-            <p:ph type="body" idx="101" hasCustomPrompt="1"/>
+            <p:ph idx="101" type="body" hasCustomPrompt="1"/>
           </p:nvPr>
         </p:nvSpPr>
         <p:spPr>
@@ -7246,7 +7601,7 @@
           <a:bodyPr wrap="square" lIns="0" tIns="0" rIns="0" bIns="0" rtlCol="0"/>
           <a:lstStyle/>
           <a:p>
-            <a:pPr marL="0" indent="0">
+            <a:pPr indent="0" marL="0">
               <a:buNone/>
             </a:pPr>
             <a:r>
@@ -7264,11 +7619,9 @@
       <p:sp>
         <p:nvSpPr>
           <p:cNvPr id="3" name="Text 1"/>
-          <p:cNvSpPr>
-            <a:spLocks noGrp="1"/>
-          </p:cNvSpPr>
+          <p:cNvSpPr/>
           <p:nvPr>
-            <p:ph type="title" idx="102" hasCustomPrompt="1"/>
+            <p:ph idx="102" type="title" hasCustomPrompt="1"/>
           </p:nvPr>
         </p:nvSpPr>
         <p:spPr>
@@ -7286,7 +7639,7 @@
           <a:bodyPr wrap="square" lIns="0" tIns="0" rIns="0" bIns="0" rtlCol="0" anchor="t"/>
           <a:lstStyle/>
           <a:p>
-            <a:pPr marL="0" indent="0" algn="l">
+            <a:pPr algn="l" indent="0" marL="0">
               <a:buNone/>
             </a:pPr>
             <a:r>
@@ -7393,7 +7746,7 @@
           <a:bodyPr wrap="square" lIns="0" tIns="0" rIns="0" bIns="0" rtlCol="0" anchor="ctr"/>
           <a:lstStyle/>
           <a:p>
-            <a:pPr marL="0" indent="0">
+            <a:pPr indent="0" marL="0">
               <a:buNone/>
             </a:pPr>
             <a:r>
@@ -7429,7 +7782,7 @@
           <a:bodyPr wrap="square" lIns="0" tIns="0" rIns="0" bIns="0" rtlCol="0" anchor="ctr"/>
           <a:lstStyle/>
           <a:p>
-            <a:pPr marL="0" indent="0" algn="r">
+            <a:pPr algn="r" indent="0" marL="0">
               <a:buNone/>
             </a:pPr>
             <a:r>
@@ -7465,7 +7818,7 @@
           <a:bodyPr wrap="square" lIns="0" tIns="0" rIns="0" bIns="0" rtlCol="0" anchor="ctr"/>
           <a:lstStyle/>
           <a:p>
-            <a:pPr marL="0" indent="0">
+            <a:pPr indent="0" marL="0">
               <a:buNone/>
             </a:pPr>
             <a:r>
@@ -7501,7 +7854,7 @@
           <a:bodyPr wrap="square" lIns="0" tIns="0" rIns="0" bIns="0" rtlCol="0" anchor="ctr"/>
           <a:lstStyle/>
           <a:p>
-            <a:pPr marL="0" indent="0">
+            <a:pPr indent="0" marL="0">
               <a:buNone/>
             </a:pPr>
             <a:r>
@@ -7564,7 +7917,7 @@
           <a:bodyPr wrap="square" lIns="0" tIns="0" rIns="0" bIns="0" rtlCol="0" anchor="ctr"/>
           <a:lstStyle/>
           <a:p>
-            <a:pPr marL="0" indent="0" algn="ctr">
+            <a:pPr algn="ctr" indent="0" marL="0">
               <a:buNone/>
             </a:pPr>
             <a:r>
@@ -7578,7 +7931,7 @@
             <a:endParaRPr lang="en-US" sz="1050" dirty="0"/>
           </a:p>
           <a:p>
-            <a:pPr marL="0" indent="0" algn="ctr">
+            <a:pPr algn="ctr" indent="0" marL="0">
               <a:buNone/>
             </a:pPr>
             <a:r>
@@ -7641,7 +7994,7 @@
           <a:bodyPr wrap="square" lIns="0" tIns="0" rIns="0" bIns="0" rtlCol="0" anchor="ctr"/>
           <a:lstStyle/>
           <a:p>
-            <a:pPr marL="0" indent="0" algn="ctr">
+            <a:pPr algn="ctr" indent="0" marL="0">
               <a:buNone/>
             </a:pPr>
             <a:r>
@@ -7655,7 +8008,7 @@
             <a:endParaRPr lang="en-US" sz="1050" dirty="0"/>
           </a:p>
           <a:p>
-            <a:pPr marL="0" indent="0" algn="ctr">
+            <a:pPr algn="ctr" indent="0" marL="0">
               <a:buNone/>
             </a:pPr>
             <a:r>
@@ -7718,7 +8071,7 @@
           <a:bodyPr wrap="square" lIns="0" tIns="0" rIns="0" bIns="0" rtlCol="0" anchor="ctr"/>
           <a:lstStyle/>
           <a:p>
-            <a:pPr marL="0" indent="0" algn="ctr">
+            <a:pPr algn="ctr" indent="0" marL="0">
               <a:buNone/>
             </a:pPr>
             <a:r>
@@ -7732,7 +8085,7 @@
             <a:endParaRPr lang="en-US" sz="1050" dirty="0"/>
           </a:p>
           <a:p>
-            <a:pPr marL="0" indent="0" algn="ctr">
+            <a:pPr algn="ctr" indent="0" marL="0">
               <a:buNone/>
             </a:pPr>
             <a:r>
@@ -7795,7 +8148,7 @@
           <a:bodyPr wrap="square" lIns="0" tIns="0" rIns="0" bIns="0" rtlCol="0" anchor="ctr"/>
           <a:lstStyle/>
           <a:p>
-            <a:pPr marL="0" indent="0" algn="ctr">
+            <a:pPr algn="ctr" indent="0" marL="0">
               <a:buNone/>
             </a:pPr>
             <a:r>
@@ -7809,7 +8162,7 @@
             <a:endParaRPr lang="en-US" sz="1050" dirty="0"/>
           </a:p>
           <a:p>
-            <a:pPr marL="0" indent="0" algn="ctr">
+            <a:pPr algn="ctr" indent="0" marL="0">
               <a:buNone/>
             </a:pPr>
             <a:r>
@@ -7872,7 +8225,7 @@
           <a:bodyPr wrap="square" lIns="0" tIns="0" rIns="0" bIns="0" rtlCol="0" anchor="ctr"/>
           <a:lstStyle/>
           <a:p>
-            <a:pPr marL="0" indent="0" algn="ctr">
+            <a:pPr algn="ctr" indent="0" marL="0">
               <a:buNone/>
             </a:pPr>
             <a:r>
@@ -7886,7 +8239,7 @@
             <a:endParaRPr lang="en-US" sz="1050" dirty="0"/>
           </a:p>
           <a:p>
-            <a:pPr marL="0" indent="0" algn="ctr">
+            <a:pPr algn="ctr" indent="0" marL="0">
               <a:buNone/>
             </a:pPr>
             <a:r>
@@ -7922,7 +8275,7 @@
           <a:bodyPr wrap="square" lIns="0" tIns="0" rIns="0" bIns="0" rtlCol="0" anchor="t"/>
           <a:lstStyle/>
           <a:p>
-            <a:pPr marL="0" indent="0">
+            <a:pPr indent="0" marL="0">
               <a:buNone/>
             </a:pPr>
             <a:r>
@@ -7958,7 +8311,7 @@
           <a:bodyPr wrap="square" lIns="0" tIns="0" rIns="0" bIns="0" rtlCol="0" anchor="t"/>
           <a:lstStyle/>
           <a:p>
-            <a:pPr marL="0" indent="0">
+            <a:pPr indent="0" marL="0">
               <a:buNone/>
             </a:pPr>
             <a:r>
@@ -7972,7 +8325,7 @@
             <a:endParaRPr lang="en-US" sz="1200" dirty="0"/>
           </a:p>
           <a:p>
-            <a:pPr marL="0" indent="0">
+            <a:pPr indent="0" marL="0">
               <a:buNone/>
             </a:pPr>
             <a:r>
@@ -7986,7 +8339,7 @@
             <a:endParaRPr lang="en-US" sz="1200" dirty="0"/>
           </a:p>
           <a:p>
-            <a:pPr marL="0" indent="0">
+            <a:pPr indent="0" marL="0">
               <a:buNone/>
             </a:pPr>
             <a:r>
@@ -8021,7 +8374,7 @@
           </a:prstGeom>
           <a:extLst>
             <a:ext uri="{C572A759-6A51-4108-AA02-DFA0A04FC94B}">
-              <ma14:wrappingTextBoxFlag xmlns:ma14="http://schemas.microsoft.com/office/mac/drawingml/2011/main" xmlns="" val="0"/>
+              <ma14:wrappingTextBoxFlag xmlns:ma14="http://schemas.microsoft.com/office/mac/drawingml/2011/main" val="0"/>
             </a:ext>
           </a:extLst>
         </p:spPr>
@@ -8039,7 +8392,7 @@
           <a:p>
             <a:pPr algn="r"/>
             <a:fld id="{F7021451-1387-4CA6-816F-3879F97B5CBC}" type="slidenum">
-              <a:rPr lang="en-US" b="0"/>
+              <a:rPr b="0" lang="en-US"/>
               <a:t>14</a:t>
             </a:fld>
             <a:endParaRPr lang="en-US"/>
@@ -8074,11 +8427,9 @@
       <p:sp>
         <p:nvSpPr>
           <p:cNvPr id="2" name="Text 1"/>
-          <p:cNvSpPr>
-            <a:spLocks noGrp="1"/>
-          </p:cNvSpPr>
+          <p:cNvSpPr/>
           <p:nvPr>
-            <p:ph type="body" idx="101" hasCustomPrompt="1"/>
+            <p:ph idx="101" type="body" hasCustomPrompt="1"/>
           </p:nvPr>
         </p:nvSpPr>
         <p:spPr>
@@ -8096,7 +8447,7 @@
           <a:bodyPr wrap="square" lIns="0" tIns="0" rIns="0" bIns="0" rtlCol="0"/>
           <a:lstStyle/>
           <a:p>
-            <a:pPr marL="0" indent="0">
+            <a:pPr indent="0" marL="0">
               <a:buNone/>
             </a:pPr>
             <a:r>
@@ -8114,11 +8465,9 @@
       <p:sp>
         <p:nvSpPr>
           <p:cNvPr id="3" name="Text 1"/>
-          <p:cNvSpPr>
-            <a:spLocks noGrp="1"/>
-          </p:cNvSpPr>
+          <p:cNvSpPr/>
           <p:nvPr>
-            <p:ph type="title" idx="102" hasCustomPrompt="1"/>
+            <p:ph idx="102" type="title" hasCustomPrompt="1"/>
           </p:nvPr>
         </p:nvSpPr>
         <p:spPr>
@@ -8136,7 +8485,7 @@
           <a:bodyPr wrap="square" lIns="0" tIns="0" rIns="0" bIns="0" rtlCol="0" anchor="t"/>
           <a:lstStyle/>
           <a:p>
-            <a:pPr marL="0" indent="0" algn="l">
+            <a:pPr algn="l" indent="0" marL="0">
               <a:buNone/>
             </a:pPr>
             <a:r>
@@ -8172,7 +8521,7 @@
           <a:bodyPr wrap="square" lIns="0" tIns="0" rIns="0" bIns="0" rtlCol="0" anchor="ctr"/>
           <a:lstStyle/>
           <a:p>
-            <a:pPr marL="0" indent="0">
+            <a:pPr indent="0" marL="0">
               <a:buNone/>
             </a:pPr>
             <a:r>
@@ -8208,7 +8557,7 @@
           <a:bodyPr wrap="square" lIns="0" tIns="0" rIns="0" bIns="0" rtlCol="0" anchor="ctr"/>
           <a:lstStyle/>
           <a:p>
-            <a:pPr marL="0" indent="0">
+            <a:pPr indent="0" marL="0">
               <a:buNone/>
             </a:pPr>
             <a:r>
@@ -8244,7 +8593,7 @@
           <a:bodyPr wrap="square" lIns="0" tIns="0" rIns="0" bIns="0" rtlCol="0" anchor="ctr"/>
           <a:lstStyle/>
           <a:p>
-            <a:pPr marL="0" indent="0" algn="r">
+            <a:pPr algn="r" indent="0" marL="0">
               <a:buNone/>
             </a:pPr>
             <a:r>
@@ -8303,7 +8652,7 @@
           <a:bodyPr wrap="square" lIns="0" tIns="0" rIns="0" bIns="0" rtlCol="0" anchor="ctr"/>
           <a:lstStyle/>
           <a:p>
-            <a:pPr marL="0" indent="0">
+            <a:pPr indent="0" marL="0">
               <a:buNone/>
             </a:pPr>
             <a:r>
@@ -8339,7 +8688,7 @@
           <a:bodyPr wrap="square" lIns="0" tIns="0" rIns="0" bIns="0" rtlCol="0" anchor="ctr"/>
           <a:lstStyle/>
           <a:p>
-            <a:pPr marL="0" indent="0" algn="r">
+            <a:pPr algn="r" indent="0" marL="0">
               <a:buNone/>
             </a:pPr>
             <a:r>
@@ -8398,7 +8747,7 @@
           <a:bodyPr wrap="square" lIns="0" tIns="0" rIns="0" bIns="0" rtlCol="0" anchor="ctr"/>
           <a:lstStyle/>
           <a:p>
-            <a:pPr marL="0" indent="0">
+            <a:pPr indent="0" marL="0">
               <a:buNone/>
             </a:pPr>
             <a:r>
@@ -8434,7 +8783,7 @@
           <a:bodyPr wrap="square" lIns="0" tIns="0" rIns="0" bIns="0" rtlCol="0" anchor="ctr"/>
           <a:lstStyle/>
           <a:p>
-            <a:pPr marL="0" indent="0" algn="r">
+            <a:pPr algn="r" indent="0" marL="0">
               <a:buNone/>
             </a:pPr>
             <a:r>
@@ -8493,7 +8842,7 @@
           <a:bodyPr wrap="square" lIns="0" tIns="0" rIns="0" bIns="0" rtlCol="0" anchor="ctr"/>
           <a:lstStyle/>
           <a:p>
-            <a:pPr marL="0" indent="0">
+            <a:pPr indent="0" marL="0">
               <a:buNone/>
             </a:pPr>
             <a:r>
@@ -8529,7 +8878,7 @@
           <a:bodyPr wrap="square" lIns="0" tIns="0" rIns="0" bIns="0" rtlCol="0" anchor="ctr"/>
           <a:lstStyle/>
           <a:p>
-            <a:pPr marL="0" indent="0" algn="r">
+            <a:pPr algn="r" indent="0" marL="0">
               <a:buNone/>
             </a:pPr>
             <a:r>
@@ -8588,7 +8937,7 @@
           <a:bodyPr wrap="square" lIns="0" tIns="0" rIns="0" bIns="0" rtlCol="0" anchor="ctr"/>
           <a:lstStyle/>
           <a:p>
-            <a:pPr marL="0" indent="0">
+            <a:pPr indent="0" marL="0">
               <a:buNone/>
             </a:pPr>
             <a:r>
@@ -8624,7 +8973,7 @@
           <a:bodyPr wrap="square" lIns="0" tIns="0" rIns="0" bIns="0" rtlCol="0" anchor="t"/>
           <a:lstStyle/>
           <a:p>
-            <a:pPr marL="0" indent="0">
+            <a:pPr indent="0" marL="0">
               <a:buNone/>
             </a:pPr>
             <a:r>
@@ -8660,7 +9009,7 @@
           <a:bodyPr wrap="square" lIns="0" tIns="0" rIns="0" bIns="0" rtlCol="0" anchor="ctr"/>
           <a:lstStyle/>
           <a:p>
-            <a:pPr marL="0" indent="0">
+            <a:pPr indent="0" marL="0">
               <a:buNone/>
             </a:pPr>
             <a:r>
@@ -8696,7 +9045,7 @@
           <a:bodyPr wrap="square" lIns="0" tIns="0" rIns="0" bIns="0" rtlCol="0" anchor="t"/>
           <a:lstStyle/>
           <a:p>
-            <a:pPr marL="0" indent="0">
+            <a:pPr indent="0" marL="0">
               <a:buNone/>
             </a:pPr>
             <a:r>
@@ -8731,7 +9080,7 @@
           </a:prstGeom>
           <a:extLst>
             <a:ext uri="{C572A759-6A51-4108-AA02-DFA0A04FC94B}">
-              <ma14:wrappingTextBoxFlag xmlns:ma14="http://schemas.microsoft.com/office/mac/drawingml/2011/main" xmlns="" val="0"/>
+              <ma14:wrappingTextBoxFlag xmlns:ma14="http://schemas.microsoft.com/office/mac/drawingml/2011/main" val="0"/>
             </a:ext>
           </a:extLst>
         </p:spPr>
@@ -8749,7 +9098,7 @@
           <a:p>
             <a:pPr algn="r"/>
             <a:fld id="{F7021451-1387-4CA6-816F-3879F97B5CBC}" type="slidenum">
-              <a:rPr lang="en-US" b="0"/>
+              <a:rPr b="0" lang="en-US"/>
               <a:t>15</a:t>
             </a:fld>
             <a:endParaRPr lang="en-US"/>
@@ -8784,11 +9133,9 @@
       <p:sp>
         <p:nvSpPr>
           <p:cNvPr id="2" name="Text 1"/>
-          <p:cNvSpPr>
-            <a:spLocks noGrp="1"/>
-          </p:cNvSpPr>
+          <p:cNvSpPr/>
           <p:nvPr>
-            <p:ph type="body" idx="101" hasCustomPrompt="1"/>
+            <p:ph idx="101" type="body" hasCustomPrompt="1"/>
           </p:nvPr>
         </p:nvSpPr>
         <p:spPr>
@@ -8806,7 +9153,7 @@
           <a:bodyPr wrap="square" lIns="0" tIns="0" rIns="0" bIns="0" rtlCol="0"/>
           <a:lstStyle/>
           <a:p>
-            <a:pPr marL="0" indent="0">
+            <a:pPr indent="0" marL="0">
               <a:buNone/>
             </a:pPr>
             <a:r>
@@ -8824,11 +9171,9 @@
       <p:sp>
         <p:nvSpPr>
           <p:cNvPr id="3" name="Text 1"/>
-          <p:cNvSpPr>
-            <a:spLocks noGrp="1"/>
-          </p:cNvSpPr>
+          <p:cNvSpPr/>
           <p:nvPr>
-            <p:ph type="title" idx="102" hasCustomPrompt="1"/>
+            <p:ph idx="102" type="title" hasCustomPrompt="1"/>
           </p:nvPr>
         </p:nvSpPr>
         <p:spPr>
@@ -8846,7 +9191,7 @@
           <a:bodyPr wrap="square" lIns="0" tIns="0" rIns="0" bIns="0" rtlCol="0" anchor="t"/>
           <a:lstStyle/>
           <a:p>
-            <a:pPr marL="0" indent="0" algn="l">
+            <a:pPr algn="l" indent="0" marL="0">
               <a:buNone/>
             </a:pPr>
             <a:r>
@@ -8882,7 +9227,7 @@
           <a:bodyPr wrap="square" lIns="0" tIns="0" rIns="0" bIns="0" rtlCol="0" anchor="ctr"/>
           <a:lstStyle/>
           <a:p>
-            <a:pPr marL="0" indent="0">
+            <a:pPr indent="0" marL="0">
               <a:buNone/>
             </a:pPr>
             <a:r>
@@ -8893,6 +9238,9 @@
               </a:rPr>
               <a:t>가설  </a:t>
             </a:r>
+            <a:pPr indent="0" marL="0">
+              <a:buNone/>
+            </a:pPr>
             <a:r>
               <a:rPr lang="en-US" sz="1100" dirty="0">
                 <a:solidFill>
@@ -8928,34 +9276,10 @@
             <a:tbl>
               <a:tblPr/>
               <a:tblGrid>
-                <a:gridCol w="2240280">
-                  <a:extLst>
-                    <a:ext uri="{9D8B030D-6E8A-4147-A177-3AD203B41FA5}">
-                      <a16:colId xmlns:a16="http://schemas.microsoft.com/office/drawing/2014/main" val="20000"/>
-                    </a:ext>
-                  </a:extLst>
-                </a:gridCol>
-                <a:gridCol w="2514600">
-                  <a:extLst>
-                    <a:ext uri="{9D8B030D-6E8A-4147-A177-3AD203B41FA5}">
-                      <a16:colId xmlns:a16="http://schemas.microsoft.com/office/drawing/2014/main" val="20001"/>
-                    </a:ext>
-                  </a:extLst>
-                </a:gridCol>
-                <a:gridCol w="1920240">
-                  <a:extLst>
-                    <a:ext uri="{9D8B030D-6E8A-4147-A177-3AD203B41FA5}">
-                      <a16:colId xmlns:a16="http://schemas.microsoft.com/office/drawing/2014/main" val="20002"/>
-                    </a:ext>
-                  </a:extLst>
-                </a:gridCol>
-                <a:gridCol w="1554480">
-                  <a:extLst>
-                    <a:ext uri="{9D8B030D-6E8A-4147-A177-3AD203B41FA5}">
-                      <a16:colId xmlns:a16="http://schemas.microsoft.com/office/drawing/2014/main" val="20003"/>
-                    </a:ext>
-                  </a:extLst>
-                </a:gridCol>
+                <a:gridCol w="2240280"/>
+                <a:gridCol w="2514600"/>
+                <a:gridCol w="1920240"/>
+                <a:gridCol w="1554480"/>
               </a:tblGrid>
               <a:tr h="384048">
                 <a:tc>
@@ -8963,7 +9287,7 @@
                     <a:bodyPr/>
                     <a:lstStyle/>
                     <a:p>
-                      <a:pPr marL="0" indent="0">
+                      <a:pPr indent="0" marL="0">
                         <a:buNone/>
                       </a:pPr>
                       <a:r>
@@ -9024,7 +9348,7 @@
                     <a:bodyPr/>
                     <a:lstStyle/>
                     <a:p>
-                      <a:pPr marL="0" indent="0">
+                      <a:pPr indent="0" marL="0">
                         <a:buNone/>
                       </a:pPr>
                       <a:r>
@@ -9085,7 +9409,7 @@
                     <a:bodyPr/>
                     <a:lstStyle/>
                     <a:p>
-                      <a:pPr marL="0" indent="0">
+                      <a:pPr indent="0" marL="0">
                         <a:buNone/>
                       </a:pPr>
                       <a:r>
@@ -9146,7 +9470,7 @@
                     <a:bodyPr/>
                     <a:lstStyle/>
                     <a:p>
-                      <a:pPr marL="0" indent="0">
+                      <a:pPr indent="0" marL="0">
                         <a:buNone/>
                       </a:pPr>
                       <a:r>
@@ -9202,11 +9526,6 @@
                     </a:solidFill>
                   </a:tcPr>
                 </a:tc>
-                <a:extLst>
-                  <a:ext uri="{0D108BD9-81ED-4DB2-BD59-A6C34878D82A}">
-                    <a16:rowId xmlns:a16="http://schemas.microsoft.com/office/drawing/2014/main" val="10000"/>
-                  </a:ext>
-                </a:extLst>
               </a:tr>
               <a:tr h="475488">
                 <a:tc>
@@ -9214,7 +9533,7 @@
                     <a:bodyPr/>
                     <a:lstStyle/>
                     <a:p>
-                      <a:pPr marL="0" indent="0">
+                      <a:pPr indent="0" marL="0">
                         <a:buNone/>
                       </a:pPr>
                       <a:r>
@@ -9272,7 +9591,7 @@
                     <a:bodyPr/>
                     <a:lstStyle/>
                     <a:p>
-                      <a:pPr marL="0" indent="0">
+                      <a:pPr indent="0" marL="0">
                         <a:buNone/>
                       </a:pPr>
                       <a:r>
@@ -9330,7 +9649,7 @@
                     <a:bodyPr/>
                     <a:lstStyle/>
                     <a:p>
-                      <a:pPr marL="0" indent="0">
+                      <a:pPr indent="0" marL="0">
                         <a:buNone/>
                       </a:pPr>
                       <a:r>
@@ -9388,7 +9707,7 @@
                     <a:bodyPr/>
                     <a:lstStyle/>
                     <a:p>
-                      <a:pPr marL="0" indent="0">
+                      <a:pPr indent="0" marL="0">
                         <a:buNone/>
                       </a:pPr>
                       <a:r>
@@ -9441,11 +9760,6 @@
                     </a:lnB>
                   </a:tcPr>
                 </a:tc>
-                <a:extLst>
-                  <a:ext uri="{0D108BD9-81ED-4DB2-BD59-A6C34878D82A}">
-                    <a16:rowId xmlns:a16="http://schemas.microsoft.com/office/drawing/2014/main" val="10001"/>
-                  </a:ext>
-                </a:extLst>
               </a:tr>
               <a:tr h="475488">
                 <a:tc>
@@ -9453,7 +9767,7 @@
                     <a:bodyPr/>
                     <a:lstStyle/>
                     <a:p>
-                      <a:pPr marL="0" indent="0">
+                      <a:pPr indent="0" marL="0">
                         <a:buNone/>
                       </a:pPr>
                       <a:r>
@@ -9511,7 +9825,7 @@
                     <a:bodyPr/>
                     <a:lstStyle/>
                     <a:p>
-                      <a:pPr marL="0" indent="0">
+                      <a:pPr indent="0" marL="0">
                         <a:buNone/>
                       </a:pPr>
                       <a:r>
@@ -9569,7 +9883,7 @@
                     <a:bodyPr/>
                     <a:lstStyle/>
                     <a:p>
-                      <a:pPr marL="0" indent="0">
+                      <a:pPr indent="0" marL="0">
                         <a:buNone/>
                       </a:pPr>
                       <a:r>
@@ -9627,7 +9941,7 @@
                     <a:bodyPr/>
                     <a:lstStyle/>
                     <a:p>
-                      <a:pPr marL="0" indent="0">
+                      <a:pPr indent="0" marL="0">
                         <a:buNone/>
                       </a:pPr>
                       <a:r>
@@ -9641,7 +9955,7 @@
                       <a:endParaRPr lang="en-US" sz="1100" dirty="0"/>
                     </a:p>
                     <a:p>
-                      <a:pPr marL="0" indent="0">
+                      <a:pPr indent="0" marL="0">
                         <a:buNone/>
                       </a:pPr>
                       <a:r>
@@ -9694,11 +10008,6 @@
                     </a:lnB>
                   </a:tcPr>
                 </a:tc>
-                <a:extLst>
-                  <a:ext uri="{0D108BD9-81ED-4DB2-BD59-A6C34878D82A}">
-                    <a16:rowId xmlns:a16="http://schemas.microsoft.com/office/drawing/2014/main" val="10002"/>
-                  </a:ext>
-                </a:extLst>
               </a:tr>
               <a:tr h="475488">
                 <a:tc>
@@ -9706,7 +10015,7 @@
                     <a:bodyPr/>
                     <a:lstStyle/>
                     <a:p>
-                      <a:pPr marL="0" indent="0">
+                      <a:pPr indent="0" marL="0">
                         <a:buNone/>
                       </a:pPr>
                       <a:r>
@@ -9764,7 +10073,7 @@
                     <a:bodyPr/>
                     <a:lstStyle/>
                     <a:p>
-                      <a:pPr marL="0" indent="0">
+                      <a:pPr indent="0" marL="0">
                         <a:buNone/>
                       </a:pPr>
                       <a:r>
@@ -9822,7 +10131,7 @@
                     <a:bodyPr/>
                     <a:lstStyle/>
                     <a:p>
-                      <a:pPr marL="0" indent="0">
+                      <a:pPr indent="0" marL="0">
                         <a:buNone/>
                       </a:pPr>
                       <a:r>
@@ -9880,7 +10189,7 @@
                     <a:bodyPr/>
                     <a:lstStyle/>
                     <a:p>
-                      <a:pPr marL="0" indent="0">
+                      <a:pPr indent="0" marL="0">
                         <a:buNone/>
                       </a:pPr>
                       <a:r>
@@ -9894,7 +10203,7 @@
                       <a:endParaRPr lang="en-US" sz="1100" dirty="0"/>
                     </a:p>
                     <a:p>
-                      <a:pPr marL="0" indent="0">
+                      <a:pPr indent="0" marL="0">
                         <a:buNone/>
                       </a:pPr>
                       <a:r>
@@ -9947,11 +10256,6 @@
                     </a:lnB>
                   </a:tcPr>
                 </a:tc>
-                <a:extLst>
-                  <a:ext uri="{0D108BD9-81ED-4DB2-BD59-A6C34878D82A}">
-                    <a16:rowId xmlns:a16="http://schemas.microsoft.com/office/drawing/2014/main" val="10003"/>
-                  </a:ext>
-                </a:extLst>
               </a:tr>
               <a:tr h="475488">
                 <a:tc>
@@ -9959,7 +10263,7 @@
                     <a:bodyPr/>
                     <a:lstStyle/>
                     <a:p>
-                      <a:pPr marL="0" indent="0">
+                      <a:pPr indent="0" marL="0">
                         <a:buNone/>
                       </a:pPr>
                       <a:r>
@@ -10017,7 +10321,7 @@
                     <a:bodyPr/>
                     <a:lstStyle/>
                     <a:p>
-                      <a:pPr marL="0" indent="0">
+                      <a:pPr indent="0" marL="0">
                         <a:buNone/>
                       </a:pPr>
                       <a:r>
@@ -10075,7 +10379,7 @@
                     <a:bodyPr/>
                     <a:lstStyle/>
                     <a:p>
-                      <a:pPr marL="0" indent="0">
+                      <a:pPr indent="0" marL="0">
                         <a:buNone/>
                       </a:pPr>
                       <a:r>
@@ -10133,7 +10437,7 @@
                     <a:bodyPr/>
                     <a:lstStyle/>
                     <a:p>
-                      <a:pPr marL="0" indent="0">
+                      <a:pPr indent="0" marL="0">
                         <a:buNone/>
                       </a:pPr>
                       <a:r>
@@ -10186,11 +10490,6 @@
                     </a:lnB>
                   </a:tcPr>
                 </a:tc>
-                <a:extLst>
-                  <a:ext uri="{0D108BD9-81ED-4DB2-BD59-A6C34878D82A}">
-                    <a16:rowId xmlns:a16="http://schemas.microsoft.com/office/drawing/2014/main" val="10004"/>
-                  </a:ext>
-                </a:extLst>
               </a:tr>
               <a:tr h="475488">
                 <a:tc>
@@ -10198,7 +10497,7 @@
                     <a:bodyPr/>
                     <a:lstStyle/>
                     <a:p>
-                      <a:pPr marL="0" indent="0">
+                      <a:pPr indent="0" marL="0">
                         <a:buNone/>
                       </a:pPr>
                       <a:r>
@@ -10256,7 +10555,7 @@
                     <a:bodyPr/>
                     <a:lstStyle/>
                     <a:p>
-                      <a:pPr marL="0" indent="0">
+                      <a:pPr indent="0" marL="0">
                         <a:buNone/>
                       </a:pPr>
                       <a:r>
@@ -10314,7 +10613,7 @@
                     <a:bodyPr/>
                     <a:lstStyle/>
                     <a:p>
-                      <a:pPr marL="0" indent="0">
+                      <a:pPr indent="0" marL="0">
                         <a:buNone/>
                       </a:pPr>
                       <a:r>
@@ -10372,7 +10671,7 @@
                     <a:bodyPr/>
                     <a:lstStyle/>
                     <a:p>
-                      <a:pPr marL="0" indent="0">
+                      <a:pPr indent="0" marL="0">
                         <a:buNone/>
                       </a:pPr>
                       <a:r>
@@ -10386,7 +10685,7 @@
                       <a:endParaRPr lang="en-US" sz="1100" dirty="0"/>
                     </a:p>
                     <a:p>
-                      <a:pPr marL="0" indent="0">
+                      <a:pPr indent="0" marL="0">
                         <a:buNone/>
                       </a:pPr>
                       <a:r>
@@ -10439,11 +10738,6 @@
                     </a:lnB>
                   </a:tcPr>
                 </a:tc>
-                <a:extLst>
-                  <a:ext uri="{0D108BD9-81ED-4DB2-BD59-A6C34878D82A}">
-                    <a16:rowId xmlns:a16="http://schemas.microsoft.com/office/drawing/2014/main" val="10005"/>
-                  </a:ext>
-                </a:extLst>
               </a:tr>
             </a:tbl>
           </a:graphicData>
@@ -10470,7 +10764,7 @@
           <a:bodyPr wrap="square" lIns="0" tIns="0" rIns="0" bIns="0" rtlCol="0" anchor="ctr"/>
           <a:lstStyle/>
           <a:p>
-            <a:pPr marL="0" indent="0">
+            <a:pPr indent="0" marL="0">
               <a:buNone/>
             </a:pPr>
             <a:r>
@@ -10505,7 +10799,7 @@
           </a:prstGeom>
           <a:extLst>
             <a:ext uri="{C572A759-6A51-4108-AA02-DFA0A04FC94B}">
-              <ma14:wrappingTextBoxFlag xmlns:ma14="http://schemas.microsoft.com/office/mac/drawingml/2011/main" xmlns="" val="0"/>
+              <ma14:wrappingTextBoxFlag xmlns:ma14="http://schemas.microsoft.com/office/mac/drawingml/2011/main" val="0"/>
             </a:ext>
           </a:extLst>
         </p:spPr>
@@ -10523,7 +10817,7 @@
           <a:p>
             <a:pPr algn="r"/>
             <a:fld id="{F7021451-1387-4CA6-816F-3879F97B5CBC}" type="slidenum">
-              <a:rPr lang="en-US" b="0"/>
+              <a:rPr b="0" lang="en-US"/>
               <a:t>16</a:t>
             </a:fld>
             <a:endParaRPr lang="en-US"/>
@@ -10558,11 +10852,9 @@
       <p:sp>
         <p:nvSpPr>
           <p:cNvPr id="2" name="Text 1"/>
-          <p:cNvSpPr>
-            <a:spLocks noGrp="1"/>
-          </p:cNvSpPr>
+          <p:cNvSpPr/>
           <p:nvPr>
-            <p:ph type="body" idx="101" hasCustomPrompt="1"/>
+            <p:ph idx="101" type="body" hasCustomPrompt="1"/>
           </p:nvPr>
         </p:nvSpPr>
         <p:spPr>
@@ -10580,7 +10872,7 @@
           <a:bodyPr wrap="square" lIns="0" tIns="0" rIns="0" bIns="0" rtlCol="0"/>
           <a:lstStyle/>
           <a:p>
-            <a:pPr marL="0" indent="0">
+            <a:pPr indent="0" marL="0">
               <a:buNone/>
             </a:pPr>
             <a:r>
@@ -10598,11 +10890,9 @@
       <p:sp>
         <p:nvSpPr>
           <p:cNvPr id="3" name="Text 1"/>
-          <p:cNvSpPr>
-            <a:spLocks noGrp="1"/>
-          </p:cNvSpPr>
+          <p:cNvSpPr/>
           <p:nvPr>
-            <p:ph type="title" idx="102" hasCustomPrompt="1"/>
+            <p:ph idx="102" type="title" hasCustomPrompt="1"/>
           </p:nvPr>
         </p:nvSpPr>
         <p:spPr>
@@ -10620,7 +10910,7 @@
           <a:bodyPr wrap="square" lIns="0" tIns="0" rIns="0" bIns="0" rtlCol="0" anchor="t"/>
           <a:lstStyle/>
           <a:p>
-            <a:pPr marL="0" indent="0" algn="l">
+            <a:pPr algn="l" indent="0" marL="0">
               <a:buNone/>
             </a:pPr>
             <a:r>
@@ -10704,7 +10994,7 @@
           <a:bodyPr wrap="square" lIns="0" tIns="0" rIns="0" bIns="0" rtlCol="0" anchor="t"/>
           <a:lstStyle/>
           <a:p>
-            <a:pPr marL="0" indent="0" algn="ctr">
+            <a:pPr algn="ctr" indent="0" marL="0">
               <a:buNone/>
             </a:pPr>
             <a:r>
@@ -10765,7 +11055,7 @@
           <a:bodyPr wrap="square" lIns="0" tIns="0" rIns="0" bIns="0" rtlCol="0" anchor="t"/>
           <a:lstStyle/>
           <a:p>
-            <a:pPr marL="0" indent="0" algn="ctr">
+            <a:pPr algn="ctr" indent="0" marL="0">
               <a:buNone/>
             </a:pPr>
             <a:r>
@@ -10826,7 +11116,7 @@
           <a:bodyPr wrap="square" lIns="0" tIns="0" rIns="0" bIns="0" rtlCol="0" anchor="t"/>
           <a:lstStyle/>
           <a:p>
-            <a:pPr marL="0" indent="0" algn="ctr">
+            <a:pPr algn="ctr" indent="0" marL="0">
               <a:buNone/>
             </a:pPr>
             <a:r>
@@ -10887,7 +11177,7 @@
           <a:bodyPr wrap="square" lIns="0" tIns="0" rIns="0" bIns="0" rtlCol="0" anchor="t"/>
           <a:lstStyle/>
           <a:p>
-            <a:pPr marL="0" indent="0" algn="ctr">
+            <a:pPr algn="ctr" indent="0" marL="0">
               <a:buNone/>
             </a:pPr>
             <a:r>
@@ -10948,7 +11238,7 @@
           <a:bodyPr wrap="square" lIns="0" tIns="0" rIns="0" bIns="0" rtlCol="0" anchor="t"/>
           <a:lstStyle/>
           <a:p>
-            <a:pPr marL="0" indent="0" algn="ctr">
+            <a:pPr algn="ctr" indent="0" marL="0">
               <a:buNone/>
             </a:pPr>
             <a:r>
@@ -10984,7 +11274,7 @@
           <a:bodyPr wrap="square" lIns="0" tIns="0" rIns="0" bIns="0" rtlCol="0" anchor="ctr"/>
           <a:lstStyle/>
           <a:p>
-            <a:pPr marL="0" indent="0">
+            <a:pPr indent="0" marL="0">
               <a:buNone/>
             </a:pPr>
             <a:r>
@@ -11020,7 +11310,7 @@
           <a:bodyPr wrap="square" lIns="0" tIns="0" rIns="0" bIns="0" rtlCol="0" anchor="ctr"/>
           <a:lstStyle/>
           <a:p>
-            <a:pPr marL="0" indent="0" algn="ctr">
+            <a:pPr algn="ctr" indent="0" marL="0">
               <a:buNone/>
             </a:pPr>
             <a:r>
@@ -11056,7 +11346,7 @@
           <a:bodyPr wrap="square" lIns="0" tIns="0" rIns="0" bIns="0" rtlCol="0" anchor="ctr"/>
           <a:lstStyle/>
           <a:p>
-            <a:pPr marL="0" indent="0" algn="ctr">
+            <a:pPr algn="ctr" indent="0" marL="0">
               <a:buNone/>
             </a:pPr>
             <a:r>
@@ -11092,7 +11382,7 @@
           <a:bodyPr wrap="square" lIns="0" tIns="0" rIns="0" bIns="0" rtlCol="0" anchor="ctr"/>
           <a:lstStyle/>
           <a:p>
-            <a:pPr marL="0" indent="0" algn="ctr">
+            <a:pPr algn="ctr" indent="0" marL="0">
               <a:buNone/>
             </a:pPr>
             <a:r>
@@ -11128,7 +11418,7 @@
           <a:bodyPr wrap="square" lIns="0" tIns="0" rIns="0" bIns="0" rtlCol="0" anchor="ctr"/>
           <a:lstStyle/>
           <a:p>
-            <a:pPr marL="0" indent="0" algn="ctr">
+            <a:pPr algn="ctr" indent="0" marL="0">
               <a:buNone/>
             </a:pPr>
             <a:r>
@@ -11164,7 +11454,7 @@
           <a:bodyPr wrap="square" lIns="0" tIns="0" rIns="0" bIns="0" rtlCol="0" anchor="ctr"/>
           <a:lstStyle/>
           <a:p>
-            <a:pPr marL="0" indent="0" algn="ctr">
+            <a:pPr algn="ctr" indent="0" marL="0">
               <a:buNone/>
             </a:pPr>
             <a:r>
@@ -11200,7 +11490,7 @@
           <a:bodyPr wrap="square" lIns="0" tIns="0" rIns="0" bIns="0" rtlCol="0" anchor="ctr"/>
           <a:lstStyle/>
           <a:p>
-            <a:pPr marL="0" indent="0" algn="ctr">
+            <a:pPr algn="ctr" indent="0" marL="0">
               <a:buNone/>
             </a:pPr>
             <a:r>
@@ -11236,7 +11526,7 @@
           <a:bodyPr wrap="square" lIns="0" tIns="0" rIns="0" bIns="0" rtlCol="0" anchor="ctr"/>
           <a:lstStyle/>
           <a:p>
-            <a:pPr marL="0" indent="0" algn="ctr">
+            <a:pPr algn="ctr" indent="0" marL="0">
               <a:buNone/>
             </a:pPr>
             <a:r>
@@ -11272,7 +11562,7 @@
           <a:bodyPr wrap="square" lIns="0" tIns="0" rIns="0" bIns="0" rtlCol="0" anchor="ctr"/>
           <a:lstStyle/>
           <a:p>
-            <a:pPr marL="0" indent="0">
+            <a:pPr indent="0" marL="0">
               <a:buNone/>
             </a:pPr>
             <a:r>
@@ -11331,7 +11621,7 @@
           <a:bodyPr wrap="square" lIns="0" tIns="0" rIns="0" bIns="0" rtlCol="0" anchor="ctr"/>
           <a:lstStyle/>
           <a:p>
-            <a:pPr marL="0" indent="0">
+            <a:pPr indent="0" marL="0">
               <a:buNone/>
             </a:pPr>
             <a:r>
@@ -11367,7 +11657,7 @@
           <a:bodyPr wrap="square" lIns="0" tIns="0" rIns="0" bIns="0" rtlCol="0" anchor="ctr"/>
           <a:lstStyle/>
           <a:p>
-            <a:pPr marL="0" indent="0">
+            <a:pPr indent="0" marL="0">
               <a:buNone/>
             </a:pPr>
             <a:r>
@@ -11614,7 +11904,7 @@
           <a:bodyPr wrap="square" lIns="0" tIns="0" rIns="0" bIns="0" rtlCol="0" anchor="ctr"/>
           <a:lstStyle/>
           <a:p>
-            <a:pPr marL="0" indent="0">
+            <a:pPr indent="0" marL="0">
               <a:buNone/>
             </a:pPr>
             <a:r>
@@ -11650,7 +11940,7 @@
           <a:bodyPr wrap="square" lIns="0" tIns="0" rIns="0" bIns="0" rtlCol="0" anchor="ctr"/>
           <a:lstStyle/>
           <a:p>
-            <a:pPr marL="0" indent="0">
+            <a:pPr indent="0" marL="0">
               <a:buNone/>
             </a:pPr>
             <a:r>
@@ -11897,7 +12187,7 @@
           <a:bodyPr wrap="square" lIns="0" tIns="0" rIns="0" bIns="0" rtlCol="0" anchor="ctr"/>
           <a:lstStyle/>
           <a:p>
-            <a:pPr marL="0" indent="0">
+            <a:pPr indent="0" marL="0">
               <a:buNone/>
             </a:pPr>
             <a:r>
@@ -11933,7 +12223,7 @@
           <a:bodyPr wrap="square" lIns="0" tIns="0" rIns="0" bIns="0" rtlCol="0" anchor="ctr"/>
           <a:lstStyle/>
           <a:p>
-            <a:pPr marL="0" indent="0">
+            <a:pPr indent="0" marL="0">
               <a:buNone/>
             </a:pPr>
             <a:r>
@@ -12180,7 +12470,7 @@
           <a:bodyPr wrap="square" lIns="0" tIns="0" rIns="0" bIns="0" rtlCol="0" anchor="ctr"/>
           <a:lstStyle/>
           <a:p>
-            <a:pPr marL="0" indent="0">
+            <a:pPr indent="0" marL="0">
               <a:buNone/>
             </a:pPr>
             <a:r>
@@ -12216,7 +12506,7 @@
           <a:bodyPr wrap="square" lIns="0" tIns="0" rIns="0" bIns="0" rtlCol="0" anchor="ctr"/>
           <a:lstStyle/>
           <a:p>
-            <a:pPr marL="0" indent="0">
+            <a:pPr indent="0" marL="0">
               <a:buNone/>
             </a:pPr>
             <a:r>
@@ -12463,7 +12753,7 @@
           <a:bodyPr wrap="square" lIns="0" tIns="0" rIns="0" bIns="0" rtlCol="0" anchor="ctr"/>
           <a:lstStyle/>
           <a:p>
-            <a:pPr marL="0" indent="0">
+            <a:pPr indent="0" marL="0">
               <a:buNone/>
             </a:pPr>
             <a:r>
@@ -12499,7 +12789,7 @@
           <a:bodyPr wrap="square" lIns="0" tIns="0" rIns="0" bIns="0" rtlCol="0" anchor="ctr"/>
           <a:lstStyle/>
           <a:p>
-            <a:pPr marL="0" indent="0">
+            <a:pPr indent="0" marL="0">
               <a:buNone/>
             </a:pPr>
             <a:r>
@@ -12746,7 +13036,7 @@
           <a:bodyPr wrap="square" lIns="0" tIns="0" rIns="0" bIns="0" rtlCol="0" anchor="ctr"/>
           <a:lstStyle/>
           <a:p>
-            <a:pPr marL="0" indent="0">
+            <a:pPr indent="0" marL="0">
               <a:buNone/>
             </a:pPr>
             <a:r>
@@ -12782,7 +13072,7 @@
           <a:bodyPr wrap="square" lIns="0" tIns="0" rIns="0" bIns="0" rtlCol="0" anchor="ctr"/>
           <a:lstStyle/>
           <a:p>
-            <a:pPr marL="0" indent="0">
+            <a:pPr indent="0" marL="0">
               <a:buNone/>
             </a:pPr>
             <a:r>
@@ -13029,7 +13319,7 @@
           <a:bodyPr wrap="square" lIns="0" tIns="0" rIns="0" bIns="0" rtlCol="0" anchor="ctr"/>
           <a:lstStyle/>
           <a:p>
-            <a:pPr marL="0" indent="0">
+            <a:pPr indent="0" marL="0">
               <a:buNone/>
             </a:pPr>
             <a:r>
@@ -13065,7 +13355,7 @@
           <a:bodyPr wrap="square" lIns="0" tIns="0" rIns="0" bIns="0" rtlCol="0" anchor="ctr"/>
           <a:lstStyle/>
           <a:p>
-            <a:pPr marL="0" indent="0">
+            <a:pPr indent="0" marL="0">
               <a:buNone/>
             </a:pPr>
             <a:r>
@@ -13312,7 +13602,7 @@
           <a:bodyPr wrap="square" lIns="0" tIns="0" rIns="0" bIns="0" rtlCol="0" anchor="ctr"/>
           <a:lstStyle/>
           <a:p>
-            <a:pPr marL="0" indent="0">
+            <a:pPr indent="0" marL="0">
               <a:buNone/>
             </a:pPr>
             <a:r>
@@ -13329,7 +13619,7 @@
       </p:sp>
       <p:sp>
         <p:nvSpPr>
-          <p:cNvPr id="103" name="Slide Number Placeholder 0"/>
+          <p:cNvPr id="25" name="Slide Number Placeholder 0"/>
           <p:cNvSpPr>
             <a:spLocks noGrp="1"/>
           </p:cNvSpPr>
@@ -13347,7 +13637,7 @@
           </a:prstGeom>
           <a:extLst>
             <a:ext uri="{C572A759-6A51-4108-AA02-DFA0A04FC94B}">
-              <ma14:wrappingTextBoxFlag xmlns:ma14="http://schemas.microsoft.com/office/mac/drawingml/2011/main" xmlns="" val="0"/>
+              <ma14:wrappingTextBoxFlag xmlns:ma14="http://schemas.microsoft.com/office/mac/drawingml/2011/main" val="0"/>
             </a:ext>
           </a:extLst>
         </p:spPr>
@@ -13365,7 +13655,7 @@
           <a:p>
             <a:pPr algn="r"/>
             <a:fld id="{F7021451-1387-4CA6-816F-3879F97B5CBC}" type="slidenum">
-              <a:rPr lang="en-US" b="0"/>
+              <a:rPr b="0" lang="en-US"/>
               <a:t>17</a:t>
             </a:fld>
             <a:endParaRPr lang="en-US"/>
@@ -13400,11 +13690,9 @@
       <p:sp>
         <p:nvSpPr>
           <p:cNvPr id="2" name="Text 0"/>
-          <p:cNvSpPr>
-            <a:spLocks noGrp="1"/>
-          </p:cNvSpPr>
+          <p:cNvSpPr/>
           <p:nvPr>
-            <p:ph type="title" idx="100" hasCustomPrompt="1"/>
+            <p:ph idx="100" type="title" hasCustomPrompt="1"/>
           </p:nvPr>
         </p:nvSpPr>
         <p:spPr>
@@ -13422,7 +13710,7 @@
           <a:bodyPr wrap="square" lIns="0" tIns="0" rIns="0" bIns="0" rtlCol="0" anchor="t"/>
           <a:lstStyle/>
           <a:p>
-            <a:pPr marL="0" indent="0" algn="l">
+            <a:pPr algn="l" indent="0" marL="0">
               <a:buNone/>
             </a:pPr>
             <a:r>
@@ -13458,7 +13746,7 @@
           <a:bodyPr wrap="square" lIns="0" tIns="0" rIns="0" bIns="0" rtlCol="0" anchor="ctr"/>
           <a:lstStyle/>
           <a:p>
-            <a:pPr marL="0" indent="0">
+            <a:pPr indent="0" marL="0">
               <a:buNone/>
             </a:pPr>
             <a:r>
@@ -13469,6 +13757,9 @@
               </a:rPr>
               <a:t>이지훈</a:t>
             </a:r>
+            <a:pPr indent="0" marL="0">
+              <a:buNone/>
+            </a:pPr>
             <a:r>
               <a:rPr lang="en-US" sz="1000" dirty="0">
                 <a:solidFill>
@@ -13603,7 +13894,7 @@
           <a:bodyPr wrap="square" lIns="0" tIns="0" rIns="0" bIns="0" rtlCol="0" anchor="ctr"/>
           <a:lstStyle/>
           <a:p>
-            <a:pPr marL="0" indent="0">
+            <a:pPr indent="0" marL="0">
               <a:buNone/>
             </a:pPr>
             <a:r>
@@ -13614,6 +13905,9 @@
               </a:rPr>
               <a:t>손유호</a:t>
             </a:r>
+            <a:pPr indent="0" marL="0">
+              <a:buNone/>
+            </a:pPr>
             <a:r>
               <a:rPr lang="en-US" sz="1000" dirty="0">
                 <a:solidFill>
@@ -13748,7 +14042,7 @@
           <a:bodyPr wrap="square" lIns="0" tIns="0" rIns="0" bIns="0" rtlCol="0" anchor="ctr"/>
           <a:lstStyle/>
           <a:p>
-            <a:pPr marL="0" indent="0">
+            <a:pPr indent="0" marL="0">
               <a:buNone/>
             </a:pPr>
             <a:r>
@@ -13759,6 +14053,9 @@
               </a:rPr>
               <a:t>박명진</a:t>
             </a:r>
+            <a:pPr indent="0" marL="0">
+              <a:buNone/>
+            </a:pPr>
             <a:r>
               <a:rPr lang="en-US" sz="1000" dirty="0">
                 <a:solidFill>
@@ -13868,7 +14165,7 @@
           <a:bodyPr wrap="square" lIns="0" tIns="0" rIns="0" bIns="0" rtlCol="0" anchor="ctr"/>
           <a:lstStyle/>
           <a:p>
-            <a:pPr marL="0" indent="0">
+            <a:pPr indent="0" marL="0">
               <a:buNone/>
             </a:pPr>
             <a:r>
@@ -13911,11 +14208,9 @@
       <p:sp>
         <p:nvSpPr>
           <p:cNvPr id="2" name="Text 0"/>
-          <p:cNvSpPr>
-            <a:spLocks noGrp="1"/>
-          </p:cNvSpPr>
+          <p:cNvSpPr/>
           <p:nvPr>
-            <p:ph type="title" idx="100" hasCustomPrompt="1"/>
+            <p:ph idx="100" type="title" hasCustomPrompt="1"/>
           </p:nvPr>
         </p:nvSpPr>
         <p:spPr>
@@ -13933,7 +14228,7 @@
           <a:bodyPr wrap="square" lIns="0" tIns="0" rIns="0" bIns="0" rtlCol="0" anchor="t"/>
           <a:lstStyle/>
           <a:p>
-            <a:pPr marL="0" indent="0" algn="l">
+            <a:pPr algn="l" indent="0" marL="0">
               <a:buNone/>
             </a:pPr>
             <a:r>
@@ -13994,7 +14289,7 @@
           <a:bodyPr wrap="square" lIns="0" tIns="0" rIns="0" bIns="0" rtlCol="0" anchor="ctr"/>
           <a:lstStyle/>
           <a:p>
-            <a:pPr marL="0" indent="0">
+            <a:pPr indent="0" marL="0">
               <a:buNone/>
             </a:pPr>
             <a:r>
@@ -14030,7 +14325,7 @@
           <a:bodyPr wrap="square" lIns="0" tIns="0" rIns="0" bIns="0" rtlCol="0" anchor="ctr"/>
           <a:lstStyle/>
           <a:p>
-            <a:pPr marL="0" indent="0" algn="r">
+            <a:pPr algn="r" indent="0" marL="0">
               <a:buNone/>
             </a:pPr>
             <a:r>
@@ -14044,7 +14339,7 @@
             <a:endParaRPr lang="en-US" sz="1100" dirty="0"/>
           </a:p>
           <a:p>
-            <a:pPr marL="0" indent="0" algn="r">
+            <a:pPr algn="r" indent="0" marL="0">
               <a:buNone/>
             </a:pPr>
             <a:r>
@@ -14105,7 +14400,7 @@
           <a:bodyPr wrap="square" lIns="0" tIns="0" rIns="0" bIns="0" rtlCol="0" anchor="ctr"/>
           <a:lstStyle/>
           <a:p>
-            <a:pPr marL="0" indent="0">
+            <a:pPr indent="0" marL="0">
               <a:buNone/>
             </a:pPr>
             <a:r>
@@ -14141,7 +14436,7 @@
           <a:bodyPr wrap="square" lIns="0" tIns="0" rIns="0" bIns="0" rtlCol="0" anchor="ctr"/>
           <a:lstStyle/>
           <a:p>
-            <a:pPr marL="0" indent="0" algn="r">
+            <a:pPr algn="r" indent="0" marL="0">
               <a:buNone/>
             </a:pPr>
             <a:r>
@@ -14202,7 +14497,7 @@
           <a:bodyPr wrap="square" lIns="0" tIns="0" rIns="0" bIns="0" rtlCol="0" anchor="ctr"/>
           <a:lstStyle/>
           <a:p>
-            <a:pPr marL="0" indent="0">
+            <a:pPr indent="0" marL="0">
               <a:buNone/>
             </a:pPr>
             <a:r>
@@ -14238,7 +14533,7 @@
           <a:bodyPr wrap="square" lIns="0" tIns="0" rIns="0" bIns="0" rtlCol="0" anchor="ctr"/>
           <a:lstStyle/>
           <a:p>
-            <a:pPr marL="0" indent="0" algn="r">
+            <a:pPr algn="r" indent="0" marL="0">
               <a:buNone/>
             </a:pPr>
             <a:r>
@@ -14305,14 +14600,14 @@
       </p:sp>
       <p:pic>
         <p:nvPicPr>
-          <p:cNvPr id="14" name="앱 설치" descr="C:\Users\user\Desktop\albaguard기술창업\docs\report_src\qr_app.png"/>
+          <p:cNvPr id="14" name="앱 설치" descr="C:\Users\user\Desktop\albaguard기술창업\docs\report_src\qr_app.png">    </p:cNvPr>
           <p:cNvPicPr>
             <a:picLocks noChangeAspect="1"/>
           </p:cNvPicPr>
           <p:nvPr/>
         </p:nvPicPr>
         <p:blipFill>
-          <a:blip r:embed="rId3"/>
+          <a:blip r:embed="rId1"/>
           <a:stretch>
             <a:fillRect/>
           </a:stretch>
@@ -14348,7 +14643,7 @@
           <a:bodyPr wrap="square" lIns="0" tIns="0" rIns="0" bIns="0" rtlCol="0" anchor="ctr"/>
           <a:lstStyle/>
           <a:p>
-            <a:pPr marL="0" indent="0" algn="ctr">
+            <a:pPr algn="ctr" indent="0" marL="0">
               <a:buNone/>
             </a:pPr>
             <a:r>
@@ -14384,7 +14679,7 @@
           <a:bodyPr wrap="square" lIns="0" tIns="0" rIns="0" bIns="0" rtlCol="0" anchor="t"/>
           <a:lstStyle/>
           <a:p>
-            <a:pPr marL="0" indent="0" algn="ctr">
+            <a:pPr algn="ctr" indent="0" marL="0">
               <a:buNone/>
             </a:pPr>
             <a:r>
@@ -14426,14 +14721,14 @@
       </p:sp>
       <p:pic>
         <p:nvPicPr>
-          <p:cNvPr id="18" name="설문 3분" descr="C:\Users\user\Desktop\albaguard기술창업\docs\report_src\qr_survey.png"/>
+          <p:cNvPr id="18" name="설문 3분" descr="C:\Users\user\Desktop\albaguard기술창업\docs\report_src\qr_survey.png">    </p:cNvPr>
           <p:cNvPicPr>
             <a:picLocks noChangeAspect="1"/>
           </p:cNvPicPr>
           <p:nvPr/>
         </p:nvPicPr>
         <p:blipFill>
-          <a:blip r:embed="rId4"/>
+          <a:blip r:embed="rId2"/>
           <a:stretch>
             <a:fillRect/>
           </a:stretch>
@@ -14469,7 +14764,7 @@
           <a:bodyPr wrap="square" lIns="0" tIns="0" rIns="0" bIns="0" rtlCol="0" anchor="ctr"/>
           <a:lstStyle/>
           <a:p>
-            <a:pPr marL="0" indent="0" algn="ctr">
+            <a:pPr algn="ctr" indent="0" marL="0">
               <a:buNone/>
             </a:pPr>
             <a:r>
@@ -14505,7 +14800,7 @@
           <a:bodyPr wrap="square" lIns="0" tIns="0" rIns="0" bIns="0" rtlCol="0" anchor="t"/>
           <a:lstStyle/>
           <a:p>
-            <a:pPr marL="0" indent="0" algn="ctr">
+            <a:pPr algn="ctr" indent="0" marL="0">
               <a:buNone/>
             </a:pPr>
             <a:r>
@@ -14541,7 +14836,7 @@
           <a:bodyPr wrap="square" lIns="0" tIns="0" rIns="0" bIns="0" rtlCol="0" anchor="ctr"/>
           <a:lstStyle/>
           <a:p>
-            <a:pPr marL="0" indent="0">
+            <a:pPr indent="0" marL="0">
               <a:buNone/>
             </a:pPr>
             <a:r>
@@ -14577,7 +14872,7 @@
           <a:bodyPr wrap="square" lIns="0" tIns="0" rIns="0" bIns="0" rtlCol="0" anchor="ctr"/>
           <a:lstStyle/>
           <a:p>
-            <a:pPr marL="0" indent="0">
+            <a:pPr indent="0" marL="0">
               <a:buNone/>
             </a:pPr>
             <a:r>
@@ -14620,11 +14915,9 @@
       <p:sp>
         <p:nvSpPr>
           <p:cNvPr id="2" name="Text 1"/>
-          <p:cNvSpPr>
-            <a:spLocks noGrp="1"/>
-          </p:cNvSpPr>
+          <p:cNvSpPr/>
           <p:nvPr>
-            <p:ph type="body" idx="101" hasCustomPrompt="1"/>
+            <p:ph idx="101" type="body" hasCustomPrompt="1"/>
           </p:nvPr>
         </p:nvSpPr>
         <p:spPr>
@@ -14642,7 +14935,7 @@
           <a:bodyPr wrap="square" lIns="0" tIns="0" rIns="0" bIns="0" rtlCol="0"/>
           <a:lstStyle/>
           <a:p>
-            <a:pPr marL="0" indent="0">
+            <a:pPr indent="0" marL="0">
               <a:buNone/>
             </a:pPr>
             <a:r>
@@ -14660,11 +14953,9 @@
       <p:sp>
         <p:nvSpPr>
           <p:cNvPr id="3" name="Text 1"/>
-          <p:cNvSpPr>
-            <a:spLocks noGrp="1"/>
-          </p:cNvSpPr>
+          <p:cNvSpPr/>
           <p:nvPr>
-            <p:ph type="title" idx="102" hasCustomPrompt="1"/>
+            <p:ph idx="102" type="title" hasCustomPrompt="1"/>
           </p:nvPr>
         </p:nvSpPr>
         <p:spPr>
@@ -14682,7 +14973,7 @@
           <a:bodyPr wrap="square" lIns="0" tIns="0" rIns="0" bIns="0" rtlCol="0" anchor="t"/>
           <a:lstStyle/>
           <a:p>
-            <a:pPr marL="0" indent="0" algn="l">
+            <a:pPr algn="l" indent="0" marL="0">
               <a:buNone/>
             </a:pPr>
             <a:r>
@@ -14718,7 +15009,7 @@
           <a:bodyPr wrap="square" lIns="0" tIns="0" rIns="0" bIns="0" rtlCol="0" anchor="ctr"/>
           <a:lstStyle/>
           <a:p>
-            <a:pPr marL="0" indent="0">
+            <a:pPr indent="0" marL="0">
               <a:buNone/>
             </a:pPr>
             <a:r>
@@ -14732,7 +15023,7 @@
             <a:endParaRPr lang="en-US" sz="1300" dirty="0"/>
           </a:p>
           <a:p>
-            <a:pPr marL="0" indent="0">
+            <a:pPr indent="0" marL="0">
               <a:buNone/>
             </a:pPr>
             <a:r>
@@ -14768,7 +15059,7 @@
           <a:bodyPr wrap="square" lIns="0" tIns="0" rIns="0" bIns="0" rtlCol="0" anchor="ctr"/>
           <a:lstStyle/>
           <a:p>
-            <a:pPr marL="0" indent="0" algn="r">
+            <a:pPr algn="r" indent="0" marL="0">
               <a:buNone/>
             </a:pPr>
             <a:r>
@@ -14827,7 +15118,7 @@
           <a:bodyPr wrap="square" lIns="0" tIns="0" rIns="0" bIns="0" rtlCol="0" anchor="ctr"/>
           <a:lstStyle/>
           <a:p>
-            <a:pPr marL="0" indent="0">
+            <a:pPr indent="0" marL="0">
               <a:buNone/>
             </a:pPr>
             <a:r>
@@ -14841,7 +15132,7 @@
             <a:endParaRPr lang="en-US" sz="1300" dirty="0"/>
           </a:p>
           <a:p>
-            <a:pPr marL="0" indent="0">
+            <a:pPr indent="0" marL="0">
               <a:buNone/>
             </a:pPr>
             <a:r>
@@ -14877,7 +15168,7 @@
           <a:bodyPr wrap="square" lIns="0" tIns="0" rIns="0" bIns="0" rtlCol="0" anchor="ctr"/>
           <a:lstStyle/>
           <a:p>
-            <a:pPr marL="0" indent="0" algn="r">
+            <a:pPr algn="r" indent="0" marL="0">
               <a:buNone/>
             </a:pPr>
             <a:r>
@@ -14936,7 +15227,7 @@
           <a:bodyPr wrap="square" lIns="0" tIns="0" rIns="0" bIns="0" rtlCol="0" anchor="ctr"/>
           <a:lstStyle/>
           <a:p>
-            <a:pPr marL="0" indent="0">
+            <a:pPr indent="0" marL="0">
               <a:buNone/>
             </a:pPr>
             <a:r>
@@ -14950,7 +15241,7 @@
             <a:endParaRPr lang="en-US" sz="1300" dirty="0"/>
           </a:p>
           <a:p>
-            <a:pPr marL="0" indent="0">
+            <a:pPr indent="0" marL="0">
               <a:buNone/>
             </a:pPr>
             <a:r>
@@ -14986,7 +15277,7 @@
           <a:bodyPr wrap="square" lIns="0" tIns="0" rIns="0" bIns="0" rtlCol="0" anchor="ctr"/>
           <a:lstStyle/>
           <a:p>
-            <a:pPr marL="0" indent="0" algn="r">
+            <a:pPr algn="r" indent="0" marL="0">
               <a:buNone/>
             </a:pPr>
             <a:r>
@@ -15045,7 +15336,7 @@
           <a:bodyPr wrap="square" lIns="0" tIns="0" rIns="0" bIns="0" rtlCol="0" anchor="ctr"/>
           <a:lstStyle/>
           <a:p>
-            <a:pPr marL="0" indent="0">
+            <a:pPr indent="0" marL="0">
               <a:buNone/>
             </a:pPr>
             <a:r>
@@ -15081,7 +15372,7 @@
           <a:bodyPr wrap="square" lIns="0" tIns="0" rIns="0" bIns="0" rtlCol="0" anchor="ctr"/>
           <a:lstStyle/>
           <a:p>
-            <a:pPr marL="0" indent="0">
+            <a:pPr indent="0" marL="0">
               <a:buNone/>
             </a:pPr>
             <a:r>
@@ -15117,7 +15408,7 @@
           <a:bodyPr wrap="square" lIns="0" tIns="0" rIns="0" bIns="0" rtlCol="0" anchor="ctr"/>
           <a:lstStyle/>
           <a:p>
-            <a:pPr marL="0" indent="0">
+            <a:pPr indent="0" marL="0">
               <a:buNone/>
             </a:pPr>
             <a:r>
@@ -15134,14 +15425,14 @@
       </p:sp>
       <p:pic>
         <p:nvPicPr>
-          <p:cNvPr id="16" name="앱 설치" descr="C:\Users\user\Desktop\albaguard기술창업\docs\report_src\qr_app.png"/>
+          <p:cNvPr id="16" name="앱 설치" descr="C:\Users\user\Desktop\albaguard기술창업\docs\report_src\qr_app.png">    </p:cNvPr>
           <p:cNvPicPr>
             <a:picLocks noChangeAspect="1"/>
           </p:cNvPicPr>
           <p:nvPr/>
         </p:nvPicPr>
         <p:blipFill>
-          <a:blip r:embed="rId3"/>
+          <a:blip r:embed="rId1"/>
           <a:stretch>
             <a:fillRect/>
           </a:stretch>
@@ -15177,7 +15468,7 @@
           <a:bodyPr wrap="square" lIns="0" tIns="0" rIns="0" bIns="0" rtlCol="0" anchor="ctr"/>
           <a:lstStyle/>
           <a:p>
-            <a:pPr marL="0" indent="0" algn="ctr">
+            <a:pPr algn="ctr" indent="0" marL="0">
               <a:buNone/>
             </a:pPr>
             <a:r>
@@ -15213,7 +15504,7 @@
           <a:bodyPr wrap="square" lIns="0" tIns="0" rIns="0" bIns="0" rtlCol="0" anchor="t"/>
           <a:lstStyle/>
           <a:p>
-            <a:pPr marL="0" indent="0" algn="ctr">
+            <a:pPr algn="ctr" indent="0" marL="0">
               <a:buNone/>
             </a:pPr>
             <a:r>
@@ -15227,7 +15518,7 @@
             <a:endParaRPr lang="en-US" sz="900" dirty="0"/>
           </a:p>
           <a:p>
-            <a:pPr marL="0" indent="0" algn="ctr">
+            <a:pPr algn="ctr" indent="0" marL="0">
               <a:buNone/>
             </a:pPr>
             <a:r>
@@ -15244,14 +15535,14 @@
       </p:sp>
       <p:pic>
         <p:nvPicPr>
-          <p:cNvPr id="19" name="설문 3분" descr="C:\Users\user\Desktop\albaguard기술창업\docs\report_src\qr_survey.png"/>
+          <p:cNvPr id="19" name="설문 3분" descr="C:\Users\user\Desktop\albaguard기술창업\docs\report_src\qr_survey.png">    </p:cNvPr>
           <p:cNvPicPr>
             <a:picLocks noChangeAspect="1"/>
           </p:cNvPicPr>
           <p:nvPr/>
         </p:nvPicPr>
         <p:blipFill>
-          <a:blip r:embed="rId4"/>
+          <a:blip r:embed="rId2"/>
           <a:stretch>
             <a:fillRect/>
           </a:stretch>
@@ -15287,7 +15578,7 @@
           <a:bodyPr wrap="square" lIns="0" tIns="0" rIns="0" bIns="0" rtlCol="0" anchor="ctr"/>
           <a:lstStyle/>
           <a:p>
-            <a:pPr marL="0" indent="0" algn="ctr">
+            <a:pPr algn="ctr" indent="0" marL="0">
               <a:buNone/>
             </a:pPr>
             <a:r>
@@ -15323,7 +15614,7 @@
           <a:bodyPr wrap="square" lIns="0" tIns="0" rIns="0" bIns="0" rtlCol="0" anchor="t"/>
           <a:lstStyle/>
           <a:p>
-            <a:pPr marL="0" indent="0" algn="ctr">
+            <a:pPr algn="ctr" indent="0" marL="0">
               <a:buNone/>
             </a:pPr>
             <a:r>
@@ -15337,7 +15628,7 @@
             <a:endParaRPr lang="en-US" sz="900" dirty="0"/>
           </a:p>
           <a:p>
-            <a:pPr marL="0" indent="0" algn="ctr">
+            <a:pPr algn="ctr" indent="0" marL="0">
               <a:buNone/>
             </a:pPr>
             <a:r>
@@ -15373,7 +15664,7 @@
           <a:bodyPr wrap="square" lIns="0" tIns="0" rIns="0" bIns="0" rtlCol="0" anchor="ctr"/>
           <a:lstStyle/>
           <a:p>
-            <a:pPr marL="0" indent="0" algn="ctr">
+            <a:pPr algn="ctr" indent="0" marL="0">
               <a:buNone/>
             </a:pPr>
             <a:r>
@@ -15408,7 +15699,7 @@
           </a:prstGeom>
           <a:extLst>
             <a:ext uri="{C572A759-6A51-4108-AA02-DFA0A04FC94B}">
-              <ma14:wrappingTextBoxFlag xmlns:ma14="http://schemas.microsoft.com/office/mac/drawingml/2011/main" xmlns="" val="0"/>
+              <ma14:wrappingTextBoxFlag xmlns:ma14="http://schemas.microsoft.com/office/mac/drawingml/2011/main" val="0"/>
             </a:ext>
           </a:extLst>
         </p:spPr>
@@ -15426,7 +15717,7 @@
           <a:p>
             <a:pPr algn="r"/>
             <a:fld id="{F7021451-1387-4CA6-816F-3879F97B5CBC}" type="slidenum">
-              <a:rPr lang="en-US" b="0"/>
+              <a:rPr b="0" lang="en-US"/>
               <a:t>2</a:t>
             </a:fld>
             <a:endParaRPr lang="en-US"/>
@@ -15461,11 +15752,9 @@
       <p:sp>
         <p:nvSpPr>
           <p:cNvPr id="2" name="Text 1"/>
-          <p:cNvSpPr>
-            <a:spLocks noGrp="1"/>
-          </p:cNvSpPr>
+          <p:cNvSpPr/>
           <p:nvPr>
-            <p:ph type="body" idx="101" hasCustomPrompt="1"/>
+            <p:ph idx="101" type="body" hasCustomPrompt="1"/>
           </p:nvPr>
         </p:nvSpPr>
         <p:spPr>
@@ -15483,7 +15772,7 @@
           <a:bodyPr wrap="square" lIns="0" tIns="0" rIns="0" bIns="0" rtlCol="0"/>
           <a:lstStyle/>
           <a:p>
-            <a:pPr marL="0" indent="0">
+            <a:pPr indent="0" marL="0">
               <a:buNone/>
             </a:pPr>
             <a:r>
@@ -15501,11 +15790,9 @@
       <p:sp>
         <p:nvSpPr>
           <p:cNvPr id="3" name="Text 1"/>
-          <p:cNvSpPr>
-            <a:spLocks noGrp="1"/>
-          </p:cNvSpPr>
+          <p:cNvSpPr/>
           <p:nvPr>
-            <p:ph type="title" idx="102" hasCustomPrompt="1"/>
+            <p:ph idx="102" type="title" hasCustomPrompt="1"/>
           </p:nvPr>
         </p:nvSpPr>
         <p:spPr>
@@ -15523,7 +15810,7 @@
           <a:bodyPr wrap="square" lIns="0" tIns="0" rIns="0" bIns="0" rtlCol="0" anchor="t"/>
           <a:lstStyle/>
           <a:p>
-            <a:pPr marL="0" indent="0" algn="l">
+            <a:pPr algn="l" indent="0" marL="0">
               <a:buNone/>
             </a:pPr>
             <a:r>
@@ -15586,7 +15873,7 @@
           <a:bodyPr wrap="square" lIns="0" tIns="0" rIns="0" bIns="0" rtlCol="0" anchor="ctr"/>
           <a:lstStyle/>
           <a:p>
-            <a:pPr marL="0" indent="0">
+            <a:pPr indent="0" marL="0">
               <a:buNone/>
             </a:pPr>
             <a:r>
@@ -15597,6 +15884,9 @@
               </a:rPr>
               <a:t>타깃  </a:t>
             </a:r>
+            <a:pPr indent="0" marL="0">
+              <a:buNone/>
+            </a:pPr>
             <a:r>
               <a:rPr lang="en-US" sz="1150" dirty="0">
                 <a:solidFill>
@@ -15630,7 +15920,7 @@
           <a:bodyPr wrap="square" lIns="0" tIns="0" rIns="0" bIns="0" rtlCol="0" anchor="b"/>
           <a:lstStyle/>
           <a:p>
-            <a:pPr marL="0" indent="0">
+            <a:pPr indent="0" marL="0">
               <a:buNone/>
             </a:pPr>
             <a:r>
@@ -15666,7 +15956,7 @@
           <a:bodyPr wrap="square" lIns="0" tIns="0" rIns="0" bIns="0" rtlCol="0" anchor="t"/>
           <a:lstStyle/>
           <a:p>
-            <a:pPr marL="0" indent="0">
+            <a:pPr indent="0" marL="0">
               <a:buNone/>
             </a:pPr>
             <a:r>
@@ -15702,7 +15992,7 @@
           <a:bodyPr wrap="square" lIns="0" tIns="0" rIns="0" bIns="0" rtlCol="0" anchor="t"/>
           <a:lstStyle/>
           <a:p>
-            <a:pPr marL="0" indent="0">
+            <a:pPr indent="0" marL="0">
               <a:buNone/>
             </a:pPr>
             <a:r>
@@ -15786,7 +16076,7 @@
           <a:bodyPr wrap="square" lIns="0" tIns="0" rIns="0" bIns="0" rtlCol="0" anchor="ctr"/>
           <a:lstStyle/>
           <a:p>
-            <a:pPr marL="0" indent="0" algn="ctr">
+            <a:pPr algn="ctr" indent="0" marL="0">
               <a:buNone/>
             </a:pPr>
             <a:r>
@@ -15822,7 +16112,7 @@
           <a:bodyPr wrap="square" lIns="0" tIns="0" rIns="0" bIns="0" rtlCol="0" anchor="t"/>
           <a:lstStyle/>
           <a:p>
-            <a:pPr marL="0" indent="0">
+            <a:pPr indent="0" marL="0">
               <a:buNone/>
             </a:pPr>
             <a:r>
@@ -15836,7 +16126,7 @@
             <a:endParaRPr lang="en-US" sz="1400" dirty="0"/>
           </a:p>
           <a:p>
-            <a:pPr marL="0" indent="0">
+            <a:pPr indent="0" marL="0">
               <a:buNone/>
             </a:pPr>
             <a:r>
@@ -15872,7 +16162,7 @@
           <a:bodyPr wrap="square" lIns="0" tIns="0" rIns="0" bIns="0" rtlCol="0" anchor="b"/>
           <a:lstStyle/>
           <a:p>
-            <a:pPr marL="0" indent="0">
+            <a:pPr indent="0" marL="0">
               <a:buNone/>
             </a:pPr>
             <a:r>
@@ -15908,7 +16198,7 @@
           <a:bodyPr wrap="square" lIns="0" tIns="0" rIns="0" bIns="0" rtlCol="0" anchor="t"/>
           <a:lstStyle/>
           <a:p>
-            <a:pPr marL="0" indent="0">
+            <a:pPr indent="0" marL="0">
               <a:buNone/>
             </a:pPr>
             <a:r>
@@ -15944,7 +16234,7 @@
           <a:bodyPr wrap="square" lIns="0" tIns="0" rIns="0" bIns="0" rtlCol="0" anchor="t"/>
           <a:lstStyle/>
           <a:p>
-            <a:pPr marL="0" indent="0">
+            <a:pPr indent="0" marL="0">
               <a:buNone/>
             </a:pPr>
             <a:r>
@@ -15958,7 +16248,7 @@
             <a:endParaRPr lang="en-US" sz="850" dirty="0"/>
           </a:p>
           <a:p>
-            <a:pPr marL="0" indent="0">
+            <a:pPr indent="0" marL="0">
               <a:buNone/>
             </a:pPr>
             <a:r>
@@ -16042,7 +16332,7 @@
           <a:bodyPr wrap="square" lIns="0" tIns="0" rIns="0" bIns="0" rtlCol="0" anchor="ctr"/>
           <a:lstStyle/>
           <a:p>
-            <a:pPr marL="0" indent="0" algn="ctr">
+            <a:pPr algn="ctr" indent="0" marL="0">
               <a:buNone/>
             </a:pPr>
             <a:r>
@@ -16078,7 +16368,7 @@
           <a:bodyPr wrap="square" lIns="0" tIns="0" rIns="0" bIns="0" rtlCol="0" anchor="t"/>
           <a:lstStyle/>
           <a:p>
-            <a:pPr marL="0" indent="0">
+            <a:pPr indent="0" marL="0">
               <a:buNone/>
             </a:pPr>
             <a:r>
@@ -16092,7 +16382,7 @@
             <a:endParaRPr lang="en-US" sz="1400" dirty="0"/>
           </a:p>
           <a:p>
-            <a:pPr marL="0" indent="0">
+            <a:pPr indent="0" marL="0">
               <a:buNone/>
             </a:pPr>
             <a:r>
@@ -16128,7 +16418,7 @@
           <a:bodyPr wrap="square" lIns="0" tIns="0" rIns="0" bIns="0" rtlCol="0" anchor="b"/>
           <a:lstStyle/>
           <a:p>
-            <a:pPr marL="0" indent="0">
+            <a:pPr indent="0" marL="0">
               <a:buNone/>
             </a:pPr>
             <a:r>
@@ -16164,7 +16454,7 @@
           <a:bodyPr wrap="square" lIns="0" tIns="0" rIns="0" bIns="0" rtlCol="0" anchor="t"/>
           <a:lstStyle/>
           <a:p>
-            <a:pPr marL="0" indent="0">
+            <a:pPr indent="0" marL="0">
               <a:buNone/>
             </a:pPr>
             <a:r>
@@ -16200,7 +16490,7 @@
           <a:bodyPr wrap="square" lIns="0" tIns="0" rIns="0" bIns="0" rtlCol="0" anchor="t"/>
           <a:lstStyle/>
           <a:p>
-            <a:pPr marL="0" indent="0">
+            <a:pPr indent="0" marL="0">
               <a:buNone/>
             </a:pPr>
             <a:r>
@@ -16284,7 +16574,7 @@
           <a:bodyPr wrap="square" lIns="0" tIns="0" rIns="0" bIns="0" rtlCol="0" anchor="ctr"/>
           <a:lstStyle/>
           <a:p>
-            <a:pPr marL="0" indent="0" algn="ctr">
+            <a:pPr algn="ctr" indent="0" marL="0">
               <a:buNone/>
             </a:pPr>
             <a:r>
@@ -16320,7 +16610,7 @@
           <a:bodyPr wrap="square" lIns="0" tIns="0" rIns="0" bIns="0" rtlCol="0" anchor="t"/>
           <a:lstStyle/>
           <a:p>
-            <a:pPr marL="0" indent="0">
+            <a:pPr indent="0" marL="0">
               <a:buNone/>
             </a:pPr>
             <a:r>
@@ -16334,7 +16624,7 @@
             <a:endParaRPr lang="en-US" sz="1400" dirty="0"/>
           </a:p>
           <a:p>
-            <a:pPr marL="0" indent="0">
+            <a:pPr indent="0" marL="0">
               <a:buNone/>
             </a:pPr>
             <a:r>
@@ -16351,7 +16641,7 @@
       </p:sp>
       <p:sp>
         <p:nvSpPr>
-          <p:cNvPr id="27" name="Slide Number Placeholder 0"/>
+          <p:cNvPr id="25" name="Slide Number Placeholder 0"/>
           <p:cNvSpPr>
             <a:spLocks noGrp="1"/>
           </p:cNvSpPr>
@@ -16369,7 +16659,7 @@
           </a:prstGeom>
           <a:extLst>
             <a:ext uri="{C572A759-6A51-4108-AA02-DFA0A04FC94B}">
-              <ma14:wrappingTextBoxFlag xmlns:ma14="http://schemas.microsoft.com/office/mac/drawingml/2011/main" xmlns="" val="0"/>
+              <ma14:wrappingTextBoxFlag xmlns:ma14="http://schemas.microsoft.com/office/mac/drawingml/2011/main" val="0"/>
             </a:ext>
           </a:extLst>
         </p:spPr>
@@ -16387,7 +16677,7 @@
           <a:p>
             <a:pPr algn="r"/>
             <a:fld id="{F7021451-1387-4CA6-816F-3879F97B5CBC}" type="slidenum">
-              <a:rPr lang="en-US" b="0"/>
+              <a:rPr b="0" lang="en-US"/>
               <a:t>3</a:t>
             </a:fld>
             <a:endParaRPr lang="en-US"/>
@@ -16422,11 +16712,9 @@
       <p:sp>
         <p:nvSpPr>
           <p:cNvPr id="2" name="Text 1"/>
-          <p:cNvSpPr>
-            <a:spLocks noGrp="1"/>
-          </p:cNvSpPr>
+          <p:cNvSpPr/>
           <p:nvPr>
-            <p:ph type="body" idx="101" hasCustomPrompt="1"/>
+            <p:ph idx="101" type="body" hasCustomPrompt="1"/>
           </p:nvPr>
         </p:nvSpPr>
         <p:spPr>
@@ -16444,7 +16732,7 @@
           <a:bodyPr wrap="square" lIns="0" tIns="0" rIns="0" bIns="0" rtlCol="0"/>
           <a:lstStyle/>
           <a:p>
-            <a:pPr marL="0" indent="0">
+            <a:pPr indent="0" marL="0">
               <a:buNone/>
             </a:pPr>
             <a:r>
@@ -16462,11 +16750,9 @@
       <p:sp>
         <p:nvSpPr>
           <p:cNvPr id="3" name="Text 1"/>
-          <p:cNvSpPr>
-            <a:spLocks noGrp="1"/>
-          </p:cNvSpPr>
+          <p:cNvSpPr/>
           <p:nvPr>
-            <p:ph type="title" idx="102" hasCustomPrompt="1"/>
+            <p:ph idx="102" type="title" hasCustomPrompt="1"/>
           </p:nvPr>
         </p:nvSpPr>
         <p:spPr>
@@ -16484,7 +16770,7 @@
           <a:bodyPr wrap="square" lIns="0" tIns="0" rIns="0" bIns="0" rtlCol="0" anchor="t"/>
           <a:lstStyle/>
           <a:p>
-            <a:pPr marL="0" indent="0" algn="l">
+            <a:pPr algn="l" indent="0" marL="0">
               <a:buNone/>
             </a:pPr>
             <a:r>
@@ -16522,55 +16808,13 @@
             <a:tbl>
               <a:tblPr/>
               <a:tblGrid>
-                <a:gridCol w="1920240">
-                  <a:extLst>
-                    <a:ext uri="{9D8B030D-6E8A-4147-A177-3AD203B41FA5}">
-                      <a16:colId xmlns:a16="http://schemas.microsoft.com/office/drawing/2014/main" val="20000"/>
-                    </a:ext>
-                  </a:extLst>
-                </a:gridCol>
-                <a:gridCol w="1051560">
-                  <a:extLst>
-                    <a:ext uri="{9D8B030D-6E8A-4147-A177-3AD203B41FA5}">
-                      <a16:colId xmlns:a16="http://schemas.microsoft.com/office/drawing/2014/main" val="20001"/>
-                    </a:ext>
-                  </a:extLst>
-                </a:gridCol>
-                <a:gridCol w="1051560">
-                  <a:extLst>
-                    <a:ext uri="{9D8B030D-6E8A-4147-A177-3AD203B41FA5}">
-                      <a16:colId xmlns:a16="http://schemas.microsoft.com/office/drawing/2014/main" val="20002"/>
-                    </a:ext>
-                  </a:extLst>
-                </a:gridCol>
-                <a:gridCol w="1051560">
-                  <a:extLst>
-                    <a:ext uri="{9D8B030D-6E8A-4147-A177-3AD203B41FA5}">
-                      <a16:colId xmlns:a16="http://schemas.microsoft.com/office/drawing/2014/main" val="20003"/>
-                    </a:ext>
-                  </a:extLst>
-                </a:gridCol>
-                <a:gridCol w="1051560">
-                  <a:extLst>
-                    <a:ext uri="{9D8B030D-6E8A-4147-A177-3AD203B41FA5}">
-                      <a16:colId xmlns:a16="http://schemas.microsoft.com/office/drawing/2014/main" val="20004"/>
-                    </a:ext>
-                  </a:extLst>
-                </a:gridCol>
-                <a:gridCol w="1051560">
-                  <a:extLst>
-                    <a:ext uri="{9D8B030D-6E8A-4147-A177-3AD203B41FA5}">
-                      <a16:colId xmlns:a16="http://schemas.microsoft.com/office/drawing/2014/main" val="20005"/>
-                    </a:ext>
-                  </a:extLst>
-                </a:gridCol>
-                <a:gridCol w="1051560">
-                  <a:extLst>
-                    <a:ext uri="{9D8B030D-6E8A-4147-A177-3AD203B41FA5}">
-                      <a16:colId xmlns:a16="http://schemas.microsoft.com/office/drawing/2014/main" val="20006"/>
-                    </a:ext>
-                  </a:extLst>
-                </a:gridCol>
+                <a:gridCol w="1920240"/>
+                <a:gridCol w="1051560"/>
+                <a:gridCol w="1051560"/>
+                <a:gridCol w="1051560"/>
+                <a:gridCol w="1051560"/>
+                <a:gridCol w="1051560"/>
+                <a:gridCol w="1051560"/>
               </a:tblGrid>
               <a:tr h="365760">
                 <a:tc>
@@ -16578,7 +16822,7 @@
                     <a:bodyPr/>
                     <a:lstStyle/>
                     <a:p>
-                      <a:pPr marL="0" indent="0" algn="l">
+                      <a:pPr algn="l" indent="0" marL="0">
                         <a:buNone/>
                       </a:pPr>
                       <a:endParaRPr lang="en-US" sz="950" dirty="0"/>
@@ -16631,7 +16875,7 @@
                     <a:bodyPr/>
                     <a:lstStyle/>
                     <a:p>
-                      <a:pPr marL="0" indent="0" algn="ctr">
+                      <a:pPr algn="ctr" indent="0" marL="0">
                         <a:buNone/>
                       </a:pPr>
                       <a:r>
@@ -16692,7 +16936,7 @@
                     <a:bodyPr/>
                     <a:lstStyle/>
                     <a:p>
-                      <a:pPr marL="0" indent="0" algn="ctr">
+                      <a:pPr algn="ctr" indent="0" marL="0">
                         <a:buNone/>
                       </a:pPr>
                       <a:r>
@@ -16753,7 +16997,7 @@
                     <a:bodyPr/>
                     <a:lstStyle/>
                     <a:p>
-                      <a:pPr marL="0" indent="0" algn="ctr">
+                      <a:pPr algn="ctr" indent="0" marL="0">
                         <a:buNone/>
                       </a:pPr>
                       <a:r>
@@ -16814,7 +17058,7 @@
                     <a:bodyPr/>
                     <a:lstStyle/>
                     <a:p>
-                      <a:pPr marL="0" indent="0" algn="ctr">
+                      <a:pPr algn="ctr" indent="0" marL="0">
                         <a:buNone/>
                       </a:pPr>
                       <a:r>
@@ -16828,7 +17072,7 @@
                       <a:endParaRPr lang="en-US" sz="950" dirty="0"/>
                     </a:p>
                     <a:p>
-                      <a:pPr marL="0" indent="0" algn="ctr">
+                      <a:pPr algn="ctr" indent="0" marL="0">
                         <a:buNone/>
                       </a:pPr>
                       <a:r>
@@ -16889,7 +17133,7 @@
                     <a:bodyPr/>
                     <a:lstStyle/>
                     <a:p>
-                      <a:pPr marL="0" indent="0" algn="ctr">
+                      <a:pPr algn="ctr" indent="0" marL="0">
                         <a:buNone/>
                       </a:pPr>
                       <a:r>
@@ -16903,7 +17147,7 @@
                       <a:endParaRPr lang="en-US" sz="950" dirty="0"/>
                     </a:p>
                     <a:p>
-                      <a:pPr marL="0" indent="0" algn="ctr">
+                      <a:pPr algn="ctr" indent="0" marL="0">
                         <a:buNone/>
                       </a:pPr>
                       <a:r>
@@ -16964,7 +17208,7 @@
                     <a:bodyPr/>
                     <a:lstStyle/>
                     <a:p>
-                      <a:pPr marL="0" indent="0" algn="ctr">
+                      <a:pPr algn="ctr" indent="0" marL="0">
                         <a:buNone/>
                       </a:pPr>
                       <a:r>
@@ -17020,11 +17264,6 @@
                     </a:solidFill>
                   </a:tcPr>
                 </a:tc>
-                <a:extLst>
-                  <a:ext uri="{0D108BD9-81ED-4DB2-BD59-A6C34878D82A}">
-                    <a16:rowId xmlns:a16="http://schemas.microsoft.com/office/drawing/2014/main" val="10000"/>
-                  </a:ext>
-                </a:extLst>
               </a:tr>
               <a:tr h="384048">
                 <a:tc>
@@ -17032,7 +17271,7 @@
                     <a:bodyPr/>
                     <a:lstStyle/>
                     <a:p>
-                      <a:pPr marL="0" indent="0">
+                      <a:pPr indent="0" marL="0">
                         <a:buNone/>
                       </a:pPr>
                       <a:r>
@@ -17090,7 +17329,7 @@
                     <a:bodyPr/>
                     <a:lstStyle/>
                     <a:p>
-                      <a:pPr marL="0" indent="0" algn="ctr">
+                      <a:pPr algn="ctr" indent="0" marL="0">
                         <a:buNone/>
                       </a:pPr>
                       <a:r>
@@ -17148,7 +17387,7 @@
                     <a:bodyPr/>
                     <a:lstStyle/>
                     <a:p>
-                      <a:pPr marL="0" indent="0" algn="ctr">
+                      <a:pPr algn="ctr" indent="0" marL="0">
                         <a:buNone/>
                       </a:pPr>
                       <a:r>
@@ -17206,7 +17445,7 @@
                     <a:bodyPr/>
                     <a:lstStyle/>
                     <a:p>
-                      <a:pPr marL="0" indent="0" algn="ctr">
+                      <a:pPr algn="ctr" indent="0" marL="0">
                         <a:buNone/>
                       </a:pPr>
                       <a:r>
@@ -17217,6 +17456,9 @@
                         </a:rPr>
                         <a:t>X</a:t>
                       </a:r>
+                      <a:pPr algn="ctr" indent="0" marL="0">
+                        <a:buNone/>
+                      </a:pPr>
                       <a:r>
                         <a:rPr lang="en-US" sz="900" dirty="0">
                           <a:solidFill>
@@ -17272,7 +17514,7 @@
                     <a:bodyPr/>
                     <a:lstStyle/>
                     <a:p>
-                      <a:pPr marL="0" indent="0" algn="ctr">
+                      <a:pPr algn="ctr" indent="0" marL="0">
                         <a:buNone/>
                       </a:pPr>
                       <a:r>
@@ -17330,7 +17572,7 @@
                     <a:bodyPr/>
                     <a:lstStyle/>
                     <a:p>
-                      <a:pPr marL="0" indent="0" algn="ctr">
+                      <a:pPr algn="ctr" indent="0" marL="0">
                         <a:buNone/>
                       </a:pPr>
                       <a:r>
@@ -17388,7 +17630,7 @@
                     <a:bodyPr/>
                     <a:lstStyle/>
                     <a:p>
-                      <a:pPr marL="0" indent="0" algn="ctr">
+                      <a:pPr algn="ctr" indent="0" marL="0">
                         <a:buNone/>
                       </a:pPr>
                       <a:r>
@@ -17444,11 +17686,6 @@
                     </a:solidFill>
                   </a:tcPr>
                 </a:tc>
-                <a:extLst>
-                  <a:ext uri="{0D108BD9-81ED-4DB2-BD59-A6C34878D82A}">
-                    <a16:rowId xmlns:a16="http://schemas.microsoft.com/office/drawing/2014/main" val="10001"/>
-                  </a:ext>
-                </a:extLst>
               </a:tr>
               <a:tr h="384048">
                 <a:tc>
@@ -17456,7 +17693,7 @@
                     <a:bodyPr/>
                     <a:lstStyle/>
                     <a:p>
-                      <a:pPr marL="0" indent="0">
+                      <a:pPr indent="0" marL="0">
                         <a:buNone/>
                       </a:pPr>
                       <a:r>
@@ -17514,7 +17751,7 @@
                     <a:bodyPr/>
                     <a:lstStyle/>
                     <a:p>
-                      <a:pPr marL="0" indent="0" algn="ctr">
+                      <a:pPr algn="ctr" indent="0" marL="0">
                         <a:buNone/>
                       </a:pPr>
                       <a:r>
@@ -17572,7 +17809,7 @@
                     <a:bodyPr/>
                     <a:lstStyle/>
                     <a:p>
-                      <a:pPr marL="0" indent="0" algn="ctr">
+                      <a:pPr algn="ctr" indent="0" marL="0">
                         <a:buNone/>
                       </a:pPr>
                       <a:r>
@@ -17630,7 +17867,7 @@
                     <a:bodyPr/>
                     <a:lstStyle/>
                     <a:p>
-                      <a:pPr marL="0" indent="0" algn="ctr">
+                      <a:pPr algn="ctr" indent="0" marL="0">
                         <a:buNone/>
                       </a:pPr>
                       <a:r>
@@ -17688,7 +17925,7 @@
                     <a:bodyPr/>
                     <a:lstStyle/>
                     <a:p>
-                      <a:pPr marL="0" indent="0" algn="ctr">
+                      <a:pPr algn="ctr" indent="0" marL="0">
                         <a:buNone/>
                       </a:pPr>
                       <a:r>
@@ -17699,6 +17936,9 @@
                         </a:rPr>
                         <a:t>O</a:t>
                       </a:r>
+                      <a:pPr algn="ctr" indent="0" marL="0">
+                        <a:buNone/>
+                      </a:pPr>
                       <a:r>
                         <a:rPr lang="en-US" sz="900" dirty="0">
                           <a:solidFill>
@@ -17754,7 +17994,7 @@
                     <a:bodyPr/>
                     <a:lstStyle/>
                     <a:p>
-                      <a:pPr marL="0" indent="0" algn="ctr">
+                      <a:pPr algn="ctr" indent="0" marL="0">
                         <a:buNone/>
                       </a:pPr>
                       <a:r>
@@ -17812,7 +18052,7 @@
                     <a:bodyPr/>
                     <a:lstStyle/>
                     <a:p>
-                      <a:pPr marL="0" indent="0" algn="ctr">
+                      <a:pPr algn="ctr" indent="0" marL="0">
                         <a:buNone/>
                       </a:pPr>
                       <a:r>
@@ -17823,6 +18063,9 @@
                         </a:rPr>
                         <a:t>O</a:t>
                       </a:r>
+                      <a:pPr algn="ctr" indent="0" marL="0">
+                        <a:buNone/>
+                      </a:pPr>
                       <a:r>
                         <a:rPr lang="en-US" sz="900" dirty="0">
                           <a:solidFill>
@@ -17876,11 +18119,6 @@
                     </a:solidFill>
                   </a:tcPr>
                 </a:tc>
-                <a:extLst>
-                  <a:ext uri="{0D108BD9-81ED-4DB2-BD59-A6C34878D82A}">
-                    <a16:rowId xmlns:a16="http://schemas.microsoft.com/office/drawing/2014/main" val="10002"/>
-                  </a:ext>
-                </a:extLst>
               </a:tr>
               <a:tr h="384048">
                 <a:tc>
@@ -17888,7 +18126,7 @@
                     <a:bodyPr/>
                     <a:lstStyle/>
                     <a:p>
-                      <a:pPr marL="0" indent="0">
+                      <a:pPr indent="0" marL="0">
                         <a:buNone/>
                       </a:pPr>
                       <a:r>
@@ -17946,7 +18184,7 @@
                     <a:bodyPr/>
                     <a:lstStyle/>
                     <a:p>
-                      <a:pPr marL="0" indent="0" algn="ctr">
+                      <a:pPr algn="ctr" indent="0" marL="0">
                         <a:buNone/>
                       </a:pPr>
                       <a:r>
@@ -18004,7 +18242,7 @@
                     <a:bodyPr/>
                     <a:lstStyle/>
                     <a:p>
-                      <a:pPr marL="0" indent="0" algn="ctr">
+                      <a:pPr algn="ctr" indent="0" marL="0">
                         <a:buNone/>
                       </a:pPr>
                       <a:r>
@@ -18062,7 +18300,7 @@
                     <a:bodyPr/>
                     <a:lstStyle/>
                     <a:p>
-                      <a:pPr marL="0" indent="0" algn="ctr">
+                      <a:pPr algn="ctr" indent="0" marL="0">
                         <a:buNone/>
                       </a:pPr>
                       <a:r>
@@ -18120,7 +18358,7 @@
                     <a:bodyPr/>
                     <a:lstStyle/>
                     <a:p>
-                      <a:pPr marL="0" indent="0" algn="ctr">
+                      <a:pPr algn="ctr" indent="0" marL="0">
                         <a:buNone/>
                       </a:pPr>
                       <a:r>
@@ -18178,7 +18416,7 @@
                     <a:bodyPr/>
                     <a:lstStyle/>
                     <a:p>
-                      <a:pPr marL="0" indent="0" algn="ctr">
+                      <a:pPr algn="ctr" indent="0" marL="0">
                         <a:buNone/>
                       </a:pPr>
                       <a:r>
@@ -18236,7 +18474,7 @@
                     <a:bodyPr/>
                     <a:lstStyle/>
                     <a:p>
-                      <a:pPr marL="0" indent="0" algn="ctr">
+                      <a:pPr algn="ctr" indent="0" marL="0">
                         <a:buNone/>
                       </a:pPr>
                       <a:r>
@@ -18292,11 +18530,6 @@
                     </a:solidFill>
                   </a:tcPr>
                 </a:tc>
-                <a:extLst>
-                  <a:ext uri="{0D108BD9-81ED-4DB2-BD59-A6C34878D82A}">
-                    <a16:rowId xmlns:a16="http://schemas.microsoft.com/office/drawing/2014/main" val="10003"/>
-                  </a:ext>
-                </a:extLst>
               </a:tr>
               <a:tr h="384048">
                 <a:tc>
@@ -18304,7 +18537,7 @@
                     <a:bodyPr/>
                     <a:lstStyle/>
                     <a:p>
-                      <a:pPr marL="0" indent="0">
+                      <a:pPr indent="0" marL="0">
                         <a:buNone/>
                       </a:pPr>
                       <a:r>
@@ -18362,7 +18595,7 @@
                     <a:bodyPr/>
                     <a:lstStyle/>
                     <a:p>
-                      <a:pPr marL="0" indent="0" algn="ctr">
+                      <a:pPr algn="ctr" indent="0" marL="0">
                         <a:buNone/>
                       </a:pPr>
                       <a:r>
@@ -18420,7 +18653,7 @@
                     <a:bodyPr/>
                     <a:lstStyle/>
                     <a:p>
-                      <a:pPr marL="0" indent="0" algn="ctr">
+                      <a:pPr algn="ctr" indent="0" marL="0">
                         <a:buNone/>
                       </a:pPr>
                       <a:r>
@@ -18478,7 +18711,7 @@
                     <a:bodyPr/>
                     <a:lstStyle/>
                     <a:p>
-                      <a:pPr marL="0" indent="0" algn="ctr">
+                      <a:pPr algn="ctr" indent="0" marL="0">
                         <a:buNone/>
                       </a:pPr>
                       <a:r>
@@ -18536,7 +18769,7 @@
                     <a:bodyPr/>
                     <a:lstStyle/>
                     <a:p>
-                      <a:pPr marL="0" indent="0" algn="ctr">
+                      <a:pPr algn="ctr" indent="0" marL="0">
                         <a:buNone/>
                       </a:pPr>
                       <a:r>
@@ -18594,7 +18827,7 @@
                     <a:bodyPr/>
                     <a:lstStyle/>
                     <a:p>
-                      <a:pPr marL="0" indent="0" algn="ctr">
+                      <a:pPr algn="ctr" indent="0" marL="0">
                         <a:buNone/>
                       </a:pPr>
                       <a:r>
@@ -18605,6 +18838,9 @@
                         </a:rPr>
                         <a:t>X</a:t>
                       </a:r>
+                      <a:pPr algn="ctr" indent="0" marL="0">
+                        <a:buNone/>
+                      </a:pPr>
                       <a:r>
                         <a:rPr lang="en-US" sz="900" dirty="0">
                           <a:solidFill>
@@ -18660,7 +18896,7 @@
                     <a:bodyPr/>
                     <a:lstStyle/>
                     <a:p>
-                      <a:pPr marL="0" indent="0" algn="ctr">
+                      <a:pPr algn="ctr" indent="0" marL="0">
                         <a:buNone/>
                       </a:pPr>
                       <a:r>
@@ -18716,11 +18952,6 @@
                     </a:solidFill>
                   </a:tcPr>
                 </a:tc>
-                <a:extLst>
-                  <a:ext uri="{0D108BD9-81ED-4DB2-BD59-A6C34878D82A}">
-                    <a16:rowId xmlns:a16="http://schemas.microsoft.com/office/drawing/2014/main" val="10004"/>
-                  </a:ext>
-                </a:extLst>
               </a:tr>
               <a:tr h="384048">
                 <a:tc>
@@ -18728,7 +18959,7 @@
                     <a:bodyPr/>
                     <a:lstStyle/>
                     <a:p>
-                      <a:pPr marL="0" indent="0">
+                      <a:pPr indent="0" marL="0">
                         <a:buNone/>
                       </a:pPr>
                       <a:r>
@@ -18786,7 +19017,7 @@
                     <a:bodyPr/>
                     <a:lstStyle/>
                     <a:p>
-                      <a:pPr marL="0" indent="0" algn="ctr">
+                      <a:pPr algn="ctr" indent="0" marL="0">
                         <a:buNone/>
                       </a:pPr>
                       <a:r>
@@ -18797,6 +19028,9 @@
                         </a:rPr>
                         <a:t>△</a:t>
                       </a:r>
+                      <a:pPr algn="ctr" indent="0" marL="0">
+                        <a:buNone/>
+                      </a:pPr>
                       <a:r>
                         <a:rPr lang="en-US" sz="900" dirty="0">
                           <a:solidFill>
@@ -18852,7 +19086,7 @@
                     <a:bodyPr/>
                     <a:lstStyle/>
                     <a:p>
-                      <a:pPr marL="0" indent="0" algn="ctr">
+                      <a:pPr algn="ctr" indent="0" marL="0">
                         <a:buNone/>
                       </a:pPr>
                       <a:r>
@@ -18910,7 +19144,7 @@
                     <a:bodyPr/>
                     <a:lstStyle/>
                     <a:p>
-                      <a:pPr marL="0" indent="0" algn="ctr">
+                      <a:pPr algn="ctr" indent="0" marL="0">
                         <a:buNone/>
                       </a:pPr>
                       <a:r>
@@ -18968,7 +19202,7 @@
                     <a:bodyPr/>
                     <a:lstStyle/>
                     <a:p>
-                      <a:pPr marL="0" indent="0" algn="ctr">
+                      <a:pPr algn="ctr" indent="0" marL="0">
                         <a:buNone/>
                       </a:pPr>
                       <a:r>
@@ -19026,7 +19260,7 @@
                     <a:bodyPr/>
                     <a:lstStyle/>
                     <a:p>
-                      <a:pPr marL="0" indent="0" algn="ctr">
+                      <a:pPr algn="ctr" indent="0" marL="0">
                         <a:buNone/>
                       </a:pPr>
                       <a:r>
@@ -19084,7 +19318,7 @@
                     <a:bodyPr/>
                     <a:lstStyle/>
                     <a:p>
-                      <a:pPr marL="0" indent="0" algn="ctr">
+                      <a:pPr algn="ctr" indent="0" marL="0">
                         <a:buNone/>
                       </a:pPr>
                       <a:r>
@@ -19140,11 +19374,6 @@
                     </a:solidFill>
                   </a:tcPr>
                 </a:tc>
-                <a:extLst>
-                  <a:ext uri="{0D108BD9-81ED-4DB2-BD59-A6C34878D82A}">
-                    <a16:rowId xmlns:a16="http://schemas.microsoft.com/office/drawing/2014/main" val="10005"/>
-                  </a:ext>
-                </a:extLst>
               </a:tr>
               <a:tr h="384048">
                 <a:tc>
@@ -19152,7 +19381,7 @@
                     <a:bodyPr/>
                     <a:lstStyle/>
                     <a:p>
-                      <a:pPr marL="0" indent="0">
+                      <a:pPr indent="0" marL="0">
                         <a:buNone/>
                       </a:pPr>
                       <a:r>
@@ -19210,7 +19439,7 @@
                     <a:bodyPr/>
                     <a:lstStyle/>
                     <a:p>
-                      <a:pPr marL="0" indent="0" algn="ctr">
+                      <a:pPr algn="ctr" indent="0" marL="0">
                         <a:buNone/>
                       </a:pPr>
                       <a:r>
@@ -19268,7 +19497,7 @@
                     <a:bodyPr/>
                     <a:lstStyle/>
                     <a:p>
-                      <a:pPr marL="0" indent="0" algn="ctr">
+                      <a:pPr algn="ctr" indent="0" marL="0">
                         <a:buNone/>
                       </a:pPr>
                       <a:r>
@@ -19326,7 +19555,7 @@
                     <a:bodyPr/>
                     <a:lstStyle/>
                     <a:p>
-                      <a:pPr marL="0" indent="0" algn="ctr">
+                      <a:pPr algn="ctr" indent="0" marL="0">
                         <a:buNone/>
                       </a:pPr>
                       <a:r>
@@ -19384,7 +19613,7 @@
                     <a:bodyPr/>
                     <a:lstStyle/>
                     <a:p>
-                      <a:pPr marL="0" indent="0" algn="ctr">
+                      <a:pPr algn="ctr" indent="0" marL="0">
                         <a:buNone/>
                       </a:pPr>
                       <a:r>
@@ -19442,7 +19671,7 @@
                     <a:bodyPr/>
                     <a:lstStyle/>
                     <a:p>
-                      <a:pPr marL="0" indent="0" algn="ctr">
+                      <a:pPr algn="ctr" indent="0" marL="0">
                         <a:buNone/>
                       </a:pPr>
                       <a:r>
@@ -19500,7 +19729,7 @@
                     <a:bodyPr/>
                     <a:lstStyle/>
                     <a:p>
-                      <a:pPr marL="0" indent="0" algn="ctr">
+                      <a:pPr algn="ctr" indent="0" marL="0">
                         <a:buNone/>
                       </a:pPr>
                       <a:r>
@@ -19511,6 +19740,9 @@
                         </a:rPr>
                         <a:t>X</a:t>
                       </a:r>
+                      <a:pPr algn="ctr" indent="0" marL="0">
+                        <a:buNone/>
+                      </a:pPr>
                       <a:r>
                         <a:rPr lang="en-US" sz="900" dirty="0">
                           <a:solidFill>
@@ -19564,11 +19796,6 @@
                     </a:solidFill>
                   </a:tcPr>
                 </a:tc>
-                <a:extLst>
-                  <a:ext uri="{0D108BD9-81ED-4DB2-BD59-A6C34878D82A}">
-                    <a16:rowId xmlns:a16="http://schemas.microsoft.com/office/drawing/2014/main" val="10006"/>
-                  </a:ext>
-                </a:extLst>
               </a:tr>
             </a:tbl>
           </a:graphicData>
@@ -19576,7 +19803,7 @@
       </p:graphicFrame>
       <p:sp>
         <p:nvSpPr>
-          <p:cNvPr id="4" name="결론 칸"/>
+          <p:cNvPr id="5" name="결론 칸"/>
           <p:cNvSpPr/>
           <p:nvPr/>
         </p:nvSpPr>
@@ -19622,7 +19849,7 @@
           <a:bodyPr wrap="square" lIns="0" tIns="0" rIns="0" bIns="0" rtlCol="0" anchor="ctr"/>
           <a:lstStyle/>
           <a:p>
-            <a:pPr marL="0" indent="0">
+            <a:pPr indent="0" marL="0">
               <a:buNone/>
             </a:pPr>
             <a:r>
@@ -19633,6 +19860,9 @@
               </a:rPr>
               <a:t>알바가드만 O  </a:t>
             </a:r>
+            <a:pPr indent="0" marL="0">
+              <a:buNone/>
+            </a:pPr>
             <a:r>
               <a:rPr lang="en-US" sz="1150" dirty="0">
                 <a:solidFill>
@@ -19665,7 +19895,7 @@
           </a:prstGeom>
           <a:extLst>
             <a:ext uri="{C572A759-6A51-4108-AA02-DFA0A04FC94B}">
-              <ma14:wrappingTextBoxFlag xmlns:ma14="http://schemas.microsoft.com/office/mac/drawingml/2011/main" xmlns="" val="0"/>
+              <ma14:wrappingTextBoxFlag xmlns:ma14="http://schemas.microsoft.com/office/mac/drawingml/2011/main" val="0"/>
             </a:ext>
           </a:extLst>
         </p:spPr>
@@ -19683,7 +19913,7 @@
           <a:p>
             <a:pPr algn="r"/>
             <a:fld id="{F7021451-1387-4CA6-816F-3879F97B5CBC}" type="slidenum">
-              <a:rPr lang="en-US" b="0"/>
+              <a:rPr b="0" lang="en-US"/>
               <a:t>4</a:t>
             </a:fld>
             <a:endParaRPr lang="en-US"/>
@@ -19718,11 +19948,9 @@
       <p:sp>
         <p:nvSpPr>
           <p:cNvPr id="2" name="Text 1"/>
-          <p:cNvSpPr>
-            <a:spLocks noGrp="1"/>
-          </p:cNvSpPr>
+          <p:cNvSpPr/>
           <p:nvPr>
-            <p:ph type="body" idx="101" hasCustomPrompt="1"/>
+            <p:ph idx="101" type="body" hasCustomPrompt="1"/>
           </p:nvPr>
         </p:nvSpPr>
         <p:spPr>
@@ -19740,7 +19968,7 @@
           <a:bodyPr wrap="square" lIns="0" tIns="0" rIns="0" bIns="0" rtlCol="0"/>
           <a:lstStyle/>
           <a:p>
-            <a:pPr marL="0" indent="0">
+            <a:pPr indent="0" marL="0">
               <a:buNone/>
             </a:pPr>
             <a:r>
@@ -19758,11 +19986,9 @@
       <p:sp>
         <p:nvSpPr>
           <p:cNvPr id="3" name="Text 1"/>
-          <p:cNvSpPr>
-            <a:spLocks noGrp="1"/>
-          </p:cNvSpPr>
+          <p:cNvSpPr/>
           <p:nvPr>
-            <p:ph type="title" idx="102" hasCustomPrompt="1"/>
+            <p:ph idx="102" type="title" hasCustomPrompt="1"/>
           </p:nvPr>
         </p:nvSpPr>
         <p:spPr>
@@ -19780,7 +20006,7 @@
           <a:bodyPr wrap="square" lIns="0" tIns="0" rIns="0" bIns="0" rtlCol="0" anchor="t"/>
           <a:lstStyle/>
           <a:p>
-            <a:pPr marL="0" indent="0" algn="l">
+            <a:pPr algn="l" indent="0" marL="0">
               <a:buNone/>
             </a:pPr>
             <a:r>
@@ -19841,7 +20067,7 @@
           <a:bodyPr wrap="square" lIns="0" tIns="0" rIns="0" bIns="0" rtlCol="0" anchor="ctr"/>
           <a:lstStyle/>
           <a:p>
-            <a:pPr marL="0" indent="0" algn="ctr">
+            <a:pPr algn="ctr" indent="0" marL="0">
               <a:buNone/>
             </a:pPr>
             <a:r>
@@ -19877,7 +20103,7 @@
           <a:bodyPr wrap="square" lIns="0" tIns="0" rIns="0" bIns="0" rtlCol="0" anchor="ctr"/>
           <a:lstStyle/>
           <a:p>
-            <a:pPr marL="0" indent="0">
+            <a:pPr indent="0" marL="0">
               <a:buNone/>
             </a:pPr>
             <a:r>
@@ -19913,7 +20139,7 @@
           <a:bodyPr wrap="square" lIns="0" tIns="0" rIns="0" bIns="0" rtlCol="0" anchor="t"/>
           <a:lstStyle/>
           <a:p>
-            <a:pPr marL="0" indent="0">
+            <a:pPr indent="0" marL="0">
               <a:buNone/>
             </a:pPr>
             <a:r>
@@ -19957,14 +20183,14 @@
       </p:sp>
       <p:pic>
         <p:nvPicPr>
-          <p:cNvPr id="9" name="기록 화면" descr="C:\Users\user\Desktop\albaguard기술창업\docs\screenshots\1-home.jpg"/>
+          <p:cNvPr id="9" name="기록 화면" descr="C:\Users\user\Desktop\albaguard기술창업\docs\screenshots\1-home.jpg">    </p:cNvPr>
           <p:cNvPicPr>
             <a:picLocks noChangeAspect="1"/>
           </p:cNvPicPr>
           <p:nvPr/>
         </p:nvPicPr>
         <p:blipFill>
-          <a:blip r:embed="rId3"/>
+          <a:blip r:embed="rId1"/>
           <a:stretch>
             <a:fillRect/>
           </a:stretch>
@@ -20049,7 +20275,7 @@
           <a:bodyPr wrap="square" lIns="0" tIns="0" rIns="0" bIns="0" rtlCol="0" anchor="ctr"/>
           <a:lstStyle/>
           <a:p>
-            <a:pPr marL="0" indent="0" algn="ctr">
+            <a:pPr algn="ctr" indent="0" marL="0">
               <a:buNone/>
             </a:pPr>
             <a:r>
@@ -20085,7 +20311,7 @@
           <a:bodyPr wrap="square" lIns="0" tIns="0" rIns="0" bIns="0" rtlCol="0" anchor="ctr"/>
           <a:lstStyle/>
           <a:p>
-            <a:pPr marL="0" indent="0">
+            <a:pPr indent="0" marL="0">
               <a:buNone/>
             </a:pPr>
             <a:r>
@@ -20121,7 +20347,7 @@
           <a:bodyPr wrap="square" lIns="0" tIns="0" rIns="0" bIns="0" rtlCol="0" anchor="t"/>
           <a:lstStyle/>
           <a:p>
-            <a:pPr marL="0" indent="0">
+            <a:pPr indent="0" marL="0">
               <a:buNone/>
             </a:pPr>
             <a:r>
@@ -20135,7 +20361,7 @@
             <a:endParaRPr lang="en-US" sz="1050" dirty="0"/>
           </a:p>
           <a:p>
-            <a:pPr marL="0" indent="0">
+            <a:pPr indent="0" marL="0">
               <a:buNone/>
             </a:pPr>
             <a:r>
@@ -20179,14 +20405,14 @@
       </p:sp>
       <p:pic>
         <p:nvPicPr>
-          <p:cNvPr id="16" name="비교 화면" descr="C:\Users\user\Desktop\albaguard기술창업\docs\screenshots\3-pay.jpg"/>
+          <p:cNvPr id="16" name="비교 화면" descr="C:\Users\user\Desktop\albaguard기술창업\docs\screenshots\3-pay.jpg">    </p:cNvPr>
           <p:cNvPicPr>
             <a:picLocks noChangeAspect="1"/>
           </p:cNvPicPr>
           <p:nvPr/>
         </p:nvPicPr>
         <p:blipFill>
-          <a:blip r:embed="rId4"/>
+          <a:blip r:embed="rId2"/>
           <a:stretch>
             <a:fillRect/>
           </a:stretch>
@@ -20271,7 +20497,7 @@
           <a:bodyPr wrap="square" lIns="0" tIns="0" rIns="0" bIns="0" rtlCol="0" anchor="ctr"/>
           <a:lstStyle/>
           <a:p>
-            <a:pPr marL="0" indent="0" algn="ctr">
+            <a:pPr algn="ctr" indent="0" marL="0">
               <a:buNone/>
             </a:pPr>
             <a:r>
@@ -20307,7 +20533,7 @@
           <a:bodyPr wrap="square" lIns="0" tIns="0" rIns="0" bIns="0" rtlCol="0" anchor="ctr"/>
           <a:lstStyle/>
           <a:p>
-            <a:pPr marL="0" indent="0">
+            <a:pPr indent="0" marL="0">
               <a:buNone/>
             </a:pPr>
             <a:r>
@@ -20343,7 +20569,7 @@
           <a:bodyPr wrap="square" lIns="0" tIns="0" rIns="0" bIns="0" rtlCol="0" anchor="t"/>
           <a:lstStyle/>
           <a:p>
-            <a:pPr marL="0" indent="0">
+            <a:pPr indent="0" marL="0">
               <a:buNone/>
             </a:pPr>
             <a:r>
@@ -20357,7 +20583,7 @@
             <a:endParaRPr lang="en-US" sz="1050" dirty="0"/>
           </a:p>
           <a:p>
-            <a:pPr marL="0" indent="0">
+            <a:pPr indent="0" marL="0">
               <a:buNone/>
             </a:pPr>
             <a:r>
@@ -20401,14 +20627,14 @@
       </p:sp>
       <p:pic>
         <p:nvPicPr>
-          <p:cNvPr id="23" name="요청 화면" descr="C:\Users\user\Desktop\albaguard기술창업\docs\screenshots\4-request.jpg"/>
+          <p:cNvPr id="23" name="요청 화면" descr="C:\Users\user\Desktop\albaguard기술창업\docs\screenshots\4-request.jpg">    </p:cNvPr>
           <p:cNvPicPr>
             <a:picLocks noChangeAspect="1"/>
           </p:cNvPicPr>
           <p:nvPr/>
         </p:nvPicPr>
         <p:blipFill>
-          <a:blip r:embed="rId5"/>
+          <a:blip r:embed="rId3"/>
           <a:stretch>
             <a:fillRect/>
           </a:stretch>
@@ -20443,7 +20669,7 @@
           </a:prstGeom>
           <a:extLst>
             <a:ext uri="{C572A759-6A51-4108-AA02-DFA0A04FC94B}">
-              <ma14:wrappingTextBoxFlag xmlns:ma14="http://schemas.microsoft.com/office/mac/drawingml/2011/main" xmlns="" val="0"/>
+              <ma14:wrappingTextBoxFlag xmlns:ma14="http://schemas.microsoft.com/office/mac/drawingml/2011/main" val="0"/>
             </a:ext>
           </a:extLst>
         </p:spPr>
@@ -20461,7 +20687,7 @@
           <a:p>
             <a:pPr algn="r"/>
             <a:fld id="{F7021451-1387-4CA6-816F-3879F97B5CBC}" type="slidenum">
-              <a:rPr lang="en-US" b="0"/>
+              <a:rPr b="0" lang="en-US"/>
               <a:t>5</a:t>
             </a:fld>
             <a:endParaRPr lang="en-US"/>
@@ -20496,11 +20722,9 @@
       <p:sp>
         <p:nvSpPr>
           <p:cNvPr id="2" name="Text 1"/>
-          <p:cNvSpPr>
-            <a:spLocks noGrp="1"/>
-          </p:cNvSpPr>
+          <p:cNvSpPr/>
           <p:nvPr>
-            <p:ph type="body" idx="101" hasCustomPrompt="1"/>
+            <p:ph idx="101" type="body" hasCustomPrompt="1"/>
           </p:nvPr>
         </p:nvSpPr>
         <p:spPr>
@@ -20518,7 +20742,7 @@
           <a:bodyPr wrap="square" lIns="0" tIns="0" rIns="0" bIns="0" rtlCol="0"/>
           <a:lstStyle/>
           <a:p>
-            <a:pPr marL="0" indent="0">
+            <a:pPr indent="0" marL="0">
               <a:buNone/>
             </a:pPr>
             <a:r>
@@ -20536,11 +20760,9 @@
       <p:sp>
         <p:nvSpPr>
           <p:cNvPr id="3" name="Text 1"/>
-          <p:cNvSpPr>
-            <a:spLocks noGrp="1"/>
-          </p:cNvSpPr>
+          <p:cNvSpPr/>
           <p:nvPr>
-            <p:ph type="title" idx="102" hasCustomPrompt="1"/>
+            <p:ph idx="102" type="title" hasCustomPrompt="1"/>
           </p:nvPr>
         </p:nvSpPr>
         <p:spPr>
@@ -20558,7 +20780,7 @@
           <a:bodyPr wrap="square" lIns="0" tIns="0" rIns="0" bIns="0" rtlCol="0" anchor="t"/>
           <a:lstStyle/>
           <a:p>
-            <a:pPr marL="0" indent="0" algn="l">
+            <a:pPr algn="l" indent="0" marL="0">
               <a:buNone/>
             </a:pPr>
             <a:r>
@@ -20619,7 +20841,7 @@
           <a:bodyPr wrap="square" lIns="0" tIns="0" rIns="0" bIns="0" rtlCol="0" anchor="ctr"/>
           <a:lstStyle/>
           <a:p>
-            <a:pPr marL="0" indent="0" algn="ctr">
+            <a:pPr algn="ctr" indent="0" marL="0">
               <a:buNone/>
             </a:pPr>
             <a:r>
@@ -20655,7 +20877,7 @@
           <a:bodyPr wrap="square" lIns="0" tIns="0" rIns="0" bIns="0" rtlCol="0" anchor="ctr"/>
           <a:lstStyle/>
           <a:p>
-            <a:pPr marL="0" indent="0">
+            <a:pPr indent="0" marL="0">
               <a:buNone/>
             </a:pPr>
             <a:r>
@@ -20666,6 +20888,9 @@
               </a:rPr>
               <a:t>사장 연동 없이 혼자 씀</a:t>
             </a:r>
+            <a:pPr indent="0" marL="0">
+              <a:buNone/>
+            </a:pPr>
             <a:r>
               <a:rPr lang="en-US" sz="900" dirty="0">
                 <a:solidFill>
@@ -20699,7 +20924,7 @@
           <a:bodyPr wrap="square" lIns="0" tIns="0" rIns="0" bIns="0" rtlCol="0" anchor="t"/>
           <a:lstStyle/>
           <a:p>
-            <a:pPr marL="0" indent="0">
+            <a:pPr indent="0" marL="0">
               <a:buNone/>
             </a:pPr>
             <a:r>
@@ -20783,7 +21008,7 @@
           <a:bodyPr wrap="square" lIns="0" tIns="0" rIns="0" bIns="0" rtlCol="0" anchor="ctr"/>
           <a:lstStyle/>
           <a:p>
-            <a:pPr marL="0" indent="0" algn="ctr">
+            <a:pPr algn="ctr" indent="0" marL="0">
               <a:buNone/>
             </a:pPr>
             <a:r>
@@ -20819,7 +21044,7 @@
           <a:bodyPr wrap="square" lIns="0" tIns="0" rIns="0" bIns="0" rtlCol="0" anchor="ctr"/>
           <a:lstStyle/>
           <a:p>
-            <a:pPr marL="0" indent="0">
+            <a:pPr indent="0" marL="0">
               <a:buNone/>
             </a:pPr>
             <a:r>
@@ -20830,6 +21055,9 @@
               </a:rPr>
               <a:t>입금액 비교 → 차액 → 요청 · 증빙까지</a:t>
             </a:r>
+            <a:pPr indent="0" marL="0">
+              <a:buNone/>
+            </a:pPr>
             <a:r>
               <a:rPr lang="en-US" sz="900" dirty="0">
                 <a:solidFill>
@@ -20863,7 +21091,7 @@
           <a:bodyPr wrap="square" lIns="0" tIns="0" rIns="0" bIns="0" rtlCol="0" anchor="t"/>
           <a:lstStyle/>
           <a:p>
-            <a:pPr marL="0" indent="0">
+            <a:pPr indent="0" marL="0">
               <a:buNone/>
             </a:pPr>
             <a:r>
@@ -20947,7 +21175,7 @@
           <a:bodyPr wrap="square" lIns="0" tIns="0" rIns="0" bIns="0" rtlCol="0" anchor="ctr"/>
           <a:lstStyle/>
           <a:p>
-            <a:pPr marL="0" indent="0" algn="ctr">
+            <a:pPr algn="ctr" indent="0" marL="0">
               <a:buNone/>
             </a:pPr>
             <a:r>
@@ -20983,7 +21211,7 @@
           <a:bodyPr wrap="square" lIns="0" tIns="0" rIns="0" bIns="0" rtlCol="0" anchor="ctr"/>
           <a:lstStyle/>
           <a:p>
-            <a:pPr marL="0" indent="0">
+            <a:pPr indent="0" marL="0">
               <a:buNone/>
             </a:pPr>
             <a:r>
@@ -20994,6 +21222,9 @@
               </a:rPr>
               <a:t>기록 등록: 확인 번호 + 등록 시각</a:t>
             </a:r>
+            <a:pPr indent="0" marL="0">
+              <a:buNone/>
+            </a:pPr>
             <a:r>
               <a:rPr lang="en-US" sz="900" dirty="0">
                 <a:solidFill>
@@ -21027,7 +21258,7 @@
           <a:bodyPr wrap="square" lIns="0" tIns="0" rIns="0" bIns="0" rtlCol="0" anchor="t"/>
           <a:lstStyle/>
           <a:p>
-            <a:pPr marL="0" indent="0">
+            <a:pPr indent="0" marL="0">
               <a:buNone/>
             </a:pPr>
             <a:r>
@@ -21113,7 +21344,7 @@
           <a:bodyPr wrap="square" lIns="0" tIns="0" rIns="0" bIns="0" rtlCol="0" anchor="ctr"/>
           <a:lstStyle/>
           <a:p>
-            <a:pPr marL="0" indent="0">
+            <a:pPr indent="0" marL="0">
               <a:buNone/>
             </a:pPr>
             <a:r>
@@ -21149,7 +21380,7 @@
           <a:bodyPr wrap="square" lIns="0" tIns="0" rIns="0" bIns="0" rtlCol="0" anchor="t"/>
           <a:lstStyle/>
           <a:p>
-            <a:pPr marL="0" indent="0">
+            <a:pPr indent="0" marL="0">
               <a:buNone/>
             </a:pPr>
             <a:r>
@@ -21185,7 +21416,7 @@
           <a:bodyPr wrap="square" lIns="0" tIns="0" rIns="0" bIns="0" rtlCol="0" anchor="t"/>
           <a:lstStyle/>
           <a:p>
-            <a:pPr marL="0" indent="0">
+            <a:pPr indent="0" marL="0">
               <a:buNone/>
             </a:pPr>
             <a:r>
@@ -21220,7 +21451,7 @@
           </a:prstGeom>
           <a:extLst>
             <a:ext uri="{C572A759-6A51-4108-AA02-DFA0A04FC94B}">
-              <ma14:wrappingTextBoxFlag xmlns:ma14="http://schemas.microsoft.com/office/mac/drawingml/2011/main" xmlns="" val="0"/>
+              <ma14:wrappingTextBoxFlag xmlns:ma14="http://schemas.microsoft.com/office/mac/drawingml/2011/main" val="0"/>
             </a:ext>
           </a:extLst>
         </p:spPr>
@@ -21238,7 +21469,7 @@
           <a:p>
             <a:pPr algn="r"/>
             <a:fld id="{F7021451-1387-4CA6-816F-3879F97B5CBC}" type="slidenum">
-              <a:rPr lang="en-US" b="0"/>
+              <a:rPr b="0" lang="en-US"/>
               <a:t>6</a:t>
             </a:fld>
             <a:endParaRPr lang="en-US"/>
@@ -21273,11 +21504,9 @@
       <p:sp>
         <p:nvSpPr>
           <p:cNvPr id="2" name="Text 1"/>
-          <p:cNvSpPr>
-            <a:spLocks noGrp="1"/>
-          </p:cNvSpPr>
+          <p:cNvSpPr/>
           <p:nvPr>
-            <p:ph type="body" idx="101" hasCustomPrompt="1"/>
+            <p:ph idx="101" type="body" hasCustomPrompt="1"/>
           </p:nvPr>
         </p:nvSpPr>
         <p:spPr>
@@ -21295,7 +21524,7 @@
           <a:bodyPr wrap="square" lIns="0" tIns="0" rIns="0" bIns="0" rtlCol="0"/>
           <a:lstStyle/>
           <a:p>
-            <a:pPr marL="0" indent="0">
+            <a:pPr indent="0" marL="0">
               <a:buNone/>
             </a:pPr>
             <a:r>
@@ -21313,11 +21542,9 @@
       <p:sp>
         <p:nvSpPr>
           <p:cNvPr id="3" name="Text 1"/>
-          <p:cNvSpPr>
-            <a:spLocks noGrp="1"/>
-          </p:cNvSpPr>
+          <p:cNvSpPr/>
           <p:nvPr>
-            <p:ph type="title" idx="102" hasCustomPrompt="1"/>
+            <p:ph idx="102" type="title" hasCustomPrompt="1"/>
           </p:nvPr>
         </p:nvSpPr>
         <p:spPr>
@@ -21335,7 +21562,7 @@
           <a:bodyPr wrap="square" lIns="0" tIns="0" rIns="0" bIns="0" rtlCol="0" anchor="t"/>
           <a:lstStyle/>
           <a:p>
-            <a:pPr marL="0" indent="0" algn="l">
+            <a:pPr algn="l" indent="0" marL="0">
               <a:buNone/>
             </a:pPr>
             <a:r>
@@ -21366,34 +21593,16 @@
         </p:nvGraphicFramePr>
         <p:xfrm>
           <a:off x="457200" y="1234440"/>
-          <a:ext cx="8229600" cy="3474720"/>
+          <a:ext cx="8229600" cy="914400"/>
         </p:xfrm>
         <a:graphic>
           <a:graphicData uri="http://schemas.openxmlformats.org/drawingml/2006/table">
             <a:tbl>
               <a:tblPr/>
               <a:tblGrid>
-                <a:gridCol w="1600200">
-                  <a:extLst>
-                    <a:ext uri="{9D8B030D-6E8A-4147-A177-3AD203B41FA5}">
-                      <a16:colId xmlns:a16="http://schemas.microsoft.com/office/drawing/2014/main" val="20000"/>
-                    </a:ext>
-                  </a:extLst>
-                </a:gridCol>
-                <a:gridCol w="3703320">
-                  <a:extLst>
-                    <a:ext uri="{9D8B030D-6E8A-4147-A177-3AD203B41FA5}">
-                      <a16:colId xmlns:a16="http://schemas.microsoft.com/office/drawing/2014/main" val="20001"/>
-                    </a:ext>
-                  </a:extLst>
-                </a:gridCol>
-                <a:gridCol w="2926080">
-                  <a:extLst>
-                    <a:ext uri="{9D8B030D-6E8A-4147-A177-3AD203B41FA5}">
-                      <a16:colId xmlns:a16="http://schemas.microsoft.com/office/drawing/2014/main" val="20002"/>
-                    </a:ext>
-                  </a:extLst>
-                </a:gridCol>
+                <a:gridCol w="1600200"/>
+                <a:gridCol w="3703320"/>
+                <a:gridCol w="2926080"/>
               </a:tblGrid>
               <a:tr h="365760">
                 <a:tc>
@@ -21401,7 +21610,7 @@
                     <a:bodyPr/>
                     <a:lstStyle/>
                     <a:p>
-                      <a:pPr marL="0" indent="0">
+                      <a:pPr indent="0" marL="0">
                         <a:buNone/>
                       </a:pPr>
                       <a:r>
@@ -21415,7 +21624,7 @@
                       <a:endParaRPr lang="en-US" sz="1100" dirty="0"/>
                     </a:p>
                   </a:txBody>
-                  <a:tcPr marT="36576" marB="36576" anchor="ctr">
+                  <a:tcPr marL="91440" marR="91440" marT="36576" marB="36576" anchor="ctr">
                     <a:lnL w="6350" cap="flat" cmpd="sng" algn="ctr">
                       <a:solidFill>
                         <a:srgbClr val="DCD9D0"/>
@@ -21462,7 +21671,7 @@
                     <a:bodyPr/>
                     <a:lstStyle/>
                     <a:p>
-                      <a:pPr marL="0" indent="0">
+                      <a:pPr indent="0" marL="0">
                         <a:buNone/>
                       </a:pPr>
                       <a:r>
@@ -21476,7 +21685,7 @@
                       <a:endParaRPr lang="en-US" sz="1100" dirty="0"/>
                     </a:p>
                   </a:txBody>
-                  <a:tcPr marT="36576" marB="36576" anchor="ctr">
+                  <a:tcPr marL="91440" marR="91440" marT="36576" marB="36576" anchor="ctr">
                     <a:lnL w="6350" cap="flat" cmpd="sng" algn="ctr">
                       <a:solidFill>
                         <a:srgbClr val="DCD9D0"/>
@@ -21523,7 +21732,7 @@
                     <a:bodyPr/>
                     <a:lstStyle/>
                     <a:p>
-                      <a:pPr marL="0" indent="0">
+                      <a:pPr indent="0" marL="0">
                         <a:buNone/>
                       </a:pPr>
                       <a:r>
@@ -21537,7 +21746,7 @@
                       <a:endParaRPr lang="en-US" sz="1100" dirty="0"/>
                     </a:p>
                   </a:txBody>
-                  <a:tcPr marT="36576" marB="36576" anchor="ctr">
+                  <a:tcPr marL="91440" marR="91440" marT="36576" marB="36576" anchor="ctr">
                     <a:lnL w="6350" cap="flat" cmpd="sng" algn="ctr">
                       <a:solidFill>
                         <a:srgbClr val="DCD9D0"/>
@@ -21579,11 +21788,6 @@
                     </a:solidFill>
                   </a:tcPr>
                 </a:tc>
-                <a:extLst>
-                  <a:ext uri="{0D108BD9-81ED-4DB2-BD59-A6C34878D82A}">
-                    <a16:rowId xmlns:a16="http://schemas.microsoft.com/office/drawing/2014/main" val="10000"/>
-                  </a:ext>
-                </a:extLst>
               </a:tr>
               <a:tr h="475488">
                 <a:tc>
@@ -21591,7 +21795,7 @@
                     <a:bodyPr/>
                     <a:lstStyle/>
                     <a:p>
-                      <a:pPr marL="0" indent="0">
+                      <a:pPr indent="0" marL="0">
                         <a:buNone/>
                       </a:pPr>
                       <a:r>
@@ -21605,7 +21809,7 @@
                       <a:endParaRPr lang="en-US" sz="1150" dirty="0"/>
                     </a:p>
                   </a:txBody>
-                  <a:tcPr marT="36576" marB="36576" anchor="ctr">
+                  <a:tcPr marL="91440" marR="91440" marT="36576" marB="36576" anchor="ctr">
                     <a:lnL w="6350" cap="flat" cmpd="sng" algn="ctr">
                       <a:solidFill>
                         <a:srgbClr val="DCD9D0"/>
@@ -21649,7 +21853,7 @@
                     <a:bodyPr/>
                     <a:lstStyle/>
                     <a:p>
-                      <a:pPr marL="0" indent="0">
+                      <a:pPr indent="0" marL="0">
                         <a:buNone/>
                       </a:pPr>
                       <a:r>
@@ -21663,7 +21867,7 @@
                       <a:endParaRPr lang="en-US" sz="1150" dirty="0"/>
                     </a:p>
                   </a:txBody>
-                  <a:tcPr marT="36576" marB="36576" anchor="ctr">
+                  <a:tcPr marL="91440" marR="91440" marT="36576" marB="36576" anchor="ctr">
                     <a:lnL w="6350" cap="flat" cmpd="sng" algn="ctr">
                       <a:solidFill>
                         <a:srgbClr val="DCD9D0"/>
@@ -21707,7 +21911,7 @@
                     <a:bodyPr/>
                     <a:lstStyle/>
                     <a:p>
-                      <a:pPr marL="0" indent="0">
+                      <a:pPr indent="0" marL="0">
                         <a:buNone/>
                       </a:pPr>
                       <a:r>
@@ -21721,7 +21925,7 @@
                       <a:endParaRPr lang="en-US" sz="1150" dirty="0"/>
                     </a:p>
                   </a:txBody>
-                  <a:tcPr marT="36576" marB="36576" anchor="ctr">
+                  <a:tcPr marL="91440" marR="91440" marT="36576" marB="36576" anchor="ctr">
                     <a:lnL w="6350" cap="flat" cmpd="sng" algn="ctr">
                       <a:solidFill>
                         <a:srgbClr val="DCD9D0"/>
@@ -21760,11 +21964,6 @@
                     </a:lnB>
                   </a:tcPr>
                 </a:tc>
-                <a:extLst>
-                  <a:ext uri="{0D108BD9-81ED-4DB2-BD59-A6C34878D82A}">
-                    <a16:rowId xmlns:a16="http://schemas.microsoft.com/office/drawing/2014/main" val="10001"/>
-                  </a:ext>
-                </a:extLst>
               </a:tr>
               <a:tr h="475488">
                 <a:tc>
@@ -21772,7 +21971,7 @@
                     <a:bodyPr/>
                     <a:lstStyle/>
                     <a:p>
-                      <a:pPr marL="0" indent="0">
+                      <a:pPr indent="0" marL="0">
                         <a:buNone/>
                       </a:pPr>
                       <a:r>
@@ -21786,7 +21985,7 @@
                       <a:endParaRPr lang="en-US" sz="1150" dirty="0"/>
                     </a:p>
                   </a:txBody>
-                  <a:tcPr marT="36576" marB="36576" anchor="ctr">
+                  <a:tcPr marL="91440" marR="91440" marT="36576" marB="36576" anchor="ctr">
                     <a:lnL w="6350" cap="flat" cmpd="sng" algn="ctr">
                       <a:solidFill>
                         <a:srgbClr val="DCD9D0"/>
@@ -21830,7 +22029,7 @@
                     <a:bodyPr/>
                     <a:lstStyle/>
                     <a:p>
-                      <a:pPr marL="0" indent="0">
+                      <a:pPr indent="0" marL="0">
                         <a:buNone/>
                       </a:pPr>
                       <a:r>
@@ -21844,7 +22043,7 @@
                       <a:endParaRPr lang="en-US" sz="1150" dirty="0"/>
                     </a:p>
                   </a:txBody>
-                  <a:tcPr marT="36576" marB="36576" anchor="ctr">
+                  <a:tcPr marL="91440" marR="91440" marT="36576" marB="36576" anchor="ctr">
                     <a:lnL w="6350" cap="flat" cmpd="sng" algn="ctr">
                       <a:solidFill>
                         <a:srgbClr val="DCD9D0"/>
@@ -21888,7 +22087,7 @@
                     <a:bodyPr/>
                     <a:lstStyle/>
                     <a:p>
-                      <a:pPr marL="0" indent="0">
+                      <a:pPr indent="0" marL="0">
                         <a:buNone/>
                       </a:pPr>
                       <a:r>
@@ -21902,7 +22101,7 @@
                       <a:endParaRPr lang="en-US" sz="1150" dirty="0"/>
                     </a:p>
                   </a:txBody>
-                  <a:tcPr marT="36576" marB="36576" anchor="ctr">
+                  <a:tcPr marL="91440" marR="91440" marT="36576" marB="36576" anchor="ctr">
                     <a:lnL w="6350" cap="flat" cmpd="sng" algn="ctr">
                       <a:solidFill>
                         <a:srgbClr val="DCD9D0"/>
@@ -21941,11 +22140,6 @@
                     </a:lnB>
                   </a:tcPr>
                 </a:tc>
-                <a:extLst>
-                  <a:ext uri="{0D108BD9-81ED-4DB2-BD59-A6C34878D82A}">
-                    <a16:rowId xmlns:a16="http://schemas.microsoft.com/office/drawing/2014/main" val="10002"/>
-                  </a:ext>
-                </a:extLst>
               </a:tr>
               <a:tr h="731520">
                 <a:tc>
@@ -21953,7 +22147,7 @@
                     <a:bodyPr/>
                     <a:lstStyle/>
                     <a:p>
-                      <a:pPr marL="0" indent="0">
+                      <a:pPr indent="0" marL="0">
                         <a:buNone/>
                       </a:pPr>
                       <a:r>
@@ -21967,7 +22161,7 @@
                       <a:endParaRPr lang="en-US" sz="1150" dirty="0"/>
                     </a:p>
                   </a:txBody>
-                  <a:tcPr marT="36576" marB="36576" anchor="ctr">
+                  <a:tcPr marL="91440" marR="91440" marT="36576" marB="36576" anchor="ctr">
                     <a:lnL w="6350" cap="flat" cmpd="sng" algn="ctr">
                       <a:solidFill>
                         <a:srgbClr val="DCD9D0"/>
@@ -22011,7 +22205,7 @@
                     <a:bodyPr/>
                     <a:lstStyle/>
                     <a:p>
-                      <a:pPr marL="0" indent="0">
+                      <a:pPr indent="0" marL="0">
                         <a:buNone/>
                       </a:pPr>
                       <a:r>
@@ -22025,7 +22219,7 @@
                       <a:endParaRPr lang="en-US" sz="1150" dirty="0"/>
                     </a:p>
                     <a:p>
-                      <a:pPr marL="0" indent="0">
+                      <a:pPr indent="0" marL="0">
                         <a:buNone/>
                       </a:pPr>
                       <a:r>
@@ -22039,7 +22233,7 @@
                       <a:endParaRPr lang="en-US" sz="1150" dirty="0"/>
                     </a:p>
                   </a:txBody>
-                  <a:tcPr marT="36576" marB="36576" anchor="ctr">
+                  <a:tcPr marL="91440" marR="91440" marT="36576" marB="36576" anchor="ctr">
                     <a:lnL w="6350" cap="flat" cmpd="sng" algn="ctr">
                       <a:solidFill>
                         <a:srgbClr val="DCD9D0"/>
@@ -22083,7 +22277,7 @@
                     <a:bodyPr/>
                     <a:lstStyle/>
                     <a:p>
-                      <a:pPr marL="0" indent="0">
+                      <a:pPr indent="0" marL="0">
                         <a:buNone/>
                       </a:pPr>
                       <a:r>
@@ -22097,7 +22291,7 @@
                       <a:endParaRPr lang="en-US" sz="1150" dirty="0"/>
                     </a:p>
                     <a:p>
-                      <a:pPr marL="0" indent="0">
+                      <a:pPr indent="0" marL="0">
                         <a:buNone/>
                       </a:pPr>
                       <a:r>
@@ -22111,7 +22305,7 @@
                       <a:endParaRPr lang="en-US" sz="1150" dirty="0"/>
                     </a:p>
                   </a:txBody>
-                  <a:tcPr marT="36576" marB="36576" anchor="ctr">
+                  <a:tcPr marL="91440" marR="91440" marT="36576" marB="36576" anchor="ctr">
                     <a:lnL w="6350" cap="flat" cmpd="sng" algn="ctr">
                       <a:solidFill>
                         <a:srgbClr val="DCD9D0"/>
@@ -22150,11 +22344,6 @@
                     </a:lnB>
                   </a:tcPr>
                 </a:tc>
-                <a:extLst>
-                  <a:ext uri="{0D108BD9-81ED-4DB2-BD59-A6C34878D82A}">
-                    <a16:rowId xmlns:a16="http://schemas.microsoft.com/office/drawing/2014/main" val="10003"/>
-                  </a:ext>
-                </a:extLst>
               </a:tr>
               <a:tr h="475488">
                 <a:tc>
@@ -22162,7 +22351,7 @@
                     <a:bodyPr/>
                     <a:lstStyle/>
                     <a:p>
-                      <a:pPr marL="0" indent="0">
+                      <a:pPr indent="0" marL="0">
                         <a:buNone/>
                       </a:pPr>
                       <a:r>
@@ -22176,7 +22365,7 @@
                       <a:endParaRPr lang="en-US" sz="1150" dirty="0"/>
                     </a:p>
                   </a:txBody>
-                  <a:tcPr marT="36576" marB="36576" anchor="ctr">
+                  <a:tcPr marL="91440" marR="91440" marT="36576" marB="36576" anchor="ctr">
                     <a:lnL w="6350" cap="flat" cmpd="sng" algn="ctr">
                       <a:solidFill>
                         <a:srgbClr val="DCD9D0"/>
@@ -22220,7 +22409,7 @@
                     <a:bodyPr/>
                     <a:lstStyle/>
                     <a:p>
-                      <a:pPr marL="0" indent="0">
+                      <a:pPr indent="0" marL="0">
                         <a:buNone/>
                       </a:pPr>
                       <a:r>
@@ -22234,7 +22423,7 @@
                       <a:endParaRPr lang="en-US" sz="1150" dirty="0"/>
                     </a:p>
                   </a:txBody>
-                  <a:tcPr marT="36576" marB="36576" anchor="ctr">
+                  <a:tcPr marL="91440" marR="91440" marT="36576" marB="36576" anchor="ctr">
                     <a:lnL w="6350" cap="flat" cmpd="sng" algn="ctr">
                       <a:solidFill>
                         <a:srgbClr val="DCD9D0"/>
@@ -22278,7 +22467,7 @@
                     <a:bodyPr/>
                     <a:lstStyle/>
                     <a:p>
-                      <a:pPr marL="0" indent="0">
+                      <a:pPr indent="0" marL="0">
                         <a:buNone/>
                       </a:pPr>
                       <a:r>
@@ -22292,7 +22481,7 @@
                       <a:endParaRPr lang="en-US" sz="1150" dirty="0"/>
                     </a:p>
                   </a:txBody>
-                  <a:tcPr marT="36576" marB="36576" anchor="ctr">
+                  <a:tcPr marL="91440" marR="91440" marT="36576" marB="36576" anchor="ctr">
                     <a:lnL w="6350" cap="flat" cmpd="sng" algn="ctr">
                       <a:solidFill>
                         <a:srgbClr val="DCD9D0"/>
@@ -22331,11 +22520,6 @@
                     </a:lnB>
                   </a:tcPr>
                 </a:tc>
-                <a:extLst>
-                  <a:ext uri="{0D108BD9-81ED-4DB2-BD59-A6C34878D82A}">
-                    <a16:rowId xmlns:a16="http://schemas.microsoft.com/office/drawing/2014/main" val="10004"/>
-                  </a:ext>
-                </a:extLst>
               </a:tr>
               <a:tr h="475488">
                 <a:tc>
@@ -22343,7 +22527,7 @@
                     <a:bodyPr/>
                     <a:lstStyle/>
                     <a:p>
-                      <a:pPr marL="0" indent="0">
+                      <a:pPr indent="0" marL="0">
                         <a:buNone/>
                       </a:pPr>
                       <a:r>
@@ -22357,7 +22541,7 @@
                       <a:endParaRPr lang="en-US" sz="1150" dirty="0"/>
                     </a:p>
                   </a:txBody>
-                  <a:tcPr marT="36576" marB="36576" anchor="ctr">
+                  <a:tcPr marL="91440" marR="91440" marT="36576" marB="36576" anchor="ctr">
                     <a:lnL w="6350" cap="flat" cmpd="sng" algn="ctr">
                       <a:solidFill>
                         <a:srgbClr val="DCD9D0"/>
@@ -22401,7 +22585,7 @@
                     <a:bodyPr/>
                     <a:lstStyle/>
                     <a:p>
-                      <a:pPr marL="0" indent="0">
+                      <a:pPr indent="0" marL="0">
                         <a:buNone/>
                       </a:pPr>
                       <a:r>
@@ -22415,7 +22599,7 @@
                       <a:endParaRPr lang="en-US" sz="1150" dirty="0"/>
                     </a:p>
                   </a:txBody>
-                  <a:tcPr marT="36576" marB="36576" anchor="ctr">
+                  <a:tcPr marL="91440" marR="91440" marT="36576" marB="36576" anchor="ctr">
                     <a:lnL w="6350" cap="flat" cmpd="sng" algn="ctr">
                       <a:solidFill>
                         <a:srgbClr val="DCD9D0"/>
@@ -22459,7 +22643,7 @@
                     <a:bodyPr/>
                     <a:lstStyle/>
                     <a:p>
-                      <a:pPr marL="0" indent="0">
+                      <a:pPr indent="0" marL="0">
                         <a:buNone/>
                       </a:pPr>
                       <a:r>
@@ -22473,7 +22657,7 @@
                       <a:endParaRPr lang="en-US" sz="1150" dirty="0"/>
                     </a:p>
                   </a:txBody>
-                  <a:tcPr marT="36576" marB="36576" anchor="ctr">
+                  <a:tcPr marL="91440" marR="91440" marT="36576" marB="36576" anchor="ctr">
                     <a:lnL w="6350" cap="flat" cmpd="sng" algn="ctr">
                       <a:solidFill>
                         <a:srgbClr val="DCD9D0"/>
@@ -22512,11 +22696,6 @@
                     </a:lnB>
                   </a:tcPr>
                 </a:tc>
-                <a:extLst>
-                  <a:ext uri="{0D108BD9-81ED-4DB2-BD59-A6C34878D82A}">
-                    <a16:rowId xmlns:a16="http://schemas.microsoft.com/office/drawing/2014/main" val="10005"/>
-                  </a:ext>
-                </a:extLst>
               </a:tr>
               <a:tr h="475488">
                 <a:tc>
@@ -22524,7 +22703,7 @@
                     <a:bodyPr/>
                     <a:lstStyle/>
                     <a:p>
-                      <a:pPr marL="0" indent="0">
+                      <a:pPr indent="0" marL="0">
                         <a:buNone/>
                       </a:pPr>
                       <a:r>
@@ -22538,7 +22717,7 @@
                       <a:endParaRPr lang="en-US" sz="1150" dirty="0"/>
                     </a:p>
                   </a:txBody>
-                  <a:tcPr marT="36576" marB="36576" anchor="ctr">
+                  <a:tcPr marL="91440" marR="91440" marT="36576" marB="36576" anchor="ctr">
                     <a:lnL w="6350" cap="flat" cmpd="sng" algn="ctr">
                       <a:solidFill>
                         <a:srgbClr val="DCD9D0"/>
@@ -22582,7 +22761,7 @@
                     <a:bodyPr/>
                     <a:lstStyle/>
                     <a:p>
-                      <a:pPr marL="0" indent="0">
+                      <a:pPr indent="0" marL="0">
                         <a:buNone/>
                       </a:pPr>
                       <a:r>
@@ -22596,7 +22775,7 @@
                       <a:endParaRPr lang="en-US" sz="1150" dirty="0"/>
                     </a:p>
                   </a:txBody>
-                  <a:tcPr marT="36576" marB="36576" anchor="ctr">
+                  <a:tcPr marL="91440" marR="91440" marT="36576" marB="36576" anchor="ctr">
                     <a:lnL w="6350" cap="flat" cmpd="sng" algn="ctr">
                       <a:solidFill>
                         <a:srgbClr val="DCD9D0"/>
@@ -22640,7 +22819,7 @@
                     <a:bodyPr/>
                     <a:lstStyle/>
                     <a:p>
-                      <a:pPr marL="0" indent="0">
+                      <a:pPr indent="0" marL="0">
                         <a:buNone/>
                       </a:pPr>
                       <a:r>
@@ -22654,7 +22833,7 @@
                       <a:endParaRPr lang="en-US" sz="1150" dirty="0"/>
                     </a:p>
                   </a:txBody>
-                  <a:tcPr marT="36576" marB="36576" anchor="ctr">
+                  <a:tcPr marL="91440" marR="91440" marT="36576" marB="36576" anchor="ctr">
                     <a:lnL w="6350" cap="flat" cmpd="sng" algn="ctr">
                       <a:solidFill>
                         <a:srgbClr val="DCD9D0"/>
@@ -22693,11 +22872,6 @@
                     </a:lnB>
                   </a:tcPr>
                 </a:tc>
-                <a:extLst>
-                  <a:ext uri="{0D108BD9-81ED-4DB2-BD59-A6C34878D82A}">
-                    <a16:rowId xmlns:a16="http://schemas.microsoft.com/office/drawing/2014/main" val="10006"/>
-                  </a:ext>
-                </a:extLst>
               </a:tr>
             </a:tbl>
           </a:graphicData>
@@ -22723,7 +22897,7 @@
           </a:prstGeom>
           <a:extLst>
             <a:ext uri="{C572A759-6A51-4108-AA02-DFA0A04FC94B}">
-              <ma14:wrappingTextBoxFlag xmlns:ma14="http://schemas.microsoft.com/office/mac/drawingml/2011/main" xmlns="" val="0"/>
+              <ma14:wrappingTextBoxFlag xmlns:ma14="http://schemas.microsoft.com/office/mac/drawingml/2011/main" val="0"/>
             </a:ext>
           </a:extLst>
         </p:spPr>
@@ -22741,7 +22915,7 @@
           <a:p>
             <a:pPr algn="r"/>
             <a:fld id="{F7021451-1387-4CA6-816F-3879F97B5CBC}" type="slidenum">
-              <a:rPr lang="en-US" b="0"/>
+              <a:rPr b="0" lang="en-US"/>
               <a:t>7</a:t>
             </a:fld>
             <a:endParaRPr lang="en-US"/>
@@ -22776,11 +22950,9 @@
       <p:sp>
         <p:nvSpPr>
           <p:cNvPr id="2" name="Text 1"/>
-          <p:cNvSpPr>
-            <a:spLocks noGrp="1"/>
-          </p:cNvSpPr>
+          <p:cNvSpPr/>
           <p:nvPr>
-            <p:ph type="body" idx="101" hasCustomPrompt="1"/>
+            <p:ph idx="101" type="body" hasCustomPrompt="1"/>
           </p:nvPr>
         </p:nvSpPr>
         <p:spPr>
@@ -22798,7 +22970,7 @@
           <a:bodyPr wrap="square" lIns="0" tIns="0" rIns="0" bIns="0" rtlCol="0"/>
           <a:lstStyle/>
           <a:p>
-            <a:pPr marL="0" indent="0">
+            <a:pPr indent="0" marL="0">
               <a:buNone/>
             </a:pPr>
             <a:r>
@@ -22816,11 +22988,9 @@
       <p:sp>
         <p:nvSpPr>
           <p:cNvPr id="3" name="Text 1"/>
-          <p:cNvSpPr>
-            <a:spLocks noGrp="1"/>
-          </p:cNvSpPr>
+          <p:cNvSpPr/>
           <p:nvPr>
-            <p:ph type="title" idx="102" hasCustomPrompt="1"/>
+            <p:ph idx="102" type="title" hasCustomPrompt="1"/>
           </p:nvPr>
         </p:nvSpPr>
         <p:spPr>
@@ -22838,7 +23008,7 @@
           <a:bodyPr wrap="square" lIns="0" tIns="0" rIns="0" bIns="0" rtlCol="0" anchor="t"/>
           <a:lstStyle/>
           <a:p>
-            <a:pPr marL="0" indent="0" algn="l">
+            <a:pPr algn="l" indent="0" marL="0">
               <a:buNone/>
             </a:pPr>
             <a:r>
@@ -22901,7 +23071,7 @@
           <a:bodyPr wrap="square" lIns="0" tIns="0" rIns="0" bIns="0" rtlCol="0" anchor="ctr"/>
           <a:lstStyle/>
           <a:p>
-            <a:pPr marL="0" indent="0">
+            <a:pPr indent="0" marL="0">
               <a:buNone/>
             </a:pPr>
             <a:r>
@@ -22964,7 +23134,7 @@
           <a:bodyPr wrap="square" lIns="0" tIns="0" rIns="0" bIns="0" rtlCol="0" anchor="ctr"/>
           <a:lstStyle/>
           <a:p>
-            <a:pPr marL="0" indent="0" algn="ctr">
+            <a:pPr algn="ctr" indent="0" marL="0">
               <a:buNone/>
             </a:pPr>
             <a:r>
@@ -22978,7 +23148,7 @@
             <a:endParaRPr lang="en-US" sz="1100" dirty="0"/>
           </a:p>
           <a:p>
-            <a:pPr marL="0" indent="0" algn="ctr">
+            <a:pPr algn="ctr" indent="0" marL="0">
               <a:buNone/>
             </a:pPr>
             <a:r>
@@ -23065,7 +23235,7 @@
           <a:bodyPr wrap="square" lIns="0" tIns="0" rIns="0" bIns="0" rtlCol="0" anchor="ctr"/>
           <a:lstStyle/>
           <a:p>
-            <a:pPr marL="0" indent="0" algn="ctr">
+            <a:pPr algn="ctr" indent="0" marL="0">
               <a:buNone/>
             </a:pPr>
             <a:r>
@@ -23079,7 +23249,7 @@
             <a:endParaRPr lang="en-US" sz="1100" dirty="0"/>
           </a:p>
           <a:p>
-            <a:pPr marL="0" indent="0" algn="ctr">
+            <a:pPr algn="ctr" indent="0" marL="0">
               <a:buNone/>
             </a:pPr>
             <a:r>
@@ -23166,7 +23336,7 @@
           <a:bodyPr wrap="square" lIns="0" tIns="0" rIns="0" bIns="0" rtlCol="0" anchor="ctr"/>
           <a:lstStyle/>
           <a:p>
-            <a:pPr marL="0" indent="0" algn="ctr">
+            <a:pPr algn="ctr" indent="0" marL="0">
               <a:buNone/>
             </a:pPr>
             <a:r>
@@ -23180,7 +23350,7 @@
             <a:endParaRPr lang="en-US" sz="1100" dirty="0"/>
           </a:p>
           <a:p>
-            <a:pPr marL="0" indent="0" algn="ctr">
+            <a:pPr algn="ctr" indent="0" marL="0">
               <a:buNone/>
             </a:pPr>
             <a:r>
@@ -23216,7 +23386,7 @@
           <a:bodyPr wrap="square" lIns="0" tIns="0" rIns="0" bIns="0" rtlCol="0" anchor="ctr"/>
           <a:lstStyle/>
           <a:p>
-            <a:pPr marL="0" indent="0" algn="ctr">
+            <a:pPr algn="ctr" indent="0" marL="0">
               <a:buNone/>
             </a:pPr>
             <a:r>
@@ -23276,7 +23446,7 @@
           <a:bodyPr wrap="square" lIns="0" tIns="0" rIns="0" bIns="0" rtlCol="0" anchor="b"/>
           <a:lstStyle/>
           <a:p>
-            <a:pPr marL="0" indent="0" algn="ctr">
+            <a:pPr algn="ctr" indent="0" marL="0">
               <a:buNone/>
             </a:pPr>
             <a:r>
@@ -23290,7 +23460,7 @@
             <a:endParaRPr lang="en-US" sz="950" dirty="0"/>
           </a:p>
           <a:p>
-            <a:pPr marL="0" indent="0" algn="ctr">
+            <a:pPr algn="ctr" indent="0" marL="0">
               <a:buNone/>
             </a:pPr>
             <a:r>
@@ -23326,7 +23496,7 @@
           <a:bodyPr wrap="square" lIns="0" tIns="0" rIns="0" bIns="0" rtlCol="0" anchor="t"/>
           <a:lstStyle/>
           <a:p>
-            <a:pPr marL="0" indent="0" algn="ctr">
+            <a:pPr algn="ctr" indent="0" marL="0">
               <a:buNone/>
             </a:pPr>
             <a:r>
@@ -23340,7 +23510,7 @@
             <a:endParaRPr lang="en-US" sz="950" dirty="0"/>
           </a:p>
           <a:p>
-            <a:pPr marL="0" indent="0" algn="ctr">
+            <a:pPr algn="ctr" indent="0" marL="0">
               <a:buNone/>
             </a:pPr>
             <a:r>
@@ -23403,7 +23573,7 @@
           <a:bodyPr wrap="square" lIns="0" tIns="0" rIns="0" bIns="0" rtlCol="0" anchor="t"/>
           <a:lstStyle/>
           <a:p>
-            <a:pPr marL="0" indent="0">
+            <a:pPr indent="0" marL="0">
               <a:spcAft>
                 <a:spcPts val="200"/>
               </a:spcAft>
@@ -23420,7 +23590,7 @@
             <a:endParaRPr lang="en-US" sz="1250" dirty="0"/>
           </a:p>
           <a:p>
-            <a:pPr marL="0" indent="0">
+            <a:pPr indent="0" marL="0">
               <a:spcAft>
                 <a:spcPts val="200"/>
               </a:spcAft>
@@ -23437,7 +23607,7 @@
             <a:endParaRPr lang="en-US" sz="1250" dirty="0"/>
           </a:p>
           <a:p>
-            <a:pPr marL="0" indent="0">
+            <a:pPr indent="0" marL="0">
               <a:spcAft>
                 <a:spcPts val="200"/>
               </a:spcAft>
@@ -23454,7 +23624,7 @@
             <a:endParaRPr lang="en-US" sz="1250" dirty="0"/>
           </a:p>
           <a:p>
-            <a:pPr marL="0" indent="0">
+            <a:pPr indent="0" marL="0">
               <a:spcAft>
                 <a:spcPts val="200"/>
               </a:spcAft>
@@ -23471,7 +23641,7 @@
             <a:endParaRPr lang="en-US" sz="1250" dirty="0"/>
           </a:p>
           <a:p>
-            <a:pPr marL="0" indent="0">
+            <a:pPr indent="0" marL="0">
               <a:spcAft>
                 <a:spcPts val="200"/>
               </a:spcAft>
@@ -23534,7 +23704,7 @@
           <a:bodyPr wrap="square" lIns="0" tIns="0" rIns="0" bIns="0" rtlCol="0" anchor="ctr"/>
           <a:lstStyle/>
           <a:p>
-            <a:pPr marL="0" indent="0">
+            <a:pPr indent="0" marL="0">
               <a:buNone/>
             </a:pPr>
             <a:r>
@@ -23597,7 +23767,7 @@
           <a:bodyPr wrap="square" lIns="0" tIns="0" rIns="0" bIns="0" rtlCol="0" anchor="ctr"/>
           <a:lstStyle/>
           <a:p>
-            <a:pPr marL="0" indent="0">
+            <a:pPr indent="0" marL="0">
               <a:buNone/>
             </a:pPr>
             <a:r>
@@ -23611,7 +23781,7 @@
             <a:endParaRPr lang="en-US" sz="1100" dirty="0"/>
           </a:p>
           <a:p>
-            <a:pPr marL="0" indent="0">
+            <a:pPr indent="0" marL="0">
               <a:buNone/>
             </a:pPr>
             <a:r>
@@ -23647,7 +23817,7 @@
           <a:bodyPr wrap="square" lIns="0" tIns="0" rIns="0" bIns="0" rtlCol="0" anchor="ctr"/>
           <a:lstStyle/>
           <a:p>
-            <a:pPr marL="0" indent="0">
+            <a:pPr indent="0" marL="0">
               <a:buNone/>
             </a:pPr>
             <a:r>
@@ -23708,7 +23878,7 @@
           <a:bodyPr wrap="square" lIns="0" tIns="0" rIns="0" bIns="0" rtlCol="0" anchor="ctr"/>
           <a:lstStyle/>
           <a:p>
-            <a:pPr marL="0" indent="0" algn="ctr">
+            <a:pPr algn="ctr" indent="0" marL="0">
               <a:buNone/>
             </a:pPr>
             <a:r>
@@ -23744,7 +23914,7 @@
           <a:bodyPr wrap="square" lIns="0" tIns="0" rIns="0" bIns="0" rtlCol="0" anchor="t"/>
           <a:lstStyle/>
           <a:p>
-            <a:pPr marL="0" indent="0">
+            <a:pPr indent="0" marL="0">
               <a:buNone/>
             </a:pPr>
             <a:r>
@@ -23805,7 +23975,7 @@
           <a:bodyPr wrap="square" lIns="0" tIns="0" rIns="0" bIns="0" rtlCol="0" anchor="ctr"/>
           <a:lstStyle/>
           <a:p>
-            <a:pPr marL="0" indent="0" algn="ctr">
+            <a:pPr algn="ctr" indent="0" marL="0">
               <a:buNone/>
             </a:pPr>
             <a:r>
@@ -23841,7 +24011,7 @@
           <a:bodyPr wrap="square" lIns="0" tIns="0" rIns="0" bIns="0" rtlCol="0" anchor="t"/>
           <a:lstStyle/>
           <a:p>
-            <a:pPr marL="0" indent="0">
+            <a:pPr indent="0" marL="0">
               <a:buNone/>
             </a:pPr>
             <a:r>
@@ -23902,7 +24072,7 @@
           <a:bodyPr wrap="square" lIns="0" tIns="0" rIns="0" bIns="0" rtlCol="0" anchor="ctr"/>
           <a:lstStyle/>
           <a:p>
-            <a:pPr marL="0" indent="0" algn="ctr">
+            <a:pPr algn="ctr" indent="0" marL="0">
               <a:buNone/>
             </a:pPr>
             <a:r>
@@ -23938,7 +24108,7 @@
           <a:bodyPr wrap="square" lIns="0" tIns="0" rIns="0" bIns="0" rtlCol="0" anchor="t"/>
           <a:lstStyle/>
           <a:p>
-            <a:pPr marL="0" indent="0">
+            <a:pPr indent="0" marL="0">
               <a:buNone/>
             </a:pPr>
             <a:r>
@@ -23955,7 +24125,7 @@
       </p:sp>
       <p:sp>
         <p:nvSpPr>
-          <p:cNvPr id="34" name="Slide Number Placeholder 0"/>
+          <p:cNvPr id="25" name="Slide Number Placeholder 0"/>
           <p:cNvSpPr>
             <a:spLocks noGrp="1"/>
           </p:cNvSpPr>
@@ -23973,7 +24143,7 @@
           </a:prstGeom>
           <a:extLst>
             <a:ext uri="{C572A759-6A51-4108-AA02-DFA0A04FC94B}">
-              <ma14:wrappingTextBoxFlag xmlns:ma14="http://schemas.microsoft.com/office/mac/drawingml/2011/main" xmlns="" val="0"/>
+              <ma14:wrappingTextBoxFlag xmlns:ma14="http://schemas.microsoft.com/office/mac/drawingml/2011/main" val="0"/>
             </a:ext>
           </a:extLst>
         </p:spPr>
@@ -23991,7 +24161,7 @@
           <a:p>
             <a:pPr algn="r"/>
             <a:fld id="{F7021451-1387-4CA6-816F-3879F97B5CBC}" type="slidenum">
-              <a:rPr lang="en-US" b="0"/>
+              <a:rPr b="0" lang="en-US"/>
               <a:t>8</a:t>
             </a:fld>
             <a:endParaRPr lang="en-US"/>
@@ -24026,11 +24196,9 @@
       <p:sp>
         <p:nvSpPr>
           <p:cNvPr id="2" name="Text 1"/>
-          <p:cNvSpPr>
-            <a:spLocks noGrp="1"/>
-          </p:cNvSpPr>
+          <p:cNvSpPr/>
           <p:nvPr>
-            <p:ph type="body" idx="101" hasCustomPrompt="1"/>
+            <p:ph idx="101" type="body" hasCustomPrompt="1"/>
           </p:nvPr>
         </p:nvSpPr>
         <p:spPr>
@@ -24048,7 +24216,7 @@
           <a:bodyPr wrap="square" lIns="0" tIns="0" rIns="0" bIns="0" rtlCol="0"/>
           <a:lstStyle/>
           <a:p>
-            <a:pPr marL="0" indent="0">
+            <a:pPr indent="0" marL="0">
               <a:buNone/>
             </a:pPr>
             <a:r>
@@ -24066,11 +24234,9 @@
       <p:sp>
         <p:nvSpPr>
           <p:cNvPr id="3" name="Text 1"/>
-          <p:cNvSpPr>
-            <a:spLocks noGrp="1"/>
-          </p:cNvSpPr>
+          <p:cNvSpPr/>
           <p:nvPr>
-            <p:ph type="title" idx="102" hasCustomPrompt="1"/>
+            <p:ph idx="102" type="title" hasCustomPrompt="1"/>
           </p:nvPr>
         </p:nvSpPr>
         <p:spPr>
@@ -24088,7 +24254,7 @@
           <a:bodyPr wrap="square" lIns="0" tIns="0" rIns="0" bIns="0" rtlCol="0" anchor="t"/>
           <a:lstStyle/>
           <a:p>
-            <a:pPr marL="0" indent="0" algn="l">
+            <a:pPr algn="l" indent="0" marL="0">
               <a:buNone/>
             </a:pPr>
             <a:r>
@@ -24132,14 +24298,14 @@
       </p:sp>
       <p:pic>
         <p:nvPicPr>
-          <p:cNvPr id="5" name="캘린더" descr="C:\Users\user\Desktop\albaguard기술창업\docs\screenshots\2-calendar.jpg"/>
+          <p:cNvPr id="5" name="캘린더" descr="C:\Users\user\Desktop\albaguard기술창업\docs\screenshots\2-calendar.jpg">    </p:cNvPr>
           <p:cNvPicPr>
             <a:picLocks noChangeAspect="1"/>
           </p:cNvPicPr>
           <p:nvPr/>
         </p:nvPicPr>
         <p:blipFill>
-          <a:blip r:embed="rId3"/>
+          <a:blip r:embed="rId1"/>
           <a:stretch>
             <a:fillRect/>
           </a:stretch>
@@ -24175,7 +24341,7 @@
           <a:bodyPr wrap="square" lIns="0" tIns="0" rIns="0" bIns="0" rtlCol="0" anchor="ctr"/>
           <a:lstStyle/>
           <a:p>
-            <a:pPr marL="0" indent="0" algn="ctr">
+            <a:pPr algn="ctr" indent="0" marL="0">
               <a:buNone/>
             </a:pPr>
             <a:r>
@@ -24211,7 +24377,7 @@
           <a:bodyPr wrap="square" lIns="0" tIns="0" rIns="0" bIns="0" rtlCol="0" anchor="t"/>
           <a:lstStyle/>
           <a:p>
-            <a:pPr marL="0" indent="0" algn="ctr">
+            <a:pPr algn="ctr" indent="0" marL="0">
               <a:buNone/>
             </a:pPr>
             <a:r>
@@ -24225,7 +24391,7 @@
             <a:endParaRPr lang="en-US" sz="900" dirty="0"/>
           </a:p>
           <a:p>
-            <a:pPr marL="0" indent="0" algn="ctr">
+            <a:pPr algn="ctr" indent="0" marL="0">
               <a:buNone/>
             </a:pPr>
             <a:r>
@@ -24269,14 +24435,14 @@
       </p:sp>
       <p:pic>
         <p:nvPicPr>
-          <p:cNvPr id="9" name="설정" descr="C:\Users\user\Desktop\albaguard기술창업\docs\screenshots\10-settings.jpg"/>
+          <p:cNvPr id="9" name="설정" descr="C:\Users\user\Desktop\albaguard기술창업\docs\screenshots\10-settings.jpg">    </p:cNvPr>
           <p:cNvPicPr>
             <a:picLocks noChangeAspect="1"/>
           </p:cNvPicPr>
           <p:nvPr/>
         </p:nvPicPr>
         <p:blipFill>
-          <a:blip r:embed="rId4"/>
+          <a:blip r:embed="rId2"/>
           <a:stretch>
             <a:fillRect/>
           </a:stretch>
@@ -24312,7 +24478,7 @@
           <a:bodyPr wrap="square" lIns="0" tIns="0" rIns="0" bIns="0" rtlCol="0" anchor="ctr"/>
           <a:lstStyle/>
           <a:p>
-            <a:pPr marL="0" indent="0" algn="ctr">
+            <a:pPr algn="ctr" indent="0" marL="0">
               <a:buNone/>
             </a:pPr>
             <a:r>
@@ -24348,7 +24514,7 @@
           <a:bodyPr wrap="square" lIns="0" tIns="0" rIns="0" bIns="0" rtlCol="0" anchor="t"/>
           <a:lstStyle/>
           <a:p>
-            <a:pPr marL="0" indent="0" algn="ctr">
+            <a:pPr algn="ctr" indent="0" marL="0">
               <a:buNone/>
             </a:pPr>
             <a:r>
@@ -24362,7 +24528,7 @@
             <a:endParaRPr lang="en-US" sz="900" dirty="0"/>
           </a:p>
           <a:p>
-            <a:pPr marL="0" indent="0" algn="ctr">
+            <a:pPr algn="ctr" indent="0" marL="0">
               <a:buNone/>
             </a:pPr>
             <a:r>
@@ -24406,14 +24572,14 @@
       </p:sp>
       <p:pic>
         <p:nvPicPr>
-          <p:cNvPr id="13" name="증빙 묶음 PDF" descr="C:\Users\user\Desktop\albaguard기술창업\docs\screenshots\8-evidence.jpg"/>
+          <p:cNvPr id="13" name="증빙 묶음 PDF" descr="C:\Users\user\Desktop\albaguard기술창업\docs\screenshots\8-evidence.jpg">    </p:cNvPr>
           <p:cNvPicPr>
             <a:picLocks noChangeAspect="1"/>
           </p:cNvPicPr>
           <p:nvPr/>
         </p:nvPicPr>
         <p:blipFill>
-          <a:blip r:embed="rId5"/>
+          <a:blip r:embed="rId3"/>
           <a:stretch>
             <a:fillRect/>
           </a:stretch>
@@ -24449,7 +24615,7 @@
           <a:bodyPr wrap="square" lIns="0" tIns="0" rIns="0" bIns="0" rtlCol="0" anchor="ctr"/>
           <a:lstStyle/>
           <a:p>
-            <a:pPr marL="0" indent="0" algn="ctr">
+            <a:pPr algn="ctr" indent="0" marL="0">
               <a:buNone/>
             </a:pPr>
             <a:r>
@@ -24485,7 +24651,7 @@
           <a:bodyPr wrap="square" lIns="0" tIns="0" rIns="0" bIns="0" rtlCol="0" anchor="t"/>
           <a:lstStyle/>
           <a:p>
-            <a:pPr marL="0" indent="0" algn="ctr">
+            <a:pPr algn="ctr" indent="0" marL="0">
               <a:buNone/>
             </a:pPr>
             <a:r>
@@ -24499,7 +24665,7 @@
             <a:endParaRPr lang="en-US" sz="900" dirty="0"/>
           </a:p>
           <a:p>
-            <a:pPr marL="0" indent="0" algn="ctr">
+            <a:pPr algn="ctr" indent="0" marL="0">
               <a:buNone/>
             </a:pPr>
             <a:r>
@@ -24543,14 +24709,14 @@
       </p:sp>
       <p:pic>
         <p:nvPicPr>
-          <p:cNvPr id="17" name="확인 페이지" descr="C:\Users\user\Desktop\albaguard기술창업\docs\screenshots\9-verify.jpg"/>
+          <p:cNvPr id="17" name="확인 페이지" descr="C:\Users\user\Desktop\albaguard기술창업\docs\screenshots\9-verify.jpg">    </p:cNvPr>
           <p:cNvPicPr>
             <a:picLocks noChangeAspect="1"/>
           </p:cNvPicPr>
           <p:nvPr/>
         </p:nvPicPr>
         <p:blipFill>
-          <a:blip r:embed="rId6"/>
+          <a:blip r:embed="rId4"/>
           <a:stretch>
             <a:fillRect/>
           </a:stretch>
@@ -24586,7 +24752,7 @@
           <a:bodyPr wrap="square" lIns="0" tIns="0" rIns="0" bIns="0" rtlCol="0" anchor="ctr"/>
           <a:lstStyle/>
           <a:p>
-            <a:pPr marL="0" indent="0" algn="ctr">
+            <a:pPr algn="ctr" indent="0" marL="0">
               <a:buNone/>
             </a:pPr>
             <a:r>
@@ -24622,7 +24788,7 @@
           <a:bodyPr wrap="square" lIns="0" tIns="0" rIns="0" bIns="0" rtlCol="0" anchor="t"/>
           <a:lstStyle/>
           <a:p>
-            <a:pPr marL="0" indent="0" algn="ctr">
+            <a:pPr algn="ctr" indent="0" marL="0">
               <a:buNone/>
             </a:pPr>
             <a:r>
@@ -24657,7 +24823,7 @@
           </a:prstGeom>
           <a:extLst>
             <a:ext uri="{C572A759-6A51-4108-AA02-DFA0A04FC94B}">
-              <ma14:wrappingTextBoxFlag xmlns:ma14="http://schemas.microsoft.com/office/mac/drawingml/2011/main" xmlns="" val="0"/>
+              <ma14:wrappingTextBoxFlag xmlns:ma14="http://schemas.microsoft.com/office/mac/drawingml/2011/main" val="0"/>
             </a:ext>
           </a:extLst>
         </p:spPr>
@@ -24675,7 +24841,7 @@
           <a:p>
             <a:pPr algn="r"/>
             <a:fld id="{F7021451-1387-4CA6-816F-3879F97B5CBC}" type="slidenum">
-              <a:rPr lang="en-US" b="0"/>
+              <a:rPr b="0" lang="en-US"/>
               <a:t>9</a:t>
             </a:fld>
             <a:endParaRPr lang="en-US"/>
@@ -24983,299 +25149,4 @@
     </a:ext>
   </a:extLst>
 </a:theme>
-</file>
-
-<file path=ppt/theme/theme2.xml><?xml version="1.0" encoding="utf-8"?>
-<a:theme xmlns:a="http://schemas.openxmlformats.org/drawingml/2006/main" name="Office 테마">
-  <a:themeElements>
-    <a:clrScheme name="Office">
-      <a:dk1>
-        <a:sysClr val="windowText" lastClr="000000"/>
-      </a:dk1>
-      <a:lt1>
-        <a:sysClr val="window" lastClr="FFFFFF"/>
-      </a:lt1>
-      <a:dk2>
-        <a:srgbClr val="44546A"/>
-      </a:dk2>
-      <a:lt2>
-        <a:srgbClr val="E7E6E6"/>
-      </a:lt2>
-      <a:accent1>
-        <a:srgbClr val="4472C4"/>
-      </a:accent1>
-      <a:accent2>
-        <a:srgbClr val="ED7D31"/>
-      </a:accent2>
-      <a:accent3>
-        <a:srgbClr val="A5A5A5"/>
-      </a:accent3>
-      <a:accent4>
-        <a:srgbClr val="FFC000"/>
-      </a:accent4>
-      <a:accent5>
-        <a:srgbClr val="5B9BD5"/>
-      </a:accent5>
-      <a:accent6>
-        <a:srgbClr val="70AD47"/>
-      </a:accent6>
-      <a:hlink>
-        <a:srgbClr val="0563C1"/>
-      </a:hlink>
-      <a:folHlink>
-        <a:srgbClr val="954F72"/>
-      </a:folHlink>
-    </a:clrScheme>
-    <a:fontScheme name="Office">
-      <a:majorFont>
-        <a:latin typeface="맑은 고딕" panose="020F0302020204030204"/>
-        <a:ea typeface=""/>
-        <a:cs typeface=""/>
-        <a:font script="Jpan" typeface="游ゴシック Light"/>
-        <a:font script="Hang" typeface="맑은 고딕"/>
-        <a:font script="Hans" typeface="等线 Light"/>
-        <a:font script="Hant" typeface="新細明體"/>
-        <a:font script="Arab" typeface="Times New Roman"/>
-        <a:font script="Hebr" typeface="Times New Roman"/>
-        <a:font script="Thai" typeface="Angsana New"/>
-        <a:font script="Ethi" typeface="Nyala"/>
-        <a:font script="Beng" typeface="Vrinda"/>
-        <a:font script="Gujr" typeface="Shruti"/>
-        <a:font script="Khmr" typeface="MoolBoran"/>
-        <a:font script="Knda" typeface="Tunga"/>
-        <a:font script="Guru" typeface="Raavi"/>
-        <a:font script="Cans" typeface="Euphemia"/>
-        <a:font script="Cher" typeface="Plantagenet Cherokee"/>
-        <a:font script="Yiii" typeface="Microsoft Yi Baiti"/>
-        <a:font script="Tibt" typeface="Microsoft Himalaya"/>
-        <a:font script="Thaa" typeface="MV Boli"/>
-        <a:font script="Deva" typeface="Mangal"/>
-        <a:font script="Telu" typeface="Gautami"/>
-        <a:font script="Taml" typeface="Latha"/>
-        <a:font script="Syrc" typeface="Estrangelo Edessa"/>
-        <a:font script="Orya" typeface="Kalinga"/>
-        <a:font script="Mlym" typeface="Kartika"/>
-        <a:font script="Laoo" typeface="DokChampa"/>
-        <a:font script="Sinh" typeface="Iskoola Pota"/>
-        <a:font script="Mong" typeface="Mongolian Baiti"/>
-        <a:font script="Viet" typeface="Times New Roman"/>
-        <a:font script="Uigh" typeface="Microsoft Uighur"/>
-        <a:font script="Geor" typeface="Sylfaen"/>
-        <a:font script="Armn" typeface="Arial"/>
-        <a:font script="Bugi" typeface="Leelawadee UI"/>
-        <a:font script="Bopo" typeface="Microsoft JhengHei"/>
-        <a:font script="Java" typeface="Javanese Text"/>
-        <a:font script="Lisu" typeface="Segoe UI"/>
-        <a:font script="Mymr" typeface="Myanmar Text"/>
-        <a:font script="Nkoo" typeface="Ebrima"/>
-        <a:font script="Olck" typeface="Nirmala UI"/>
-        <a:font script="Osma" typeface="Ebrima"/>
-        <a:font script="Phag" typeface="Phagspa"/>
-        <a:font script="Syrn" typeface="Estrangelo Edessa"/>
-        <a:font script="Syrj" typeface="Estrangelo Edessa"/>
-        <a:font script="Syre" typeface="Estrangelo Edessa"/>
-        <a:font script="Sora" typeface="Nirmala UI"/>
-        <a:font script="Tale" typeface="Microsoft Tai Le"/>
-        <a:font script="Talu" typeface="Microsoft New Tai Lue"/>
-        <a:font script="Tfng" typeface="Ebrima"/>
-      </a:majorFont>
-      <a:minorFont>
-        <a:latin typeface="맑은 고딕" panose="020F0502020204030204"/>
-        <a:ea typeface=""/>
-        <a:cs typeface=""/>
-        <a:font script="Jpan" typeface="游ゴシック"/>
-        <a:font script="Hang" typeface="맑은 고딕"/>
-        <a:font script="Hans" typeface="等线"/>
-        <a:font script="Hant" typeface="新細明體"/>
-        <a:font script="Arab" typeface="Arial"/>
-        <a:font script="Hebr" typeface="Arial"/>
-        <a:font script="Thai" typeface="Cordia New"/>
-        <a:font script="Ethi" typeface="Nyala"/>
-        <a:font script="Beng" typeface="Vrinda"/>
-        <a:font script="Gujr" typeface="Shruti"/>
-        <a:font script="Khmr" typeface="DaunPenh"/>
-        <a:font script="Knda" typeface="Tunga"/>
-        <a:font script="Guru" typeface="Raavi"/>
-        <a:font script="Cans" typeface="Euphemia"/>
-        <a:font script="Cher" typeface="Plantagenet Cherokee"/>
-        <a:font script="Yiii" typeface="Microsoft Yi Baiti"/>
-        <a:font script="Tibt" typeface="Microsoft Himalaya"/>
-        <a:font script="Thaa" typeface="MV Boli"/>
-        <a:font script="Deva" typeface="Mangal"/>
-        <a:font script="Telu" typeface="Gautami"/>
-        <a:font script="Taml" typeface="Latha"/>
-        <a:font script="Syrc" typeface="Estrangelo Edessa"/>
-        <a:font script="Orya" typeface="Kalinga"/>
-        <a:font script="Mlym" typeface="Kartika"/>
-        <a:font script="Laoo" typeface="DokChampa"/>
-        <a:font script="Sinh" typeface="Iskoola Pota"/>
-        <a:font script="Mong" typeface="Mongolian Baiti"/>
-        <a:font script="Viet" typeface="Arial"/>
-        <a:font script="Uigh" typeface="Microsoft Uighur"/>
-        <a:font script="Geor" typeface="Sylfaen"/>
-        <a:font script="Armn" typeface="Arial"/>
-        <a:font script="Bugi" typeface="Leelawadee UI"/>
-        <a:font script="Bopo" typeface="Microsoft JhengHei"/>
-        <a:font script="Java" typeface="Javanese Text"/>
-        <a:font script="Lisu" typeface="Segoe UI"/>
-        <a:font script="Mymr" typeface="Myanmar Text"/>
-        <a:font script="Nkoo" typeface="Ebrima"/>
-        <a:font script="Olck" typeface="Nirmala UI"/>
-        <a:font script="Osma" typeface="Ebrima"/>
-        <a:font script="Phag" typeface="Phagspa"/>
-        <a:font script="Syrn" typeface="Estrangelo Edessa"/>
-        <a:font script="Syrj" typeface="Estrangelo Edessa"/>
-        <a:font script="Syre" typeface="Estrangelo Edessa"/>
-        <a:font script="Sora" typeface="Nirmala UI"/>
-        <a:font script="Tale" typeface="Microsoft Tai Le"/>
-        <a:font script="Talu" typeface="Microsoft New Tai Lue"/>
-        <a:font script="Tfng" typeface="Ebrima"/>
-      </a:minorFont>
-    </a:fontScheme>
-    <a:fmtScheme name="Office">
-      <a:fillStyleLst>
-        <a:solidFill>
-          <a:schemeClr val="phClr"/>
-        </a:solidFill>
-        <a:gradFill rotWithShape="1">
-          <a:gsLst>
-            <a:gs pos="0">
-              <a:schemeClr val="phClr">
-                <a:lumMod val="110000"/>
-                <a:satMod val="105000"/>
-                <a:tint val="67000"/>
-              </a:schemeClr>
-            </a:gs>
-            <a:gs pos="50000">
-              <a:schemeClr val="phClr">
-                <a:lumMod val="105000"/>
-                <a:satMod val="103000"/>
-                <a:tint val="73000"/>
-              </a:schemeClr>
-            </a:gs>
-            <a:gs pos="100000">
-              <a:schemeClr val="phClr">
-                <a:lumMod val="105000"/>
-                <a:satMod val="109000"/>
-                <a:tint val="81000"/>
-              </a:schemeClr>
-            </a:gs>
-          </a:gsLst>
-          <a:lin ang="5400000" scaled="0"/>
-        </a:gradFill>
-        <a:gradFill rotWithShape="1">
-          <a:gsLst>
-            <a:gs pos="0">
-              <a:schemeClr val="phClr">
-                <a:satMod val="103000"/>
-                <a:lumMod val="102000"/>
-                <a:tint val="94000"/>
-              </a:schemeClr>
-            </a:gs>
-            <a:gs pos="50000">
-              <a:schemeClr val="phClr">
-                <a:satMod val="110000"/>
-                <a:lumMod val="100000"/>
-                <a:shade val="100000"/>
-              </a:schemeClr>
-            </a:gs>
-            <a:gs pos="100000">
-              <a:schemeClr val="phClr">
-                <a:lumMod val="99000"/>
-                <a:satMod val="120000"/>
-                <a:shade val="78000"/>
-              </a:schemeClr>
-            </a:gs>
-          </a:gsLst>
-          <a:lin ang="5400000" scaled="0"/>
-        </a:gradFill>
-      </a:fillStyleLst>
-      <a:lnStyleLst>
-        <a:ln w="6350" cap="flat" cmpd="sng" algn="ctr">
-          <a:solidFill>
-            <a:schemeClr val="phClr"/>
-          </a:solidFill>
-          <a:prstDash val="solid"/>
-          <a:miter lim="800000"/>
-        </a:ln>
-        <a:ln w="12700" cap="flat" cmpd="sng" algn="ctr">
-          <a:solidFill>
-            <a:schemeClr val="phClr"/>
-          </a:solidFill>
-          <a:prstDash val="solid"/>
-          <a:miter lim="800000"/>
-        </a:ln>
-        <a:ln w="19050" cap="flat" cmpd="sng" algn="ctr">
-          <a:solidFill>
-            <a:schemeClr val="phClr"/>
-          </a:solidFill>
-          <a:prstDash val="solid"/>
-          <a:miter lim="800000"/>
-        </a:ln>
-      </a:lnStyleLst>
-      <a:effectStyleLst>
-        <a:effectStyle>
-          <a:effectLst/>
-        </a:effectStyle>
-        <a:effectStyle>
-          <a:effectLst/>
-        </a:effectStyle>
-        <a:effectStyle>
-          <a:effectLst>
-            <a:outerShdw blurRad="57150" dist="19050" dir="5400000" algn="ctr" rotWithShape="0">
-              <a:srgbClr val="000000">
-                <a:alpha val="63000"/>
-              </a:srgbClr>
-            </a:outerShdw>
-          </a:effectLst>
-        </a:effectStyle>
-      </a:effectStyleLst>
-      <a:bgFillStyleLst>
-        <a:solidFill>
-          <a:schemeClr val="phClr"/>
-        </a:solidFill>
-        <a:solidFill>
-          <a:schemeClr val="phClr">
-            <a:tint val="95000"/>
-            <a:satMod val="170000"/>
-          </a:schemeClr>
-        </a:solidFill>
-        <a:gradFill rotWithShape="1">
-          <a:gsLst>
-            <a:gs pos="0">
-              <a:schemeClr val="phClr">
-                <a:tint val="93000"/>
-                <a:satMod val="150000"/>
-                <a:shade val="98000"/>
-                <a:lumMod val="102000"/>
-              </a:schemeClr>
-            </a:gs>
-            <a:gs pos="50000">
-              <a:schemeClr val="phClr">
-                <a:tint val="98000"/>
-                <a:satMod val="130000"/>
-                <a:shade val="90000"/>
-                <a:lumMod val="103000"/>
-              </a:schemeClr>
-            </a:gs>
-            <a:gs pos="100000">
-              <a:schemeClr val="phClr">
-                <a:shade val="63000"/>
-                <a:satMod val="120000"/>
-              </a:schemeClr>
-            </a:gs>
-          </a:gsLst>
-          <a:lin ang="5400000" scaled="0"/>
-        </a:gradFill>
-      </a:bgFillStyleLst>
-    </a:fmtScheme>
-  </a:themeElements>
-  <a:objectDefaults/>
-  <a:extraClrSchemeLst/>
-  <a:extLst>
-    <a:ext uri="{05A4C25C-085E-4340-85A3-A5531E510DB2}">
-      <thm15:themeFamily xmlns:thm15="http://schemas.microsoft.com/office/thememl/2012/main" name="Office Theme" id="{62F939B6-93AF-4DB8-9C6B-D6C7DFDC589F}" vid="{4A3C46E8-61CC-4603-A589-7422A47A8E4A}"/>
-    </a:ext>
-  </a:extLst>
-</a:theme>
 </file>
--- a/docs/06_중간발표_PPT.pptx
+++ b/docs/06_중간발표_PPT.pptx
@@ -125,31 +125,31 @@
   <p:extLst>
     <p:ext uri="{521415D9-36F7-43E2-AB2F-B90AF26B5E84}">
       <p14:sectionLst xmlns:p14="http://schemas.microsoft.com/office/powerpoint/2010/main">
-        <p14:section name="① 표지·팀 소개" id="{5dfe561a-8659-22f8-0ab9-818f751bf68f}">
+        <p14:section name="① 표지·팀 소개" id="{7fef4de1-686e-5c1d-1410-294b8102a8c8}">
           <p14:sldIdLst>
             <p14:sldId id="256"/>
             <p14:sldId id="257"/>
           </p14:sldIdLst>
         </p14:section>
-        <p14:section name="② 문제 정의" id="{2ba8bc19-c49f-0b04-238f-b0c89fd1af1b}">
+        <p14:section name="② 문제 정의" id="{ebb39fe8-900b-7fa8-29d5-d54c9f9c545f}">
           <p14:sldIdLst>
             <p14:sldId id="258"/>
             <p14:sldId id="259"/>
           </p14:sldIdLst>
         </p14:section>
-        <p14:section name="③ 솔루션·핵심 가치" id="{2b61e57a-fe1a-8c46-c078-d01885f9f97c}">
+        <p14:section name="③ 솔루션·핵심 가치" id="{05f003c4-b666-2d50-b25e-bf9e48287f4a}">
           <p14:sldIdLst>
             <p14:sldId id="260"/>
             <p14:sldId id="261"/>
           </p14:sldIdLst>
         </p14:section>
-        <p14:section name="④ SW 기술 아키텍처" id="{8d28315e-f4e2-1ef8-ccb6-f186f4d1166b}">
+        <p14:section name="④ SW 기술 아키텍처" id="{82967cca-c212-3b35-67ae-c951d5f25794}">
           <p14:sldIdLst>
             <p14:sldId id="262"/>
             <p14:sldId id="263"/>
           </p14:sldIdLst>
         </p14:section>
-        <p14:section name="⑤ 개발 현황·MVP 시연" id="{6c5ae00f-0234-9d1f-217c-04f3c0510fcc}">
+        <p14:section name="⑤ 개발 현황·MVP 시연" id="{c1dc4b6c-3e90-c061-503f-ca9b26115802}">
           <p14:sldIdLst>
             <p14:sldId id="264"/>
             <p14:sldId id="265"/>
@@ -157,19 +157,19 @@
             <p14:sldId id="267"/>
           </p14:sldIdLst>
         </p14:section>
-        <p14:section name="⑥ 시장 분석·비즈니스 모델" id="{065fb490-5460-446b-8a96-be4288737d56}">
+        <p14:section name="⑥ 시장 분석·비즈니스 모델" id="{0f43a052-4917-0396-1a78-a1d34cfdec42}">
           <p14:sldIdLst>
             <p14:sldId id="268"/>
             <p14:sldId id="269"/>
             <p14:sldId id="270"/>
           </p14:sldIdLst>
         </p14:section>
-        <p14:section name="⑦ 초기 시장 검증" id="{75e3e25d-78c6-c9dd-3e1a-daa16354b729}">
+        <p14:section name="⑦ 초기 시장 검증" id="{a8c78b7a-63bd-e509-3167-c5cbe8998030}">
           <p14:sldIdLst>
             <p14:sldId id="271"/>
           </p14:sldIdLst>
         </p14:section>
-        <p14:section name="⑧ 향후 계획·팀 역량" id="{1b94bdb3-4fbe-c4df-abcc-122ac5132909}">
+        <p14:section name="⑧ 향후 계획·팀 역량" id="{1e29a8f4-0a55-265f-11db-1807b55d571c}">
           <p14:sldIdLst>
             <p14:sldId id="272"/>
             <p14:sldId id="273"/>
@@ -3521,7 +3521,7 @@
                   <a:schemeClr val="bg2"/>
                 </a:solidFill>
               </a:rPr>
-              <a:t>4조 · 앱 이름과 같게 정함</a:t>
+              <a:t>4조</a:t>
             </a:r>
             <a:endParaRPr lang="en-US" sz="950" dirty="0"/>
           </a:p>

--- a/docs/06_중간발표_PPT.pptx
+++ b/docs/06_중간발표_PPT.pptx
@@ -125,31 +125,31 @@
   <p:extLst>
     <p:ext uri="{521415D9-36F7-43E2-AB2F-B90AF26B5E84}">
       <p14:sectionLst xmlns:p14="http://schemas.microsoft.com/office/powerpoint/2010/main">
-        <p14:section name="① 표지·팀 소개" id="{7fef4de1-686e-5c1d-1410-294b8102a8c8}">
+        <p14:section name="① 표지·팀 소개" id="{5587ad04-bfd5-6909-b667-a9697642fb72}">
           <p14:sldIdLst>
             <p14:sldId id="256"/>
             <p14:sldId id="257"/>
           </p14:sldIdLst>
         </p14:section>
-        <p14:section name="② 문제 정의" id="{ebb39fe8-900b-7fa8-29d5-d54c9f9c545f}">
+        <p14:section name="② 문제 정의" id="{80fb9f52-eb61-c33d-89f6-3fca1fbd296b}">
           <p14:sldIdLst>
             <p14:sldId id="258"/>
             <p14:sldId id="259"/>
           </p14:sldIdLst>
         </p14:section>
-        <p14:section name="③ 솔루션·핵심 가치" id="{05f003c4-b666-2d50-b25e-bf9e48287f4a}">
+        <p14:section name="③ 솔루션·핵심 가치" id="{a163b707-774f-4af2-4741-d92a59a881f9}">
           <p14:sldIdLst>
             <p14:sldId id="260"/>
             <p14:sldId id="261"/>
           </p14:sldIdLst>
         </p14:section>
-        <p14:section name="④ SW 기술 아키텍처" id="{82967cca-c212-3b35-67ae-c951d5f25794}">
+        <p14:section name="④ SW 기술 아키텍처" id="{9a800c58-ef60-0d25-224e-f213bcb4ab6d}">
           <p14:sldIdLst>
             <p14:sldId id="262"/>
             <p14:sldId id="263"/>
           </p14:sldIdLst>
         </p14:section>
-        <p14:section name="⑤ 개발 현황·MVP 시연" id="{c1dc4b6c-3e90-c061-503f-ca9b26115802}">
+        <p14:section name="⑤ 개발 현황·MVP 시연" id="{40bb32af-0696-f5ee-56a7-a0d8ad1fc38d}">
           <p14:sldIdLst>
             <p14:sldId id="264"/>
             <p14:sldId id="265"/>
@@ -157,19 +157,19 @@
             <p14:sldId id="267"/>
           </p14:sldIdLst>
         </p14:section>
-        <p14:section name="⑥ 시장 분석·비즈니스 모델" id="{0f43a052-4917-0396-1a78-a1d34cfdec42}">
+        <p14:section name="⑥ 시장 분석·비즈니스 모델" id="{a7b26de2-adf8-9129-e211-e7eb366465b1}">
           <p14:sldIdLst>
             <p14:sldId id="268"/>
             <p14:sldId id="269"/>
             <p14:sldId id="270"/>
           </p14:sldIdLst>
         </p14:section>
-        <p14:section name="⑦ 초기 시장 검증" id="{a8c78b7a-63bd-e509-3167-c5cbe8998030}">
+        <p14:section name="⑦ 초기 시장 검증" id="{a5b1e2cf-8858-d5f0-35b4-87c5dffc537f}">
           <p14:sldIdLst>
             <p14:sldId id="271"/>
           </p14:sldIdLst>
         </p14:section>
-        <p14:section name="⑧ 향후 계획·팀 역량" id="{1e29a8f4-0a55-265f-11db-1807b55d571c}">
+        <p14:section name="⑧ 향후 계획·팀 역량" id="{03de6154-e17d-a671-0b25-49461f520ef0}">
           <p14:sldIdLst>
             <p14:sldId id="272"/>
             <p14:sldId id="273"/>
@@ -838,7 +838,7 @@
           <a:p>
             <a:r>
               <a:rPr lang="en-US" dirty="0"/>
-              <a:t>안녕하세요, 4조 알바가드입니다. 화면의 269,352원은 저희 앱 예시 데이터에서 두 달 동안 덜 받은 돈입니다. 통장 총액만 봐서는 보이지 않는 돈입니다. 알바가드는 알바비를 덜 받아도 모르고, 알아도 말을 못 하는 대학생을 위해 기록, 비교, 요청을 한 앱으로 잇는 서비스입니다. 팀명도 앱 이름과 같은 알바가드이고, 저는 팀장 이지훈입니다.</a:t>
+              <a:t>안녕하세요, 4조 알바가드입니다. 화면에 보이는 269,352원은 저희 앱 예시 데이터에서 두 달 동안 덜 받은 돈입니다. 통장 총액만 봐서는 보이지 않는 돈이죠. 알바가드는 이런 돈을 기록으로 찾아 주는 앱입니다. 알바비를 덜 받아도 모르고, 알아도 말을 못 하는 대학생을 위해 기록, 비교, 요청을 한 앱으로 이었습니다. 저는 팀장 이지훈입니다.</a:t>
             </a:r>
             <a:endParaRPr lang="en-US" dirty="0"/>
           </a:p>
@@ -926,7 +926,7 @@
           <a:p>
             <a:r>
               <a:rPr lang="en-US" dirty="0"/>
-              <a:t>이제 시연을 보여 드리겠습니다. 배포된 앱을 실제로 눌러서 녹화한 영상이고, 출근 · 퇴근, 받은 금액 입력, 요청 메시지와 증빙 PDF, 확인 페이지 순서입니다.</a:t>
+              <a:t>그럼 실제로 어떻게 쓰는지 보여 드리겠습니다. 배포된 앱을 직접 눌러 녹화한 영상입니다. 출근과 퇴근, 받은 금액 입력, 요청 메시지와 증빙 PDF, 그리고 확인 페이지 순서로 보겠습니다.</a:t>
             </a:r>
             <a:endParaRPr lang="en-US" dirty="0"/>
           </a:p>
@@ -1014,9 +1014,9 @@
           <a:p>
             <a:r>
               <a:rPr lang="en-US" dirty="0"/>
-              <a:t>(재생 전) 마지막 장면의 등록 시각을 봐 주세요. 지금도 서버에 그대로 있는 값입니다.
+              <a:t>(재생 전) 마지막 장면의 등록 시각을 눈여겨봐 주세요. 지금도 서버에 그대로 남아 있는 값입니다.
 (영상을 멈출 때마다 한 문장씩. 시간이 모자라면 멈추지 않고 그대로 틉니다)
-① 출근 · 퇴근을 누르자 서버에 2건이 등록됐습니다.
+① 출근과 퇴근을 누르자 서버에 2건이 등록됐습니다.
 ② 받은 금액을 넣으니 덜 받은 돈이 빨간 숫자로 나옵니다.
 ③ 덜 받은 석 달을 합쳐 사장님께 보낼 메시지를 만들고, 증빙 PDF 7번 표에 방금 등록된 확인 번호가 들어갑니다.
 ④ 확인 페이지에 번호를 넣으면 서버가 찍은 등록 시각이 나옵니다.</a:t>
@@ -1107,7 +1107,7 @@
           <a:p>
             <a:r>
               <a:rPr lang="en-US" dirty="0"/>
-              <a:t>방금 보신 기능을 포함해 계획한 8개가 모두 동작합니다. 다만 100%라고 하지는 않았습니다. 오른쪽 동그라미는 컴퓨터 동작, 실제 폰, 사용자 검증인데, 지금은 첫 칸만 찼고 나머지 두 칸이 11월 일정입니다. 그래서 완성도는 평균 약 80%로 잡았습니다. 이어서 시장과 수익은 손유호님이 말씀드리겠습니다.</a:t>
+              <a:t>방금 보신 기능을 포함해 계획한 8개가 모두 동작합니다. 그래도 100%라고 하지는 않았습니다. 오른쪽 동그라미 세 칸은 컴퓨터 동작, 실제 폰, 사용자 검증인데, 지금은 첫 칸만 찼고 나머지 두 칸이 11월 일정입니다. 그래서 완성도를 평균 약 80%로 잡았습니다. 시장과 수익은 손유호님이 이어서 말씀드리겠습니다.</a:t>
             </a:r>
             <a:endParaRPr lang="en-US" dirty="0"/>
           </a:p>
@@ -1723,7 +1723,7 @@
           <a:p>
             <a:r>
               <a:rPr lang="en-US" dirty="0"/>
-              <a:t>팀장 마무리: 처음 보여 드린 269,352원처럼, 통장만 봐서는 보이지 않던 돈을 기록으로 찾아 주는 것이 알바가드입니다. 마지막으로 여쭙고 싶은 것이 두 가지 있습니다. 문서를 유료화하지 않으면서 가능한 수익 모델이 더 있을지, 그리고 설문 30명과 인터뷰 5명이면 검증에 충분할지입니다. 감사합니다. 질문 받겠습니다.
+              <a:t>팀장 마무리: 처음 보여 드린 269,352원처럼, 통장만 봐서는 보이지 않던 돈을 기록으로 찾아 주는 것, 그게 알바가드입니다. 마지막으로 두 가지 여쭙고 싶습니다. 문서를 유료화하지 않고도 가능한 수익 모델이 더 있을지, 그리고 설문 30명과 인터뷰 5명이면 검증에 충분할지입니다. 들어 주셔서 감사합니다. 질문 받겠습니다.
 예상 질문 (이름 붙은 사람이 먼저 답하고, 모자라면 팀장이 보탭니다. 답은 짧은 메모이니 말할 때는 "~습니다"로)
 · [이지훈] 법적 효력 있나? → 보장하지 않는다. 판단은 감독관 · 법원. 우리는 판단할 자료를 정리하고, 수정 이력으로 무엇을 언제 왜 고쳤는지, 확인 번호로 그 번호가 언제 서버에 들어왔는지 보여 준다(내용과 맞춰 보는 방법은 기말까지). 통장 내역 · 카톡과 함께 내야 한다고 앱에도 적어 뒀다.
 · [이지훈] 서버는 여러분이 관리하는데 고치면 그만 아닌가? → 맞다. 공개키로는 넣기 · 읽기만 되고 시각은 서버가 찍는 것까지 확인했지만, 프로젝트 소유자 권한으로는 고칠 수 있다. 한계로 인정한다. 지금 막는 건 "사용자 본인이 나중에 고쳐 쓰기"까지. 운영자까지 못 고치게 하는 외부 공인 시점 확인은 비용 때문에 계획. 서버에는 번호만 있어서 운영자가 서버를 고쳐도 폰의 근무 내용 자체는 못 바꾼다. (확인 페이지에도 "앱에서 고치거나 지울 수 없음, 운영자 권한으로는 가능"이라고 적어 두었다)
@@ -1838,7 +1838,7 @@
           <a:p>
             <a:r>
               <a:rPr lang="en-US" dirty="0"/>
-              <a:t>먼저 지금 상태부터 말씀드리겠습니다. 계획한 기능 8개는 모두 동작하는 상태로 배포했고, 완성도는 평균 약 80%입니다. 설문은 지금까지 13명이 답했고, 앱을 직접 써 보게 하는 인터뷰는 11월에 합니다. 오른쪽 QR은 앱과 설문입니다. 설문은 이름 없이 3분이면 끝나니, 발표가 끝난 뒤에 답해 주시면 감사하겠습니다. 발표는 문제, 솔루션, 기술, 시연, 시장과 수익, 검증과 일정 순서로 셋이 나눠서 하겠습니다.</a:t>
+              <a:t>먼저 지금 상태입니다. 계획한 기능 8개는 모두 동작하는 상태로 배포했고, 완성도는 평균 약 80%입니다. 설문은 지금까지 13명이 답했고, 앱을 직접 써 보는 인터뷰는 11월에 합니다. 오른쪽 QR로 앱과 설문을 열 수 있습니다. 설문은 이름 없이 3분이면 끝나니, 발표가 끝난 뒤 답해 주시면 감사하겠습니다. 발표는 저와 손유호, 박명진 셋이 나눠서 하겠습니다.</a:t>
             </a:r>
             <a:endParaRPr lang="en-US" dirty="0"/>
           </a:p>
@@ -1926,7 +1926,7 @@
           <a:p>
             <a:r>
               <a:rPr lang="en-US" dirty="0"/>
-              <a:t>알바생의 문제는 세 가지입니다. 첫째, 얼마를 받아야 하는지 계산하기 어렵습니다. 노동절에 일한 알바생의 33.2%는 수당을 받는지 안내받지 못해 모르겠다고 답했습니다. 둘째, 덜 받아도 알아채기 어렵습니다. 알바생의 48.0%가 임금 문제를 겪었는데, 저희 설문에서도 12명 중 7명이 통장에 들어온 총액만 본다고 답했습니다. 셋째, 알아도 말을 꺼내기 어렵습니다. 최저시급보다 덜 받은 사람의 49.3%는 아무 대응도 하지 않았습니다. 기록이 없으니 "나중에 지어낸 것 아니냐"는 말 한마디에 무너지기 때문입니다. 이 숫자들은 알바천국 설문이라, 저희도 직접 설문을 돌리고 있습니다.</a:t>
+              <a:t>알바생이 겪는 문제는 세 가지입니다. 첫째, 얼마를 받아야 하는지 계산하기 어렵습니다. 노동절에 일한 알바생의 33.2%는 수당을 받는지 안내받지 못해 모른다고 답했습니다. 둘째, 덜 받아도 알아채기 어렵습니다. 알바생의 48.0%가 임금 문제를 겪었는데, 저희 설문에서도 12명 중 7명이 통장에 들어온 총액만 본다고 답했습니다. 셋째, 알아도 말을 꺼내기 어렵습니다. 최저시급보다 덜 받은 사람의 49.3%는 아무 대응도 하지 않았습니다. 기록이 없으면 "나중에 지어낸 것 아니냐"는 한마디에 무너지기 때문입니다. 세 숫자는 모두 알바천국 설문 결과입니다.</a:t>
             </a:r>
             <a:endParaRPr lang="en-US" dirty="0"/>
           </a:p>
@@ -2014,7 +2014,7 @@
           <a:p>
             <a:r>
               <a:rPr lang="en-US" dirty="0"/>
-              <a:t>기존 서비스와 비교해 보겠습니다. 알바생들이 실제로 많이 쓰는 건 앱보다 메모장과 카톡이라 첫 열에 넣었습니다. 하우머치는 혼자 기록할 수 있지만 예상 급여에서 멈추고, 기그는 사장님이 가입해야 하고, 알바천국 계산기는 기록이 남지 않고, 진정24는 증거가 이미 있어야 시작합니다. 가운데 세 줄, 실제 받은 돈과의 비교, 요청 문구와 증빙, 수정 이력과 등록 시각은 알바가드에만 있습니다. 진정 접수는 저희가 일부러 하지 않고, 1350과 노동포털로 연결만 합니다.</a:t>
+              <a:t>그럼 기존 서비스는 어떨까요. 알바생들이 실제로 가장 많이 쓰는 건 메모장과 카톡이라 첫 열에 넣었습니다. 하우머치는 예상 급여에서 멈추고, 기그는 사장님이 가입해야 하고, 알바천국 계산기는 기록이 남지 않고, 진정24는 증거가 이미 있어야 시작합니다. 가운데 세 줄, 실제 받은 돈과의 비교, 요청 문구와 증빙, 수정 이력과 등록 시각은 모두 알바가드에만 있습니다. 진정 접수는 저희가 직접 하지 않고, 1350과 노동포털로 연결해 드립니다.</a:t>
             </a:r>
             <a:endParaRPr lang="en-US" dirty="0"/>
           </a:p>
@@ -2102,7 +2102,7 @@
           <a:p>
             <a:r>
               <a:rPr lang="en-US" dirty="0"/>
-              <a:t>그래서 알바가드는 기록, 비교, 요청 세 단계를 한 앱으로 잇습니다. 출근 · 퇴근 버튼으로 기록하고, 고치면 수정 전후와 사유가 남습니다. 받았어야 할 돈과 실제 받은 돈의 차이를 보여 주고, 덜 받았다면 정중한 메시지부터 내용증명 초안, 진정 절차 안내까지 단계별로 돕습니다. 사장님 연동도, 로그인도 없고, 근무 내용은 폰 안에만 둡니다.</a:t>
+              <a:t>그래서 알바가드는 기록, 비교, 요청 세 단계를 한 앱으로 잇습니다. 출근과 퇴근은 버튼 하나로 기록하고, 고치면 무엇을 왜 고쳤는지 남습니다. 받았어야 할 돈과 실제 받은 돈의 차이를 보여 주고, 덜 받았다면 정중한 메시지부터 내용증명 초안, 진정 절차 안내까지 단계별로 돕습니다. 사장님 연동도, 로그인도 필요 없고, 근무 내용은 내 폰 안에만 남습니다.</a:t>
             </a:r>
             <a:endParaRPr lang="en-US" dirty="0"/>
           </a:p>
@@ -2190,7 +2190,7 @@
           <a:p>
             <a:r>
               <a:rPr lang="en-US" dirty="0"/>
-              <a:t>차별점은 세 가지입니다. 첫째, 사장님 가입 없이 혼자 씁니다. 둘째, 실제 받은 돈과 비교해서 요청 문구와 증빙까지 이어 줍니다. 셋째가 따라 하기 어려운 부분인데, 기록할 때마다 확인 번호와 서버 등록 시각이 남습니다. 사유 없이는 못 고치고, 지워도 흔적이 남고, 고치면 다시 등록됩니다. 한계도 먼저 말씀드리면, 비교 기능은 다른 앱이 따라올 수 있습니다. 그리고 이 기록이 법적 효력을 보장하지는 않습니다. 통장 내역이나 메시지와 함께 내야 힘이 생기고, 판단은 근로감독관과 법원이 합니다.</a:t>
+              <a:t>저희만의 차별점은 세 가지입니다. 첫째, 사장님 가입 없이 혼자 씁니다. 둘째, 실제 받은 돈과 비교해서 요청 문구와 증빙까지 이어 줍니다. 셋째, 기록할 때마다 확인 번호와 서버 등록 시각이 남습니다. 사유 없이는 고칠 수 없고, 지워도 흔적이 남고, 고치면 다시 등록됩니다. 그래서 다른 앱이 쉽게 따라 하기 어렵습니다. 한계도 말씀드리겠습니다. 비교 기능 자체는 다른 앱도 따라올 수 있습니다. 그리고 이 기록이 법적 효력을 보장하지는 않습니다. 통장 내역이나 메시지와 함께 내야 힘이 생기고, 판단은 근로감독관과 법원이 합니다.</a:t>
             </a:r>
             <a:endParaRPr lang="en-US" dirty="0"/>
           </a:p>
@@ -2278,7 +2278,7 @@
           <a:p>
             <a:r>
               <a:rPr lang="en-US" dirty="0"/>
-              <a:t>기술 스택입니다. 앱은 React와 Vite로 만든 웹앱이고, 홈 화면에 추가하면 앱처럼 쓰고 인터넷 없이도 열립니다. 별도 서버는 두지 않았고, Supabase는 확인 번호 등록과 설문 수집에만 씁니다. 배포는 GitHub Pages로, 코드를 올리면 자동으로 배포됩니다. 서버를 최소로 둔 이유는 개인정보와 비용 때문입니다.</a:t>
+              <a:t>기술 스택입니다. 앱은 React와 Vite로 만든 웹앱입니다. 앱스토어 없이 링크로 바로 설치하고, 홈 화면에 추가하면 인터넷 없이도 열립니다. 별도 서버는 두지 않았고, Supabase는 확인 번호 등록과 설문 수집에만 씁니다. 코드를 올리면 GitHub Pages로 자동 배포됩니다. 서버를 최소로 둔 이유는 개인정보와 비용 때문입니다.</a:t>
             </a:r>
             <a:endParaRPr lang="en-US" dirty="0"/>
           </a:p>
@@ -2366,7 +2366,7 @@
           <a:p>
             <a:r>
               <a:rPr lang="en-US" dirty="0"/>
-              <a:t>구성도입니다. 왼쪽 폰 안에서 화면, 계산, 저장이 모두 끝납니다. 서버로 가는 건 확인 번호와 기록 번호, 무작위 기기 번호뿐이고, 근무지나 시각, 금액은 가지 않습니다. 등록 시각은 서버가 직접 찍고, 앱에서는 고치거나 지울 수 없습니다. 실제로 2000년 시각을 보내 봐도 서버 시각으로 들어가고, 수정이나 삭제 요청은 거부되는 것을 확인했습니다. 다만 운영자 권한으로는 고칠 수 있어서, 지금 막는 것은 사용자가 나중에 고쳐 쓰는 것까지입니다.</a:t>
+              <a:t>구성도입니다. 계산과 저장은 모두 왼쪽 폰 안에서 끝납니다. 서버로 가는 건 확인 번호와 기록 번호, 무작위 기기 번호뿐이고, 근무지나 시각, 금액은 보내지 않습니다. 등록 시각은 서버가 직접 찍기 때문에 폰 시계를 바꿔도 소용이 없습니다. 실제로 2000년 시각을 보내 봤는데 서버 시각으로 저장됐고, 수정이나 삭제 요청은 거부됐습니다. 다만 운영자 권한으로는 고칠 수 있어서, 지금 막는 것은 사용자가 나중에 고쳐 쓰는 것까지입니다.</a:t>
             </a:r>
             <a:endParaRPr lang="en-US" dirty="0"/>
           </a:p>
@@ -2454,7 +2454,7 @@
           <a:p>
             <a:r>
               <a:rPr lang="en-US" dirty="0"/>
-              <a:t>실제 화면입니다. 캘린더는 예정과 다른 날을 표시하고, 설정에서는 무엇이 서버로 가는지 보고 끌 수 있습니다. 증빙 묶음 PDF에는 기록, 수정 이력, 계산 근거가 한 문서로 들어가고, 확인 페이지에서는 누구나 확인 번호로 등록 시각을 볼 수 있습니다. 모두 지금 배포 주소에서 열리는 화면입니다.</a:t>
+              <a:t>실제 화면입니다. 캘린더는 예정과 다른 날을 따로 표시하고, 설정에서는 무엇이 서버로 가는지 보고 끌 수 있습니다. 증빙 묶음 PDF에는 기록, 수정 이력, 계산 근거가 한 문서로 들어갑니다. 확인 페이지에서는 누구나 확인 번호만 넣으면 등록 시각을 볼 수 있습니다.</a:t>
             </a:r>
             <a:endParaRPr lang="en-US" dirty="0"/>
           </a:p>

--- a/docs/06_중간발표_PPT.pptx
+++ b/docs/06_중간발표_PPT.pptx
@@ -125,31 +125,31 @@
   <p:extLst>
     <p:ext uri="{521415D9-36F7-43E2-AB2F-B90AF26B5E84}">
       <p14:sectionLst xmlns:p14="http://schemas.microsoft.com/office/powerpoint/2010/main">
-        <p14:section name="① 표지·팀 소개" id="{5587ad04-bfd5-6909-b667-a9697642fb72}">
+        <p14:section name="① 표지·팀 소개" id="{6806c200-6ec8-7ea1-c40b-1da7fc1e3240}">
           <p14:sldIdLst>
             <p14:sldId id="256"/>
             <p14:sldId id="257"/>
           </p14:sldIdLst>
         </p14:section>
-        <p14:section name="② 문제 정의" id="{80fb9f52-eb61-c33d-89f6-3fca1fbd296b}">
+        <p14:section name="② 문제 정의" id="{c5f38b47-3d73-cb0e-b05e-7d4257b987a7}">
           <p14:sldIdLst>
             <p14:sldId id="258"/>
             <p14:sldId id="259"/>
           </p14:sldIdLst>
         </p14:section>
-        <p14:section name="③ 솔루션·핵심 가치" id="{a163b707-774f-4af2-4741-d92a59a881f9}">
+        <p14:section name="③ 솔루션·핵심 가치" id="{59408be1-7afa-c9c9-d144-b1016bac79ee}">
           <p14:sldIdLst>
             <p14:sldId id="260"/>
             <p14:sldId id="261"/>
           </p14:sldIdLst>
         </p14:section>
-        <p14:section name="④ SW 기술 아키텍처" id="{9a800c58-ef60-0d25-224e-f213bcb4ab6d}">
+        <p14:section name="④ SW 기술 아키텍처" id="{3a39b9ee-eb4f-d344-b073-4020afa1346c}">
           <p14:sldIdLst>
             <p14:sldId id="262"/>
             <p14:sldId id="263"/>
           </p14:sldIdLst>
         </p14:section>
-        <p14:section name="⑤ 개발 현황·MVP 시연" id="{40bb32af-0696-f5ee-56a7-a0d8ad1fc38d}">
+        <p14:section name="⑤ 개발 현황·MVP 시연" id="{39970eae-2abe-d1ce-a252-27a96c0dddbf}">
           <p14:sldIdLst>
             <p14:sldId id="264"/>
             <p14:sldId id="265"/>
@@ -157,19 +157,19 @@
             <p14:sldId id="267"/>
           </p14:sldIdLst>
         </p14:section>
-        <p14:section name="⑥ 시장 분석·비즈니스 모델" id="{a7b26de2-adf8-9129-e211-e7eb366465b1}">
+        <p14:section name="⑥ 시장 분석·비즈니스 모델" id="{75e551d0-b47e-06e2-eaa9-bc808549516f}">
           <p14:sldIdLst>
             <p14:sldId id="268"/>
             <p14:sldId id="269"/>
             <p14:sldId id="270"/>
           </p14:sldIdLst>
         </p14:section>
-        <p14:section name="⑦ 초기 시장 검증" id="{a5b1e2cf-8858-d5f0-35b4-87c5dffc537f}">
+        <p14:section name="⑦ 초기 시장 검증" id="{e5ba3b02-2e51-858f-f2af-5b528eb0be26}">
           <p14:sldIdLst>
             <p14:sldId id="271"/>
           </p14:sldIdLst>
         </p14:section>
-        <p14:section name="⑧ 향후 계획·팀 역량" id="{03de6154-e17d-a671-0b25-49461f520ef0}">
+        <p14:section name="⑧ 향후 계획·팀 역량" id="{9e53f84e-8d16-aafc-b3db-9dc28ed13df6}">
           <p14:sldIdLst>
             <p14:sldId id="272"/>
             <p14:sldId id="273"/>
@@ -838,7 +838,7 @@
           <a:p>
             <a:r>
               <a:rPr lang="en-US" dirty="0"/>
-              <a:t>안녕하세요, 4조 알바가드입니다. 화면에 보이는 269,352원은 저희 앱 예시 데이터에서 두 달 동안 덜 받은 돈입니다. 통장 총액만 봐서는 보이지 않는 돈이죠. 알바가드는 이런 돈을 기록으로 찾아 주는 앱입니다. 알바비를 덜 받아도 모르고, 알아도 말을 못 하는 대학생을 위해 기록, 비교, 요청을 한 앱으로 이었습니다. 저는 팀장 이지훈입니다.</a:t>
+              <a:t>안녕하세요, 4조 발표를 맡은 팀장 이지훈입니다. 저희가 만든 앱은 알바가드입니다. 화면에 보이는 금액은 저희 앱 예시 데이터에서 두 달 동안 덜 받은 알바비인데요. 통장에 들어온 총액만 봐서는 잘 안 보이는 돈입니다. 알바가드는 이렇게 놓치기 쉬운 돈을 근무 기록으로 찾아 주는 앱입니다. 알바비를 덜 받아도 모르거나, 알아도 말을 꺼내기 어려운 대학생을 위해 기록, 비교, 요청을 한 앱에 담았습니다.</a:t>
             </a:r>
             <a:endParaRPr lang="en-US" dirty="0"/>
           </a:p>
@@ -926,7 +926,7 @@
           <a:p>
             <a:r>
               <a:rPr lang="en-US" dirty="0"/>
-              <a:t>그럼 실제로 어떻게 쓰는지 보여 드리겠습니다. 배포된 앱을 직접 눌러 녹화한 영상입니다. 출근과 퇴근, 받은 금액 입력, 요청 메시지와 증빙 PDF, 그리고 확인 페이지 순서로 보겠습니다.</a:t>
+              <a:t>그럼 실제로 어떻게 쓰는지 보여 드리겠습니다. 배포된 앱을 직접 눌러 보면서 녹화한 영상입니다. 출근과 퇴근, 받은 금액 입력, 요청 메시지와 증빙 PDF, 마지막으로 확인 페이지 순서로 보시겠습니다.</a:t>
             </a:r>
             <a:endParaRPr lang="en-US" dirty="0"/>
           </a:p>
@@ -1014,12 +1014,12 @@
           <a:p>
             <a:r>
               <a:rPr lang="en-US" dirty="0"/>
-              <a:t>(재생 전) 마지막 장면의 등록 시각을 눈여겨봐 주세요. 지금도 서버에 그대로 남아 있는 값입니다.
+              <a:t>(재생 전) 마지막 장면에 나오는 등록 시각을 잘 봐 주세요. 지금도 서버에 그대로 남아 있는 값입니다.
 (영상을 멈출 때마다 한 문장씩. 시간이 모자라면 멈추지 않고 그대로 틉니다)
-① 출근과 퇴근을 누르자 서버에 2건이 등록됐습니다.
-② 받은 금액을 넣으니 덜 받은 돈이 빨간 숫자로 나옵니다.
-③ 덜 받은 석 달을 합쳐 사장님께 보낼 메시지를 만들고, 증빙 PDF 7번 표에 방금 등록된 확인 번호가 들어갑니다.
-④ 확인 페이지에 번호를 넣으면 서버가 찍은 등록 시각이 나옵니다.</a:t>
+① 출근과 퇴근을 누르니까 서버에 2건이 등록됐습니다.
+② 받은 금액을 넣으면 덜 받은 돈이 빨간 숫자로 나옵니다.
+③ 덜 받은 석 달을 합쳐서 사장님께 보낼 메시지를 만들고, 증빙 PDF 7번 표에는 방금 등록한 확인 번호가 들어갑니다.
+④ 확인 페이지에 이 번호를 넣으면 서버가 찍은 등록 시각이 나옵니다.</a:t>
             </a:r>
             <a:endParaRPr lang="en-US" dirty="0"/>
           </a:p>
@@ -1107,7 +1107,7 @@
           <a:p>
             <a:r>
               <a:rPr lang="en-US" dirty="0"/>
-              <a:t>방금 보신 기능을 포함해 계획한 8개가 모두 동작합니다. 그래도 100%라고 하지는 않았습니다. 오른쪽 동그라미 세 칸은 컴퓨터 동작, 실제 폰, 사용자 검증인데, 지금은 첫 칸만 찼고 나머지 두 칸이 11월 일정입니다. 그래서 완성도를 평균 약 80%로 잡았습니다. 시장과 수익은 손유호님이 이어서 말씀드리겠습니다.</a:t>
+              <a:t>방금 보신 기능을 포함해서, 계획한 8개 기능은 모두 동작합니다. 그래도 100%라고 쓰지는 않았습니다. 오른쪽 동그라미 세 칸은 각각 컴퓨터에서 동작, 실제 폰에서 확인, 사용자 검증인데요. 지금은 첫 칸만 채워졌고, 나머지 두 칸은 11월에 할 일입니다. 그래서 완성도를 평균 80% 정도로 잡았습니다. 다음으로 시장과 수익 부분은 손유호 팀원이 이어서 발표하겠습니다.</a:t>
             </a:r>
             <a:endParaRPr lang="en-US" dirty="0"/>
           </a:p>
@@ -1195,7 +1195,7 @@
           <a:p>
             <a:r>
               <a:rPr lang="en-US" dirty="0"/>
-              <a:t>시장과 수익을 맡은 손유호입니다. 임금체불은 2023년 1조 7천억 원대에서 2년 연속 2조 원을 넘었습니다. 그중 67.8%가 30인 미만 사업장에서 나왔는데, 알바생이 많이 일하는 카페, 편의점, 음식점은 대개 이 규모입니다. 타깃 규모는 대학 재적생 307만 명 중 알바 경험이 있는 사람으로 어림해서, 약 210만에서 270만 명을 상한으로 봤습니다. 지금 알바 중인 사람과 주 15시간 이상인 사람은 공식 통계가 없어 설문으로 확인하고 있습니다. 작년 9월 임금체불 근절 대책과 10월 개정 근로기준법으로 체불 제재도 세졌습니다.</a:t>
+              <a:t>안녕하세요, 시장과 수익 부분을 맡은 손유호입니다. 먼저 임금체불 규모를 보면, 2023년 1조 7천억 원대에서 2년 연속 2조 원을 넘었습니다. 그중 67.8%가 30인 미만 사업장에서 나왔는데요, 알바생이 많이 일하는 카페, 편의점, 음식점이 대부분 이 규모입니다. 저희 타깃 규모는 대학 재적생 307만 명 중 알바 경험이 있는 사람으로 어림해서, 많아야 약 210만에서 270만 명으로 봤습니다. 지금 알바 중인 사람이나 주 15시간 이상 일하는 사람은 공식 통계가 없어서 설문으로 확인하고 있습니다. 또 작년 9월 임금체불 근절 대책과 10월 개정 근로기준법으로 체불에 대한 제재도 더 강해졌습니다.</a:t>
             </a:r>
             <a:endParaRPr lang="en-US" dirty="0"/>
           </a:p>
@@ -1283,7 +1283,7 @@
           <a:p>
             <a:r>
               <a:rPr lang="en-US" dirty="0"/>
-              <a:t>경쟁 서비스 위치입니다. 가로는 혼자 쓸 수 있는지, 세로는 대응까지 가는지입니다. 계산기는 계산에서 멈추고, 기그는 사장님이 가입해야 하고, 진정24는 증거가 있어야 시작합니다. 혼자 쓰면서 대응까지 가는 칸에는 알바가드뿐입니다. 하우머치가 비교 기능을 넣으면 따라올 수 있어서, 저희는 따라 하기 어려운 기록 등록 쪽을 키우려고 합니다.</a:t>
+              <a:t>다음은 경쟁 서비스들의 위치입니다. 가로축은 혼자 쓸 수 있는지, 세로축은 대응까지 가는지를 나타냅니다. 계산기는 계산에서 멈추고, 기그는 사장님이 가입해야 하고, 진정24는 증거가 있어야 시작할 수 있습니다. 혼자 쓰면서 대응까지 가는 칸에는 알바가드만 있습니다. 다만 하우머치가 비교 기능을 넣으면 따라올 수 있기 때문에, 저희는 따라 하기 어려운 기록 등록 쪽을 더 키우려고 합니다.</a:t>
             </a:r>
             <a:endParaRPr lang="en-US" dirty="0"/>
           </a:p>
@@ -1371,7 +1371,7 @@
           <a:p>
             <a:r>
               <a:rPr lang="en-US" dirty="0"/>
-              <a:t>비즈니스 모델입니다. 기록, 비교, 요청, 증빙 같은 핵심 화면은 무료이고 광고도 넣지 않습니다. 믿고 써야 하는 화면이기 때문입니다. 수익은 쉬는 틈 게임 화면 광고가 1차 가설입니다. 출퇴근은 일하는 날마다 누르지만 돈을 확인하는 건 급여일에 한 번이라, 그 사이 앱을 열 이유로 게임을 넣었고 그 화면이 광고 자리입니다. 2차 후보는 폰을 바꿔도 기록이 남는 동기화와 자동 백업 구독입니다. 정산 문구나 증빙 문서를 돈 받고 만들면 변호사법과 공인노무사법 문제가 생길 수 있어 유료화하지 않습니다. 사용자는 에브리타임, 학과 단톡, 알바 커뮤니티와 짧은 영상으로 모으겠습니다. 주 15시간 이상 일하는 사람이 많은지는 설문으로 확인하고 있는데, 결과와 검증 계획은 박명진님이 말씀드리겠습니다.</a:t>
+              <a:t>다음은 비즈니스 모델입니다. 기록, 비교, 요청, 증빙 같은 핵심 화면은 무료이고, 광고도 넣지 않습니다. 사용자가 믿고 써야 하는 화면이기 때문입니다. 1차 수익 가설은 쉬는 틈 게임 화면의 광고입니다. 출퇴근은 일하는 날마다 누르지만 돈을 확인하는 건 급여일 한 번뿐이라서, 그 사이에 앱을 열 이유로 게임을 넣었고, 그 화면을 광고 자리로 보고 있습니다. 2차 후보는 폰을 바꿔도 기록이 남는 동기화와 자동 백업 구독입니다. 반대로 정산 문구나 증빙 문서를 돈 받고 만들어 주면 변호사법이나 공인노무사법 문제가 생길 수 있어서 유료화하지 않습니다. 사용자는 에브리타임, 학과 단톡방, 알바 커뮤니티, 그리고 짧은 영상으로 모을 계획입니다. 주 15시간 이상 일하는 사람이 얼마나 되는지는 설문으로 확인하고 있고, 그 결과와 검증 계획은 박명진 팀원이 이어서 설명하겠습니다.</a:t>
             </a:r>
             <a:endParaRPr lang="en-US" dirty="0"/>
           </a:p>
@@ -1459,7 +1459,7 @@
           <a:p>
             <a:r>
               <a:rPr lang="en-US" dirty="0"/>
-              <a:t>검증을 맡은 박명진입니다. 저희 가설은, 근무 기록을 근거로 한 요청 문구가 있으면 알바생이 사장님께 말을 꺼낼 수 있다고 느끼고 쓸 것이라는 것입니다. 11월에 설문 30명과 인터뷰 5명으로 표의 다섯 가지를 확인합니다. 오른쪽 끝 칸은 10월 26일까지 받은 설문 13명의 중간 결과입니다. 매달 받은 금액을 넣겠다는 사람이 11명, 게임 화면 광고를 싫다는 사람은 4명이었습니다. 다만 지인 중심이라 정식 조사는 아니고, 지금 알바 중인 사람은 2명뿐이라 주 15시간 기준은 판단을 미룹니다. 불리한 결과도 있었습니다. 정산 요청 메시지와 기록 등록을 가장 쓸모 있다고 고른 사람은 없었고, 미니게임은 안 쓸 것 같은 기능 1위였습니다. 그래서 11월 인터뷰에서 요청 문구와 확인 번호를 직접 보여 주고 반응을 보겠습니다.</a:t>
+              <a:t>안녕하세요, 검증 부분을 맡은 박명진입니다. 저희 가설은 근무 기록을 근거로 한 요청 문구가 있으면, 알바생이 사장님께 말을 꺼낼 수 있다고 느끼고 실제로 쓸 거라는 겁니다. 이 가설을 11월에 설문 30명과 인터뷰 5명으로, 표에 있는 다섯 가지를 확인하려고 합니다. 오른쪽 끝 칸은 10월 26일까지 받은 설문 13명의 중간 결과입니다. 매달 받은 금액을 넣겠다는 사람이 11명이었고, 게임 화면 광고가 싫다는 사람은 4명이었습니다. 다만 아직 지인 위주라 정식 조사라고 보기는 어렵고, 지금 알바 중인 사람이 2명뿐이라 주 15시간 기준은 판단을 미뤘습니다. 저희한테 불리한 결과도 있었습니다. 정산 요청 메시지와 기록 등록을 가장 쓸모 있는 기능으로 고른 사람은 한 명도 없었고, 미니게임은 안 쓸 것 같은 기능 1위였습니다. 그래서 11월 인터뷰에서는 요청 문구와 확인 번호를 직접 보여 주고 반응을 들어 보려고 합니다.</a:t>
             </a:r>
             <a:endParaRPr lang="en-US" dirty="0"/>
           </a:p>
@@ -1547,7 +1547,7 @@
           <a:p>
             <a:r>
               <a:rPr lang="en-US" dirty="0"/>
-              <a:t>기말 발표인 12월 15일까지 7주 일정입니다. 빨간 마름모가 마일스톤입니다. 11월 9일에 인터뷰와 설문 1차 정리, 11월 23일에 피드백을 반영해 배포하고, 11월 30일에 실제 폰 검증을 마칩니다. 12월 7일에 기능을 동결하고, 그 뒤에는 보고서와 발표를 준비합니다. 인터뷰는 손유호님이 3명, 제가 2명을 맡고, 갤럭시 폰 검증도 제가 맡습니다.</a:t>
+              <a:t>다음은 기말 발표인 12월 15일까지 7주 일정입니다. 빨간 마름모가 주요 마일스톤입니다. 11월 9일까지 인터뷰와 설문 1차 정리를 하고, 11월 23일에는 피드백을 반영해서 다시 배포합니다. 11월 30일까지 실제 폰 검증을 마치고, 12월 7일에 기능을 동결한 뒤로는 보고서와 발표 준비에 집중하겠습니다. 인터뷰는 손유호 팀원이 3명, 제가 2명을 맡고, 갤럭시 폰 검증도 제가 맡았습니다.</a:t>
             </a:r>
             <a:endParaRPr lang="en-US" dirty="0"/>
           </a:p>
@@ -1635,7 +1635,7 @@
           <a:p>
             <a:r>
               <a:rPr lang="en-US" dirty="0"/>
-              <a:t>팀원별 역할입니다. 앞으로 맡는 일은 오늘 각자 발표한 장과 같습니다. 개발은 팀장 이지훈, 시장과 설문, 인터뷰 3명은 손유호, 인터뷰 2명과 갤럭시 테스트, 일정 관리와 보고서 편집은 제가 맡습니다. 마무리는 팀장이 하겠습니다.</a:t>
+              <a:t>다음은 팀원별 역할입니다. 앞으로 각자 맡을 일은 오늘 발표한 부분과 같습니다. 개발은 팀장 이지훈, 시장과 설문, 인터뷰 3명은 손유호, 그리고 인터뷰 2명과 갤럭시 테스트, 일정 관리, 보고서 편집은 제가 맡았습니다. 마무리는 이지훈 팀장이 하겠습니다.</a:t>
             </a:r>
             <a:endParaRPr lang="en-US" dirty="0"/>
           </a:p>
@@ -1723,7 +1723,7 @@
           <a:p>
             <a:r>
               <a:rPr lang="en-US" dirty="0"/>
-              <a:t>팀장 마무리: 처음 보여 드린 269,352원처럼, 통장만 봐서는 보이지 않던 돈을 기록으로 찾아 주는 것, 그게 알바가드입니다. 마지막으로 두 가지 여쭙고 싶습니다. 문서를 유료화하지 않고도 가능한 수익 모델이 더 있을지, 그리고 설문 30명과 인터뷰 5명이면 검증에 충분할지입니다. 들어 주셔서 감사합니다. 질문 받겠습니다.
+              <a:t>팀장 마무리: 처음에 보여 드린 금액처럼, 통장만 봐서는 보이지 않던 돈을 기록으로 찾아 주는 것, 그게 저희 알바가드입니다. 마지막으로 두 가지 조언을 구하고 싶습니다. 문서를 유료화하지 않고도 할 수 있는 수익 모델이 더 있을지, 그리고 설문 30명과 인터뷰 5명이면 검증하기에 충분할지입니다. 이상으로 4조 발표를 마치겠습니다. 들어 주셔서 감사합니다. 질문 받겠습니다.
 예상 질문 (이름 붙은 사람이 먼저 답하고, 모자라면 팀장이 보탭니다. 답은 짧은 메모이니 말할 때는 "~습니다"로)
 · [이지훈] 법적 효력 있나? → 보장하지 않는다. 판단은 감독관 · 법원. 우리는 판단할 자료를 정리하고, 수정 이력으로 무엇을 언제 왜 고쳤는지, 확인 번호로 그 번호가 언제 서버에 들어왔는지 보여 준다(내용과 맞춰 보는 방법은 기말까지). 통장 내역 · 카톡과 함께 내야 한다고 앱에도 적어 뒀다.
 · [이지훈] 서버는 여러분이 관리하는데 고치면 그만 아닌가? → 맞다. 공개키로는 넣기 · 읽기만 되고 시각은 서버가 찍는 것까지 확인했지만, 프로젝트 소유자 권한으로는 고칠 수 있다. 한계로 인정한다. 지금 막는 건 "사용자 본인이 나중에 고쳐 쓰기"까지. 운영자까지 못 고치게 하는 외부 공인 시점 확인은 비용 때문에 계획. 서버에는 번호만 있어서 운영자가 서버를 고쳐도 폰의 근무 내용 자체는 못 바꾼다. (확인 페이지에도 "앱에서 고치거나 지울 수 없음, 운영자 권한으로는 가능"이라고 적어 두었다)
@@ -1838,7 +1838,7 @@
           <a:p>
             <a:r>
               <a:rPr lang="en-US" dirty="0"/>
-              <a:t>먼저 지금 상태입니다. 계획한 기능 8개는 모두 동작하는 상태로 배포했고, 완성도는 평균 약 80%입니다. 설문은 지금까지 13명이 답했고, 앱을 직접 써 보는 인터뷰는 11월에 합니다. 오른쪽 QR로 앱과 설문을 열 수 있습니다. 설문은 이름 없이 3분이면 끝나니, 발표가 끝난 뒤 답해 주시면 감사하겠습니다. 발표는 저와 손유호, 박명진 셋이 나눠서 하겠습니다.</a:t>
+              <a:t>먼저 지금 상태부터 말씀드리겠습니다. 계획했던 기능 8개는 모두 동작하는 상태로 배포까지 했고, 완성도는 평균 80% 정도로 보고 있습니다. 설문은 지금까지 13명이 답해 줬고, 앱을 직접 써 보게 하는 인터뷰는 11월에 진행할 예정입니다. 오른쪽 QR을 찍으시면 앱과 설문을 바로 열 수 있습니다. 설문은 이름 없이 3분이면 끝나니까, 발표가 끝나고 한번 답해 주시면 정말 감사하겠습니다. 발표는 저와 손유호, 박명진 세 명이 나눠서 진행하겠습니다.</a:t>
             </a:r>
             <a:endParaRPr lang="en-US" dirty="0"/>
           </a:p>
@@ -1926,7 +1926,7 @@
           <a:p>
             <a:r>
               <a:rPr lang="en-US" dirty="0"/>
-              <a:t>알바생이 겪는 문제는 세 가지입니다. 첫째, 얼마를 받아야 하는지 계산하기 어렵습니다. 노동절에 일한 알바생의 33.2%는 수당을 받는지 안내받지 못해 모른다고 답했습니다. 둘째, 덜 받아도 알아채기 어렵습니다. 알바생의 48.0%가 임금 문제를 겪었는데, 저희 설문에서도 12명 중 7명이 통장에 들어온 총액만 본다고 답했습니다. 셋째, 알아도 말을 꺼내기 어렵습니다. 최저시급보다 덜 받은 사람의 49.3%는 아무 대응도 하지 않았습니다. 기록이 없으면 "나중에 지어낸 것 아니냐"는 한마디에 무너지기 때문입니다. 세 숫자는 모두 알바천국 설문 결과입니다.</a:t>
+              <a:t>저희가 주목한 문제는 세 가지입니다. 첫 번째는 얼마를 받아야 하는지 계산하기 어렵다는 겁니다. 노동절에 일한 알바생 중 33.2%는 수당을 받는지 안내를 못 받아서 모른다고 답했습니다. 두 번째는 덜 받아도 알아채기 어렵다는 겁니다. 알바생의 48.0%가 임금 문제를 겪었다고 했는데, 저희 설문에서도 12명 중 7명이 통장에 들어온 총액만 본다고 답했습니다. 세 번째는 알아도 말을 꺼내기 어렵다는 겁니다. 최저시급보다 덜 받은 사람 중 49.3%는 아무 대응도 하지 않았습니다. 기록이 없으면 "나중에 지어낸 거 아니냐"는 한마디에 할 말이 없어지기 때문입니다. 참고로 이 세 숫자는 모두 알바천국 설문 결과입니다.</a:t>
             </a:r>
             <a:endParaRPr lang="en-US" dirty="0"/>
           </a:p>
@@ -2014,7 +2014,7 @@
           <a:p>
             <a:r>
               <a:rPr lang="en-US" dirty="0"/>
-              <a:t>그럼 기존 서비스는 어떨까요. 알바생들이 실제로 가장 많이 쓰는 건 메모장과 카톡이라 첫 열에 넣었습니다. 하우머치는 예상 급여에서 멈추고, 기그는 사장님이 가입해야 하고, 알바천국 계산기는 기록이 남지 않고, 진정24는 증거가 이미 있어야 시작합니다. 가운데 세 줄, 실제 받은 돈과의 비교, 요청 문구와 증빙, 수정 이력과 등록 시각은 모두 알바가드에만 있습니다. 진정 접수는 저희가 직접 하지 않고, 1350과 노동포털로 연결해 드립니다.</a:t>
+              <a:t>그럼 기존 서비스들은 어떨까요? 알바생들이 실제로 제일 많이 쓰는 건 앱보다 메모장이나 카톡이라서 맨 앞 열에 같이 넣었습니다. 하우머치는 예상 급여를 보여 주는 데서 멈추고, 기그는 사장님이 가입해야 쓸 수 있습니다. 알바천국 계산기는 기록이 남지 않고, 진정24는 증거가 이미 있어야 시작할 수 있습니다. 표 가운데 세 줄, 실제 받은 돈과 비교하기, 요청 문구와 증빙 만들기, 수정 이력과 등록 시각은 알바가드에만 있습니다. 진정 접수는 저희가 직접 하지 않고, 1350과 노동포털로 연결만 해 드립니다.</a:t>
             </a:r>
             <a:endParaRPr lang="en-US" dirty="0"/>
           </a:p>
@@ -2102,7 +2102,7 @@
           <a:p>
             <a:r>
               <a:rPr lang="en-US" dirty="0"/>
-              <a:t>그래서 알바가드는 기록, 비교, 요청 세 단계를 한 앱으로 잇습니다. 출근과 퇴근은 버튼 하나로 기록하고, 고치면 무엇을 왜 고쳤는지 남습니다. 받았어야 할 돈과 실제 받은 돈의 차이를 보여 주고, 덜 받았다면 정중한 메시지부터 내용증명 초안, 진정 절차 안내까지 단계별로 돕습니다. 사장님 연동도, 로그인도 필요 없고, 근무 내용은 내 폰 안에만 남습니다.</a:t>
+              <a:t>그래서 저희는 기록, 비교, 요청 세 단계를 앱 하나로 이었습니다. 출근과 퇴근은 버튼 하나로 기록하고, 나중에 고치면 무엇을 왜 고쳤는지가 남습니다. 그다음 받았어야 할 돈과 실제로 받은 돈의 차이를 보여 주고, 덜 받았다면 정중한 메시지부터 내용증명 초안, 진정 절차 안내까지 단계별로 도와줍니다. 사장님 연동이나 로그인은 필요 없고, 근무 내용은 내 폰 안에만 저장됩니다.</a:t>
             </a:r>
             <a:endParaRPr lang="en-US" dirty="0"/>
           </a:p>
@@ -2190,7 +2190,7 @@
           <a:p>
             <a:r>
               <a:rPr lang="en-US" dirty="0"/>
-              <a:t>저희만의 차별점은 세 가지입니다. 첫째, 사장님 가입 없이 혼자 씁니다. 둘째, 실제 받은 돈과 비교해서 요청 문구와 증빙까지 이어 줍니다. 셋째, 기록할 때마다 확인 번호와 서버 등록 시각이 남습니다. 사유 없이는 고칠 수 없고, 지워도 흔적이 남고, 고치면 다시 등록됩니다. 그래서 다른 앱이 쉽게 따라 하기 어렵습니다. 한계도 말씀드리겠습니다. 비교 기능 자체는 다른 앱도 따라올 수 있습니다. 그리고 이 기록이 법적 효력을 보장하지는 않습니다. 통장 내역이나 메시지와 함께 내야 힘이 생기고, 판단은 근로감독관과 법원이 합니다.</a:t>
+              <a:t>저희 차별점은 세 가지입니다. 첫째, 사장님 가입 없이 혼자 쓸 수 있습니다. 둘째, 실제로 받은 돈과 비교해서 요청 문구와 증빙까지 이어집니다. 셋째, 기록할 때마다 확인 번호와 서버 등록 시각이 남습니다. 사유 없이는 기록을 고칠 수 없고, 지워도 흔적이 남고, 고치면 다시 등록됩니다. 이 부분은 다른 앱이 쉽게 따라 하기 어렵다고 생각합니다. 물론 한계도 있습니다. 비교 기능 자체는 다른 앱도 충분히 따라올 수 있습니다. 그리고 이 기록이 법적 효력을 보장하지는 않습니다. 통장 내역이나 메시지와 같이 내야 힘이 생기고, 최종 판단은 근로감독관과 법원이 합니다.</a:t>
             </a:r>
             <a:endParaRPr lang="en-US" dirty="0"/>
           </a:p>
@@ -2278,7 +2278,7 @@
           <a:p>
             <a:r>
               <a:rPr lang="en-US" dirty="0"/>
-              <a:t>기술 스택입니다. 앱은 React와 Vite로 만든 웹앱입니다. 앱스토어 없이 링크로 바로 설치하고, 홈 화면에 추가하면 인터넷 없이도 열립니다. 별도 서버는 두지 않았고, Supabase는 확인 번호 등록과 설문 수집에만 씁니다. 코드를 올리면 GitHub Pages로 자동 배포됩니다. 서버를 최소로 둔 이유는 개인정보와 비용 때문입니다.</a:t>
+              <a:t>다음은 기술 스택입니다. 앱은 React와 Vite로 만든 웹앱입니다. 앱스토어를 거치지 않고 링크로 바로 설치할 수 있고, 홈 화면에 추가해 두면 인터넷이 없어도 열립니다. 따로 서버는 두지 않았고, Supabase는 확인 번호 등록이랑 설문 수집에만 쓰고 있습니다. 코드를 올리면 GitHub Pages로 자동 배포됩니다. 서버를 최소한으로 둔 건 개인정보와 비용 때문입니다.</a:t>
             </a:r>
             <a:endParaRPr lang="en-US" dirty="0"/>
           </a:p>
@@ -2366,7 +2366,7 @@
           <a:p>
             <a:r>
               <a:rPr lang="en-US" dirty="0"/>
-              <a:t>구성도입니다. 계산과 저장은 모두 왼쪽 폰 안에서 끝납니다. 서버로 가는 건 확인 번호와 기록 번호, 무작위 기기 번호뿐이고, 근무지나 시각, 금액은 보내지 않습니다. 등록 시각은 서버가 직접 찍기 때문에 폰 시계를 바꿔도 소용이 없습니다. 실제로 2000년 시각을 보내 봤는데 서버 시각으로 저장됐고, 수정이나 삭제 요청은 거부됐습니다. 다만 운영자 권한으로는 고칠 수 있어서, 지금 막는 것은 사용자가 나중에 고쳐 쓰는 것까지입니다.</a:t>
+              <a:t>이건 전체 구성도입니다. 계산과 저장은 모두 왼쪽 폰 안에서 끝납니다. 서버로 가는 건 확인 번호와 기록 번호, 무작위 기기 번호뿐이고, 근무지나 시각, 금액은 보내지 않습니다. 등록 시각은 서버가 직접 찍기 때문에 폰 시계를 바꿔도 소용이 없습니다. 실제로 2000년 시각을 보내 봤는데 서버 시각으로 저장됐고, 수정이나 삭제 요청은 거부되는 걸 확인했습니다. 다만 운영자 권한으로는 고칠 수 있어서, 지금 막을 수 있는 건 사용자가 나중에 기록을 고쳐 쓰는 것까지입니다.</a:t>
             </a:r>
             <a:endParaRPr lang="en-US" dirty="0"/>
           </a:p>
@@ -2454,7 +2454,7 @@
           <a:p>
             <a:r>
               <a:rPr lang="en-US" dirty="0"/>
-              <a:t>실제 화면입니다. 캘린더는 예정과 다른 날을 따로 표시하고, 설정에서는 무엇이 서버로 가는지 보고 끌 수 있습니다. 증빙 묶음 PDF에는 기록, 수정 이력, 계산 근거가 한 문서로 들어갑니다. 확인 페이지에서는 누구나 확인 번호만 넣으면 등록 시각을 볼 수 있습니다.</a:t>
+              <a:t>실제 앱 화면입니다. 캘린더에서는 예정과 다르게 일한 날이 따로 표시되고, 설정에서는 어떤 정보가 서버로 가는지 확인하고 끌 수도 있습니다. 증빙 묶음 PDF에는 근무 기록, 수정 이력, 계산 근거가 한 문서로 정리됩니다. 그리고 확인 페이지에서는 누구나 확인 번호만 넣으면 등록 시각을 볼 수 있습니다.</a:t>
             </a:r>
             <a:endParaRPr lang="en-US" dirty="0"/>
           </a:p>

--- a/docs/06_중간발표_PPT.pptx
+++ b/docs/06_중간발표_PPT.pptx
@@ -125,31 +125,31 @@
   <p:extLst>
     <p:ext uri="{521415D9-36F7-43E2-AB2F-B90AF26B5E84}">
       <p14:sectionLst xmlns:p14="http://schemas.microsoft.com/office/powerpoint/2010/main">
-        <p14:section name="① 표지·팀 소개" id="{6806c200-6ec8-7ea1-c40b-1da7fc1e3240}">
+        <p14:section name="① 표지·팀 소개" id="{43c7ff68-6bc0-81d3-6f2e-618b7849b061}">
           <p14:sldIdLst>
             <p14:sldId id="256"/>
             <p14:sldId id="257"/>
           </p14:sldIdLst>
         </p14:section>
-        <p14:section name="② 문제 정의" id="{c5f38b47-3d73-cb0e-b05e-7d4257b987a7}">
+        <p14:section name="② 문제 정의" id="{a594a6d2-ea66-bb4c-f8a8-024f10a41e7a}">
           <p14:sldIdLst>
             <p14:sldId id="258"/>
             <p14:sldId id="259"/>
           </p14:sldIdLst>
         </p14:section>
-        <p14:section name="③ 솔루션·핵심 가치" id="{59408be1-7afa-c9c9-d144-b1016bac79ee}">
+        <p14:section name="③ 솔루션·핵심 가치" id="{233955bc-b0ee-3729-effe-604d6838fadd}">
           <p14:sldIdLst>
             <p14:sldId id="260"/>
             <p14:sldId id="261"/>
           </p14:sldIdLst>
         </p14:section>
-        <p14:section name="④ SW 기술 아키텍처" id="{3a39b9ee-eb4f-d344-b073-4020afa1346c}">
+        <p14:section name="④ SW 기술 아키텍처" id="{fec46cd1-20c6-1092-5012-db3d0d1e75c7}">
           <p14:sldIdLst>
             <p14:sldId id="262"/>
             <p14:sldId id="263"/>
           </p14:sldIdLst>
         </p14:section>
-        <p14:section name="⑤ 개발 현황·MVP 시연" id="{39970eae-2abe-d1ce-a252-27a96c0dddbf}">
+        <p14:section name="⑤ 개발 현황·MVP 시연" id="{1d6bdd00-3ec8-21b5-8882-3be1981f4c86}">
           <p14:sldIdLst>
             <p14:sldId id="264"/>
             <p14:sldId id="265"/>
@@ -157,19 +157,19 @@
             <p14:sldId id="267"/>
           </p14:sldIdLst>
         </p14:section>
-        <p14:section name="⑥ 시장 분석·비즈니스 모델" id="{75e551d0-b47e-06e2-eaa9-bc808549516f}">
+        <p14:section name="⑥ 시장 분석·비즈니스 모델" id="{46e3ae46-7626-457b-166f-59d94e882fa4}">
           <p14:sldIdLst>
             <p14:sldId id="268"/>
             <p14:sldId id="269"/>
             <p14:sldId id="270"/>
           </p14:sldIdLst>
         </p14:section>
-        <p14:section name="⑦ 초기 시장 검증" id="{e5ba3b02-2e51-858f-f2af-5b528eb0be26}">
+        <p14:section name="⑦ 초기 시장 검증" id="{9efe7318-0966-7430-39b4-f2f4a584e33a}">
           <p14:sldIdLst>
             <p14:sldId id="271"/>
           </p14:sldIdLst>
         </p14:section>
-        <p14:section name="⑧ 향후 계획·팀 역량" id="{9e53f84e-8d16-aafc-b3db-9dc28ed13df6}">
+        <p14:section name="⑧ 향후 계획·팀 역량" id="{1089a665-3adf-f981-1b38-8089ae8cbbda}">
           <p14:sldIdLst>
             <p14:sldId id="272"/>
             <p14:sldId id="273"/>
@@ -1459,7 +1459,7 @@
           <a:p>
             <a:r>
               <a:rPr lang="en-US" dirty="0"/>
-              <a:t>안녕하세요, 검증 부분을 맡은 박명진입니다. 저희 가설은 근무 기록을 근거로 한 요청 문구가 있으면, 알바생이 사장님께 말을 꺼낼 수 있다고 느끼고 실제로 쓸 거라는 겁니다. 이 가설을 11월에 설문 30명과 인터뷰 5명으로, 표에 있는 다섯 가지를 확인하려고 합니다. 오른쪽 끝 칸은 10월 26일까지 받은 설문 13명의 중간 결과입니다. 매달 받은 금액을 넣겠다는 사람이 11명이었고, 게임 화면 광고가 싫다는 사람은 4명이었습니다. 다만 아직 지인 위주라 정식 조사라고 보기는 어렵고, 지금 알바 중인 사람이 2명뿐이라 주 15시간 기준은 판단을 미뤘습니다. 저희한테 불리한 결과도 있었습니다. 정산 요청 메시지와 기록 등록을 가장 쓸모 있는 기능으로 고른 사람은 한 명도 없었고, 미니게임은 안 쓸 것 같은 기능 1위였습니다. 그래서 11월 인터뷰에서는 요청 문구와 확인 번호를 직접 보여 주고 반응을 들어 보려고 합니다.</a:t>
+              <a:t>안녕하세요, 검증 부분을 맡은 박명진입니다. 저희 가설은 근무 기록을 근거로 한 요청 문구가 있으면, 알바생이 사장님께 말을 꺼낼 수 있다고 느끼고 실제로 쓸 거라는 겁니다. 이 가설을 11월에 설문 30명과 인터뷰 5명으로, 표에 있는 다섯 가지를 확인하려고 합니다. 오른쪽 끝 칸은 10월 26일까지 받은 설문 13명의 중간 결과입니다. 매달 받은 금액을 넣겠다는 사람이 11명이었고, 게임 화면 광고가 싫다는 사람은 4명이었습니다. 다만 아직 지인 위주라 정식 조사라고 보기는 어렵고, 지금 알바 중인 사람이 2명뿐이라 주 15시간 기준은 판단을 미뤘습니다. 저희한테 불리한 결과도 있었습니다. 정산 요청 메시지와 기록 등록을 가장 쓸모 있는 기능으로 고른 사람은 한 명도 없었고, 미니게임은 안 쓸 것 같은 기능 1위였습니다. (멈춤) 정리하면, 비교 기능은 원했지만 요청 기능의 가치는 아직 못 느꼈습니다. 11월 인터뷰에서는 요청 문구와 확인 번호를 직접 보여 주고, 바로 이 부분을 확인하겠습니다.</a:t>
             </a:r>
             <a:endParaRPr lang="en-US" dirty="0"/>
           </a:p>
@@ -1723,7 +1723,7 @@
           <a:p>
             <a:r>
               <a:rPr lang="en-US" dirty="0"/>
-              <a:t>팀장 마무리: 처음에 보여 드린 금액처럼, 통장만 봐서는 보이지 않던 돈을 기록으로 찾아 주는 것, 그게 저희 알바가드입니다. 마지막으로 두 가지 조언을 구하고 싶습니다. 문서를 유료화하지 않고도 할 수 있는 수익 모델이 더 있을지, 그리고 설문 30명과 인터뷰 5명이면 검증하기에 충분할지입니다. 이상으로 4조 발표를 마치겠습니다. 들어 주셔서 감사합니다. 질문 받겠습니다.
+              <a:t>팀장 마무리: (멈춤) 다시 한번 말씀드리면, 다른 앱은 '얼마 받아야 하나'에서 멈추지만, 알바가드는 '덜 받았으면 어떻게 받아내나'까지 갑니다. 처음에 보여 드린 금액처럼, 통장만 봐서는 보이지 않던 돈을 기록으로 찾아 주는 것, 그게 저희 알바가드입니다. 마지막으로 두 가지 조언을 구하고 싶습니다. 문서를 유료화하지 않고도 할 수 있는 수익 모델이 더 있을지, 그리고 설문 30명과 인터뷰 5명이면 검증하기에 충분할지입니다. 이상으로 4조 발표를 마치겠습니다. 들어 주셔서 감사합니다. 질문 받겠습니다.
 예상 질문 (이름 붙은 사람이 먼저 답하고, 모자라면 팀장이 보탭니다. 답은 짧은 메모이니 말할 때는 "~습니다"로)
 · [이지훈] 법적 효력 있나? → 보장하지 않는다. 판단은 감독관 · 법원. 우리는 판단할 자료를 정리하고, 수정 이력으로 무엇을 언제 왜 고쳤는지, 확인 번호로 그 번호가 언제 서버에 들어왔는지 보여 준다(내용과 맞춰 보는 방법은 기말까지). 통장 내역 · 카톡과 함께 내야 한다고 앱에도 적어 뒀다.
 · [이지훈] 서버는 여러분이 관리하는데 고치면 그만 아닌가? → 맞다. 공개키로는 넣기 · 읽기만 되고 시각은 서버가 찍는 것까지 확인했지만, 프로젝트 소유자 권한으로는 고칠 수 있다. 한계로 인정한다. 지금 막는 건 "사용자 본인이 나중에 고쳐 쓰기"까지. 운영자까지 못 고치게 하는 외부 공인 시점 확인은 비용 때문에 계획. 서버에는 번호만 있어서 운영자가 서버를 고쳐도 폰의 근무 내용 자체는 못 바꾼다. (확인 페이지에도 "앱에서 고치거나 지울 수 없음, 운영자 권한으로는 가능"이라고 적어 두었다)
@@ -1926,7 +1926,7 @@
           <a:p>
             <a:r>
               <a:rPr lang="en-US" dirty="0"/>
-              <a:t>저희가 주목한 문제는 세 가지입니다. 첫 번째는 얼마를 받아야 하는지 계산하기 어렵다는 겁니다. 노동절에 일한 알바생 중 33.2%는 수당을 받는지 안내를 못 받아서 모른다고 답했습니다. 두 번째는 덜 받아도 알아채기 어렵다는 겁니다. 알바생의 48.0%가 임금 문제를 겪었다고 했는데, 저희 설문에서도 12명 중 7명이 통장에 들어온 총액만 본다고 답했습니다. 세 번째는 알아도 말을 꺼내기 어렵다는 겁니다. 최저시급보다 덜 받은 사람 중 49.3%는 아무 대응도 하지 않았습니다. 기록이 없으면 "나중에 지어낸 거 아니냐"는 한마디에 할 말이 없어지기 때문입니다. 참고로 이 세 숫자는 모두 알바천국 설문 결과입니다.</a:t>
+              <a:t>저희가 주목한 문제는 세 가지입니다. 첫 번째는 얼마를 받아야 하는지 계산하기 어렵다는 겁니다. 노동절에 일한 알바생 중 33.2%는 수당을 받는지 안내를 못 받아서 모른다고 답했습니다. 두 번째는 덜 받아도 알아채기 어렵다는 겁니다. 알바생의 48.0%가 임금 문제를 겪었다고 했는데, 저희 설문에서도 12명 중 7명이 통장에 들어온 총액만 본다고 답했습니다. 세 번째는 알아도 말을 꺼내기 어렵다는 겁니다. 최저시급보다 덜 받은 사람 중 49.3%는 아무 대응도 하지 않았습니다. 기록이 없으면 "나중에 지어낸 거 아니냐"는 한마디에 할 말이 없어지기 때문입니다. 참고로 이 세 숫자는 모두 알바천국 설문 결과입니다. (멈춤) 결국 문제는 계산이 아니라, 말을 꺼낼 근거가 없다는 겁니다.</a:t>
             </a:r>
             <a:endParaRPr lang="en-US" dirty="0"/>
           </a:p>
@@ -2014,7 +2014,7 @@
           <a:p>
             <a:r>
               <a:rPr lang="en-US" dirty="0"/>
-              <a:t>그럼 기존 서비스들은 어떨까요? 알바생들이 실제로 제일 많이 쓰는 건 앱보다 메모장이나 카톡이라서 맨 앞 열에 같이 넣었습니다. 하우머치는 예상 급여를 보여 주는 데서 멈추고, 기그는 사장님이 가입해야 쓸 수 있습니다. 알바천국 계산기는 기록이 남지 않고, 진정24는 증거가 이미 있어야 시작할 수 있습니다. 표 가운데 세 줄, 실제 받은 돈과 비교하기, 요청 문구와 증빙 만들기, 수정 이력과 등록 시각은 알바가드에만 있습니다. 진정 접수는 저희가 직접 하지 않고, 1350과 노동포털로 연결만 해 드립니다.</a:t>
+              <a:t>그럼 기존 서비스들은 어떨까요? 알바생들이 실제로 제일 많이 쓰는 건 앱보다 메모장이나 카톡이라서 맨 앞 열에 같이 넣었습니다. 표를 다 보실 필요는 없고, 가운데 세 줄만 봐 주세요. 실제 받은 돈과 비교하기, 요청 문구와 증빙 만들기, 수정 이력과 등록 시각입니다. 이 세 줄은 알바가드에만 O가 있습니다. 다른 서비스는 대부분 예상 급여 계산에서 멈추거나, 사장님이 가입해야 하거나, 증거가 이미 있어야 시작할 수 있습니다. 진정 접수는 저희가 직접 하지 않고, 1350과 노동포털로 연결만 해 드립니다.</a:t>
             </a:r>
             <a:endParaRPr lang="en-US" dirty="0"/>
           </a:p>
@@ -2190,7 +2190,7 @@
           <a:p>
             <a:r>
               <a:rPr lang="en-US" dirty="0"/>
-              <a:t>저희 차별점은 세 가지입니다. 첫째, 사장님 가입 없이 혼자 쓸 수 있습니다. 둘째, 실제로 받은 돈과 비교해서 요청 문구와 증빙까지 이어집니다. 셋째, 기록할 때마다 확인 번호와 서버 등록 시각이 남습니다. 사유 없이는 기록을 고칠 수 없고, 지워도 흔적이 남고, 고치면 다시 등록됩니다. 이 부분은 다른 앱이 쉽게 따라 하기 어렵다고 생각합니다. 물론 한계도 있습니다. 비교 기능 자체는 다른 앱도 충분히 따라올 수 있습니다. 그리고 이 기록이 법적 효력을 보장하지는 않습니다. 통장 내역이나 메시지와 같이 내야 힘이 생기고, 최종 판단은 근로감독관과 법원이 합니다.</a:t>
+              <a:t>저희 차별점은 세 가지입니다. 첫째, 사장님 가입 없이 혼자 쓸 수 있습니다. 둘째, 실제로 받은 돈과 비교해서 요청 문구와 증빙까지 이어집니다. 셋째, 기록할 때마다 확인 번호와 서버 등록 시각이 남습니다. 사유 없이는 기록을 고칠 수 없고, 지워도 흔적이 남고, 고치면 다시 등록됩니다. 이 부분은 다른 앱이 쉽게 따라 하기 어렵다고 생각합니다. (멈춤) 결국 다른 앱은 '얼마 받아야 하나'에서 멈추고, 알바가드는 '덜 받았으면 어떻게 받아내나'까지 갑니다. 물론 한계도 있습니다. 비교 기능 자체는 다른 앱도 충분히 따라올 수 있습니다. 그리고 이 기록이 법적 효력을 보장하지는 않습니다. 통장 내역이나 메시지와 같이 내야 힘이 생기고, 최종 판단은 근로감독관과 법원이 합니다.</a:t>
             </a:r>
             <a:endParaRPr lang="en-US" dirty="0"/>
           </a:p>
@@ -2278,7 +2278,7 @@
           <a:p>
             <a:r>
               <a:rPr lang="en-US" dirty="0"/>
-              <a:t>다음은 기술 스택입니다. 앱은 React와 Vite로 만든 웹앱입니다. 앱스토어를 거치지 않고 링크로 바로 설치할 수 있고, 홈 화면에 추가해 두면 인터넷이 없어도 열립니다. 따로 서버는 두지 않았고, Supabase는 확인 번호 등록이랑 설문 수집에만 쓰고 있습니다. 코드를 올리면 GitHub Pages로 자동 배포됩니다. 서버를 최소한으로 둔 건 개인정보와 비용 때문입니다.</a:t>
+              <a:t>다음은 기술 스택입니다. 표를 한 문장으로 줄이면, 앱은 폰 안에서 돌아가고 서버는 꼭 필요한 곳에만 쓴다는 겁니다. 앱은 React와 Vite로 만든 웹앱이라 앱스토어 없이 링크로 바로 설치하고, 홈 화면에 추가하면 인터넷이 없어도 열립니다. 서버는 따로 두지 않았고, Supabase는 확인 번호 등록과 설문 수집에만 씁니다. 이렇게 한 이유는 개인정보와 비용 때문입니다.</a:t>
             </a:r>
             <a:endParaRPr lang="en-US" dirty="0"/>
           </a:p>
@@ -2366,7 +2366,7 @@
           <a:p>
             <a:r>
               <a:rPr lang="en-US" dirty="0"/>
-              <a:t>이건 전체 구성도입니다. 계산과 저장은 모두 왼쪽 폰 안에서 끝납니다. 서버로 가는 건 확인 번호와 기록 번호, 무작위 기기 번호뿐이고, 근무지나 시각, 금액은 보내지 않습니다. 등록 시각은 서버가 직접 찍기 때문에 폰 시계를 바꿔도 소용이 없습니다. 실제로 2000년 시각을 보내 봤는데 서버 시각으로 저장됐고, 수정이나 삭제 요청은 거부되는 걸 확인했습니다. 다만 운영자 권한으로는 고칠 수 있어서, 지금 막을 수 있는 건 사용자가 나중에 기록을 고쳐 쓰는 것까지입니다.</a:t>
+              <a:t>이건 전체 구성도입니다. 계산과 저장은 모두 왼쪽 폰 안에서 끝납니다. 서버로 가는 건 확인 번호와 기록 번호, 무작위 기기 번호뿐이고, 근무지나 시각, 금액은 보내지 않습니다. 등록 시각은 서버가 직접 찍기 때문에 폰 시계를 바꿔도 소용이 없습니다. 실제로 2000년 시각을 보내 봤는데 서버 시각으로 저장됐고, 수정이나 삭제 요청은 거부되는 걸 확인했습니다. 다만 운영자 권한으로는 고칠 수 있어서, 지금 막을 수 있는 건 사용자가 나중에 기록을 고쳐 쓰는 것까지입니다. (멈춤) 다시 말해, 근무 내용은 폰 밖으로 나가지 않고, 서버에는 번호와 시각만 갑니다.</a:t>
             </a:r>
             <a:endParaRPr lang="en-US" dirty="0"/>
           </a:p>

--- a/docs/06_중간발표_PPT.pptx
+++ b/docs/06_중간발표_PPT.pptx
@@ -125,31 +125,31 @@
   <p:extLst>
     <p:ext uri="{521415D9-36F7-43E2-AB2F-B90AF26B5E84}">
       <p14:sectionLst xmlns:p14="http://schemas.microsoft.com/office/powerpoint/2010/main">
-        <p14:section name="① 표지·팀 소개" id="{43c7ff68-6bc0-81d3-6f2e-618b7849b061}">
+        <p14:section name="① 표지·팀 소개" id="{2f1c203f-5b57-6586-3b74-6d3f536a7dc1}">
           <p14:sldIdLst>
             <p14:sldId id="256"/>
             <p14:sldId id="257"/>
           </p14:sldIdLst>
         </p14:section>
-        <p14:section name="② 문제 정의" id="{a594a6d2-ea66-bb4c-f8a8-024f10a41e7a}">
+        <p14:section name="② 문제 정의" id="{75d13e89-5e16-0e26-411b-879f3a8480c4}">
           <p14:sldIdLst>
             <p14:sldId id="258"/>
             <p14:sldId id="259"/>
           </p14:sldIdLst>
         </p14:section>
-        <p14:section name="③ 솔루션·핵심 가치" id="{233955bc-b0ee-3729-effe-604d6838fadd}">
+        <p14:section name="③ 솔루션·핵심 가치" id="{8cb18e17-0110-6d48-e169-0aa7a2a49c3b}">
           <p14:sldIdLst>
             <p14:sldId id="260"/>
             <p14:sldId id="261"/>
           </p14:sldIdLst>
         </p14:section>
-        <p14:section name="④ SW 기술 아키텍처" id="{fec46cd1-20c6-1092-5012-db3d0d1e75c7}">
+        <p14:section name="④ SW 기술 아키텍처" id="{ce15caa2-e6b6-b478-9514-545dde0718d1}">
           <p14:sldIdLst>
             <p14:sldId id="262"/>
             <p14:sldId id="263"/>
           </p14:sldIdLst>
         </p14:section>
-        <p14:section name="⑤ 개발 현황·MVP 시연" id="{1d6bdd00-3ec8-21b5-8882-3be1981f4c86}">
+        <p14:section name="⑤ 개발 현황·MVP 시연" id="{6b37f3ee-a706-fdfc-a67b-aa283724e008}">
           <p14:sldIdLst>
             <p14:sldId id="264"/>
             <p14:sldId id="265"/>
@@ -157,19 +157,19 @@
             <p14:sldId id="267"/>
           </p14:sldIdLst>
         </p14:section>
-        <p14:section name="⑥ 시장 분석·비즈니스 모델" id="{46e3ae46-7626-457b-166f-59d94e882fa4}">
+        <p14:section name="⑥ 시장 분석·비즈니스 모델" id="{f2badf0f-51c0-6869-cf89-828d8df00cbe}">
           <p14:sldIdLst>
             <p14:sldId id="268"/>
             <p14:sldId id="269"/>
             <p14:sldId id="270"/>
           </p14:sldIdLst>
         </p14:section>
-        <p14:section name="⑦ 초기 시장 검증" id="{9efe7318-0966-7430-39b4-f2f4a584e33a}">
+        <p14:section name="⑦ 초기 시장 검증" id="{14e98f9c-50e9-1923-8aa5-0de147a865c2}">
           <p14:sldIdLst>
             <p14:sldId id="271"/>
           </p14:sldIdLst>
         </p14:section>
-        <p14:section name="⑧ 향후 계획·팀 역량" id="{1089a665-3adf-f981-1b38-8089ae8cbbda}">
+        <p14:section name="⑧ 향후 계획·팀 역량" id="{f4bcae77-ccf6-2354-7b85-94aa0eb27587}">
           <p14:sldIdLst>
             <p14:sldId id="272"/>
             <p14:sldId id="273"/>
@@ -1926,7 +1926,7 @@
           <a:p>
             <a:r>
               <a:rPr lang="en-US" dirty="0"/>
-              <a:t>저희가 주목한 문제는 세 가지입니다. 첫 번째는 얼마를 받아야 하는지 계산하기 어렵다는 겁니다. 노동절에 일한 알바생 중 33.2%는 수당을 받는지 안내를 못 받아서 모른다고 답했습니다. 두 번째는 덜 받아도 알아채기 어렵다는 겁니다. 알바생의 48.0%가 임금 문제를 겪었다고 했는데, 저희 설문에서도 12명 중 7명이 통장에 들어온 총액만 본다고 답했습니다. 세 번째는 알아도 말을 꺼내기 어렵다는 겁니다. 최저시급보다 덜 받은 사람 중 49.3%는 아무 대응도 하지 않았습니다. 기록이 없으면 "나중에 지어낸 거 아니냐"는 한마디에 할 말이 없어지기 때문입니다. 참고로 이 세 숫자는 모두 알바천국 설문 결과입니다. (멈춤) 결국 문제는 계산이 아니라, 말을 꺼낼 근거가 없다는 겁니다.</a:t>
+              <a:t>저희가 주목한 문제는 세 가지입니다. 첫 번째는 얼마를 받아야 하는지 계산하기 어렵다는 겁니다. 노동절에 일한 알바생 중 33.2%는 수당을 받는지 안내를 못 받아서 모른다고 답했습니다. 두 번째는 덜 받아도 알아채기 어렵다는 겁니다. 알바생의 48.0%가 임금 문제를 겪었다고 했는데, 저희 설문에서도 12명 중 7명이 통장에 들어온 총액만 본다고 답했습니다. 세 번째는 알아도 말을 꺼내기 어렵다는 겁니다. 최저시급보다 덜 받은 사람 중 49.3%는 아무 대응도 하지 않았습니다. 기록이 없으면 "나중에 지어낸 거 아니냐"는 한마디에 할 말이 없어지기 때문입니다. 참고로 이 세 숫자는 모두 알바천국 설문 결과입니다. (멈춤) 결국 세 문제의 뿌리는 같습니다. 근거가 될 기록이 없다는 겁니다.</a:t>
             </a:r>
             <a:endParaRPr lang="en-US" dirty="0"/>
           </a:p>
@@ -15819,7 +15819,7 @@
                   <a:schemeClr val="tx2"/>
                 </a:solidFill>
               </a:rPr>
-              <a:t>덜 받아도 모르고, 알아도 말하지 못함</a:t>
+              <a:t>세 문제의 뿌리는 하나: 근거가 될 기록이 없음</a:t>
             </a:r>
             <a:endParaRPr lang="en-US" sz="2400" dirty="0"/>
           </a:p>
@@ -20789,7 +20789,7 @@
                   <a:schemeClr val="tx2"/>
                 </a:solidFill>
               </a:rPr>
-              <a:t>차별점과 한계</a:t>
+              <a:t>다른 앱은 계산에서 멈추고, 알바가드는 받아내기까지</a:t>
             </a:r>
             <a:endParaRPr lang="en-US" sz="2400" dirty="0"/>
           </a:p>

--- a/docs/06_중간발표_PPT.pptx
+++ b/docs/06_중간발표_PPT.pptx
@@ -125,31 +125,31 @@
   <p:extLst>
     <p:ext uri="{521415D9-36F7-43E2-AB2F-B90AF26B5E84}">
       <p14:sectionLst xmlns:p14="http://schemas.microsoft.com/office/powerpoint/2010/main">
-        <p14:section name="① 표지·팀 소개" id="{2f1c203f-5b57-6586-3b74-6d3f536a7dc1}">
+        <p14:section name="① 표지·팀 소개" id="{8cb89464-d640-96b0-4eac-8ced6d5a7adf}">
           <p14:sldIdLst>
             <p14:sldId id="256"/>
             <p14:sldId id="257"/>
           </p14:sldIdLst>
         </p14:section>
-        <p14:section name="② 문제 정의" id="{75d13e89-5e16-0e26-411b-879f3a8480c4}">
+        <p14:section name="② 문제 정의" id="{d659b3c4-f1f6-4b42-36b4-60bd9c2cee84}">
           <p14:sldIdLst>
             <p14:sldId id="258"/>
             <p14:sldId id="259"/>
           </p14:sldIdLst>
         </p14:section>
-        <p14:section name="③ 솔루션·핵심 가치" id="{8cb18e17-0110-6d48-e169-0aa7a2a49c3b}">
+        <p14:section name="③ 솔루션·핵심 가치" id="{d8ae67c8-2172-4f92-5084-9fdbd243697a}">
           <p14:sldIdLst>
             <p14:sldId id="260"/>
             <p14:sldId id="261"/>
           </p14:sldIdLst>
         </p14:section>
-        <p14:section name="④ SW 기술 아키텍처" id="{ce15caa2-e6b6-b478-9514-545dde0718d1}">
+        <p14:section name="④ SW 기술 아키텍처" id="{8bcee471-a635-ec2b-ecbe-ff96d1f69f00}">
           <p14:sldIdLst>
             <p14:sldId id="262"/>
             <p14:sldId id="263"/>
           </p14:sldIdLst>
         </p14:section>
-        <p14:section name="⑤ 개발 현황·MVP 시연" id="{6b37f3ee-a706-fdfc-a67b-aa283724e008}">
+        <p14:section name="⑤ 개발 현황·MVP 시연" id="{6f49b775-a309-7e6c-f0be-cf40f48f2c46}">
           <p14:sldIdLst>
             <p14:sldId id="264"/>
             <p14:sldId id="265"/>
@@ -157,19 +157,19 @@
             <p14:sldId id="267"/>
           </p14:sldIdLst>
         </p14:section>
-        <p14:section name="⑥ 시장 분석·비즈니스 모델" id="{f2badf0f-51c0-6869-cf89-828d8df00cbe}">
+        <p14:section name="⑥ 시장 분석·비즈니스 모델" id="{d0fb0021-7927-808e-a9f8-4125fb70b9d6}">
           <p14:sldIdLst>
             <p14:sldId id="268"/>
             <p14:sldId id="269"/>
             <p14:sldId id="270"/>
           </p14:sldIdLst>
         </p14:section>
-        <p14:section name="⑦ 초기 시장 검증" id="{14e98f9c-50e9-1923-8aa5-0de147a865c2}">
+        <p14:section name="⑦ 초기 시장 검증" id="{bbb72f94-489e-0c8b-ba81-3e767696bc0d}">
           <p14:sldIdLst>
             <p14:sldId id="271"/>
           </p14:sldIdLst>
         </p14:section>
-        <p14:section name="⑧ 향후 계획·팀 역량" id="{f4bcae77-ccf6-2354-7b85-94aa0eb27587}">
+        <p14:section name="⑧ 향후 계획·팀 역량" id="{e6974e64-2683-e858-3e10-160da0304217}">
           <p14:sldIdLst>
             <p14:sldId id="272"/>
             <p14:sldId id="273"/>
@@ -2278,7 +2278,7 @@
           <a:p>
             <a:r>
               <a:rPr lang="en-US" dirty="0"/>
-              <a:t>다음은 기술 스택입니다. 표를 한 문장으로 줄이면, 앱은 폰 안에서 돌아가고 서버는 꼭 필요한 곳에만 쓴다는 겁니다. 앱은 React와 Vite로 만든 웹앱이라 앱스토어 없이 링크로 바로 설치하고, 홈 화면에 추가하면 인터넷이 없어도 열립니다. 서버는 따로 두지 않았고, Supabase는 확인 번호 등록과 설문 수집에만 씁니다. 이렇게 한 이유는 개인정보와 비용 때문입니다.</a:t>
+              <a:t>다음은 기술 스택입니다. 표를 한 문장으로 줄이면, 앱은 폰 안에서 돌아가고 서버는 꼭 필요한 곳에만 쓴다는 겁니다. 앱은 React와 Vite로 만든 웹앱이라 앱스토어 없이 링크로 바로 설치하고, 홈 화면에 추가하면 인터넷이 없어도 열립니다. 저희가 직접 운영하는 서버는 없고, 외부 서비스인 Supabase를 확인 번호 등록과 설문 수집에만 씁니다. 이렇게 한 이유는 개인정보와 비용 때문입니다.</a:t>
             </a:r>
             <a:endParaRPr lang="en-US" dirty="0"/>
           </a:p>

--- a/docs/06_중간발표_PPT.pptx
+++ b/docs/06_중간발표_PPT.pptx
@@ -125,31 +125,31 @@
   <p:extLst>
     <p:ext uri="{521415D9-36F7-43E2-AB2F-B90AF26B5E84}">
       <p14:sectionLst xmlns:p14="http://schemas.microsoft.com/office/powerpoint/2010/main">
-        <p14:section name="① 표지·팀 소개" id="{8cb89464-d640-96b0-4eac-8ced6d5a7adf}">
+        <p14:section name="① 표지·팀 소개" id="{fcd71fc2-0727-ace8-9e63-470b46c66149}">
           <p14:sldIdLst>
             <p14:sldId id="256"/>
             <p14:sldId id="257"/>
           </p14:sldIdLst>
         </p14:section>
-        <p14:section name="② 문제 정의" id="{d659b3c4-f1f6-4b42-36b4-60bd9c2cee84}">
+        <p14:section name="② 문제 정의" id="{d56e23b0-927c-471f-c90d-71dfa8fb3d25}">
           <p14:sldIdLst>
             <p14:sldId id="258"/>
             <p14:sldId id="259"/>
           </p14:sldIdLst>
         </p14:section>
-        <p14:section name="③ 솔루션·핵심 가치" id="{d8ae67c8-2172-4f92-5084-9fdbd243697a}">
+        <p14:section name="③ 솔루션·핵심 가치" id="{cecb6766-ecde-a89d-5333-b9e69fed1ad8}">
           <p14:sldIdLst>
             <p14:sldId id="260"/>
             <p14:sldId id="261"/>
           </p14:sldIdLst>
         </p14:section>
-        <p14:section name="④ SW 기술 아키텍처" id="{8bcee471-a635-ec2b-ecbe-ff96d1f69f00}">
+        <p14:section name="④ SW 기술 아키텍처" id="{81d0fd5b-ce42-4610-b352-6b26c08bf759}">
           <p14:sldIdLst>
             <p14:sldId id="262"/>
             <p14:sldId id="263"/>
           </p14:sldIdLst>
         </p14:section>
-        <p14:section name="⑤ 개발 현황·MVP 시연" id="{6f49b775-a309-7e6c-f0be-cf40f48f2c46}">
+        <p14:section name="⑤ 개발 현황·MVP 시연" id="{fcaf2139-3e45-ae29-cd5d-46f1de0068cc}">
           <p14:sldIdLst>
             <p14:sldId id="264"/>
             <p14:sldId id="265"/>
@@ -157,19 +157,19 @@
             <p14:sldId id="267"/>
           </p14:sldIdLst>
         </p14:section>
-        <p14:section name="⑥ 시장 분석·비즈니스 모델" id="{d0fb0021-7927-808e-a9f8-4125fb70b9d6}">
+        <p14:section name="⑥ 시장 분석·비즈니스 모델" id="{dd64d4ec-c7d4-6d26-9c1c-b85e125039fa}">
           <p14:sldIdLst>
             <p14:sldId id="268"/>
             <p14:sldId id="269"/>
             <p14:sldId id="270"/>
           </p14:sldIdLst>
         </p14:section>
-        <p14:section name="⑦ 초기 시장 검증" id="{bbb72f94-489e-0c8b-ba81-3e767696bc0d}">
+        <p14:section name="⑦ 초기 시장 검증" id="{62b1ef0e-fe42-9411-10c9-7762d1e80b28}">
           <p14:sldIdLst>
             <p14:sldId id="271"/>
           </p14:sldIdLst>
         </p14:section>
-        <p14:section name="⑧ 향후 계획·팀 역량" id="{e6974e64-2683-e858-3e10-160da0304217}">
+        <p14:section name="⑧ 향후 계획·팀 역량" id="{1e881a14-1a85-52f2-36d5-656e0c62edcb}">
           <p14:sldIdLst>
             <p14:sldId id="272"/>
             <p14:sldId id="273"/>
@@ -1459,7 +1459,7 @@
           <a:p>
             <a:r>
               <a:rPr lang="en-US" dirty="0"/>
-              <a:t>안녕하세요, 검증 부분을 맡은 박명진입니다. 저희 가설은 근무 기록을 근거로 한 요청 문구가 있으면, 알바생이 사장님께 말을 꺼낼 수 있다고 느끼고 실제로 쓸 거라는 겁니다. 이 가설을 11월에 설문 30명과 인터뷰 5명으로, 표에 있는 다섯 가지를 확인하려고 합니다. 오른쪽 끝 칸은 10월 26일까지 받은 설문 13명의 중간 결과입니다. 매달 받은 금액을 넣겠다는 사람이 11명이었고, 게임 화면 광고가 싫다는 사람은 4명이었습니다. 다만 아직 지인 위주라 정식 조사라고 보기는 어렵고, 지금 알바 중인 사람이 2명뿐이라 주 15시간 기준은 판단을 미뤘습니다. 저희한테 불리한 결과도 있었습니다. 정산 요청 메시지와 기록 등록을 가장 쓸모 있는 기능으로 고른 사람은 한 명도 없었고, 미니게임은 안 쓸 것 같은 기능 1위였습니다. (멈춤) 정리하면, 비교 기능은 원했지만 요청 기능의 가치는 아직 못 느꼈습니다. 11월 인터뷰에서는 요청 문구와 확인 번호를 직접 보여 주고, 바로 이 부분을 확인하겠습니다.</a:t>
+              <a:t>안녕하세요, 검증 부분을 맡은 박명진입니다. 저희 가설은 근무 기록을 근거로 한 요청 문구가 있으면, 알바생이 사장님께 말을 꺼낼 수 있다고 느끼고 실제로 쓸 거라는 겁니다. 이 가설을 11월에 설문 30명과 인터뷰 5명으로, 표에 있는 다섯 가지를 확인하려고 합니다. 기준도 정해 뒀습니다. 예를 들어 인터뷰 5명 중 3명이 실제로 보내겠다고 하면 통과이고, 못 미치면 문구와 단계를 다시 짭니다. 자세한 기준은 보고서에 있습니다. 오른쪽 끝 칸은 10월 26일까지 받은 설문 13명의 중간 결과입니다. 매달 받은 금액을 넣겠다는 사람이 11명이었고, 게임 화면 광고가 싫다는 사람은 4명이었습니다. 다만 아직 지인 위주라 정식 조사라고 보기는 어렵고, 지금 알바 중인 사람이 2명뿐이라 주 15시간 기준은 판단을 미뤘습니다. 저희한테 불리한 결과도 있었습니다. 정산 요청 메시지와 기록 등록을 가장 쓸모 있는 기능으로 고른 사람은 한 명도 없었고, 미니게임은 안 쓸 것 같은 기능 1위였습니다. (멈춤) 정리하면, 비교 기능은 원했지만 요청 기능의 가치는 아직 못 느꼈습니다. 11월 인터뷰에서는 요청 문구와 확인 번호를 직접 보여 주고, 바로 이 부분을 확인하겠습니다.</a:t>
             </a:r>
             <a:endParaRPr lang="en-US" dirty="0"/>
           </a:p>

--- a/docs/06_중간발표_PPT.pptx
+++ b/docs/06_중간발표_PPT.pptx
@@ -125,31 +125,31 @@
   <p:extLst>
     <p:ext uri="{521415D9-36F7-43E2-AB2F-B90AF26B5E84}">
       <p14:sectionLst xmlns:p14="http://schemas.microsoft.com/office/powerpoint/2010/main">
-        <p14:section name="① 표지·팀 소개" id="{fcd71fc2-0727-ace8-9e63-470b46c66149}">
+        <p14:section name="① 표지·팀 소개" id="{f105bdd1-77de-8ea3-9370-234db9735e52}">
           <p14:sldIdLst>
             <p14:sldId id="256"/>
             <p14:sldId id="257"/>
           </p14:sldIdLst>
         </p14:section>
-        <p14:section name="② 문제 정의" id="{d56e23b0-927c-471f-c90d-71dfa8fb3d25}">
+        <p14:section name="② 문제 정의" id="{82a56437-0693-a6fc-96c6-8cfa02f4ce97}">
           <p14:sldIdLst>
             <p14:sldId id="258"/>
             <p14:sldId id="259"/>
           </p14:sldIdLst>
         </p14:section>
-        <p14:section name="③ 솔루션·핵심 가치" id="{cecb6766-ecde-a89d-5333-b9e69fed1ad8}">
+        <p14:section name="③ 솔루션·핵심 가치" id="{2aa7201a-d423-5b8d-a0ce-c878055d7af6}">
           <p14:sldIdLst>
             <p14:sldId id="260"/>
             <p14:sldId id="261"/>
           </p14:sldIdLst>
         </p14:section>
-        <p14:section name="④ SW 기술 아키텍처" id="{81d0fd5b-ce42-4610-b352-6b26c08bf759}">
+        <p14:section name="④ SW 기술 아키텍처" id="{8a7f066f-741d-ceb0-488c-e52d8e361a1f}">
           <p14:sldIdLst>
             <p14:sldId id="262"/>
             <p14:sldId id="263"/>
           </p14:sldIdLst>
         </p14:section>
-        <p14:section name="⑤ 개발 현황·MVP 시연" id="{fcaf2139-3e45-ae29-cd5d-46f1de0068cc}">
+        <p14:section name="⑤ 개발 현황·MVP 시연" id="{e9409495-49c5-090f-5959-0a9e669e0e52}">
           <p14:sldIdLst>
             <p14:sldId id="264"/>
             <p14:sldId id="265"/>
@@ -157,19 +157,19 @@
             <p14:sldId id="267"/>
           </p14:sldIdLst>
         </p14:section>
-        <p14:section name="⑥ 시장 분석·비즈니스 모델" id="{dd64d4ec-c7d4-6d26-9c1c-b85e125039fa}">
+        <p14:section name="⑥ 시장 분석·비즈니스 모델" id="{7f92e738-595b-4f42-1e32-724011483686}">
           <p14:sldIdLst>
             <p14:sldId id="268"/>
             <p14:sldId id="269"/>
             <p14:sldId id="270"/>
           </p14:sldIdLst>
         </p14:section>
-        <p14:section name="⑦ 초기 시장 검증" id="{62b1ef0e-fe42-9411-10c9-7762d1e80b28}">
+        <p14:section name="⑦ 초기 시장 검증" id="{67eda673-1b64-69f7-c46e-48d7380454c8}">
           <p14:sldIdLst>
             <p14:sldId id="271"/>
           </p14:sldIdLst>
         </p14:section>
-        <p14:section name="⑧ 향후 계획·팀 역량" id="{1e881a14-1a85-52f2-36d5-656e0c62edcb}">
+        <p14:section name="⑧ 향후 계획·팀 역량" id="{d82f3085-770a-34a9-b90f-e493ddb0de0d}">
           <p14:sldIdLst>
             <p14:sldId id="272"/>
             <p14:sldId id="273"/>
@@ -1459,7 +1459,7 @@
           <a:p>
             <a:r>
               <a:rPr lang="en-US" dirty="0"/>
-              <a:t>안녕하세요, 검증 부분을 맡은 박명진입니다. 저희 가설은 근무 기록을 근거로 한 요청 문구가 있으면, 알바생이 사장님께 말을 꺼낼 수 있다고 느끼고 실제로 쓸 거라는 겁니다. 이 가설을 11월에 설문 30명과 인터뷰 5명으로, 표에 있는 다섯 가지를 확인하려고 합니다. 기준도 정해 뒀습니다. 예를 들어 인터뷰 5명 중 3명이 실제로 보내겠다고 하면 통과이고, 못 미치면 문구와 단계를 다시 짭니다. 자세한 기준은 보고서에 있습니다. 오른쪽 끝 칸은 10월 26일까지 받은 설문 13명의 중간 결과입니다. 매달 받은 금액을 넣겠다는 사람이 11명이었고, 게임 화면 광고가 싫다는 사람은 4명이었습니다. 다만 아직 지인 위주라 정식 조사라고 보기는 어렵고, 지금 알바 중인 사람이 2명뿐이라 주 15시간 기준은 판단을 미뤘습니다. 저희한테 불리한 결과도 있었습니다. 정산 요청 메시지와 기록 등록을 가장 쓸모 있는 기능으로 고른 사람은 한 명도 없었고, 미니게임은 안 쓸 것 같은 기능 1위였습니다. (멈춤) 정리하면, 비교 기능은 원했지만 요청 기능의 가치는 아직 못 느꼈습니다. 11월 인터뷰에서는 요청 문구와 확인 번호를 직접 보여 주고, 바로 이 부분을 확인하겠습니다.</a:t>
+              <a:t>안녕하세요, 검증 부분을 맡은 박명진입니다. 저희 가설은 이렇습니다. 근무 기록을 근거로 한 요청 문구가 있으면, 알바생이 사장님께 말을 꺼낼 수 있다고 느끼고 실제로 쓸 것이다. 이 가설을 11월에 설문 30명과 인터뷰 5명으로, 표에 있는 다섯 가지를 확인하려고 합니다. 기준도 정해 뒀습니다. 예를 들어 인터뷰 5명 중 3명이 실제로 보내겠다고 하면 통과이고, 못 미치면 문구와 단계를 다시 짭니다. 자세한 기준은 보고서에 있습니다. 오른쪽 끝 칸은 10월 26일까지 받은 설문 13명의 중간 결과입니다. 매달 받은 금액을 넣겠다는 사람이 11명이었고, 게임 화면 광고가 싫다는 사람은 4명이었습니다. 다만 아직 지인 위주라 정식 조사라고 보기는 어렵고, 지금 알바 중인 사람이 2명뿐이라 주 15시간 기준은 판단을 미뤘습니다. 저희한테 불리한 결과도 있었습니다. 정산 요청 메시지와 기록 등록을 가장 쓸모 있는 기능으로 고른 사람은 한 명도 없었고, 미니게임은 안 쓸 것 같은 기능 1위였습니다. (멈춤) 정리하면, 비교 기능은 원했지만 요청 기능의 가치는 아직 못 느꼈습니다. 11월 인터뷰에서는 요청 문구와 확인 번호를 직접 보여 주고, 바로 이 부분을 확인하겠습니다.</a:t>
             </a:r>
             <a:endParaRPr lang="en-US" dirty="0"/>
           </a:p>
@@ -1723,7 +1723,7 @@
           <a:p>
             <a:r>
               <a:rPr lang="en-US" dirty="0"/>
-              <a:t>팀장 마무리: (멈춤) 다시 한번 말씀드리면, 다른 앱은 '얼마 받아야 하나'에서 멈추지만, 알바가드는 '덜 받았으면 어떻게 받아내나'까지 갑니다. 처음에 보여 드린 금액처럼, 통장만 봐서는 보이지 않던 돈을 기록으로 찾아 주는 것, 그게 저희 알바가드입니다. 마지막으로 두 가지 조언을 구하고 싶습니다. 문서를 유료화하지 않고도 할 수 있는 수익 모델이 더 있을지, 그리고 설문 30명과 인터뷰 5명이면 검증하기에 충분할지입니다. 이상으로 4조 발표를 마치겠습니다. 들어 주셔서 감사합니다. 질문 받겠습니다.
+              <a:t>팀장 마무리: (멈춤) 다시 한번 말씀드리면, 다른 앱은 '얼마 받아야 하나'에서 멈추지만, 알바가드는 '덜 받았으면 어떻게 받아내나'까지 갑니다. 알바가드는 처음에 보여 드린 금액처럼, 통장만 봐서는 보이지 않던 돈을 기록으로 찾아 주는 앱입니다. 마지막으로 두 가지 조언을 구하고 싶습니다. 문서를 유료화하지 않고도 할 수 있는 수익 모델이 더 있을지, 그리고 설문 30명과 인터뷰 5명이면 검증하기에 충분할지입니다. 이상으로 4조 발표를 마치겠습니다. 들어 주셔서 감사합니다. 질문 받겠습니다.
 예상 질문 (이름 붙은 사람이 먼저 답하고, 모자라면 팀장이 보탭니다. 답은 짧은 메모이니 말할 때는 "~습니다"로)
 · [이지훈] 법적 효력 있나? → 보장하지 않는다. 판단은 감독관 · 법원. 우리는 판단할 자료를 정리하고, 수정 이력으로 무엇을 언제 왜 고쳤는지, 확인 번호로 그 번호가 언제 서버에 들어왔는지 보여 준다(내용과 맞춰 보는 방법은 기말까지). 통장 내역 · 카톡과 함께 내야 한다고 앱에도 적어 뒀다.
 · [이지훈] 서버는 여러분이 관리하는데 고치면 그만 아닌가? → 맞다. 공개키로는 넣기 · 읽기만 되고 시각은 서버가 찍는 것까지 확인했지만, 프로젝트 소유자 권한으로는 고칠 수 있다. 한계로 인정한다. 지금 막는 건 "사용자 본인이 나중에 고쳐 쓰기"까지. 운영자까지 못 고치게 하는 외부 공인 시점 확인은 비용 때문에 계획. 서버에는 번호만 있어서 운영자가 서버를 고쳐도 폰의 근무 내용 자체는 못 바꾼다. (확인 페이지에도 "앱에서 고치거나 지울 수 없음, 운영자 권한으로는 가능"이라고 적어 두었다)
@@ -1926,7 +1926,7 @@
           <a:p>
             <a:r>
               <a:rPr lang="en-US" dirty="0"/>
-              <a:t>저희가 주목한 문제는 세 가지입니다. 첫 번째는 얼마를 받아야 하는지 계산하기 어렵다는 겁니다. 노동절에 일한 알바생 중 33.2%는 수당을 받는지 안내를 못 받아서 모른다고 답했습니다. 두 번째는 덜 받아도 알아채기 어렵다는 겁니다. 알바생의 48.0%가 임금 문제를 겪었다고 했는데, 저희 설문에서도 12명 중 7명이 통장에 들어온 총액만 본다고 답했습니다. 세 번째는 알아도 말을 꺼내기 어렵다는 겁니다. 최저시급보다 덜 받은 사람 중 49.3%는 아무 대응도 하지 않았습니다. 기록이 없으면 "나중에 지어낸 거 아니냐"는 한마디에 할 말이 없어지기 때문입니다. 참고로 이 세 숫자는 모두 알바천국 설문 결과입니다. (멈춤) 결국 세 문제의 뿌리는 같습니다. 근거가 될 기록이 없다는 겁니다.</a:t>
+              <a:t>저희가 주목한 문제는 세 가지입니다. 화면의 숫자는 모두 알바천국 설문 결과인데요. 먼저, 얼마를 받아야 하는지부터 어렵습니다. 노동절에 일한 알바생 셋 중 한 명은 수당을 받는지조차 몰랐습니다. 다음은 덜 받아도 잘 모른다는 점입니다. 저희 설문에서도 12명 중 7명이 통장에 들어온 총액만 본다고 했습니다. 마지막으로, 알아도 말을 못 합니다. 최저시급보다 덜 받은 사람 중 절반 가까이가 아무 대응도 하지 않았습니다. 기록이 없으면 "나중에 지어낸 거 아니냐"는 한마디에 할 말이 없어지니까요. (멈춤) 결국 세 문제의 뿌리는 같습니다. 근거가 될 기록이 없다는 겁니다.</a:t>
             </a:r>
             <a:endParaRPr lang="en-US" dirty="0"/>
           </a:p>
@@ -2190,7 +2190,7 @@
           <a:p>
             <a:r>
               <a:rPr lang="en-US" dirty="0"/>
-              <a:t>저희 차별점은 세 가지입니다. 첫째, 사장님 가입 없이 혼자 쓸 수 있습니다. 둘째, 실제로 받은 돈과 비교해서 요청 문구와 증빙까지 이어집니다. 셋째, 기록할 때마다 확인 번호와 서버 등록 시각이 남습니다. 사유 없이는 기록을 고칠 수 없고, 지워도 흔적이 남고, 고치면 다시 등록됩니다. 이 부분은 다른 앱이 쉽게 따라 하기 어렵다고 생각합니다. (멈춤) 결국 다른 앱은 '얼마 받아야 하나'에서 멈추고, 알바가드는 '덜 받았으면 어떻게 받아내나'까지 갑니다. 물론 한계도 있습니다. 비교 기능 자체는 다른 앱도 충분히 따라올 수 있습니다. 그리고 이 기록이 법적 효력을 보장하지는 않습니다. 통장 내역이나 메시지와 같이 내야 힘이 생기고, 최종 판단은 근로감독관과 법원이 합니다.</a:t>
+              <a:t>저희 차별점은 세 가지입니다. 첫째, 사장님 가입 없이 혼자 쓸 수 있습니다. 둘째, 실제로 받은 돈과 비교해서 요청 문구와 증빙까지 이어집니다. 셋째, 기록할 때마다 확인 번호와 서버 등록 시각이 남습니다. 사유 없이는 기록을 고칠 수 없고, 지워도 흔적이 남고, 고치면 다시 등록됩니다. 이 부분은 다른 앱이 쉽게 따라 하기 어렵다고 생각합니다. (멈춤) 한마디로, 다른 앱은 '얼마 받아야 하나'에서 멈추고, 알바가드는 '덜 받았으면 어떻게 받아내나'까지 갑니다. 물론 한계도 있습니다. 비교 기능 자체는 다른 앱도 충분히 따라올 수 있습니다. 그리고 이 기록이 법적 효력을 보장하지는 않습니다. 통장 내역이나 메시지와 같이 내야 힘이 생기고, 최종 판단은 근로감독관과 법원이 합니다.</a:t>
             </a:r>
             <a:endParaRPr lang="en-US" dirty="0"/>
           </a:p>
@@ -2278,7 +2278,7 @@
           <a:p>
             <a:r>
               <a:rPr lang="en-US" dirty="0"/>
-              <a:t>다음은 기술 스택입니다. 표를 한 문장으로 줄이면, 앱은 폰 안에서 돌아가고 서버는 꼭 필요한 곳에만 쓴다는 겁니다. 앱은 React와 Vite로 만든 웹앱이라 앱스토어 없이 링크로 바로 설치하고, 홈 화면에 추가하면 인터넷이 없어도 열립니다. 저희가 직접 운영하는 서버는 없고, 외부 서비스인 Supabase를 확인 번호 등록과 설문 수집에만 씁니다. 이렇게 한 이유는 개인정보와 비용 때문입니다.</a:t>
+              <a:t>다음은 기술 스택입니다. 표에서 기억하실 건 하나입니다. 앱은 폰 안에서 돌아가고, 서버는 꼭 필요한 곳에만 씁니다. 앱은 React와 Vite로 만든 웹앱이라 앱스토어 없이 링크로 바로 설치하고, 홈 화면에 추가하면 인터넷이 없어도 열립니다. 저희가 직접 운영하는 서버는 없고, 외부 서비스인 Supabase를 확인 번호 등록과 설문 수집에만 씁니다. 이렇게 한 이유는 개인정보와 비용 때문입니다.</a:t>
             </a:r>
             <a:endParaRPr lang="en-US" dirty="0"/>
           </a:p>

--- a/docs/06_중간발표_PPT.pptx
+++ b/docs/06_중간발표_PPT.pptx
@@ -125,31 +125,31 @@
   <p:extLst>
     <p:ext uri="{521415D9-36F7-43E2-AB2F-B90AF26B5E84}">
       <p14:sectionLst xmlns:p14="http://schemas.microsoft.com/office/powerpoint/2010/main">
-        <p14:section name="① 표지·팀 소개" id="{f105bdd1-77de-8ea3-9370-234db9735e52}">
+        <p14:section name="① 표지·팀 소개" id="{c0fb310e-87bf-12e2-278d-f8ddf2be5386}">
           <p14:sldIdLst>
             <p14:sldId id="256"/>
             <p14:sldId id="257"/>
           </p14:sldIdLst>
         </p14:section>
-        <p14:section name="② 문제 정의" id="{82a56437-0693-a6fc-96c6-8cfa02f4ce97}">
+        <p14:section name="② 문제 정의" id="{5d443072-4d74-244c-ca56-742dccd243d4}">
           <p14:sldIdLst>
             <p14:sldId id="258"/>
             <p14:sldId id="259"/>
           </p14:sldIdLst>
         </p14:section>
-        <p14:section name="③ 솔루션·핵심 가치" id="{2aa7201a-d423-5b8d-a0ce-c878055d7af6}">
+        <p14:section name="③ 솔루션·핵심 가치" id="{56fd923c-6ae7-2f73-ed4c-c4e6a4085dd6}">
           <p14:sldIdLst>
             <p14:sldId id="260"/>
             <p14:sldId id="261"/>
           </p14:sldIdLst>
         </p14:section>
-        <p14:section name="④ SW 기술 아키텍처" id="{8a7f066f-741d-ceb0-488c-e52d8e361a1f}">
+        <p14:section name="④ SW 기술 아키텍처" id="{644a8cdc-d80c-a51b-a606-4a6d2097d909}">
           <p14:sldIdLst>
             <p14:sldId id="262"/>
             <p14:sldId id="263"/>
           </p14:sldIdLst>
         </p14:section>
-        <p14:section name="⑤ 개발 현황·MVP 시연" id="{e9409495-49c5-090f-5959-0a9e669e0e52}">
+        <p14:section name="⑤ 개발 현황·MVP 시연" id="{989bc66a-26c0-205e-4120-ae72e6c0bade}">
           <p14:sldIdLst>
             <p14:sldId id="264"/>
             <p14:sldId id="265"/>
@@ -157,19 +157,19 @@
             <p14:sldId id="267"/>
           </p14:sldIdLst>
         </p14:section>
-        <p14:section name="⑥ 시장 분석·비즈니스 모델" id="{7f92e738-595b-4f42-1e32-724011483686}">
+        <p14:section name="⑥ 시장 분석·비즈니스 모델" id="{443fc185-cbda-06c3-bd91-07c7cfdfb573}">
           <p14:sldIdLst>
             <p14:sldId id="268"/>
             <p14:sldId id="269"/>
             <p14:sldId id="270"/>
           </p14:sldIdLst>
         </p14:section>
-        <p14:section name="⑦ 초기 시장 검증" id="{67eda673-1b64-69f7-c46e-48d7380454c8}">
+        <p14:section name="⑦ 초기 시장 검증" id="{882525e8-96c9-efbb-906d-ba0ea603aa87}">
           <p14:sldIdLst>
             <p14:sldId id="271"/>
           </p14:sldIdLst>
         </p14:section>
-        <p14:section name="⑧ 향후 계획·팀 역량" id="{d82f3085-770a-34a9-b90f-e493ddb0de0d}">
+        <p14:section name="⑧ 향후 계획·팀 역량" id="{7da49c0d-08e1-1666-3d49-9b1b3f82caae}">
           <p14:sldIdLst>
             <p14:sldId id="272"/>
             <p14:sldId id="273"/>
@@ -1723,7 +1723,7 @@
           <a:p>
             <a:r>
               <a:rPr lang="en-US" dirty="0"/>
-              <a:t>팀장 마무리: (멈춤) 다시 한번 말씀드리면, 다른 앱은 '얼마 받아야 하나'에서 멈추지만, 알바가드는 '덜 받았으면 어떻게 받아내나'까지 갑니다. 알바가드는 처음에 보여 드린 금액처럼, 통장만 봐서는 보이지 않던 돈을 기록으로 찾아 주는 앱입니다. 마지막으로 두 가지 조언을 구하고 싶습니다. 문서를 유료화하지 않고도 할 수 있는 수익 모델이 더 있을지, 그리고 설문 30명과 인터뷰 5명이면 검증하기에 충분할지입니다. 이상으로 4조 발표를 마치겠습니다. 들어 주셔서 감사합니다. 질문 받겠습니다.
+              <a:t>팀장 마무리: (멈춤) 다시 한번 말씀드리면, 다른 앱은 '얼마 받아야 하나'에서 멈추지만, 알바가드는 '덜 받았으면 어떻게 받아내나'까지 갑니다. 처음에 보여 드린 금액처럼, 통장만 봐서는 보이지 않던 돈을 기록으로 찾아 주려고 만든 앱입니다. 마지막으로 두 가지 조언을 구하고 싶습니다. 문서를 유료화하지 않고도 할 수 있는 수익 모델이 더 있을지, 그리고 설문 30명과 인터뷰 5명이면 검증하기에 충분할지입니다. 이상으로 4조 발표를 마치겠습니다. 들어 주셔서 감사합니다. 질문 받겠습니다.
 예상 질문 (이름 붙은 사람이 먼저 답하고, 모자라면 팀장이 보탭니다. 답은 짧은 메모이니 말할 때는 "~습니다"로)
 · [이지훈] 법적 효력 있나? → 보장하지 않는다. 판단은 감독관 · 법원. 우리는 판단할 자료를 정리하고, 수정 이력으로 무엇을 언제 왜 고쳤는지, 확인 번호로 그 번호가 언제 서버에 들어왔는지 보여 준다(내용과 맞춰 보는 방법은 기말까지). 통장 내역 · 카톡과 함께 내야 한다고 앱에도 적어 뒀다.
 · [이지훈] 서버는 여러분이 관리하는데 고치면 그만 아닌가? → 맞다. 공개키로는 넣기 · 읽기만 되고 시각은 서버가 찍는 것까지 확인했지만, 프로젝트 소유자 권한으로는 고칠 수 있다. 한계로 인정한다. 지금 막는 건 "사용자 본인이 나중에 고쳐 쓰기"까지. 운영자까지 못 고치게 하는 외부 공인 시점 확인은 비용 때문에 계획. 서버에는 번호만 있어서 운영자가 서버를 고쳐도 폰의 근무 내용 자체는 못 바꾼다. (확인 페이지에도 "앱에서 고치거나 지울 수 없음, 운영자 권한으로는 가능"이라고 적어 두었다)

--- a/docs/06_중간발표_PPT.pptx
+++ b/docs/06_중간발표_PPT.pptx
@@ -125,31 +125,31 @@
   <p:extLst>
     <p:ext uri="{521415D9-36F7-43E2-AB2F-B90AF26B5E84}">
       <p14:sectionLst xmlns:p14="http://schemas.microsoft.com/office/powerpoint/2010/main">
-        <p14:section name="① 표지·팀 소개" id="{c0fb310e-87bf-12e2-278d-f8ddf2be5386}">
+        <p14:section name="① 표지·팀 소개" id="{a3a2234e-2f88-76e4-57e2-8ff59e7e59c7}">
           <p14:sldIdLst>
             <p14:sldId id="256"/>
             <p14:sldId id="257"/>
           </p14:sldIdLst>
         </p14:section>
-        <p14:section name="② 문제 정의" id="{5d443072-4d74-244c-ca56-742dccd243d4}">
+        <p14:section name="② 문제 정의" id="{708a6e70-2895-0d3a-684a-ea0334ffa691}">
           <p14:sldIdLst>
             <p14:sldId id="258"/>
             <p14:sldId id="259"/>
           </p14:sldIdLst>
         </p14:section>
-        <p14:section name="③ 솔루션·핵심 가치" id="{56fd923c-6ae7-2f73-ed4c-c4e6a4085dd6}">
+        <p14:section name="③ 솔루션·핵심 가치" id="{120fa9d6-a427-7e6f-2502-44f56eb561a3}">
           <p14:sldIdLst>
             <p14:sldId id="260"/>
             <p14:sldId id="261"/>
           </p14:sldIdLst>
         </p14:section>
-        <p14:section name="④ SW 기술 아키텍처" id="{644a8cdc-d80c-a51b-a606-4a6d2097d909}">
+        <p14:section name="④ SW 기술 아키텍처" id="{ff8cedc9-9e29-3f6d-3220-d979f17c40f6}">
           <p14:sldIdLst>
             <p14:sldId id="262"/>
             <p14:sldId id="263"/>
           </p14:sldIdLst>
         </p14:section>
-        <p14:section name="⑤ 개발 현황·MVP 시연" id="{989bc66a-26c0-205e-4120-ae72e6c0bade}">
+        <p14:section name="⑤ 개발 현황·MVP 시연" id="{45c17715-0729-62d3-d013-d5914e7b3ec1}">
           <p14:sldIdLst>
             <p14:sldId id="264"/>
             <p14:sldId id="265"/>
@@ -157,19 +157,19 @@
             <p14:sldId id="267"/>
           </p14:sldIdLst>
         </p14:section>
-        <p14:section name="⑥ 시장 분석·비즈니스 모델" id="{443fc185-cbda-06c3-bd91-07c7cfdfb573}">
+        <p14:section name="⑥ 시장 분석·비즈니스 모델" id="{f17c8b81-8a5d-fae4-4836-90e652c92cd7}">
           <p14:sldIdLst>
             <p14:sldId id="268"/>
             <p14:sldId id="269"/>
             <p14:sldId id="270"/>
           </p14:sldIdLst>
         </p14:section>
-        <p14:section name="⑦ 초기 시장 검증" id="{882525e8-96c9-efbb-906d-ba0ea603aa87}">
+        <p14:section name="⑦ 초기 시장 검증" id="{b5f73f87-4241-21fa-689b-ade949105416}">
           <p14:sldIdLst>
             <p14:sldId id="271"/>
           </p14:sldIdLst>
         </p14:section>
-        <p14:section name="⑧ 향후 계획·팀 역량" id="{7da49c0d-08e1-1666-3d49-9b1b3f82caae}">
+        <p14:section name="⑧ 향후 계획·팀 역량" id="{c7085367-f2f2-823d-045f-440e6e5702d5}">
           <p14:sldIdLst>
             <p14:sldId id="272"/>
             <p14:sldId id="273"/>
@@ -838,7 +838,7 @@
           <a:p>
             <a:r>
               <a:rPr lang="en-US" dirty="0"/>
-              <a:t>안녕하세요, 4조 발표를 맡은 팀장 이지훈입니다. 저희가 만든 앱은 알바가드입니다. 화면에 보이는 금액은 저희 앱 예시 데이터에서 두 달 동안 덜 받은 알바비인데요. 통장에 들어온 총액만 봐서는 잘 안 보이는 돈입니다. 알바가드는 이렇게 놓치기 쉬운 돈을 근무 기록으로 찾아 주는 앱입니다. 알바비를 덜 받아도 모르거나, 알아도 말을 꺼내기 어려운 대학생을 위해 기록, 비교, 요청을 한 앱에 담았습니다.</a:t>
+              <a:t>안녕하세요, 4조 발표를 맡은 팀장 이지훈입니다. 혹시 지난달 알바비, 정확히 얼마를 받아야 했는지 아시나요? 저희가 만든 앱은 알바가드입니다. 화면에 보이는 금액은 저희 앱 예시 데이터에서 두 달 동안 덜 받은 알바비인데요. 통장에 들어온 총액만 봐서는 잘 안 보이는 돈입니다. 알바가드는 이렇게 놓치기 쉬운 돈을 근무 기록으로 찾아 주는 앱입니다. 알바비를 덜 받아도 모르거나, 알아도 말을 꺼내기 어려운 대학생을 위해 기록, 비교, 요청을 한 앱에 담았습니다.</a:t>
             </a:r>
             <a:endParaRPr lang="en-US" dirty="0"/>
           </a:p>
@@ -1107,7 +1107,7 @@
           <a:p>
             <a:r>
               <a:rPr lang="en-US" dirty="0"/>
-              <a:t>방금 보신 기능을 포함해서, 계획한 8개 기능은 모두 동작합니다. 그래도 100%라고 쓰지는 않았습니다. 오른쪽 동그라미 세 칸은 각각 컴퓨터에서 동작, 실제 폰에서 확인, 사용자 검증인데요. 지금은 첫 칸만 채워졌고, 나머지 두 칸은 11월에 할 일입니다. 그래서 완성도를 평균 80% 정도로 잡았습니다. 다음으로 시장과 수익 부분은 손유호 팀원이 이어서 발표하겠습니다.</a:t>
+              <a:t>방금 보신 기능을 포함해서, 계획한 8개 기능은 모두 동작합니다. 그래도 100%라고 쓰지는 않았습니다. 오른쪽 동그라미 세 칸은 각각 컴퓨터에서 동작, 실제 폰에서 확인, 사용자 검증인데요. 지금은 첫 칸만 채워졌고, 나머지 두 칸은 11월에 할 일입니다. 그래서 완성도를 평균 80% 정도로 잡았습니다. 지금까지 문제와 해결 방법, 그리고 실제로 동작하는 모습을 보셨습니다. 다음으로 시장과 수익 부분은 손유호 팀원이 이어서 발표하겠습니다.</a:t>
             </a:r>
             <a:endParaRPr lang="en-US" dirty="0"/>
           </a:p>
@@ -1838,7 +1838,7 @@
           <a:p>
             <a:r>
               <a:rPr lang="en-US" dirty="0"/>
-              <a:t>먼저 지금 상태부터 말씀드리겠습니다. 계획했던 기능 8개는 모두 동작하는 상태로 배포까지 했고, 완성도는 평균 80% 정도로 보고 있습니다. 설문은 지금까지 13명이 답해 줬고, 앱을 직접 써 보게 하는 인터뷰는 11월에 진행할 예정입니다. 오른쪽 QR을 찍으시면 앱과 설문을 바로 열 수 있습니다. 설문은 이름 없이 3분이면 끝나니까, 발표가 끝나고 한번 답해 주시면 정말 감사하겠습니다. 발표는 저와 손유호, 박명진 세 명이 나눠서 진행하겠습니다.</a:t>
+              <a:t>먼저 지금 상태부터 말씀드리겠습니다. 계획했던 기능 8개는 모두 동작하는 상태로 배포까지 했고, 완성도는 평균 80% 정도로 보고 있습니다. 설문은 지금까지 13명이 답해 줬고, 앱을 직접 써 보게 하는 인터뷰는 11월에 진행할 예정입니다. 오른쪽 QR을 찍으시면 앱과 설문을 바로 열 수 있습니다. 설문은 이름 없이 3분이면 끝나니까, 발표가 끝나고 한번 답해 주시면 정말 감사하겠습니다. 오늘은 문제, 해결 방법, 기술과 시연, 시장과 수익, 검증과 일정 순서로 말씀드리겠습니다. 발표는 저와 손유호, 박명진 세 명이 나눠서 진행하겠습니다.</a:t>
             </a:r>
             <a:endParaRPr lang="en-US" dirty="0"/>
           </a:p>
